--- a/docs/slides/qwenpi-optimization.pptx
+++ b/docs/slides/qwenpi-optimization.pptx
@@ -1912,7 +1912,7 @@
         </p:nvSpPr>
         <p:spPr>
           <a:xfrm>
-            <a:off x="457200" y="1828800"/>
+            <a:off x="457200" y="2103120"/>
             <a:ext cx="8229600" cy="914400"/>
           </a:xfrm>
           <a:prstGeom prst="rect">
@@ -1929,7 +1929,7 @@
               <a:buNone/>
             </a:pPr>
             <a:r>
-              <a:rPr lang="en-US" sz="3400" b="1" dirty="0">
+              <a:rPr lang="en-US" sz="3600" b="1" dirty="0">
                 <a:solidFill>
                   <a:srgbClr val="000000"/>
                 </a:solidFill>
@@ -1937,9 +1937,9 @@
                 <a:ea typeface="NVIDIA Sans" pitchFamily="34" charset="-122"/>
                 <a:cs typeface="NVIDIA Sans" pitchFamily="34" charset="-120"/>
               </a:rPr>
-              <a:t>QwenPI VLA Training Optimization on 8×H200</a:t>
-            </a:r>
-            <a:endParaRPr lang="en-US" sz="3400" dirty="0"/>
+              <a:t>QwenPI VLA Training Optimization</a:t>
+            </a:r>
+            <a:endParaRPr lang="en-US" sz="3600" dirty="0"/>
           </a:p>
         </p:txBody>
       </p:sp>
@@ -1951,8 +1951,8 @@
         </p:nvSpPr>
         <p:spPr>
           <a:xfrm>
-            <a:off x="457200" y="2743200"/>
-            <a:ext cx="8229600" cy="457200"/>
+            <a:off x="457200" y="3108960"/>
+            <a:ext cx="5486400" cy="365760"/>
           </a:xfrm>
           <a:prstGeom prst="rect">
             <a:avLst/>
@@ -1968,7 +1968,7 @@
               <a:buNone/>
             </a:pPr>
             <a:r>
-              <a:rPr lang="en-US" sz="1800" dirty="0">
+              <a:rPr lang="en-US" sz="1400" dirty="0">
                 <a:solidFill>
                   <a:srgbClr val="76B900"/>
                 </a:solidFill>
@@ -1976,54 +1976,15 @@
                 <a:ea typeface="NVIDIA Sans" pitchFamily="34" charset="-122"/>
                 <a:cs typeface="NVIDIA Sans" pitchFamily="34" charset="-120"/>
               </a:rPr>
-              <a:t>A profile-driven journey from 800 ms to 249 ms per step (3.2×)</a:t>
-            </a:r>
-            <a:endParaRPr lang="en-US" sz="1800" dirty="0"/>
+              <a:t>NVIDIA DevTech</a:t>
+            </a:r>
+            <a:endParaRPr lang="en-US" sz="1400" dirty="0"/>
           </a:p>
         </p:txBody>
       </p:sp>
       <p:sp>
         <p:nvSpPr>
-          <p:cNvPr id="6" name="Text 3"/>
-          <p:cNvSpPr/>
-          <p:nvPr/>
-        </p:nvSpPr>
-        <p:spPr>
-          <a:xfrm>
-            <a:off x="457200" y="3383280"/>
-            <a:ext cx="5486400" cy="365760"/>
-          </a:xfrm>
-          <a:prstGeom prst="rect">
-            <a:avLst/>
-          </a:prstGeom>
-          <a:noFill/>
-          <a:ln/>
-        </p:spPr>
-        <p:txBody>
-          <a:bodyPr wrap="square" lIns="0" tIns="0" rIns="0" bIns="0" rtlCol="0" anchor="ctr"/>
-          <a:lstStyle/>
-          <a:p>
-            <a:pPr indent="0" marL="0">
-              <a:buNone/>
-            </a:pPr>
-            <a:r>
-              <a:rPr lang="en-US" sz="1200" dirty="0">
-                <a:solidFill>
-                  <a:srgbClr val="8C8C8C"/>
-                </a:solidFill>
-                <a:latin typeface="NVIDIA Sans" pitchFamily="34" charset="0"/>
-                <a:ea typeface="NVIDIA Sans" pitchFamily="34" charset="-122"/>
-                <a:cs typeface="NVIDIA Sans" pitchFamily="34" charset="-120"/>
-              </a:rPr>
-              <a:t>Qihan Kang  |  NVIDIA  |  July 2026</a:t>
-            </a:r>
-            <a:endParaRPr lang="en-US" sz="1200" dirty="0"/>
-          </a:p>
-        </p:txBody>
-      </p:sp>
-      <p:sp>
-        <p:nvSpPr>
-          <p:cNvPr id="7" name="Shape 4"/>
+          <p:cNvPr id="6" name="Shape 3"/>
           <p:cNvSpPr/>
           <p:nvPr/>
         </p:nvSpPr>
@@ -8528,7 +8489,7 @@
                 <a:ea typeface="NVIDIA Sans" pitchFamily="34" charset="-122"/>
                 <a:cs typeface="NVIDIA Sans" pitchFamily="34" charset="-120"/>
               </a:rPr>
-              <a:t>Real per-stream activity of one baseline step (nsys sqlite, 866 ms wall)</a:t>
+              <a:t>One baseline step from the nsys sqlite (866 ms), aligned to the model phases</a:t>
             </a:r>
             <a:endParaRPr lang="en-US" sz="1500" dirty="0"/>
           </a:p>
@@ -8536,13 +8497,229 @@
       </p:sp>
       <p:sp>
         <p:nvSpPr>
-          <p:cNvPr id="4" name="Text 2"/>
+          <p:cNvPr id="4" name="Shape 2"/>
+          <p:cNvSpPr/>
+          <p:nvPr/>
+        </p:nvSpPr>
+        <p:spPr>
+          <a:xfrm>
+            <a:off x="1508760" y="1325880"/>
+            <a:ext cx="1912226" cy="237744"/>
+          </a:xfrm>
+          <a:prstGeom prst="rect">
+            <a:avLst/>
+          </a:prstGeom>
+          <a:solidFill>
+            <a:srgbClr val="5D1682"/>
+          </a:solidFill>
+          <a:ln/>
+        </p:spPr>
+      </p:sp>
+      <p:sp>
+        <p:nvSpPr>
+          <p:cNvPr id="5" name="Text 3"/>
+          <p:cNvSpPr/>
+          <p:nvPr/>
+        </p:nvSpPr>
+        <p:spPr>
+          <a:xfrm>
+            <a:off x="1508760" y="1325880"/>
+            <a:ext cx="1912226" cy="237744"/>
+          </a:xfrm>
+          <a:prstGeom prst="rect">
+            <a:avLst/>
+          </a:prstGeom>
+          <a:noFill/>
+          <a:ln/>
+        </p:spPr>
+        <p:txBody>
+          <a:bodyPr wrap="square" lIns="0" tIns="0" rIns="0" bIns="0" rtlCol="0" anchor="ctr"/>
+          <a:lstStyle/>
+          <a:p>
+            <a:pPr algn="ctr" indent="0" marL="0">
+              <a:buNone/>
+            </a:pPr>
+            <a:r>
+              <a:rPr lang="en-US" sz="900" b="1" dirty="0">
+                <a:solidFill>
+                  <a:srgbClr val="FFFFFF"/>
+                </a:solidFill>
+                <a:latin typeface="NVIDIA Sans" pitchFamily="34" charset="0"/>
+                <a:ea typeface="NVIDIA Sans" pitchFamily="34" charset="-122"/>
+                <a:cs typeface="NVIDIA Sans" pitchFamily="34" charset="-120"/>
+              </a:rPr>
+              <a:t>Forward 270 ms</a:t>
+            </a:r>
+            <a:endParaRPr lang="en-US" sz="900" dirty="0"/>
+          </a:p>
+        </p:txBody>
+      </p:sp>
+      <p:sp>
+        <p:nvSpPr>
+          <p:cNvPr id="6" name="Shape 4"/>
+          <p:cNvSpPr/>
+          <p:nvPr/>
+        </p:nvSpPr>
+        <p:spPr>
+          <a:xfrm>
+            <a:off x="3421693" y="1325880"/>
+            <a:ext cx="3639101" cy="237744"/>
+          </a:xfrm>
+          <a:prstGeom prst="rect">
+            <a:avLst/>
+          </a:prstGeom>
+          <a:solidFill>
+            <a:srgbClr val="008564"/>
+          </a:solidFill>
+          <a:ln/>
+        </p:spPr>
+      </p:sp>
+      <p:sp>
+        <p:nvSpPr>
+          <p:cNvPr id="7" name="Text 5"/>
+          <p:cNvSpPr/>
+          <p:nvPr/>
+        </p:nvSpPr>
+        <p:spPr>
+          <a:xfrm>
+            <a:off x="3421693" y="1325880"/>
+            <a:ext cx="3639101" cy="237744"/>
+          </a:xfrm>
+          <a:prstGeom prst="rect">
+            <a:avLst/>
+          </a:prstGeom>
+          <a:noFill/>
+          <a:ln/>
+        </p:spPr>
+        <p:txBody>
+          <a:bodyPr wrap="square" lIns="0" tIns="0" rIns="0" bIns="0" rtlCol="0" anchor="ctr"/>
+          <a:lstStyle/>
+          <a:p>
+            <a:pPr algn="ctr" indent="0" marL="0">
+              <a:buNone/>
+            </a:pPr>
+            <a:r>
+              <a:rPr lang="en-US" sz="900" b="1" dirty="0">
+                <a:solidFill>
+                  <a:srgbClr val="FFFFFF"/>
+                </a:solidFill>
+                <a:latin typeface="NVIDIA Sans" pitchFamily="34" charset="0"/>
+                <a:ea typeface="NVIDIA Sans" pitchFamily="34" charset="-122"/>
+                <a:cs typeface="NVIDIA Sans" pitchFamily="34" charset="-120"/>
+              </a:rPr>
+              <a:t>Backward 514 ms</a:t>
+            </a:r>
+            <a:endParaRPr lang="en-US" sz="900" dirty="0"/>
+          </a:p>
+        </p:txBody>
+      </p:sp>
+      <p:sp>
+        <p:nvSpPr>
+          <p:cNvPr id="8" name="Shape 6"/>
+          <p:cNvSpPr/>
+          <p:nvPr/>
+        </p:nvSpPr>
+        <p:spPr>
+          <a:xfrm>
+            <a:off x="7060794" y="1325880"/>
+            <a:ext cx="574446" cy="237744"/>
+          </a:xfrm>
+          <a:prstGeom prst="rect">
+            <a:avLst/>
+          </a:prstGeom>
+          <a:solidFill>
+            <a:srgbClr val="890C58"/>
+          </a:solidFill>
+          <a:ln/>
+        </p:spPr>
+      </p:sp>
+      <p:sp>
+        <p:nvSpPr>
+          <p:cNvPr id="9" name="Text 7"/>
+          <p:cNvSpPr/>
+          <p:nvPr/>
+        </p:nvSpPr>
+        <p:spPr>
+          <a:xfrm>
+            <a:off x="7060794" y="1325880"/>
+            <a:ext cx="574446" cy="237744"/>
+          </a:xfrm>
+          <a:prstGeom prst="rect">
+            <a:avLst/>
+          </a:prstGeom>
+          <a:noFill/>
+          <a:ln/>
+        </p:spPr>
+        <p:txBody>
+          <a:bodyPr wrap="square" lIns="0" tIns="0" rIns="0" bIns="0" rtlCol="0" anchor="ctr"/>
+          <a:lstStyle/>
+          <a:p>
+            <a:pPr algn="ctr" indent="0" marL="0">
+              <a:buNone/>
+            </a:pPr>
+            <a:r>
+              <a:rPr lang="en-US" sz="900" b="1" dirty="0">
+                <a:solidFill>
+                  <a:srgbClr val="FFFFFF"/>
+                </a:solidFill>
+                <a:latin typeface="NVIDIA Sans" pitchFamily="34" charset="0"/>
+                <a:ea typeface="NVIDIA Sans" pitchFamily="34" charset="-122"/>
+                <a:cs typeface="NVIDIA Sans" pitchFamily="34" charset="-120"/>
+              </a:rPr>
+              <a:t>Optimizer 81 ms</a:t>
+            </a:r>
+            <a:endParaRPr lang="en-US" sz="900" dirty="0"/>
+          </a:p>
+        </p:txBody>
+      </p:sp>
+      <p:sp>
+        <p:nvSpPr>
+          <p:cNvPr id="10" name="Text 8"/>
           <p:cNvSpPr/>
           <p:nvPr/>
         </p:nvSpPr>
         <p:spPr>
           <a:xfrm>
             <a:off x="457200" y="1325880"/>
+            <a:ext cx="978408" cy="237744"/>
+          </a:xfrm>
+          <a:prstGeom prst="rect">
+            <a:avLst/>
+          </a:prstGeom>
+          <a:noFill/>
+          <a:ln/>
+        </p:spPr>
+        <p:txBody>
+          <a:bodyPr wrap="square" lIns="0" tIns="0" rIns="0" bIns="0" rtlCol="0" anchor="ctr"/>
+          <a:lstStyle/>
+          <a:p>
+            <a:pPr algn="r" indent="0" marL="0">
+              <a:buNone/>
+            </a:pPr>
+            <a:r>
+              <a:rPr lang="en-US" sz="900" i="1" dirty="0">
+                <a:solidFill>
+                  <a:srgbClr val="5E5E5E"/>
+                </a:solidFill>
+                <a:latin typeface="NVIDIA Sans" pitchFamily="34" charset="0"/>
+                <a:ea typeface="NVIDIA Sans" pitchFamily="34" charset="-122"/>
+                <a:cs typeface="NVIDIA Sans" pitchFamily="34" charset="-120"/>
+              </a:rPr>
+              <a:t>model phase</a:t>
+            </a:r>
+            <a:endParaRPr lang="en-US" sz="900" dirty="0"/>
+          </a:p>
+        </p:txBody>
+      </p:sp>
+      <p:sp>
+        <p:nvSpPr>
+          <p:cNvPr id="11" name="Text 9"/>
+          <p:cNvSpPr/>
+          <p:nvPr/>
+        </p:nvSpPr>
+        <p:spPr>
+          <a:xfrm>
+            <a:off x="457200" y="1600200"/>
             <a:ext cx="978408" cy="384048"/>
           </a:xfrm>
           <a:prstGeom prst="rect">
@@ -8575,13 +8752,13 @@
       </p:sp>
       <p:sp>
         <p:nvSpPr>
-          <p:cNvPr id="5" name="Shape 3"/>
-          <p:cNvSpPr/>
-          <p:nvPr/>
-        </p:nvSpPr>
-        <p:spPr>
-          <a:xfrm>
-            <a:off x="1508760" y="1325880"/>
+          <p:cNvPr id="12" name="Shape 10"/>
+          <p:cNvSpPr/>
+          <p:nvPr/>
+        </p:nvSpPr>
+        <p:spPr>
+          <a:xfrm>
+            <a:off x="1508760" y="1600200"/>
             <a:ext cx="6126480" cy="384048"/>
           </a:xfrm>
           <a:prstGeom prst="rect">
@@ -8600,13 +8777,13 @@
       </p:sp>
       <p:sp>
         <p:nvSpPr>
-          <p:cNvPr id="6" name="Shape 4"/>
-          <p:cNvSpPr/>
-          <p:nvPr/>
-        </p:nvSpPr>
-        <p:spPr>
-          <a:xfrm>
-            <a:off x="2073655" y="1353312"/>
+          <p:cNvPr id="13" name="Shape 11"/>
+          <p:cNvSpPr/>
+          <p:nvPr/>
+        </p:nvSpPr>
+        <p:spPr>
+          <a:xfrm>
+            <a:off x="2073655" y="1627632"/>
             <a:ext cx="4572" cy="329184"/>
           </a:xfrm>
           <a:prstGeom prst="rect">
@@ -8620,13 +8797,13 @@
       </p:sp>
       <p:sp>
         <p:nvSpPr>
-          <p:cNvPr id="7" name="Shape 5"/>
-          <p:cNvSpPr/>
-          <p:nvPr/>
-        </p:nvSpPr>
-        <p:spPr>
-          <a:xfrm>
-            <a:off x="2112919" y="1353312"/>
+          <p:cNvPr id="14" name="Shape 12"/>
+          <p:cNvSpPr/>
+          <p:nvPr/>
+        </p:nvSpPr>
+        <p:spPr>
+          <a:xfrm>
+            <a:off x="2112919" y="1627632"/>
             <a:ext cx="4572" cy="329184"/>
           </a:xfrm>
           <a:prstGeom prst="rect">
@@ -8640,13 +8817,13 @@
       </p:sp>
       <p:sp>
         <p:nvSpPr>
-          <p:cNvPr id="8" name="Shape 6"/>
-          <p:cNvSpPr/>
-          <p:nvPr/>
-        </p:nvSpPr>
-        <p:spPr>
-          <a:xfrm>
-            <a:off x="2114970" y="1353312"/>
+          <p:cNvPr id="15" name="Shape 13"/>
+          <p:cNvSpPr/>
+          <p:nvPr/>
+        </p:nvSpPr>
+        <p:spPr>
+          <a:xfrm>
+            <a:off x="2114970" y="1627632"/>
             <a:ext cx="5660" cy="329184"/>
           </a:xfrm>
           <a:prstGeom prst="rect">
@@ -8660,13 +8837,13 @@
       </p:sp>
       <p:sp>
         <p:nvSpPr>
-          <p:cNvPr id="9" name="Shape 7"/>
-          <p:cNvSpPr/>
-          <p:nvPr/>
-        </p:nvSpPr>
-        <p:spPr>
-          <a:xfrm>
-            <a:off x="2123106" y="1353312"/>
+          <p:cNvPr id="16" name="Shape 14"/>
+          <p:cNvSpPr/>
+          <p:nvPr/>
+        </p:nvSpPr>
+        <p:spPr>
+          <a:xfrm>
+            <a:off x="2123106" y="1627632"/>
             <a:ext cx="25539" cy="329184"/>
           </a:xfrm>
           <a:prstGeom prst="rect">
@@ -8680,13 +8857,13 @@
       </p:sp>
       <p:sp>
         <p:nvSpPr>
-          <p:cNvPr id="10" name="Shape 8"/>
-          <p:cNvSpPr/>
-          <p:nvPr/>
-        </p:nvSpPr>
-        <p:spPr>
-          <a:xfrm>
-            <a:off x="2151121" y="1353312"/>
+          <p:cNvPr id="17" name="Shape 15"/>
+          <p:cNvSpPr/>
+          <p:nvPr/>
+        </p:nvSpPr>
+        <p:spPr>
+          <a:xfrm>
+            <a:off x="2151121" y="1627632"/>
             <a:ext cx="4572" cy="329184"/>
           </a:xfrm>
           <a:prstGeom prst="rect">
@@ -8700,13 +8877,13 @@
       </p:sp>
       <p:sp>
         <p:nvSpPr>
-          <p:cNvPr id="11" name="Shape 9"/>
-          <p:cNvSpPr/>
-          <p:nvPr/>
-        </p:nvSpPr>
-        <p:spPr>
-          <a:xfrm>
-            <a:off x="2156285" y="1353312"/>
+          <p:cNvPr id="18" name="Shape 16"/>
+          <p:cNvSpPr/>
+          <p:nvPr/>
+        </p:nvSpPr>
+        <p:spPr>
+          <a:xfrm>
+            <a:off x="2156285" y="1627632"/>
             <a:ext cx="5094" cy="329184"/>
           </a:xfrm>
           <a:prstGeom prst="rect">
@@ -8720,13 +8897,13 @@
       </p:sp>
       <p:sp>
         <p:nvSpPr>
-          <p:cNvPr id="12" name="Shape 10"/>
-          <p:cNvSpPr/>
-          <p:nvPr/>
-        </p:nvSpPr>
-        <p:spPr>
-          <a:xfrm>
-            <a:off x="2162086" y="1353312"/>
+          <p:cNvPr id="19" name="Shape 17"/>
+          <p:cNvSpPr/>
+          <p:nvPr/>
+        </p:nvSpPr>
+        <p:spPr>
+          <a:xfrm>
+            <a:off x="2162086" y="1627632"/>
             <a:ext cx="6579" cy="329184"/>
           </a:xfrm>
           <a:prstGeom prst="rect">
@@ -8740,13 +8917,13 @@
       </p:sp>
       <p:sp>
         <p:nvSpPr>
-          <p:cNvPr id="13" name="Shape 11"/>
-          <p:cNvSpPr/>
-          <p:nvPr/>
-        </p:nvSpPr>
-        <p:spPr>
-          <a:xfrm>
-            <a:off x="2170363" y="1353312"/>
+          <p:cNvPr id="20" name="Shape 18"/>
+          <p:cNvSpPr/>
+          <p:nvPr/>
+        </p:nvSpPr>
+        <p:spPr>
+          <a:xfrm>
+            <a:off x="2170363" y="1627632"/>
             <a:ext cx="11956" cy="329184"/>
           </a:xfrm>
           <a:prstGeom prst="rect">
@@ -8760,13 +8937,13 @@
       </p:sp>
       <p:sp>
         <p:nvSpPr>
-          <p:cNvPr id="14" name="Shape 12"/>
-          <p:cNvSpPr/>
-          <p:nvPr/>
-        </p:nvSpPr>
-        <p:spPr>
-          <a:xfrm>
-            <a:off x="2184017" y="1353312"/>
+          <p:cNvPr id="21" name="Shape 19"/>
+          <p:cNvSpPr/>
+          <p:nvPr/>
+        </p:nvSpPr>
+        <p:spPr>
+          <a:xfrm>
+            <a:off x="2184017" y="1627632"/>
             <a:ext cx="11602" cy="329184"/>
           </a:xfrm>
           <a:prstGeom prst="rect">
@@ -8780,13 +8957,13 @@
       </p:sp>
       <p:sp>
         <p:nvSpPr>
-          <p:cNvPr id="15" name="Shape 13"/>
-          <p:cNvSpPr/>
-          <p:nvPr/>
-        </p:nvSpPr>
-        <p:spPr>
-          <a:xfrm>
-            <a:off x="2197317" y="1353312"/>
+          <p:cNvPr id="22" name="Shape 20"/>
+          <p:cNvSpPr/>
+          <p:nvPr/>
+        </p:nvSpPr>
+        <p:spPr>
+          <a:xfrm>
+            <a:off x="2197317" y="1627632"/>
             <a:ext cx="11390" cy="329184"/>
           </a:xfrm>
           <a:prstGeom prst="rect">
@@ -8800,13 +8977,13 @@
       </p:sp>
       <p:sp>
         <p:nvSpPr>
-          <p:cNvPr id="16" name="Shape 14"/>
-          <p:cNvSpPr/>
-          <p:nvPr/>
-        </p:nvSpPr>
-        <p:spPr>
-          <a:xfrm>
-            <a:off x="2210263" y="1353312"/>
+          <p:cNvPr id="23" name="Shape 21"/>
+          <p:cNvSpPr/>
+          <p:nvPr/>
+        </p:nvSpPr>
+        <p:spPr>
+          <a:xfrm>
+            <a:off x="2210263" y="1627632"/>
             <a:ext cx="4881" cy="329184"/>
           </a:xfrm>
           <a:prstGeom prst="rect">
@@ -8820,13 +8997,13 @@
       </p:sp>
       <p:sp>
         <p:nvSpPr>
-          <p:cNvPr id="17" name="Shape 15"/>
-          <p:cNvSpPr/>
-          <p:nvPr/>
-        </p:nvSpPr>
-        <p:spPr>
-          <a:xfrm>
-            <a:off x="2215781" y="1353312"/>
+          <p:cNvPr id="24" name="Shape 22"/>
+          <p:cNvSpPr/>
+          <p:nvPr/>
+        </p:nvSpPr>
+        <p:spPr>
+          <a:xfrm>
+            <a:off x="2215781" y="1627632"/>
             <a:ext cx="7711" cy="329184"/>
           </a:xfrm>
           <a:prstGeom prst="rect">
@@ -8840,13 +9017,13 @@
       </p:sp>
       <p:sp>
         <p:nvSpPr>
-          <p:cNvPr id="18" name="Shape 16"/>
-          <p:cNvSpPr/>
-          <p:nvPr/>
-        </p:nvSpPr>
-        <p:spPr>
-          <a:xfrm>
-            <a:off x="2225473" y="1353312"/>
+          <p:cNvPr id="25" name="Shape 23"/>
+          <p:cNvSpPr/>
+          <p:nvPr/>
+        </p:nvSpPr>
+        <p:spPr>
+          <a:xfrm>
+            <a:off x="2225473" y="1627632"/>
             <a:ext cx="5023" cy="329184"/>
           </a:xfrm>
           <a:prstGeom prst="rect">
@@ -8860,13 +9037,13 @@
       </p:sp>
       <p:sp>
         <p:nvSpPr>
-          <p:cNvPr id="19" name="Shape 17"/>
-          <p:cNvSpPr/>
-          <p:nvPr/>
-        </p:nvSpPr>
-        <p:spPr>
-          <a:xfrm>
-            <a:off x="2231133" y="1353312"/>
+          <p:cNvPr id="26" name="Shape 24"/>
+          <p:cNvSpPr/>
+          <p:nvPr/>
+        </p:nvSpPr>
+        <p:spPr>
+          <a:xfrm>
+            <a:off x="2231133" y="1627632"/>
             <a:ext cx="6296" cy="329184"/>
           </a:xfrm>
           <a:prstGeom prst="rect">
@@ -8880,13 +9057,13 @@
       </p:sp>
       <p:sp>
         <p:nvSpPr>
-          <p:cNvPr id="20" name="Shape 18"/>
-          <p:cNvSpPr/>
-          <p:nvPr/>
-        </p:nvSpPr>
-        <p:spPr>
-          <a:xfrm>
-            <a:off x="2239127" y="1353312"/>
+          <p:cNvPr id="27" name="Shape 25"/>
+          <p:cNvSpPr/>
+          <p:nvPr/>
+        </p:nvSpPr>
+        <p:spPr>
+          <a:xfrm>
+            <a:off x="2239127" y="1627632"/>
             <a:ext cx="4811" cy="329184"/>
           </a:xfrm>
           <a:prstGeom prst="rect">
@@ -8900,13 +9077,13 @@
       </p:sp>
       <p:sp>
         <p:nvSpPr>
-          <p:cNvPr id="21" name="Shape 19"/>
-          <p:cNvSpPr/>
-          <p:nvPr/>
-        </p:nvSpPr>
-        <p:spPr>
-          <a:xfrm>
-            <a:off x="2244504" y="1353312"/>
+          <p:cNvPr id="28" name="Shape 26"/>
+          <p:cNvSpPr/>
+          <p:nvPr/>
+        </p:nvSpPr>
+        <p:spPr>
+          <a:xfrm>
+            <a:off x="2244504" y="1627632"/>
             <a:ext cx="6650" cy="329184"/>
           </a:xfrm>
           <a:prstGeom prst="rect">
@@ -8920,13 +9097,13 @@
       </p:sp>
       <p:sp>
         <p:nvSpPr>
-          <p:cNvPr id="22" name="Shape 20"/>
-          <p:cNvSpPr/>
-          <p:nvPr/>
-        </p:nvSpPr>
-        <p:spPr>
-          <a:xfrm>
-            <a:off x="2252993" y="1353312"/>
+          <p:cNvPr id="29" name="Shape 27"/>
+          <p:cNvSpPr/>
+          <p:nvPr/>
+        </p:nvSpPr>
+        <p:spPr>
+          <a:xfrm>
+            <a:off x="2252993" y="1627632"/>
             <a:ext cx="4881" cy="329184"/>
           </a:xfrm>
           <a:prstGeom prst="rect">
@@ -8940,13 +9117,13 @@
       </p:sp>
       <p:sp>
         <p:nvSpPr>
-          <p:cNvPr id="23" name="Shape 21"/>
-          <p:cNvSpPr/>
-          <p:nvPr/>
-        </p:nvSpPr>
-        <p:spPr>
-          <a:xfrm>
-            <a:off x="2258723" y="1353312"/>
+          <p:cNvPr id="30" name="Shape 28"/>
+          <p:cNvSpPr/>
+          <p:nvPr/>
+        </p:nvSpPr>
+        <p:spPr>
+          <a:xfrm>
+            <a:off x="2258723" y="1627632"/>
             <a:ext cx="7499" cy="329184"/>
           </a:xfrm>
           <a:prstGeom prst="rect">
@@ -8960,13 +9137,13 @@
       </p:sp>
       <p:sp>
         <p:nvSpPr>
-          <p:cNvPr id="24" name="Shape 22"/>
-          <p:cNvSpPr/>
-          <p:nvPr/>
-        </p:nvSpPr>
-        <p:spPr>
-          <a:xfrm>
-            <a:off x="2268061" y="1353312"/>
+          <p:cNvPr id="31" name="Shape 29"/>
+          <p:cNvSpPr/>
+          <p:nvPr/>
+        </p:nvSpPr>
+        <p:spPr>
+          <a:xfrm>
+            <a:off x="2268061" y="1627632"/>
             <a:ext cx="4881" cy="329184"/>
           </a:xfrm>
           <a:prstGeom prst="rect">
@@ -8980,13 +9157,13 @@
       </p:sp>
       <p:sp>
         <p:nvSpPr>
-          <p:cNvPr id="25" name="Shape 23"/>
-          <p:cNvSpPr/>
-          <p:nvPr/>
-        </p:nvSpPr>
-        <p:spPr>
-          <a:xfrm>
-            <a:off x="2273580" y="1353312"/>
+          <p:cNvPr id="32" name="Shape 30"/>
+          <p:cNvSpPr/>
+          <p:nvPr/>
+        </p:nvSpPr>
+        <p:spPr>
+          <a:xfrm>
+            <a:off x="2273580" y="1627632"/>
             <a:ext cx="6296" cy="329184"/>
           </a:xfrm>
           <a:prstGeom prst="rect">
@@ -9000,13 +9177,13 @@
       </p:sp>
       <p:sp>
         <p:nvSpPr>
-          <p:cNvPr id="26" name="Shape 24"/>
-          <p:cNvSpPr/>
-          <p:nvPr/>
-        </p:nvSpPr>
-        <p:spPr>
-          <a:xfrm>
-            <a:off x="2281574" y="1353312"/>
+          <p:cNvPr id="33" name="Shape 31"/>
+          <p:cNvSpPr/>
+          <p:nvPr/>
+        </p:nvSpPr>
+        <p:spPr>
+          <a:xfrm>
+            <a:off x="2281574" y="1627632"/>
             <a:ext cx="12310" cy="329184"/>
           </a:xfrm>
           <a:prstGeom prst="rect">
@@ -9020,13 +9197,13 @@
       </p:sp>
       <p:sp>
         <p:nvSpPr>
-          <p:cNvPr id="27" name="Shape 25"/>
-          <p:cNvSpPr/>
-          <p:nvPr/>
-        </p:nvSpPr>
-        <p:spPr>
-          <a:xfrm>
-            <a:off x="2296713" y="1353312"/>
+          <p:cNvPr id="34" name="Shape 32"/>
+          <p:cNvSpPr/>
+          <p:nvPr/>
+        </p:nvSpPr>
+        <p:spPr>
+          <a:xfrm>
+            <a:off x="2296713" y="1627632"/>
             <a:ext cx="5164" cy="329184"/>
           </a:xfrm>
           <a:prstGeom prst="rect">
@@ -9040,13 +9217,13 @@
       </p:sp>
       <p:sp>
         <p:nvSpPr>
-          <p:cNvPr id="28" name="Shape 26"/>
-          <p:cNvSpPr/>
-          <p:nvPr/>
-        </p:nvSpPr>
-        <p:spPr>
-          <a:xfrm>
-            <a:off x="2302514" y="1353312"/>
+          <p:cNvPr id="35" name="Shape 33"/>
+          <p:cNvSpPr/>
+          <p:nvPr/>
+        </p:nvSpPr>
+        <p:spPr>
+          <a:xfrm>
+            <a:off x="2302514" y="1627632"/>
             <a:ext cx="6650" cy="329184"/>
           </a:xfrm>
           <a:prstGeom prst="rect">
@@ -9060,13 +9237,13 @@
       </p:sp>
       <p:sp>
         <p:nvSpPr>
-          <p:cNvPr id="29" name="Shape 27"/>
-          <p:cNvSpPr/>
-          <p:nvPr/>
-        </p:nvSpPr>
-        <p:spPr>
-          <a:xfrm>
-            <a:off x="2310791" y="1353312"/>
+          <p:cNvPr id="36" name="Shape 34"/>
+          <p:cNvSpPr/>
+          <p:nvPr/>
+        </p:nvSpPr>
+        <p:spPr>
+          <a:xfrm>
+            <a:off x="2310791" y="1627632"/>
             <a:ext cx="11531" cy="329184"/>
           </a:xfrm>
           <a:prstGeom prst="rect">
@@ -9080,13 +9257,13 @@
       </p:sp>
       <p:sp>
         <p:nvSpPr>
-          <p:cNvPr id="30" name="Shape 28"/>
-          <p:cNvSpPr/>
-          <p:nvPr/>
-        </p:nvSpPr>
-        <p:spPr>
-          <a:xfrm>
-            <a:off x="2324020" y="1353312"/>
+          <p:cNvPr id="37" name="Shape 35"/>
+          <p:cNvSpPr/>
+          <p:nvPr/>
+        </p:nvSpPr>
+        <p:spPr>
+          <a:xfrm>
+            <a:off x="2324020" y="1627632"/>
             <a:ext cx="4952" cy="329184"/>
           </a:xfrm>
           <a:prstGeom prst="rect">
@@ -9100,13 +9277,13 @@
       </p:sp>
       <p:sp>
         <p:nvSpPr>
-          <p:cNvPr id="31" name="Shape 29"/>
-          <p:cNvSpPr/>
-          <p:nvPr/>
-        </p:nvSpPr>
-        <p:spPr>
-          <a:xfrm>
-            <a:off x="2329609" y="1353312"/>
+          <p:cNvPr id="38" name="Shape 36"/>
+          <p:cNvSpPr/>
+          <p:nvPr/>
+        </p:nvSpPr>
+        <p:spPr>
+          <a:xfrm>
+            <a:off x="2329609" y="1627632"/>
             <a:ext cx="7074" cy="329184"/>
           </a:xfrm>
           <a:prstGeom prst="rect">
@@ -9120,13 +9297,13 @@
       </p:sp>
       <p:sp>
         <p:nvSpPr>
-          <p:cNvPr id="32" name="Shape 30"/>
-          <p:cNvSpPr/>
-          <p:nvPr/>
-        </p:nvSpPr>
-        <p:spPr>
-          <a:xfrm>
-            <a:off x="2338382" y="1353312"/>
+          <p:cNvPr id="39" name="Shape 37"/>
+          <p:cNvSpPr/>
+          <p:nvPr/>
+        </p:nvSpPr>
+        <p:spPr>
+          <a:xfrm>
+            <a:off x="2338382" y="1627632"/>
             <a:ext cx="4952" cy="329184"/>
           </a:xfrm>
           <a:prstGeom prst="rect">
@@ -9140,13 +9317,13 @@
       </p:sp>
       <p:sp>
         <p:nvSpPr>
-          <p:cNvPr id="33" name="Shape 31"/>
-          <p:cNvSpPr/>
-          <p:nvPr/>
-        </p:nvSpPr>
-        <p:spPr>
-          <a:xfrm>
-            <a:off x="2344041" y="1353312"/>
+          <p:cNvPr id="40" name="Shape 38"/>
+          <p:cNvSpPr/>
+          <p:nvPr/>
+        </p:nvSpPr>
+        <p:spPr>
+          <a:xfrm>
+            <a:off x="2344041" y="1627632"/>
             <a:ext cx="6509" cy="329184"/>
           </a:xfrm>
           <a:prstGeom prst="rect">
@@ -9160,13 +9337,13 @@
       </p:sp>
       <p:sp>
         <p:nvSpPr>
-          <p:cNvPr id="34" name="Shape 32"/>
-          <p:cNvSpPr/>
-          <p:nvPr/>
-        </p:nvSpPr>
-        <p:spPr>
-          <a:xfrm>
-            <a:off x="2352177" y="1353312"/>
+          <p:cNvPr id="41" name="Shape 39"/>
+          <p:cNvSpPr/>
+          <p:nvPr/>
+        </p:nvSpPr>
+        <p:spPr>
+          <a:xfrm>
+            <a:off x="2352177" y="1627632"/>
             <a:ext cx="4740" cy="329184"/>
           </a:xfrm>
           <a:prstGeom prst="rect">
@@ -9180,13 +9357,13 @@
       </p:sp>
       <p:sp>
         <p:nvSpPr>
-          <p:cNvPr id="35" name="Shape 33"/>
-          <p:cNvSpPr/>
-          <p:nvPr/>
-        </p:nvSpPr>
-        <p:spPr>
-          <a:xfrm>
-            <a:off x="2357553" y="1353312"/>
+          <p:cNvPr id="42" name="Shape 40"/>
+          <p:cNvSpPr/>
+          <p:nvPr/>
+        </p:nvSpPr>
+        <p:spPr>
+          <a:xfrm>
+            <a:off x="2357553" y="1627632"/>
             <a:ext cx="6226" cy="329184"/>
           </a:xfrm>
           <a:prstGeom prst="rect">
@@ -9200,13 +9377,13 @@
       </p:sp>
       <p:sp>
         <p:nvSpPr>
-          <p:cNvPr id="36" name="Shape 34"/>
-          <p:cNvSpPr/>
-          <p:nvPr/>
-        </p:nvSpPr>
-        <p:spPr>
-          <a:xfrm>
-            <a:off x="2365830" y="1353312"/>
+          <p:cNvPr id="43" name="Shape 41"/>
+          <p:cNvSpPr/>
+          <p:nvPr/>
+        </p:nvSpPr>
+        <p:spPr>
+          <a:xfrm>
+            <a:off x="2365830" y="1627632"/>
             <a:ext cx="12734" cy="329184"/>
           </a:xfrm>
           <a:prstGeom prst="rect">
@@ -9220,13 +9397,13 @@
       </p:sp>
       <p:sp>
         <p:nvSpPr>
-          <p:cNvPr id="37" name="Shape 35"/>
-          <p:cNvSpPr/>
-          <p:nvPr/>
-        </p:nvSpPr>
-        <p:spPr>
-          <a:xfrm>
-            <a:off x="2380262" y="1353312"/>
+          <p:cNvPr id="44" name="Shape 42"/>
+          <p:cNvSpPr/>
+          <p:nvPr/>
+        </p:nvSpPr>
+        <p:spPr>
+          <a:xfrm>
+            <a:off x="2380262" y="1627632"/>
             <a:ext cx="11390" cy="329184"/>
           </a:xfrm>
           <a:prstGeom prst="rect">
@@ -9240,13 +9417,13 @@
       </p:sp>
       <p:sp>
         <p:nvSpPr>
-          <p:cNvPr id="38" name="Shape 36"/>
-          <p:cNvSpPr/>
-          <p:nvPr/>
-        </p:nvSpPr>
-        <p:spPr>
-          <a:xfrm>
-            <a:off x="2393350" y="1353312"/>
+          <p:cNvPr id="45" name="Shape 43"/>
+          <p:cNvSpPr/>
+          <p:nvPr/>
+        </p:nvSpPr>
+        <p:spPr>
+          <a:xfrm>
+            <a:off x="2393350" y="1627632"/>
             <a:ext cx="11178" cy="329184"/>
           </a:xfrm>
           <a:prstGeom prst="rect">
@@ -9260,13 +9437,13 @@
       </p:sp>
       <p:sp>
         <p:nvSpPr>
-          <p:cNvPr id="39" name="Shape 37"/>
-          <p:cNvSpPr/>
-          <p:nvPr/>
-        </p:nvSpPr>
-        <p:spPr>
-          <a:xfrm>
-            <a:off x="2406013" y="1353312"/>
+          <p:cNvPr id="46" name="Shape 44"/>
+          <p:cNvSpPr/>
+          <p:nvPr/>
+        </p:nvSpPr>
+        <p:spPr>
+          <a:xfrm>
+            <a:off x="2406013" y="1627632"/>
             <a:ext cx="11319" cy="329184"/>
           </a:xfrm>
           <a:prstGeom prst="rect">
@@ -9280,13 +9457,13 @@
       </p:sp>
       <p:sp>
         <p:nvSpPr>
-          <p:cNvPr id="40" name="Shape 38"/>
-          <p:cNvSpPr/>
-          <p:nvPr/>
-        </p:nvSpPr>
-        <p:spPr>
-          <a:xfrm>
-            <a:off x="2418889" y="1353312"/>
+          <p:cNvPr id="47" name="Shape 45"/>
+          <p:cNvSpPr/>
+          <p:nvPr/>
+        </p:nvSpPr>
+        <p:spPr>
+          <a:xfrm>
+            <a:off x="2418889" y="1627632"/>
             <a:ext cx="11814" cy="329184"/>
           </a:xfrm>
           <a:prstGeom prst="rect">
@@ -9300,13 +9477,13 @@
       </p:sp>
       <p:sp>
         <p:nvSpPr>
-          <p:cNvPr id="41" name="Shape 39"/>
-          <p:cNvSpPr/>
-          <p:nvPr/>
-        </p:nvSpPr>
-        <p:spPr>
-          <a:xfrm>
-            <a:off x="2432330" y="1353312"/>
+          <p:cNvPr id="48" name="Shape 46"/>
+          <p:cNvSpPr/>
+          <p:nvPr/>
+        </p:nvSpPr>
+        <p:spPr>
+          <a:xfrm>
+            <a:off x="2432330" y="1627632"/>
             <a:ext cx="4811" cy="329184"/>
           </a:xfrm>
           <a:prstGeom prst="rect">
@@ -9320,13 +9497,13 @@
       </p:sp>
       <p:sp>
         <p:nvSpPr>
-          <p:cNvPr id="42" name="Shape 40"/>
-          <p:cNvSpPr/>
-          <p:nvPr/>
-        </p:nvSpPr>
-        <p:spPr>
-          <a:xfrm>
-            <a:off x="2437707" y="1353312"/>
+          <p:cNvPr id="49" name="Shape 47"/>
+          <p:cNvSpPr/>
+          <p:nvPr/>
+        </p:nvSpPr>
+        <p:spPr>
+          <a:xfrm>
+            <a:off x="2437707" y="1627632"/>
             <a:ext cx="6438" cy="329184"/>
           </a:xfrm>
           <a:prstGeom prst="rect">
@@ -9340,13 +9517,13 @@
       </p:sp>
       <p:sp>
         <p:nvSpPr>
-          <p:cNvPr id="43" name="Shape 41"/>
-          <p:cNvSpPr/>
-          <p:nvPr/>
-        </p:nvSpPr>
-        <p:spPr>
-          <a:xfrm>
-            <a:off x="2445843" y="1353312"/>
+          <p:cNvPr id="50" name="Shape 48"/>
+          <p:cNvSpPr/>
+          <p:nvPr/>
+        </p:nvSpPr>
+        <p:spPr>
+          <a:xfrm>
+            <a:off x="2445843" y="1627632"/>
             <a:ext cx="11885" cy="329184"/>
           </a:xfrm>
           <a:prstGeom prst="rect">
@@ -9360,13 +9537,13 @@
       </p:sp>
       <p:sp>
         <p:nvSpPr>
-          <p:cNvPr id="44" name="Shape 42"/>
-          <p:cNvSpPr/>
-          <p:nvPr/>
-        </p:nvSpPr>
-        <p:spPr>
-          <a:xfrm>
-            <a:off x="2459921" y="1353312"/>
+          <p:cNvPr id="51" name="Shape 49"/>
+          <p:cNvSpPr/>
+          <p:nvPr/>
+        </p:nvSpPr>
+        <p:spPr>
+          <a:xfrm>
+            <a:off x="2459921" y="1627632"/>
             <a:ext cx="12097" cy="329184"/>
           </a:xfrm>
           <a:prstGeom prst="rect">
@@ -9380,13 +9557,13 @@
       </p:sp>
       <p:sp>
         <p:nvSpPr>
-          <p:cNvPr id="45" name="Shape 43"/>
-          <p:cNvSpPr/>
-          <p:nvPr/>
-        </p:nvSpPr>
-        <p:spPr>
-          <a:xfrm>
-            <a:off x="2473928" y="1353312"/>
+          <p:cNvPr id="52" name="Shape 50"/>
+          <p:cNvSpPr/>
+          <p:nvPr/>
+        </p:nvSpPr>
+        <p:spPr>
+          <a:xfrm>
+            <a:off x="2473928" y="1627632"/>
             <a:ext cx="4881" cy="329184"/>
           </a:xfrm>
           <a:prstGeom prst="rect">
@@ -9400,13 +9577,13 @@
       </p:sp>
       <p:sp>
         <p:nvSpPr>
-          <p:cNvPr id="46" name="Shape 44"/>
-          <p:cNvSpPr/>
-          <p:nvPr/>
-        </p:nvSpPr>
-        <p:spPr>
-          <a:xfrm>
-            <a:off x="2479376" y="1353312"/>
+          <p:cNvPr id="53" name="Shape 51"/>
+          <p:cNvSpPr/>
+          <p:nvPr/>
+        </p:nvSpPr>
+        <p:spPr>
+          <a:xfrm>
+            <a:off x="2479376" y="1627632"/>
             <a:ext cx="5094" cy="329184"/>
           </a:xfrm>
           <a:prstGeom prst="rect">
@@ -9420,13 +9597,13 @@
       </p:sp>
       <p:sp>
         <p:nvSpPr>
-          <p:cNvPr id="47" name="Shape 45"/>
-          <p:cNvSpPr/>
-          <p:nvPr/>
-        </p:nvSpPr>
-        <p:spPr>
-          <a:xfrm>
-            <a:off x="2485389" y="1353312"/>
+          <p:cNvPr id="54" name="Shape 52"/>
+          <p:cNvSpPr/>
+          <p:nvPr/>
+        </p:nvSpPr>
+        <p:spPr>
+          <a:xfrm>
+            <a:off x="2485389" y="1627632"/>
             <a:ext cx="5660" cy="329184"/>
           </a:xfrm>
           <a:prstGeom prst="rect">
@@ -9440,13 +9617,13 @@
       </p:sp>
       <p:sp>
         <p:nvSpPr>
-          <p:cNvPr id="48" name="Shape 46"/>
-          <p:cNvSpPr/>
-          <p:nvPr/>
-        </p:nvSpPr>
-        <p:spPr>
-          <a:xfrm>
-            <a:off x="2492534" y="1353312"/>
+          <p:cNvPr id="55" name="Shape 53"/>
+          <p:cNvSpPr/>
+          <p:nvPr/>
+        </p:nvSpPr>
+        <p:spPr>
+          <a:xfrm>
+            <a:off x="2492534" y="1627632"/>
             <a:ext cx="41386" cy="329184"/>
           </a:xfrm>
           <a:prstGeom prst="rect">
@@ -9460,13 +9637,13 @@
       </p:sp>
       <p:sp>
         <p:nvSpPr>
-          <p:cNvPr id="49" name="Shape 47"/>
-          <p:cNvSpPr/>
-          <p:nvPr/>
-        </p:nvSpPr>
-        <p:spPr>
-          <a:xfrm>
-            <a:off x="2534556" y="1353312"/>
+          <p:cNvPr id="56" name="Shape 54"/>
+          <p:cNvSpPr/>
+          <p:nvPr/>
+        </p:nvSpPr>
+        <p:spPr>
+          <a:xfrm>
+            <a:off x="2534556" y="1627632"/>
             <a:ext cx="18111" cy="329184"/>
           </a:xfrm>
           <a:prstGeom prst="rect">
@@ -9480,13 +9657,13 @@
       </p:sp>
       <p:sp>
         <p:nvSpPr>
-          <p:cNvPr id="50" name="Shape 48"/>
-          <p:cNvSpPr/>
-          <p:nvPr/>
-        </p:nvSpPr>
-        <p:spPr>
-          <a:xfrm>
-            <a:off x="2555072" y="1353312"/>
+          <p:cNvPr id="57" name="Shape 55"/>
+          <p:cNvSpPr/>
+          <p:nvPr/>
+        </p:nvSpPr>
+        <p:spPr>
+          <a:xfrm>
+            <a:off x="2555072" y="1627632"/>
             <a:ext cx="4572" cy="329184"/>
           </a:xfrm>
           <a:prstGeom prst="rect">
@@ -9500,13 +9677,13 @@
       </p:sp>
       <p:sp>
         <p:nvSpPr>
-          <p:cNvPr id="51" name="Shape 49"/>
-          <p:cNvSpPr/>
-          <p:nvPr/>
-        </p:nvSpPr>
-        <p:spPr>
-          <a:xfrm>
-            <a:off x="2560307" y="1353312"/>
+          <p:cNvPr id="58" name="Shape 56"/>
+          <p:cNvSpPr/>
+          <p:nvPr/>
+        </p:nvSpPr>
+        <p:spPr>
+          <a:xfrm>
+            <a:off x="2560307" y="1627632"/>
             <a:ext cx="4572" cy="329184"/>
           </a:xfrm>
           <a:prstGeom prst="rect">
@@ -9520,13 +9697,13 @@
       </p:sp>
       <p:sp>
         <p:nvSpPr>
-          <p:cNvPr id="52" name="Shape 50"/>
-          <p:cNvSpPr/>
-          <p:nvPr/>
-        </p:nvSpPr>
-        <p:spPr>
-          <a:xfrm>
-            <a:off x="2563066" y="1353312"/>
+          <p:cNvPr id="59" name="Shape 57"/>
+          <p:cNvSpPr/>
+          <p:nvPr/>
+        </p:nvSpPr>
+        <p:spPr>
+          <a:xfrm>
+            <a:off x="2563066" y="1627632"/>
             <a:ext cx="4572" cy="329184"/>
           </a:xfrm>
           <a:prstGeom prst="rect">
@@ -9540,13 +9717,13 @@
       </p:sp>
       <p:sp>
         <p:nvSpPr>
-          <p:cNvPr id="53" name="Shape 51"/>
-          <p:cNvSpPr/>
-          <p:nvPr/>
-        </p:nvSpPr>
-        <p:spPr>
-          <a:xfrm>
-            <a:off x="2565542" y="1353312"/>
+          <p:cNvPr id="60" name="Shape 58"/>
+          <p:cNvSpPr/>
+          <p:nvPr/>
+        </p:nvSpPr>
+        <p:spPr>
+          <a:xfrm>
+            <a:off x="2565542" y="1627632"/>
             <a:ext cx="5094" cy="329184"/>
           </a:xfrm>
           <a:prstGeom prst="rect">
@@ -9560,13 +9737,13 @@
       </p:sp>
       <p:sp>
         <p:nvSpPr>
-          <p:cNvPr id="54" name="Shape 52"/>
-          <p:cNvSpPr/>
-          <p:nvPr/>
-        </p:nvSpPr>
-        <p:spPr>
-          <a:xfrm>
-            <a:off x="2574244" y="1353312"/>
+          <p:cNvPr id="61" name="Shape 59"/>
+          <p:cNvSpPr/>
+          <p:nvPr/>
+        </p:nvSpPr>
+        <p:spPr>
+          <a:xfrm>
+            <a:off x="2574244" y="1627632"/>
             <a:ext cx="4572" cy="329184"/>
           </a:xfrm>
           <a:prstGeom prst="rect">
@@ -9580,13 +9757,13 @@
       </p:sp>
       <p:sp>
         <p:nvSpPr>
-          <p:cNvPr id="55" name="Shape 53"/>
-          <p:cNvSpPr/>
-          <p:nvPr/>
-        </p:nvSpPr>
-        <p:spPr>
-          <a:xfrm>
-            <a:off x="2580682" y="1353312"/>
+          <p:cNvPr id="62" name="Shape 60"/>
+          <p:cNvSpPr/>
+          <p:nvPr/>
+        </p:nvSpPr>
+        <p:spPr>
+          <a:xfrm>
+            <a:off x="2580682" y="1627632"/>
             <a:ext cx="4572" cy="329184"/>
           </a:xfrm>
           <a:prstGeom prst="rect">
@@ -9600,13 +9777,13 @@
       </p:sp>
       <p:sp>
         <p:nvSpPr>
-          <p:cNvPr id="56" name="Shape 54"/>
-          <p:cNvSpPr/>
-          <p:nvPr/>
-        </p:nvSpPr>
-        <p:spPr>
-          <a:xfrm>
-            <a:off x="2583229" y="1353312"/>
+          <p:cNvPr id="63" name="Shape 61"/>
+          <p:cNvSpPr/>
+          <p:nvPr/>
+        </p:nvSpPr>
+        <p:spPr>
+          <a:xfrm>
+            <a:off x="2583229" y="1627632"/>
             <a:ext cx="9055" cy="329184"/>
           </a:xfrm>
           <a:prstGeom prst="rect">
@@ -9620,13 +9797,13 @@
       </p:sp>
       <p:sp>
         <p:nvSpPr>
-          <p:cNvPr id="57" name="Shape 55"/>
-          <p:cNvSpPr/>
-          <p:nvPr/>
-        </p:nvSpPr>
-        <p:spPr>
-          <a:xfrm>
-            <a:off x="2595750" y="1353312"/>
+          <p:cNvPr id="64" name="Shape 62"/>
+          <p:cNvSpPr/>
+          <p:nvPr/>
+        </p:nvSpPr>
+        <p:spPr>
+          <a:xfrm>
+            <a:off x="2595750" y="1627632"/>
             <a:ext cx="4572" cy="329184"/>
           </a:xfrm>
           <a:prstGeom prst="rect">
@@ -9640,13 +9817,13 @@
       </p:sp>
       <p:sp>
         <p:nvSpPr>
-          <p:cNvPr id="58" name="Shape 56"/>
-          <p:cNvSpPr/>
-          <p:nvPr/>
-        </p:nvSpPr>
-        <p:spPr>
-          <a:xfrm>
-            <a:off x="2598368" y="1353312"/>
+          <p:cNvPr id="65" name="Shape 63"/>
+          <p:cNvSpPr/>
+          <p:nvPr/>
+        </p:nvSpPr>
+        <p:spPr>
+          <a:xfrm>
+            <a:off x="2598368" y="1627632"/>
             <a:ext cx="4572" cy="329184"/>
           </a:xfrm>
           <a:prstGeom prst="rect">
@@ -9660,13 +9837,13 @@
       </p:sp>
       <p:sp>
         <p:nvSpPr>
-          <p:cNvPr id="59" name="Shape 57"/>
-          <p:cNvSpPr/>
-          <p:nvPr/>
-        </p:nvSpPr>
-        <p:spPr>
-          <a:xfrm>
-            <a:off x="2601834" y="1353312"/>
+          <p:cNvPr id="66" name="Shape 64"/>
+          <p:cNvSpPr/>
+          <p:nvPr/>
+        </p:nvSpPr>
+        <p:spPr>
+          <a:xfrm>
+            <a:off x="2601834" y="1627632"/>
             <a:ext cx="10541" cy="329184"/>
           </a:xfrm>
           <a:prstGeom prst="rect">
@@ -9680,13 +9857,13 @@
       </p:sp>
       <p:sp>
         <p:nvSpPr>
-          <p:cNvPr id="60" name="Shape 58"/>
-          <p:cNvSpPr/>
-          <p:nvPr/>
-        </p:nvSpPr>
-        <p:spPr>
-          <a:xfrm>
-            <a:off x="2615488" y="1353312"/>
+          <p:cNvPr id="67" name="Shape 65"/>
+          <p:cNvSpPr/>
+          <p:nvPr/>
+        </p:nvSpPr>
+        <p:spPr>
+          <a:xfrm>
+            <a:off x="2615488" y="1627632"/>
             <a:ext cx="4572" cy="329184"/>
           </a:xfrm>
           <a:prstGeom prst="rect">
@@ -9700,13 +9877,13 @@
       </p:sp>
       <p:sp>
         <p:nvSpPr>
-          <p:cNvPr id="61" name="Shape 59"/>
-          <p:cNvSpPr/>
-          <p:nvPr/>
-        </p:nvSpPr>
-        <p:spPr>
-          <a:xfrm>
-            <a:off x="2621006" y="1353312"/>
+          <p:cNvPr id="68" name="Shape 66"/>
+          <p:cNvSpPr/>
+          <p:nvPr/>
+        </p:nvSpPr>
+        <p:spPr>
+          <a:xfrm>
+            <a:off x="2621006" y="1627632"/>
             <a:ext cx="4572" cy="329184"/>
           </a:xfrm>
           <a:prstGeom prst="rect">
@@ -9720,13 +9897,13 @@
       </p:sp>
       <p:sp>
         <p:nvSpPr>
-          <p:cNvPr id="62" name="Shape 60"/>
-          <p:cNvSpPr/>
-          <p:nvPr/>
-        </p:nvSpPr>
-        <p:spPr>
-          <a:xfrm>
-            <a:off x="2623836" y="1353312"/>
+          <p:cNvPr id="69" name="Shape 67"/>
+          <p:cNvSpPr/>
+          <p:nvPr/>
+        </p:nvSpPr>
+        <p:spPr>
+          <a:xfrm>
+            <a:off x="2623836" y="1627632"/>
             <a:ext cx="4572" cy="329184"/>
           </a:xfrm>
           <a:prstGeom prst="rect">
@@ -9740,13 +9917,13 @@
       </p:sp>
       <p:sp>
         <p:nvSpPr>
-          <p:cNvPr id="63" name="Shape 61"/>
-          <p:cNvSpPr/>
-          <p:nvPr/>
-        </p:nvSpPr>
-        <p:spPr>
-          <a:xfrm>
-            <a:off x="2627585" y="1353312"/>
+          <p:cNvPr id="70" name="Shape 68"/>
+          <p:cNvSpPr/>
+          <p:nvPr/>
+        </p:nvSpPr>
+        <p:spPr>
+          <a:xfrm>
+            <a:off x="2627585" y="1627632"/>
             <a:ext cx="20657" cy="329184"/>
           </a:xfrm>
           <a:prstGeom prst="rect">
@@ -9760,13 +9937,13 @@
       </p:sp>
       <p:sp>
         <p:nvSpPr>
-          <p:cNvPr id="64" name="Shape 62"/>
-          <p:cNvSpPr/>
-          <p:nvPr/>
-        </p:nvSpPr>
-        <p:spPr>
-          <a:xfrm>
-            <a:off x="2650719" y="1353312"/>
+          <p:cNvPr id="71" name="Shape 69"/>
+          <p:cNvSpPr/>
+          <p:nvPr/>
+        </p:nvSpPr>
+        <p:spPr>
+          <a:xfrm>
+            <a:off x="2650719" y="1627632"/>
             <a:ext cx="4572" cy="329184"/>
           </a:xfrm>
           <a:prstGeom prst="rect">
@@ -9780,13 +9957,13 @@
       </p:sp>
       <p:sp>
         <p:nvSpPr>
-          <p:cNvPr id="65" name="Shape 63"/>
-          <p:cNvSpPr/>
-          <p:nvPr/>
-        </p:nvSpPr>
-        <p:spPr>
-          <a:xfrm>
-            <a:off x="2656874" y="1353312"/>
+          <p:cNvPr id="72" name="Shape 70"/>
+          <p:cNvSpPr/>
+          <p:nvPr/>
+        </p:nvSpPr>
+        <p:spPr>
+          <a:xfrm>
+            <a:off x="2656874" y="1627632"/>
             <a:ext cx="4572" cy="329184"/>
           </a:xfrm>
           <a:prstGeom prst="rect">
@@ -9800,13 +9977,13 @@
       </p:sp>
       <p:sp>
         <p:nvSpPr>
-          <p:cNvPr id="66" name="Shape 64"/>
-          <p:cNvSpPr/>
-          <p:nvPr/>
-        </p:nvSpPr>
-        <p:spPr>
-          <a:xfrm>
-            <a:off x="2659279" y="1353312"/>
+          <p:cNvPr id="73" name="Shape 71"/>
+          <p:cNvSpPr/>
+          <p:nvPr/>
+        </p:nvSpPr>
+        <p:spPr>
+          <a:xfrm>
+            <a:off x="2659279" y="1627632"/>
             <a:ext cx="8419" cy="329184"/>
           </a:xfrm>
           <a:prstGeom prst="rect">
@@ -9820,13 +9997,13 @@
       </p:sp>
       <p:sp>
         <p:nvSpPr>
-          <p:cNvPr id="67" name="Shape 65"/>
-          <p:cNvSpPr/>
-          <p:nvPr/>
-        </p:nvSpPr>
-        <p:spPr>
-          <a:xfrm>
-            <a:off x="2670103" y="1353312"/>
+          <p:cNvPr id="74" name="Shape 72"/>
+          <p:cNvSpPr/>
+          <p:nvPr/>
+        </p:nvSpPr>
+        <p:spPr>
+          <a:xfrm>
+            <a:off x="2670103" y="1627632"/>
             <a:ext cx="4572" cy="329184"/>
           </a:xfrm>
           <a:prstGeom prst="rect">
@@ -9840,13 +10017,13 @@
       </p:sp>
       <p:sp>
         <p:nvSpPr>
-          <p:cNvPr id="68" name="Shape 66"/>
-          <p:cNvSpPr/>
-          <p:nvPr/>
-        </p:nvSpPr>
-        <p:spPr>
-          <a:xfrm>
-            <a:off x="2672862" y="1353312"/>
+          <p:cNvPr id="75" name="Shape 73"/>
+          <p:cNvSpPr/>
+          <p:nvPr/>
+        </p:nvSpPr>
+        <p:spPr>
+          <a:xfrm>
+            <a:off x="2672862" y="1627632"/>
             <a:ext cx="4572" cy="329184"/>
           </a:xfrm>
           <a:prstGeom prst="rect">
@@ -9860,13 +10037,13 @@
       </p:sp>
       <p:sp>
         <p:nvSpPr>
-          <p:cNvPr id="69" name="Shape 67"/>
-          <p:cNvSpPr/>
-          <p:nvPr/>
-        </p:nvSpPr>
-        <p:spPr>
-          <a:xfrm>
-            <a:off x="2676116" y="1353312"/>
+          <p:cNvPr id="76" name="Shape 74"/>
+          <p:cNvSpPr/>
+          <p:nvPr/>
+        </p:nvSpPr>
+        <p:spPr>
+          <a:xfrm>
+            <a:off x="2676116" y="1627632"/>
             <a:ext cx="11319" cy="329184"/>
           </a:xfrm>
           <a:prstGeom prst="rect">
@@ -9880,13 +10057,13 @@
       </p:sp>
       <p:sp>
         <p:nvSpPr>
-          <p:cNvPr id="70" name="Shape 68"/>
-          <p:cNvSpPr/>
-          <p:nvPr/>
-        </p:nvSpPr>
-        <p:spPr>
-          <a:xfrm>
-            <a:off x="2690619" y="1353312"/>
+          <p:cNvPr id="77" name="Shape 75"/>
+          <p:cNvSpPr/>
+          <p:nvPr/>
+        </p:nvSpPr>
+        <p:spPr>
+          <a:xfrm>
+            <a:off x="2690619" y="1627632"/>
             <a:ext cx="4572" cy="329184"/>
           </a:xfrm>
           <a:prstGeom prst="rect">
@@ -9900,13 +10077,13 @@
       </p:sp>
       <p:sp>
         <p:nvSpPr>
-          <p:cNvPr id="71" name="Shape 69"/>
-          <p:cNvSpPr/>
-          <p:nvPr/>
-        </p:nvSpPr>
-        <p:spPr>
-          <a:xfrm>
-            <a:off x="2693095" y="1353312"/>
+          <p:cNvPr id="78" name="Shape 76"/>
+          <p:cNvSpPr/>
+          <p:nvPr/>
+        </p:nvSpPr>
+        <p:spPr>
+          <a:xfrm>
+            <a:off x="2693095" y="1627632"/>
             <a:ext cx="4572" cy="329184"/>
           </a:xfrm>
           <a:prstGeom prst="rect">
@@ -9920,13 +10097,13 @@
       </p:sp>
       <p:sp>
         <p:nvSpPr>
-          <p:cNvPr id="72" name="Shape 70"/>
-          <p:cNvSpPr/>
-          <p:nvPr/>
-        </p:nvSpPr>
-        <p:spPr>
-          <a:xfrm>
-            <a:off x="2696915" y="1353312"/>
+          <p:cNvPr id="79" name="Shape 77"/>
+          <p:cNvSpPr/>
+          <p:nvPr/>
+        </p:nvSpPr>
+        <p:spPr>
+          <a:xfrm>
+            <a:off x="2696915" y="1627632"/>
             <a:ext cx="4572" cy="329184"/>
           </a:xfrm>
           <a:prstGeom prst="rect">
@@ -9940,13 +10117,13 @@
       </p:sp>
       <p:sp>
         <p:nvSpPr>
-          <p:cNvPr id="73" name="Shape 71"/>
-          <p:cNvSpPr/>
-          <p:nvPr/>
-        </p:nvSpPr>
-        <p:spPr>
-          <a:xfrm>
-            <a:off x="2699603" y="1353312"/>
+          <p:cNvPr id="80" name="Shape 78"/>
+          <p:cNvSpPr/>
+          <p:nvPr/>
+        </p:nvSpPr>
+        <p:spPr>
+          <a:xfrm>
+            <a:off x="2699603" y="1627632"/>
             <a:ext cx="17828" cy="329184"/>
           </a:xfrm>
           <a:prstGeom prst="rect">
@@ -9960,13 +10137,13 @@
       </p:sp>
       <p:sp>
         <p:nvSpPr>
-          <p:cNvPr id="74" name="Shape 72"/>
-          <p:cNvSpPr/>
-          <p:nvPr/>
-        </p:nvSpPr>
-        <p:spPr>
-          <a:xfrm>
-            <a:off x="2718138" y="1353312"/>
+          <p:cNvPr id="81" name="Shape 79"/>
+          <p:cNvSpPr/>
+          <p:nvPr/>
+        </p:nvSpPr>
+        <p:spPr>
+          <a:xfrm>
+            <a:off x="2718138" y="1627632"/>
             <a:ext cx="5094" cy="329184"/>
           </a:xfrm>
           <a:prstGeom prst="rect">
@@ -9980,13 +10157,13 @@
       </p:sp>
       <p:sp>
         <p:nvSpPr>
-          <p:cNvPr id="75" name="Shape 73"/>
-          <p:cNvSpPr/>
-          <p:nvPr/>
-        </p:nvSpPr>
-        <p:spPr>
-          <a:xfrm>
-            <a:off x="2726203" y="1353312"/>
+          <p:cNvPr id="82" name="Shape 80"/>
+          <p:cNvSpPr/>
+          <p:nvPr/>
+        </p:nvSpPr>
+        <p:spPr>
+          <a:xfrm>
+            <a:off x="2726203" y="1627632"/>
             <a:ext cx="4572" cy="329184"/>
           </a:xfrm>
           <a:prstGeom prst="rect">
@@ -10000,13 +10177,13 @@
       </p:sp>
       <p:sp>
         <p:nvSpPr>
-          <p:cNvPr id="76" name="Shape 74"/>
-          <p:cNvSpPr/>
-          <p:nvPr/>
-        </p:nvSpPr>
-        <p:spPr>
-          <a:xfrm>
-            <a:off x="2728538" y="1353312"/>
+          <p:cNvPr id="83" name="Shape 81"/>
+          <p:cNvSpPr/>
+          <p:nvPr/>
+        </p:nvSpPr>
+        <p:spPr>
+          <a:xfrm>
+            <a:off x="2728538" y="1627632"/>
             <a:ext cx="4572" cy="329184"/>
           </a:xfrm>
           <a:prstGeom prst="rect">
@@ -10020,13 +10197,13 @@
       </p:sp>
       <p:sp>
         <p:nvSpPr>
-          <p:cNvPr id="77" name="Shape 75"/>
-          <p:cNvSpPr/>
-          <p:nvPr/>
-        </p:nvSpPr>
-        <p:spPr>
-          <a:xfrm>
-            <a:off x="2735188" y="1353312"/>
+          <p:cNvPr id="84" name="Shape 82"/>
+          <p:cNvSpPr/>
+          <p:nvPr/>
+        </p:nvSpPr>
+        <p:spPr>
+          <a:xfrm>
+            <a:off x="2735188" y="1627632"/>
             <a:ext cx="10329" cy="329184"/>
           </a:xfrm>
           <a:prstGeom prst="rect">
@@ -10040,13 +10217,13 @@
       </p:sp>
       <p:sp>
         <p:nvSpPr>
-          <p:cNvPr id="78" name="Shape 76"/>
-          <p:cNvSpPr/>
-          <p:nvPr/>
-        </p:nvSpPr>
-        <p:spPr>
-          <a:xfrm>
-            <a:off x="2748488" y="1353312"/>
+          <p:cNvPr id="85" name="Shape 83"/>
+          <p:cNvSpPr/>
+          <p:nvPr/>
+        </p:nvSpPr>
+        <p:spPr>
+          <a:xfrm>
+            <a:off x="2748488" y="1627632"/>
             <a:ext cx="4572" cy="329184"/>
           </a:xfrm>
           <a:prstGeom prst="rect">
@@ -10060,13 +10237,13 @@
       </p:sp>
       <p:sp>
         <p:nvSpPr>
-          <p:cNvPr id="79" name="Shape 77"/>
-          <p:cNvSpPr/>
-          <p:nvPr/>
-        </p:nvSpPr>
-        <p:spPr>
-          <a:xfrm>
-            <a:off x="2754006" y="1353312"/>
+          <p:cNvPr id="86" name="Shape 84"/>
+          <p:cNvSpPr/>
+          <p:nvPr/>
+        </p:nvSpPr>
+        <p:spPr>
+          <a:xfrm>
+            <a:off x="2754006" y="1627632"/>
             <a:ext cx="10116" cy="329184"/>
           </a:xfrm>
           <a:prstGeom prst="rect">
@@ -10080,13 +10257,13 @@
       </p:sp>
       <p:sp>
         <p:nvSpPr>
-          <p:cNvPr id="80" name="Shape 78"/>
-          <p:cNvSpPr/>
-          <p:nvPr/>
-        </p:nvSpPr>
-        <p:spPr>
-          <a:xfrm>
-            <a:off x="2767023" y="1353312"/>
+          <p:cNvPr id="87" name="Shape 85"/>
+          <p:cNvSpPr/>
+          <p:nvPr/>
+        </p:nvSpPr>
+        <p:spPr>
+          <a:xfrm>
+            <a:off x="2767023" y="1627632"/>
             <a:ext cx="4572" cy="329184"/>
           </a:xfrm>
           <a:prstGeom prst="rect">
@@ -10100,13 +10277,13 @@
       </p:sp>
       <p:sp>
         <p:nvSpPr>
-          <p:cNvPr id="81" name="Shape 79"/>
-          <p:cNvSpPr/>
-          <p:nvPr/>
-        </p:nvSpPr>
-        <p:spPr>
-          <a:xfrm>
-            <a:off x="2769358" y="1353312"/>
+          <p:cNvPr id="88" name="Shape 86"/>
+          <p:cNvSpPr/>
+          <p:nvPr/>
+        </p:nvSpPr>
+        <p:spPr>
+          <a:xfrm>
+            <a:off x="2769358" y="1627632"/>
             <a:ext cx="4572" cy="329184"/>
           </a:xfrm>
           <a:prstGeom prst="rect">
@@ -10120,13 +10297,13 @@
       </p:sp>
       <p:sp>
         <p:nvSpPr>
-          <p:cNvPr id="82" name="Shape 80"/>
-          <p:cNvSpPr/>
-          <p:nvPr/>
-        </p:nvSpPr>
-        <p:spPr>
-          <a:xfrm>
-            <a:off x="2772400" y="1353312"/>
+          <p:cNvPr id="89" name="Shape 87"/>
+          <p:cNvSpPr/>
+          <p:nvPr/>
+        </p:nvSpPr>
+        <p:spPr>
+          <a:xfrm>
+            <a:off x="2772400" y="1627632"/>
             <a:ext cx="4572" cy="329184"/>
           </a:xfrm>
           <a:prstGeom prst="rect">
@@ -10140,13 +10317,13 @@
       </p:sp>
       <p:sp>
         <p:nvSpPr>
-          <p:cNvPr id="83" name="Shape 81"/>
-          <p:cNvSpPr/>
-          <p:nvPr/>
-        </p:nvSpPr>
-        <p:spPr>
-          <a:xfrm>
-            <a:off x="2774876" y="1353312"/>
+          <p:cNvPr id="90" name="Shape 88"/>
+          <p:cNvSpPr/>
+          <p:nvPr/>
+        </p:nvSpPr>
+        <p:spPr>
+          <a:xfrm>
+            <a:off x="2774876" y="1627632"/>
             <a:ext cx="15069" cy="329184"/>
           </a:xfrm>
           <a:prstGeom prst="rect">
@@ -10160,13 +10337,13 @@
       </p:sp>
       <p:sp>
         <p:nvSpPr>
-          <p:cNvPr id="84" name="Shape 82"/>
-          <p:cNvSpPr/>
-          <p:nvPr/>
-        </p:nvSpPr>
-        <p:spPr>
-          <a:xfrm>
-            <a:off x="2790581" y="1353312"/>
+          <p:cNvPr id="91" name="Shape 89"/>
+          <p:cNvSpPr/>
+          <p:nvPr/>
+        </p:nvSpPr>
+        <p:spPr>
+          <a:xfrm>
+            <a:off x="2790581" y="1627632"/>
             <a:ext cx="8065" cy="329184"/>
           </a:xfrm>
           <a:prstGeom prst="rect">
@@ -10180,13 +10357,13 @@
       </p:sp>
       <p:sp>
         <p:nvSpPr>
-          <p:cNvPr id="85" name="Shape 83"/>
-          <p:cNvSpPr/>
-          <p:nvPr/>
-        </p:nvSpPr>
-        <p:spPr>
-          <a:xfrm>
-            <a:off x="2801405" y="1353312"/>
+          <p:cNvPr id="92" name="Shape 90"/>
+          <p:cNvSpPr/>
+          <p:nvPr/>
+        </p:nvSpPr>
+        <p:spPr>
+          <a:xfrm>
+            <a:off x="2801405" y="1627632"/>
             <a:ext cx="4572" cy="329184"/>
           </a:xfrm>
           <a:prstGeom prst="rect">
@@ -10200,13 +10377,13 @@
       </p:sp>
       <p:sp>
         <p:nvSpPr>
-          <p:cNvPr id="86" name="Shape 84"/>
-          <p:cNvSpPr/>
-          <p:nvPr/>
-        </p:nvSpPr>
-        <p:spPr>
-          <a:xfrm>
-            <a:off x="2806145" y="1353312"/>
+          <p:cNvPr id="93" name="Shape 91"/>
+          <p:cNvSpPr/>
+          <p:nvPr/>
+        </p:nvSpPr>
+        <p:spPr>
+          <a:xfrm>
+            <a:off x="2806145" y="1627632"/>
             <a:ext cx="4572" cy="329184"/>
           </a:xfrm>
           <a:prstGeom prst="rect">
@@ -10220,13 +10397,13 @@
       </p:sp>
       <p:sp>
         <p:nvSpPr>
-          <p:cNvPr id="87" name="Shape 85"/>
-          <p:cNvSpPr/>
-          <p:nvPr/>
-        </p:nvSpPr>
-        <p:spPr>
-          <a:xfrm>
-            <a:off x="2808762" y="1353312"/>
+          <p:cNvPr id="94" name="Shape 92"/>
+          <p:cNvSpPr/>
+          <p:nvPr/>
+        </p:nvSpPr>
+        <p:spPr>
+          <a:xfrm>
+            <a:off x="2808762" y="1627632"/>
             <a:ext cx="4572" cy="329184"/>
           </a:xfrm>
           <a:prstGeom prst="rect">
@@ -10240,13 +10417,13 @@
       </p:sp>
       <p:sp>
         <p:nvSpPr>
-          <p:cNvPr id="88" name="Shape 86"/>
-          <p:cNvSpPr/>
-          <p:nvPr/>
-        </p:nvSpPr>
-        <p:spPr>
-          <a:xfrm>
-            <a:off x="2812370" y="1353312"/>
+          <p:cNvPr id="95" name="Shape 93"/>
+          <p:cNvSpPr/>
+          <p:nvPr/>
+        </p:nvSpPr>
+        <p:spPr>
+          <a:xfrm>
+            <a:off x="2812370" y="1627632"/>
             <a:ext cx="10399" cy="329184"/>
           </a:xfrm>
           <a:prstGeom prst="rect">
@@ -10260,13 +10437,13 @@
       </p:sp>
       <p:sp>
         <p:nvSpPr>
-          <p:cNvPr id="89" name="Shape 87"/>
-          <p:cNvSpPr/>
-          <p:nvPr/>
-        </p:nvSpPr>
-        <p:spPr>
-          <a:xfrm>
-            <a:off x="2825034" y="1353312"/>
+          <p:cNvPr id="96" name="Shape 94"/>
+          <p:cNvSpPr/>
+          <p:nvPr/>
+        </p:nvSpPr>
+        <p:spPr>
+          <a:xfrm>
+            <a:off x="2825034" y="1627632"/>
             <a:ext cx="4572" cy="329184"/>
           </a:xfrm>
           <a:prstGeom prst="rect">
@@ -10280,13 +10457,13 @@
       </p:sp>
       <p:sp>
         <p:nvSpPr>
-          <p:cNvPr id="90" name="Shape 88"/>
-          <p:cNvSpPr/>
-          <p:nvPr/>
-        </p:nvSpPr>
-        <p:spPr>
-          <a:xfrm>
-            <a:off x="2830764" y="1353312"/>
+          <p:cNvPr id="97" name="Shape 95"/>
+          <p:cNvSpPr/>
+          <p:nvPr/>
+        </p:nvSpPr>
+        <p:spPr>
+          <a:xfrm>
+            <a:off x="2830764" y="1627632"/>
             <a:ext cx="4572" cy="329184"/>
           </a:xfrm>
           <a:prstGeom prst="rect">
@@ -10300,13 +10477,13 @@
       </p:sp>
       <p:sp>
         <p:nvSpPr>
-          <p:cNvPr id="91" name="Shape 89"/>
-          <p:cNvSpPr/>
-          <p:nvPr/>
-        </p:nvSpPr>
-        <p:spPr>
-          <a:xfrm>
-            <a:off x="2833664" y="1353312"/>
+          <p:cNvPr id="98" name="Shape 96"/>
+          <p:cNvSpPr/>
+          <p:nvPr/>
+        </p:nvSpPr>
+        <p:spPr>
+          <a:xfrm>
+            <a:off x="2833664" y="1627632"/>
             <a:ext cx="9338" cy="329184"/>
           </a:xfrm>
           <a:prstGeom prst="rect">
@@ -10320,13 +10497,13 @@
       </p:sp>
       <p:sp>
         <p:nvSpPr>
-          <p:cNvPr id="92" name="Shape 90"/>
-          <p:cNvSpPr/>
-          <p:nvPr/>
-        </p:nvSpPr>
-        <p:spPr>
-          <a:xfrm>
-            <a:off x="2846328" y="1353312"/>
+          <p:cNvPr id="99" name="Shape 97"/>
+          <p:cNvSpPr/>
+          <p:nvPr/>
+        </p:nvSpPr>
+        <p:spPr>
+          <a:xfrm>
+            <a:off x="2846328" y="1627632"/>
             <a:ext cx="4572" cy="329184"/>
           </a:xfrm>
           <a:prstGeom prst="rect">
@@ -10340,13 +10517,13 @@
       </p:sp>
       <p:sp>
         <p:nvSpPr>
-          <p:cNvPr id="93" name="Shape 91"/>
-          <p:cNvSpPr/>
-          <p:nvPr/>
-        </p:nvSpPr>
-        <p:spPr>
-          <a:xfrm>
-            <a:off x="2851633" y="1353312"/>
+          <p:cNvPr id="100" name="Shape 98"/>
+          <p:cNvSpPr/>
+          <p:nvPr/>
+        </p:nvSpPr>
+        <p:spPr>
+          <a:xfrm>
+            <a:off x="2851633" y="1627632"/>
             <a:ext cx="23770" cy="329184"/>
           </a:xfrm>
           <a:prstGeom prst="rect">
@@ -10360,13 +10537,13 @@
       </p:sp>
       <p:sp>
         <p:nvSpPr>
-          <p:cNvPr id="94" name="Shape 92"/>
-          <p:cNvSpPr/>
-          <p:nvPr/>
-        </p:nvSpPr>
-        <p:spPr>
-          <a:xfrm>
-            <a:off x="2877667" y="1353312"/>
+          <p:cNvPr id="101" name="Shape 99"/>
+          <p:cNvSpPr/>
+          <p:nvPr/>
+        </p:nvSpPr>
+        <p:spPr>
+          <a:xfrm>
+            <a:off x="2877667" y="1627632"/>
             <a:ext cx="4572" cy="329184"/>
           </a:xfrm>
           <a:prstGeom prst="rect">
@@ -10380,13 +10557,13 @@
       </p:sp>
       <p:sp>
         <p:nvSpPr>
-          <p:cNvPr id="95" name="Shape 93"/>
-          <p:cNvSpPr/>
-          <p:nvPr/>
-        </p:nvSpPr>
-        <p:spPr>
-          <a:xfrm>
-            <a:off x="2880427" y="1353312"/>
+          <p:cNvPr id="102" name="Shape 100"/>
+          <p:cNvSpPr/>
+          <p:nvPr/>
+        </p:nvSpPr>
+        <p:spPr>
+          <a:xfrm>
+            <a:off x="2880427" y="1627632"/>
             <a:ext cx="4572" cy="329184"/>
           </a:xfrm>
           <a:prstGeom prst="rect">
@@ -10400,13 +10577,13 @@
       </p:sp>
       <p:sp>
         <p:nvSpPr>
-          <p:cNvPr id="96" name="Shape 94"/>
-          <p:cNvSpPr/>
-          <p:nvPr/>
-        </p:nvSpPr>
-        <p:spPr>
-          <a:xfrm>
-            <a:off x="2883539" y="1353312"/>
+          <p:cNvPr id="103" name="Shape 101"/>
+          <p:cNvSpPr/>
+          <p:nvPr/>
+        </p:nvSpPr>
+        <p:spPr>
+          <a:xfrm>
+            <a:off x="2883539" y="1627632"/>
             <a:ext cx="10824" cy="329184"/>
           </a:xfrm>
           <a:prstGeom prst="rect">
@@ -10420,13 +10597,13 @@
       </p:sp>
       <p:sp>
         <p:nvSpPr>
-          <p:cNvPr id="97" name="Shape 95"/>
-          <p:cNvSpPr/>
-          <p:nvPr/>
-        </p:nvSpPr>
-        <p:spPr>
-          <a:xfrm>
-            <a:off x="2897051" y="1353312"/>
+          <p:cNvPr id="104" name="Shape 102"/>
+          <p:cNvSpPr/>
+          <p:nvPr/>
+        </p:nvSpPr>
+        <p:spPr>
+          <a:xfrm>
+            <a:off x="2897051" y="1627632"/>
             <a:ext cx="4572" cy="329184"/>
           </a:xfrm>
           <a:prstGeom prst="rect">
@@ -10440,13 +10617,13 @@
       </p:sp>
       <p:sp>
         <p:nvSpPr>
-          <p:cNvPr id="98" name="Shape 96"/>
-          <p:cNvSpPr/>
-          <p:nvPr/>
-        </p:nvSpPr>
-        <p:spPr>
-          <a:xfrm>
-            <a:off x="2903065" y="1353312"/>
+          <p:cNvPr id="105" name="Shape 103"/>
+          <p:cNvSpPr/>
+          <p:nvPr/>
+        </p:nvSpPr>
+        <p:spPr>
+          <a:xfrm>
+            <a:off x="2903065" y="1627632"/>
             <a:ext cx="10187" cy="329184"/>
           </a:xfrm>
           <a:prstGeom prst="rect">
@@ -10460,13 +10637,13 @@
       </p:sp>
       <p:sp>
         <p:nvSpPr>
-          <p:cNvPr id="99" name="Shape 97"/>
-          <p:cNvSpPr/>
-          <p:nvPr/>
-        </p:nvSpPr>
-        <p:spPr>
-          <a:xfrm>
-            <a:off x="2915304" y="1353312"/>
+          <p:cNvPr id="106" name="Shape 104"/>
+          <p:cNvSpPr/>
+          <p:nvPr/>
+        </p:nvSpPr>
+        <p:spPr>
+          <a:xfrm>
+            <a:off x="2915304" y="1627632"/>
             <a:ext cx="4572" cy="329184"/>
           </a:xfrm>
           <a:prstGeom prst="rect">
@@ -10480,13 +10657,13 @@
       </p:sp>
       <p:sp>
         <p:nvSpPr>
-          <p:cNvPr id="100" name="Shape 98"/>
-          <p:cNvSpPr/>
-          <p:nvPr/>
-        </p:nvSpPr>
-        <p:spPr>
-          <a:xfrm>
-            <a:off x="2921105" y="1353312"/>
+          <p:cNvPr id="107" name="Shape 105"/>
+          <p:cNvSpPr/>
+          <p:nvPr/>
+        </p:nvSpPr>
+        <p:spPr>
+          <a:xfrm>
+            <a:off x="2921105" y="1627632"/>
             <a:ext cx="4572" cy="329184"/>
           </a:xfrm>
           <a:prstGeom prst="rect">
@@ -10500,13 +10677,13 @@
       </p:sp>
       <p:sp>
         <p:nvSpPr>
-          <p:cNvPr id="101" name="Shape 99"/>
-          <p:cNvSpPr/>
-          <p:nvPr/>
-        </p:nvSpPr>
-        <p:spPr>
-          <a:xfrm>
-            <a:off x="2923651" y="1353312"/>
+          <p:cNvPr id="108" name="Shape 106"/>
+          <p:cNvSpPr/>
+          <p:nvPr/>
+        </p:nvSpPr>
+        <p:spPr>
+          <a:xfrm>
+            <a:off x="2923651" y="1627632"/>
             <a:ext cx="13583" cy="329184"/>
           </a:xfrm>
           <a:prstGeom prst="rect">
@@ -10520,13 +10697,13 @@
       </p:sp>
       <p:sp>
         <p:nvSpPr>
-          <p:cNvPr id="102" name="Shape 100"/>
-          <p:cNvSpPr/>
-          <p:nvPr/>
-        </p:nvSpPr>
-        <p:spPr>
-          <a:xfrm>
-            <a:off x="2937800" y="1353312"/>
+          <p:cNvPr id="109" name="Shape 107"/>
+          <p:cNvSpPr/>
+          <p:nvPr/>
+        </p:nvSpPr>
+        <p:spPr>
+          <a:xfrm>
+            <a:off x="2937800" y="1627632"/>
             <a:ext cx="7428" cy="329184"/>
           </a:xfrm>
           <a:prstGeom prst="rect">
@@ -10540,13 +10717,13 @@
       </p:sp>
       <p:sp>
         <p:nvSpPr>
-          <p:cNvPr id="103" name="Shape 101"/>
-          <p:cNvSpPr/>
-          <p:nvPr/>
-        </p:nvSpPr>
-        <p:spPr>
-          <a:xfrm>
-            <a:off x="2948129" y="1353312"/>
+          <p:cNvPr id="110" name="Shape 108"/>
+          <p:cNvSpPr/>
+          <p:nvPr/>
+        </p:nvSpPr>
+        <p:spPr>
+          <a:xfrm>
+            <a:off x="2948129" y="1627632"/>
             <a:ext cx="4572" cy="329184"/>
           </a:xfrm>
           <a:prstGeom prst="rect">
@@ -10560,13 +10737,13 @@
       </p:sp>
       <p:sp>
         <p:nvSpPr>
-          <p:cNvPr id="104" name="Shape 102"/>
-          <p:cNvSpPr/>
-          <p:nvPr/>
-        </p:nvSpPr>
-        <p:spPr>
-          <a:xfrm>
-            <a:off x="2950888" y="1353312"/>
+          <p:cNvPr id="111" name="Shape 109"/>
+          <p:cNvSpPr/>
+          <p:nvPr/>
+        </p:nvSpPr>
+        <p:spPr>
+          <a:xfrm>
+            <a:off x="2950888" y="1627632"/>
             <a:ext cx="4572" cy="329184"/>
           </a:xfrm>
           <a:prstGeom prst="rect">
@@ -10580,13 +10757,13 @@
       </p:sp>
       <p:sp>
         <p:nvSpPr>
-          <p:cNvPr id="105" name="Shape 103"/>
-          <p:cNvSpPr/>
-          <p:nvPr/>
-        </p:nvSpPr>
-        <p:spPr>
-          <a:xfrm>
-            <a:off x="2954001" y="1353312"/>
+          <p:cNvPr id="112" name="Shape 110"/>
+          <p:cNvSpPr/>
+          <p:nvPr/>
+        </p:nvSpPr>
+        <p:spPr>
+          <a:xfrm>
+            <a:off x="2954001" y="1627632"/>
             <a:ext cx="10187" cy="329184"/>
           </a:xfrm>
           <a:prstGeom prst="rect">
@@ -10600,13 +10777,13 @@
       </p:sp>
       <p:sp>
         <p:nvSpPr>
-          <p:cNvPr id="106" name="Shape 104"/>
-          <p:cNvSpPr/>
-          <p:nvPr/>
-        </p:nvSpPr>
-        <p:spPr>
-          <a:xfrm>
-            <a:off x="2966523" y="1353312"/>
+          <p:cNvPr id="113" name="Shape 111"/>
+          <p:cNvSpPr/>
+          <p:nvPr/>
+        </p:nvSpPr>
+        <p:spPr>
+          <a:xfrm>
+            <a:off x="2966523" y="1627632"/>
             <a:ext cx="4572" cy="329184"/>
           </a:xfrm>
           <a:prstGeom prst="rect">
@@ -10620,13 +10797,13 @@
       </p:sp>
       <p:sp>
         <p:nvSpPr>
-          <p:cNvPr id="107" name="Shape 105"/>
-          <p:cNvSpPr/>
-          <p:nvPr/>
-        </p:nvSpPr>
-        <p:spPr>
-          <a:xfrm>
-            <a:off x="2972111" y="1353312"/>
+          <p:cNvPr id="114" name="Shape 112"/>
+          <p:cNvSpPr/>
+          <p:nvPr/>
+        </p:nvSpPr>
+        <p:spPr>
+          <a:xfrm>
+            <a:off x="2972111" y="1627632"/>
             <a:ext cx="9975" cy="329184"/>
           </a:xfrm>
           <a:prstGeom prst="rect">
@@ -10640,13 +10817,13 @@
       </p:sp>
       <p:sp>
         <p:nvSpPr>
-          <p:cNvPr id="108" name="Shape 106"/>
-          <p:cNvSpPr/>
-          <p:nvPr/>
-        </p:nvSpPr>
-        <p:spPr>
-          <a:xfrm>
-            <a:off x="2984280" y="1353312"/>
+          <p:cNvPr id="115" name="Shape 113"/>
+          <p:cNvSpPr/>
+          <p:nvPr/>
+        </p:nvSpPr>
+        <p:spPr>
+          <a:xfrm>
+            <a:off x="2984280" y="1627632"/>
             <a:ext cx="4572" cy="329184"/>
           </a:xfrm>
           <a:prstGeom prst="rect">
@@ -10660,13 +10837,13 @@
       </p:sp>
       <p:sp>
         <p:nvSpPr>
-          <p:cNvPr id="109" name="Shape 107"/>
-          <p:cNvSpPr/>
-          <p:nvPr/>
-        </p:nvSpPr>
-        <p:spPr>
-          <a:xfrm>
-            <a:off x="2989939" y="1353312"/>
+          <p:cNvPr id="116" name="Shape 114"/>
+          <p:cNvSpPr/>
+          <p:nvPr/>
+        </p:nvSpPr>
+        <p:spPr>
+          <a:xfrm>
+            <a:off x="2989939" y="1627632"/>
             <a:ext cx="23841" cy="329184"/>
           </a:xfrm>
           <a:prstGeom prst="rect">
@@ -10680,13 +10857,13 @@
       </p:sp>
       <p:sp>
         <p:nvSpPr>
-          <p:cNvPr id="110" name="Shape 108"/>
-          <p:cNvSpPr/>
-          <p:nvPr/>
-        </p:nvSpPr>
-        <p:spPr>
-          <a:xfrm>
-            <a:off x="3016751" y="1353312"/>
+          <p:cNvPr id="117" name="Shape 115"/>
+          <p:cNvSpPr/>
+          <p:nvPr/>
+        </p:nvSpPr>
+        <p:spPr>
+          <a:xfrm>
+            <a:off x="3016751" y="1627632"/>
             <a:ext cx="4572" cy="329184"/>
           </a:xfrm>
           <a:prstGeom prst="rect">
@@ -10700,13 +10877,13 @@
       </p:sp>
       <p:sp>
         <p:nvSpPr>
-          <p:cNvPr id="111" name="Shape 109"/>
-          <p:cNvSpPr/>
-          <p:nvPr/>
-        </p:nvSpPr>
-        <p:spPr>
-          <a:xfrm>
-            <a:off x="3021916" y="1353312"/>
+          <p:cNvPr id="118" name="Shape 116"/>
+          <p:cNvSpPr/>
+          <p:nvPr/>
+        </p:nvSpPr>
+        <p:spPr>
+          <a:xfrm>
+            <a:off x="3021916" y="1627632"/>
             <a:ext cx="9904" cy="329184"/>
           </a:xfrm>
           <a:prstGeom prst="rect">
@@ -10720,13 +10897,13 @@
       </p:sp>
       <p:sp>
         <p:nvSpPr>
-          <p:cNvPr id="112" name="Shape 110"/>
-          <p:cNvSpPr/>
-          <p:nvPr/>
-        </p:nvSpPr>
-        <p:spPr>
-          <a:xfrm>
-            <a:off x="3034013" y="1353312"/>
+          <p:cNvPr id="119" name="Shape 117"/>
+          <p:cNvSpPr/>
+          <p:nvPr/>
+        </p:nvSpPr>
+        <p:spPr>
+          <a:xfrm>
+            <a:off x="3034013" y="1627632"/>
             <a:ext cx="4572" cy="329184"/>
           </a:xfrm>
           <a:prstGeom prst="rect">
@@ -10740,13 +10917,13 @@
       </p:sp>
       <p:sp>
         <p:nvSpPr>
-          <p:cNvPr id="113" name="Shape 111"/>
-          <p:cNvSpPr/>
-          <p:nvPr/>
-        </p:nvSpPr>
-        <p:spPr>
-          <a:xfrm>
-            <a:off x="3039673" y="1353312"/>
+          <p:cNvPr id="120" name="Shape 118"/>
+          <p:cNvSpPr/>
+          <p:nvPr/>
+        </p:nvSpPr>
+        <p:spPr>
+          <a:xfrm>
+            <a:off x="3039673" y="1627632"/>
             <a:ext cx="9551" cy="329184"/>
           </a:xfrm>
           <a:prstGeom prst="rect">
@@ -10760,13 +10937,13 @@
       </p:sp>
       <p:sp>
         <p:nvSpPr>
-          <p:cNvPr id="114" name="Shape 112"/>
-          <p:cNvSpPr/>
-          <p:nvPr/>
-        </p:nvSpPr>
-        <p:spPr>
-          <a:xfrm>
-            <a:off x="3052407" y="1353312"/>
+          <p:cNvPr id="121" name="Shape 119"/>
+          <p:cNvSpPr/>
+          <p:nvPr/>
+        </p:nvSpPr>
+        <p:spPr>
+          <a:xfrm>
+            <a:off x="3052407" y="1627632"/>
             <a:ext cx="4572" cy="329184"/>
           </a:xfrm>
           <a:prstGeom prst="rect">
@@ -10780,13 +10957,13 @@
       </p:sp>
       <p:sp>
         <p:nvSpPr>
-          <p:cNvPr id="115" name="Shape 113"/>
-          <p:cNvSpPr/>
-          <p:nvPr/>
-        </p:nvSpPr>
-        <p:spPr>
-          <a:xfrm>
-            <a:off x="3057642" y="1353312"/>
+          <p:cNvPr id="122" name="Shape 120"/>
+          <p:cNvSpPr/>
+          <p:nvPr/>
+        </p:nvSpPr>
+        <p:spPr>
+          <a:xfrm>
+            <a:off x="3057642" y="1627632"/>
             <a:ext cx="21153" cy="329184"/>
           </a:xfrm>
           <a:prstGeom prst="rect">
@@ -10800,13 +10977,13 @@
       </p:sp>
       <p:sp>
         <p:nvSpPr>
-          <p:cNvPr id="116" name="Shape 114"/>
-          <p:cNvSpPr/>
-          <p:nvPr/>
-        </p:nvSpPr>
-        <p:spPr>
-          <a:xfrm>
-            <a:off x="3080987" y="1353312"/>
+          <p:cNvPr id="123" name="Shape 121"/>
+          <p:cNvSpPr/>
+          <p:nvPr/>
+        </p:nvSpPr>
+        <p:spPr>
+          <a:xfrm>
+            <a:off x="3080987" y="1627632"/>
             <a:ext cx="4572" cy="329184"/>
           </a:xfrm>
           <a:prstGeom prst="rect">
@@ -10820,13 +10997,13 @@
       </p:sp>
       <p:sp>
         <p:nvSpPr>
-          <p:cNvPr id="117" name="Shape 115"/>
-          <p:cNvSpPr/>
-          <p:nvPr/>
-        </p:nvSpPr>
-        <p:spPr>
-          <a:xfrm>
-            <a:off x="3086435" y="1353312"/>
+          <p:cNvPr id="124" name="Shape 122"/>
+          <p:cNvSpPr/>
+          <p:nvPr/>
+        </p:nvSpPr>
+        <p:spPr>
+          <a:xfrm>
+            <a:off x="3086435" y="1627632"/>
             <a:ext cx="9197" cy="329184"/>
           </a:xfrm>
           <a:prstGeom prst="rect">
@@ -10840,13 +11017,13 @@
       </p:sp>
       <p:sp>
         <p:nvSpPr>
-          <p:cNvPr id="118" name="Shape 116"/>
-          <p:cNvSpPr/>
-          <p:nvPr/>
-        </p:nvSpPr>
-        <p:spPr>
-          <a:xfrm>
-            <a:off x="3096410" y="1353312"/>
+          <p:cNvPr id="125" name="Shape 123"/>
+          <p:cNvSpPr/>
+          <p:nvPr/>
+        </p:nvSpPr>
+        <p:spPr>
+          <a:xfrm>
+            <a:off x="3096410" y="1627632"/>
             <a:ext cx="4572" cy="329184"/>
           </a:xfrm>
           <a:prstGeom prst="rect">
@@ -10860,13 +11037,13 @@
       </p:sp>
       <p:sp>
         <p:nvSpPr>
-          <p:cNvPr id="119" name="Shape 117"/>
-          <p:cNvSpPr/>
-          <p:nvPr/>
-        </p:nvSpPr>
-        <p:spPr>
-          <a:xfrm>
-            <a:off x="3102564" y="1353312"/>
+          <p:cNvPr id="126" name="Shape 124"/>
+          <p:cNvSpPr/>
+          <p:nvPr/>
+        </p:nvSpPr>
+        <p:spPr>
+          <a:xfrm>
+            <a:off x="3102564" y="1627632"/>
             <a:ext cx="8560" cy="329184"/>
           </a:xfrm>
           <a:prstGeom prst="rect">
@@ -10880,13 +11057,13 @@
       </p:sp>
       <p:sp>
         <p:nvSpPr>
-          <p:cNvPr id="120" name="Shape 118"/>
-          <p:cNvSpPr/>
-          <p:nvPr/>
-        </p:nvSpPr>
-        <p:spPr>
-          <a:xfrm>
-            <a:off x="3111832" y="1353312"/>
+          <p:cNvPr id="127" name="Shape 125"/>
+          <p:cNvSpPr/>
+          <p:nvPr/>
+        </p:nvSpPr>
+        <p:spPr>
+          <a:xfrm>
+            <a:off x="3111832" y="1627632"/>
             <a:ext cx="4572" cy="329184"/>
           </a:xfrm>
           <a:prstGeom prst="rect">
@@ -10900,13 +11077,13 @@
       </p:sp>
       <p:sp>
         <p:nvSpPr>
-          <p:cNvPr id="121" name="Shape 119"/>
-          <p:cNvSpPr/>
-          <p:nvPr/>
-        </p:nvSpPr>
-        <p:spPr>
-          <a:xfrm>
-            <a:off x="3117562" y="1353312"/>
+          <p:cNvPr id="128" name="Shape 126"/>
+          <p:cNvSpPr/>
+          <p:nvPr/>
+        </p:nvSpPr>
+        <p:spPr>
+          <a:xfrm>
+            <a:off x="3117562" y="1627632"/>
             <a:ext cx="35089" cy="329184"/>
           </a:xfrm>
           <a:prstGeom prst="rect">
@@ -10920,13 +11097,13 @@
       </p:sp>
       <p:sp>
         <p:nvSpPr>
-          <p:cNvPr id="122" name="Shape 120"/>
-          <p:cNvSpPr/>
-          <p:nvPr/>
-        </p:nvSpPr>
-        <p:spPr>
-          <a:xfrm>
-            <a:off x="3154067" y="1353312"/>
+          <p:cNvPr id="129" name="Shape 127"/>
+          <p:cNvSpPr/>
+          <p:nvPr/>
+        </p:nvSpPr>
+        <p:spPr>
+          <a:xfrm>
+            <a:off x="3154067" y="1627632"/>
             <a:ext cx="4740" cy="329184"/>
           </a:xfrm>
           <a:prstGeom prst="rect">
@@ -10940,13 +11117,13 @@
       </p:sp>
       <p:sp>
         <p:nvSpPr>
-          <p:cNvPr id="123" name="Shape 121"/>
-          <p:cNvSpPr/>
-          <p:nvPr/>
-        </p:nvSpPr>
-        <p:spPr>
-          <a:xfrm>
-            <a:off x="3160292" y="1353312"/>
+          <p:cNvPr id="130" name="Shape 128"/>
+          <p:cNvSpPr/>
+          <p:nvPr/>
+        </p:nvSpPr>
+        <p:spPr>
+          <a:xfrm>
+            <a:off x="3160292" y="1627632"/>
             <a:ext cx="4572" cy="329184"/>
           </a:xfrm>
           <a:prstGeom prst="rect">
@@ -10960,13 +11137,13 @@
       </p:sp>
       <p:sp>
         <p:nvSpPr>
-          <p:cNvPr id="124" name="Shape 122"/>
-          <p:cNvSpPr/>
-          <p:nvPr/>
-        </p:nvSpPr>
-        <p:spPr>
-          <a:xfrm>
-            <a:off x="3162697" y="1353312"/>
+          <p:cNvPr id="131" name="Shape 129"/>
+          <p:cNvSpPr/>
+          <p:nvPr/>
+        </p:nvSpPr>
+        <p:spPr>
+          <a:xfrm>
+            <a:off x="3162697" y="1627632"/>
             <a:ext cx="10258" cy="329184"/>
           </a:xfrm>
           <a:prstGeom prst="rect">
@@ -10980,13 +11157,13 @@
       </p:sp>
       <p:sp>
         <p:nvSpPr>
-          <p:cNvPr id="125" name="Shape 123"/>
-          <p:cNvSpPr/>
-          <p:nvPr/>
-        </p:nvSpPr>
-        <p:spPr>
-          <a:xfrm>
-            <a:off x="3173875" y="1353312"/>
+          <p:cNvPr id="132" name="Shape 130"/>
+          <p:cNvSpPr/>
+          <p:nvPr/>
+        </p:nvSpPr>
+        <p:spPr>
+          <a:xfrm>
+            <a:off x="3173875" y="1627632"/>
             <a:ext cx="2551686" cy="329184"/>
           </a:xfrm>
           <a:prstGeom prst="rect">
@@ -11000,13 +11177,13 @@
       </p:sp>
       <p:sp>
         <p:nvSpPr>
-          <p:cNvPr id="126" name="Shape 124"/>
-          <p:cNvSpPr/>
-          <p:nvPr/>
-        </p:nvSpPr>
-        <p:spPr>
-          <a:xfrm>
-            <a:off x="5727896" y="1353312"/>
+          <p:cNvPr id="133" name="Shape 131"/>
+          <p:cNvSpPr/>
+          <p:nvPr/>
+        </p:nvSpPr>
+        <p:spPr>
+          <a:xfrm>
+            <a:off x="5727896" y="1627632"/>
             <a:ext cx="536315" cy="329184"/>
           </a:xfrm>
           <a:prstGeom prst="rect">
@@ -11020,13 +11197,13 @@
       </p:sp>
       <p:sp>
         <p:nvSpPr>
-          <p:cNvPr id="127" name="Shape 125"/>
-          <p:cNvSpPr/>
-          <p:nvPr/>
-        </p:nvSpPr>
-        <p:spPr>
-          <a:xfrm>
-            <a:off x="6266191" y="1353312"/>
+          <p:cNvPr id="134" name="Shape 132"/>
+          <p:cNvSpPr/>
+          <p:nvPr/>
+        </p:nvSpPr>
+        <p:spPr>
+          <a:xfrm>
+            <a:off x="6266191" y="1627632"/>
             <a:ext cx="12663" cy="329184"/>
           </a:xfrm>
           <a:prstGeom prst="rect">
@@ -11040,13 +11217,13 @@
       </p:sp>
       <p:sp>
         <p:nvSpPr>
-          <p:cNvPr id="128" name="Shape 126"/>
-          <p:cNvSpPr/>
-          <p:nvPr/>
-        </p:nvSpPr>
-        <p:spPr>
-          <a:xfrm>
-            <a:off x="6285292" y="1353312"/>
+          <p:cNvPr id="135" name="Shape 133"/>
+          <p:cNvSpPr/>
+          <p:nvPr/>
+        </p:nvSpPr>
+        <p:spPr>
+          <a:xfrm>
+            <a:off x="6285292" y="1627632"/>
             <a:ext cx="4572" cy="329184"/>
           </a:xfrm>
           <a:prstGeom prst="rect">
@@ -11060,13 +11237,13 @@
       </p:sp>
       <p:sp>
         <p:nvSpPr>
-          <p:cNvPr id="129" name="Shape 127"/>
-          <p:cNvSpPr/>
-          <p:nvPr/>
-        </p:nvSpPr>
-        <p:spPr>
-          <a:xfrm>
-            <a:off x="6290103" y="1353312"/>
+          <p:cNvPr id="136" name="Shape 134"/>
+          <p:cNvSpPr/>
+          <p:nvPr/>
+        </p:nvSpPr>
+        <p:spPr>
+          <a:xfrm>
+            <a:off x="6290103" y="1627632"/>
             <a:ext cx="4572" cy="329184"/>
           </a:xfrm>
           <a:prstGeom prst="rect">
@@ -11080,13 +11257,13 @@
       </p:sp>
       <p:sp>
         <p:nvSpPr>
-          <p:cNvPr id="130" name="Shape 128"/>
-          <p:cNvSpPr/>
-          <p:nvPr/>
-        </p:nvSpPr>
-        <p:spPr>
-          <a:xfrm>
-            <a:off x="6292013" y="1353312"/>
+          <p:cNvPr id="137" name="Shape 135"/>
+          <p:cNvSpPr/>
+          <p:nvPr/>
+        </p:nvSpPr>
+        <p:spPr>
+          <a:xfrm>
+            <a:off x="6292013" y="1627632"/>
             <a:ext cx="4572" cy="329184"/>
           </a:xfrm>
           <a:prstGeom prst="rect">
@@ -11100,13 +11277,13 @@
       </p:sp>
       <p:sp>
         <p:nvSpPr>
-          <p:cNvPr id="131" name="Shape 129"/>
-          <p:cNvSpPr/>
-          <p:nvPr/>
-        </p:nvSpPr>
-        <p:spPr>
-          <a:xfrm>
-            <a:off x="6296965" y="1353312"/>
+          <p:cNvPr id="138" name="Shape 136"/>
+          <p:cNvSpPr/>
+          <p:nvPr/>
+        </p:nvSpPr>
+        <p:spPr>
+          <a:xfrm>
+            <a:off x="6296965" y="1627632"/>
             <a:ext cx="8702" cy="329184"/>
           </a:xfrm>
           <a:prstGeom prst="rect">
@@ -11120,13 +11297,13 @@
       </p:sp>
       <p:sp>
         <p:nvSpPr>
-          <p:cNvPr id="132" name="Shape 130"/>
-          <p:cNvSpPr/>
-          <p:nvPr/>
-        </p:nvSpPr>
-        <p:spPr>
-          <a:xfrm>
-            <a:off x="6306657" y="1353312"/>
+          <p:cNvPr id="139" name="Shape 137"/>
+          <p:cNvSpPr/>
+          <p:nvPr/>
+        </p:nvSpPr>
+        <p:spPr>
+          <a:xfrm>
+            <a:off x="6306657" y="1627632"/>
             <a:ext cx="20940" cy="329184"/>
           </a:xfrm>
           <a:prstGeom prst="rect">
@@ -11140,13 +11317,13 @@
       </p:sp>
       <p:sp>
         <p:nvSpPr>
-          <p:cNvPr id="133" name="Shape 131"/>
-          <p:cNvSpPr/>
-          <p:nvPr/>
-        </p:nvSpPr>
-        <p:spPr>
-          <a:xfrm>
-            <a:off x="6328163" y="1353312"/>
+          <p:cNvPr id="140" name="Shape 138"/>
+          <p:cNvSpPr/>
+          <p:nvPr/>
+        </p:nvSpPr>
+        <p:spPr>
+          <a:xfrm>
+            <a:off x="6328163" y="1627632"/>
             <a:ext cx="4572" cy="329184"/>
           </a:xfrm>
           <a:prstGeom prst="rect">
@@ -11160,13 +11337,13 @@
       </p:sp>
       <p:sp>
         <p:nvSpPr>
-          <p:cNvPr id="134" name="Shape 132"/>
-          <p:cNvSpPr/>
-          <p:nvPr/>
-        </p:nvSpPr>
-        <p:spPr>
-          <a:xfrm>
-            <a:off x="6330073" y="1353312"/>
+          <p:cNvPr id="141" name="Shape 139"/>
+          <p:cNvSpPr/>
+          <p:nvPr/>
+        </p:nvSpPr>
+        <p:spPr>
+          <a:xfrm>
+            <a:off x="6330073" y="1627632"/>
             <a:ext cx="4572" cy="329184"/>
           </a:xfrm>
           <a:prstGeom prst="rect">
@@ -11180,13 +11357,13 @@
       </p:sp>
       <p:sp>
         <p:nvSpPr>
-          <p:cNvPr id="135" name="Shape 133"/>
-          <p:cNvSpPr/>
-          <p:nvPr/>
-        </p:nvSpPr>
-        <p:spPr>
-          <a:xfrm>
-            <a:off x="6335308" y="1353312"/>
+          <p:cNvPr id="142" name="Shape 140"/>
+          <p:cNvSpPr/>
+          <p:nvPr/>
+        </p:nvSpPr>
+        <p:spPr>
+          <a:xfrm>
+            <a:off x="6335308" y="1627632"/>
             <a:ext cx="40466" cy="329184"/>
           </a:xfrm>
           <a:prstGeom prst="rect">
@@ -11200,13 +11377,13 @@
       </p:sp>
       <p:sp>
         <p:nvSpPr>
-          <p:cNvPr id="136" name="Shape 134"/>
-          <p:cNvSpPr/>
-          <p:nvPr/>
-        </p:nvSpPr>
-        <p:spPr>
-          <a:xfrm>
-            <a:off x="6379029" y="1353312"/>
+          <p:cNvPr id="143" name="Shape 141"/>
+          <p:cNvSpPr/>
+          <p:nvPr/>
+        </p:nvSpPr>
+        <p:spPr>
+          <a:xfrm>
+            <a:off x="6379029" y="1627632"/>
             <a:ext cx="4598" cy="329184"/>
           </a:xfrm>
           <a:prstGeom prst="rect">
@@ -11220,13 +11397,13 @@
       </p:sp>
       <p:sp>
         <p:nvSpPr>
-          <p:cNvPr id="137" name="Shape 135"/>
-          <p:cNvSpPr/>
-          <p:nvPr/>
-        </p:nvSpPr>
-        <p:spPr>
-          <a:xfrm>
-            <a:off x="6385396" y="1353312"/>
+          <p:cNvPr id="144" name="Shape 142"/>
+          <p:cNvSpPr/>
+          <p:nvPr/>
+        </p:nvSpPr>
+        <p:spPr>
+          <a:xfrm>
+            <a:off x="6385396" y="1627632"/>
             <a:ext cx="4572" cy="329184"/>
           </a:xfrm>
           <a:prstGeom prst="rect">
@@ -11240,13 +11417,13 @@
       </p:sp>
       <p:sp>
         <p:nvSpPr>
-          <p:cNvPr id="138" name="Shape 136"/>
-          <p:cNvSpPr/>
-          <p:nvPr/>
-        </p:nvSpPr>
-        <p:spPr>
-          <a:xfrm>
-            <a:off x="6387306" y="1353312"/>
+          <p:cNvPr id="145" name="Shape 143"/>
+          <p:cNvSpPr/>
+          <p:nvPr/>
+        </p:nvSpPr>
+        <p:spPr>
+          <a:xfrm>
+            <a:off x="6387306" y="1627632"/>
             <a:ext cx="4572" cy="329184"/>
           </a:xfrm>
           <a:prstGeom prst="rect">
@@ -11260,13 +11437,13 @@
       </p:sp>
       <p:sp>
         <p:nvSpPr>
-          <p:cNvPr id="139" name="Shape 137"/>
-          <p:cNvSpPr/>
-          <p:nvPr/>
-        </p:nvSpPr>
-        <p:spPr>
-          <a:xfrm>
-            <a:off x="6389994" y="1353312"/>
+          <p:cNvPr id="146" name="Shape 144"/>
+          <p:cNvSpPr/>
+          <p:nvPr/>
+        </p:nvSpPr>
+        <p:spPr>
+          <a:xfrm>
+            <a:off x="6389994" y="1627632"/>
             <a:ext cx="4572" cy="329184"/>
           </a:xfrm>
           <a:prstGeom prst="rect">
@@ -11280,13 +11457,13 @@
       </p:sp>
       <p:sp>
         <p:nvSpPr>
-          <p:cNvPr id="140" name="Shape 138"/>
-          <p:cNvSpPr/>
-          <p:nvPr/>
-        </p:nvSpPr>
-        <p:spPr>
-          <a:xfrm>
-            <a:off x="6392046" y="1353312"/>
+          <p:cNvPr id="147" name="Shape 145"/>
+          <p:cNvSpPr/>
+          <p:nvPr/>
+        </p:nvSpPr>
+        <p:spPr>
+          <a:xfrm>
+            <a:off x="6392046" y="1627632"/>
             <a:ext cx="12522" cy="329184"/>
           </a:xfrm>
           <a:prstGeom prst="rect">
@@ -11300,13 +11477,13 @@
       </p:sp>
       <p:sp>
         <p:nvSpPr>
-          <p:cNvPr id="141" name="Shape 139"/>
-          <p:cNvSpPr/>
-          <p:nvPr/>
-        </p:nvSpPr>
-        <p:spPr>
-          <a:xfrm>
-            <a:off x="6411430" y="1353312"/>
+          <p:cNvPr id="148" name="Shape 146"/>
+          <p:cNvSpPr/>
+          <p:nvPr/>
+        </p:nvSpPr>
+        <p:spPr>
+          <a:xfrm>
+            <a:off x="6411430" y="1627632"/>
             <a:ext cx="4572" cy="329184"/>
           </a:xfrm>
           <a:prstGeom prst="rect">
@@ -11320,13 +11497,13 @@
       </p:sp>
       <p:sp>
         <p:nvSpPr>
-          <p:cNvPr id="142" name="Shape 140"/>
-          <p:cNvSpPr/>
-          <p:nvPr/>
-        </p:nvSpPr>
-        <p:spPr>
-          <a:xfrm>
-            <a:off x="6415108" y="1353312"/>
+          <p:cNvPr id="149" name="Shape 147"/>
+          <p:cNvSpPr/>
+          <p:nvPr/>
+        </p:nvSpPr>
+        <p:spPr>
+          <a:xfrm>
+            <a:off x="6415108" y="1627632"/>
             <a:ext cx="4572" cy="329184"/>
           </a:xfrm>
           <a:prstGeom prst="rect">
@@ -11340,13 +11517,13 @@
       </p:sp>
       <p:sp>
         <p:nvSpPr>
-          <p:cNvPr id="143" name="Shape 141"/>
-          <p:cNvSpPr/>
-          <p:nvPr/>
-        </p:nvSpPr>
-        <p:spPr>
-          <a:xfrm>
-            <a:off x="6416806" y="1353312"/>
+          <p:cNvPr id="150" name="Shape 148"/>
+          <p:cNvSpPr/>
+          <p:nvPr/>
+        </p:nvSpPr>
+        <p:spPr>
+          <a:xfrm>
+            <a:off x="6416806" y="1627632"/>
             <a:ext cx="4572" cy="329184"/>
           </a:xfrm>
           <a:prstGeom prst="rect">
@@ -11360,13 +11537,13 @@
       </p:sp>
       <p:sp>
         <p:nvSpPr>
-          <p:cNvPr id="144" name="Shape 142"/>
-          <p:cNvSpPr/>
-          <p:nvPr/>
-        </p:nvSpPr>
-        <p:spPr>
-          <a:xfrm>
-            <a:off x="6419495" y="1353312"/>
+          <p:cNvPr id="151" name="Shape 149"/>
+          <p:cNvSpPr/>
+          <p:nvPr/>
+        </p:nvSpPr>
+        <p:spPr>
+          <a:xfrm>
+            <a:off x="6419495" y="1627632"/>
             <a:ext cx="4572" cy="329184"/>
           </a:xfrm>
           <a:prstGeom prst="rect">
@@ -11380,13 +11557,13 @@
       </p:sp>
       <p:sp>
         <p:nvSpPr>
-          <p:cNvPr id="145" name="Shape 143"/>
-          <p:cNvSpPr/>
-          <p:nvPr/>
-        </p:nvSpPr>
-        <p:spPr>
-          <a:xfrm>
-            <a:off x="6421546" y="1353312"/>
+          <p:cNvPr id="152" name="Shape 150"/>
+          <p:cNvSpPr/>
+          <p:nvPr/>
+        </p:nvSpPr>
+        <p:spPr>
+          <a:xfrm>
+            <a:off x="6421546" y="1627632"/>
             <a:ext cx="12451" cy="329184"/>
           </a:xfrm>
           <a:prstGeom prst="rect">
@@ -11400,13 +11577,13 @@
       </p:sp>
       <p:sp>
         <p:nvSpPr>
-          <p:cNvPr id="146" name="Shape 144"/>
-          <p:cNvSpPr/>
-          <p:nvPr/>
-        </p:nvSpPr>
-        <p:spPr>
-          <a:xfrm>
-            <a:off x="6435554" y="1353312"/>
+          <p:cNvPr id="153" name="Shape 151"/>
+          <p:cNvSpPr/>
+          <p:nvPr/>
+        </p:nvSpPr>
+        <p:spPr>
+          <a:xfrm>
+            <a:off x="6435554" y="1627632"/>
             <a:ext cx="21153" cy="329184"/>
           </a:xfrm>
           <a:prstGeom prst="rect">
@@ -11420,13 +11597,13 @@
       </p:sp>
       <p:sp>
         <p:nvSpPr>
-          <p:cNvPr id="147" name="Shape 145"/>
-          <p:cNvSpPr/>
-          <p:nvPr/>
-        </p:nvSpPr>
-        <p:spPr>
-          <a:xfrm>
-            <a:off x="6457484" y="1353312"/>
+          <p:cNvPr id="154" name="Shape 152"/>
+          <p:cNvSpPr/>
+          <p:nvPr/>
+        </p:nvSpPr>
+        <p:spPr>
+          <a:xfrm>
+            <a:off x="6457484" y="1627632"/>
             <a:ext cx="20162" cy="329184"/>
           </a:xfrm>
           <a:prstGeom prst="rect">
@@ -11440,13 +11617,13 @@
       </p:sp>
       <p:sp>
         <p:nvSpPr>
-          <p:cNvPr id="148" name="Shape 146"/>
-          <p:cNvSpPr/>
-          <p:nvPr/>
-        </p:nvSpPr>
-        <p:spPr>
-          <a:xfrm>
-            <a:off x="6478354" y="1353312"/>
+          <p:cNvPr id="155" name="Shape 153"/>
+          <p:cNvSpPr/>
+          <p:nvPr/>
+        </p:nvSpPr>
+        <p:spPr>
+          <a:xfrm>
+            <a:off x="6478354" y="1627632"/>
             <a:ext cx="13017" cy="329184"/>
           </a:xfrm>
           <a:prstGeom prst="rect">
@@ -11460,13 +11637,13 @@
       </p:sp>
       <p:sp>
         <p:nvSpPr>
-          <p:cNvPr id="149" name="Shape 147"/>
-          <p:cNvSpPr/>
-          <p:nvPr/>
-        </p:nvSpPr>
-        <p:spPr>
-          <a:xfrm>
-            <a:off x="6492149" y="1353312"/>
+          <p:cNvPr id="156" name="Shape 154"/>
+          <p:cNvSpPr/>
+          <p:nvPr/>
+        </p:nvSpPr>
+        <p:spPr>
+          <a:xfrm>
+            <a:off x="6492149" y="1627632"/>
             <a:ext cx="4572" cy="329184"/>
           </a:xfrm>
           <a:prstGeom prst="rect">
@@ -11480,13 +11657,13 @@
       </p:sp>
       <p:sp>
         <p:nvSpPr>
-          <p:cNvPr id="150" name="Shape 148"/>
-          <p:cNvSpPr/>
-          <p:nvPr/>
-        </p:nvSpPr>
-        <p:spPr>
-          <a:xfrm>
-            <a:off x="6493918" y="1353312"/>
+          <p:cNvPr id="157" name="Shape 155"/>
+          <p:cNvSpPr/>
+          <p:nvPr/>
+        </p:nvSpPr>
+        <p:spPr>
+          <a:xfrm>
+            <a:off x="6493918" y="1627632"/>
             <a:ext cx="4740" cy="329184"/>
           </a:xfrm>
           <a:prstGeom prst="rect">
@@ -11500,13 +11677,13 @@
       </p:sp>
       <p:sp>
         <p:nvSpPr>
-          <p:cNvPr id="151" name="Shape 149"/>
-          <p:cNvSpPr/>
-          <p:nvPr/>
-        </p:nvSpPr>
-        <p:spPr>
-          <a:xfrm>
-            <a:off x="6500002" y="1353312"/>
+          <p:cNvPr id="158" name="Shape 156"/>
+          <p:cNvSpPr/>
+          <p:nvPr/>
+        </p:nvSpPr>
+        <p:spPr>
+          <a:xfrm>
+            <a:off x="6500002" y="1627632"/>
             <a:ext cx="12451" cy="329184"/>
           </a:xfrm>
           <a:prstGeom prst="rect">
@@ -11520,13 +11697,13 @@
       </p:sp>
       <p:sp>
         <p:nvSpPr>
-          <p:cNvPr id="152" name="Shape 150"/>
-          <p:cNvSpPr/>
-          <p:nvPr/>
-        </p:nvSpPr>
-        <p:spPr>
-          <a:xfrm>
-            <a:off x="6513160" y="1353312"/>
+          <p:cNvPr id="159" name="Shape 157"/>
+          <p:cNvSpPr/>
+          <p:nvPr/>
+        </p:nvSpPr>
+        <p:spPr>
+          <a:xfrm>
+            <a:off x="6513160" y="1627632"/>
             <a:ext cx="4572" cy="329184"/>
           </a:xfrm>
           <a:prstGeom prst="rect">
@@ -11540,13 +11717,13 @@
       </p:sp>
       <p:sp>
         <p:nvSpPr>
-          <p:cNvPr id="153" name="Shape 151"/>
-          <p:cNvSpPr/>
-          <p:nvPr/>
-        </p:nvSpPr>
-        <p:spPr>
-          <a:xfrm>
-            <a:off x="6514787" y="1353312"/>
+          <p:cNvPr id="160" name="Shape 158"/>
+          <p:cNvSpPr/>
+          <p:nvPr/>
+        </p:nvSpPr>
+        <p:spPr>
+          <a:xfrm>
+            <a:off x="6514787" y="1627632"/>
             <a:ext cx="4598" cy="329184"/>
           </a:xfrm>
           <a:prstGeom prst="rect">
@@ -11560,13 +11737,13 @@
       </p:sp>
       <p:sp>
         <p:nvSpPr>
-          <p:cNvPr id="154" name="Shape 152"/>
-          <p:cNvSpPr/>
-          <p:nvPr/>
-        </p:nvSpPr>
-        <p:spPr>
-          <a:xfrm>
-            <a:off x="6520659" y="1353312"/>
+          <p:cNvPr id="161" name="Shape 159"/>
+          <p:cNvSpPr/>
+          <p:nvPr/>
+        </p:nvSpPr>
+        <p:spPr>
+          <a:xfrm>
+            <a:off x="6520659" y="1627632"/>
             <a:ext cx="12097" cy="329184"/>
           </a:xfrm>
           <a:prstGeom prst="rect">
@@ -11580,13 +11757,13 @@
       </p:sp>
       <p:sp>
         <p:nvSpPr>
-          <p:cNvPr id="155" name="Shape 153"/>
-          <p:cNvSpPr/>
-          <p:nvPr/>
-        </p:nvSpPr>
-        <p:spPr>
-          <a:xfrm>
-            <a:off x="6533323" y="1353312"/>
+          <p:cNvPr id="162" name="Shape 160"/>
+          <p:cNvSpPr/>
+          <p:nvPr/>
+        </p:nvSpPr>
+        <p:spPr>
+          <a:xfrm>
+            <a:off x="6533323" y="1627632"/>
             <a:ext cx="4572" cy="329184"/>
           </a:xfrm>
           <a:prstGeom prst="rect">
@@ -11600,13 +11777,13 @@
       </p:sp>
       <p:sp>
         <p:nvSpPr>
-          <p:cNvPr id="156" name="Shape 154"/>
-          <p:cNvSpPr/>
-          <p:nvPr/>
-        </p:nvSpPr>
-        <p:spPr>
-          <a:xfrm>
-            <a:off x="6535020" y="1353312"/>
+          <p:cNvPr id="163" name="Shape 161"/>
+          <p:cNvSpPr/>
+          <p:nvPr/>
+        </p:nvSpPr>
+        <p:spPr>
+          <a:xfrm>
+            <a:off x="6535020" y="1627632"/>
             <a:ext cx="4572" cy="329184"/>
           </a:xfrm>
           <a:prstGeom prst="rect">
@@ -11620,13 +11797,13 @@
       </p:sp>
       <p:sp>
         <p:nvSpPr>
-          <p:cNvPr id="157" name="Shape 155"/>
-          <p:cNvSpPr/>
-          <p:nvPr/>
-        </p:nvSpPr>
-        <p:spPr>
-          <a:xfrm>
-            <a:off x="6540751" y="1353312"/>
+          <p:cNvPr id="164" name="Shape 162"/>
+          <p:cNvSpPr/>
+          <p:nvPr/>
+        </p:nvSpPr>
+        <p:spPr>
+          <a:xfrm>
+            <a:off x="6540751" y="1627632"/>
             <a:ext cx="4572" cy="329184"/>
           </a:xfrm>
           <a:prstGeom prst="rect">
@@ -11640,13 +11817,13 @@
       </p:sp>
       <p:sp>
         <p:nvSpPr>
-          <p:cNvPr id="158" name="Shape 156"/>
-          <p:cNvSpPr/>
-          <p:nvPr/>
-        </p:nvSpPr>
-        <p:spPr>
-          <a:xfrm>
-            <a:off x="6544076" y="1353312"/>
+          <p:cNvPr id="165" name="Shape 163"/>
+          <p:cNvSpPr/>
+          <p:nvPr/>
+        </p:nvSpPr>
+        <p:spPr>
+          <a:xfrm>
+            <a:off x="6544076" y="1627632"/>
             <a:ext cx="4572" cy="329184"/>
           </a:xfrm>
           <a:prstGeom prst="rect">
@@ -11660,13 +11837,13 @@
       </p:sp>
       <p:sp>
         <p:nvSpPr>
-          <p:cNvPr id="159" name="Shape 157"/>
-          <p:cNvSpPr/>
-          <p:nvPr/>
-        </p:nvSpPr>
-        <p:spPr>
-          <a:xfrm>
-            <a:off x="6546623" y="1353312"/>
+          <p:cNvPr id="166" name="Shape 164"/>
+          <p:cNvSpPr/>
+          <p:nvPr/>
+        </p:nvSpPr>
+        <p:spPr>
+          <a:xfrm>
+            <a:off x="6546623" y="1627632"/>
             <a:ext cx="4572" cy="329184"/>
           </a:xfrm>
           <a:prstGeom prst="rect">
@@ -11680,13 +11857,13 @@
       </p:sp>
       <p:sp>
         <p:nvSpPr>
-          <p:cNvPr id="160" name="Shape 158"/>
-          <p:cNvSpPr/>
-          <p:nvPr/>
-        </p:nvSpPr>
-        <p:spPr>
-          <a:xfrm>
-            <a:off x="6549877" y="1353312"/>
+          <p:cNvPr id="167" name="Shape 165"/>
+          <p:cNvSpPr/>
+          <p:nvPr/>
+        </p:nvSpPr>
+        <p:spPr>
+          <a:xfrm>
+            <a:off x="6549877" y="1627632"/>
             <a:ext cx="4572" cy="329184"/>
           </a:xfrm>
           <a:prstGeom prst="rect">
@@ -11700,13 +11877,13 @@
       </p:sp>
       <p:sp>
         <p:nvSpPr>
-          <p:cNvPr id="161" name="Shape 159"/>
-          <p:cNvSpPr/>
-          <p:nvPr/>
-        </p:nvSpPr>
-        <p:spPr>
-          <a:xfrm>
-            <a:off x="6551716" y="1353312"/>
+          <p:cNvPr id="168" name="Shape 166"/>
+          <p:cNvSpPr/>
+          <p:nvPr/>
+        </p:nvSpPr>
+        <p:spPr>
+          <a:xfrm>
+            <a:off x="6551716" y="1627632"/>
             <a:ext cx="6650" cy="329184"/>
           </a:xfrm>
           <a:prstGeom prst="rect">
@@ -11720,13 +11897,13 @@
       </p:sp>
       <p:sp>
         <p:nvSpPr>
-          <p:cNvPr id="162" name="Shape 160"/>
-          <p:cNvSpPr/>
-          <p:nvPr/>
-        </p:nvSpPr>
-        <p:spPr>
-          <a:xfrm>
-            <a:off x="6561196" y="1353312"/>
+          <p:cNvPr id="169" name="Shape 167"/>
+          <p:cNvSpPr/>
+          <p:nvPr/>
+        </p:nvSpPr>
+        <p:spPr>
+          <a:xfrm>
+            <a:off x="6561196" y="1627632"/>
             <a:ext cx="4572" cy="329184"/>
           </a:xfrm>
           <a:prstGeom prst="rect">
@@ -11740,13 +11917,13 @@
       </p:sp>
       <p:sp>
         <p:nvSpPr>
-          <p:cNvPr id="163" name="Shape 161"/>
-          <p:cNvSpPr/>
-          <p:nvPr/>
-        </p:nvSpPr>
-        <p:spPr>
-          <a:xfrm>
-            <a:off x="6585956" y="1353312"/>
+          <p:cNvPr id="170" name="Shape 168"/>
+          <p:cNvSpPr/>
+          <p:nvPr/>
+        </p:nvSpPr>
+        <p:spPr>
+          <a:xfrm>
+            <a:off x="6585956" y="1627632"/>
             <a:ext cx="4572" cy="329184"/>
           </a:xfrm>
           <a:prstGeom prst="rect">
@@ -11760,13 +11937,13 @@
       </p:sp>
       <p:sp>
         <p:nvSpPr>
-          <p:cNvPr id="164" name="Shape 162"/>
-          <p:cNvSpPr/>
-          <p:nvPr/>
-        </p:nvSpPr>
-        <p:spPr>
-          <a:xfrm>
-            <a:off x="6591050" y="1353312"/>
+          <p:cNvPr id="171" name="Shape 169"/>
+          <p:cNvSpPr/>
+          <p:nvPr/>
+        </p:nvSpPr>
+        <p:spPr>
+          <a:xfrm>
+            <a:off x="6591050" y="1627632"/>
             <a:ext cx="11531" cy="329184"/>
           </a:xfrm>
           <a:prstGeom prst="rect">
@@ -11780,13 +11957,13 @@
       </p:sp>
       <p:sp>
         <p:nvSpPr>
-          <p:cNvPr id="165" name="Shape 163"/>
-          <p:cNvSpPr/>
-          <p:nvPr/>
-        </p:nvSpPr>
-        <p:spPr>
-          <a:xfrm>
-            <a:off x="6603218" y="1353312"/>
+          <p:cNvPr id="172" name="Shape 170"/>
+          <p:cNvSpPr/>
+          <p:nvPr/>
+        </p:nvSpPr>
+        <p:spPr>
+          <a:xfrm>
+            <a:off x="6603218" y="1627632"/>
             <a:ext cx="5306" cy="329184"/>
           </a:xfrm>
           <a:prstGeom prst="rect">
@@ -11800,13 +11977,13 @@
       </p:sp>
       <p:sp>
         <p:nvSpPr>
-          <p:cNvPr id="166" name="Shape 164"/>
-          <p:cNvSpPr/>
-          <p:nvPr/>
-        </p:nvSpPr>
-        <p:spPr>
-          <a:xfrm>
-            <a:off x="6609656" y="1353312"/>
+          <p:cNvPr id="173" name="Shape 171"/>
+          <p:cNvSpPr/>
+          <p:nvPr/>
+        </p:nvSpPr>
+        <p:spPr>
+          <a:xfrm>
+            <a:off x="6609656" y="1627632"/>
             <a:ext cx="15422" cy="329184"/>
           </a:xfrm>
           <a:prstGeom prst="rect">
@@ -11820,13 +11997,13 @@
       </p:sp>
       <p:sp>
         <p:nvSpPr>
-          <p:cNvPr id="167" name="Shape 165"/>
-          <p:cNvSpPr/>
-          <p:nvPr/>
-        </p:nvSpPr>
-        <p:spPr>
-          <a:xfrm>
-            <a:off x="6626069" y="1353312"/>
+          <p:cNvPr id="174" name="Shape 172"/>
+          <p:cNvSpPr/>
+          <p:nvPr/>
+        </p:nvSpPr>
+        <p:spPr>
+          <a:xfrm>
+            <a:off x="6626069" y="1627632"/>
             <a:ext cx="15352" cy="329184"/>
           </a:xfrm>
           <a:prstGeom prst="rect">
@@ -11840,13 +12017,13 @@
       </p:sp>
       <p:sp>
         <p:nvSpPr>
-          <p:cNvPr id="168" name="Shape 166"/>
-          <p:cNvSpPr/>
-          <p:nvPr/>
-        </p:nvSpPr>
-        <p:spPr>
-          <a:xfrm>
-            <a:off x="6642340" y="1353312"/>
+          <p:cNvPr id="175" name="Shape 173"/>
+          <p:cNvSpPr/>
+          <p:nvPr/>
+        </p:nvSpPr>
+        <p:spPr>
+          <a:xfrm>
+            <a:off x="6642340" y="1627632"/>
             <a:ext cx="15493" cy="329184"/>
           </a:xfrm>
           <a:prstGeom prst="rect">
@@ -11860,13 +12037,13 @@
       </p:sp>
       <p:sp>
         <p:nvSpPr>
-          <p:cNvPr id="169" name="Shape 167"/>
-          <p:cNvSpPr/>
-          <p:nvPr/>
-        </p:nvSpPr>
-        <p:spPr>
-          <a:xfrm>
-            <a:off x="6658965" y="1353312"/>
+          <p:cNvPr id="176" name="Shape 174"/>
+          <p:cNvSpPr/>
+          <p:nvPr/>
+        </p:nvSpPr>
+        <p:spPr>
+          <a:xfrm>
+            <a:off x="6658965" y="1627632"/>
             <a:ext cx="15564" cy="329184"/>
           </a:xfrm>
           <a:prstGeom prst="rect">
@@ -11880,13 +12057,13 @@
       </p:sp>
       <p:sp>
         <p:nvSpPr>
-          <p:cNvPr id="170" name="Shape 168"/>
-          <p:cNvSpPr/>
-          <p:nvPr/>
-        </p:nvSpPr>
-        <p:spPr>
-          <a:xfrm>
-            <a:off x="6675590" y="1353312"/>
+          <p:cNvPr id="177" name="Shape 175"/>
+          <p:cNvSpPr/>
+          <p:nvPr/>
+        </p:nvSpPr>
+        <p:spPr>
+          <a:xfrm>
+            <a:off x="6675590" y="1627632"/>
             <a:ext cx="16342" cy="329184"/>
           </a:xfrm>
           <a:prstGeom prst="rect">
@@ -11900,13 +12077,13 @@
       </p:sp>
       <p:sp>
         <p:nvSpPr>
-          <p:cNvPr id="171" name="Shape 169"/>
-          <p:cNvSpPr/>
-          <p:nvPr/>
-        </p:nvSpPr>
-        <p:spPr>
-          <a:xfrm>
-            <a:off x="6692993" y="1353312"/>
+          <p:cNvPr id="178" name="Shape 176"/>
+          <p:cNvSpPr/>
+          <p:nvPr/>
+        </p:nvSpPr>
+        <p:spPr>
+          <a:xfrm>
+            <a:off x="6692993" y="1627632"/>
             <a:ext cx="15635" cy="329184"/>
           </a:xfrm>
           <a:prstGeom prst="rect">
@@ -11920,13 +12097,13 @@
       </p:sp>
       <p:sp>
         <p:nvSpPr>
-          <p:cNvPr id="172" name="Shape 170"/>
-          <p:cNvSpPr/>
-          <p:nvPr/>
-        </p:nvSpPr>
-        <p:spPr>
-          <a:xfrm>
-            <a:off x="6709689" y="1353312"/>
+          <p:cNvPr id="179" name="Shape 177"/>
+          <p:cNvSpPr/>
+          <p:nvPr/>
+        </p:nvSpPr>
+        <p:spPr>
+          <a:xfrm>
+            <a:off x="6709689" y="1627632"/>
             <a:ext cx="15139" cy="329184"/>
           </a:xfrm>
           <a:prstGeom prst="rect">
@@ -11940,13 +12117,13 @@
       </p:sp>
       <p:sp>
         <p:nvSpPr>
-          <p:cNvPr id="173" name="Shape 171"/>
-          <p:cNvSpPr/>
-          <p:nvPr/>
-        </p:nvSpPr>
-        <p:spPr>
-          <a:xfrm>
-            <a:off x="6725748" y="1353312"/>
+          <p:cNvPr id="180" name="Shape 178"/>
+          <p:cNvSpPr/>
+          <p:nvPr/>
+        </p:nvSpPr>
+        <p:spPr>
+          <a:xfrm>
+            <a:off x="6725748" y="1627632"/>
             <a:ext cx="14503" cy="329184"/>
           </a:xfrm>
           <a:prstGeom prst="rect">
@@ -11960,13 +12137,13 @@
       </p:sp>
       <p:sp>
         <p:nvSpPr>
-          <p:cNvPr id="174" name="Shape 172"/>
-          <p:cNvSpPr/>
-          <p:nvPr/>
-        </p:nvSpPr>
-        <p:spPr>
-          <a:xfrm>
-            <a:off x="6742656" y="1353312"/>
+          <p:cNvPr id="181" name="Shape 179"/>
+          <p:cNvSpPr/>
+          <p:nvPr/>
+        </p:nvSpPr>
+        <p:spPr>
+          <a:xfrm>
+            <a:off x="6742656" y="1627632"/>
             <a:ext cx="15705" cy="329184"/>
           </a:xfrm>
           <a:prstGeom prst="rect">
@@ -11980,13 +12157,13 @@
       </p:sp>
       <p:sp>
         <p:nvSpPr>
-          <p:cNvPr id="175" name="Shape 173"/>
-          <p:cNvSpPr/>
-          <p:nvPr/>
-        </p:nvSpPr>
-        <p:spPr>
-          <a:xfrm>
-            <a:off x="6759422" y="1353312"/>
+          <p:cNvPr id="182" name="Shape 180"/>
+          <p:cNvSpPr/>
+          <p:nvPr/>
+        </p:nvSpPr>
+        <p:spPr>
+          <a:xfrm>
+            <a:off x="6759422" y="1627632"/>
             <a:ext cx="15281" cy="329184"/>
           </a:xfrm>
           <a:prstGeom prst="rect">
@@ -12000,13 +12177,13 @@
       </p:sp>
       <p:sp>
         <p:nvSpPr>
-          <p:cNvPr id="176" name="Shape 174"/>
-          <p:cNvSpPr/>
-          <p:nvPr/>
-        </p:nvSpPr>
-        <p:spPr>
-          <a:xfrm>
-            <a:off x="6775623" y="1353312"/>
+          <p:cNvPr id="183" name="Shape 181"/>
+          <p:cNvSpPr/>
+          <p:nvPr/>
+        </p:nvSpPr>
+        <p:spPr>
+          <a:xfrm>
+            <a:off x="6775623" y="1627632"/>
             <a:ext cx="15281" cy="329184"/>
           </a:xfrm>
           <a:prstGeom prst="rect">
@@ -12020,13 +12197,13 @@
       </p:sp>
       <p:sp>
         <p:nvSpPr>
-          <p:cNvPr id="177" name="Shape 175"/>
-          <p:cNvSpPr/>
-          <p:nvPr/>
-        </p:nvSpPr>
-        <p:spPr>
-          <a:xfrm>
-            <a:off x="6791823" y="1353312"/>
+          <p:cNvPr id="184" name="Shape 182"/>
+          <p:cNvSpPr/>
+          <p:nvPr/>
+        </p:nvSpPr>
+        <p:spPr>
+          <a:xfrm>
+            <a:off x="6791823" y="1627632"/>
             <a:ext cx="15069" cy="329184"/>
           </a:xfrm>
           <a:prstGeom prst="rect">
@@ -12040,13 +12217,13 @@
       </p:sp>
       <p:sp>
         <p:nvSpPr>
-          <p:cNvPr id="178" name="Shape 176"/>
-          <p:cNvSpPr/>
-          <p:nvPr/>
-        </p:nvSpPr>
-        <p:spPr>
-          <a:xfrm>
-            <a:off x="6807953" y="1353312"/>
+          <p:cNvPr id="185" name="Shape 183"/>
+          <p:cNvSpPr/>
+          <p:nvPr/>
+        </p:nvSpPr>
+        <p:spPr>
+          <a:xfrm>
+            <a:off x="6807953" y="1627632"/>
             <a:ext cx="15069" cy="329184"/>
           </a:xfrm>
           <a:prstGeom prst="rect">
@@ -12060,13 +12237,13 @@
       </p:sp>
       <p:sp>
         <p:nvSpPr>
-          <p:cNvPr id="179" name="Shape 177"/>
-          <p:cNvSpPr/>
-          <p:nvPr/>
-        </p:nvSpPr>
-        <p:spPr>
-          <a:xfrm>
-            <a:off x="6823941" y="1353312"/>
+          <p:cNvPr id="186" name="Shape 184"/>
+          <p:cNvSpPr/>
+          <p:nvPr/>
+        </p:nvSpPr>
+        <p:spPr>
+          <a:xfrm>
+            <a:off x="6823941" y="1627632"/>
             <a:ext cx="14927" cy="329184"/>
           </a:xfrm>
           <a:prstGeom prst="rect">
@@ -12080,13 +12257,13 @@
       </p:sp>
       <p:sp>
         <p:nvSpPr>
-          <p:cNvPr id="180" name="Shape 178"/>
-          <p:cNvSpPr/>
-          <p:nvPr/>
-        </p:nvSpPr>
-        <p:spPr>
-          <a:xfrm>
-            <a:off x="6839859" y="1353312"/>
+          <p:cNvPr id="187" name="Shape 185"/>
+          <p:cNvSpPr/>
+          <p:nvPr/>
+        </p:nvSpPr>
+        <p:spPr>
+          <a:xfrm>
+            <a:off x="6839859" y="1627632"/>
             <a:ext cx="14856" cy="329184"/>
           </a:xfrm>
           <a:prstGeom prst="rect">
@@ -12100,13 +12277,13 @@
       </p:sp>
       <p:sp>
         <p:nvSpPr>
-          <p:cNvPr id="181" name="Shape 179"/>
-          <p:cNvSpPr/>
-          <p:nvPr/>
-        </p:nvSpPr>
-        <p:spPr>
-          <a:xfrm>
-            <a:off x="6855706" y="1353312"/>
+          <p:cNvPr id="188" name="Shape 186"/>
+          <p:cNvSpPr/>
+          <p:nvPr/>
+        </p:nvSpPr>
+        <p:spPr>
+          <a:xfrm>
+            <a:off x="6855706" y="1627632"/>
             <a:ext cx="15069" cy="329184"/>
           </a:xfrm>
           <a:prstGeom prst="rect">
@@ -12120,13 +12297,13 @@
       </p:sp>
       <p:sp>
         <p:nvSpPr>
-          <p:cNvPr id="182" name="Shape 180"/>
-          <p:cNvSpPr/>
-          <p:nvPr/>
-        </p:nvSpPr>
-        <p:spPr>
-          <a:xfrm>
-            <a:off x="6871835" y="1353312"/>
+          <p:cNvPr id="189" name="Shape 187"/>
+          <p:cNvSpPr/>
+          <p:nvPr/>
+        </p:nvSpPr>
+        <p:spPr>
+          <a:xfrm>
+            <a:off x="6871835" y="1627632"/>
             <a:ext cx="14927" cy="329184"/>
           </a:xfrm>
           <a:prstGeom prst="rect">
@@ -12140,13 +12317,13 @@
       </p:sp>
       <p:sp>
         <p:nvSpPr>
-          <p:cNvPr id="183" name="Shape 181"/>
-          <p:cNvSpPr/>
-          <p:nvPr/>
-        </p:nvSpPr>
-        <p:spPr>
-          <a:xfrm>
-            <a:off x="6887611" y="1353312"/>
+          <p:cNvPr id="190" name="Shape 188"/>
+          <p:cNvSpPr/>
+          <p:nvPr/>
+        </p:nvSpPr>
+        <p:spPr>
+          <a:xfrm>
+            <a:off x="6887611" y="1627632"/>
             <a:ext cx="14998" cy="329184"/>
           </a:xfrm>
           <a:prstGeom prst="rect">
@@ -12160,13 +12337,13 @@
       </p:sp>
       <p:sp>
         <p:nvSpPr>
-          <p:cNvPr id="184" name="Shape 182"/>
-          <p:cNvSpPr/>
-          <p:nvPr/>
-        </p:nvSpPr>
-        <p:spPr>
-          <a:xfrm>
-            <a:off x="6903600" y="1353312"/>
+          <p:cNvPr id="191" name="Shape 189"/>
+          <p:cNvSpPr/>
+          <p:nvPr/>
+        </p:nvSpPr>
+        <p:spPr>
+          <a:xfrm>
+            <a:off x="6903600" y="1627632"/>
             <a:ext cx="10824" cy="329184"/>
           </a:xfrm>
           <a:prstGeom prst="rect">
@@ -12180,13 +12357,13 @@
       </p:sp>
       <p:sp>
         <p:nvSpPr>
-          <p:cNvPr id="185" name="Shape 183"/>
-          <p:cNvSpPr/>
-          <p:nvPr/>
-        </p:nvSpPr>
-        <p:spPr>
-          <a:xfrm>
-            <a:off x="6915202" y="1353312"/>
+          <p:cNvPr id="192" name="Shape 190"/>
+          <p:cNvSpPr/>
+          <p:nvPr/>
+        </p:nvSpPr>
+        <p:spPr>
+          <a:xfrm>
+            <a:off x="6915202" y="1627632"/>
             <a:ext cx="6721" cy="329184"/>
           </a:xfrm>
           <a:prstGeom prst="rect">
@@ -12200,13 +12377,13 @@
       </p:sp>
       <p:sp>
         <p:nvSpPr>
-          <p:cNvPr id="186" name="Shape 184"/>
-          <p:cNvSpPr/>
-          <p:nvPr/>
-        </p:nvSpPr>
-        <p:spPr>
-          <a:xfrm>
-            <a:off x="6922630" y="1353312"/>
+          <p:cNvPr id="193" name="Shape 191"/>
+          <p:cNvSpPr/>
+          <p:nvPr/>
+        </p:nvSpPr>
+        <p:spPr>
+          <a:xfrm>
+            <a:off x="6922630" y="1627632"/>
             <a:ext cx="17403" cy="329184"/>
           </a:xfrm>
           <a:prstGeom prst="rect">
@@ -12220,13 +12397,13 @@
       </p:sp>
       <p:sp>
         <p:nvSpPr>
-          <p:cNvPr id="187" name="Shape 185"/>
-          <p:cNvSpPr/>
-          <p:nvPr/>
-        </p:nvSpPr>
-        <p:spPr>
-          <a:xfrm>
-            <a:off x="6984956" y="1353312"/>
+          <p:cNvPr id="194" name="Shape 192"/>
+          <p:cNvSpPr/>
+          <p:nvPr/>
+        </p:nvSpPr>
+        <p:spPr>
+          <a:xfrm>
+            <a:off x="6984956" y="1627632"/>
             <a:ext cx="15352" cy="329184"/>
           </a:xfrm>
           <a:prstGeom prst="rect">
@@ -12240,13 +12417,13 @@
       </p:sp>
       <p:sp>
         <p:nvSpPr>
-          <p:cNvPr id="188" name="Shape 186"/>
-          <p:cNvSpPr/>
-          <p:nvPr/>
-        </p:nvSpPr>
-        <p:spPr>
-          <a:xfrm>
-            <a:off x="7061289" y="1353312"/>
+          <p:cNvPr id="195" name="Shape 193"/>
+          <p:cNvSpPr/>
+          <p:nvPr/>
+        </p:nvSpPr>
+        <p:spPr>
+          <a:xfrm>
+            <a:off x="7061289" y="1627632"/>
             <a:ext cx="67420" cy="329184"/>
           </a:xfrm>
           <a:prstGeom prst="rect">
@@ -12260,13 +12437,13 @@
       </p:sp>
       <p:sp>
         <p:nvSpPr>
-          <p:cNvPr id="189" name="Shape 187"/>
-          <p:cNvSpPr/>
-          <p:nvPr/>
-        </p:nvSpPr>
-        <p:spPr>
-          <a:xfrm>
-            <a:off x="7130902" y="1353312"/>
+          <p:cNvPr id="196" name="Shape 194"/>
+          <p:cNvSpPr/>
+          <p:nvPr/>
+        </p:nvSpPr>
+        <p:spPr>
+          <a:xfrm>
+            <a:off x="7130902" y="1627632"/>
             <a:ext cx="23558" cy="329184"/>
           </a:xfrm>
           <a:prstGeom prst="rect">
@@ -12280,13 +12457,13 @@
       </p:sp>
       <p:sp>
         <p:nvSpPr>
-          <p:cNvPr id="190" name="Shape 188"/>
-          <p:cNvSpPr/>
-          <p:nvPr/>
-        </p:nvSpPr>
-        <p:spPr>
-          <a:xfrm>
-            <a:off x="7158280" y="1353312"/>
+          <p:cNvPr id="197" name="Shape 195"/>
+          <p:cNvSpPr/>
+          <p:nvPr/>
+        </p:nvSpPr>
+        <p:spPr>
+          <a:xfrm>
+            <a:off x="7158280" y="1627632"/>
             <a:ext cx="127552" cy="329184"/>
           </a:xfrm>
           <a:prstGeom prst="rect">
@@ -12300,13 +12477,13 @@
       </p:sp>
       <p:sp>
         <p:nvSpPr>
-          <p:cNvPr id="191" name="Text 189"/>
-          <p:cNvSpPr/>
-          <p:nvPr/>
-        </p:nvSpPr>
-        <p:spPr>
-          <a:xfrm>
-            <a:off x="7671816" y="1325880"/>
+          <p:cNvPr id="198" name="Text 196"/>
+          <p:cNvSpPr/>
+          <p:nvPr/>
+        </p:nvSpPr>
+        <p:spPr>
+          <a:xfrm>
+            <a:off x="7671816" y="1600200"/>
             <a:ext cx="914400" cy="384048"/>
           </a:xfrm>
           <a:prstGeom prst="rect">
@@ -12339,13 +12516,13 @@
       </p:sp>
       <p:sp>
         <p:nvSpPr>
-          <p:cNvPr id="192" name="Text 190"/>
-          <p:cNvSpPr/>
-          <p:nvPr/>
-        </p:nvSpPr>
-        <p:spPr>
-          <a:xfrm>
-            <a:off x="457200" y="1801368"/>
+          <p:cNvPr id="199" name="Text 197"/>
+          <p:cNvSpPr/>
+          <p:nvPr/>
+        </p:nvSpPr>
+        <p:spPr>
+          <a:xfrm>
+            <a:off x="457200" y="2075688"/>
             <a:ext cx="978408" cy="384048"/>
           </a:xfrm>
           <a:prstGeom prst="rect">
@@ -12378,13 +12555,13 @@
       </p:sp>
       <p:sp>
         <p:nvSpPr>
-          <p:cNvPr id="193" name="Shape 191"/>
-          <p:cNvSpPr/>
-          <p:nvPr/>
-        </p:nvSpPr>
-        <p:spPr>
-          <a:xfrm>
-            <a:off x="1508760" y="1801368"/>
+          <p:cNvPr id="200" name="Shape 198"/>
+          <p:cNvSpPr/>
+          <p:nvPr/>
+        </p:nvSpPr>
+        <p:spPr>
+          <a:xfrm>
+            <a:off x="1508760" y="2075688"/>
             <a:ext cx="6126480" cy="384048"/>
           </a:xfrm>
           <a:prstGeom prst="rect">
@@ -12403,13 +12580,13 @@
       </p:sp>
       <p:sp>
         <p:nvSpPr>
-          <p:cNvPr id="194" name="Shape 192"/>
-          <p:cNvSpPr/>
-          <p:nvPr/>
-        </p:nvSpPr>
-        <p:spPr>
-          <a:xfrm>
-            <a:off x="4308689" y="1828800"/>
+          <p:cNvPr id="201" name="Shape 199"/>
+          <p:cNvSpPr/>
+          <p:nvPr/>
+        </p:nvSpPr>
+        <p:spPr>
+          <a:xfrm>
+            <a:off x="4308689" y="2103120"/>
             <a:ext cx="27307" cy="329184"/>
           </a:xfrm>
           <a:prstGeom prst="rect">
@@ -12423,13 +12600,13 @@
       </p:sp>
       <p:sp>
         <p:nvSpPr>
-          <p:cNvPr id="195" name="Shape 193"/>
-          <p:cNvSpPr/>
-          <p:nvPr/>
-        </p:nvSpPr>
-        <p:spPr>
-          <a:xfrm>
-            <a:off x="4589615" y="1828800"/>
+          <p:cNvPr id="202" name="Shape 200"/>
+          <p:cNvSpPr/>
+          <p:nvPr/>
+        </p:nvSpPr>
+        <p:spPr>
+          <a:xfrm>
+            <a:off x="4589615" y="2103120"/>
             <a:ext cx="28510" cy="329184"/>
           </a:xfrm>
           <a:prstGeom prst="rect">
@@ -12443,13 +12620,13 @@
       </p:sp>
       <p:sp>
         <p:nvSpPr>
-          <p:cNvPr id="196" name="Shape 194"/>
-          <p:cNvSpPr/>
-          <p:nvPr/>
-        </p:nvSpPr>
-        <p:spPr>
-          <a:xfrm>
-            <a:off x="4879951" y="1828800"/>
+          <p:cNvPr id="203" name="Shape 201"/>
+          <p:cNvSpPr/>
+          <p:nvPr/>
+        </p:nvSpPr>
+        <p:spPr>
+          <a:xfrm>
+            <a:off x="4879951" y="2103120"/>
             <a:ext cx="27095" cy="329184"/>
           </a:xfrm>
           <a:prstGeom prst="rect">
@@ -12463,13 +12640,13 @@
       </p:sp>
       <p:sp>
         <p:nvSpPr>
-          <p:cNvPr id="197" name="Shape 195"/>
-          <p:cNvSpPr/>
-          <p:nvPr/>
-        </p:nvSpPr>
-        <p:spPr>
-          <a:xfrm>
-            <a:off x="5138240" y="1828800"/>
+          <p:cNvPr id="204" name="Shape 202"/>
+          <p:cNvSpPr/>
+          <p:nvPr/>
+        </p:nvSpPr>
+        <p:spPr>
+          <a:xfrm>
+            <a:off x="5138240" y="2103120"/>
             <a:ext cx="26812" cy="329184"/>
           </a:xfrm>
           <a:prstGeom prst="rect">
@@ -12483,13 +12660,13 @@
       </p:sp>
       <p:sp>
         <p:nvSpPr>
-          <p:cNvPr id="198" name="Shape 196"/>
-          <p:cNvSpPr/>
-          <p:nvPr/>
-        </p:nvSpPr>
-        <p:spPr>
-          <a:xfrm>
-            <a:off x="5418247" y="1828800"/>
+          <p:cNvPr id="205" name="Shape 203"/>
+          <p:cNvSpPr/>
+          <p:nvPr/>
+        </p:nvSpPr>
+        <p:spPr>
+          <a:xfrm>
+            <a:off x="5418247" y="2103120"/>
             <a:ext cx="28298" cy="329184"/>
           </a:xfrm>
           <a:prstGeom prst="rect">
@@ -12503,13 +12680,13 @@
       </p:sp>
       <p:sp>
         <p:nvSpPr>
-          <p:cNvPr id="199" name="Shape 197"/>
-          <p:cNvSpPr/>
-          <p:nvPr/>
-        </p:nvSpPr>
-        <p:spPr>
-          <a:xfrm>
-            <a:off x="5694433" y="1828800"/>
+          <p:cNvPr id="206" name="Shape 204"/>
+          <p:cNvSpPr/>
+          <p:nvPr/>
+        </p:nvSpPr>
+        <p:spPr>
+          <a:xfrm>
+            <a:off x="5694433" y="2103120"/>
             <a:ext cx="30774" cy="329184"/>
           </a:xfrm>
           <a:prstGeom prst="rect">
@@ -12523,13 +12700,13 @@
       </p:sp>
       <p:sp>
         <p:nvSpPr>
-          <p:cNvPr id="200" name="Shape 198"/>
-          <p:cNvSpPr/>
-          <p:nvPr/>
-        </p:nvSpPr>
-        <p:spPr>
-          <a:xfrm>
-            <a:off x="5801328" y="1828800"/>
+          <p:cNvPr id="207" name="Shape 205"/>
+          <p:cNvSpPr/>
+          <p:nvPr/>
+        </p:nvSpPr>
+        <p:spPr>
+          <a:xfrm>
+            <a:off x="5801328" y="2103120"/>
             <a:ext cx="40112" cy="329184"/>
           </a:xfrm>
           <a:prstGeom prst="rect">
@@ -12543,13 +12720,13 @@
       </p:sp>
       <p:sp>
         <p:nvSpPr>
-          <p:cNvPr id="201" name="Shape 199"/>
-          <p:cNvSpPr/>
-          <p:nvPr/>
-        </p:nvSpPr>
-        <p:spPr>
-          <a:xfrm>
-            <a:off x="5901291" y="1828800"/>
+          <p:cNvPr id="208" name="Shape 206"/>
+          <p:cNvSpPr/>
+          <p:nvPr/>
+        </p:nvSpPr>
+        <p:spPr>
+          <a:xfrm>
+            <a:off x="5901291" y="2103120"/>
             <a:ext cx="40466" cy="329184"/>
           </a:xfrm>
           <a:prstGeom prst="rect">
@@ -12563,13 +12740,13 @@
       </p:sp>
       <p:sp>
         <p:nvSpPr>
-          <p:cNvPr id="202" name="Shape 200"/>
-          <p:cNvSpPr/>
-          <p:nvPr/>
-        </p:nvSpPr>
-        <p:spPr>
-          <a:xfrm>
-            <a:off x="6006771" y="1828800"/>
+          <p:cNvPr id="209" name="Shape 207"/>
+          <p:cNvSpPr/>
+          <p:nvPr/>
+        </p:nvSpPr>
+        <p:spPr>
+          <a:xfrm>
+            <a:off x="6006771" y="2103120"/>
             <a:ext cx="40254" cy="329184"/>
           </a:xfrm>
           <a:prstGeom prst="rect">
@@ -12583,13 +12760,13 @@
       </p:sp>
       <p:sp>
         <p:nvSpPr>
-          <p:cNvPr id="203" name="Shape 201"/>
-          <p:cNvSpPr/>
-          <p:nvPr/>
-        </p:nvSpPr>
-        <p:spPr>
-          <a:xfrm>
-            <a:off x="6104681" y="1828800"/>
+          <p:cNvPr id="210" name="Shape 208"/>
+          <p:cNvSpPr/>
+          <p:nvPr/>
+        </p:nvSpPr>
+        <p:spPr>
+          <a:xfrm>
+            <a:off x="6104681" y="2103120"/>
             <a:ext cx="41103" cy="329184"/>
           </a:xfrm>
           <a:prstGeom prst="rect">
@@ -12603,13 +12780,13 @@
       </p:sp>
       <p:sp>
         <p:nvSpPr>
-          <p:cNvPr id="204" name="Shape 202"/>
-          <p:cNvSpPr/>
-          <p:nvPr/>
-        </p:nvSpPr>
-        <p:spPr>
-          <a:xfrm>
-            <a:off x="6204148" y="1828800"/>
+          <p:cNvPr id="211" name="Shape 209"/>
+          <p:cNvSpPr/>
+          <p:nvPr/>
+        </p:nvSpPr>
+        <p:spPr>
+          <a:xfrm>
+            <a:off x="6204148" y="2103120"/>
             <a:ext cx="40890" cy="329184"/>
           </a:xfrm>
           <a:prstGeom prst="rect">
@@ -12623,13 +12800,13 @@
       </p:sp>
       <p:sp>
         <p:nvSpPr>
-          <p:cNvPr id="205" name="Shape 203"/>
-          <p:cNvSpPr/>
-          <p:nvPr/>
-        </p:nvSpPr>
-        <p:spPr>
-          <a:xfrm>
-            <a:off x="6318825" y="1828800"/>
+          <p:cNvPr id="212" name="Shape 210"/>
+          <p:cNvSpPr/>
+          <p:nvPr/>
+        </p:nvSpPr>
+        <p:spPr>
+          <a:xfrm>
+            <a:off x="6318825" y="2103120"/>
             <a:ext cx="39900" cy="329184"/>
           </a:xfrm>
           <a:prstGeom prst="rect">
@@ -12643,13 +12820,13 @@
       </p:sp>
       <p:sp>
         <p:nvSpPr>
-          <p:cNvPr id="206" name="Shape 204"/>
-          <p:cNvSpPr/>
-          <p:nvPr/>
-        </p:nvSpPr>
-        <p:spPr>
-          <a:xfrm>
-            <a:off x="6448641" y="1828800"/>
+          <p:cNvPr id="213" name="Shape 211"/>
+          <p:cNvSpPr/>
+          <p:nvPr/>
+        </p:nvSpPr>
+        <p:spPr>
+          <a:xfrm>
+            <a:off x="6448641" y="2103120"/>
             <a:ext cx="29500" cy="329184"/>
           </a:xfrm>
           <a:prstGeom prst="rect">
@@ -12663,13 +12840,13 @@
       </p:sp>
       <p:sp>
         <p:nvSpPr>
-          <p:cNvPr id="207" name="Shape 205"/>
-          <p:cNvSpPr/>
-          <p:nvPr/>
-        </p:nvSpPr>
-        <p:spPr>
-          <a:xfrm>
-            <a:off x="6940033" y="1828800"/>
+          <p:cNvPr id="214" name="Shape 212"/>
+          <p:cNvSpPr/>
+          <p:nvPr/>
+        </p:nvSpPr>
+        <p:spPr>
+          <a:xfrm>
+            <a:off x="6940033" y="2103120"/>
             <a:ext cx="20233" cy="329184"/>
           </a:xfrm>
           <a:prstGeom prst="rect">
@@ -12683,13 +12860,13 @@
       </p:sp>
       <p:sp>
         <p:nvSpPr>
-          <p:cNvPr id="208" name="Shape 206"/>
-          <p:cNvSpPr/>
-          <p:nvPr/>
-        </p:nvSpPr>
-        <p:spPr>
-          <a:xfrm>
-            <a:off x="7011202" y="1828800"/>
+          <p:cNvPr id="215" name="Shape 213"/>
+          <p:cNvSpPr/>
+          <p:nvPr/>
+        </p:nvSpPr>
+        <p:spPr>
+          <a:xfrm>
+            <a:off x="7011202" y="2103120"/>
             <a:ext cx="33391" cy="329184"/>
           </a:xfrm>
           <a:prstGeom prst="rect">
@@ -12703,13 +12880,13 @@
       </p:sp>
       <p:sp>
         <p:nvSpPr>
-          <p:cNvPr id="209" name="Shape 207"/>
-          <p:cNvSpPr/>
-          <p:nvPr/>
-        </p:nvSpPr>
-        <p:spPr>
-          <a:xfrm>
-            <a:off x="7285833" y="1828800"/>
+          <p:cNvPr id="216" name="Shape 214"/>
+          <p:cNvSpPr/>
+          <p:nvPr/>
+        </p:nvSpPr>
+        <p:spPr>
+          <a:xfrm>
+            <a:off x="7285833" y="2103120"/>
             <a:ext cx="310498" cy="329184"/>
           </a:xfrm>
           <a:prstGeom prst="rect">
@@ -12723,13 +12900,13 @@
       </p:sp>
       <p:sp>
         <p:nvSpPr>
-          <p:cNvPr id="210" name="Text 208"/>
-          <p:cNvSpPr/>
-          <p:nvPr/>
-        </p:nvSpPr>
-        <p:spPr>
-          <a:xfrm>
-            <a:off x="7671816" y="1801368"/>
+          <p:cNvPr id="217" name="Text 215"/>
+          <p:cNvSpPr/>
+          <p:nvPr/>
+        </p:nvSpPr>
+        <p:spPr>
+          <a:xfrm>
+            <a:off x="7671816" y="2075688"/>
             <a:ext cx="914400" cy="384048"/>
           </a:xfrm>
           <a:prstGeom prst="rect">
@@ -12762,206 +12939,48 @@
       </p:sp>
       <p:sp>
         <p:nvSpPr>
-          <p:cNvPr id="211" name="Text 209"/>
-          <p:cNvSpPr/>
-          <p:nvPr/>
-        </p:nvSpPr>
-        <p:spPr>
-          <a:xfrm>
-            <a:off x="457200" y="2276856"/>
-            <a:ext cx="978408" cy="384048"/>
-          </a:xfrm>
-          <a:prstGeom prst="rect">
+          <p:cNvPr id="218" name="Shape 216"/>
+          <p:cNvSpPr/>
+          <p:nvPr/>
+        </p:nvSpPr>
+        <p:spPr>
+          <a:xfrm>
+            <a:off x="3421693" y="1600200"/>
+            <a:ext cx="0" cy="859536"/>
+          </a:xfrm>
+          <a:prstGeom prst="line">
             <a:avLst/>
           </a:prstGeom>
           <a:noFill/>
-          <a:ln/>
-        </p:spPr>
-        <p:txBody>
-          <a:bodyPr wrap="square" lIns="0" tIns="0" rIns="0" bIns="0" rtlCol="0" anchor="ctr"/>
-          <a:lstStyle/>
-          <a:p>
-            <a:pPr algn="r" indent="0" marL="0">
-              <a:buNone/>
-            </a:pPr>
-            <a:r>
-              <a:rPr lang="en-US" sz="1000" dirty="0">
-                <a:solidFill>
-                  <a:srgbClr val="5E5E5E"/>
-                </a:solidFill>
-                <a:latin typeface="NVIDIA Sans" pitchFamily="34" charset="0"/>
-                <a:ea typeface="NVIDIA Sans" pitchFamily="34" charset="-122"/>
-                <a:cs typeface="NVIDIA Sans" pitchFamily="34" charset="-120"/>
-              </a:rPr>
-              <a:t>Memcpy</a:t>
-            </a:r>
-            <a:endParaRPr lang="en-US" sz="1000" dirty="0"/>
-          </a:p>
-        </p:txBody>
-      </p:sp>
-      <p:sp>
-        <p:nvSpPr>
-          <p:cNvPr id="212" name="Shape 210"/>
-          <p:cNvSpPr/>
-          <p:nvPr/>
-        </p:nvSpPr>
-        <p:spPr>
-          <a:xfrm>
-            <a:off x="1508760" y="2276856"/>
-            <a:ext cx="6126480" cy="384048"/>
-          </a:xfrm>
-          <a:prstGeom prst="rect">
-            <a:avLst/>
-          </a:prstGeom>
-          <a:solidFill>
-            <a:srgbClr val="F0F0F0"/>
-          </a:solidFill>
-          <a:ln w="6350">
+          <a:ln w="9525">
             <a:solidFill>
-              <a:srgbClr val="E0E0E0"/>
+              <a:srgbClr val="5E5E5E"/>
             </a:solidFill>
-            <a:prstDash val="solid"/>
+            <a:prstDash val="dash"/>
           </a:ln>
         </p:spPr>
       </p:sp>
       <p:sp>
         <p:nvSpPr>
-          <p:cNvPr id="213" name="Shape 211"/>
-          <p:cNvSpPr/>
-          <p:nvPr/>
-        </p:nvSpPr>
-        <p:spPr>
-          <a:xfrm>
-            <a:off x="2020951" y="2304288"/>
-            <a:ext cx="20304" cy="329184"/>
-          </a:xfrm>
-          <a:prstGeom prst="rect">
-            <a:avLst/>
-          </a:prstGeom>
-          <a:solidFill>
-            <a:srgbClr val="8C8C8C"/>
-          </a:solidFill>
-          <a:ln/>
-        </p:spPr>
-      </p:sp>
-      <p:sp>
-        <p:nvSpPr>
-          <p:cNvPr id="214" name="Shape 212"/>
-          <p:cNvSpPr/>
-          <p:nvPr/>
-        </p:nvSpPr>
-        <p:spPr>
-          <a:xfrm>
-            <a:off x="2114617" y="2304288"/>
-            <a:ext cx="5447" cy="329184"/>
-          </a:xfrm>
-          <a:prstGeom prst="rect">
-            <a:avLst/>
-          </a:prstGeom>
-          <a:solidFill>
-            <a:srgbClr val="8C8C8C"/>
-          </a:solidFill>
-          <a:ln/>
-        </p:spPr>
-      </p:sp>
-      <p:sp>
-        <p:nvSpPr>
-          <p:cNvPr id="215" name="Shape 213"/>
-          <p:cNvSpPr/>
-          <p:nvPr/>
-        </p:nvSpPr>
-        <p:spPr>
-          <a:xfrm>
-            <a:off x="2154516" y="2304288"/>
-            <a:ext cx="4572" cy="329184"/>
-          </a:xfrm>
-          <a:prstGeom prst="rect">
-            <a:avLst/>
-          </a:prstGeom>
-          <a:solidFill>
-            <a:srgbClr val="8C8C8C"/>
-          </a:solidFill>
-          <a:ln/>
-        </p:spPr>
-      </p:sp>
-      <p:sp>
-        <p:nvSpPr>
-          <p:cNvPr id="216" name="Shape 214"/>
-          <p:cNvSpPr/>
-          <p:nvPr/>
-        </p:nvSpPr>
-        <p:spPr>
-          <a:xfrm>
-            <a:off x="2168807" y="2304288"/>
-            <a:ext cx="4572" cy="329184"/>
-          </a:xfrm>
-          <a:prstGeom prst="rect">
-            <a:avLst/>
-          </a:prstGeom>
-          <a:solidFill>
-            <a:srgbClr val="8C8C8C"/>
-          </a:solidFill>
-          <a:ln/>
-        </p:spPr>
-      </p:sp>
-      <p:sp>
-        <p:nvSpPr>
-          <p:cNvPr id="217" name="Shape 215"/>
-          <p:cNvSpPr/>
-          <p:nvPr/>
-        </p:nvSpPr>
-        <p:spPr>
-          <a:xfrm>
-            <a:off x="2182461" y="2304288"/>
-            <a:ext cx="4572" cy="329184"/>
-          </a:xfrm>
-          <a:prstGeom prst="rect">
-            <a:avLst/>
-          </a:prstGeom>
-          <a:solidFill>
-            <a:srgbClr val="8C8C8C"/>
-          </a:solidFill>
-          <a:ln/>
-        </p:spPr>
-      </p:sp>
-      <p:sp>
-        <p:nvSpPr>
-          <p:cNvPr id="218" name="Shape 216"/>
-          <p:cNvSpPr/>
-          <p:nvPr/>
-        </p:nvSpPr>
-        <p:spPr>
-          <a:xfrm>
-            <a:off x="2195761" y="2304288"/>
-            <a:ext cx="4572" cy="329184"/>
-          </a:xfrm>
-          <a:prstGeom prst="rect">
-            <a:avLst/>
-          </a:prstGeom>
-          <a:solidFill>
-            <a:srgbClr val="8C8C8C"/>
-          </a:solidFill>
-          <a:ln/>
-        </p:spPr>
-      </p:sp>
-      <p:sp>
-        <p:nvSpPr>
           <p:cNvPr id="219" name="Shape 217"/>
           <p:cNvSpPr/>
           <p:nvPr/>
         </p:nvSpPr>
         <p:spPr>
           <a:xfrm>
-            <a:off x="2208848" y="2304288"/>
-            <a:ext cx="4572" cy="329184"/>
-          </a:xfrm>
-          <a:prstGeom prst="rect">
-            <a:avLst/>
-          </a:prstGeom>
-          <a:solidFill>
-            <a:srgbClr val="8C8C8C"/>
-          </a:solidFill>
-          <a:ln/>
+            <a:off x="7060794" y="1600200"/>
+            <a:ext cx="0" cy="859536"/>
+          </a:xfrm>
+          <a:prstGeom prst="line">
+            <a:avLst/>
+          </a:prstGeom>
+          <a:noFill/>
+          <a:ln w="9525">
+            <a:solidFill>
+              <a:srgbClr val="5E5E5E"/>
+            </a:solidFill>
+            <a:prstDash val="dash"/>
+          </a:ln>
         </p:spPr>
       </p:sp>
       <p:sp>
@@ -12972,4266 +12991,7 @@
         </p:nvSpPr>
         <p:spPr>
           <a:xfrm>
-            <a:off x="2223705" y="2304288"/>
-            <a:ext cx="4572" cy="329184"/>
-          </a:xfrm>
-          <a:prstGeom prst="rect">
-            <a:avLst/>
-          </a:prstGeom>
-          <a:solidFill>
-            <a:srgbClr val="8C8C8C"/>
-          </a:solidFill>
-          <a:ln/>
-        </p:spPr>
-      </p:sp>
-      <p:sp>
-        <p:nvSpPr>
-          <p:cNvPr id="221" name="Shape 219"/>
-          <p:cNvSpPr/>
-          <p:nvPr/>
-        </p:nvSpPr>
-        <p:spPr>
-          <a:xfrm>
-            <a:off x="2237571" y="2304288"/>
-            <a:ext cx="4572" cy="329184"/>
-          </a:xfrm>
-          <a:prstGeom prst="rect">
-            <a:avLst/>
-          </a:prstGeom>
-          <a:solidFill>
-            <a:srgbClr val="8C8C8C"/>
-          </a:solidFill>
-          <a:ln/>
-        </p:spPr>
-      </p:sp>
-      <p:sp>
-        <p:nvSpPr>
-          <p:cNvPr id="222" name="Shape 220"/>
-          <p:cNvSpPr/>
-          <p:nvPr/>
-        </p:nvSpPr>
-        <p:spPr>
-          <a:xfrm>
-            <a:off x="2251366" y="2304288"/>
-            <a:ext cx="4572" cy="329184"/>
-          </a:xfrm>
-          <a:prstGeom prst="rect">
-            <a:avLst/>
-          </a:prstGeom>
-          <a:solidFill>
-            <a:srgbClr val="8C8C8C"/>
-          </a:solidFill>
-          <a:ln/>
-        </p:spPr>
-      </p:sp>
-      <p:sp>
-        <p:nvSpPr>
-          <p:cNvPr id="223" name="Shape 221"/>
-          <p:cNvSpPr/>
-          <p:nvPr/>
-        </p:nvSpPr>
-        <p:spPr>
-          <a:xfrm>
-            <a:off x="2266434" y="2304288"/>
-            <a:ext cx="4572" cy="329184"/>
-          </a:xfrm>
-          <a:prstGeom prst="rect">
-            <a:avLst/>
-          </a:prstGeom>
-          <a:solidFill>
-            <a:srgbClr val="8C8C8C"/>
-          </a:solidFill>
-          <a:ln/>
-        </p:spPr>
-      </p:sp>
-      <p:sp>
-        <p:nvSpPr>
-          <p:cNvPr id="224" name="Shape 222"/>
-          <p:cNvSpPr/>
-          <p:nvPr/>
-        </p:nvSpPr>
-        <p:spPr>
-          <a:xfrm>
-            <a:off x="2280088" y="2304288"/>
-            <a:ext cx="4572" cy="329184"/>
-          </a:xfrm>
-          <a:prstGeom prst="rect">
-            <a:avLst/>
-          </a:prstGeom>
-          <a:solidFill>
-            <a:srgbClr val="8C8C8C"/>
-          </a:solidFill>
-          <a:ln/>
-        </p:spPr>
-      </p:sp>
-      <p:sp>
-        <p:nvSpPr>
-          <p:cNvPr id="225" name="Shape 223"/>
-          <p:cNvSpPr/>
-          <p:nvPr/>
-        </p:nvSpPr>
-        <p:spPr>
-          <a:xfrm>
-            <a:off x="2294096" y="2304288"/>
-            <a:ext cx="4572" cy="329184"/>
-          </a:xfrm>
-          <a:prstGeom prst="rect">
-            <a:avLst/>
-          </a:prstGeom>
-          <a:solidFill>
-            <a:srgbClr val="8C8C8C"/>
-          </a:solidFill>
-          <a:ln/>
-        </p:spPr>
-      </p:sp>
-      <p:sp>
-        <p:nvSpPr>
-          <p:cNvPr id="226" name="Shape 224"/>
-          <p:cNvSpPr/>
-          <p:nvPr/>
-        </p:nvSpPr>
-        <p:spPr>
-          <a:xfrm>
-            <a:off x="2309306" y="2304288"/>
-            <a:ext cx="4572" cy="329184"/>
-          </a:xfrm>
-          <a:prstGeom prst="rect">
-            <a:avLst/>
-          </a:prstGeom>
-          <a:solidFill>
-            <a:srgbClr val="8C8C8C"/>
-          </a:solidFill>
-          <a:ln/>
-        </p:spPr>
-      </p:sp>
-      <p:sp>
-        <p:nvSpPr>
-          <p:cNvPr id="227" name="Shape 225"/>
-          <p:cNvSpPr/>
-          <p:nvPr/>
-        </p:nvSpPr>
-        <p:spPr>
-          <a:xfrm>
-            <a:off x="2322535" y="2304288"/>
-            <a:ext cx="4572" cy="329184"/>
-          </a:xfrm>
-          <a:prstGeom prst="rect">
-            <a:avLst/>
-          </a:prstGeom>
-          <a:solidFill>
-            <a:srgbClr val="8C8C8C"/>
-          </a:solidFill>
-          <a:ln/>
-        </p:spPr>
-      </p:sp>
-      <p:sp>
-        <p:nvSpPr>
-          <p:cNvPr id="228" name="Shape 226"/>
-          <p:cNvSpPr/>
-          <p:nvPr/>
-        </p:nvSpPr>
-        <p:spPr>
-          <a:xfrm>
-            <a:off x="2336896" y="2304288"/>
-            <a:ext cx="4572" cy="329184"/>
-          </a:xfrm>
-          <a:prstGeom prst="rect">
-            <a:avLst/>
-          </a:prstGeom>
-          <a:solidFill>
-            <a:srgbClr val="8C8C8C"/>
-          </a:solidFill>
-          <a:ln/>
-        </p:spPr>
-      </p:sp>
-      <p:sp>
-        <p:nvSpPr>
-          <p:cNvPr id="229" name="Shape 227"/>
-          <p:cNvSpPr/>
-          <p:nvPr/>
-        </p:nvSpPr>
-        <p:spPr>
-          <a:xfrm>
-            <a:off x="2350691" y="2304288"/>
-            <a:ext cx="4572" cy="329184"/>
-          </a:xfrm>
-          <a:prstGeom prst="rect">
-            <a:avLst/>
-          </a:prstGeom>
-          <a:solidFill>
-            <a:srgbClr val="8C8C8C"/>
-          </a:solidFill>
-          <a:ln/>
-        </p:spPr>
-      </p:sp>
-      <p:sp>
-        <p:nvSpPr>
-          <p:cNvPr id="230" name="Shape 228"/>
-          <p:cNvSpPr/>
-          <p:nvPr/>
-        </p:nvSpPr>
-        <p:spPr>
-          <a:xfrm>
-            <a:off x="2363991" y="2304288"/>
-            <a:ext cx="4572" cy="329184"/>
-          </a:xfrm>
-          <a:prstGeom prst="rect">
-            <a:avLst/>
-          </a:prstGeom>
-          <a:solidFill>
-            <a:srgbClr val="8C8C8C"/>
-          </a:solidFill>
-          <a:ln/>
-        </p:spPr>
-      </p:sp>
-      <p:sp>
-        <p:nvSpPr>
-          <p:cNvPr id="231" name="Shape 229"/>
-          <p:cNvSpPr/>
-          <p:nvPr/>
-        </p:nvSpPr>
-        <p:spPr>
-          <a:xfrm>
-            <a:off x="2378777" y="2304288"/>
-            <a:ext cx="4572" cy="329184"/>
-          </a:xfrm>
-          <a:prstGeom prst="rect">
-            <a:avLst/>
-          </a:prstGeom>
-          <a:solidFill>
-            <a:srgbClr val="8C8C8C"/>
-          </a:solidFill>
-          <a:ln/>
-        </p:spPr>
-      </p:sp>
-      <p:sp>
-        <p:nvSpPr>
-          <p:cNvPr id="232" name="Shape 230"/>
-          <p:cNvSpPr/>
-          <p:nvPr/>
-        </p:nvSpPr>
-        <p:spPr>
-          <a:xfrm>
-            <a:off x="2391794" y="2304288"/>
-            <a:ext cx="4572" cy="329184"/>
-          </a:xfrm>
-          <a:prstGeom prst="rect">
-            <a:avLst/>
-          </a:prstGeom>
-          <a:solidFill>
-            <a:srgbClr val="8C8C8C"/>
-          </a:solidFill>
-          <a:ln/>
-        </p:spPr>
-      </p:sp>
-      <p:sp>
-        <p:nvSpPr>
-          <p:cNvPr id="233" name="Shape 231"/>
-          <p:cNvSpPr/>
-          <p:nvPr/>
-        </p:nvSpPr>
-        <p:spPr>
-          <a:xfrm>
-            <a:off x="2404669" y="2304288"/>
-            <a:ext cx="4572" cy="329184"/>
-          </a:xfrm>
-          <a:prstGeom prst="rect">
-            <a:avLst/>
-          </a:prstGeom>
-          <a:solidFill>
-            <a:srgbClr val="8C8C8C"/>
-          </a:solidFill>
-          <a:ln/>
-        </p:spPr>
-      </p:sp>
-      <p:sp>
-        <p:nvSpPr>
-          <p:cNvPr id="234" name="Shape 232"/>
-          <p:cNvSpPr/>
-          <p:nvPr/>
-        </p:nvSpPr>
-        <p:spPr>
-          <a:xfrm>
-            <a:off x="2417474" y="2304288"/>
-            <a:ext cx="4572" cy="329184"/>
-          </a:xfrm>
-          <a:prstGeom prst="rect">
-            <a:avLst/>
-          </a:prstGeom>
-          <a:solidFill>
-            <a:srgbClr val="8C8C8C"/>
-          </a:solidFill>
-          <a:ln/>
-        </p:spPr>
-      </p:sp>
-      <p:sp>
-        <p:nvSpPr>
-          <p:cNvPr id="235" name="Shape 233"/>
-          <p:cNvSpPr/>
-          <p:nvPr/>
-        </p:nvSpPr>
-        <p:spPr>
-          <a:xfrm>
-            <a:off x="2430845" y="2304288"/>
-            <a:ext cx="4572" cy="329184"/>
-          </a:xfrm>
-          <a:prstGeom prst="rect">
-            <a:avLst/>
-          </a:prstGeom>
-          <a:solidFill>
-            <a:srgbClr val="8C8C8C"/>
-          </a:solidFill>
-          <a:ln/>
-        </p:spPr>
-      </p:sp>
-      <p:sp>
-        <p:nvSpPr>
-          <p:cNvPr id="236" name="Shape 234"/>
-          <p:cNvSpPr/>
-          <p:nvPr/>
-        </p:nvSpPr>
-        <p:spPr>
-          <a:xfrm>
-            <a:off x="2444357" y="2304288"/>
-            <a:ext cx="4572" cy="329184"/>
-          </a:xfrm>
-          <a:prstGeom prst="rect">
-            <a:avLst/>
-          </a:prstGeom>
-          <a:solidFill>
-            <a:srgbClr val="8C8C8C"/>
-          </a:solidFill>
-          <a:ln/>
-        </p:spPr>
-      </p:sp>
-      <p:sp>
-        <p:nvSpPr>
-          <p:cNvPr id="237" name="Shape 235"/>
-          <p:cNvSpPr/>
-          <p:nvPr/>
-        </p:nvSpPr>
-        <p:spPr>
-          <a:xfrm>
-            <a:off x="2457940" y="2304288"/>
-            <a:ext cx="4572" cy="329184"/>
-          </a:xfrm>
-          <a:prstGeom prst="rect">
-            <a:avLst/>
-          </a:prstGeom>
-          <a:solidFill>
-            <a:srgbClr val="8C8C8C"/>
-          </a:solidFill>
-          <a:ln/>
-        </p:spPr>
-      </p:sp>
-      <p:sp>
-        <p:nvSpPr>
-          <p:cNvPr id="238" name="Shape 236"/>
-          <p:cNvSpPr/>
-          <p:nvPr/>
-        </p:nvSpPr>
-        <p:spPr>
-          <a:xfrm>
-            <a:off x="2472230" y="2304288"/>
-            <a:ext cx="4572" cy="329184"/>
-          </a:xfrm>
-          <a:prstGeom prst="rect">
-            <a:avLst/>
-          </a:prstGeom>
-          <a:solidFill>
-            <a:srgbClr val="8C8C8C"/>
-          </a:solidFill>
-          <a:ln/>
-        </p:spPr>
-      </p:sp>
-      <p:sp>
-        <p:nvSpPr>
-          <p:cNvPr id="239" name="Shape 237"/>
-          <p:cNvSpPr/>
-          <p:nvPr/>
-        </p:nvSpPr>
-        <p:spPr>
-          <a:xfrm>
-            <a:off x="2486733" y="2304288"/>
-            <a:ext cx="4572" cy="329184"/>
-          </a:xfrm>
-          <a:prstGeom prst="rect">
-            <a:avLst/>
-          </a:prstGeom>
-          <a:solidFill>
-            <a:srgbClr val="8C8C8C"/>
-          </a:solidFill>
-          <a:ln/>
-        </p:spPr>
-      </p:sp>
-      <p:sp>
-        <p:nvSpPr>
-          <p:cNvPr id="240" name="Shape 238"/>
-          <p:cNvSpPr/>
-          <p:nvPr/>
-        </p:nvSpPr>
-        <p:spPr>
-          <a:xfrm>
-            <a:off x="2490129" y="2304288"/>
-            <a:ext cx="4572" cy="329184"/>
-          </a:xfrm>
-          <a:prstGeom prst="rect">
-            <a:avLst/>
-          </a:prstGeom>
-          <a:solidFill>
-            <a:srgbClr val="8C8C8C"/>
-          </a:solidFill>
-          <a:ln/>
-        </p:spPr>
-      </p:sp>
-      <p:sp>
-        <p:nvSpPr>
-          <p:cNvPr id="241" name="Shape 239"/>
-          <p:cNvSpPr/>
-          <p:nvPr/>
-        </p:nvSpPr>
-        <p:spPr>
-          <a:xfrm>
-            <a:off x="2493807" y="2304288"/>
-            <a:ext cx="4572" cy="329184"/>
-          </a:xfrm>
-          <a:prstGeom prst="rect">
-            <a:avLst/>
-          </a:prstGeom>
-          <a:solidFill>
-            <a:srgbClr val="8C8C8C"/>
-          </a:solidFill>
-          <a:ln/>
-        </p:spPr>
-      </p:sp>
-      <p:sp>
-        <p:nvSpPr>
-          <p:cNvPr id="242" name="Shape 240"/>
-          <p:cNvSpPr/>
-          <p:nvPr/>
-        </p:nvSpPr>
-        <p:spPr>
-          <a:xfrm>
-            <a:off x="2499113" y="2304288"/>
-            <a:ext cx="4572" cy="329184"/>
-          </a:xfrm>
-          <a:prstGeom prst="rect">
-            <a:avLst/>
-          </a:prstGeom>
-          <a:solidFill>
-            <a:srgbClr val="8C8C8C"/>
-          </a:solidFill>
-          <a:ln/>
-        </p:spPr>
-      </p:sp>
-      <p:sp>
-        <p:nvSpPr>
-          <p:cNvPr id="243" name="Shape 241"/>
-          <p:cNvSpPr/>
-          <p:nvPr/>
-        </p:nvSpPr>
-        <p:spPr>
-          <a:xfrm>
-            <a:off x="2502155" y="2304288"/>
-            <a:ext cx="4572" cy="329184"/>
-          </a:xfrm>
-          <a:prstGeom prst="rect">
-            <a:avLst/>
-          </a:prstGeom>
-          <a:solidFill>
-            <a:srgbClr val="8C8C8C"/>
-          </a:solidFill>
-          <a:ln/>
-        </p:spPr>
-      </p:sp>
-      <p:sp>
-        <p:nvSpPr>
-          <p:cNvPr id="244" name="Shape 242"/>
-          <p:cNvSpPr/>
-          <p:nvPr/>
-        </p:nvSpPr>
-        <p:spPr>
-          <a:xfrm>
-            <a:off x="2506046" y="2304288"/>
-            <a:ext cx="4572" cy="329184"/>
-          </a:xfrm>
-          <a:prstGeom prst="rect">
-            <a:avLst/>
-          </a:prstGeom>
-          <a:solidFill>
-            <a:srgbClr val="8C8C8C"/>
-          </a:solidFill>
-          <a:ln/>
-        </p:spPr>
-      </p:sp>
-      <p:sp>
-        <p:nvSpPr>
-          <p:cNvPr id="245" name="Shape 243"/>
-          <p:cNvSpPr/>
-          <p:nvPr/>
-        </p:nvSpPr>
-        <p:spPr>
-          <a:xfrm>
-            <a:off x="2510220" y="2304288"/>
-            <a:ext cx="4572" cy="329184"/>
-          </a:xfrm>
-          <a:prstGeom prst="rect">
-            <a:avLst/>
-          </a:prstGeom>
-          <a:solidFill>
-            <a:srgbClr val="8C8C8C"/>
-          </a:solidFill>
-          <a:ln/>
-        </p:spPr>
-      </p:sp>
-      <p:sp>
-        <p:nvSpPr>
-          <p:cNvPr id="246" name="Shape 244"/>
-          <p:cNvSpPr/>
-          <p:nvPr/>
-        </p:nvSpPr>
-        <p:spPr>
-          <a:xfrm>
-            <a:off x="2514323" y="2304288"/>
-            <a:ext cx="4572" cy="329184"/>
-          </a:xfrm>
-          <a:prstGeom prst="rect">
-            <a:avLst/>
-          </a:prstGeom>
-          <a:solidFill>
-            <a:srgbClr val="8C8C8C"/>
-          </a:solidFill>
-          <a:ln/>
-        </p:spPr>
-      </p:sp>
-      <p:sp>
-        <p:nvSpPr>
-          <p:cNvPr id="247" name="Shape 245"/>
-          <p:cNvSpPr/>
-          <p:nvPr/>
-        </p:nvSpPr>
-        <p:spPr>
-          <a:xfrm>
-            <a:off x="2518214" y="2304288"/>
-            <a:ext cx="4572" cy="329184"/>
-          </a:xfrm>
-          <a:prstGeom prst="rect">
-            <a:avLst/>
-          </a:prstGeom>
-          <a:solidFill>
-            <a:srgbClr val="8C8C8C"/>
-          </a:solidFill>
-          <a:ln/>
-        </p:spPr>
-      </p:sp>
-      <p:sp>
-        <p:nvSpPr>
-          <p:cNvPr id="248" name="Shape 246"/>
-          <p:cNvSpPr/>
-          <p:nvPr/>
-        </p:nvSpPr>
-        <p:spPr>
-          <a:xfrm>
-            <a:off x="2522035" y="2304288"/>
-            <a:ext cx="6509" cy="329184"/>
-          </a:xfrm>
-          <a:prstGeom prst="rect">
-            <a:avLst/>
-          </a:prstGeom>
-          <a:solidFill>
-            <a:srgbClr val="8C8C8C"/>
-          </a:solidFill>
-          <a:ln/>
-        </p:spPr>
-      </p:sp>
-      <p:sp>
-        <p:nvSpPr>
-          <p:cNvPr id="249" name="Shape 247"/>
-          <p:cNvSpPr/>
-          <p:nvPr/>
-        </p:nvSpPr>
-        <p:spPr>
-          <a:xfrm>
-            <a:off x="2529675" y="2304288"/>
-            <a:ext cx="17615" cy="329184"/>
-          </a:xfrm>
-          <a:prstGeom prst="rect">
-            <a:avLst/>
-          </a:prstGeom>
-          <a:solidFill>
-            <a:srgbClr val="8C8C8C"/>
-          </a:solidFill>
-          <a:ln/>
-        </p:spPr>
-      </p:sp>
-      <p:sp>
-        <p:nvSpPr>
-          <p:cNvPr id="250" name="Shape 248"/>
-          <p:cNvSpPr/>
-          <p:nvPr/>
-        </p:nvSpPr>
-        <p:spPr>
-          <a:xfrm>
-            <a:off x="2548422" y="2304288"/>
-            <a:ext cx="5377" cy="329184"/>
-          </a:xfrm>
-          <a:prstGeom prst="rect">
-            <a:avLst/>
-          </a:prstGeom>
-          <a:solidFill>
-            <a:srgbClr val="8C8C8C"/>
-          </a:solidFill>
-          <a:ln/>
-        </p:spPr>
-      </p:sp>
-      <p:sp>
-        <p:nvSpPr>
-          <p:cNvPr id="251" name="Shape 249"/>
-          <p:cNvSpPr/>
-          <p:nvPr/>
-        </p:nvSpPr>
-        <p:spPr>
-          <a:xfrm>
-            <a:off x="4075515" y="2304288"/>
-            <a:ext cx="4572" cy="329184"/>
-          </a:xfrm>
-          <a:prstGeom prst="rect">
-            <a:avLst/>
-          </a:prstGeom>
-          <a:solidFill>
-            <a:srgbClr val="8C8C8C"/>
-          </a:solidFill>
-          <a:ln/>
-        </p:spPr>
-      </p:sp>
-      <p:sp>
-        <p:nvSpPr>
-          <p:cNvPr id="252" name="Shape 250"/>
-          <p:cNvSpPr/>
-          <p:nvPr/>
-        </p:nvSpPr>
-        <p:spPr>
-          <a:xfrm>
-            <a:off x="4133950" y="2304288"/>
-            <a:ext cx="4572" cy="329184"/>
-          </a:xfrm>
-          <a:prstGeom prst="rect">
-            <a:avLst/>
-          </a:prstGeom>
-          <a:solidFill>
-            <a:srgbClr val="8C8C8C"/>
-          </a:solidFill>
-          <a:ln/>
-        </p:spPr>
-      </p:sp>
-      <p:sp>
-        <p:nvSpPr>
-          <p:cNvPr id="253" name="Shape 251"/>
-          <p:cNvSpPr/>
-          <p:nvPr/>
-        </p:nvSpPr>
-        <p:spPr>
-          <a:xfrm>
-            <a:off x="4173071" y="2304288"/>
-            <a:ext cx="4572" cy="329184"/>
-          </a:xfrm>
-          <a:prstGeom prst="rect">
-            <a:avLst/>
-          </a:prstGeom>
-          <a:solidFill>
-            <a:srgbClr val="8C8C8C"/>
-          </a:solidFill>
-          <a:ln/>
-        </p:spPr>
-      </p:sp>
-      <p:sp>
-        <p:nvSpPr>
-          <p:cNvPr id="254" name="Shape 252"/>
-          <p:cNvSpPr/>
-          <p:nvPr/>
-        </p:nvSpPr>
-        <p:spPr>
-          <a:xfrm>
-            <a:off x="4231577" y="2304288"/>
-            <a:ext cx="4572" cy="329184"/>
-          </a:xfrm>
-          <a:prstGeom prst="rect">
-            <a:avLst/>
-          </a:prstGeom>
-          <a:solidFill>
-            <a:srgbClr val="8C8C8C"/>
-          </a:solidFill>
-          <a:ln/>
-        </p:spPr>
-      </p:sp>
-      <p:sp>
-        <p:nvSpPr>
-          <p:cNvPr id="255" name="Shape 253"/>
-          <p:cNvSpPr/>
-          <p:nvPr/>
-        </p:nvSpPr>
-        <p:spPr>
-          <a:xfrm>
-            <a:off x="4270911" y="2304288"/>
-            <a:ext cx="4572" cy="329184"/>
-          </a:xfrm>
-          <a:prstGeom prst="rect">
-            <a:avLst/>
-          </a:prstGeom>
-          <a:solidFill>
-            <a:srgbClr val="8C8C8C"/>
-          </a:solidFill>
-          <a:ln/>
-        </p:spPr>
-      </p:sp>
-      <p:sp>
-        <p:nvSpPr>
-          <p:cNvPr id="256" name="Shape 254"/>
-          <p:cNvSpPr/>
-          <p:nvPr/>
-        </p:nvSpPr>
-        <p:spPr>
-          <a:xfrm>
-            <a:off x="4348801" y="2304288"/>
-            <a:ext cx="4572" cy="329184"/>
-          </a:xfrm>
-          <a:prstGeom prst="rect">
-            <a:avLst/>
-          </a:prstGeom>
-          <a:solidFill>
-            <a:srgbClr val="8C8C8C"/>
-          </a:solidFill>
-          <a:ln/>
-        </p:spPr>
-      </p:sp>
-      <p:sp>
-        <p:nvSpPr>
-          <p:cNvPr id="257" name="Shape 255"/>
-          <p:cNvSpPr/>
-          <p:nvPr/>
-        </p:nvSpPr>
-        <p:spPr>
-          <a:xfrm>
-            <a:off x="4387498" y="2304288"/>
-            <a:ext cx="4572" cy="329184"/>
-          </a:xfrm>
-          <a:prstGeom prst="rect">
-            <a:avLst/>
-          </a:prstGeom>
-          <a:solidFill>
-            <a:srgbClr val="8C8C8C"/>
-          </a:solidFill>
-          <a:ln/>
-        </p:spPr>
-      </p:sp>
-      <p:sp>
-        <p:nvSpPr>
-          <p:cNvPr id="258" name="Shape 256"/>
-          <p:cNvSpPr/>
-          <p:nvPr/>
-        </p:nvSpPr>
-        <p:spPr>
-          <a:xfrm>
-            <a:off x="4445438" y="2304288"/>
-            <a:ext cx="4572" cy="329184"/>
-          </a:xfrm>
-          <a:prstGeom prst="rect">
-            <a:avLst/>
-          </a:prstGeom>
-          <a:solidFill>
-            <a:srgbClr val="8C8C8C"/>
-          </a:solidFill>
-          <a:ln/>
-        </p:spPr>
-      </p:sp>
-      <p:sp>
-        <p:nvSpPr>
-          <p:cNvPr id="259" name="Shape 257"/>
-          <p:cNvSpPr/>
-          <p:nvPr/>
-        </p:nvSpPr>
-        <p:spPr>
-          <a:xfrm>
-            <a:off x="4484206" y="2304288"/>
-            <a:ext cx="4572" cy="329184"/>
-          </a:xfrm>
-          <a:prstGeom prst="rect">
-            <a:avLst/>
-          </a:prstGeom>
-          <a:solidFill>
-            <a:srgbClr val="8C8C8C"/>
-          </a:solidFill>
-          <a:ln/>
-        </p:spPr>
-      </p:sp>
-      <p:sp>
-        <p:nvSpPr>
-          <p:cNvPr id="260" name="Shape 258"/>
-          <p:cNvSpPr/>
-          <p:nvPr/>
-        </p:nvSpPr>
-        <p:spPr>
-          <a:xfrm>
-            <a:off x="4542075" y="2304288"/>
-            <a:ext cx="4572" cy="329184"/>
-          </a:xfrm>
-          <a:prstGeom prst="rect">
-            <a:avLst/>
-          </a:prstGeom>
-          <a:solidFill>
-            <a:srgbClr val="8C8C8C"/>
-          </a:solidFill>
-          <a:ln/>
-        </p:spPr>
-      </p:sp>
-      <p:sp>
-        <p:nvSpPr>
-          <p:cNvPr id="261" name="Shape 259"/>
-          <p:cNvSpPr/>
-          <p:nvPr/>
-        </p:nvSpPr>
-        <p:spPr>
-          <a:xfrm>
-            <a:off x="4592657" y="2304288"/>
-            <a:ext cx="4572" cy="329184"/>
-          </a:xfrm>
-          <a:prstGeom prst="rect">
-            <a:avLst/>
-          </a:prstGeom>
-          <a:solidFill>
-            <a:srgbClr val="8C8C8C"/>
-          </a:solidFill>
-          <a:ln/>
-        </p:spPr>
-      </p:sp>
-      <p:sp>
-        <p:nvSpPr>
-          <p:cNvPr id="262" name="Shape 260"/>
-          <p:cNvSpPr/>
-          <p:nvPr/>
-        </p:nvSpPr>
-        <p:spPr>
-          <a:xfrm>
-            <a:off x="4655903" y="2304288"/>
-            <a:ext cx="4572" cy="329184"/>
-          </a:xfrm>
-          <a:prstGeom prst="rect">
-            <a:avLst/>
-          </a:prstGeom>
-          <a:solidFill>
-            <a:srgbClr val="8C8C8C"/>
-          </a:solidFill>
-          <a:ln/>
-        </p:spPr>
-      </p:sp>
-      <p:sp>
-        <p:nvSpPr>
-          <p:cNvPr id="263" name="Shape 261"/>
-          <p:cNvSpPr/>
-          <p:nvPr/>
-        </p:nvSpPr>
-        <p:spPr>
-          <a:xfrm>
-            <a:off x="4694530" y="2304288"/>
-            <a:ext cx="4572" cy="329184"/>
-          </a:xfrm>
-          <a:prstGeom prst="rect">
-            <a:avLst/>
-          </a:prstGeom>
-          <a:solidFill>
-            <a:srgbClr val="8C8C8C"/>
-          </a:solidFill>
-          <a:ln/>
-        </p:spPr>
-      </p:sp>
-      <p:sp>
-        <p:nvSpPr>
-          <p:cNvPr id="264" name="Shape 262"/>
-          <p:cNvSpPr/>
-          <p:nvPr/>
-        </p:nvSpPr>
-        <p:spPr>
-          <a:xfrm>
-            <a:off x="4752399" y="2304288"/>
-            <a:ext cx="4572" cy="329184"/>
-          </a:xfrm>
-          <a:prstGeom prst="rect">
-            <a:avLst/>
-          </a:prstGeom>
-          <a:solidFill>
-            <a:srgbClr val="8C8C8C"/>
-          </a:solidFill>
-          <a:ln/>
-        </p:spPr>
-      </p:sp>
-      <p:sp>
-        <p:nvSpPr>
-          <p:cNvPr id="265" name="Shape 263"/>
-          <p:cNvSpPr/>
-          <p:nvPr/>
-        </p:nvSpPr>
-        <p:spPr>
-          <a:xfrm>
-            <a:off x="4791025" y="2304288"/>
-            <a:ext cx="4572" cy="329184"/>
-          </a:xfrm>
-          <a:prstGeom prst="rect">
-            <a:avLst/>
-          </a:prstGeom>
-          <a:solidFill>
-            <a:srgbClr val="8C8C8C"/>
-          </a:solidFill>
-          <a:ln/>
-        </p:spPr>
-      </p:sp>
-      <p:sp>
-        <p:nvSpPr>
-          <p:cNvPr id="266" name="Shape 264"/>
-          <p:cNvSpPr/>
-          <p:nvPr/>
-        </p:nvSpPr>
-        <p:spPr>
-          <a:xfrm>
-            <a:off x="4848824" y="2304288"/>
-            <a:ext cx="4572" cy="329184"/>
-          </a:xfrm>
-          <a:prstGeom prst="rect">
-            <a:avLst/>
-          </a:prstGeom>
-          <a:solidFill>
-            <a:srgbClr val="8C8C8C"/>
-          </a:solidFill>
-          <a:ln/>
-        </p:spPr>
-      </p:sp>
-      <p:sp>
-        <p:nvSpPr>
-          <p:cNvPr id="267" name="Shape 265"/>
-          <p:cNvSpPr/>
-          <p:nvPr/>
-        </p:nvSpPr>
-        <p:spPr>
-          <a:xfrm>
-            <a:off x="4907259" y="2304288"/>
-            <a:ext cx="4572" cy="329184"/>
-          </a:xfrm>
-          <a:prstGeom prst="rect">
-            <a:avLst/>
-          </a:prstGeom>
-          <a:solidFill>
-            <a:srgbClr val="8C8C8C"/>
-          </a:solidFill>
-          <a:ln/>
-        </p:spPr>
-      </p:sp>
-      <p:sp>
-        <p:nvSpPr>
-          <p:cNvPr id="268" name="Shape 266"/>
-          <p:cNvSpPr/>
-          <p:nvPr/>
-        </p:nvSpPr>
-        <p:spPr>
-          <a:xfrm>
-            <a:off x="4965128" y="2304288"/>
-            <a:ext cx="4572" cy="329184"/>
-          </a:xfrm>
-          <a:prstGeom prst="rect">
-            <a:avLst/>
-          </a:prstGeom>
-          <a:solidFill>
-            <a:srgbClr val="8C8C8C"/>
-          </a:solidFill>
-          <a:ln/>
-        </p:spPr>
-      </p:sp>
-      <p:sp>
-        <p:nvSpPr>
-          <p:cNvPr id="269" name="Shape 267"/>
-          <p:cNvSpPr/>
-          <p:nvPr/>
-        </p:nvSpPr>
-        <p:spPr>
-          <a:xfrm>
-            <a:off x="5003754" y="2304288"/>
-            <a:ext cx="4572" cy="329184"/>
-          </a:xfrm>
-          <a:prstGeom prst="rect">
-            <a:avLst/>
-          </a:prstGeom>
-          <a:solidFill>
-            <a:srgbClr val="8C8C8C"/>
-          </a:solidFill>
-          <a:ln/>
-        </p:spPr>
-      </p:sp>
-      <p:sp>
-        <p:nvSpPr>
-          <p:cNvPr id="270" name="Shape 268"/>
-          <p:cNvSpPr/>
-          <p:nvPr/>
-        </p:nvSpPr>
-        <p:spPr>
-          <a:xfrm>
-            <a:off x="5061623" y="2304288"/>
-            <a:ext cx="4572" cy="329184"/>
-          </a:xfrm>
-          <a:prstGeom prst="rect">
-            <a:avLst/>
-          </a:prstGeom>
-          <a:solidFill>
-            <a:srgbClr val="8C8C8C"/>
-          </a:solidFill>
-          <a:ln/>
-        </p:spPr>
-      </p:sp>
-      <p:sp>
-        <p:nvSpPr>
-          <p:cNvPr id="271" name="Shape 269"/>
-          <p:cNvSpPr/>
-          <p:nvPr/>
-        </p:nvSpPr>
-        <p:spPr>
-          <a:xfrm>
-            <a:off x="5100250" y="2304288"/>
-            <a:ext cx="4572" cy="329184"/>
-          </a:xfrm>
-          <a:prstGeom prst="rect">
-            <a:avLst/>
-          </a:prstGeom>
-          <a:solidFill>
-            <a:srgbClr val="8C8C8C"/>
-          </a:solidFill>
-          <a:ln/>
-        </p:spPr>
-      </p:sp>
-      <p:sp>
-        <p:nvSpPr>
-          <p:cNvPr id="272" name="Shape 270"/>
-          <p:cNvSpPr/>
-          <p:nvPr/>
-        </p:nvSpPr>
-        <p:spPr>
-          <a:xfrm>
-            <a:off x="5177998" y="2304288"/>
-            <a:ext cx="4572" cy="329184"/>
-          </a:xfrm>
-          <a:prstGeom prst="rect">
-            <a:avLst/>
-          </a:prstGeom>
-          <a:solidFill>
-            <a:srgbClr val="8C8C8C"/>
-          </a:solidFill>
-          <a:ln/>
-        </p:spPr>
-      </p:sp>
-      <p:sp>
-        <p:nvSpPr>
-          <p:cNvPr id="273" name="Shape 271"/>
-          <p:cNvSpPr/>
-          <p:nvPr/>
-        </p:nvSpPr>
-        <p:spPr>
-          <a:xfrm>
-            <a:off x="5216695" y="2304288"/>
-            <a:ext cx="4572" cy="329184"/>
-          </a:xfrm>
-          <a:prstGeom prst="rect">
-            <a:avLst/>
-          </a:prstGeom>
-          <a:solidFill>
-            <a:srgbClr val="8C8C8C"/>
-          </a:solidFill>
-          <a:ln/>
-        </p:spPr>
-      </p:sp>
-      <p:sp>
-        <p:nvSpPr>
-          <p:cNvPr id="274" name="Shape 272"/>
-          <p:cNvSpPr/>
-          <p:nvPr/>
-        </p:nvSpPr>
-        <p:spPr>
-          <a:xfrm>
-            <a:off x="5274564" y="2304288"/>
-            <a:ext cx="4572" cy="329184"/>
-          </a:xfrm>
-          <a:prstGeom prst="rect">
-            <a:avLst/>
-          </a:prstGeom>
-          <a:solidFill>
-            <a:srgbClr val="8C8C8C"/>
-          </a:solidFill>
-          <a:ln/>
-        </p:spPr>
-      </p:sp>
-      <p:sp>
-        <p:nvSpPr>
-          <p:cNvPr id="275" name="Shape 273"/>
-          <p:cNvSpPr/>
-          <p:nvPr/>
-        </p:nvSpPr>
-        <p:spPr>
-          <a:xfrm>
-            <a:off x="5313191" y="2304288"/>
-            <a:ext cx="4572" cy="329184"/>
-          </a:xfrm>
-          <a:prstGeom prst="rect">
-            <a:avLst/>
-          </a:prstGeom>
-          <a:solidFill>
-            <a:srgbClr val="8C8C8C"/>
-          </a:solidFill>
-          <a:ln/>
-        </p:spPr>
-      </p:sp>
-      <p:sp>
-        <p:nvSpPr>
-          <p:cNvPr id="276" name="Shape 274"/>
-          <p:cNvSpPr/>
-          <p:nvPr/>
-        </p:nvSpPr>
-        <p:spPr>
-          <a:xfrm>
-            <a:off x="5371060" y="2304288"/>
-            <a:ext cx="4572" cy="329184"/>
-          </a:xfrm>
-          <a:prstGeom prst="rect">
-            <a:avLst/>
-          </a:prstGeom>
-          <a:solidFill>
-            <a:srgbClr val="8C8C8C"/>
-          </a:solidFill>
-          <a:ln/>
-        </p:spPr>
-      </p:sp>
-      <p:sp>
-        <p:nvSpPr>
-          <p:cNvPr id="277" name="Shape 275"/>
-          <p:cNvSpPr/>
-          <p:nvPr/>
-        </p:nvSpPr>
-        <p:spPr>
-          <a:xfrm>
-            <a:off x="5421289" y="2304288"/>
-            <a:ext cx="4572" cy="329184"/>
-          </a:xfrm>
-          <a:prstGeom prst="rect">
-            <a:avLst/>
-          </a:prstGeom>
-          <a:solidFill>
-            <a:srgbClr val="8C8C8C"/>
-          </a:solidFill>
-          <a:ln/>
-        </p:spPr>
-      </p:sp>
-      <p:sp>
-        <p:nvSpPr>
-          <p:cNvPr id="278" name="Shape 276"/>
-          <p:cNvSpPr/>
-          <p:nvPr/>
-        </p:nvSpPr>
-        <p:spPr>
-          <a:xfrm>
-            <a:off x="5484322" y="2304288"/>
-            <a:ext cx="4572" cy="329184"/>
-          </a:xfrm>
-          <a:prstGeom prst="rect">
-            <a:avLst/>
-          </a:prstGeom>
-          <a:solidFill>
-            <a:srgbClr val="8C8C8C"/>
-          </a:solidFill>
-          <a:ln/>
-        </p:spPr>
-      </p:sp>
-      <p:sp>
-        <p:nvSpPr>
-          <p:cNvPr id="279" name="Shape 277"/>
-          <p:cNvSpPr/>
-          <p:nvPr/>
-        </p:nvSpPr>
-        <p:spPr>
-          <a:xfrm>
-            <a:off x="5522949" y="2304288"/>
-            <a:ext cx="4572" cy="329184"/>
-          </a:xfrm>
-          <a:prstGeom prst="rect">
-            <a:avLst/>
-          </a:prstGeom>
-          <a:solidFill>
-            <a:srgbClr val="8C8C8C"/>
-          </a:solidFill>
-          <a:ln/>
-        </p:spPr>
-      </p:sp>
-      <p:sp>
-        <p:nvSpPr>
-          <p:cNvPr id="280" name="Shape 278"/>
-          <p:cNvSpPr/>
-          <p:nvPr/>
-        </p:nvSpPr>
-        <p:spPr>
-          <a:xfrm>
-            <a:off x="5580818" y="2304288"/>
-            <a:ext cx="4572" cy="329184"/>
-          </a:xfrm>
-          <a:prstGeom prst="rect">
-            <a:avLst/>
-          </a:prstGeom>
-          <a:solidFill>
-            <a:srgbClr val="8C8C8C"/>
-          </a:solidFill>
-          <a:ln/>
-        </p:spPr>
-      </p:sp>
-      <p:sp>
-        <p:nvSpPr>
-          <p:cNvPr id="281" name="Shape 279"/>
-          <p:cNvSpPr/>
-          <p:nvPr/>
-        </p:nvSpPr>
-        <p:spPr>
-          <a:xfrm>
-            <a:off x="5619515" y="2304288"/>
-            <a:ext cx="4572" cy="329184"/>
-          </a:xfrm>
-          <a:prstGeom prst="rect">
-            <a:avLst/>
-          </a:prstGeom>
-          <a:solidFill>
-            <a:srgbClr val="8C8C8C"/>
-          </a:solidFill>
-          <a:ln/>
-        </p:spPr>
-      </p:sp>
-      <p:sp>
-        <p:nvSpPr>
-          <p:cNvPr id="282" name="Shape 280"/>
-          <p:cNvSpPr/>
-          <p:nvPr/>
-        </p:nvSpPr>
-        <p:spPr>
-          <a:xfrm>
-            <a:off x="5677455" y="2304288"/>
-            <a:ext cx="4572" cy="329184"/>
-          </a:xfrm>
-          <a:prstGeom prst="rect">
-            <a:avLst/>
-          </a:prstGeom>
-          <a:solidFill>
-            <a:srgbClr val="8C8C8C"/>
-          </a:solidFill>
-          <a:ln/>
-        </p:spPr>
-      </p:sp>
-      <p:sp>
-        <p:nvSpPr>
-          <p:cNvPr id="283" name="Shape 281"/>
-          <p:cNvSpPr/>
-          <p:nvPr/>
-        </p:nvSpPr>
-        <p:spPr>
-          <a:xfrm>
-            <a:off x="5695919" y="2304288"/>
-            <a:ext cx="4572" cy="329184"/>
-          </a:xfrm>
-          <a:prstGeom prst="rect">
-            <a:avLst/>
-          </a:prstGeom>
-          <a:solidFill>
-            <a:srgbClr val="8C8C8C"/>
-          </a:solidFill>
-          <a:ln/>
-        </p:spPr>
-      </p:sp>
-      <p:sp>
-        <p:nvSpPr>
-          <p:cNvPr id="284" name="Shape 282"/>
-          <p:cNvSpPr/>
-          <p:nvPr/>
-        </p:nvSpPr>
-        <p:spPr>
-          <a:xfrm>
-            <a:off x="5709856" y="2304288"/>
-            <a:ext cx="4572" cy="329184"/>
-          </a:xfrm>
-          <a:prstGeom prst="rect">
-            <a:avLst/>
-          </a:prstGeom>
-          <a:solidFill>
-            <a:srgbClr val="8C8C8C"/>
-          </a:solidFill>
-          <a:ln/>
-        </p:spPr>
-      </p:sp>
-      <p:sp>
-        <p:nvSpPr>
-          <p:cNvPr id="285" name="Shape 283"/>
-          <p:cNvSpPr/>
-          <p:nvPr/>
-        </p:nvSpPr>
-        <p:spPr>
-          <a:xfrm>
-            <a:off x="5718557" y="2304288"/>
-            <a:ext cx="4572" cy="329184"/>
-          </a:xfrm>
-          <a:prstGeom prst="rect">
-            <a:avLst/>
-          </a:prstGeom>
-          <a:solidFill>
-            <a:srgbClr val="8C8C8C"/>
-          </a:solidFill>
-          <a:ln/>
-        </p:spPr>
-      </p:sp>
-      <p:sp>
-        <p:nvSpPr>
-          <p:cNvPr id="286" name="Shape 284"/>
-          <p:cNvSpPr/>
-          <p:nvPr/>
-        </p:nvSpPr>
-        <p:spPr>
-          <a:xfrm>
-            <a:off x="5725066" y="2304288"/>
-            <a:ext cx="9551" cy="329184"/>
-          </a:xfrm>
-          <a:prstGeom prst="rect">
-            <a:avLst/>
-          </a:prstGeom>
-          <a:solidFill>
-            <a:srgbClr val="8C8C8C"/>
-          </a:solidFill>
-          <a:ln/>
-        </p:spPr>
-      </p:sp>
-      <p:sp>
-        <p:nvSpPr>
-          <p:cNvPr id="287" name="Shape 285"/>
-          <p:cNvSpPr/>
-          <p:nvPr/>
-        </p:nvSpPr>
-        <p:spPr>
-          <a:xfrm>
-            <a:off x="5736314" y="2304288"/>
-            <a:ext cx="4572" cy="329184"/>
-          </a:xfrm>
-          <a:prstGeom prst="rect">
-            <a:avLst/>
-          </a:prstGeom>
-          <a:solidFill>
-            <a:srgbClr val="8C8C8C"/>
-          </a:solidFill>
-          <a:ln/>
-        </p:spPr>
-      </p:sp>
-      <p:sp>
-        <p:nvSpPr>
-          <p:cNvPr id="288" name="Shape 286"/>
-          <p:cNvSpPr/>
-          <p:nvPr/>
-        </p:nvSpPr>
-        <p:spPr>
-          <a:xfrm>
-            <a:off x="5741903" y="2304288"/>
-            <a:ext cx="4572" cy="329184"/>
-          </a:xfrm>
-          <a:prstGeom prst="rect">
-            <a:avLst/>
-          </a:prstGeom>
-          <a:solidFill>
-            <a:srgbClr val="8C8C8C"/>
-          </a:solidFill>
-          <a:ln/>
-        </p:spPr>
-      </p:sp>
-      <p:sp>
-        <p:nvSpPr>
-          <p:cNvPr id="289" name="Shape 287"/>
-          <p:cNvSpPr/>
-          <p:nvPr/>
-        </p:nvSpPr>
-        <p:spPr>
-          <a:xfrm>
-            <a:off x="5745369" y="2304288"/>
-            <a:ext cx="4572" cy="329184"/>
-          </a:xfrm>
-          <a:prstGeom prst="rect">
-            <a:avLst/>
-          </a:prstGeom>
-          <a:solidFill>
-            <a:srgbClr val="8C8C8C"/>
-          </a:solidFill>
-          <a:ln/>
-        </p:spPr>
-      </p:sp>
-      <p:sp>
-        <p:nvSpPr>
-          <p:cNvPr id="290" name="Shape 288"/>
-          <p:cNvSpPr/>
-          <p:nvPr/>
-        </p:nvSpPr>
-        <p:spPr>
-          <a:xfrm>
-            <a:off x="5752161" y="2304288"/>
-            <a:ext cx="4572" cy="329184"/>
-          </a:xfrm>
-          <a:prstGeom prst="rect">
-            <a:avLst/>
-          </a:prstGeom>
-          <a:solidFill>
-            <a:srgbClr val="8C8C8C"/>
-          </a:solidFill>
-          <a:ln/>
-        </p:spPr>
-      </p:sp>
-      <p:sp>
-        <p:nvSpPr>
-          <p:cNvPr id="291" name="Shape 289"/>
-          <p:cNvSpPr/>
-          <p:nvPr/>
-        </p:nvSpPr>
-        <p:spPr>
-          <a:xfrm>
-            <a:off x="5757750" y="2304288"/>
-            <a:ext cx="4572" cy="329184"/>
-          </a:xfrm>
-          <a:prstGeom prst="rect">
-            <a:avLst/>
-          </a:prstGeom>
-          <a:solidFill>
-            <a:srgbClr val="8C8C8C"/>
-          </a:solidFill>
-          <a:ln/>
-        </p:spPr>
-      </p:sp>
-      <p:sp>
-        <p:nvSpPr>
-          <p:cNvPr id="292" name="Shape 290"/>
-          <p:cNvSpPr/>
-          <p:nvPr/>
-        </p:nvSpPr>
-        <p:spPr>
-          <a:xfrm>
-            <a:off x="5761216" y="2304288"/>
-            <a:ext cx="4572" cy="329184"/>
-          </a:xfrm>
-          <a:prstGeom prst="rect">
-            <a:avLst/>
-          </a:prstGeom>
-          <a:solidFill>
-            <a:srgbClr val="8C8C8C"/>
-          </a:solidFill>
-          <a:ln/>
-        </p:spPr>
-      </p:sp>
-      <p:sp>
-        <p:nvSpPr>
-          <p:cNvPr id="293" name="Shape 291"/>
-          <p:cNvSpPr/>
-          <p:nvPr/>
-        </p:nvSpPr>
-        <p:spPr>
-          <a:xfrm>
-            <a:off x="5768008" y="2304288"/>
-            <a:ext cx="4572" cy="329184"/>
-          </a:xfrm>
-          <a:prstGeom prst="rect">
-            <a:avLst/>
-          </a:prstGeom>
-          <a:solidFill>
-            <a:srgbClr val="8C8C8C"/>
-          </a:solidFill>
-          <a:ln/>
-        </p:spPr>
-      </p:sp>
-      <p:sp>
-        <p:nvSpPr>
-          <p:cNvPr id="294" name="Shape 292"/>
-          <p:cNvSpPr/>
-          <p:nvPr/>
-        </p:nvSpPr>
-        <p:spPr>
-          <a:xfrm>
-            <a:off x="5775860" y="2304288"/>
-            <a:ext cx="4572" cy="329184"/>
-          </a:xfrm>
-          <a:prstGeom prst="rect">
-            <a:avLst/>
-          </a:prstGeom>
-          <a:solidFill>
-            <a:srgbClr val="8C8C8C"/>
-          </a:solidFill>
-          <a:ln/>
-        </p:spPr>
-      </p:sp>
-      <p:sp>
-        <p:nvSpPr>
-          <p:cNvPr id="295" name="Shape 293"/>
-          <p:cNvSpPr/>
-          <p:nvPr/>
-        </p:nvSpPr>
-        <p:spPr>
-          <a:xfrm>
-            <a:off x="5781095" y="2304288"/>
-            <a:ext cx="4572" cy="329184"/>
-          </a:xfrm>
-          <a:prstGeom prst="rect">
-            <a:avLst/>
-          </a:prstGeom>
-          <a:solidFill>
-            <a:srgbClr val="8C8C8C"/>
-          </a:solidFill>
-          <a:ln/>
-        </p:spPr>
-      </p:sp>
-      <p:sp>
-        <p:nvSpPr>
-          <p:cNvPr id="296" name="Shape 294"/>
-          <p:cNvSpPr/>
-          <p:nvPr/>
-        </p:nvSpPr>
-        <p:spPr>
-          <a:xfrm>
-            <a:off x="5802885" y="2304288"/>
-            <a:ext cx="4572" cy="329184"/>
-          </a:xfrm>
-          <a:prstGeom prst="rect">
-            <a:avLst/>
-          </a:prstGeom>
-          <a:solidFill>
-            <a:srgbClr val="8C8C8C"/>
-          </a:solidFill>
-          <a:ln/>
-        </p:spPr>
-      </p:sp>
-      <p:sp>
-        <p:nvSpPr>
-          <p:cNvPr id="297" name="Shape 295"/>
-          <p:cNvSpPr/>
-          <p:nvPr/>
-        </p:nvSpPr>
-        <p:spPr>
-          <a:xfrm>
-            <a:off x="5811020" y="2304288"/>
-            <a:ext cx="4572" cy="329184"/>
-          </a:xfrm>
-          <a:prstGeom prst="rect">
-            <a:avLst/>
-          </a:prstGeom>
-          <a:solidFill>
-            <a:srgbClr val="8C8C8C"/>
-          </a:solidFill>
-          <a:ln/>
-        </p:spPr>
-      </p:sp>
-      <p:sp>
-        <p:nvSpPr>
-          <p:cNvPr id="298" name="Shape 296"/>
-          <p:cNvSpPr/>
-          <p:nvPr/>
-        </p:nvSpPr>
-        <p:spPr>
-          <a:xfrm>
-            <a:off x="5816468" y="2304288"/>
-            <a:ext cx="4572" cy="329184"/>
-          </a:xfrm>
-          <a:prstGeom prst="rect">
-            <a:avLst/>
-          </a:prstGeom>
-          <a:solidFill>
-            <a:srgbClr val="8C8C8C"/>
-          </a:solidFill>
-          <a:ln/>
-        </p:spPr>
-      </p:sp>
-      <p:sp>
-        <p:nvSpPr>
-          <p:cNvPr id="299" name="Shape 297"/>
-          <p:cNvSpPr/>
-          <p:nvPr/>
-        </p:nvSpPr>
-        <p:spPr>
-          <a:xfrm>
-            <a:off x="5827362" y="2304288"/>
-            <a:ext cx="4572" cy="329184"/>
-          </a:xfrm>
-          <a:prstGeom prst="rect">
-            <a:avLst/>
-          </a:prstGeom>
-          <a:solidFill>
-            <a:srgbClr val="8C8C8C"/>
-          </a:solidFill>
-          <a:ln/>
-        </p:spPr>
-      </p:sp>
-      <p:sp>
-        <p:nvSpPr>
-          <p:cNvPr id="300" name="Shape 298"/>
-          <p:cNvSpPr/>
-          <p:nvPr/>
-        </p:nvSpPr>
-        <p:spPr>
-          <a:xfrm>
-            <a:off x="5835923" y="2304288"/>
-            <a:ext cx="4572" cy="329184"/>
-          </a:xfrm>
-          <a:prstGeom prst="rect">
-            <a:avLst/>
-          </a:prstGeom>
-          <a:solidFill>
-            <a:srgbClr val="8C8C8C"/>
-          </a:solidFill>
-          <a:ln/>
-        </p:spPr>
-      </p:sp>
-      <p:sp>
-        <p:nvSpPr>
-          <p:cNvPr id="301" name="Shape 299"/>
-          <p:cNvSpPr/>
-          <p:nvPr/>
-        </p:nvSpPr>
-        <p:spPr>
-          <a:xfrm>
-            <a:off x="5841299" y="2304288"/>
-            <a:ext cx="4572" cy="329184"/>
-          </a:xfrm>
-          <a:prstGeom prst="rect">
-            <a:avLst/>
-          </a:prstGeom>
-          <a:solidFill>
-            <a:srgbClr val="8C8C8C"/>
-          </a:solidFill>
-          <a:ln/>
-        </p:spPr>
-      </p:sp>
-      <p:sp>
-        <p:nvSpPr>
-          <p:cNvPr id="302" name="Shape 300"/>
-          <p:cNvSpPr/>
-          <p:nvPr/>
-        </p:nvSpPr>
-        <p:spPr>
-          <a:xfrm>
-            <a:off x="5848161" y="2304288"/>
-            <a:ext cx="4572" cy="329184"/>
-          </a:xfrm>
-          <a:prstGeom prst="rect">
-            <a:avLst/>
-          </a:prstGeom>
-          <a:solidFill>
-            <a:srgbClr val="8C8C8C"/>
-          </a:solidFill>
-          <a:ln/>
-        </p:spPr>
-      </p:sp>
-      <p:sp>
-        <p:nvSpPr>
-          <p:cNvPr id="303" name="Shape 301"/>
-          <p:cNvSpPr/>
-          <p:nvPr/>
-        </p:nvSpPr>
-        <p:spPr>
-          <a:xfrm>
-            <a:off x="5853679" y="2304288"/>
-            <a:ext cx="4572" cy="329184"/>
-          </a:xfrm>
-          <a:prstGeom prst="rect">
-            <a:avLst/>
-          </a:prstGeom>
-          <a:solidFill>
-            <a:srgbClr val="8C8C8C"/>
-          </a:solidFill>
-          <a:ln/>
-        </p:spPr>
-      </p:sp>
-      <p:sp>
-        <p:nvSpPr>
-          <p:cNvPr id="304" name="Shape 302"/>
-          <p:cNvSpPr/>
-          <p:nvPr/>
-        </p:nvSpPr>
-        <p:spPr>
-          <a:xfrm>
-            <a:off x="5857075" y="2304288"/>
-            <a:ext cx="4572" cy="329184"/>
-          </a:xfrm>
-          <a:prstGeom prst="rect">
-            <a:avLst/>
-          </a:prstGeom>
-          <a:solidFill>
-            <a:srgbClr val="8C8C8C"/>
-          </a:solidFill>
-          <a:ln/>
-        </p:spPr>
-      </p:sp>
-      <p:sp>
-        <p:nvSpPr>
-          <p:cNvPr id="305" name="Shape 303"/>
-          <p:cNvSpPr/>
-          <p:nvPr/>
-        </p:nvSpPr>
-        <p:spPr>
-          <a:xfrm>
-            <a:off x="5863937" y="2304288"/>
-            <a:ext cx="4572" cy="329184"/>
-          </a:xfrm>
-          <a:prstGeom prst="rect">
-            <a:avLst/>
-          </a:prstGeom>
-          <a:solidFill>
-            <a:srgbClr val="8C8C8C"/>
-          </a:solidFill>
-          <a:ln/>
-        </p:spPr>
-      </p:sp>
-      <p:sp>
-        <p:nvSpPr>
-          <p:cNvPr id="306" name="Shape 304"/>
-          <p:cNvSpPr/>
-          <p:nvPr/>
-        </p:nvSpPr>
-        <p:spPr>
-          <a:xfrm>
-            <a:off x="5871790" y="2304288"/>
-            <a:ext cx="4572" cy="329184"/>
-          </a:xfrm>
-          <a:prstGeom prst="rect">
-            <a:avLst/>
-          </a:prstGeom>
-          <a:solidFill>
-            <a:srgbClr val="8C8C8C"/>
-          </a:solidFill>
-          <a:ln/>
-        </p:spPr>
-      </p:sp>
-      <p:sp>
-        <p:nvSpPr>
-          <p:cNvPr id="307" name="Shape 305"/>
-          <p:cNvSpPr/>
-          <p:nvPr/>
-        </p:nvSpPr>
-        <p:spPr>
-          <a:xfrm>
-            <a:off x="5877025" y="2304288"/>
-            <a:ext cx="4572" cy="329184"/>
-          </a:xfrm>
-          <a:prstGeom prst="rect">
-            <a:avLst/>
-          </a:prstGeom>
-          <a:solidFill>
-            <a:srgbClr val="8C8C8C"/>
-          </a:solidFill>
-          <a:ln/>
-        </p:spPr>
-      </p:sp>
-      <p:sp>
-        <p:nvSpPr>
-          <p:cNvPr id="308" name="Shape 306"/>
-          <p:cNvSpPr/>
-          <p:nvPr/>
-        </p:nvSpPr>
-        <p:spPr>
-          <a:xfrm>
-            <a:off x="5883746" y="2304288"/>
-            <a:ext cx="4572" cy="329184"/>
-          </a:xfrm>
-          <a:prstGeom prst="rect">
-            <a:avLst/>
-          </a:prstGeom>
-          <a:solidFill>
-            <a:srgbClr val="8C8C8C"/>
-          </a:solidFill>
-          <a:ln/>
-        </p:spPr>
-      </p:sp>
-      <p:sp>
-        <p:nvSpPr>
-          <p:cNvPr id="309" name="Shape 307"/>
-          <p:cNvSpPr/>
-          <p:nvPr/>
-        </p:nvSpPr>
-        <p:spPr>
-          <a:xfrm>
-            <a:off x="5904050" y="2304288"/>
-            <a:ext cx="4572" cy="329184"/>
-          </a:xfrm>
-          <a:prstGeom prst="rect">
-            <a:avLst/>
-          </a:prstGeom>
-          <a:solidFill>
-            <a:srgbClr val="8C8C8C"/>
-          </a:solidFill>
-          <a:ln/>
-        </p:spPr>
-      </p:sp>
-      <p:sp>
-        <p:nvSpPr>
-          <p:cNvPr id="310" name="Shape 308"/>
-          <p:cNvSpPr/>
-          <p:nvPr/>
-        </p:nvSpPr>
-        <p:spPr>
-          <a:xfrm>
-            <a:off x="5909992" y="2304288"/>
-            <a:ext cx="4572" cy="329184"/>
-          </a:xfrm>
-          <a:prstGeom prst="rect">
-            <a:avLst/>
-          </a:prstGeom>
-          <a:solidFill>
-            <a:srgbClr val="8C8C8C"/>
-          </a:solidFill>
-          <a:ln/>
-        </p:spPr>
-      </p:sp>
-      <p:sp>
-        <p:nvSpPr>
-          <p:cNvPr id="311" name="Shape 309"/>
-          <p:cNvSpPr/>
-          <p:nvPr/>
-        </p:nvSpPr>
-        <p:spPr>
-          <a:xfrm>
-            <a:off x="5921170" y="2304288"/>
-            <a:ext cx="4572" cy="329184"/>
-          </a:xfrm>
-          <a:prstGeom prst="rect">
-            <a:avLst/>
-          </a:prstGeom>
-          <a:solidFill>
-            <a:srgbClr val="8C8C8C"/>
-          </a:solidFill>
-          <a:ln/>
-        </p:spPr>
-      </p:sp>
-      <p:sp>
-        <p:nvSpPr>
-          <p:cNvPr id="312" name="Shape 310"/>
-          <p:cNvSpPr/>
-          <p:nvPr/>
-        </p:nvSpPr>
-        <p:spPr>
-          <a:xfrm>
-            <a:off x="5929730" y="2304288"/>
-            <a:ext cx="4572" cy="329184"/>
-          </a:xfrm>
-          <a:prstGeom prst="rect">
-            <a:avLst/>
-          </a:prstGeom>
-          <a:solidFill>
-            <a:srgbClr val="8C8C8C"/>
-          </a:solidFill>
-          <a:ln/>
-        </p:spPr>
-      </p:sp>
-      <p:sp>
-        <p:nvSpPr>
-          <p:cNvPr id="313" name="Shape 311"/>
-          <p:cNvSpPr/>
-          <p:nvPr/>
-        </p:nvSpPr>
-        <p:spPr>
-          <a:xfrm>
-            <a:off x="5935885" y="2304288"/>
-            <a:ext cx="4572" cy="329184"/>
-          </a:xfrm>
-          <a:prstGeom prst="rect">
-            <a:avLst/>
-          </a:prstGeom>
-          <a:solidFill>
-            <a:srgbClr val="8C8C8C"/>
-          </a:solidFill>
-          <a:ln/>
-        </p:spPr>
-      </p:sp>
-      <p:sp>
-        <p:nvSpPr>
-          <p:cNvPr id="314" name="Shape 312"/>
-          <p:cNvSpPr/>
-          <p:nvPr/>
-        </p:nvSpPr>
-        <p:spPr>
-          <a:xfrm>
-            <a:off x="5944728" y="2304288"/>
-            <a:ext cx="4572" cy="329184"/>
-          </a:xfrm>
-          <a:prstGeom prst="rect">
-            <a:avLst/>
-          </a:prstGeom>
-          <a:solidFill>
-            <a:srgbClr val="8C8C8C"/>
-          </a:solidFill>
-          <a:ln/>
-        </p:spPr>
-      </p:sp>
-      <p:sp>
-        <p:nvSpPr>
-          <p:cNvPr id="315" name="Shape 313"/>
-          <p:cNvSpPr/>
-          <p:nvPr/>
-        </p:nvSpPr>
-        <p:spPr>
-          <a:xfrm>
-            <a:off x="5950246" y="2304288"/>
-            <a:ext cx="4572" cy="329184"/>
-          </a:xfrm>
-          <a:prstGeom prst="rect">
-            <a:avLst/>
-          </a:prstGeom>
-          <a:solidFill>
-            <a:srgbClr val="8C8C8C"/>
-          </a:solidFill>
-          <a:ln/>
-        </p:spPr>
-      </p:sp>
-      <p:sp>
-        <p:nvSpPr>
-          <p:cNvPr id="316" name="Shape 314"/>
-          <p:cNvSpPr/>
-          <p:nvPr/>
-        </p:nvSpPr>
-        <p:spPr>
-          <a:xfrm>
-            <a:off x="5953712" y="2304288"/>
-            <a:ext cx="4572" cy="329184"/>
-          </a:xfrm>
-          <a:prstGeom prst="rect">
-            <a:avLst/>
-          </a:prstGeom>
-          <a:solidFill>
-            <a:srgbClr val="8C8C8C"/>
-          </a:solidFill>
-          <a:ln/>
-        </p:spPr>
-      </p:sp>
-      <p:sp>
-        <p:nvSpPr>
-          <p:cNvPr id="317" name="Shape 315"/>
-          <p:cNvSpPr/>
-          <p:nvPr/>
-        </p:nvSpPr>
-        <p:spPr>
-          <a:xfrm>
-            <a:off x="5960504" y="2304288"/>
-            <a:ext cx="4572" cy="329184"/>
-          </a:xfrm>
-          <a:prstGeom prst="rect">
-            <a:avLst/>
-          </a:prstGeom>
-          <a:solidFill>
-            <a:srgbClr val="8C8C8C"/>
-          </a:solidFill>
-          <a:ln/>
-        </p:spPr>
-      </p:sp>
-      <p:sp>
-        <p:nvSpPr>
-          <p:cNvPr id="318" name="Shape 316"/>
-          <p:cNvSpPr/>
-          <p:nvPr/>
-        </p:nvSpPr>
-        <p:spPr>
-          <a:xfrm>
-            <a:off x="5968356" y="2304288"/>
-            <a:ext cx="4572" cy="329184"/>
-          </a:xfrm>
-          <a:prstGeom prst="rect">
-            <a:avLst/>
-          </a:prstGeom>
-          <a:solidFill>
-            <a:srgbClr val="8C8C8C"/>
-          </a:solidFill>
-          <a:ln/>
-        </p:spPr>
-      </p:sp>
-      <p:sp>
-        <p:nvSpPr>
-          <p:cNvPr id="319" name="Shape 317"/>
-          <p:cNvSpPr/>
-          <p:nvPr/>
-        </p:nvSpPr>
-        <p:spPr>
-          <a:xfrm>
-            <a:off x="5973591" y="2304288"/>
-            <a:ext cx="4572" cy="329184"/>
-          </a:xfrm>
-          <a:prstGeom prst="rect">
-            <a:avLst/>
-          </a:prstGeom>
-          <a:solidFill>
-            <a:srgbClr val="8C8C8C"/>
-          </a:solidFill>
-          <a:ln/>
-        </p:spPr>
-      </p:sp>
-      <p:sp>
-        <p:nvSpPr>
-          <p:cNvPr id="320" name="Shape 318"/>
-          <p:cNvSpPr/>
-          <p:nvPr/>
-        </p:nvSpPr>
-        <p:spPr>
-          <a:xfrm>
-            <a:off x="5980312" y="2304288"/>
-            <a:ext cx="4572" cy="329184"/>
-          </a:xfrm>
-          <a:prstGeom prst="rect">
-            <a:avLst/>
-          </a:prstGeom>
-          <a:solidFill>
-            <a:srgbClr val="8C8C8C"/>
-          </a:solidFill>
-          <a:ln/>
-        </p:spPr>
-      </p:sp>
-      <p:sp>
-        <p:nvSpPr>
-          <p:cNvPr id="321" name="Shape 319"/>
-          <p:cNvSpPr/>
-          <p:nvPr/>
-        </p:nvSpPr>
-        <p:spPr>
-          <a:xfrm>
-            <a:off x="5985901" y="2304288"/>
-            <a:ext cx="4572" cy="329184"/>
-          </a:xfrm>
-          <a:prstGeom prst="rect">
-            <a:avLst/>
-          </a:prstGeom>
-          <a:solidFill>
-            <a:srgbClr val="8C8C8C"/>
-          </a:solidFill>
-          <a:ln/>
-        </p:spPr>
-      </p:sp>
-      <p:sp>
-        <p:nvSpPr>
-          <p:cNvPr id="322" name="Shape 320"/>
-          <p:cNvSpPr/>
-          <p:nvPr/>
-        </p:nvSpPr>
-        <p:spPr>
-          <a:xfrm>
-            <a:off x="5989297" y="2304288"/>
-            <a:ext cx="4572" cy="329184"/>
-          </a:xfrm>
-          <a:prstGeom prst="rect">
-            <a:avLst/>
-          </a:prstGeom>
-          <a:solidFill>
-            <a:srgbClr val="8C8C8C"/>
-          </a:solidFill>
-          <a:ln/>
-        </p:spPr>
-      </p:sp>
-      <p:sp>
-        <p:nvSpPr>
-          <p:cNvPr id="323" name="Shape 321"/>
-          <p:cNvSpPr/>
-          <p:nvPr/>
-        </p:nvSpPr>
-        <p:spPr>
-          <a:xfrm>
-            <a:off x="6011086" y="2304288"/>
-            <a:ext cx="4572" cy="329184"/>
-          </a:xfrm>
-          <a:prstGeom prst="rect">
-            <a:avLst/>
-          </a:prstGeom>
-          <a:solidFill>
-            <a:srgbClr val="8C8C8C"/>
-          </a:solidFill>
-          <a:ln/>
-        </p:spPr>
-      </p:sp>
-      <p:sp>
-        <p:nvSpPr>
-          <p:cNvPr id="324" name="Shape 322"/>
-          <p:cNvSpPr/>
-          <p:nvPr/>
-        </p:nvSpPr>
-        <p:spPr>
-          <a:xfrm>
-            <a:off x="6019363" y="2304288"/>
-            <a:ext cx="4572" cy="329184"/>
-          </a:xfrm>
-          <a:prstGeom prst="rect">
-            <a:avLst/>
-          </a:prstGeom>
-          <a:solidFill>
-            <a:srgbClr val="8C8C8C"/>
-          </a:solidFill>
-          <a:ln/>
-        </p:spPr>
-      </p:sp>
-      <p:sp>
-        <p:nvSpPr>
-          <p:cNvPr id="325" name="Shape 323"/>
-          <p:cNvSpPr/>
-          <p:nvPr/>
-        </p:nvSpPr>
-        <p:spPr>
-          <a:xfrm>
-            <a:off x="6024952" y="2304288"/>
-            <a:ext cx="4572" cy="329184"/>
-          </a:xfrm>
-          <a:prstGeom prst="rect">
-            <a:avLst/>
-          </a:prstGeom>
-          <a:solidFill>
-            <a:srgbClr val="8C8C8C"/>
-          </a:solidFill>
-          <a:ln/>
-        </p:spPr>
-      </p:sp>
-      <p:sp>
-        <p:nvSpPr>
-          <p:cNvPr id="326" name="Shape 324"/>
-          <p:cNvSpPr/>
-          <p:nvPr/>
-        </p:nvSpPr>
-        <p:spPr>
-          <a:xfrm>
-            <a:off x="6035917" y="2304288"/>
-            <a:ext cx="4572" cy="329184"/>
-          </a:xfrm>
-          <a:prstGeom prst="rect">
-            <a:avLst/>
-          </a:prstGeom>
-          <a:solidFill>
-            <a:srgbClr val="8C8C8C"/>
-          </a:solidFill>
-          <a:ln/>
-        </p:spPr>
-      </p:sp>
-      <p:sp>
-        <p:nvSpPr>
-          <p:cNvPr id="327" name="Shape 325"/>
-          <p:cNvSpPr/>
-          <p:nvPr/>
-        </p:nvSpPr>
-        <p:spPr>
-          <a:xfrm>
-            <a:off x="6044761" y="2304288"/>
-            <a:ext cx="4572" cy="329184"/>
-          </a:xfrm>
-          <a:prstGeom prst="rect">
-            <a:avLst/>
-          </a:prstGeom>
-          <a:solidFill>
-            <a:srgbClr val="8C8C8C"/>
-          </a:solidFill>
-          <a:ln/>
-        </p:spPr>
-      </p:sp>
-      <p:sp>
-        <p:nvSpPr>
-          <p:cNvPr id="328" name="Shape 326"/>
-          <p:cNvSpPr/>
-          <p:nvPr/>
-        </p:nvSpPr>
-        <p:spPr>
-          <a:xfrm>
-            <a:off x="6048793" y="2304288"/>
-            <a:ext cx="4572" cy="329184"/>
-          </a:xfrm>
-          <a:prstGeom prst="rect">
-            <a:avLst/>
-          </a:prstGeom>
-          <a:solidFill>
-            <a:srgbClr val="8C8C8C"/>
-          </a:solidFill>
-          <a:ln/>
-        </p:spPr>
-      </p:sp>
-      <p:sp>
-        <p:nvSpPr>
-          <p:cNvPr id="329" name="Shape 327"/>
-          <p:cNvSpPr/>
-          <p:nvPr/>
-        </p:nvSpPr>
-        <p:spPr>
-          <a:xfrm>
-            <a:off x="6055655" y="2304288"/>
-            <a:ext cx="4572" cy="329184"/>
-          </a:xfrm>
-          <a:prstGeom prst="rect">
-            <a:avLst/>
-          </a:prstGeom>
-          <a:solidFill>
-            <a:srgbClr val="8C8C8C"/>
-          </a:solidFill>
-          <a:ln/>
-        </p:spPr>
-      </p:sp>
-      <p:sp>
-        <p:nvSpPr>
-          <p:cNvPr id="330" name="Shape 328"/>
-          <p:cNvSpPr/>
-          <p:nvPr/>
-        </p:nvSpPr>
-        <p:spPr>
-          <a:xfrm>
-            <a:off x="6063579" y="2304288"/>
-            <a:ext cx="4572" cy="329184"/>
-          </a:xfrm>
-          <a:prstGeom prst="rect">
-            <a:avLst/>
-          </a:prstGeom>
-          <a:solidFill>
-            <a:srgbClr val="8C8C8C"/>
-          </a:solidFill>
-          <a:ln/>
-        </p:spPr>
-      </p:sp>
-      <p:sp>
-        <p:nvSpPr>
-          <p:cNvPr id="331" name="Shape 329"/>
-          <p:cNvSpPr/>
-          <p:nvPr/>
-        </p:nvSpPr>
-        <p:spPr>
-          <a:xfrm>
-            <a:off x="6068743" y="2304288"/>
-            <a:ext cx="4572" cy="329184"/>
-          </a:xfrm>
-          <a:prstGeom prst="rect">
-            <a:avLst/>
-          </a:prstGeom>
-          <a:solidFill>
-            <a:srgbClr val="8C8C8C"/>
-          </a:solidFill>
-          <a:ln/>
-        </p:spPr>
-      </p:sp>
-      <p:sp>
-        <p:nvSpPr>
-          <p:cNvPr id="332" name="Shape 330"/>
-          <p:cNvSpPr/>
-          <p:nvPr/>
-        </p:nvSpPr>
-        <p:spPr>
-          <a:xfrm>
-            <a:off x="6075464" y="2304288"/>
-            <a:ext cx="4572" cy="329184"/>
-          </a:xfrm>
-          <a:prstGeom prst="rect">
-            <a:avLst/>
-          </a:prstGeom>
-          <a:solidFill>
-            <a:srgbClr val="8C8C8C"/>
-          </a:solidFill>
-          <a:ln/>
-        </p:spPr>
-      </p:sp>
-      <p:sp>
-        <p:nvSpPr>
-          <p:cNvPr id="333" name="Shape 331"/>
-          <p:cNvSpPr/>
-          <p:nvPr/>
-        </p:nvSpPr>
-        <p:spPr>
-          <a:xfrm>
-            <a:off x="6080982" y="2304288"/>
-            <a:ext cx="4572" cy="329184"/>
-          </a:xfrm>
-          <a:prstGeom prst="rect">
-            <a:avLst/>
-          </a:prstGeom>
-          <a:solidFill>
-            <a:srgbClr val="8C8C8C"/>
-          </a:solidFill>
-          <a:ln/>
-        </p:spPr>
-      </p:sp>
-      <p:sp>
-        <p:nvSpPr>
-          <p:cNvPr id="334" name="Shape 332"/>
-          <p:cNvSpPr/>
-          <p:nvPr/>
-        </p:nvSpPr>
-        <p:spPr>
-          <a:xfrm>
-            <a:off x="6084448" y="2304288"/>
-            <a:ext cx="4572" cy="329184"/>
-          </a:xfrm>
-          <a:prstGeom prst="rect">
-            <a:avLst/>
-          </a:prstGeom>
-          <a:solidFill>
-            <a:srgbClr val="8C8C8C"/>
-          </a:solidFill>
-          <a:ln/>
-        </p:spPr>
-      </p:sp>
-      <p:sp>
-        <p:nvSpPr>
-          <p:cNvPr id="335" name="Shape 333"/>
-          <p:cNvSpPr/>
-          <p:nvPr/>
-        </p:nvSpPr>
-        <p:spPr>
-          <a:xfrm>
-            <a:off x="6099729" y="2304288"/>
-            <a:ext cx="4572" cy="329184"/>
-          </a:xfrm>
-          <a:prstGeom prst="rect">
-            <a:avLst/>
-          </a:prstGeom>
-          <a:solidFill>
-            <a:srgbClr val="8C8C8C"/>
-          </a:solidFill>
-          <a:ln/>
-        </p:spPr>
-      </p:sp>
-      <p:sp>
-        <p:nvSpPr>
-          <p:cNvPr id="336" name="Shape 334"/>
-          <p:cNvSpPr/>
-          <p:nvPr/>
-        </p:nvSpPr>
-        <p:spPr>
-          <a:xfrm>
-            <a:off x="6110411" y="2304288"/>
-            <a:ext cx="4572" cy="329184"/>
-          </a:xfrm>
-          <a:prstGeom prst="rect">
-            <a:avLst/>
-          </a:prstGeom>
-          <a:solidFill>
-            <a:srgbClr val="8C8C8C"/>
-          </a:solidFill>
-          <a:ln/>
-        </p:spPr>
-      </p:sp>
-      <p:sp>
-        <p:nvSpPr>
-          <p:cNvPr id="337" name="Shape 335"/>
-          <p:cNvSpPr/>
-          <p:nvPr/>
-        </p:nvSpPr>
-        <p:spPr>
-          <a:xfrm>
-            <a:off x="6117981" y="2304288"/>
-            <a:ext cx="4572" cy="329184"/>
-          </a:xfrm>
-          <a:prstGeom prst="rect">
-            <a:avLst/>
-          </a:prstGeom>
-          <a:solidFill>
-            <a:srgbClr val="8C8C8C"/>
-          </a:solidFill>
-          <a:ln/>
-        </p:spPr>
-      </p:sp>
-      <p:sp>
-        <p:nvSpPr>
-          <p:cNvPr id="338" name="Shape 336"/>
-          <p:cNvSpPr/>
-          <p:nvPr/>
-        </p:nvSpPr>
-        <p:spPr>
-          <a:xfrm>
-            <a:off x="6127532" y="2304288"/>
-            <a:ext cx="4572" cy="329184"/>
-          </a:xfrm>
-          <a:prstGeom prst="rect">
-            <a:avLst/>
-          </a:prstGeom>
-          <a:solidFill>
-            <a:srgbClr val="8C8C8C"/>
-          </a:solidFill>
-          <a:ln/>
-        </p:spPr>
-      </p:sp>
-      <p:sp>
-        <p:nvSpPr>
-          <p:cNvPr id="339" name="Shape 337"/>
-          <p:cNvSpPr/>
-          <p:nvPr/>
-        </p:nvSpPr>
-        <p:spPr>
-          <a:xfrm>
-            <a:off x="6135809" y="2304288"/>
-            <a:ext cx="4572" cy="329184"/>
-          </a:xfrm>
-          <a:prstGeom prst="rect">
-            <a:avLst/>
-          </a:prstGeom>
-          <a:solidFill>
-            <a:srgbClr val="8C8C8C"/>
-          </a:solidFill>
-          <a:ln/>
-        </p:spPr>
-      </p:sp>
-      <p:sp>
-        <p:nvSpPr>
-          <p:cNvPr id="340" name="Shape 338"/>
-          <p:cNvSpPr/>
-          <p:nvPr/>
-        </p:nvSpPr>
-        <p:spPr>
-          <a:xfrm>
-            <a:off x="6140761" y="2304288"/>
-            <a:ext cx="4572" cy="329184"/>
-          </a:xfrm>
-          <a:prstGeom prst="rect">
-            <a:avLst/>
-          </a:prstGeom>
-          <a:solidFill>
-            <a:srgbClr val="8C8C8C"/>
-          </a:solidFill>
-          <a:ln/>
-        </p:spPr>
-      </p:sp>
-      <p:sp>
-        <p:nvSpPr>
-          <p:cNvPr id="341" name="Shape 339"/>
-          <p:cNvSpPr/>
-          <p:nvPr/>
-        </p:nvSpPr>
-        <p:spPr>
-          <a:xfrm>
-            <a:off x="6148331" y="2304288"/>
-            <a:ext cx="4572" cy="329184"/>
-          </a:xfrm>
-          <a:prstGeom prst="rect">
-            <a:avLst/>
-          </a:prstGeom>
-          <a:solidFill>
-            <a:srgbClr val="8C8C8C"/>
-          </a:solidFill>
-          <a:ln/>
-        </p:spPr>
-      </p:sp>
-      <p:sp>
-        <p:nvSpPr>
-          <p:cNvPr id="342" name="Shape 340"/>
-          <p:cNvSpPr/>
-          <p:nvPr/>
-        </p:nvSpPr>
-        <p:spPr>
-          <a:xfrm>
-            <a:off x="6155688" y="2304288"/>
-            <a:ext cx="4572" cy="329184"/>
-          </a:xfrm>
-          <a:prstGeom prst="rect">
-            <a:avLst/>
-          </a:prstGeom>
-          <a:solidFill>
-            <a:srgbClr val="8C8C8C"/>
-          </a:solidFill>
-          <a:ln/>
-        </p:spPr>
-      </p:sp>
-      <p:sp>
-        <p:nvSpPr>
-          <p:cNvPr id="343" name="Shape 341"/>
-          <p:cNvSpPr/>
-          <p:nvPr/>
-        </p:nvSpPr>
-        <p:spPr>
-          <a:xfrm>
-            <a:off x="6160569" y="2304288"/>
-            <a:ext cx="4572" cy="329184"/>
-          </a:xfrm>
-          <a:prstGeom prst="rect">
-            <a:avLst/>
-          </a:prstGeom>
-          <a:solidFill>
-            <a:srgbClr val="8C8C8C"/>
-          </a:solidFill>
-          <a:ln/>
-        </p:spPr>
-      </p:sp>
-      <p:sp>
-        <p:nvSpPr>
-          <p:cNvPr id="344" name="Shape 342"/>
-          <p:cNvSpPr/>
-          <p:nvPr/>
-        </p:nvSpPr>
-        <p:spPr>
-          <a:xfrm>
-            <a:off x="6167078" y="2304288"/>
-            <a:ext cx="4572" cy="329184"/>
-          </a:xfrm>
-          <a:prstGeom prst="rect">
-            <a:avLst/>
-          </a:prstGeom>
-          <a:solidFill>
-            <a:srgbClr val="8C8C8C"/>
-          </a:solidFill>
-          <a:ln/>
-        </p:spPr>
-      </p:sp>
-      <p:sp>
-        <p:nvSpPr>
-          <p:cNvPr id="345" name="Shape 343"/>
-          <p:cNvSpPr/>
-          <p:nvPr/>
-        </p:nvSpPr>
-        <p:spPr>
-          <a:xfrm>
-            <a:off x="6172384" y="2304288"/>
-            <a:ext cx="4572" cy="329184"/>
-          </a:xfrm>
-          <a:prstGeom prst="rect">
-            <a:avLst/>
-          </a:prstGeom>
-          <a:solidFill>
-            <a:srgbClr val="8C8C8C"/>
-          </a:solidFill>
-          <a:ln/>
-        </p:spPr>
-      </p:sp>
-      <p:sp>
-        <p:nvSpPr>
-          <p:cNvPr id="346" name="Shape 344"/>
-          <p:cNvSpPr/>
-          <p:nvPr/>
-        </p:nvSpPr>
-        <p:spPr>
-          <a:xfrm>
-            <a:off x="6175779" y="2304288"/>
-            <a:ext cx="4572" cy="329184"/>
-          </a:xfrm>
-          <a:prstGeom prst="rect">
-            <a:avLst/>
-          </a:prstGeom>
-          <a:solidFill>
-            <a:srgbClr val="8C8C8C"/>
-          </a:solidFill>
-          <a:ln/>
-        </p:spPr>
-      </p:sp>
-      <p:sp>
-        <p:nvSpPr>
-          <p:cNvPr id="347" name="Shape 345"/>
-          <p:cNvSpPr/>
-          <p:nvPr/>
-        </p:nvSpPr>
-        <p:spPr>
-          <a:xfrm>
-            <a:off x="6182642" y="2304288"/>
-            <a:ext cx="4572" cy="329184"/>
-          </a:xfrm>
-          <a:prstGeom prst="rect">
-            <a:avLst/>
-          </a:prstGeom>
-          <a:solidFill>
-            <a:srgbClr val="8C8C8C"/>
-          </a:solidFill>
-          <a:ln/>
-        </p:spPr>
-      </p:sp>
-      <p:sp>
-        <p:nvSpPr>
-          <p:cNvPr id="348" name="Shape 346"/>
-          <p:cNvSpPr/>
-          <p:nvPr/>
-        </p:nvSpPr>
-        <p:spPr>
-          <a:xfrm>
-            <a:off x="6188160" y="2304288"/>
-            <a:ext cx="4572" cy="329184"/>
-          </a:xfrm>
-          <a:prstGeom prst="rect">
-            <a:avLst/>
-          </a:prstGeom>
-          <a:solidFill>
-            <a:srgbClr val="8C8C8C"/>
-          </a:solidFill>
-          <a:ln/>
-        </p:spPr>
-      </p:sp>
-      <p:sp>
-        <p:nvSpPr>
-          <p:cNvPr id="349" name="Shape 347"/>
-          <p:cNvSpPr/>
-          <p:nvPr/>
-        </p:nvSpPr>
-        <p:spPr>
-          <a:xfrm>
-            <a:off x="6201955" y="2304288"/>
-            <a:ext cx="4572" cy="329184"/>
-          </a:xfrm>
-          <a:prstGeom prst="rect">
-            <a:avLst/>
-          </a:prstGeom>
-          <a:solidFill>
-            <a:srgbClr val="8C8C8C"/>
-          </a:solidFill>
-          <a:ln/>
-        </p:spPr>
-      </p:sp>
-      <p:sp>
-        <p:nvSpPr>
-          <p:cNvPr id="350" name="Shape 348"/>
-          <p:cNvSpPr/>
-          <p:nvPr/>
-        </p:nvSpPr>
-        <p:spPr>
-          <a:xfrm>
-            <a:off x="6211152" y="2304288"/>
-            <a:ext cx="4572" cy="329184"/>
-          </a:xfrm>
-          <a:prstGeom prst="rect">
-            <a:avLst/>
-          </a:prstGeom>
-          <a:solidFill>
-            <a:srgbClr val="8C8C8C"/>
-          </a:solidFill>
-          <a:ln/>
-        </p:spPr>
-      </p:sp>
-      <p:sp>
-        <p:nvSpPr>
-          <p:cNvPr id="351" name="Shape 349"/>
-          <p:cNvSpPr/>
-          <p:nvPr/>
-        </p:nvSpPr>
-        <p:spPr>
-          <a:xfrm>
-            <a:off x="6219146" y="2304288"/>
-            <a:ext cx="4572" cy="329184"/>
-          </a:xfrm>
-          <a:prstGeom prst="rect">
-            <a:avLst/>
-          </a:prstGeom>
-          <a:solidFill>
-            <a:srgbClr val="8C8C8C"/>
-          </a:solidFill>
-          <a:ln/>
-        </p:spPr>
-      </p:sp>
-      <p:sp>
-        <p:nvSpPr>
-          <p:cNvPr id="352" name="Shape 350"/>
-          <p:cNvSpPr/>
-          <p:nvPr/>
-        </p:nvSpPr>
-        <p:spPr>
-          <a:xfrm>
-            <a:off x="6224876" y="2304288"/>
-            <a:ext cx="4572" cy="329184"/>
-          </a:xfrm>
-          <a:prstGeom prst="rect">
-            <a:avLst/>
-          </a:prstGeom>
-          <a:solidFill>
-            <a:srgbClr val="8C8C8C"/>
-          </a:solidFill>
-          <a:ln/>
-        </p:spPr>
-      </p:sp>
-      <p:sp>
-        <p:nvSpPr>
-          <p:cNvPr id="353" name="Shape 351"/>
-          <p:cNvSpPr/>
-          <p:nvPr/>
-        </p:nvSpPr>
-        <p:spPr>
-          <a:xfrm>
-            <a:off x="6235559" y="2304288"/>
-            <a:ext cx="4572" cy="329184"/>
-          </a:xfrm>
-          <a:prstGeom prst="rect">
-            <a:avLst/>
-          </a:prstGeom>
-          <a:solidFill>
-            <a:srgbClr val="8C8C8C"/>
-          </a:solidFill>
-          <a:ln/>
-        </p:spPr>
-      </p:sp>
-      <p:sp>
-        <p:nvSpPr>
-          <p:cNvPr id="354" name="Shape 352"/>
-          <p:cNvSpPr/>
-          <p:nvPr/>
-        </p:nvSpPr>
-        <p:spPr>
-          <a:xfrm>
-            <a:off x="6246100" y="2304288"/>
-            <a:ext cx="4572" cy="329184"/>
-          </a:xfrm>
-          <a:prstGeom prst="rect">
-            <a:avLst/>
-          </a:prstGeom>
-          <a:solidFill>
-            <a:srgbClr val="8C8C8C"/>
-          </a:solidFill>
-          <a:ln/>
-        </p:spPr>
-      </p:sp>
-      <p:sp>
-        <p:nvSpPr>
-          <p:cNvPr id="355" name="Shape 353"/>
-          <p:cNvSpPr/>
-          <p:nvPr/>
-        </p:nvSpPr>
-        <p:spPr>
-          <a:xfrm>
-            <a:off x="6250981" y="2304288"/>
-            <a:ext cx="4572" cy="329184"/>
-          </a:xfrm>
-          <a:prstGeom prst="rect">
-            <a:avLst/>
-          </a:prstGeom>
-          <a:solidFill>
-            <a:srgbClr val="8C8C8C"/>
-          </a:solidFill>
-          <a:ln/>
-        </p:spPr>
-      </p:sp>
-      <p:sp>
-        <p:nvSpPr>
-          <p:cNvPr id="356" name="Shape 354"/>
-          <p:cNvSpPr/>
-          <p:nvPr/>
-        </p:nvSpPr>
-        <p:spPr>
-          <a:xfrm>
-            <a:off x="6257489" y="2304288"/>
-            <a:ext cx="4572" cy="329184"/>
-          </a:xfrm>
-          <a:prstGeom prst="rect">
-            <a:avLst/>
-          </a:prstGeom>
-          <a:solidFill>
-            <a:srgbClr val="8C8C8C"/>
-          </a:solidFill>
-          <a:ln/>
-        </p:spPr>
-      </p:sp>
-      <p:sp>
-        <p:nvSpPr>
-          <p:cNvPr id="357" name="Shape 355"/>
-          <p:cNvSpPr/>
-          <p:nvPr/>
-        </p:nvSpPr>
-        <p:spPr>
-          <a:xfrm>
-            <a:off x="6264493" y="2304288"/>
-            <a:ext cx="4572" cy="329184"/>
-          </a:xfrm>
-          <a:prstGeom prst="rect">
-            <a:avLst/>
-          </a:prstGeom>
-          <a:solidFill>
-            <a:srgbClr val="8C8C8C"/>
-          </a:solidFill>
-          <a:ln/>
-        </p:spPr>
-      </p:sp>
-      <p:sp>
-        <p:nvSpPr>
-          <p:cNvPr id="358" name="Shape 356"/>
-          <p:cNvSpPr/>
-          <p:nvPr/>
-        </p:nvSpPr>
-        <p:spPr>
-          <a:xfrm>
-            <a:off x="6276661" y="2304288"/>
-            <a:ext cx="4572" cy="329184"/>
-          </a:xfrm>
-          <a:prstGeom prst="rect">
-            <a:avLst/>
-          </a:prstGeom>
-          <a:solidFill>
-            <a:srgbClr val="8C8C8C"/>
-          </a:solidFill>
-          <a:ln/>
-        </p:spPr>
-      </p:sp>
-      <p:sp>
-        <p:nvSpPr>
-          <p:cNvPr id="359" name="Shape 357"/>
-          <p:cNvSpPr/>
-          <p:nvPr/>
-        </p:nvSpPr>
-        <p:spPr>
-          <a:xfrm>
-            <a:off x="6291730" y="2304288"/>
-            <a:ext cx="4572" cy="329184"/>
-          </a:xfrm>
-          <a:prstGeom prst="rect">
-            <a:avLst/>
-          </a:prstGeom>
-          <a:solidFill>
-            <a:srgbClr val="8C8C8C"/>
-          </a:solidFill>
-          <a:ln/>
-        </p:spPr>
-      </p:sp>
-      <p:sp>
-        <p:nvSpPr>
-          <p:cNvPr id="360" name="Shape 358"/>
-          <p:cNvSpPr/>
-          <p:nvPr/>
-        </p:nvSpPr>
-        <p:spPr>
-          <a:xfrm>
-            <a:off x="6295267" y="2304288"/>
-            <a:ext cx="4572" cy="329184"/>
-          </a:xfrm>
-          <a:prstGeom prst="rect">
-            <a:avLst/>
-          </a:prstGeom>
-          <a:solidFill>
-            <a:srgbClr val="8C8C8C"/>
-          </a:solidFill>
-          <a:ln/>
-        </p:spPr>
-      </p:sp>
-      <p:sp>
-        <p:nvSpPr>
-          <p:cNvPr id="361" name="Shape 359"/>
-          <p:cNvSpPr/>
-          <p:nvPr/>
-        </p:nvSpPr>
-        <p:spPr>
-          <a:xfrm>
-            <a:off x="6299582" y="2304288"/>
-            <a:ext cx="4572" cy="329184"/>
-          </a:xfrm>
-          <a:prstGeom prst="rect">
-            <a:avLst/>
-          </a:prstGeom>
-          <a:solidFill>
-            <a:srgbClr val="8C8C8C"/>
-          </a:solidFill>
-          <a:ln/>
-        </p:spPr>
-      </p:sp>
-      <p:sp>
-        <p:nvSpPr>
-          <p:cNvPr id="362" name="Shape 360"/>
-          <p:cNvSpPr/>
-          <p:nvPr/>
-        </p:nvSpPr>
-        <p:spPr>
-          <a:xfrm>
-            <a:off x="6320311" y="2304288"/>
-            <a:ext cx="4572" cy="329184"/>
-          </a:xfrm>
-          <a:prstGeom prst="rect">
-            <a:avLst/>
-          </a:prstGeom>
-          <a:solidFill>
-            <a:srgbClr val="8C8C8C"/>
-          </a:solidFill>
-          <a:ln/>
-        </p:spPr>
-      </p:sp>
-      <p:sp>
-        <p:nvSpPr>
-          <p:cNvPr id="363" name="Shape 361"/>
-          <p:cNvSpPr/>
-          <p:nvPr/>
-        </p:nvSpPr>
-        <p:spPr>
-          <a:xfrm>
-            <a:off x="6329790" y="2304288"/>
-            <a:ext cx="4572" cy="329184"/>
-          </a:xfrm>
-          <a:prstGeom prst="rect">
-            <a:avLst/>
-          </a:prstGeom>
-          <a:solidFill>
-            <a:srgbClr val="8C8C8C"/>
-          </a:solidFill>
-          <a:ln/>
-        </p:spPr>
-      </p:sp>
-      <p:sp>
-        <p:nvSpPr>
-          <p:cNvPr id="364" name="Shape 362"/>
-          <p:cNvSpPr/>
-          <p:nvPr/>
-        </p:nvSpPr>
-        <p:spPr>
-          <a:xfrm>
-            <a:off x="6333752" y="2304288"/>
-            <a:ext cx="4572" cy="329184"/>
-          </a:xfrm>
-          <a:prstGeom prst="rect">
-            <a:avLst/>
-          </a:prstGeom>
-          <a:solidFill>
-            <a:srgbClr val="8C8C8C"/>
-          </a:solidFill>
-          <a:ln/>
-        </p:spPr>
-      </p:sp>
-      <p:sp>
-        <p:nvSpPr>
-          <p:cNvPr id="365" name="Shape 363"/>
-          <p:cNvSpPr/>
-          <p:nvPr/>
-        </p:nvSpPr>
-        <p:spPr>
-          <a:xfrm>
-            <a:off x="6339058" y="2304288"/>
-            <a:ext cx="4572" cy="329184"/>
-          </a:xfrm>
-          <a:prstGeom prst="rect">
-            <a:avLst/>
-          </a:prstGeom>
-          <a:solidFill>
-            <a:srgbClr val="8C8C8C"/>
-          </a:solidFill>
-          <a:ln/>
-        </p:spPr>
-      </p:sp>
-      <p:sp>
-        <p:nvSpPr>
-          <p:cNvPr id="366" name="Shape 364"/>
-          <p:cNvSpPr/>
-          <p:nvPr/>
-        </p:nvSpPr>
-        <p:spPr>
-          <a:xfrm>
-            <a:off x="6349528" y="2304288"/>
-            <a:ext cx="4572" cy="329184"/>
-          </a:xfrm>
-          <a:prstGeom prst="rect">
-            <a:avLst/>
-          </a:prstGeom>
-          <a:solidFill>
-            <a:srgbClr val="8C8C8C"/>
-          </a:solidFill>
-          <a:ln/>
-        </p:spPr>
-      </p:sp>
-      <p:sp>
-        <p:nvSpPr>
-          <p:cNvPr id="367" name="Shape 365"/>
-          <p:cNvSpPr/>
-          <p:nvPr/>
-        </p:nvSpPr>
-        <p:spPr>
-          <a:xfrm>
-            <a:off x="6360069" y="2304288"/>
-            <a:ext cx="4572" cy="329184"/>
-          </a:xfrm>
-          <a:prstGeom prst="rect">
-            <a:avLst/>
-          </a:prstGeom>
-          <a:solidFill>
-            <a:srgbClr val="8C8C8C"/>
-          </a:solidFill>
-          <a:ln/>
-        </p:spPr>
-      </p:sp>
-      <p:sp>
-        <p:nvSpPr>
-          <p:cNvPr id="368" name="Shape 366"/>
-          <p:cNvSpPr/>
-          <p:nvPr/>
-        </p:nvSpPr>
-        <p:spPr>
-          <a:xfrm>
-            <a:off x="6362616" y="2304288"/>
-            <a:ext cx="4572" cy="329184"/>
-          </a:xfrm>
-          <a:prstGeom prst="rect">
-            <a:avLst/>
-          </a:prstGeom>
-          <a:solidFill>
-            <a:srgbClr val="8C8C8C"/>
-          </a:solidFill>
-          <a:ln/>
-        </p:spPr>
-      </p:sp>
-      <p:sp>
-        <p:nvSpPr>
-          <p:cNvPr id="369" name="Shape 367"/>
-          <p:cNvSpPr/>
-          <p:nvPr/>
-        </p:nvSpPr>
-        <p:spPr>
-          <a:xfrm>
-            <a:off x="6366224" y="2304288"/>
-            <a:ext cx="4572" cy="329184"/>
-          </a:xfrm>
-          <a:prstGeom prst="rect">
-            <a:avLst/>
-          </a:prstGeom>
-          <a:solidFill>
-            <a:srgbClr val="8C8C8C"/>
-          </a:solidFill>
-          <a:ln/>
-        </p:spPr>
-      </p:sp>
-      <p:sp>
-        <p:nvSpPr>
-          <p:cNvPr id="370" name="Shape 368"/>
-          <p:cNvSpPr/>
-          <p:nvPr/>
-        </p:nvSpPr>
-        <p:spPr>
-          <a:xfrm>
-            <a:off x="6373652" y="2304288"/>
-            <a:ext cx="4572" cy="329184"/>
-          </a:xfrm>
-          <a:prstGeom prst="rect">
-            <a:avLst/>
-          </a:prstGeom>
-          <a:solidFill>
-            <a:srgbClr val="8C8C8C"/>
-          </a:solidFill>
-          <a:ln/>
-        </p:spPr>
-      </p:sp>
-      <p:sp>
-        <p:nvSpPr>
-          <p:cNvPr id="371" name="Shape 369"/>
-          <p:cNvSpPr/>
-          <p:nvPr/>
-        </p:nvSpPr>
-        <p:spPr>
-          <a:xfrm>
-            <a:off x="6387094" y="2304288"/>
-            <a:ext cx="4572" cy="329184"/>
-          </a:xfrm>
-          <a:prstGeom prst="rect">
-            <a:avLst/>
-          </a:prstGeom>
-          <a:solidFill>
-            <a:srgbClr val="8C8C8C"/>
-          </a:solidFill>
-          <a:ln/>
-        </p:spPr>
-      </p:sp>
-      <p:sp>
-        <p:nvSpPr>
-          <p:cNvPr id="372" name="Shape 370"/>
-          <p:cNvSpPr/>
-          <p:nvPr/>
-        </p:nvSpPr>
-        <p:spPr>
-          <a:xfrm>
-            <a:off x="6390560" y="2304288"/>
-            <a:ext cx="4572" cy="329184"/>
-          </a:xfrm>
-          <a:prstGeom prst="rect">
-            <a:avLst/>
-          </a:prstGeom>
-          <a:solidFill>
-            <a:srgbClr val="8C8C8C"/>
-          </a:solidFill>
-          <a:ln/>
-        </p:spPr>
-      </p:sp>
-      <p:sp>
-        <p:nvSpPr>
-          <p:cNvPr id="373" name="Shape 371"/>
-          <p:cNvSpPr/>
-          <p:nvPr/>
-        </p:nvSpPr>
-        <p:spPr>
-          <a:xfrm>
-            <a:off x="6394592" y="2304288"/>
-            <a:ext cx="4572" cy="329184"/>
-          </a:xfrm>
-          <a:prstGeom prst="rect">
-            <a:avLst/>
-          </a:prstGeom>
-          <a:solidFill>
-            <a:srgbClr val="8C8C8C"/>
-          </a:solidFill>
-          <a:ln/>
-        </p:spPr>
-      </p:sp>
-      <p:sp>
-        <p:nvSpPr>
-          <p:cNvPr id="374" name="Shape 372"/>
-          <p:cNvSpPr/>
-          <p:nvPr/>
-        </p:nvSpPr>
-        <p:spPr>
-          <a:xfrm>
-            <a:off x="6402374" y="2304288"/>
-            <a:ext cx="4572" cy="329184"/>
-          </a:xfrm>
-          <a:prstGeom prst="rect">
-            <a:avLst/>
-          </a:prstGeom>
-          <a:solidFill>
-            <a:srgbClr val="8C8C8C"/>
-          </a:solidFill>
-          <a:ln/>
-        </p:spPr>
-      </p:sp>
-      <p:sp>
-        <p:nvSpPr>
-          <p:cNvPr id="375" name="Shape 373"/>
-          <p:cNvSpPr/>
-          <p:nvPr/>
-        </p:nvSpPr>
-        <p:spPr>
-          <a:xfrm>
-            <a:off x="6416594" y="2304288"/>
-            <a:ext cx="4572" cy="329184"/>
-          </a:xfrm>
-          <a:prstGeom prst="rect">
-            <a:avLst/>
-          </a:prstGeom>
-          <a:solidFill>
-            <a:srgbClr val="8C8C8C"/>
-          </a:solidFill>
-          <a:ln/>
-        </p:spPr>
-      </p:sp>
-      <p:sp>
-        <p:nvSpPr>
-          <p:cNvPr id="376" name="Shape 374"/>
-          <p:cNvSpPr/>
-          <p:nvPr/>
-        </p:nvSpPr>
-        <p:spPr>
-          <a:xfrm>
-            <a:off x="6420060" y="2304288"/>
-            <a:ext cx="4572" cy="329184"/>
-          </a:xfrm>
-          <a:prstGeom prst="rect">
-            <a:avLst/>
-          </a:prstGeom>
-          <a:solidFill>
-            <a:srgbClr val="8C8C8C"/>
-          </a:solidFill>
-          <a:ln/>
-        </p:spPr>
-      </p:sp>
-      <p:sp>
-        <p:nvSpPr>
-          <p:cNvPr id="377" name="Shape 375"/>
-          <p:cNvSpPr/>
-          <p:nvPr/>
-        </p:nvSpPr>
-        <p:spPr>
-          <a:xfrm>
-            <a:off x="6431875" y="2304288"/>
-            <a:ext cx="4572" cy="329184"/>
-          </a:xfrm>
-          <a:prstGeom prst="rect">
-            <a:avLst/>
-          </a:prstGeom>
-          <a:solidFill>
-            <a:srgbClr val="8C8C8C"/>
-          </a:solidFill>
-          <a:ln/>
-        </p:spPr>
-      </p:sp>
-      <p:sp>
-        <p:nvSpPr>
-          <p:cNvPr id="378" name="Shape 376"/>
-          <p:cNvSpPr/>
-          <p:nvPr/>
-        </p:nvSpPr>
-        <p:spPr>
-          <a:xfrm>
-            <a:off x="6455786" y="2304288"/>
-            <a:ext cx="4572" cy="329184"/>
-          </a:xfrm>
-          <a:prstGeom prst="rect">
-            <a:avLst/>
-          </a:prstGeom>
-          <a:solidFill>
-            <a:srgbClr val="8C8C8C"/>
-          </a:solidFill>
-          <a:ln/>
-        </p:spPr>
-      </p:sp>
-      <p:sp>
-        <p:nvSpPr>
-          <p:cNvPr id="379" name="Shape 377"/>
-          <p:cNvSpPr/>
-          <p:nvPr/>
-        </p:nvSpPr>
-        <p:spPr>
-          <a:xfrm>
-            <a:off x="6461800" y="2304288"/>
-            <a:ext cx="4572" cy="329184"/>
-          </a:xfrm>
-          <a:prstGeom prst="rect">
-            <a:avLst/>
-          </a:prstGeom>
-          <a:solidFill>
-            <a:srgbClr val="8C8C8C"/>
-          </a:solidFill>
-          <a:ln/>
-        </p:spPr>
-      </p:sp>
-      <p:sp>
-        <p:nvSpPr>
-          <p:cNvPr id="380" name="Shape 378"/>
-          <p:cNvSpPr/>
-          <p:nvPr/>
-        </p:nvSpPr>
-        <p:spPr>
-          <a:xfrm>
-            <a:off x="6470501" y="2304288"/>
-            <a:ext cx="4572" cy="329184"/>
-          </a:xfrm>
-          <a:prstGeom prst="rect">
-            <a:avLst/>
-          </a:prstGeom>
-          <a:solidFill>
-            <a:srgbClr val="8C8C8C"/>
-          </a:solidFill>
-          <a:ln/>
-        </p:spPr>
-      </p:sp>
-      <p:sp>
-        <p:nvSpPr>
-          <p:cNvPr id="381" name="Shape 379"/>
-          <p:cNvSpPr/>
-          <p:nvPr/>
-        </p:nvSpPr>
-        <p:spPr>
-          <a:xfrm>
-            <a:off x="6475878" y="2304288"/>
-            <a:ext cx="4572" cy="329184"/>
-          </a:xfrm>
-          <a:prstGeom prst="rect">
-            <a:avLst/>
-          </a:prstGeom>
-          <a:solidFill>
-            <a:srgbClr val="8C8C8C"/>
-          </a:solidFill>
-          <a:ln/>
-        </p:spPr>
-      </p:sp>
-      <p:sp>
-        <p:nvSpPr>
-          <p:cNvPr id="382" name="Shape 380"/>
-          <p:cNvSpPr/>
-          <p:nvPr/>
-        </p:nvSpPr>
-        <p:spPr>
-          <a:xfrm>
-            <a:off x="6496252" y="2304288"/>
-            <a:ext cx="4572" cy="329184"/>
-          </a:xfrm>
-          <a:prstGeom prst="rect">
-            <a:avLst/>
-          </a:prstGeom>
-          <a:solidFill>
-            <a:srgbClr val="8C8C8C"/>
-          </a:solidFill>
-          <a:ln/>
-        </p:spPr>
-      </p:sp>
-      <p:sp>
-        <p:nvSpPr>
-          <p:cNvPr id="383" name="Shape 381"/>
-          <p:cNvSpPr/>
-          <p:nvPr/>
-        </p:nvSpPr>
-        <p:spPr>
-          <a:xfrm>
-            <a:off x="6512594" y="2304288"/>
-            <a:ext cx="4572" cy="329184"/>
-          </a:xfrm>
-          <a:prstGeom prst="rect">
-            <a:avLst/>
-          </a:prstGeom>
-          <a:solidFill>
-            <a:srgbClr val="8C8C8C"/>
-          </a:solidFill>
-          <a:ln/>
-        </p:spPr>
-      </p:sp>
-      <p:sp>
-        <p:nvSpPr>
-          <p:cNvPr id="384" name="Shape 382"/>
-          <p:cNvSpPr/>
-          <p:nvPr/>
-        </p:nvSpPr>
-        <p:spPr>
-          <a:xfrm>
-            <a:off x="6517051" y="2304288"/>
-            <a:ext cx="4572" cy="329184"/>
-          </a:xfrm>
-          <a:prstGeom prst="rect">
-            <a:avLst/>
-          </a:prstGeom>
-          <a:solidFill>
-            <a:srgbClr val="8C8C8C"/>
-          </a:solidFill>
-          <a:ln/>
-        </p:spPr>
-      </p:sp>
-      <p:sp>
-        <p:nvSpPr>
-          <p:cNvPr id="385" name="Shape 383"/>
-          <p:cNvSpPr/>
-          <p:nvPr/>
-        </p:nvSpPr>
-        <p:spPr>
-          <a:xfrm>
-            <a:off x="6532757" y="2304288"/>
-            <a:ext cx="4572" cy="329184"/>
-          </a:xfrm>
-          <a:prstGeom prst="rect">
-            <a:avLst/>
-          </a:prstGeom>
-          <a:solidFill>
-            <a:srgbClr val="8C8C8C"/>
-          </a:solidFill>
-          <a:ln/>
-        </p:spPr>
-      </p:sp>
-      <p:sp>
-        <p:nvSpPr>
-          <p:cNvPr id="386" name="Shape 384"/>
-          <p:cNvSpPr/>
-          <p:nvPr/>
-        </p:nvSpPr>
-        <p:spPr>
-          <a:xfrm>
-            <a:off x="6537213" y="2304288"/>
-            <a:ext cx="4572" cy="329184"/>
-          </a:xfrm>
-          <a:prstGeom prst="rect">
-            <a:avLst/>
-          </a:prstGeom>
-          <a:solidFill>
-            <a:srgbClr val="8C8C8C"/>
-          </a:solidFill>
-          <a:ln/>
-        </p:spPr>
-      </p:sp>
-      <p:sp>
-        <p:nvSpPr>
-          <p:cNvPr id="387" name="Shape 385"/>
-          <p:cNvSpPr/>
-          <p:nvPr/>
-        </p:nvSpPr>
-        <p:spPr>
-          <a:xfrm>
-            <a:off x="6559640" y="2304288"/>
-            <a:ext cx="4572" cy="329184"/>
-          </a:xfrm>
-          <a:prstGeom prst="rect">
-            <a:avLst/>
-          </a:prstGeom>
-          <a:solidFill>
-            <a:srgbClr val="8C8C8C"/>
-          </a:solidFill>
-          <a:ln/>
-        </p:spPr>
-      </p:sp>
-      <p:sp>
-        <p:nvSpPr>
-          <p:cNvPr id="388" name="Shape 386"/>
-          <p:cNvSpPr/>
-          <p:nvPr/>
-        </p:nvSpPr>
-        <p:spPr>
-          <a:xfrm>
-            <a:off x="6588503" y="2304288"/>
-            <a:ext cx="4572" cy="329184"/>
-          </a:xfrm>
-          <a:prstGeom prst="rect">
-            <a:avLst/>
-          </a:prstGeom>
-          <a:solidFill>
-            <a:srgbClr val="8C8C8C"/>
-          </a:solidFill>
-          <a:ln/>
-        </p:spPr>
-      </p:sp>
-      <p:sp>
-        <p:nvSpPr>
-          <p:cNvPr id="389" name="Shape 387"/>
-          <p:cNvSpPr/>
-          <p:nvPr/>
-        </p:nvSpPr>
-        <p:spPr>
-          <a:xfrm>
-            <a:off x="6602723" y="2304288"/>
-            <a:ext cx="4572" cy="329184"/>
-          </a:xfrm>
-          <a:prstGeom prst="rect">
-            <a:avLst/>
-          </a:prstGeom>
-          <a:solidFill>
-            <a:srgbClr val="8C8C8C"/>
-          </a:solidFill>
-          <a:ln/>
-        </p:spPr>
-      </p:sp>
-      <p:sp>
-        <p:nvSpPr>
-          <p:cNvPr id="390" name="Shape 388"/>
-          <p:cNvSpPr/>
-          <p:nvPr/>
-        </p:nvSpPr>
-        <p:spPr>
-          <a:xfrm>
-            <a:off x="6606755" y="2304288"/>
-            <a:ext cx="4572" cy="329184"/>
-          </a:xfrm>
-          <a:prstGeom prst="rect">
-            <a:avLst/>
-          </a:prstGeom>
-          <a:solidFill>
-            <a:srgbClr val="8C8C8C"/>
-          </a:solidFill>
-          <a:ln/>
-        </p:spPr>
-      </p:sp>
-      <p:sp>
-        <p:nvSpPr>
-          <p:cNvPr id="391" name="Shape 389"/>
-          <p:cNvSpPr/>
-          <p:nvPr/>
-        </p:nvSpPr>
-        <p:spPr>
-          <a:xfrm>
-            <a:off x="6619702" y="2304288"/>
-            <a:ext cx="4572" cy="329184"/>
-          </a:xfrm>
-          <a:prstGeom prst="rect">
-            <a:avLst/>
-          </a:prstGeom>
-          <a:solidFill>
-            <a:srgbClr val="8C8C8C"/>
-          </a:solidFill>
-          <a:ln/>
-        </p:spPr>
-      </p:sp>
-      <p:sp>
-        <p:nvSpPr>
-          <p:cNvPr id="392" name="Shape 390"/>
-          <p:cNvSpPr/>
-          <p:nvPr/>
-        </p:nvSpPr>
-        <p:spPr>
-          <a:xfrm>
-            <a:off x="6623380" y="2304288"/>
-            <a:ext cx="4572" cy="329184"/>
-          </a:xfrm>
-          <a:prstGeom prst="rect">
-            <a:avLst/>
-          </a:prstGeom>
-          <a:solidFill>
-            <a:srgbClr val="8C8C8C"/>
-          </a:solidFill>
-          <a:ln/>
-        </p:spPr>
-      </p:sp>
-      <p:sp>
-        <p:nvSpPr>
-          <p:cNvPr id="393" name="Shape 391"/>
-          <p:cNvSpPr/>
-          <p:nvPr/>
-        </p:nvSpPr>
-        <p:spPr>
-          <a:xfrm>
-            <a:off x="6636044" y="2304288"/>
-            <a:ext cx="4572" cy="329184"/>
-          </a:xfrm>
-          <a:prstGeom prst="rect">
-            <a:avLst/>
-          </a:prstGeom>
-          <a:solidFill>
-            <a:srgbClr val="8C8C8C"/>
-          </a:solidFill>
-          <a:ln/>
-        </p:spPr>
-      </p:sp>
-      <p:sp>
-        <p:nvSpPr>
-          <p:cNvPr id="394" name="Shape 392"/>
-          <p:cNvSpPr/>
-          <p:nvPr/>
-        </p:nvSpPr>
-        <p:spPr>
-          <a:xfrm>
-            <a:off x="6638732" y="2304288"/>
-            <a:ext cx="4572" cy="329184"/>
-          </a:xfrm>
-          <a:prstGeom prst="rect">
-            <a:avLst/>
-          </a:prstGeom>
-          <a:solidFill>
-            <a:srgbClr val="8C8C8C"/>
-          </a:solidFill>
-          <a:ln/>
-        </p:spPr>
-      </p:sp>
-      <p:sp>
-        <p:nvSpPr>
-          <p:cNvPr id="395" name="Shape 393"/>
-          <p:cNvSpPr/>
-          <p:nvPr/>
-        </p:nvSpPr>
-        <p:spPr>
-          <a:xfrm>
-            <a:off x="6652386" y="2304288"/>
-            <a:ext cx="4572" cy="329184"/>
-          </a:xfrm>
-          <a:prstGeom prst="rect">
-            <a:avLst/>
-          </a:prstGeom>
-          <a:solidFill>
-            <a:srgbClr val="8C8C8C"/>
-          </a:solidFill>
-          <a:ln/>
-        </p:spPr>
-      </p:sp>
-      <p:sp>
-        <p:nvSpPr>
-          <p:cNvPr id="396" name="Shape 394"/>
-          <p:cNvSpPr/>
-          <p:nvPr/>
-        </p:nvSpPr>
-        <p:spPr>
-          <a:xfrm>
-            <a:off x="6656206" y="2304288"/>
-            <a:ext cx="4572" cy="329184"/>
-          </a:xfrm>
-          <a:prstGeom prst="rect">
-            <a:avLst/>
-          </a:prstGeom>
-          <a:solidFill>
-            <a:srgbClr val="8C8C8C"/>
-          </a:solidFill>
-          <a:ln/>
-        </p:spPr>
-      </p:sp>
-      <p:sp>
-        <p:nvSpPr>
-          <p:cNvPr id="397" name="Shape 395"/>
-          <p:cNvSpPr/>
-          <p:nvPr/>
-        </p:nvSpPr>
-        <p:spPr>
-          <a:xfrm>
-            <a:off x="6668869" y="2304288"/>
-            <a:ext cx="4572" cy="329184"/>
-          </a:xfrm>
-          <a:prstGeom prst="rect">
-            <a:avLst/>
-          </a:prstGeom>
-          <a:solidFill>
-            <a:srgbClr val="8C8C8C"/>
-          </a:solidFill>
-          <a:ln/>
-        </p:spPr>
-      </p:sp>
-      <p:sp>
-        <p:nvSpPr>
-          <p:cNvPr id="398" name="Shape 396"/>
-          <p:cNvSpPr/>
-          <p:nvPr/>
-        </p:nvSpPr>
-        <p:spPr>
-          <a:xfrm>
-            <a:off x="6672406" y="2304288"/>
-            <a:ext cx="4572" cy="329184"/>
-          </a:xfrm>
-          <a:prstGeom prst="rect">
-            <a:avLst/>
-          </a:prstGeom>
-          <a:solidFill>
-            <a:srgbClr val="8C8C8C"/>
-          </a:solidFill>
-          <a:ln/>
-        </p:spPr>
-      </p:sp>
-      <p:sp>
-        <p:nvSpPr>
-          <p:cNvPr id="399" name="Shape 397"/>
-          <p:cNvSpPr/>
-          <p:nvPr/>
-        </p:nvSpPr>
-        <p:spPr>
-          <a:xfrm>
-            <a:off x="6686131" y="2304288"/>
-            <a:ext cx="4572" cy="329184"/>
-          </a:xfrm>
-          <a:prstGeom prst="rect">
-            <a:avLst/>
-          </a:prstGeom>
-          <a:solidFill>
-            <a:srgbClr val="8C8C8C"/>
-          </a:solidFill>
-          <a:ln/>
-        </p:spPr>
-      </p:sp>
-      <p:sp>
-        <p:nvSpPr>
-          <p:cNvPr id="400" name="Shape 398"/>
-          <p:cNvSpPr/>
-          <p:nvPr/>
-        </p:nvSpPr>
-        <p:spPr>
-          <a:xfrm>
-            <a:off x="6690163" y="2304288"/>
-            <a:ext cx="4572" cy="329184"/>
-          </a:xfrm>
-          <a:prstGeom prst="rect">
-            <a:avLst/>
-          </a:prstGeom>
-          <a:solidFill>
-            <a:srgbClr val="8C8C8C"/>
-          </a:solidFill>
-          <a:ln/>
-        </p:spPr>
-      </p:sp>
-      <p:sp>
-        <p:nvSpPr>
-          <p:cNvPr id="401" name="Shape 399"/>
-          <p:cNvSpPr/>
-          <p:nvPr/>
-        </p:nvSpPr>
-        <p:spPr>
-          <a:xfrm>
-            <a:off x="6703322" y="2304288"/>
-            <a:ext cx="4572" cy="329184"/>
-          </a:xfrm>
-          <a:prstGeom prst="rect">
-            <a:avLst/>
-          </a:prstGeom>
-          <a:solidFill>
-            <a:srgbClr val="8C8C8C"/>
-          </a:solidFill>
-          <a:ln/>
-        </p:spPr>
-      </p:sp>
-      <p:sp>
-        <p:nvSpPr>
-          <p:cNvPr id="402" name="Shape 400"/>
-          <p:cNvSpPr/>
-          <p:nvPr/>
-        </p:nvSpPr>
-        <p:spPr>
-          <a:xfrm>
-            <a:off x="6707000" y="2304288"/>
-            <a:ext cx="4572" cy="329184"/>
-          </a:xfrm>
-          <a:prstGeom prst="rect">
-            <a:avLst/>
-          </a:prstGeom>
-          <a:solidFill>
-            <a:srgbClr val="8C8C8C"/>
-          </a:solidFill>
-          <a:ln/>
-        </p:spPr>
-      </p:sp>
-      <p:sp>
-        <p:nvSpPr>
-          <p:cNvPr id="403" name="Shape 401"/>
-          <p:cNvSpPr/>
-          <p:nvPr/>
-        </p:nvSpPr>
-        <p:spPr>
-          <a:xfrm>
-            <a:off x="6719664" y="2304288"/>
-            <a:ext cx="4572" cy="329184"/>
-          </a:xfrm>
-          <a:prstGeom prst="rect">
-            <a:avLst/>
-          </a:prstGeom>
-          <a:solidFill>
-            <a:srgbClr val="8C8C8C"/>
-          </a:solidFill>
-          <a:ln/>
-        </p:spPr>
-      </p:sp>
-      <p:sp>
-        <p:nvSpPr>
-          <p:cNvPr id="404" name="Shape 402"/>
-          <p:cNvSpPr/>
-          <p:nvPr/>
-        </p:nvSpPr>
-        <p:spPr>
-          <a:xfrm>
-            <a:off x="6723201" y="2304288"/>
-            <a:ext cx="4572" cy="329184"/>
-          </a:xfrm>
-          <a:prstGeom prst="rect">
-            <a:avLst/>
-          </a:prstGeom>
-          <a:solidFill>
-            <a:srgbClr val="8C8C8C"/>
-          </a:solidFill>
-          <a:ln/>
-        </p:spPr>
-      </p:sp>
-      <p:sp>
-        <p:nvSpPr>
-          <p:cNvPr id="405" name="Shape 403"/>
-          <p:cNvSpPr/>
-          <p:nvPr/>
-        </p:nvSpPr>
-        <p:spPr>
-          <a:xfrm>
-            <a:off x="6735723" y="2304288"/>
-            <a:ext cx="4572" cy="329184"/>
-          </a:xfrm>
-          <a:prstGeom prst="rect">
-            <a:avLst/>
-          </a:prstGeom>
-          <a:solidFill>
-            <a:srgbClr val="8C8C8C"/>
-          </a:solidFill>
-          <a:ln/>
-        </p:spPr>
-      </p:sp>
-      <p:sp>
-        <p:nvSpPr>
-          <p:cNvPr id="406" name="Shape 404"/>
-          <p:cNvSpPr/>
-          <p:nvPr/>
-        </p:nvSpPr>
-        <p:spPr>
-          <a:xfrm>
-            <a:off x="6739472" y="2304288"/>
-            <a:ext cx="4572" cy="329184"/>
-          </a:xfrm>
-          <a:prstGeom prst="rect">
-            <a:avLst/>
-          </a:prstGeom>
-          <a:solidFill>
-            <a:srgbClr val="8C8C8C"/>
-          </a:solidFill>
-          <a:ln/>
-        </p:spPr>
-      </p:sp>
-      <p:sp>
-        <p:nvSpPr>
-          <p:cNvPr id="407" name="Shape 405"/>
-          <p:cNvSpPr/>
-          <p:nvPr/>
-        </p:nvSpPr>
-        <p:spPr>
-          <a:xfrm>
-            <a:off x="6752984" y="2304288"/>
-            <a:ext cx="4572" cy="329184"/>
-          </a:xfrm>
-          <a:prstGeom prst="rect">
-            <a:avLst/>
-          </a:prstGeom>
-          <a:solidFill>
-            <a:srgbClr val="8C8C8C"/>
-          </a:solidFill>
-          <a:ln/>
-        </p:spPr>
-      </p:sp>
-      <p:sp>
-        <p:nvSpPr>
-          <p:cNvPr id="408" name="Shape 406"/>
-          <p:cNvSpPr/>
-          <p:nvPr/>
-        </p:nvSpPr>
-        <p:spPr>
-          <a:xfrm>
-            <a:off x="6756734" y="2304288"/>
-            <a:ext cx="4572" cy="329184"/>
-          </a:xfrm>
-          <a:prstGeom prst="rect">
-            <a:avLst/>
-          </a:prstGeom>
-          <a:solidFill>
-            <a:srgbClr val="8C8C8C"/>
-          </a:solidFill>
-          <a:ln/>
-        </p:spPr>
-      </p:sp>
-      <p:sp>
-        <p:nvSpPr>
-          <p:cNvPr id="409" name="Shape 407"/>
-          <p:cNvSpPr/>
-          <p:nvPr/>
-        </p:nvSpPr>
-        <p:spPr>
-          <a:xfrm>
-            <a:off x="6769397" y="2304288"/>
-            <a:ext cx="4572" cy="329184"/>
-          </a:xfrm>
-          <a:prstGeom prst="rect">
-            <a:avLst/>
-          </a:prstGeom>
-          <a:solidFill>
-            <a:srgbClr val="8C8C8C"/>
-          </a:solidFill>
-          <a:ln/>
-        </p:spPr>
-      </p:sp>
-      <p:sp>
-        <p:nvSpPr>
-          <p:cNvPr id="410" name="Shape 408"/>
-          <p:cNvSpPr/>
-          <p:nvPr/>
-        </p:nvSpPr>
-        <p:spPr>
-          <a:xfrm>
-            <a:off x="6773005" y="2304288"/>
-            <a:ext cx="4572" cy="329184"/>
-          </a:xfrm>
-          <a:prstGeom prst="rect">
-            <a:avLst/>
-          </a:prstGeom>
-          <a:solidFill>
-            <a:srgbClr val="8C8C8C"/>
-          </a:solidFill>
-          <a:ln/>
-        </p:spPr>
-      </p:sp>
-      <p:sp>
-        <p:nvSpPr>
-          <p:cNvPr id="411" name="Shape 409"/>
-          <p:cNvSpPr/>
-          <p:nvPr/>
-        </p:nvSpPr>
-        <p:spPr>
-          <a:xfrm>
-            <a:off x="6785598" y="2304288"/>
-            <a:ext cx="4572" cy="329184"/>
-          </a:xfrm>
-          <a:prstGeom prst="rect">
-            <a:avLst/>
-          </a:prstGeom>
-          <a:solidFill>
-            <a:srgbClr val="8C8C8C"/>
-          </a:solidFill>
-          <a:ln/>
-        </p:spPr>
-      </p:sp>
-      <p:sp>
-        <p:nvSpPr>
-          <p:cNvPr id="412" name="Shape 410"/>
-          <p:cNvSpPr/>
-          <p:nvPr/>
-        </p:nvSpPr>
-        <p:spPr>
-          <a:xfrm>
-            <a:off x="6789347" y="2304288"/>
-            <a:ext cx="4572" cy="329184"/>
-          </a:xfrm>
-          <a:prstGeom prst="rect">
-            <a:avLst/>
-          </a:prstGeom>
-          <a:solidFill>
-            <a:srgbClr val="8C8C8C"/>
-          </a:solidFill>
-          <a:ln/>
-        </p:spPr>
-      </p:sp>
-      <p:sp>
-        <p:nvSpPr>
-          <p:cNvPr id="413" name="Shape 411"/>
-          <p:cNvSpPr/>
-          <p:nvPr/>
-        </p:nvSpPr>
-        <p:spPr>
-          <a:xfrm>
-            <a:off x="6801727" y="2304288"/>
-            <a:ext cx="4572" cy="329184"/>
-          </a:xfrm>
-          <a:prstGeom prst="rect">
-            <a:avLst/>
-          </a:prstGeom>
-          <a:solidFill>
-            <a:srgbClr val="8C8C8C"/>
-          </a:solidFill>
-          <a:ln/>
-        </p:spPr>
-      </p:sp>
-      <p:sp>
-        <p:nvSpPr>
-          <p:cNvPr id="414" name="Shape 412"/>
-          <p:cNvSpPr/>
-          <p:nvPr/>
-        </p:nvSpPr>
-        <p:spPr>
-          <a:xfrm>
-            <a:off x="6805335" y="2304288"/>
-            <a:ext cx="4572" cy="329184"/>
-          </a:xfrm>
-          <a:prstGeom prst="rect">
-            <a:avLst/>
-          </a:prstGeom>
-          <a:solidFill>
-            <a:srgbClr val="8C8C8C"/>
-          </a:solidFill>
-          <a:ln/>
-        </p:spPr>
-      </p:sp>
-      <p:sp>
-        <p:nvSpPr>
-          <p:cNvPr id="415" name="Shape 413"/>
-          <p:cNvSpPr/>
-          <p:nvPr/>
-        </p:nvSpPr>
-        <p:spPr>
-          <a:xfrm>
-            <a:off x="6817786" y="2304288"/>
-            <a:ext cx="4572" cy="329184"/>
-          </a:xfrm>
-          <a:prstGeom prst="rect">
-            <a:avLst/>
-          </a:prstGeom>
-          <a:solidFill>
-            <a:srgbClr val="8C8C8C"/>
-          </a:solidFill>
-          <a:ln/>
-        </p:spPr>
-      </p:sp>
-      <p:sp>
-        <p:nvSpPr>
-          <p:cNvPr id="416" name="Shape 414"/>
-          <p:cNvSpPr/>
-          <p:nvPr/>
-        </p:nvSpPr>
-        <p:spPr>
-          <a:xfrm>
-            <a:off x="6821394" y="2304288"/>
-            <a:ext cx="4572" cy="329184"/>
-          </a:xfrm>
-          <a:prstGeom prst="rect">
-            <a:avLst/>
-          </a:prstGeom>
-          <a:solidFill>
-            <a:srgbClr val="8C8C8C"/>
-          </a:solidFill>
-          <a:ln/>
-        </p:spPr>
-      </p:sp>
-      <p:sp>
-        <p:nvSpPr>
-          <p:cNvPr id="417" name="Shape 415"/>
-          <p:cNvSpPr/>
-          <p:nvPr/>
-        </p:nvSpPr>
-        <p:spPr>
-          <a:xfrm>
-            <a:off x="6833704" y="2304288"/>
-            <a:ext cx="4572" cy="329184"/>
-          </a:xfrm>
-          <a:prstGeom prst="rect">
-            <a:avLst/>
-          </a:prstGeom>
-          <a:solidFill>
-            <a:srgbClr val="8C8C8C"/>
-          </a:solidFill>
-          <a:ln/>
-        </p:spPr>
-      </p:sp>
-      <p:sp>
-        <p:nvSpPr>
-          <p:cNvPr id="418" name="Shape 416"/>
-          <p:cNvSpPr/>
-          <p:nvPr/>
-        </p:nvSpPr>
-        <p:spPr>
-          <a:xfrm>
-            <a:off x="6837312" y="2304288"/>
-            <a:ext cx="4572" cy="329184"/>
-          </a:xfrm>
-          <a:prstGeom prst="rect">
-            <a:avLst/>
-          </a:prstGeom>
-          <a:solidFill>
-            <a:srgbClr val="8C8C8C"/>
-          </a:solidFill>
-          <a:ln/>
-        </p:spPr>
-      </p:sp>
-      <p:sp>
-        <p:nvSpPr>
-          <p:cNvPr id="419" name="Shape 417"/>
-          <p:cNvSpPr/>
-          <p:nvPr/>
-        </p:nvSpPr>
-        <p:spPr>
-          <a:xfrm>
-            <a:off x="6849622" y="2304288"/>
-            <a:ext cx="4572" cy="329184"/>
-          </a:xfrm>
-          <a:prstGeom prst="rect">
-            <a:avLst/>
-          </a:prstGeom>
-          <a:solidFill>
-            <a:srgbClr val="8C8C8C"/>
-          </a:solidFill>
-          <a:ln/>
-        </p:spPr>
-      </p:sp>
-      <p:sp>
-        <p:nvSpPr>
-          <p:cNvPr id="420" name="Shape 418"/>
-          <p:cNvSpPr/>
-          <p:nvPr/>
-        </p:nvSpPr>
-        <p:spPr>
-          <a:xfrm>
-            <a:off x="6853159" y="2304288"/>
-            <a:ext cx="4572" cy="329184"/>
-          </a:xfrm>
-          <a:prstGeom prst="rect">
-            <a:avLst/>
-          </a:prstGeom>
-          <a:solidFill>
-            <a:srgbClr val="8C8C8C"/>
-          </a:solidFill>
-          <a:ln/>
-        </p:spPr>
-      </p:sp>
-      <p:sp>
-        <p:nvSpPr>
-          <p:cNvPr id="421" name="Shape 419"/>
-          <p:cNvSpPr/>
-          <p:nvPr/>
-        </p:nvSpPr>
-        <p:spPr>
-          <a:xfrm>
-            <a:off x="6865468" y="2304288"/>
-            <a:ext cx="4572" cy="329184"/>
-          </a:xfrm>
-          <a:prstGeom prst="rect">
-            <a:avLst/>
-          </a:prstGeom>
-          <a:solidFill>
-            <a:srgbClr val="8C8C8C"/>
-          </a:solidFill>
-          <a:ln/>
-        </p:spPr>
-      </p:sp>
-      <p:sp>
-        <p:nvSpPr>
-          <p:cNvPr id="422" name="Shape 420"/>
-          <p:cNvSpPr/>
-          <p:nvPr/>
-        </p:nvSpPr>
-        <p:spPr>
-          <a:xfrm>
-            <a:off x="6869147" y="2304288"/>
-            <a:ext cx="4572" cy="329184"/>
-          </a:xfrm>
-          <a:prstGeom prst="rect">
-            <a:avLst/>
-          </a:prstGeom>
-          <a:solidFill>
-            <a:srgbClr val="8C8C8C"/>
-          </a:solidFill>
-          <a:ln/>
-        </p:spPr>
-      </p:sp>
-      <p:sp>
-        <p:nvSpPr>
-          <p:cNvPr id="423" name="Shape 421"/>
-          <p:cNvSpPr/>
-          <p:nvPr/>
-        </p:nvSpPr>
-        <p:spPr>
-          <a:xfrm>
-            <a:off x="6881598" y="2304288"/>
-            <a:ext cx="4572" cy="329184"/>
-          </a:xfrm>
-          <a:prstGeom prst="rect">
-            <a:avLst/>
-          </a:prstGeom>
-          <a:solidFill>
-            <a:srgbClr val="8C8C8C"/>
-          </a:solidFill>
-          <a:ln/>
-        </p:spPr>
-      </p:sp>
-      <p:sp>
-        <p:nvSpPr>
-          <p:cNvPr id="424" name="Shape 422"/>
-          <p:cNvSpPr/>
-          <p:nvPr/>
-        </p:nvSpPr>
-        <p:spPr>
-          <a:xfrm>
-            <a:off x="6885135" y="2304288"/>
-            <a:ext cx="4572" cy="329184"/>
-          </a:xfrm>
-          <a:prstGeom prst="rect">
-            <a:avLst/>
-          </a:prstGeom>
-          <a:solidFill>
-            <a:srgbClr val="8C8C8C"/>
-          </a:solidFill>
-          <a:ln/>
-        </p:spPr>
-      </p:sp>
-      <p:sp>
-        <p:nvSpPr>
-          <p:cNvPr id="425" name="Shape 423"/>
-          <p:cNvSpPr/>
-          <p:nvPr/>
-        </p:nvSpPr>
-        <p:spPr>
-          <a:xfrm>
-            <a:off x="6897445" y="2304288"/>
-            <a:ext cx="4572" cy="329184"/>
-          </a:xfrm>
-          <a:prstGeom prst="rect">
-            <a:avLst/>
-          </a:prstGeom>
-          <a:solidFill>
-            <a:srgbClr val="8C8C8C"/>
-          </a:solidFill>
-          <a:ln/>
-        </p:spPr>
-      </p:sp>
-      <p:sp>
-        <p:nvSpPr>
-          <p:cNvPr id="426" name="Shape 424"/>
-          <p:cNvSpPr/>
-          <p:nvPr/>
-        </p:nvSpPr>
-        <p:spPr>
-          <a:xfrm>
-            <a:off x="6901053" y="2304288"/>
-            <a:ext cx="4572" cy="329184"/>
-          </a:xfrm>
-          <a:prstGeom prst="rect">
-            <a:avLst/>
-          </a:prstGeom>
-          <a:solidFill>
-            <a:srgbClr val="8C8C8C"/>
-          </a:solidFill>
-          <a:ln/>
-        </p:spPr>
-      </p:sp>
-      <p:sp>
-        <p:nvSpPr>
-          <p:cNvPr id="427" name="Shape 425"/>
-          <p:cNvSpPr/>
-          <p:nvPr/>
-        </p:nvSpPr>
-        <p:spPr>
-          <a:xfrm>
-            <a:off x="6913362" y="2304288"/>
-            <a:ext cx="4572" cy="329184"/>
-          </a:xfrm>
-          <a:prstGeom prst="rect">
-            <a:avLst/>
-          </a:prstGeom>
-          <a:solidFill>
-            <a:srgbClr val="8C8C8C"/>
-          </a:solidFill>
-          <a:ln/>
-        </p:spPr>
-      </p:sp>
-      <p:sp>
-        <p:nvSpPr>
-          <p:cNvPr id="428" name="Shape 426"/>
-          <p:cNvSpPr/>
-          <p:nvPr/>
-        </p:nvSpPr>
-        <p:spPr>
-          <a:xfrm>
-            <a:off x="6919234" y="2304288"/>
-            <a:ext cx="4572" cy="329184"/>
-          </a:xfrm>
-          <a:prstGeom prst="rect">
-            <a:avLst/>
-          </a:prstGeom>
-          <a:solidFill>
-            <a:srgbClr val="8C8C8C"/>
-          </a:solidFill>
-          <a:ln/>
-        </p:spPr>
-      </p:sp>
-      <p:sp>
-        <p:nvSpPr>
-          <p:cNvPr id="429" name="Shape 427"/>
-          <p:cNvSpPr/>
-          <p:nvPr/>
-        </p:nvSpPr>
-        <p:spPr>
-          <a:xfrm>
-            <a:off x="6960266" y="2304288"/>
-            <a:ext cx="9904" cy="329184"/>
-          </a:xfrm>
-          <a:prstGeom prst="rect">
-            <a:avLst/>
-          </a:prstGeom>
-          <a:solidFill>
-            <a:srgbClr val="8C8C8C"/>
-          </a:solidFill>
-          <a:ln/>
-        </p:spPr>
-      </p:sp>
-      <p:sp>
-        <p:nvSpPr>
-          <p:cNvPr id="430" name="Shape 428"/>
-          <p:cNvSpPr/>
-          <p:nvPr/>
-        </p:nvSpPr>
-        <p:spPr>
-          <a:xfrm>
-            <a:off x="7044664" y="2304288"/>
-            <a:ext cx="5801" cy="329184"/>
-          </a:xfrm>
-          <a:prstGeom prst="rect">
-            <a:avLst/>
-          </a:prstGeom>
-          <a:solidFill>
-            <a:srgbClr val="8C8C8C"/>
-          </a:solidFill>
-          <a:ln/>
-        </p:spPr>
-      </p:sp>
-      <p:sp>
-        <p:nvSpPr>
-          <p:cNvPr id="431" name="Text 429"/>
-          <p:cNvSpPr/>
-          <p:nvPr/>
-        </p:nvSpPr>
-        <p:spPr>
-          <a:xfrm>
-            <a:off x="7671816" y="2276856"/>
-            <a:ext cx="914400" cy="384048"/>
-          </a:xfrm>
-          <a:prstGeom prst="rect">
-            <a:avLst/>
-          </a:prstGeom>
-          <a:noFill/>
-          <a:ln/>
-        </p:spPr>
-        <p:txBody>
-          <a:bodyPr wrap="square" lIns="0" tIns="0" rIns="0" bIns="0" rtlCol="0" anchor="ctr"/>
-          <a:lstStyle/>
-          <a:p>
-            <a:pPr indent="0" marL="0">
-              <a:buNone/>
-            </a:pPr>
-            <a:r>
-              <a:rPr lang="en-US" sz="900" dirty="0">
-                <a:solidFill>
-                  <a:srgbClr val="5E5E5E"/>
-                </a:solidFill>
-                <a:latin typeface="NVIDIA Sans" pitchFamily="34" charset="0"/>
-                <a:ea typeface="NVIDIA Sans" pitchFamily="34" charset="-122"/>
-                <a:cs typeface="NVIDIA Sans" pitchFamily="34" charset="-120"/>
-              </a:rPr>
-              <a:t>16 ms · 2%</a:t>
-            </a:r>
-            <a:endParaRPr lang="en-US" sz="900" dirty="0"/>
-          </a:p>
-        </p:txBody>
-      </p:sp>
-      <p:sp>
-        <p:nvSpPr>
-          <p:cNvPr id="432" name="Shape 430"/>
-          <p:cNvSpPr/>
-          <p:nvPr/>
-        </p:nvSpPr>
-        <p:spPr>
-          <a:xfrm>
-            <a:off x="1508760" y="2770632"/>
+            <a:off x="1508760" y="2569464"/>
             <a:ext cx="6126480" cy="0"/>
           </a:xfrm>
           <a:prstGeom prst="line">
@@ -17248,13 +13008,13 @@
       </p:sp>
       <p:sp>
         <p:nvSpPr>
-          <p:cNvPr id="433" name="Shape 431"/>
-          <p:cNvSpPr/>
-          <p:nvPr/>
-        </p:nvSpPr>
-        <p:spPr>
-          <a:xfrm>
-            <a:off x="1508760" y="2770632"/>
+          <p:cNvPr id="221" name="Shape 219"/>
+          <p:cNvSpPr/>
+          <p:nvPr/>
+        </p:nvSpPr>
+        <p:spPr>
+          <a:xfrm>
+            <a:off x="1508760" y="2569464"/>
             <a:ext cx="0" cy="45720"/>
           </a:xfrm>
           <a:prstGeom prst="line">
@@ -17271,13 +13031,13 @@
       </p:sp>
       <p:sp>
         <p:nvSpPr>
-          <p:cNvPr id="434" name="Text 432"/>
-          <p:cNvSpPr/>
-          <p:nvPr/>
-        </p:nvSpPr>
-        <p:spPr>
-          <a:xfrm>
-            <a:off x="1234440" y="2816352"/>
+          <p:cNvPr id="222" name="Text 220"/>
+          <p:cNvSpPr/>
+          <p:nvPr/>
+        </p:nvSpPr>
+        <p:spPr>
+          <a:xfrm>
+            <a:off x="1234440" y="2615184"/>
             <a:ext cx="548640" cy="182880"/>
           </a:xfrm>
           <a:prstGeom prst="rect">
@@ -17310,13 +13070,13 @@
       </p:sp>
       <p:sp>
         <p:nvSpPr>
-          <p:cNvPr id="435" name="Shape 433"/>
-          <p:cNvSpPr/>
-          <p:nvPr/>
-        </p:nvSpPr>
-        <p:spPr>
-          <a:xfrm>
-            <a:off x="2923651" y="2770632"/>
+          <p:cNvPr id="223" name="Shape 221"/>
+          <p:cNvSpPr/>
+          <p:nvPr/>
+        </p:nvSpPr>
+        <p:spPr>
+          <a:xfrm>
+            <a:off x="2923651" y="2569464"/>
             <a:ext cx="0" cy="45720"/>
           </a:xfrm>
           <a:prstGeom prst="line">
@@ -17333,13 +13093,13 @@
       </p:sp>
       <p:sp>
         <p:nvSpPr>
-          <p:cNvPr id="436" name="Text 434"/>
-          <p:cNvSpPr/>
-          <p:nvPr/>
-        </p:nvSpPr>
-        <p:spPr>
-          <a:xfrm>
-            <a:off x="2649331" y="2816352"/>
+          <p:cNvPr id="224" name="Text 222"/>
+          <p:cNvSpPr/>
+          <p:nvPr/>
+        </p:nvSpPr>
+        <p:spPr>
+          <a:xfrm>
+            <a:off x="2649331" y="2615184"/>
             <a:ext cx="548640" cy="182880"/>
           </a:xfrm>
           <a:prstGeom prst="rect">
@@ -17372,13 +13132,13 @@
       </p:sp>
       <p:sp>
         <p:nvSpPr>
-          <p:cNvPr id="437" name="Shape 435"/>
-          <p:cNvSpPr/>
-          <p:nvPr/>
-        </p:nvSpPr>
-        <p:spPr>
-          <a:xfrm>
-            <a:off x="4338543" y="2770632"/>
+          <p:cNvPr id="225" name="Shape 223"/>
+          <p:cNvSpPr/>
+          <p:nvPr/>
+        </p:nvSpPr>
+        <p:spPr>
+          <a:xfrm>
+            <a:off x="4338543" y="2569464"/>
             <a:ext cx="0" cy="45720"/>
           </a:xfrm>
           <a:prstGeom prst="line">
@@ -17395,13 +13155,13 @@
       </p:sp>
       <p:sp>
         <p:nvSpPr>
-          <p:cNvPr id="438" name="Text 436"/>
-          <p:cNvSpPr/>
-          <p:nvPr/>
-        </p:nvSpPr>
-        <p:spPr>
-          <a:xfrm>
-            <a:off x="4064223" y="2816352"/>
+          <p:cNvPr id="226" name="Text 224"/>
+          <p:cNvSpPr/>
+          <p:nvPr/>
+        </p:nvSpPr>
+        <p:spPr>
+          <a:xfrm>
+            <a:off x="4064223" y="2615184"/>
             <a:ext cx="548640" cy="182880"/>
           </a:xfrm>
           <a:prstGeom prst="rect">
@@ -17434,13 +13194,13 @@
       </p:sp>
       <p:sp>
         <p:nvSpPr>
-          <p:cNvPr id="439" name="Shape 437"/>
-          <p:cNvSpPr/>
-          <p:nvPr/>
-        </p:nvSpPr>
-        <p:spPr>
-          <a:xfrm>
-            <a:off x="5753434" y="2770632"/>
+          <p:cNvPr id="227" name="Shape 225"/>
+          <p:cNvSpPr/>
+          <p:nvPr/>
+        </p:nvSpPr>
+        <p:spPr>
+          <a:xfrm>
+            <a:off x="5753434" y="2569464"/>
             <a:ext cx="0" cy="45720"/>
           </a:xfrm>
           <a:prstGeom prst="line">
@@ -17457,13 +13217,13 @@
       </p:sp>
       <p:sp>
         <p:nvSpPr>
-          <p:cNvPr id="440" name="Text 438"/>
-          <p:cNvSpPr/>
-          <p:nvPr/>
-        </p:nvSpPr>
-        <p:spPr>
-          <a:xfrm>
-            <a:off x="5479114" y="2816352"/>
+          <p:cNvPr id="228" name="Text 226"/>
+          <p:cNvSpPr/>
+          <p:nvPr/>
+        </p:nvSpPr>
+        <p:spPr>
+          <a:xfrm>
+            <a:off x="5479114" y="2615184"/>
             <a:ext cx="548640" cy="182880"/>
           </a:xfrm>
           <a:prstGeom prst="rect">
@@ -17496,13 +13256,13 @@
       </p:sp>
       <p:sp>
         <p:nvSpPr>
-          <p:cNvPr id="441" name="Shape 439"/>
-          <p:cNvSpPr/>
-          <p:nvPr/>
-        </p:nvSpPr>
-        <p:spPr>
-          <a:xfrm>
-            <a:off x="7168326" y="2770632"/>
+          <p:cNvPr id="229" name="Shape 227"/>
+          <p:cNvSpPr/>
+          <p:nvPr/>
+        </p:nvSpPr>
+        <p:spPr>
+          <a:xfrm>
+            <a:off x="7168326" y="2569464"/>
             <a:ext cx="0" cy="45720"/>
           </a:xfrm>
           <a:prstGeom prst="line">
@@ -17519,13 +13279,13 @@
       </p:sp>
       <p:sp>
         <p:nvSpPr>
-          <p:cNvPr id="442" name="Text 440"/>
-          <p:cNvSpPr/>
-          <p:nvPr/>
-        </p:nvSpPr>
-        <p:spPr>
-          <a:xfrm>
-            <a:off x="6894006" y="2816352"/>
+          <p:cNvPr id="230" name="Text 228"/>
+          <p:cNvSpPr/>
+          <p:nvPr/>
+        </p:nvSpPr>
+        <p:spPr>
+          <a:xfrm>
+            <a:off x="6894006" y="2615184"/>
             <a:ext cx="548640" cy="182880"/>
           </a:xfrm>
           <a:prstGeom prst="rect">
@@ -17558,13 +13318,13 @@
       </p:sp>
       <p:sp>
         <p:nvSpPr>
-          <p:cNvPr id="443" name="Text 441"/>
-          <p:cNvSpPr/>
-          <p:nvPr/>
-        </p:nvSpPr>
-        <p:spPr>
-          <a:xfrm>
-            <a:off x="5806440" y="2971800"/>
+          <p:cNvPr id="231" name="Text 229"/>
+          <p:cNvSpPr/>
+          <p:nvPr/>
+        </p:nvSpPr>
+        <p:spPr>
+          <a:xfrm>
+            <a:off x="5806440" y="2770632"/>
             <a:ext cx="1828800" cy="182880"/>
           </a:xfrm>
           <a:prstGeom prst="rect">
@@ -17597,13 +13357,13 @@
       </p:sp>
       <p:sp>
         <p:nvSpPr>
-          <p:cNvPr id="444" name="Shape 442"/>
-          <p:cNvSpPr/>
-          <p:nvPr/>
-        </p:nvSpPr>
-        <p:spPr>
-          <a:xfrm>
-            <a:off x="457200" y="3291840"/>
+          <p:cNvPr id="232" name="Shape 230"/>
+          <p:cNvSpPr/>
+          <p:nvPr/>
+        </p:nvSpPr>
+        <p:spPr>
+          <a:xfrm>
+            <a:off x="457200" y="3090672"/>
             <a:ext cx="45720" cy="475488"/>
           </a:xfrm>
           <a:prstGeom prst="rect">
@@ -17617,13 +13377,13 @@
       </p:sp>
       <p:sp>
         <p:nvSpPr>
-          <p:cNvPr id="445" name="Text 443"/>
-          <p:cNvSpPr/>
-          <p:nvPr/>
-        </p:nvSpPr>
-        <p:spPr>
-          <a:xfrm>
-            <a:off x="621792" y="3273552"/>
+          <p:cNvPr id="233" name="Text 231"/>
+          <p:cNvSpPr/>
+          <p:nvPr/>
+        </p:nvSpPr>
+        <p:spPr>
+          <a:xfrm>
+            <a:off x="621792" y="3072384"/>
             <a:ext cx="3840480" cy="548640"/>
           </a:xfrm>
           <a:prstGeom prst="rect">
@@ -17670,13 +13430,13 @@
       </p:sp>
       <p:sp>
         <p:nvSpPr>
-          <p:cNvPr id="446" name="Shape 444"/>
-          <p:cNvSpPr/>
-          <p:nvPr/>
-        </p:nvSpPr>
-        <p:spPr>
-          <a:xfrm>
-            <a:off x="4663440" y="3291840"/>
+          <p:cNvPr id="234" name="Shape 232"/>
+          <p:cNvSpPr/>
+          <p:nvPr/>
+        </p:nvSpPr>
+        <p:spPr>
+          <a:xfrm>
+            <a:off x="4663440" y="3090672"/>
             <a:ext cx="45720" cy="475488"/>
           </a:xfrm>
           <a:prstGeom prst="rect">
@@ -17690,13 +13450,13 @@
       </p:sp>
       <p:sp>
         <p:nvSpPr>
-          <p:cNvPr id="447" name="Text 445"/>
-          <p:cNvSpPr/>
-          <p:nvPr/>
-        </p:nvSpPr>
-        <p:spPr>
-          <a:xfrm>
-            <a:off x="4828032" y="3273552"/>
+          <p:cNvPr id="235" name="Text 233"/>
+          <p:cNvSpPr/>
+          <p:nvPr/>
+        </p:nvSpPr>
+        <p:spPr>
+          <a:xfrm>
+            <a:off x="4828032" y="3072384"/>
             <a:ext cx="3840480" cy="548640"/>
           </a:xfrm>
           <a:prstGeom prst="rect">
@@ -17743,13 +13503,13 @@
       </p:sp>
       <p:sp>
         <p:nvSpPr>
-          <p:cNvPr id="448" name="Shape 446"/>
-          <p:cNvSpPr/>
-          <p:nvPr/>
-        </p:nvSpPr>
-        <p:spPr>
-          <a:xfrm>
-            <a:off x="457200" y="3858768"/>
+          <p:cNvPr id="236" name="Shape 234"/>
+          <p:cNvSpPr/>
+          <p:nvPr/>
+        </p:nvSpPr>
+        <p:spPr>
+          <a:xfrm>
+            <a:off x="457200" y="3657600"/>
             <a:ext cx="45720" cy="475488"/>
           </a:xfrm>
           <a:prstGeom prst="rect">
@@ -17763,13 +13523,13 @@
       </p:sp>
       <p:sp>
         <p:nvSpPr>
-          <p:cNvPr id="449" name="Text 447"/>
-          <p:cNvSpPr/>
-          <p:nvPr/>
-        </p:nvSpPr>
-        <p:spPr>
-          <a:xfrm>
-            <a:off x="621792" y="3840480"/>
+          <p:cNvPr id="237" name="Text 235"/>
+          <p:cNvSpPr/>
+          <p:nvPr/>
+        </p:nvSpPr>
+        <p:spPr>
+          <a:xfrm>
+            <a:off x="621792" y="3639312"/>
             <a:ext cx="3840480" cy="548640"/>
           </a:xfrm>
           <a:prstGeom prst="rect">
@@ -17816,13 +13576,13 @@
       </p:sp>
       <p:sp>
         <p:nvSpPr>
-          <p:cNvPr id="450" name="Shape 448"/>
-          <p:cNvSpPr/>
-          <p:nvPr/>
-        </p:nvSpPr>
-        <p:spPr>
-          <a:xfrm>
-            <a:off x="4663440" y="3858768"/>
+          <p:cNvPr id="238" name="Shape 236"/>
+          <p:cNvSpPr/>
+          <p:nvPr/>
+        </p:nvSpPr>
+        <p:spPr>
+          <a:xfrm>
+            <a:off x="4663440" y="3657600"/>
             <a:ext cx="45720" cy="475488"/>
           </a:xfrm>
           <a:prstGeom prst="rect">
@@ -17836,13 +13596,13 @@
       </p:sp>
       <p:sp>
         <p:nvSpPr>
-          <p:cNvPr id="451" name="Text 449"/>
-          <p:cNvSpPr/>
-          <p:nvPr/>
-        </p:nvSpPr>
-        <p:spPr>
-          <a:xfrm>
-            <a:off x="4828032" y="3840480"/>
+          <p:cNvPr id="239" name="Text 237"/>
+          <p:cNvSpPr/>
+          <p:nvPr/>
+        </p:nvSpPr>
+        <p:spPr>
+          <a:xfrm>
+            <a:off x="4828032" y="3639312"/>
             <a:ext cx="3840480" cy="548640"/>
           </a:xfrm>
           <a:prstGeom prst="rect">
@@ -17889,7 +13649,7 @@
       </p:sp>
       <p:sp>
         <p:nvSpPr>
-          <p:cNvPr id="452" name="Text 450"/>
+          <p:cNvPr id="240" name="Text 238"/>
           <p:cNvSpPr/>
           <p:nvPr/>
         </p:nvSpPr>
@@ -17928,7 +13688,7 @@
       </p:sp>
       <p:sp>
         <p:nvSpPr>
-          <p:cNvPr id="453" name="Text 451"/>
+          <p:cNvPr id="241" name="Text 239"/>
           <p:cNvSpPr/>
           <p:nvPr/>
         </p:nvSpPr>
@@ -17967,7 +13727,7 @@
       </p:sp>
       <p:sp>
         <p:nvSpPr>
-          <p:cNvPr id="454" name="Shape 452"/>
+          <p:cNvPr id="242" name="Shape 240"/>
           <p:cNvSpPr/>
           <p:nvPr/>
         </p:nvSpPr>
@@ -17987,7 +13747,7 @@
       </p:sp>
       <p:pic>
         <p:nvPicPr>
-          <p:cNvPr id="455" name="Image 0" descr="/app/logos/nvidia-logo-blk-sm.png">    </p:cNvPr>
+          <p:cNvPr id="243" name="Image 0" descr="/app/logos/nvidia-logo-blk-sm.png">    </p:cNvPr>
           <p:cNvPicPr>
             <a:picLocks noChangeAspect="1"/>
           </p:cNvPicPr>

--- a/docs/slides/qwenpi-optimization.pptx
+++ b/docs/slides/qwenpi-optimization.pptx
@@ -6911,7 +6911,7 @@
         <p:spPr>
           <a:xfrm>
             <a:off x="411480" y="1234440"/>
-            <a:ext cx="3141155" cy="3154680"/>
+            <a:ext cx="3522026" cy="3017520"/>
           </a:xfrm>
           <a:prstGeom prst="rect">
             <a:avLst/>

--- a/docs/slides/qwenpi-optimization.pptx
+++ b/docs/slides/qwenpi-optimization.pptx
@@ -1043,8 +1043,9 @@
           <a:p>
             <a:r>
               <a:rPr lang="en-US" dirty="0"/>
-              <a:t>Timeline bars are real busy intervals from the nsys sqlite export (kernels classified compute vs NCCL vs memcpy).
-[IMPORTANT] Key message: this workload was CPU-launch-bound, not GPU-bound. That ordering drives the whole optimization plan.</a:t>
+              <a:t>Timeline bars are real busy intervals from the nsys sqlite; badges 1/2/4/5 point at where each problem is visible.
+Rows 2+3 land as one ladder level (pipeline &amp; caching, -117 ms); row 5 combines bucket sizing (PR11) and the redundant-flatten removal (PR12); row 6 covers the two config-level fixes.
+[IMPORTANT] Key message: every fix in this deck was first SEEN here as a trace shape or a measured kernel cost - problems first, solutions second.</a:t>
             </a:r>
             <a:endParaRPr lang="en-US" dirty="0"/>
           </a:p>
@@ -8489,7 +8490,7 @@
                 <a:ea typeface="NVIDIA Sans" pitchFamily="34" charset="-122"/>
                 <a:cs typeface="NVIDIA Sans" pitchFamily="34" charset="-120"/>
               </a:rPr>
-              <a:t>One baseline step from the nsys sqlite (866 ms), aligned to the model phases</a:t>
+              <a:t>One baseline step (nsys, 866 ms): six problems you can see in the trace — each maps to a fix</a:t>
             </a:r>
             <a:endParaRPr lang="en-US" sz="1500" dirty="0"/>
           </a:p>
@@ -8503,7 +8504,7 @@
         </p:nvSpPr>
         <p:spPr>
           <a:xfrm>
-            <a:off x="1508760" y="1325880"/>
+            <a:off x="1508760" y="1261872"/>
             <a:ext cx="1912226" cy="237744"/>
           </a:xfrm>
           <a:prstGeom prst="rect">
@@ -8523,7 +8524,7 @@
         </p:nvSpPr>
         <p:spPr>
           <a:xfrm>
-            <a:off x="1508760" y="1325880"/>
+            <a:off x="1508760" y="1261872"/>
             <a:ext cx="1912226" cy="237744"/>
           </a:xfrm>
           <a:prstGeom prst="rect">
@@ -8562,7 +8563,7 @@
         </p:nvSpPr>
         <p:spPr>
           <a:xfrm>
-            <a:off x="3421693" y="1325880"/>
+            <a:off x="3421693" y="1261872"/>
             <a:ext cx="3639101" cy="237744"/>
           </a:xfrm>
           <a:prstGeom prst="rect">
@@ -8582,7 +8583,7 @@
         </p:nvSpPr>
         <p:spPr>
           <a:xfrm>
-            <a:off x="3421693" y="1325880"/>
+            <a:off x="3421693" y="1261872"/>
             <a:ext cx="3639101" cy="237744"/>
           </a:xfrm>
           <a:prstGeom prst="rect">
@@ -8621,7 +8622,7 @@
         </p:nvSpPr>
         <p:spPr>
           <a:xfrm>
-            <a:off x="7060794" y="1325880"/>
+            <a:off x="7060794" y="1261872"/>
             <a:ext cx="574446" cy="237744"/>
           </a:xfrm>
           <a:prstGeom prst="rect">
@@ -8641,7 +8642,7 @@
         </p:nvSpPr>
         <p:spPr>
           <a:xfrm>
-            <a:off x="7060794" y="1325880"/>
+            <a:off x="7060794" y="1261872"/>
             <a:ext cx="574446" cy="237744"/>
           </a:xfrm>
           <a:prstGeom prst="rect">
@@ -8680,7 +8681,7 @@
         </p:nvSpPr>
         <p:spPr>
           <a:xfrm>
-            <a:off x="457200" y="1325880"/>
+            <a:off x="457200" y="1261872"/>
             <a:ext cx="978408" cy="237744"/>
           </a:xfrm>
           <a:prstGeom prst="rect">
@@ -8719,8 +8720,8 @@
         </p:nvSpPr>
         <p:spPr>
           <a:xfrm>
-            <a:off x="457200" y="1600200"/>
-            <a:ext cx="978408" cy="384048"/>
+            <a:off x="457200" y="1536192"/>
+            <a:ext cx="978408" cy="310896"/>
           </a:xfrm>
           <a:prstGeom prst="rect">
             <a:avLst/>
@@ -8758,8 +8759,8 @@
         </p:nvSpPr>
         <p:spPr>
           <a:xfrm>
-            <a:off x="1508760" y="1600200"/>
-            <a:ext cx="6126480" cy="384048"/>
+            <a:off x="1508760" y="1536192"/>
+            <a:ext cx="6126480" cy="310896"/>
           </a:xfrm>
           <a:prstGeom prst="rect">
             <a:avLst/>
@@ -8783,8 +8784,8 @@
         </p:nvSpPr>
         <p:spPr>
           <a:xfrm>
-            <a:off x="2073655" y="1627632"/>
-            <a:ext cx="4572" cy="329184"/>
+            <a:off x="2073655" y="1563624"/>
+            <a:ext cx="4572" cy="256032"/>
           </a:xfrm>
           <a:prstGeom prst="rect">
             <a:avLst/>
@@ -8803,8 +8804,8 @@
         </p:nvSpPr>
         <p:spPr>
           <a:xfrm>
-            <a:off x="2112919" y="1627632"/>
-            <a:ext cx="4572" cy="329184"/>
+            <a:off x="2112919" y="1563624"/>
+            <a:ext cx="4572" cy="256032"/>
           </a:xfrm>
           <a:prstGeom prst="rect">
             <a:avLst/>
@@ -8823,8 +8824,8 @@
         </p:nvSpPr>
         <p:spPr>
           <a:xfrm>
-            <a:off x="2114970" y="1627632"/>
-            <a:ext cx="5660" cy="329184"/>
+            <a:off x="2114970" y="1563624"/>
+            <a:ext cx="5660" cy="256032"/>
           </a:xfrm>
           <a:prstGeom prst="rect">
             <a:avLst/>
@@ -8843,8 +8844,8 @@
         </p:nvSpPr>
         <p:spPr>
           <a:xfrm>
-            <a:off x="2123106" y="1627632"/>
-            <a:ext cx="25539" cy="329184"/>
+            <a:off x="2123106" y="1563624"/>
+            <a:ext cx="25539" cy="256032"/>
           </a:xfrm>
           <a:prstGeom prst="rect">
             <a:avLst/>
@@ -8863,8 +8864,8 @@
         </p:nvSpPr>
         <p:spPr>
           <a:xfrm>
-            <a:off x="2151121" y="1627632"/>
-            <a:ext cx="4572" cy="329184"/>
+            <a:off x="2151121" y="1563624"/>
+            <a:ext cx="4572" cy="256032"/>
           </a:xfrm>
           <a:prstGeom prst="rect">
             <a:avLst/>
@@ -8883,8 +8884,8 @@
         </p:nvSpPr>
         <p:spPr>
           <a:xfrm>
-            <a:off x="2156285" y="1627632"/>
-            <a:ext cx="5094" cy="329184"/>
+            <a:off x="2156285" y="1563624"/>
+            <a:ext cx="5094" cy="256032"/>
           </a:xfrm>
           <a:prstGeom prst="rect">
             <a:avLst/>
@@ -8903,8 +8904,8 @@
         </p:nvSpPr>
         <p:spPr>
           <a:xfrm>
-            <a:off x="2162086" y="1627632"/>
-            <a:ext cx="6579" cy="329184"/>
+            <a:off x="2162086" y="1563624"/>
+            <a:ext cx="6579" cy="256032"/>
           </a:xfrm>
           <a:prstGeom prst="rect">
             <a:avLst/>
@@ -8923,8 +8924,8 @@
         </p:nvSpPr>
         <p:spPr>
           <a:xfrm>
-            <a:off x="2170363" y="1627632"/>
-            <a:ext cx="11956" cy="329184"/>
+            <a:off x="2170363" y="1563624"/>
+            <a:ext cx="11956" cy="256032"/>
           </a:xfrm>
           <a:prstGeom prst="rect">
             <a:avLst/>
@@ -8943,8 +8944,8 @@
         </p:nvSpPr>
         <p:spPr>
           <a:xfrm>
-            <a:off x="2184017" y="1627632"/>
-            <a:ext cx="11602" cy="329184"/>
+            <a:off x="2184017" y="1563624"/>
+            <a:ext cx="11602" cy="256032"/>
           </a:xfrm>
           <a:prstGeom prst="rect">
             <a:avLst/>
@@ -8963,8 +8964,8 @@
         </p:nvSpPr>
         <p:spPr>
           <a:xfrm>
-            <a:off x="2197317" y="1627632"/>
-            <a:ext cx="11390" cy="329184"/>
+            <a:off x="2197317" y="1563624"/>
+            <a:ext cx="11390" cy="256032"/>
           </a:xfrm>
           <a:prstGeom prst="rect">
             <a:avLst/>
@@ -8983,8 +8984,8 @@
         </p:nvSpPr>
         <p:spPr>
           <a:xfrm>
-            <a:off x="2210263" y="1627632"/>
-            <a:ext cx="4881" cy="329184"/>
+            <a:off x="2210263" y="1563624"/>
+            <a:ext cx="4881" cy="256032"/>
           </a:xfrm>
           <a:prstGeom prst="rect">
             <a:avLst/>
@@ -9003,8 +9004,8 @@
         </p:nvSpPr>
         <p:spPr>
           <a:xfrm>
-            <a:off x="2215781" y="1627632"/>
-            <a:ext cx="7711" cy="329184"/>
+            <a:off x="2215781" y="1563624"/>
+            <a:ext cx="7711" cy="256032"/>
           </a:xfrm>
           <a:prstGeom prst="rect">
             <a:avLst/>
@@ -9023,8 +9024,8 @@
         </p:nvSpPr>
         <p:spPr>
           <a:xfrm>
-            <a:off x="2225473" y="1627632"/>
-            <a:ext cx="5023" cy="329184"/>
+            <a:off x="2225473" y="1563624"/>
+            <a:ext cx="5023" cy="256032"/>
           </a:xfrm>
           <a:prstGeom prst="rect">
             <a:avLst/>
@@ -9043,8 +9044,8 @@
         </p:nvSpPr>
         <p:spPr>
           <a:xfrm>
-            <a:off x="2231133" y="1627632"/>
-            <a:ext cx="6296" cy="329184"/>
+            <a:off x="2231133" y="1563624"/>
+            <a:ext cx="6296" cy="256032"/>
           </a:xfrm>
           <a:prstGeom prst="rect">
             <a:avLst/>
@@ -9063,8 +9064,8 @@
         </p:nvSpPr>
         <p:spPr>
           <a:xfrm>
-            <a:off x="2239127" y="1627632"/>
-            <a:ext cx="4811" cy="329184"/>
+            <a:off x="2239127" y="1563624"/>
+            <a:ext cx="4811" cy="256032"/>
           </a:xfrm>
           <a:prstGeom prst="rect">
             <a:avLst/>
@@ -9083,8 +9084,8 @@
         </p:nvSpPr>
         <p:spPr>
           <a:xfrm>
-            <a:off x="2244504" y="1627632"/>
-            <a:ext cx="6650" cy="329184"/>
+            <a:off x="2244504" y="1563624"/>
+            <a:ext cx="6650" cy="256032"/>
           </a:xfrm>
           <a:prstGeom prst="rect">
             <a:avLst/>
@@ -9103,8 +9104,8 @@
         </p:nvSpPr>
         <p:spPr>
           <a:xfrm>
-            <a:off x="2252993" y="1627632"/>
-            <a:ext cx="4881" cy="329184"/>
+            <a:off x="2252993" y="1563624"/>
+            <a:ext cx="4881" cy="256032"/>
           </a:xfrm>
           <a:prstGeom prst="rect">
             <a:avLst/>
@@ -9123,8 +9124,8 @@
         </p:nvSpPr>
         <p:spPr>
           <a:xfrm>
-            <a:off x="2258723" y="1627632"/>
-            <a:ext cx="7499" cy="329184"/>
+            <a:off x="2258723" y="1563624"/>
+            <a:ext cx="7499" cy="256032"/>
           </a:xfrm>
           <a:prstGeom prst="rect">
             <a:avLst/>
@@ -9143,8 +9144,8 @@
         </p:nvSpPr>
         <p:spPr>
           <a:xfrm>
-            <a:off x="2268061" y="1627632"/>
-            <a:ext cx="4881" cy="329184"/>
+            <a:off x="2268061" y="1563624"/>
+            <a:ext cx="4881" cy="256032"/>
           </a:xfrm>
           <a:prstGeom prst="rect">
             <a:avLst/>
@@ -9163,8 +9164,8 @@
         </p:nvSpPr>
         <p:spPr>
           <a:xfrm>
-            <a:off x="2273580" y="1627632"/>
-            <a:ext cx="6296" cy="329184"/>
+            <a:off x="2273580" y="1563624"/>
+            <a:ext cx="6296" cy="256032"/>
           </a:xfrm>
           <a:prstGeom prst="rect">
             <a:avLst/>
@@ -9183,8 +9184,8 @@
         </p:nvSpPr>
         <p:spPr>
           <a:xfrm>
-            <a:off x="2281574" y="1627632"/>
-            <a:ext cx="12310" cy="329184"/>
+            <a:off x="2281574" y="1563624"/>
+            <a:ext cx="12310" cy="256032"/>
           </a:xfrm>
           <a:prstGeom prst="rect">
             <a:avLst/>
@@ -9203,8 +9204,8 @@
         </p:nvSpPr>
         <p:spPr>
           <a:xfrm>
-            <a:off x="2296713" y="1627632"/>
-            <a:ext cx="5164" cy="329184"/>
+            <a:off x="2296713" y="1563624"/>
+            <a:ext cx="5164" cy="256032"/>
           </a:xfrm>
           <a:prstGeom prst="rect">
             <a:avLst/>
@@ -9223,8 +9224,8 @@
         </p:nvSpPr>
         <p:spPr>
           <a:xfrm>
-            <a:off x="2302514" y="1627632"/>
-            <a:ext cx="6650" cy="329184"/>
+            <a:off x="2302514" y="1563624"/>
+            <a:ext cx="6650" cy="256032"/>
           </a:xfrm>
           <a:prstGeom prst="rect">
             <a:avLst/>
@@ -9243,8 +9244,8 @@
         </p:nvSpPr>
         <p:spPr>
           <a:xfrm>
-            <a:off x="2310791" y="1627632"/>
-            <a:ext cx="11531" cy="329184"/>
+            <a:off x="2310791" y="1563624"/>
+            <a:ext cx="11531" cy="256032"/>
           </a:xfrm>
           <a:prstGeom prst="rect">
             <a:avLst/>
@@ -9263,8 +9264,8 @@
         </p:nvSpPr>
         <p:spPr>
           <a:xfrm>
-            <a:off x="2324020" y="1627632"/>
-            <a:ext cx="4952" cy="329184"/>
+            <a:off x="2324020" y="1563624"/>
+            <a:ext cx="4952" cy="256032"/>
           </a:xfrm>
           <a:prstGeom prst="rect">
             <a:avLst/>
@@ -9283,8 +9284,8 @@
         </p:nvSpPr>
         <p:spPr>
           <a:xfrm>
-            <a:off x="2329609" y="1627632"/>
-            <a:ext cx="7074" cy="329184"/>
+            <a:off x="2329609" y="1563624"/>
+            <a:ext cx="7074" cy="256032"/>
           </a:xfrm>
           <a:prstGeom prst="rect">
             <a:avLst/>
@@ -9303,8 +9304,8 @@
         </p:nvSpPr>
         <p:spPr>
           <a:xfrm>
-            <a:off x="2338382" y="1627632"/>
-            <a:ext cx="4952" cy="329184"/>
+            <a:off x="2338382" y="1563624"/>
+            <a:ext cx="4952" cy="256032"/>
           </a:xfrm>
           <a:prstGeom prst="rect">
             <a:avLst/>
@@ -9323,8 +9324,8 @@
         </p:nvSpPr>
         <p:spPr>
           <a:xfrm>
-            <a:off x="2344041" y="1627632"/>
-            <a:ext cx="6509" cy="329184"/>
+            <a:off x="2344041" y="1563624"/>
+            <a:ext cx="6509" cy="256032"/>
           </a:xfrm>
           <a:prstGeom prst="rect">
             <a:avLst/>
@@ -9343,8 +9344,8 @@
         </p:nvSpPr>
         <p:spPr>
           <a:xfrm>
-            <a:off x="2352177" y="1627632"/>
-            <a:ext cx="4740" cy="329184"/>
+            <a:off x="2352177" y="1563624"/>
+            <a:ext cx="4740" cy="256032"/>
           </a:xfrm>
           <a:prstGeom prst="rect">
             <a:avLst/>
@@ -9363,8 +9364,8 @@
         </p:nvSpPr>
         <p:spPr>
           <a:xfrm>
-            <a:off x="2357553" y="1627632"/>
-            <a:ext cx="6226" cy="329184"/>
+            <a:off x="2357553" y="1563624"/>
+            <a:ext cx="6226" cy="256032"/>
           </a:xfrm>
           <a:prstGeom prst="rect">
             <a:avLst/>
@@ -9383,8 +9384,8 @@
         </p:nvSpPr>
         <p:spPr>
           <a:xfrm>
-            <a:off x="2365830" y="1627632"/>
-            <a:ext cx="12734" cy="329184"/>
+            <a:off x="2365830" y="1563624"/>
+            <a:ext cx="12734" cy="256032"/>
           </a:xfrm>
           <a:prstGeom prst="rect">
             <a:avLst/>
@@ -9403,8 +9404,8 @@
         </p:nvSpPr>
         <p:spPr>
           <a:xfrm>
-            <a:off x="2380262" y="1627632"/>
-            <a:ext cx="11390" cy="329184"/>
+            <a:off x="2380262" y="1563624"/>
+            <a:ext cx="11390" cy="256032"/>
           </a:xfrm>
           <a:prstGeom prst="rect">
             <a:avLst/>
@@ -9423,8 +9424,8 @@
         </p:nvSpPr>
         <p:spPr>
           <a:xfrm>
-            <a:off x="2393350" y="1627632"/>
-            <a:ext cx="11178" cy="329184"/>
+            <a:off x="2393350" y="1563624"/>
+            <a:ext cx="11178" cy="256032"/>
           </a:xfrm>
           <a:prstGeom prst="rect">
             <a:avLst/>
@@ -9443,8 +9444,8 @@
         </p:nvSpPr>
         <p:spPr>
           <a:xfrm>
-            <a:off x="2406013" y="1627632"/>
-            <a:ext cx="11319" cy="329184"/>
+            <a:off x="2406013" y="1563624"/>
+            <a:ext cx="11319" cy="256032"/>
           </a:xfrm>
           <a:prstGeom prst="rect">
             <a:avLst/>
@@ -9463,8 +9464,8 @@
         </p:nvSpPr>
         <p:spPr>
           <a:xfrm>
-            <a:off x="2418889" y="1627632"/>
-            <a:ext cx="11814" cy="329184"/>
+            <a:off x="2418889" y="1563624"/>
+            <a:ext cx="11814" cy="256032"/>
           </a:xfrm>
           <a:prstGeom prst="rect">
             <a:avLst/>
@@ -9483,8 +9484,8 @@
         </p:nvSpPr>
         <p:spPr>
           <a:xfrm>
-            <a:off x="2432330" y="1627632"/>
-            <a:ext cx="4811" cy="329184"/>
+            <a:off x="2432330" y="1563624"/>
+            <a:ext cx="4811" cy="256032"/>
           </a:xfrm>
           <a:prstGeom prst="rect">
             <a:avLst/>
@@ -9503,8 +9504,8 @@
         </p:nvSpPr>
         <p:spPr>
           <a:xfrm>
-            <a:off x="2437707" y="1627632"/>
-            <a:ext cx="6438" cy="329184"/>
+            <a:off x="2437707" y="1563624"/>
+            <a:ext cx="6438" cy="256032"/>
           </a:xfrm>
           <a:prstGeom prst="rect">
             <a:avLst/>
@@ -9523,8 +9524,8 @@
         </p:nvSpPr>
         <p:spPr>
           <a:xfrm>
-            <a:off x="2445843" y="1627632"/>
-            <a:ext cx="11885" cy="329184"/>
+            <a:off x="2445843" y="1563624"/>
+            <a:ext cx="11885" cy="256032"/>
           </a:xfrm>
           <a:prstGeom prst="rect">
             <a:avLst/>
@@ -9543,8 +9544,8 @@
         </p:nvSpPr>
         <p:spPr>
           <a:xfrm>
-            <a:off x="2459921" y="1627632"/>
-            <a:ext cx="12097" cy="329184"/>
+            <a:off x="2459921" y="1563624"/>
+            <a:ext cx="12097" cy="256032"/>
           </a:xfrm>
           <a:prstGeom prst="rect">
             <a:avLst/>
@@ -9563,8 +9564,8 @@
         </p:nvSpPr>
         <p:spPr>
           <a:xfrm>
-            <a:off x="2473928" y="1627632"/>
-            <a:ext cx="4881" cy="329184"/>
+            <a:off x="2473928" y="1563624"/>
+            <a:ext cx="4881" cy="256032"/>
           </a:xfrm>
           <a:prstGeom prst="rect">
             <a:avLst/>
@@ -9583,8 +9584,8 @@
         </p:nvSpPr>
         <p:spPr>
           <a:xfrm>
-            <a:off x="2479376" y="1627632"/>
-            <a:ext cx="5094" cy="329184"/>
+            <a:off x="2479376" y="1563624"/>
+            <a:ext cx="5094" cy="256032"/>
           </a:xfrm>
           <a:prstGeom prst="rect">
             <a:avLst/>
@@ -9603,8 +9604,8 @@
         </p:nvSpPr>
         <p:spPr>
           <a:xfrm>
-            <a:off x="2485389" y="1627632"/>
-            <a:ext cx="5660" cy="329184"/>
+            <a:off x="2485389" y="1563624"/>
+            <a:ext cx="5660" cy="256032"/>
           </a:xfrm>
           <a:prstGeom prst="rect">
             <a:avLst/>
@@ -9623,8 +9624,8 @@
         </p:nvSpPr>
         <p:spPr>
           <a:xfrm>
-            <a:off x="2492534" y="1627632"/>
-            <a:ext cx="41386" cy="329184"/>
+            <a:off x="2492534" y="1563624"/>
+            <a:ext cx="41386" cy="256032"/>
           </a:xfrm>
           <a:prstGeom prst="rect">
             <a:avLst/>
@@ -9643,8 +9644,8 @@
         </p:nvSpPr>
         <p:spPr>
           <a:xfrm>
-            <a:off x="2534556" y="1627632"/>
-            <a:ext cx="18111" cy="329184"/>
+            <a:off x="2534556" y="1563624"/>
+            <a:ext cx="18111" cy="256032"/>
           </a:xfrm>
           <a:prstGeom prst="rect">
             <a:avLst/>
@@ -9663,8 +9664,8 @@
         </p:nvSpPr>
         <p:spPr>
           <a:xfrm>
-            <a:off x="2555072" y="1627632"/>
-            <a:ext cx="4572" cy="329184"/>
+            <a:off x="2555072" y="1563624"/>
+            <a:ext cx="4572" cy="256032"/>
           </a:xfrm>
           <a:prstGeom prst="rect">
             <a:avLst/>
@@ -9683,8 +9684,8 @@
         </p:nvSpPr>
         <p:spPr>
           <a:xfrm>
-            <a:off x="2560307" y="1627632"/>
-            <a:ext cx="4572" cy="329184"/>
+            <a:off x="2560307" y="1563624"/>
+            <a:ext cx="4572" cy="256032"/>
           </a:xfrm>
           <a:prstGeom prst="rect">
             <a:avLst/>
@@ -9703,8 +9704,8 @@
         </p:nvSpPr>
         <p:spPr>
           <a:xfrm>
-            <a:off x="2563066" y="1627632"/>
-            <a:ext cx="4572" cy="329184"/>
+            <a:off x="2563066" y="1563624"/>
+            <a:ext cx="4572" cy="256032"/>
           </a:xfrm>
           <a:prstGeom prst="rect">
             <a:avLst/>
@@ -9723,8 +9724,8 @@
         </p:nvSpPr>
         <p:spPr>
           <a:xfrm>
-            <a:off x="2565542" y="1627632"/>
-            <a:ext cx="5094" cy="329184"/>
+            <a:off x="2565542" y="1563624"/>
+            <a:ext cx="5094" cy="256032"/>
           </a:xfrm>
           <a:prstGeom prst="rect">
             <a:avLst/>
@@ -9743,8 +9744,8 @@
         </p:nvSpPr>
         <p:spPr>
           <a:xfrm>
-            <a:off x="2574244" y="1627632"/>
-            <a:ext cx="4572" cy="329184"/>
+            <a:off x="2574244" y="1563624"/>
+            <a:ext cx="4572" cy="256032"/>
           </a:xfrm>
           <a:prstGeom prst="rect">
             <a:avLst/>
@@ -9763,8 +9764,8 @@
         </p:nvSpPr>
         <p:spPr>
           <a:xfrm>
-            <a:off x="2580682" y="1627632"/>
-            <a:ext cx="4572" cy="329184"/>
+            <a:off x="2580682" y="1563624"/>
+            <a:ext cx="4572" cy="256032"/>
           </a:xfrm>
           <a:prstGeom prst="rect">
             <a:avLst/>
@@ -9783,8 +9784,8 @@
         </p:nvSpPr>
         <p:spPr>
           <a:xfrm>
-            <a:off x="2583229" y="1627632"/>
-            <a:ext cx="9055" cy="329184"/>
+            <a:off x="2583229" y="1563624"/>
+            <a:ext cx="9055" cy="256032"/>
           </a:xfrm>
           <a:prstGeom prst="rect">
             <a:avLst/>
@@ -9803,8 +9804,8 @@
         </p:nvSpPr>
         <p:spPr>
           <a:xfrm>
-            <a:off x="2595750" y="1627632"/>
-            <a:ext cx="4572" cy="329184"/>
+            <a:off x="2595750" y="1563624"/>
+            <a:ext cx="4572" cy="256032"/>
           </a:xfrm>
           <a:prstGeom prst="rect">
             <a:avLst/>
@@ -9823,8 +9824,8 @@
         </p:nvSpPr>
         <p:spPr>
           <a:xfrm>
-            <a:off x="2598368" y="1627632"/>
-            <a:ext cx="4572" cy="329184"/>
+            <a:off x="2598368" y="1563624"/>
+            <a:ext cx="4572" cy="256032"/>
           </a:xfrm>
           <a:prstGeom prst="rect">
             <a:avLst/>
@@ -9843,8 +9844,8 @@
         </p:nvSpPr>
         <p:spPr>
           <a:xfrm>
-            <a:off x="2601834" y="1627632"/>
-            <a:ext cx="10541" cy="329184"/>
+            <a:off x="2601834" y="1563624"/>
+            <a:ext cx="10541" cy="256032"/>
           </a:xfrm>
           <a:prstGeom prst="rect">
             <a:avLst/>
@@ -9863,8 +9864,8 @@
         </p:nvSpPr>
         <p:spPr>
           <a:xfrm>
-            <a:off x="2615488" y="1627632"/>
-            <a:ext cx="4572" cy="329184"/>
+            <a:off x="2615488" y="1563624"/>
+            <a:ext cx="4572" cy="256032"/>
           </a:xfrm>
           <a:prstGeom prst="rect">
             <a:avLst/>
@@ -9883,8 +9884,8 @@
         </p:nvSpPr>
         <p:spPr>
           <a:xfrm>
-            <a:off x="2621006" y="1627632"/>
-            <a:ext cx="4572" cy="329184"/>
+            <a:off x="2621006" y="1563624"/>
+            <a:ext cx="4572" cy="256032"/>
           </a:xfrm>
           <a:prstGeom prst="rect">
             <a:avLst/>
@@ -9903,8 +9904,8 @@
         </p:nvSpPr>
         <p:spPr>
           <a:xfrm>
-            <a:off x="2623836" y="1627632"/>
-            <a:ext cx="4572" cy="329184"/>
+            <a:off x="2623836" y="1563624"/>
+            <a:ext cx="4572" cy="256032"/>
           </a:xfrm>
           <a:prstGeom prst="rect">
             <a:avLst/>
@@ -9923,8 +9924,8 @@
         </p:nvSpPr>
         <p:spPr>
           <a:xfrm>
-            <a:off x="2627585" y="1627632"/>
-            <a:ext cx="20657" cy="329184"/>
+            <a:off x="2627585" y="1563624"/>
+            <a:ext cx="20657" cy="256032"/>
           </a:xfrm>
           <a:prstGeom prst="rect">
             <a:avLst/>
@@ -9943,8 +9944,8 @@
         </p:nvSpPr>
         <p:spPr>
           <a:xfrm>
-            <a:off x="2650719" y="1627632"/>
-            <a:ext cx="4572" cy="329184"/>
+            <a:off x="2650719" y="1563624"/>
+            <a:ext cx="4572" cy="256032"/>
           </a:xfrm>
           <a:prstGeom prst="rect">
             <a:avLst/>
@@ -9963,8 +9964,8 @@
         </p:nvSpPr>
         <p:spPr>
           <a:xfrm>
-            <a:off x="2656874" y="1627632"/>
-            <a:ext cx="4572" cy="329184"/>
+            <a:off x="2656874" y="1563624"/>
+            <a:ext cx="4572" cy="256032"/>
           </a:xfrm>
           <a:prstGeom prst="rect">
             <a:avLst/>
@@ -9983,8 +9984,8 @@
         </p:nvSpPr>
         <p:spPr>
           <a:xfrm>
-            <a:off x="2659279" y="1627632"/>
-            <a:ext cx="8419" cy="329184"/>
+            <a:off x="2659279" y="1563624"/>
+            <a:ext cx="8419" cy="256032"/>
           </a:xfrm>
           <a:prstGeom prst="rect">
             <a:avLst/>
@@ -10003,8 +10004,8 @@
         </p:nvSpPr>
         <p:spPr>
           <a:xfrm>
-            <a:off x="2670103" y="1627632"/>
-            <a:ext cx="4572" cy="329184"/>
+            <a:off x="2670103" y="1563624"/>
+            <a:ext cx="4572" cy="256032"/>
           </a:xfrm>
           <a:prstGeom prst="rect">
             <a:avLst/>
@@ -10023,8 +10024,8 @@
         </p:nvSpPr>
         <p:spPr>
           <a:xfrm>
-            <a:off x="2672862" y="1627632"/>
-            <a:ext cx="4572" cy="329184"/>
+            <a:off x="2672862" y="1563624"/>
+            <a:ext cx="4572" cy="256032"/>
           </a:xfrm>
           <a:prstGeom prst="rect">
             <a:avLst/>
@@ -10043,8 +10044,8 @@
         </p:nvSpPr>
         <p:spPr>
           <a:xfrm>
-            <a:off x="2676116" y="1627632"/>
-            <a:ext cx="11319" cy="329184"/>
+            <a:off x="2676116" y="1563624"/>
+            <a:ext cx="11319" cy="256032"/>
           </a:xfrm>
           <a:prstGeom prst="rect">
             <a:avLst/>
@@ -10063,8 +10064,8 @@
         </p:nvSpPr>
         <p:spPr>
           <a:xfrm>
-            <a:off x="2690619" y="1627632"/>
-            <a:ext cx="4572" cy="329184"/>
+            <a:off x="2690619" y="1563624"/>
+            <a:ext cx="4572" cy="256032"/>
           </a:xfrm>
           <a:prstGeom prst="rect">
             <a:avLst/>
@@ -10083,8 +10084,8 @@
         </p:nvSpPr>
         <p:spPr>
           <a:xfrm>
-            <a:off x="2693095" y="1627632"/>
-            <a:ext cx="4572" cy="329184"/>
+            <a:off x="2693095" y="1563624"/>
+            <a:ext cx="4572" cy="256032"/>
           </a:xfrm>
           <a:prstGeom prst="rect">
             <a:avLst/>
@@ -10103,8 +10104,8 @@
         </p:nvSpPr>
         <p:spPr>
           <a:xfrm>
-            <a:off x="2696915" y="1627632"/>
-            <a:ext cx="4572" cy="329184"/>
+            <a:off x="2696915" y="1563624"/>
+            <a:ext cx="4572" cy="256032"/>
           </a:xfrm>
           <a:prstGeom prst="rect">
             <a:avLst/>
@@ -10123,8 +10124,8 @@
         </p:nvSpPr>
         <p:spPr>
           <a:xfrm>
-            <a:off x="2699603" y="1627632"/>
-            <a:ext cx="17828" cy="329184"/>
+            <a:off x="2699603" y="1563624"/>
+            <a:ext cx="17828" cy="256032"/>
           </a:xfrm>
           <a:prstGeom prst="rect">
             <a:avLst/>
@@ -10143,8 +10144,8 @@
         </p:nvSpPr>
         <p:spPr>
           <a:xfrm>
-            <a:off x="2718138" y="1627632"/>
-            <a:ext cx="5094" cy="329184"/>
+            <a:off x="2718138" y="1563624"/>
+            <a:ext cx="5094" cy="256032"/>
           </a:xfrm>
           <a:prstGeom prst="rect">
             <a:avLst/>
@@ -10163,8 +10164,8 @@
         </p:nvSpPr>
         <p:spPr>
           <a:xfrm>
-            <a:off x="2726203" y="1627632"/>
-            <a:ext cx="4572" cy="329184"/>
+            <a:off x="2726203" y="1563624"/>
+            <a:ext cx="4572" cy="256032"/>
           </a:xfrm>
           <a:prstGeom prst="rect">
             <a:avLst/>
@@ -10183,8 +10184,8 @@
         </p:nvSpPr>
         <p:spPr>
           <a:xfrm>
-            <a:off x="2728538" y="1627632"/>
-            <a:ext cx="4572" cy="329184"/>
+            <a:off x="2728538" y="1563624"/>
+            <a:ext cx="4572" cy="256032"/>
           </a:xfrm>
           <a:prstGeom prst="rect">
             <a:avLst/>
@@ -10203,8 +10204,8 @@
         </p:nvSpPr>
         <p:spPr>
           <a:xfrm>
-            <a:off x="2735188" y="1627632"/>
-            <a:ext cx="10329" cy="329184"/>
+            <a:off x="2735188" y="1563624"/>
+            <a:ext cx="10329" cy="256032"/>
           </a:xfrm>
           <a:prstGeom prst="rect">
             <a:avLst/>
@@ -10223,8 +10224,8 @@
         </p:nvSpPr>
         <p:spPr>
           <a:xfrm>
-            <a:off x="2748488" y="1627632"/>
-            <a:ext cx="4572" cy="329184"/>
+            <a:off x="2748488" y="1563624"/>
+            <a:ext cx="4572" cy="256032"/>
           </a:xfrm>
           <a:prstGeom prst="rect">
             <a:avLst/>
@@ -10243,8 +10244,8 @@
         </p:nvSpPr>
         <p:spPr>
           <a:xfrm>
-            <a:off x="2754006" y="1627632"/>
-            <a:ext cx="10116" cy="329184"/>
+            <a:off x="2754006" y="1563624"/>
+            <a:ext cx="10116" cy="256032"/>
           </a:xfrm>
           <a:prstGeom prst="rect">
             <a:avLst/>
@@ -10263,8 +10264,8 @@
         </p:nvSpPr>
         <p:spPr>
           <a:xfrm>
-            <a:off x="2767023" y="1627632"/>
-            <a:ext cx="4572" cy="329184"/>
+            <a:off x="2767023" y="1563624"/>
+            <a:ext cx="4572" cy="256032"/>
           </a:xfrm>
           <a:prstGeom prst="rect">
             <a:avLst/>
@@ -10283,8 +10284,8 @@
         </p:nvSpPr>
         <p:spPr>
           <a:xfrm>
-            <a:off x="2769358" y="1627632"/>
-            <a:ext cx="4572" cy="329184"/>
+            <a:off x="2769358" y="1563624"/>
+            <a:ext cx="4572" cy="256032"/>
           </a:xfrm>
           <a:prstGeom prst="rect">
             <a:avLst/>
@@ -10303,8 +10304,8 @@
         </p:nvSpPr>
         <p:spPr>
           <a:xfrm>
-            <a:off x="2772400" y="1627632"/>
-            <a:ext cx="4572" cy="329184"/>
+            <a:off x="2772400" y="1563624"/>
+            <a:ext cx="4572" cy="256032"/>
           </a:xfrm>
           <a:prstGeom prst="rect">
             <a:avLst/>
@@ -10323,8 +10324,8 @@
         </p:nvSpPr>
         <p:spPr>
           <a:xfrm>
-            <a:off x="2774876" y="1627632"/>
-            <a:ext cx="15069" cy="329184"/>
+            <a:off x="2774876" y="1563624"/>
+            <a:ext cx="15069" cy="256032"/>
           </a:xfrm>
           <a:prstGeom prst="rect">
             <a:avLst/>
@@ -10343,8 +10344,8 @@
         </p:nvSpPr>
         <p:spPr>
           <a:xfrm>
-            <a:off x="2790581" y="1627632"/>
-            <a:ext cx="8065" cy="329184"/>
+            <a:off x="2790581" y="1563624"/>
+            <a:ext cx="8065" cy="256032"/>
           </a:xfrm>
           <a:prstGeom prst="rect">
             <a:avLst/>
@@ -10363,8 +10364,8 @@
         </p:nvSpPr>
         <p:spPr>
           <a:xfrm>
-            <a:off x="2801405" y="1627632"/>
-            <a:ext cx="4572" cy="329184"/>
+            <a:off x="2801405" y="1563624"/>
+            <a:ext cx="4572" cy="256032"/>
           </a:xfrm>
           <a:prstGeom prst="rect">
             <a:avLst/>
@@ -10383,8 +10384,8 @@
         </p:nvSpPr>
         <p:spPr>
           <a:xfrm>
-            <a:off x="2806145" y="1627632"/>
-            <a:ext cx="4572" cy="329184"/>
+            <a:off x="2806145" y="1563624"/>
+            <a:ext cx="4572" cy="256032"/>
           </a:xfrm>
           <a:prstGeom prst="rect">
             <a:avLst/>
@@ -10403,8 +10404,8 @@
         </p:nvSpPr>
         <p:spPr>
           <a:xfrm>
-            <a:off x="2808762" y="1627632"/>
-            <a:ext cx="4572" cy="329184"/>
+            <a:off x="2808762" y="1563624"/>
+            <a:ext cx="4572" cy="256032"/>
           </a:xfrm>
           <a:prstGeom prst="rect">
             <a:avLst/>
@@ -10423,8 +10424,8 @@
         </p:nvSpPr>
         <p:spPr>
           <a:xfrm>
-            <a:off x="2812370" y="1627632"/>
-            <a:ext cx="10399" cy="329184"/>
+            <a:off x="2812370" y="1563624"/>
+            <a:ext cx="10399" cy="256032"/>
           </a:xfrm>
           <a:prstGeom prst="rect">
             <a:avLst/>
@@ -10443,8 +10444,8 @@
         </p:nvSpPr>
         <p:spPr>
           <a:xfrm>
-            <a:off x="2825034" y="1627632"/>
-            <a:ext cx="4572" cy="329184"/>
+            <a:off x="2825034" y="1563624"/>
+            <a:ext cx="4572" cy="256032"/>
           </a:xfrm>
           <a:prstGeom prst="rect">
             <a:avLst/>
@@ -10463,8 +10464,8 @@
         </p:nvSpPr>
         <p:spPr>
           <a:xfrm>
-            <a:off x="2830764" y="1627632"/>
-            <a:ext cx="4572" cy="329184"/>
+            <a:off x="2830764" y="1563624"/>
+            <a:ext cx="4572" cy="256032"/>
           </a:xfrm>
           <a:prstGeom prst="rect">
             <a:avLst/>
@@ -10483,8 +10484,8 @@
         </p:nvSpPr>
         <p:spPr>
           <a:xfrm>
-            <a:off x="2833664" y="1627632"/>
-            <a:ext cx="9338" cy="329184"/>
+            <a:off x="2833664" y="1563624"/>
+            <a:ext cx="9338" cy="256032"/>
           </a:xfrm>
           <a:prstGeom prst="rect">
             <a:avLst/>
@@ -10503,8 +10504,8 @@
         </p:nvSpPr>
         <p:spPr>
           <a:xfrm>
-            <a:off x="2846328" y="1627632"/>
-            <a:ext cx="4572" cy="329184"/>
+            <a:off x="2846328" y="1563624"/>
+            <a:ext cx="4572" cy="256032"/>
           </a:xfrm>
           <a:prstGeom prst="rect">
             <a:avLst/>
@@ -10523,8 +10524,8 @@
         </p:nvSpPr>
         <p:spPr>
           <a:xfrm>
-            <a:off x="2851633" y="1627632"/>
-            <a:ext cx="23770" cy="329184"/>
+            <a:off x="2851633" y="1563624"/>
+            <a:ext cx="23770" cy="256032"/>
           </a:xfrm>
           <a:prstGeom prst="rect">
             <a:avLst/>
@@ -10543,8 +10544,8 @@
         </p:nvSpPr>
         <p:spPr>
           <a:xfrm>
-            <a:off x="2877667" y="1627632"/>
-            <a:ext cx="4572" cy="329184"/>
+            <a:off x="2877667" y="1563624"/>
+            <a:ext cx="4572" cy="256032"/>
           </a:xfrm>
           <a:prstGeom prst="rect">
             <a:avLst/>
@@ -10563,8 +10564,8 @@
         </p:nvSpPr>
         <p:spPr>
           <a:xfrm>
-            <a:off x="2880427" y="1627632"/>
-            <a:ext cx="4572" cy="329184"/>
+            <a:off x="2880427" y="1563624"/>
+            <a:ext cx="4572" cy="256032"/>
           </a:xfrm>
           <a:prstGeom prst="rect">
             <a:avLst/>
@@ -10583,8 +10584,8 @@
         </p:nvSpPr>
         <p:spPr>
           <a:xfrm>
-            <a:off x="2883539" y="1627632"/>
-            <a:ext cx="10824" cy="329184"/>
+            <a:off x="2883539" y="1563624"/>
+            <a:ext cx="10824" cy="256032"/>
           </a:xfrm>
           <a:prstGeom prst="rect">
             <a:avLst/>
@@ -10603,8 +10604,8 @@
         </p:nvSpPr>
         <p:spPr>
           <a:xfrm>
-            <a:off x="2897051" y="1627632"/>
-            <a:ext cx="4572" cy="329184"/>
+            <a:off x="2897051" y="1563624"/>
+            <a:ext cx="4572" cy="256032"/>
           </a:xfrm>
           <a:prstGeom prst="rect">
             <a:avLst/>
@@ -10623,8 +10624,8 @@
         </p:nvSpPr>
         <p:spPr>
           <a:xfrm>
-            <a:off x="2903065" y="1627632"/>
-            <a:ext cx="10187" cy="329184"/>
+            <a:off x="2903065" y="1563624"/>
+            <a:ext cx="10187" cy="256032"/>
           </a:xfrm>
           <a:prstGeom prst="rect">
             <a:avLst/>
@@ -10643,8 +10644,8 @@
         </p:nvSpPr>
         <p:spPr>
           <a:xfrm>
-            <a:off x="2915304" y="1627632"/>
-            <a:ext cx="4572" cy="329184"/>
+            <a:off x="2915304" y="1563624"/>
+            <a:ext cx="4572" cy="256032"/>
           </a:xfrm>
           <a:prstGeom prst="rect">
             <a:avLst/>
@@ -10663,8 +10664,8 @@
         </p:nvSpPr>
         <p:spPr>
           <a:xfrm>
-            <a:off x="2921105" y="1627632"/>
-            <a:ext cx="4572" cy="329184"/>
+            <a:off x="2921105" y="1563624"/>
+            <a:ext cx="4572" cy="256032"/>
           </a:xfrm>
           <a:prstGeom prst="rect">
             <a:avLst/>
@@ -10683,8 +10684,8 @@
         </p:nvSpPr>
         <p:spPr>
           <a:xfrm>
-            <a:off x="2923651" y="1627632"/>
-            <a:ext cx="13583" cy="329184"/>
+            <a:off x="2923651" y="1563624"/>
+            <a:ext cx="13583" cy="256032"/>
           </a:xfrm>
           <a:prstGeom prst="rect">
             <a:avLst/>
@@ -10703,8 +10704,8 @@
         </p:nvSpPr>
         <p:spPr>
           <a:xfrm>
-            <a:off x="2937800" y="1627632"/>
-            <a:ext cx="7428" cy="329184"/>
+            <a:off x="2937800" y="1563624"/>
+            <a:ext cx="7428" cy="256032"/>
           </a:xfrm>
           <a:prstGeom prst="rect">
             <a:avLst/>
@@ -10723,8 +10724,8 @@
         </p:nvSpPr>
         <p:spPr>
           <a:xfrm>
-            <a:off x="2948129" y="1627632"/>
-            <a:ext cx="4572" cy="329184"/>
+            <a:off x="2948129" y="1563624"/>
+            <a:ext cx="4572" cy="256032"/>
           </a:xfrm>
           <a:prstGeom prst="rect">
             <a:avLst/>
@@ -10743,8 +10744,8 @@
         </p:nvSpPr>
         <p:spPr>
           <a:xfrm>
-            <a:off x="2950888" y="1627632"/>
-            <a:ext cx="4572" cy="329184"/>
+            <a:off x="2950888" y="1563624"/>
+            <a:ext cx="4572" cy="256032"/>
           </a:xfrm>
           <a:prstGeom prst="rect">
             <a:avLst/>
@@ -10763,8 +10764,8 @@
         </p:nvSpPr>
         <p:spPr>
           <a:xfrm>
-            <a:off x="2954001" y="1627632"/>
-            <a:ext cx="10187" cy="329184"/>
+            <a:off x="2954001" y="1563624"/>
+            <a:ext cx="10187" cy="256032"/>
           </a:xfrm>
           <a:prstGeom prst="rect">
             <a:avLst/>
@@ -10783,8 +10784,8 @@
         </p:nvSpPr>
         <p:spPr>
           <a:xfrm>
-            <a:off x="2966523" y="1627632"/>
-            <a:ext cx="4572" cy="329184"/>
+            <a:off x="2966523" y="1563624"/>
+            <a:ext cx="4572" cy="256032"/>
           </a:xfrm>
           <a:prstGeom prst="rect">
             <a:avLst/>
@@ -10803,8 +10804,8 @@
         </p:nvSpPr>
         <p:spPr>
           <a:xfrm>
-            <a:off x="2972111" y="1627632"/>
-            <a:ext cx="9975" cy="329184"/>
+            <a:off x="2972111" y="1563624"/>
+            <a:ext cx="9975" cy="256032"/>
           </a:xfrm>
           <a:prstGeom prst="rect">
             <a:avLst/>
@@ -10823,8 +10824,8 @@
         </p:nvSpPr>
         <p:spPr>
           <a:xfrm>
-            <a:off x="2984280" y="1627632"/>
-            <a:ext cx="4572" cy="329184"/>
+            <a:off x="2984280" y="1563624"/>
+            <a:ext cx="4572" cy="256032"/>
           </a:xfrm>
           <a:prstGeom prst="rect">
             <a:avLst/>
@@ -10843,8 +10844,8 @@
         </p:nvSpPr>
         <p:spPr>
           <a:xfrm>
-            <a:off x="2989939" y="1627632"/>
-            <a:ext cx="23841" cy="329184"/>
+            <a:off x="2989939" y="1563624"/>
+            <a:ext cx="23841" cy="256032"/>
           </a:xfrm>
           <a:prstGeom prst="rect">
             <a:avLst/>
@@ -10863,8 +10864,8 @@
         </p:nvSpPr>
         <p:spPr>
           <a:xfrm>
-            <a:off x="3016751" y="1627632"/>
-            <a:ext cx="4572" cy="329184"/>
+            <a:off x="3016751" y="1563624"/>
+            <a:ext cx="4572" cy="256032"/>
           </a:xfrm>
           <a:prstGeom prst="rect">
             <a:avLst/>
@@ -10883,8 +10884,8 @@
         </p:nvSpPr>
         <p:spPr>
           <a:xfrm>
-            <a:off x="3021916" y="1627632"/>
-            <a:ext cx="9904" cy="329184"/>
+            <a:off x="3021916" y="1563624"/>
+            <a:ext cx="9904" cy="256032"/>
           </a:xfrm>
           <a:prstGeom prst="rect">
             <a:avLst/>
@@ -10903,8 +10904,8 @@
         </p:nvSpPr>
         <p:spPr>
           <a:xfrm>
-            <a:off x="3034013" y="1627632"/>
-            <a:ext cx="4572" cy="329184"/>
+            <a:off x="3034013" y="1563624"/>
+            <a:ext cx="4572" cy="256032"/>
           </a:xfrm>
           <a:prstGeom prst="rect">
             <a:avLst/>
@@ -10923,8 +10924,8 @@
         </p:nvSpPr>
         <p:spPr>
           <a:xfrm>
-            <a:off x="3039673" y="1627632"/>
-            <a:ext cx="9551" cy="329184"/>
+            <a:off x="3039673" y="1563624"/>
+            <a:ext cx="9551" cy="256032"/>
           </a:xfrm>
           <a:prstGeom prst="rect">
             <a:avLst/>
@@ -10943,8 +10944,8 @@
         </p:nvSpPr>
         <p:spPr>
           <a:xfrm>
-            <a:off x="3052407" y="1627632"/>
-            <a:ext cx="4572" cy="329184"/>
+            <a:off x="3052407" y="1563624"/>
+            <a:ext cx="4572" cy="256032"/>
           </a:xfrm>
           <a:prstGeom prst="rect">
             <a:avLst/>
@@ -10963,8 +10964,8 @@
         </p:nvSpPr>
         <p:spPr>
           <a:xfrm>
-            <a:off x="3057642" y="1627632"/>
-            <a:ext cx="21153" cy="329184"/>
+            <a:off x="3057642" y="1563624"/>
+            <a:ext cx="21153" cy="256032"/>
           </a:xfrm>
           <a:prstGeom prst="rect">
             <a:avLst/>
@@ -10983,8 +10984,8 @@
         </p:nvSpPr>
         <p:spPr>
           <a:xfrm>
-            <a:off x="3080987" y="1627632"/>
-            <a:ext cx="4572" cy="329184"/>
+            <a:off x="3080987" y="1563624"/>
+            <a:ext cx="4572" cy="256032"/>
           </a:xfrm>
           <a:prstGeom prst="rect">
             <a:avLst/>
@@ -11003,8 +11004,8 @@
         </p:nvSpPr>
         <p:spPr>
           <a:xfrm>
-            <a:off x="3086435" y="1627632"/>
-            <a:ext cx="9197" cy="329184"/>
+            <a:off x="3086435" y="1563624"/>
+            <a:ext cx="9197" cy="256032"/>
           </a:xfrm>
           <a:prstGeom prst="rect">
             <a:avLst/>
@@ -11023,8 +11024,8 @@
         </p:nvSpPr>
         <p:spPr>
           <a:xfrm>
-            <a:off x="3096410" y="1627632"/>
-            <a:ext cx="4572" cy="329184"/>
+            <a:off x="3096410" y="1563624"/>
+            <a:ext cx="4572" cy="256032"/>
           </a:xfrm>
           <a:prstGeom prst="rect">
             <a:avLst/>
@@ -11043,8 +11044,8 @@
         </p:nvSpPr>
         <p:spPr>
           <a:xfrm>
-            <a:off x="3102564" y="1627632"/>
-            <a:ext cx="8560" cy="329184"/>
+            <a:off x="3102564" y="1563624"/>
+            <a:ext cx="8560" cy="256032"/>
           </a:xfrm>
           <a:prstGeom prst="rect">
             <a:avLst/>
@@ -11063,8 +11064,8 @@
         </p:nvSpPr>
         <p:spPr>
           <a:xfrm>
-            <a:off x="3111832" y="1627632"/>
-            <a:ext cx="4572" cy="329184"/>
+            <a:off x="3111832" y="1563624"/>
+            <a:ext cx="4572" cy="256032"/>
           </a:xfrm>
           <a:prstGeom prst="rect">
             <a:avLst/>
@@ -11083,8 +11084,8 @@
         </p:nvSpPr>
         <p:spPr>
           <a:xfrm>
-            <a:off x="3117562" y="1627632"/>
-            <a:ext cx="35089" cy="329184"/>
+            <a:off x="3117562" y="1563624"/>
+            <a:ext cx="35089" cy="256032"/>
           </a:xfrm>
           <a:prstGeom prst="rect">
             <a:avLst/>
@@ -11103,8 +11104,8 @@
         </p:nvSpPr>
         <p:spPr>
           <a:xfrm>
-            <a:off x="3154067" y="1627632"/>
-            <a:ext cx="4740" cy="329184"/>
+            <a:off x="3154067" y="1563624"/>
+            <a:ext cx="4740" cy="256032"/>
           </a:xfrm>
           <a:prstGeom prst="rect">
             <a:avLst/>
@@ -11123,8 +11124,8 @@
         </p:nvSpPr>
         <p:spPr>
           <a:xfrm>
-            <a:off x="3160292" y="1627632"/>
-            <a:ext cx="4572" cy="329184"/>
+            <a:off x="3160292" y="1563624"/>
+            <a:ext cx="4572" cy="256032"/>
           </a:xfrm>
           <a:prstGeom prst="rect">
             <a:avLst/>
@@ -11143,8 +11144,8 @@
         </p:nvSpPr>
         <p:spPr>
           <a:xfrm>
-            <a:off x="3162697" y="1627632"/>
-            <a:ext cx="10258" cy="329184"/>
+            <a:off x="3162697" y="1563624"/>
+            <a:ext cx="10258" cy="256032"/>
           </a:xfrm>
           <a:prstGeom prst="rect">
             <a:avLst/>
@@ -11163,8 +11164,8 @@
         </p:nvSpPr>
         <p:spPr>
           <a:xfrm>
-            <a:off x="3173875" y="1627632"/>
-            <a:ext cx="2551686" cy="329184"/>
+            <a:off x="3173875" y="1563624"/>
+            <a:ext cx="2551686" cy="256032"/>
           </a:xfrm>
           <a:prstGeom prst="rect">
             <a:avLst/>
@@ -11183,8 +11184,8 @@
         </p:nvSpPr>
         <p:spPr>
           <a:xfrm>
-            <a:off x="5727896" y="1627632"/>
-            <a:ext cx="536315" cy="329184"/>
+            <a:off x="5727896" y="1563624"/>
+            <a:ext cx="536315" cy="256032"/>
           </a:xfrm>
           <a:prstGeom prst="rect">
             <a:avLst/>
@@ -11203,8 +11204,8 @@
         </p:nvSpPr>
         <p:spPr>
           <a:xfrm>
-            <a:off x="6266191" y="1627632"/>
-            <a:ext cx="12663" cy="329184"/>
+            <a:off x="6266191" y="1563624"/>
+            <a:ext cx="12663" cy="256032"/>
           </a:xfrm>
           <a:prstGeom prst="rect">
             <a:avLst/>
@@ -11223,8 +11224,8 @@
         </p:nvSpPr>
         <p:spPr>
           <a:xfrm>
-            <a:off x="6285292" y="1627632"/>
-            <a:ext cx="4572" cy="329184"/>
+            <a:off x="6285292" y="1563624"/>
+            <a:ext cx="4572" cy="256032"/>
           </a:xfrm>
           <a:prstGeom prst="rect">
             <a:avLst/>
@@ -11243,8 +11244,8 @@
         </p:nvSpPr>
         <p:spPr>
           <a:xfrm>
-            <a:off x="6290103" y="1627632"/>
-            <a:ext cx="4572" cy="329184"/>
+            <a:off x="6290103" y="1563624"/>
+            <a:ext cx="4572" cy="256032"/>
           </a:xfrm>
           <a:prstGeom prst="rect">
             <a:avLst/>
@@ -11263,8 +11264,8 @@
         </p:nvSpPr>
         <p:spPr>
           <a:xfrm>
-            <a:off x="6292013" y="1627632"/>
-            <a:ext cx="4572" cy="329184"/>
+            <a:off x="6292013" y="1563624"/>
+            <a:ext cx="4572" cy="256032"/>
           </a:xfrm>
           <a:prstGeom prst="rect">
             <a:avLst/>
@@ -11283,8 +11284,8 @@
         </p:nvSpPr>
         <p:spPr>
           <a:xfrm>
-            <a:off x="6296965" y="1627632"/>
-            <a:ext cx="8702" cy="329184"/>
+            <a:off x="6296965" y="1563624"/>
+            <a:ext cx="8702" cy="256032"/>
           </a:xfrm>
           <a:prstGeom prst="rect">
             <a:avLst/>
@@ -11303,8 +11304,8 @@
         </p:nvSpPr>
         <p:spPr>
           <a:xfrm>
-            <a:off x="6306657" y="1627632"/>
-            <a:ext cx="20940" cy="329184"/>
+            <a:off x="6306657" y="1563624"/>
+            <a:ext cx="20940" cy="256032"/>
           </a:xfrm>
           <a:prstGeom prst="rect">
             <a:avLst/>
@@ -11323,8 +11324,8 @@
         </p:nvSpPr>
         <p:spPr>
           <a:xfrm>
-            <a:off x="6328163" y="1627632"/>
-            <a:ext cx="4572" cy="329184"/>
+            <a:off x="6328163" y="1563624"/>
+            <a:ext cx="4572" cy="256032"/>
           </a:xfrm>
           <a:prstGeom prst="rect">
             <a:avLst/>
@@ -11343,8 +11344,8 @@
         </p:nvSpPr>
         <p:spPr>
           <a:xfrm>
-            <a:off x="6330073" y="1627632"/>
-            <a:ext cx="4572" cy="329184"/>
+            <a:off x="6330073" y="1563624"/>
+            <a:ext cx="4572" cy="256032"/>
           </a:xfrm>
           <a:prstGeom prst="rect">
             <a:avLst/>
@@ -11363,8 +11364,8 @@
         </p:nvSpPr>
         <p:spPr>
           <a:xfrm>
-            <a:off x="6335308" y="1627632"/>
-            <a:ext cx="40466" cy="329184"/>
+            <a:off x="6335308" y="1563624"/>
+            <a:ext cx="40466" cy="256032"/>
           </a:xfrm>
           <a:prstGeom prst="rect">
             <a:avLst/>
@@ -11383,8 +11384,8 @@
         </p:nvSpPr>
         <p:spPr>
           <a:xfrm>
-            <a:off x="6379029" y="1627632"/>
-            <a:ext cx="4598" cy="329184"/>
+            <a:off x="6379029" y="1563624"/>
+            <a:ext cx="4598" cy="256032"/>
           </a:xfrm>
           <a:prstGeom prst="rect">
             <a:avLst/>
@@ -11403,8 +11404,8 @@
         </p:nvSpPr>
         <p:spPr>
           <a:xfrm>
-            <a:off x="6385396" y="1627632"/>
-            <a:ext cx="4572" cy="329184"/>
+            <a:off x="6385396" y="1563624"/>
+            <a:ext cx="4572" cy="256032"/>
           </a:xfrm>
           <a:prstGeom prst="rect">
             <a:avLst/>
@@ -11423,8 +11424,8 @@
         </p:nvSpPr>
         <p:spPr>
           <a:xfrm>
-            <a:off x="6387306" y="1627632"/>
-            <a:ext cx="4572" cy="329184"/>
+            <a:off x="6387306" y="1563624"/>
+            <a:ext cx="4572" cy="256032"/>
           </a:xfrm>
           <a:prstGeom prst="rect">
             <a:avLst/>
@@ -11443,8 +11444,8 @@
         </p:nvSpPr>
         <p:spPr>
           <a:xfrm>
-            <a:off x="6389994" y="1627632"/>
-            <a:ext cx="4572" cy="329184"/>
+            <a:off x="6389994" y="1563624"/>
+            <a:ext cx="4572" cy="256032"/>
           </a:xfrm>
           <a:prstGeom prst="rect">
             <a:avLst/>
@@ -11463,8 +11464,8 @@
         </p:nvSpPr>
         <p:spPr>
           <a:xfrm>
-            <a:off x="6392046" y="1627632"/>
-            <a:ext cx="12522" cy="329184"/>
+            <a:off x="6392046" y="1563624"/>
+            <a:ext cx="12522" cy="256032"/>
           </a:xfrm>
           <a:prstGeom prst="rect">
             <a:avLst/>
@@ -11483,8 +11484,8 @@
         </p:nvSpPr>
         <p:spPr>
           <a:xfrm>
-            <a:off x="6411430" y="1627632"/>
-            <a:ext cx="4572" cy="329184"/>
+            <a:off x="6411430" y="1563624"/>
+            <a:ext cx="4572" cy="256032"/>
           </a:xfrm>
           <a:prstGeom prst="rect">
             <a:avLst/>
@@ -11503,8 +11504,8 @@
         </p:nvSpPr>
         <p:spPr>
           <a:xfrm>
-            <a:off x="6415108" y="1627632"/>
-            <a:ext cx="4572" cy="329184"/>
+            <a:off x="6415108" y="1563624"/>
+            <a:ext cx="4572" cy="256032"/>
           </a:xfrm>
           <a:prstGeom prst="rect">
             <a:avLst/>
@@ -11523,8 +11524,8 @@
         </p:nvSpPr>
         <p:spPr>
           <a:xfrm>
-            <a:off x="6416806" y="1627632"/>
-            <a:ext cx="4572" cy="329184"/>
+            <a:off x="6416806" y="1563624"/>
+            <a:ext cx="4572" cy="256032"/>
           </a:xfrm>
           <a:prstGeom prst="rect">
             <a:avLst/>
@@ -11543,8 +11544,8 @@
         </p:nvSpPr>
         <p:spPr>
           <a:xfrm>
-            <a:off x="6419495" y="1627632"/>
-            <a:ext cx="4572" cy="329184"/>
+            <a:off x="6419495" y="1563624"/>
+            <a:ext cx="4572" cy="256032"/>
           </a:xfrm>
           <a:prstGeom prst="rect">
             <a:avLst/>
@@ -11563,8 +11564,8 @@
         </p:nvSpPr>
         <p:spPr>
           <a:xfrm>
-            <a:off x="6421546" y="1627632"/>
-            <a:ext cx="12451" cy="329184"/>
+            <a:off x="6421546" y="1563624"/>
+            <a:ext cx="12451" cy="256032"/>
           </a:xfrm>
           <a:prstGeom prst="rect">
             <a:avLst/>
@@ -11583,8 +11584,8 @@
         </p:nvSpPr>
         <p:spPr>
           <a:xfrm>
-            <a:off x="6435554" y="1627632"/>
-            <a:ext cx="21153" cy="329184"/>
+            <a:off x="6435554" y="1563624"/>
+            <a:ext cx="21153" cy="256032"/>
           </a:xfrm>
           <a:prstGeom prst="rect">
             <a:avLst/>
@@ -11603,8 +11604,8 @@
         </p:nvSpPr>
         <p:spPr>
           <a:xfrm>
-            <a:off x="6457484" y="1627632"/>
-            <a:ext cx="20162" cy="329184"/>
+            <a:off x="6457484" y="1563624"/>
+            <a:ext cx="20162" cy="256032"/>
           </a:xfrm>
           <a:prstGeom prst="rect">
             <a:avLst/>
@@ -11623,8 +11624,8 @@
         </p:nvSpPr>
         <p:spPr>
           <a:xfrm>
-            <a:off x="6478354" y="1627632"/>
-            <a:ext cx="13017" cy="329184"/>
+            <a:off x="6478354" y="1563624"/>
+            <a:ext cx="13017" cy="256032"/>
           </a:xfrm>
           <a:prstGeom prst="rect">
             <a:avLst/>
@@ -11643,8 +11644,8 @@
         </p:nvSpPr>
         <p:spPr>
           <a:xfrm>
-            <a:off x="6492149" y="1627632"/>
-            <a:ext cx="4572" cy="329184"/>
+            <a:off x="6492149" y="1563624"/>
+            <a:ext cx="4572" cy="256032"/>
           </a:xfrm>
           <a:prstGeom prst="rect">
             <a:avLst/>
@@ -11663,8 +11664,8 @@
         </p:nvSpPr>
         <p:spPr>
           <a:xfrm>
-            <a:off x="6493918" y="1627632"/>
-            <a:ext cx="4740" cy="329184"/>
+            <a:off x="6493918" y="1563624"/>
+            <a:ext cx="4740" cy="256032"/>
           </a:xfrm>
           <a:prstGeom prst="rect">
             <a:avLst/>
@@ -11683,8 +11684,8 @@
         </p:nvSpPr>
         <p:spPr>
           <a:xfrm>
-            <a:off x="6500002" y="1627632"/>
-            <a:ext cx="12451" cy="329184"/>
+            <a:off x="6500002" y="1563624"/>
+            <a:ext cx="12451" cy="256032"/>
           </a:xfrm>
           <a:prstGeom prst="rect">
             <a:avLst/>
@@ -11703,8 +11704,8 @@
         </p:nvSpPr>
         <p:spPr>
           <a:xfrm>
-            <a:off x="6513160" y="1627632"/>
-            <a:ext cx="4572" cy="329184"/>
+            <a:off x="6513160" y="1563624"/>
+            <a:ext cx="4572" cy="256032"/>
           </a:xfrm>
           <a:prstGeom prst="rect">
             <a:avLst/>
@@ -11723,8 +11724,8 @@
         </p:nvSpPr>
         <p:spPr>
           <a:xfrm>
-            <a:off x="6514787" y="1627632"/>
-            <a:ext cx="4598" cy="329184"/>
+            <a:off x="6514787" y="1563624"/>
+            <a:ext cx="4598" cy="256032"/>
           </a:xfrm>
           <a:prstGeom prst="rect">
             <a:avLst/>
@@ -11743,8 +11744,8 @@
         </p:nvSpPr>
         <p:spPr>
           <a:xfrm>
-            <a:off x="6520659" y="1627632"/>
-            <a:ext cx="12097" cy="329184"/>
+            <a:off x="6520659" y="1563624"/>
+            <a:ext cx="12097" cy="256032"/>
           </a:xfrm>
           <a:prstGeom prst="rect">
             <a:avLst/>
@@ -11763,8 +11764,8 @@
         </p:nvSpPr>
         <p:spPr>
           <a:xfrm>
-            <a:off x="6533323" y="1627632"/>
-            <a:ext cx="4572" cy="329184"/>
+            <a:off x="6533323" y="1563624"/>
+            <a:ext cx="4572" cy="256032"/>
           </a:xfrm>
           <a:prstGeom prst="rect">
             <a:avLst/>
@@ -11783,8 +11784,8 @@
         </p:nvSpPr>
         <p:spPr>
           <a:xfrm>
-            <a:off x="6535020" y="1627632"/>
-            <a:ext cx="4572" cy="329184"/>
+            <a:off x="6535020" y="1563624"/>
+            <a:ext cx="4572" cy="256032"/>
           </a:xfrm>
           <a:prstGeom prst="rect">
             <a:avLst/>
@@ -11803,8 +11804,8 @@
         </p:nvSpPr>
         <p:spPr>
           <a:xfrm>
-            <a:off x="6540751" y="1627632"/>
-            <a:ext cx="4572" cy="329184"/>
+            <a:off x="6540751" y="1563624"/>
+            <a:ext cx="4572" cy="256032"/>
           </a:xfrm>
           <a:prstGeom prst="rect">
             <a:avLst/>
@@ -11823,8 +11824,8 @@
         </p:nvSpPr>
         <p:spPr>
           <a:xfrm>
-            <a:off x="6544076" y="1627632"/>
-            <a:ext cx="4572" cy="329184"/>
+            <a:off x="6544076" y="1563624"/>
+            <a:ext cx="4572" cy="256032"/>
           </a:xfrm>
           <a:prstGeom prst="rect">
             <a:avLst/>
@@ -11843,8 +11844,8 @@
         </p:nvSpPr>
         <p:spPr>
           <a:xfrm>
-            <a:off x="6546623" y="1627632"/>
-            <a:ext cx="4572" cy="329184"/>
+            <a:off x="6546623" y="1563624"/>
+            <a:ext cx="4572" cy="256032"/>
           </a:xfrm>
           <a:prstGeom prst="rect">
             <a:avLst/>
@@ -11863,8 +11864,8 @@
         </p:nvSpPr>
         <p:spPr>
           <a:xfrm>
-            <a:off x="6549877" y="1627632"/>
-            <a:ext cx="4572" cy="329184"/>
+            <a:off x="6549877" y="1563624"/>
+            <a:ext cx="4572" cy="256032"/>
           </a:xfrm>
           <a:prstGeom prst="rect">
             <a:avLst/>
@@ -11883,8 +11884,8 @@
         </p:nvSpPr>
         <p:spPr>
           <a:xfrm>
-            <a:off x="6551716" y="1627632"/>
-            <a:ext cx="6650" cy="329184"/>
+            <a:off x="6551716" y="1563624"/>
+            <a:ext cx="6650" cy="256032"/>
           </a:xfrm>
           <a:prstGeom prst="rect">
             <a:avLst/>
@@ -11903,8 +11904,8 @@
         </p:nvSpPr>
         <p:spPr>
           <a:xfrm>
-            <a:off x="6561196" y="1627632"/>
-            <a:ext cx="4572" cy="329184"/>
+            <a:off x="6561196" y="1563624"/>
+            <a:ext cx="4572" cy="256032"/>
           </a:xfrm>
           <a:prstGeom prst="rect">
             <a:avLst/>
@@ -11923,8 +11924,8 @@
         </p:nvSpPr>
         <p:spPr>
           <a:xfrm>
-            <a:off x="6585956" y="1627632"/>
-            <a:ext cx="4572" cy="329184"/>
+            <a:off x="6585956" y="1563624"/>
+            <a:ext cx="4572" cy="256032"/>
           </a:xfrm>
           <a:prstGeom prst="rect">
             <a:avLst/>
@@ -11943,8 +11944,8 @@
         </p:nvSpPr>
         <p:spPr>
           <a:xfrm>
-            <a:off x="6591050" y="1627632"/>
-            <a:ext cx="11531" cy="329184"/>
+            <a:off x="6591050" y="1563624"/>
+            <a:ext cx="11531" cy="256032"/>
           </a:xfrm>
           <a:prstGeom prst="rect">
             <a:avLst/>
@@ -11963,8 +11964,8 @@
         </p:nvSpPr>
         <p:spPr>
           <a:xfrm>
-            <a:off x="6603218" y="1627632"/>
-            <a:ext cx="5306" cy="329184"/>
+            <a:off x="6603218" y="1563624"/>
+            <a:ext cx="5306" cy="256032"/>
           </a:xfrm>
           <a:prstGeom prst="rect">
             <a:avLst/>
@@ -11983,8 +11984,8 @@
         </p:nvSpPr>
         <p:spPr>
           <a:xfrm>
-            <a:off x="6609656" y="1627632"/>
-            <a:ext cx="15422" cy="329184"/>
+            <a:off x="6609656" y="1563624"/>
+            <a:ext cx="15422" cy="256032"/>
           </a:xfrm>
           <a:prstGeom prst="rect">
             <a:avLst/>
@@ -12003,8 +12004,8 @@
         </p:nvSpPr>
         <p:spPr>
           <a:xfrm>
-            <a:off x="6626069" y="1627632"/>
-            <a:ext cx="15352" cy="329184"/>
+            <a:off x="6626069" y="1563624"/>
+            <a:ext cx="15352" cy="256032"/>
           </a:xfrm>
           <a:prstGeom prst="rect">
             <a:avLst/>
@@ -12023,8 +12024,8 @@
         </p:nvSpPr>
         <p:spPr>
           <a:xfrm>
-            <a:off x="6642340" y="1627632"/>
-            <a:ext cx="15493" cy="329184"/>
+            <a:off x="6642340" y="1563624"/>
+            <a:ext cx="15493" cy="256032"/>
           </a:xfrm>
           <a:prstGeom prst="rect">
             <a:avLst/>
@@ -12043,8 +12044,8 @@
         </p:nvSpPr>
         <p:spPr>
           <a:xfrm>
-            <a:off x="6658965" y="1627632"/>
-            <a:ext cx="15564" cy="329184"/>
+            <a:off x="6658965" y="1563624"/>
+            <a:ext cx="15564" cy="256032"/>
           </a:xfrm>
           <a:prstGeom prst="rect">
             <a:avLst/>
@@ -12063,8 +12064,8 @@
         </p:nvSpPr>
         <p:spPr>
           <a:xfrm>
-            <a:off x="6675590" y="1627632"/>
-            <a:ext cx="16342" cy="329184"/>
+            <a:off x="6675590" y="1563624"/>
+            <a:ext cx="16342" cy="256032"/>
           </a:xfrm>
           <a:prstGeom prst="rect">
             <a:avLst/>
@@ -12083,8 +12084,8 @@
         </p:nvSpPr>
         <p:spPr>
           <a:xfrm>
-            <a:off x="6692993" y="1627632"/>
-            <a:ext cx="15635" cy="329184"/>
+            <a:off x="6692993" y="1563624"/>
+            <a:ext cx="15635" cy="256032"/>
           </a:xfrm>
           <a:prstGeom prst="rect">
             <a:avLst/>
@@ -12103,8 +12104,8 @@
         </p:nvSpPr>
         <p:spPr>
           <a:xfrm>
-            <a:off x="6709689" y="1627632"/>
-            <a:ext cx="15139" cy="329184"/>
+            <a:off x="6709689" y="1563624"/>
+            <a:ext cx="15139" cy="256032"/>
           </a:xfrm>
           <a:prstGeom prst="rect">
             <a:avLst/>
@@ -12123,8 +12124,8 @@
         </p:nvSpPr>
         <p:spPr>
           <a:xfrm>
-            <a:off x="6725748" y="1627632"/>
-            <a:ext cx="14503" cy="329184"/>
+            <a:off x="6725748" y="1563624"/>
+            <a:ext cx="14503" cy="256032"/>
           </a:xfrm>
           <a:prstGeom prst="rect">
             <a:avLst/>
@@ -12143,8 +12144,8 @@
         </p:nvSpPr>
         <p:spPr>
           <a:xfrm>
-            <a:off x="6742656" y="1627632"/>
-            <a:ext cx="15705" cy="329184"/>
+            <a:off x="6742656" y="1563624"/>
+            <a:ext cx="15705" cy="256032"/>
           </a:xfrm>
           <a:prstGeom prst="rect">
             <a:avLst/>
@@ -12163,8 +12164,8 @@
         </p:nvSpPr>
         <p:spPr>
           <a:xfrm>
-            <a:off x="6759422" y="1627632"/>
-            <a:ext cx="15281" cy="329184"/>
+            <a:off x="6759422" y="1563624"/>
+            <a:ext cx="15281" cy="256032"/>
           </a:xfrm>
           <a:prstGeom prst="rect">
             <a:avLst/>
@@ -12183,8 +12184,8 @@
         </p:nvSpPr>
         <p:spPr>
           <a:xfrm>
-            <a:off x="6775623" y="1627632"/>
-            <a:ext cx="15281" cy="329184"/>
+            <a:off x="6775623" y="1563624"/>
+            <a:ext cx="15281" cy="256032"/>
           </a:xfrm>
           <a:prstGeom prst="rect">
             <a:avLst/>
@@ -12203,8 +12204,8 @@
         </p:nvSpPr>
         <p:spPr>
           <a:xfrm>
-            <a:off x="6791823" y="1627632"/>
-            <a:ext cx="15069" cy="329184"/>
+            <a:off x="6791823" y="1563624"/>
+            <a:ext cx="15069" cy="256032"/>
           </a:xfrm>
           <a:prstGeom prst="rect">
             <a:avLst/>
@@ -12223,8 +12224,8 @@
         </p:nvSpPr>
         <p:spPr>
           <a:xfrm>
-            <a:off x="6807953" y="1627632"/>
-            <a:ext cx="15069" cy="329184"/>
+            <a:off x="6807953" y="1563624"/>
+            <a:ext cx="15069" cy="256032"/>
           </a:xfrm>
           <a:prstGeom prst="rect">
             <a:avLst/>
@@ -12243,8 +12244,8 @@
         </p:nvSpPr>
         <p:spPr>
           <a:xfrm>
-            <a:off x="6823941" y="1627632"/>
-            <a:ext cx="14927" cy="329184"/>
+            <a:off x="6823941" y="1563624"/>
+            <a:ext cx="14927" cy="256032"/>
           </a:xfrm>
           <a:prstGeom prst="rect">
             <a:avLst/>
@@ -12263,8 +12264,8 @@
         </p:nvSpPr>
         <p:spPr>
           <a:xfrm>
-            <a:off x="6839859" y="1627632"/>
-            <a:ext cx="14856" cy="329184"/>
+            <a:off x="6839859" y="1563624"/>
+            <a:ext cx="14856" cy="256032"/>
           </a:xfrm>
           <a:prstGeom prst="rect">
             <a:avLst/>
@@ -12283,8 +12284,8 @@
         </p:nvSpPr>
         <p:spPr>
           <a:xfrm>
-            <a:off x="6855706" y="1627632"/>
-            <a:ext cx="15069" cy="329184"/>
+            <a:off x="6855706" y="1563624"/>
+            <a:ext cx="15069" cy="256032"/>
           </a:xfrm>
           <a:prstGeom prst="rect">
             <a:avLst/>
@@ -12303,8 +12304,8 @@
         </p:nvSpPr>
         <p:spPr>
           <a:xfrm>
-            <a:off x="6871835" y="1627632"/>
-            <a:ext cx="14927" cy="329184"/>
+            <a:off x="6871835" y="1563624"/>
+            <a:ext cx="14927" cy="256032"/>
           </a:xfrm>
           <a:prstGeom prst="rect">
             <a:avLst/>
@@ -12323,8 +12324,8 @@
         </p:nvSpPr>
         <p:spPr>
           <a:xfrm>
-            <a:off x="6887611" y="1627632"/>
-            <a:ext cx="14998" cy="329184"/>
+            <a:off x="6887611" y="1563624"/>
+            <a:ext cx="14998" cy="256032"/>
           </a:xfrm>
           <a:prstGeom prst="rect">
             <a:avLst/>
@@ -12343,8 +12344,8 @@
         </p:nvSpPr>
         <p:spPr>
           <a:xfrm>
-            <a:off x="6903600" y="1627632"/>
-            <a:ext cx="10824" cy="329184"/>
+            <a:off x="6903600" y="1563624"/>
+            <a:ext cx="10824" cy="256032"/>
           </a:xfrm>
           <a:prstGeom prst="rect">
             <a:avLst/>
@@ -12363,8 +12364,8 @@
         </p:nvSpPr>
         <p:spPr>
           <a:xfrm>
-            <a:off x="6915202" y="1627632"/>
-            <a:ext cx="6721" cy="329184"/>
+            <a:off x="6915202" y="1563624"/>
+            <a:ext cx="6721" cy="256032"/>
           </a:xfrm>
           <a:prstGeom prst="rect">
             <a:avLst/>
@@ -12383,8 +12384,8 @@
         </p:nvSpPr>
         <p:spPr>
           <a:xfrm>
-            <a:off x="6922630" y="1627632"/>
-            <a:ext cx="17403" cy="329184"/>
+            <a:off x="6922630" y="1563624"/>
+            <a:ext cx="17403" cy="256032"/>
           </a:xfrm>
           <a:prstGeom prst="rect">
             <a:avLst/>
@@ -12403,8 +12404,8 @@
         </p:nvSpPr>
         <p:spPr>
           <a:xfrm>
-            <a:off x="6984956" y="1627632"/>
-            <a:ext cx="15352" cy="329184"/>
+            <a:off x="6984956" y="1563624"/>
+            <a:ext cx="15352" cy="256032"/>
           </a:xfrm>
           <a:prstGeom prst="rect">
             <a:avLst/>
@@ -12423,8 +12424,8 @@
         </p:nvSpPr>
         <p:spPr>
           <a:xfrm>
-            <a:off x="7061289" y="1627632"/>
-            <a:ext cx="67420" cy="329184"/>
+            <a:off x="7061289" y="1563624"/>
+            <a:ext cx="67420" cy="256032"/>
           </a:xfrm>
           <a:prstGeom prst="rect">
             <a:avLst/>
@@ -12443,8 +12444,8 @@
         </p:nvSpPr>
         <p:spPr>
           <a:xfrm>
-            <a:off x="7130902" y="1627632"/>
-            <a:ext cx="23558" cy="329184"/>
+            <a:off x="7130902" y="1563624"/>
+            <a:ext cx="23558" cy="256032"/>
           </a:xfrm>
           <a:prstGeom prst="rect">
             <a:avLst/>
@@ -12463,8 +12464,8 @@
         </p:nvSpPr>
         <p:spPr>
           <a:xfrm>
-            <a:off x="7158280" y="1627632"/>
-            <a:ext cx="127552" cy="329184"/>
+            <a:off x="7158280" y="1563624"/>
+            <a:ext cx="127552" cy="256032"/>
           </a:xfrm>
           <a:prstGeom prst="rect">
             <a:avLst/>
@@ -12483,8 +12484,8 @@
         </p:nvSpPr>
         <p:spPr>
           <a:xfrm>
-            <a:off x="7671816" y="1600200"/>
-            <a:ext cx="914400" cy="384048"/>
+            <a:off x="7671816" y="1536192"/>
+            <a:ext cx="914400" cy="310896"/>
           </a:xfrm>
           <a:prstGeom prst="rect">
             <a:avLst/>
@@ -12522,8 +12523,8 @@
         </p:nvSpPr>
         <p:spPr>
           <a:xfrm>
-            <a:off x="457200" y="2075688"/>
-            <a:ext cx="978408" cy="384048"/>
+            <a:off x="457200" y="1938528"/>
+            <a:ext cx="978408" cy="310896"/>
           </a:xfrm>
           <a:prstGeom prst="rect">
             <a:avLst/>
@@ -12561,8 +12562,8 @@
         </p:nvSpPr>
         <p:spPr>
           <a:xfrm>
-            <a:off x="1508760" y="2075688"/>
-            <a:ext cx="6126480" cy="384048"/>
+            <a:off x="1508760" y="1938528"/>
+            <a:ext cx="6126480" cy="310896"/>
           </a:xfrm>
           <a:prstGeom prst="rect">
             <a:avLst/>
@@ -12586,8 +12587,8 @@
         </p:nvSpPr>
         <p:spPr>
           <a:xfrm>
-            <a:off x="4308689" y="2103120"/>
-            <a:ext cx="27307" cy="329184"/>
+            <a:off x="4308689" y="1965960"/>
+            <a:ext cx="27307" cy="256032"/>
           </a:xfrm>
           <a:prstGeom prst="rect">
             <a:avLst/>
@@ -12606,8 +12607,8 @@
         </p:nvSpPr>
         <p:spPr>
           <a:xfrm>
-            <a:off x="4589615" y="2103120"/>
-            <a:ext cx="28510" cy="329184"/>
+            <a:off x="4589615" y="1965960"/>
+            <a:ext cx="28510" cy="256032"/>
           </a:xfrm>
           <a:prstGeom prst="rect">
             <a:avLst/>
@@ -12626,8 +12627,8 @@
         </p:nvSpPr>
         <p:spPr>
           <a:xfrm>
-            <a:off x="4879951" y="2103120"/>
-            <a:ext cx="27095" cy="329184"/>
+            <a:off x="4879951" y="1965960"/>
+            <a:ext cx="27095" cy="256032"/>
           </a:xfrm>
           <a:prstGeom prst="rect">
             <a:avLst/>
@@ -12646,8 +12647,8 @@
         </p:nvSpPr>
         <p:spPr>
           <a:xfrm>
-            <a:off x="5138240" y="2103120"/>
-            <a:ext cx="26812" cy="329184"/>
+            <a:off x="5138240" y="1965960"/>
+            <a:ext cx="26812" cy="256032"/>
           </a:xfrm>
           <a:prstGeom prst="rect">
             <a:avLst/>
@@ -12666,8 +12667,8 @@
         </p:nvSpPr>
         <p:spPr>
           <a:xfrm>
-            <a:off x="5418247" y="2103120"/>
-            <a:ext cx="28298" cy="329184"/>
+            <a:off x="5418247" y="1965960"/>
+            <a:ext cx="28298" cy="256032"/>
           </a:xfrm>
           <a:prstGeom prst="rect">
             <a:avLst/>
@@ -12686,8 +12687,8 @@
         </p:nvSpPr>
         <p:spPr>
           <a:xfrm>
-            <a:off x="5694433" y="2103120"/>
-            <a:ext cx="30774" cy="329184"/>
+            <a:off x="5694433" y="1965960"/>
+            <a:ext cx="30774" cy="256032"/>
           </a:xfrm>
           <a:prstGeom prst="rect">
             <a:avLst/>
@@ -12706,8 +12707,8 @@
         </p:nvSpPr>
         <p:spPr>
           <a:xfrm>
-            <a:off x="5801328" y="2103120"/>
-            <a:ext cx="40112" cy="329184"/>
+            <a:off x="5801328" y="1965960"/>
+            <a:ext cx="40112" cy="256032"/>
           </a:xfrm>
           <a:prstGeom prst="rect">
             <a:avLst/>
@@ -12726,8 +12727,8 @@
         </p:nvSpPr>
         <p:spPr>
           <a:xfrm>
-            <a:off x="5901291" y="2103120"/>
-            <a:ext cx="40466" cy="329184"/>
+            <a:off x="5901291" y="1965960"/>
+            <a:ext cx="40466" cy="256032"/>
           </a:xfrm>
           <a:prstGeom prst="rect">
             <a:avLst/>
@@ -12746,8 +12747,8 @@
         </p:nvSpPr>
         <p:spPr>
           <a:xfrm>
-            <a:off x="6006771" y="2103120"/>
-            <a:ext cx="40254" cy="329184"/>
+            <a:off x="6006771" y="1965960"/>
+            <a:ext cx="40254" cy="256032"/>
           </a:xfrm>
           <a:prstGeom prst="rect">
             <a:avLst/>
@@ -12766,8 +12767,8 @@
         </p:nvSpPr>
         <p:spPr>
           <a:xfrm>
-            <a:off x="6104681" y="2103120"/>
-            <a:ext cx="41103" cy="329184"/>
+            <a:off x="6104681" y="1965960"/>
+            <a:ext cx="41103" cy="256032"/>
           </a:xfrm>
           <a:prstGeom prst="rect">
             <a:avLst/>
@@ -12786,8 +12787,8 @@
         </p:nvSpPr>
         <p:spPr>
           <a:xfrm>
-            <a:off x="6204148" y="2103120"/>
-            <a:ext cx="40890" cy="329184"/>
+            <a:off x="6204148" y="1965960"/>
+            <a:ext cx="40890" cy="256032"/>
           </a:xfrm>
           <a:prstGeom prst="rect">
             <a:avLst/>
@@ -12806,8 +12807,8 @@
         </p:nvSpPr>
         <p:spPr>
           <a:xfrm>
-            <a:off x="6318825" y="2103120"/>
-            <a:ext cx="39900" cy="329184"/>
+            <a:off x="6318825" y="1965960"/>
+            <a:ext cx="39900" cy="256032"/>
           </a:xfrm>
           <a:prstGeom prst="rect">
             <a:avLst/>
@@ -12826,8 +12827,8 @@
         </p:nvSpPr>
         <p:spPr>
           <a:xfrm>
-            <a:off x="6448641" y="2103120"/>
-            <a:ext cx="29500" cy="329184"/>
+            <a:off x="6448641" y="1965960"/>
+            <a:ext cx="29500" cy="256032"/>
           </a:xfrm>
           <a:prstGeom prst="rect">
             <a:avLst/>
@@ -12846,8 +12847,8 @@
         </p:nvSpPr>
         <p:spPr>
           <a:xfrm>
-            <a:off x="6940033" y="2103120"/>
-            <a:ext cx="20233" cy="329184"/>
+            <a:off x="6940033" y="1965960"/>
+            <a:ext cx="20233" cy="256032"/>
           </a:xfrm>
           <a:prstGeom prst="rect">
             <a:avLst/>
@@ -12866,8 +12867,8 @@
         </p:nvSpPr>
         <p:spPr>
           <a:xfrm>
-            <a:off x="7011202" y="2103120"/>
-            <a:ext cx="33391" cy="329184"/>
+            <a:off x="7011202" y="1965960"/>
+            <a:ext cx="33391" cy="256032"/>
           </a:xfrm>
           <a:prstGeom prst="rect">
             <a:avLst/>
@@ -12886,8 +12887,8 @@
         </p:nvSpPr>
         <p:spPr>
           <a:xfrm>
-            <a:off x="7285833" y="2103120"/>
-            <a:ext cx="310498" cy="329184"/>
+            <a:off x="7285833" y="1965960"/>
+            <a:ext cx="310498" cy="256032"/>
           </a:xfrm>
           <a:prstGeom prst="rect">
             <a:avLst/>
@@ -12906,8 +12907,8 @@
         </p:nvSpPr>
         <p:spPr>
           <a:xfrm>
-            <a:off x="7671816" y="2075688"/>
-            <a:ext cx="914400" cy="384048"/>
+            <a:off x="7671816" y="1938528"/>
+            <a:ext cx="914400" cy="310896"/>
           </a:xfrm>
           <a:prstGeom prst="rect">
             <a:avLst/>
@@ -12945,8 +12946,8 @@
         </p:nvSpPr>
         <p:spPr>
           <a:xfrm>
-            <a:off x="3421693" y="1600200"/>
-            <a:ext cx="0" cy="859536"/>
+            <a:off x="3421693" y="1536192"/>
+            <a:ext cx="0" cy="713232"/>
           </a:xfrm>
           <a:prstGeom prst="line">
             <a:avLst/>
@@ -12968,8 +12969,8 @@
         </p:nvSpPr>
         <p:spPr>
           <a:xfrm>
-            <a:off x="7060794" y="1600200"/>
-            <a:ext cx="0" cy="859536"/>
+            <a:off x="7060794" y="1536192"/>
+            <a:ext cx="0" cy="713232"/>
           </a:xfrm>
           <a:prstGeom prst="line">
             <a:avLst/>
@@ -12991,7 +12992,7 @@
         </p:nvSpPr>
         <p:spPr>
           <a:xfrm>
-            <a:off x="1508760" y="2569464"/>
+            <a:off x="1508760" y="2359152"/>
             <a:ext cx="6126480" cy="0"/>
           </a:xfrm>
           <a:prstGeom prst="line">
@@ -13014,7 +13015,7 @@
         </p:nvSpPr>
         <p:spPr>
           <a:xfrm>
-            <a:off x="1508760" y="2569464"/>
+            <a:off x="1508760" y="2359152"/>
             <a:ext cx="0" cy="45720"/>
           </a:xfrm>
           <a:prstGeom prst="line">
@@ -13037,7 +13038,7 @@
         </p:nvSpPr>
         <p:spPr>
           <a:xfrm>
-            <a:off x="1234440" y="2615184"/>
+            <a:off x="1234440" y="2404872"/>
             <a:ext cx="548640" cy="182880"/>
           </a:xfrm>
           <a:prstGeom prst="rect">
@@ -13076,7 +13077,7 @@
         </p:nvSpPr>
         <p:spPr>
           <a:xfrm>
-            <a:off x="2923651" y="2569464"/>
+            <a:off x="2923651" y="2359152"/>
             <a:ext cx="0" cy="45720"/>
           </a:xfrm>
           <a:prstGeom prst="line">
@@ -13099,7 +13100,7 @@
         </p:nvSpPr>
         <p:spPr>
           <a:xfrm>
-            <a:off x="2649331" y="2615184"/>
+            <a:off x="2649331" y="2404872"/>
             <a:ext cx="548640" cy="182880"/>
           </a:xfrm>
           <a:prstGeom prst="rect">
@@ -13138,7 +13139,7 @@
         </p:nvSpPr>
         <p:spPr>
           <a:xfrm>
-            <a:off x="4338543" y="2569464"/>
+            <a:off x="4338543" y="2359152"/>
             <a:ext cx="0" cy="45720"/>
           </a:xfrm>
           <a:prstGeom prst="line">
@@ -13161,7 +13162,7 @@
         </p:nvSpPr>
         <p:spPr>
           <a:xfrm>
-            <a:off x="4064223" y="2615184"/>
+            <a:off x="4064223" y="2404872"/>
             <a:ext cx="548640" cy="182880"/>
           </a:xfrm>
           <a:prstGeom prst="rect">
@@ -13200,7 +13201,7 @@
         </p:nvSpPr>
         <p:spPr>
           <a:xfrm>
-            <a:off x="5753434" y="2569464"/>
+            <a:off x="5753434" y="2359152"/>
             <a:ext cx="0" cy="45720"/>
           </a:xfrm>
           <a:prstGeom prst="line">
@@ -13223,7 +13224,7 @@
         </p:nvSpPr>
         <p:spPr>
           <a:xfrm>
-            <a:off x="5479114" y="2615184"/>
+            <a:off x="5479114" y="2404872"/>
             <a:ext cx="548640" cy="182880"/>
           </a:xfrm>
           <a:prstGeom prst="rect">
@@ -13262,7 +13263,7 @@
         </p:nvSpPr>
         <p:spPr>
           <a:xfrm>
-            <a:off x="7168326" y="2569464"/>
+            <a:off x="7168326" y="2359152"/>
             <a:ext cx="0" cy="45720"/>
           </a:xfrm>
           <a:prstGeom prst="line">
@@ -13285,7 +13286,7 @@
         </p:nvSpPr>
         <p:spPr>
           <a:xfrm>
-            <a:off x="6894006" y="2615184"/>
+            <a:off x="6894006" y="2404872"/>
             <a:ext cx="548640" cy="182880"/>
           </a:xfrm>
           <a:prstGeom prst="rect">
@@ -13324,7 +13325,7 @@
         </p:nvSpPr>
         <p:spPr>
           <a:xfrm>
-            <a:off x="5806440" y="2770632"/>
+            <a:off x="5806440" y="2560320"/>
             <a:ext cx="1828800" cy="182880"/>
           </a:xfrm>
           <a:prstGeom prst="rect">
@@ -13363,14 +13364,14 @@
         </p:nvSpPr>
         <p:spPr>
           <a:xfrm>
-            <a:off x="457200" y="3090672"/>
-            <a:ext cx="45720" cy="475488"/>
-          </a:xfrm>
-          <a:prstGeom prst="rect">
-            <a:avLst/>
-          </a:prstGeom>
-          <a:solidFill>
-            <a:srgbClr val="76B900"/>
+            <a:off x="1700298" y="1600200"/>
+            <a:ext cx="182880" cy="182880"/>
+          </a:xfrm>
+          <a:prstGeom prst="ellipse">
+            <a:avLst/>
+          </a:prstGeom>
+          <a:solidFill>
+            <a:srgbClr val="1A1A1A"/>
           </a:solidFill>
           <a:ln/>
         </p:spPr>
@@ -13383,8 +13384,8 @@
         </p:nvSpPr>
         <p:spPr>
           <a:xfrm>
-            <a:off x="621792" y="3072384"/>
-            <a:ext cx="3840480" cy="548640"/>
+            <a:off x="1700298" y="1600200"/>
+            <a:ext cx="182880" cy="182880"/>
           </a:xfrm>
           <a:prstGeom prst="rect">
             <a:avLst/>
@@ -13393,71 +13394,116 @@
           <a:ln/>
         </p:spPr>
         <p:txBody>
-          <a:bodyPr wrap="square" lIns="0" tIns="0" rIns="0" bIns="0" rtlCol="0" anchor="t"/>
+          <a:bodyPr wrap="square" lIns="0" tIns="0" rIns="0" bIns="0" rtlCol="0" anchor="ctr"/>
           <a:lstStyle/>
           <a:p>
-            <a:pPr indent="0" marL="0">
+            <a:pPr algn="ctr" indent="0" marL="0">
               <a:buNone/>
             </a:pPr>
             <a:r>
-              <a:rPr lang="en-US" sz="1050" b="1" dirty="0">
+              <a:rPr lang="en-US" sz="850" b="1" dirty="0">
                 <a:solidFill>
-                  <a:srgbClr val="000000"/>
+                  <a:srgbClr val="FFFFFF"/>
                 </a:solidFill>
                 <a:latin typeface="NVIDIA Sans" pitchFamily="34" charset="0"/>
                 <a:ea typeface="NVIDIA Sans" pitchFamily="34" charset="-122"/>
                 <a:cs typeface="NVIDIA Sans" pitchFamily="34" charset="-120"/>
               </a:rPr>
-              <a:t>29% pure GPU idle — </a:t>
+              <a:t>2</a:t>
             </a:r>
-            <a:pPr indent="0" marL="0">
+            <a:endParaRPr lang="en-US" sz="850" dirty="0"/>
+          </a:p>
+        </p:txBody>
+      </p:sp>
+      <p:sp>
+        <p:nvSpPr>
+          <p:cNvPr id="234" name="Shape 232"/>
+          <p:cNvSpPr/>
+          <p:nvPr/>
+        </p:nvSpPr>
+        <p:spPr>
+          <a:xfrm>
+            <a:off x="2655350" y="1600200"/>
+            <a:ext cx="182880" cy="182880"/>
+          </a:xfrm>
+          <a:prstGeom prst="ellipse">
+            <a:avLst/>
+          </a:prstGeom>
+          <a:solidFill>
+            <a:srgbClr val="1A1A1A"/>
+          </a:solidFill>
+          <a:ln/>
+        </p:spPr>
+      </p:sp>
+      <p:sp>
+        <p:nvSpPr>
+          <p:cNvPr id="235" name="Text 233"/>
+          <p:cNvSpPr/>
+          <p:nvPr/>
+        </p:nvSpPr>
+        <p:spPr>
+          <a:xfrm>
+            <a:off x="2655350" y="1600200"/>
+            <a:ext cx="182880" cy="182880"/>
+          </a:xfrm>
+          <a:prstGeom prst="rect">
+            <a:avLst/>
+          </a:prstGeom>
+          <a:noFill/>
+          <a:ln/>
+        </p:spPr>
+        <p:txBody>
+          <a:bodyPr wrap="square" lIns="0" tIns="0" rIns="0" bIns="0" rtlCol="0" anchor="ctr"/>
+          <a:lstStyle/>
+          <a:p>
+            <a:pPr algn="ctr" indent="0" marL="0">
               <a:buNone/>
             </a:pPr>
             <a:r>
-              <a:rPr lang="en-US" sz="1050" dirty="0">
+              <a:rPr lang="en-US" sz="850" b="1" dirty="0">
                 <a:solidFill>
-                  <a:srgbClr val="5E5E5E"/>
+                  <a:srgbClr val="FFFFFF"/>
                 </a:solidFill>
                 <a:latin typeface="NVIDIA Sans" pitchFamily="34" charset="0"/>
                 <a:ea typeface="NVIDIA Sans" pitchFamily="34" charset="-122"/>
                 <a:cs typeface="NVIDIA Sans" pitchFamily="34" charset="-120"/>
               </a:rPr>
-              <a:t>254 ms with no kernel on any stream — the GPU waits for the CPU</a:t>
+              <a:t>4</a:t>
             </a:r>
-            <a:endParaRPr lang="en-US" sz="1050" dirty="0"/>
+            <a:endParaRPr lang="en-US" sz="850" dirty="0"/>
           </a:p>
         </p:txBody>
       </p:sp>
       <p:sp>
         <p:nvSpPr>
-          <p:cNvPr id="234" name="Shape 232"/>
-          <p:cNvSpPr/>
-          <p:nvPr/>
-        </p:nvSpPr>
-        <p:spPr>
-          <a:xfrm>
-            <a:off x="4663440" y="3090672"/>
-            <a:ext cx="45720" cy="475488"/>
-          </a:xfrm>
-          <a:prstGeom prst="rect">
-            <a:avLst/>
-          </a:prstGeom>
-          <a:solidFill>
-            <a:srgbClr val="76B900"/>
-          </a:solidFill>
-          <a:ln/>
-        </p:spPr>
-      </p:sp>
-      <p:sp>
-        <p:nvSpPr>
-          <p:cNvPr id="235" name="Text 233"/>
-          <p:cNvSpPr/>
-          <p:nvPr/>
-        </p:nvSpPr>
-        <p:spPr>
-          <a:xfrm>
-            <a:off x="4828032" y="3072384"/>
-            <a:ext cx="3840480" cy="548640"/>
+          <p:cNvPr id="236" name="Shape 234"/>
+          <p:cNvSpPr/>
+          <p:nvPr/>
+        </p:nvSpPr>
+        <p:spPr>
+          <a:xfrm>
+            <a:off x="4459337" y="1600200"/>
+            <a:ext cx="182880" cy="182880"/>
+          </a:xfrm>
+          <a:prstGeom prst="ellipse">
+            <a:avLst/>
+          </a:prstGeom>
+          <a:solidFill>
+            <a:srgbClr val="1A1A1A"/>
+          </a:solidFill>
+          <a:ln/>
+        </p:spPr>
+      </p:sp>
+      <p:sp>
+        <p:nvSpPr>
+          <p:cNvPr id="237" name="Text 235"/>
+          <p:cNvSpPr/>
+          <p:nvPr/>
+        </p:nvSpPr>
+        <p:spPr>
+          <a:xfrm>
+            <a:off x="4459337" y="1600200"/>
+            <a:ext cx="182880" cy="182880"/>
           </a:xfrm>
           <a:prstGeom prst="rect">
             <a:avLst/>
@@ -13466,190 +13512,1302 @@
           <a:ln/>
         </p:spPr>
         <p:txBody>
-          <a:bodyPr wrap="square" lIns="0" tIns="0" rIns="0" bIns="0" rtlCol="0" anchor="t"/>
+          <a:bodyPr wrap="square" lIns="0" tIns="0" rIns="0" bIns="0" rtlCol="0" anchor="ctr"/>
           <a:lstStyle/>
           <a:p>
-            <a:pPr indent="0" marL="0">
+            <a:pPr algn="ctr" indent="0" marL="0">
               <a:buNone/>
             </a:pPr>
             <a:r>
-              <a:rPr lang="en-US" sz="1050" b="1" dirty="0">
+              <a:rPr lang="en-US" sz="850" b="1" dirty="0">
                 <a:solidFill>
-                  <a:srgbClr val="000000"/>
+                  <a:srgbClr val="FFFFFF"/>
                 </a:solidFill>
                 <a:latin typeface="NVIDIA Sans" pitchFamily="34" charset="0"/>
                 <a:ea typeface="NVIDIA Sans" pitchFamily="34" charset="-122"/>
                 <a:cs typeface="NVIDIA Sans" pitchFamily="34" charset="-120"/>
               </a:rPr>
-              <a:t>13,868 kernel launches / step — </a:t>
+              <a:t>1</a:t>
             </a:r>
-            <a:pPr indent="0" marL="0">
+            <a:endParaRPr lang="en-US" sz="850" dirty="0"/>
+          </a:p>
+        </p:txBody>
+      </p:sp>
+      <p:sp>
+        <p:nvSpPr>
+          <p:cNvPr id="238" name="Shape 236"/>
+          <p:cNvSpPr/>
+          <p:nvPr/>
+        </p:nvSpPr>
+        <p:spPr>
+          <a:xfrm>
+            <a:off x="7345715" y="2002536"/>
+            <a:ext cx="182880" cy="182880"/>
+          </a:xfrm>
+          <a:prstGeom prst="ellipse">
+            <a:avLst/>
+          </a:prstGeom>
+          <a:solidFill>
+            <a:srgbClr val="1A1A1A"/>
+          </a:solidFill>
+          <a:ln/>
+        </p:spPr>
+      </p:sp>
+      <p:sp>
+        <p:nvSpPr>
+          <p:cNvPr id="239" name="Text 237"/>
+          <p:cNvSpPr/>
+          <p:nvPr/>
+        </p:nvSpPr>
+        <p:spPr>
+          <a:xfrm>
+            <a:off x="7345715" y="2002536"/>
+            <a:ext cx="182880" cy="182880"/>
+          </a:xfrm>
+          <a:prstGeom prst="rect">
+            <a:avLst/>
+          </a:prstGeom>
+          <a:noFill/>
+          <a:ln/>
+        </p:spPr>
+        <p:txBody>
+          <a:bodyPr wrap="square" lIns="0" tIns="0" rIns="0" bIns="0" rtlCol="0" anchor="ctr"/>
+          <a:lstStyle/>
+          <a:p>
+            <a:pPr algn="ctr" indent="0" marL="0">
               <a:buNone/>
             </a:pPr>
             <a:r>
-              <a:rPr lang="en-US" sz="1050" dirty="0">
+              <a:rPr lang="en-US" sz="850" b="1" dirty="0">
                 <a:solidFill>
-                  <a:srgbClr val="5E5E5E"/>
+                  <a:srgbClr val="FFFFFF"/>
                 </a:solidFill>
                 <a:latin typeface="NVIDIA Sans" pitchFamily="34" charset="0"/>
                 <a:ea typeface="NVIDIA Sans" pitchFamily="34" charset="-122"/>
                 <a:cs typeface="NVIDIA Sans" pitchFamily="34" charset="-120"/>
               </a:rPr>
-              <a:t>eager launch overhead dominates; many kernels run &lt; 20 µs</a:t>
+              <a:t>5</a:t>
             </a:r>
-            <a:endParaRPr lang="en-US" sz="1050" dirty="0"/>
+            <a:endParaRPr lang="en-US" sz="850" dirty="0"/>
           </a:p>
         </p:txBody>
       </p:sp>
-      <p:sp>
-        <p:nvSpPr>
-          <p:cNvPr id="236" name="Shape 234"/>
-          <p:cNvSpPr/>
-          <p:nvPr/>
-        </p:nvSpPr>
-        <p:spPr>
-          <a:xfrm>
-            <a:off x="457200" y="3657600"/>
-            <a:ext cx="45720" cy="475488"/>
-          </a:xfrm>
-          <a:prstGeom prst="rect">
-            <a:avLst/>
-          </a:prstGeom>
-          <a:solidFill>
-            <a:srgbClr val="76B900"/>
-          </a:solidFill>
-          <a:ln/>
-        </p:spPr>
-      </p:sp>
-      <p:sp>
-        <p:nvSpPr>
-          <p:cNvPr id="237" name="Text 235"/>
-          <p:cNvSpPr/>
-          <p:nvPr/>
-        </p:nvSpPr>
-        <p:spPr>
-          <a:xfrm>
-            <a:off x="621792" y="3639312"/>
-            <a:ext cx="3840480" cy="548640"/>
-          </a:xfrm>
-          <a:prstGeom prst="rect">
-            <a:avLst/>
-          </a:prstGeom>
-          <a:noFill/>
-          <a:ln/>
-        </p:spPr>
-        <p:txBody>
-          <a:bodyPr wrap="square" lIns="0" tIns="0" rIns="0" bIns="0" rtlCol="0" anchor="t"/>
-          <a:lstStyle/>
-          <a:p>
-            <a:pPr indent="0" marL="0">
-              <a:buNone/>
-            </a:pPr>
-            <a:r>
-              <a:rPr lang="en-US" sz="1050" b="1" dirty="0">
-                <a:solidFill>
-                  <a:srgbClr val="000000"/>
-                </a:solidFill>
-                <a:latin typeface="NVIDIA Sans" pitchFamily="34" charset="0"/>
-                <a:ea typeface="NVIDIA Sans" pitchFamily="34" charset="-122"/>
-                <a:cs typeface="NVIDIA Sans" pitchFamily="34" charset="-120"/>
-              </a:rPr>
-              <a:t>Action head runs in fp32 — </a:t>
-            </a:r>
-            <a:pPr indent="0" marL="0">
-              <a:buNone/>
-            </a:pPr>
-            <a:r>
-              <a:rPr lang="en-US" sz="1050" dirty="0">
-                <a:solidFill>
-                  <a:srgbClr val="5E5E5E"/>
-                </a:solidFill>
-                <a:latin typeface="NVIDIA Sans" pitchFamily="34" charset="0"/>
-                <a:ea typeface="NVIDIA Sans" pitchFamily="34" charset="-122"/>
-                <a:cs typeface="NVIDIA Sans" pitchFamily="34" charset="-120"/>
-              </a:rPr>
-              <a:t>the 2.96B DiT sits outside autocast — half the achievable math rate</a:t>
-            </a:r>
-            <a:endParaRPr lang="en-US" sz="1050" dirty="0"/>
-          </a:p>
-        </p:txBody>
-      </p:sp>
-      <p:sp>
-        <p:nvSpPr>
-          <p:cNvPr id="238" name="Shape 236"/>
-          <p:cNvSpPr/>
-          <p:nvPr/>
-        </p:nvSpPr>
-        <p:spPr>
-          <a:xfrm>
-            <a:off x="4663440" y="3657600"/>
-            <a:ext cx="45720" cy="475488"/>
-          </a:xfrm>
-          <a:prstGeom prst="rect">
-            <a:avLst/>
-          </a:prstGeom>
-          <a:solidFill>
-            <a:srgbClr val="76B900"/>
-          </a:solidFill>
-          <a:ln/>
-        </p:spPr>
-      </p:sp>
-      <p:sp>
-        <p:nvSpPr>
-          <p:cNvPr id="239" name="Text 237"/>
-          <p:cNvSpPr/>
-          <p:nvPr/>
-        </p:nvSpPr>
-        <p:spPr>
-          <a:xfrm>
-            <a:off x="4828032" y="3639312"/>
-            <a:ext cx="3840480" cy="548640"/>
-          </a:xfrm>
-          <a:prstGeom prst="rect">
-            <a:avLst/>
-          </a:prstGeom>
-          <a:noFill/>
-          <a:ln/>
-        </p:spPr>
-        <p:txBody>
-          <a:bodyPr wrap="square" lIns="0" tIns="0" rIns="0" bIns="0" rtlCol="0" anchor="t"/>
-          <a:lstStyle/>
-          <a:p>
-            <a:pPr indent="0" marL="0">
-              <a:buNone/>
-            </a:pPr>
-            <a:r>
-              <a:rPr lang="en-US" sz="1050" b="1" dirty="0">
-                <a:solidFill>
-                  <a:srgbClr val="000000"/>
-                </a:solidFill>
-                <a:latin typeface="NVIDIA Sans" pitchFamily="34" charset="0"/>
-                <a:ea typeface="NVIDIA Sans" pitchFamily="34" charset="-122"/>
-                <a:cs typeface="NVIDIA Sans" pitchFamily="34" charset="-120"/>
-              </a:rPr>
-              <a:t>CPU work inside forward() — </a:t>
-            </a:r>
-            <a:pPr indent="0" marL="0">
-              <a:buNone/>
-            </a:pPr>
-            <a:r>
-              <a:rPr lang="en-US" sz="1050" dirty="0">
-                <a:solidFill>
-                  <a:srgbClr val="5E5E5E"/>
-                </a:solidFill>
-                <a:latin typeface="NVIDIA Sans" pitchFamily="34" charset="0"/>
-                <a:ea typeface="NVIDIA Sans" pitchFamily="34" charset="-122"/>
-                <a:cs typeface="NVIDIA Sans" pitchFamily="34" charset="-120"/>
-              </a:rPr>
-              <a:t>HF preprocessing + per-step syncs serialize CPU and GPU</a:t>
-            </a:r>
-            <a:endParaRPr lang="en-US" sz="1050" dirty="0"/>
-          </a:p>
-        </p:txBody>
-      </p:sp>
-      <p:sp>
-        <p:nvSpPr>
-          <p:cNvPr id="240" name="Text 238"/>
+      <p:graphicFrame>
+        <p:nvGraphicFramePr>
+          <p:cNvPr id="5" name="Table 0"/>
+          <p:cNvGraphicFramePr>
+            <a:graphicFrameLocks noGrp="1"/>
+          </p:cNvGraphicFramePr>
+          <p:nvPr>
+            <p:extLst>
+              <p:ext uri="{D42A27DB-BD31-4B8C-83A1-F6EECF244321}">
+                <p14:modId xmlns:p14="http://schemas.microsoft.com/office/powerpoint/2010/main" val="1579011935"/>
+              </p:ext>
+            </p:extLst>
+          </p:nvPr>
+        </p:nvGraphicFramePr>
+        <p:xfrm>
+          <a:off x="457200" y="2825496"/>
+          <a:ext cx="8229600" cy="914400"/>
+        </p:xfrm>
+        <a:graphic>
+          <a:graphicData uri="http://schemas.openxmlformats.org/drawingml/2006/table">
+            <a:tbl>
+              <a:tblPr/>
+              <a:tblGrid>
+                <a:gridCol w="1645920"/>
+                <a:gridCol w="4114800"/>
+                <a:gridCol w="2468880"/>
+              </a:tblGrid>
+              <a:tr h="237744">
+                <a:tc>
+                  <a:txBody>
+                    <a:bodyPr/>
+                    <a:lstStyle/>
+                    <a:p>
+                      <a:pPr algn="l" indent="0" marL="0">
+                        <a:buNone/>
+                      </a:pPr>
+                      <a:r>
+                        <a:rPr lang="en-US" sz="850" b="1" dirty="0">
+                          <a:solidFill>
+                            <a:srgbClr val="000000"/>
+                          </a:solidFill>
+                          <a:latin typeface="NVIDIA Sans" pitchFamily="34" charset="0"/>
+                          <a:ea typeface="NVIDIA Sans" pitchFamily="34" charset="-122"/>
+                          <a:cs typeface="NVIDIA Sans" pitchFamily="34" charset="-120"/>
+                        </a:rPr>
+                        <a:t>1 · fp32 action head</a:t>
+                      </a:r>
+                      <a:endParaRPr lang="en-US" sz="850" dirty="0">
+                        <a:latin typeface="NVIDIA Sans" charset="0"/>
+                        <a:ea typeface="NVIDIA Sans" charset="0"/>
+                        <a:cs typeface="NVIDIA Sans" charset="0"/>
+                      </a:endParaRPr>
+                    </a:p>
+                  </a:txBody>
+                  <a:tcPr marL="91440" marR="91440" marT="45720" marB="45720" anchor="ctr">
+                    <a:lnL w="6350" cap="flat" cmpd="sng" algn="ctr">
+                      <a:solidFill>
+                        <a:srgbClr val="CDCDCD"/>
+                      </a:solidFill>
+                      <a:prstDash val="solid"/>
+                      <a:round/>
+                      <a:headEnd type="none" w="med" len="med"/>
+                      <a:tailEnd type="none" w="med" len="med"/>
+                    </a:lnL>
+                    <a:lnR w="6350" cap="flat" cmpd="sng" algn="ctr">
+                      <a:solidFill>
+                        <a:srgbClr val="CDCDCD"/>
+                      </a:solidFill>
+                      <a:prstDash val="solid"/>
+                      <a:round/>
+                      <a:headEnd type="none" w="med" len="med"/>
+                      <a:tailEnd type="none" w="med" len="med"/>
+                    </a:lnR>
+                    <a:lnT w="6350" cap="flat" cmpd="sng" algn="ctr">
+                      <a:solidFill>
+                        <a:srgbClr val="CDCDCD"/>
+                      </a:solidFill>
+                      <a:prstDash val="solid"/>
+                      <a:round/>
+                      <a:headEnd type="none" w="med" len="med"/>
+                      <a:tailEnd type="none" w="med" len="med"/>
+                    </a:lnT>
+                    <a:lnB w="6350" cap="flat" cmpd="sng" algn="ctr">
+                      <a:solidFill>
+                        <a:srgbClr val="CDCDCD"/>
+                      </a:solidFill>
+                      <a:prstDash val="solid"/>
+                      <a:round/>
+                      <a:headEnd type="none" w="med" len="med"/>
+                      <a:tailEnd type="none" w="med" len="med"/>
+                    </a:lnB>
+                  </a:tcPr>
+                </a:tc>
+                <a:tc>
+                  <a:txBody>
+                    <a:bodyPr/>
+                    <a:lstStyle/>
+                    <a:p>
+                      <a:pPr algn="l" indent="0" marL="0">
+                        <a:buNone/>
+                      </a:pPr>
+                      <a:r>
+                        <a:rPr lang="en-US" sz="850" dirty="0">
+                          <a:solidFill>
+                            <a:srgbClr val="000000"/>
+                          </a:solidFill>
+                          <a:latin typeface="NVIDIA Sans" pitchFamily="34" charset="0"/>
+                          <a:ea typeface="NVIDIA Sans" pitchFamily="34" charset="-122"/>
+                          <a:cs typeface="NVIDIA Sans" pitchFamily="34" charset="-120"/>
+                        </a:rPr>
+                        <a:t>201 ms fp32 GEMMs vs 66 ms bf16 — 2.96B DiT outside autocast</a:t>
+                      </a:r>
+                      <a:endParaRPr lang="en-US" sz="850" dirty="0">
+                        <a:latin typeface="NVIDIA Sans" charset="0"/>
+                        <a:ea typeface="NVIDIA Sans" charset="0"/>
+                        <a:cs typeface="NVIDIA Sans" charset="0"/>
+                      </a:endParaRPr>
+                    </a:p>
+                  </a:txBody>
+                  <a:tcPr marL="91440" marR="91440" marT="45720" marB="45720" anchor="ctr">
+                    <a:lnL w="6350" cap="flat" cmpd="sng" algn="ctr">
+                      <a:solidFill>
+                        <a:srgbClr val="CDCDCD"/>
+                      </a:solidFill>
+                      <a:prstDash val="solid"/>
+                      <a:round/>
+                      <a:headEnd type="none" w="med" len="med"/>
+                      <a:tailEnd type="none" w="med" len="med"/>
+                    </a:lnL>
+                    <a:lnR w="6350" cap="flat" cmpd="sng" algn="ctr">
+                      <a:solidFill>
+                        <a:srgbClr val="CDCDCD"/>
+                      </a:solidFill>
+                      <a:prstDash val="solid"/>
+                      <a:round/>
+                      <a:headEnd type="none" w="med" len="med"/>
+                      <a:tailEnd type="none" w="med" len="med"/>
+                    </a:lnR>
+                    <a:lnT w="6350" cap="flat" cmpd="sng" algn="ctr">
+                      <a:solidFill>
+                        <a:srgbClr val="CDCDCD"/>
+                      </a:solidFill>
+                      <a:prstDash val="solid"/>
+                      <a:round/>
+                      <a:headEnd type="none" w="med" len="med"/>
+                      <a:tailEnd type="none" w="med" len="med"/>
+                    </a:lnT>
+                    <a:lnB w="6350" cap="flat" cmpd="sng" algn="ctr">
+                      <a:solidFill>
+                        <a:srgbClr val="CDCDCD"/>
+                      </a:solidFill>
+                      <a:prstDash val="solid"/>
+                      <a:round/>
+                      <a:headEnd type="none" w="med" len="med"/>
+                      <a:tailEnd type="none" w="med" len="med"/>
+                    </a:lnB>
+                  </a:tcPr>
+                </a:tc>
+                <a:tc>
+                  <a:txBody>
+                    <a:bodyPr/>
+                    <a:lstStyle/>
+                    <a:p>
+                      <a:pPr algn="l" indent="0" marL="0">
+                        <a:buNone/>
+                      </a:pPr>
+                      <a:r>
+                        <a:rPr lang="en-US" sz="850" b="1" dirty="0">
+                          <a:solidFill>
+                            <a:srgbClr val="008564"/>
+                          </a:solidFill>
+                          <a:latin typeface="NVIDIA Sans" pitchFamily="34" charset="0"/>
+                          <a:ea typeface="NVIDIA Sans" pitchFamily="34" charset="-122"/>
+                          <a:cs typeface="NVIDIA Sans" pitchFamily="34" charset="-120"/>
+                        </a:rPr>
+                        <a:t>bf16 DiT  (−218 ms)</a:t>
+                      </a:r>
+                      <a:endParaRPr lang="en-US" sz="850" dirty="0">
+                        <a:latin typeface="NVIDIA Sans" charset="0"/>
+                        <a:ea typeface="NVIDIA Sans" charset="0"/>
+                        <a:cs typeface="NVIDIA Sans" charset="0"/>
+                      </a:endParaRPr>
+                    </a:p>
+                  </a:txBody>
+                  <a:tcPr marL="91440" marR="91440" marT="45720" marB="45720" anchor="ctr">
+                    <a:lnL w="6350" cap="flat" cmpd="sng" algn="ctr">
+                      <a:solidFill>
+                        <a:srgbClr val="CDCDCD"/>
+                      </a:solidFill>
+                      <a:prstDash val="solid"/>
+                      <a:round/>
+                      <a:headEnd type="none" w="med" len="med"/>
+                      <a:tailEnd type="none" w="med" len="med"/>
+                    </a:lnL>
+                    <a:lnR w="6350" cap="flat" cmpd="sng" algn="ctr">
+                      <a:solidFill>
+                        <a:srgbClr val="CDCDCD"/>
+                      </a:solidFill>
+                      <a:prstDash val="solid"/>
+                      <a:round/>
+                      <a:headEnd type="none" w="med" len="med"/>
+                      <a:tailEnd type="none" w="med" len="med"/>
+                    </a:lnR>
+                    <a:lnT w="6350" cap="flat" cmpd="sng" algn="ctr">
+                      <a:solidFill>
+                        <a:srgbClr val="CDCDCD"/>
+                      </a:solidFill>
+                      <a:prstDash val="solid"/>
+                      <a:round/>
+                      <a:headEnd type="none" w="med" len="med"/>
+                      <a:tailEnd type="none" w="med" len="med"/>
+                    </a:lnT>
+                    <a:lnB w="6350" cap="flat" cmpd="sng" algn="ctr">
+                      <a:solidFill>
+                        <a:srgbClr val="CDCDCD"/>
+                      </a:solidFill>
+                      <a:prstDash val="solid"/>
+                      <a:round/>
+                      <a:headEnd type="none" w="med" len="med"/>
+                      <a:tailEnd type="none" w="med" len="med"/>
+                    </a:lnB>
+                  </a:tcPr>
+                </a:tc>
+              </a:tr>
+              <a:tr h="237744">
+                <a:tc>
+                  <a:txBody>
+                    <a:bodyPr/>
+                    <a:lstStyle/>
+                    <a:p>
+                      <a:pPr algn="l" indent="0" marL="0">
+                        <a:buNone/>
+                      </a:pPr>
+                      <a:r>
+                        <a:rPr lang="en-US" sz="850" b="1" dirty="0">
+                          <a:solidFill>
+                            <a:srgbClr val="000000"/>
+                          </a:solidFill>
+                          <a:latin typeface="NVIDIA Sans" pitchFamily="34" charset="0"/>
+                          <a:ea typeface="NVIDIA Sans" pitchFamily="34" charset="-122"/>
+                          <a:cs typeface="NVIDIA Sans" pitchFamily="34" charset="-120"/>
+                        </a:rPr>
+                        <a:t>2 · CPU inside forward()</a:t>
+                      </a:r>
+                      <a:endParaRPr lang="en-US" sz="850" dirty="0">
+                        <a:latin typeface="NVIDIA Sans" charset="0"/>
+                        <a:ea typeface="NVIDIA Sans" charset="0"/>
+                        <a:cs typeface="NVIDIA Sans" charset="0"/>
+                      </a:endParaRPr>
+                    </a:p>
+                  </a:txBody>
+                  <a:tcPr marL="91440" marR="91440" marT="45720" marB="45720" anchor="ctr">
+                    <a:lnL w="6350" cap="flat" cmpd="sng" algn="ctr">
+                      <a:solidFill>
+                        <a:srgbClr val="CDCDCD"/>
+                      </a:solidFill>
+                      <a:prstDash val="solid"/>
+                      <a:round/>
+                      <a:headEnd type="none" w="med" len="med"/>
+                      <a:tailEnd type="none" w="med" len="med"/>
+                    </a:lnL>
+                    <a:lnR w="6350" cap="flat" cmpd="sng" algn="ctr">
+                      <a:solidFill>
+                        <a:srgbClr val="CDCDCD"/>
+                      </a:solidFill>
+                      <a:prstDash val="solid"/>
+                      <a:round/>
+                      <a:headEnd type="none" w="med" len="med"/>
+                      <a:tailEnd type="none" w="med" len="med"/>
+                    </a:lnR>
+                    <a:lnT w="6350" cap="flat" cmpd="sng" algn="ctr">
+                      <a:solidFill>
+                        <a:srgbClr val="CDCDCD"/>
+                      </a:solidFill>
+                      <a:prstDash val="solid"/>
+                      <a:round/>
+                      <a:headEnd type="none" w="med" len="med"/>
+                      <a:tailEnd type="none" w="med" len="med"/>
+                    </a:lnT>
+                    <a:lnB w="6350" cap="flat" cmpd="sng" algn="ctr">
+                      <a:solidFill>
+                        <a:srgbClr val="CDCDCD"/>
+                      </a:solidFill>
+                      <a:prstDash val="solid"/>
+                      <a:round/>
+                      <a:headEnd type="none" w="med" len="med"/>
+                      <a:tailEnd type="none" w="med" len="med"/>
+                    </a:lnB>
+                  </a:tcPr>
+                </a:tc>
+                <a:tc>
+                  <a:txBody>
+                    <a:bodyPr/>
+                    <a:lstStyle/>
+                    <a:p>
+                      <a:pPr algn="l" indent="0" marL="0">
+                        <a:buNone/>
+                      </a:pPr>
+                      <a:r>
+                        <a:rPr lang="en-US" sz="850" dirty="0">
+                          <a:solidFill>
+                            <a:srgbClr val="000000"/>
+                          </a:solidFill>
+                          <a:latin typeface="NVIDIA Sans" pitchFamily="34" charset="0"/>
+                          <a:ea typeface="NVIDIA Sans" pitchFamily="34" charset="-122"/>
+                          <a:cs typeface="NVIDIA Sans" pitchFamily="34" charset="-120"/>
+                        </a:rPr>
+                        <a:t>first 80 ms of every step: compute idle, HF preprocessing on critical path</a:t>
+                      </a:r>
+                      <a:endParaRPr lang="en-US" sz="850" dirty="0">
+                        <a:latin typeface="NVIDIA Sans" charset="0"/>
+                        <a:ea typeface="NVIDIA Sans" charset="0"/>
+                        <a:cs typeface="NVIDIA Sans" charset="0"/>
+                      </a:endParaRPr>
+                    </a:p>
+                  </a:txBody>
+                  <a:tcPr marL="91440" marR="91440" marT="45720" marB="45720" anchor="ctr">
+                    <a:lnL w="6350" cap="flat" cmpd="sng" algn="ctr">
+                      <a:solidFill>
+                        <a:srgbClr val="CDCDCD"/>
+                      </a:solidFill>
+                      <a:prstDash val="solid"/>
+                      <a:round/>
+                      <a:headEnd type="none" w="med" len="med"/>
+                      <a:tailEnd type="none" w="med" len="med"/>
+                    </a:lnL>
+                    <a:lnR w="6350" cap="flat" cmpd="sng" algn="ctr">
+                      <a:solidFill>
+                        <a:srgbClr val="CDCDCD"/>
+                      </a:solidFill>
+                      <a:prstDash val="solid"/>
+                      <a:round/>
+                      <a:headEnd type="none" w="med" len="med"/>
+                      <a:tailEnd type="none" w="med" len="med"/>
+                    </a:lnR>
+                    <a:lnT w="6350" cap="flat" cmpd="sng" algn="ctr">
+                      <a:solidFill>
+                        <a:srgbClr val="CDCDCD"/>
+                      </a:solidFill>
+                      <a:prstDash val="solid"/>
+                      <a:round/>
+                      <a:headEnd type="none" w="med" len="med"/>
+                      <a:tailEnd type="none" w="med" len="med"/>
+                    </a:lnT>
+                    <a:lnB w="6350" cap="flat" cmpd="sng" algn="ctr">
+                      <a:solidFill>
+                        <a:srgbClr val="CDCDCD"/>
+                      </a:solidFill>
+                      <a:prstDash val="solid"/>
+                      <a:round/>
+                      <a:headEnd type="none" w="med" len="med"/>
+                      <a:tailEnd type="none" w="med" len="med"/>
+                    </a:lnB>
+                  </a:tcPr>
+                </a:tc>
+                <a:tc>
+                  <a:txBody>
+                    <a:bodyPr/>
+                    <a:lstStyle/>
+                    <a:p>
+                      <a:pPr algn="l" indent="0" marL="0">
+                        <a:buNone/>
+                      </a:pPr>
+                      <a:r>
+                        <a:rPr lang="en-US" sz="850" b="1" dirty="0">
+                          <a:solidFill>
+                            <a:srgbClr val="008564"/>
+                          </a:solidFill>
+                          <a:latin typeface="NVIDIA Sans" pitchFamily="34" charset="0"/>
+                          <a:ea typeface="NVIDIA Sans" pitchFamily="34" charset="-122"/>
+                          <a:cs typeface="NVIDIA Sans" pitchFamily="34" charset="-120"/>
+                        </a:rPr>
+                        <a:t>collate in DataLoader workers</a:t>
+                      </a:r>
+                      <a:endParaRPr lang="en-US" sz="850" dirty="0">
+                        <a:latin typeface="NVIDIA Sans" charset="0"/>
+                        <a:ea typeface="NVIDIA Sans" charset="0"/>
+                        <a:cs typeface="NVIDIA Sans" charset="0"/>
+                      </a:endParaRPr>
+                    </a:p>
+                  </a:txBody>
+                  <a:tcPr marL="91440" marR="91440" marT="45720" marB="45720" anchor="ctr">
+                    <a:lnL w="6350" cap="flat" cmpd="sng" algn="ctr">
+                      <a:solidFill>
+                        <a:srgbClr val="CDCDCD"/>
+                      </a:solidFill>
+                      <a:prstDash val="solid"/>
+                      <a:round/>
+                      <a:headEnd type="none" w="med" len="med"/>
+                      <a:tailEnd type="none" w="med" len="med"/>
+                    </a:lnL>
+                    <a:lnR w="6350" cap="flat" cmpd="sng" algn="ctr">
+                      <a:solidFill>
+                        <a:srgbClr val="CDCDCD"/>
+                      </a:solidFill>
+                      <a:prstDash val="solid"/>
+                      <a:round/>
+                      <a:headEnd type="none" w="med" len="med"/>
+                      <a:tailEnd type="none" w="med" len="med"/>
+                    </a:lnR>
+                    <a:lnT w="6350" cap="flat" cmpd="sng" algn="ctr">
+                      <a:solidFill>
+                        <a:srgbClr val="CDCDCD"/>
+                      </a:solidFill>
+                      <a:prstDash val="solid"/>
+                      <a:round/>
+                      <a:headEnd type="none" w="med" len="med"/>
+                      <a:tailEnd type="none" w="med" len="med"/>
+                    </a:lnT>
+                    <a:lnB w="6350" cap="flat" cmpd="sng" algn="ctr">
+                      <a:solidFill>
+                        <a:srgbClr val="CDCDCD"/>
+                      </a:solidFill>
+                      <a:prstDash val="solid"/>
+                      <a:round/>
+                      <a:headEnd type="none" w="med" len="med"/>
+                      <a:tailEnd type="none" w="med" len="med"/>
+                    </a:lnB>
+                  </a:tcPr>
+                </a:tc>
+              </a:tr>
+              <a:tr h="237744">
+                <a:tc>
+                  <a:txBody>
+                    <a:bodyPr/>
+                    <a:lstStyle/>
+                    <a:p>
+                      <a:pPr algn="l" indent="0" marL="0">
+                        <a:buNone/>
+                      </a:pPr>
+                      <a:r>
+                        <a:rPr lang="en-US" sz="850" b="1" dirty="0">
+                          <a:solidFill>
+                            <a:srgbClr val="000000"/>
+                          </a:solidFill>
+                          <a:latin typeface="NVIDIA Sans" pitchFamily="34" charset="0"/>
+                          <a:ea typeface="NVIDIA Sans" pitchFamily="34" charset="-122"/>
+                          <a:cs typeface="NVIDIA Sans" pitchFamily="34" charset="-120"/>
+                        </a:rPr>
+                        <a:t>3 · Per-step syncs</a:t>
+                      </a:r>
+                      <a:endParaRPr lang="en-US" sz="850" dirty="0">
+                        <a:latin typeface="NVIDIA Sans" charset="0"/>
+                        <a:ea typeface="NVIDIA Sans" charset="0"/>
+                        <a:cs typeface="NVIDIA Sans" charset="0"/>
+                      </a:endParaRPr>
+                    </a:p>
+                  </a:txBody>
+                  <a:tcPr marL="91440" marR="91440" marT="45720" marB="45720" anchor="ctr">
+                    <a:lnL w="6350" cap="flat" cmpd="sng" algn="ctr">
+                      <a:solidFill>
+                        <a:srgbClr val="CDCDCD"/>
+                      </a:solidFill>
+                      <a:prstDash val="solid"/>
+                      <a:round/>
+                      <a:headEnd type="none" w="med" len="med"/>
+                      <a:tailEnd type="none" w="med" len="med"/>
+                    </a:lnL>
+                    <a:lnR w="6350" cap="flat" cmpd="sng" algn="ctr">
+                      <a:solidFill>
+                        <a:srgbClr val="CDCDCD"/>
+                      </a:solidFill>
+                      <a:prstDash val="solid"/>
+                      <a:round/>
+                      <a:headEnd type="none" w="med" len="med"/>
+                      <a:tailEnd type="none" w="med" len="med"/>
+                    </a:lnR>
+                    <a:lnT w="6350" cap="flat" cmpd="sng" algn="ctr">
+                      <a:solidFill>
+                        <a:srgbClr val="CDCDCD"/>
+                      </a:solidFill>
+                      <a:prstDash val="solid"/>
+                      <a:round/>
+                      <a:headEnd type="none" w="med" len="med"/>
+                      <a:tailEnd type="none" w="med" len="med"/>
+                    </a:lnT>
+                    <a:lnB w="6350" cap="flat" cmpd="sng" algn="ctr">
+                      <a:solidFill>
+                        <a:srgbClr val="CDCDCD"/>
+                      </a:solidFill>
+                      <a:prstDash val="solid"/>
+                      <a:round/>
+                      <a:headEnd type="none" w="med" len="med"/>
+                      <a:tailEnd type="none" w="med" len="med"/>
+                    </a:lnB>
+                  </a:tcPr>
+                </a:tc>
+                <a:tc>
+                  <a:txBody>
+                    <a:bodyPr/>
+                    <a:lstStyle/>
+                    <a:p>
+                      <a:pPr algn="l" indent="0" marL="0">
+                        <a:buNone/>
+                      </a:pPr>
+                      <a:r>
+                        <a:rPr lang="en-US" sz="850" dirty="0">
+                          <a:solidFill>
+                            <a:srgbClr val="000000"/>
+                          </a:solidFill>
+                          <a:latin typeface="NVIDIA Sans" pitchFamily="34" charset="0"/>
+                          <a:ea typeface="NVIDIA Sans" pitchFamily="34" charset="-122"/>
+                          <a:cs typeface="NVIDIA Sans" pitchFamily="34" charset="-120"/>
+                        </a:rPr>
+                        <a:t>loss readback, DS timers, MRoPE position-ids, mm-merge check</a:t>
+                      </a:r>
+                      <a:endParaRPr lang="en-US" sz="850" dirty="0">
+                        <a:latin typeface="NVIDIA Sans" charset="0"/>
+                        <a:ea typeface="NVIDIA Sans" charset="0"/>
+                        <a:cs typeface="NVIDIA Sans" charset="0"/>
+                      </a:endParaRPr>
+                    </a:p>
+                  </a:txBody>
+                  <a:tcPr marL="91440" marR="91440" marT="45720" marB="45720" anchor="ctr">
+                    <a:lnL w="6350" cap="flat" cmpd="sng" algn="ctr">
+                      <a:solidFill>
+                        <a:srgbClr val="CDCDCD"/>
+                      </a:solidFill>
+                      <a:prstDash val="solid"/>
+                      <a:round/>
+                      <a:headEnd type="none" w="med" len="med"/>
+                      <a:tailEnd type="none" w="med" len="med"/>
+                    </a:lnL>
+                    <a:lnR w="6350" cap="flat" cmpd="sng" algn="ctr">
+                      <a:solidFill>
+                        <a:srgbClr val="CDCDCD"/>
+                      </a:solidFill>
+                      <a:prstDash val="solid"/>
+                      <a:round/>
+                      <a:headEnd type="none" w="med" len="med"/>
+                      <a:tailEnd type="none" w="med" len="med"/>
+                    </a:lnR>
+                    <a:lnT w="6350" cap="flat" cmpd="sng" algn="ctr">
+                      <a:solidFill>
+                        <a:srgbClr val="CDCDCD"/>
+                      </a:solidFill>
+                      <a:prstDash val="solid"/>
+                      <a:round/>
+                      <a:headEnd type="none" w="med" len="med"/>
+                      <a:tailEnd type="none" w="med" len="med"/>
+                    </a:lnT>
+                    <a:lnB w="6350" cap="flat" cmpd="sng" algn="ctr">
+                      <a:solidFill>
+                        <a:srgbClr val="CDCDCD"/>
+                      </a:solidFill>
+                      <a:prstDash val="solid"/>
+                      <a:round/>
+                      <a:headEnd type="none" w="med" len="med"/>
+                      <a:tailEnd type="none" w="med" len="med"/>
+                    </a:lnB>
+                  </a:tcPr>
+                </a:tc>
+                <a:tc>
+                  <a:txBody>
+                    <a:bodyPr/>
+                    <a:lstStyle/>
+                    <a:p>
+                      <a:pPr algn="l" indent="0" marL="0">
+                        <a:buNone/>
+                      </a:pPr>
+                      <a:r>
+                        <a:rPr lang="en-US" sz="850" b="1" dirty="0">
+                          <a:solidFill>
+                            <a:srgbClr val="008564"/>
+                          </a:solidFill>
+                          <a:latin typeface="NVIDIA Sans" pitchFamily="34" charset="0"/>
+                          <a:ea typeface="NVIDIA Sans" pitchFamily="34" charset="-122"/>
+                          <a:cs typeface="NVIDIA Sans" pitchFamily="34" charset="-120"/>
+                        </a:rPr>
+                        <a:t>sync-free logging + caches  (2+3: −117)</a:t>
+                      </a:r>
+                      <a:endParaRPr lang="en-US" sz="850" dirty="0">
+                        <a:latin typeface="NVIDIA Sans" charset="0"/>
+                        <a:ea typeface="NVIDIA Sans" charset="0"/>
+                        <a:cs typeface="NVIDIA Sans" charset="0"/>
+                      </a:endParaRPr>
+                    </a:p>
+                  </a:txBody>
+                  <a:tcPr marL="91440" marR="91440" marT="45720" marB="45720" anchor="ctr">
+                    <a:lnL w="6350" cap="flat" cmpd="sng" algn="ctr">
+                      <a:solidFill>
+                        <a:srgbClr val="CDCDCD"/>
+                      </a:solidFill>
+                      <a:prstDash val="solid"/>
+                      <a:round/>
+                      <a:headEnd type="none" w="med" len="med"/>
+                      <a:tailEnd type="none" w="med" len="med"/>
+                    </a:lnL>
+                    <a:lnR w="6350" cap="flat" cmpd="sng" algn="ctr">
+                      <a:solidFill>
+                        <a:srgbClr val="CDCDCD"/>
+                      </a:solidFill>
+                      <a:prstDash val="solid"/>
+                      <a:round/>
+                      <a:headEnd type="none" w="med" len="med"/>
+                      <a:tailEnd type="none" w="med" len="med"/>
+                    </a:lnR>
+                    <a:lnT w="6350" cap="flat" cmpd="sng" algn="ctr">
+                      <a:solidFill>
+                        <a:srgbClr val="CDCDCD"/>
+                      </a:solidFill>
+                      <a:prstDash val="solid"/>
+                      <a:round/>
+                      <a:headEnd type="none" w="med" len="med"/>
+                      <a:tailEnd type="none" w="med" len="med"/>
+                    </a:lnT>
+                    <a:lnB w="6350" cap="flat" cmpd="sng" algn="ctr">
+                      <a:solidFill>
+                        <a:srgbClr val="CDCDCD"/>
+                      </a:solidFill>
+                      <a:prstDash val="solid"/>
+                      <a:round/>
+                      <a:headEnd type="none" w="med" len="med"/>
+                      <a:tailEnd type="none" w="med" len="med"/>
+                    </a:lnB>
+                  </a:tcPr>
+                </a:tc>
+              </a:tr>
+              <a:tr h="237744">
+                <a:tc>
+                  <a:txBody>
+                    <a:bodyPr/>
+                    <a:lstStyle/>
+                    <a:p>
+                      <a:pPr algn="l" indent="0" marL="0">
+                        <a:buNone/>
+                      </a:pPr>
+                      <a:r>
+                        <a:rPr lang="en-US" sz="850" b="1" dirty="0">
+                          <a:solidFill>
+                            <a:srgbClr val="000000"/>
+                          </a:solidFill>
+                          <a:latin typeface="NVIDIA Sans" pitchFamily="34" charset="0"/>
+                          <a:ea typeface="NVIDIA Sans" pitchFamily="34" charset="-122"/>
+                          <a:cs typeface="NVIDIA Sans" pitchFamily="34" charset="-120"/>
+                        </a:rPr>
+                        <a:t>4 · Launch-bound eager</a:t>
+                      </a:r>
+                      <a:endParaRPr lang="en-US" sz="850" dirty="0">
+                        <a:latin typeface="NVIDIA Sans" charset="0"/>
+                        <a:ea typeface="NVIDIA Sans" charset="0"/>
+                        <a:cs typeface="NVIDIA Sans" charset="0"/>
+                      </a:endParaRPr>
+                    </a:p>
+                  </a:txBody>
+                  <a:tcPr marL="91440" marR="91440" marT="45720" marB="45720" anchor="ctr">
+                    <a:lnL w="6350" cap="flat" cmpd="sng" algn="ctr">
+                      <a:solidFill>
+                        <a:srgbClr val="CDCDCD"/>
+                      </a:solidFill>
+                      <a:prstDash val="solid"/>
+                      <a:round/>
+                      <a:headEnd type="none" w="med" len="med"/>
+                      <a:tailEnd type="none" w="med" len="med"/>
+                    </a:lnL>
+                    <a:lnR w="6350" cap="flat" cmpd="sng" algn="ctr">
+                      <a:solidFill>
+                        <a:srgbClr val="CDCDCD"/>
+                      </a:solidFill>
+                      <a:prstDash val="solid"/>
+                      <a:round/>
+                      <a:headEnd type="none" w="med" len="med"/>
+                      <a:tailEnd type="none" w="med" len="med"/>
+                    </a:lnR>
+                    <a:lnT w="6350" cap="flat" cmpd="sng" algn="ctr">
+                      <a:solidFill>
+                        <a:srgbClr val="CDCDCD"/>
+                      </a:solidFill>
+                      <a:prstDash val="solid"/>
+                      <a:round/>
+                      <a:headEnd type="none" w="med" len="med"/>
+                      <a:tailEnd type="none" w="med" len="med"/>
+                    </a:lnT>
+                    <a:lnB w="6350" cap="flat" cmpd="sng" algn="ctr">
+                      <a:solidFill>
+                        <a:srgbClr val="CDCDCD"/>
+                      </a:solidFill>
+                      <a:prstDash val="solid"/>
+                      <a:round/>
+                      <a:headEnd type="none" w="med" len="med"/>
+                      <a:tailEnd type="none" w="med" len="med"/>
+                    </a:lnB>
+                  </a:tcPr>
+                </a:tc>
+                <a:tc>
+                  <a:txBody>
+                    <a:bodyPr/>
+                    <a:lstStyle/>
+                    <a:p>
+                      <a:pPr algn="l" indent="0" marL="0">
+                        <a:buNone/>
+                      </a:pPr>
+                      <a:r>
+                        <a:rPr lang="en-US" sz="850" dirty="0">
+                          <a:solidFill>
+                            <a:srgbClr val="000000"/>
+                          </a:solidFill>
+                          <a:latin typeface="NVIDIA Sans" pitchFamily="34" charset="0"/>
+                          <a:ea typeface="NVIDIA Sans" pitchFamily="34" charset="-122"/>
+                          <a:cs typeface="NVIDIA Sans" pitchFamily="34" charset="-120"/>
+                        </a:rPr>
+                        <a:t>13,868 launches/step, median 8 µs, 79% &lt; 20 µs — 254 ms pure idle</a:t>
+                      </a:r>
+                      <a:endParaRPr lang="en-US" sz="850" dirty="0">
+                        <a:latin typeface="NVIDIA Sans" charset="0"/>
+                        <a:ea typeface="NVIDIA Sans" charset="0"/>
+                        <a:cs typeface="NVIDIA Sans" charset="0"/>
+                      </a:endParaRPr>
+                    </a:p>
+                  </a:txBody>
+                  <a:tcPr marL="91440" marR="91440" marT="45720" marB="45720" anchor="ctr">
+                    <a:lnL w="6350" cap="flat" cmpd="sng" algn="ctr">
+                      <a:solidFill>
+                        <a:srgbClr val="CDCDCD"/>
+                      </a:solidFill>
+                      <a:prstDash val="solid"/>
+                      <a:round/>
+                      <a:headEnd type="none" w="med" len="med"/>
+                      <a:tailEnd type="none" w="med" len="med"/>
+                    </a:lnL>
+                    <a:lnR w="6350" cap="flat" cmpd="sng" algn="ctr">
+                      <a:solidFill>
+                        <a:srgbClr val="CDCDCD"/>
+                      </a:solidFill>
+                      <a:prstDash val="solid"/>
+                      <a:round/>
+                      <a:headEnd type="none" w="med" len="med"/>
+                      <a:tailEnd type="none" w="med" len="med"/>
+                    </a:lnR>
+                    <a:lnT w="6350" cap="flat" cmpd="sng" algn="ctr">
+                      <a:solidFill>
+                        <a:srgbClr val="CDCDCD"/>
+                      </a:solidFill>
+                      <a:prstDash val="solid"/>
+                      <a:round/>
+                      <a:headEnd type="none" w="med" len="med"/>
+                      <a:tailEnd type="none" w="med" len="med"/>
+                    </a:lnT>
+                    <a:lnB w="6350" cap="flat" cmpd="sng" algn="ctr">
+                      <a:solidFill>
+                        <a:srgbClr val="CDCDCD"/>
+                      </a:solidFill>
+                      <a:prstDash val="solid"/>
+                      <a:round/>
+                      <a:headEnd type="none" w="med" len="med"/>
+                      <a:tailEnd type="none" w="med" len="med"/>
+                    </a:lnB>
+                  </a:tcPr>
+                </a:tc>
+                <a:tc>
+                  <a:txBody>
+                    <a:bodyPr/>
+                    <a:lstStyle/>
+                    <a:p>
+                      <a:pPr algn="l" indent="0" marL="0">
+                        <a:buNone/>
+                      </a:pPr>
+                      <a:r>
+                        <a:rPr lang="en-US" sz="850" b="1" dirty="0">
+                          <a:solidFill>
+                            <a:srgbClr val="008564"/>
+                          </a:solidFill>
+                          <a:latin typeface="NVIDIA Sans" pitchFamily="34" charset="0"/>
+                          <a:ea typeface="NVIDIA Sans" pitchFamily="34" charset="-122"/>
+                          <a:cs typeface="NVIDIA Sans" pitchFamily="34" charset="-120"/>
+                        </a:rPr>
+                        <a:t>CUDA Graphs + compile  (−126 ms)</a:t>
+                      </a:r>
+                      <a:endParaRPr lang="en-US" sz="850" dirty="0">
+                        <a:latin typeface="NVIDIA Sans" charset="0"/>
+                        <a:ea typeface="NVIDIA Sans" charset="0"/>
+                        <a:cs typeface="NVIDIA Sans" charset="0"/>
+                      </a:endParaRPr>
+                    </a:p>
+                  </a:txBody>
+                  <a:tcPr marL="91440" marR="91440" marT="45720" marB="45720" anchor="ctr">
+                    <a:lnL w="6350" cap="flat" cmpd="sng" algn="ctr">
+                      <a:solidFill>
+                        <a:srgbClr val="CDCDCD"/>
+                      </a:solidFill>
+                      <a:prstDash val="solid"/>
+                      <a:round/>
+                      <a:headEnd type="none" w="med" len="med"/>
+                      <a:tailEnd type="none" w="med" len="med"/>
+                    </a:lnL>
+                    <a:lnR w="6350" cap="flat" cmpd="sng" algn="ctr">
+                      <a:solidFill>
+                        <a:srgbClr val="CDCDCD"/>
+                      </a:solidFill>
+                      <a:prstDash val="solid"/>
+                      <a:round/>
+                      <a:headEnd type="none" w="med" len="med"/>
+                      <a:tailEnd type="none" w="med" len="med"/>
+                    </a:lnR>
+                    <a:lnT w="6350" cap="flat" cmpd="sng" algn="ctr">
+                      <a:solidFill>
+                        <a:srgbClr val="CDCDCD"/>
+                      </a:solidFill>
+                      <a:prstDash val="solid"/>
+                      <a:round/>
+                      <a:headEnd type="none" w="med" len="med"/>
+                      <a:tailEnd type="none" w="med" len="med"/>
+                    </a:lnT>
+                    <a:lnB w="6350" cap="flat" cmpd="sng" algn="ctr">
+                      <a:solidFill>
+                        <a:srgbClr val="CDCDCD"/>
+                      </a:solidFill>
+                      <a:prstDash val="solid"/>
+                      <a:round/>
+                      <a:headEnd type="none" w="med" len="med"/>
+                      <a:tailEnd type="none" w="med" len="med"/>
+                    </a:lnB>
+                  </a:tcPr>
+                </a:tc>
+              </a:tr>
+              <a:tr h="237744">
+                <a:tc>
+                  <a:txBody>
+                    <a:bodyPr/>
+                    <a:lstStyle/>
+                    <a:p>
+                      <a:pPr algn="l" indent="0" marL="0">
+                        <a:buNone/>
+                      </a:pPr>
+                      <a:r>
+                        <a:rPr lang="en-US" sz="850" b="1" dirty="0">
+                          <a:solidFill>
+                            <a:srgbClr val="000000"/>
+                          </a:solidFill>
+                          <a:latin typeface="NVIDIA Sans" pitchFamily="34" charset="0"/>
+                          <a:ea typeface="NVIDIA Sans" pitchFamily="34" charset="-122"/>
+                          <a:cs typeface="NVIDIA Sans" pitchFamily="34" charset="-120"/>
+                        </a:rPr>
+                        <a:t>5 · Comm configuration</a:t>
+                      </a:r>
+                      <a:endParaRPr lang="en-US" sz="850" dirty="0">
+                        <a:latin typeface="NVIDIA Sans" charset="0"/>
+                        <a:ea typeface="NVIDIA Sans" charset="0"/>
+                        <a:cs typeface="NVIDIA Sans" charset="0"/>
+                      </a:endParaRPr>
+                    </a:p>
+                  </a:txBody>
+                  <a:tcPr marL="91440" marR="91440" marT="45720" marB="45720" anchor="ctr">
+                    <a:lnL w="6350" cap="flat" cmpd="sng" algn="ctr">
+                      <a:solidFill>
+                        <a:srgbClr val="CDCDCD"/>
+                      </a:solidFill>
+                      <a:prstDash val="solid"/>
+                      <a:round/>
+                      <a:headEnd type="none" w="med" len="med"/>
+                      <a:tailEnd type="none" w="med" len="med"/>
+                    </a:lnL>
+                    <a:lnR w="6350" cap="flat" cmpd="sng" algn="ctr">
+                      <a:solidFill>
+                        <a:srgbClr val="CDCDCD"/>
+                      </a:solidFill>
+                      <a:prstDash val="solid"/>
+                      <a:round/>
+                      <a:headEnd type="none" w="med" len="med"/>
+                      <a:tailEnd type="none" w="med" len="med"/>
+                    </a:lnR>
+                    <a:lnT w="6350" cap="flat" cmpd="sng" algn="ctr">
+                      <a:solidFill>
+                        <a:srgbClr val="CDCDCD"/>
+                      </a:solidFill>
+                      <a:prstDash val="solid"/>
+                      <a:round/>
+                      <a:headEnd type="none" w="med" len="med"/>
+                      <a:tailEnd type="none" w="med" len="med"/>
+                    </a:lnT>
+                    <a:lnB w="6350" cap="flat" cmpd="sng" algn="ctr">
+                      <a:solidFill>
+                        <a:srgbClr val="CDCDCD"/>
+                      </a:solidFill>
+                      <a:prstDash val="solid"/>
+                      <a:round/>
+                      <a:headEnd type="none" w="med" len="med"/>
+                      <a:tailEnd type="none" w="med" len="med"/>
+                    </a:lnB>
+                  </a:tcPr>
+                </a:tc>
+                <a:tc>
+                  <a:txBody>
+                    <a:bodyPr/>
+                    <a:lstStyle/>
+                    <a:p>
+                      <a:pPr algn="l" indent="0" marL="0">
+                        <a:buNone/>
+                      </a:pPr>
+                      <a:r>
+                        <a:rPr lang="en-US" sz="850" dirty="0">
+                          <a:solidFill>
+                            <a:srgbClr val="000000"/>
+                          </a:solidFill>
+                          <a:latin typeface="NVIDIA Sans" pitchFamily="34" charset="0"/>
+                          <a:ea typeface="NVIDIA Sans" pitchFamily="34" charset="-122"/>
+                          <a:cs typeface="NVIDIA Sans" pitchFamily="34" charset="-120"/>
+                        </a:rPr>
+                        <a:t>15 small AR buckets; 22 ms redundant flatten; 44 ms exposed AllGather</a:t>
+                      </a:r>
+                      <a:endParaRPr lang="en-US" sz="850" dirty="0">
+                        <a:latin typeface="NVIDIA Sans" charset="0"/>
+                        <a:ea typeface="NVIDIA Sans" charset="0"/>
+                        <a:cs typeface="NVIDIA Sans" charset="0"/>
+                      </a:endParaRPr>
+                    </a:p>
+                  </a:txBody>
+                  <a:tcPr marL="91440" marR="91440" marT="45720" marB="45720" anchor="ctr">
+                    <a:lnL w="6350" cap="flat" cmpd="sng" algn="ctr">
+                      <a:solidFill>
+                        <a:srgbClr val="CDCDCD"/>
+                      </a:solidFill>
+                      <a:prstDash val="solid"/>
+                      <a:round/>
+                      <a:headEnd type="none" w="med" len="med"/>
+                      <a:tailEnd type="none" w="med" len="med"/>
+                    </a:lnL>
+                    <a:lnR w="6350" cap="flat" cmpd="sng" algn="ctr">
+                      <a:solidFill>
+                        <a:srgbClr val="CDCDCD"/>
+                      </a:solidFill>
+                      <a:prstDash val="solid"/>
+                      <a:round/>
+                      <a:headEnd type="none" w="med" len="med"/>
+                      <a:tailEnd type="none" w="med" len="med"/>
+                    </a:lnR>
+                    <a:lnT w="6350" cap="flat" cmpd="sng" algn="ctr">
+                      <a:solidFill>
+                        <a:srgbClr val="CDCDCD"/>
+                      </a:solidFill>
+                      <a:prstDash val="solid"/>
+                      <a:round/>
+                      <a:headEnd type="none" w="med" len="med"/>
+                      <a:tailEnd type="none" w="med" len="med"/>
+                    </a:lnT>
+                    <a:lnB w="6350" cap="flat" cmpd="sng" algn="ctr">
+                      <a:solidFill>
+                        <a:srgbClr val="CDCDCD"/>
+                      </a:solidFill>
+                      <a:prstDash val="solid"/>
+                      <a:round/>
+                      <a:headEnd type="none" w="med" len="med"/>
+                      <a:tailEnd type="none" w="med" len="med"/>
+                    </a:lnB>
+                  </a:tcPr>
+                </a:tc>
+                <a:tc>
+                  <a:txBody>
+                    <a:bodyPr/>
+                    <a:lstStyle/>
+                    <a:p>
+                      <a:pPr algn="l" indent="0" marL="0">
+                        <a:buNone/>
+                      </a:pPr>
+                      <a:r>
+                        <a:rPr lang="en-US" sz="850" b="1" dirty="0">
+                          <a:solidFill>
+                            <a:srgbClr val="008564"/>
+                          </a:solidFill>
+                          <a:latin typeface="NVIDIA Sans" pitchFamily="34" charset="0"/>
+                          <a:ea typeface="NVIDIA Sans" pitchFamily="34" charset="-122"/>
+                          <a:cs typeface="NVIDIA Sans" pitchFamily="34" charset="-120"/>
+                        </a:rPr>
+                        <a:t>bucket 1.5e9 + reduce_scatter off  (−22)</a:t>
+                      </a:r>
+                      <a:endParaRPr lang="en-US" sz="850" dirty="0">
+                        <a:latin typeface="NVIDIA Sans" charset="0"/>
+                        <a:ea typeface="NVIDIA Sans" charset="0"/>
+                        <a:cs typeface="NVIDIA Sans" charset="0"/>
+                      </a:endParaRPr>
+                    </a:p>
+                  </a:txBody>
+                  <a:tcPr marL="91440" marR="91440" marT="45720" marB="45720" anchor="ctr">
+                    <a:lnL w="6350" cap="flat" cmpd="sng" algn="ctr">
+                      <a:solidFill>
+                        <a:srgbClr val="CDCDCD"/>
+                      </a:solidFill>
+                      <a:prstDash val="solid"/>
+                      <a:round/>
+                      <a:headEnd type="none" w="med" len="med"/>
+                      <a:tailEnd type="none" w="med" len="med"/>
+                    </a:lnL>
+                    <a:lnR w="6350" cap="flat" cmpd="sng" algn="ctr">
+                      <a:solidFill>
+                        <a:srgbClr val="CDCDCD"/>
+                      </a:solidFill>
+                      <a:prstDash val="solid"/>
+                      <a:round/>
+                      <a:headEnd type="none" w="med" len="med"/>
+                      <a:tailEnd type="none" w="med" len="med"/>
+                    </a:lnR>
+                    <a:lnT w="6350" cap="flat" cmpd="sng" algn="ctr">
+                      <a:solidFill>
+                        <a:srgbClr val="CDCDCD"/>
+                      </a:solidFill>
+                      <a:prstDash val="solid"/>
+                      <a:round/>
+                      <a:headEnd type="none" w="med" len="med"/>
+                      <a:tailEnd type="none" w="med" len="med"/>
+                    </a:lnT>
+                    <a:lnB w="6350" cap="flat" cmpd="sng" algn="ctr">
+                      <a:solidFill>
+                        <a:srgbClr val="CDCDCD"/>
+                      </a:solidFill>
+                      <a:prstDash val="solid"/>
+                      <a:round/>
+                      <a:headEnd type="none" w="med" len="med"/>
+                      <a:tailEnd type="none" w="med" len="med"/>
+                    </a:lnB>
+                  </a:tcPr>
+                </a:tc>
+              </a:tr>
+              <a:tr h="237744">
+                <a:tc>
+                  <a:txBody>
+                    <a:bodyPr/>
+                    <a:lstStyle/>
+                    <a:p>
+                      <a:pPr algn="l" indent="0" marL="0">
+                        <a:buNone/>
+                      </a:pPr>
+                      <a:r>
+                        <a:rPr lang="en-US" sz="850" b="1" dirty="0">
+                          <a:solidFill>
+                            <a:srgbClr val="000000"/>
+                          </a:solidFill>
+                          <a:latin typeface="NVIDIA Sans" pitchFamily="34" charset="0"/>
+                          <a:ea typeface="NVIDIA Sans" pitchFamily="34" charset="-122"/>
+                          <a:cs typeface="NVIDIA Sans" pitchFamily="34" charset="-120"/>
+                        </a:rPr>
+                        <a:t>6 · Config-level</a:t>
+                      </a:r>
+                      <a:endParaRPr lang="en-US" sz="850" dirty="0">
+                        <a:latin typeface="NVIDIA Sans" charset="0"/>
+                        <a:ea typeface="NVIDIA Sans" charset="0"/>
+                        <a:cs typeface="NVIDIA Sans" charset="0"/>
+                      </a:endParaRPr>
+                    </a:p>
+                  </a:txBody>
+                  <a:tcPr marL="91440" marR="91440" marT="45720" marB="45720" anchor="ctr">
+                    <a:lnL w="6350" cap="flat" cmpd="sng" algn="ctr">
+                      <a:solidFill>
+                        <a:srgbClr val="CDCDCD"/>
+                      </a:solidFill>
+                      <a:prstDash val="solid"/>
+                      <a:round/>
+                      <a:headEnd type="none" w="med" len="med"/>
+                      <a:tailEnd type="none" w="med" len="med"/>
+                    </a:lnL>
+                    <a:lnR w="6350" cap="flat" cmpd="sng" algn="ctr">
+                      <a:solidFill>
+                        <a:srgbClr val="CDCDCD"/>
+                      </a:solidFill>
+                      <a:prstDash val="solid"/>
+                      <a:round/>
+                      <a:headEnd type="none" w="med" len="med"/>
+                      <a:tailEnd type="none" w="med" len="med"/>
+                    </a:lnR>
+                    <a:lnT w="6350" cap="flat" cmpd="sng" algn="ctr">
+                      <a:solidFill>
+                        <a:srgbClr val="CDCDCD"/>
+                      </a:solidFill>
+                      <a:prstDash val="solid"/>
+                      <a:round/>
+                      <a:headEnd type="none" w="med" len="med"/>
+                      <a:tailEnd type="none" w="med" len="med"/>
+                    </a:lnT>
+                    <a:lnB w="6350" cap="flat" cmpd="sng" algn="ctr">
+                      <a:solidFill>
+                        <a:srgbClr val="CDCDCD"/>
+                      </a:solidFill>
+                      <a:prstDash val="solid"/>
+                      <a:round/>
+                      <a:headEnd type="none" w="med" len="med"/>
+                      <a:tailEnd type="none" w="med" len="med"/>
+                    </a:lnB>
+                  </a:tcPr>
+                </a:tc>
+                <a:tc>
+                  <a:txBody>
+                    <a:bodyPr/>
+                    <a:lstStyle/>
+                    <a:p>
+                      <a:pPr algn="l" indent="0" marL="0">
+                        <a:buNone/>
+                      </a:pPr>
+                      <a:r>
+                        <a:rPr lang="en-US" sz="850" dirty="0">
+                          <a:solidFill>
+                            <a:srgbClr val="000000"/>
+                          </a:solidFill>
+                          <a:latin typeface="NVIDIA Sans" pitchFamily="34" charset="0"/>
+                          <a:ea typeface="NVIDIA Sans" pitchFamily="34" charset="-122"/>
+                          <a:cs typeface="NVIDIA Sans" pitchFamily="34" charset="-120"/>
+                        </a:rPr>
+                        <a:t>torch 2.6-era kernels; one attention backend for vision + text</a:t>
+                      </a:r>
+                      <a:endParaRPr lang="en-US" sz="850" dirty="0">
+                        <a:latin typeface="NVIDIA Sans" charset="0"/>
+                        <a:ea typeface="NVIDIA Sans" charset="0"/>
+                        <a:cs typeface="NVIDIA Sans" charset="0"/>
+                      </a:endParaRPr>
+                    </a:p>
+                  </a:txBody>
+                  <a:tcPr marL="91440" marR="91440" marT="45720" marB="45720" anchor="ctr">
+                    <a:lnL w="6350" cap="flat" cmpd="sng" algn="ctr">
+                      <a:solidFill>
+                        <a:srgbClr val="CDCDCD"/>
+                      </a:solidFill>
+                      <a:prstDash val="solid"/>
+                      <a:round/>
+                      <a:headEnd type="none" w="med" len="med"/>
+                      <a:tailEnd type="none" w="med" len="med"/>
+                    </a:lnL>
+                    <a:lnR w="6350" cap="flat" cmpd="sng" algn="ctr">
+                      <a:solidFill>
+                        <a:srgbClr val="CDCDCD"/>
+                      </a:solidFill>
+                      <a:prstDash val="solid"/>
+                      <a:round/>
+                      <a:headEnd type="none" w="med" len="med"/>
+                      <a:tailEnd type="none" w="med" len="med"/>
+                    </a:lnR>
+                    <a:lnT w="6350" cap="flat" cmpd="sng" algn="ctr">
+                      <a:solidFill>
+                        <a:srgbClr val="CDCDCD"/>
+                      </a:solidFill>
+                      <a:prstDash val="solid"/>
+                      <a:round/>
+                      <a:headEnd type="none" w="med" len="med"/>
+                      <a:tailEnd type="none" w="med" len="med"/>
+                    </a:lnT>
+                    <a:lnB w="6350" cap="flat" cmpd="sng" algn="ctr">
+                      <a:solidFill>
+                        <a:srgbClr val="CDCDCD"/>
+                      </a:solidFill>
+                      <a:prstDash val="solid"/>
+                      <a:round/>
+                      <a:headEnd type="none" w="med" len="med"/>
+                      <a:tailEnd type="none" w="med" len="med"/>
+                    </a:lnB>
+                  </a:tcPr>
+                </a:tc>
+                <a:tc>
+                  <a:txBody>
+                    <a:bodyPr/>
+                    <a:lstStyle/>
+                    <a:p>
+                      <a:pPr algn="l" indent="0" marL="0">
+                        <a:buNone/>
+                      </a:pPr>
+                      <a:r>
+                        <a:rPr lang="en-US" sz="850" b="1" dirty="0">
+                          <a:solidFill>
+                            <a:srgbClr val="008564"/>
+                          </a:solidFill>
+                          <a:latin typeface="NVIDIA Sans" pitchFamily="34" charset="0"/>
+                          <a:ea typeface="NVIDIA Sans" pitchFamily="34" charset="-122"/>
+                          <a:cs typeface="NVIDIA Sans" pitchFamily="34" charset="-120"/>
+                        </a:rPr>
+                        <a:t>torch 2.7.1  (−37); mixed attn  (−30)</a:t>
+                      </a:r>
+                      <a:endParaRPr lang="en-US" sz="850" dirty="0">
+                        <a:latin typeface="NVIDIA Sans" charset="0"/>
+                        <a:ea typeface="NVIDIA Sans" charset="0"/>
+                        <a:cs typeface="NVIDIA Sans" charset="0"/>
+                      </a:endParaRPr>
+                    </a:p>
+                  </a:txBody>
+                  <a:tcPr marL="91440" marR="91440" marT="45720" marB="45720" anchor="ctr">
+                    <a:lnL w="6350" cap="flat" cmpd="sng" algn="ctr">
+                      <a:solidFill>
+                        <a:srgbClr val="CDCDCD"/>
+                      </a:solidFill>
+                      <a:prstDash val="solid"/>
+                      <a:round/>
+                      <a:headEnd type="none" w="med" len="med"/>
+                      <a:tailEnd type="none" w="med" len="med"/>
+                    </a:lnL>
+                    <a:lnR w="6350" cap="flat" cmpd="sng" algn="ctr">
+                      <a:solidFill>
+                        <a:srgbClr val="CDCDCD"/>
+                      </a:solidFill>
+                      <a:prstDash val="solid"/>
+                      <a:round/>
+                      <a:headEnd type="none" w="med" len="med"/>
+                      <a:tailEnd type="none" w="med" len="med"/>
+                    </a:lnR>
+                    <a:lnT w="6350" cap="flat" cmpd="sng" algn="ctr">
+                      <a:solidFill>
+                        <a:srgbClr val="CDCDCD"/>
+                      </a:solidFill>
+                      <a:prstDash val="solid"/>
+                      <a:round/>
+                      <a:headEnd type="none" w="med" len="med"/>
+                      <a:tailEnd type="none" w="med" len="med"/>
+                    </a:lnT>
+                    <a:lnB w="6350" cap="flat" cmpd="sng" algn="ctr">
+                      <a:solidFill>
+                        <a:srgbClr val="CDCDCD"/>
+                      </a:solidFill>
+                      <a:prstDash val="solid"/>
+                      <a:round/>
+                      <a:headEnd type="none" w="med" len="med"/>
+                      <a:tailEnd type="none" w="med" len="med"/>
+                    </a:lnB>
+                  </a:tcPr>
+                </a:tc>
+              </a:tr>
+            </a:tbl>
+          </a:graphicData>
+        </a:graphic>
+      </p:graphicFrame>
+      <p:sp>
+        <p:nvSpPr>
+          <p:cNvPr id="241" name="Text 238"/>
           <p:cNvSpPr/>
           <p:nvPr/>
         </p:nvSpPr>
@@ -13688,7 +14846,7 @@
       </p:sp>
       <p:sp>
         <p:nvSpPr>
-          <p:cNvPr id="241" name="Text 239"/>
+          <p:cNvPr id="242" name="Text 239"/>
           <p:cNvSpPr/>
           <p:nvPr/>
         </p:nvSpPr>
@@ -13727,7 +14885,7 @@
       </p:sp>
       <p:sp>
         <p:nvSpPr>
-          <p:cNvPr id="242" name="Shape 240"/>
+          <p:cNvPr id="243" name="Shape 240"/>
           <p:cNvSpPr/>
           <p:nvPr/>
         </p:nvSpPr>
@@ -13747,7 +14905,7 @@
       </p:sp>
       <p:pic>
         <p:nvPicPr>
-          <p:cNvPr id="243" name="Image 0" descr="/app/logos/nvidia-logo-blk-sm.png">    </p:cNvPr>
+          <p:cNvPr id="244" name="Image 0" descr="/app/logos/nvidia-logo-blk-sm.png">    </p:cNvPr>
           <p:cNvPicPr>
             <a:picLocks noChangeAspect="1"/>
           </p:cNvPicPr>

--- a/docs/slides/qwenpi-optimization.pptx
+++ b/docs/slides/qwenpi-optimization.pptx
@@ -1133,7 +1133,7 @@
           <a:p>
             <a:r>
               <a:rPr lang="en-US" dirty="0"/>
-              <a:t>Each bar was a separate 60-step run; deltas are p50-to-p50 on the same node. The next four slides walk these levels.</a:t>
+              <a:t>Each bar is a separate 60-step run at that cumulative level; bars show ACTUAL step time, not deltas. The next slides walk these levels.</a:t>
             </a:r>
             <a:endParaRPr lang="en-US" dirty="0"/>
           </a:p>
@@ -8490,7 +8490,7 @@
                 <a:ea typeface="NVIDIA Sans" pitchFamily="34" charset="-122"/>
                 <a:cs typeface="NVIDIA Sans" pitchFamily="34" charset="-120"/>
               </a:rPr>
-              <a:t>One baseline step (nsys, 866 ms): six problems you can see in the trace — each maps to a fix</a:t>
+              <a:t>Five problems visible in one baseline step (nsys, 866 ms) — each maps to a fix</a:t>
             </a:r>
             <a:endParaRPr lang="en-US" sz="1500" dirty="0"/>
           </a:p>
@@ -8714,13 +8714,328 @@
       </p:sp>
       <p:sp>
         <p:nvSpPr>
-          <p:cNvPr id="11" name="Text 9"/>
+          <p:cNvPr id="11" name="Shape 9"/>
+          <p:cNvSpPr/>
+          <p:nvPr/>
+        </p:nvSpPr>
+        <p:spPr>
+          <a:xfrm>
+            <a:off x="1508760" y="1536192"/>
+            <a:ext cx="565249" cy="237744"/>
+          </a:xfrm>
+          <a:prstGeom prst="rect">
+            <a:avLst/>
+          </a:prstGeom>
+          <a:solidFill>
+            <a:srgbClr val="8C8C8C"/>
+          </a:solidFill>
+          <a:ln/>
+        </p:spPr>
+      </p:sp>
+      <p:sp>
+        <p:nvSpPr>
+          <p:cNvPr id="12" name="Text 10"/>
+          <p:cNvSpPr/>
+          <p:nvPr/>
+        </p:nvSpPr>
+        <p:spPr>
+          <a:xfrm>
+            <a:off x="1508760" y="1536192"/>
+            <a:ext cx="565249" cy="237744"/>
+          </a:xfrm>
+          <a:prstGeom prst="rect">
+            <a:avLst/>
+          </a:prstGeom>
+          <a:noFill/>
+          <a:ln/>
+        </p:spPr>
+        <p:txBody>
+          <a:bodyPr wrap="square" lIns="0" tIns="0" rIns="0" bIns="0" rtlCol="0" anchor="ctr"/>
+          <a:lstStyle/>
+          <a:p>
+            <a:pPr algn="ctr" indent="0" marL="0">
+              <a:buNone/>
+            </a:pPr>
+            <a:r>
+              <a:rPr lang="en-US" sz="850" b="1" dirty="0">
+                <a:solidFill>
+                  <a:srgbClr val="FFFFFF"/>
+                </a:solidFill>
+                <a:latin typeface="NVIDIA Sans" pitchFamily="34" charset="0"/>
+                <a:ea typeface="NVIDIA Sans" pitchFamily="34" charset="-122"/>
+                <a:cs typeface="NVIDIA Sans" pitchFamily="34" charset="-120"/>
+              </a:rPr>
+              <a:t>CPU prep</a:t>
+            </a:r>
+            <a:endParaRPr lang="en-US" sz="850" dirty="0"/>
+          </a:p>
+        </p:txBody>
+      </p:sp>
+      <p:sp>
+        <p:nvSpPr>
+          <p:cNvPr id="13" name="Shape 11"/>
+          <p:cNvSpPr/>
+          <p:nvPr/>
+        </p:nvSpPr>
+        <p:spPr>
+          <a:xfrm>
+            <a:off x="2074009" y="1536192"/>
+            <a:ext cx="1078855" cy="237744"/>
+          </a:xfrm>
+          <a:prstGeom prst="rect">
+            <a:avLst/>
+          </a:prstGeom>
+          <a:solidFill>
+            <a:srgbClr val="0071C5"/>
+          </a:solidFill>
+          <a:ln/>
+        </p:spPr>
+      </p:sp>
+      <p:sp>
+        <p:nvSpPr>
+          <p:cNvPr id="14" name="Text 12"/>
+          <p:cNvSpPr/>
+          <p:nvPr/>
+        </p:nvSpPr>
+        <p:spPr>
+          <a:xfrm>
+            <a:off x="2074009" y="1536192"/>
+            <a:ext cx="1078855" cy="237744"/>
+          </a:xfrm>
+          <a:prstGeom prst="rect">
+            <a:avLst/>
+          </a:prstGeom>
+          <a:noFill/>
+          <a:ln/>
+        </p:spPr>
+        <p:txBody>
+          <a:bodyPr wrap="square" lIns="0" tIns="0" rIns="0" bIns="0" rtlCol="0" anchor="ctr"/>
+          <a:lstStyle/>
+          <a:p>
+            <a:pPr algn="ctr" indent="0" marL="0">
+              <a:buNone/>
+            </a:pPr>
+            <a:r>
+              <a:rPr lang="en-US" sz="850" b="1" dirty="0">
+                <a:solidFill>
+                  <a:srgbClr val="FFFFFF"/>
+                </a:solidFill>
+                <a:latin typeface="NVIDIA Sans" pitchFamily="34" charset="0"/>
+                <a:ea typeface="NVIDIA Sans" pitchFamily="34" charset="-122"/>
+                <a:cs typeface="NVIDIA Sans" pitchFamily="34" charset="-120"/>
+              </a:rPr>
+              <a:t>Qwen3.5 153 ms</a:t>
+            </a:r>
+            <a:endParaRPr lang="en-US" sz="850" dirty="0"/>
+          </a:p>
+        </p:txBody>
+      </p:sp>
+      <p:sp>
+        <p:nvSpPr>
+          <p:cNvPr id="15" name="Shape 13"/>
+          <p:cNvSpPr/>
+          <p:nvPr/>
+        </p:nvSpPr>
+        <p:spPr>
+          <a:xfrm>
+            <a:off x="3152864" y="1536192"/>
+            <a:ext cx="268829" cy="237744"/>
+          </a:xfrm>
+          <a:prstGeom prst="rect">
+            <a:avLst/>
+          </a:prstGeom>
+          <a:solidFill>
+            <a:srgbClr val="76B900"/>
+          </a:solidFill>
+          <a:ln/>
+        </p:spPr>
+      </p:sp>
+      <p:sp>
+        <p:nvSpPr>
+          <p:cNvPr id="16" name="Shape 14"/>
+          <p:cNvSpPr/>
+          <p:nvPr/>
+        </p:nvSpPr>
+        <p:spPr>
+          <a:xfrm>
+            <a:off x="3421693" y="1536192"/>
+            <a:ext cx="2275145" cy="237744"/>
+          </a:xfrm>
+          <a:prstGeom prst="rect">
+            <a:avLst/>
+          </a:prstGeom>
+          <a:solidFill>
+            <a:srgbClr val="76B900"/>
+          </a:solidFill>
+          <a:ln/>
+        </p:spPr>
+      </p:sp>
+      <p:sp>
+        <p:nvSpPr>
+          <p:cNvPr id="17" name="Text 15"/>
+          <p:cNvSpPr/>
+          <p:nvPr/>
+        </p:nvSpPr>
+        <p:spPr>
+          <a:xfrm>
+            <a:off x="3421693" y="1536192"/>
+            <a:ext cx="2275145" cy="237744"/>
+          </a:xfrm>
+          <a:prstGeom prst="rect">
+            <a:avLst/>
+          </a:prstGeom>
+          <a:noFill/>
+          <a:ln/>
+        </p:spPr>
+        <p:txBody>
+          <a:bodyPr wrap="square" lIns="0" tIns="0" rIns="0" bIns="0" rtlCol="0" anchor="ctr"/>
+          <a:lstStyle/>
+          <a:p>
+            <a:pPr algn="ctr" indent="0" marL="0">
+              <a:buNone/>
+            </a:pPr>
+            <a:r>
+              <a:rPr lang="en-US" sz="850" b="1" dirty="0">
+                <a:solidFill>
+                  <a:srgbClr val="FFFFFF"/>
+                </a:solidFill>
+                <a:latin typeface="NVIDIA Sans" pitchFamily="34" charset="0"/>
+                <a:ea typeface="NVIDIA Sans" pitchFamily="34" charset="-122"/>
+                <a:cs typeface="NVIDIA Sans" pitchFamily="34" charset="-120"/>
+              </a:rPr>
+              <a:t>DiT 322 ms</a:t>
+            </a:r>
+            <a:endParaRPr lang="en-US" sz="850" dirty="0"/>
+          </a:p>
+        </p:txBody>
+      </p:sp>
+      <p:sp>
+        <p:nvSpPr>
+          <p:cNvPr id="18" name="Shape 16"/>
+          <p:cNvSpPr/>
+          <p:nvPr/>
+        </p:nvSpPr>
+        <p:spPr>
+          <a:xfrm>
+            <a:off x="5696839" y="1536192"/>
+            <a:ext cx="1363955" cy="237744"/>
+          </a:xfrm>
+          <a:prstGeom prst="rect">
+            <a:avLst/>
+          </a:prstGeom>
+          <a:solidFill>
+            <a:srgbClr val="0071C5"/>
+          </a:solidFill>
+          <a:ln/>
+        </p:spPr>
+      </p:sp>
+      <p:sp>
+        <p:nvSpPr>
+          <p:cNvPr id="19" name="Text 17"/>
+          <p:cNvSpPr/>
+          <p:nvPr/>
+        </p:nvSpPr>
+        <p:spPr>
+          <a:xfrm>
+            <a:off x="5696839" y="1536192"/>
+            <a:ext cx="1363955" cy="237744"/>
+          </a:xfrm>
+          <a:prstGeom prst="rect">
+            <a:avLst/>
+          </a:prstGeom>
+          <a:noFill/>
+          <a:ln/>
+        </p:spPr>
+        <p:txBody>
+          <a:bodyPr wrap="square" lIns="0" tIns="0" rIns="0" bIns="0" rtlCol="0" anchor="ctr"/>
+          <a:lstStyle/>
+          <a:p>
+            <a:pPr algn="ctr" indent="0" marL="0">
+              <a:buNone/>
+            </a:pPr>
+            <a:r>
+              <a:rPr lang="en-US" sz="850" b="1" dirty="0">
+                <a:solidFill>
+                  <a:srgbClr val="FFFFFF"/>
+                </a:solidFill>
+                <a:latin typeface="NVIDIA Sans" pitchFamily="34" charset="0"/>
+                <a:ea typeface="NVIDIA Sans" pitchFamily="34" charset="-122"/>
+                <a:cs typeface="NVIDIA Sans" pitchFamily="34" charset="-120"/>
+              </a:rPr>
+              <a:t>Qwen3.5 193 ms</a:t>
+            </a:r>
+            <a:endParaRPr lang="en-US" sz="850" dirty="0"/>
+          </a:p>
+        </p:txBody>
+      </p:sp>
+      <p:sp>
+        <p:nvSpPr>
+          <p:cNvPr id="20" name="Shape 18"/>
+          <p:cNvSpPr/>
+          <p:nvPr/>
+        </p:nvSpPr>
+        <p:spPr>
+          <a:xfrm>
+            <a:off x="7060794" y="1536192"/>
+            <a:ext cx="574446" cy="237744"/>
+          </a:xfrm>
+          <a:prstGeom prst="rect">
+            <a:avLst/>
+          </a:prstGeom>
+          <a:solidFill>
+            <a:srgbClr val="D9D9D9"/>
+          </a:solidFill>
+          <a:ln/>
+        </p:spPr>
+      </p:sp>
+      <p:sp>
+        <p:nvSpPr>
+          <p:cNvPr id="21" name="Text 19"/>
           <p:cNvSpPr/>
           <p:nvPr/>
         </p:nvSpPr>
         <p:spPr>
           <a:xfrm>
             <a:off x="457200" y="1536192"/>
+            <a:ext cx="978408" cy="237744"/>
+          </a:xfrm>
+          <a:prstGeom prst="rect">
+            <a:avLst/>
+          </a:prstGeom>
+          <a:noFill/>
+          <a:ln/>
+        </p:spPr>
+        <p:txBody>
+          <a:bodyPr wrap="square" lIns="0" tIns="0" rIns="0" bIns="0" rtlCol="0" anchor="ctr"/>
+          <a:lstStyle/>
+          <a:p>
+            <a:pPr algn="r" indent="0" marL="0">
+              <a:buNone/>
+            </a:pPr>
+            <a:r>
+              <a:rPr lang="en-US" sz="900" i="1" dirty="0">
+                <a:solidFill>
+                  <a:srgbClr val="5E5E5E"/>
+                </a:solidFill>
+                <a:latin typeface="NVIDIA Sans" pitchFamily="34" charset="0"/>
+                <a:ea typeface="NVIDIA Sans" pitchFamily="34" charset="-122"/>
+                <a:cs typeface="NVIDIA Sans" pitchFamily="34" charset="-120"/>
+              </a:rPr>
+              <a:t>module</a:t>
+            </a:r>
+            <a:endParaRPr lang="en-US" sz="900" dirty="0"/>
+          </a:p>
+        </p:txBody>
+      </p:sp>
+      <p:sp>
+        <p:nvSpPr>
+          <p:cNvPr id="22" name="Text 20"/>
+          <p:cNvSpPr/>
+          <p:nvPr/>
+        </p:nvSpPr>
+        <p:spPr>
+          <a:xfrm>
+            <a:off x="457200" y="1810512"/>
             <a:ext cx="978408" cy="310896"/>
           </a:xfrm>
           <a:prstGeom prst="rect">
@@ -8753,13 +9068,13 @@
       </p:sp>
       <p:sp>
         <p:nvSpPr>
-          <p:cNvPr id="12" name="Shape 10"/>
-          <p:cNvSpPr/>
-          <p:nvPr/>
-        </p:nvSpPr>
-        <p:spPr>
-          <a:xfrm>
-            <a:off x="1508760" y="1536192"/>
+          <p:cNvPr id="23" name="Shape 21"/>
+          <p:cNvSpPr/>
+          <p:nvPr/>
+        </p:nvSpPr>
+        <p:spPr>
+          <a:xfrm>
+            <a:off x="1508760" y="1810512"/>
             <a:ext cx="6126480" cy="310896"/>
           </a:xfrm>
           <a:prstGeom prst="rect">
@@ -8778,13 +9093,13 @@
       </p:sp>
       <p:sp>
         <p:nvSpPr>
-          <p:cNvPr id="13" name="Shape 11"/>
-          <p:cNvSpPr/>
-          <p:nvPr/>
-        </p:nvSpPr>
-        <p:spPr>
-          <a:xfrm>
-            <a:off x="2073655" y="1563624"/>
+          <p:cNvPr id="24" name="Shape 22"/>
+          <p:cNvSpPr/>
+          <p:nvPr/>
+        </p:nvSpPr>
+        <p:spPr>
+          <a:xfrm>
+            <a:off x="2073655" y="1837944"/>
             <a:ext cx="4572" cy="256032"/>
           </a:xfrm>
           <a:prstGeom prst="rect">
@@ -8798,13 +9113,13 @@
       </p:sp>
       <p:sp>
         <p:nvSpPr>
-          <p:cNvPr id="14" name="Shape 12"/>
-          <p:cNvSpPr/>
-          <p:nvPr/>
-        </p:nvSpPr>
-        <p:spPr>
-          <a:xfrm>
-            <a:off x="2112919" y="1563624"/>
+          <p:cNvPr id="25" name="Shape 23"/>
+          <p:cNvSpPr/>
+          <p:nvPr/>
+        </p:nvSpPr>
+        <p:spPr>
+          <a:xfrm>
+            <a:off x="2112919" y="1837944"/>
             <a:ext cx="4572" cy="256032"/>
           </a:xfrm>
           <a:prstGeom prst="rect">
@@ -8818,13 +9133,13 @@
       </p:sp>
       <p:sp>
         <p:nvSpPr>
-          <p:cNvPr id="15" name="Shape 13"/>
-          <p:cNvSpPr/>
-          <p:nvPr/>
-        </p:nvSpPr>
-        <p:spPr>
-          <a:xfrm>
-            <a:off x="2114970" y="1563624"/>
+          <p:cNvPr id="26" name="Shape 24"/>
+          <p:cNvSpPr/>
+          <p:nvPr/>
+        </p:nvSpPr>
+        <p:spPr>
+          <a:xfrm>
+            <a:off x="2114970" y="1837944"/>
             <a:ext cx="5660" cy="256032"/>
           </a:xfrm>
           <a:prstGeom prst="rect">
@@ -8838,13 +9153,13 @@
       </p:sp>
       <p:sp>
         <p:nvSpPr>
-          <p:cNvPr id="16" name="Shape 14"/>
-          <p:cNvSpPr/>
-          <p:nvPr/>
-        </p:nvSpPr>
-        <p:spPr>
-          <a:xfrm>
-            <a:off x="2123106" y="1563624"/>
+          <p:cNvPr id="27" name="Shape 25"/>
+          <p:cNvSpPr/>
+          <p:nvPr/>
+        </p:nvSpPr>
+        <p:spPr>
+          <a:xfrm>
+            <a:off x="2123106" y="1837944"/>
             <a:ext cx="25539" cy="256032"/>
           </a:xfrm>
           <a:prstGeom prst="rect">
@@ -8858,13 +9173,13 @@
       </p:sp>
       <p:sp>
         <p:nvSpPr>
-          <p:cNvPr id="17" name="Shape 15"/>
-          <p:cNvSpPr/>
-          <p:nvPr/>
-        </p:nvSpPr>
-        <p:spPr>
-          <a:xfrm>
-            <a:off x="2151121" y="1563624"/>
+          <p:cNvPr id="28" name="Shape 26"/>
+          <p:cNvSpPr/>
+          <p:nvPr/>
+        </p:nvSpPr>
+        <p:spPr>
+          <a:xfrm>
+            <a:off x="2151121" y="1837944"/>
             <a:ext cx="4572" cy="256032"/>
           </a:xfrm>
           <a:prstGeom prst="rect">
@@ -8878,13 +9193,13 @@
       </p:sp>
       <p:sp>
         <p:nvSpPr>
-          <p:cNvPr id="18" name="Shape 16"/>
-          <p:cNvSpPr/>
-          <p:nvPr/>
-        </p:nvSpPr>
-        <p:spPr>
-          <a:xfrm>
-            <a:off x="2156285" y="1563624"/>
+          <p:cNvPr id="29" name="Shape 27"/>
+          <p:cNvSpPr/>
+          <p:nvPr/>
+        </p:nvSpPr>
+        <p:spPr>
+          <a:xfrm>
+            <a:off x="2156285" y="1837944"/>
             <a:ext cx="5094" cy="256032"/>
           </a:xfrm>
           <a:prstGeom prst="rect">
@@ -8898,13 +9213,13 @@
       </p:sp>
       <p:sp>
         <p:nvSpPr>
-          <p:cNvPr id="19" name="Shape 17"/>
-          <p:cNvSpPr/>
-          <p:nvPr/>
-        </p:nvSpPr>
-        <p:spPr>
-          <a:xfrm>
-            <a:off x="2162086" y="1563624"/>
+          <p:cNvPr id="30" name="Shape 28"/>
+          <p:cNvSpPr/>
+          <p:nvPr/>
+        </p:nvSpPr>
+        <p:spPr>
+          <a:xfrm>
+            <a:off x="2162086" y="1837944"/>
             <a:ext cx="6579" cy="256032"/>
           </a:xfrm>
           <a:prstGeom prst="rect">
@@ -8918,13 +9233,13 @@
       </p:sp>
       <p:sp>
         <p:nvSpPr>
-          <p:cNvPr id="20" name="Shape 18"/>
-          <p:cNvSpPr/>
-          <p:nvPr/>
-        </p:nvSpPr>
-        <p:spPr>
-          <a:xfrm>
-            <a:off x="2170363" y="1563624"/>
+          <p:cNvPr id="31" name="Shape 29"/>
+          <p:cNvSpPr/>
+          <p:nvPr/>
+        </p:nvSpPr>
+        <p:spPr>
+          <a:xfrm>
+            <a:off x="2170363" y="1837944"/>
             <a:ext cx="11956" cy="256032"/>
           </a:xfrm>
           <a:prstGeom prst="rect">
@@ -8938,13 +9253,13 @@
       </p:sp>
       <p:sp>
         <p:nvSpPr>
-          <p:cNvPr id="21" name="Shape 19"/>
-          <p:cNvSpPr/>
-          <p:nvPr/>
-        </p:nvSpPr>
-        <p:spPr>
-          <a:xfrm>
-            <a:off x="2184017" y="1563624"/>
+          <p:cNvPr id="32" name="Shape 30"/>
+          <p:cNvSpPr/>
+          <p:nvPr/>
+        </p:nvSpPr>
+        <p:spPr>
+          <a:xfrm>
+            <a:off x="2184017" y="1837944"/>
             <a:ext cx="11602" cy="256032"/>
           </a:xfrm>
           <a:prstGeom prst="rect">
@@ -8958,13 +9273,13 @@
       </p:sp>
       <p:sp>
         <p:nvSpPr>
-          <p:cNvPr id="22" name="Shape 20"/>
-          <p:cNvSpPr/>
-          <p:nvPr/>
-        </p:nvSpPr>
-        <p:spPr>
-          <a:xfrm>
-            <a:off x="2197317" y="1563624"/>
+          <p:cNvPr id="33" name="Shape 31"/>
+          <p:cNvSpPr/>
+          <p:nvPr/>
+        </p:nvSpPr>
+        <p:spPr>
+          <a:xfrm>
+            <a:off x="2197317" y="1837944"/>
             <a:ext cx="11390" cy="256032"/>
           </a:xfrm>
           <a:prstGeom prst="rect">
@@ -8978,13 +9293,13 @@
       </p:sp>
       <p:sp>
         <p:nvSpPr>
-          <p:cNvPr id="23" name="Shape 21"/>
-          <p:cNvSpPr/>
-          <p:nvPr/>
-        </p:nvSpPr>
-        <p:spPr>
-          <a:xfrm>
-            <a:off x="2210263" y="1563624"/>
+          <p:cNvPr id="34" name="Shape 32"/>
+          <p:cNvSpPr/>
+          <p:nvPr/>
+        </p:nvSpPr>
+        <p:spPr>
+          <a:xfrm>
+            <a:off x="2210263" y="1837944"/>
             <a:ext cx="4881" cy="256032"/>
           </a:xfrm>
           <a:prstGeom prst="rect">
@@ -8998,13 +9313,13 @@
       </p:sp>
       <p:sp>
         <p:nvSpPr>
-          <p:cNvPr id="24" name="Shape 22"/>
-          <p:cNvSpPr/>
-          <p:nvPr/>
-        </p:nvSpPr>
-        <p:spPr>
-          <a:xfrm>
-            <a:off x="2215781" y="1563624"/>
+          <p:cNvPr id="35" name="Shape 33"/>
+          <p:cNvSpPr/>
+          <p:nvPr/>
+        </p:nvSpPr>
+        <p:spPr>
+          <a:xfrm>
+            <a:off x="2215781" y="1837944"/>
             <a:ext cx="7711" cy="256032"/>
           </a:xfrm>
           <a:prstGeom prst="rect">
@@ -9018,13 +9333,13 @@
       </p:sp>
       <p:sp>
         <p:nvSpPr>
-          <p:cNvPr id="25" name="Shape 23"/>
-          <p:cNvSpPr/>
-          <p:nvPr/>
-        </p:nvSpPr>
-        <p:spPr>
-          <a:xfrm>
-            <a:off x="2225473" y="1563624"/>
+          <p:cNvPr id="36" name="Shape 34"/>
+          <p:cNvSpPr/>
+          <p:nvPr/>
+        </p:nvSpPr>
+        <p:spPr>
+          <a:xfrm>
+            <a:off x="2225473" y="1837944"/>
             <a:ext cx="5023" cy="256032"/>
           </a:xfrm>
           <a:prstGeom prst="rect">
@@ -9038,13 +9353,13 @@
       </p:sp>
       <p:sp>
         <p:nvSpPr>
-          <p:cNvPr id="26" name="Shape 24"/>
-          <p:cNvSpPr/>
-          <p:nvPr/>
-        </p:nvSpPr>
-        <p:spPr>
-          <a:xfrm>
-            <a:off x="2231133" y="1563624"/>
+          <p:cNvPr id="37" name="Shape 35"/>
+          <p:cNvSpPr/>
+          <p:nvPr/>
+        </p:nvSpPr>
+        <p:spPr>
+          <a:xfrm>
+            <a:off x="2231133" y="1837944"/>
             <a:ext cx="6296" cy="256032"/>
           </a:xfrm>
           <a:prstGeom prst="rect">
@@ -9058,13 +9373,13 @@
       </p:sp>
       <p:sp>
         <p:nvSpPr>
-          <p:cNvPr id="27" name="Shape 25"/>
-          <p:cNvSpPr/>
-          <p:nvPr/>
-        </p:nvSpPr>
-        <p:spPr>
-          <a:xfrm>
-            <a:off x="2239127" y="1563624"/>
+          <p:cNvPr id="38" name="Shape 36"/>
+          <p:cNvSpPr/>
+          <p:nvPr/>
+        </p:nvSpPr>
+        <p:spPr>
+          <a:xfrm>
+            <a:off x="2239127" y="1837944"/>
             <a:ext cx="4811" cy="256032"/>
           </a:xfrm>
           <a:prstGeom prst="rect">
@@ -9078,13 +9393,13 @@
       </p:sp>
       <p:sp>
         <p:nvSpPr>
-          <p:cNvPr id="28" name="Shape 26"/>
-          <p:cNvSpPr/>
-          <p:nvPr/>
-        </p:nvSpPr>
-        <p:spPr>
-          <a:xfrm>
-            <a:off x="2244504" y="1563624"/>
+          <p:cNvPr id="39" name="Shape 37"/>
+          <p:cNvSpPr/>
+          <p:nvPr/>
+        </p:nvSpPr>
+        <p:spPr>
+          <a:xfrm>
+            <a:off x="2244504" y="1837944"/>
             <a:ext cx="6650" cy="256032"/>
           </a:xfrm>
           <a:prstGeom prst="rect">
@@ -9098,13 +9413,13 @@
       </p:sp>
       <p:sp>
         <p:nvSpPr>
-          <p:cNvPr id="29" name="Shape 27"/>
-          <p:cNvSpPr/>
-          <p:nvPr/>
-        </p:nvSpPr>
-        <p:spPr>
-          <a:xfrm>
-            <a:off x="2252993" y="1563624"/>
+          <p:cNvPr id="40" name="Shape 38"/>
+          <p:cNvSpPr/>
+          <p:nvPr/>
+        </p:nvSpPr>
+        <p:spPr>
+          <a:xfrm>
+            <a:off x="2252993" y="1837944"/>
             <a:ext cx="4881" cy="256032"/>
           </a:xfrm>
           <a:prstGeom prst="rect">
@@ -9118,13 +9433,13 @@
       </p:sp>
       <p:sp>
         <p:nvSpPr>
-          <p:cNvPr id="30" name="Shape 28"/>
-          <p:cNvSpPr/>
-          <p:nvPr/>
-        </p:nvSpPr>
-        <p:spPr>
-          <a:xfrm>
-            <a:off x="2258723" y="1563624"/>
+          <p:cNvPr id="41" name="Shape 39"/>
+          <p:cNvSpPr/>
+          <p:nvPr/>
+        </p:nvSpPr>
+        <p:spPr>
+          <a:xfrm>
+            <a:off x="2258723" y="1837944"/>
             <a:ext cx="7499" cy="256032"/>
           </a:xfrm>
           <a:prstGeom prst="rect">
@@ -9138,13 +9453,13 @@
       </p:sp>
       <p:sp>
         <p:nvSpPr>
-          <p:cNvPr id="31" name="Shape 29"/>
-          <p:cNvSpPr/>
-          <p:nvPr/>
-        </p:nvSpPr>
-        <p:spPr>
-          <a:xfrm>
-            <a:off x="2268061" y="1563624"/>
+          <p:cNvPr id="42" name="Shape 40"/>
+          <p:cNvSpPr/>
+          <p:nvPr/>
+        </p:nvSpPr>
+        <p:spPr>
+          <a:xfrm>
+            <a:off x="2268061" y="1837944"/>
             <a:ext cx="4881" cy="256032"/>
           </a:xfrm>
           <a:prstGeom prst="rect">
@@ -9158,13 +9473,13 @@
       </p:sp>
       <p:sp>
         <p:nvSpPr>
-          <p:cNvPr id="32" name="Shape 30"/>
-          <p:cNvSpPr/>
-          <p:nvPr/>
-        </p:nvSpPr>
-        <p:spPr>
-          <a:xfrm>
-            <a:off x="2273580" y="1563624"/>
+          <p:cNvPr id="43" name="Shape 41"/>
+          <p:cNvSpPr/>
+          <p:nvPr/>
+        </p:nvSpPr>
+        <p:spPr>
+          <a:xfrm>
+            <a:off x="2273580" y="1837944"/>
             <a:ext cx="6296" cy="256032"/>
           </a:xfrm>
           <a:prstGeom prst="rect">
@@ -9178,13 +9493,13 @@
       </p:sp>
       <p:sp>
         <p:nvSpPr>
-          <p:cNvPr id="33" name="Shape 31"/>
-          <p:cNvSpPr/>
-          <p:nvPr/>
-        </p:nvSpPr>
-        <p:spPr>
-          <a:xfrm>
-            <a:off x="2281574" y="1563624"/>
+          <p:cNvPr id="44" name="Shape 42"/>
+          <p:cNvSpPr/>
+          <p:nvPr/>
+        </p:nvSpPr>
+        <p:spPr>
+          <a:xfrm>
+            <a:off x="2281574" y="1837944"/>
             <a:ext cx="12310" cy="256032"/>
           </a:xfrm>
           <a:prstGeom prst="rect">
@@ -9198,13 +9513,13 @@
       </p:sp>
       <p:sp>
         <p:nvSpPr>
-          <p:cNvPr id="34" name="Shape 32"/>
-          <p:cNvSpPr/>
-          <p:nvPr/>
-        </p:nvSpPr>
-        <p:spPr>
-          <a:xfrm>
-            <a:off x="2296713" y="1563624"/>
+          <p:cNvPr id="45" name="Shape 43"/>
+          <p:cNvSpPr/>
+          <p:nvPr/>
+        </p:nvSpPr>
+        <p:spPr>
+          <a:xfrm>
+            <a:off x="2296713" y="1837944"/>
             <a:ext cx="5164" cy="256032"/>
           </a:xfrm>
           <a:prstGeom prst="rect">
@@ -9218,13 +9533,13 @@
       </p:sp>
       <p:sp>
         <p:nvSpPr>
-          <p:cNvPr id="35" name="Shape 33"/>
-          <p:cNvSpPr/>
-          <p:nvPr/>
-        </p:nvSpPr>
-        <p:spPr>
-          <a:xfrm>
-            <a:off x="2302514" y="1563624"/>
+          <p:cNvPr id="46" name="Shape 44"/>
+          <p:cNvSpPr/>
+          <p:nvPr/>
+        </p:nvSpPr>
+        <p:spPr>
+          <a:xfrm>
+            <a:off x="2302514" y="1837944"/>
             <a:ext cx="6650" cy="256032"/>
           </a:xfrm>
           <a:prstGeom prst="rect">
@@ -9238,13 +9553,13 @@
       </p:sp>
       <p:sp>
         <p:nvSpPr>
-          <p:cNvPr id="36" name="Shape 34"/>
-          <p:cNvSpPr/>
-          <p:nvPr/>
-        </p:nvSpPr>
-        <p:spPr>
-          <a:xfrm>
-            <a:off x="2310791" y="1563624"/>
+          <p:cNvPr id="47" name="Shape 45"/>
+          <p:cNvSpPr/>
+          <p:nvPr/>
+        </p:nvSpPr>
+        <p:spPr>
+          <a:xfrm>
+            <a:off x="2310791" y="1837944"/>
             <a:ext cx="11531" cy="256032"/>
           </a:xfrm>
           <a:prstGeom prst="rect">
@@ -9258,13 +9573,13 @@
       </p:sp>
       <p:sp>
         <p:nvSpPr>
-          <p:cNvPr id="37" name="Shape 35"/>
-          <p:cNvSpPr/>
-          <p:nvPr/>
-        </p:nvSpPr>
-        <p:spPr>
-          <a:xfrm>
-            <a:off x="2324020" y="1563624"/>
+          <p:cNvPr id="48" name="Shape 46"/>
+          <p:cNvSpPr/>
+          <p:nvPr/>
+        </p:nvSpPr>
+        <p:spPr>
+          <a:xfrm>
+            <a:off x="2324020" y="1837944"/>
             <a:ext cx="4952" cy="256032"/>
           </a:xfrm>
           <a:prstGeom prst="rect">
@@ -9278,13 +9593,13 @@
       </p:sp>
       <p:sp>
         <p:nvSpPr>
-          <p:cNvPr id="38" name="Shape 36"/>
-          <p:cNvSpPr/>
-          <p:nvPr/>
-        </p:nvSpPr>
-        <p:spPr>
-          <a:xfrm>
-            <a:off x="2329609" y="1563624"/>
+          <p:cNvPr id="49" name="Shape 47"/>
+          <p:cNvSpPr/>
+          <p:nvPr/>
+        </p:nvSpPr>
+        <p:spPr>
+          <a:xfrm>
+            <a:off x="2329609" y="1837944"/>
             <a:ext cx="7074" cy="256032"/>
           </a:xfrm>
           <a:prstGeom prst="rect">
@@ -9298,13 +9613,13 @@
       </p:sp>
       <p:sp>
         <p:nvSpPr>
-          <p:cNvPr id="39" name="Shape 37"/>
-          <p:cNvSpPr/>
-          <p:nvPr/>
-        </p:nvSpPr>
-        <p:spPr>
-          <a:xfrm>
-            <a:off x="2338382" y="1563624"/>
+          <p:cNvPr id="50" name="Shape 48"/>
+          <p:cNvSpPr/>
+          <p:nvPr/>
+        </p:nvSpPr>
+        <p:spPr>
+          <a:xfrm>
+            <a:off x="2338382" y="1837944"/>
             <a:ext cx="4952" cy="256032"/>
           </a:xfrm>
           <a:prstGeom prst="rect">
@@ -9318,13 +9633,13 @@
       </p:sp>
       <p:sp>
         <p:nvSpPr>
-          <p:cNvPr id="40" name="Shape 38"/>
-          <p:cNvSpPr/>
-          <p:nvPr/>
-        </p:nvSpPr>
-        <p:spPr>
-          <a:xfrm>
-            <a:off x="2344041" y="1563624"/>
+          <p:cNvPr id="51" name="Shape 49"/>
+          <p:cNvSpPr/>
+          <p:nvPr/>
+        </p:nvSpPr>
+        <p:spPr>
+          <a:xfrm>
+            <a:off x="2344041" y="1837944"/>
             <a:ext cx="6509" cy="256032"/>
           </a:xfrm>
           <a:prstGeom prst="rect">
@@ -9338,13 +9653,13 @@
       </p:sp>
       <p:sp>
         <p:nvSpPr>
-          <p:cNvPr id="41" name="Shape 39"/>
-          <p:cNvSpPr/>
-          <p:nvPr/>
-        </p:nvSpPr>
-        <p:spPr>
-          <a:xfrm>
-            <a:off x="2352177" y="1563624"/>
+          <p:cNvPr id="52" name="Shape 50"/>
+          <p:cNvSpPr/>
+          <p:nvPr/>
+        </p:nvSpPr>
+        <p:spPr>
+          <a:xfrm>
+            <a:off x="2352177" y="1837944"/>
             <a:ext cx="4740" cy="256032"/>
           </a:xfrm>
           <a:prstGeom prst="rect">
@@ -9358,13 +9673,13 @@
       </p:sp>
       <p:sp>
         <p:nvSpPr>
-          <p:cNvPr id="42" name="Shape 40"/>
-          <p:cNvSpPr/>
-          <p:nvPr/>
-        </p:nvSpPr>
-        <p:spPr>
-          <a:xfrm>
-            <a:off x="2357553" y="1563624"/>
+          <p:cNvPr id="53" name="Shape 51"/>
+          <p:cNvSpPr/>
+          <p:nvPr/>
+        </p:nvSpPr>
+        <p:spPr>
+          <a:xfrm>
+            <a:off x="2357553" y="1837944"/>
             <a:ext cx="6226" cy="256032"/>
           </a:xfrm>
           <a:prstGeom prst="rect">
@@ -9378,13 +9693,13 @@
       </p:sp>
       <p:sp>
         <p:nvSpPr>
-          <p:cNvPr id="43" name="Shape 41"/>
-          <p:cNvSpPr/>
-          <p:nvPr/>
-        </p:nvSpPr>
-        <p:spPr>
-          <a:xfrm>
-            <a:off x="2365830" y="1563624"/>
+          <p:cNvPr id="54" name="Shape 52"/>
+          <p:cNvSpPr/>
+          <p:nvPr/>
+        </p:nvSpPr>
+        <p:spPr>
+          <a:xfrm>
+            <a:off x="2365830" y="1837944"/>
             <a:ext cx="12734" cy="256032"/>
           </a:xfrm>
           <a:prstGeom prst="rect">
@@ -9398,13 +9713,13 @@
       </p:sp>
       <p:sp>
         <p:nvSpPr>
-          <p:cNvPr id="44" name="Shape 42"/>
-          <p:cNvSpPr/>
-          <p:nvPr/>
-        </p:nvSpPr>
-        <p:spPr>
-          <a:xfrm>
-            <a:off x="2380262" y="1563624"/>
+          <p:cNvPr id="55" name="Shape 53"/>
+          <p:cNvSpPr/>
+          <p:nvPr/>
+        </p:nvSpPr>
+        <p:spPr>
+          <a:xfrm>
+            <a:off x="2380262" y="1837944"/>
             <a:ext cx="11390" cy="256032"/>
           </a:xfrm>
           <a:prstGeom prst="rect">
@@ -9418,13 +9733,13 @@
       </p:sp>
       <p:sp>
         <p:nvSpPr>
-          <p:cNvPr id="45" name="Shape 43"/>
-          <p:cNvSpPr/>
-          <p:nvPr/>
-        </p:nvSpPr>
-        <p:spPr>
-          <a:xfrm>
-            <a:off x="2393350" y="1563624"/>
+          <p:cNvPr id="56" name="Shape 54"/>
+          <p:cNvSpPr/>
+          <p:nvPr/>
+        </p:nvSpPr>
+        <p:spPr>
+          <a:xfrm>
+            <a:off x="2393350" y="1837944"/>
             <a:ext cx="11178" cy="256032"/>
           </a:xfrm>
           <a:prstGeom prst="rect">
@@ -9438,13 +9753,13 @@
       </p:sp>
       <p:sp>
         <p:nvSpPr>
-          <p:cNvPr id="46" name="Shape 44"/>
-          <p:cNvSpPr/>
-          <p:nvPr/>
-        </p:nvSpPr>
-        <p:spPr>
-          <a:xfrm>
-            <a:off x="2406013" y="1563624"/>
+          <p:cNvPr id="57" name="Shape 55"/>
+          <p:cNvSpPr/>
+          <p:nvPr/>
+        </p:nvSpPr>
+        <p:spPr>
+          <a:xfrm>
+            <a:off x="2406013" y="1837944"/>
             <a:ext cx="11319" cy="256032"/>
           </a:xfrm>
           <a:prstGeom prst="rect">
@@ -9458,13 +9773,13 @@
       </p:sp>
       <p:sp>
         <p:nvSpPr>
-          <p:cNvPr id="47" name="Shape 45"/>
-          <p:cNvSpPr/>
-          <p:nvPr/>
-        </p:nvSpPr>
-        <p:spPr>
-          <a:xfrm>
-            <a:off x="2418889" y="1563624"/>
+          <p:cNvPr id="58" name="Shape 56"/>
+          <p:cNvSpPr/>
+          <p:nvPr/>
+        </p:nvSpPr>
+        <p:spPr>
+          <a:xfrm>
+            <a:off x="2418889" y="1837944"/>
             <a:ext cx="11814" cy="256032"/>
           </a:xfrm>
           <a:prstGeom prst="rect">
@@ -9478,13 +9793,13 @@
       </p:sp>
       <p:sp>
         <p:nvSpPr>
-          <p:cNvPr id="48" name="Shape 46"/>
-          <p:cNvSpPr/>
-          <p:nvPr/>
-        </p:nvSpPr>
-        <p:spPr>
-          <a:xfrm>
-            <a:off x="2432330" y="1563624"/>
+          <p:cNvPr id="59" name="Shape 57"/>
+          <p:cNvSpPr/>
+          <p:nvPr/>
+        </p:nvSpPr>
+        <p:spPr>
+          <a:xfrm>
+            <a:off x="2432330" y="1837944"/>
             <a:ext cx="4811" cy="256032"/>
           </a:xfrm>
           <a:prstGeom prst="rect">
@@ -9498,13 +9813,13 @@
       </p:sp>
       <p:sp>
         <p:nvSpPr>
-          <p:cNvPr id="49" name="Shape 47"/>
-          <p:cNvSpPr/>
-          <p:nvPr/>
-        </p:nvSpPr>
-        <p:spPr>
-          <a:xfrm>
-            <a:off x="2437707" y="1563624"/>
+          <p:cNvPr id="60" name="Shape 58"/>
+          <p:cNvSpPr/>
+          <p:nvPr/>
+        </p:nvSpPr>
+        <p:spPr>
+          <a:xfrm>
+            <a:off x="2437707" y="1837944"/>
             <a:ext cx="6438" cy="256032"/>
           </a:xfrm>
           <a:prstGeom prst="rect">
@@ -9518,13 +9833,13 @@
       </p:sp>
       <p:sp>
         <p:nvSpPr>
-          <p:cNvPr id="50" name="Shape 48"/>
-          <p:cNvSpPr/>
-          <p:nvPr/>
-        </p:nvSpPr>
-        <p:spPr>
-          <a:xfrm>
-            <a:off x="2445843" y="1563624"/>
+          <p:cNvPr id="61" name="Shape 59"/>
+          <p:cNvSpPr/>
+          <p:nvPr/>
+        </p:nvSpPr>
+        <p:spPr>
+          <a:xfrm>
+            <a:off x="2445843" y="1837944"/>
             <a:ext cx="11885" cy="256032"/>
           </a:xfrm>
           <a:prstGeom prst="rect">
@@ -9538,13 +9853,13 @@
       </p:sp>
       <p:sp>
         <p:nvSpPr>
-          <p:cNvPr id="51" name="Shape 49"/>
-          <p:cNvSpPr/>
-          <p:nvPr/>
-        </p:nvSpPr>
-        <p:spPr>
-          <a:xfrm>
-            <a:off x="2459921" y="1563624"/>
+          <p:cNvPr id="62" name="Shape 60"/>
+          <p:cNvSpPr/>
+          <p:nvPr/>
+        </p:nvSpPr>
+        <p:spPr>
+          <a:xfrm>
+            <a:off x="2459921" y="1837944"/>
             <a:ext cx="12097" cy="256032"/>
           </a:xfrm>
           <a:prstGeom prst="rect">
@@ -9558,13 +9873,13 @@
       </p:sp>
       <p:sp>
         <p:nvSpPr>
-          <p:cNvPr id="52" name="Shape 50"/>
-          <p:cNvSpPr/>
-          <p:nvPr/>
-        </p:nvSpPr>
-        <p:spPr>
-          <a:xfrm>
-            <a:off x="2473928" y="1563624"/>
+          <p:cNvPr id="63" name="Shape 61"/>
+          <p:cNvSpPr/>
+          <p:nvPr/>
+        </p:nvSpPr>
+        <p:spPr>
+          <a:xfrm>
+            <a:off x="2473928" y="1837944"/>
             <a:ext cx="4881" cy="256032"/>
           </a:xfrm>
           <a:prstGeom prst="rect">
@@ -9578,13 +9893,13 @@
       </p:sp>
       <p:sp>
         <p:nvSpPr>
-          <p:cNvPr id="53" name="Shape 51"/>
-          <p:cNvSpPr/>
-          <p:nvPr/>
-        </p:nvSpPr>
-        <p:spPr>
-          <a:xfrm>
-            <a:off x="2479376" y="1563624"/>
+          <p:cNvPr id="64" name="Shape 62"/>
+          <p:cNvSpPr/>
+          <p:nvPr/>
+        </p:nvSpPr>
+        <p:spPr>
+          <a:xfrm>
+            <a:off x="2479376" y="1837944"/>
             <a:ext cx="5094" cy="256032"/>
           </a:xfrm>
           <a:prstGeom prst="rect">
@@ -9598,13 +9913,13 @@
       </p:sp>
       <p:sp>
         <p:nvSpPr>
-          <p:cNvPr id="54" name="Shape 52"/>
-          <p:cNvSpPr/>
-          <p:nvPr/>
-        </p:nvSpPr>
-        <p:spPr>
-          <a:xfrm>
-            <a:off x="2485389" y="1563624"/>
+          <p:cNvPr id="65" name="Shape 63"/>
+          <p:cNvSpPr/>
+          <p:nvPr/>
+        </p:nvSpPr>
+        <p:spPr>
+          <a:xfrm>
+            <a:off x="2485389" y="1837944"/>
             <a:ext cx="5660" cy="256032"/>
           </a:xfrm>
           <a:prstGeom prst="rect">
@@ -9618,13 +9933,13 @@
       </p:sp>
       <p:sp>
         <p:nvSpPr>
-          <p:cNvPr id="55" name="Shape 53"/>
-          <p:cNvSpPr/>
-          <p:nvPr/>
-        </p:nvSpPr>
-        <p:spPr>
-          <a:xfrm>
-            <a:off x="2492534" y="1563624"/>
+          <p:cNvPr id="66" name="Shape 64"/>
+          <p:cNvSpPr/>
+          <p:nvPr/>
+        </p:nvSpPr>
+        <p:spPr>
+          <a:xfrm>
+            <a:off x="2492534" y="1837944"/>
             <a:ext cx="41386" cy="256032"/>
           </a:xfrm>
           <a:prstGeom prst="rect">
@@ -9638,13 +9953,13 @@
       </p:sp>
       <p:sp>
         <p:nvSpPr>
-          <p:cNvPr id="56" name="Shape 54"/>
-          <p:cNvSpPr/>
-          <p:nvPr/>
-        </p:nvSpPr>
-        <p:spPr>
-          <a:xfrm>
-            <a:off x="2534556" y="1563624"/>
+          <p:cNvPr id="67" name="Shape 65"/>
+          <p:cNvSpPr/>
+          <p:nvPr/>
+        </p:nvSpPr>
+        <p:spPr>
+          <a:xfrm>
+            <a:off x="2534556" y="1837944"/>
             <a:ext cx="18111" cy="256032"/>
           </a:xfrm>
           <a:prstGeom prst="rect">
@@ -9658,13 +9973,13 @@
       </p:sp>
       <p:sp>
         <p:nvSpPr>
-          <p:cNvPr id="57" name="Shape 55"/>
-          <p:cNvSpPr/>
-          <p:nvPr/>
-        </p:nvSpPr>
-        <p:spPr>
-          <a:xfrm>
-            <a:off x="2555072" y="1563624"/>
+          <p:cNvPr id="68" name="Shape 66"/>
+          <p:cNvSpPr/>
+          <p:nvPr/>
+        </p:nvSpPr>
+        <p:spPr>
+          <a:xfrm>
+            <a:off x="2555072" y="1837944"/>
             <a:ext cx="4572" cy="256032"/>
           </a:xfrm>
           <a:prstGeom prst="rect">
@@ -9678,13 +9993,13 @@
       </p:sp>
       <p:sp>
         <p:nvSpPr>
-          <p:cNvPr id="58" name="Shape 56"/>
-          <p:cNvSpPr/>
-          <p:nvPr/>
-        </p:nvSpPr>
-        <p:spPr>
-          <a:xfrm>
-            <a:off x="2560307" y="1563624"/>
+          <p:cNvPr id="69" name="Shape 67"/>
+          <p:cNvSpPr/>
+          <p:nvPr/>
+        </p:nvSpPr>
+        <p:spPr>
+          <a:xfrm>
+            <a:off x="2560307" y="1837944"/>
             <a:ext cx="4572" cy="256032"/>
           </a:xfrm>
           <a:prstGeom prst="rect">
@@ -9698,13 +10013,13 @@
       </p:sp>
       <p:sp>
         <p:nvSpPr>
-          <p:cNvPr id="59" name="Shape 57"/>
-          <p:cNvSpPr/>
-          <p:nvPr/>
-        </p:nvSpPr>
-        <p:spPr>
-          <a:xfrm>
-            <a:off x="2563066" y="1563624"/>
+          <p:cNvPr id="70" name="Shape 68"/>
+          <p:cNvSpPr/>
+          <p:nvPr/>
+        </p:nvSpPr>
+        <p:spPr>
+          <a:xfrm>
+            <a:off x="2563066" y="1837944"/>
             <a:ext cx="4572" cy="256032"/>
           </a:xfrm>
           <a:prstGeom prst="rect">
@@ -9718,13 +10033,13 @@
       </p:sp>
       <p:sp>
         <p:nvSpPr>
-          <p:cNvPr id="60" name="Shape 58"/>
-          <p:cNvSpPr/>
-          <p:nvPr/>
-        </p:nvSpPr>
-        <p:spPr>
-          <a:xfrm>
-            <a:off x="2565542" y="1563624"/>
+          <p:cNvPr id="71" name="Shape 69"/>
+          <p:cNvSpPr/>
+          <p:nvPr/>
+        </p:nvSpPr>
+        <p:spPr>
+          <a:xfrm>
+            <a:off x="2565542" y="1837944"/>
             <a:ext cx="5094" cy="256032"/>
           </a:xfrm>
           <a:prstGeom prst="rect">
@@ -9738,13 +10053,13 @@
       </p:sp>
       <p:sp>
         <p:nvSpPr>
-          <p:cNvPr id="61" name="Shape 59"/>
-          <p:cNvSpPr/>
-          <p:nvPr/>
-        </p:nvSpPr>
-        <p:spPr>
-          <a:xfrm>
-            <a:off x="2574244" y="1563624"/>
+          <p:cNvPr id="72" name="Shape 70"/>
+          <p:cNvSpPr/>
+          <p:nvPr/>
+        </p:nvSpPr>
+        <p:spPr>
+          <a:xfrm>
+            <a:off x="2574244" y="1837944"/>
             <a:ext cx="4572" cy="256032"/>
           </a:xfrm>
           <a:prstGeom prst="rect">
@@ -9758,13 +10073,13 @@
       </p:sp>
       <p:sp>
         <p:nvSpPr>
-          <p:cNvPr id="62" name="Shape 60"/>
-          <p:cNvSpPr/>
-          <p:nvPr/>
-        </p:nvSpPr>
-        <p:spPr>
-          <a:xfrm>
-            <a:off x="2580682" y="1563624"/>
+          <p:cNvPr id="73" name="Shape 71"/>
+          <p:cNvSpPr/>
+          <p:nvPr/>
+        </p:nvSpPr>
+        <p:spPr>
+          <a:xfrm>
+            <a:off x="2580682" y="1837944"/>
             <a:ext cx="4572" cy="256032"/>
           </a:xfrm>
           <a:prstGeom prst="rect">
@@ -9778,13 +10093,13 @@
       </p:sp>
       <p:sp>
         <p:nvSpPr>
-          <p:cNvPr id="63" name="Shape 61"/>
-          <p:cNvSpPr/>
-          <p:nvPr/>
-        </p:nvSpPr>
-        <p:spPr>
-          <a:xfrm>
-            <a:off x="2583229" y="1563624"/>
+          <p:cNvPr id="74" name="Shape 72"/>
+          <p:cNvSpPr/>
+          <p:nvPr/>
+        </p:nvSpPr>
+        <p:spPr>
+          <a:xfrm>
+            <a:off x="2583229" y="1837944"/>
             <a:ext cx="9055" cy="256032"/>
           </a:xfrm>
           <a:prstGeom prst="rect">
@@ -9798,13 +10113,13 @@
       </p:sp>
       <p:sp>
         <p:nvSpPr>
-          <p:cNvPr id="64" name="Shape 62"/>
-          <p:cNvSpPr/>
-          <p:nvPr/>
-        </p:nvSpPr>
-        <p:spPr>
-          <a:xfrm>
-            <a:off x="2595750" y="1563624"/>
+          <p:cNvPr id="75" name="Shape 73"/>
+          <p:cNvSpPr/>
+          <p:nvPr/>
+        </p:nvSpPr>
+        <p:spPr>
+          <a:xfrm>
+            <a:off x="2595750" y="1837944"/>
             <a:ext cx="4572" cy="256032"/>
           </a:xfrm>
           <a:prstGeom prst="rect">
@@ -9818,13 +10133,13 @@
       </p:sp>
       <p:sp>
         <p:nvSpPr>
-          <p:cNvPr id="65" name="Shape 63"/>
-          <p:cNvSpPr/>
-          <p:nvPr/>
-        </p:nvSpPr>
-        <p:spPr>
-          <a:xfrm>
-            <a:off x="2598368" y="1563624"/>
+          <p:cNvPr id="76" name="Shape 74"/>
+          <p:cNvSpPr/>
+          <p:nvPr/>
+        </p:nvSpPr>
+        <p:spPr>
+          <a:xfrm>
+            <a:off x="2598368" y="1837944"/>
             <a:ext cx="4572" cy="256032"/>
           </a:xfrm>
           <a:prstGeom prst="rect">
@@ -9838,13 +10153,13 @@
       </p:sp>
       <p:sp>
         <p:nvSpPr>
-          <p:cNvPr id="66" name="Shape 64"/>
-          <p:cNvSpPr/>
-          <p:nvPr/>
-        </p:nvSpPr>
-        <p:spPr>
-          <a:xfrm>
-            <a:off x="2601834" y="1563624"/>
+          <p:cNvPr id="77" name="Shape 75"/>
+          <p:cNvSpPr/>
+          <p:nvPr/>
+        </p:nvSpPr>
+        <p:spPr>
+          <a:xfrm>
+            <a:off x="2601834" y="1837944"/>
             <a:ext cx="10541" cy="256032"/>
           </a:xfrm>
           <a:prstGeom prst="rect">
@@ -9858,13 +10173,13 @@
       </p:sp>
       <p:sp>
         <p:nvSpPr>
-          <p:cNvPr id="67" name="Shape 65"/>
-          <p:cNvSpPr/>
-          <p:nvPr/>
-        </p:nvSpPr>
-        <p:spPr>
-          <a:xfrm>
-            <a:off x="2615488" y="1563624"/>
+          <p:cNvPr id="78" name="Shape 76"/>
+          <p:cNvSpPr/>
+          <p:nvPr/>
+        </p:nvSpPr>
+        <p:spPr>
+          <a:xfrm>
+            <a:off x="2615488" y="1837944"/>
             <a:ext cx="4572" cy="256032"/>
           </a:xfrm>
           <a:prstGeom prst="rect">
@@ -9878,13 +10193,13 @@
       </p:sp>
       <p:sp>
         <p:nvSpPr>
-          <p:cNvPr id="68" name="Shape 66"/>
-          <p:cNvSpPr/>
-          <p:nvPr/>
-        </p:nvSpPr>
-        <p:spPr>
-          <a:xfrm>
-            <a:off x="2621006" y="1563624"/>
+          <p:cNvPr id="79" name="Shape 77"/>
+          <p:cNvSpPr/>
+          <p:nvPr/>
+        </p:nvSpPr>
+        <p:spPr>
+          <a:xfrm>
+            <a:off x="2621006" y="1837944"/>
             <a:ext cx="4572" cy="256032"/>
           </a:xfrm>
           <a:prstGeom prst="rect">
@@ -9898,13 +10213,13 @@
       </p:sp>
       <p:sp>
         <p:nvSpPr>
-          <p:cNvPr id="69" name="Shape 67"/>
-          <p:cNvSpPr/>
-          <p:nvPr/>
-        </p:nvSpPr>
-        <p:spPr>
-          <a:xfrm>
-            <a:off x="2623836" y="1563624"/>
+          <p:cNvPr id="80" name="Shape 78"/>
+          <p:cNvSpPr/>
+          <p:nvPr/>
+        </p:nvSpPr>
+        <p:spPr>
+          <a:xfrm>
+            <a:off x="2623836" y="1837944"/>
             <a:ext cx="4572" cy="256032"/>
           </a:xfrm>
           <a:prstGeom prst="rect">
@@ -9918,13 +10233,13 @@
       </p:sp>
       <p:sp>
         <p:nvSpPr>
-          <p:cNvPr id="70" name="Shape 68"/>
-          <p:cNvSpPr/>
-          <p:nvPr/>
-        </p:nvSpPr>
-        <p:spPr>
-          <a:xfrm>
-            <a:off x="2627585" y="1563624"/>
+          <p:cNvPr id="81" name="Shape 79"/>
+          <p:cNvSpPr/>
+          <p:nvPr/>
+        </p:nvSpPr>
+        <p:spPr>
+          <a:xfrm>
+            <a:off x="2627585" y="1837944"/>
             <a:ext cx="20657" cy="256032"/>
           </a:xfrm>
           <a:prstGeom prst="rect">
@@ -9938,13 +10253,13 @@
       </p:sp>
       <p:sp>
         <p:nvSpPr>
-          <p:cNvPr id="71" name="Shape 69"/>
-          <p:cNvSpPr/>
-          <p:nvPr/>
-        </p:nvSpPr>
-        <p:spPr>
-          <a:xfrm>
-            <a:off x="2650719" y="1563624"/>
+          <p:cNvPr id="82" name="Shape 80"/>
+          <p:cNvSpPr/>
+          <p:nvPr/>
+        </p:nvSpPr>
+        <p:spPr>
+          <a:xfrm>
+            <a:off x="2650719" y="1837944"/>
             <a:ext cx="4572" cy="256032"/>
           </a:xfrm>
           <a:prstGeom prst="rect">
@@ -9958,13 +10273,13 @@
       </p:sp>
       <p:sp>
         <p:nvSpPr>
-          <p:cNvPr id="72" name="Shape 70"/>
-          <p:cNvSpPr/>
-          <p:nvPr/>
-        </p:nvSpPr>
-        <p:spPr>
-          <a:xfrm>
-            <a:off x="2656874" y="1563624"/>
+          <p:cNvPr id="83" name="Shape 81"/>
+          <p:cNvSpPr/>
+          <p:nvPr/>
+        </p:nvSpPr>
+        <p:spPr>
+          <a:xfrm>
+            <a:off x="2656874" y="1837944"/>
             <a:ext cx="4572" cy="256032"/>
           </a:xfrm>
           <a:prstGeom prst="rect">
@@ -9978,13 +10293,13 @@
       </p:sp>
       <p:sp>
         <p:nvSpPr>
-          <p:cNvPr id="73" name="Shape 71"/>
-          <p:cNvSpPr/>
-          <p:nvPr/>
-        </p:nvSpPr>
-        <p:spPr>
-          <a:xfrm>
-            <a:off x="2659279" y="1563624"/>
+          <p:cNvPr id="84" name="Shape 82"/>
+          <p:cNvSpPr/>
+          <p:nvPr/>
+        </p:nvSpPr>
+        <p:spPr>
+          <a:xfrm>
+            <a:off x="2659279" y="1837944"/>
             <a:ext cx="8419" cy="256032"/>
           </a:xfrm>
           <a:prstGeom prst="rect">
@@ -9998,13 +10313,13 @@
       </p:sp>
       <p:sp>
         <p:nvSpPr>
-          <p:cNvPr id="74" name="Shape 72"/>
-          <p:cNvSpPr/>
-          <p:nvPr/>
-        </p:nvSpPr>
-        <p:spPr>
-          <a:xfrm>
-            <a:off x="2670103" y="1563624"/>
+          <p:cNvPr id="85" name="Shape 83"/>
+          <p:cNvSpPr/>
+          <p:nvPr/>
+        </p:nvSpPr>
+        <p:spPr>
+          <a:xfrm>
+            <a:off x="2670103" y="1837944"/>
             <a:ext cx="4572" cy="256032"/>
           </a:xfrm>
           <a:prstGeom prst="rect">
@@ -10018,13 +10333,13 @@
       </p:sp>
       <p:sp>
         <p:nvSpPr>
-          <p:cNvPr id="75" name="Shape 73"/>
-          <p:cNvSpPr/>
-          <p:nvPr/>
-        </p:nvSpPr>
-        <p:spPr>
-          <a:xfrm>
-            <a:off x="2672862" y="1563624"/>
+          <p:cNvPr id="86" name="Shape 84"/>
+          <p:cNvSpPr/>
+          <p:nvPr/>
+        </p:nvSpPr>
+        <p:spPr>
+          <a:xfrm>
+            <a:off x="2672862" y="1837944"/>
             <a:ext cx="4572" cy="256032"/>
           </a:xfrm>
           <a:prstGeom prst="rect">
@@ -10038,13 +10353,13 @@
       </p:sp>
       <p:sp>
         <p:nvSpPr>
-          <p:cNvPr id="76" name="Shape 74"/>
-          <p:cNvSpPr/>
-          <p:nvPr/>
-        </p:nvSpPr>
-        <p:spPr>
-          <a:xfrm>
-            <a:off x="2676116" y="1563624"/>
+          <p:cNvPr id="87" name="Shape 85"/>
+          <p:cNvSpPr/>
+          <p:nvPr/>
+        </p:nvSpPr>
+        <p:spPr>
+          <a:xfrm>
+            <a:off x="2676116" y="1837944"/>
             <a:ext cx="11319" cy="256032"/>
           </a:xfrm>
           <a:prstGeom prst="rect">
@@ -10058,13 +10373,13 @@
       </p:sp>
       <p:sp>
         <p:nvSpPr>
-          <p:cNvPr id="77" name="Shape 75"/>
-          <p:cNvSpPr/>
-          <p:nvPr/>
-        </p:nvSpPr>
-        <p:spPr>
-          <a:xfrm>
-            <a:off x="2690619" y="1563624"/>
+          <p:cNvPr id="88" name="Shape 86"/>
+          <p:cNvSpPr/>
+          <p:nvPr/>
+        </p:nvSpPr>
+        <p:spPr>
+          <a:xfrm>
+            <a:off x="2690619" y="1837944"/>
             <a:ext cx="4572" cy="256032"/>
           </a:xfrm>
           <a:prstGeom prst="rect">
@@ -10078,13 +10393,13 @@
       </p:sp>
       <p:sp>
         <p:nvSpPr>
-          <p:cNvPr id="78" name="Shape 76"/>
-          <p:cNvSpPr/>
-          <p:nvPr/>
-        </p:nvSpPr>
-        <p:spPr>
-          <a:xfrm>
-            <a:off x="2693095" y="1563624"/>
+          <p:cNvPr id="89" name="Shape 87"/>
+          <p:cNvSpPr/>
+          <p:nvPr/>
+        </p:nvSpPr>
+        <p:spPr>
+          <a:xfrm>
+            <a:off x="2693095" y="1837944"/>
             <a:ext cx="4572" cy="256032"/>
           </a:xfrm>
           <a:prstGeom prst="rect">
@@ -10098,13 +10413,13 @@
       </p:sp>
       <p:sp>
         <p:nvSpPr>
-          <p:cNvPr id="79" name="Shape 77"/>
-          <p:cNvSpPr/>
-          <p:nvPr/>
-        </p:nvSpPr>
-        <p:spPr>
-          <a:xfrm>
-            <a:off x="2696915" y="1563624"/>
+          <p:cNvPr id="90" name="Shape 88"/>
+          <p:cNvSpPr/>
+          <p:nvPr/>
+        </p:nvSpPr>
+        <p:spPr>
+          <a:xfrm>
+            <a:off x="2696915" y="1837944"/>
             <a:ext cx="4572" cy="256032"/>
           </a:xfrm>
           <a:prstGeom prst="rect">
@@ -10118,13 +10433,13 @@
       </p:sp>
       <p:sp>
         <p:nvSpPr>
-          <p:cNvPr id="80" name="Shape 78"/>
-          <p:cNvSpPr/>
-          <p:nvPr/>
-        </p:nvSpPr>
-        <p:spPr>
-          <a:xfrm>
-            <a:off x="2699603" y="1563624"/>
+          <p:cNvPr id="91" name="Shape 89"/>
+          <p:cNvSpPr/>
+          <p:nvPr/>
+        </p:nvSpPr>
+        <p:spPr>
+          <a:xfrm>
+            <a:off x="2699603" y="1837944"/>
             <a:ext cx="17828" cy="256032"/>
           </a:xfrm>
           <a:prstGeom prst="rect">
@@ -10138,13 +10453,13 @@
       </p:sp>
       <p:sp>
         <p:nvSpPr>
-          <p:cNvPr id="81" name="Shape 79"/>
-          <p:cNvSpPr/>
-          <p:nvPr/>
-        </p:nvSpPr>
-        <p:spPr>
-          <a:xfrm>
-            <a:off x="2718138" y="1563624"/>
+          <p:cNvPr id="92" name="Shape 90"/>
+          <p:cNvSpPr/>
+          <p:nvPr/>
+        </p:nvSpPr>
+        <p:spPr>
+          <a:xfrm>
+            <a:off x="2718138" y="1837944"/>
             <a:ext cx="5094" cy="256032"/>
           </a:xfrm>
           <a:prstGeom prst="rect">
@@ -10158,13 +10473,13 @@
       </p:sp>
       <p:sp>
         <p:nvSpPr>
-          <p:cNvPr id="82" name="Shape 80"/>
-          <p:cNvSpPr/>
-          <p:nvPr/>
-        </p:nvSpPr>
-        <p:spPr>
-          <a:xfrm>
-            <a:off x="2726203" y="1563624"/>
+          <p:cNvPr id="93" name="Shape 91"/>
+          <p:cNvSpPr/>
+          <p:nvPr/>
+        </p:nvSpPr>
+        <p:spPr>
+          <a:xfrm>
+            <a:off x="2726203" y="1837944"/>
             <a:ext cx="4572" cy="256032"/>
           </a:xfrm>
           <a:prstGeom prst="rect">
@@ -10178,13 +10493,13 @@
       </p:sp>
       <p:sp>
         <p:nvSpPr>
-          <p:cNvPr id="83" name="Shape 81"/>
-          <p:cNvSpPr/>
-          <p:nvPr/>
-        </p:nvSpPr>
-        <p:spPr>
-          <a:xfrm>
-            <a:off x="2728538" y="1563624"/>
+          <p:cNvPr id="94" name="Shape 92"/>
+          <p:cNvSpPr/>
+          <p:nvPr/>
+        </p:nvSpPr>
+        <p:spPr>
+          <a:xfrm>
+            <a:off x="2728538" y="1837944"/>
             <a:ext cx="4572" cy="256032"/>
           </a:xfrm>
           <a:prstGeom prst="rect">
@@ -10198,13 +10513,13 @@
       </p:sp>
       <p:sp>
         <p:nvSpPr>
-          <p:cNvPr id="84" name="Shape 82"/>
-          <p:cNvSpPr/>
-          <p:nvPr/>
-        </p:nvSpPr>
-        <p:spPr>
-          <a:xfrm>
-            <a:off x="2735188" y="1563624"/>
+          <p:cNvPr id="95" name="Shape 93"/>
+          <p:cNvSpPr/>
+          <p:nvPr/>
+        </p:nvSpPr>
+        <p:spPr>
+          <a:xfrm>
+            <a:off x="2735188" y="1837944"/>
             <a:ext cx="10329" cy="256032"/>
           </a:xfrm>
           <a:prstGeom prst="rect">
@@ -10218,13 +10533,13 @@
       </p:sp>
       <p:sp>
         <p:nvSpPr>
-          <p:cNvPr id="85" name="Shape 83"/>
-          <p:cNvSpPr/>
-          <p:nvPr/>
-        </p:nvSpPr>
-        <p:spPr>
-          <a:xfrm>
-            <a:off x="2748488" y="1563624"/>
+          <p:cNvPr id="96" name="Shape 94"/>
+          <p:cNvSpPr/>
+          <p:nvPr/>
+        </p:nvSpPr>
+        <p:spPr>
+          <a:xfrm>
+            <a:off x="2748488" y="1837944"/>
             <a:ext cx="4572" cy="256032"/>
           </a:xfrm>
           <a:prstGeom prst="rect">
@@ -10238,13 +10553,13 @@
       </p:sp>
       <p:sp>
         <p:nvSpPr>
-          <p:cNvPr id="86" name="Shape 84"/>
-          <p:cNvSpPr/>
-          <p:nvPr/>
-        </p:nvSpPr>
-        <p:spPr>
-          <a:xfrm>
-            <a:off x="2754006" y="1563624"/>
+          <p:cNvPr id="97" name="Shape 95"/>
+          <p:cNvSpPr/>
+          <p:nvPr/>
+        </p:nvSpPr>
+        <p:spPr>
+          <a:xfrm>
+            <a:off x="2754006" y="1837944"/>
             <a:ext cx="10116" cy="256032"/>
           </a:xfrm>
           <a:prstGeom prst="rect">
@@ -10258,13 +10573,13 @@
       </p:sp>
       <p:sp>
         <p:nvSpPr>
-          <p:cNvPr id="87" name="Shape 85"/>
-          <p:cNvSpPr/>
-          <p:nvPr/>
-        </p:nvSpPr>
-        <p:spPr>
-          <a:xfrm>
-            <a:off x="2767023" y="1563624"/>
+          <p:cNvPr id="98" name="Shape 96"/>
+          <p:cNvSpPr/>
+          <p:nvPr/>
+        </p:nvSpPr>
+        <p:spPr>
+          <a:xfrm>
+            <a:off x="2767023" y="1837944"/>
             <a:ext cx="4572" cy="256032"/>
           </a:xfrm>
           <a:prstGeom prst="rect">
@@ -10278,13 +10593,13 @@
       </p:sp>
       <p:sp>
         <p:nvSpPr>
-          <p:cNvPr id="88" name="Shape 86"/>
-          <p:cNvSpPr/>
-          <p:nvPr/>
-        </p:nvSpPr>
-        <p:spPr>
-          <a:xfrm>
-            <a:off x="2769358" y="1563624"/>
+          <p:cNvPr id="99" name="Shape 97"/>
+          <p:cNvSpPr/>
+          <p:nvPr/>
+        </p:nvSpPr>
+        <p:spPr>
+          <a:xfrm>
+            <a:off x="2769358" y="1837944"/>
             <a:ext cx="4572" cy="256032"/>
           </a:xfrm>
           <a:prstGeom prst="rect">
@@ -10298,13 +10613,13 @@
       </p:sp>
       <p:sp>
         <p:nvSpPr>
-          <p:cNvPr id="89" name="Shape 87"/>
-          <p:cNvSpPr/>
-          <p:nvPr/>
-        </p:nvSpPr>
-        <p:spPr>
-          <a:xfrm>
-            <a:off x="2772400" y="1563624"/>
+          <p:cNvPr id="100" name="Shape 98"/>
+          <p:cNvSpPr/>
+          <p:nvPr/>
+        </p:nvSpPr>
+        <p:spPr>
+          <a:xfrm>
+            <a:off x="2772400" y="1837944"/>
             <a:ext cx="4572" cy="256032"/>
           </a:xfrm>
           <a:prstGeom prst="rect">
@@ -10318,13 +10633,13 @@
       </p:sp>
       <p:sp>
         <p:nvSpPr>
-          <p:cNvPr id="90" name="Shape 88"/>
-          <p:cNvSpPr/>
-          <p:nvPr/>
-        </p:nvSpPr>
-        <p:spPr>
-          <a:xfrm>
-            <a:off x="2774876" y="1563624"/>
+          <p:cNvPr id="101" name="Shape 99"/>
+          <p:cNvSpPr/>
+          <p:nvPr/>
+        </p:nvSpPr>
+        <p:spPr>
+          <a:xfrm>
+            <a:off x="2774876" y="1837944"/>
             <a:ext cx="15069" cy="256032"/>
           </a:xfrm>
           <a:prstGeom prst="rect">
@@ -10338,13 +10653,13 @@
       </p:sp>
       <p:sp>
         <p:nvSpPr>
-          <p:cNvPr id="91" name="Shape 89"/>
-          <p:cNvSpPr/>
-          <p:nvPr/>
-        </p:nvSpPr>
-        <p:spPr>
-          <a:xfrm>
-            <a:off x="2790581" y="1563624"/>
+          <p:cNvPr id="102" name="Shape 100"/>
+          <p:cNvSpPr/>
+          <p:nvPr/>
+        </p:nvSpPr>
+        <p:spPr>
+          <a:xfrm>
+            <a:off x="2790581" y="1837944"/>
             <a:ext cx="8065" cy="256032"/>
           </a:xfrm>
           <a:prstGeom prst="rect">
@@ -10358,13 +10673,13 @@
       </p:sp>
       <p:sp>
         <p:nvSpPr>
-          <p:cNvPr id="92" name="Shape 90"/>
-          <p:cNvSpPr/>
-          <p:nvPr/>
-        </p:nvSpPr>
-        <p:spPr>
-          <a:xfrm>
-            <a:off x="2801405" y="1563624"/>
+          <p:cNvPr id="103" name="Shape 101"/>
+          <p:cNvSpPr/>
+          <p:nvPr/>
+        </p:nvSpPr>
+        <p:spPr>
+          <a:xfrm>
+            <a:off x="2801405" y="1837944"/>
             <a:ext cx="4572" cy="256032"/>
           </a:xfrm>
           <a:prstGeom prst="rect">
@@ -10378,13 +10693,13 @@
       </p:sp>
       <p:sp>
         <p:nvSpPr>
-          <p:cNvPr id="93" name="Shape 91"/>
-          <p:cNvSpPr/>
-          <p:nvPr/>
-        </p:nvSpPr>
-        <p:spPr>
-          <a:xfrm>
-            <a:off x="2806145" y="1563624"/>
+          <p:cNvPr id="104" name="Shape 102"/>
+          <p:cNvSpPr/>
+          <p:nvPr/>
+        </p:nvSpPr>
+        <p:spPr>
+          <a:xfrm>
+            <a:off x="2806145" y="1837944"/>
             <a:ext cx="4572" cy="256032"/>
           </a:xfrm>
           <a:prstGeom prst="rect">
@@ -10398,13 +10713,13 @@
       </p:sp>
       <p:sp>
         <p:nvSpPr>
-          <p:cNvPr id="94" name="Shape 92"/>
-          <p:cNvSpPr/>
-          <p:nvPr/>
-        </p:nvSpPr>
-        <p:spPr>
-          <a:xfrm>
-            <a:off x="2808762" y="1563624"/>
+          <p:cNvPr id="105" name="Shape 103"/>
+          <p:cNvSpPr/>
+          <p:nvPr/>
+        </p:nvSpPr>
+        <p:spPr>
+          <a:xfrm>
+            <a:off x="2808762" y="1837944"/>
             <a:ext cx="4572" cy="256032"/>
           </a:xfrm>
           <a:prstGeom prst="rect">
@@ -10418,13 +10733,13 @@
       </p:sp>
       <p:sp>
         <p:nvSpPr>
-          <p:cNvPr id="95" name="Shape 93"/>
-          <p:cNvSpPr/>
-          <p:nvPr/>
-        </p:nvSpPr>
-        <p:spPr>
-          <a:xfrm>
-            <a:off x="2812370" y="1563624"/>
+          <p:cNvPr id="106" name="Shape 104"/>
+          <p:cNvSpPr/>
+          <p:nvPr/>
+        </p:nvSpPr>
+        <p:spPr>
+          <a:xfrm>
+            <a:off x="2812370" y="1837944"/>
             <a:ext cx="10399" cy="256032"/>
           </a:xfrm>
           <a:prstGeom prst="rect">
@@ -10438,13 +10753,13 @@
       </p:sp>
       <p:sp>
         <p:nvSpPr>
-          <p:cNvPr id="96" name="Shape 94"/>
-          <p:cNvSpPr/>
-          <p:nvPr/>
-        </p:nvSpPr>
-        <p:spPr>
-          <a:xfrm>
-            <a:off x="2825034" y="1563624"/>
+          <p:cNvPr id="107" name="Shape 105"/>
+          <p:cNvSpPr/>
+          <p:nvPr/>
+        </p:nvSpPr>
+        <p:spPr>
+          <a:xfrm>
+            <a:off x="2825034" y="1837944"/>
             <a:ext cx="4572" cy="256032"/>
           </a:xfrm>
           <a:prstGeom prst="rect">
@@ -10458,13 +10773,13 @@
       </p:sp>
       <p:sp>
         <p:nvSpPr>
-          <p:cNvPr id="97" name="Shape 95"/>
-          <p:cNvSpPr/>
-          <p:nvPr/>
-        </p:nvSpPr>
-        <p:spPr>
-          <a:xfrm>
-            <a:off x="2830764" y="1563624"/>
+          <p:cNvPr id="108" name="Shape 106"/>
+          <p:cNvSpPr/>
+          <p:nvPr/>
+        </p:nvSpPr>
+        <p:spPr>
+          <a:xfrm>
+            <a:off x="2830764" y="1837944"/>
             <a:ext cx="4572" cy="256032"/>
           </a:xfrm>
           <a:prstGeom prst="rect">
@@ -10478,13 +10793,13 @@
       </p:sp>
       <p:sp>
         <p:nvSpPr>
-          <p:cNvPr id="98" name="Shape 96"/>
-          <p:cNvSpPr/>
-          <p:nvPr/>
-        </p:nvSpPr>
-        <p:spPr>
-          <a:xfrm>
-            <a:off x="2833664" y="1563624"/>
+          <p:cNvPr id="109" name="Shape 107"/>
+          <p:cNvSpPr/>
+          <p:nvPr/>
+        </p:nvSpPr>
+        <p:spPr>
+          <a:xfrm>
+            <a:off x="2833664" y="1837944"/>
             <a:ext cx="9338" cy="256032"/>
           </a:xfrm>
           <a:prstGeom prst="rect">
@@ -10498,13 +10813,13 @@
       </p:sp>
       <p:sp>
         <p:nvSpPr>
-          <p:cNvPr id="99" name="Shape 97"/>
-          <p:cNvSpPr/>
-          <p:nvPr/>
-        </p:nvSpPr>
-        <p:spPr>
-          <a:xfrm>
-            <a:off x="2846328" y="1563624"/>
+          <p:cNvPr id="110" name="Shape 108"/>
+          <p:cNvSpPr/>
+          <p:nvPr/>
+        </p:nvSpPr>
+        <p:spPr>
+          <a:xfrm>
+            <a:off x="2846328" y="1837944"/>
             <a:ext cx="4572" cy="256032"/>
           </a:xfrm>
           <a:prstGeom prst="rect">
@@ -10518,13 +10833,13 @@
       </p:sp>
       <p:sp>
         <p:nvSpPr>
-          <p:cNvPr id="100" name="Shape 98"/>
-          <p:cNvSpPr/>
-          <p:nvPr/>
-        </p:nvSpPr>
-        <p:spPr>
-          <a:xfrm>
-            <a:off x="2851633" y="1563624"/>
+          <p:cNvPr id="111" name="Shape 109"/>
+          <p:cNvSpPr/>
+          <p:nvPr/>
+        </p:nvSpPr>
+        <p:spPr>
+          <a:xfrm>
+            <a:off x="2851633" y="1837944"/>
             <a:ext cx="23770" cy="256032"/>
           </a:xfrm>
           <a:prstGeom prst="rect">
@@ -10538,13 +10853,13 @@
       </p:sp>
       <p:sp>
         <p:nvSpPr>
-          <p:cNvPr id="101" name="Shape 99"/>
-          <p:cNvSpPr/>
-          <p:nvPr/>
-        </p:nvSpPr>
-        <p:spPr>
-          <a:xfrm>
-            <a:off x="2877667" y="1563624"/>
+          <p:cNvPr id="112" name="Shape 110"/>
+          <p:cNvSpPr/>
+          <p:nvPr/>
+        </p:nvSpPr>
+        <p:spPr>
+          <a:xfrm>
+            <a:off x="2877667" y="1837944"/>
             <a:ext cx="4572" cy="256032"/>
           </a:xfrm>
           <a:prstGeom prst="rect">
@@ -10558,13 +10873,13 @@
       </p:sp>
       <p:sp>
         <p:nvSpPr>
-          <p:cNvPr id="102" name="Shape 100"/>
-          <p:cNvSpPr/>
-          <p:nvPr/>
-        </p:nvSpPr>
-        <p:spPr>
-          <a:xfrm>
-            <a:off x="2880427" y="1563624"/>
+          <p:cNvPr id="113" name="Shape 111"/>
+          <p:cNvSpPr/>
+          <p:nvPr/>
+        </p:nvSpPr>
+        <p:spPr>
+          <a:xfrm>
+            <a:off x="2880427" y="1837944"/>
             <a:ext cx="4572" cy="256032"/>
           </a:xfrm>
           <a:prstGeom prst="rect">
@@ -10578,13 +10893,13 @@
       </p:sp>
       <p:sp>
         <p:nvSpPr>
-          <p:cNvPr id="103" name="Shape 101"/>
-          <p:cNvSpPr/>
-          <p:nvPr/>
-        </p:nvSpPr>
-        <p:spPr>
-          <a:xfrm>
-            <a:off x="2883539" y="1563624"/>
+          <p:cNvPr id="114" name="Shape 112"/>
+          <p:cNvSpPr/>
+          <p:nvPr/>
+        </p:nvSpPr>
+        <p:spPr>
+          <a:xfrm>
+            <a:off x="2883539" y="1837944"/>
             <a:ext cx="10824" cy="256032"/>
           </a:xfrm>
           <a:prstGeom prst="rect">
@@ -10598,13 +10913,13 @@
       </p:sp>
       <p:sp>
         <p:nvSpPr>
-          <p:cNvPr id="104" name="Shape 102"/>
-          <p:cNvSpPr/>
-          <p:nvPr/>
-        </p:nvSpPr>
-        <p:spPr>
-          <a:xfrm>
-            <a:off x="2897051" y="1563624"/>
+          <p:cNvPr id="115" name="Shape 113"/>
+          <p:cNvSpPr/>
+          <p:nvPr/>
+        </p:nvSpPr>
+        <p:spPr>
+          <a:xfrm>
+            <a:off x="2897051" y="1837944"/>
             <a:ext cx="4572" cy="256032"/>
           </a:xfrm>
           <a:prstGeom prst="rect">
@@ -10618,13 +10933,13 @@
       </p:sp>
       <p:sp>
         <p:nvSpPr>
-          <p:cNvPr id="105" name="Shape 103"/>
-          <p:cNvSpPr/>
-          <p:nvPr/>
-        </p:nvSpPr>
-        <p:spPr>
-          <a:xfrm>
-            <a:off x="2903065" y="1563624"/>
+          <p:cNvPr id="116" name="Shape 114"/>
+          <p:cNvSpPr/>
+          <p:nvPr/>
+        </p:nvSpPr>
+        <p:spPr>
+          <a:xfrm>
+            <a:off x="2903065" y="1837944"/>
             <a:ext cx="10187" cy="256032"/>
           </a:xfrm>
           <a:prstGeom prst="rect">
@@ -10638,13 +10953,13 @@
       </p:sp>
       <p:sp>
         <p:nvSpPr>
-          <p:cNvPr id="106" name="Shape 104"/>
-          <p:cNvSpPr/>
-          <p:nvPr/>
-        </p:nvSpPr>
-        <p:spPr>
-          <a:xfrm>
-            <a:off x="2915304" y="1563624"/>
+          <p:cNvPr id="117" name="Shape 115"/>
+          <p:cNvSpPr/>
+          <p:nvPr/>
+        </p:nvSpPr>
+        <p:spPr>
+          <a:xfrm>
+            <a:off x="2915304" y="1837944"/>
             <a:ext cx="4572" cy="256032"/>
           </a:xfrm>
           <a:prstGeom prst="rect">
@@ -10658,13 +10973,13 @@
       </p:sp>
       <p:sp>
         <p:nvSpPr>
-          <p:cNvPr id="107" name="Shape 105"/>
-          <p:cNvSpPr/>
-          <p:nvPr/>
-        </p:nvSpPr>
-        <p:spPr>
-          <a:xfrm>
-            <a:off x="2921105" y="1563624"/>
+          <p:cNvPr id="118" name="Shape 116"/>
+          <p:cNvSpPr/>
+          <p:nvPr/>
+        </p:nvSpPr>
+        <p:spPr>
+          <a:xfrm>
+            <a:off x="2921105" y="1837944"/>
             <a:ext cx="4572" cy="256032"/>
           </a:xfrm>
           <a:prstGeom prst="rect">
@@ -10678,13 +10993,13 @@
       </p:sp>
       <p:sp>
         <p:nvSpPr>
-          <p:cNvPr id="108" name="Shape 106"/>
-          <p:cNvSpPr/>
-          <p:nvPr/>
-        </p:nvSpPr>
-        <p:spPr>
-          <a:xfrm>
-            <a:off x="2923651" y="1563624"/>
+          <p:cNvPr id="119" name="Shape 117"/>
+          <p:cNvSpPr/>
+          <p:nvPr/>
+        </p:nvSpPr>
+        <p:spPr>
+          <a:xfrm>
+            <a:off x="2923651" y="1837944"/>
             <a:ext cx="13583" cy="256032"/>
           </a:xfrm>
           <a:prstGeom prst="rect">
@@ -10698,13 +11013,13 @@
       </p:sp>
       <p:sp>
         <p:nvSpPr>
-          <p:cNvPr id="109" name="Shape 107"/>
-          <p:cNvSpPr/>
-          <p:nvPr/>
-        </p:nvSpPr>
-        <p:spPr>
-          <a:xfrm>
-            <a:off x="2937800" y="1563624"/>
+          <p:cNvPr id="120" name="Shape 118"/>
+          <p:cNvSpPr/>
+          <p:nvPr/>
+        </p:nvSpPr>
+        <p:spPr>
+          <a:xfrm>
+            <a:off x="2937800" y="1837944"/>
             <a:ext cx="7428" cy="256032"/>
           </a:xfrm>
           <a:prstGeom prst="rect">
@@ -10718,13 +11033,13 @@
       </p:sp>
       <p:sp>
         <p:nvSpPr>
-          <p:cNvPr id="110" name="Shape 108"/>
-          <p:cNvSpPr/>
-          <p:nvPr/>
-        </p:nvSpPr>
-        <p:spPr>
-          <a:xfrm>
-            <a:off x="2948129" y="1563624"/>
+          <p:cNvPr id="121" name="Shape 119"/>
+          <p:cNvSpPr/>
+          <p:nvPr/>
+        </p:nvSpPr>
+        <p:spPr>
+          <a:xfrm>
+            <a:off x="2948129" y="1837944"/>
             <a:ext cx="4572" cy="256032"/>
           </a:xfrm>
           <a:prstGeom prst="rect">
@@ -10738,13 +11053,13 @@
       </p:sp>
       <p:sp>
         <p:nvSpPr>
-          <p:cNvPr id="111" name="Shape 109"/>
-          <p:cNvSpPr/>
-          <p:nvPr/>
-        </p:nvSpPr>
-        <p:spPr>
-          <a:xfrm>
-            <a:off x="2950888" y="1563624"/>
+          <p:cNvPr id="122" name="Shape 120"/>
+          <p:cNvSpPr/>
+          <p:nvPr/>
+        </p:nvSpPr>
+        <p:spPr>
+          <a:xfrm>
+            <a:off x="2950888" y="1837944"/>
             <a:ext cx="4572" cy="256032"/>
           </a:xfrm>
           <a:prstGeom prst="rect">
@@ -10758,13 +11073,13 @@
       </p:sp>
       <p:sp>
         <p:nvSpPr>
-          <p:cNvPr id="112" name="Shape 110"/>
-          <p:cNvSpPr/>
-          <p:nvPr/>
-        </p:nvSpPr>
-        <p:spPr>
-          <a:xfrm>
-            <a:off x="2954001" y="1563624"/>
+          <p:cNvPr id="123" name="Shape 121"/>
+          <p:cNvSpPr/>
+          <p:nvPr/>
+        </p:nvSpPr>
+        <p:spPr>
+          <a:xfrm>
+            <a:off x="2954001" y="1837944"/>
             <a:ext cx="10187" cy="256032"/>
           </a:xfrm>
           <a:prstGeom prst="rect">
@@ -10778,13 +11093,13 @@
       </p:sp>
       <p:sp>
         <p:nvSpPr>
-          <p:cNvPr id="113" name="Shape 111"/>
-          <p:cNvSpPr/>
-          <p:nvPr/>
-        </p:nvSpPr>
-        <p:spPr>
-          <a:xfrm>
-            <a:off x="2966523" y="1563624"/>
+          <p:cNvPr id="124" name="Shape 122"/>
+          <p:cNvSpPr/>
+          <p:nvPr/>
+        </p:nvSpPr>
+        <p:spPr>
+          <a:xfrm>
+            <a:off x="2966523" y="1837944"/>
             <a:ext cx="4572" cy="256032"/>
           </a:xfrm>
           <a:prstGeom prst="rect">
@@ -10798,13 +11113,13 @@
       </p:sp>
       <p:sp>
         <p:nvSpPr>
-          <p:cNvPr id="114" name="Shape 112"/>
-          <p:cNvSpPr/>
-          <p:nvPr/>
-        </p:nvSpPr>
-        <p:spPr>
-          <a:xfrm>
-            <a:off x="2972111" y="1563624"/>
+          <p:cNvPr id="125" name="Shape 123"/>
+          <p:cNvSpPr/>
+          <p:nvPr/>
+        </p:nvSpPr>
+        <p:spPr>
+          <a:xfrm>
+            <a:off x="2972111" y="1837944"/>
             <a:ext cx="9975" cy="256032"/>
           </a:xfrm>
           <a:prstGeom prst="rect">
@@ -10818,13 +11133,13 @@
       </p:sp>
       <p:sp>
         <p:nvSpPr>
-          <p:cNvPr id="115" name="Shape 113"/>
-          <p:cNvSpPr/>
-          <p:nvPr/>
-        </p:nvSpPr>
-        <p:spPr>
-          <a:xfrm>
-            <a:off x="2984280" y="1563624"/>
+          <p:cNvPr id="126" name="Shape 124"/>
+          <p:cNvSpPr/>
+          <p:nvPr/>
+        </p:nvSpPr>
+        <p:spPr>
+          <a:xfrm>
+            <a:off x="2984280" y="1837944"/>
             <a:ext cx="4572" cy="256032"/>
           </a:xfrm>
           <a:prstGeom prst="rect">
@@ -10838,13 +11153,13 @@
       </p:sp>
       <p:sp>
         <p:nvSpPr>
-          <p:cNvPr id="116" name="Shape 114"/>
-          <p:cNvSpPr/>
-          <p:nvPr/>
-        </p:nvSpPr>
-        <p:spPr>
-          <a:xfrm>
-            <a:off x="2989939" y="1563624"/>
+          <p:cNvPr id="127" name="Shape 125"/>
+          <p:cNvSpPr/>
+          <p:nvPr/>
+        </p:nvSpPr>
+        <p:spPr>
+          <a:xfrm>
+            <a:off x="2989939" y="1837944"/>
             <a:ext cx="23841" cy="256032"/>
           </a:xfrm>
           <a:prstGeom prst="rect">
@@ -10858,13 +11173,13 @@
       </p:sp>
       <p:sp>
         <p:nvSpPr>
-          <p:cNvPr id="117" name="Shape 115"/>
-          <p:cNvSpPr/>
-          <p:nvPr/>
-        </p:nvSpPr>
-        <p:spPr>
-          <a:xfrm>
-            <a:off x="3016751" y="1563624"/>
+          <p:cNvPr id="128" name="Shape 126"/>
+          <p:cNvSpPr/>
+          <p:nvPr/>
+        </p:nvSpPr>
+        <p:spPr>
+          <a:xfrm>
+            <a:off x="3016751" y="1837944"/>
             <a:ext cx="4572" cy="256032"/>
           </a:xfrm>
           <a:prstGeom prst="rect">
@@ -10878,13 +11193,13 @@
       </p:sp>
       <p:sp>
         <p:nvSpPr>
-          <p:cNvPr id="118" name="Shape 116"/>
-          <p:cNvSpPr/>
-          <p:nvPr/>
-        </p:nvSpPr>
-        <p:spPr>
-          <a:xfrm>
-            <a:off x="3021916" y="1563624"/>
+          <p:cNvPr id="129" name="Shape 127"/>
+          <p:cNvSpPr/>
+          <p:nvPr/>
+        </p:nvSpPr>
+        <p:spPr>
+          <a:xfrm>
+            <a:off x="3021916" y="1837944"/>
             <a:ext cx="9904" cy="256032"/>
           </a:xfrm>
           <a:prstGeom prst="rect">
@@ -10898,13 +11213,13 @@
       </p:sp>
       <p:sp>
         <p:nvSpPr>
-          <p:cNvPr id="119" name="Shape 117"/>
-          <p:cNvSpPr/>
-          <p:nvPr/>
-        </p:nvSpPr>
-        <p:spPr>
-          <a:xfrm>
-            <a:off x="3034013" y="1563624"/>
+          <p:cNvPr id="130" name="Shape 128"/>
+          <p:cNvSpPr/>
+          <p:nvPr/>
+        </p:nvSpPr>
+        <p:spPr>
+          <a:xfrm>
+            <a:off x="3034013" y="1837944"/>
             <a:ext cx="4572" cy="256032"/>
           </a:xfrm>
           <a:prstGeom prst="rect">
@@ -10918,13 +11233,13 @@
       </p:sp>
       <p:sp>
         <p:nvSpPr>
-          <p:cNvPr id="120" name="Shape 118"/>
-          <p:cNvSpPr/>
-          <p:nvPr/>
-        </p:nvSpPr>
-        <p:spPr>
-          <a:xfrm>
-            <a:off x="3039673" y="1563624"/>
+          <p:cNvPr id="131" name="Shape 129"/>
+          <p:cNvSpPr/>
+          <p:nvPr/>
+        </p:nvSpPr>
+        <p:spPr>
+          <a:xfrm>
+            <a:off x="3039673" y="1837944"/>
             <a:ext cx="9551" cy="256032"/>
           </a:xfrm>
           <a:prstGeom prst="rect">
@@ -10938,13 +11253,13 @@
       </p:sp>
       <p:sp>
         <p:nvSpPr>
-          <p:cNvPr id="121" name="Shape 119"/>
-          <p:cNvSpPr/>
-          <p:nvPr/>
-        </p:nvSpPr>
-        <p:spPr>
-          <a:xfrm>
-            <a:off x="3052407" y="1563624"/>
+          <p:cNvPr id="132" name="Shape 130"/>
+          <p:cNvSpPr/>
+          <p:nvPr/>
+        </p:nvSpPr>
+        <p:spPr>
+          <a:xfrm>
+            <a:off x="3052407" y="1837944"/>
             <a:ext cx="4572" cy="256032"/>
           </a:xfrm>
           <a:prstGeom prst="rect">
@@ -10958,13 +11273,13 @@
       </p:sp>
       <p:sp>
         <p:nvSpPr>
-          <p:cNvPr id="122" name="Shape 120"/>
-          <p:cNvSpPr/>
-          <p:nvPr/>
-        </p:nvSpPr>
-        <p:spPr>
-          <a:xfrm>
-            <a:off x="3057642" y="1563624"/>
+          <p:cNvPr id="133" name="Shape 131"/>
+          <p:cNvSpPr/>
+          <p:nvPr/>
+        </p:nvSpPr>
+        <p:spPr>
+          <a:xfrm>
+            <a:off x="3057642" y="1837944"/>
             <a:ext cx="21153" cy="256032"/>
           </a:xfrm>
           <a:prstGeom prst="rect">
@@ -10978,13 +11293,13 @@
       </p:sp>
       <p:sp>
         <p:nvSpPr>
-          <p:cNvPr id="123" name="Shape 121"/>
-          <p:cNvSpPr/>
-          <p:nvPr/>
-        </p:nvSpPr>
-        <p:spPr>
-          <a:xfrm>
-            <a:off x="3080987" y="1563624"/>
+          <p:cNvPr id="134" name="Shape 132"/>
+          <p:cNvSpPr/>
+          <p:nvPr/>
+        </p:nvSpPr>
+        <p:spPr>
+          <a:xfrm>
+            <a:off x="3080987" y="1837944"/>
             <a:ext cx="4572" cy="256032"/>
           </a:xfrm>
           <a:prstGeom prst="rect">
@@ -10998,13 +11313,13 @@
       </p:sp>
       <p:sp>
         <p:nvSpPr>
-          <p:cNvPr id="124" name="Shape 122"/>
-          <p:cNvSpPr/>
-          <p:nvPr/>
-        </p:nvSpPr>
-        <p:spPr>
-          <a:xfrm>
-            <a:off x="3086435" y="1563624"/>
+          <p:cNvPr id="135" name="Shape 133"/>
+          <p:cNvSpPr/>
+          <p:nvPr/>
+        </p:nvSpPr>
+        <p:spPr>
+          <a:xfrm>
+            <a:off x="3086435" y="1837944"/>
             <a:ext cx="9197" cy="256032"/>
           </a:xfrm>
           <a:prstGeom prst="rect">
@@ -11018,13 +11333,13 @@
       </p:sp>
       <p:sp>
         <p:nvSpPr>
-          <p:cNvPr id="125" name="Shape 123"/>
-          <p:cNvSpPr/>
-          <p:nvPr/>
-        </p:nvSpPr>
-        <p:spPr>
-          <a:xfrm>
-            <a:off x="3096410" y="1563624"/>
+          <p:cNvPr id="136" name="Shape 134"/>
+          <p:cNvSpPr/>
+          <p:nvPr/>
+        </p:nvSpPr>
+        <p:spPr>
+          <a:xfrm>
+            <a:off x="3096410" y="1837944"/>
             <a:ext cx="4572" cy="256032"/>
           </a:xfrm>
           <a:prstGeom prst="rect">
@@ -11038,13 +11353,13 @@
       </p:sp>
       <p:sp>
         <p:nvSpPr>
-          <p:cNvPr id="126" name="Shape 124"/>
-          <p:cNvSpPr/>
-          <p:nvPr/>
-        </p:nvSpPr>
-        <p:spPr>
-          <a:xfrm>
-            <a:off x="3102564" y="1563624"/>
+          <p:cNvPr id="137" name="Shape 135"/>
+          <p:cNvSpPr/>
+          <p:nvPr/>
+        </p:nvSpPr>
+        <p:spPr>
+          <a:xfrm>
+            <a:off x="3102564" y="1837944"/>
             <a:ext cx="8560" cy="256032"/>
           </a:xfrm>
           <a:prstGeom prst="rect">
@@ -11058,13 +11373,13 @@
       </p:sp>
       <p:sp>
         <p:nvSpPr>
-          <p:cNvPr id="127" name="Shape 125"/>
-          <p:cNvSpPr/>
-          <p:nvPr/>
-        </p:nvSpPr>
-        <p:spPr>
-          <a:xfrm>
-            <a:off x="3111832" y="1563624"/>
+          <p:cNvPr id="138" name="Shape 136"/>
+          <p:cNvSpPr/>
+          <p:nvPr/>
+        </p:nvSpPr>
+        <p:spPr>
+          <a:xfrm>
+            <a:off x="3111832" y="1837944"/>
             <a:ext cx="4572" cy="256032"/>
           </a:xfrm>
           <a:prstGeom prst="rect">
@@ -11078,13 +11393,13 @@
       </p:sp>
       <p:sp>
         <p:nvSpPr>
-          <p:cNvPr id="128" name="Shape 126"/>
-          <p:cNvSpPr/>
-          <p:nvPr/>
-        </p:nvSpPr>
-        <p:spPr>
-          <a:xfrm>
-            <a:off x="3117562" y="1563624"/>
+          <p:cNvPr id="139" name="Shape 137"/>
+          <p:cNvSpPr/>
+          <p:nvPr/>
+        </p:nvSpPr>
+        <p:spPr>
+          <a:xfrm>
+            <a:off x="3117562" y="1837944"/>
             <a:ext cx="35089" cy="256032"/>
           </a:xfrm>
           <a:prstGeom prst="rect">
@@ -11098,13 +11413,13 @@
       </p:sp>
       <p:sp>
         <p:nvSpPr>
-          <p:cNvPr id="129" name="Shape 127"/>
-          <p:cNvSpPr/>
-          <p:nvPr/>
-        </p:nvSpPr>
-        <p:spPr>
-          <a:xfrm>
-            <a:off x="3154067" y="1563624"/>
+          <p:cNvPr id="140" name="Shape 138"/>
+          <p:cNvSpPr/>
+          <p:nvPr/>
+        </p:nvSpPr>
+        <p:spPr>
+          <a:xfrm>
+            <a:off x="3154067" y="1837944"/>
             <a:ext cx="4740" cy="256032"/>
           </a:xfrm>
           <a:prstGeom prst="rect">
@@ -11118,13 +11433,13 @@
       </p:sp>
       <p:sp>
         <p:nvSpPr>
-          <p:cNvPr id="130" name="Shape 128"/>
-          <p:cNvSpPr/>
-          <p:nvPr/>
-        </p:nvSpPr>
-        <p:spPr>
-          <a:xfrm>
-            <a:off x="3160292" y="1563624"/>
+          <p:cNvPr id="141" name="Shape 139"/>
+          <p:cNvSpPr/>
+          <p:nvPr/>
+        </p:nvSpPr>
+        <p:spPr>
+          <a:xfrm>
+            <a:off x="3160292" y="1837944"/>
             <a:ext cx="4572" cy="256032"/>
           </a:xfrm>
           <a:prstGeom prst="rect">
@@ -11138,13 +11453,13 @@
       </p:sp>
       <p:sp>
         <p:nvSpPr>
-          <p:cNvPr id="131" name="Shape 129"/>
-          <p:cNvSpPr/>
-          <p:nvPr/>
-        </p:nvSpPr>
-        <p:spPr>
-          <a:xfrm>
-            <a:off x="3162697" y="1563624"/>
+          <p:cNvPr id="142" name="Shape 140"/>
+          <p:cNvSpPr/>
+          <p:nvPr/>
+        </p:nvSpPr>
+        <p:spPr>
+          <a:xfrm>
+            <a:off x="3162697" y="1837944"/>
             <a:ext cx="10258" cy="256032"/>
           </a:xfrm>
           <a:prstGeom prst="rect">
@@ -11158,13 +11473,13 @@
       </p:sp>
       <p:sp>
         <p:nvSpPr>
-          <p:cNvPr id="132" name="Shape 130"/>
-          <p:cNvSpPr/>
-          <p:nvPr/>
-        </p:nvSpPr>
-        <p:spPr>
-          <a:xfrm>
-            <a:off x="3173875" y="1563624"/>
+          <p:cNvPr id="143" name="Shape 141"/>
+          <p:cNvSpPr/>
+          <p:nvPr/>
+        </p:nvSpPr>
+        <p:spPr>
+          <a:xfrm>
+            <a:off x="3173875" y="1837944"/>
             <a:ext cx="2551686" cy="256032"/>
           </a:xfrm>
           <a:prstGeom prst="rect">
@@ -11178,13 +11493,13 @@
       </p:sp>
       <p:sp>
         <p:nvSpPr>
-          <p:cNvPr id="133" name="Shape 131"/>
-          <p:cNvSpPr/>
-          <p:nvPr/>
-        </p:nvSpPr>
-        <p:spPr>
-          <a:xfrm>
-            <a:off x="5727896" y="1563624"/>
+          <p:cNvPr id="144" name="Shape 142"/>
+          <p:cNvSpPr/>
+          <p:nvPr/>
+        </p:nvSpPr>
+        <p:spPr>
+          <a:xfrm>
+            <a:off x="5727896" y="1837944"/>
             <a:ext cx="536315" cy="256032"/>
           </a:xfrm>
           <a:prstGeom prst="rect">
@@ -11198,13 +11513,13 @@
       </p:sp>
       <p:sp>
         <p:nvSpPr>
-          <p:cNvPr id="134" name="Shape 132"/>
-          <p:cNvSpPr/>
-          <p:nvPr/>
-        </p:nvSpPr>
-        <p:spPr>
-          <a:xfrm>
-            <a:off x="6266191" y="1563624"/>
+          <p:cNvPr id="145" name="Shape 143"/>
+          <p:cNvSpPr/>
+          <p:nvPr/>
+        </p:nvSpPr>
+        <p:spPr>
+          <a:xfrm>
+            <a:off x="6266191" y="1837944"/>
             <a:ext cx="12663" cy="256032"/>
           </a:xfrm>
           <a:prstGeom prst="rect">
@@ -11218,13 +11533,13 @@
       </p:sp>
       <p:sp>
         <p:nvSpPr>
-          <p:cNvPr id="135" name="Shape 133"/>
-          <p:cNvSpPr/>
-          <p:nvPr/>
-        </p:nvSpPr>
-        <p:spPr>
-          <a:xfrm>
-            <a:off x="6285292" y="1563624"/>
+          <p:cNvPr id="146" name="Shape 144"/>
+          <p:cNvSpPr/>
+          <p:nvPr/>
+        </p:nvSpPr>
+        <p:spPr>
+          <a:xfrm>
+            <a:off x="6285292" y="1837944"/>
             <a:ext cx="4572" cy="256032"/>
           </a:xfrm>
           <a:prstGeom prst="rect">
@@ -11238,13 +11553,13 @@
       </p:sp>
       <p:sp>
         <p:nvSpPr>
-          <p:cNvPr id="136" name="Shape 134"/>
-          <p:cNvSpPr/>
-          <p:nvPr/>
-        </p:nvSpPr>
-        <p:spPr>
-          <a:xfrm>
-            <a:off x="6290103" y="1563624"/>
+          <p:cNvPr id="147" name="Shape 145"/>
+          <p:cNvSpPr/>
+          <p:nvPr/>
+        </p:nvSpPr>
+        <p:spPr>
+          <a:xfrm>
+            <a:off x="6290103" y="1837944"/>
             <a:ext cx="4572" cy="256032"/>
           </a:xfrm>
           <a:prstGeom prst="rect">
@@ -11258,13 +11573,13 @@
       </p:sp>
       <p:sp>
         <p:nvSpPr>
-          <p:cNvPr id="137" name="Shape 135"/>
-          <p:cNvSpPr/>
-          <p:nvPr/>
-        </p:nvSpPr>
-        <p:spPr>
-          <a:xfrm>
-            <a:off x="6292013" y="1563624"/>
+          <p:cNvPr id="148" name="Shape 146"/>
+          <p:cNvSpPr/>
+          <p:nvPr/>
+        </p:nvSpPr>
+        <p:spPr>
+          <a:xfrm>
+            <a:off x="6292013" y="1837944"/>
             <a:ext cx="4572" cy="256032"/>
           </a:xfrm>
           <a:prstGeom prst="rect">
@@ -11278,13 +11593,13 @@
       </p:sp>
       <p:sp>
         <p:nvSpPr>
-          <p:cNvPr id="138" name="Shape 136"/>
-          <p:cNvSpPr/>
-          <p:nvPr/>
-        </p:nvSpPr>
-        <p:spPr>
-          <a:xfrm>
-            <a:off x="6296965" y="1563624"/>
+          <p:cNvPr id="149" name="Shape 147"/>
+          <p:cNvSpPr/>
+          <p:nvPr/>
+        </p:nvSpPr>
+        <p:spPr>
+          <a:xfrm>
+            <a:off x="6296965" y="1837944"/>
             <a:ext cx="8702" cy="256032"/>
           </a:xfrm>
           <a:prstGeom prst="rect">
@@ -11298,13 +11613,13 @@
       </p:sp>
       <p:sp>
         <p:nvSpPr>
-          <p:cNvPr id="139" name="Shape 137"/>
-          <p:cNvSpPr/>
-          <p:nvPr/>
-        </p:nvSpPr>
-        <p:spPr>
-          <a:xfrm>
-            <a:off x="6306657" y="1563624"/>
+          <p:cNvPr id="150" name="Shape 148"/>
+          <p:cNvSpPr/>
+          <p:nvPr/>
+        </p:nvSpPr>
+        <p:spPr>
+          <a:xfrm>
+            <a:off x="6306657" y="1837944"/>
             <a:ext cx="20940" cy="256032"/>
           </a:xfrm>
           <a:prstGeom prst="rect">
@@ -11318,13 +11633,13 @@
       </p:sp>
       <p:sp>
         <p:nvSpPr>
-          <p:cNvPr id="140" name="Shape 138"/>
-          <p:cNvSpPr/>
-          <p:nvPr/>
-        </p:nvSpPr>
-        <p:spPr>
-          <a:xfrm>
-            <a:off x="6328163" y="1563624"/>
+          <p:cNvPr id="151" name="Shape 149"/>
+          <p:cNvSpPr/>
+          <p:nvPr/>
+        </p:nvSpPr>
+        <p:spPr>
+          <a:xfrm>
+            <a:off x="6328163" y="1837944"/>
             <a:ext cx="4572" cy="256032"/>
           </a:xfrm>
           <a:prstGeom prst="rect">
@@ -11338,13 +11653,13 @@
       </p:sp>
       <p:sp>
         <p:nvSpPr>
-          <p:cNvPr id="141" name="Shape 139"/>
-          <p:cNvSpPr/>
-          <p:nvPr/>
-        </p:nvSpPr>
-        <p:spPr>
-          <a:xfrm>
-            <a:off x="6330073" y="1563624"/>
+          <p:cNvPr id="152" name="Shape 150"/>
+          <p:cNvSpPr/>
+          <p:nvPr/>
+        </p:nvSpPr>
+        <p:spPr>
+          <a:xfrm>
+            <a:off x="6330073" y="1837944"/>
             <a:ext cx="4572" cy="256032"/>
           </a:xfrm>
           <a:prstGeom prst="rect">
@@ -11358,13 +11673,13 @@
       </p:sp>
       <p:sp>
         <p:nvSpPr>
-          <p:cNvPr id="142" name="Shape 140"/>
-          <p:cNvSpPr/>
-          <p:nvPr/>
-        </p:nvSpPr>
-        <p:spPr>
-          <a:xfrm>
-            <a:off x="6335308" y="1563624"/>
+          <p:cNvPr id="153" name="Shape 151"/>
+          <p:cNvSpPr/>
+          <p:nvPr/>
+        </p:nvSpPr>
+        <p:spPr>
+          <a:xfrm>
+            <a:off x="6335308" y="1837944"/>
             <a:ext cx="40466" cy="256032"/>
           </a:xfrm>
           <a:prstGeom prst="rect">
@@ -11378,13 +11693,13 @@
       </p:sp>
       <p:sp>
         <p:nvSpPr>
-          <p:cNvPr id="143" name="Shape 141"/>
-          <p:cNvSpPr/>
-          <p:nvPr/>
-        </p:nvSpPr>
-        <p:spPr>
-          <a:xfrm>
-            <a:off x="6379029" y="1563624"/>
+          <p:cNvPr id="154" name="Shape 152"/>
+          <p:cNvSpPr/>
+          <p:nvPr/>
+        </p:nvSpPr>
+        <p:spPr>
+          <a:xfrm>
+            <a:off x="6379029" y="1837944"/>
             <a:ext cx="4598" cy="256032"/>
           </a:xfrm>
           <a:prstGeom prst="rect">
@@ -11398,13 +11713,13 @@
       </p:sp>
       <p:sp>
         <p:nvSpPr>
-          <p:cNvPr id="144" name="Shape 142"/>
-          <p:cNvSpPr/>
-          <p:nvPr/>
-        </p:nvSpPr>
-        <p:spPr>
-          <a:xfrm>
-            <a:off x="6385396" y="1563624"/>
+          <p:cNvPr id="155" name="Shape 153"/>
+          <p:cNvSpPr/>
+          <p:nvPr/>
+        </p:nvSpPr>
+        <p:spPr>
+          <a:xfrm>
+            <a:off x="6385396" y="1837944"/>
             <a:ext cx="4572" cy="256032"/>
           </a:xfrm>
           <a:prstGeom prst="rect">
@@ -11418,13 +11733,13 @@
       </p:sp>
       <p:sp>
         <p:nvSpPr>
-          <p:cNvPr id="145" name="Shape 143"/>
-          <p:cNvSpPr/>
-          <p:nvPr/>
-        </p:nvSpPr>
-        <p:spPr>
-          <a:xfrm>
-            <a:off x="6387306" y="1563624"/>
+          <p:cNvPr id="156" name="Shape 154"/>
+          <p:cNvSpPr/>
+          <p:nvPr/>
+        </p:nvSpPr>
+        <p:spPr>
+          <a:xfrm>
+            <a:off x="6387306" y="1837944"/>
             <a:ext cx="4572" cy="256032"/>
           </a:xfrm>
           <a:prstGeom prst="rect">
@@ -11438,13 +11753,13 @@
       </p:sp>
       <p:sp>
         <p:nvSpPr>
-          <p:cNvPr id="146" name="Shape 144"/>
-          <p:cNvSpPr/>
-          <p:nvPr/>
-        </p:nvSpPr>
-        <p:spPr>
-          <a:xfrm>
-            <a:off x="6389994" y="1563624"/>
+          <p:cNvPr id="157" name="Shape 155"/>
+          <p:cNvSpPr/>
+          <p:nvPr/>
+        </p:nvSpPr>
+        <p:spPr>
+          <a:xfrm>
+            <a:off x="6389994" y="1837944"/>
             <a:ext cx="4572" cy="256032"/>
           </a:xfrm>
           <a:prstGeom prst="rect">
@@ -11458,13 +11773,13 @@
       </p:sp>
       <p:sp>
         <p:nvSpPr>
-          <p:cNvPr id="147" name="Shape 145"/>
-          <p:cNvSpPr/>
-          <p:nvPr/>
-        </p:nvSpPr>
-        <p:spPr>
-          <a:xfrm>
-            <a:off x="6392046" y="1563624"/>
+          <p:cNvPr id="158" name="Shape 156"/>
+          <p:cNvSpPr/>
+          <p:nvPr/>
+        </p:nvSpPr>
+        <p:spPr>
+          <a:xfrm>
+            <a:off x="6392046" y="1837944"/>
             <a:ext cx="12522" cy="256032"/>
           </a:xfrm>
           <a:prstGeom prst="rect">
@@ -11478,13 +11793,13 @@
       </p:sp>
       <p:sp>
         <p:nvSpPr>
-          <p:cNvPr id="148" name="Shape 146"/>
-          <p:cNvSpPr/>
-          <p:nvPr/>
-        </p:nvSpPr>
-        <p:spPr>
-          <a:xfrm>
-            <a:off x="6411430" y="1563624"/>
+          <p:cNvPr id="159" name="Shape 157"/>
+          <p:cNvSpPr/>
+          <p:nvPr/>
+        </p:nvSpPr>
+        <p:spPr>
+          <a:xfrm>
+            <a:off x="6411430" y="1837944"/>
             <a:ext cx="4572" cy="256032"/>
           </a:xfrm>
           <a:prstGeom prst="rect">
@@ -11498,13 +11813,13 @@
       </p:sp>
       <p:sp>
         <p:nvSpPr>
-          <p:cNvPr id="149" name="Shape 147"/>
-          <p:cNvSpPr/>
-          <p:nvPr/>
-        </p:nvSpPr>
-        <p:spPr>
-          <a:xfrm>
-            <a:off x="6415108" y="1563624"/>
+          <p:cNvPr id="160" name="Shape 158"/>
+          <p:cNvSpPr/>
+          <p:nvPr/>
+        </p:nvSpPr>
+        <p:spPr>
+          <a:xfrm>
+            <a:off x="6415108" y="1837944"/>
             <a:ext cx="4572" cy="256032"/>
           </a:xfrm>
           <a:prstGeom prst="rect">
@@ -11518,13 +11833,13 @@
       </p:sp>
       <p:sp>
         <p:nvSpPr>
-          <p:cNvPr id="150" name="Shape 148"/>
-          <p:cNvSpPr/>
-          <p:nvPr/>
-        </p:nvSpPr>
-        <p:spPr>
-          <a:xfrm>
-            <a:off x="6416806" y="1563624"/>
+          <p:cNvPr id="161" name="Shape 159"/>
+          <p:cNvSpPr/>
+          <p:nvPr/>
+        </p:nvSpPr>
+        <p:spPr>
+          <a:xfrm>
+            <a:off x="6416806" y="1837944"/>
             <a:ext cx="4572" cy="256032"/>
           </a:xfrm>
           <a:prstGeom prst="rect">
@@ -11538,13 +11853,13 @@
       </p:sp>
       <p:sp>
         <p:nvSpPr>
-          <p:cNvPr id="151" name="Shape 149"/>
-          <p:cNvSpPr/>
-          <p:nvPr/>
-        </p:nvSpPr>
-        <p:spPr>
-          <a:xfrm>
-            <a:off x="6419495" y="1563624"/>
+          <p:cNvPr id="162" name="Shape 160"/>
+          <p:cNvSpPr/>
+          <p:nvPr/>
+        </p:nvSpPr>
+        <p:spPr>
+          <a:xfrm>
+            <a:off x="6419495" y="1837944"/>
             <a:ext cx="4572" cy="256032"/>
           </a:xfrm>
           <a:prstGeom prst="rect">
@@ -11558,13 +11873,13 @@
       </p:sp>
       <p:sp>
         <p:nvSpPr>
-          <p:cNvPr id="152" name="Shape 150"/>
-          <p:cNvSpPr/>
-          <p:nvPr/>
-        </p:nvSpPr>
-        <p:spPr>
-          <a:xfrm>
-            <a:off x="6421546" y="1563624"/>
+          <p:cNvPr id="163" name="Shape 161"/>
+          <p:cNvSpPr/>
+          <p:nvPr/>
+        </p:nvSpPr>
+        <p:spPr>
+          <a:xfrm>
+            <a:off x="6421546" y="1837944"/>
             <a:ext cx="12451" cy="256032"/>
           </a:xfrm>
           <a:prstGeom prst="rect">
@@ -11578,13 +11893,13 @@
       </p:sp>
       <p:sp>
         <p:nvSpPr>
-          <p:cNvPr id="153" name="Shape 151"/>
-          <p:cNvSpPr/>
-          <p:nvPr/>
-        </p:nvSpPr>
-        <p:spPr>
-          <a:xfrm>
-            <a:off x="6435554" y="1563624"/>
+          <p:cNvPr id="164" name="Shape 162"/>
+          <p:cNvSpPr/>
+          <p:nvPr/>
+        </p:nvSpPr>
+        <p:spPr>
+          <a:xfrm>
+            <a:off x="6435554" y="1837944"/>
             <a:ext cx="21153" cy="256032"/>
           </a:xfrm>
           <a:prstGeom prst="rect">
@@ -11598,13 +11913,13 @@
       </p:sp>
       <p:sp>
         <p:nvSpPr>
-          <p:cNvPr id="154" name="Shape 152"/>
-          <p:cNvSpPr/>
-          <p:nvPr/>
-        </p:nvSpPr>
-        <p:spPr>
-          <a:xfrm>
-            <a:off x="6457484" y="1563624"/>
+          <p:cNvPr id="165" name="Shape 163"/>
+          <p:cNvSpPr/>
+          <p:nvPr/>
+        </p:nvSpPr>
+        <p:spPr>
+          <a:xfrm>
+            <a:off x="6457484" y="1837944"/>
             <a:ext cx="20162" cy="256032"/>
           </a:xfrm>
           <a:prstGeom prst="rect">
@@ -11618,13 +11933,13 @@
       </p:sp>
       <p:sp>
         <p:nvSpPr>
-          <p:cNvPr id="155" name="Shape 153"/>
-          <p:cNvSpPr/>
-          <p:nvPr/>
-        </p:nvSpPr>
-        <p:spPr>
-          <a:xfrm>
-            <a:off x="6478354" y="1563624"/>
+          <p:cNvPr id="166" name="Shape 164"/>
+          <p:cNvSpPr/>
+          <p:nvPr/>
+        </p:nvSpPr>
+        <p:spPr>
+          <a:xfrm>
+            <a:off x="6478354" y="1837944"/>
             <a:ext cx="13017" cy="256032"/>
           </a:xfrm>
           <a:prstGeom prst="rect">
@@ -11638,13 +11953,13 @@
       </p:sp>
       <p:sp>
         <p:nvSpPr>
-          <p:cNvPr id="156" name="Shape 154"/>
-          <p:cNvSpPr/>
-          <p:nvPr/>
-        </p:nvSpPr>
-        <p:spPr>
-          <a:xfrm>
-            <a:off x="6492149" y="1563624"/>
+          <p:cNvPr id="167" name="Shape 165"/>
+          <p:cNvSpPr/>
+          <p:nvPr/>
+        </p:nvSpPr>
+        <p:spPr>
+          <a:xfrm>
+            <a:off x="6492149" y="1837944"/>
             <a:ext cx="4572" cy="256032"/>
           </a:xfrm>
           <a:prstGeom prst="rect">
@@ -11658,13 +11973,13 @@
       </p:sp>
       <p:sp>
         <p:nvSpPr>
-          <p:cNvPr id="157" name="Shape 155"/>
-          <p:cNvSpPr/>
-          <p:nvPr/>
-        </p:nvSpPr>
-        <p:spPr>
-          <a:xfrm>
-            <a:off x="6493918" y="1563624"/>
+          <p:cNvPr id="168" name="Shape 166"/>
+          <p:cNvSpPr/>
+          <p:nvPr/>
+        </p:nvSpPr>
+        <p:spPr>
+          <a:xfrm>
+            <a:off x="6493918" y="1837944"/>
             <a:ext cx="4740" cy="256032"/>
           </a:xfrm>
           <a:prstGeom prst="rect">
@@ -11678,13 +11993,13 @@
       </p:sp>
       <p:sp>
         <p:nvSpPr>
-          <p:cNvPr id="158" name="Shape 156"/>
-          <p:cNvSpPr/>
-          <p:nvPr/>
-        </p:nvSpPr>
-        <p:spPr>
-          <a:xfrm>
-            <a:off x="6500002" y="1563624"/>
+          <p:cNvPr id="169" name="Shape 167"/>
+          <p:cNvSpPr/>
+          <p:nvPr/>
+        </p:nvSpPr>
+        <p:spPr>
+          <a:xfrm>
+            <a:off x="6500002" y="1837944"/>
             <a:ext cx="12451" cy="256032"/>
           </a:xfrm>
           <a:prstGeom prst="rect">
@@ -11698,13 +12013,13 @@
       </p:sp>
       <p:sp>
         <p:nvSpPr>
-          <p:cNvPr id="159" name="Shape 157"/>
-          <p:cNvSpPr/>
-          <p:nvPr/>
-        </p:nvSpPr>
-        <p:spPr>
-          <a:xfrm>
-            <a:off x="6513160" y="1563624"/>
+          <p:cNvPr id="170" name="Shape 168"/>
+          <p:cNvSpPr/>
+          <p:nvPr/>
+        </p:nvSpPr>
+        <p:spPr>
+          <a:xfrm>
+            <a:off x="6513160" y="1837944"/>
             <a:ext cx="4572" cy="256032"/>
           </a:xfrm>
           <a:prstGeom prst="rect">
@@ -11718,13 +12033,13 @@
       </p:sp>
       <p:sp>
         <p:nvSpPr>
-          <p:cNvPr id="160" name="Shape 158"/>
-          <p:cNvSpPr/>
-          <p:nvPr/>
-        </p:nvSpPr>
-        <p:spPr>
-          <a:xfrm>
-            <a:off x="6514787" y="1563624"/>
+          <p:cNvPr id="171" name="Shape 169"/>
+          <p:cNvSpPr/>
+          <p:nvPr/>
+        </p:nvSpPr>
+        <p:spPr>
+          <a:xfrm>
+            <a:off x="6514787" y="1837944"/>
             <a:ext cx="4598" cy="256032"/>
           </a:xfrm>
           <a:prstGeom prst="rect">
@@ -11738,13 +12053,13 @@
       </p:sp>
       <p:sp>
         <p:nvSpPr>
-          <p:cNvPr id="161" name="Shape 159"/>
-          <p:cNvSpPr/>
-          <p:nvPr/>
-        </p:nvSpPr>
-        <p:spPr>
-          <a:xfrm>
-            <a:off x="6520659" y="1563624"/>
+          <p:cNvPr id="172" name="Shape 170"/>
+          <p:cNvSpPr/>
+          <p:nvPr/>
+        </p:nvSpPr>
+        <p:spPr>
+          <a:xfrm>
+            <a:off x="6520659" y="1837944"/>
             <a:ext cx="12097" cy="256032"/>
           </a:xfrm>
           <a:prstGeom prst="rect">
@@ -11758,13 +12073,13 @@
       </p:sp>
       <p:sp>
         <p:nvSpPr>
-          <p:cNvPr id="162" name="Shape 160"/>
-          <p:cNvSpPr/>
-          <p:nvPr/>
-        </p:nvSpPr>
-        <p:spPr>
-          <a:xfrm>
-            <a:off x="6533323" y="1563624"/>
+          <p:cNvPr id="173" name="Shape 171"/>
+          <p:cNvSpPr/>
+          <p:nvPr/>
+        </p:nvSpPr>
+        <p:spPr>
+          <a:xfrm>
+            <a:off x="6533323" y="1837944"/>
             <a:ext cx="4572" cy="256032"/>
           </a:xfrm>
           <a:prstGeom prst="rect">
@@ -11778,13 +12093,13 @@
       </p:sp>
       <p:sp>
         <p:nvSpPr>
-          <p:cNvPr id="163" name="Shape 161"/>
-          <p:cNvSpPr/>
-          <p:nvPr/>
-        </p:nvSpPr>
-        <p:spPr>
-          <a:xfrm>
-            <a:off x="6535020" y="1563624"/>
+          <p:cNvPr id="174" name="Shape 172"/>
+          <p:cNvSpPr/>
+          <p:nvPr/>
+        </p:nvSpPr>
+        <p:spPr>
+          <a:xfrm>
+            <a:off x="6535020" y="1837944"/>
             <a:ext cx="4572" cy="256032"/>
           </a:xfrm>
           <a:prstGeom prst="rect">
@@ -11798,13 +12113,13 @@
       </p:sp>
       <p:sp>
         <p:nvSpPr>
-          <p:cNvPr id="164" name="Shape 162"/>
-          <p:cNvSpPr/>
-          <p:nvPr/>
-        </p:nvSpPr>
-        <p:spPr>
-          <a:xfrm>
-            <a:off x="6540751" y="1563624"/>
+          <p:cNvPr id="175" name="Shape 173"/>
+          <p:cNvSpPr/>
+          <p:nvPr/>
+        </p:nvSpPr>
+        <p:spPr>
+          <a:xfrm>
+            <a:off x="6540751" y="1837944"/>
             <a:ext cx="4572" cy="256032"/>
           </a:xfrm>
           <a:prstGeom prst="rect">
@@ -11818,13 +12133,13 @@
       </p:sp>
       <p:sp>
         <p:nvSpPr>
-          <p:cNvPr id="165" name="Shape 163"/>
-          <p:cNvSpPr/>
-          <p:nvPr/>
-        </p:nvSpPr>
-        <p:spPr>
-          <a:xfrm>
-            <a:off x="6544076" y="1563624"/>
+          <p:cNvPr id="176" name="Shape 174"/>
+          <p:cNvSpPr/>
+          <p:nvPr/>
+        </p:nvSpPr>
+        <p:spPr>
+          <a:xfrm>
+            <a:off x="6544076" y="1837944"/>
             <a:ext cx="4572" cy="256032"/>
           </a:xfrm>
           <a:prstGeom prst="rect">
@@ -11838,13 +12153,13 @@
       </p:sp>
       <p:sp>
         <p:nvSpPr>
-          <p:cNvPr id="166" name="Shape 164"/>
-          <p:cNvSpPr/>
-          <p:nvPr/>
-        </p:nvSpPr>
-        <p:spPr>
-          <a:xfrm>
-            <a:off x="6546623" y="1563624"/>
+          <p:cNvPr id="177" name="Shape 175"/>
+          <p:cNvSpPr/>
+          <p:nvPr/>
+        </p:nvSpPr>
+        <p:spPr>
+          <a:xfrm>
+            <a:off x="6546623" y="1837944"/>
             <a:ext cx="4572" cy="256032"/>
           </a:xfrm>
           <a:prstGeom prst="rect">
@@ -11858,13 +12173,13 @@
       </p:sp>
       <p:sp>
         <p:nvSpPr>
-          <p:cNvPr id="167" name="Shape 165"/>
-          <p:cNvSpPr/>
-          <p:nvPr/>
-        </p:nvSpPr>
-        <p:spPr>
-          <a:xfrm>
-            <a:off x="6549877" y="1563624"/>
+          <p:cNvPr id="178" name="Shape 176"/>
+          <p:cNvSpPr/>
+          <p:nvPr/>
+        </p:nvSpPr>
+        <p:spPr>
+          <a:xfrm>
+            <a:off x="6549877" y="1837944"/>
             <a:ext cx="4572" cy="256032"/>
           </a:xfrm>
           <a:prstGeom prst="rect">
@@ -11878,13 +12193,13 @@
       </p:sp>
       <p:sp>
         <p:nvSpPr>
-          <p:cNvPr id="168" name="Shape 166"/>
-          <p:cNvSpPr/>
-          <p:nvPr/>
-        </p:nvSpPr>
-        <p:spPr>
-          <a:xfrm>
-            <a:off x="6551716" y="1563624"/>
+          <p:cNvPr id="179" name="Shape 177"/>
+          <p:cNvSpPr/>
+          <p:nvPr/>
+        </p:nvSpPr>
+        <p:spPr>
+          <a:xfrm>
+            <a:off x="6551716" y="1837944"/>
             <a:ext cx="6650" cy="256032"/>
           </a:xfrm>
           <a:prstGeom prst="rect">
@@ -11898,13 +12213,13 @@
       </p:sp>
       <p:sp>
         <p:nvSpPr>
-          <p:cNvPr id="169" name="Shape 167"/>
-          <p:cNvSpPr/>
-          <p:nvPr/>
-        </p:nvSpPr>
-        <p:spPr>
-          <a:xfrm>
-            <a:off x="6561196" y="1563624"/>
+          <p:cNvPr id="180" name="Shape 178"/>
+          <p:cNvSpPr/>
+          <p:nvPr/>
+        </p:nvSpPr>
+        <p:spPr>
+          <a:xfrm>
+            <a:off x="6561196" y="1837944"/>
             <a:ext cx="4572" cy="256032"/>
           </a:xfrm>
           <a:prstGeom prst="rect">
@@ -11918,13 +12233,13 @@
       </p:sp>
       <p:sp>
         <p:nvSpPr>
-          <p:cNvPr id="170" name="Shape 168"/>
-          <p:cNvSpPr/>
-          <p:nvPr/>
-        </p:nvSpPr>
-        <p:spPr>
-          <a:xfrm>
-            <a:off x="6585956" y="1563624"/>
+          <p:cNvPr id="181" name="Shape 179"/>
+          <p:cNvSpPr/>
+          <p:nvPr/>
+        </p:nvSpPr>
+        <p:spPr>
+          <a:xfrm>
+            <a:off x="6585956" y="1837944"/>
             <a:ext cx="4572" cy="256032"/>
           </a:xfrm>
           <a:prstGeom prst="rect">
@@ -11938,13 +12253,13 @@
       </p:sp>
       <p:sp>
         <p:nvSpPr>
-          <p:cNvPr id="171" name="Shape 169"/>
-          <p:cNvSpPr/>
-          <p:nvPr/>
-        </p:nvSpPr>
-        <p:spPr>
-          <a:xfrm>
-            <a:off x="6591050" y="1563624"/>
+          <p:cNvPr id="182" name="Shape 180"/>
+          <p:cNvSpPr/>
+          <p:nvPr/>
+        </p:nvSpPr>
+        <p:spPr>
+          <a:xfrm>
+            <a:off x="6591050" y="1837944"/>
             <a:ext cx="11531" cy="256032"/>
           </a:xfrm>
           <a:prstGeom prst="rect">
@@ -11958,13 +12273,13 @@
       </p:sp>
       <p:sp>
         <p:nvSpPr>
-          <p:cNvPr id="172" name="Shape 170"/>
-          <p:cNvSpPr/>
-          <p:nvPr/>
-        </p:nvSpPr>
-        <p:spPr>
-          <a:xfrm>
-            <a:off x="6603218" y="1563624"/>
+          <p:cNvPr id="183" name="Shape 181"/>
+          <p:cNvSpPr/>
+          <p:nvPr/>
+        </p:nvSpPr>
+        <p:spPr>
+          <a:xfrm>
+            <a:off x="6603218" y="1837944"/>
             <a:ext cx="5306" cy="256032"/>
           </a:xfrm>
           <a:prstGeom prst="rect">
@@ -11978,13 +12293,13 @@
       </p:sp>
       <p:sp>
         <p:nvSpPr>
-          <p:cNvPr id="173" name="Shape 171"/>
-          <p:cNvSpPr/>
-          <p:nvPr/>
-        </p:nvSpPr>
-        <p:spPr>
-          <a:xfrm>
-            <a:off x="6609656" y="1563624"/>
+          <p:cNvPr id="184" name="Shape 182"/>
+          <p:cNvSpPr/>
+          <p:nvPr/>
+        </p:nvSpPr>
+        <p:spPr>
+          <a:xfrm>
+            <a:off x="6609656" y="1837944"/>
             <a:ext cx="15422" cy="256032"/>
           </a:xfrm>
           <a:prstGeom prst="rect">
@@ -11998,13 +12313,13 @@
       </p:sp>
       <p:sp>
         <p:nvSpPr>
-          <p:cNvPr id="174" name="Shape 172"/>
-          <p:cNvSpPr/>
-          <p:nvPr/>
-        </p:nvSpPr>
-        <p:spPr>
-          <a:xfrm>
-            <a:off x="6626069" y="1563624"/>
+          <p:cNvPr id="185" name="Shape 183"/>
+          <p:cNvSpPr/>
+          <p:nvPr/>
+        </p:nvSpPr>
+        <p:spPr>
+          <a:xfrm>
+            <a:off x="6626069" y="1837944"/>
             <a:ext cx="15352" cy="256032"/>
           </a:xfrm>
           <a:prstGeom prst="rect">
@@ -12018,13 +12333,13 @@
       </p:sp>
       <p:sp>
         <p:nvSpPr>
-          <p:cNvPr id="175" name="Shape 173"/>
-          <p:cNvSpPr/>
-          <p:nvPr/>
-        </p:nvSpPr>
-        <p:spPr>
-          <a:xfrm>
-            <a:off x="6642340" y="1563624"/>
+          <p:cNvPr id="186" name="Shape 184"/>
+          <p:cNvSpPr/>
+          <p:nvPr/>
+        </p:nvSpPr>
+        <p:spPr>
+          <a:xfrm>
+            <a:off x="6642340" y="1837944"/>
             <a:ext cx="15493" cy="256032"/>
           </a:xfrm>
           <a:prstGeom prst="rect">
@@ -12038,13 +12353,13 @@
       </p:sp>
       <p:sp>
         <p:nvSpPr>
-          <p:cNvPr id="176" name="Shape 174"/>
-          <p:cNvSpPr/>
-          <p:nvPr/>
-        </p:nvSpPr>
-        <p:spPr>
-          <a:xfrm>
-            <a:off x="6658965" y="1563624"/>
+          <p:cNvPr id="187" name="Shape 185"/>
+          <p:cNvSpPr/>
+          <p:nvPr/>
+        </p:nvSpPr>
+        <p:spPr>
+          <a:xfrm>
+            <a:off x="6658965" y="1837944"/>
             <a:ext cx="15564" cy="256032"/>
           </a:xfrm>
           <a:prstGeom prst="rect">
@@ -12058,13 +12373,13 @@
       </p:sp>
       <p:sp>
         <p:nvSpPr>
-          <p:cNvPr id="177" name="Shape 175"/>
-          <p:cNvSpPr/>
-          <p:nvPr/>
-        </p:nvSpPr>
-        <p:spPr>
-          <a:xfrm>
-            <a:off x="6675590" y="1563624"/>
+          <p:cNvPr id="188" name="Shape 186"/>
+          <p:cNvSpPr/>
+          <p:nvPr/>
+        </p:nvSpPr>
+        <p:spPr>
+          <a:xfrm>
+            <a:off x="6675590" y="1837944"/>
             <a:ext cx="16342" cy="256032"/>
           </a:xfrm>
           <a:prstGeom prst="rect">
@@ -12078,13 +12393,13 @@
       </p:sp>
       <p:sp>
         <p:nvSpPr>
-          <p:cNvPr id="178" name="Shape 176"/>
-          <p:cNvSpPr/>
-          <p:nvPr/>
-        </p:nvSpPr>
-        <p:spPr>
-          <a:xfrm>
-            <a:off x="6692993" y="1563624"/>
+          <p:cNvPr id="189" name="Shape 187"/>
+          <p:cNvSpPr/>
+          <p:nvPr/>
+        </p:nvSpPr>
+        <p:spPr>
+          <a:xfrm>
+            <a:off x="6692993" y="1837944"/>
             <a:ext cx="15635" cy="256032"/>
           </a:xfrm>
           <a:prstGeom prst="rect">
@@ -12098,13 +12413,13 @@
       </p:sp>
       <p:sp>
         <p:nvSpPr>
-          <p:cNvPr id="179" name="Shape 177"/>
-          <p:cNvSpPr/>
-          <p:nvPr/>
-        </p:nvSpPr>
-        <p:spPr>
-          <a:xfrm>
-            <a:off x="6709689" y="1563624"/>
+          <p:cNvPr id="190" name="Shape 188"/>
+          <p:cNvSpPr/>
+          <p:nvPr/>
+        </p:nvSpPr>
+        <p:spPr>
+          <a:xfrm>
+            <a:off x="6709689" y="1837944"/>
             <a:ext cx="15139" cy="256032"/>
           </a:xfrm>
           <a:prstGeom prst="rect">
@@ -12118,13 +12433,13 @@
       </p:sp>
       <p:sp>
         <p:nvSpPr>
-          <p:cNvPr id="180" name="Shape 178"/>
-          <p:cNvSpPr/>
-          <p:nvPr/>
-        </p:nvSpPr>
-        <p:spPr>
-          <a:xfrm>
-            <a:off x="6725748" y="1563624"/>
+          <p:cNvPr id="191" name="Shape 189"/>
+          <p:cNvSpPr/>
+          <p:nvPr/>
+        </p:nvSpPr>
+        <p:spPr>
+          <a:xfrm>
+            <a:off x="6725748" y="1837944"/>
             <a:ext cx="14503" cy="256032"/>
           </a:xfrm>
           <a:prstGeom prst="rect">
@@ -12138,13 +12453,13 @@
       </p:sp>
       <p:sp>
         <p:nvSpPr>
-          <p:cNvPr id="181" name="Shape 179"/>
-          <p:cNvSpPr/>
-          <p:nvPr/>
-        </p:nvSpPr>
-        <p:spPr>
-          <a:xfrm>
-            <a:off x="6742656" y="1563624"/>
+          <p:cNvPr id="192" name="Shape 190"/>
+          <p:cNvSpPr/>
+          <p:nvPr/>
+        </p:nvSpPr>
+        <p:spPr>
+          <a:xfrm>
+            <a:off x="6742656" y="1837944"/>
             <a:ext cx="15705" cy="256032"/>
           </a:xfrm>
           <a:prstGeom prst="rect">
@@ -12158,13 +12473,13 @@
       </p:sp>
       <p:sp>
         <p:nvSpPr>
-          <p:cNvPr id="182" name="Shape 180"/>
-          <p:cNvSpPr/>
-          <p:nvPr/>
-        </p:nvSpPr>
-        <p:spPr>
-          <a:xfrm>
-            <a:off x="6759422" y="1563624"/>
+          <p:cNvPr id="193" name="Shape 191"/>
+          <p:cNvSpPr/>
+          <p:nvPr/>
+        </p:nvSpPr>
+        <p:spPr>
+          <a:xfrm>
+            <a:off x="6759422" y="1837944"/>
             <a:ext cx="15281" cy="256032"/>
           </a:xfrm>
           <a:prstGeom prst="rect">
@@ -12178,13 +12493,13 @@
       </p:sp>
       <p:sp>
         <p:nvSpPr>
-          <p:cNvPr id="183" name="Shape 181"/>
-          <p:cNvSpPr/>
-          <p:nvPr/>
-        </p:nvSpPr>
-        <p:spPr>
-          <a:xfrm>
-            <a:off x="6775623" y="1563624"/>
+          <p:cNvPr id="194" name="Shape 192"/>
+          <p:cNvSpPr/>
+          <p:nvPr/>
+        </p:nvSpPr>
+        <p:spPr>
+          <a:xfrm>
+            <a:off x="6775623" y="1837944"/>
             <a:ext cx="15281" cy="256032"/>
           </a:xfrm>
           <a:prstGeom prst="rect">
@@ -12198,13 +12513,13 @@
       </p:sp>
       <p:sp>
         <p:nvSpPr>
-          <p:cNvPr id="184" name="Shape 182"/>
-          <p:cNvSpPr/>
-          <p:nvPr/>
-        </p:nvSpPr>
-        <p:spPr>
-          <a:xfrm>
-            <a:off x="6791823" y="1563624"/>
+          <p:cNvPr id="195" name="Shape 193"/>
+          <p:cNvSpPr/>
+          <p:nvPr/>
+        </p:nvSpPr>
+        <p:spPr>
+          <a:xfrm>
+            <a:off x="6791823" y="1837944"/>
             <a:ext cx="15069" cy="256032"/>
           </a:xfrm>
           <a:prstGeom prst="rect">
@@ -12218,13 +12533,13 @@
       </p:sp>
       <p:sp>
         <p:nvSpPr>
-          <p:cNvPr id="185" name="Shape 183"/>
-          <p:cNvSpPr/>
-          <p:nvPr/>
-        </p:nvSpPr>
-        <p:spPr>
-          <a:xfrm>
-            <a:off x="6807953" y="1563624"/>
+          <p:cNvPr id="196" name="Shape 194"/>
+          <p:cNvSpPr/>
+          <p:nvPr/>
+        </p:nvSpPr>
+        <p:spPr>
+          <a:xfrm>
+            <a:off x="6807953" y="1837944"/>
             <a:ext cx="15069" cy="256032"/>
           </a:xfrm>
           <a:prstGeom prst="rect">
@@ -12238,13 +12553,13 @@
       </p:sp>
       <p:sp>
         <p:nvSpPr>
-          <p:cNvPr id="186" name="Shape 184"/>
-          <p:cNvSpPr/>
-          <p:nvPr/>
-        </p:nvSpPr>
-        <p:spPr>
-          <a:xfrm>
-            <a:off x="6823941" y="1563624"/>
+          <p:cNvPr id="197" name="Shape 195"/>
+          <p:cNvSpPr/>
+          <p:nvPr/>
+        </p:nvSpPr>
+        <p:spPr>
+          <a:xfrm>
+            <a:off x="6823941" y="1837944"/>
             <a:ext cx="14927" cy="256032"/>
           </a:xfrm>
           <a:prstGeom prst="rect">
@@ -12258,13 +12573,13 @@
       </p:sp>
       <p:sp>
         <p:nvSpPr>
-          <p:cNvPr id="187" name="Shape 185"/>
-          <p:cNvSpPr/>
-          <p:nvPr/>
-        </p:nvSpPr>
-        <p:spPr>
-          <a:xfrm>
-            <a:off x="6839859" y="1563624"/>
+          <p:cNvPr id="198" name="Shape 196"/>
+          <p:cNvSpPr/>
+          <p:nvPr/>
+        </p:nvSpPr>
+        <p:spPr>
+          <a:xfrm>
+            <a:off x="6839859" y="1837944"/>
             <a:ext cx="14856" cy="256032"/>
           </a:xfrm>
           <a:prstGeom prst="rect">
@@ -12278,13 +12593,13 @@
       </p:sp>
       <p:sp>
         <p:nvSpPr>
-          <p:cNvPr id="188" name="Shape 186"/>
-          <p:cNvSpPr/>
-          <p:nvPr/>
-        </p:nvSpPr>
-        <p:spPr>
-          <a:xfrm>
-            <a:off x="6855706" y="1563624"/>
+          <p:cNvPr id="199" name="Shape 197"/>
+          <p:cNvSpPr/>
+          <p:nvPr/>
+        </p:nvSpPr>
+        <p:spPr>
+          <a:xfrm>
+            <a:off x="6855706" y="1837944"/>
             <a:ext cx="15069" cy="256032"/>
           </a:xfrm>
           <a:prstGeom prst="rect">
@@ -12298,13 +12613,13 @@
       </p:sp>
       <p:sp>
         <p:nvSpPr>
-          <p:cNvPr id="189" name="Shape 187"/>
-          <p:cNvSpPr/>
-          <p:nvPr/>
-        </p:nvSpPr>
-        <p:spPr>
-          <a:xfrm>
-            <a:off x="6871835" y="1563624"/>
+          <p:cNvPr id="200" name="Shape 198"/>
+          <p:cNvSpPr/>
+          <p:nvPr/>
+        </p:nvSpPr>
+        <p:spPr>
+          <a:xfrm>
+            <a:off x="6871835" y="1837944"/>
             <a:ext cx="14927" cy="256032"/>
           </a:xfrm>
           <a:prstGeom prst="rect">
@@ -12318,13 +12633,13 @@
       </p:sp>
       <p:sp>
         <p:nvSpPr>
-          <p:cNvPr id="190" name="Shape 188"/>
-          <p:cNvSpPr/>
-          <p:nvPr/>
-        </p:nvSpPr>
-        <p:spPr>
-          <a:xfrm>
-            <a:off x="6887611" y="1563624"/>
+          <p:cNvPr id="201" name="Shape 199"/>
+          <p:cNvSpPr/>
+          <p:nvPr/>
+        </p:nvSpPr>
+        <p:spPr>
+          <a:xfrm>
+            <a:off x="6887611" y="1837944"/>
             <a:ext cx="14998" cy="256032"/>
           </a:xfrm>
           <a:prstGeom prst="rect">
@@ -12338,13 +12653,13 @@
       </p:sp>
       <p:sp>
         <p:nvSpPr>
-          <p:cNvPr id="191" name="Shape 189"/>
-          <p:cNvSpPr/>
-          <p:nvPr/>
-        </p:nvSpPr>
-        <p:spPr>
-          <a:xfrm>
-            <a:off x="6903600" y="1563624"/>
+          <p:cNvPr id="202" name="Shape 200"/>
+          <p:cNvSpPr/>
+          <p:nvPr/>
+        </p:nvSpPr>
+        <p:spPr>
+          <a:xfrm>
+            <a:off x="6903600" y="1837944"/>
             <a:ext cx="10824" cy="256032"/>
           </a:xfrm>
           <a:prstGeom prst="rect">
@@ -12358,13 +12673,13 @@
       </p:sp>
       <p:sp>
         <p:nvSpPr>
-          <p:cNvPr id="192" name="Shape 190"/>
-          <p:cNvSpPr/>
-          <p:nvPr/>
-        </p:nvSpPr>
-        <p:spPr>
-          <a:xfrm>
-            <a:off x="6915202" y="1563624"/>
+          <p:cNvPr id="203" name="Shape 201"/>
+          <p:cNvSpPr/>
+          <p:nvPr/>
+        </p:nvSpPr>
+        <p:spPr>
+          <a:xfrm>
+            <a:off x="6915202" y="1837944"/>
             <a:ext cx="6721" cy="256032"/>
           </a:xfrm>
           <a:prstGeom prst="rect">
@@ -12378,13 +12693,13 @@
       </p:sp>
       <p:sp>
         <p:nvSpPr>
-          <p:cNvPr id="193" name="Shape 191"/>
-          <p:cNvSpPr/>
-          <p:nvPr/>
-        </p:nvSpPr>
-        <p:spPr>
-          <a:xfrm>
-            <a:off x="6922630" y="1563624"/>
+          <p:cNvPr id="204" name="Shape 202"/>
+          <p:cNvSpPr/>
+          <p:nvPr/>
+        </p:nvSpPr>
+        <p:spPr>
+          <a:xfrm>
+            <a:off x="6922630" y="1837944"/>
             <a:ext cx="17403" cy="256032"/>
           </a:xfrm>
           <a:prstGeom prst="rect">
@@ -12398,13 +12713,13 @@
       </p:sp>
       <p:sp>
         <p:nvSpPr>
-          <p:cNvPr id="194" name="Shape 192"/>
-          <p:cNvSpPr/>
-          <p:nvPr/>
-        </p:nvSpPr>
-        <p:spPr>
-          <a:xfrm>
-            <a:off x="6984956" y="1563624"/>
+          <p:cNvPr id="205" name="Shape 203"/>
+          <p:cNvSpPr/>
+          <p:nvPr/>
+        </p:nvSpPr>
+        <p:spPr>
+          <a:xfrm>
+            <a:off x="6984956" y="1837944"/>
             <a:ext cx="15352" cy="256032"/>
           </a:xfrm>
           <a:prstGeom prst="rect">
@@ -12418,13 +12733,13 @@
       </p:sp>
       <p:sp>
         <p:nvSpPr>
-          <p:cNvPr id="195" name="Shape 193"/>
-          <p:cNvSpPr/>
-          <p:nvPr/>
-        </p:nvSpPr>
-        <p:spPr>
-          <a:xfrm>
-            <a:off x="7061289" y="1563624"/>
+          <p:cNvPr id="206" name="Shape 204"/>
+          <p:cNvSpPr/>
+          <p:nvPr/>
+        </p:nvSpPr>
+        <p:spPr>
+          <a:xfrm>
+            <a:off x="7061289" y="1837944"/>
             <a:ext cx="67420" cy="256032"/>
           </a:xfrm>
           <a:prstGeom prst="rect">
@@ -12438,13 +12753,13 @@
       </p:sp>
       <p:sp>
         <p:nvSpPr>
-          <p:cNvPr id="196" name="Shape 194"/>
-          <p:cNvSpPr/>
-          <p:nvPr/>
-        </p:nvSpPr>
-        <p:spPr>
-          <a:xfrm>
-            <a:off x="7130902" y="1563624"/>
+          <p:cNvPr id="207" name="Shape 205"/>
+          <p:cNvSpPr/>
+          <p:nvPr/>
+        </p:nvSpPr>
+        <p:spPr>
+          <a:xfrm>
+            <a:off x="7130902" y="1837944"/>
             <a:ext cx="23558" cy="256032"/>
           </a:xfrm>
           <a:prstGeom prst="rect">
@@ -12458,13 +12773,13 @@
       </p:sp>
       <p:sp>
         <p:nvSpPr>
-          <p:cNvPr id="197" name="Shape 195"/>
-          <p:cNvSpPr/>
-          <p:nvPr/>
-        </p:nvSpPr>
-        <p:spPr>
-          <a:xfrm>
-            <a:off x="7158280" y="1563624"/>
+          <p:cNvPr id="208" name="Shape 206"/>
+          <p:cNvSpPr/>
+          <p:nvPr/>
+        </p:nvSpPr>
+        <p:spPr>
+          <a:xfrm>
+            <a:off x="7158280" y="1837944"/>
             <a:ext cx="127552" cy="256032"/>
           </a:xfrm>
           <a:prstGeom prst="rect">
@@ -12478,13 +12793,13 @@
       </p:sp>
       <p:sp>
         <p:nvSpPr>
-          <p:cNvPr id="198" name="Text 196"/>
-          <p:cNvSpPr/>
-          <p:nvPr/>
-        </p:nvSpPr>
-        <p:spPr>
-          <a:xfrm>
-            <a:off x="7671816" y="1536192"/>
+          <p:cNvPr id="209" name="Text 207"/>
+          <p:cNvSpPr/>
+          <p:nvPr/>
+        </p:nvSpPr>
+        <p:spPr>
+          <a:xfrm>
+            <a:off x="7671816" y="1810512"/>
             <a:ext cx="914400" cy="310896"/>
           </a:xfrm>
           <a:prstGeom prst="rect">
@@ -12517,13 +12832,13 @@
       </p:sp>
       <p:sp>
         <p:nvSpPr>
-          <p:cNvPr id="199" name="Text 197"/>
-          <p:cNvSpPr/>
-          <p:nvPr/>
-        </p:nvSpPr>
-        <p:spPr>
-          <a:xfrm>
-            <a:off x="457200" y="1938528"/>
+          <p:cNvPr id="210" name="Text 208"/>
+          <p:cNvSpPr/>
+          <p:nvPr/>
+        </p:nvSpPr>
+        <p:spPr>
+          <a:xfrm>
+            <a:off x="457200" y="2212848"/>
             <a:ext cx="978408" cy="310896"/>
           </a:xfrm>
           <a:prstGeom prst="rect">
@@ -12556,13 +12871,13 @@
       </p:sp>
       <p:sp>
         <p:nvSpPr>
-          <p:cNvPr id="200" name="Shape 198"/>
-          <p:cNvSpPr/>
-          <p:nvPr/>
-        </p:nvSpPr>
-        <p:spPr>
-          <a:xfrm>
-            <a:off x="1508760" y="1938528"/>
+          <p:cNvPr id="211" name="Shape 209"/>
+          <p:cNvSpPr/>
+          <p:nvPr/>
+        </p:nvSpPr>
+        <p:spPr>
+          <a:xfrm>
+            <a:off x="1508760" y="2212848"/>
             <a:ext cx="6126480" cy="310896"/>
           </a:xfrm>
           <a:prstGeom prst="rect">
@@ -12581,13 +12896,13 @@
       </p:sp>
       <p:sp>
         <p:nvSpPr>
-          <p:cNvPr id="201" name="Shape 199"/>
-          <p:cNvSpPr/>
-          <p:nvPr/>
-        </p:nvSpPr>
-        <p:spPr>
-          <a:xfrm>
-            <a:off x="4308689" y="1965960"/>
+          <p:cNvPr id="212" name="Shape 210"/>
+          <p:cNvSpPr/>
+          <p:nvPr/>
+        </p:nvSpPr>
+        <p:spPr>
+          <a:xfrm>
+            <a:off x="4308689" y="2240280"/>
             <a:ext cx="27307" cy="256032"/>
           </a:xfrm>
           <a:prstGeom prst="rect">
@@ -12601,13 +12916,13 @@
       </p:sp>
       <p:sp>
         <p:nvSpPr>
-          <p:cNvPr id="202" name="Shape 200"/>
-          <p:cNvSpPr/>
-          <p:nvPr/>
-        </p:nvSpPr>
-        <p:spPr>
-          <a:xfrm>
-            <a:off x="4589615" y="1965960"/>
+          <p:cNvPr id="213" name="Shape 211"/>
+          <p:cNvSpPr/>
+          <p:nvPr/>
+        </p:nvSpPr>
+        <p:spPr>
+          <a:xfrm>
+            <a:off x="4589615" y="2240280"/>
             <a:ext cx="28510" cy="256032"/>
           </a:xfrm>
           <a:prstGeom prst="rect">
@@ -12621,13 +12936,13 @@
       </p:sp>
       <p:sp>
         <p:nvSpPr>
-          <p:cNvPr id="203" name="Shape 201"/>
-          <p:cNvSpPr/>
-          <p:nvPr/>
-        </p:nvSpPr>
-        <p:spPr>
-          <a:xfrm>
-            <a:off x="4879951" y="1965960"/>
+          <p:cNvPr id="214" name="Shape 212"/>
+          <p:cNvSpPr/>
+          <p:nvPr/>
+        </p:nvSpPr>
+        <p:spPr>
+          <a:xfrm>
+            <a:off x="4879951" y="2240280"/>
             <a:ext cx="27095" cy="256032"/>
           </a:xfrm>
           <a:prstGeom prst="rect">
@@ -12641,13 +12956,13 @@
       </p:sp>
       <p:sp>
         <p:nvSpPr>
-          <p:cNvPr id="204" name="Shape 202"/>
-          <p:cNvSpPr/>
-          <p:nvPr/>
-        </p:nvSpPr>
-        <p:spPr>
-          <a:xfrm>
-            <a:off x="5138240" y="1965960"/>
+          <p:cNvPr id="215" name="Shape 213"/>
+          <p:cNvSpPr/>
+          <p:nvPr/>
+        </p:nvSpPr>
+        <p:spPr>
+          <a:xfrm>
+            <a:off x="5138240" y="2240280"/>
             <a:ext cx="26812" cy="256032"/>
           </a:xfrm>
           <a:prstGeom prst="rect">
@@ -12661,13 +12976,13 @@
       </p:sp>
       <p:sp>
         <p:nvSpPr>
-          <p:cNvPr id="205" name="Shape 203"/>
-          <p:cNvSpPr/>
-          <p:nvPr/>
-        </p:nvSpPr>
-        <p:spPr>
-          <a:xfrm>
-            <a:off x="5418247" y="1965960"/>
+          <p:cNvPr id="216" name="Shape 214"/>
+          <p:cNvSpPr/>
+          <p:nvPr/>
+        </p:nvSpPr>
+        <p:spPr>
+          <a:xfrm>
+            <a:off x="5418247" y="2240280"/>
             <a:ext cx="28298" cy="256032"/>
           </a:xfrm>
           <a:prstGeom prst="rect">
@@ -12681,13 +12996,13 @@
       </p:sp>
       <p:sp>
         <p:nvSpPr>
-          <p:cNvPr id="206" name="Shape 204"/>
-          <p:cNvSpPr/>
-          <p:nvPr/>
-        </p:nvSpPr>
-        <p:spPr>
-          <a:xfrm>
-            <a:off x="5694433" y="1965960"/>
+          <p:cNvPr id="217" name="Shape 215"/>
+          <p:cNvSpPr/>
+          <p:nvPr/>
+        </p:nvSpPr>
+        <p:spPr>
+          <a:xfrm>
+            <a:off x="5694433" y="2240280"/>
             <a:ext cx="30774" cy="256032"/>
           </a:xfrm>
           <a:prstGeom prst="rect">
@@ -12701,13 +13016,13 @@
       </p:sp>
       <p:sp>
         <p:nvSpPr>
-          <p:cNvPr id="207" name="Shape 205"/>
-          <p:cNvSpPr/>
-          <p:nvPr/>
-        </p:nvSpPr>
-        <p:spPr>
-          <a:xfrm>
-            <a:off x="5801328" y="1965960"/>
+          <p:cNvPr id="218" name="Shape 216"/>
+          <p:cNvSpPr/>
+          <p:nvPr/>
+        </p:nvSpPr>
+        <p:spPr>
+          <a:xfrm>
+            <a:off x="5801328" y="2240280"/>
             <a:ext cx="40112" cy="256032"/>
           </a:xfrm>
           <a:prstGeom prst="rect">
@@ -12721,13 +13036,13 @@
       </p:sp>
       <p:sp>
         <p:nvSpPr>
-          <p:cNvPr id="208" name="Shape 206"/>
-          <p:cNvSpPr/>
-          <p:nvPr/>
-        </p:nvSpPr>
-        <p:spPr>
-          <a:xfrm>
-            <a:off x="5901291" y="1965960"/>
+          <p:cNvPr id="219" name="Shape 217"/>
+          <p:cNvSpPr/>
+          <p:nvPr/>
+        </p:nvSpPr>
+        <p:spPr>
+          <a:xfrm>
+            <a:off x="5901291" y="2240280"/>
             <a:ext cx="40466" cy="256032"/>
           </a:xfrm>
           <a:prstGeom prst="rect">
@@ -12741,13 +13056,13 @@
       </p:sp>
       <p:sp>
         <p:nvSpPr>
-          <p:cNvPr id="209" name="Shape 207"/>
-          <p:cNvSpPr/>
-          <p:nvPr/>
-        </p:nvSpPr>
-        <p:spPr>
-          <a:xfrm>
-            <a:off x="6006771" y="1965960"/>
+          <p:cNvPr id="220" name="Shape 218"/>
+          <p:cNvSpPr/>
+          <p:nvPr/>
+        </p:nvSpPr>
+        <p:spPr>
+          <a:xfrm>
+            <a:off x="6006771" y="2240280"/>
             <a:ext cx="40254" cy="256032"/>
           </a:xfrm>
           <a:prstGeom prst="rect">
@@ -12761,13 +13076,13 @@
       </p:sp>
       <p:sp>
         <p:nvSpPr>
-          <p:cNvPr id="210" name="Shape 208"/>
-          <p:cNvSpPr/>
-          <p:nvPr/>
-        </p:nvSpPr>
-        <p:spPr>
-          <a:xfrm>
-            <a:off x="6104681" y="1965960"/>
+          <p:cNvPr id="221" name="Shape 219"/>
+          <p:cNvSpPr/>
+          <p:nvPr/>
+        </p:nvSpPr>
+        <p:spPr>
+          <a:xfrm>
+            <a:off x="6104681" y="2240280"/>
             <a:ext cx="41103" cy="256032"/>
           </a:xfrm>
           <a:prstGeom prst="rect">
@@ -12781,13 +13096,13 @@
       </p:sp>
       <p:sp>
         <p:nvSpPr>
-          <p:cNvPr id="211" name="Shape 209"/>
-          <p:cNvSpPr/>
-          <p:nvPr/>
-        </p:nvSpPr>
-        <p:spPr>
-          <a:xfrm>
-            <a:off x="6204148" y="1965960"/>
+          <p:cNvPr id="222" name="Shape 220"/>
+          <p:cNvSpPr/>
+          <p:nvPr/>
+        </p:nvSpPr>
+        <p:spPr>
+          <a:xfrm>
+            <a:off x="6204148" y="2240280"/>
             <a:ext cx="40890" cy="256032"/>
           </a:xfrm>
           <a:prstGeom prst="rect">
@@ -12801,13 +13116,13 @@
       </p:sp>
       <p:sp>
         <p:nvSpPr>
-          <p:cNvPr id="212" name="Shape 210"/>
-          <p:cNvSpPr/>
-          <p:nvPr/>
-        </p:nvSpPr>
-        <p:spPr>
-          <a:xfrm>
-            <a:off x="6318825" y="1965960"/>
+          <p:cNvPr id="223" name="Shape 221"/>
+          <p:cNvSpPr/>
+          <p:nvPr/>
+        </p:nvSpPr>
+        <p:spPr>
+          <a:xfrm>
+            <a:off x="6318825" y="2240280"/>
             <a:ext cx="39900" cy="256032"/>
           </a:xfrm>
           <a:prstGeom prst="rect">
@@ -12821,13 +13136,13 @@
       </p:sp>
       <p:sp>
         <p:nvSpPr>
-          <p:cNvPr id="213" name="Shape 211"/>
-          <p:cNvSpPr/>
-          <p:nvPr/>
-        </p:nvSpPr>
-        <p:spPr>
-          <a:xfrm>
-            <a:off x="6448641" y="1965960"/>
+          <p:cNvPr id="224" name="Shape 222"/>
+          <p:cNvSpPr/>
+          <p:nvPr/>
+        </p:nvSpPr>
+        <p:spPr>
+          <a:xfrm>
+            <a:off x="6448641" y="2240280"/>
             <a:ext cx="29500" cy="256032"/>
           </a:xfrm>
           <a:prstGeom prst="rect">
@@ -12841,13 +13156,13 @@
       </p:sp>
       <p:sp>
         <p:nvSpPr>
-          <p:cNvPr id="214" name="Shape 212"/>
-          <p:cNvSpPr/>
-          <p:nvPr/>
-        </p:nvSpPr>
-        <p:spPr>
-          <a:xfrm>
-            <a:off x="6940033" y="1965960"/>
+          <p:cNvPr id="225" name="Shape 223"/>
+          <p:cNvSpPr/>
+          <p:nvPr/>
+        </p:nvSpPr>
+        <p:spPr>
+          <a:xfrm>
+            <a:off x="6940033" y="2240280"/>
             <a:ext cx="20233" cy="256032"/>
           </a:xfrm>
           <a:prstGeom prst="rect">
@@ -12861,13 +13176,13 @@
       </p:sp>
       <p:sp>
         <p:nvSpPr>
-          <p:cNvPr id="215" name="Shape 213"/>
-          <p:cNvSpPr/>
-          <p:nvPr/>
-        </p:nvSpPr>
-        <p:spPr>
-          <a:xfrm>
-            <a:off x="7011202" y="1965960"/>
+          <p:cNvPr id="226" name="Shape 224"/>
+          <p:cNvSpPr/>
+          <p:nvPr/>
+        </p:nvSpPr>
+        <p:spPr>
+          <a:xfrm>
+            <a:off x="7011202" y="2240280"/>
             <a:ext cx="33391" cy="256032"/>
           </a:xfrm>
           <a:prstGeom prst="rect">
@@ -12881,13 +13196,13 @@
       </p:sp>
       <p:sp>
         <p:nvSpPr>
-          <p:cNvPr id="216" name="Shape 214"/>
-          <p:cNvSpPr/>
-          <p:nvPr/>
-        </p:nvSpPr>
-        <p:spPr>
-          <a:xfrm>
-            <a:off x="7285833" y="1965960"/>
+          <p:cNvPr id="227" name="Shape 225"/>
+          <p:cNvSpPr/>
+          <p:nvPr/>
+        </p:nvSpPr>
+        <p:spPr>
+          <a:xfrm>
+            <a:off x="7285833" y="2240280"/>
             <a:ext cx="310498" cy="256032"/>
           </a:xfrm>
           <a:prstGeom prst="rect">
@@ -12901,13 +13216,13 @@
       </p:sp>
       <p:sp>
         <p:nvSpPr>
-          <p:cNvPr id="217" name="Text 215"/>
-          <p:cNvSpPr/>
-          <p:nvPr/>
-        </p:nvSpPr>
-        <p:spPr>
-          <a:xfrm>
-            <a:off x="7671816" y="1938528"/>
+          <p:cNvPr id="228" name="Text 226"/>
+          <p:cNvSpPr/>
+          <p:nvPr/>
+        </p:nvSpPr>
+        <p:spPr>
+          <a:xfrm>
+            <a:off x="7671816" y="2212848"/>
             <a:ext cx="914400" cy="310896"/>
           </a:xfrm>
           <a:prstGeom prst="rect">
@@ -12940,13 +13255,13 @@
       </p:sp>
       <p:sp>
         <p:nvSpPr>
-          <p:cNvPr id="218" name="Shape 216"/>
-          <p:cNvSpPr/>
-          <p:nvPr/>
-        </p:nvSpPr>
-        <p:spPr>
-          <a:xfrm>
-            <a:off x="3421693" y="1536192"/>
+          <p:cNvPr id="229" name="Shape 227"/>
+          <p:cNvSpPr/>
+          <p:nvPr/>
+        </p:nvSpPr>
+        <p:spPr>
+          <a:xfrm>
+            <a:off x="3421693" y="1810512"/>
             <a:ext cx="0" cy="713232"/>
           </a:xfrm>
           <a:prstGeom prst="line">
@@ -12963,13 +13278,13 @@
       </p:sp>
       <p:sp>
         <p:nvSpPr>
-          <p:cNvPr id="219" name="Shape 217"/>
-          <p:cNvSpPr/>
-          <p:nvPr/>
-        </p:nvSpPr>
-        <p:spPr>
-          <a:xfrm>
-            <a:off x="7060794" y="1536192"/>
+          <p:cNvPr id="230" name="Shape 228"/>
+          <p:cNvSpPr/>
+          <p:nvPr/>
+        </p:nvSpPr>
+        <p:spPr>
+          <a:xfrm>
+            <a:off x="7060794" y="1810512"/>
             <a:ext cx="0" cy="713232"/>
           </a:xfrm>
           <a:prstGeom prst="line">
@@ -12986,13 +13301,13 @@
       </p:sp>
       <p:sp>
         <p:nvSpPr>
-          <p:cNvPr id="220" name="Shape 218"/>
-          <p:cNvSpPr/>
-          <p:nvPr/>
-        </p:nvSpPr>
-        <p:spPr>
-          <a:xfrm>
-            <a:off x="1508760" y="2359152"/>
+          <p:cNvPr id="231" name="Shape 229"/>
+          <p:cNvSpPr/>
+          <p:nvPr/>
+        </p:nvSpPr>
+        <p:spPr>
+          <a:xfrm>
+            <a:off x="1508760" y="2633472"/>
             <a:ext cx="6126480" cy="0"/>
           </a:xfrm>
           <a:prstGeom prst="line">
@@ -13009,13 +13324,13 @@
       </p:sp>
       <p:sp>
         <p:nvSpPr>
-          <p:cNvPr id="221" name="Shape 219"/>
-          <p:cNvSpPr/>
-          <p:nvPr/>
-        </p:nvSpPr>
-        <p:spPr>
-          <a:xfrm>
-            <a:off x="1508760" y="2359152"/>
+          <p:cNvPr id="232" name="Shape 230"/>
+          <p:cNvSpPr/>
+          <p:nvPr/>
+        </p:nvSpPr>
+        <p:spPr>
+          <a:xfrm>
+            <a:off x="1508760" y="2633472"/>
             <a:ext cx="0" cy="45720"/>
           </a:xfrm>
           <a:prstGeom prst="line">
@@ -13032,13 +13347,13 @@
       </p:sp>
       <p:sp>
         <p:nvSpPr>
-          <p:cNvPr id="222" name="Text 220"/>
-          <p:cNvSpPr/>
-          <p:nvPr/>
-        </p:nvSpPr>
-        <p:spPr>
-          <a:xfrm>
-            <a:off x="1234440" y="2404872"/>
+          <p:cNvPr id="233" name="Text 231"/>
+          <p:cNvSpPr/>
+          <p:nvPr/>
+        </p:nvSpPr>
+        <p:spPr>
+          <a:xfrm>
+            <a:off x="1234440" y="2679192"/>
             <a:ext cx="548640" cy="182880"/>
           </a:xfrm>
           <a:prstGeom prst="rect">
@@ -13071,13 +13386,13 @@
       </p:sp>
       <p:sp>
         <p:nvSpPr>
-          <p:cNvPr id="223" name="Shape 221"/>
-          <p:cNvSpPr/>
-          <p:nvPr/>
-        </p:nvSpPr>
-        <p:spPr>
-          <a:xfrm>
-            <a:off x="2923651" y="2359152"/>
+          <p:cNvPr id="234" name="Shape 232"/>
+          <p:cNvSpPr/>
+          <p:nvPr/>
+        </p:nvSpPr>
+        <p:spPr>
+          <a:xfrm>
+            <a:off x="2923651" y="2633472"/>
             <a:ext cx="0" cy="45720"/>
           </a:xfrm>
           <a:prstGeom prst="line">
@@ -13094,13 +13409,13 @@
       </p:sp>
       <p:sp>
         <p:nvSpPr>
-          <p:cNvPr id="224" name="Text 222"/>
-          <p:cNvSpPr/>
-          <p:nvPr/>
-        </p:nvSpPr>
-        <p:spPr>
-          <a:xfrm>
-            <a:off x="2649331" y="2404872"/>
+          <p:cNvPr id="235" name="Text 233"/>
+          <p:cNvSpPr/>
+          <p:nvPr/>
+        </p:nvSpPr>
+        <p:spPr>
+          <a:xfrm>
+            <a:off x="2649331" y="2679192"/>
             <a:ext cx="548640" cy="182880"/>
           </a:xfrm>
           <a:prstGeom prst="rect">
@@ -13133,13 +13448,13 @@
       </p:sp>
       <p:sp>
         <p:nvSpPr>
-          <p:cNvPr id="225" name="Shape 223"/>
-          <p:cNvSpPr/>
-          <p:nvPr/>
-        </p:nvSpPr>
-        <p:spPr>
-          <a:xfrm>
-            <a:off x="4338543" y="2359152"/>
+          <p:cNvPr id="236" name="Shape 234"/>
+          <p:cNvSpPr/>
+          <p:nvPr/>
+        </p:nvSpPr>
+        <p:spPr>
+          <a:xfrm>
+            <a:off x="4338543" y="2633472"/>
             <a:ext cx="0" cy="45720"/>
           </a:xfrm>
           <a:prstGeom prst="line">
@@ -13156,13 +13471,13 @@
       </p:sp>
       <p:sp>
         <p:nvSpPr>
-          <p:cNvPr id="226" name="Text 224"/>
-          <p:cNvSpPr/>
-          <p:nvPr/>
-        </p:nvSpPr>
-        <p:spPr>
-          <a:xfrm>
-            <a:off x="4064223" y="2404872"/>
+          <p:cNvPr id="237" name="Text 235"/>
+          <p:cNvSpPr/>
+          <p:nvPr/>
+        </p:nvSpPr>
+        <p:spPr>
+          <a:xfrm>
+            <a:off x="4064223" y="2679192"/>
             <a:ext cx="548640" cy="182880"/>
           </a:xfrm>
           <a:prstGeom prst="rect">
@@ -13195,13 +13510,13 @@
       </p:sp>
       <p:sp>
         <p:nvSpPr>
-          <p:cNvPr id="227" name="Shape 225"/>
-          <p:cNvSpPr/>
-          <p:nvPr/>
-        </p:nvSpPr>
-        <p:spPr>
-          <a:xfrm>
-            <a:off x="5753434" y="2359152"/>
+          <p:cNvPr id="238" name="Shape 236"/>
+          <p:cNvSpPr/>
+          <p:nvPr/>
+        </p:nvSpPr>
+        <p:spPr>
+          <a:xfrm>
+            <a:off x="5753434" y="2633472"/>
             <a:ext cx="0" cy="45720"/>
           </a:xfrm>
           <a:prstGeom prst="line">
@@ -13218,13 +13533,13 @@
       </p:sp>
       <p:sp>
         <p:nvSpPr>
-          <p:cNvPr id="228" name="Text 226"/>
-          <p:cNvSpPr/>
-          <p:nvPr/>
-        </p:nvSpPr>
-        <p:spPr>
-          <a:xfrm>
-            <a:off x="5479114" y="2404872"/>
+          <p:cNvPr id="239" name="Text 237"/>
+          <p:cNvSpPr/>
+          <p:nvPr/>
+        </p:nvSpPr>
+        <p:spPr>
+          <a:xfrm>
+            <a:off x="5479114" y="2679192"/>
             <a:ext cx="548640" cy="182880"/>
           </a:xfrm>
           <a:prstGeom prst="rect">
@@ -13257,13 +13572,13 @@
       </p:sp>
       <p:sp>
         <p:nvSpPr>
-          <p:cNvPr id="229" name="Shape 227"/>
-          <p:cNvSpPr/>
-          <p:nvPr/>
-        </p:nvSpPr>
-        <p:spPr>
-          <a:xfrm>
-            <a:off x="7168326" y="2359152"/>
+          <p:cNvPr id="240" name="Shape 238"/>
+          <p:cNvSpPr/>
+          <p:nvPr/>
+        </p:nvSpPr>
+        <p:spPr>
+          <a:xfrm>
+            <a:off x="7168326" y="2633472"/>
             <a:ext cx="0" cy="45720"/>
           </a:xfrm>
           <a:prstGeom prst="line">
@@ -13280,13 +13595,13 @@
       </p:sp>
       <p:sp>
         <p:nvSpPr>
-          <p:cNvPr id="230" name="Text 228"/>
-          <p:cNvSpPr/>
-          <p:nvPr/>
-        </p:nvSpPr>
-        <p:spPr>
-          <a:xfrm>
-            <a:off x="6894006" y="2404872"/>
+          <p:cNvPr id="241" name="Text 239"/>
+          <p:cNvSpPr/>
+          <p:nvPr/>
+        </p:nvSpPr>
+        <p:spPr>
+          <a:xfrm>
+            <a:off x="6894006" y="2679192"/>
             <a:ext cx="548640" cy="182880"/>
           </a:xfrm>
           <a:prstGeom prst="rect">
@@ -13319,13 +13634,13 @@
       </p:sp>
       <p:sp>
         <p:nvSpPr>
-          <p:cNvPr id="231" name="Text 229"/>
-          <p:cNvSpPr/>
-          <p:nvPr/>
-        </p:nvSpPr>
-        <p:spPr>
-          <a:xfrm>
-            <a:off x="5806440" y="2560320"/>
+          <p:cNvPr id="242" name="Text 240"/>
+          <p:cNvSpPr/>
+          <p:nvPr/>
+        </p:nvSpPr>
+        <p:spPr>
+          <a:xfrm>
+            <a:off x="5806440" y="2834640"/>
             <a:ext cx="1828800" cy="182880"/>
           </a:xfrm>
           <a:prstGeom prst="rect">
@@ -13358,13 +13673,13 @@
       </p:sp>
       <p:sp>
         <p:nvSpPr>
-          <p:cNvPr id="232" name="Shape 230"/>
-          <p:cNvSpPr/>
-          <p:nvPr/>
-        </p:nvSpPr>
-        <p:spPr>
-          <a:xfrm>
-            <a:off x="1700298" y="1600200"/>
+          <p:cNvPr id="243" name="Shape 241"/>
+          <p:cNvSpPr/>
+          <p:nvPr/>
+        </p:nvSpPr>
+        <p:spPr>
+          <a:xfrm>
+            <a:off x="1700298" y="1874520"/>
             <a:ext cx="182880" cy="182880"/>
           </a:xfrm>
           <a:prstGeom prst="ellipse">
@@ -13378,13 +13693,13 @@
       </p:sp>
       <p:sp>
         <p:nvSpPr>
-          <p:cNvPr id="233" name="Text 231"/>
-          <p:cNvSpPr/>
-          <p:nvPr/>
-        </p:nvSpPr>
-        <p:spPr>
-          <a:xfrm>
-            <a:off x="1700298" y="1600200"/>
+          <p:cNvPr id="244" name="Text 242"/>
+          <p:cNvSpPr/>
+          <p:nvPr/>
+        </p:nvSpPr>
+        <p:spPr>
+          <a:xfrm>
+            <a:off x="1700298" y="1874520"/>
             <a:ext cx="182880" cy="182880"/>
           </a:xfrm>
           <a:prstGeom prst="rect">
@@ -13417,13 +13732,13 @@
       </p:sp>
       <p:sp>
         <p:nvSpPr>
-          <p:cNvPr id="234" name="Shape 232"/>
-          <p:cNvSpPr/>
-          <p:nvPr/>
-        </p:nvSpPr>
-        <p:spPr>
-          <a:xfrm>
-            <a:off x="2655350" y="1600200"/>
+          <p:cNvPr id="245" name="Shape 243"/>
+          <p:cNvSpPr/>
+          <p:nvPr/>
+        </p:nvSpPr>
+        <p:spPr>
+          <a:xfrm>
+            <a:off x="2655350" y="1874520"/>
             <a:ext cx="182880" cy="182880"/>
           </a:xfrm>
           <a:prstGeom prst="ellipse">
@@ -13437,13 +13752,13 @@
       </p:sp>
       <p:sp>
         <p:nvSpPr>
-          <p:cNvPr id="235" name="Text 233"/>
-          <p:cNvSpPr/>
-          <p:nvPr/>
-        </p:nvSpPr>
-        <p:spPr>
-          <a:xfrm>
-            <a:off x="2655350" y="1600200"/>
+          <p:cNvPr id="246" name="Text 244"/>
+          <p:cNvSpPr/>
+          <p:nvPr/>
+        </p:nvSpPr>
+        <p:spPr>
+          <a:xfrm>
+            <a:off x="2655350" y="1874520"/>
             <a:ext cx="182880" cy="182880"/>
           </a:xfrm>
           <a:prstGeom prst="rect">
@@ -13476,13 +13791,13 @@
       </p:sp>
       <p:sp>
         <p:nvSpPr>
-          <p:cNvPr id="236" name="Shape 234"/>
-          <p:cNvSpPr/>
-          <p:nvPr/>
-        </p:nvSpPr>
-        <p:spPr>
-          <a:xfrm>
-            <a:off x="4459337" y="1600200"/>
+          <p:cNvPr id="247" name="Shape 245"/>
+          <p:cNvSpPr/>
+          <p:nvPr/>
+        </p:nvSpPr>
+        <p:spPr>
+          <a:xfrm>
+            <a:off x="4459337" y="1874520"/>
             <a:ext cx="182880" cy="182880"/>
           </a:xfrm>
           <a:prstGeom prst="ellipse">
@@ -13496,13 +13811,13 @@
       </p:sp>
       <p:sp>
         <p:nvSpPr>
-          <p:cNvPr id="237" name="Text 235"/>
-          <p:cNvSpPr/>
-          <p:nvPr/>
-        </p:nvSpPr>
-        <p:spPr>
-          <a:xfrm>
-            <a:off x="4459337" y="1600200"/>
+          <p:cNvPr id="248" name="Text 246"/>
+          <p:cNvSpPr/>
+          <p:nvPr/>
+        </p:nvSpPr>
+        <p:spPr>
+          <a:xfrm>
+            <a:off x="4459337" y="1874520"/>
             <a:ext cx="182880" cy="182880"/>
           </a:xfrm>
           <a:prstGeom prst="rect">
@@ -13535,13 +13850,13 @@
       </p:sp>
       <p:sp>
         <p:nvSpPr>
-          <p:cNvPr id="238" name="Shape 236"/>
-          <p:cNvSpPr/>
-          <p:nvPr/>
-        </p:nvSpPr>
-        <p:spPr>
-          <a:xfrm>
-            <a:off x="7345715" y="2002536"/>
+          <p:cNvPr id="249" name="Shape 247"/>
+          <p:cNvSpPr/>
+          <p:nvPr/>
+        </p:nvSpPr>
+        <p:spPr>
+          <a:xfrm>
+            <a:off x="7345715" y="2276856"/>
             <a:ext cx="182880" cy="182880"/>
           </a:xfrm>
           <a:prstGeom prst="ellipse">
@@ -13555,13 +13870,13 @@
       </p:sp>
       <p:sp>
         <p:nvSpPr>
-          <p:cNvPr id="239" name="Text 237"/>
-          <p:cNvSpPr/>
-          <p:nvPr/>
-        </p:nvSpPr>
-        <p:spPr>
-          <a:xfrm>
-            <a:off x="7345715" y="2002536"/>
+          <p:cNvPr id="250" name="Text 248"/>
+          <p:cNvSpPr/>
+          <p:nvPr/>
+        </p:nvSpPr>
+        <p:spPr>
+          <a:xfrm>
+            <a:off x="7345715" y="2276856"/>
             <a:ext cx="182880" cy="182880"/>
           </a:xfrm>
           <a:prstGeom prst="rect">
@@ -13607,7 +13922,7 @@
           </p:nvPr>
         </p:nvGraphicFramePr>
         <p:xfrm>
-          <a:off x="457200" y="2825496"/>
+          <a:off x="457200" y="3099816"/>
           <a:ext cx="8229600" cy="914400"/>
         </p:xfrm>
         <a:graphic>
@@ -14604,210 +14919,13 @@
                   </a:tcPr>
                 </a:tc>
               </a:tr>
-              <a:tr h="237744">
-                <a:tc>
-                  <a:txBody>
-                    <a:bodyPr/>
-                    <a:lstStyle/>
-                    <a:p>
-                      <a:pPr algn="l" indent="0" marL="0">
-                        <a:buNone/>
-                      </a:pPr>
-                      <a:r>
-                        <a:rPr lang="en-US" sz="850" b="1" dirty="0">
-                          <a:solidFill>
-                            <a:srgbClr val="000000"/>
-                          </a:solidFill>
-                          <a:latin typeface="NVIDIA Sans" pitchFamily="34" charset="0"/>
-                          <a:ea typeface="NVIDIA Sans" pitchFamily="34" charset="-122"/>
-                          <a:cs typeface="NVIDIA Sans" pitchFamily="34" charset="-120"/>
-                        </a:rPr>
-                        <a:t>6 · Config-level</a:t>
-                      </a:r>
-                      <a:endParaRPr lang="en-US" sz="850" dirty="0">
-                        <a:latin typeface="NVIDIA Sans" charset="0"/>
-                        <a:ea typeface="NVIDIA Sans" charset="0"/>
-                        <a:cs typeface="NVIDIA Sans" charset="0"/>
-                      </a:endParaRPr>
-                    </a:p>
-                  </a:txBody>
-                  <a:tcPr marL="91440" marR="91440" marT="45720" marB="45720" anchor="ctr">
-                    <a:lnL w="6350" cap="flat" cmpd="sng" algn="ctr">
-                      <a:solidFill>
-                        <a:srgbClr val="CDCDCD"/>
-                      </a:solidFill>
-                      <a:prstDash val="solid"/>
-                      <a:round/>
-                      <a:headEnd type="none" w="med" len="med"/>
-                      <a:tailEnd type="none" w="med" len="med"/>
-                    </a:lnL>
-                    <a:lnR w="6350" cap="flat" cmpd="sng" algn="ctr">
-                      <a:solidFill>
-                        <a:srgbClr val="CDCDCD"/>
-                      </a:solidFill>
-                      <a:prstDash val="solid"/>
-                      <a:round/>
-                      <a:headEnd type="none" w="med" len="med"/>
-                      <a:tailEnd type="none" w="med" len="med"/>
-                    </a:lnR>
-                    <a:lnT w="6350" cap="flat" cmpd="sng" algn="ctr">
-                      <a:solidFill>
-                        <a:srgbClr val="CDCDCD"/>
-                      </a:solidFill>
-                      <a:prstDash val="solid"/>
-                      <a:round/>
-                      <a:headEnd type="none" w="med" len="med"/>
-                      <a:tailEnd type="none" w="med" len="med"/>
-                    </a:lnT>
-                    <a:lnB w="6350" cap="flat" cmpd="sng" algn="ctr">
-                      <a:solidFill>
-                        <a:srgbClr val="CDCDCD"/>
-                      </a:solidFill>
-                      <a:prstDash val="solid"/>
-                      <a:round/>
-                      <a:headEnd type="none" w="med" len="med"/>
-                      <a:tailEnd type="none" w="med" len="med"/>
-                    </a:lnB>
-                  </a:tcPr>
-                </a:tc>
-                <a:tc>
-                  <a:txBody>
-                    <a:bodyPr/>
-                    <a:lstStyle/>
-                    <a:p>
-                      <a:pPr algn="l" indent="0" marL="0">
-                        <a:buNone/>
-                      </a:pPr>
-                      <a:r>
-                        <a:rPr lang="en-US" sz="850" dirty="0">
-                          <a:solidFill>
-                            <a:srgbClr val="000000"/>
-                          </a:solidFill>
-                          <a:latin typeface="NVIDIA Sans" pitchFamily="34" charset="0"/>
-                          <a:ea typeface="NVIDIA Sans" pitchFamily="34" charset="-122"/>
-                          <a:cs typeface="NVIDIA Sans" pitchFamily="34" charset="-120"/>
-                        </a:rPr>
-                        <a:t>torch 2.6-era kernels; one attention backend for vision + text</a:t>
-                      </a:r>
-                      <a:endParaRPr lang="en-US" sz="850" dirty="0">
-                        <a:latin typeface="NVIDIA Sans" charset="0"/>
-                        <a:ea typeface="NVIDIA Sans" charset="0"/>
-                        <a:cs typeface="NVIDIA Sans" charset="0"/>
-                      </a:endParaRPr>
-                    </a:p>
-                  </a:txBody>
-                  <a:tcPr marL="91440" marR="91440" marT="45720" marB="45720" anchor="ctr">
-                    <a:lnL w="6350" cap="flat" cmpd="sng" algn="ctr">
-                      <a:solidFill>
-                        <a:srgbClr val="CDCDCD"/>
-                      </a:solidFill>
-                      <a:prstDash val="solid"/>
-                      <a:round/>
-                      <a:headEnd type="none" w="med" len="med"/>
-                      <a:tailEnd type="none" w="med" len="med"/>
-                    </a:lnL>
-                    <a:lnR w="6350" cap="flat" cmpd="sng" algn="ctr">
-                      <a:solidFill>
-                        <a:srgbClr val="CDCDCD"/>
-                      </a:solidFill>
-                      <a:prstDash val="solid"/>
-                      <a:round/>
-                      <a:headEnd type="none" w="med" len="med"/>
-                      <a:tailEnd type="none" w="med" len="med"/>
-                    </a:lnR>
-                    <a:lnT w="6350" cap="flat" cmpd="sng" algn="ctr">
-                      <a:solidFill>
-                        <a:srgbClr val="CDCDCD"/>
-                      </a:solidFill>
-                      <a:prstDash val="solid"/>
-                      <a:round/>
-                      <a:headEnd type="none" w="med" len="med"/>
-                      <a:tailEnd type="none" w="med" len="med"/>
-                    </a:lnT>
-                    <a:lnB w="6350" cap="flat" cmpd="sng" algn="ctr">
-                      <a:solidFill>
-                        <a:srgbClr val="CDCDCD"/>
-                      </a:solidFill>
-                      <a:prstDash val="solid"/>
-                      <a:round/>
-                      <a:headEnd type="none" w="med" len="med"/>
-                      <a:tailEnd type="none" w="med" len="med"/>
-                    </a:lnB>
-                  </a:tcPr>
-                </a:tc>
-                <a:tc>
-                  <a:txBody>
-                    <a:bodyPr/>
-                    <a:lstStyle/>
-                    <a:p>
-                      <a:pPr algn="l" indent="0" marL="0">
-                        <a:buNone/>
-                      </a:pPr>
-                      <a:r>
-                        <a:rPr lang="en-US" sz="850" b="1" dirty="0">
-                          <a:solidFill>
-                            <a:srgbClr val="008564"/>
-                          </a:solidFill>
-                          <a:latin typeface="NVIDIA Sans" pitchFamily="34" charset="0"/>
-                          <a:ea typeface="NVIDIA Sans" pitchFamily="34" charset="-122"/>
-                          <a:cs typeface="NVIDIA Sans" pitchFamily="34" charset="-120"/>
-                        </a:rPr>
-                        <a:t>torch 2.7.1  (−37); mixed attn  (−30)</a:t>
-                      </a:r>
-                      <a:endParaRPr lang="en-US" sz="850" dirty="0">
-                        <a:latin typeface="NVIDIA Sans" charset="0"/>
-                        <a:ea typeface="NVIDIA Sans" charset="0"/>
-                        <a:cs typeface="NVIDIA Sans" charset="0"/>
-                      </a:endParaRPr>
-                    </a:p>
-                  </a:txBody>
-                  <a:tcPr marL="91440" marR="91440" marT="45720" marB="45720" anchor="ctr">
-                    <a:lnL w="6350" cap="flat" cmpd="sng" algn="ctr">
-                      <a:solidFill>
-                        <a:srgbClr val="CDCDCD"/>
-                      </a:solidFill>
-                      <a:prstDash val="solid"/>
-                      <a:round/>
-                      <a:headEnd type="none" w="med" len="med"/>
-                      <a:tailEnd type="none" w="med" len="med"/>
-                    </a:lnL>
-                    <a:lnR w="6350" cap="flat" cmpd="sng" algn="ctr">
-                      <a:solidFill>
-                        <a:srgbClr val="CDCDCD"/>
-                      </a:solidFill>
-                      <a:prstDash val="solid"/>
-                      <a:round/>
-                      <a:headEnd type="none" w="med" len="med"/>
-                      <a:tailEnd type="none" w="med" len="med"/>
-                    </a:lnR>
-                    <a:lnT w="6350" cap="flat" cmpd="sng" algn="ctr">
-                      <a:solidFill>
-                        <a:srgbClr val="CDCDCD"/>
-                      </a:solidFill>
-                      <a:prstDash val="solid"/>
-                      <a:round/>
-                      <a:headEnd type="none" w="med" len="med"/>
-                      <a:tailEnd type="none" w="med" len="med"/>
-                    </a:lnT>
-                    <a:lnB w="6350" cap="flat" cmpd="sng" algn="ctr">
-                      <a:solidFill>
-                        <a:srgbClr val="CDCDCD"/>
-                      </a:solidFill>
-                      <a:prstDash val="solid"/>
-                      <a:round/>
-                      <a:headEnd type="none" w="med" len="med"/>
-                      <a:tailEnd type="none" w="med" len="med"/>
-                    </a:lnB>
-                  </a:tcPr>
-                </a:tc>
-              </a:tr>
             </a:tbl>
           </a:graphicData>
         </a:graphic>
       </p:graphicFrame>
       <p:sp>
         <p:nvSpPr>
-          <p:cNvPr id="241" name="Text 238"/>
+          <p:cNvPr id="252" name="Text 249"/>
           <p:cNvSpPr/>
           <p:nvPr/>
         </p:nvSpPr>
@@ -14846,7 +14964,7 @@
       </p:sp>
       <p:sp>
         <p:nvSpPr>
-          <p:cNvPr id="242" name="Text 239"/>
+          <p:cNvPr id="253" name="Text 250"/>
           <p:cNvSpPr/>
           <p:nvPr/>
         </p:nvSpPr>
@@ -14885,7 +15003,7 @@
       </p:sp>
       <p:sp>
         <p:nvSpPr>
-          <p:cNvPr id="243" name="Shape 240"/>
+          <p:cNvPr id="254" name="Shape 251"/>
           <p:cNvSpPr/>
           <p:nvPr/>
         </p:nvSpPr>
@@ -14905,7 +15023,7 @@
       </p:sp>
       <p:pic>
         <p:nvPicPr>
-          <p:cNvPr id="244" name="Image 0" descr="/app/logos/nvidia-logo-blk-sm.png">    </p:cNvPr>
+          <p:cNvPr id="255" name="Image 0" descr="/app/logos/nvidia-logo-blk-sm.png">    </p:cNvPr>
           <p:cNvPicPr>
             <a:picLocks noChangeAspect="1"/>
           </p:cNvPicPr>
@@ -15031,7 +15149,7 @@
                 <a:ea typeface="NVIDIA Sans" pitchFamily="34" charset="-122"/>
                 <a:cs typeface="NVIDIA Sans" pitchFamily="34" charset="-120"/>
               </a:rPr>
-              <a:t>Six measured steps, ms per step — each level profiled on the same node</a:t>
+              <a:t>Actual step time (ms) after each optimization lands — same node, steady-state p50</a:t>
             </a:r>
             <a:endParaRPr lang="en-US" sz="1500" dirty="0"/>
           </a:p>
@@ -15355,8 +15473,8 @@
         </p:nvSpPr>
         <p:spPr>
           <a:xfrm>
-            <a:off x="1166513" y="1325880"/>
-            <a:ext cx="841248" cy="2331720"/>
+            <a:off x="1219200" y="1325880"/>
+            <a:ext cx="914400" cy="2331720"/>
           </a:xfrm>
           <a:prstGeom prst="rect">
             <a:avLst/>
@@ -15375,8 +15493,8 @@
         </p:nvSpPr>
         <p:spPr>
           <a:xfrm>
-            <a:off x="1166513" y="1069848"/>
-            <a:ext cx="841248" cy="228600"/>
+            <a:off x="1127760" y="1069848"/>
+            <a:ext cx="1097280" cy="228600"/>
           </a:xfrm>
           <a:prstGeom prst="rect">
             <a:avLst/>
@@ -15392,7 +15510,7 @@
               <a:buNone/>
             </a:pPr>
             <a:r>
-              <a:rPr lang="en-US" sz="1200" b="1" dirty="0">
+              <a:rPr lang="en-US" sz="1300" b="1" dirty="0">
                 <a:solidFill>
                   <a:srgbClr val="000000"/>
                 </a:solidFill>
@@ -15402,7 +15520,7 @@
               </a:rPr>
               <a:t>800</a:t>
             </a:r>
-            <a:endParaRPr lang="en-US" sz="1200" dirty="0"/>
+            <a:endParaRPr lang="en-US" sz="1300" dirty="0"/>
           </a:p>
         </p:txBody>
       </p:sp>
@@ -15415,7 +15533,7 @@
         <p:spPr>
           <a:xfrm>
             <a:off x="996696" y="3730752"/>
-            <a:ext cx="1180882" cy="411480"/>
+            <a:ext cx="1359408" cy="411480"/>
           </a:xfrm>
           <a:prstGeom prst="rect">
             <a:avLst/>
@@ -15443,149 +15561,6 @@
             </a:r>
             <a:endParaRPr lang="en-US" sz="950" dirty="0"/>
           </a:p>
-        </p:txBody>
-      </p:sp>
-      <p:sp>
-        <p:nvSpPr>
-          <p:cNvPr id="17" name="Shape 15"/>
-          <p:cNvSpPr/>
-          <p:nvPr/>
-        </p:nvSpPr>
-        <p:spPr>
-          <a:xfrm>
-            <a:off x="2237667" y="1325880"/>
-            <a:ext cx="841248" cy="635394"/>
-          </a:xfrm>
-          <a:prstGeom prst="rect">
-            <a:avLst/>
-          </a:prstGeom>
-          <a:solidFill>
-            <a:srgbClr val="008564"/>
-          </a:solidFill>
-          <a:ln/>
-        </p:spPr>
-      </p:sp>
-      <p:sp>
-        <p:nvSpPr>
-          <p:cNvPr id="18" name="Shape 16"/>
-          <p:cNvSpPr/>
-          <p:nvPr/>
-        </p:nvSpPr>
-        <p:spPr>
-          <a:xfrm>
-            <a:off x="2007761" y="1325880"/>
-            <a:ext cx="229906" cy="0"/>
-          </a:xfrm>
-          <a:prstGeom prst="line">
-            <a:avLst/>
-          </a:prstGeom>
-          <a:noFill/>
-          <a:ln w="9525">
-            <a:solidFill>
-              <a:srgbClr val="8C8C8C"/>
-            </a:solidFill>
-            <a:prstDash val="dash"/>
-          </a:ln>
-        </p:spPr>
-      </p:sp>
-      <p:sp>
-        <p:nvSpPr>
-          <p:cNvPr id="19" name="Text 17"/>
-          <p:cNvSpPr/>
-          <p:nvPr/>
-        </p:nvSpPr>
-        <p:spPr>
-          <a:xfrm>
-            <a:off x="2237667" y="1088136"/>
-            <a:ext cx="841248" cy="201168"/>
-          </a:xfrm>
-          <a:prstGeom prst="rect">
-            <a:avLst/>
-          </a:prstGeom>
-          <a:noFill/>
-          <a:ln/>
-        </p:spPr>
-        <p:txBody>
-          <a:bodyPr wrap="square" lIns="0" tIns="0" rIns="0" bIns="0" rtlCol="0" anchor="ctr"/>
-          <a:lstStyle/>
-          <a:p>
-            <a:pPr algn="ctr" indent="0" marL="0">
-              <a:buNone/>
-            </a:pPr>
-            <a:r>
-              <a:rPr lang="en-US" sz="1100" b="1" dirty="0">
-                <a:solidFill>
-                  <a:srgbClr val="008564"/>
-                </a:solidFill>
-                <a:latin typeface="NVIDIA Sans" pitchFamily="34" charset="0"/>
-                <a:ea typeface="NVIDIA Sans" pitchFamily="34" charset="-122"/>
-                <a:cs typeface="NVIDIA Sans" pitchFamily="34" charset="-120"/>
-              </a:rPr>
-              <a:t>-218</a:t>
-            </a:r>
-            <a:endParaRPr lang="en-US" sz="1100" dirty="0"/>
-          </a:p>
-        </p:txBody>
-      </p:sp>
-      <p:sp>
-        <p:nvSpPr>
-          <p:cNvPr id="20" name="Text 18"/>
-          <p:cNvSpPr/>
-          <p:nvPr/>
-        </p:nvSpPr>
-        <p:spPr>
-          <a:xfrm>
-            <a:off x="2237667" y="1988706"/>
-            <a:ext cx="841248" cy="182880"/>
-          </a:xfrm>
-          <a:prstGeom prst="rect">
-            <a:avLst/>
-          </a:prstGeom>
-          <a:noFill/>
-          <a:ln/>
-        </p:spPr>
-        <p:txBody>
-          <a:bodyPr wrap="square" lIns="0" tIns="0" rIns="0" bIns="0" rtlCol="0" anchor="ctr"/>
-          <a:lstStyle/>
-          <a:p>
-            <a:pPr algn="ctr" indent="0" marL="0">
-              <a:buNone/>
-            </a:pPr>
-            <a:r>
-              <a:rPr lang="en-US" sz="900" dirty="0">
-                <a:solidFill>
-                  <a:srgbClr val="5E5E5E"/>
-                </a:solidFill>
-                <a:latin typeface="NVIDIA Sans" pitchFamily="34" charset="0"/>
-                <a:ea typeface="NVIDIA Sans" pitchFamily="34" charset="-122"/>
-                <a:cs typeface="NVIDIA Sans" pitchFamily="34" charset="-120"/>
-              </a:rPr>
-              <a:t>582</a:t>
-            </a:r>
-            <a:endParaRPr lang="en-US" sz="900" dirty="0"/>
-          </a:p>
-        </p:txBody>
-      </p:sp>
-      <p:sp>
-        <p:nvSpPr>
-          <p:cNvPr id="21" name="Text 19"/>
-          <p:cNvSpPr/>
-          <p:nvPr/>
-        </p:nvSpPr>
-        <p:spPr>
-          <a:xfrm>
-            <a:off x="2067850" y="3730752"/>
-            <a:ext cx="1180882" cy="411480"/>
-          </a:xfrm>
-          <a:prstGeom prst="rect">
-            <a:avLst/>
-          </a:prstGeom>
-          <a:noFill/>
-          <a:ln/>
-        </p:spPr>
-        <p:txBody>
-          <a:bodyPr wrap="square" lIns="0" tIns="0" rIns="0" bIns="0" rtlCol="0" anchor="t"/>
-          <a:lstStyle/>
           <a:p>
             <a:pPr algn="ctr" indent="0" marL="0">
               <a:buNone/>
@@ -15599,7 +15574,105 @@
                 <a:ea typeface="NVIDIA Sans" pitchFamily="34" charset="-122"/>
                 <a:cs typeface="NVIDIA Sans" pitchFamily="34" charset="-120"/>
               </a:rPr>
-              <a:t>bf16</a:t>
+              <a:t>(fp32 head, eager)</a:t>
+            </a:r>
+            <a:endParaRPr lang="en-US" sz="950" dirty="0"/>
+          </a:p>
+        </p:txBody>
+      </p:sp>
+      <p:sp>
+        <p:nvSpPr>
+          <p:cNvPr id="17" name="Shape 15"/>
+          <p:cNvSpPr/>
+          <p:nvPr/>
+        </p:nvSpPr>
+        <p:spPr>
+          <a:xfrm>
+            <a:off x="2468880" y="1961274"/>
+            <a:ext cx="914400" cy="1696326"/>
+          </a:xfrm>
+          <a:prstGeom prst="rect">
+            <a:avLst/>
+          </a:prstGeom>
+          <a:solidFill>
+            <a:srgbClr val="008564"/>
+          </a:solidFill>
+          <a:ln/>
+        </p:spPr>
+      </p:sp>
+      <p:sp>
+        <p:nvSpPr>
+          <p:cNvPr id="18" name="Text 16"/>
+          <p:cNvSpPr/>
+          <p:nvPr/>
+        </p:nvSpPr>
+        <p:spPr>
+          <a:xfrm>
+            <a:off x="2377440" y="1705242"/>
+            <a:ext cx="1097280" cy="228600"/>
+          </a:xfrm>
+          <a:prstGeom prst="rect">
+            <a:avLst/>
+          </a:prstGeom>
+          <a:noFill/>
+          <a:ln/>
+        </p:spPr>
+        <p:txBody>
+          <a:bodyPr wrap="square" lIns="0" tIns="0" rIns="0" bIns="0" rtlCol="0" anchor="ctr"/>
+          <a:lstStyle/>
+          <a:p>
+            <a:pPr algn="ctr" indent="0" marL="0">
+              <a:buNone/>
+            </a:pPr>
+            <a:r>
+              <a:rPr lang="en-US" sz="1300" b="1" dirty="0">
+                <a:solidFill>
+                  <a:srgbClr val="008564"/>
+                </a:solidFill>
+                <a:latin typeface="NVIDIA Sans" pitchFamily="34" charset="0"/>
+                <a:ea typeface="NVIDIA Sans" pitchFamily="34" charset="-122"/>
+                <a:cs typeface="NVIDIA Sans" pitchFamily="34" charset="-120"/>
+              </a:rPr>
+              <a:t>582</a:t>
+            </a:r>
+            <a:endParaRPr lang="en-US" sz="1300" dirty="0"/>
+          </a:p>
+        </p:txBody>
+      </p:sp>
+      <p:sp>
+        <p:nvSpPr>
+          <p:cNvPr id="19" name="Text 17"/>
+          <p:cNvSpPr/>
+          <p:nvPr/>
+        </p:nvSpPr>
+        <p:spPr>
+          <a:xfrm>
+            <a:off x="2246376" y="3730752"/>
+            <a:ext cx="1359408" cy="411480"/>
+          </a:xfrm>
+          <a:prstGeom prst="rect">
+            <a:avLst/>
+          </a:prstGeom>
+          <a:noFill/>
+          <a:ln/>
+        </p:spPr>
+        <p:txBody>
+          <a:bodyPr wrap="square" lIns="0" tIns="0" rIns="0" bIns="0" rtlCol="0" anchor="t"/>
+          <a:lstStyle/>
+          <a:p>
+            <a:pPr algn="ctr" indent="0" marL="0">
+              <a:buNone/>
+            </a:pPr>
+            <a:r>
+              <a:rPr lang="en-US" sz="950" dirty="0">
+                <a:solidFill>
+                  <a:srgbClr val="000000"/>
+                </a:solidFill>
+                <a:latin typeface="NVIDIA Sans" pitchFamily="34" charset="0"/>
+                <a:ea typeface="NVIDIA Sans" pitchFamily="34" charset="-122"/>
+                <a:cs typeface="NVIDIA Sans" pitchFamily="34" charset="-120"/>
+              </a:rPr>
+              <a:t>+ bf16</a:t>
             </a:r>
             <a:endParaRPr lang="en-US" sz="950" dirty="0"/>
           </a:p>
@@ -15624,14 +15697,14 @@
       </p:sp>
       <p:sp>
         <p:nvSpPr>
-          <p:cNvPr id="22" name="Shape 20"/>
-          <p:cNvSpPr/>
-          <p:nvPr/>
-        </p:nvSpPr>
-        <p:spPr>
-          <a:xfrm>
-            <a:off x="3308822" y="1961274"/>
-            <a:ext cx="841248" cy="107842"/>
+          <p:cNvPr id="20" name="Shape 18"/>
+          <p:cNvSpPr/>
+          <p:nvPr/>
+        </p:nvSpPr>
+        <p:spPr>
+          <a:xfrm>
+            <a:off x="3718560" y="2410130"/>
+            <a:ext cx="914400" cy="1247470"/>
           </a:xfrm>
           <a:prstGeom prst="rect">
             <a:avLst/>
@@ -15644,37 +15717,14 @@
       </p:sp>
       <p:sp>
         <p:nvSpPr>
-          <p:cNvPr id="23" name="Shape 21"/>
-          <p:cNvSpPr/>
-          <p:nvPr/>
-        </p:nvSpPr>
-        <p:spPr>
-          <a:xfrm>
-            <a:off x="3078915" y="1961274"/>
-            <a:ext cx="229906" cy="0"/>
-          </a:xfrm>
-          <a:prstGeom prst="line">
-            <a:avLst/>
-          </a:prstGeom>
-          <a:noFill/>
-          <a:ln w="9525">
-            <a:solidFill>
-              <a:srgbClr val="8C8C8C"/>
-            </a:solidFill>
-            <a:prstDash val="dash"/>
-          </a:ln>
-        </p:spPr>
-      </p:sp>
-      <p:sp>
-        <p:nvSpPr>
-          <p:cNvPr id="24" name="Text 22"/>
-          <p:cNvSpPr/>
-          <p:nvPr/>
-        </p:nvSpPr>
-        <p:spPr>
-          <a:xfrm>
-            <a:off x="3308822" y="1723530"/>
-            <a:ext cx="841248" cy="201168"/>
+          <p:cNvPr id="21" name="Text 19"/>
+          <p:cNvSpPr/>
+          <p:nvPr/>
+        </p:nvSpPr>
+        <p:spPr>
+          <a:xfrm>
+            <a:off x="3627120" y="2154098"/>
+            <a:ext cx="1097280" cy="228600"/>
           </a:xfrm>
           <a:prstGeom prst="rect">
             <a:avLst/>
@@ -15690,7 +15740,7 @@
               <a:buNone/>
             </a:pPr>
             <a:r>
-              <a:rPr lang="en-US" sz="1100" b="1" dirty="0">
+              <a:rPr lang="en-US" sz="1300" b="1" dirty="0">
                 <a:solidFill>
                   <a:srgbClr val="008564"/>
                 </a:solidFill>
@@ -15698,61 +15748,22 @@
                 <a:ea typeface="NVIDIA Sans" pitchFamily="34" charset="-122"/>
                 <a:cs typeface="NVIDIA Sans" pitchFamily="34" charset="-120"/>
               </a:rPr>
-              <a:t>-37</a:t>
+              <a:t>428</a:t>
             </a:r>
-            <a:endParaRPr lang="en-US" sz="1100" dirty="0"/>
+            <a:endParaRPr lang="en-US" sz="1300" dirty="0"/>
           </a:p>
         </p:txBody>
       </p:sp>
       <p:sp>
         <p:nvSpPr>
-          <p:cNvPr id="25" name="Text 23"/>
-          <p:cNvSpPr/>
-          <p:nvPr/>
-        </p:nvSpPr>
-        <p:spPr>
-          <a:xfrm>
-            <a:off x="3308822" y="2096548"/>
-            <a:ext cx="841248" cy="182880"/>
-          </a:xfrm>
-          <a:prstGeom prst="rect">
-            <a:avLst/>
-          </a:prstGeom>
-          <a:noFill/>
-          <a:ln/>
-        </p:spPr>
-        <p:txBody>
-          <a:bodyPr wrap="square" lIns="0" tIns="0" rIns="0" bIns="0" rtlCol="0" anchor="ctr"/>
-          <a:lstStyle/>
-          <a:p>
-            <a:pPr algn="ctr" indent="0" marL="0">
-              <a:buNone/>
-            </a:pPr>
-            <a:r>
-              <a:rPr lang="en-US" sz="900" dirty="0">
-                <a:solidFill>
-                  <a:srgbClr val="5E5E5E"/>
-                </a:solidFill>
-                <a:latin typeface="NVIDIA Sans" pitchFamily="34" charset="0"/>
-                <a:ea typeface="NVIDIA Sans" pitchFamily="34" charset="-122"/>
-                <a:cs typeface="NVIDIA Sans" pitchFamily="34" charset="-120"/>
-              </a:rPr>
-              <a:t>545</a:t>
-            </a:r>
-            <a:endParaRPr lang="en-US" sz="900" dirty="0"/>
-          </a:p>
-        </p:txBody>
-      </p:sp>
-      <p:sp>
-        <p:nvSpPr>
-          <p:cNvPr id="26" name="Text 24"/>
-          <p:cNvSpPr/>
-          <p:nvPr/>
-        </p:nvSpPr>
-        <p:spPr>
-          <a:xfrm>
-            <a:off x="3139005" y="3730752"/>
-            <a:ext cx="1180882" cy="411480"/>
+          <p:cNvPr id="22" name="Text 20"/>
+          <p:cNvSpPr/>
+          <p:nvPr/>
+        </p:nvSpPr>
+        <p:spPr>
+          <a:xfrm>
+            <a:off x="3496056" y="3730752"/>
+            <a:ext cx="1359408" cy="411480"/>
           </a:xfrm>
           <a:prstGeom prst="rect">
             <a:avLst/>
@@ -15776,184 +15787,7 @@
                 <a:ea typeface="NVIDIA Sans" pitchFamily="34" charset="-122"/>
                 <a:cs typeface="NVIDIA Sans" pitchFamily="34" charset="-120"/>
               </a:rPr>
-              <a:t>torch 2.7.1</a:t>
-            </a:r>
-            <a:endParaRPr lang="en-US" sz="950" dirty="0"/>
-          </a:p>
-          <a:p>
-            <a:pPr algn="ctr" indent="0" marL="0">
-              <a:buNone/>
-            </a:pPr>
-            <a:r>
-              <a:rPr lang="en-US" sz="950" dirty="0">
-                <a:solidFill>
-                  <a:srgbClr val="000000"/>
-                </a:solidFill>
-                <a:latin typeface="NVIDIA Sans" pitchFamily="34" charset="0"/>
-                <a:ea typeface="NVIDIA Sans" pitchFamily="34" charset="-122"/>
-                <a:cs typeface="NVIDIA Sans" pitchFamily="34" charset="-120"/>
-              </a:rPr>
-              <a:t>+ NCCL 2.26</a:t>
-            </a:r>
-            <a:endParaRPr lang="en-US" sz="950" dirty="0"/>
-          </a:p>
-        </p:txBody>
-      </p:sp>
-      <p:sp>
-        <p:nvSpPr>
-          <p:cNvPr id="27" name="Shape 25"/>
-          <p:cNvSpPr/>
-          <p:nvPr/>
-        </p:nvSpPr>
-        <p:spPr>
-          <a:xfrm>
-            <a:off x="4379976" y="2069116"/>
-            <a:ext cx="841248" cy="341014"/>
-          </a:xfrm>
-          <a:prstGeom prst="rect">
-            <a:avLst/>
-          </a:prstGeom>
-          <a:solidFill>
-            <a:srgbClr val="008564"/>
-          </a:solidFill>
-          <a:ln/>
-        </p:spPr>
-      </p:sp>
-      <p:sp>
-        <p:nvSpPr>
-          <p:cNvPr id="28" name="Shape 26"/>
-          <p:cNvSpPr/>
-          <p:nvPr/>
-        </p:nvSpPr>
-        <p:spPr>
-          <a:xfrm>
-            <a:off x="4150070" y="2069116"/>
-            <a:ext cx="229906" cy="0"/>
-          </a:xfrm>
-          <a:prstGeom prst="line">
-            <a:avLst/>
-          </a:prstGeom>
-          <a:noFill/>
-          <a:ln w="9525">
-            <a:solidFill>
-              <a:srgbClr val="8C8C8C"/>
-            </a:solidFill>
-            <a:prstDash val="dash"/>
-          </a:ln>
-        </p:spPr>
-      </p:sp>
-      <p:sp>
-        <p:nvSpPr>
-          <p:cNvPr id="29" name="Text 27"/>
-          <p:cNvSpPr/>
-          <p:nvPr/>
-        </p:nvSpPr>
-        <p:spPr>
-          <a:xfrm>
-            <a:off x="4379976" y="1831372"/>
-            <a:ext cx="841248" cy="201168"/>
-          </a:xfrm>
-          <a:prstGeom prst="rect">
-            <a:avLst/>
-          </a:prstGeom>
-          <a:noFill/>
-          <a:ln/>
-        </p:spPr>
-        <p:txBody>
-          <a:bodyPr wrap="square" lIns="0" tIns="0" rIns="0" bIns="0" rtlCol="0" anchor="ctr"/>
-          <a:lstStyle/>
-          <a:p>
-            <a:pPr algn="ctr" indent="0" marL="0">
-              <a:buNone/>
-            </a:pPr>
-            <a:r>
-              <a:rPr lang="en-US" sz="1100" b="1" dirty="0">
-                <a:solidFill>
-                  <a:srgbClr val="008564"/>
-                </a:solidFill>
-                <a:latin typeface="NVIDIA Sans" pitchFamily="34" charset="0"/>
-                <a:ea typeface="NVIDIA Sans" pitchFamily="34" charset="-122"/>
-                <a:cs typeface="NVIDIA Sans" pitchFamily="34" charset="-120"/>
-              </a:rPr>
-              <a:t>-117</a:t>
-            </a:r>
-            <a:endParaRPr lang="en-US" sz="1100" dirty="0"/>
-          </a:p>
-        </p:txBody>
-      </p:sp>
-      <p:sp>
-        <p:nvSpPr>
-          <p:cNvPr id="30" name="Text 28"/>
-          <p:cNvSpPr/>
-          <p:nvPr/>
-        </p:nvSpPr>
-        <p:spPr>
-          <a:xfrm>
-            <a:off x="4379976" y="2437562"/>
-            <a:ext cx="841248" cy="182880"/>
-          </a:xfrm>
-          <a:prstGeom prst="rect">
-            <a:avLst/>
-          </a:prstGeom>
-          <a:noFill/>
-          <a:ln/>
-        </p:spPr>
-        <p:txBody>
-          <a:bodyPr wrap="square" lIns="0" tIns="0" rIns="0" bIns="0" rtlCol="0" anchor="ctr"/>
-          <a:lstStyle/>
-          <a:p>
-            <a:pPr algn="ctr" indent="0" marL="0">
-              <a:buNone/>
-            </a:pPr>
-            <a:r>
-              <a:rPr lang="en-US" sz="900" dirty="0">
-                <a:solidFill>
-                  <a:srgbClr val="5E5E5E"/>
-                </a:solidFill>
-                <a:latin typeface="NVIDIA Sans" pitchFamily="34" charset="0"/>
-                <a:ea typeface="NVIDIA Sans" pitchFamily="34" charset="-122"/>
-                <a:cs typeface="NVIDIA Sans" pitchFamily="34" charset="-120"/>
-              </a:rPr>
-              <a:t>428</a:t>
-            </a:r>
-            <a:endParaRPr lang="en-US" sz="900" dirty="0"/>
-          </a:p>
-        </p:txBody>
-      </p:sp>
-      <p:sp>
-        <p:nvSpPr>
-          <p:cNvPr id="31" name="Text 29"/>
-          <p:cNvSpPr/>
-          <p:nvPr/>
-        </p:nvSpPr>
-        <p:spPr>
-          <a:xfrm>
-            <a:off x="4210159" y="3730752"/>
-            <a:ext cx="1180882" cy="411480"/>
-          </a:xfrm>
-          <a:prstGeom prst="rect">
-            <a:avLst/>
-          </a:prstGeom>
-          <a:noFill/>
-          <a:ln/>
-        </p:spPr>
-        <p:txBody>
-          <a:bodyPr wrap="square" lIns="0" tIns="0" rIns="0" bIns="0" rtlCol="0" anchor="t"/>
-          <a:lstStyle/>
-          <a:p>
-            <a:pPr algn="ctr" indent="0" marL="0">
-              <a:buNone/>
-            </a:pPr>
-            <a:r>
-              <a:rPr lang="en-US" sz="950" dirty="0">
-                <a:solidFill>
-                  <a:srgbClr val="000000"/>
-                </a:solidFill>
-                <a:latin typeface="NVIDIA Sans" pitchFamily="34" charset="0"/>
-                <a:ea typeface="NVIDIA Sans" pitchFamily="34" charset="-122"/>
-                <a:cs typeface="NVIDIA Sans" pitchFamily="34" charset="-120"/>
-              </a:rPr>
-              <a:t>Pipeline</a:t>
+              <a:t>+ Pipeline</a:t>
             </a:r>
             <a:endParaRPr lang="en-US" sz="950" dirty="0"/>
           </a:p>
@@ -15978,14 +15812,14 @@
       </p:sp>
       <p:sp>
         <p:nvSpPr>
-          <p:cNvPr id="32" name="Shape 30"/>
-          <p:cNvSpPr/>
-          <p:nvPr/>
-        </p:nvSpPr>
-        <p:spPr>
-          <a:xfrm>
-            <a:off x="5451130" y="2410130"/>
-            <a:ext cx="841248" cy="87440"/>
+          <p:cNvPr id="23" name="Shape 21"/>
+          <p:cNvSpPr/>
+          <p:nvPr/>
+        </p:nvSpPr>
+        <p:spPr>
+          <a:xfrm>
+            <a:off x="4968240" y="2497569"/>
+            <a:ext cx="914400" cy="1160031"/>
           </a:xfrm>
           <a:prstGeom prst="rect">
             <a:avLst/>
@@ -15998,37 +15832,14 @@
       </p:sp>
       <p:sp>
         <p:nvSpPr>
-          <p:cNvPr id="33" name="Shape 31"/>
-          <p:cNvSpPr/>
-          <p:nvPr/>
-        </p:nvSpPr>
-        <p:spPr>
-          <a:xfrm>
-            <a:off x="5221224" y="2410130"/>
-            <a:ext cx="229906" cy="0"/>
-          </a:xfrm>
-          <a:prstGeom prst="line">
-            <a:avLst/>
-          </a:prstGeom>
-          <a:noFill/>
-          <a:ln w="9525">
-            <a:solidFill>
-              <a:srgbClr val="8C8C8C"/>
-            </a:solidFill>
-            <a:prstDash val="dash"/>
-          </a:ln>
-        </p:spPr>
-      </p:sp>
-      <p:sp>
-        <p:nvSpPr>
-          <p:cNvPr id="34" name="Text 32"/>
-          <p:cNvSpPr/>
-          <p:nvPr/>
-        </p:nvSpPr>
-        <p:spPr>
-          <a:xfrm>
-            <a:off x="5451130" y="2172386"/>
-            <a:ext cx="841248" cy="201168"/>
+          <p:cNvPr id="24" name="Text 22"/>
+          <p:cNvSpPr/>
+          <p:nvPr/>
+        </p:nvSpPr>
+        <p:spPr>
+          <a:xfrm>
+            <a:off x="4876800" y="2241537"/>
+            <a:ext cx="1097280" cy="228600"/>
           </a:xfrm>
           <a:prstGeom prst="rect">
             <a:avLst/>
@@ -16044,7 +15855,7 @@
               <a:buNone/>
             </a:pPr>
             <a:r>
-              <a:rPr lang="en-US" sz="1100" b="1" dirty="0">
+              <a:rPr lang="en-US" sz="1300" b="1" dirty="0">
                 <a:solidFill>
                   <a:srgbClr val="008564"/>
                 </a:solidFill>
@@ -16052,61 +15863,22 @@
                 <a:ea typeface="NVIDIA Sans" pitchFamily="34" charset="-122"/>
                 <a:cs typeface="NVIDIA Sans" pitchFamily="34" charset="-120"/>
               </a:rPr>
-              <a:t>-30</a:t>
-            </a:r>
-            <a:endParaRPr lang="en-US" sz="1100" dirty="0"/>
-          </a:p>
-        </p:txBody>
-      </p:sp>
-      <p:sp>
-        <p:nvSpPr>
-          <p:cNvPr id="35" name="Text 33"/>
-          <p:cNvSpPr/>
-          <p:nvPr/>
-        </p:nvSpPr>
-        <p:spPr>
-          <a:xfrm>
-            <a:off x="5451130" y="2525001"/>
-            <a:ext cx="841248" cy="182880"/>
-          </a:xfrm>
-          <a:prstGeom prst="rect">
-            <a:avLst/>
-          </a:prstGeom>
-          <a:noFill/>
-          <a:ln/>
-        </p:spPr>
-        <p:txBody>
-          <a:bodyPr wrap="square" lIns="0" tIns="0" rIns="0" bIns="0" rtlCol="0" anchor="ctr"/>
-          <a:lstStyle/>
-          <a:p>
-            <a:pPr algn="ctr" indent="0" marL="0">
-              <a:buNone/>
-            </a:pPr>
-            <a:r>
-              <a:rPr lang="en-US" sz="900" dirty="0">
-                <a:solidFill>
-                  <a:srgbClr val="5E5E5E"/>
-                </a:solidFill>
-                <a:latin typeface="NVIDIA Sans" pitchFamily="34" charset="0"/>
-                <a:ea typeface="NVIDIA Sans" pitchFamily="34" charset="-122"/>
-                <a:cs typeface="NVIDIA Sans" pitchFamily="34" charset="-120"/>
-              </a:rPr>
               <a:t>398</a:t>
             </a:r>
-            <a:endParaRPr lang="en-US" sz="900" dirty="0"/>
+            <a:endParaRPr lang="en-US" sz="1300" dirty="0"/>
           </a:p>
         </p:txBody>
       </p:sp>
       <p:sp>
         <p:nvSpPr>
-          <p:cNvPr id="36" name="Text 34"/>
-          <p:cNvSpPr/>
-          <p:nvPr/>
-        </p:nvSpPr>
-        <p:spPr>
-          <a:xfrm>
-            <a:off x="5281313" y="3730752"/>
-            <a:ext cx="1180882" cy="411480"/>
+          <p:cNvPr id="25" name="Text 23"/>
+          <p:cNvSpPr/>
+          <p:nvPr/>
+        </p:nvSpPr>
+        <p:spPr>
+          <a:xfrm>
+            <a:off x="4745736" y="3730752"/>
+            <a:ext cx="1359408" cy="411480"/>
           </a:xfrm>
           <a:prstGeom prst="rect">
             <a:avLst/>
@@ -16130,7 +15902,7 @@
                 <a:ea typeface="NVIDIA Sans" pitchFamily="34" charset="-122"/>
                 <a:cs typeface="NVIDIA Sans" pitchFamily="34" charset="-120"/>
               </a:rPr>
-              <a:t>Mixed</a:t>
+              <a:t>+ Mixed</a:t>
             </a:r>
             <a:endParaRPr lang="en-US" sz="950" dirty="0"/>
           </a:p>
@@ -16155,14 +15927,14 @@
       </p:sp>
       <p:sp>
         <p:nvSpPr>
-          <p:cNvPr id="37" name="Shape 35"/>
-          <p:cNvSpPr/>
-          <p:nvPr/>
-        </p:nvSpPr>
-        <p:spPr>
-          <a:xfrm>
-            <a:off x="6522285" y="2497569"/>
-            <a:ext cx="841248" cy="370161"/>
+          <p:cNvPr id="26" name="Shape 24"/>
+          <p:cNvSpPr/>
+          <p:nvPr/>
+        </p:nvSpPr>
+        <p:spPr>
+          <a:xfrm>
+            <a:off x="6217920" y="2867730"/>
+            <a:ext cx="914400" cy="789870"/>
           </a:xfrm>
           <a:prstGeom prst="rect">
             <a:avLst/>
@@ -16175,37 +15947,14 @@
       </p:sp>
       <p:sp>
         <p:nvSpPr>
-          <p:cNvPr id="38" name="Shape 36"/>
-          <p:cNvSpPr/>
-          <p:nvPr/>
-        </p:nvSpPr>
-        <p:spPr>
-          <a:xfrm>
-            <a:off x="6292378" y="2497569"/>
-            <a:ext cx="229906" cy="0"/>
-          </a:xfrm>
-          <a:prstGeom prst="line">
-            <a:avLst/>
-          </a:prstGeom>
-          <a:noFill/>
-          <a:ln w="9525">
-            <a:solidFill>
-              <a:srgbClr val="8C8C8C"/>
-            </a:solidFill>
-            <a:prstDash val="dash"/>
-          </a:ln>
-        </p:spPr>
-      </p:sp>
-      <p:sp>
-        <p:nvSpPr>
-          <p:cNvPr id="39" name="Text 37"/>
-          <p:cNvSpPr/>
-          <p:nvPr/>
-        </p:nvSpPr>
-        <p:spPr>
-          <a:xfrm>
-            <a:off x="6522285" y="2259825"/>
-            <a:ext cx="841248" cy="201168"/>
+          <p:cNvPr id="27" name="Text 25"/>
+          <p:cNvSpPr/>
+          <p:nvPr/>
+        </p:nvSpPr>
+        <p:spPr>
+          <a:xfrm>
+            <a:off x="6126480" y="2611698"/>
+            <a:ext cx="1097280" cy="228600"/>
           </a:xfrm>
           <a:prstGeom prst="rect">
             <a:avLst/>
@@ -16221,7 +15970,7 @@
               <a:buNone/>
             </a:pPr>
             <a:r>
-              <a:rPr lang="en-US" sz="1100" b="1" dirty="0">
+              <a:rPr lang="en-US" sz="1300" b="1" dirty="0">
                 <a:solidFill>
                   <a:srgbClr val="008564"/>
                 </a:solidFill>
@@ -16229,61 +15978,22 @@
                 <a:ea typeface="NVIDIA Sans" pitchFamily="34" charset="-122"/>
                 <a:cs typeface="NVIDIA Sans" pitchFamily="34" charset="-120"/>
               </a:rPr>
-              <a:t>-126</a:t>
-            </a:r>
-            <a:endParaRPr lang="en-US" sz="1100" dirty="0"/>
-          </a:p>
-        </p:txBody>
-      </p:sp>
-      <p:sp>
-        <p:nvSpPr>
-          <p:cNvPr id="40" name="Text 38"/>
-          <p:cNvSpPr/>
-          <p:nvPr/>
-        </p:nvSpPr>
-        <p:spPr>
-          <a:xfrm>
-            <a:off x="6522285" y="2895162"/>
-            <a:ext cx="841248" cy="182880"/>
-          </a:xfrm>
-          <a:prstGeom prst="rect">
-            <a:avLst/>
-          </a:prstGeom>
-          <a:noFill/>
-          <a:ln/>
-        </p:spPr>
-        <p:txBody>
-          <a:bodyPr wrap="square" lIns="0" tIns="0" rIns="0" bIns="0" rtlCol="0" anchor="ctr"/>
-          <a:lstStyle/>
-          <a:p>
-            <a:pPr algn="ctr" indent="0" marL="0">
-              <a:buNone/>
-            </a:pPr>
-            <a:r>
-              <a:rPr lang="en-US" sz="900" dirty="0">
-                <a:solidFill>
-                  <a:srgbClr val="5E5E5E"/>
-                </a:solidFill>
-                <a:latin typeface="NVIDIA Sans" pitchFamily="34" charset="0"/>
-                <a:ea typeface="NVIDIA Sans" pitchFamily="34" charset="-122"/>
-                <a:cs typeface="NVIDIA Sans" pitchFamily="34" charset="-120"/>
-              </a:rPr>
               <a:t>271</a:t>
             </a:r>
-            <a:endParaRPr lang="en-US" sz="900" dirty="0"/>
+            <a:endParaRPr lang="en-US" sz="1300" dirty="0"/>
           </a:p>
         </p:txBody>
       </p:sp>
       <p:sp>
         <p:nvSpPr>
-          <p:cNvPr id="41" name="Text 39"/>
-          <p:cNvSpPr/>
-          <p:nvPr/>
-        </p:nvSpPr>
-        <p:spPr>
-          <a:xfrm>
-            <a:off x="6352467" y="3730752"/>
-            <a:ext cx="1180882" cy="411480"/>
+          <p:cNvPr id="28" name="Text 26"/>
+          <p:cNvSpPr/>
+          <p:nvPr/>
+        </p:nvSpPr>
+        <p:spPr>
+          <a:xfrm>
+            <a:off x="5995416" y="3730752"/>
+            <a:ext cx="1359408" cy="411480"/>
           </a:xfrm>
           <a:prstGeom prst="rect">
             <a:avLst/>
@@ -16307,7 +16017,7 @@
                 <a:ea typeface="NVIDIA Sans" pitchFamily="34" charset="-122"/>
                 <a:cs typeface="NVIDIA Sans" pitchFamily="34" charset="-120"/>
               </a:rPr>
-              <a:t>CUDA Graphs</a:t>
+              <a:t>+ CUDA Graphs</a:t>
             </a:r>
             <a:endParaRPr lang="en-US" sz="950" dirty="0"/>
           </a:p>
@@ -16332,57 +16042,34 @@
       </p:sp>
       <p:sp>
         <p:nvSpPr>
-          <p:cNvPr id="42" name="Shape 40"/>
-          <p:cNvSpPr/>
-          <p:nvPr/>
-        </p:nvSpPr>
-        <p:spPr>
-          <a:xfrm>
-            <a:off x="7363533" y="2867730"/>
-            <a:ext cx="229906" cy="0"/>
-          </a:xfrm>
-          <a:prstGeom prst="line">
-            <a:avLst/>
-          </a:prstGeom>
-          <a:noFill/>
-          <a:ln w="9525">
-            <a:solidFill>
-              <a:srgbClr val="8C8C8C"/>
-            </a:solidFill>
-            <a:prstDash val="dash"/>
-          </a:ln>
-        </p:spPr>
-      </p:sp>
-      <p:sp>
-        <p:nvSpPr>
-          <p:cNvPr id="43" name="Shape 41"/>
-          <p:cNvSpPr/>
-          <p:nvPr/>
-        </p:nvSpPr>
-        <p:spPr>
-          <a:xfrm>
-            <a:off x="7593439" y="2931852"/>
-            <a:ext cx="841248" cy="725748"/>
-          </a:xfrm>
-          <a:prstGeom prst="rect">
-            <a:avLst/>
-          </a:prstGeom>
-          <a:solidFill>
-            <a:srgbClr val="76B900"/>
-          </a:solidFill>
-          <a:ln/>
-        </p:spPr>
-      </p:sp>
-      <p:sp>
-        <p:nvSpPr>
-          <p:cNvPr id="44" name="Text 42"/>
-          <p:cNvSpPr/>
-          <p:nvPr/>
-        </p:nvSpPr>
-        <p:spPr>
-          <a:xfrm>
-            <a:off x="7593439" y="2675820"/>
-            <a:ext cx="841248" cy="228600"/>
+          <p:cNvPr id="29" name="Shape 27"/>
+          <p:cNvSpPr/>
+          <p:nvPr/>
+        </p:nvSpPr>
+        <p:spPr>
+          <a:xfrm>
+            <a:off x="7467600" y="2931852"/>
+            <a:ext cx="914400" cy="725748"/>
+          </a:xfrm>
+          <a:prstGeom prst="rect">
+            <a:avLst/>
+          </a:prstGeom>
+          <a:solidFill>
+            <a:srgbClr val="76B900"/>
+          </a:solidFill>
+          <a:ln/>
+        </p:spPr>
+      </p:sp>
+      <p:sp>
+        <p:nvSpPr>
+          <p:cNvPr id="30" name="Text 28"/>
+          <p:cNvSpPr/>
+          <p:nvPr/>
+        </p:nvSpPr>
+        <p:spPr>
+          <a:xfrm>
+            <a:off x="7376160" y="2675820"/>
+            <a:ext cx="1097280" cy="228600"/>
           </a:xfrm>
           <a:prstGeom prst="rect">
             <a:avLst/>
@@ -16414,14 +16101,14 @@
       </p:sp>
       <p:sp>
         <p:nvSpPr>
-          <p:cNvPr id="45" name="Text 43"/>
-          <p:cNvSpPr/>
-          <p:nvPr/>
-        </p:nvSpPr>
-        <p:spPr>
-          <a:xfrm>
-            <a:off x="7423622" y="3730752"/>
-            <a:ext cx="1180882" cy="411480"/>
+          <p:cNvPr id="31" name="Text 29"/>
+          <p:cNvSpPr/>
+          <p:nvPr/>
+        </p:nvSpPr>
+        <p:spPr>
+          <a:xfrm>
+            <a:off x="7245096" y="3730752"/>
+            <a:ext cx="1359408" cy="411480"/>
           </a:xfrm>
           <a:prstGeom prst="rect">
             <a:avLst/>
@@ -16445,7 +16132,7 @@
                 <a:ea typeface="NVIDIA Sans" pitchFamily="34" charset="-122"/>
                 <a:cs typeface="NVIDIA Sans" pitchFamily="34" charset="-120"/>
               </a:rPr>
-              <a:t>ZeRO-2 comm</a:t>
+              <a:t>+ ZeRO-2</a:t>
             </a:r>
             <a:endParaRPr lang="en-US" sz="950" dirty="0"/>
           </a:p>
@@ -16462,7 +16149,7 @@
                 <a:ea typeface="NVIDIA Sans" pitchFamily="34" charset="-122"/>
                 <a:cs typeface="NVIDIA Sans" pitchFamily="34" charset="-120"/>
               </a:rPr>
-              <a:t>tuning</a:t>
+              <a:t>comm tuning</a:t>
             </a:r>
             <a:endParaRPr lang="en-US" sz="950" dirty="0"/>
           </a:p>
@@ -16470,14 +16157,53 @@
       </p:sp>
       <p:sp>
         <p:nvSpPr>
-          <p:cNvPr id="46" name="Text 44"/>
-          <p:cNvSpPr/>
-          <p:nvPr/>
-        </p:nvSpPr>
-        <p:spPr>
-          <a:xfrm>
-            <a:off x="1051560" y="4187952"/>
-            <a:ext cx="7498080" cy="219456"/>
+          <p:cNvPr id="32" name="Text 30"/>
+          <p:cNvSpPr/>
+          <p:nvPr/>
+        </p:nvSpPr>
+        <p:spPr>
+          <a:xfrm>
+            <a:off x="6172200" y="1413319"/>
+            <a:ext cx="2377440" cy="228600"/>
+          </a:xfrm>
+          <a:prstGeom prst="rect">
+            <a:avLst/>
+          </a:prstGeom>
+          <a:noFill/>
+          <a:ln/>
+        </p:spPr>
+        <p:txBody>
+          <a:bodyPr wrap="square" lIns="0" tIns="0" rIns="0" bIns="0" rtlCol="0" anchor="ctr"/>
+          <a:lstStyle/>
+          <a:p>
+            <a:pPr algn="r" indent="0" marL="0">
+              <a:buNone/>
+            </a:pPr>
+            <a:r>
+              <a:rPr lang="en-US" sz="1100" b="1" dirty="0">
+                <a:solidFill>
+                  <a:srgbClr val="76B900"/>
+                </a:solidFill>
+                <a:latin typeface="NVIDIA Sans" pitchFamily="34" charset="0"/>
+                <a:ea typeface="NVIDIA Sans" pitchFamily="34" charset="-122"/>
+                <a:cs typeface="NVIDIA Sans" pitchFamily="34" charset="-120"/>
+              </a:rPr>
+              <a:t>3.2× faster end to end</a:t>
+            </a:r>
+            <a:endParaRPr lang="en-US" sz="1100" dirty="0"/>
+          </a:p>
+        </p:txBody>
+      </p:sp>
+      <p:sp>
+        <p:nvSpPr>
+          <p:cNvPr id="33" name="Text 31"/>
+          <p:cNvSpPr/>
+          <p:nvPr/>
+        </p:nvSpPr>
+        <p:spPr>
+          <a:xfrm>
+            <a:off x="1051560" y="4160520"/>
+            <a:ext cx="7498080" cy="274320"/>
           </a:xfrm>
           <a:prstGeom prst="rect">
             <a:avLst/>
@@ -16501,7 +16227,7 @@
                 <a:ea typeface="NVIDIA Sans" pitchFamily="34" charset="-122"/>
                 <a:cs typeface="NVIDIA Sans" pitchFamily="34" charset="-120"/>
               </a:rPr>
-              <a:t>Ladder levels measured with nsys attached on rank 0 (~5% overhead); final 249 ms is the clean steady-state p50 of the merged main branch (bucket 1.5e9 + reduce_scatter off).</a:t>
+              <a:t>Cumulative levels re-measured per step with nsys attached on rank 0 (~5% overhead). The torch 2.7.1 + NCCL 2.26.2 environment upgrade landed between the bf16 and pipeline levels and is folded into the Pipeline bar. Final 249 ms = clean steady-state p50 of merged main.</a:t>
             </a:r>
             <a:endParaRPr lang="en-US" sz="850" dirty="0"/>
           </a:p>
@@ -16509,7 +16235,7 @@
       </p:sp>
       <p:sp>
         <p:nvSpPr>
-          <p:cNvPr id="47" name="Text 45"/>
+          <p:cNvPr id="34" name="Text 32"/>
           <p:cNvSpPr/>
           <p:nvPr/>
         </p:nvSpPr>
@@ -16548,7 +16274,7 @@
       </p:sp>
       <p:sp>
         <p:nvSpPr>
-          <p:cNvPr id="48" name="Text 46"/>
+          <p:cNvPr id="35" name="Text 33"/>
           <p:cNvSpPr/>
           <p:nvPr/>
         </p:nvSpPr>
@@ -16587,7 +16313,7 @@
       </p:sp>
       <p:sp>
         <p:nvSpPr>
-          <p:cNvPr id="49" name="Shape 47"/>
+          <p:cNvPr id="36" name="Shape 34"/>
           <p:cNvSpPr/>
           <p:nvPr/>
         </p:nvSpPr>
@@ -16607,7 +16333,7 @@
       </p:sp>
       <p:pic>
         <p:nvPicPr>
-          <p:cNvPr id="50" name="Image 0" descr="/app/logos/nvidia-logo-blk-sm.png">    </p:cNvPr>
+          <p:cNvPr id="37" name="Image 0" descr="/app/logos/nvidia-logo-blk-sm.png">    </p:cNvPr>
           <p:cNvPicPr>
             <a:picLocks noChangeAspect="1"/>
           </p:cNvPicPr>

--- a/docs/slides/qwenpi-optimization.pptx
+++ b/docs/slides/qwenpi-optimization.pptx
@@ -1043,7 +1043,8 @@
           <a:p>
             <a:r>
               <a:rPr lang="en-US" dirty="0"/>
-              <a:t>Timeline bars are real busy intervals from the nsys sqlite; badges 1/2/4/5 point at where each problem is visible.
+              <a:t>Timeline from the NVTX-instrumented baseline re-capture (qwenpi_baseline_nvtx, viking-prod-303, 807 ms step).
+Module bands = GPU execution spans, attributed by launch-window correlation (kernels joined to their CPU launch time via correlationId). GPU busy inside the bands: Qwen3.5 fwd 50 ms, DiT fwd 120 ms, DiT bwd 224 ms, Qwen3.5 bwd 123 ms - DiT owns 43% of all GPU busy time.
 Rows 2+3 land as one ladder level (pipeline &amp; caching, -117 ms); row 5 combines bucket sizing (PR11) and the redundant-flatten removal (PR12); row 6 covers the two config-level fixes.
 [IMPORTANT] Key message: every fix in this deck was first SEEN here as a trace shape or a measured kernel cost - problems first, solutions second.</a:t>
             </a:r>
@@ -8490,7 +8491,7 @@
                 <a:ea typeface="NVIDIA Sans" pitchFamily="34" charset="-122"/>
                 <a:cs typeface="NVIDIA Sans" pitchFamily="34" charset="-120"/>
               </a:rPr>
-              <a:t>Five problems visible in one baseline step (nsys, 866 ms) — each maps to a fix</a:t>
+              <a:t>Five problems visible in one baseline step (nsys, 806.9 ms) — each maps to a fix</a:t>
             </a:r>
             <a:endParaRPr lang="en-US" sz="1500" dirty="0"/>
           </a:p>
@@ -8505,7 +8506,7 @@
         <p:spPr>
           <a:xfrm>
             <a:off x="1508760" y="1261872"/>
-            <a:ext cx="1912226" cy="237744"/>
+            <a:ext cx="1711375" cy="237744"/>
           </a:xfrm>
           <a:prstGeom prst="rect">
             <a:avLst/>
@@ -8525,7 +8526,7 @@
         <p:spPr>
           <a:xfrm>
             <a:off x="1508760" y="1261872"/>
-            <a:ext cx="1912226" cy="237744"/>
+            <a:ext cx="1711375" cy="237744"/>
           </a:xfrm>
           <a:prstGeom prst="rect">
             <a:avLst/>
@@ -8549,7 +8550,7 @@
                 <a:ea typeface="NVIDIA Sans" pitchFamily="34" charset="-122"/>
                 <a:cs typeface="NVIDIA Sans" pitchFamily="34" charset="-120"/>
               </a:rPr>
-              <a:t>Forward 270 ms</a:t>
+              <a:t>Forward 225 ms</a:t>
             </a:r>
             <a:endParaRPr lang="en-US" sz="900" dirty="0"/>
           </a:p>
@@ -8563,8 +8564,8 @@
         </p:nvSpPr>
         <p:spPr>
           <a:xfrm>
-            <a:off x="3421693" y="1261872"/>
-            <a:ext cx="3639101" cy="237744"/>
+            <a:off x="3220135" y="1261872"/>
+            <a:ext cx="3799344" cy="237744"/>
           </a:xfrm>
           <a:prstGeom prst="rect">
             <a:avLst/>
@@ -8583,8 +8584,8 @@
         </p:nvSpPr>
         <p:spPr>
           <a:xfrm>
-            <a:off x="3421693" y="1261872"/>
-            <a:ext cx="3639101" cy="237744"/>
+            <a:off x="3220135" y="1261872"/>
+            <a:ext cx="3799344" cy="237744"/>
           </a:xfrm>
           <a:prstGeom prst="rect">
             <a:avLst/>
@@ -8608,7 +8609,7 @@
                 <a:ea typeface="NVIDIA Sans" pitchFamily="34" charset="-122"/>
                 <a:cs typeface="NVIDIA Sans" pitchFamily="34" charset="-120"/>
               </a:rPr>
-              <a:t>Backward 514 ms</a:t>
+              <a:t>Backward 500 ms</a:t>
             </a:r>
             <a:endParaRPr lang="en-US" sz="900" dirty="0"/>
           </a:p>
@@ -8622,8 +8623,8 @@
         </p:nvSpPr>
         <p:spPr>
           <a:xfrm>
-            <a:off x="7060794" y="1261872"/>
-            <a:ext cx="574446" cy="237744"/>
+            <a:off x="7019479" y="1261872"/>
+            <a:ext cx="615761" cy="237744"/>
           </a:xfrm>
           <a:prstGeom prst="rect">
             <a:avLst/>
@@ -8642,8 +8643,8 @@
         </p:nvSpPr>
         <p:spPr>
           <a:xfrm>
-            <a:off x="7060794" y="1261872"/>
-            <a:ext cx="574446" cy="237744"/>
+            <a:off x="7019479" y="1261872"/>
+            <a:ext cx="615761" cy="237744"/>
           </a:xfrm>
           <a:prstGeom prst="rect">
             <a:avLst/>
@@ -8721,7 +8722,7 @@
         <p:spPr>
           <a:xfrm>
             <a:off x="1508760" y="1536192"/>
-            <a:ext cx="565249" cy="237744"/>
+            <a:ext cx="280167" cy="237744"/>
           </a:xfrm>
           <a:prstGeom prst="rect">
             <a:avLst/>
@@ -8741,7 +8742,7 @@
         <p:spPr>
           <a:xfrm>
             <a:off x="1508760" y="1536192"/>
-            <a:ext cx="565249" cy="237744"/>
+            <a:ext cx="280167" cy="237744"/>
           </a:xfrm>
           <a:prstGeom prst="rect">
             <a:avLst/>
@@ -8779,8 +8780,8 @@
         </p:nvSpPr>
         <p:spPr>
           <a:xfrm>
-            <a:off x="2074009" y="1536192"/>
-            <a:ext cx="1078855" cy="237744"/>
+            <a:off x="1788927" y="1536192"/>
+            <a:ext cx="1121429" cy="237744"/>
           </a:xfrm>
           <a:prstGeom prst="rect">
             <a:avLst/>
@@ -8799,8 +8800,8 @@
         </p:nvSpPr>
         <p:spPr>
           <a:xfrm>
-            <a:off x="2074009" y="1536192"/>
-            <a:ext cx="1078855" cy="237744"/>
+            <a:off x="1788927" y="1536192"/>
+            <a:ext cx="1121429" cy="237744"/>
           </a:xfrm>
           <a:prstGeom prst="rect">
             <a:avLst/>
@@ -8824,7 +8825,7 @@
                 <a:ea typeface="NVIDIA Sans" pitchFamily="34" charset="-122"/>
                 <a:cs typeface="NVIDIA Sans" pitchFamily="34" charset="-120"/>
               </a:rPr>
-              <a:t>Qwen3.5 153 ms</a:t>
+              <a:t>Qwen3.5 · 148 ms</a:t>
             </a:r>
             <a:endParaRPr lang="en-US" sz="850" dirty="0"/>
           </a:p>
@@ -8838,8 +8839,8 @@
         </p:nvSpPr>
         <p:spPr>
           <a:xfrm>
-            <a:off x="3152864" y="1536192"/>
-            <a:ext cx="268829" cy="237744"/>
+            <a:off x="2910356" y="1536192"/>
+            <a:ext cx="945280" cy="237744"/>
           </a:xfrm>
           <a:prstGeom prst="rect">
             <a:avLst/>
@@ -8852,34 +8853,14 @@
       </p:sp>
       <p:sp>
         <p:nvSpPr>
-          <p:cNvPr id="16" name="Shape 14"/>
-          <p:cNvSpPr/>
-          <p:nvPr/>
-        </p:nvSpPr>
-        <p:spPr>
-          <a:xfrm>
-            <a:off x="3421693" y="1536192"/>
-            <a:ext cx="2275145" cy="237744"/>
-          </a:xfrm>
-          <a:prstGeom prst="rect">
-            <a:avLst/>
-          </a:prstGeom>
-          <a:solidFill>
-            <a:srgbClr val="76B900"/>
-          </a:solidFill>
-          <a:ln/>
-        </p:spPr>
-      </p:sp>
-      <p:sp>
-        <p:nvSpPr>
-          <p:cNvPr id="17" name="Text 15"/>
-          <p:cNvSpPr/>
-          <p:nvPr/>
-        </p:nvSpPr>
-        <p:spPr>
-          <a:xfrm>
-            <a:off x="3421693" y="1536192"/>
-            <a:ext cx="2275145" cy="237744"/>
+          <p:cNvPr id="16" name="Text 14"/>
+          <p:cNvSpPr/>
+          <p:nvPr/>
+        </p:nvSpPr>
+        <p:spPr>
+          <a:xfrm>
+            <a:off x="2910356" y="1536192"/>
+            <a:ext cx="945280" cy="237744"/>
           </a:xfrm>
           <a:prstGeom prst="rect">
             <a:avLst/>
@@ -8903,7 +8884,7 @@
                 <a:ea typeface="NVIDIA Sans" pitchFamily="34" charset="-122"/>
                 <a:cs typeface="NVIDIA Sans" pitchFamily="34" charset="-120"/>
               </a:rPr>
-              <a:t>DiT 322 ms</a:t>
+              <a:t>DiT · 124 ms</a:t>
             </a:r>
             <a:endParaRPr lang="en-US" sz="850" dirty="0"/>
           </a:p>
@@ -8911,34 +8892,34 @@
       </p:sp>
       <p:sp>
         <p:nvSpPr>
-          <p:cNvPr id="18" name="Shape 16"/>
-          <p:cNvSpPr/>
-          <p:nvPr/>
-        </p:nvSpPr>
-        <p:spPr>
-          <a:xfrm>
-            <a:off x="5696839" y="1536192"/>
-            <a:ext cx="1363955" cy="237744"/>
-          </a:xfrm>
-          <a:prstGeom prst="rect">
-            <a:avLst/>
-          </a:prstGeom>
-          <a:solidFill>
-            <a:srgbClr val="0071C5"/>
-          </a:solidFill>
-          <a:ln/>
-        </p:spPr>
-      </p:sp>
-      <p:sp>
-        <p:nvSpPr>
-          <p:cNvPr id="19" name="Text 17"/>
-          <p:cNvSpPr/>
-          <p:nvPr/>
-        </p:nvSpPr>
-        <p:spPr>
-          <a:xfrm>
-            <a:off x="5696839" y="1536192"/>
-            <a:ext cx="1363955" cy="237744"/>
+          <p:cNvPr id="17" name="Shape 15"/>
+          <p:cNvSpPr/>
+          <p:nvPr/>
+        </p:nvSpPr>
+        <p:spPr>
+          <a:xfrm>
+            <a:off x="3855637" y="1536192"/>
+            <a:ext cx="1776672" cy="237744"/>
+          </a:xfrm>
+          <a:prstGeom prst="rect">
+            <a:avLst/>
+          </a:prstGeom>
+          <a:solidFill>
+            <a:srgbClr val="76B900"/>
+          </a:solidFill>
+          <a:ln/>
+        </p:spPr>
+      </p:sp>
+      <p:sp>
+        <p:nvSpPr>
+          <p:cNvPr id="18" name="Text 16"/>
+          <p:cNvSpPr/>
+          <p:nvPr/>
+        </p:nvSpPr>
+        <p:spPr>
+          <a:xfrm>
+            <a:off x="3855637" y="1536192"/>
+            <a:ext cx="1776672" cy="237744"/>
           </a:xfrm>
           <a:prstGeom prst="rect">
             <a:avLst/>
@@ -8962,7 +8943,7 @@
                 <a:ea typeface="NVIDIA Sans" pitchFamily="34" charset="-122"/>
                 <a:cs typeface="NVIDIA Sans" pitchFamily="34" charset="-120"/>
               </a:rPr>
-              <a:t>Qwen3.5 193 ms</a:t>
+              <a:t>DiT · 234 ms</a:t>
             </a:r>
             <a:endParaRPr lang="en-US" sz="850" dirty="0"/>
           </a:p>
@@ -8970,14 +8951,73 @@
       </p:sp>
       <p:sp>
         <p:nvSpPr>
-          <p:cNvPr id="20" name="Shape 18"/>
-          <p:cNvSpPr/>
-          <p:nvPr/>
-        </p:nvSpPr>
-        <p:spPr>
-          <a:xfrm>
-            <a:off x="7060794" y="1536192"/>
-            <a:ext cx="574446" cy="237744"/>
+          <p:cNvPr id="19" name="Shape 17"/>
+          <p:cNvSpPr/>
+          <p:nvPr/>
+        </p:nvSpPr>
+        <p:spPr>
+          <a:xfrm>
+            <a:off x="5632309" y="1536192"/>
+            <a:ext cx="1325670" cy="237744"/>
+          </a:xfrm>
+          <a:prstGeom prst="rect">
+            <a:avLst/>
+          </a:prstGeom>
+          <a:solidFill>
+            <a:srgbClr val="0071C5"/>
+          </a:solidFill>
+          <a:ln/>
+        </p:spPr>
+      </p:sp>
+      <p:sp>
+        <p:nvSpPr>
+          <p:cNvPr id="20" name="Text 18"/>
+          <p:cNvSpPr/>
+          <p:nvPr/>
+        </p:nvSpPr>
+        <p:spPr>
+          <a:xfrm>
+            <a:off x="5632309" y="1536192"/>
+            <a:ext cx="1325670" cy="237744"/>
+          </a:xfrm>
+          <a:prstGeom prst="rect">
+            <a:avLst/>
+          </a:prstGeom>
+          <a:noFill/>
+          <a:ln/>
+        </p:spPr>
+        <p:txBody>
+          <a:bodyPr wrap="square" lIns="0" tIns="0" rIns="0" bIns="0" rtlCol="0" anchor="ctr"/>
+          <a:lstStyle/>
+          <a:p>
+            <a:pPr algn="ctr" indent="0" marL="0">
+              <a:buNone/>
+            </a:pPr>
+            <a:r>
+              <a:rPr lang="en-US" sz="850" b="1" dirty="0">
+                <a:solidFill>
+                  <a:srgbClr val="FFFFFF"/>
+                </a:solidFill>
+                <a:latin typeface="NVIDIA Sans" pitchFamily="34" charset="0"/>
+                <a:ea typeface="NVIDIA Sans" pitchFamily="34" charset="-122"/>
+                <a:cs typeface="NVIDIA Sans" pitchFamily="34" charset="-120"/>
+              </a:rPr>
+              <a:t>Qwen3.5 · 175 ms</a:t>
+            </a:r>
+            <a:endParaRPr lang="en-US" sz="850" dirty="0"/>
+          </a:p>
+        </p:txBody>
+      </p:sp>
+      <p:sp>
+        <p:nvSpPr>
+          <p:cNvPr id="21" name="Shape 19"/>
+          <p:cNvSpPr/>
+          <p:nvPr/>
+        </p:nvSpPr>
+        <p:spPr>
+          <a:xfrm>
+            <a:off x="6957979" y="1536192"/>
+            <a:ext cx="677261" cy="237744"/>
           </a:xfrm>
           <a:prstGeom prst="rect">
             <a:avLst/>
@@ -8990,7 +9030,7 @@
       </p:sp>
       <p:sp>
         <p:nvSpPr>
-          <p:cNvPr id="21" name="Text 19"/>
+          <p:cNvPr id="22" name="Text 20"/>
           <p:cNvSpPr/>
           <p:nvPr/>
         </p:nvSpPr>
@@ -9029,7 +9069,7 @@
       </p:sp>
       <p:sp>
         <p:nvSpPr>
-          <p:cNvPr id="22" name="Text 20"/>
+          <p:cNvPr id="23" name="Text 21"/>
           <p:cNvSpPr/>
           <p:nvPr/>
         </p:nvSpPr>
@@ -9068,7 +9108,7 @@
       </p:sp>
       <p:sp>
         <p:nvSpPr>
-          <p:cNvPr id="23" name="Shape 21"/>
+          <p:cNvPr id="24" name="Shape 22"/>
           <p:cNvSpPr/>
           <p:nvPr/>
         </p:nvSpPr>
@@ -9093,13 +9133,13 @@
       </p:sp>
       <p:sp>
         <p:nvSpPr>
-          <p:cNvPr id="24" name="Shape 22"/>
-          <p:cNvSpPr/>
-          <p:nvPr/>
-        </p:nvSpPr>
-        <p:spPr>
-          <a:xfrm>
-            <a:off x="2073655" y="1837944"/>
+          <p:cNvPr id="25" name="Shape 23"/>
+          <p:cNvSpPr/>
+          <p:nvPr/>
+        </p:nvSpPr>
+        <p:spPr>
+          <a:xfrm>
+            <a:off x="1791813" y="1837944"/>
             <a:ext cx="4572" cy="256032"/>
           </a:xfrm>
           <a:prstGeom prst="rect">
@@ -9113,13 +9153,13 @@
       </p:sp>
       <p:sp>
         <p:nvSpPr>
-          <p:cNvPr id="25" name="Shape 23"/>
-          <p:cNvSpPr/>
-          <p:nvPr/>
-        </p:nvSpPr>
-        <p:spPr>
-          <a:xfrm>
-            <a:off x="2112919" y="1837944"/>
+          <p:cNvPr id="26" name="Shape 24"/>
+          <p:cNvSpPr/>
+          <p:nvPr/>
+        </p:nvSpPr>
+        <p:spPr>
+          <a:xfrm>
+            <a:off x="1831902" y="1837944"/>
             <a:ext cx="4572" cy="256032"/>
           </a:xfrm>
           <a:prstGeom prst="rect">
@@ -9133,14 +9173,14 @@
       </p:sp>
       <p:sp>
         <p:nvSpPr>
-          <p:cNvPr id="26" name="Shape 24"/>
-          <p:cNvSpPr/>
-          <p:nvPr/>
-        </p:nvSpPr>
-        <p:spPr>
-          <a:xfrm>
-            <a:off x="2114970" y="1837944"/>
-            <a:ext cx="5660" cy="256032"/>
+          <p:cNvPr id="27" name="Shape 25"/>
+          <p:cNvSpPr/>
+          <p:nvPr/>
+        </p:nvSpPr>
+        <p:spPr>
+          <a:xfrm>
+            <a:off x="1834179" y="1837944"/>
+            <a:ext cx="5770" cy="256032"/>
           </a:xfrm>
           <a:prstGeom prst="rect">
             <a:avLst/>
@@ -9153,14 +9193,14 @@
       </p:sp>
       <p:sp>
         <p:nvSpPr>
-          <p:cNvPr id="27" name="Shape 25"/>
-          <p:cNvSpPr/>
-          <p:nvPr/>
-        </p:nvSpPr>
-        <p:spPr>
-          <a:xfrm>
-            <a:off x="2123106" y="1837944"/>
-            <a:ext cx="25539" cy="256032"/>
+          <p:cNvPr id="28" name="Shape 26"/>
+          <p:cNvSpPr/>
+          <p:nvPr/>
+        </p:nvSpPr>
+        <p:spPr>
+          <a:xfrm>
+            <a:off x="1842683" y="1837944"/>
+            <a:ext cx="26650" cy="256032"/>
           </a:xfrm>
           <a:prstGeom prst="rect">
             <a:avLst/>
@@ -9173,13 +9213,13 @@
       </p:sp>
       <p:sp>
         <p:nvSpPr>
-          <p:cNvPr id="28" name="Shape 26"/>
-          <p:cNvSpPr/>
-          <p:nvPr/>
-        </p:nvSpPr>
-        <p:spPr>
-          <a:xfrm>
-            <a:off x="2151121" y="1837944"/>
+          <p:cNvPr id="29" name="Shape 27"/>
+          <p:cNvSpPr/>
+          <p:nvPr/>
+        </p:nvSpPr>
+        <p:spPr>
+          <a:xfrm>
+            <a:off x="1869941" y="1837944"/>
             <a:ext cx="4572" cy="256032"/>
           </a:xfrm>
           <a:prstGeom prst="rect">
@@ -9193,14 +9233,14 @@
       </p:sp>
       <p:sp>
         <p:nvSpPr>
-          <p:cNvPr id="29" name="Shape 27"/>
-          <p:cNvSpPr/>
-          <p:nvPr/>
-        </p:nvSpPr>
-        <p:spPr>
-          <a:xfrm>
-            <a:off x="2156285" y="1837944"/>
-            <a:ext cx="5094" cy="256032"/>
+          <p:cNvPr id="30" name="Shape 28"/>
+          <p:cNvSpPr/>
+          <p:nvPr/>
+        </p:nvSpPr>
+        <p:spPr>
+          <a:xfrm>
+            <a:off x="1871915" y="1837944"/>
+            <a:ext cx="4572" cy="256032"/>
           </a:xfrm>
           <a:prstGeom prst="rect">
             <a:avLst/>
@@ -9213,14 +9253,14 @@
       </p:sp>
       <p:sp>
         <p:nvSpPr>
-          <p:cNvPr id="30" name="Shape 28"/>
-          <p:cNvSpPr/>
-          <p:nvPr/>
-        </p:nvSpPr>
-        <p:spPr>
-          <a:xfrm>
-            <a:off x="2162086" y="1837944"/>
-            <a:ext cx="6579" cy="256032"/>
+          <p:cNvPr id="31" name="Shape 29"/>
+          <p:cNvSpPr/>
+          <p:nvPr/>
+        </p:nvSpPr>
+        <p:spPr>
+          <a:xfrm>
+            <a:off x="1877078" y="1837944"/>
+            <a:ext cx="5239" cy="256032"/>
           </a:xfrm>
           <a:prstGeom prst="rect">
             <a:avLst/>
@@ -9233,14 +9273,14 @@
       </p:sp>
       <p:sp>
         <p:nvSpPr>
-          <p:cNvPr id="31" name="Shape 29"/>
-          <p:cNvSpPr/>
-          <p:nvPr/>
-        </p:nvSpPr>
-        <p:spPr>
-          <a:xfrm>
-            <a:off x="2170363" y="1837944"/>
-            <a:ext cx="11956" cy="256032"/>
+          <p:cNvPr id="32" name="Shape 30"/>
+          <p:cNvSpPr/>
+          <p:nvPr/>
+        </p:nvSpPr>
+        <p:spPr>
+          <a:xfrm>
+            <a:off x="1883076" y="1837944"/>
+            <a:ext cx="6833" cy="256032"/>
           </a:xfrm>
           <a:prstGeom prst="rect">
             <a:avLst/>
@@ -9253,14 +9293,14 @@
       </p:sp>
       <p:sp>
         <p:nvSpPr>
-          <p:cNvPr id="32" name="Shape 30"/>
-          <p:cNvSpPr/>
-          <p:nvPr/>
-        </p:nvSpPr>
-        <p:spPr>
-          <a:xfrm>
-            <a:off x="2184017" y="1837944"/>
-            <a:ext cx="11602" cy="256032"/>
+          <p:cNvPr id="33" name="Shape 31"/>
+          <p:cNvSpPr/>
+          <p:nvPr/>
+        </p:nvSpPr>
+        <p:spPr>
+          <a:xfrm>
+            <a:off x="1891807" y="1837944"/>
+            <a:ext cx="12983" cy="256032"/>
           </a:xfrm>
           <a:prstGeom prst="rect">
             <a:avLst/>
@@ -9273,14 +9313,14 @@
       </p:sp>
       <p:sp>
         <p:nvSpPr>
-          <p:cNvPr id="33" name="Shape 31"/>
-          <p:cNvSpPr/>
-          <p:nvPr/>
-        </p:nvSpPr>
-        <p:spPr>
-          <a:xfrm>
-            <a:off x="2197317" y="1837944"/>
-            <a:ext cx="11390" cy="256032"/>
+          <p:cNvPr id="34" name="Shape 32"/>
+          <p:cNvSpPr/>
+          <p:nvPr/>
+        </p:nvSpPr>
+        <p:spPr>
+          <a:xfrm>
+            <a:off x="1906613" y="1837944"/>
+            <a:ext cx="12148" cy="256032"/>
           </a:xfrm>
           <a:prstGeom prst="rect">
             <a:avLst/>
@@ -9293,14 +9333,14 @@
       </p:sp>
       <p:sp>
         <p:nvSpPr>
-          <p:cNvPr id="34" name="Shape 32"/>
-          <p:cNvSpPr/>
-          <p:nvPr/>
-        </p:nvSpPr>
-        <p:spPr>
-          <a:xfrm>
-            <a:off x="2210263" y="1837944"/>
-            <a:ext cx="4881" cy="256032"/>
+          <p:cNvPr id="35" name="Shape 33"/>
+          <p:cNvSpPr/>
+          <p:nvPr/>
+        </p:nvSpPr>
+        <p:spPr>
+          <a:xfrm>
+            <a:off x="1920583" y="1837944"/>
+            <a:ext cx="12224" cy="256032"/>
           </a:xfrm>
           <a:prstGeom prst="rect">
             <a:avLst/>
@@ -9313,14 +9353,14 @@
       </p:sp>
       <p:sp>
         <p:nvSpPr>
-          <p:cNvPr id="35" name="Shape 33"/>
-          <p:cNvSpPr/>
-          <p:nvPr/>
-        </p:nvSpPr>
-        <p:spPr>
-          <a:xfrm>
-            <a:off x="2215781" y="1837944"/>
-            <a:ext cx="7711" cy="256032"/>
+          <p:cNvPr id="36" name="Shape 34"/>
+          <p:cNvSpPr/>
+          <p:nvPr/>
+        </p:nvSpPr>
+        <p:spPr>
+          <a:xfrm>
+            <a:off x="1934630" y="1837944"/>
+            <a:ext cx="12452" cy="256032"/>
           </a:xfrm>
           <a:prstGeom prst="rect">
             <a:avLst/>
@@ -9333,14 +9373,14 @@
       </p:sp>
       <p:sp>
         <p:nvSpPr>
-          <p:cNvPr id="36" name="Shape 34"/>
-          <p:cNvSpPr/>
-          <p:nvPr/>
-        </p:nvSpPr>
-        <p:spPr>
-          <a:xfrm>
-            <a:off x="2225473" y="1837944"/>
-            <a:ext cx="5023" cy="256032"/>
+          <p:cNvPr id="37" name="Shape 35"/>
+          <p:cNvSpPr/>
+          <p:nvPr/>
+        </p:nvSpPr>
+        <p:spPr>
+          <a:xfrm>
+            <a:off x="1948752" y="1837944"/>
+            <a:ext cx="5087" cy="256032"/>
           </a:xfrm>
           <a:prstGeom prst="rect">
             <a:avLst/>
@@ -9353,14 +9393,14 @@
       </p:sp>
       <p:sp>
         <p:nvSpPr>
-          <p:cNvPr id="37" name="Shape 35"/>
-          <p:cNvSpPr/>
-          <p:nvPr/>
-        </p:nvSpPr>
-        <p:spPr>
-          <a:xfrm>
-            <a:off x="2231133" y="1837944"/>
-            <a:ext cx="6296" cy="256032"/>
+          <p:cNvPr id="38" name="Shape 36"/>
+          <p:cNvSpPr/>
+          <p:nvPr/>
+        </p:nvSpPr>
+        <p:spPr>
+          <a:xfrm>
+            <a:off x="1954522" y="1837944"/>
+            <a:ext cx="6909" cy="256032"/>
           </a:xfrm>
           <a:prstGeom prst="rect">
             <a:avLst/>
@@ -9373,14 +9413,14 @@
       </p:sp>
       <p:sp>
         <p:nvSpPr>
-          <p:cNvPr id="38" name="Shape 36"/>
-          <p:cNvSpPr/>
-          <p:nvPr/>
-        </p:nvSpPr>
-        <p:spPr>
-          <a:xfrm>
-            <a:off x="2239127" y="1837944"/>
-            <a:ext cx="4811" cy="256032"/>
+          <p:cNvPr id="39" name="Shape 37"/>
+          <p:cNvSpPr/>
+          <p:nvPr/>
+        </p:nvSpPr>
+        <p:spPr>
+          <a:xfrm>
+            <a:off x="1963406" y="1837944"/>
+            <a:ext cx="11996" cy="256032"/>
           </a:xfrm>
           <a:prstGeom prst="rect">
             <a:avLst/>
@@ -9393,14 +9433,14 @@
       </p:sp>
       <p:sp>
         <p:nvSpPr>
-          <p:cNvPr id="39" name="Shape 37"/>
-          <p:cNvSpPr/>
-          <p:nvPr/>
-        </p:nvSpPr>
-        <p:spPr>
-          <a:xfrm>
-            <a:off x="2244504" y="1837944"/>
-            <a:ext cx="6650" cy="256032"/>
+          <p:cNvPr id="40" name="Shape 38"/>
+          <p:cNvSpPr/>
+          <p:nvPr/>
+        </p:nvSpPr>
+        <p:spPr>
+          <a:xfrm>
+            <a:off x="1977224" y="1837944"/>
+            <a:ext cx="12072" cy="256032"/>
           </a:xfrm>
           <a:prstGeom prst="rect">
             <a:avLst/>
@@ -9413,14 +9453,14 @@
       </p:sp>
       <p:sp>
         <p:nvSpPr>
-          <p:cNvPr id="40" name="Shape 38"/>
-          <p:cNvSpPr/>
-          <p:nvPr/>
-        </p:nvSpPr>
-        <p:spPr>
-          <a:xfrm>
-            <a:off x="2252993" y="1837944"/>
-            <a:ext cx="4881" cy="256032"/>
+          <p:cNvPr id="41" name="Shape 39"/>
+          <p:cNvSpPr/>
+          <p:nvPr/>
+        </p:nvSpPr>
+        <p:spPr>
+          <a:xfrm>
+            <a:off x="1991043" y="1837944"/>
+            <a:ext cx="12148" cy="256032"/>
           </a:xfrm>
           <a:prstGeom prst="rect">
             <a:avLst/>
@@ -9433,14 +9473,14 @@
       </p:sp>
       <p:sp>
         <p:nvSpPr>
-          <p:cNvPr id="41" name="Shape 39"/>
-          <p:cNvSpPr/>
-          <p:nvPr/>
-        </p:nvSpPr>
-        <p:spPr>
-          <a:xfrm>
-            <a:off x="2258723" y="1837944"/>
-            <a:ext cx="7499" cy="256032"/>
+          <p:cNvPr id="42" name="Shape 40"/>
+          <p:cNvSpPr/>
+          <p:nvPr/>
+        </p:nvSpPr>
+        <p:spPr>
+          <a:xfrm>
+            <a:off x="2005013" y="1837944"/>
+            <a:ext cx="12072" cy="256032"/>
           </a:xfrm>
           <a:prstGeom prst="rect">
             <a:avLst/>
@@ -9453,14 +9493,14 @@
       </p:sp>
       <p:sp>
         <p:nvSpPr>
-          <p:cNvPr id="42" name="Shape 40"/>
-          <p:cNvSpPr/>
-          <p:nvPr/>
-        </p:nvSpPr>
-        <p:spPr>
-          <a:xfrm>
-            <a:off x="2268061" y="1837944"/>
-            <a:ext cx="4881" cy="256032"/>
+          <p:cNvPr id="43" name="Shape 41"/>
+          <p:cNvSpPr/>
+          <p:nvPr/>
+        </p:nvSpPr>
+        <p:spPr>
+          <a:xfrm>
+            <a:off x="2019515" y="1837944"/>
+            <a:ext cx="11541" cy="256032"/>
           </a:xfrm>
           <a:prstGeom prst="rect">
             <a:avLst/>
@@ -9473,14 +9513,14 @@
       </p:sp>
       <p:sp>
         <p:nvSpPr>
-          <p:cNvPr id="43" name="Shape 41"/>
-          <p:cNvSpPr/>
-          <p:nvPr/>
-        </p:nvSpPr>
-        <p:spPr>
-          <a:xfrm>
-            <a:off x="2273580" y="1837944"/>
-            <a:ext cx="6296" cy="256032"/>
+          <p:cNvPr id="44" name="Shape 42"/>
+          <p:cNvSpPr/>
+          <p:nvPr/>
+        </p:nvSpPr>
+        <p:spPr>
+          <a:xfrm>
+            <a:off x="2032650" y="1837944"/>
+            <a:ext cx="11617" cy="256032"/>
           </a:xfrm>
           <a:prstGeom prst="rect">
             <a:avLst/>
@@ -9493,14 +9533,14 @@
       </p:sp>
       <p:sp>
         <p:nvSpPr>
-          <p:cNvPr id="44" name="Shape 42"/>
-          <p:cNvSpPr/>
-          <p:nvPr/>
-        </p:nvSpPr>
-        <p:spPr>
-          <a:xfrm>
-            <a:off x="2281574" y="1837944"/>
-            <a:ext cx="12310" cy="256032"/>
+          <p:cNvPr id="45" name="Shape 43"/>
+          <p:cNvSpPr/>
+          <p:nvPr/>
+        </p:nvSpPr>
+        <p:spPr>
+          <a:xfrm>
+            <a:off x="2045937" y="1837944"/>
+            <a:ext cx="11617" cy="256032"/>
           </a:xfrm>
           <a:prstGeom prst="rect">
             <a:avLst/>
@@ -9513,14 +9553,14 @@
       </p:sp>
       <p:sp>
         <p:nvSpPr>
-          <p:cNvPr id="45" name="Shape 43"/>
-          <p:cNvSpPr/>
-          <p:nvPr/>
-        </p:nvSpPr>
-        <p:spPr>
-          <a:xfrm>
-            <a:off x="2296713" y="1837944"/>
-            <a:ext cx="5164" cy="256032"/>
+          <p:cNvPr id="46" name="Shape 44"/>
+          <p:cNvSpPr/>
+          <p:nvPr/>
+        </p:nvSpPr>
+        <p:spPr>
+          <a:xfrm>
+            <a:off x="2059224" y="1837944"/>
+            <a:ext cx="12376" cy="256032"/>
           </a:xfrm>
           <a:prstGeom prst="rect">
             <a:avLst/>
@@ -9533,14 +9573,14 @@
       </p:sp>
       <p:sp>
         <p:nvSpPr>
-          <p:cNvPr id="46" name="Shape 44"/>
-          <p:cNvSpPr/>
-          <p:nvPr/>
-        </p:nvSpPr>
-        <p:spPr>
-          <a:xfrm>
-            <a:off x="2302514" y="1837944"/>
-            <a:ext cx="6650" cy="256032"/>
+          <p:cNvPr id="47" name="Shape 45"/>
+          <p:cNvSpPr/>
+          <p:nvPr/>
+        </p:nvSpPr>
+        <p:spPr>
+          <a:xfrm>
+            <a:off x="2073271" y="1837944"/>
+            <a:ext cx="11844" cy="256032"/>
           </a:xfrm>
           <a:prstGeom prst="rect">
             <a:avLst/>
@@ -9553,14 +9593,14 @@
       </p:sp>
       <p:sp>
         <p:nvSpPr>
-          <p:cNvPr id="47" name="Shape 45"/>
-          <p:cNvSpPr/>
-          <p:nvPr/>
-        </p:nvSpPr>
-        <p:spPr>
-          <a:xfrm>
-            <a:off x="2310791" y="1837944"/>
-            <a:ext cx="11531" cy="256032"/>
+          <p:cNvPr id="48" name="Shape 46"/>
+          <p:cNvSpPr/>
+          <p:nvPr/>
+        </p:nvSpPr>
+        <p:spPr>
+          <a:xfrm>
+            <a:off x="2086786" y="1837944"/>
+            <a:ext cx="12224" cy="256032"/>
           </a:xfrm>
           <a:prstGeom prst="rect">
             <a:avLst/>
@@ -9573,14 +9613,14 @@
       </p:sp>
       <p:sp>
         <p:nvSpPr>
-          <p:cNvPr id="48" name="Shape 46"/>
-          <p:cNvSpPr/>
-          <p:nvPr/>
-        </p:nvSpPr>
-        <p:spPr>
-          <a:xfrm>
-            <a:off x="2324020" y="1837944"/>
-            <a:ext cx="4952" cy="256032"/>
+          <p:cNvPr id="49" name="Shape 47"/>
+          <p:cNvSpPr/>
+          <p:nvPr/>
+        </p:nvSpPr>
+        <p:spPr>
+          <a:xfrm>
+            <a:off x="2100680" y="1837944"/>
+            <a:ext cx="11844" cy="256032"/>
           </a:xfrm>
           <a:prstGeom prst="rect">
             <a:avLst/>
@@ -9593,14 +9633,14 @@
       </p:sp>
       <p:sp>
         <p:nvSpPr>
-          <p:cNvPr id="49" name="Shape 47"/>
-          <p:cNvSpPr/>
-          <p:nvPr/>
-        </p:nvSpPr>
-        <p:spPr>
-          <a:xfrm>
-            <a:off x="2329609" y="1837944"/>
-            <a:ext cx="7074" cy="256032"/>
+          <p:cNvPr id="50" name="Shape 48"/>
+          <p:cNvSpPr/>
+          <p:nvPr/>
+        </p:nvSpPr>
+        <p:spPr>
+          <a:xfrm>
+            <a:off x="2114271" y="1837944"/>
+            <a:ext cx="11996" cy="256032"/>
           </a:xfrm>
           <a:prstGeom prst="rect">
             <a:avLst/>
@@ -9613,14 +9653,14 @@
       </p:sp>
       <p:sp>
         <p:nvSpPr>
-          <p:cNvPr id="50" name="Shape 48"/>
-          <p:cNvSpPr/>
-          <p:nvPr/>
-        </p:nvSpPr>
-        <p:spPr>
-          <a:xfrm>
-            <a:off x="2338382" y="1837944"/>
-            <a:ext cx="4952" cy="256032"/>
+          <p:cNvPr id="51" name="Shape 49"/>
+          <p:cNvSpPr/>
+          <p:nvPr/>
+        </p:nvSpPr>
+        <p:spPr>
+          <a:xfrm>
+            <a:off x="2127862" y="1837944"/>
+            <a:ext cx="11920" cy="256032"/>
           </a:xfrm>
           <a:prstGeom prst="rect">
             <a:avLst/>
@@ -9633,14 +9673,14 @@
       </p:sp>
       <p:sp>
         <p:nvSpPr>
-          <p:cNvPr id="51" name="Shape 49"/>
-          <p:cNvSpPr/>
-          <p:nvPr/>
-        </p:nvSpPr>
-        <p:spPr>
-          <a:xfrm>
-            <a:off x="2344041" y="1837944"/>
-            <a:ext cx="6509" cy="256032"/>
+          <p:cNvPr id="52" name="Shape 50"/>
+          <p:cNvSpPr/>
+          <p:nvPr/>
+        </p:nvSpPr>
+        <p:spPr>
+          <a:xfrm>
+            <a:off x="2141453" y="1837944"/>
+            <a:ext cx="11920" cy="256032"/>
           </a:xfrm>
           <a:prstGeom prst="rect">
             <a:avLst/>
@@ -9653,14 +9693,14 @@
       </p:sp>
       <p:sp>
         <p:nvSpPr>
-          <p:cNvPr id="52" name="Shape 50"/>
-          <p:cNvSpPr/>
-          <p:nvPr/>
-        </p:nvSpPr>
-        <p:spPr>
-          <a:xfrm>
-            <a:off x="2352177" y="1837944"/>
-            <a:ext cx="4740" cy="256032"/>
+          <p:cNvPr id="53" name="Shape 51"/>
+          <p:cNvSpPr/>
+          <p:nvPr/>
+        </p:nvSpPr>
+        <p:spPr>
+          <a:xfrm>
+            <a:off x="2154967" y="1837944"/>
+            <a:ext cx="11693" cy="256032"/>
           </a:xfrm>
           <a:prstGeom prst="rect">
             <a:avLst/>
@@ -9673,14 +9713,14 @@
       </p:sp>
       <p:sp>
         <p:nvSpPr>
-          <p:cNvPr id="53" name="Shape 51"/>
-          <p:cNvSpPr/>
-          <p:nvPr/>
-        </p:nvSpPr>
-        <p:spPr>
-          <a:xfrm>
-            <a:off x="2357553" y="1837944"/>
-            <a:ext cx="6226" cy="256032"/>
+          <p:cNvPr id="54" name="Shape 52"/>
+          <p:cNvSpPr/>
+          <p:nvPr/>
+        </p:nvSpPr>
+        <p:spPr>
+          <a:xfrm>
+            <a:off x="2168406" y="1837944"/>
+            <a:ext cx="11769" cy="256032"/>
           </a:xfrm>
           <a:prstGeom prst="rect">
             <a:avLst/>
@@ -9693,14 +9733,14 @@
       </p:sp>
       <p:sp>
         <p:nvSpPr>
-          <p:cNvPr id="54" name="Shape 52"/>
-          <p:cNvSpPr/>
-          <p:nvPr/>
-        </p:nvSpPr>
-        <p:spPr>
-          <a:xfrm>
-            <a:off x="2365830" y="1837944"/>
-            <a:ext cx="12734" cy="256032"/>
+          <p:cNvPr id="55" name="Shape 53"/>
+          <p:cNvSpPr/>
+          <p:nvPr/>
+        </p:nvSpPr>
+        <p:spPr>
+          <a:xfrm>
+            <a:off x="2185414" y="1837944"/>
+            <a:ext cx="5239" cy="256032"/>
           </a:xfrm>
           <a:prstGeom prst="rect">
             <a:avLst/>
@@ -9713,14 +9753,14 @@
       </p:sp>
       <p:sp>
         <p:nvSpPr>
-          <p:cNvPr id="55" name="Shape 53"/>
-          <p:cNvSpPr/>
-          <p:nvPr/>
-        </p:nvSpPr>
-        <p:spPr>
-          <a:xfrm>
-            <a:off x="2380262" y="1837944"/>
-            <a:ext cx="11390" cy="256032"/>
+          <p:cNvPr id="56" name="Shape 54"/>
+          <p:cNvSpPr/>
+          <p:nvPr/>
+        </p:nvSpPr>
+        <p:spPr>
+          <a:xfrm>
+            <a:off x="2191260" y="1837944"/>
+            <a:ext cx="6606" cy="256032"/>
           </a:xfrm>
           <a:prstGeom prst="rect">
             <a:avLst/>
@@ -9733,14 +9773,14 @@
       </p:sp>
       <p:sp>
         <p:nvSpPr>
-          <p:cNvPr id="56" name="Shape 54"/>
-          <p:cNvSpPr/>
-          <p:nvPr/>
-        </p:nvSpPr>
-        <p:spPr>
-          <a:xfrm>
-            <a:off x="2393350" y="1837944"/>
-            <a:ext cx="11178" cy="256032"/>
+          <p:cNvPr id="57" name="Shape 55"/>
+          <p:cNvSpPr/>
+          <p:nvPr/>
+        </p:nvSpPr>
+        <p:spPr>
+          <a:xfrm>
+            <a:off x="2199612" y="1837944"/>
+            <a:ext cx="4935" cy="256032"/>
           </a:xfrm>
           <a:prstGeom prst="rect">
             <a:avLst/>
@@ -9753,14 +9793,14 @@
       </p:sp>
       <p:sp>
         <p:nvSpPr>
-          <p:cNvPr id="57" name="Shape 55"/>
-          <p:cNvSpPr/>
-          <p:nvPr/>
-        </p:nvSpPr>
-        <p:spPr>
-          <a:xfrm>
-            <a:off x="2406013" y="1837944"/>
-            <a:ext cx="11319" cy="256032"/>
+          <p:cNvPr id="58" name="Shape 56"/>
+          <p:cNvSpPr/>
+          <p:nvPr/>
+        </p:nvSpPr>
+        <p:spPr>
+          <a:xfrm>
+            <a:off x="2205230" y="1837944"/>
+            <a:ext cx="5315" cy="256032"/>
           </a:xfrm>
           <a:prstGeom prst="rect">
             <a:avLst/>
@@ -9773,14 +9813,14 @@
       </p:sp>
       <p:sp>
         <p:nvSpPr>
-          <p:cNvPr id="58" name="Shape 56"/>
-          <p:cNvSpPr/>
-          <p:nvPr/>
-        </p:nvSpPr>
-        <p:spPr>
-          <a:xfrm>
-            <a:off x="2418889" y="1837944"/>
-            <a:ext cx="11814" cy="256032"/>
+          <p:cNvPr id="59" name="Shape 57"/>
+          <p:cNvSpPr/>
+          <p:nvPr/>
+        </p:nvSpPr>
+        <p:spPr>
+          <a:xfrm>
+            <a:off x="2211608" y="1837944"/>
+            <a:ext cx="5922" cy="256032"/>
           </a:xfrm>
           <a:prstGeom prst="rect">
             <a:avLst/>
@@ -9793,14 +9833,14 @@
       </p:sp>
       <p:sp>
         <p:nvSpPr>
-          <p:cNvPr id="59" name="Shape 57"/>
-          <p:cNvSpPr/>
-          <p:nvPr/>
-        </p:nvSpPr>
-        <p:spPr>
-          <a:xfrm>
-            <a:off x="2432330" y="1837944"/>
-            <a:ext cx="4811" cy="256032"/>
+          <p:cNvPr id="60" name="Shape 58"/>
+          <p:cNvSpPr/>
+          <p:nvPr/>
+        </p:nvSpPr>
+        <p:spPr>
+          <a:xfrm>
+            <a:off x="2219049" y="1837944"/>
+            <a:ext cx="17083" cy="256032"/>
           </a:xfrm>
           <a:prstGeom prst="rect">
             <a:avLst/>
@@ -9813,14 +9853,14 @@
       </p:sp>
       <p:sp>
         <p:nvSpPr>
-          <p:cNvPr id="60" name="Shape 58"/>
-          <p:cNvSpPr/>
-          <p:nvPr/>
-        </p:nvSpPr>
-        <p:spPr>
-          <a:xfrm>
-            <a:off x="2437707" y="1837944"/>
-            <a:ext cx="6438" cy="256032"/>
+          <p:cNvPr id="61" name="Shape 59"/>
+          <p:cNvSpPr/>
+          <p:nvPr/>
+        </p:nvSpPr>
+        <p:spPr>
+          <a:xfrm>
+            <a:off x="2236740" y="1837944"/>
+            <a:ext cx="25815" cy="256032"/>
           </a:xfrm>
           <a:prstGeom prst="rect">
             <a:avLst/>
@@ -9833,14 +9873,14 @@
       </p:sp>
       <p:sp>
         <p:nvSpPr>
-          <p:cNvPr id="61" name="Shape 59"/>
-          <p:cNvSpPr/>
-          <p:nvPr/>
-        </p:nvSpPr>
-        <p:spPr>
-          <a:xfrm>
-            <a:off x="2445843" y="1837944"/>
-            <a:ext cx="11885" cy="256032"/>
+          <p:cNvPr id="62" name="Shape 60"/>
+          <p:cNvSpPr/>
+          <p:nvPr/>
+        </p:nvSpPr>
+        <p:spPr>
+          <a:xfrm>
+            <a:off x="2263162" y="1837944"/>
+            <a:ext cx="19437" cy="256032"/>
           </a:xfrm>
           <a:prstGeom prst="rect">
             <a:avLst/>
@@ -9853,14 +9893,14 @@
       </p:sp>
       <p:sp>
         <p:nvSpPr>
-          <p:cNvPr id="62" name="Shape 60"/>
-          <p:cNvSpPr/>
-          <p:nvPr/>
-        </p:nvSpPr>
-        <p:spPr>
-          <a:xfrm>
-            <a:off x="2459921" y="1837944"/>
-            <a:ext cx="12097" cy="256032"/>
+          <p:cNvPr id="63" name="Shape 61"/>
+          <p:cNvSpPr/>
+          <p:nvPr/>
+        </p:nvSpPr>
+        <p:spPr>
+          <a:xfrm>
+            <a:off x="2285105" y="1837944"/>
+            <a:ext cx="4572" cy="256032"/>
           </a:xfrm>
           <a:prstGeom prst="rect">
             <a:avLst/>
@@ -9873,14 +9913,14 @@
       </p:sp>
       <p:sp>
         <p:nvSpPr>
-          <p:cNvPr id="63" name="Shape 61"/>
-          <p:cNvSpPr/>
-          <p:nvPr/>
-        </p:nvSpPr>
-        <p:spPr>
-          <a:xfrm>
-            <a:off x="2473928" y="1837944"/>
-            <a:ext cx="4881" cy="256032"/>
+          <p:cNvPr id="64" name="Shape 62"/>
+          <p:cNvSpPr/>
+          <p:nvPr/>
+        </p:nvSpPr>
+        <p:spPr>
+          <a:xfrm>
+            <a:off x="2290723" y="1837944"/>
+            <a:ext cx="4572" cy="256032"/>
           </a:xfrm>
           <a:prstGeom prst="rect">
             <a:avLst/>
@@ -9893,14 +9933,14 @@
       </p:sp>
       <p:sp>
         <p:nvSpPr>
-          <p:cNvPr id="64" name="Shape 62"/>
-          <p:cNvSpPr/>
-          <p:nvPr/>
-        </p:nvSpPr>
-        <p:spPr>
-          <a:xfrm>
-            <a:off x="2479376" y="1837944"/>
-            <a:ext cx="5094" cy="256032"/>
+          <p:cNvPr id="65" name="Shape 63"/>
+          <p:cNvSpPr/>
+          <p:nvPr/>
+        </p:nvSpPr>
+        <p:spPr>
+          <a:xfrm>
+            <a:off x="2293608" y="1837944"/>
+            <a:ext cx="4572" cy="256032"/>
           </a:xfrm>
           <a:prstGeom prst="rect">
             <a:avLst/>
@@ -9913,14 +9953,14 @@
       </p:sp>
       <p:sp>
         <p:nvSpPr>
-          <p:cNvPr id="65" name="Shape 63"/>
-          <p:cNvSpPr/>
-          <p:nvPr/>
-        </p:nvSpPr>
-        <p:spPr>
-          <a:xfrm>
-            <a:off x="2485389" y="1837944"/>
-            <a:ext cx="5660" cy="256032"/>
+          <p:cNvPr id="66" name="Shape 64"/>
+          <p:cNvSpPr/>
+          <p:nvPr/>
+        </p:nvSpPr>
+        <p:spPr>
+          <a:xfrm>
+            <a:off x="2296342" y="1837944"/>
+            <a:ext cx="5467" cy="256032"/>
           </a:xfrm>
           <a:prstGeom prst="rect">
             <a:avLst/>
@@ -9933,14 +9973,14 @@
       </p:sp>
       <p:sp>
         <p:nvSpPr>
-          <p:cNvPr id="66" name="Shape 64"/>
-          <p:cNvSpPr/>
-          <p:nvPr/>
-        </p:nvSpPr>
-        <p:spPr>
-          <a:xfrm>
-            <a:off x="2492534" y="1837944"/>
-            <a:ext cx="41386" cy="256032"/>
+          <p:cNvPr id="67" name="Shape 65"/>
+          <p:cNvSpPr/>
+          <p:nvPr/>
+        </p:nvSpPr>
+        <p:spPr>
+          <a:xfrm>
+            <a:off x="2305833" y="1837944"/>
+            <a:ext cx="4572" cy="256032"/>
           </a:xfrm>
           <a:prstGeom prst="rect">
             <a:avLst/>
@@ -9953,14 +9993,14 @@
       </p:sp>
       <p:sp>
         <p:nvSpPr>
-          <p:cNvPr id="67" name="Shape 65"/>
-          <p:cNvSpPr/>
-          <p:nvPr/>
-        </p:nvSpPr>
-        <p:spPr>
-          <a:xfrm>
-            <a:off x="2534556" y="1837944"/>
-            <a:ext cx="18111" cy="256032"/>
+          <p:cNvPr id="68" name="Shape 66"/>
+          <p:cNvSpPr/>
+          <p:nvPr/>
+        </p:nvSpPr>
+        <p:spPr>
+          <a:xfrm>
+            <a:off x="2308566" y="1837944"/>
+            <a:ext cx="4572" cy="256032"/>
           </a:xfrm>
           <a:prstGeom prst="rect">
             <a:avLst/>
@@ -9973,13 +10013,13 @@
       </p:sp>
       <p:sp>
         <p:nvSpPr>
-          <p:cNvPr id="68" name="Shape 66"/>
-          <p:cNvSpPr/>
-          <p:nvPr/>
-        </p:nvSpPr>
-        <p:spPr>
-          <a:xfrm>
-            <a:off x="2555072" y="1837944"/>
+          <p:cNvPr id="69" name="Shape 67"/>
+          <p:cNvSpPr/>
+          <p:nvPr/>
+        </p:nvSpPr>
+        <p:spPr>
+          <a:xfrm>
+            <a:off x="2312286" y="1837944"/>
             <a:ext cx="4572" cy="256032"/>
           </a:xfrm>
           <a:prstGeom prst="rect">
@@ -9993,13 +10033,33 @@
       </p:sp>
       <p:sp>
         <p:nvSpPr>
-          <p:cNvPr id="69" name="Shape 67"/>
-          <p:cNvSpPr/>
-          <p:nvPr/>
-        </p:nvSpPr>
-        <p:spPr>
-          <a:xfrm>
-            <a:off x="2560307" y="1837944"/>
+          <p:cNvPr id="70" name="Shape 68"/>
+          <p:cNvSpPr/>
+          <p:nvPr/>
+        </p:nvSpPr>
+        <p:spPr>
+          <a:xfrm>
+            <a:off x="2314944" y="1837944"/>
+            <a:ext cx="8656" cy="256032"/>
+          </a:xfrm>
+          <a:prstGeom prst="rect">
+            <a:avLst/>
+          </a:prstGeom>
+          <a:solidFill>
+            <a:srgbClr val="76B900"/>
+          </a:solidFill>
+          <a:ln/>
+        </p:spPr>
+      </p:sp>
+      <p:sp>
+        <p:nvSpPr>
+          <p:cNvPr id="71" name="Shape 69"/>
+          <p:cNvSpPr/>
+          <p:nvPr/>
+        </p:nvSpPr>
+        <p:spPr>
+          <a:xfrm>
+            <a:off x="2326940" y="1837944"/>
             <a:ext cx="4572" cy="256032"/>
           </a:xfrm>
           <a:prstGeom prst="rect">
@@ -10013,13 +10073,13 @@
       </p:sp>
       <p:sp>
         <p:nvSpPr>
-          <p:cNvPr id="70" name="Shape 68"/>
-          <p:cNvSpPr/>
-          <p:nvPr/>
-        </p:nvSpPr>
-        <p:spPr>
-          <a:xfrm>
-            <a:off x="2563066" y="1837944"/>
+          <p:cNvPr id="72" name="Shape 70"/>
+          <p:cNvSpPr/>
+          <p:nvPr/>
+        </p:nvSpPr>
+        <p:spPr>
+          <a:xfrm>
+            <a:off x="2329294" y="1837944"/>
             <a:ext cx="4572" cy="256032"/>
           </a:xfrm>
           <a:prstGeom prst="rect">
@@ -10033,14 +10093,14 @@
       </p:sp>
       <p:sp>
         <p:nvSpPr>
-          <p:cNvPr id="71" name="Shape 69"/>
-          <p:cNvSpPr/>
-          <p:nvPr/>
-        </p:nvSpPr>
-        <p:spPr>
-          <a:xfrm>
-            <a:off x="2565542" y="1837944"/>
-            <a:ext cx="5094" cy="256032"/>
+          <p:cNvPr id="73" name="Shape 71"/>
+          <p:cNvSpPr/>
+          <p:nvPr/>
+        </p:nvSpPr>
+        <p:spPr>
+          <a:xfrm>
+            <a:off x="2332635" y="1837944"/>
+            <a:ext cx="4572" cy="256032"/>
           </a:xfrm>
           <a:prstGeom prst="rect">
             <a:avLst/>
@@ -10053,13 +10113,33 @@
       </p:sp>
       <p:sp>
         <p:nvSpPr>
-          <p:cNvPr id="72" name="Shape 70"/>
-          <p:cNvSpPr/>
-          <p:nvPr/>
-        </p:nvSpPr>
-        <p:spPr>
-          <a:xfrm>
-            <a:off x="2574244" y="1837944"/>
+          <p:cNvPr id="74" name="Shape 72"/>
+          <p:cNvSpPr/>
+          <p:nvPr/>
+        </p:nvSpPr>
+        <p:spPr>
+          <a:xfrm>
+            <a:off x="2335368" y="1837944"/>
+            <a:ext cx="5846" cy="256032"/>
+          </a:xfrm>
+          <a:prstGeom prst="rect">
+            <a:avLst/>
+          </a:prstGeom>
+          <a:solidFill>
+            <a:srgbClr val="76B900"/>
+          </a:solidFill>
+          <a:ln/>
+        </p:spPr>
+      </p:sp>
+      <p:sp>
+        <p:nvSpPr>
+          <p:cNvPr id="75" name="Shape 73"/>
+          <p:cNvSpPr/>
+          <p:nvPr/>
+        </p:nvSpPr>
+        <p:spPr>
+          <a:xfrm>
+            <a:off x="2341822" y="1837944"/>
             <a:ext cx="4572" cy="256032"/>
           </a:xfrm>
           <a:prstGeom prst="rect">
@@ -10073,13 +10153,13 @@
       </p:sp>
       <p:sp>
         <p:nvSpPr>
-          <p:cNvPr id="73" name="Shape 71"/>
-          <p:cNvSpPr/>
-          <p:nvPr/>
-        </p:nvSpPr>
-        <p:spPr>
-          <a:xfrm>
-            <a:off x="2580682" y="1837944"/>
+          <p:cNvPr id="76" name="Shape 74"/>
+          <p:cNvSpPr/>
+          <p:nvPr/>
+        </p:nvSpPr>
+        <p:spPr>
+          <a:xfrm>
+            <a:off x="2346529" y="1837944"/>
             <a:ext cx="4572" cy="256032"/>
           </a:xfrm>
           <a:prstGeom prst="rect">
@@ -10093,14 +10173,14 @@
       </p:sp>
       <p:sp>
         <p:nvSpPr>
-          <p:cNvPr id="74" name="Shape 72"/>
-          <p:cNvSpPr/>
-          <p:nvPr/>
-        </p:nvSpPr>
-        <p:spPr>
-          <a:xfrm>
-            <a:off x="2583229" y="1837944"/>
-            <a:ext cx="9055" cy="256032"/>
+          <p:cNvPr id="77" name="Shape 75"/>
+          <p:cNvSpPr/>
+          <p:nvPr/>
+        </p:nvSpPr>
+        <p:spPr>
+          <a:xfrm>
+            <a:off x="2349566" y="1837944"/>
+            <a:ext cx="4572" cy="256032"/>
           </a:xfrm>
           <a:prstGeom prst="rect">
             <a:avLst/>
@@ -10113,13 +10193,33 @@
       </p:sp>
       <p:sp>
         <p:nvSpPr>
-          <p:cNvPr id="75" name="Shape 73"/>
-          <p:cNvSpPr/>
-          <p:nvPr/>
-        </p:nvSpPr>
-        <p:spPr>
-          <a:xfrm>
-            <a:off x="2595750" y="1837944"/>
+          <p:cNvPr id="78" name="Shape 76"/>
+          <p:cNvSpPr/>
+          <p:nvPr/>
+        </p:nvSpPr>
+        <p:spPr>
+          <a:xfrm>
+            <a:off x="2352831" y="1837944"/>
+            <a:ext cx="26043" cy="256032"/>
+          </a:xfrm>
+          <a:prstGeom prst="rect">
+            <a:avLst/>
+          </a:prstGeom>
+          <a:solidFill>
+            <a:srgbClr val="76B900"/>
+          </a:solidFill>
+          <a:ln/>
+        </p:spPr>
+      </p:sp>
+      <p:sp>
+        <p:nvSpPr>
+          <p:cNvPr id="79" name="Shape 77"/>
+          <p:cNvSpPr/>
+          <p:nvPr/>
+        </p:nvSpPr>
+        <p:spPr>
+          <a:xfrm>
+            <a:off x="2381455" y="1837944"/>
             <a:ext cx="4572" cy="256032"/>
           </a:xfrm>
           <a:prstGeom prst="rect">
@@ -10133,13 +10233,13 @@
       </p:sp>
       <p:sp>
         <p:nvSpPr>
-          <p:cNvPr id="76" name="Shape 74"/>
-          <p:cNvSpPr/>
-          <p:nvPr/>
-        </p:nvSpPr>
-        <p:spPr>
-          <a:xfrm>
-            <a:off x="2598368" y="1837944"/>
+          <p:cNvPr id="80" name="Shape 78"/>
+          <p:cNvSpPr/>
+          <p:nvPr/>
+        </p:nvSpPr>
+        <p:spPr>
+          <a:xfrm>
+            <a:off x="2387681" y="1837944"/>
             <a:ext cx="4572" cy="256032"/>
           </a:xfrm>
           <a:prstGeom prst="rect">
@@ -10153,14 +10253,14 @@
       </p:sp>
       <p:sp>
         <p:nvSpPr>
-          <p:cNvPr id="77" name="Shape 75"/>
-          <p:cNvSpPr/>
-          <p:nvPr/>
-        </p:nvSpPr>
-        <p:spPr>
-          <a:xfrm>
-            <a:off x="2601834" y="1837944"/>
-            <a:ext cx="10541" cy="256032"/>
+          <p:cNvPr id="81" name="Shape 79"/>
+          <p:cNvSpPr/>
+          <p:nvPr/>
+        </p:nvSpPr>
+        <p:spPr>
+          <a:xfrm>
+            <a:off x="2390338" y="1837944"/>
+            <a:ext cx="8276" cy="256032"/>
           </a:xfrm>
           <a:prstGeom prst="rect">
             <a:avLst/>
@@ -10173,13 +10273,13 @@
       </p:sp>
       <p:sp>
         <p:nvSpPr>
-          <p:cNvPr id="78" name="Shape 76"/>
-          <p:cNvSpPr/>
-          <p:nvPr/>
-        </p:nvSpPr>
-        <p:spPr>
-          <a:xfrm>
-            <a:off x="2615488" y="1837944"/>
+          <p:cNvPr id="82" name="Shape 80"/>
+          <p:cNvSpPr/>
+          <p:nvPr/>
+        </p:nvSpPr>
+        <p:spPr>
+          <a:xfrm>
+            <a:off x="2401044" y="1837944"/>
             <a:ext cx="4572" cy="256032"/>
           </a:xfrm>
           <a:prstGeom prst="rect">
@@ -10193,13 +10293,13 @@
       </p:sp>
       <p:sp>
         <p:nvSpPr>
-          <p:cNvPr id="79" name="Shape 77"/>
-          <p:cNvSpPr/>
-          <p:nvPr/>
-        </p:nvSpPr>
-        <p:spPr>
-          <a:xfrm>
-            <a:off x="2621006" y="1837944"/>
+          <p:cNvPr id="83" name="Shape 81"/>
+          <p:cNvSpPr/>
+          <p:nvPr/>
+        </p:nvSpPr>
+        <p:spPr>
+          <a:xfrm>
+            <a:off x="2407194" y="1837944"/>
             <a:ext cx="4572" cy="256032"/>
           </a:xfrm>
           <a:prstGeom prst="rect">
@@ -10213,13 +10313,33 @@
       </p:sp>
       <p:sp>
         <p:nvSpPr>
-          <p:cNvPr id="80" name="Shape 78"/>
-          <p:cNvSpPr/>
-          <p:nvPr/>
-        </p:nvSpPr>
-        <p:spPr>
-          <a:xfrm>
-            <a:off x="2623836" y="1837944"/>
+          <p:cNvPr id="84" name="Shape 82"/>
+          <p:cNvSpPr/>
+          <p:nvPr/>
+        </p:nvSpPr>
+        <p:spPr>
+          <a:xfrm>
+            <a:off x="2409851" y="1837944"/>
+            <a:ext cx="8504" cy="256032"/>
+          </a:xfrm>
+          <a:prstGeom prst="rect">
+            <a:avLst/>
+          </a:prstGeom>
+          <a:solidFill>
+            <a:srgbClr val="76B900"/>
+          </a:solidFill>
+          <a:ln/>
+        </p:spPr>
+      </p:sp>
+      <p:sp>
+        <p:nvSpPr>
+          <p:cNvPr id="85" name="Shape 83"/>
+          <p:cNvSpPr/>
+          <p:nvPr/>
+        </p:nvSpPr>
+        <p:spPr>
+          <a:xfrm>
+            <a:off x="2420709" y="1837944"/>
             <a:ext cx="4572" cy="256032"/>
           </a:xfrm>
           <a:prstGeom prst="rect">
@@ -10233,14 +10353,14 @@
       </p:sp>
       <p:sp>
         <p:nvSpPr>
-          <p:cNvPr id="81" name="Shape 79"/>
-          <p:cNvSpPr/>
-          <p:nvPr/>
-        </p:nvSpPr>
-        <p:spPr>
-          <a:xfrm>
-            <a:off x="2627585" y="1837944"/>
-            <a:ext cx="20657" cy="256032"/>
+          <p:cNvPr id="86" name="Shape 84"/>
+          <p:cNvSpPr/>
+          <p:nvPr/>
+        </p:nvSpPr>
+        <p:spPr>
+          <a:xfrm>
+            <a:off x="2426935" y="1837944"/>
+            <a:ext cx="25359" cy="256032"/>
           </a:xfrm>
           <a:prstGeom prst="rect">
             <a:avLst/>
@@ -10253,13 +10373,13 @@
       </p:sp>
       <p:sp>
         <p:nvSpPr>
-          <p:cNvPr id="82" name="Shape 80"/>
-          <p:cNvSpPr/>
-          <p:nvPr/>
-        </p:nvSpPr>
-        <p:spPr>
-          <a:xfrm>
-            <a:off x="2650719" y="1837944"/>
+          <p:cNvPr id="87" name="Shape 85"/>
+          <p:cNvSpPr/>
+          <p:nvPr/>
+        </p:nvSpPr>
+        <p:spPr>
+          <a:xfrm>
+            <a:off x="2455407" y="1837944"/>
             <a:ext cx="4572" cy="256032"/>
           </a:xfrm>
           <a:prstGeom prst="rect">
@@ -10273,13 +10393,13 @@
       </p:sp>
       <p:sp>
         <p:nvSpPr>
-          <p:cNvPr id="83" name="Shape 81"/>
-          <p:cNvSpPr/>
-          <p:nvPr/>
-        </p:nvSpPr>
-        <p:spPr>
-          <a:xfrm>
-            <a:off x="2656874" y="1837944"/>
+          <p:cNvPr id="88" name="Shape 86"/>
+          <p:cNvSpPr/>
+          <p:nvPr/>
+        </p:nvSpPr>
+        <p:spPr>
+          <a:xfrm>
+            <a:off x="2457761" y="1837944"/>
             <a:ext cx="4572" cy="256032"/>
           </a:xfrm>
           <a:prstGeom prst="rect">
@@ -10293,14 +10413,14 @@
       </p:sp>
       <p:sp>
         <p:nvSpPr>
-          <p:cNvPr id="84" name="Shape 82"/>
-          <p:cNvSpPr/>
-          <p:nvPr/>
-        </p:nvSpPr>
-        <p:spPr>
-          <a:xfrm>
-            <a:off x="2659279" y="1837944"/>
-            <a:ext cx="8419" cy="256032"/>
+          <p:cNvPr id="89" name="Shape 87"/>
+          <p:cNvSpPr/>
+          <p:nvPr/>
+        </p:nvSpPr>
+        <p:spPr>
+          <a:xfrm>
+            <a:off x="2461785" y="1837944"/>
+            <a:ext cx="4572" cy="256032"/>
           </a:xfrm>
           <a:prstGeom prst="rect">
             <a:avLst/>
@@ -10313,13 +10433,33 @@
       </p:sp>
       <p:sp>
         <p:nvSpPr>
-          <p:cNvPr id="85" name="Shape 83"/>
-          <p:cNvSpPr/>
-          <p:nvPr/>
-        </p:nvSpPr>
-        <p:spPr>
-          <a:xfrm>
-            <a:off x="2670103" y="1837944"/>
+          <p:cNvPr id="90" name="Shape 88"/>
+          <p:cNvSpPr/>
+          <p:nvPr/>
+        </p:nvSpPr>
+        <p:spPr>
+          <a:xfrm>
+            <a:off x="2464898" y="1837944"/>
+            <a:ext cx="8428" cy="256032"/>
+          </a:xfrm>
+          <a:prstGeom prst="rect">
+            <a:avLst/>
+          </a:prstGeom>
+          <a:solidFill>
+            <a:srgbClr val="76B900"/>
+          </a:solidFill>
+          <a:ln/>
+        </p:spPr>
+      </p:sp>
+      <p:sp>
+        <p:nvSpPr>
+          <p:cNvPr id="91" name="Shape 89"/>
+          <p:cNvSpPr/>
+          <p:nvPr/>
+        </p:nvSpPr>
+        <p:spPr>
+          <a:xfrm>
+            <a:off x="2475679" y="1837944"/>
             <a:ext cx="4572" cy="256032"/>
           </a:xfrm>
           <a:prstGeom prst="rect">
@@ -10333,13 +10473,33 @@
       </p:sp>
       <p:sp>
         <p:nvSpPr>
-          <p:cNvPr id="86" name="Shape 84"/>
-          <p:cNvSpPr/>
-          <p:nvPr/>
-        </p:nvSpPr>
-        <p:spPr>
-          <a:xfrm>
-            <a:off x="2672862" y="1837944"/>
+          <p:cNvPr id="92" name="Shape 90"/>
+          <p:cNvSpPr/>
+          <p:nvPr/>
+        </p:nvSpPr>
+        <p:spPr>
+          <a:xfrm>
+            <a:off x="2481829" y="1837944"/>
+            <a:ext cx="10782" cy="256032"/>
+          </a:xfrm>
+          <a:prstGeom prst="rect">
+            <a:avLst/>
+          </a:prstGeom>
+          <a:solidFill>
+            <a:srgbClr val="76B900"/>
+          </a:solidFill>
+          <a:ln/>
+        </p:spPr>
+      </p:sp>
+      <p:sp>
+        <p:nvSpPr>
+          <p:cNvPr id="93" name="Shape 91"/>
+          <p:cNvSpPr/>
+          <p:nvPr/>
+        </p:nvSpPr>
+        <p:spPr>
+          <a:xfrm>
+            <a:off x="2495116" y="1837944"/>
             <a:ext cx="4572" cy="256032"/>
           </a:xfrm>
           <a:prstGeom prst="rect">
@@ -10353,14 +10513,14 @@
       </p:sp>
       <p:sp>
         <p:nvSpPr>
-          <p:cNvPr id="87" name="Shape 85"/>
-          <p:cNvSpPr/>
-          <p:nvPr/>
-        </p:nvSpPr>
-        <p:spPr>
-          <a:xfrm>
-            <a:off x="2676116" y="1837944"/>
-            <a:ext cx="11319" cy="256032"/>
+          <p:cNvPr id="94" name="Shape 92"/>
+          <p:cNvSpPr/>
+          <p:nvPr/>
+        </p:nvSpPr>
+        <p:spPr>
+          <a:xfrm>
+            <a:off x="2498002" y="1837944"/>
+            <a:ext cx="4572" cy="256032"/>
           </a:xfrm>
           <a:prstGeom prst="rect">
             <a:avLst/>
@@ -10373,13 +10533,33 @@
       </p:sp>
       <p:sp>
         <p:nvSpPr>
-          <p:cNvPr id="88" name="Shape 86"/>
-          <p:cNvSpPr/>
-          <p:nvPr/>
-        </p:nvSpPr>
-        <p:spPr>
-          <a:xfrm>
-            <a:off x="2690619" y="1837944"/>
+          <p:cNvPr id="95" name="Shape 93"/>
+          <p:cNvSpPr/>
+          <p:nvPr/>
+        </p:nvSpPr>
+        <p:spPr>
+          <a:xfrm>
+            <a:off x="2501646" y="1837944"/>
+            <a:ext cx="26422" cy="256032"/>
+          </a:xfrm>
+          <a:prstGeom prst="rect">
+            <a:avLst/>
+          </a:prstGeom>
+          <a:solidFill>
+            <a:srgbClr val="76B900"/>
+          </a:solidFill>
+          <a:ln/>
+        </p:spPr>
+      </p:sp>
+      <p:sp>
+        <p:nvSpPr>
+          <p:cNvPr id="96" name="Shape 94"/>
+          <p:cNvSpPr/>
+          <p:nvPr/>
+        </p:nvSpPr>
+        <p:spPr>
+          <a:xfrm>
+            <a:off x="2531105" y="1837944"/>
             <a:ext cx="4572" cy="256032"/>
           </a:xfrm>
           <a:prstGeom prst="rect">
@@ -10393,13 +10573,13 @@
       </p:sp>
       <p:sp>
         <p:nvSpPr>
-          <p:cNvPr id="89" name="Shape 87"/>
-          <p:cNvSpPr/>
-          <p:nvPr/>
-        </p:nvSpPr>
-        <p:spPr>
-          <a:xfrm>
-            <a:off x="2693095" y="1837944"/>
+          <p:cNvPr id="97" name="Shape 95"/>
+          <p:cNvSpPr/>
+          <p:nvPr/>
+        </p:nvSpPr>
+        <p:spPr>
+          <a:xfrm>
+            <a:off x="2537104" y="1837944"/>
             <a:ext cx="4572" cy="256032"/>
           </a:xfrm>
           <a:prstGeom prst="rect">
@@ -10413,13 +10593,33 @@
       </p:sp>
       <p:sp>
         <p:nvSpPr>
-          <p:cNvPr id="90" name="Shape 88"/>
-          <p:cNvSpPr/>
-          <p:nvPr/>
-        </p:nvSpPr>
-        <p:spPr>
-          <a:xfrm>
-            <a:off x="2696915" y="1837944"/>
+          <p:cNvPr id="98" name="Shape 96"/>
+          <p:cNvSpPr/>
+          <p:nvPr/>
+        </p:nvSpPr>
+        <p:spPr>
+          <a:xfrm>
+            <a:off x="2539761" y="1837944"/>
+            <a:ext cx="8352" cy="256032"/>
+          </a:xfrm>
+          <a:prstGeom prst="rect">
+            <a:avLst/>
+          </a:prstGeom>
+          <a:solidFill>
+            <a:srgbClr val="76B900"/>
+          </a:solidFill>
+          <a:ln/>
+        </p:spPr>
+      </p:sp>
+      <p:sp>
+        <p:nvSpPr>
+          <p:cNvPr id="99" name="Shape 97"/>
+          <p:cNvSpPr/>
+          <p:nvPr/>
+        </p:nvSpPr>
+        <p:spPr>
+          <a:xfrm>
+            <a:off x="2550467" y="1837944"/>
             <a:ext cx="4572" cy="256032"/>
           </a:xfrm>
           <a:prstGeom prst="rect">
@@ -10433,14 +10633,14 @@
       </p:sp>
       <p:sp>
         <p:nvSpPr>
-          <p:cNvPr id="91" name="Shape 89"/>
-          <p:cNvSpPr/>
-          <p:nvPr/>
-        </p:nvSpPr>
-        <p:spPr>
-          <a:xfrm>
-            <a:off x="2699603" y="1837944"/>
-            <a:ext cx="17828" cy="256032"/>
+          <p:cNvPr id="100" name="Shape 98"/>
+          <p:cNvSpPr/>
+          <p:nvPr/>
+        </p:nvSpPr>
+        <p:spPr>
+          <a:xfrm>
+            <a:off x="2553352" y="1837944"/>
+            <a:ext cx="4572" cy="256032"/>
           </a:xfrm>
           <a:prstGeom prst="rect">
             <a:avLst/>
@@ -10453,14 +10653,14 @@
       </p:sp>
       <p:sp>
         <p:nvSpPr>
-          <p:cNvPr id="92" name="Shape 90"/>
-          <p:cNvSpPr/>
-          <p:nvPr/>
-        </p:nvSpPr>
-        <p:spPr>
-          <a:xfrm>
-            <a:off x="2718138" y="1837944"/>
-            <a:ext cx="5094" cy="256032"/>
+          <p:cNvPr id="101" name="Shape 99"/>
+          <p:cNvSpPr/>
+          <p:nvPr/>
+        </p:nvSpPr>
+        <p:spPr>
+          <a:xfrm>
+            <a:off x="2556617" y="1837944"/>
+            <a:ext cx="11237" cy="256032"/>
           </a:xfrm>
           <a:prstGeom prst="rect">
             <a:avLst/>
@@ -10473,13 +10673,13 @@
       </p:sp>
       <p:sp>
         <p:nvSpPr>
-          <p:cNvPr id="93" name="Shape 91"/>
-          <p:cNvSpPr/>
-          <p:nvPr/>
-        </p:nvSpPr>
-        <p:spPr>
-          <a:xfrm>
-            <a:off x="2726203" y="1837944"/>
+          <p:cNvPr id="102" name="Shape 100"/>
+          <p:cNvSpPr/>
+          <p:nvPr/>
+        </p:nvSpPr>
+        <p:spPr>
+          <a:xfrm>
+            <a:off x="2570739" y="1837944"/>
             <a:ext cx="4572" cy="256032"/>
           </a:xfrm>
           <a:prstGeom prst="rect">
@@ -10493,13 +10693,33 @@
       </p:sp>
       <p:sp>
         <p:nvSpPr>
-          <p:cNvPr id="94" name="Shape 92"/>
-          <p:cNvSpPr/>
-          <p:nvPr/>
-        </p:nvSpPr>
-        <p:spPr>
-          <a:xfrm>
-            <a:off x="2728538" y="1837944"/>
+          <p:cNvPr id="103" name="Shape 101"/>
+          <p:cNvSpPr/>
+          <p:nvPr/>
+        </p:nvSpPr>
+        <p:spPr>
+          <a:xfrm>
+            <a:off x="2577117" y="1837944"/>
+            <a:ext cx="25207" cy="256032"/>
+          </a:xfrm>
+          <a:prstGeom prst="rect">
+            <a:avLst/>
+          </a:prstGeom>
+          <a:solidFill>
+            <a:srgbClr val="76B900"/>
+          </a:solidFill>
+          <a:ln/>
+        </p:spPr>
+      </p:sp>
+      <p:sp>
+        <p:nvSpPr>
+          <p:cNvPr id="104" name="Shape 102"/>
+          <p:cNvSpPr/>
+          <p:nvPr/>
+        </p:nvSpPr>
+        <p:spPr>
+          <a:xfrm>
+            <a:off x="2604754" y="1837944"/>
             <a:ext cx="4572" cy="256032"/>
           </a:xfrm>
           <a:prstGeom prst="rect">
@@ -10513,14 +10733,14 @@
       </p:sp>
       <p:sp>
         <p:nvSpPr>
-          <p:cNvPr id="95" name="Shape 93"/>
-          <p:cNvSpPr/>
-          <p:nvPr/>
-        </p:nvSpPr>
-        <p:spPr>
-          <a:xfrm>
-            <a:off x="2735188" y="1837944"/>
-            <a:ext cx="10329" cy="256032"/>
+          <p:cNvPr id="105" name="Shape 103"/>
+          <p:cNvSpPr/>
+          <p:nvPr/>
+        </p:nvSpPr>
+        <p:spPr>
+          <a:xfrm>
+            <a:off x="2607715" y="1837944"/>
+            <a:ext cx="4572" cy="256032"/>
           </a:xfrm>
           <a:prstGeom prst="rect">
             <a:avLst/>
@@ -10533,13 +10753,33 @@
       </p:sp>
       <p:sp>
         <p:nvSpPr>
-          <p:cNvPr id="96" name="Shape 94"/>
-          <p:cNvSpPr/>
-          <p:nvPr/>
-        </p:nvSpPr>
-        <p:spPr>
-          <a:xfrm>
-            <a:off x="2748488" y="1837944"/>
+          <p:cNvPr id="106" name="Shape 104"/>
+          <p:cNvSpPr/>
+          <p:nvPr/>
+        </p:nvSpPr>
+        <p:spPr>
+          <a:xfrm>
+            <a:off x="2610904" y="1837944"/>
+            <a:ext cx="11009" cy="256032"/>
+          </a:xfrm>
+          <a:prstGeom prst="rect">
+            <a:avLst/>
+          </a:prstGeom>
+          <a:solidFill>
+            <a:srgbClr val="76B900"/>
+          </a:solidFill>
+          <a:ln/>
+        </p:spPr>
+      </p:sp>
+      <p:sp>
+        <p:nvSpPr>
+          <p:cNvPr id="107" name="Shape 105"/>
+          <p:cNvSpPr/>
+          <p:nvPr/>
+        </p:nvSpPr>
+        <p:spPr>
+          <a:xfrm>
+            <a:off x="2624343" y="1837944"/>
             <a:ext cx="4572" cy="256032"/>
           </a:xfrm>
           <a:prstGeom prst="rect">
@@ -10553,14 +10793,14 @@
       </p:sp>
       <p:sp>
         <p:nvSpPr>
-          <p:cNvPr id="97" name="Shape 95"/>
-          <p:cNvSpPr/>
-          <p:nvPr/>
-        </p:nvSpPr>
-        <p:spPr>
-          <a:xfrm>
-            <a:off x="2754006" y="1837944"/>
-            <a:ext cx="10116" cy="256032"/>
+          <p:cNvPr id="108" name="Shape 106"/>
+          <p:cNvSpPr/>
+          <p:nvPr/>
+        </p:nvSpPr>
+        <p:spPr>
+          <a:xfrm>
+            <a:off x="2627304" y="1837944"/>
+            <a:ext cx="4572" cy="256032"/>
           </a:xfrm>
           <a:prstGeom prst="rect">
             <a:avLst/>
@@ -10573,13 +10813,33 @@
       </p:sp>
       <p:sp>
         <p:nvSpPr>
-          <p:cNvPr id="98" name="Shape 96"/>
-          <p:cNvSpPr/>
-          <p:nvPr/>
-        </p:nvSpPr>
-        <p:spPr>
-          <a:xfrm>
-            <a:off x="2767023" y="1837944"/>
+          <p:cNvPr id="109" name="Shape 107"/>
+          <p:cNvSpPr/>
+          <p:nvPr/>
+        </p:nvSpPr>
+        <p:spPr>
+          <a:xfrm>
+            <a:off x="2630569" y="1837944"/>
+            <a:ext cx="10782" cy="256032"/>
+          </a:xfrm>
+          <a:prstGeom prst="rect">
+            <a:avLst/>
+          </a:prstGeom>
+          <a:solidFill>
+            <a:srgbClr val="76B900"/>
+          </a:solidFill>
+          <a:ln/>
+        </p:spPr>
+      </p:sp>
+      <p:sp>
+        <p:nvSpPr>
+          <p:cNvPr id="110" name="Shape 108"/>
+          <p:cNvSpPr/>
+          <p:nvPr/>
+        </p:nvSpPr>
+        <p:spPr>
+          <a:xfrm>
+            <a:off x="2643628" y="1837944"/>
             <a:ext cx="4572" cy="256032"/>
           </a:xfrm>
           <a:prstGeom prst="rect">
@@ -10593,13 +10853,53 @@
       </p:sp>
       <p:sp>
         <p:nvSpPr>
-          <p:cNvPr id="99" name="Shape 97"/>
-          <p:cNvSpPr/>
-          <p:nvPr/>
-        </p:nvSpPr>
-        <p:spPr>
-          <a:xfrm>
-            <a:off x="2769358" y="1837944"/>
+          <p:cNvPr id="111" name="Shape 109"/>
+          <p:cNvSpPr/>
+          <p:nvPr/>
+        </p:nvSpPr>
+        <p:spPr>
+          <a:xfrm>
+            <a:off x="2649778" y="1837944"/>
+            <a:ext cx="17539" cy="256032"/>
+          </a:xfrm>
+          <a:prstGeom prst="rect">
+            <a:avLst/>
+          </a:prstGeom>
+          <a:solidFill>
+            <a:srgbClr val="76B900"/>
+          </a:solidFill>
+          <a:ln/>
+        </p:spPr>
+      </p:sp>
+      <p:sp>
+        <p:nvSpPr>
+          <p:cNvPr id="112" name="Shape 110"/>
+          <p:cNvSpPr/>
+          <p:nvPr/>
+        </p:nvSpPr>
+        <p:spPr>
+          <a:xfrm>
+            <a:off x="2668000" y="1837944"/>
+            <a:ext cx="7972" cy="256032"/>
+          </a:xfrm>
+          <a:prstGeom prst="rect">
+            <a:avLst/>
+          </a:prstGeom>
+          <a:solidFill>
+            <a:srgbClr val="76B900"/>
+          </a:solidFill>
+          <a:ln/>
+        </p:spPr>
+      </p:sp>
+      <p:sp>
+        <p:nvSpPr>
+          <p:cNvPr id="113" name="Shape 111"/>
+          <p:cNvSpPr/>
+          <p:nvPr/>
+        </p:nvSpPr>
+        <p:spPr>
+          <a:xfrm>
+            <a:off x="2678934" y="1837944"/>
             <a:ext cx="4572" cy="256032"/>
           </a:xfrm>
           <a:prstGeom prst="rect">
@@ -10613,13 +10913,33 @@
       </p:sp>
       <p:sp>
         <p:nvSpPr>
-          <p:cNvPr id="100" name="Shape 98"/>
-          <p:cNvSpPr/>
-          <p:nvPr/>
-        </p:nvSpPr>
-        <p:spPr>
-          <a:xfrm>
-            <a:off x="2772400" y="1837944"/>
+          <p:cNvPr id="114" name="Shape 112"/>
+          <p:cNvSpPr/>
+          <p:nvPr/>
+        </p:nvSpPr>
+        <p:spPr>
+          <a:xfrm>
+            <a:off x="2684780" y="1837944"/>
+            <a:ext cx="10098" cy="256032"/>
+          </a:xfrm>
+          <a:prstGeom prst="rect">
+            <a:avLst/>
+          </a:prstGeom>
+          <a:solidFill>
+            <a:srgbClr val="76B900"/>
+          </a:solidFill>
+          <a:ln/>
+        </p:spPr>
+      </p:sp>
+      <p:sp>
+        <p:nvSpPr>
+          <p:cNvPr id="115" name="Shape 113"/>
+          <p:cNvSpPr/>
+          <p:nvPr/>
+        </p:nvSpPr>
+        <p:spPr>
+          <a:xfrm>
+            <a:off x="2697156" y="1837944"/>
             <a:ext cx="4572" cy="256032"/>
           </a:xfrm>
           <a:prstGeom prst="rect">
@@ -10633,14 +10953,14 @@
       </p:sp>
       <p:sp>
         <p:nvSpPr>
-          <p:cNvPr id="101" name="Shape 99"/>
-          <p:cNvSpPr/>
-          <p:nvPr/>
-        </p:nvSpPr>
-        <p:spPr>
-          <a:xfrm>
-            <a:off x="2774876" y="1837944"/>
-            <a:ext cx="15069" cy="256032"/>
+          <p:cNvPr id="116" name="Shape 114"/>
+          <p:cNvSpPr/>
+          <p:nvPr/>
+        </p:nvSpPr>
+        <p:spPr>
+          <a:xfrm>
+            <a:off x="2703154" y="1837944"/>
+            <a:ext cx="4572" cy="256032"/>
           </a:xfrm>
           <a:prstGeom prst="rect">
             <a:avLst/>
@@ -10653,14 +10973,14 @@
       </p:sp>
       <p:sp>
         <p:nvSpPr>
-          <p:cNvPr id="102" name="Shape 100"/>
-          <p:cNvSpPr/>
-          <p:nvPr/>
-        </p:nvSpPr>
-        <p:spPr>
-          <a:xfrm>
-            <a:off x="2790581" y="1837944"/>
-            <a:ext cx="8065" cy="256032"/>
+          <p:cNvPr id="117" name="Shape 115"/>
+          <p:cNvSpPr/>
+          <p:nvPr/>
+        </p:nvSpPr>
+        <p:spPr>
+          <a:xfrm>
+            <a:off x="2706191" y="1837944"/>
+            <a:ext cx="8883" cy="256032"/>
           </a:xfrm>
           <a:prstGeom prst="rect">
             <a:avLst/>
@@ -10673,13 +10993,13 @@
       </p:sp>
       <p:sp>
         <p:nvSpPr>
-          <p:cNvPr id="103" name="Shape 101"/>
-          <p:cNvSpPr/>
-          <p:nvPr/>
-        </p:nvSpPr>
-        <p:spPr>
-          <a:xfrm>
-            <a:off x="2801405" y="1837944"/>
+          <p:cNvPr id="118" name="Shape 116"/>
+          <p:cNvSpPr/>
+          <p:nvPr/>
+        </p:nvSpPr>
+        <p:spPr>
+          <a:xfrm>
+            <a:off x="2717428" y="1837944"/>
             <a:ext cx="4572" cy="256032"/>
           </a:xfrm>
           <a:prstGeom prst="rect">
@@ -10693,13 +11013,13 @@
       </p:sp>
       <p:sp>
         <p:nvSpPr>
-          <p:cNvPr id="104" name="Shape 102"/>
-          <p:cNvSpPr/>
-          <p:nvPr/>
-        </p:nvSpPr>
-        <p:spPr>
-          <a:xfrm>
-            <a:off x="2806145" y="1837944"/>
+          <p:cNvPr id="119" name="Shape 117"/>
+          <p:cNvSpPr/>
+          <p:nvPr/>
+        </p:nvSpPr>
+        <p:spPr>
+          <a:xfrm>
+            <a:off x="2720313" y="1837944"/>
             <a:ext cx="4572" cy="256032"/>
           </a:xfrm>
           <a:prstGeom prst="rect">
@@ -10713,13 +11033,33 @@
       </p:sp>
       <p:sp>
         <p:nvSpPr>
-          <p:cNvPr id="105" name="Shape 103"/>
-          <p:cNvSpPr/>
-          <p:nvPr/>
-        </p:nvSpPr>
-        <p:spPr>
-          <a:xfrm>
-            <a:off x="2808762" y="1837944"/>
+          <p:cNvPr id="120" name="Shape 118"/>
+          <p:cNvSpPr/>
+          <p:nvPr/>
+        </p:nvSpPr>
+        <p:spPr>
+          <a:xfrm>
+            <a:off x="2723578" y="1837944"/>
+            <a:ext cx="24220" cy="256032"/>
+          </a:xfrm>
+          <a:prstGeom prst="rect">
+            <a:avLst/>
+          </a:prstGeom>
+          <a:solidFill>
+            <a:srgbClr val="76B900"/>
+          </a:solidFill>
+          <a:ln/>
+        </p:spPr>
+      </p:sp>
+      <p:sp>
+        <p:nvSpPr>
+          <p:cNvPr id="121" name="Shape 119"/>
+          <p:cNvSpPr/>
+          <p:nvPr/>
+        </p:nvSpPr>
+        <p:spPr>
+          <a:xfrm>
+            <a:off x="2748558" y="1837944"/>
             <a:ext cx="4572" cy="256032"/>
           </a:xfrm>
           <a:prstGeom prst="rect">
@@ -10733,14 +11073,14 @@
       </p:sp>
       <p:sp>
         <p:nvSpPr>
-          <p:cNvPr id="106" name="Shape 104"/>
-          <p:cNvSpPr/>
-          <p:nvPr/>
-        </p:nvSpPr>
-        <p:spPr>
-          <a:xfrm>
-            <a:off x="2812370" y="1837944"/>
-            <a:ext cx="10399" cy="256032"/>
+          <p:cNvPr id="122" name="Shape 120"/>
+          <p:cNvSpPr/>
+          <p:nvPr/>
+        </p:nvSpPr>
+        <p:spPr>
+          <a:xfrm>
+            <a:off x="2754632" y="1837944"/>
+            <a:ext cx="9263" cy="256032"/>
           </a:xfrm>
           <a:prstGeom prst="rect">
             <a:avLst/>
@@ -10753,13 +11093,33 @@
       </p:sp>
       <p:sp>
         <p:nvSpPr>
-          <p:cNvPr id="107" name="Shape 105"/>
-          <p:cNvSpPr/>
-          <p:nvPr/>
-        </p:nvSpPr>
-        <p:spPr>
-          <a:xfrm>
-            <a:off x="2825034" y="1837944"/>
+          <p:cNvPr id="123" name="Shape 121"/>
+          <p:cNvSpPr/>
+          <p:nvPr/>
+        </p:nvSpPr>
+        <p:spPr>
+          <a:xfrm>
+            <a:off x="2764730" y="1837944"/>
+            <a:ext cx="4783" cy="256032"/>
+          </a:xfrm>
+          <a:prstGeom prst="rect">
+            <a:avLst/>
+          </a:prstGeom>
+          <a:solidFill>
+            <a:srgbClr val="76B900"/>
+          </a:solidFill>
+          <a:ln/>
+        </p:spPr>
+      </p:sp>
+      <p:sp>
+        <p:nvSpPr>
+          <p:cNvPr id="124" name="Shape 122"/>
+          <p:cNvSpPr/>
+          <p:nvPr/>
+        </p:nvSpPr>
+        <p:spPr>
+          <a:xfrm>
+            <a:off x="2771412" y="1837944"/>
             <a:ext cx="4572" cy="256032"/>
           </a:xfrm>
           <a:prstGeom prst="rect">
@@ -10773,13 +11133,33 @@
       </p:sp>
       <p:sp>
         <p:nvSpPr>
-          <p:cNvPr id="108" name="Shape 106"/>
-          <p:cNvSpPr/>
-          <p:nvPr/>
-        </p:nvSpPr>
-        <p:spPr>
-          <a:xfrm>
-            <a:off x="2830764" y="1837944"/>
+          <p:cNvPr id="125" name="Shape 123"/>
+          <p:cNvSpPr/>
+          <p:nvPr/>
+        </p:nvSpPr>
+        <p:spPr>
+          <a:xfrm>
+            <a:off x="2773841" y="1837944"/>
+            <a:ext cx="8276" cy="256032"/>
+          </a:xfrm>
+          <a:prstGeom prst="rect">
+            <a:avLst/>
+          </a:prstGeom>
+          <a:solidFill>
+            <a:srgbClr val="76B900"/>
+          </a:solidFill>
+          <a:ln/>
+        </p:spPr>
+      </p:sp>
+      <p:sp>
+        <p:nvSpPr>
+          <p:cNvPr id="126" name="Shape 124"/>
+          <p:cNvSpPr/>
+          <p:nvPr/>
+        </p:nvSpPr>
+        <p:spPr>
+          <a:xfrm>
+            <a:off x="2785686" y="1837944"/>
             <a:ext cx="4572" cy="256032"/>
           </a:xfrm>
           <a:prstGeom prst="rect">
@@ -10793,14 +11173,14 @@
       </p:sp>
       <p:sp>
         <p:nvSpPr>
-          <p:cNvPr id="109" name="Shape 107"/>
-          <p:cNvSpPr/>
-          <p:nvPr/>
-        </p:nvSpPr>
-        <p:spPr>
-          <a:xfrm>
-            <a:off x="2833664" y="1837944"/>
-            <a:ext cx="9338" cy="256032"/>
+          <p:cNvPr id="127" name="Shape 125"/>
+          <p:cNvSpPr/>
+          <p:nvPr/>
+        </p:nvSpPr>
+        <p:spPr>
+          <a:xfrm>
+            <a:off x="2791380" y="1837944"/>
+            <a:ext cx="25132" cy="256032"/>
           </a:xfrm>
           <a:prstGeom prst="rect">
             <a:avLst/>
@@ -10813,13 +11193,13 @@
       </p:sp>
       <p:sp>
         <p:nvSpPr>
-          <p:cNvPr id="110" name="Shape 108"/>
-          <p:cNvSpPr/>
-          <p:nvPr/>
-        </p:nvSpPr>
-        <p:spPr>
-          <a:xfrm>
-            <a:off x="2846328" y="1837944"/>
+          <p:cNvPr id="128" name="Shape 126"/>
+          <p:cNvSpPr/>
+          <p:nvPr/>
+        </p:nvSpPr>
+        <p:spPr>
+          <a:xfrm>
+            <a:off x="2818941" y="1837944"/>
             <a:ext cx="4572" cy="256032"/>
           </a:xfrm>
           <a:prstGeom prst="rect">
@@ -10833,14 +11213,14 @@
       </p:sp>
       <p:sp>
         <p:nvSpPr>
-          <p:cNvPr id="111" name="Shape 109"/>
-          <p:cNvSpPr/>
-          <p:nvPr/>
-        </p:nvSpPr>
-        <p:spPr>
-          <a:xfrm>
-            <a:off x="2851633" y="1837944"/>
-            <a:ext cx="23770" cy="256032"/>
+          <p:cNvPr id="129" name="Shape 127"/>
+          <p:cNvSpPr/>
+          <p:nvPr/>
+        </p:nvSpPr>
+        <p:spPr>
+          <a:xfrm>
+            <a:off x="2825091" y="1837944"/>
+            <a:ext cx="4572" cy="256032"/>
           </a:xfrm>
           <a:prstGeom prst="rect">
             <a:avLst/>
@@ -10853,13 +11233,33 @@
       </p:sp>
       <p:sp>
         <p:nvSpPr>
-          <p:cNvPr id="112" name="Shape 110"/>
-          <p:cNvSpPr/>
-          <p:nvPr/>
-        </p:nvSpPr>
-        <p:spPr>
-          <a:xfrm>
-            <a:off x="2877667" y="1837944"/>
+          <p:cNvPr id="130" name="Shape 128"/>
+          <p:cNvSpPr/>
+          <p:nvPr/>
+        </p:nvSpPr>
+        <p:spPr>
+          <a:xfrm>
+            <a:off x="2827673" y="1837944"/>
+            <a:ext cx="8048" cy="256032"/>
+          </a:xfrm>
+          <a:prstGeom prst="rect">
+            <a:avLst/>
+          </a:prstGeom>
+          <a:solidFill>
+            <a:srgbClr val="76B900"/>
+          </a:solidFill>
+          <a:ln/>
+        </p:spPr>
+      </p:sp>
+      <p:sp>
+        <p:nvSpPr>
+          <p:cNvPr id="131" name="Shape 129"/>
+          <p:cNvSpPr/>
+          <p:nvPr/>
+        </p:nvSpPr>
+        <p:spPr>
+          <a:xfrm>
+            <a:off x="2838075" y="1837944"/>
             <a:ext cx="4572" cy="256032"/>
           </a:xfrm>
           <a:prstGeom prst="rect">
@@ -10873,13 +11273,33 @@
       </p:sp>
       <p:sp>
         <p:nvSpPr>
-          <p:cNvPr id="113" name="Shape 111"/>
-          <p:cNvSpPr/>
-          <p:nvPr/>
-        </p:nvSpPr>
-        <p:spPr>
-          <a:xfrm>
-            <a:off x="2880427" y="1837944"/>
+          <p:cNvPr id="132" name="Shape 130"/>
+          <p:cNvSpPr/>
+          <p:nvPr/>
+        </p:nvSpPr>
+        <p:spPr>
+          <a:xfrm>
+            <a:off x="2844073" y="1837944"/>
+            <a:ext cx="10478" cy="256032"/>
+          </a:xfrm>
+          <a:prstGeom prst="rect">
+            <a:avLst/>
+          </a:prstGeom>
+          <a:solidFill>
+            <a:srgbClr val="76B900"/>
+          </a:solidFill>
+          <a:ln/>
+        </p:spPr>
+      </p:sp>
+      <p:sp>
+        <p:nvSpPr>
+          <p:cNvPr id="133" name="Shape 131"/>
+          <p:cNvSpPr/>
+          <p:nvPr/>
+        </p:nvSpPr>
+        <p:spPr>
+          <a:xfrm>
+            <a:off x="2856904" y="1837944"/>
             <a:ext cx="4572" cy="256032"/>
           </a:xfrm>
           <a:prstGeom prst="rect">
@@ -10893,14 +11313,14 @@
       </p:sp>
       <p:sp>
         <p:nvSpPr>
-          <p:cNvPr id="114" name="Shape 112"/>
-          <p:cNvSpPr/>
-          <p:nvPr/>
-        </p:nvSpPr>
-        <p:spPr>
-          <a:xfrm>
-            <a:off x="2883539" y="1837944"/>
-            <a:ext cx="10824" cy="256032"/>
+          <p:cNvPr id="134" name="Shape 132"/>
+          <p:cNvSpPr/>
+          <p:nvPr/>
+        </p:nvSpPr>
+        <p:spPr>
+          <a:xfrm>
+            <a:off x="2862903" y="1837944"/>
+            <a:ext cx="4572" cy="256032"/>
           </a:xfrm>
           <a:prstGeom prst="rect">
             <a:avLst/>
@@ -10913,13 +11333,73 @@
       </p:sp>
       <p:sp>
         <p:nvSpPr>
-          <p:cNvPr id="115" name="Shape 113"/>
-          <p:cNvSpPr/>
-          <p:nvPr/>
-        </p:nvSpPr>
-        <p:spPr>
-          <a:xfrm>
-            <a:off x="2897051" y="1837944"/>
+          <p:cNvPr id="135" name="Shape 133"/>
+          <p:cNvSpPr/>
+          <p:nvPr/>
+        </p:nvSpPr>
+        <p:spPr>
+          <a:xfrm>
+            <a:off x="2865408" y="1837944"/>
+            <a:ext cx="17387" cy="256032"/>
+          </a:xfrm>
+          <a:prstGeom prst="rect">
+            <a:avLst/>
+          </a:prstGeom>
+          <a:solidFill>
+            <a:srgbClr val="76B900"/>
+          </a:solidFill>
+          <a:ln/>
+        </p:spPr>
+      </p:sp>
+      <p:sp>
+        <p:nvSpPr>
+          <p:cNvPr id="136" name="Shape 134"/>
+          <p:cNvSpPr/>
+          <p:nvPr/>
+        </p:nvSpPr>
+        <p:spPr>
+          <a:xfrm>
+            <a:off x="2884010" y="1837944"/>
+            <a:ext cx="19741" cy="256032"/>
+          </a:xfrm>
+          <a:prstGeom prst="rect">
+            <a:avLst/>
+          </a:prstGeom>
+          <a:solidFill>
+            <a:srgbClr val="76B900"/>
+          </a:solidFill>
+          <a:ln/>
+        </p:spPr>
+      </p:sp>
+      <p:sp>
+        <p:nvSpPr>
+          <p:cNvPr id="137" name="Shape 135"/>
+          <p:cNvSpPr/>
+          <p:nvPr/>
+        </p:nvSpPr>
+        <p:spPr>
+          <a:xfrm>
+            <a:off x="2905269" y="1837944"/>
+            <a:ext cx="5239" cy="256032"/>
+          </a:xfrm>
+          <a:prstGeom prst="rect">
+            <a:avLst/>
+          </a:prstGeom>
+          <a:solidFill>
+            <a:srgbClr val="76B900"/>
+          </a:solidFill>
+          <a:ln/>
+        </p:spPr>
+      </p:sp>
+      <p:sp>
+        <p:nvSpPr>
+          <p:cNvPr id="138" name="Shape 136"/>
+          <p:cNvSpPr/>
+          <p:nvPr/>
+        </p:nvSpPr>
+        <p:spPr>
+          <a:xfrm>
+            <a:off x="2912179" y="1837944"/>
             <a:ext cx="4572" cy="256032"/>
           </a:xfrm>
           <a:prstGeom prst="rect">
@@ -10933,14 +11413,14 @@
       </p:sp>
       <p:sp>
         <p:nvSpPr>
-          <p:cNvPr id="116" name="Shape 114"/>
-          <p:cNvSpPr/>
-          <p:nvPr/>
-        </p:nvSpPr>
-        <p:spPr>
-          <a:xfrm>
-            <a:off x="2903065" y="1837944"/>
-            <a:ext cx="10187" cy="256032"/>
+          <p:cNvPr id="139" name="Shape 137"/>
+          <p:cNvSpPr/>
+          <p:nvPr/>
+        </p:nvSpPr>
+        <p:spPr>
+          <a:xfrm>
+            <a:off x="2914684" y="1837944"/>
+            <a:ext cx="5770" cy="256032"/>
           </a:xfrm>
           <a:prstGeom prst="rect">
             <a:avLst/>
@@ -10953,13 +11433,73 @@
       </p:sp>
       <p:sp>
         <p:nvSpPr>
-          <p:cNvPr id="117" name="Shape 115"/>
-          <p:cNvSpPr/>
-          <p:nvPr/>
-        </p:nvSpPr>
-        <p:spPr>
-          <a:xfrm>
-            <a:off x="2915304" y="1837944"/>
+          <p:cNvPr id="140" name="Shape 138"/>
+          <p:cNvSpPr/>
+          <p:nvPr/>
+        </p:nvSpPr>
+        <p:spPr>
+          <a:xfrm>
+            <a:off x="2923112" y="1837944"/>
+            <a:ext cx="5239" cy="256032"/>
+          </a:xfrm>
+          <a:prstGeom prst="rect">
+            <a:avLst/>
+          </a:prstGeom>
+          <a:solidFill>
+            <a:srgbClr val="76B900"/>
+          </a:solidFill>
+          <a:ln/>
+        </p:spPr>
+      </p:sp>
+      <p:sp>
+        <p:nvSpPr>
+          <p:cNvPr id="141" name="Shape 139"/>
+          <p:cNvSpPr/>
+          <p:nvPr/>
+        </p:nvSpPr>
+        <p:spPr>
+          <a:xfrm>
+            <a:off x="2929414" y="1837944"/>
+            <a:ext cx="2758321" cy="256032"/>
+          </a:xfrm>
+          <a:prstGeom prst="rect">
+            <a:avLst/>
+          </a:prstGeom>
+          <a:solidFill>
+            <a:srgbClr val="76B900"/>
+          </a:solidFill>
+          <a:ln/>
+        </p:spPr>
+      </p:sp>
+      <p:sp>
+        <p:nvSpPr>
+          <p:cNvPr id="142" name="Shape 140"/>
+          <p:cNvSpPr/>
+          <p:nvPr/>
+        </p:nvSpPr>
+        <p:spPr>
+          <a:xfrm>
+            <a:off x="5690164" y="1837944"/>
+            <a:ext cx="762222" cy="256032"/>
+          </a:xfrm>
+          <a:prstGeom prst="rect">
+            <a:avLst/>
+          </a:prstGeom>
+          <a:solidFill>
+            <a:srgbClr val="76B900"/>
+          </a:solidFill>
+          <a:ln/>
+        </p:spPr>
+      </p:sp>
+      <p:sp>
+        <p:nvSpPr>
+          <p:cNvPr id="143" name="Shape 141"/>
+          <p:cNvSpPr/>
+          <p:nvPr/>
+        </p:nvSpPr>
+        <p:spPr>
+          <a:xfrm>
+            <a:off x="6455196" y="1837944"/>
             <a:ext cx="4572" cy="256032"/>
           </a:xfrm>
           <a:prstGeom prst="rect">
@@ -10973,14 +11513,14 @@
       </p:sp>
       <p:sp>
         <p:nvSpPr>
-          <p:cNvPr id="118" name="Shape 116"/>
-          <p:cNvSpPr/>
-          <p:nvPr/>
-        </p:nvSpPr>
-        <p:spPr>
-          <a:xfrm>
-            <a:off x="2921105" y="1837944"/>
-            <a:ext cx="4572" cy="256032"/>
+          <p:cNvPr id="144" name="Shape 142"/>
+          <p:cNvSpPr/>
+          <p:nvPr/>
+        </p:nvSpPr>
+        <p:spPr>
+          <a:xfrm>
+            <a:off x="6463927" y="1837944"/>
+            <a:ext cx="17311" cy="256032"/>
           </a:xfrm>
           <a:prstGeom prst="rect">
             <a:avLst/>
@@ -10993,14 +11533,14 @@
       </p:sp>
       <p:sp>
         <p:nvSpPr>
-          <p:cNvPr id="119" name="Shape 117"/>
-          <p:cNvSpPr/>
-          <p:nvPr/>
-        </p:nvSpPr>
-        <p:spPr>
-          <a:xfrm>
-            <a:off x="2923651" y="1837944"/>
-            <a:ext cx="13583" cy="256032"/>
+          <p:cNvPr id="145" name="Shape 143"/>
+          <p:cNvSpPr/>
+          <p:nvPr/>
+        </p:nvSpPr>
+        <p:spPr>
+          <a:xfrm>
+            <a:off x="6482226" y="1837944"/>
+            <a:ext cx="15944" cy="256032"/>
           </a:xfrm>
           <a:prstGeom prst="rect">
             <a:avLst/>
@@ -11013,14 +11553,14 @@
       </p:sp>
       <p:sp>
         <p:nvSpPr>
-          <p:cNvPr id="120" name="Shape 118"/>
-          <p:cNvSpPr/>
-          <p:nvPr/>
-        </p:nvSpPr>
-        <p:spPr>
-          <a:xfrm>
-            <a:off x="2937800" y="1837944"/>
-            <a:ext cx="7428" cy="256032"/>
+          <p:cNvPr id="146" name="Shape 144"/>
+          <p:cNvSpPr/>
+          <p:nvPr/>
+        </p:nvSpPr>
+        <p:spPr>
+          <a:xfrm>
+            <a:off x="6499157" y="1837944"/>
+            <a:ext cx="16476" cy="256032"/>
           </a:xfrm>
           <a:prstGeom prst="rect">
             <a:avLst/>
@@ -11033,14 +11573,14 @@
       </p:sp>
       <p:sp>
         <p:nvSpPr>
-          <p:cNvPr id="121" name="Shape 119"/>
-          <p:cNvSpPr/>
-          <p:nvPr/>
-        </p:nvSpPr>
-        <p:spPr>
-          <a:xfrm>
-            <a:off x="2948129" y="1837944"/>
-            <a:ext cx="4572" cy="256032"/>
+          <p:cNvPr id="147" name="Shape 145"/>
+          <p:cNvSpPr/>
+          <p:nvPr/>
+        </p:nvSpPr>
+        <p:spPr>
+          <a:xfrm>
+            <a:off x="6516620" y="1837944"/>
+            <a:ext cx="15793" cy="256032"/>
           </a:xfrm>
           <a:prstGeom prst="rect">
             <a:avLst/>
@@ -11053,14 +11593,14 @@
       </p:sp>
       <p:sp>
         <p:nvSpPr>
-          <p:cNvPr id="122" name="Shape 120"/>
-          <p:cNvSpPr/>
-          <p:nvPr/>
-        </p:nvSpPr>
-        <p:spPr>
-          <a:xfrm>
-            <a:off x="2950888" y="1837944"/>
-            <a:ext cx="4572" cy="256032"/>
+          <p:cNvPr id="148" name="Shape 146"/>
+          <p:cNvSpPr/>
+          <p:nvPr/>
+        </p:nvSpPr>
+        <p:spPr>
+          <a:xfrm>
+            <a:off x="6533400" y="1837944"/>
+            <a:ext cx="15641" cy="256032"/>
           </a:xfrm>
           <a:prstGeom prst="rect">
             <a:avLst/>
@@ -11073,14 +11613,14 @@
       </p:sp>
       <p:sp>
         <p:nvSpPr>
-          <p:cNvPr id="123" name="Shape 121"/>
-          <p:cNvSpPr/>
-          <p:nvPr/>
-        </p:nvSpPr>
-        <p:spPr>
-          <a:xfrm>
-            <a:off x="2954001" y="1837944"/>
-            <a:ext cx="10187" cy="256032"/>
+          <p:cNvPr id="149" name="Shape 147"/>
+          <p:cNvSpPr/>
+          <p:nvPr/>
+        </p:nvSpPr>
+        <p:spPr>
+          <a:xfrm>
+            <a:off x="6550028" y="1837944"/>
+            <a:ext cx="15869" cy="256032"/>
           </a:xfrm>
           <a:prstGeom prst="rect">
             <a:avLst/>
@@ -11093,14 +11633,14 @@
       </p:sp>
       <p:sp>
         <p:nvSpPr>
-          <p:cNvPr id="124" name="Shape 122"/>
-          <p:cNvSpPr/>
-          <p:nvPr/>
-        </p:nvSpPr>
-        <p:spPr>
-          <a:xfrm>
-            <a:off x="2966523" y="1837944"/>
-            <a:ext cx="4572" cy="256032"/>
+          <p:cNvPr id="150" name="Shape 148"/>
+          <p:cNvSpPr/>
+          <p:nvPr/>
+        </p:nvSpPr>
+        <p:spPr>
+          <a:xfrm>
+            <a:off x="6566883" y="1837944"/>
+            <a:ext cx="16096" cy="256032"/>
           </a:xfrm>
           <a:prstGeom prst="rect">
             <a:avLst/>
@@ -11113,14 +11653,14 @@
       </p:sp>
       <p:sp>
         <p:nvSpPr>
-          <p:cNvPr id="125" name="Shape 123"/>
-          <p:cNvSpPr/>
-          <p:nvPr/>
-        </p:nvSpPr>
-        <p:spPr>
-          <a:xfrm>
-            <a:off x="2972111" y="1837944"/>
-            <a:ext cx="9975" cy="256032"/>
+          <p:cNvPr id="151" name="Shape 149"/>
+          <p:cNvSpPr/>
+          <p:nvPr/>
+        </p:nvSpPr>
+        <p:spPr>
+          <a:xfrm>
+            <a:off x="6583967" y="1837944"/>
+            <a:ext cx="15717" cy="256032"/>
           </a:xfrm>
           <a:prstGeom prst="rect">
             <a:avLst/>
@@ -11133,14 +11673,14 @@
       </p:sp>
       <p:sp>
         <p:nvSpPr>
-          <p:cNvPr id="126" name="Shape 124"/>
-          <p:cNvSpPr/>
-          <p:nvPr/>
-        </p:nvSpPr>
-        <p:spPr>
-          <a:xfrm>
-            <a:off x="2984280" y="1837944"/>
-            <a:ext cx="4572" cy="256032"/>
+          <p:cNvPr id="152" name="Shape 150"/>
+          <p:cNvSpPr/>
+          <p:nvPr/>
+        </p:nvSpPr>
+        <p:spPr>
+          <a:xfrm>
+            <a:off x="6600670" y="1837944"/>
+            <a:ext cx="15944" cy="256032"/>
           </a:xfrm>
           <a:prstGeom prst="rect">
             <a:avLst/>
@@ -11153,14 +11693,14 @@
       </p:sp>
       <p:sp>
         <p:nvSpPr>
-          <p:cNvPr id="127" name="Shape 125"/>
-          <p:cNvSpPr/>
-          <p:nvPr/>
-        </p:nvSpPr>
-        <p:spPr>
-          <a:xfrm>
-            <a:off x="2989939" y="1837944"/>
-            <a:ext cx="23841" cy="256032"/>
+          <p:cNvPr id="153" name="Shape 151"/>
+          <p:cNvSpPr/>
+          <p:nvPr/>
+        </p:nvSpPr>
+        <p:spPr>
+          <a:xfrm>
+            <a:off x="6617602" y="1837944"/>
+            <a:ext cx="15869" cy="256032"/>
           </a:xfrm>
           <a:prstGeom prst="rect">
             <a:avLst/>
@@ -11173,14 +11713,14 @@
       </p:sp>
       <p:sp>
         <p:nvSpPr>
-          <p:cNvPr id="128" name="Shape 126"/>
-          <p:cNvSpPr/>
-          <p:nvPr/>
-        </p:nvSpPr>
-        <p:spPr>
-          <a:xfrm>
-            <a:off x="3016751" y="1837944"/>
-            <a:ext cx="4572" cy="256032"/>
+          <p:cNvPr id="154" name="Shape 152"/>
+          <p:cNvSpPr/>
+          <p:nvPr/>
+        </p:nvSpPr>
+        <p:spPr>
+          <a:xfrm>
+            <a:off x="6634458" y="1837944"/>
+            <a:ext cx="15565" cy="256032"/>
           </a:xfrm>
           <a:prstGeom prst="rect">
             <a:avLst/>
@@ -11193,14 +11733,14 @@
       </p:sp>
       <p:sp>
         <p:nvSpPr>
-          <p:cNvPr id="129" name="Shape 127"/>
-          <p:cNvSpPr/>
-          <p:nvPr/>
-        </p:nvSpPr>
-        <p:spPr>
-          <a:xfrm>
-            <a:off x="3021916" y="1837944"/>
-            <a:ext cx="9904" cy="256032"/>
+          <p:cNvPr id="155" name="Shape 153"/>
+          <p:cNvSpPr/>
+          <p:nvPr/>
+        </p:nvSpPr>
+        <p:spPr>
+          <a:xfrm>
+            <a:off x="6651009" y="1837944"/>
+            <a:ext cx="15869" cy="256032"/>
           </a:xfrm>
           <a:prstGeom prst="rect">
             <a:avLst/>
@@ -11213,14 +11753,14 @@
       </p:sp>
       <p:sp>
         <p:nvSpPr>
-          <p:cNvPr id="130" name="Shape 128"/>
-          <p:cNvSpPr/>
-          <p:nvPr/>
-        </p:nvSpPr>
-        <p:spPr>
-          <a:xfrm>
-            <a:off x="3034013" y="1837944"/>
-            <a:ext cx="4572" cy="256032"/>
+          <p:cNvPr id="156" name="Shape 154"/>
+          <p:cNvSpPr/>
+          <p:nvPr/>
+        </p:nvSpPr>
+        <p:spPr>
+          <a:xfrm>
+            <a:off x="6667865" y="1837944"/>
+            <a:ext cx="15717" cy="256032"/>
           </a:xfrm>
           <a:prstGeom prst="rect">
             <a:avLst/>
@@ -11233,14 +11773,14 @@
       </p:sp>
       <p:sp>
         <p:nvSpPr>
-          <p:cNvPr id="131" name="Shape 129"/>
-          <p:cNvSpPr/>
-          <p:nvPr/>
-        </p:nvSpPr>
-        <p:spPr>
-          <a:xfrm>
-            <a:off x="3039673" y="1837944"/>
-            <a:ext cx="9551" cy="256032"/>
+          <p:cNvPr id="157" name="Shape 155"/>
+          <p:cNvSpPr/>
+          <p:nvPr/>
+        </p:nvSpPr>
+        <p:spPr>
+          <a:xfrm>
+            <a:off x="6684645" y="1837944"/>
+            <a:ext cx="15869" cy="256032"/>
           </a:xfrm>
           <a:prstGeom prst="rect">
             <a:avLst/>
@@ -11253,14 +11793,14 @@
       </p:sp>
       <p:sp>
         <p:nvSpPr>
-          <p:cNvPr id="132" name="Shape 130"/>
-          <p:cNvSpPr/>
-          <p:nvPr/>
-        </p:nvSpPr>
-        <p:spPr>
-          <a:xfrm>
-            <a:off x="3052407" y="1837944"/>
-            <a:ext cx="4572" cy="256032"/>
+          <p:cNvPr id="158" name="Shape 156"/>
+          <p:cNvSpPr/>
+          <p:nvPr/>
+        </p:nvSpPr>
+        <p:spPr>
+          <a:xfrm>
+            <a:off x="6701500" y="1837944"/>
+            <a:ext cx="15869" cy="256032"/>
           </a:xfrm>
           <a:prstGeom prst="rect">
             <a:avLst/>
@@ -11273,14 +11813,14 @@
       </p:sp>
       <p:sp>
         <p:nvSpPr>
-          <p:cNvPr id="133" name="Shape 131"/>
-          <p:cNvSpPr/>
-          <p:nvPr/>
-        </p:nvSpPr>
-        <p:spPr>
-          <a:xfrm>
-            <a:off x="3057642" y="1837944"/>
-            <a:ext cx="21153" cy="256032"/>
+          <p:cNvPr id="159" name="Shape 157"/>
+          <p:cNvSpPr/>
+          <p:nvPr/>
+        </p:nvSpPr>
+        <p:spPr>
+          <a:xfrm>
+            <a:off x="6718432" y="1837944"/>
+            <a:ext cx="16096" cy="256032"/>
           </a:xfrm>
           <a:prstGeom prst="rect">
             <a:avLst/>
@@ -11293,14 +11833,14 @@
       </p:sp>
       <p:sp>
         <p:nvSpPr>
-          <p:cNvPr id="134" name="Shape 132"/>
-          <p:cNvSpPr/>
-          <p:nvPr/>
-        </p:nvSpPr>
-        <p:spPr>
-          <a:xfrm>
-            <a:off x="3080987" y="1837944"/>
-            <a:ext cx="4572" cy="256032"/>
+          <p:cNvPr id="160" name="Shape 158"/>
+          <p:cNvSpPr/>
+          <p:nvPr/>
+        </p:nvSpPr>
+        <p:spPr>
+          <a:xfrm>
+            <a:off x="6735515" y="1837944"/>
+            <a:ext cx="16172" cy="256032"/>
           </a:xfrm>
           <a:prstGeom prst="rect">
             <a:avLst/>
@@ -11313,14 +11853,14 @@
       </p:sp>
       <p:sp>
         <p:nvSpPr>
-          <p:cNvPr id="135" name="Shape 133"/>
-          <p:cNvSpPr/>
-          <p:nvPr/>
-        </p:nvSpPr>
-        <p:spPr>
-          <a:xfrm>
-            <a:off x="3086435" y="1837944"/>
-            <a:ext cx="9197" cy="256032"/>
+          <p:cNvPr id="161" name="Shape 159"/>
+          <p:cNvSpPr/>
+          <p:nvPr/>
+        </p:nvSpPr>
+        <p:spPr>
+          <a:xfrm>
+            <a:off x="6752751" y="1837944"/>
+            <a:ext cx="15793" cy="256032"/>
           </a:xfrm>
           <a:prstGeom prst="rect">
             <a:avLst/>
@@ -11333,14 +11873,14 @@
       </p:sp>
       <p:sp>
         <p:nvSpPr>
-          <p:cNvPr id="136" name="Shape 134"/>
-          <p:cNvSpPr/>
-          <p:nvPr/>
-        </p:nvSpPr>
-        <p:spPr>
-          <a:xfrm>
-            <a:off x="3096410" y="1837944"/>
-            <a:ext cx="4572" cy="256032"/>
+          <p:cNvPr id="162" name="Shape 160"/>
+          <p:cNvSpPr/>
+          <p:nvPr/>
+        </p:nvSpPr>
+        <p:spPr>
+          <a:xfrm>
+            <a:off x="6769606" y="1837944"/>
+            <a:ext cx="16552" cy="256032"/>
           </a:xfrm>
           <a:prstGeom prst="rect">
             <a:avLst/>
@@ -11353,14 +11893,14 @@
       </p:sp>
       <p:sp>
         <p:nvSpPr>
-          <p:cNvPr id="137" name="Shape 135"/>
-          <p:cNvSpPr/>
-          <p:nvPr/>
-        </p:nvSpPr>
-        <p:spPr>
-          <a:xfrm>
-            <a:off x="3102564" y="1837944"/>
-            <a:ext cx="8560" cy="256032"/>
+          <p:cNvPr id="163" name="Shape 161"/>
+          <p:cNvSpPr/>
+          <p:nvPr/>
+        </p:nvSpPr>
+        <p:spPr>
+          <a:xfrm>
+            <a:off x="6787069" y="1837944"/>
+            <a:ext cx="16704" cy="256032"/>
           </a:xfrm>
           <a:prstGeom prst="rect">
             <a:avLst/>
@@ -11373,14 +11913,14 @@
       </p:sp>
       <p:sp>
         <p:nvSpPr>
-          <p:cNvPr id="138" name="Shape 136"/>
-          <p:cNvSpPr/>
-          <p:nvPr/>
-        </p:nvSpPr>
-        <p:spPr>
-          <a:xfrm>
-            <a:off x="3111832" y="1837944"/>
-            <a:ext cx="4572" cy="256032"/>
+          <p:cNvPr id="164" name="Shape 162"/>
+          <p:cNvSpPr/>
+          <p:nvPr/>
+        </p:nvSpPr>
+        <p:spPr>
+          <a:xfrm>
+            <a:off x="6804836" y="1837944"/>
+            <a:ext cx="16172" cy="256032"/>
           </a:xfrm>
           <a:prstGeom prst="rect">
             <a:avLst/>
@@ -11393,14 +11933,14 @@
       </p:sp>
       <p:sp>
         <p:nvSpPr>
-          <p:cNvPr id="139" name="Shape 137"/>
-          <p:cNvSpPr/>
-          <p:nvPr/>
-        </p:nvSpPr>
-        <p:spPr>
-          <a:xfrm>
-            <a:off x="3117562" y="1837944"/>
-            <a:ext cx="35089" cy="256032"/>
+          <p:cNvPr id="165" name="Shape 163"/>
+          <p:cNvSpPr/>
+          <p:nvPr/>
+        </p:nvSpPr>
+        <p:spPr>
+          <a:xfrm>
+            <a:off x="6821995" y="1837944"/>
+            <a:ext cx="17083" cy="256032"/>
           </a:xfrm>
           <a:prstGeom prst="rect">
             <a:avLst/>
@@ -11413,14 +11953,14 @@
       </p:sp>
       <p:sp>
         <p:nvSpPr>
-          <p:cNvPr id="140" name="Shape 138"/>
-          <p:cNvSpPr/>
-          <p:nvPr/>
-        </p:nvSpPr>
-        <p:spPr>
-          <a:xfrm>
-            <a:off x="3154067" y="1837944"/>
-            <a:ext cx="4740" cy="256032"/>
+          <p:cNvPr id="166" name="Shape 164"/>
+          <p:cNvSpPr/>
+          <p:nvPr/>
+        </p:nvSpPr>
+        <p:spPr>
+          <a:xfrm>
+            <a:off x="6840217" y="1837944"/>
+            <a:ext cx="13515" cy="256032"/>
           </a:xfrm>
           <a:prstGeom prst="rect">
             <a:avLst/>
@@ -11433,14 +11973,14 @@
       </p:sp>
       <p:sp>
         <p:nvSpPr>
-          <p:cNvPr id="141" name="Shape 139"/>
-          <p:cNvSpPr/>
-          <p:nvPr/>
-        </p:nvSpPr>
-        <p:spPr>
-          <a:xfrm>
-            <a:off x="3160292" y="1837944"/>
-            <a:ext cx="4572" cy="256032"/>
+          <p:cNvPr id="167" name="Shape 165"/>
+          <p:cNvSpPr/>
+          <p:nvPr/>
+        </p:nvSpPr>
+        <p:spPr>
+          <a:xfrm>
+            <a:off x="6854643" y="1837944"/>
+            <a:ext cx="8124" cy="256032"/>
           </a:xfrm>
           <a:prstGeom prst="rect">
             <a:avLst/>
@@ -11453,14 +11993,14 @@
       </p:sp>
       <p:sp>
         <p:nvSpPr>
-          <p:cNvPr id="142" name="Shape 140"/>
-          <p:cNvSpPr/>
-          <p:nvPr/>
-        </p:nvSpPr>
-        <p:spPr>
-          <a:xfrm>
-            <a:off x="3162697" y="1837944"/>
-            <a:ext cx="10258" cy="256032"/>
+          <p:cNvPr id="168" name="Shape 166"/>
+          <p:cNvSpPr/>
+          <p:nvPr/>
+        </p:nvSpPr>
+        <p:spPr>
+          <a:xfrm>
+            <a:off x="6863527" y="1837944"/>
+            <a:ext cx="6606" cy="256032"/>
           </a:xfrm>
           <a:prstGeom prst="rect">
             <a:avLst/>
@@ -11473,14 +12013,14 @@
       </p:sp>
       <p:sp>
         <p:nvSpPr>
-          <p:cNvPr id="143" name="Shape 141"/>
-          <p:cNvSpPr/>
-          <p:nvPr/>
-        </p:nvSpPr>
-        <p:spPr>
-          <a:xfrm>
-            <a:off x="3173875" y="1837944"/>
-            <a:ext cx="2551686" cy="256032"/>
+          <p:cNvPr id="169" name="Shape 167"/>
+          <p:cNvSpPr/>
+          <p:nvPr/>
+        </p:nvSpPr>
+        <p:spPr>
+          <a:xfrm>
+            <a:off x="6871043" y="1837944"/>
+            <a:ext cx="11617" cy="256032"/>
           </a:xfrm>
           <a:prstGeom prst="rect">
             <a:avLst/>
@@ -11493,14 +12033,14 @@
       </p:sp>
       <p:sp>
         <p:nvSpPr>
-          <p:cNvPr id="144" name="Shape 142"/>
-          <p:cNvSpPr/>
-          <p:nvPr/>
-        </p:nvSpPr>
-        <p:spPr>
-          <a:xfrm>
-            <a:off x="5727896" y="1837944"/>
-            <a:ext cx="536315" cy="256032"/>
+          <p:cNvPr id="170" name="Shape 168"/>
+          <p:cNvSpPr/>
+          <p:nvPr/>
+        </p:nvSpPr>
+        <p:spPr>
+          <a:xfrm>
+            <a:off x="6941275" y="1837944"/>
+            <a:ext cx="16476" cy="256032"/>
           </a:xfrm>
           <a:prstGeom prst="rect">
             <a:avLst/>
@@ -11513,14 +12053,14 @@
       </p:sp>
       <p:sp>
         <p:nvSpPr>
-          <p:cNvPr id="145" name="Shape 143"/>
-          <p:cNvSpPr/>
-          <p:nvPr/>
-        </p:nvSpPr>
-        <p:spPr>
-          <a:xfrm>
-            <a:off x="6266191" y="1837944"/>
-            <a:ext cx="12663" cy="256032"/>
+          <p:cNvPr id="171" name="Shape 169"/>
+          <p:cNvSpPr/>
+          <p:nvPr/>
+        </p:nvSpPr>
+        <p:spPr>
+          <a:xfrm>
+            <a:off x="7020238" y="1837944"/>
+            <a:ext cx="71219" cy="256032"/>
           </a:xfrm>
           <a:prstGeom prst="rect">
             <a:avLst/>
@@ -11533,14 +12073,14 @@
       </p:sp>
       <p:sp>
         <p:nvSpPr>
-          <p:cNvPr id="146" name="Shape 144"/>
-          <p:cNvSpPr/>
-          <p:nvPr/>
-        </p:nvSpPr>
-        <p:spPr>
-          <a:xfrm>
-            <a:off x="6285292" y="1837944"/>
-            <a:ext cx="4572" cy="256032"/>
+          <p:cNvPr id="172" name="Shape 170"/>
+          <p:cNvSpPr/>
+          <p:nvPr/>
+        </p:nvSpPr>
+        <p:spPr>
+          <a:xfrm>
+            <a:off x="7093583" y="1837944"/>
+            <a:ext cx="25056" cy="256032"/>
           </a:xfrm>
           <a:prstGeom prst="rect">
             <a:avLst/>
@@ -11553,14 +12093,14 @@
       </p:sp>
       <p:sp>
         <p:nvSpPr>
-          <p:cNvPr id="147" name="Shape 145"/>
-          <p:cNvSpPr/>
-          <p:nvPr/>
-        </p:nvSpPr>
-        <p:spPr>
-          <a:xfrm>
-            <a:off x="6290103" y="1837944"/>
-            <a:ext cx="4572" cy="256032"/>
+          <p:cNvPr id="173" name="Shape 171"/>
+          <p:cNvSpPr/>
+          <p:nvPr/>
+        </p:nvSpPr>
+        <p:spPr>
+          <a:xfrm>
+            <a:off x="7122359" y="1837944"/>
+            <a:ext cx="137199" cy="256032"/>
           </a:xfrm>
           <a:prstGeom prst="rect">
             <a:avLst/>
@@ -11573,1227 +12113,7 @@
       </p:sp>
       <p:sp>
         <p:nvSpPr>
-          <p:cNvPr id="148" name="Shape 146"/>
-          <p:cNvSpPr/>
-          <p:nvPr/>
-        </p:nvSpPr>
-        <p:spPr>
-          <a:xfrm>
-            <a:off x="6292013" y="1837944"/>
-            <a:ext cx="4572" cy="256032"/>
-          </a:xfrm>
-          <a:prstGeom prst="rect">
-            <a:avLst/>
-          </a:prstGeom>
-          <a:solidFill>
-            <a:srgbClr val="76B900"/>
-          </a:solidFill>
-          <a:ln/>
-        </p:spPr>
-      </p:sp>
-      <p:sp>
-        <p:nvSpPr>
-          <p:cNvPr id="149" name="Shape 147"/>
-          <p:cNvSpPr/>
-          <p:nvPr/>
-        </p:nvSpPr>
-        <p:spPr>
-          <a:xfrm>
-            <a:off x="6296965" y="1837944"/>
-            <a:ext cx="8702" cy="256032"/>
-          </a:xfrm>
-          <a:prstGeom prst="rect">
-            <a:avLst/>
-          </a:prstGeom>
-          <a:solidFill>
-            <a:srgbClr val="76B900"/>
-          </a:solidFill>
-          <a:ln/>
-        </p:spPr>
-      </p:sp>
-      <p:sp>
-        <p:nvSpPr>
-          <p:cNvPr id="150" name="Shape 148"/>
-          <p:cNvSpPr/>
-          <p:nvPr/>
-        </p:nvSpPr>
-        <p:spPr>
-          <a:xfrm>
-            <a:off x="6306657" y="1837944"/>
-            <a:ext cx="20940" cy="256032"/>
-          </a:xfrm>
-          <a:prstGeom prst="rect">
-            <a:avLst/>
-          </a:prstGeom>
-          <a:solidFill>
-            <a:srgbClr val="76B900"/>
-          </a:solidFill>
-          <a:ln/>
-        </p:spPr>
-      </p:sp>
-      <p:sp>
-        <p:nvSpPr>
-          <p:cNvPr id="151" name="Shape 149"/>
-          <p:cNvSpPr/>
-          <p:nvPr/>
-        </p:nvSpPr>
-        <p:spPr>
-          <a:xfrm>
-            <a:off x="6328163" y="1837944"/>
-            <a:ext cx="4572" cy="256032"/>
-          </a:xfrm>
-          <a:prstGeom prst="rect">
-            <a:avLst/>
-          </a:prstGeom>
-          <a:solidFill>
-            <a:srgbClr val="76B900"/>
-          </a:solidFill>
-          <a:ln/>
-        </p:spPr>
-      </p:sp>
-      <p:sp>
-        <p:nvSpPr>
-          <p:cNvPr id="152" name="Shape 150"/>
-          <p:cNvSpPr/>
-          <p:nvPr/>
-        </p:nvSpPr>
-        <p:spPr>
-          <a:xfrm>
-            <a:off x="6330073" y="1837944"/>
-            <a:ext cx="4572" cy="256032"/>
-          </a:xfrm>
-          <a:prstGeom prst="rect">
-            <a:avLst/>
-          </a:prstGeom>
-          <a:solidFill>
-            <a:srgbClr val="76B900"/>
-          </a:solidFill>
-          <a:ln/>
-        </p:spPr>
-      </p:sp>
-      <p:sp>
-        <p:nvSpPr>
-          <p:cNvPr id="153" name="Shape 151"/>
-          <p:cNvSpPr/>
-          <p:nvPr/>
-        </p:nvSpPr>
-        <p:spPr>
-          <a:xfrm>
-            <a:off x="6335308" y="1837944"/>
-            <a:ext cx="40466" cy="256032"/>
-          </a:xfrm>
-          <a:prstGeom prst="rect">
-            <a:avLst/>
-          </a:prstGeom>
-          <a:solidFill>
-            <a:srgbClr val="76B900"/>
-          </a:solidFill>
-          <a:ln/>
-        </p:spPr>
-      </p:sp>
-      <p:sp>
-        <p:nvSpPr>
-          <p:cNvPr id="154" name="Shape 152"/>
-          <p:cNvSpPr/>
-          <p:nvPr/>
-        </p:nvSpPr>
-        <p:spPr>
-          <a:xfrm>
-            <a:off x="6379029" y="1837944"/>
-            <a:ext cx="4598" cy="256032"/>
-          </a:xfrm>
-          <a:prstGeom prst="rect">
-            <a:avLst/>
-          </a:prstGeom>
-          <a:solidFill>
-            <a:srgbClr val="76B900"/>
-          </a:solidFill>
-          <a:ln/>
-        </p:spPr>
-      </p:sp>
-      <p:sp>
-        <p:nvSpPr>
-          <p:cNvPr id="155" name="Shape 153"/>
-          <p:cNvSpPr/>
-          <p:nvPr/>
-        </p:nvSpPr>
-        <p:spPr>
-          <a:xfrm>
-            <a:off x="6385396" y="1837944"/>
-            <a:ext cx="4572" cy="256032"/>
-          </a:xfrm>
-          <a:prstGeom prst="rect">
-            <a:avLst/>
-          </a:prstGeom>
-          <a:solidFill>
-            <a:srgbClr val="76B900"/>
-          </a:solidFill>
-          <a:ln/>
-        </p:spPr>
-      </p:sp>
-      <p:sp>
-        <p:nvSpPr>
-          <p:cNvPr id="156" name="Shape 154"/>
-          <p:cNvSpPr/>
-          <p:nvPr/>
-        </p:nvSpPr>
-        <p:spPr>
-          <a:xfrm>
-            <a:off x="6387306" y="1837944"/>
-            <a:ext cx="4572" cy="256032"/>
-          </a:xfrm>
-          <a:prstGeom prst="rect">
-            <a:avLst/>
-          </a:prstGeom>
-          <a:solidFill>
-            <a:srgbClr val="76B900"/>
-          </a:solidFill>
-          <a:ln/>
-        </p:spPr>
-      </p:sp>
-      <p:sp>
-        <p:nvSpPr>
-          <p:cNvPr id="157" name="Shape 155"/>
-          <p:cNvSpPr/>
-          <p:nvPr/>
-        </p:nvSpPr>
-        <p:spPr>
-          <a:xfrm>
-            <a:off x="6389994" y="1837944"/>
-            <a:ext cx="4572" cy="256032"/>
-          </a:xfrm>
-          <a:prstGeom prst="rect">
-            <a:avLst/>
-          </a:prstGeom>
-          <a:solidFill>
-            <a:srgbClr val="76B900"/>
-          </a:solidFill>
-          <a:ln/>
-        </p:spPr>
-      </p:sp>
-      <p:sp>
-        <p:nvSpPr>
-          <p:cNvPr id="158" name="Shape 156"/>
-          <p:cNvSpPr/>
-          <p:nvPr/>
-        </p:nvSpPr>
-        <p:spPr>
-          <a:xfrm>
-            <a:off x="6392046" y="1837944"/>
-            <a:ext cx="12522" cy="256032"/>
-          </a:xfrm>
-          <a:prstGeom prst="rect">
-            <a:avLst/>
-          </a:prstGeom>
-          <a:solidFill>
-            <a:srgbClr val="76B900"/>
-          </a:solidFill>
-          <a:ln/>
-        </p:spPr>
-      </p:sp>
-      <p:sp>
-        <p:nvSpPr>
-          <p:cNvPr id="159" name="Shape 157"/>
-          <p:cNvSpPr/>
-          <p:nvPr/>
-        </p:nvSpPr>
-        <p:spPr>
-          <a:xfrm>
-            <a:off x="6411430" y="1837944"/>
-            <a:ext cx="4572" cy="256032"/>
-          </a:xfrm>
-          <a:prstGeom prst="rect">
-            <a:avLst/>
-          </a:prstGeom>
-          <a:solidFill>
-            <a:srgbClr val="76B900"/>
-          </a:solidFill>
-          <a:ln/>
-        </p:spPr>
-      </p:sp>
-      <p:sp>
-        <p:nvSpPr>
-          <p:cNvPr id="160" name="Shape 158"/>
-          <p:cNvSpPr/>
-          <p:nvPr/>
-        </p:nvSpPr>
-        <p:spPr>
-          <a:xfrm>
-            <a:off x="6415108" y="1837944"/>
-            <a:ext cx="4572" cy="256032"/>
-          </a:xfrm>
-          <a:prstGeom prst="rect">
-            <a:avLst/>
-          </a:prstGeom>
-          <a:solidFill>
-            <a:srgbClr val="76B900"/>
-          </a:solidFill>
-          <a:ln/>
-        </p:spPr>
-      </p:sp>
-      <p:sp>
-        <p:nvSpPr>
-          <p:cNvPr id="161" name="Shape 159"/>
-          <p:cNvSpPr/>
-          <p:nvPr/>
-        </p:nvSpPr>
-        <p:spPr>
-          <a:xfrm>
-            <a:off x="6416806" y="1837944"/>
-            <a:ext cx="4572" cy="256032"/>
-          </a:xfrm>
-          <a:prstGeom prst="rect">
-            <a:avLst/>
-          </a:prstGeom>
-          <a:solidFill>
-            <a:srgbClr val="76B900"/>
-          </a:solidFill>
-          <a:ln/>
-        </p:spPr>
-      </p:sp>
-      <p:sp>
-        <p:nvSpPr>
-          <p:cNvPr id="162" name="Shape 160"/>
-          <p:cNvSpPr/>
-          <p:nvPr/>
-        </p:nvSpPr>
-        <p:spPr>
-          <a:xfrm>
-            <a:off x="6419495" y="1837944"/>
-            <a:ext cx="4572" cy="256032"/>
-          </a:xfrm>
-          <a:prstGeom prst="rect">
-            <a:avLst/>
-          </a:prstGeom>
-          <a:solidFill>
-            <a:srgbClr val="76B900"/>
-          </a:solidFill>
-          <a:ln/>
-        </p:spPr>
-      </p:sp>
-      <p:sp>
-        <p:nvSpPr>
-          <p:cNvPr id="163" name="Shape 161"/>
-          <p:cNvSpPr/>
-          <p:nvPr/>
-        </p:nvSpPr>
-        <p:spPr>
-          <a:xfrm>
-            <a:off x="6421546" y="1837944"/>
-            <a:ext cx="12451" cy="256032"/>
-          </a:xfrm>
-          <a:prstGeom prst="rect">
-            <a:avLst/>
-          </a:prstGeom>
-          <a:solidFill>
-            <a:srgbClr val="76B900"/>
-          </a:solidFill>
-          <a:ln/>
-        </p:spPr>
-      </p:sp>
-      <p:sp>
-        <p:nvSpPr>
-          <p:cNvPr id="164" name="Shape 162"/>
-          <p:cNvSpPr/>
-          <p:nvPr/>
-        </p:nvSpPr>
-        <p:spPr>
-          <a:xfrm>
-            <a:off x="6435554" y="1837944"/>
-            <a:ext cx="21153" cy="256032"/>
-          </a:xfrm>
-          <a:prstGeom prst="rect">
-            <a:avLst/>
-          </a:prstGeom>
-          <a:solidFill>
-            <a:srgbClr val="76B900"/>
-          </a:solidFill>
-          <a:ln/>
-        </p:spPr>
-      </p:sp>
-      <p:sp>
-        <p:nvSpPr>
-          <p:cNvPr id="165" name="Shape 163"/>
-          <p:cNvSpPr/>
-          <p:nvPr/>
-        </p:nvSpPr>
-        <p:spPr>
-          <a:xfrm>
-            <a:off x="6457484" y="1837944"/>
-            <a:ext cx="20162" cy="256032"/>
-          </a:xfrm>
-          <a:prstGeom prst="rect">
-            <a:avLst/>
-          </a:prstGeom>
-          <a:solidFill>
-            <a:srgbClr val="76B900"/>
-          </a:solidFill>
-          <a:ln/>
-        </p:spPr>
-      </p:sp>
-      <p:sp>
-        <p:nvSpPr>
-          <p:cNvPr id="166" name="Shape 164"/>
-          <p:cNvSpPr/>
-          <p:nvPr/>
-        </p:nvSpPr>
-        <p:spPr>
-          <a:xfrm>
-            <a:off x="6478354" y="1837944"/>
-            <a:ext cx="13017" cy="256032"/>
-          </a:xfrm>
-          <a:prstGeom prst="rect">
-            <a:avLst/>
-          </a:prstGeom>
-          <a:solidFill>
-            <a:srgbClr val="76B900"/>
-          </a:solidFill>
-          <a:ln/>
-        </p:spPr>
-      </p:sp>
-      <p:sp>
-        <p:nvSpPr>
-          <p:cNvPr id="167" name="Shape 165"/>
-          <p:cNvSpPr/>
-          <p:nvPr/>
-        </p:nvSpPr>
-        <p:spPr>
-          <a:xfrm>
-            <a:off x="6492149" y="1837944"/>
-            <a:ext cx="4572" cy="256032"/>
-          </a:xfrm>
-          <a:prstGeom prst="rect">
-            <a:avLst/>
-          </a:prstGeom>
-          <a:solidFill>
-            <a:srgbClr val="76B900"/>
-          </a:solidFill>
-          <a:ln/>
-        </p:spPr>
-      </p:sp>
-      <p:sp>
-        <p:nvSpPr>
-          <p:cNvPr id="168" name="Shape 166"/>
-          <p:cNvSpPr/>
-          <p:nvPr/>
-        </p:nvSpPr>
-        <p:spPr>
-          <a:xfrm>
-            <a:off x="6493918" y="1837944"/>
-            <a:ext cx="4740" cy="256032"/>
-          </a:xfrm>
-          <a:prstGeom prst="rect">
-            <a:avLst/>
-          </a:prstGeom>
-          <a:solidFill>
-            <a:srgbClr val="76B900"/>
-          </a:solidFill>
-          <a:ln/>
-        </p:spPr>
-      </p:sp>
-      <p:sp>
-        <p:nvSpPr>
-          <p:cNvPr id="169" name="Shape 167"/>
-          <p:cNvSpPr/>
-          <p:nvPr/>
-        </p:nvSpPr>
-        <p:spPr>
-          <a:xfrm>
-            <a:off x="6500002" y="1837944"/>
-            <a:ext cx="12451" cy="256032"/>
-          </a:xfrm>
-          <a:prstGeom prst="rect">
-            <a:avLst/>
-          </a:prstGeom>
-          <a:solidFill>
-            <a:srgbClr val="76B900"/>
-          </a:solidFill>
-          <a:ln/>
-        </p:spPr>
-      </p:sp>
-      <p:sp>
-        <p:nvSpPr>
-          <p:cNvPr id="170" name="Shape 168"/>
-          <p:cNvSpPr/>
-          <p:nvPr/>
-        </p:nvSpPr>
-        <p:spPr>
-          <a:xfrm>
-            <a:off x="6513160" y="1837944"/>
-            <a:ext cx="4572" cy="256032"/>
-          </a:xfrm>
-          <a:prstGeom prst="rect">
-            <a:avLst/>
-          </a:prstGeom>
-          <a:solidFill>
-            <a:srgbClr val="76B900"/>
-          </a:solidFill>
-          <a:ln/>
-        </p:spPr>
-      </p:sp>
-      <p:sp>
-        <p:nvSpPr>
-          <p:cNvPr id="171" name="Shape 169"/>
-          <p:cNvSpPr/>
-          <p:nvPr/>
-        </p:nvSpPr>
-        <p:spPr>
-          <a:xfrm>
-            <a:off x="6514787" y="1837944"/>
-            <a:ext cx="4598" cy="256032"/>
-          </a:xfrm>
-          <a:prstGeom prst="rect">
-            <a:avLst/>
-          </a:prstGeom>
-          <a:solidFill>
-            <a:srgbClr val="76B900"/>
-          </a:solidFill>
-          <a:ln/>
-        </p:spPr>
-      </p:sp>
-      <p:sp>
-        <p:nvSpPr>
-          <p:cNvPr id="172" name="Shape 170"/>
-          <p:cNvSpPr/>
-          <p:nvPr/>
-        </p:nvSpPr>
-        <p:spPr>
-          <a:xfrm>
-            <a:off x="6520659" y="1837944"/>
-            <a:ext cx="12097" cy="256032"/>
-          </a:xfrm>
-          <a:prstGeom prst="rect">
-            <a:avLst/>
-          </a:prstGeom>
-          <a:solidFill>
-            <a:srgbClr val="76B900"/>
-          </a:solidFill>
-          <a:ln/>
-        </p:spPr>
-      </p:sp>
-      <p:sp>
-        <p:nvSpPr>
-          <p:cNvPr id="173" name="Shape 171"/>
-          <p:cNvSpPr/>
-          <p:nvPr/>
-        </p:nvSpPr>
-        <p:spPr>
-          <a:xfrm>
-            <a:off x="6533323" y="1837944"/>
-            <a:ext cx="4572" cy="256032"/>
-          </a:xfrm>
-          <a:prstGeom prst="rect">
-            <a:avLst/>
-          </a:prstGeom>
-          <a:solidFill>
-            <a:srgbClr val="76B900"/>
-          </a:solidFill>
-          <a:ln/>
-        </p:spPr>
-      </p:sp>
-      <p:sp>
-        <p:nvSpPr>
-          <p:cNvPr id="174" name="Shape 172"/>
-          <p:cNvSpPr/>
-          <p:nvPr/>
-        </p:nvSpPr>
-        <p:spPr>
-          <a:xfrm>
-            <a:off x="6535020" y="1837944"/>
-            <a:ext cx="4572" cy="256032"/>
-          </a:xfrm>
-          <a:prstGeom prst="rect">
-            <a:avLst/>
-          </a:prstGeom>
-          <a:solidFill>
-            <a:srgbClr val="76B900"/>
-          </a:solidFill>
-          <a:ln/>
-        </p:spPr>
-      </p:sp>
-      <p:sp>
-        <p:nvSpPr>
-          <p:cNvPr id="175" name="Shape 173"/>
-          <p:cNvSpPr/>
-          <p:nvPr/>
-        </p:nvSpPr>
-        <p:spPr>
-          <a:xfrm>
-            <a:off x="6540751" y="1837944"/>
-            <a:ext cx="4572" cy="256032"/>
-          </a:xfrm>
-          <a:prstGeom prst="rect">
-            <a:avLst/>
-          </a:prstGeom>
-          <a:solidFill>
-            <a:srgbClr val="76B900"/>
-          </a:solidFill>
-          <a:ln/>
-        </p:spPr>
-      </p:sp>
-      <p:sp>
-        <p:nvSpPr>
-          <p:cNvPr id="176" name="Shape 174"/>
-          <p:cNvSpPr/>
-          <p:nvPr/>
-        </p:nvSpPr>
-        <p:spPr>
-          <a:xfrm>
-            <a:off x="6544076" y="1837944"/>
-            <a:ext cx="4572" cy="256032"/>
-          </a:xfrm>
-          <a:prstGeom prst="rect">
-            <a:avLst/>
-          </a:prstGeom>
-          <a:solidFill>
-            <a:srgbClr val="76B900"/>
-          </a:solidFill>
-          <a:ln/>
-        </p:spPr>
-      </p:sp>
-      <p:sp>
-        <p:nvSpPr>
-          <p:cNvPr id="177" name="Shape 175"/>
-          <p:cNvSpPr/>
-          <p:nvPr/>
-        </p:nvSpPr>
-        <p:spPr>
-          <a:xfrm>
-            <a:off x="6546623" y="1837944"/>
-            <a:ext cx="4572" cy="256032"/>
-          </a:xfrm>
-          <a:prstGeom prst="rect">
-            <a:avLst/>
-          </a:prstGeom>
-          <a:solidFill>
-            <a:srgbClr val="76B900"/>
-          </a:solidFill>
-          <a:ln/>
-        </p:spPr>
-      </p:sp>
-      <p:sp>
-        <p:nvSpPr>
-          <p:cNvPr id="178" name="Shape 176"/>
-          <p:cNvSpPr/>
-          <p:nvPr/>
-        </p:nvSpPr>
-        <p:spPr>
-          <a:xfrm>
-            <a:off x="6549877" y="1837944"/>
-            <a:ext cx="4572" cy="256032"/>
-          </a:xfrm>
-          <a:prstGeom prst="rect">
-            <a:avLst/>
-          </a:prstGeom>
-          <a:solidFill>
-            <a:srgbClr val="76B900"/>
-          </a:solidFill>
-          <a:ln/>
-        </p:spPr>
-      </p:sp>
-      <p:sp>
-        <p:nvSpPr>
-          <p:cNvPr id="179" name="Shape 177"/>
-          <p:cNvSpPr/>
-          <p:nvPr/>
-        </p:nvSpPr>
-        <p:spPr>
-          <a:xfrm>
-            <a:off x="6551716" y="1837944"/>
-            <a:ext cx="6650" cy="256032"/>
-          </a:xfrm>
-          <a:prstGeom prst="rect">
-            <a:avLst/>
-          </a:prstGeom>
-          <a:solidFill>
-            <a:srgbClr val="76B900"/>
-          </a:solidFill>
-          <a:ln/>
-        </p:spPr>
-      </p:sp>
-      <p:sp>
-        <p:nvSpPr>
-          <p:cNvPr id="180" name="Shape 178"/>
-          <p:cNvSpPr/>
-          <p:nvPr/>
-        </p:nvSpPr>
-        <p:spPr>
-          <a:xfrm>
-            <a:off x="6561196" y="1837944"/>
-            <a:ext cx="4572" cy="256032"/>
-          </a:xfrm>
-          <a:prstGeom prst="rect">
-            <a:avLst/>
-          </a:prstGeom>
-          <a:solidFill>
-            <a:srgbClr val="76B900"/>
-          </a:solidFill>
-          <a:ln/>
-        </p:spPr>
-      </p:sp>
-      <p:sp>
-        <p:nvSpPr>
-          <p:cNvPr id="181" name="Shape 179"/>
-          <p:cNvSpPr/>
-          <p:nvPr/>
-        </p:nvSpPr>
-        <p:spPr>
-          <a:xfrm>
-            <a:off x="6585956" y="1837944"/>
-            <a:ext cx="4572" cy="256032"/>
-          </a:xfrm>
-          <a:prstGeom prst="rect">
-            <a:avLst/>
-          </a:prstGeom>
-          <a:solidFill>
-            <a:srgbClr val="76B900"/>
-          </a:solidFill>
-          <a:ln/>
-        </p:spPr>
-      </p:sp>
-      <p:sp>
-        <p:nvSpPr>
-          <p:cNvPr id="182" name="Shape 180"/>
-          <p:cNvSpPr/>
-          <p:nvPr/>
-        </p:nvSpPr>
-        <p:spPr>
-          <a:xfrm>
-            <a:off x="6591050" y="1837944"/>
-            <a:ext cx="11531" cy="256032"/>
-          </a:xfrm>
-          <a:prstGeom prst="rect">
-            <a:avLst/>
-          </a:prstGeom>
-          <a:solidFill>
-            <a:srgbClr val="76B900"/>
-          </a:solidFill>
-          <a:ln/>
-        </p:spPr>
-      </p:sp>
-      <p:sp>
-        <p:nvSpPr>
-          <p:cNvPr id="183" name="Shape 181"/>
-          <p:cNvSpPr/>
-          <p:nvPr/>
-        </p:nvSpPr>
-        <p:spPr>
-          <a:xfrm>
-            <a:off x="6603218" y="1837944"/>
-            <a:ext cx="5306" cy="256032"/>
-          </a:xfrm>
-          <a:prstGeom prst="rect">
-            <a:avLst/>
-          </a:prstGeom>
-          <a:solidFill>
-            <a:srgbClr val="76B900"/>
-          </a:solidFill>
-          <a:ln/>
-        </p:spPr>
-      </p:sp>
-      <p:sp>
-        <p:nvSpPr>
-          <p:cNvPr id="184" name="Shape 182"/>
-          <p:cNvSpPr/>
-          <p:nvPr/>
-        </p:nvSpPr>
-        <p:spPr>
-          <a:xfrm>
-            <a:off x="6609656" y="1837944"/>
-            <a:ext cx="15422" cy="256032"/>
-          </a:xfrm>
-          <a:prstGeom prst="rect">
-            <a:avLst/>
-          </a:prstGeom>
-          <a:solidFill>
-            <a:srgbClr val="76B900"/>
-          </a:solidFill>
-          <a:ln/>
-        </p:spPr>
-      </p:sp>
-      <p:sp>
-        <p:nvSpPr>
-          <p:cNvPr id="185" name="Shape 183"/>
-          <p:cNvSpPr/>
-          <p:nvPr/>
-        </p:nvSpPr>
-        <p:spPr>
-          <a:xfrm>
-            <a:off x="6626069" y="1837944"/>
-            <a:ext cx="15352" cy="256032"/>
-          </a:xfrm>
-          <a:prstGeom prst="rect">
-            <a:avLst/>
-          </a:prstGeom>
-          <a:solidFill>
-            <a:srgbClr val="76B900"/>
-          </a:solidFill>
-          <a:ln/>
-        </p:spPr>
-      </p:sp>
-      <p:sp>
-        <p:nvSpPr>
-          <p:cNvPr id="186" name="Shape 184"/>
-          <p:cNvSpPr/>
-          <p:nvPr/>
-        </p:nvSpPr>
-        <p:spPr>
-          <a:xfrm>
-            <a:off x="6642340" y="1837944"/>
-            <a:ext cx="15493" cy="256032"/>
-          </a:xfrm>
-          <a:prstGeom prst="rect">
-            <a:avLst/>
-          </a:prstGeom>
-          <a:solidFill>
-            <a:srgbClr val="76B900"/>
-          </a:solidFill>
-          <a:ln/>
-        </p:spPr>
-      </p:sp>
-      <p:sp>
-        <p:nvSpPr>
-          <p:cNvPr id="187" name="Shape 185"/>
-          <p:cNvSpPr/>
-          <p:nvPr/>
-        </p:nvSpPr>
-        <p:spPr>
-          <a:xfrm>
-            <a:off x="6658965" y="1837944"/>
-            <a:ext cx="15564" cy="256032"/>
-          </a:xfrm>
-          <a:prstGeom prst="rect">
-            <a:avLst/>
-          </a:prstGeom>
-          <a:solidFill>
-            <a:srgbClr val="76B900"/>
-          </a:solidFill>
-          <a:ln/>
-        </p:spPr>
-      </p:sp>
-      <p:sp>
-        <p:nvSpPr>
-          <p:cNvPr id="188" name="Shape 186"/>
-          <p:cNvSpPr/>
-          <p:nvPr/>
-        </p:nvSpPr>
-        <p:spPr>
-          <a:xfrm>
-            <a:off x="6675590" y="1837944"/>
-            <a:ext cx="16342" cy="256032"/>
-          </a:xfrm>
-          <a:prstGeom prst="rect">
-            <a:avLst/>
-          </a:prstGeom>
-          <a:solidFill>
-            <a:srgbClr val="76B900"/>
-          </a:solidFill>
-          <a:ln/>
-        </p:spPr>
-      </p:sp>
-      <p:sp>
-        <p:nvSpPr>
-          <p:cNvPr id="189" name="Shape 187"/>
-          <p:cNvSpPr/>
-          <p:nvPr/>
-        </p:nvSpPr>
-        <p:spPr>
-          <a:xfrm>
-            <a:off x="6692993" y="1837944"/>
-            <a:ext cx="15635" cy="256032"/>
-          </a:xfrm>
-          <a:prstGeom prst="rect">
-            <a:avLst/>
-          </a:prstGeom>
-          <a:solidFill>
-            <a:srgbClr val="76B900"/>
-          </a:solidFill>
-          <a:ln/>
-        </p:spPr>
-      </p:sp>
-      <p:sp>
-        <p:nvSpPr>
-          <p:cNvPr id="190" name="Shape 188"/>
-          <p:cNvSpPr/>
-          <p:nvPr/>
-        </p:nvSpPr>
-        <p:spPr>
-          <a:xfrm>
-            <a:off x="6709689" y="1837944"/>
-            <a:ext cx="15139" cy="256032"/>
-          </a:xfrm>
-          <a:prstGeom prst="rect">
-            <a:avLst/>
-          </a:prstGeom>
-          <a:solidFill>
-            <a:srgbClr val="76B900"/>
-          </a:solidFill>
-          <a:ln/>
-        </p:spPr>
-      </p:sp>
-      <p:sp>
-        <p:nvSpPr>
-          <p:cNvPr id="191" name="Shape 189"/>
-          <p:cNvSpPr/>
-          <p:nvPr/>
-        </p:nvSpPr>
-        <p:spPr>
-          <a:xfrm>
-            <a:off x="6725748" y="1837944"/>
-            <a:ext cx="14503" cy="256032"/>
-          </a:xfrm>
-          <a:prstGeom prst="rect">
-            <a:avLst/>
-          </a:prstGeom>
-          <a:solidFill>
-            <a:srgbClr val="76B900"/>
-          </a:solidFill>
-          <a:ln/>
-        </p:spPr>
-      </p:sp>
-      <p:sp>
-        <p:nvSpPr>
-          <p:cNvPr id="192" name="Shape 190"/>
-          <p:cNvSpPr/>
-          <p:nvPr/>
-        </p:nvSpPr>
-        <p:spPr>
-          <a:xfrm>
-            <a:off x="6742656" y="1837944"/>
-            <a:ext cx="15705" cy="256032"/>
-          </a:xfrm>
-          <a:prstGeom prst="rect">
-            <a:avLst/>
-          </a:prstGeom>
-          <a:solidFill>
-            <a:srgbClr val="76B900"/>
-          </a:solidFill>
-          <a:ln/>
-        </p:spPr>
-      </p:sp>
-      <p:sp>
-        <p:nvSpPr>
-          <p:cNvPr id="193" name="Shape 191"/>
-          <p:cNvSpPr/>
-          <p:nvPr/>
-        </p:nvSpPr>
-        <p:spPr>
-          <a:xfrm>
-            <a:off x="6759422" y="1837944"/>
-            <a:ext cx="15281" cy="256032"/>
-          </a:xfrm>
-          <a:prstGeom prst="rect">
-            <a:avLst/>
-          </a:prstGeom>
-          <a:solidFill>
-            <a:srgbClr val="76B900"/>
-          </a:solidFill>
-          <a:ln/>
-        </p:spPr>
-      </p:sp>
-      <p:sp>
-        <p:nvSpPr>
-          <p:cNvPr id="194" name="Shape 192"/>
-          <p:cNvSpPr/>
-          <p:nvPr/>
-        </p:nvSpPr>
-        <p:spPr>
-          <a:xfrm>
-            <a:off x="6775623" y="1837944"/>
-            <a:ext cx="15281" cy="256032"/>
-          </a:xfrm>
-          <a:prstGeom prst="rect">
-            <a:avLst/>
-          </a:prstGeom>
-          <a:solidFill>
-            <a:srgbClr val="76B900"/>
-          </a:solidFill>
-          <a:ln/>
-        </p:spPr>
-      </p:sp>
-      <p:sp>
-        <p:nvSpPr>
-          <p:cNvPr id="195" name="Shape 193"/>
-          <p:cNvSpPr/>
-          <p:nvPr/>
-        </p:nvSpPr>
-        <p:spPr>
-          <a:xfrm>
-            <a:off x="6791823" y="1837944"/>
-            <a:ext cx="15069" cy="256032"/>
-          </a:xfrm>
-          <a:prstGeom prst="rect">
-            <a:avLst/>
-          </a:prstGeom>
-          <a:solidFill>
-            <a:srgbClr val="76B900"/>
-          </a:solidFill>
-          <a:ln/>
-        </p:spPr>
-      </p:sp>
-      <p:sp>
-        <p:nvSpPr>
-          <p:cNvPr id="196" name="Shape 194"/>
-          <p:cNvSpPr/>
-          <p:nvPr/>
-        </p:nvSpPr>
-        <p:spPr>
-          <a:xfrm>
-            <a:off x="6807953" y="1837944"/>
-            <a:ext cx="15069" cy="256032"/>
-          </a:xfrm>
-          <a:prstGeom prst="rect">
-            <a:avLst/>
-          </a:prstGeom>
-          <a:solidFill>
-            <a:srgbClr val="76B900"/>
-          </a:solidFill>
-          <a:ln/>
-        </p:spPr>
-      </p:sp>
-      <p:sp>
-        <p:nvSpPr>
-          <p:cNvPr id="197" name="Shape 195"/>
-          <p:cNvSpPr/>
-          <p:nvPr/>
-        </p:nvSpPr>
-        <p:spPr>
-          <a:xfrm>
-            <a:off x="6823941" y="1837944"/>
-            <a:ext cx="14927" cy="256032"/>
-          </a:xfrm>
-          <a:prstGeom prst="rect">
-            <a:avLst/>
-          </a:prstGeom>
-          <a:solidFill>
-            <a:srgbClr val="76B900"/>
-          </a:solidFill>
-          <a:ln/>
-        </p:spPr>
-      </p:sp>
-      <p:sp>
-        <p:nvSpPr>
-          <p:cNvPr id="198" name="Shape 196"/>
-          <p:cNvSpPr/>
-          <p:nvPr/>
-        </p:nvSpPr>
-        <p:spPr>
-          <a:xfrm>
-            <a:off x="6839859" y="1837944"/>
-            <a:ext cx="14856" cy="256032"/>
-          </a:xfrm>
-          <a:prstGeom prst="rect">
-            <a:avLst/>
-          </a:prstGeom>
-          <a:solidFill>
-            <a:srgbClr val="76B900"/>
-          </a:solidFill>
-          <a:ln/>
-        </p:spPr>
-      </p:sp>
-      <p:sp>
-        <p:nvSpPr>
-          <p:cNvPr id="199" name="Shape 197"/>
-          <p:cNvSpPr/>
-          <p:nvPr/>
-        </p:nvSpPr>
-        <p:spPr>
-          <a:xfrm>
-            <a:off x="6855706" y="1837944"/>
-            <a:ext cx="15069" cy="256032"/>
-          </a:xfrm>
-          <a:prstGeom prst="rect">
-            <a:avLst/>
-          </a:prstGeom>
-          <a:solidFill>
-            <a:srgbClr val="76B900"/>
-          </a:solidFill>
-          <a:ln/>
-        </p:spPr>
-      </p:sp>
-      <p:sp>
-        <p:nvSpPr>
-          <p:cNvPr id="200" name="Shape 198"/>
-          <p:cNvSpPr/>
-          <p:nvPr/>
-        </p:nvSpPr>
-        <p:spPr>
-          <a:xfrm>
-            <a:off x="6871835" y="1837944"/>
-            <a:ext cx="14927" cy="256032"/>
-          </a:xfrm>
-          <a:prstGeom prst="rect">
-            <a:avLst/>
-          </a:prstGeom>
-          <a:solidFill>
-            <a:srgbClr val="76B900"/>
-          </a:solidFill>
-          <a:ln/>
-        </p:spPr>
-      </p:sp>
-      <p:sp>
-        <p:nvSpPr>
-          <p:cNvPr id="201" name="Shape 199"/>
-          <p:cNvSpPr/>
-          <p:nvPr/>
-        </p:nvSpPr>
-        <p:spPr>
-          <a:xfrm>
-            <a:off x="6887611" y="1837944"/>
-            <a:ext cx="14998" cy="256032"/>
-          </a:xfrm>
-          <a:prstGeom prst="rect">
-            <a:avLst/>
-          </a:prstGeom>
-          <a:solidFill>
-            <a:srgbClr val="76B900"/>
-          </a:solidFill>
-          <a:ln/>
-        </p:spPr>
-      </p:sp>
-      <p:sp>
-        <p:nvSpPr>
-          <p:cNvPr id="202" name="Shape 200"/>
-          <p:cNvSpPr/>
-          <p:nvPr/>
-        </p:nvSpPr>
-        <p:spPr>
-          <a:xfrm>
-            <a:off x="6903600" y="1837944"/>
-            <a:ext cx="10824" cy="256032"/>
-          </a:xfrm>
-          <a:prstGeom prst="rect">
-            <a:avLst/>
-          </a:prstGeom>
-          <a:solidFill>
-            <a:srgbClr val="76B900"/>
-          </a:solidFill>
-          <a:ln/>
-        </p:spPr>
-      </p:sp>
-      <p:sp>
-        <p:nvSpPr>
-          <p:cNvPr id="203" name="Shape 201"/>
-          <p:cNvSpPr/>
-          <p:nvPr/>
-        </p:nvSpPr>
-        <p:spPr>
-          <a:xfrm>
-            <a:off x="6915202" y="1837944"/>
-            <a:ext cx="6721" cy="256032"/>
-          </a:xfrm>
-          <a:prstGeom prst="rect">
-            <a:avLst/>
-          </a:prstGeom>
-          <a:solidFill>
-            <a:srgbClr val="76B900"/>
-          </a:solidFill>
-          <a:ln/>
-        </p:spPr>
-      </p:sp>
-      <p:sp>
-        <p:nvSpPr>
-          <p:cNvPr id="204" name="Shape 202"/>
-          <p:cNvSpPr/>
-          <p:nvPr/>
-        </p:nvSpPr>
-        <p:spPr>
-          <a:xfrm>
-            <a:off x="6922630" y="1837944"/>
-            <a:ext cx="17403" cy="256032"/>
-          </a:xfrm>
-          <a:prstGeom prst="rect">
-            <a:avLst/>
-          </a:prstGeom>
-          <a:solidFill>
-            <a:srgbClr val="76B900"/>
-          </a:solidFill>
-          <a:ln/>
-        </p:spPr>
-      </p:sp>
-      <p:sp>
-        <p:nvSpPr>
-          <p:cNvPr id="205" name="Shape 203"/>
-          <p:cNvSpPr/>
-          <p:nvPr/>
-        </p:nvSpPr>
-        <p:spPr>
-          <a:xfrm>
-            <a:off x="6984956" y="1837944"/>
-            <a:ext cx="15352" cy="256032"/>
-          </a:xfrm>
-          <a:prstGeom prst="rect">
-            <a:avLst/>
-          </a:prstGeom>
-          <a:solidFill>
-            <a:srgbClr val="76B900"/>
-          </a:solidFill>
-          <a:ln/>
-        </p:spPr>
-      </p:sp>
-      <p:sp>
-        <p:nvSpPr>
-          <p:cNvPr id="206" name="Shape 204"/>
-          <p:cNvSpPr/>
-          <p:nvPr/>
-        </p:nvSpPr>
-        <p:spPr>
-          <a:xfrm>
-            <a:off x="7061289" y="1837944"/>
-            <a:ext cx="67420" cy="256032"/>
-          </a:xfrm>
-          <a:prstGeom prst="rect">
-            <a:avLst/>
-          </a:prstGeom>
-          <a:solidFill>
-            <a:srgbClr val="76B900"/>
-          </a:solidFill>
-          <a:ln/>
-        </p:spPr>
-      </p:sp>
-      <p:sp>
-        <p:nvSpPr>
-          <p:cNvPr id="207" name="Shape 205"/>
-          <p:cNvSpPr/>
-          <p:nvPr/>
-        </p:nvSpPr>
-        <p:spPr>
-          <a:xfrm>
-            <a:off x="7130902" y="1837944"/>
-            <a:ext cx="23558" cy="256032"/>
-          </a:xfrm>
-          <a:prstGeom prst="rect">
-            <a:avLst/>
-          </a:prstGeom>
-          <a:solidFill>
-            <a:srgbClr val="76B900"/>
-          </a:solidFill>
-          <a:ln/>
-        </p:spPr>
-      </p:sp>
-      <p:sp>
-        <p:nvSpPr>
-          <p:cNvPr id="208" name="Shape 206"/>
-          <p:cNvSpPr/>
-          <p:nvPr/>
-        </p:nvSpPr>
-        <p:spPr>
-          <a:xfrm>
-            <a:off x="7158280" y="1837944"/>
-            <a:ext cx="127552" cy="256032"/>
-          </a:xfrm>
-          <a:prstGeom prst="rect">
-            <a:avLst/>
-          </a:prstGeom>
-          <a:solidFill>
-            <a:srgbClr val="76B900"/>
-          </a:solidFill>
-          <a:ln/>
-        </p:spPr>
-      </p:sp>
-      <p:sp>
-        <p:nvSpPr>
-          <p:cNvPr id="209" name="Text 207"/>
+          <p:cNvPr id="174" name="Text 172"/>
           <p:cNvSpPr/>
           <p:nvPr/>
         </p:nvSpPr>
@@ -12824,7 +12144,7 @@
                 <a:ea typeface="NVIDIA Sans" pitchFamily="34" charset="-122"/>
                 <a:cs typeface="NVIDIA Sans" pitchFamily="34" charset="-120"/>
               </a:rPr>
-              <a:t>544 ms · 63%</a:t>
+              <a:t>543 ms · 67%</a:t>
             </a:r>
             <a:endParaRPr lang="en-US" sz="900" dirty="0"/>
           </a:p>
@@ -12832,7 +12152,7 @@
       </p:sp>
       <p:sp>
         <p:nvSpPr>
-          <p:cNvPr id="210" name="Text 208"/>
+          <p:cNvPr id="175" name="Text 173"/>
           <p:cNvSpPr/>
           <p:nvPr/>
         </p:nvSpPr>
@@ -12871,7 +12191,7 @@
       </p:sp>
       <p:sp>
         <p:nvSpPr>
-          <p:cNvPr id="211" name="Shape 209"/>
+          <p:cNvPr id="176" name="Shape 174"/>
           <p:cNvSpPr/>
           <p:nvPr/>
         </p:nvSpPr>
@@ -12896,14 +12216,14 @@
       </p:sp>
       <p:sp>
         <p:nvSpPr>
-          <p:cNvPr id="212" name="Shape 210"/>
-          <p:cNvSpPr/>
-          <p:nvPr/>
-        </p:nvSpPr>
-        <p:spPr>
-          <a:xfrm>
-            <a:off x="4308689" y="2240280"/>
-            <a:ext cx="27307" cy="256032"/>
+          <p:cNvPr id="177" name="Shape 175"/>
+          <p:cNvSpPr/>
+          <p:nvPr/>
+        </p:nvSpPr>
+        <p:spPr>
+          <a:xfrm>
+            <a:off x="4149167" y="2240280"/>
+            <a:ext cx="47758" cy="256032"/>
           </a:xfrm>
           <a:prstGeom prst="rect">
             <a:avLst/>
@@ -12916,14 +12236,14 @@
       </p:sp>
       <p:sp>
         <p:nvSpPr>
-          <p:cNvPr id="213" name="Shape 211"/>
-          <p:cNvSpPr/>
-          <p:nvPr/>
-        </p:nvSpPr>
-        <p:spPr>
-          <a:xfrm>
-            <a:off x="4589615" y="2240280"/>
-            <a:ext cx="28510" cy="256032"/>
+          <p:cNvPr id="178" name="Shape 176"/>
+          <p:cNvSpPr/>
+          <p:nvPr/>
+        </p:nvSpPr>
+        <p:spPr>
+          <a:xfrm>
+            <a:off x="4455377" y="2240280"/>
+            <a:ext cx="44493" cy="256032"/>
           </a:xfrm>
           <a:prstGeom prst="rect">
             <a:avLst/>
@@ -12936,14 +12256,14 @@
       </p:sp>
       <p:sp>
         <p:nvSpPr>
-          <p:cNvPr id="214" name="Shape 212"/>
-          <p:cNvSpPr/>
-          <p:nvPr/>
-        </p:nvSpPr>
-        <p:spPr>
-          <a:xfrm>
-            <a:off x="4879951" y="2240280"/>
-            <a:ext cx="27095" cy="256032"/>
+          <p:cNvPr id="179" name="Shape 177"/>
+          <p:cNvSpPr/>
+          <p:nvPr/>
+        </p:nvSpPr>
+        <p:spPr>
+          <a:xfrm>
+            <a:off x="4768269" y="2240280"/>
+            <a:ext cx="42822" cy="256032"/>
           </a:xfrm>
           <a:prstGeom prst="rect">
             <a:avLst/>
@@ -12956,14 +12276,14 @@
       </p:sp>
       <p:sp>
         <p:nvSpPr>
-          <p:cNvPr id="215" name="Shape 213"/>
-          <p:cNvSpPr/>
-          <p:nvPr/>
-        </p:nvSpPr>
-        <p:spPr>
-          <a:xfrm>
-            <a:off x="5138240" y="2240280"/>
-            <a:ext cx="26812" cy="256032"/>
+          <p:cNvPr id="180" name="Shape 178"/>
+          <p:cNvSpPr/>
+          <p:nvPr/>
+        </p:nvSpPr>
+        <p:spPr>
+          <a:xfrm>
+            <a:off x="5047449" y="2240280"/>
+            <a:ext cx="39861" cy="256032"/>
           </a:xfrm>
           <a:prstGeom prst="rect">
             <a:avLst/>
@@ -12976,14 +12296,14 @@
       </p:sp>
       <p:sp>
         <p:nvSpPr>
-          <p:cNvPr id="216" name="Shape 214"/>
-          <p:cNvSpPr/>
-          <p:nvPr/>
-        </p:nvSpPr>
-        <p:spPr>
-          <a:xfrm>
-            <a:off x="5418247" y="2240280"/>
-            <a:ext cx="28298" cy="256032"/>
+          <p:cNvPr id="181" name="Shape 179"/>
+          <p:cNvSpPr/>
+          <p:nvPr/>
+        </p:nvSpPr>
+        <p:spPr>
+          <a:xfrm>
+            <a:off x="5351534" y="2240280"/>
+            <a:ext cx="37204" cy="256032"/>
           </a:xfrm>
           <a:prstGeom prst="rect">
             <a:avLst/>
@@ -12996,14 +12316,14 @@
       </p:sp>
       <p:sp>
         <p:nvSpPr>
-          <p:cNvPr id="217" name="Shape 215"/>
-          <p:cNvSpPr/>
-          <p:nvPr/>
-        </p:nvSpPr>
-        <p:spPr>
-          <a:xfrm>
-            <a:off x="5694433" y="2240280"/>
-            <a:ext cx="30774" cy="256032"/>
+          <p:cNvPr id="182" name="Shape 180"/>
+          <p:cNvSpPr/>
+          <p:nvPr/>
+        </p:nvSpPr>
+        <p:spPr>
+          <a:xfrm>
+            <a:off x="5648253" y="2240280"/>
+            <a:ext cx="38798" cy="256032"/>
           </a:xfrm>
           <a:prstGeom prst="rect">
             <a:avLst/>
@@ -13016,14 +12336,14 @@
       </p:sp>
       <p:sp>
         <p:nvSpPr>
-          <p:cNvPr id="218" name="Shape 216"/>
-          <p:cNvSpPr/>
-          <p:nvPr/>
-        </p:nvSpPr>
-        <p:spPr>
-          <a:xfrm>
-            <a:off x="5801328" y="2240280"/>
-            <a:ext cx="40112" cy="256032"/>
+          <p:cNvPr id="183" name="Shape 181"/>
+          <p:cNvSpPr/>
+          <p:nvPr/>
+        </p:nvSpPr>
+        <p:spPr>
+          <a:xfrm>
+            <a:off x="5765255" y="2240280"/>
+            <a:ext cx="43050" cy="256032"/>
           </a:xfrm>
           <a:prstGeom prst="rect">
             <a:avLst/>
@@ -13036,14 +12356,14 @@
       </p:sp>
       <p:sp>
         <p:nvSpPr>
-          <p:cNvPr id="219" name="Shape 217"/>
-          <p:cNvSpPr/>
-          <p:nvPr/>
-        </p:nvSpPr>
-        <p:spPr>
-          <a:xfrm>
-            <a:off x="5901291" y="2240280"/>
-            <a:ext cx="40466" cy="256032"/>
+          <p:cNvPr id="184" name="Shape 182"/>
+          <p:cNvSpPr/>
+          <p:nvPr/>
+        </p:nvSpPr>
+        <p:spPr>
+          <a:xfrm>
+            <a:off x="5872994" y="2240280"/>
+            <a:ext cx="41759" cy="256032"/>
           </a:xfrm>
           <a:prstGeom prst="rect">
             <a:avLst/>
@@ -13056,14 +12376,14 @@
       </p:sp>
       <p:sp>
         <p:nvSpPr>
-          <p:cNvPr id="220" name="Shape 218"/>
-          <p:cNvSpPr/>
-          <p:nvPr/>
-        </p:nvSpPr>
-        <p:spPr>
-          <a:xfrm>
-            <a:off x="6006771" y="2240280"/>
-            <a:ext cx="40254" cy="256032"/>
+          <p:cNvPr id="185" name="Shape 183"/>
+          <p:cNvSpPr/>
+          <p:nvPr/>
+        </p:nvSpPr>
+        <p:spPr>
+          <a:xfrm>
+            <a:off x="5986959" y="2240280"/>
+            <a:ext cx="44037" cy="256032"/>
           </a:xfrm>
           <a:prstGeom prst="rect">
             <a:avLst/>
@@ -13076,14 +12396,14 @@
       </p:sp>
       <p:sp>
         <p:nvSpPr>
-          <p:cNvPr id="221" name="Shape 219"/>
-          <p:cNvSpPr/>
-          <p:nvPr/>
-        </p:nvSpPr>
-        <p:spPr>
-          <a:xfrm>
-            <a:off x="6104681" y="2240280"/>
-            <a:ext cx="41103" cy="256032"/>
+          <p:cNvPr id="186" name="Shape 184"/>
+          <p:cNvSpPr/>
+          <p:nvPr/>
+        </p:nvSpPr>
+        <p:spPr>
+          <a:xfrm>
+            <a:off x="6093028" y="2240280"/>
+            <a:ext cx="43278" cy="256032"/>
           </a:xfrm>
           <a:prstGeom prst="rect">
             <a:avLst/>
@@ -13096,14 +12416,14 @@
       </p:sp>
       <p:sp>
         <p:nvSpPr>
-          <p:cNvPr id="222" name="Shape 220"/>
-          <p:cNvSpPr/>
-          <p:nvPr/>
-        </p:nvSpPr>
-        <p:spPr>
-          <a:xfrm>
-            <a:off x="6204148" y="2240280"/>
-            <a:ext cx="40890" cy="256032"/>
+          <p:cNvPr id="187" name="Shape 185"/>
+          <p:cNvSpPr/>
+          <p:nvPr/>
+        </p:nvSpPr>
+        <p:spPr>
+          <a:xfrm>
+            <a:off x="6202134" y="2240280"/>
+            <a:ext cx="43506" cy="256032"/>
           </a:xfrm>
           <a:prstGeom prst="rect">
             <a:avLst/>
@@ -13116,14 +12436,14 @@
       </p:sp>
       <p:sp>
         <p:nvSpPr>
-          <p:cNvPr id="223" name="Shape 221"/>
-          <p:cNvSpPr/>
-          <p:nvPr/>
-        </p:nvSpPr>
-        <p:spPr>
-          <a:xfrm>
-            <a:off x="6318825" y="2240280"/>
-            <a:ext cx="39900" cy="256032"/>
+          <p:cNvPr id="188" name="Shape 186"/>
+          <p:cNvSpPr/>
+          <p:nvPr/>
+        </p:nvSpPr>
+        <p:spPr>
+          <a:xfrm>
+            <a:off x="6306836" y="2240280"/>
+            <a:ext cx="43202" cy="256032"/>
           </a:xfrm>
           <a:prstGeom prst="rect">
             <a:avLst/>
@@ -13136,14 +12456,14 @@
       </p:sp>
       <p:sp>
         <p:nvSpPr>
-          <p:cNvPr id="224" name="Shape 222"/>
-          <p:cNvSpPr/>
-          <p:nvPr/>
-        </p:nvSpPr>
-        <p:spPr>
-          <a:xfrm>
-            <a:off x="6448641" y="2240280"/>
-            <a:ext cx="29500" cy="256032"/>
+          <p:cNvPr id="189" name="Shape 187"/>
+          <p:cNvSpPr/>
+          <p:nvPr/>
+        </p:nvSpPr>
+        <p:spPr>
+          <a:xfrm>
+            <a:off x="6411463" y="2240280"/>
+            <a:ext cx="40696" cy="256032"/>
           </a:xfrm>
           <a:prstGeom prst="rect">
             <a:avLst/>
@@ -13156,14 +12476,14 @@
       </p:sp>
       <p:sp>
         <p:nvSpPr>
-          <p:cNvPr id="225" name="Shape 223"/>
-          <p:cNvSpPr/>
-          <p:nvPr/>
-        </p:nvSpPr>
-        <p:spPr>
-          <a:xfrm>
-            <a:off x="6940033" y="2240280"/>
-            <a:ext cx="20233" cy="256032"/>
+          <p:cNvPr id="190" name="Shape 188"/>
+          <p:cNvSpPr/>
+          <p:nvPr/>
+        </p:nvSpPr>
+        <p:spPr>
+          <a:xfrm>
+            <a:off x="6882660" y="2240280"/>
+            <a:ext cx="21715" cy="256032"/>
           </a:xfrm>
           <a:prstGeom prst="rect">
             <a:avLst/>
@@ -13176,14 +12496,14 @@
       </p:sp>
       <p:sp>
         <p:nvSpPr>
-          <p:cNvPr id="226" name="Shape 224"/>
-          <p:cNvSpPr/>
-          <p:nvPr/>
-        </p:nvSpPr>
-        <p:spPr>
-          <a:xfrm>
-            <a:off x="7011202" y="2240280"/>
-            <a:ext cx="33391" cy="256032"/>
+          <p:cNvPr id="191" name="Shape 189"/>
+          <p:cNvSpPr/>
+          <p:nvPr/>
+        </p:nvSpPr>
+        <p:spPr>
+          <a:xfrm>
+            <a:off x="6966255" y="2240280"/>
+            <a:ext cx="35913" cy="256032"/>
           </a:xfrm>
           <a:prstGeom prst="rect">
             <a:avLst/>
@@ -13196,14 +12516,14 @@
       </p:sp>
       <p:sp>
         <p:nvSpPr>
-          <p:cNvPr id="227" name="Shape 225"/>
-          <p:cNvSpPr/>
-          <p:nvPr/>
-        </p:nvSpPr>
-        <p:spPr>
-          <a:xfrm>
-            <a:off x="7285833" y="2240280"/>
-            <a:ext cx="310498" cy="256032"/>
+          <p:cNvPr id="192" name="Shape 190"/>
+          <p:cNvSpPr/>
+          <p:nvPr/>
+        </p:nvSpPr>
+        <p:spPr>
+          <a:xfrm>
+            <a:off x="7259557" y="2240280"/>
+            <a:ext cx="332329" cy="256032"/>
           </a:xfrm>
           <a:prstGeom prst="rect">
             <a:avLst/>
@@ -13216,7 +12536,7 @@
       </p:sp>
       <p:sp>
         <p:nvSpPr>
-          <p:cNvPr id="228" name="Text 226"/>
+          <p:cNvPr id="193" name="Text 191"/>
           <p:cNvSpPr/>
           <p:nvPr/>
         </p:nvSpPr>
@@ -13247,7 +12567,7 @@
                 <a:ea typeface="NVIDIA Sans" pitchFamily="34" charset="-122"/>
                 <a:cs typeface="NVIDIA Sans" pitchFamily="34" charset="-120"/>
               </a:rPr>
-              <a:t>114 ms · 13%</a:t>
+              <a:t>124 ms · 15%</a:t>
             </a:r>
             <a:endParaRPr lang="en-US" sz="900" dirty="0"/>
           </a:p>
@@ -13255,13 +12575,13 @@
       </p:sp>
       <p:sp>
         <p:nvSpPr>
-          <p:cNvPr id="229" name="Shape 227"/>
-          <p:cNvSpPr/>
-          <p:nvPr/>
-        </p:nvSpPr>
-        <p:spPr>
-          <a:xfrm>
-            <a:off x="3421693" y="1810512"/>
+          <p:cNvPr id="194" name="Shape 192"/>
+          <p:cNvSpPr/>
+          <p:nvPr/>
+        </p:nvSpPr>
+        <p:spPr>
+          <a:xfrm>
+            <a:off x="3220135" y="1810512"/>
             <a:ext cx="0" cy="713232"/>
           </a:xfrm>
           <a:prstGeom prst="line">
@@ -13278,13 +12598,13 @@
       </p:sp>
       <p:sp>
         <p:nvSpPr>
-          <p:cNvPr id="230" name="Shape 228"/>
-          <p:cNvSpPr/>
-          <p:nvPr/>
-        </p:nvSpPr>
-        <p:spPr>
-          <a:xfrm>
-            <a:off x="7060794" y="1810512"/>
+          <p:cNvPr id="195" name="Shape 193"/>
+          <p:cNvSpPr/>
+          <p:nvPr/>
+        </p:nvSpPr>
+        <p:spPr>
+          <a:xfrm>
+            <a:off x="7019479" y="1810512"/>
             <a:ext cx="0" cy="713232"/>
           </a:xfrm>
           <a:prstGeom prst="line">
@@ -13301,7 +12621,7 @@
       </p:sp>
       <p:sp>
         <p:nvSpPr>
-          <p:cNvPr id="231" name="Shape 229"/>
+          <p:cNvPr id="196" name="Shape 194"/>
           <p:cNvSpPr/>
           <p:nvPr/>
         </p:nvSpPr>
@@ -13324,7 +12644,7 @@
       </p:sp>
       <p:sp>
         <p:nvSpPr>
-          <p:cNvPr id="232" name="Shape 230"/>
+          <p:cNvPr id="197" name="Shape 195"/>
           <p:cNvSpPr/>
           <p:nvPr/>
         </p:nvSpPr>
@@ -13347,7 +12667,7 @@
       </p:sp>
       <p:sp>
         <p:nvSpPr>
-          <p:cNvPr id="233" name="Text 231"/>
+          <p:cNvPr id="198" name="Text 196"/>
           <p:cNvSpPr/>
           <p:nvPr/>
         </p:nvSpPr>
@@ -13386,13 +12706,13 @@
       </p:sp>
       <p:sp>
         <p:nvSpPr>
-          <p:cNvPr id="234" name="Shape 232"/>
-          <p:cNvSpPr/>
-          <p:nvPr/>
-        </p:nvSpPr>
-        <p:spPr>
-          <a:xfrm>
-            <a:off x="2923651" y="2633472"/>
+          <p:cNvPr id="199" name="Shape 197"/>
+          <p:cNvSpPr/>
+          <p:nvPr/>
+        </p:nvSpPr>
+        <p:spPr>
+          <a:xfrm>
+            <a:off x="3027283" y="2633472"/>
             <a:ext cx="0" cy="45720"/>
           </a:xfrm>
           <a:prstGeom prst="line">
@@ -13409,13 +12729,13 @@
       </p:sp>
       <p:sp>
         <p:nvSpPr>
-          <p:cNvPr id="235" name="Text 233"/>
-          <p:cNvSpPr/>
-          <p:nvPr/>
-        </p:nvSpPr>
-        <p:spPr>
-          <a:xfrm>
-            <a:off x="2649331" y="2679192"/>
+          <p:cNvPr id="200" name="Text 198"/>
+          <p:cNvSpPr/>
+          <p:nvPr/>
+        </p:nvSpPr>
+        <p:spPr>
+          <a:xfrm>
+            <a:off x="2752963" y="2679192"/>
             <a:ext cx="548640" cy="182880"/>
           </a:xfrm>
           <a:prstGeom prst="rect">
@@ -13448,13 +12768,13 @@
       </p:sp>
       <p:sp>
         <p:nvSpPr>
-          <p:cNvPr id="236" name="Shape 234"/>
-          <p:cNvSpPr/>
-          <p:nvPr/>
-        </p:nvSpPr>
-        <p:spPr>
-          <a:xfrm>
-            <a:off x="4338543" y="2633472"/>
+          <p:cNvPr id="201" name="Shape 199"/>
+          <p:cNvSpPr/>
+          <p:nvPr/>
+        </p:nvSpPr>
+        <p:spPr>
+          <a:xfrm>
+            <a:off x="4545805" y="2633472"/>
             <a:ext cx="0" cy="45720"/>
           </a:xfrm>
           <a:prstGeom prst="line">
@@ -13471,13 +12791,13 @@
       </p:sp>
       <p:sp>
         <p:nvSpPr>
-          <p:cNvPr id="237" name="Text 235"/>
-          <p:cNvSpPr/>
-          <p:nvPr/>
-        </p:nvSpPr>
-        <p:spPr>
-          <a:xfrm>
-            <a:off x="4064223" y="2679192"/>
+          <p:cNvPr id="202" name="Text 200"/>
+          <p:cNvSpPr/>
+          <p:nvPr/>
+        </p:nvSpPr>
+        <p:spPr>
+          <a:xfrm>
+            <a:off x="4271485" y="2679192"/>
             <a:ext cx="548640" cy="182880"/>
           </a:xfrm>
           <a:prstGeom prst="rect">
@@ -13510,13 +12830,13 @@
       </p:sp>
       <p:sp>
         <p:nvSpPr>
-          <p:cNvPr id="238" name="Shape 236"/>
-          <p:cNvSpPr/>
-          <p:nvPr/>
-        </p:nvSpPr>
-        <p:spPr>
-          <a:xfrm>
-            <a:off x="5753434" y="2633472"/>
+          <p:cNvPr id="203" name="Shape 201"/>
+          <p:cNvSpPr/>
+          <p:nvPr/>
+        </p:nvSpPr>
+        <p:spPr>
+          <a:xfrm>
+            <a:off x="6064328" y="2633472"/>
             <a:ext cx="0" cy="45720"/>
           </a:xfrm>
           <a:prstGeom prst="line">
@@ -13533,13 +12853,13 @@
       </p:sp>
       <p:sp>
         <p:nvSpPr>
-          <p:cNvPr id="239" name="Text 237"/>
-          <p:cNvSpPr/>
-          <p:nvPr/>
-        </p:nvSpPr>
-        <p:spPr>
-          <a:xfrm>
-            <a:off x="5479114" y="2679192"/>
+          <p:cNvPr id="204" name="Text 202"/>
+          <p:cNvSpPr/>
+          <p:nvPr/>
+        </p:nvSpPr>
+        <p:spPr>
+          <a:xfrm>
+            <a:off x="5790008" y="2679192"/>
             <a:ext cx="548640" cy="182880"/>
           </a:xfrm>
           <a:prstGeom prst="rect">
@@ -13572,13 +12892,13 @@
       </p:sp>
       <p:sp>
         <p:nvSpPr>
-          <p:cNvPr id="240" name="Shape 238"/>
-          <p:cNvSpPr/>
-          <p:nvPr/>
-        </p:nvSpPr>
-        <p:spPr>
-          <a:xfrm>
-            <a:off x="7168326" y="2633472"/>
+          <p:cNvPr id="205" name="Shape 203"/>
+          <p:cNvSpPr/>
+          <p:nvPr/>
+        </p:nvSpPr>
+        <p:spPr>
+          <a:xfrm>
+            <a:off x="7582851" y="2633472"/>
             <a:ext cx="0" cy="45720"/>
           </a:xfrm>
           <a:prstGeom prst="line">
@@ -13595,13 +12915,13 @@
       </p:sp>
       <p:sp>
         <p:nvSpPr>
-          <p:cNvPr id="241" name="Text 239"/>
-          <p:cNvSpPr/>
-          <p:nvPr/>
-        </p:nvSpPr>
-        <p:spPr>
-          <a:xfrm>
-            <a:off x="6894006" y="2679192"/>
+          <p:cNvPr id="206" name="Text 204"/>
+          <p:cNvSpPr/>
+          <p:nvPr/>
+        </p:nvSpPr>
+        <p:spPr>
+          <a:xfrm>
+            <a:off x="7308531" y="2679192"/>
             <a:ext cx="548640" cy="182880"/>
           </a:xfrm>
           <a:prstGeom prst="rect">
@@ -13634,7 +12954,7 @@
       </p:sp>
       <p:sp>
         <p:nvSpPr>
-          <p:cNvPr id="242" name="Text 240"/>
+          <p:cNvPr id="207" name="Text 205"/>
           <p:cNvSpPr/>
           <p:nvPr/>
         </p:nvSpPr>
@@ -13673,13 +12993,13 @@
       </p:sp>
       <p:sp>
         <p:nvSpPr>
-          <p:cNvPr id="243" name="Shape 241"/>
-          <p:cNvSpPr/>
-          <p:nvPr/>
-        </p:nvSpPr>
-        <p:spPr>
-          <a:xfrm>
-            <a:off x="1700298" y="1874520"/>
+          <p:cNvPr id="208" name="Shape 206"/>
+          <p:cNvSpPr/>
+          <p:nvPr/>
+        </p:nvSpPr>
+        <p:spPr>
+          <a:xfrm>
+            <a:off x="1553987" y="1874520"/>
             <a:ext cx="182880" cy="182880"/>
           </a:xfrm>
           <a:prstGeom prst="ellipse">
@@ -13693,13 +13013,13 @@
       </p:sp>
       <p:sp>
         <p:nvSpPr>
-          <p:cNvPr id="244" name="Text 242"/>
-          <p:cNvSpPr/>
-          <p:nvPr/>
-        </p:nvSpPr>
-        <p:spPr>
-          <a:xfrm>
-            <a:off x="1700298" y="1874520"/>
+          <p:cNvPr id="209" name="Text 207"/>
+          <p:cNvSpPr/>
+          <p:nvPr/>
+        </p:nvSpPr>
+        <p:spPr>
+          <a:xfrm>
+            <a:off x="1553987" y="1874520"/>
             <a:ext cx="182880" cy="182880"/>
           </a:xfrm>
           <a:prstGeom prst="rect">
@@ -13732,13 +13052,13 @@
       </p:sp>
       <p:sp>
         <p:nvSpPr>
-          <p:cNvPr id="245" name="Shape 243"/>
-          <p:cNvSpPr/>
-          <p:nvPr/>
-        </p:nvSpPr>
-        <p:spPr>
-          <a:xfrm>
-            <a:off x="2655350" y="1874520"/>
+          <p:cNvPr id="210" name="Shape 208"/>
+          <p:cNvSpPr/>
+          <p:nvPr/>
+        </p:nvSpPr>
+        <p:spPr>
+          <a:xfrm>
+            <a:off x="2252508" y="1874520"/>
             <a:ext cx="182880" cy="182880"/>
           </a:xfrm>
           <a:prstGeom prst="ellipse">
@@ -13752,13 +13072,13 @@
       </p:sp>
       <p:sp>
         <p:nvSpPr>
-          <p:cNvPr id="246" name="Text 244"/>
-          <p:cNvSpPr/>
-          <p:nvPr/>
-        </p:nvSpPr>
-        <p:spPr>
-          <a:xfrm>
-            <a:off x="2655350" y="1874520"/>
+          <p:cNvPr id="211" name="Text 209"/>
+          <p:cNvSpPr/>
+          <p:nvPr/>
+        </p:nvSpPr>
+        <p:spPr>
+          <a:xfrm>
+            <a:off x="2252508" y="1874520"/>
             <a:ext cx="182880" cy="182880"/>
           </a:xfrm>
           <a:prstGeom prst="rect">
@@ -13791,13 +13111,13 @@
       </p:sp>
       <p:sp>
         <p:nvSpPr>
-          <p:cNvPr id="247" name="Shape 245"/>
-          <p:cNvSpPr/>
-          <p:nvPr/>
-        </p:nvSpPr>
-        <p:spPr>
-          <a:xfrm>
-            <a:off x="4459337" y="1874520"/>
+          <p:cNvPr id="212" name="Shape 210"/>
+          <p:cNvSpPr/>
+          <p:nvPr/>
+        </p:nvSpPr>
+        <p:spPr>
+          <a:xfrm>
+            <a:off x="4606218" y="1874520"/>
             <a:ext cx="182880" cy="182880"/>
           </a:xfrm>
           <a:prstGeom prst="ellipse">
@@ -13811,13 +13131,13 @@
       </p:sp>
       <p:sp>
         <p:nvSpPr>
-          <p:cNvPr id="248" name="Text 246"/>
-          <p:cNvSpPr/>
-          <p:nvPr/>
-        </p:nvSpPr>
-        <p:spPr>
-          <a:xfrm>
-            <a:off x="4459337" y="1874520"/>
+          <p:cNvPr id="213" name="Text 211"/>
+          <p:cNvSpPr/>
+          <p:nvPr/>
+        </p:nvSpPr>
+        <p:spPr>
+          <a:xfrm>
+            <a:off x="4606218" y="1874520"/>
             <a:ext cx="182880" cy="182880"/>
           </a:xfrm>
           <a:prstGeom prst="rect">
@@ -13850,13 +13170,13 @@
       </p:sp>
       <p:sp>
         <p:nvSpPr>
-          <p:cNvPr id="249" name="Shape 247"/>
-          <p:cNvSpPr/>
-          <p:nvPr/>
-        </p:nvSpPr>
-        <p:spPr>
-          <a:xfrm>
-            <a:off x="7345715" y="2276856"/>
+          <p:cNvPr id="214" name="Shape 212"/>
+          <p:cNvSpPr/>
+          <p:nvPr/>
+        </p:nvSpPr>
+        <p:spPr>
+          <a:xfrm>
+            <a:off x="7324373" y="2276856"/>
             <a:ext cx="182880" cy="182880"/>
           </a:xfrm>
           <a:prstGeom prst="ellipse">
@@ -13870,13 +13190,13 @@
       </p:sp>
       <p:sp>
         <p:nvSpPr>
-          <p:cNvPr id="250" name="Text 248"/>
-          <p:cNvSpPr/>
-          <p:nvPr/>
-        </p:nvSpPr>
-        <p:spPr>
-          <a:xfrm>
-            <a:off x="7345715" y="2276856"/>
+          <p:cNvPr id="215" name="Text 213"/>
+          <p:cNvSpPr/>
+          <p:nvPr/>
+        </p:nvSpPr>
+        <p:spPr>
+          <a:xfrm>
+            <a:off x="7324373" y="2276856"/>
             <a:ext cx="182880" cy="182880"/>
           </a:xfrm>
           <a:prstGeom prst="rect">
@@ -14214,7 +13534,7 @@
                           <a:ea typeface="NVIDIA Sans" pitchFamily="34" charset="-122"/>
                           <a:cs typeface="NVIDIA Sans" pitchFamily="34" charset="-120"/>
                         </a:rPr>
-                        <a:t>first 80 ms of every step: compute idle, HF preprocessing on critical path</a:t>
+                        <a:t>first ~40 ms of every step: compute idle, HF preprocessing on critical path</a:t>
                       </a:r>
                       <a:endParaRPr lang="en-US" sz="850" dirty="0">
                         <a:latin typeface="NVIDIA Sans" charset="0"/>
@@ -14608,7 +13928,7 @@
                           <a:ea typeface="NVIDIA Sans" pitchFamily="34" charset="-122"/>
                           <a:cs typeface="NVIDIA Sans" pitchFamily="34" charset="-120"/>
                         </a:rPr>
-                        <a:t>13,868 launches/step, median 8 µs, 79% &lt; 20 µs — 254 ms pure idle</a:t>
+                        <a:t>13,868 launches/step, median 8 µs, 79% &lt; 20 µs — 205 ms pure idle</a:t>
                       </a:r>
                       <a:endParaRPr lang="en-US" sz="850" dirty="0">
                         <a:latin typeface="NVIDIA Sans" charset="0"/>
@@ -14805,7 +14125,7 @@
                           <a:ea typeface="NVIDIA Sans" pitchFamily="34" charset="-122"/>
                           <a:cs typeface="NVIDIA Sans" pitchFamily="34" charset="-120"/>
                         </a:rPr>
-                        <a:t>15 small AR buckets; 22 ms redundant flatten; 44 ms exposed AllGather</a:t>
+                        <a:t>15 small AR buckets; 22 ms redundant flatten; exposed AllGather tail</a:t>
                       </a:r>
                       <a:endParaRPr lang="en-US" sz="850" dirty="0">
                         <a:latin typeface="NVIDIA Sans" charset="0"/>
@@ -14925,7 +14245,7 @@
       </p:graphicFrame>
       <p:sp>
         <p:nvSpPr>
-          <p:cNvPr id="252" name="Text 249"/>
+          <p:cNvPr id="217" name="Text 214"/>
           <p:cNvSpPr/>
           <p:nvPr/>
         </p:nvSpPr>
@@ -14964,7 +14284,7 @@
       </p:sp>
       <p:sp>
         <p:nvSpPr>
-          <p:cNvPr id="253" name="Text 250"/>
+          <p:cNvPr id="218" name="Text 215"/>
           <p:cNvSpPr/>
           <p:nvPr/>
         </p:nvSpPr>
@@ -15003,7 +14323,7 @@
       </p:sp>
       <p:sp>
         <p:nvSpPr>
-          <p:cNvPr id="254" name="Shape 251"/>
+          <p:cNvPr id="219" name="Shape 216"/>
           <p:cNvSpPr/>
           <p:nvPr/>
         </p:nvSpPr>
@@ -15023,7 +14343,7 @@
       </p:sp>
       <p:pic>
         <p:nvPicPr>
-          <p:cNvPr id="255" name="Image 0" descr="/app/logos/nvidia-logo-blk-sm.png">    </p:cNvPr>
+          <p:cNvPr id="220" name="Image 0" descr="/app/logos/nvidia-logo-blk-sm.png">    </p:cNvPr>
           <p:cNvPicPr>
             <a:picLocks noChangeAspect="1"/>
           </p:cNvPicPr>
@@ -19125,7 +18445,7 @@
         <p:spPr>
           <a:xfrm>
             <a:off x="2148840" y="3063240"/>
-            <a:ext cx="3596656" cy="310896"/>
+            <a:ext cx="3605332" cy="310896"/>
           </a:xfrm>
           <a:prstGeom prst="rect">
             <a:avLst/>
@@ -19145,7 +18465,7 @@
         <p:spPr>
           <a:xfrm>
             <a:off x="2148840" y="3063240"/>
-            <a:ext cx="3596656" cy="310896"/>
+            <a:ext cx="3605332" cy="310896"/>
           </a:xfrm>
           <a:prstGeom prst="rect">
             <a:avLst/>
@@ -19169,7 +18489,7 @@
                 <a:ea typeface="NVIDIA Sans" pitchFamily="34" charset="-122"/>
                 <a:cs typeface="NVIDIA Sans" pitchFamily="34" charset="-120"/>
               </a:rPr>
-              <a:t>539</a:t>
+              <a:t>540</a:t>
             </a:r>
             <a:endParaRPr lang="en-US" sz="1000" dirty="0"/>
           </a:p>
@@ -19183,8 +18503,8 @@
         </p:nvSpPr>
         <p:spPr>
           <a:xfrm>
-            <a:off x="5745496" y="3063240"/>
-            <a:ext cx="407118" cy="310896"/>
+            <a:off x="5754172" y="3063240"/>
+            <a:ext cx="411123" cy="310896"/>
           </a:xfrm>
           <a:prstGeom prst="rect">
             <a:avLst/>
@@ -19203,8 +18523,8 @@
         </p:nvSpPr>
         <p:spPr>
           <a:xfrm>
-            <a:off x="6152614" y="3063240"/>
-            <a:ext cx="1695881" cy="310896"/>
+            <a:off x="6165295" y="3063240"/>
+            <a:ext cx="1368852" cy="310896"/>
           </a:xfrm>
           <a:prstGeom prst="rect">
             <a:avLst/>
@@ -19223,8 +18543,8 @@
         </p:nvSpPr>
         <p:spPr>
           <a:xfrm>
-            <a:off x="6152614" y="3063240"/>
-            <a:ext cx="1695881" cy="310896"/>
+            <a:off x="6165295" y="3063240"/>
+            <a:ext cx="1368852" cy="310896"/>
           </a:xfrm>
           <a:prstGeom prst="rect">
             <a:avLst/>
@@ -19248,7 +18568,7 @@
                 <a:ea typeface="NVIDIA Sans" pitchFamily="34" charset="-122"/>
                 <a:cs typeface="NVIDIA Sans" pitchFamily="34" charset="-120"/>
               </a:rPr>
-              <a:t>254</a:t>
+              <a:t>205</a:t>
             </a:r>
             <a:endParaRPr lang="en-US" sz="1000" dirty="0"/>
           </a:p>
@@ -19262,7 +18582,7 @@
         </p:nvSpPr>
         <p:spPr>
           <a:xfrm>
-            <a:off x="7903359" y="3063240"/>
+            <a:off x="7589010" y="3063240"/>
             <a:ext cx="822960" cy="310896"/>
           </a:xfrm>
           <a:prstGeom prst="rect">
@@ -19287,7 +18607,7 @@
                 <a:ea typeface="NVIDIA Sans" pitchFamily="34" charset="-122"/>
                 <a:cs typeface="NVIDIA Sans" pitchFamily="34" charset="-120"/>
               </a:rPr>
-              <a:t>866 ms</a:t>
+              <a:t>807 ms</a:t>
             </a:r>
             <a:endParaRPr lang="en-US" sz="1100" dirty="0"/>
           </a:p>

--- a/docs/slides/qwenpi-optimization.pptx
+++ b/docs/slides/qwenpi-optimization.pptx
@@ -118,6 +118,2758 @@
 </p:presentation>
 </file>
 
+<file path=ppt/charts/chart1.xml><?xml version="1.0" encoding="utf-8"?>
+<c:chartSpace xmlns:c="http://schemas.openxmlformats.org/drawingml/2006/chart" xmlns:a="http://schemas.openxmlformats.org/drawingml/2006/main" xmlns:r="http://schemas.openxmlformats.org/officeDocument/2006/relationships">
+  <c:date1904 val="0"/>
+  <c:roundedCorners val="1"/>
+  <c:chart>
+    <c:autoTitleDeleted val="1"/>
+    <c:plotArea>
+      <c:layout/>
+      <c:lineChart>
+        <c:varyColors val="0"/>
+        <c:ser>
+          <c:idx val="0"/>
+          <c:order val="0"/>
+          <c:tx>
+            <c:strRef>
+              <c:f>Sheet1!$B$1</c:f>
+              <c:strCache>
+                <c:ptCount val="1"/>
+                <c:pt idx="0">
+                  <c:v>fp32 head (reference)</c:v>
+                </c:pt>
+              </c:strCache>
+            </c:strRef>
+          </c:tx>
+          <c:spPr>
+            <a:solidFill>
+              <a:srgbClr val="8C8C8C"/>
+            </a:solidFill>
+            <a:ln w="19050" cap="flat">
+              <a:solidFill>
+                <a:srgbClr val="8C8C8C"/>
+              </a:solidFill>
+              <a:prstDash val="solid"/>
+              <a:round/>
+            </a:ln>
+            <a:effectLst/>
+          </c:spPr>
+          <c:invertIfNegative val="0"/>
+          <c:dLbls>
+            <c:numFmt formatCode="#,##0" sourceLinked="0"/>
+            <c:txPr>
+              <a:bodyPr/>
+              <a:lstStyle/>
+              <a:p>
+                <a:pPr>
+                  <a:defRPr b="0" i="0" strike="noStrike" sz="1200" u="none">
+                    <a:solidFill>
+                      <a:srgbClr val="000000"/>
+                    </a:solidFill>
+                    <a:latin typeface="Arial"/>
+                  </a:defRPr>
+                </a:pPr>
+              </a:p>
+            </c:txPr>
+            <c:showLegendKey val="0"/>
+            <c:showVal val="0"/>
+            <c:showCatName val="0"/>
+            <c:showSerName val="0"/>
+            <c:showPercent val="0"/>
+            <c:showBubbleSize val="0"/>
+            <c:showLeaderLines val="0"/>
+          </c:dLbls>
+          <c:marker>
+            <c:symbol val="none"/>
+            <c:size val="6"/>
+            <c:spPr>
+              <a:solidFill>
+                <a:srgbClr val="8C8C8C"/>
+              </a:solidFill>
+              <a:ln w="9525" cap="flat">
+                <a:solidFill>
+                  <a:srgbClr val="8C8C8C"/>
+                </a:solidFill>
+                <a:prstDash val="solid"/>
+                <a:round/>
+              </a:ln>
+              <a:effectLst/>
+            </c:spPr>
+          </c:marker>
+          <c:cat>
+            <c:multiLvlStrRef>
+              <c:f>Sheet1!$A$2:$A$201</c:f>
+              <c:multiLvlStrCache>
+                <c:ptCount val="200"/>
+                <c:lvl>
+                  <c:pt idx="0">
+                    <c:v>1</c:v>
+                  </c:pt>
+                  <c:pt idx="1">
+                    <c:v>2</c:v>
+                  </c:pt>
+                  <c:pt idx="2">
+                    <c:v>3</c:v>
+                  </c:pt>
+                  <c:pt idx="3">
+                    <c:v>4</c:v>
+                  </c:pt>
+                  <c:pt idx="4">
+                    <c:v>5</c:v>
+                  </c:pt>
+                  <c:pt idx="5">
+                    <c:v>6</c:v>
+                  </c:pt>
+                  <c:pt idx="6">
+                    <c:v>7</c:v>
+                  </c:pt>
+                  <c:pt idx="7">
+                    <c:v>8</c:v>
+                  </c:pt>
+                  <c:pt idx="8">
+                    <c:v>9</c:v>
+                  </c:pt>
+                  <c:pt idx="9">
+                    <c:v>10</c:v>
+                  </c:pt>
+                  <c:pt idx="10">
+                    <c:v>11</c:v>
+                  </c:pt>
+                  <c:pt idx="11">
+                    <c:v>12</c:v>
+                  </c:pt>
+                  <c:pt idx="12">
+                    <c:v>13</c:v>
+                  </c:pt>
+                  <c:pt idx="13">
+                    <c:v>14</c:v>
+                  </c:pt>
+                  <c:pt idx="14">
+                    <c:v>15</c:v>
+                  </c:pt>
+                  <c:pt idx="15">
+                    <c:v>16</c:v>
+                  </c:pt>
+                  <c:pt idx="16">
+                    <c:v>17</c:v>
+                  </c:pt>
+                  <c:pt idx="17">
+                    <c:v>18</c:v>
+                  </c:pt>
+                  <c:pt idx="18">
+                    <c:v>19</c:v>
+                  </c:pt>
+                  <c:pt idx="19">
+                    <c:v>20</c:v>
+                  </c:pt>
+                  <c:pt idx="20">
+                    <c:v>21</c:v>
+                  </c:pt>
+                  <c:pt idx="21">
+                    <c:v>22</c:v>
+                  </c:pt>
+                  <c:pt idx="22">
+                    <c:v>23</c:v>
+                  </c:pt>
+                  <c:pt idx="23">
+                    <c:v>24</c:v>
+                  </c:pt>
+                  <c:pt idx="24">
+                    <c:v>25</c:v>
+                  </c:pt>
+                  <c:pt idx="25">
+                    <c:v>26</c:v>
+                  </c:pt>
+                  <c:pt idx="26">
+                    <c:v>27</c:v>
+                  </c:pt>
+                  <c:pt idx="27">
+                    <c:v>28</c:v>
+                  </c:pt>
+                  <c:pt idx="28">
+                    <c:v>29</c:v>
+                  </c:pt>
+                  <c:pt idx="29">
+                    <c:v>30</c:v>
+                  </c:pt>
+                  <c:pt idx="30">
+                    <c:v>31</c:v>
+                  </c:pt>
+                  <c:pt idx="31">
+                    <c:v>32</c:v>
+                  </c:pt>
+                  <c:pt idx="32">
+                    <c:v>33</c:v>
+                  </c:pt>
+                  <c:pt idx="33">
+                    <c:v>34</c:v>
+                  </c:pt>
+                  <c:pt idx="34">
+                    <c:v>35</c:v>
+                  </c:pt>
+                  <c:pt idx="35">
+                    <c:v>36</c:v>
+                  </c:pt>
+                  <c:pt idx="36">
+                    <c:v>37</c:v>
+                  </c:pt>
+                  <c:pt idx="37">
+                    <c:v>38</c:v>
+                  </c:pt>
+                  <c:pt idx="38">
+                    <c:v>39</c:v>
+                  </c:pt>
+                  <c:pt idx="39">
+                    <c:v>40</c:v>
+                  </c:pt>
+                  <c:pt idx="40">
+                    <c:v>41</c:v>
+                  </c:pt>
+                  <c:pt idx="41">
+                    <c:v>42</c:v>
+                  </c:pt>
+                  <c:pt idx="42">
+                    <c:v>43</c:v>
+                  </c:pt>
+                  <c:pt idx="43">
+                    <c:v>44</c:v>
+                  </c:pt>
+                  <c:pt idx="44">
+                    <c:v>45</c:v>
+                  </c:pt>
+                  <c:pt idx="45">
+                    <c:v>46</c:v>
+                  </c:pt>
+                  <c:pt idx="46">
+                    <c:v>47</c:v>
+                  </c:pt>
+                  <c:pt idx="47">
+                    <c:v>48</c:v>
+                  </c:pt>
+                  <c:pt idx="48">
+                    <c:v>49</c:v>
+                  </c:pt>
+                  <c:pt idx="49">
+                    <c:v>50</c:v>
+                  </c:pt>
+                  <c:pt idx="50">
+                    <c:v>51</c:v>
+                  </c:pt>
+                  <c:pt idx="51">
+                    <c:v>52</c:v>
+                  </c:pt>
+                  <c:pt idx="52">
+                    <c:v>53</c:v>
+                  </c:pt>
+                  <c:pt idx="53">
+                    <c:v>54</c:v>
+                  </c:pt>
+                  <c:pt idx="54">
+                    <c:v>55</c:v>
+                  </c:pt>
+                  <c:pt idx="55">
+                    <c:v>56</c:v>
+                  </c:pt>
+                  <c:pt idx="56">
+                    <c:v>57</c:v>
+                  </c:pt>
+                  <c:pt idx="57">
+                    <c:v>58</c:v>
+                  </c:pt>
+                  <c:pt idx="58">
+                    <c:v>59</c:v>
+                  </c:pt>
+                  <c:pt idx="59">
+                    <c:v>60</c:v>
+                  </c:pt>
+                  <c:pt idx="60">
+                    <c:v>61</c:v>
+                  </c:pt>
+                  <c:pt idx="61">
+                    <c:v>62</c:v>
+                  </c:pt>
+                  <c:pt idx="62">
+                    <c:v>63</c:v>
+                  </c:pt>
+                  <c:pt idx="63">
+                    <c:v>64</c:v>
+                  </c:pt>
+                  <c:pt idx="64">
+                    <c:v>65</c:v>
+                  </c:pt>
+                  <c:pt idx="65">
+                    <c:v>66</c:v>
+                  </c:pt>
+                  <c:pt idx="66">
+                    <c:v>67</c:v>
+                  </c:pt>
+                  <c:pt idx="67">
+                    <c:v>68</c:v>
+                  </c:pt>
+                  <c:pt idx="68">
+                    <c:v>69</c:v>
+                  </c:pt>
+                  <c:pt idx="69">
+                    <c:v>70</c:v>
+                  </c:pt>
+                  <c:pt idx="70">
+                    <c:v>71</c:v>
+                  </c:pt>
+                  <c:pt idx="71">
+                    <c:v>72</c:v>
+                  </c:pt>
+                  <c:pt idx="72">
+                    <c:v>73</c:v>
+                  </c:pt>
+                  <c:pt idx="73">
+                    <c:v>74</c:v>
+                  </c:pt>
+                  <c:pt idx="74">
+                    <c:v>75</c:v>
+                  </c:pt>
+                  <c:pt idx="75">
+                    <c:v>76</c:v>
+                  </c:pt>
+                  <c:pt idx="76">
+                    <c:v>77</c:v>
+                  </c:pt>
+                  <c:pt idx="77">
+                    <c:v>78</c:v>
+                  </c:pt>
+                  <c:pt idx="78">
+                    <c:v>79</c:v>
+                  </c:pt>
+                  <c:pt idx="79">
+                    <c:v>80</c:v>
+                  </c:pt>
+                  <c:pt idx="80">
+                    <c:v>81</c:v>
+                  </c:pt>
+                  <c:pt idx="81">
+                    <c:v>82</c:v>
+                  </c:pt>
+                  <c:pt idx="82">
+                    <c:v>83</c:v>
+                  </c:pt>
+                  <c:pt idx="83">
+                    <c:v>84</c:v>
+                  </c:pt>
+                  <c:pt idx="84">
+                    <c:v>85</c:v>
+                  </c:pt>
+                  <c:pt idx="85">
+                    <c:v>86</c:v>
+                  </c:pt>
+                  <c:pt idx="86">
+                    <c:v>87</c:v>
+                  </c:pt>
+                  <c:pt idx="87">
+                    <c:v>88</c:v>
+                  </c:pt>
+                  <c:pt idx="88">
+                    <c:v>89</c:v>
+                  </c:pt>
+                  <c:pt idx="89">
+                    <c:v>90</c:v>
+                  </c:pt>
+                  <c:pt idx="90">
+                    <c:v>91</c:v>
+                  </c:pt>
+                  <c:pt idx="91">
+                    <c:v>92</c:v>
+                  </c:pt>
+                  <c:pt idx="92">
+                    <c:v>93</c:v>
+                  </c:pt>
+                  <c:pt idx="93">
+                    <c:v>94</c:v>
+                  </c:pt>
+                  <c:pt idx="94">
+                    <c:v>95</c:v>
+                  </c:pt>
+                  <c:pt idx="95">
+                    <c:v>96</c:v>
+                  </c:pt>
+                  <c:pt idx="96">
+                    <c:v>97</c:v>
+                  </c:pt>
+                  <c:pt idx="97">
+                    <c:v>98</c:v>
+                  </c:pt>
+                  <c:pt idx="98">
+                    <c:v>99</c:v>
+                  </c:pt>
+                  <c:pt idx="99">
+                    <c:v>100</c:v>
+                  </c:pt>
+                  <c:pt idx="100">
+                    <c:v>101</c:v>
+                  </c:pt>
+                  <c:pt idx="101">
+                    <c:v>102</c:v>
+                  </c:pt>
+                  <c:pt idx="102">
+                    <c:v>103</c:v>
+                  </c:pt>
+                  <c:pt idx="103">
+                    <c:v>104</c:v>
+                  </c:pt>
+                  <c:pt idx="104">
+                    <c:v>105</c:v>
+                  </c:pt>
+                  <c:pt idx="105">
+                    <c:v>106</c:v>
+                  </c:pt>
+                  <c:pt idx="106">
+                    <c:v>107</c:v>
+                  </c:pt>
+                  <c:pt idx="107">
+                    <c:v>108</c:v>
+                  </c:pt>
+                  <c:pt idx="108">
+                    <c:v>109</c:v>
+                  </c:pt>
+                  <c:pt idx="109">
+                    <c:v>110</c:v>
+                  </c:pt>
+                  <c:pt idx="110">
+                    <c:v>111</c:v>
+                  </c:pt>
+                  <c:pt idx="111">
+                    <c:v>112</c:v>
+                  </c:pt>
+                  <c:pt idx="112">
+                    <c:v>113</c:v>
+                  </c:pt>
+                  <c:pt idx="113">
+                    <c:v>114</c:v>
+                  </c:pt>
+                  <c:pt idx="114">
+                    <c:v>115</c:v>
+                  </c:pt>
+                  <c:pt idx="115">
+                    <c:v>116</c:v>
+                  </c:pt>
+                  <c:pt idx="116">
+                    <c:v>117</c:v>
+                  </c:pt>
+                  <c:pt idx="117">
+                    <c:v>118</c:v>
+                  </c:pt>
+                  <c:pt idx="118">
+                    <c:v>119</c:v>
+                  </c:pt>
+                  <c:pt idx="119">
+                    <c:v>120</c:v>
+                  </c:pt>
+                  <c:pt idx="120">
+                    <c:v>121</c:v>
+                  </c:pt>
+                  <c:pt idx="121">
+                    <c:v>122</c:v>
+                  </c:pt>
+                  <c:pt idx="122">
+                    <c:v>123</c:v>
+                  </c:pt>
+                  <c:pt idx="123">
+                    <c:v>124</c:v>
+                  </c:pt>
+                  <c:pt idx="124">
+                    <c:v>125</c:v>
+                  </c:pt>
+                  <c:pt idx="125">
+                    <c:v>126</c:v>
+                  </c:pt>
+                  <c:pt idx="126">
+                    <c:v>127</c:v>
+                  </c:pt>
+                  <c:pt idx="127">
+                    <c:v>128</c:v>
+                  </c:pt>
+                  <c:pt idx="128">
+                    <c:v>129</c:v>
+                  </c:pt>
+                  <c:pt idx="129">
+                    <c:v>130</c:v>
+                  </c:pt>
+                  <c:pt idx="130">
+                    <c:v>131</c:v>
+                  </c:pt>
+                  <c:pt idx="131">
+                    <c:v>132</c:v>
+                  </c:pt>
+                  <c:pt idx="132">
+                    <c:v>133</c:v>
+                  </c:pt>
+                  <c:pt idx="133">
+                    <c:v>134</c:v>
+                  </c:pt>
+                  <c:pt idx="134">
+                    <c:v>135</c:v>
+                  </c:pt>
+                  <c:pt idx="135">
+                    <c:v>136</c:v>
+                  </c:pt>
+                  <c:pt idx="136">
+                    <c:v>137</c:v>
+                  </c:pt>
+                  <c:pt idx="137">
+                    <c:v>138</c:v>
+                  </c:pt>
+                  <c:pt idx="138">
+                    <c:v>139</c:v>
+                  </c:pt>
+                  <c:pt idx="139">
+                    <c:v>140</c:v>
+                  </c:pt>
+                  <c:pt idx="140">
+                    <c:v>141</c:v>
+                  </c:pt>
+                  <c:pt idx="141">
+                    <c:v>142</c:v>
+                  </c:pt>
+                  <c:pt idx="142">
+                    <c:v>143</c:v>
+                  </c:pt>
+                  <c:pt idx="143">
+                    <c:v>144</c:v>
+                  </c:pt>
+                  <c:pt idx="144">
+                    <c:v>145</c:v>
+                  </c:pt>
+                  <c:pt idx="145">
+                    <c:v>146</c:v>
+                  </c:pt>
+                  <c:pt idx="146">
+                    <c:v>147</c:v>
+                  </c:pt>
+                  <c:pt idx="147">
+                    <c:v>148</c:v>
+                  </c:pt>
+                  <c:pt idx="148">
+                    <c:v>149</c:v>
+                  </c:pt>
+                  <c:pt idx="149">
+                    <c:v>150</c:v>
+                  </c:pt>
+                  <c:pt idx="150">
+                    <c:v>151</c:v>
+                  </c:pt>
+                  <c:pt idx="151">
+                    <c:v>152</c:v>
+                  </c:pt>
+                  <c:pt idx="152">
+                    <c:v>153</c:v>
+                  </c:pt>
+                  <c:pt idx="153">
+                    <c:v>154</c:v>
+                  </c:pt>
+                  <c:pt idx="154">
+                    <c:v>155</c:v>
+                  </c:pt>
+                  <c:pt idx="155">
+                    <c:v>156</c:v>
+                  </c:pt>
+                  <c:pt idx="156">
+                    <c:v>157</c:v>
+                  </c:pt>
+                  <c:pt idx="157">
+                    <c:v>158</c:v>
+                  </c:pt>
+                  <c:pt idx="158">
+                    <c:v>159</c:v>
+                  </c:pt>
+                  <c:pt idx="159">
+                    <c:v>160</c:v>
+                  </c:pt>
+                  <c:pt idx="160">
+                    <c:v>161</c:v>
+                  </c:pt>
+                  <c:pt idx="161">
+                    <c:v>162</c:v>
+                  </c:pt>
+                  <c:pt idx="162">
+                    <c:v>163</c:v>
+                  </c:pt>
+                  <c:pt idx="163">
+                    <c:v>164</c:v>
+                  </c:pt>
+                  <c:pt idx="164">
+                    <c:v>165</c:v>
+                  </c:pt>
+                  <c:pt idx="165">
+                    <c:v>166</c:v>
+                  </c:pt>
+                  <c:pt idx="166">
+                    <c:v>167</c:v>
+                  </c:pt>
+                  <c:pt idx="167">
+                    <c:v>168</c:v>
+                  </c:pt>
+                  <c:pt idx="168">
+                    <c:v>169</c:v>
+                  </c:pt>
+                  <c:pt idx="169">
+                    <c:v>170</c:v>
+                  </c:pt>
+                  <c:pt idx="170">
+                    <c:v>171</c:v>
+                  </c:pt>
+                  <c:pt idx="171">
+                    <c:v>172</c:v>
+                  </c:pt>
+                  <c:pt idx="172">
+                    <c:v>173</c:v>
+                  </c:pt>
+                  <c:pt idx="173">
+                    <c:v>174</c:v>
+                  </c:pt>
+                  <c:pt idx="174">
+                    <c:v>175</c:v>
+                  </c:pt>
+                  <c:pt idx="175">
+                    <c:v>176</c:v>
+                  </c:pt>
+                  <c:pt idx="176">
+                    <c:v>177</c:v>
+                  </c:pt>
+                  <c:pt idx="177">
+                    <c:v>178</c:v>
+                  </c:pt>
+                  <c:pt idx="178">
+                    <c:v>179</c:v>
+                  </c:pt>
+                  <c:pt idx="179">
+                    <c:v>180</c:v>
+                  </c:pt>
+                  <c:pt idx="180">
+                    <c:v>181</c:v>
+                  </c:pt>
+                  <c:pt idx="181">
+                    <c:v>182</c:v>
+                  </c:pt>
+                  <c:pt idx="182">
+                    <c:v>183</c:v>
+                  </c:pt>
+                  <c:pt idx="183">
+                    <c:v>184</c:v>
+                  </c:pt>
+                  <c:pt idx="184">
+                    <c:v>185</c:v>
+                  </c:pt>
+                  <c:pt idx="185">
+                    <c:v>186</c:v>
+                  </c:pt>
+                  <c:pt idx="186">
+                    <c:v>187</c:v>
+                  </c:pt>
+                  <c:pt idx="187">
+                    <c:v>188</c:v>
+                  </c:pt>
+                  <c:pt idx="188">
+                    <c:v>189</c:v>
+                  </c:pt>
+                  <c:pt idx="189">
+                    <c:v>190</c:v>
+                  </c:pt>
+                  <c:pt idx="190">
+                    <c:v>191</c:v>
+                  </c:pt>
+                  <c:pt idx="191">
+                    <c:v>192</c:v>
+                  </c:pt>
+                  <c:pt idx="192">
+                    <c:v>193</c:v>
+                  </c:pt>
+                  <c:pt idx="193">
+                    <c:v>194</c:v>
+                  </c:pt>
+                  <c:pt idx="194">
+                    <c:v>195</c:v>
+                  </c:pt>
+                  <c:pt idx="195">
+                    <c:v>196</c:v>
+                  </c:pt>
+                  <c:pt idx="196">
+                    <c:v>197</c:v>
+                  </c:pt>
+                  <c:pt idx="197">
+                    <c:v>198</c:v>
+                  </c:pt>
+                  <c:pt idx="198">
+                    <c:v>199</c:v>
+                  </c:pt>
+                  <c:pt idx="199">
+                    <c:v>200</c:v>
+                  </c:pt>
+                </c:lvl>
+              </c:multiLvlStrCache>
+            </c:multiLvlStrRef>
+          </c:cat>
+          <c:val>
+            <c:numRef>
+              <c:f>Sheet1!$B$2:$B$201</c:f>
+              <c:numCache>
+                <c:formatCode>General</c:formatCode>
+                <c:ptCount val="200"/>
+                <c:pt idx="0">
+                  <c:v>1.4121527671813965</c:v>
+                </c:pt>
+                <c:pt idx="1">
+                  <c:v>1.3194897174835205</c:v>
+                </c:pt>
+                <c:pt idx="2">
+                  <c:v>1.2806522846221924</c:v>
+                </c:pt>
+                <c:pt idx="3">
+                  <c:v>1.4192084074020386</c:v>
+                </c:pt>
+                <c:pt idx="4">
+                  <c:v>1.2832305431365967</c:v>
+                </c:pt>
+                <c:pt idx="5">
+                  <c:v>1.4357311725616455</c:v>
+                </c:pt>
+                <c:pt idx="6">
+                  <c:v>1.3565083742141724</c:v>
+                </c:pt>
+                <c:pt idx="7">
+                  <c:v>1.252800464630127</c:v>
+                </c:pt>
+                <c:pt idx="8">
+                  <c:v>1.5194743871688843</c:v>
+                </c:pt>
+                <c:pt idx="9">
+                  <c:v>1.2733402252197266</c:v>
+                </c:pt>
+                <c:pt idx="10">
+                  <c:v>1.3320759534835815</c:v>
+                </c:pt>
+                <c:pt idx="11">
+                  <c:v>1.2384262084960938</c:v>
+                </c:pt>
+                <c:pt idx="12">
+                  <c:v>1.331701636314392</c:v>
+                </c:pt>
+                <c:pt idx="13">
+                  <c:v>1.3373163938522339</c:v>
+                </c:pt>
+                <c:pt idx="14">
+                  <c:v>1.3059637546539307</c:v>
+                </c:pt>
+                <c:pt idx="15">
+                  <c:v>1.2304404973983765</c:v>
+                </c:pt>
+                <c:pt idx="16">
+                  <c:v>1.2504774332046509</c:v>
+                </c:pt>
+                <c:pt idx="17">
+                  <c:v>1.3071314096450806</c:v>
+                </c:pt>
+                <c:pt idx="18">
+                  <c:v>1.2650794982910156</c:v>
+                </c:pt>
+                <c:pt idx="19">
+                  <c:v>1.3371632099151611</c:v>
+                </c:pt>
+                <c:pt idx="20">
+                  <c:v>1.2505412101745605</c:v>
+                </c:pt>
+                <c:pt idx="21">
+                  <c:v>1.217968463897705</c:v>
+                </c:pt>
+                <c:pt idx="22">
+                  <c:v>1.229660987854004</c:v>
+                </c:pt>
+                <c:pt idx="23">
+                  <c:v>1.2854982614517212</c:v>
+                </c:pt>
+                <c:pt idx="24">
+                  <c:v>1.307376503944397</c:v>
+                </c:pt>
+                <c:pt idx="25">
+                  <c:v>1.2500832080841064</c:v>
+                </c:pt>
+                <c:pt idx="26">
+                  <c:v>1.186734914779663</c:v>
+                </c:pt>
+                <c:pt idx="27">
+                  <c:v>1.2885030508041382</c:v>
+                </c:pt>
+                <c:pt idx="28">
+                  <c:v>1.1829630136489868</c:v>
+                </c:pt>
+                <c:pt idx="29">
+                  <c:v>1.203500747680664</c:v>
+                </c:pt>
+                <c:pt idx="30">
+                  <c:v>1.2791751623153687</c:v>
+                </c:pt>
+                <c:pt idx="31">
+                  <c:v>1.1560218334197998</c:v>
+                </c:pt>
+                <c:pt idx="32">
+                  <c:v>1.2223567962646484</c:v>
+                </c:pt>
+                <c:pt idx="33">
+                  <c:v>1.2153176069259644</c:v>
+                </c:pt>
+                <c:pt idx="34">
+                  <c:v>1.265949010848999</c:v>
+                </c:pt>
+                <c:pt idx="35">
+                  <c:v>1.1965259313583374</c:v>
+                </c:pt>
+                <c:pt idx="36">
+                  <c:v>1.1170250177383423</c:v>
+                </c:pt>
+                <c:pt idx="37">
+                  <c:v>1.2215557098388672</c:v>
+                </c:pt>
+                <c:pt idx="38">
+                  <c:v>1.165437936782837</c:v>
+                </c:pt>
+                <c:pt idx="39">
+                  <c:v>1.1495826244354248</c:v>
+                </c:pt>
+                <c:pt idx="40">
+                  <c:v>1.1819376945495605</c:v>
+                </c:pt>
+                <c:pt idx="41">
+                  <c:v>1.0881881713867188</c:v>
+                </c:pt>
+                <c:pt idx="42">
+                  <c:v>1.1222528219223022</c:v>
+                </c:pt>
+                <c:pt idx="43">
+                  <c:v>1.0755877494812012</c:v>
+                </c:pt>
+                <c:pt idx="44">
+                  <c:v>1.0528324842453003</c:v>
+                </c:pt>
+                <c:pt idx="45">
+                  <c:v>1.1442241668701172</c:v>
+                </c:pt>
+                <c:pt idx="46">
+                  <c:v>1.013492465019226</c:v>
+                </c:pt>
+                <c:pt idx="47">
+                  <c:v>1.0411361455917358</c:v>
+                </c:pt>
+                <c:pt idx="48">
+                  <c:v>1.0412721633911133</c:v>
+                </c:pt>
+                <c:pt idx="49">
+                  <c:v>1.0475513935089111</c:v>
+                </c:pt>
+                <c:pt idx="50">
+                  <c:v>0.9948570728302002</c:v>
+                </c:pt>
+                <c:pt idx="51">
+                  <c:v>1.005023717880249</c:v>
+                </c:pt>
+                <c:pt idx="52">
+                  <c:v>1.0605255365371704</c:v>
+                </c:pt>
+                <c:pt idx="53">
+                  <c:v>0.961317777633667</c:v>
+                </c:pt>
+                <c:pt idx="54">
+                  <c:v>1.0024226903915405</c:v>
+                </c:pt>
+                <c:pt idx="55">
+                  <c:v>1.0241470336914062</c:v>
+                </c:pt>
+                <c:pt idx="56">
+                  <c:v>0.8706899285316467</c:v>
+                </c:pt>
+                <c:pt idx="57">
+                  <c:v>0.9704888463020325</c:v>
+                </c:pt>
+                <c:pt idx="58">
+                  <c:v>0.8054358959197998</c:v>
+                </c:pt>
+                <c:pt idx="59">
+                  <c:v>0.9674917459487915</c:v>
+                </c:pt>
+                <c:pt idx="60">
+                  <c:v>0.7438216805458069</c:v>
+                </c:pt>
+                <c:pt idx="61">
+                  <c:v>0.7216938734054565</c:v>
+                </c:pt>
+                <c:pt idx="62">
+                  <c:v>0.8003250956535339</c:v>
+                </c:pt>
+                <c:pt idx="63">
+                  <c:v>0.8674685955047607</c:v>
+                </c:pt>
+                <c:pt idx="64">
+                  <c:v>0.6158168315887451</c:v>
+                </c:pt>
+                <c:pt idx="65">
+                  <c:v>0.6682757139205933</c:v>
+                </c:pt>
+                <c:pt idx="66">
+                  <c:v>0.7302712202072144</c:v>
+                </c:pt>
+                <c:pt idx="67">
+                  <c:v>0.8801192045211792</c:v>
+                </c:pt>
+                <c:pt idx="68">
+                  <c:v>0.7808986902236938</c:v>
+                </c:pt>
+                <c:pt idx="69">
+                  <c:v>0.6851008534431458</c:v>
+                </c:pt>
+                <c:pt idx="70">
+                  <c:v>0.7181625962257385</c:v>
+                </c:pt>
+                <c:pt idx="71">
+                  <c:v>0.6720817685127258</c:v>
+                </c:pt>
+                <c:pt idx="72">
+                  <c:v>0.6625425219535828</c:v>
+                </c:pt>
+                <c:pt idx="73">
+                  <c:v>0.9026575088500977</c:v>
+                </c:pt>
+                <c:pt idx="74">
+                  <c:v>0.7012521624565125</c:v>
+                </c:pt>
+                <c:pt idx="75">
+                  <c:v>0.576267421245575</c:v>
+                </c:pt>
+                <c:pt idx="76">
+                  <c:v>0.6958467364311218</c:v>
+                </c:pt>
+                <c:pt idx="77">
+                  <c:v>0.6293869018554688</c:v>
+                </c:pt>
+                <c:pt idx="78">
+                  <c:v>0.7244704961776733</c:v>
+                </c:pt>
+                <c:pt idx="79">
+                  <c:v>0.506386935710907</c:v>
+                </c:pt>
+                <c:pt idx="80">
+                  <c:v>0.6705743670463562</c:v>
+                </c:pt>
+                <c:pt idx="81">
+                  <c:v>0.6940733194351196</c:v>
+                </c:pt>
+                <c:pt idx="82">
+                  <c:v>0.5925152897834778</c:v>
+                </c:pt>
+                <c:pt idx="83">
+                  <c:v>0.4370642602443695</c:v>
+                </c:pt>
+                <c:pt idx="84">
+                  <c:v>0.4757087230682373</c:v>
+                </c:pt>
+                <c:pt idx="85">
+                  <c:v>0.7262538075447083</c:v>
+                </c:pt>
+                <c:pt idx="86">
+                  <c:v>0.5676386952400208</c:v>
+                </c:pt>
+                <c:pt idx="87">
+                  <c:v>0.6170207262039185</c:v>
+                </c:pt>
+                <c:pt idx="88">
+                  <c:v>0.5042673945426941</c:v>
+                </c:pt>
+                <c:pt idx="89">
+                  <c:v>0.440173864364624</c:v>
+                </c:pt>
+                <c:pt idx="90">
+                  <c:v>0.42673876881599426</c:v>
+                </c:pt>
+                <c:pt idx="91">
+                  <c:v>0.4895144999027252</c:v>
+                </c:pt>
+                <c:pt idx="92">
+                  <c:v>0.7935603260993958</c:v>
+                </c:pt>
+                <c:pt idx="93">
+                  <c:v>0.5427626371383667</c:v>
+                </c:pt>
+                <c:pt idx="94">
+                  <c:v>0.5551331639289856</c:v>
+                </c:pt>
+                <c:pt idx="95">
+                  <c:v>0.6209218502044678</c:v>
+                </c:pt>
+                <c:pt idx="96">
+                  <c:v>0.5255848169326782</c:v>
+                </c:pt>
+                <c:pt idx="97">
+                  <c:v>0.4417687952518463</c:v>
+                </c:pt>
+                <c:pt idx="98">
+                  <c:v>0.5286199450492859</c:v>
+                </c:pt>
+                <c:pt idx="99">
+                  <c:v>0.6228020787239075</c:v>
+                </c:pt>
+                <c:pt idx="100">
+                  <c:v>0.49651235342025757</c:v>
+                </c:pt>
+                <c:pt idx="101">
+                  <c:v>0.4003590941429138</c:v>
+                </c:pt>
+                <c:pt idx="102">
+                  <c:v>0.4053182303905487</c:v>
+                </c:pt>
+                <c:pt idx="103">
+                  <c:v>0.5210577249526978</c:v>
+                </c:pt>
+                <c:pt idx="104">
+                  <c:v>0.5633171200752258</c:v>
+                </c:pt>
+                <c:pt idx="105">
+                  <c:v>0.45053234696388245</c:v>
+                </c:pt>
+                <c:pt idx="106">
+                  <c:v>0.5492932796478271</c:v>
+                </c:pt>
+                <c:pt idx="107">
+                  <c:v>0.47815656661987305</c:v>
+                </c:pt>
+                <c:pt idx="108">
+                  <c:v>0.5494276285171509</c:v>
+                </c:pt>
+                <c:pt idx="109">
+                  <c:v>0.38743653893470764</c:v>
+                </c:pt>
+                <c:pt idx="110">
+                  <c:v>0.4746885895729065</c:v>
+                </c:pt>
+                <c:pt idx="111">
+                  <c:v>0.6328152418136597</c:v>
+                </c:pt>
+                <c:pt idx="112">
+                  <c:v>0.5429799556732178</c:v>
+                </c:pt>
+                <c:pt idx="113">
+                  <c:v>0.40027686953544617</c:v>
+                </c:pt>
+                <c:pt idx="114">
+                  <c:v>0.5283844470977783</c:v>
+                </c:pt>
+                <c:pt idx="115">
+                  <c:v>0.39793288707733154</c:v>
+                </c:pt>
+                <c:pt idx="116">
+                  <c:v>0.4404173493385315</c:v>
+                </c:pt>
+                <c:pt idx="117">
+                  <c:v>0.5121740102767944</c:v>
+                </c:pt>
+                <c:pt idx="118">
+                  <c:v>0.5731610059738159</c:v>
+                </c:pt>
+                <c:pt idx="119">
+                  <c:v>0.5426590442657471</c:v>
+                </c:pt>
+                <c:pt idx="120">
+                  <c:v>0.5680711269378662</c:v>
+                </c:pt>
+                <c:pt idx="121">
+                  <c:v>0.4569605588912964</c:v>
+                </c:pt>
+                <c:pt idx="122">
+                  <c:v>0.47034817934036255</c:v>
+                </c:pt>
+                <c:pt idx="123">
+                  <c:v>0.41362980008125305</c:v>
+                </c:pt>
+                <c:pt idx="124">
+                  <c:v>0.277024507522583</c:v>
+                </c:pt>
+                <c:pt idx="125">
+                  <c:v>0.4429630637168884</c:v>
+                </c:pt>
+                <c:pt idx="126">
+                  <c:v>0.4789706766605377</c:v>
+                </c:pt>
+                <c:pt idx="127">
+                  <c:v>0.33369913697242737</c:v>
+                </c:pt>
+                <c:pt idx="128">
+                  <c:v>0.4174603819847107</c:v>
+                </c:pt>
+                <c:pt idx="129">
+                  <c:v>0.28486984968185425</c:v>
+                </c:pt>
+                <c:pt idx="130">
+                  <c:v>0.39277058839797974</c:v>
+                </c:pt>
+                <c:pt idx="131">
+                  <c:v>0.3265286386013031</c:v>
+                </c:pt>
+                <c:pt idx="132">
+                  <c:v>0.3989945948123932</c:v>
+                </c:pt>
+                <c:pt idx="133">
+                  <c:v>0.458082914352417</c:v>
+                </c:pt>
+                <c:pt idx="134">
+                  <c:v>0.4210624098777771</c:v>
+                </c:pt>
+                <c:pt idx="135">
+                  <c:v>0.3008286654949188</c:v>
+                </c:pt>
+                <c:pt idx="136">
+                  <c:v>0.3467192053794861</c:v>
+                </c:pt>
+                <c:pt idx="137">
+                  <c:v>0.33319899439811707</c:v>
+                </c:pt>
+                <c:pt idx="138">
+                  <c:v>0.41055262088775635</c:v>
+                </c:pt>
+                <c:pt idx="139">
+                  <c:v>0.4121587574481964</c:v>
+                </c:pt>
+                <c:pt idx="140">
+                  <c:v>0.3992982506752014</c:v>
+                </c:pt>
+                <c:pt idx="141">
+                  <c:v>0.25365209579467773</c:v>
+                </c:pt>
+                <c:pt idx="142">
+                  <c:v>0.5339560508728027</c:v>
+                </c:pt>
+                <c:pt idx="143">
+                  <c:v>0.41845574975013733</c:v>
+                </c:pt>
+                <c:pt idx="144">
+                  <c:v>0.5512003302574158</c:v>
+                </c:pt>
+                <c:pt idx="145">
+                  <c:v>0.6220194697380066</c:v>
+                </c:pt>
+                <c:pt idx="146">
+                  <c:v>0.4980643391609192</c:v>
+                </c:pt>
+                <c:pt idx="147">
+                  <c:v>0.300197035074234</c:v>
+                </c:pt>
+                <c:pt idx="148">
+                  <c:v>0.4010825455188751</c:v>
+                </c:pt>
+                <c:pt idx="149">
+                  <c:v>0.48600900173187256</c:v>
+                </c:pt>
+                <c:pt idx="150">
+                  <c:v>0.5985763072967529</c:v>
+                </c:pt>
+                <c:pt idx="151">
+                  <c:v>0.5420645475387573</c:v>
+                </c:pt>
+                <c:pt idx="152">
+                  <c:v>0.4472673535346985</c:v>
+                </c:pt>
+                <c:pt idx="153">
+                  <c:v>0.37010976672172546</c:v>
+                </c:pt>
+                <c:pt idx="154">
+                  <c:v>0.412883460521698</c:v>
+                </c:pt>
+                <c:pt idx="155">
+                  <c:v>0.5303714275360107</c:v>
+                </c:pt>
+                <c:pt idx="156">
+                  <c:v>0.35756322741508484</c:v>
+                </c:pt>
+                <c:pt idx="157">
+                  <c:v>0.4494258165359497</c:v>
+                </c:pt>
+                <c:pt idx="158">
+                  <c:v>0.2942168414592743</c:v>
+                </c:pt>
+                <c:pt idx="159">
+                  <c:v>0.2428925633430481</c:v>
+                </c:pt>
+                <c:pt idx="160">
+                  <c:v>0.3907972574234009</c:v>
+                </c:pt>
+                <c:pt idx="161">
+                  <c:v>0.361945241689682</c:v>
+                </c:pt>
+                <c:pt idx="162">
+                  <c:v>0.34257858991622925</c:v>
+                </c:pt>
+                <c:pt idx="163">
+                  <c:v>0.3013395667076111</c:v>
+                </c:pt>
+                <c:pt idx="164">
+                  <c:v>0.49613261222839355</c:v>
+                </c:pt>
+                <c:pt idx="165">
+                  <c:v>0.4244040846824646</c:v>
+                </c:pt>
+                <c:pt idx="166">
+                  <c:v>0.28745776414871216</c:v>
+                </c:pt>
+                <c:pt idx="167">
+                  <c:v>0.3840872049331665</c:v>
+                </c:pt>
+                <c:pt idx="168">
+                  <c:v>0.39906132221221924</c:v>
+                </c:pt>
+                <c:pt idx="169">
+                  <c:v>0.3684556782245636</c:v>
+                </c:pt>
+                <c:pt idx="170">
+                  <c:v>0.3180481791496277</c:v>
+                </c:pt>
+                <c:pt idx="171">
+                  <c:v>0.3758540451526642</c:v>
+                </c:pt>
+                <c:pt idx="172">
+                  <c:v>0.37695610523223877</c:v>
+                </c:pt>
+                <c:pt idx="173">
+                  <c:v>0.4208378493785858</c:v>
+                </c:pt>
+                <c:pt idx="174">
+                  <c:v>0.37275946140289307</c:v>
+                </c:pt>
+                <c:pt idx="175">
+                  <c:v>0.32508769631385803</c:v>
+                </c:pt>
+                <c:pt idx="176">
+                  <c:v>0.3423583209514618</c:v>
+                </c:pt>
+                <c:pt idx="177">
+                  <c:v>0.2969907522201538</c:v>
+                </c:pt>
+                <c:pt idx="178">
+                  <c:v>0.40334540605545044</c:v>
+                </c:pt>
+                <c:pt idx="179">
+                  <c:v>0.2761480212211609</c:v>
+                </c:pt>
+                <c:pt idx="180">
+                  <c:v>0.35134920477867126</c:v>
+                </c:pt>
+                <c:pt idx="181">
+                  <c:v>0.3536730706691742</c:v>
+                </c:pt>
+                <c:pt idx="182">
+                  <c:v>0.42120078206062317</c:v>
+                </c:pt>
+                <c:pt idx="183">
+                  <c:v>0.4458978474140167</c:v>
+                </c:pt>
+                <c:pt idx="184">
+                  <c:v>0.33503806591033936</c:v>
+                </c:pt>
+                <c:pt idx="185">
+                  <c:v>0.3541510999202728</c:v>
+                </c:pt>
+                <c:pt idx="186">
+                  <c:v>0.45738643407821655</c:v>
+                </c:pt>
+                <c:pt idx="187">
+                  <c:v>0.4092797338962555</c:v>
+                </c:pt>
+                <c:pt idx="188">
+                  <c:v>0.3843674957752228</c:v>
+                </c:pt>
+                <c:pt idx="189">
+                  <c:v>0.31482622027397156</c:v>
+                </c:pt>
+                <c:pt idx="190">
+                  <c:v>0.3755398988723755</c:v>
+                </c:pt>
+                <c:pt idx="191">
+                  <c:v>0.45984578132629395</c:v>
+                </c:pt>
+                <c:pt idx="192">
+                  <c:v>0.4228910803794861</c:v>
+                </c:pt>
+                <c:pt idx="193">
+                  <c:v>0.32582709193229675</c:v>
+                </c:pt>
+                <c:pt idx="194">
+                  <c:v>0.40240147709846497</c:v>
+                </c:pt>
+                <c:pt idx="195">
+                  <c:v>0.2910860776901245</c:v>
+                </c:pt>
+                <c:pt idx="196">
+                  <c:v>0.39708730578422546</c:v>
+                </c:pt>
+                <c:pt idx="197">
+                  <c:v>0.3256818950176239</c:v>
+                </c:pt>
+                <c:pt idx="198">
+                  <c:v>0.5256005525588989</c:v>
+                </c:pt>
+                <c:pt idx="199">
+                  <c:v>0.549227237701416</c:v>
+                </c:pt>
+              </c:numCache>
+            </c:numRef>
+          </c:val>
+          <c:smooth val="0"/>
+        </c:ser>
+        <c:ser>
+          <c:idx val="1"/>
+          <c:order val="1"/>
+          <c:tx>
+            <c:strRef>
+              <c:f>Sheet1!$C$1</c:f>
+              <c:strCache>
+                <c:ptCount val="1"/>
+                <c:pt idx="0">
+                  <c:v>bf16 head (ours)</c:v>
+                </c:pt>
+              </c:strCache>
+            </c:strRef>
+          </c:tx>
+          <c:spPr>
+            <a:solidFill>
+              <a:srgbClr val="76B900"/>
+            </a:solidFill>
+            <a:ln w="19050" cap="flat">
+              <a:solidFill>
+                <a:srgbClr val="76B900"/>
+              </a:solidFill>
+              <a:prstDash val="solid"/>
+              <a:round/>
+            </a:ln>
+            <a:effectLst/>
+          </c:spPr>
+          <c:invertIfNegative val="0"/>
+          <c:dLbls>
+            <c:numFmt formatCode="#,##0" sourceLinked="0"/>
+            <c:txPr>
+              <a:bodyPr/>
+              <a:lstStyle/>
+              <a:p>
+                <a:pPr>
+                  <a:defRPr b="0" i="0" strike="noStrike" sz="1200" u="none">
+                    <a:solidFill>
+                      <a:srgbClr val="000000"/>
+                    </a:solidFill>
+                    <a:latin typeface="Arial"/>
+                  </a:defRPr>
+                </a:pPr>
+              </a:p>
+            </c:txPr>
+            <c:showLegendKey val="0"/>
+            <c:showVal val="0"/>
+            <c:showCatName val="0"/>
+            <c:showSerName val="0"/>
+            <c:showPercent val="0"/>
+            <c:showBubbleSize val="0"/>
+            <c:showLeaderLines val="0"/>
+          </c:dLbls>
+          <c:marker>
+            <c:symbol val="none"/>
+            <c:size val="6"/>
+            <c:spPr>
+              <a:solidFill>
+                <a:srgbClr val="76B900"/>
+              </a:solidFill>
+              <a:ln w="9525" cap="flat">
+                <a:solidFill>
+                  <a:srgbClr val="76B900"/>
+                </a:solidFill>
+                <a:prstDash val="solid"/>
+                <a:round/>
+              </a:ln>
+              <a:effectLst/>
+            </c:spPr>
+          </c:marker>
+          <c:cat>
+            <c:multiLvlStrRef>
+              <c:f>Sheet1!$A$2:$A$201</c:f>
+              <c:multiLvlStrCache>
+                <c:ptCount val="200"/>
+                <c:lvl>
+                  <c:pt idx="0">
+                    <c:v>1</c:v>
+                  </c:pt>
+                  <c:pt idx="1">
+                    <c:v>2</c:v>
+                  </c:pt>
+                  <c:pt idx="2">
+                    <c:v>3</c:v>
+                  </c:pt>
+                  <c:pt idx="3">
+                    <c:v>4</c:v>
+                  </c:pt>
+                  <c:pt idx="4">
+                    <c:v>5</c:v>
+                  </c:pt>
+                  <c:pt idx="5">
+                    <c:v>6</c:v>
+                  </c:pt>
+                  <c:pt idx="6">
+                    <c:v>7</c:v>
+                  </c:pt>
+                  <c:pt idx="7">
+                    <c:v>8</c:v>
+                  </c:pt>
+                  <c:pt idx="8">
+                    <c:v>9</c:v>
+                  </c:pt>
+                  <c:pt idx="9">
+                    <c:v>10</c:v>
+                  </c:pt>
+                  <c:pt idx="10">
+                    <c:v>11</c:v>
+                  </c:pt>
+                  <c:pt idx="11">
+                    <c:v>12</c:v>
+                  </c:pt>
+                  <c:pt idx="12">
+                    <c:v>13</c:v>
+                  </c:pt>
+                  <c:pt idx="13">
+                    <c:v>14</c:v>
+                  </c:pt>
+                  <c:pt idx="14">
+                    <c:v>15</c:v>
+                  </c:pt>
+                  <c:pt idx="15">
+                    <c:v>16</c:v>
+                  </c:pt>
+                  <c:pt idx="16">
+                    <c:v>17</c:v>
+                  </c:pt>
+                  <c:pt idx="17">
+                    <c:v>18</c:v>
+                  </c:pt>
+                  <c:pt idx="18">
+                    <c:v>19</c:v>
+                  </c:pt>
+                  <c:pt idx="19">
+                    <c:v>20</c:v>
+                  </c:pt>
+                  <c:pt idx="20">
+                    <c:v>21</c:v>
+                  </c:pt>
+                  <c:pt idx="21">
+                    <c:v>22</c:v>
+                  </c:pt>
+                  <c:pt idx="22">
+                    <c:v>23</c:v>
+                  </c:pt>
+                  <c:pt idx="23">
+                    <c:v>24</c:v>
+                  </c:pt>
+                  <c:pt idx="24">
+                    <c:v>25</c:v>
+                  </c:pt>
+                  <c:pt idx="25">
+                    <c:v>26</c:v>
+                  </c:pt>
+                  <c:pt idx="26">
+                    <c:v>27</c:v>
+                  </c:pt>
+                  <c:pt idx="27">
+                    <c:v>28</c:v>
+                  </c:pt>
+                  <c:pt idx="28">
+                    <c:v>29</c:v>
+                  </c:pt>
+                  <c:pt idx="29">
+                    <c:v>30</c:v>
+                  </c:pt>
+                  <c:pt idx="30">
+                    <c:v>31</c:v>
+                  </c:pt>
+                  <c:pt idx="31">
+                    <c:v>32</c:v>
+                  </c:pt>
+                  <c:pt idx="32">
+                    <c:v>33</c:v>
+                  </c:pt>
+                  <c:pt idx="33">
+                    <c:v>34</c:v>
+                  </c:pt>
+                  <c:pt idx="34">
+                    <c:v>35</c:v>
+                  </c:pt>
+                  <c:pt idx="35">
+                    <c:v>36</c:v>
+                  </c:pt>
+                  <c:pt idx="36">
+                    <c:v>37</c:v>
+                  </c:pt>
+                  <c:pt idx="37">
+                    <c:v>38</c:v>
+                  </c:pt>
+                  <c:pt idx="38">
+                    <c:v>39</c:v>
+                  </c:pt>
+                  <c:pt idx="39">
+                    <c:v>40</c:v>
+                  </c:pt>
+                  <c:pt idx="40">
+                    <c:v>41</c:v>
+                  </c:pt>
+                  <c:pt idx="41">
+                    <c:v>42</c:v>
+                  </c:pt>
+                  <c:pt idx="42">
+                    <c:v>43</c:v>
+                  </c:pt>
+                  <c:pt idx="43">
+                    <c:v>44</c:v>
+                  </c:pt>
+                  <c:pt idx="44">
+                    <c:v>45</c:v>
+                  </c:pt>
+                  <c:pt idx="45">
+                    <c:v>46</c:v>
+                  </c:pt>
+                  <c:pt idx="46">
+                    <c:v>47</c:v>
+                  </c:pt>
+                  <c:pt idx="47">
+                    <c:v>48</c:v>
+                  </c:pt>
+                  <c:pt idx="48">
+                    <c:v>49</c:v>
+                  </c:pt>
+                  <c:pt idx="49">
+                    <c:v>50</c:v>
+                  </c:pt>
+                  <c:pt idx="50">
+                    <c:v>51</c:v>
+                  </c:pt>
+                  <c:pt idx="51">
+                    <c:v>52</c:v>
+                  </c:pt>
+                  <c:pt idx="52">
+                    <c:v>53</c:v>
+                  </c:pt>
+                  <c:pt idx="53">
+                    <c:v>54</c:v>
+                  </c:pt>
+                  <c:pt idx="54">
+                    <c:v>55</c:v>
+                  </c:pt>
+                  <c:pt idx="55">
+                    <c:v>56</c:v>
+                  </c:pt>
+                  <c:pt idx="56">
+                    <c:v>57</c:v>
+                  </c:pt>
+                  <c:pt idx="57">
+                    <c:v>58</c:v>
+                  </c:pt>
+                  <c:pt idx="58">
+                    <c:v>59</c:v>
+                  </c:pt>
+                  <c:pt idx="59">
+                    <c:v>60</c:v>
+                  </c:pt>
+                  <c:pt idx="60">
+                    <c:v>61</c:v>
+                  </c:pt>
+                  <c:pt idx="61">
+                    <c:v>62</c:v>
+                  </c:pt>
+                  <c:pt idx="62">
+                    <c:v>63</c:v>
+                  </c:pt>
+                  <c:pt idx="63">
+                    <c:v>64</c:v>
+                  </c:pt>
+                  <c:pt idx="64">
+                    <c:v>65</c:v>
+                  </c:pt>
+                  <c:pt idx="65">
+                    <c:v>66</c:v>
+                  </c:pt>
+                  <c:pt idx="66">
+                    <c:v>67</c:v>
+                  </c:pt>
+                  <c:pt idx="67">
+                    <c:v>68</c:v>
+                  </c:pt>
+                  <c:pt idx="68">
+                    <c:v>69</c:v>
+                  </c:pt>
+                  <c:pt idx="69">
+                    <c:v>70</c:v>
+                  </c:pt>
+                  <c:pt idx="70">
+                    <c:v>71</c:v>
+                  </c:pt>
+                  <c:pt idx="71">
+                    <c:v>72</c:v>
+                  </c:pt>
+                  <c:pt idx="72">
+                    <c:v>73</c:v>
+                  </c:pt>
+                  <c:pt idx="73">
+                    <c:v>74</c:v>
+                  </c:pt>
+                  <c:pt idx="74">
+                    <c:v>75</c:v>
+                  </c:pt>
+                  <c:pt idx="75">
+                    <c:v>76</c:v>
+                  </c:pt>
+                  <c:pt idx="76">
+                    <c:v>77</c:v>
+                  </c:pt>
+                  <c:pt idx="77">
+                    <c:v>78</c:v>
+                  </c:pt>
+                  <c:pt idx="78">
+                    <c:v>79</c:v>
+                  </c:pt>
+                  <c:pt idx="79">
+                    <c:v>80</c:v>
+                  </c:pt>
+                  <c:pt idx="80">
+                    <c:v>81</c:v>
+                  </c:pt>
+                  <c:pt idx="81">
+                    <c:v>82</c:v>
+                  </c:pt>
+                  <c:pt idx="82">
+                    <c:v>83</c:v>
+                  </c:pt>
+                  <c:pt idx="83">
+                    <c:v>84</c:v>
+                  </c:pt>
+                  <c:pt idx="84">
+                    <c:v>85</c:v>
+                  </c:pt>
+                  <c:pt idx="85">
+                    <c:v>86</c:v>
+                  </c:pt>
+                  <c:pt idx="86">
+                    <c:v>87</c:v>
+                  </c:pt>
+                  <c:pt idx="87">
+                    <c:v>88</c:v>
+                  </c:pt>
+                  <c:pt idx="88">
+                    <c:v>89</c:v>
+                  </c:pt>
+                  <c:pt idx="89">
+                    <c:v>90</c:v>
+                  </c:pt>
+                  <c:pt idx="90">
+                    <c:v>91</c:v>
+                  </c:pt>
+                  <c:pt idx="91">
+                    <c:v>92</c:v>
+                  </c:pt>
+                  <c:pt idx="92">
+                    <c:v>93</c:v>
+                  </c:pt>
+                  <c:pt idx="93">
+                    <c:v>94</c:v>
+                  </c:pt>
+                  <c:pt idx="94">
+                    <c:v>95</c:v>
+                  </c:pt>
+                  <c:pt idx="95">
+                    <c:v>96</c:v>
+                  </c:pt>
+                  <c:pt idx="96">
+                    <c:v>97</c:v>
+                  </c:pt>
+                  <c:pt idx="97">
+                    <c:v>98</c:v>
+                  </c:pt>
+                  <c:pt idx="98">
+                    <c:v>99</c:v>
+                  </c:pt>
+                  <c:pt idx="99">
+                    <c:v>100</c:v>
+                  </c:pt>
+                  <c:pt idx="100">
+                    <c:v>101</c:v>
+                  </c:pt>
+                  <c:pt idx="101">
+                    <c:v>102</c:v>
+                  </c:pt>
+                  <c:pt idx="102">
+                    <c:v>103</c:v>
+                  </c:pt>
+                  <c:pt idx="103">
+                    <c:v>104</c:v>
+                  </c:pt>
+                  <c:pt idx="104">
+                    <c:v>105</c:v>
+                  </c:pt>
+                  <c:pt idx="105">
+                    <c:v>106</c:v>
+                  </c:pt>
+                  <c:pt idx="106">
+                    <c:v>107</c:v>
+                  </c:pt>
+                  <c:pt idx="107">
+                    <c:v>108</c:v>
+                  </c:pt>
+                  <c:pt idx="108">
+                    <c:v>109</c:v>
+                  </c:pt>
+                  <c:pt idx="109">
+                    <c:v>110</c:v>
+                  </c:pt>
+                  <c:pt idx="110">
+                    <c:v>111</c:v>
+                  </c:pt>
+                  <c:pt idx="111">
+                    <c:v>112</c:v>
+                  </c:pt>
+                  <c:pt idx="112">
+                    <c:v>113</c:v>
+                  </c:pt>
+                  <c:pt idx="113">
+                    <c:v>114</c:v>
+                  </c:pt>
+                  <c:pt idx="114">
+                    <c:v>115</c:v>
+                  </c:pt>
+                  <c:pt idx="115">
+                    <c:v>116</c:v>
+                  </c:pt>
+                  <c:pt idx="116">
+                    <c:v>117</c:v>
+                  </c:pt>
+                  <c:pt idx="117">
+                    <c:v>118</c:v>
+                  </c:pt>
+                  <c:pt idx="118">
+                    <c:v>119</c:v>
+                  </c:pt>
+                  <c:pt idx="119">
+                    <c:v>120</c:v>
+                  </c:pt>
+                  <c:pt idx="120">
+                    <c:v>121</c:v>
+                  </c:pt>
+                  <c:pt idx="121">
+                    <c:v>122</c:v>
+                  </c:pt>
+                  <c:pt idx="122">
+                    <c:v>123</c:v>
+                  </c:pt>
+                  <c:pt idx="123">
+                    <c:v>124</c:v>
+                  </c:pt>
+                  <c:pt idx="124">
+                    <c:v>125</c:v>
+                  </c:pt>
+                  <c:pt idx="125">
+                    <c:v>126</c:v>
+                  </c:pt>
+                  <c:pt idx="126">
+                    <c:v>127</c:v>
+                  </c:pt>
+                  <c:pt idx="127">
+                    <c:v>128</c:v>
+                  </c:pt>
+                  <c:pt idx="128">
+                    <c:v>129</c:v>
+                  </c:pt>
+                  <c:pt idx="129">
+                    <c:v>130</c:v>
+                  </c:pt>
+                  <c:pt idx="130">
+                    <c:v>131</c:v>
+                  </c:pt>
+                  <c:pt idx="131">
+                    <c:v>132</c:v>
+                  </c:pt>
+                  <c:pt idx="132">
+                    <c:v>133</c:v>
+                  </c:pt>
+                  <c:pt idx="133">
+                    <c:v>134</c:v>
+                  </c:pt>
+                  <c:pt idx="134">
+                    <c:v>135</c:v>
+                  </c:pt>
+                  <c:pt idx="135">
+                    <c:v>136</c:v>
+                  </c:pt>
+                  <c:pt idx="136">
+                    <c:v>137</c:v>
+                  </c:pt>
+                  <c:pt idx="137">
+                    <c:v>138</c:v>
+                  </c:pt>
+                  <c:pt idx="138">
+                    <c:v>139</c:v>
+                  </c:pt>
+                  <c:pt idx="139">
+                    <c:v>140</c:v>
+                  </c:pt>
+                  <c:pt idx="140">
+                    <c:v>141</c:v>
+                  </c:pt>
+                  <c:pt idx="141">
+                    <c:v>142</c:v>
+                  </c:pt>
+                  <c:pt idx="142">
+                    <c:v>143</c:v>
+                  </c:pt>
+                  <c:pt idx="143">
+                    <c:v>144</c:v>
+                  </c:pt>
+                  <c:pt idx="144">
+                    <c:v>145</c:v>
+                  </c:pt>
+                  <c:pt idx="145">
+                    <c:v>146</c:v>
+                  </c:pt>
+                  <c:pt idx="146">
+                    <c:v>147</c:v>
+                  </c:pt>
+                  <c:pt idx="147">
+                    <c:v>148</c:v>
+                  </c:pt>
+                  <c:pt idx="148">
+                    <c:v>149</c:v>
+                  </c:pt>
+                  <c:pt idx="149">
+                    <c:v>150</c:v>
+                  </c:pt>
+                  <c:pt idx="150">
+                    <c:v>151</c:v>
+                  </c:pt>
+                  <c:pt idx="151">
+                    <c:v>152</c:v>
+                  </c:pt>
+                  <c:pt idx="152">
+                    <c:v>153</c:v>
+                  </c:pt>
+                  <c:pt idx="153">
+                    <c:v>154</c:v>
+                  </c:pt>
+                  <c:pt idx="154">
+                    <c:v>155</c:v>
+                  </c:pt>
+                  <c:pt idx="155">
+                    <c:v>156</c:v>
+                  </c:pt>
+                  <c:pt idx="156">
+                    <c:v>157</c:v>
+                  </c:pt>
+                  <c:pt idx="157">
+                    <c:v>158</c:v>
+                  </c:pt>
+                  <c:pt idx="158">
+                    <c:v>159</c:v>
+                  </c:pt>
+                  <c:pt idx="159">
+                    <c:v>160</c:v>
+                  </c:pt>
+                  <c:pt idx="160">
+                    <c:v>161</c:v>
+                  </c:pt>
+                  <c:pt idx="161">
+                    <c:v>162</c:v>
+                  </c:pt>
+                  <c:pt idx="162">
+                    <c:v>163</c:v>
+                  </c:pt>
+                  <c:pt idx="163">
+                    <c:v>164</c:v>
+                  </c:pt>
+                  <c:pt idx="164">
+                    <c:v>165</c:v>
+                  </c:pt>
+                  <c:pt idx="165">
+                    <c:v>166</c:v>
+                  </c:pt>
+                  <c:pt idx="166">
+                    <c:v>167</c:v>
+                  </c:pt>
+                  <c:pt idx="167">
+                    <c:v>168</c:v>
+                  </c:pt>
+                  <c:pt idx="168">
+                    <c:v>169</c:v>
+                  </c:pt>
+                  <c:pt idx="169">
+                    <c:v>170</c:v>
+                  </c:pt>
+                  <c:pt idx="170">
+                    <c:v>171</c:v>
+                  </c:pt>
+                  <c:pt idx="171">
+                    <c:v>172</c:v>
+                  </c:pt>
+                  <c:pt idx="172">
+                    <c:v>173</c:v>
+                  </c:pt>
+                  <c:pt idx="173">
+                    <c:v>174</c:v>
+                  </c:pt>
+                  <c:pt idx="174">
+                    <c:v>175</c:v>
+                  </c:pt>
+                  <c:pt idx="175">
+                    <c:v>176</c:v>
+                  </c:pt>
+                  <c:pt idx="176">
+                    <c:v>177</c:v>
+                  </c:pt>
+                  <c:pt idx="177">
+                    <c:v>178</c:v>
+                  </c:pt>
+                  <c:pt idx="178">
+                    <c:v>179</c:v>
+                  </c:pt>
+                  <c:pt idx="179">
+                    <c:v>180</c:v>
+                  </c:pt>
+                  <c:pt idx="180">
+                    <c:v>181</c:v>
+                  </c:pt>
+                  <c:pt idx="181">
+                    <c:v>182</c:v>
+                  </c:pt>
+                  <c:pt idx="182">
+                    <c:v>183</c:v>
+                  </c:pt>
+                  <c:pt idx="183">
+                    <c:v>184</c:v>
+                  </c:pt>
+                  <c:pt idx="184">
+                    <c:v>185</c:v>
+                  </c:pt>
+                  <c:pt idx="185">
+                    <c:v>186</c:v>
+                  </c:pt>
+                  <c:pt idx="186">
+                    <c:v>187</c:v>
+                  </c:pt>
+                  <c:pt idx="187">
+                    <c:v>188</c:v>
+                  </c:pt>
+                  <c:pt idx="188">
+                    <c:v>189</c:v>
+                  </c:pt>
+                  <c:pt idx="189">
+                    <c:v>190</c:v>
+                  </c:pt>
+                  <c:pt idx="190">
+                    <c:v>191</c:v>
+                  </c:pt>
+                  <c:pt idx="191">
+                    <c:v>192</c:v>
+                  </c:pt>
+                  <c:pt idx="192">
+                    <c:v>193</c:v>
+                  </c:pt>
+                  <c:pt idx="193">
+                    <c:v>194</c:v>
+                  </c:pt>
+                  <c:pt idx="194">
+                    <c:v>195</c:v>
+                  </c:pt>
+                  <c:pt idx="195">
+                    <c:v>196</c:v>
+                  </c:pt>
+                  <c:pt idx="196">
+                    <c:v>197</c:v>
+                  </c:pt>
+                  <c:pt idx="197">
+                    <c:v>198</c:v>
+                  </c:pt>
+                  <c:pt idx="198">
+                    <c:v>199</c:v>
+                  </c:pt>
+                  <c:pt idx="199">
+                    <c:v>200</c:v>
+                  </c:pt>
+                </c:lvl>
+              </c:multiLvlStrCache>
+            </c:multiLvlStrRef>
+          </c:cat>
+          <c:val>
+            <c:numRef>
+              <c:f>Sheet1!$C$2:$C$201</c:f>
+              <c:numCache>
+                <c:formatCode>General</c:formatCode>
+                <c:ptCount val="200"/>
+                <c:pt idx="0">
+                  <c:v>1.465155005455017</c:v>
+                </c:pt>
+                <c:pt idx="1">
+                  <c:v>1.527807354927063</c:v>
+                </c:pt>
+                <c:pt idx="2">
+                  <c:v>1.3628437519073486</c:v>
+                </c:pt>
+                <c:pt idx="3">
+                  <c:v>1.5220792293548584</c:v>
+                </c:pt>
+                <c:pt idx="4">
+                  <c:v>1.4716393947601318</c:v>
+                </c:pt>
+                <c:pt idx="5">
+                  <c:v>1.5187989473342896</c:v>
+                </c:pt>
+                <c:pt idx="6">
+                  <c:v>1.4824644327163696</c:v>
+                </c:pt>
+                <c:pt idx="7">
+                  <c:v>1.3255268335342407</c:v>
+                </c:pt>
+                <c:pt idx="8">
+                  <c:v>1.4813257455825806</c:v>
+                </c:pt>
+                <c:pt idx="9">
+                  <c:v>1.4202228784561157</c:v>
+                </c:pt>
+                <c:pt idx="10">
+                  <c:v>1.491762399673462</c:v>
+                </c:pt>
+                <c:pt idx="11">
+                  <c:v>1.399654507637024</c:v>
+                </c:pt>
+                <c:pt idx="12">
+                  <c:v>1.3932831287384033</c:v>
+                </c:pt>
+                <c:pt idx="13">
+                  <c:v>1.463102102279663</c:v>
+                </c:pt>
+                <c:pt idx="14">
+                  <c:v>1.4037917852401733</c:v>
+                </c:pt>
+                <c:pt idx="15">
+                  <c:v>1.3404589891433716</c:v>
+                </c:pt>
+                <c:pt idx="16">
+                  <c:v>1.4142731428146362</c:v>
+                </c:pt>
+                <c:pt idx="17">
+                  <c:v>1.4359033107757568</c:v>
+                </c:pt>
+                <c:pt idx="18">
+                  <c:v>1.345100998878479</c:v>
+                </c:pt>
+                <c:pt idx="19">
+                  <c:v>1.4391796588897705</c:v>
+                </c:pt>
+                <c:pt idx="20">
+                  <c:v>1.3422189950942993</c:v>
+                </c:pt>
+                <c:pt idx="21">
+                  <c:v>1.1635000705718994</c:v>
+                </c:pt>
+                <c:pt idx="22">
+                  <c:v>1.1843440532684326</c:v>
+                </c:pt>
+                <c:pt idx="23">
+                  <c:v>1.2705446481704712</c:v>
+                </c:pt>
+                <c:pt idx="24">
+                  <c:v>1.2976986169815063</c:v>
+                </c:pt>
+                <c:pt idx="25">
+                  <c:v>1.191056728363037</c:v>
+                </c:pt>
+                <c:pt idx="26">
+                  <c:v>1.223349928855896</c:v>
+                </c:pt>
+                <c:pt idx="27">
+                  <c:v>1.2169265747070312</c:v>
+                </c:pt>
+                <c:pt idx="28">
+                  <c:v>1.1450639963150024</c:v>
+                </c:pt>
+                <c:pt idx="29">
+                  <c:v>1.2156018018722534</c:v>
+                </c:pt>
+                <c:pt idx="30">
+                  <c:v>1.304185390472412</c:v>
+                </c:pt>
+                <c:pt idx="31">
+                  <c:v>1.3705390691757202</c:v>
+                </c:pt>
+                <c:pt idx="32">
+                  <c:v>1.3352845907211304</c:v>
+                </c:pt>
+                <c:pt idx="33">
+                  <c:v>1.3373385667800903</c:v>
+                </c:pt>
+                <c:pt idx="34">
+                  <c:v>1.4037827253341675</c:v>
+                </c:pt>
+                <c:pt idx="35">
+                  <c:v>1.38241708278656</c:v>
+                </c:pt>
+                <c:pt idx="36">
+                  <c:v>1.1816176176071167</c:v>
+                </c:pt>
+                <c:pt idx="37">
+                  <c:v>1.2873611450195312</c:v>
+                </c:pt>
+                <c:pt idx="38">
+                  <c:v>1.23562753200531</c:v>
+                </c:pt>
+                <c:pt idx="39">
+                  <c:v>1.2019615173339844</c:v>
+                </c:pt>
+                <c:pt idx="40">
+                  <c:v>1.219366431236267</c:v>
+                </c:pt>
+                <c:pt idx="41">
+                  <c:v>1.074249267578125</c:v>
+                </c:pt>
+                <c:pt idx="42">
+                  <c:v>1.1439054012298584</c:v>
+                </c:pt>
+                <c:pt idx="43">
+                  <c:v>1.0747532844543457</c:v>
+                </c:pt>
+                <c:pt idx="44">
+                  <c:v>1.1052860021591187</c:v>
+                </c:pt>
+                <c:pt idx="45">
+                  <c:v>1.1588023900985718</c:v>
+                </c:pt>
+                <c:pt idx="46">
+                  <c:v>1.0616199970245361</c:v>
+                </c:pt>
+                <c:pt idx="47">
+                  <c:v>1.0234163999557495</c:v>
+                </c:pt>
+                <c:pt idx="48">
+                  <c:v>1.08656907081604</c:v>
+                </c:pt>
+                <c:pt idx="49">
+                  <c:v>1.1343998908996582</c:v>
+                </c:pt>
+                <c:pt idx="50">
+                  <c:v>1.0879141092300415</c:v>
+                </c:pt>
+                <c:pt idx="51">
+                  <c:v>1.056355357170105</c:v>
+                </c:pt>
+                <c:pt idx="52">
+                  <c:v>1.0624960660934448</c:v>
+                </c:pt>
+                <c:pt idx="53">
+                  <c:v>0.99652099609375</c:v>
+                </c:pt>
+                <c:pt idx="54">
+                  <c:v>1.0177422761917114</c:v>
+                </c:pt>
+                <c:pt idx="55">
+                  <c:v>1.08455228805542</c:v>
+                </c:pt>
+                <c:pt idx="56">
+                  <c:v>0.8973181843757629</c:v>
+                </c:pt>
+                <c:pt idx="57">
+                  <c:v>1.0486016273498535</c:v>
+                </c:pt>
+                <c:pt idx="58">
+                  <c:v>0.8536514043807983</c:v>
+                </c:pt>
+                <c:pt idx="59">
+                  <c:v>0.9738008379936218</c:v>
+                </c:pt>
+                <c:pt idx="60">
+                  <c:v>0.7710896134376526</c:v>
+                </c:pt>
+                <c:pt idx="61">
+                  <c:v>0.754205048084259</c:v>
+                </c:pt>
+                <c:pt idx="62">
+                  <c:v>0.8546945452690125</c:v>
+                </c:pt>
+                <c:pt idx="63">
+                  <c:v>0.9045367240905762</c:v>
+                </c:pt>
+                <c:pt idx="64">
+                  <c:v>0.680715024471283</c:v>
+                </c:pt>
+                <c:pt idx="65">
+                  <c:v>0.7250732183456421</c:v>
+                </c:pt>
+                <c:pt idx="66">
+                  <c:v>0.7675344347953796</c:v>
+                </c:pt>
+                <c:pt idx="67">
+                  <c:v>0.8586694002151489</c:v>
+                </c:pt>
+                <c:pt idx="68">
+                  <c:v>0.8278751969337463</c:v>
+                </c:pt>
+                <c:pt idx="69">
+                  <c:v>0.7105873823165894</c:v>
+                </c:pt>
+                <c:pt idx="70">
+                  <c:v>0.7219622731208801</c:v>
+                </c:pt>
+                <c:pt idx="71">
+                  <c:v>0.7096927165985107</c:v>
+                </c:pt>
+                <c:pt idx="72">
+                  <c:v>0.7293614149093628</c:v>
+                </c:pt>
+                <c:pt idx="73">
+                  <c:v>0.8888590931892395</c:v>
+                </c:pt>
+                <c:pt idx="74">
+                  <c:v>0.7104019522666931</c:v>
+                </c:pt>
+                <c:pt idx="75">
+                  <c:v>0.596458375453949</c:v>
+                </c:pt>
+                <c:pt idx="76">
+                  <c:v>0.682534396648407</c:v>
+                </c:pt>
+                <c:pt idx="77">
+                  <c:v>0.6755549907684326</c:v>
+                </c:pt>
+                <c:pt idx="78">
+                  <c:v>0.7193437814712524</c:v>
+                </c:pt>
+                <c:pt idx="79">
+                  <c:v>0.4839799404144287</c:v>
+                </c:pt>
+                <c:pt idx="80">
+                  <c:v>0.6186338663101196</c:v>
+                </c:pt>
+                <c:pt idx="81">
+                  <c:v>0.7172577977180481</c:v>
+                </c:pt>
+                <c:pt idx="82">
+                  <c:v>0.5846574902534485</c:v>
+                </c:pt>
+                <c:pt idx="83">
+                  <c:v>0.4026309549808502</c:v>
+                </c:pt>
+                <c:pt idx="84">
+                  <c:v>0.5094608664512634</c:v>
+                </c:pt>
+                <c:pt idx="85">
+                  <c:v>0.7257950901985168</c:v>
+                </c:pt>
+                <c:pt idx="86">
+                  <c:v>0.6342362761497498</c:v>
+                </c:pt>
+                <c:pt idx="87">
+                  <c:v>0.619391143321991</c:v>
+                </c:pt>
+                <c:pt idx="88">
+                  <c:v>0.5479902029037476</c:v>
+                </c:pt>
+                <c:pt idx="89">
+                  <c:v>0.4767726957798004</c:v>
+                </c:pt>
+                <c:pt idx="90">
+                  <c:v>0.4450841248035431</c:v>
+                </c:pt>
+                <c:pt idx="91">
+                  <c:v>0.4809007942676544</c:v>
+                </c:pt>
+                <c:pt idx="92">
+                  <c:v>0.7850342392921448</c:v>
+                </c:pt>
+                <c:pt idx="93">
+                  <c:v>0.5081256628036499</c:v>
+                </c:pt>
+                <c:pt idx="94">
+                  <c:v>0.5720846056938171</c:v>
+                </c:pt>
+                <c:pt idx="95">
+                  <c:v>0.6291945576667786</c:v>
+                </c:pt>
+                <c:pt idx="96">
+                  <c:v>0.520616888999939</c:v>
+                </c:pt>
+                <c:pt idx="97">
+                  <c:v>0.4715297520160675</c:v>
+                </c:pt>
+                <c:pt idx="98">
+                  <c:v>0.5869253873825073</c:v>
+                </c:pt>
+                <c:pt idx="99">
+                  <c:v>0.6197689771652222</c:v>
+                </c:pt>
+                <c:pt idx="100">
+                  <c:v>0.4962628483772278</c:v>
+                </c:pt>
+                <c:pt idx="101">
+                  <c:v>0.41832593083381653</c:v>
+                </c:pt>
+                <c:pt idx="102">
+                  <c:v>0.42151695489883423</c:v>
+                </c:pt>
+                <c:pt idx="103">
+                  <c:v>0.5117307305335999</c:v>
+                </c:pt>
+                <c:pt idx="104">
+                  <c:v>0.6144604086875916</c:v>
+                </c:pt>
+                <c:pt idx="105">
+                  <c:v>0.4910159409046173</c:v>
+                </c:pt>
+                <c:pt idx="106">
+                  <c:v>0.5178858041763306</c:v>
+                </c:pt>
+                <c:pt idx="107">
+                  <c:v>0.49383240938186646</c:v>
+                </c:pt>
+                <c:pt idx="108">
+                  <c:v>0.5756239891052246</c:v>
+                </c:pt>
+                <c:pt idx="109">
+                  <c:v>0.38393256068229675</c:v>
+                </c:pt>
+                <c:pt idx="110">
+                  <c:v>0.46590739488601685</c:v>
+                </c:pt>
+                <c:pt idx="111">
+                  <c:v>0.6281192302703857</c:v>
+                </c:pt>
+                <c:pt idx="112">
+                  <c:v>0.5689648389816284</c:v>
+                </c:pt>
+                <c:pt idx="113">
+                  <c:v>0.42764970660209656</c:v>
+                </c:pt>
+                <c:pt idx="114">
+                  <c:v>0.5116689801216125</c:v>
+                </c:pt>
+                <c:pt idx="115">
+                  <c:v>0.4103582501411438</c:v>
+                </c:pt>
+                <c:pt idx="116">
+                  <c:v>0.4663859009742737</c:v>
+                </c:pt>
+                <c:pt idx="117">
+                  <c:v>0.509663999080658</c:v>
+                </c:pt>
+                <c:pt idx="118">
+                  <c:v>0.5823853015899658</c:v>
+                </c:pt>
+                <c:pt idx="119">
+                  <c:v>0.5869860649108887</c:v>
+                </c:pt>
+                <c:pt idx="120">
+                  <c:v>0.5985053181648254</c:v>
+                </c:pt>
+                <c:pt idx="121">
+                  <c:v>0.5091955661773682</c:v>
+                </c:pt>
+                <c:pt idx="122">
+                  <c:v>0.5158333778381348</c:v>
+                </c:pt>
+                <c:pt idx="123">
+                  <c:v>0.5115501284599304</c:v>
+                </c:pt>
+                <c:pt idx="124">
+                  <c:v>0.3136970102787018</c:v>
+                </c:pt>
+                <c:pt idx="125">
+                  <c:v>0.472554475069046</c:v>
+                </c:pt>
+                <c:pt idx="126">
+                  <c:v>0.531713604927063</c:v>
+                </c:pt>
+                <c:pt idx="127">
+                  <c:v>0.38213256001472473</c:v>
+                </c:pt>
+                <c:pt idx="128">
+                  <c:v>0.4093846082687378</c:v>
+                </c:pt>
+                <c:pt idx="129">
+                  <c:v>0.34901130199432373</c:v>
+                </c:pt>
+                <c:pt idx="130">
+                  <c:v>0.40694695711135864</c:v>
+                </c:pt>
+                <c:pt idx="131">
+                  <c:v>0.35102954506874084</c:v>
+                </c:pt>
+                <c:pt idx="132">
+                  <c:v>0.41812950372695923</c:v>
+                </c:pt>
+                <c:pt idx="133">
+                  <c:v>0.48658615350723267</c:v>
+                </c:pt>
+                <c:pt idx="134">
+                  <c:v>0.43211960792541504</c:v>
+                </c:pt>
+                <c:pt idx="135">
+                  <c:v>0.37473809719085693</c:v>
+                </c:pt>
+                <c:pt idx="136">
+                  <c:v>0.33452707529067993</c:v>
+                </c:pt>
+                <c:pt idx="137">
+                  <c:v>0.3288687765598297</c:v>
+                </c:pt>
+                <c:pt idx="138">
+                  <c:v>0.4246358275413513</c:v>
+                </c:pt>
+                <c:pt idx="139">
+                  <c:v>0.3815311789512634</c:v>
+                </c:pt>
+                <c:pt idx="140">
+                  <c:v>0.4051056206226349</c:v>
+                </c:pt>
+                <c:pt idx="141">
+                  <c:v>0.31288713216781616</c:v>
+                </c:pt>
+                <c:pt idx="142">
+                  <c:v>0.5543596744537354</c:v>
+                </c:pt>
+                <c:pt idx="143">
+                  <c:v>0.45895567536354065</c:v>
+                </c:pt>
+                <c:pt idx="144">
+                  <c:v>0.5271095037460327</c:v>
+                </c:pt>
+                <c:pt idx="145">
+                  <c:v>0.5404824018478394</c:v>
+                </c:pt>
+                <c:pt idx="146">
+                  <c:v>0.5058889389038086</c:v>
+                </c:pt>
+                <c:pt idx="147">
+                  <c:v>0.3063453435897827</c:v>
+                </c:pt>
+                <c:pt idx="148">
+                  <c:v>0.4148329198360443</c:v>
+                </c:pt>
+                <c:pt idx="149">
+                  <c:v>0.45329463481903076</c:v>
+                </c:pt>
+                <c:pt idx="150">
+                  <c:v>0.6577685475349426</c:v>
+                </c:pt>
+                <c:pt idx="151">
+                  <c:v>0.533800482749939</c:v>
+                </c:pt>
+                <c:pt idx="152">
+                  <c:v>0.4096551239490509</c:v>
+                </c:pt>
+                <c:pt idx="153">
+                  <c:v>0.3777805268764496</c:v>
+                </c:pt>
+                <c:pt idx="154">
+                  <c:v>0.41307809948921204</c:v>
+                </c:pt>
+                <c:pt idx="155">
+                  <c:v>0.5235664248466492</c:v>
+                </c:pt>
+                <c:pt idx="156">
+                  <c:v>0.3221065104007721</c:v>
+                </c:pt>
+                <c:pt idx="157">
+                  <c:v>0.3986315131187439</c:v>
+                </c:pt>
+                <c:pt idx="158">
+                  <c:v>0.30904680490493774</c:v>
+                </c:pt>
+                <c:pt idx="159">
+                  <c:v>0.2613060474395752</c:v>
+                </c:pt>
+                <c:pt idx="160">
+                  <c:v>0.3940429985523224</c:v>
+                </c:pt>
+                <c:pt idx="161">
+                  <c:v>0.3984295427799225</c:v>
+                </c:pt>
+                <c:pt idx="162">
+                  <c:v>0.344331830739975</c:v>
+                </c:pt>
+                <c:pt idx="163">
+                  <c:v>0.304464727640152</c:v>
+                </c:pt>
+                <c:pt idx="164">
+                  <c:v>0.4461105763912201</c:v>
+                </c:pt>
+                <c:pt idx="165">
+                  <c:v>0.4146499037742615</c:v>
+                </c:pt>
+                <c:pt idx="166">
+                  <c:v>0.316840797662735</c:v>
+                </c:pt>
+                <c:pt idx="167">
+                  <c:v>0.398360937833786</c:v>
+                </c:pt>
+                <c:pt idx="168">
+                  <c:v>0.3579205274581909</c:v>
+                </c:pt>
+                <c:pt idx="169">
+                  <c:v>0.3704286515712738</c:v>
+                </c:pt>
+                <c:pt idx="170">
+                  <c:v>0.3166147768497467</c:v>
+                </c:pt>
+                <c:pt idx="171">
+                  <c:v>0.3747732937335968</c:v>
+                </c:pt>
+                <c:pt idx="172">
+                  <c:v>0.34969809651374817</c:v>
+                </c:pt>
+                <c:pt idx="173">
+                  <c:v>0.4294351637363434</c:v>
+                </c:pt>
+                <c:pt idx="174">
+                  <c:v>0.38716256618499756</c:v>
+                </c:pt>
+                <c:pt idx="175">
+                  <c:v>0.3348636031150818</c:v>
+                </c:pt>
+                <c:pt idx="176">
+                  <c:v>0.3218022882938385</c:v>
+                </c:pt>
+                <c:pt idx="177">
+                  <c:v>0.3057154715061188</c:v>
+                </c:pt>
+                <c:pt idx="178">
+                  <c:v>0.41044870018959045</c:v>
+                </c:pt>
+                <c:pt idx="179">
+                  <c:v>0.2848285436630249</c:v>
+                </c:pt>
+                <c:pt idx="180">
+                  <c:v>0.3626764416694641</c:v>
+                </c:pt>
+                <c:pt idx="181">
+                  <c:v>0.38770726323127747</c:v>
+                </c:pt>
+                <c:pt idx="182">
+                  <c:v>0.39427539706230164</c:v>
+                </c:pt>
+                <c:pt idx="183">
+                  <c:v>0.4490029811859131</c:v>
+                </c:pt>
+                <c:pt idx="184">
+                  <c:v>0.3346365988254547</c:v>
+                </c:pt>
+                <c:pt idx="185">
+                  <c:v>0.3602866530418396</c:v>
+                </c:pt>
+                <c:pt idx="186">
+                  <c:v>0.40346115827560425</c:v>
+                </c:pt>
+                <c:pt idx="187">
+                  <c:v>0.37242522835731506</c:v>
+                </c:pt>
+                <c:pt idx="188">
+                  <c:v>0.3671019971370697</c:v>
+                </c:pt>
+                <c:pt idx="189">
+                  <c:v>0.31144633889198303</c:v>
+                </c:pt>
+                <c:pt idx="190">
+                  <c:v>0.37649238109588623</c:v>
+                </c:pt>
+                <c:pt idx="191">
+                  <c:v>0.4047149419784546</c:v>
+                </c:pt>
+                <c:pt idx="192">
+                  <c:v>0.4507423937320709</c:v>
+                </c:pt>
+                <c:pt idx="193">
+                  <c:v>0.35981786251068115</c:v>
+                </c:pt>
+                <c:pt idx="194">
+                  <c:v>0.39086049795150757</c:v>
+                </c:pt>
+                <c:pt idx="195">
+                  <c:v>0.2534463405609131</c:v>
+                </c:pt>
+                <c:pt idx="196">
+                  <c:v>0.43365147709846497</c:v>
+                </c:pt>
+                <c:pt idx="197">
+                  <c:v>0.38471686840057373</c:v>
+                </c:pt>
+                <c:pt idx="198">
+                  <c:v>0.47391095757484436</c:v>
+                </c:pt>
+                <c:pt idx="199">
+                  <c:v>0.5325895547866821</c:v>
+                </c:pt>
+              </c:numCache>
+            </c:numRef>
+          </c:val>
+          <c:smooth val="0"/>
+        </c:ser>
+        <c:dLbls>
+          <c:numFmt formatCode="#,##0" sourceLinked="0"/>
+          <c:txPr>
+            <a:bodyPr/>
+            <a:lstStyle/>
+            <a:p>
+              <a:pPr>
+                <a:defRPr b="0" i="0" strike="noStrike" sz="1200" u="none">
+                  <a:solidFill>
+                    <a:srgbClr val="000000"/>
+                  </a:solidFill>
+                  <a:latin typeface="Arial"/>
+                </a:defRPr>
+              </a:pPr>
+            </a:p>
+          </c:txPr>
+          <c:showLegendKey val="0"/>
+          <c:showVal val="0"/>
+          <c:showCatName val="0"/>
+          <c:showSerName val="0"/>
+          <c:showPercent val="0"/>
+          <c:showBubbleSize val="0"/>
+          <c:showLeaderLines val="0"/>
+        </c:dLbls>
+        <c:marker val="1"/>
+        <c:axId val="2094734554"/>
+        <c:axId val="2094734552"/>
+        <c:axId val="2094734556"/>
+      </c:lineChart>
+      <c:catAx>
+        <c:axId val="2094734554"/>
+        <c:scaling>
+          <c:orientation val="minMax"/>
+        </c:scaling>
+        <c:delete val="1"/>
+        <c:axPos val="b"/>
+        <c:numFmt formatCode="General" sourceLinked="1"/>
+        <c:majorTickMark val="out"/>
+        <c:minorTickMark val="none"/>
+        <c:tickLblPos val="low"/>
+        <c:spPr>
+          <a:ln w="12700" cap="flat">
+            <a:solidFill>
+              <a:srgbClr val="888888"/>
+            </a:solidFill>
+            <a:prstDash val="solid"/>
+            <a:round/>
+          </a:ln>
+        </c:spPr>
+        <c:txPr>
+          <a:bodyPr/>
+          <a:lstStyle/>
+          <a:p>
+            <a:pPr>
+              <a:defRPr sz="1200" b="0" i="0" u="none" strike="noStrike">
+                <a:solidFill>
+                  <a:srgbClr val="000000"/>
+                </a:solidFill>
+                <a:latin typeface="Arial"/>
+              </a:defRPr>
+            </a:pPr>
+            <a:endParaRPr lang="en-US"/>
+          </a:p>
+        </c:txPr>
+        <c:crossAx val="2094734552"/>
+        <c:crosses val="autoZero"/>
+        <c:auto val="1"/>
+        <c:lblAlgn val="ctr"/>
+        <c:noMultiLvlLbl val="1"/>
+      </c:catAx>
+      <c:valAx>
+        <c:axId val="2094734552"/>
+        <c:scaling>
+          <c:orientation val="minMax"/>
+        </c:scaling>
+        <c:delete val="0"/>
+        <c:axPos val="l"/>
+        <c:majorGridlines>
+          <c:spPr>
+            <a:ln w="6350" cap="flat">
+              <a:solidFill>
+                <a:srgbClr val="EAEAEA"/>
+              </a:solidFill>
+              <a:prstDash val="solid"/>
+              <a:round/>
+            </a:ln>
+          </c:spPr>
+        </c:majorGridlines>
+        <c:numFmt formatCode="General" sourceLinked="0"/>
+        <c:majorTickMark val="out"/>
+        <c:minorTickMark val="none"/>
+        <c:tickLblPos val="nextTo"/>
+        <c:spPr>
+          <a:ln w="12700" cap="flat">
+            <a:solidFill>
+              <a:srgbClr val="888888"/>
+            </a:solidFill>
+            <a:prstDash val="solid"/>
+            <a:round/>
+          </a:ln>
+        </c:spPr>
+        <c:txPr>
+          <a:bodyPr/>
+          <a:lstStyle/>
+          <a:p>
+            <a:pPr>
+              <a:defRPr sz="900" b="0" i="0" u="none" strike="noStrike">
+                <a:solidFill>
+                  <a:srgbClr val="5E5E5E"/>
+                </a:solidFill>
+                <a:latin typeface="Arial"/>
+              </a:defRPr>
+            </a:pPr>
+            <a:endParaRPr lang="en-US"/>
+          </a:p>
+        </c:txPr>
+        <c:crossAx val="2094734554"/>
+        <c:crosses val="autoZero"/>
+        <c:crossBetween val="between"/>
+      </c:valAx>
+      <c:spPr>
+        <a:noFill/>
+        <a:ln>
+          <a:noFill/>
+        </a:ln>
+        <a:effectLst/>
+      </c:spPr>
+    </c:plotArea>
+    <c:legend>
+      <c:legendPos val="t"/>
+      <c:overlay val="0"/>
+      <c:txPr>
+        <a:bodyPr/>
+        <a:lstStyle/>
+        <a:p>
+          <a:pPr>
+            <a:defRPr sz="1000">
+              <a:solidFill>
+                <a:srgbClr val="000000"/>
+              </a:solidFill>
+            </a:defRPr>
+          </a:pPr>
+          <a:endParaRPr lang="en-US"/>
+        </a:p>
+      </c:txPr>
+    </c:legend>
+    <c:plotVisOnly val="1"/>
+    <c:dispBlanksAs val="span"/>
+  </c:chart>
+  <c:spPr>
+    <a:noFill/>
+    <a:ln>
+      <a:noFill/>
+    </a:ln>
+    <a:effectLst/>
+  </c:spPr>
+  <c:externalData r:id="rId1">
+    <c:autoUpdate val="0"/>
+  </c:externalData>
+</c:chartSpace>
+</file>
+
 <file path=ppt/notesMasters/notesMaster1.xml><?xml version="1.0" encoding="utf-8"?>
 <p:notesMaster xmlns:a="http://schemas.openxmlformats.org/drawingml/2006/main" xmlns:r="http://schemas.openxmlformats.org/officeDocument/2006/relationships" xmlns:p="http://schemas.openxmlformats.org/presentationml/2006/main">
   <p:cSld>
@@ -1222,7 +3974,8 @@
           <a:p>
             <a:r>
               <a:rPr lang="en-US" dirty="0"/>
-              <a:t/>
+              <a:t>Kernel classes measured on the instrumented baseline capture (qwenpi_baseline_nvtx).
+Loss curves: 200-step same-seed A/B (qwenpi_opt1_fp32_200 vs qwenpi_opt1_bf16_200). Task-level accuracy is validated customer-side; loss trajectory is our correctness evidence.</a:t>
             </a:r>
             <a:endParaRPr lang="en-US" dirty="0"/>
           </a:p>
@@ -1310,8 +4063,8 @@
           <a:p>
             <a:r>
               <a:rPr lang="en-US" dirty="0"/>
-              <a:t>Pipeline items landed as one level (-117 ms), mixed attention as the next (-30 ms).
-Mixed attention is a measured trade: full FA2 including text was SLOWER — see the ruled-out slide.</a:t>
+              <a:t>Idle quantification from the instrumented baseline: 205 ms/step total idle - ~40 ms preprocessing gap at step start, plus sync stalls and launch gaps.
+Schematic is illustrative; proportions follow the measured trace (preprocess ~40 ms of a 807 ms step at baseline, fully hidden after.</a:t>
             </a:r>
             <a:endParaRPr lang="en-US" dirty="0"/>
           </a:p>
@@ -15740,7 +18493,7 @@
                 <a:ea typeface="NVIDIA Sans" pitchFamily="34" charset="-122"/>
                 <a:cs typeface="NVIDIA Sans" pitchFamily="34" charset="-120"/>
               </a:rPr>
-              <a:t>First Wins: bf16 Head + Software Stack</a:t>
+              <a:t>Fix 1 · bf16 Action Head: −218 ms</a:t>
             </a:r>
             <a:endParaRPr lang="en-US" sz="3000" dirty="0"/>
           </a:p>
@@ -15779,7 +18532,7 @@
                 <a:ea typeface="NVIDIA Sans" pitchFamily="34" charset="-122"/>
                 <a:cs typeface="NVIDIA Sans" pitchFamily="34" charset="-120"/>
               </a:rPr>
-              <a:t>800 → 545 ms.  The two cheapest changes bought 32%</a:t>
+              <a:t>800 → 582 ms.  One config knob — and numerically a no-op for training</a:t>
             </a:r>
             <a:endParaRPr lang="en-US" sz="1500" dirty="0"/>
           </a:p>
@@ -15787,85 +18540,14 @@
       </p:sp>
       <p:sp>
         <p:nvSpPr>
-          <p:cNvPr id="4" name="Shape 2"/>
-          <p:cNvSpPr/>
-          <p:nvPr/>
-        </p:nvSpPr>
-        <p:spPr>
-          <a:xfrm>
-            <a:off x="457200" y="1371600"/>
-            <a:ext cx="3977640" cy="2514600"/>
-          </a:xfrm>
-          <a:prstGeom prst="rect">
-            <a:avLst/>
-          </a:prstGeom>
-          <a:solidFill>
-            <a:srgbClr val="FFFFFF"/>
-          </a:solidFill>
-          <a:ln/>
-          <a:effectLst>
-            <a:outerShdw sx="100000" sy="100000" kx="0" ky="0" algn="bl" rotWithShape="0" blurRad="76200" dist="25400" dir="8100000">
-              <a:srgbClr val="000000">
-                <a:alpha val="15000"/>
-              </a:srgbClr>
-            </a:outerShdw>
-          </a:effectLst>
-        </p:spPr>
-      </p:sp>
-      <p:sp>
-        <p:nvSpPr>
-          <p:cNvPr id="5" name="Shape 3"/>
-          <p:cNvSpPr/>
-          <p:nvPr/>
-        </p:nvSpPr>
-        <p:spPr>
-          <a:xfrm>
-            <a:off x="457200" y="1371600"/>
-            <a:ext cx="3977640" cy="54864"/>
-          </a:xfrm>
-          <a:prstGeom prst="rect">
-            <a:avLst/>
-          </a:prstGeom>
-          <a:solidFill>
-            <a:srgbClr val="76B900"/>
-          </a:solidFill>
-          <a:ln/>
-        </p:spPr>
-      </p:sp>
-      <p:pic>
-        <p:nvPicPr>
-          <p:cNvPr id="6" name="Image 0" descr="/app/icons/m48-gpu-chip-256px-grn.png">    </p:cNvPr>
-          <p:cNvPicPr>
-            <a:picLocks noChangeAspect="1"/>
-          </p:cNvPicPr>
-          <p:nvPr/>
-        </p:nvPicPr>
-        <p:blipFill>
-          <a:blip r:embed="rId1"/>
-          <a:stretch>
-            <a:fillRect/>
-          </a:stretch>
-        </p:blipFill>
-        <p:spPr>
-          <a:xfrm>
-            <a:off x="685800" y="1600200"/>
-            <a:ext cx="457200" cy="457200"/>
-          </a:xfrm>
-          <a:prstGeom prst="rect">
-            <a:avLst/>
-          </a:prstGeom>
-        </p:spPr>
-      </p:pic>
-      <p:sp>
-        <p:nvSpPr>
-          <p:cNvPr id="7" name="Text 4"/>
-          <p:cNvSpPr/>
-          <p:nvPr/>
-        </p:nvSpPr>
-        <p:spPr>
-          <a:xfrm>
-            <a:off x="1280160" y="1600200"/>
-            <a:ext cx="3017520" cy="457200"/>
+          <p:cNvPr id="4" name="Text 2"/>
+          <p:cNvSpPr/>
+          <p:nvPr/>
+        </p:nvSpPr>
+        <p:spPr>
+          <a:xfrm>
+            <a:off x="457200" y="1298448"/>
+            <a:ext cx="4114800" cy="274320"/>
           </a:xfrm>
           <a:prstGeom prst="rect">
             <a:avLst/>
@@ -15881,7 +18563,7 @@
               <a:buNone/>
             </a:pPr>
             <a:r>
-              <a:rPr lang="en-US" sz="1500" b="1" dirty="0">
+              <a:rPr lang="en-US" sz="1200" b="1" dirty="0">
                 <a:solidFill>
                   <a:srgbClr val="000000"/>
                 </a:solidFill>
@@ -15889,22 +18571,42 @@
                 <a:ea typeface="NVIDIA Sans" pitchFamily="34" charset="-122"/>
                 <a:cs typeface="NVIDIA Sans" pitchFamily="34" charset="-120"/>
               </a:rPr>
-              <a:t>bf16 action head</a:t>
+              <a:t>GPU busy by kernel class (baseline step, 543 ms)</a:t>
             </a:r>
-            <a:endParaRPr lang="en-US" sz="1500" dirty="0"/>
+            <a:endParaRPr lang="en-US" sz="1200" dirty="0"/>
           </a:p>
         </p:txBody>
       </p:sp>
       <p:sp>
         <p:nvSpPr>
-          <p:cNvPr id="8" name="Text 5"/>
-          <p:cNvSpPr/>
-          <p:nvPr/>
-        </p:nvSpPr>
-        <p:spPr>
-          <a:xfrm>
-            <a:off x="685800" y="2148840"/>
-            <a:ext cx="3566160" cy="365760"/>
+          <p:cNvPr id="5" name="Shape 3"/>
+          <p:cNvSpPr/>
+          <p:nvPr/>
+        </p:nvSpPr>
+        <p:spPr>
+          <a:xfrm>
+            <a:off x="457200" y="1609344"/>
+            <a:ext cx="1920240" cy="182880"/>
+          </a:xfrm>
+          <a:prstGeom prst="rect">
+            <a:avLst/>
+          </a:prstGeom>
+          <a:solidFill>
+            <a:srgbClr val="890C58"/>
+          </a:solidFill>
+          <a:ln/>
+        </p:spPr>
+      </p:sp>
+      <p:sp>
+        <p:nvSpPr>
+          <p:cNvPr id="6" name="Text 4"/>
+          <p:cNvSpPr/>
+          <p:nvPr/>
+        </p:nvSpPr>
+        <p:spPr>
+          <a:xfrm>
+            <a:off x="2432304" y="1581912"/>
+            <a:ext cx="640080" cy="237744"/>
           </a:xfrm>
           <a:prstGeom prst="rect">
             <a:avLst/>
@@ -15920,47 +18622,7 @@
               <a:buNone/>
             </a:pPr>
             <a:r>
-              <a:rPr lang="en-US" sz="2000" b="1" dirty="0">
-                <a:solidFill>
-                  <a:srgbClr val="76B900"/>
-                </a:solidFill>
-                <a:latin typeface="NVIDIA Sans" pitchFamily="34" charset="0"/>
-                <a:ea typeface="NVIDIA Sans" pitchFamily="34" charset="-122"/>
-                <a:cs typeface="NVIDIA Sans" pitchFamily="34" charset="-120"/>
-              </a:rPr>
-              <a:t>−218 ms (800 → 582)</a:t>
-            </a:r>
-            <a:endParaRPr lang="en-US" sz="2000" dirty="0"/>
-          </a:p>
-        </p:txBody>
-      </p:sp>
-      <p:sp>
-        <p:nvSpPr>
-          <p:cNvPr id="9" name="Text 6"/>
-          <p:cNvSpPr/>
-          <p:nvPr/>
-        </p:nvSpPr>
-        <p:spPr>
-          <a:xfrm>
-            <a:off x="685800" y="2560320"/>
-            <a:ext cx="3566160" cy="1234440"/>
-          </a:xfrm>
-          <a:prstGeom prst="rect">
-            <a:avLst/>
-          </a:prstGeom>
-          <a:noFill/>
-          <a:ln/>
-        </p:spPr>
-        <p:txBody>
-          <a:bodyPr wrap="square" lIns="0" tIns="0" rIns="0" bIns="0" rtlCol="0" anchor="t"/>
-          <a:lstStyle/>
-          <a:p>
-            <a:pPr marL="342900" indent="-342900">
-              <a:buSzPct val="100000"/>
-              <a:buChar char="•"/>
-            </a:pPr>
-            <a:r>
-              <a:rPr lang="en-US" sz="1150" dirty="0">
+              <a:rPr lang="en-US" sz="1000" b="1" dirty="0">
                 <a:solidFill>
                   <a:srgbClr val="000000"/>
                 </a:solidFill>
@@ -15968,129 +18630,22 @@
                 <a:ea typeface="NVIDIA Sans" pitchFamily="34" charset="-122"/>
                 <a:cs typeface="NVIDIA Sans" pitchFamily="34" charset="-120"/>
               </a:rPr>
-              <a:t>The 2.96B DiT ran in fp32 — one config knob moves it under bf16 autocast</a:t>
+              <a:t>201 ms</a:t>
             </a:r>
-            <a:endParaRPr lang="en-US" sz="1150" dirty="0"/>
-          </a:p>
-          <a:p>
-            <a:pPr marL="342900" indent="-342900">
-              <a:buSzPct val="100000"/>
-              <a:buChar char="•"/>
-            </a:pPr>
-            <a:r>
-              <a:rPr lang="en-US" sz="1150" dirty="0">
-                <a:solidFill>
-                  <a:srgbClr val="000000"/>
-                </a:solidFill>
-                <a:latin typeface="NVIDIA Sans" pitchFamily="34" charset="0"/>
-                <a:ea typeface="NVIDIA Sans" pitchFamily="34" charset="-122"/>
-                <a:cs typeface="NVIDIA Sans" pitchFamily="34" charset="-120"/>
-              </a:rPr>
-              <a:t>Loss &amp; timestep math stay fp32; same-seed 100-step loss trajectory unchanged</a:t>
-            </a:r>
-            <a:endParaRPr lang="en-US" sz="1150" dirty="0"/>
-          </a:p>
-          <a:p>
-            <a:pPr marL="342900" indent="-342900">
-              <a:buSzPct val="100000"/>
-              <a:buChar char="•"/>
-            </a:pPr>
-            <a:r>
-              <a:rPr lang="en-US" sz="1150" dirty="0">
-                <a:solidFill>
-                  <a:srgbClr val="000000"/>
-                </a:solidFill>
-                <a:latin typeface="NVIDIA Sans" pitchFamily="34" charset="0"/>
-                <a:ea typeface="NVIDIA Sans" pitchFamily="34" charset="-122"/>
-                <a:cs typeface="NVIDIA Sans" pitchFamily="34" charset="-120"/>
-              </a:rPr>
-              <a:t>Single-switch rollback: dit_dtype=none</a:t>
-            </a:r>
-            <a:endParaRPr lang="en-US" sz="1150" dirty="0"/>
+            <a:endParaRPr lang="en-US" sz="1000" dirty="0"/>
           </a:p>
         </p:txBody>
       </p:sp>
       <p:sp>
         <p:nvSpPr>
-          <p:cNvPr id="10" name="Shape 7"/>
-          <p:cNvSpPr/>
-          <p:nvPr/>
-        </p:nvSpPr>
-        <p:spPr>
-          <a:xfrm>
-            <a:off x="4709160" y="1371600"/>
-            <a:ext cx="3977640" cy="2514600"/>
-          </a:xfrm>
-          <a:prstGeom prst="rect">
-            <a:avLst/>
-          </a:prstGeom>
-          <a:solidFill>
-            <a:srgbClr val="FFFFFF"/>
-          </a:solidFill>
-          <a:ln/>
-          <a:effectLst>
-            <a:outerShdw sx="100000" sy="100000" kx="0" ky="0" algn="bl" rotWithShape="0" blurRad="76200" dist="25400" dir="8100000">
-              <a:srgbClr val="000000">
-                <a:alpha val="15000"/>
-              </a:srgbClr>
-            </a:outerShdw>
-          </a:effectLst>
-        </p:spPr>
-      </p:sp>
-      <p:sp>
-        <p:nvSpPr>
-          <p:cNvPr id="11" name="Shape 8"/>
-          <p:cNvSpPr/>
-          <p:nvPr/>
-        </p:nvSpPr>
-        <p:spPr>
-          <a:xfrm>
-            <a:off x="4709160" y="1371600"/>
-            <a:ext cx="3977640" cy="54864"/>
-          </a:xfrm>
-          <a:prstGeom prst="rect">
-            <a:avLst/>
-          </a:prstGeom>
-          <a:solidFill>
-            <a:srgbClr val="76B900"/>
-          </a:solidFill>
-          <a:ln/>
-        </p:spPr>
-      </p:sp>
-      <p:pic>
-        <p:nvPicPr>
-          <p:cNvPr id="12" name="Image 1" descr="/app/icons/m48-rocket-3-256px-grn.png">    </p:cNvPr>
-          <p:cNvPicPr>
-            <a:picLocks noChangeAspect="1"/>
-          </p:cNvPicPr>
-          <p:nvPr/>
-        </p:nvPicPr>
-        <p:blipFill>
-          <a:blip r:embed="rId2"/>
-          <a:stretch>
-            <a:fillRect/>
-          </a:stretch>
-        </p:blipFill>
-        <p:spPr>
-          <a:xfrm>
-            <a:off x="4937760" y="1600200"/>
-            <a:ext cx="457200" cy="457200"/>
-          </a:xfrm>
-          <a:prstGeom prst="rect">
-            <a:avLst/>
-          </a:prstGeom>
-        </p:spPr>
-      </p:pic>
-      <p:sp>
-        <p:nvSpPr>
-          <p:cNvPr id="13" name="Text 9"/>
-          <p:cNvSpPr/>
-          <p:nvPr/>
-        </p:nvSpPr>
-        <p:spPr>
-          <a:xfrm>
-            <a:off x="5532120" y="1600200"/>
-            <a:ext cx="3017520" cy="457200"/>
+          <p:cNvPr id="7" name="Text 5"/>
+          <p:cNvSpPr/>
+          <p:nvPr/>
+        </p:nvSpPr>
+        <p:spPr>
+          <a:xfrm>
+            <a:off x="457200" y="1792224"/>
+            <a:ext cx="4114800" cy="146304"/>
           </a:xfrm>
           <a:prstGeom prst="rect">
             <a:avLst/>
@@ -16106,30 +18661,50 @@
               <a:buNone/>
             </a:pPr>
             <a:r>
-              <a:rPr lang="en-US" sz="1500" b="1" dirty="0">
+              <a:rPr lang="en-US" sz="800" dirty="0">
                 <a:solidFill>
-                  <a:srgbClr val="000000"/>
+                  <a:srgbClr val="5E5E5E"/>
                 </a:solidFill>
                 <a:latin typeface="NVIDIA Sans" pitchFamily="34" charset="0"/>
                 <a:ea typeface="NVIDIA Sans" pitchFamily="34" charset="-122"/>
                 <a:cs typeface="NVIDIA Sans" pitchFamily="34" charset="-120"/>
               </a:rPr>
-              <a:t>torch 2.7.1 + NCCL 2.26.2</a:t>
+              <a:t>fp32 GEMM — all from the action head</a:t>
             </a:r>
-            <a:endParaRPr lang="en-US" sz="1500" dirty="0"/>
+            <a:endParaRPr lang="en-US" sz="800" dirty="0"/>
           </a:p>
         </p:txBody>
       </p:sp>
       <p:sp>
         <p:nvSpPr>
-          <p:cNvPr id="14" name="Text 10"/>
-          <p:cNvSpPr/>
-          <p:nvPr/>
-        </p:nvSpPr>
-        <p:spPr>
-          <a:xfrm>
-            <a:off x="4937760" y="2148840"/>
-            <a:ext cx="3566160" cy="365760"/>
+          <p:cNvPr id="8" name="Shape 6"/>
+          <p:cNvSpPr/>
+          <p:nvPr/>
+        </p:nvSpPr>
+        <p:spPr>
+          <a:xfrm>
+            <a:off x="457200" y="1956816"/>
+            <a:ext cx="1203733" cy="182880"/>
+          </a:xfrm>
+          <a:prstGeom prst="rect">
+            <a:avLst/>
+          </a:prstGeom>
+          <a:solidFill>
+            <a:srgbClr val="CDCDCD"/>
+          </a:solidFill>
+          <a:ln/>
+        </p:spPr>
+      </p:sp>
+      <p:sp>
+        <p:nvSpPr>
+          <p:cNvPr id="9" name="Text 7"/>
+          <p:cNvSpPr/>
+          <p:nvPr/>
+        </p:nvSpPr>
+        <p:spPr>
+          <a:xfrm>
+            <a:off x="1715797" y="1929384"/>
+            <a:ext cx="640080" cy="237744"/>
           </a:xfrm>
           <a:prstGeom prst="rect">
             <a:avLst/>
@@ -16145,47 +18720,7 @@
               <a:buNone/>
             </a:pPr>
             <a:r>
-              <a:rPr lang="en-US" sz="2000" b="1" dirty="0">
-                <a:solidFill>
-                  <a:srgbClr val="76B900"/>
-                </a:solidFill>
-                <a:latin typeface="NVIDIA Sans" pitchFamily="34" charset="0"/>
-                <a:ea typeface="NVIDIA Sans" pitchFamily="34" charset="-122"/>
-                <a:cs typeface="NVIDIA Sans" pitchFamily="34" charset="-120"/>
-              </a:rPr>
-              <a:t>−37 ms (582 → 545)</a:t>
-            </a:r>
-            <a:endParaRPr lang="en-US" sz="2000" dirty="0"/>
-          </a:p>
-        </p:txBody>
-      </p:sp>
-      <p:sp>
-        <p:nvSpPr>
-          <p:cNvPr id="15" name="Text 11"/>
-          <p:cNvSpPr/>
-          <p:nvPr/>
-        </p:nvSpPr>
-        <p:spPr>
-          <a:xfrm>
-            <a:off x="4937760" y="2560320"/>
-            <a:ext cx="3566160" cy="1234440"/>
-          </a:xfrm>
-          <a:prstGeom prst="rect">
-            <a:avLst/>
-          </a:prstGeom>
-          <a:noFill/>
-          <a:ln/>
-        </p:spPr>
-        <p:txBody>
-          <a:bodyPr wrap="square" lIns="0" tIns="0" rIns="0" bIns="0" rtlCol="0" anchor="t"/>
-          <a:lstStyle/>
-          <a:p>
-            <a:pPr marL="342900" indent="-342900">
-              <a:buSzPct val="100000"/>
-              <a:buChar char="•"/>
-            </a:pPr>
-            <a:r>
-              <a:rPr lang="en-US" sz="1150" dirty="0">
+              <a:rPr lang="en-US" sz="1000" b="1" dirty="0">
                 <a:solidFill>
                   <a:srgbClr val="000000"/>
                 </a:solidFill>
@@ -16193,17 +18728,97 @@
                 <a:ea typeface="NVIDIA Sans" pitchFamily="34" charset="-122"/>
                 <a:cs typeface="NVIDIA Sans" pitchFamily="34" charset="-120"/>
               </a:rPr>
-              <a:t>Container-level upgrade, zero code change (plus triton 3.3.1)</a:t>
+              <a:t>126 ms</a:t>
             </a:r>
-            <a:endParaRPr lang="en-US" sz="1150" dirty="0"/>
+            <a:endParaRPr lang="en-US" sz="1000" dirty="0"/>
           </a:p>
+        </p:txBody>
+      </p:sp>
+      <p:sp>
+        <p:nvSpPr>
+          <p:cNvPr id="10" name="Text 8"/>
+          <p:cNvSpPr/>
+          <p:nvPr/>
+        </p:nvSpPr>
+        <p:spPr>
+          <a:xfrm>
+            <a:off x="457200" y="2139696"/>
+            <a:ext cx="4114800" cy="146304"/>
+          </a:xfrm>
+          <a:prstGeom prst="rect">
+            <a:avLst/>
+          </a:prstGeom>
+          <a:noFill/>
+          <a:ln/>
+        </p:spPr>
+        <p:txBody>
+          <a:bodyPr wrap="square" lIns="0" tIns="0" rIns="0" bIns="0" rtlCol="0" anchor="ctr"/>
+          <a:lstStyle/>
           <a:p>
-            <a:pPr marL="342900" indent="-342900">
-              <a:buSzPct val="100000"/>
-              <a:buChar char="•"/>
+            <a:pPr indent="0" marL="0">
+              <a:buNone/>
             </a:pPr>
             <a:r>
-              <a:rPr lang="en-US" sz="1150" dirty="0">
+              <a:rPr lang="en-US" sz="800" dirty="0">
+                <a:solidFill>
+                  <a:srgbClr val="5E5E5E"/>
+                </a:solidFill>
+                <a:latin typeface="NVIDIA Sans" pitchFamily="34" charset="0"/>
+                <a:ea typeface="NVIDIA Sans" pitchFamily="34" charset="-122"/>
+                <a:cs typeface="NVIDIA Sans" pitchFamily="34" charset="-120"/>
+              </a:rPr>
+              <a:t>other (fla/GDN, embeddings, misc)</a:t>
+            </a:r>
+            <a:endParaRPr lang="en-US" sz="800" dirty="0"/>
+          </a:p>
+        </p:txBody>
+      </p:sp>
+      <p:sp>
+        <p:nvSpPr>
+          <p:cNvPr id="11" name="Shape 9"/>
+          <p:cNvSpPr/>
+          <p:nvPr/>
+        </p:nvSpPr>
+        <p:spPr>
+          <a:xfrm>
+            <a:off x="457200" y="2304288"/>
+            <a:ext cx="974450" cy="182880"/>
+          </a:xfrm>
+          <a:prstGeom prst="rect">
+            <a:avLst/>
+          </a:prstGeom>
+          <a:solidFill>
+            <a:srgbClr val="CDCDCD"/>
+          </a:solidFill>
+          <a:ln/>
+        </p:spPr>
+      </p:sp>
+      <p:sp>
+        <p:nvSpPr>
+          <p:cNvPr id="12" name="Text 10"/>
+          <p:cNvSpPr/>
+          <p:nvPr/>
+        </p:nvSpPr>
+        <p:spPr>
+          <a:xfrm>
+            <a:off x="1486514" y="2276856"/>
+            <a:ext cx="640080" cy="237744"/>
+          </a:xfrm>
+          <a:prstGeom prst="rect">
+            <a:avLst/>
+          </a:prstGeom>
+          <a:noFill/>
+          <a:ln/>
+        </p:spPr>
+        <p:txBody>
+          <a:bodyPr wrap="square" lIns="0" tIns="0" rIns="0" bIns="0" rtlCol="0" anchor="ctr"/>
+          <a:lstStyle/>
+          <a:p>
+            <a:pPr indent="0" marL="0">
+              <a:buNone/>
+            </a:pPr>
+            <a:r>
+              <a:rPr lang="en-US" sz="1000" b="1" dirty="0">
                 <a:solidFill>
                   <a:srgbClr val="000000"/>
                 </a:solidFill>
@@ -16211,17 +18826,97 @@
                 <a:ea typeface="NVIDIA Sans" pitchFamily="34" charset="-122"/>
                 <a:cs typeface="NVIDIA Sans" pitchFamily="34" charset="-120"/>
               </a:rPr>
-              <a:t>Faster eager kernels and NCCL launch path</a:t>
+              <a:t>102 ms</a:t>
             </a:r>
-            <a:endParaRPr lang="en-US" sz="1150" dirty="0"/>
+            <a:endParaRPr lang="en-US" sz="1000" dirty="0"/>
           </a:p>
+        </p:txBody>
+      </p:sp>
+      <p:sp>
+        <p:nvSpPr>
+          <p:cNvPr id="13" name="Text 11"/>
+          <p:cNvSpPr/>
+          <p:nvPr/>
+        </p:nvSpPr>
+        <p:spPr>
+          <a:xfrm>
+            <a:off x="457200" y="2487168"/>
+            <a:ext cx="4114800" cy="146304"/>
+          </a:xfrm>
+          <a:prstGeom prst="rect">
+            <a:avLst/>
+          </a:prstGeom>
+          <a:noFill/>
+          <a:ln/>
+        </p:spPr>
+        <p:txBody>
+          <a:bodyPr wrap="square" lIns="0" tIns="0" rIns="0" bIns="0" rtlCol="0" anchor="ctr"/>
+          <a:lstStyle/>
           <a:p>
-            <a:pPr marL="342900" indent="-342900">
-              <a:buSzPct val="100000"/>
-              <a:buChar char="•"/>
+            <a:pPr indent="0" marL="0">
+              <a:buNone/>
             </a:pPr>
             <a:r>
-              <a:rPr lang="en-US" sz="1150" dirty="0">
+              <a:rPr lang="en-US" sz="800" dirty="0">
+                <a:solidFill>
+                  <a:srgbClr val="5E5E5E"/>
+                </a:solidFill>
+                <a:latin typeface="NVIDIA Sans" pitchFamily="34" charset="0"/>
+                <a:ea typeface="NVIDIA Sans" pitchFamily="34" charset="-122"/>
+                <a:cs typeface="NVIDIA Sans" pitchFamily="34" charset="-120"/>
+              </a:rPr>
+              <a:t>elementwise / norm / reduce</a:t>
+            </a:r>
+            <a:endParaRPr lang="en-US" sz="800" dirty="0"/>
+          </a:p>
+        </p:txBody>
+      </p:sp>
+      <p:sp>
+        <p:nvSpPr>
+          <p:cNvPr id="14" name="Shape 12"/>
+          <p:cNvSpPr/>
+          <p:nvPr/>
+        </p:nvSpPr>
+        <p:spPr>
+          <a:xfrm>
+            <a:off x="457200" y="2651760"/>
+            <a:ext cx="630527" cy="182880"/>
+          </a:xfrm>
+          <a:prstGeom prst="rect">
+            <a:avLst/>
+          </a:prstGeom>
+          <a:solidFill>
+            <a:srgbClr val="0071C5"/>
+          </a:solidFill>
+          <a:ln/>
+        </p:spPr>
+      </p:sp>
+      <p:sp>
+        <p:nvSpPr>
+          <p:cNvPr id="15" name="Text 13"/>
+          <p:cNvSpPr/>
+          <p:nvPr/>
+        </p:nvSpPr>
+        <p:spPr>
+          <a:xfrm>
+            <a:off x="1142591" y="2624328"/>
+            <a:ext cx="640080" cy="237744"/>
+          </a:xfrm>
+          <a:prstGeom prst="rect">
+            <a:avLst/>
+          </a:prstGeom>
+          <a:noFill/>
+          <a:ln/>
+        </p:spPr>
+        <p:txBody>
+          <a:bodyPr wrap="square" lIns="0" tIns="0" rIns="0" bIns="0" rtlCol="0" anchor="ctr"/>
+          <a:lstStyle/>
+          <a:p>
+            <a:pPr indent="0" marL="0">
+              <a:buNone/>
+            </a:pPr>
+            <a:r>
+              <a:rPr lang="en-US" sz="1000" b="1" dirty="0">
                 <a:solidFill>
                   <a:srgbClr val="000000"/>
                 </a:solidFill>
@@ -16229,22 +18924,444 @@
                 <a:ea typeface="NVIDIA Sans" pitchFamily="34" charset="-122"/>
                 <a:cs typeface="NVIDIA Sans" pitchFamily="34" charset="-120"/>
               </a:rPr>
-              <a:t>Prerequisite for the CUDA-Graph work (slide 8)</a:t>
+              <a:t>66 ms</a:t>
             </a:r>
-            <a:endParaRPr lang="en-US" sz="1150" dirty="0"/>
+            <a:endParaRPr lang="en-US" sz="1000" dirty="0"/>
           </a:p>
         </p:txBody>
       </p:sp>
       <p:sp>
         <p:nvSpPr>
-          <p:cNvPr id="16" name="Text 12"/>
-          <p:cNvSpPr/>
-          <p:nvPr/>
-        </p:nvSpPr>
-        <p:spPr>
-          <a:xfrm>
-            <a:off x="640080" y="4023360"/>
-            <a:ext cx="7863840" cy="365760"/>
+          <p:cNvPr id="16" name="Text 14"/>
+          <p:cNvSpPr/>
+          <p:nvPr/>
+        </p:nvSpPr>
+        <p:spPr>
+          <a:xfrm>
+            <a:off x="457200" y="2834640"/>
+            <a:ext cx="4114800" cy="146304"/>
+          </a:xfrm>
+          <a:prstGeom prst="rect">
+            <a:avLst/>
+          </a:prstGeom>
+          <a:noFill/>
+          <a:ln/>
+        </p:spPr>
+        <p:txBody>
+          <a:bodyPr wrap="square" lIns="0" tIns="0" rIns="0" bIns="0" rtlCol="0" anchor="ctr"/>
+          <a:lstStyle/>
+          <a:p>
+            <a:pPr indent="0" marL="0">
+              <a:buNone/>
+            </a:pPr>
+            <a:r>
+              <a:rPr lang="en-US" sz="800" dirty="0">
+                <a:solidFill>
+                  <a:srgbClr val="5E5E5E"/>
+                </a:solidFill>
+                <a:latin typeface="NVIDIA Sans" pitchFamily="34" charset="0"/>
+                <a:ea typeface="NVIDIA Sans" pitchFamily="34" charset="-122"/>
+                <a:cs typeface="NVIDIA Sans" pitchFamily="34" charset="-120"/>
+              </a:rPr>
+              <a:t>bf16 GEMM (Qwen3.5)</a:t>
+            </a:r>
+            <a:endParaRPr lang="en-US" sz="800" dirty="0"/>
+          </a:p>
+        </p:txBody>
+      </p:sp>
+      <p:sp>
+        <p:nvSpPr>
+          <p:cNvPr id="17" name="Shape 15"/>
+          <p:cNvSpPr/>
+          <p:nvPr/>
+        </p:nvSpPr>
+        <p:spPr>
+          <a:xfrm>
+            <a:off x="457200" y="2999232"/>
+            <a:ext cx="257943" cy="182880"/>
+          </a:xfrm>
+          <a:prstGeom prst="rect">
+            <a:avLst/>
+          </a:prstGeom>
+          <a:solidFill>
+            <a:srgbClr val="CDCDCD"/>
+          </a:solidFill>
+          <a:ln/>
+        </p:spPr>
+      </p:sp>
+      <p:sp>
+        <p:nvSpPr>
+          <p:cNvPr id="18" name="Text 16"/>
+          <p:cNvSpPr/>
+          <p:nvPr/>
+        </p:nvSpPr>
+        <p:spPr>
+          <a:xfrm>
+            <a:off x="770007" y="2971800"/>
+            <a:ext cx="640080" cy="237744"/>
+          </a:xfrm>
+          <a:prstGeom prst="rect">
+            <a:avLst/>
+          </a:prstGeom>
+          <a:noFill/>
+          <a:ln/>
+        </p:spPr>
+        <p:txBody>
+          <a:bodyPr wrap="square" lIns="0" tIns="0" rIns="0" bIns="0" rtlCol="0" anchor="ctr"/>
+          <a:lstStyle/>
+          <a:p>
+            <a:pPr indent="0" marL="0">
+              <a:buNone/>
+            </a:pPr>
+            <a:r>
+              <a:rPr lang="en-US" sz="1000" b="1" dirty="0">
+                <a:solidFill>
+                  <a:srgbClr val="000000"/>
+                </a:solidFill>
+                <a:latin typeface="NVIDIA Sans" pitchFamily="34" charset="0"/>
+                <a:ea typeface="NVIDIA Sans" pitchFamily="34" charset="-122"/>
+                <a:cs typeface="NVIDIA Sans" pitchFamily="34" charset="-120"/>
+              </a:rPr>
+              <a:t>27 ms</a:t>
+            </a:r>
+            <a:endParaRPr lang="en-US" sz="1000" dirty="0"/>
+          </a:p>
+        </p:txBody>
+      </p:sp>
+      <p:sp>
+        <p:nvSpPr>
+          <p:cNvPr id="19" name="Text 17"/>
+          <p:cNvSpPr/>
+          <p:nvPr/>
+        </p:nvSpPr>
+        <p:spPr>
+          <a:xfrm>
+            <a:off x="457200" y="3182112"/>
+            <a:ext cx="4114800" cy="146304"/>
+          </a:xfrm>
+          <a:prstGeom prst="rect">
+            <a:avLst/>
+          </a:prstGeom>
+          <a:noFill/>
+          <a:ln/>
+        </p:spPr>
+        <p:txBody>
+          <a:bodyPr wrap="square" lIns="0" tIns="0" rIns="0" bIns="0" rtlCol="0" anchor="ctr"/>
+          <a:lstStyle/>
+          <a:p>
+            <a:pPr indent="0" marL="0">
+              <a:buNone/>
+            </a:pPr>
+            <a:r>
+              <a:rPr lang="en-US" sz="800" dirty="0">
+                <a:solidFill>
+                  <a:srgbClr val="5E5E5E"/>
+                </a:solidFill>
+                <a:latin typeface="NVIDIA Sans" pitchFamily="34" charset="0"/>
+                <a:ea typeface="NVIDIA Sans" pitchFamily="34" charset="-122"/>
+                <a:cs typeface="NVIDIA Sans" pitchFamily="34" charset="-120"/>
+              </a:rPr>
+              <a:t>copy / gather / cat</a:t>
+            </a:r>
+            <a:endParaRPr lang="en-US" sz="800" dirty="0"/>
+          </a:p>
+        </p:txBody>
+      </p:sp>
+      <p:sp>
+        <p:nvSpPr>
+          <p:cNvPr id="20" name="Shape 18"/>
+          <p:cNvSpPr/>
+          <p:nvPr/>
+        </p:nvSpPr>
+        <p:spPr>
+          <a:xfrm>
+            <a:off x="457200" y="3346704"/>
+            <a:ext cx="210176" cy="182880"/>
+          </a:xfrm>
+          <a:prstGeom prst="rect">
+            <a:avLst/>
+          </a:prstGeom>
+          <a:solidFill>
+            <a:srgbClr val="CDCDCD"/>
+          </a:solidFill>
+          <a:ln/>
+        </p:spPr>
+      </p:sp>
+      <p:sp>
+        <p:nvSpPr>
+          <p:cNvPr id="21" name="Text 19"/>
+          <p:cNvSpPr/>
+          <p:nvPr/>
+        </p:nvSpPr>
+        <p:spPr>
+          <a:xfrm>
+            <a:off x="722240" y="3319272"/>
+            <a:ext cx="640080" cy="237744"/>
+          </a:xfrm>
+          <a:prstGeom prst="rect">
+            <a:avLst/>
+          </a:prstGeom>
+          <a:noFill/>
+          <a:ln/>
+        </p:spPr>
+        <p:txBody>
+          <a:bodyPr wrap="square" lIns="0" tIns="0" rIns="0" bIns="0" rtlCol="0" anchor="ctr"/>
+          <a:lstStyle/>
+          <a:p>
+            <a:pPr indent="0" marL="0">
+              <a:buNone/>
+            </a:pPr>
+            <a:r>
+              <a:rPr lang="en-US" sz="1000" b="1" dirty="0">
+                <a:solidFill>
+                  <a:srgbClr val="000000"/>
+                </a:solidFill>
+                <a:latin typeface="NVIDIA Sans" pitchFamily="34" charset="0"/>
+                <a:ea typeface="NVIDIA Sans" pitchFamily="34" charset="-122"/>
+                <a:cs typeface="NVIDIA Sans" pitchFamily="34" charset="-120"/>
+              </a:rPr>
+              <a:t>22 ms</a:t>
+            </a:r>
+            <a:endParaRPr lang="en-US" sz="1000" dirty="0"/>
+          </a:p>
+        </p:txBody>
+      </p:sp>
+      <p:sp>
+        <p:nvSpPr>
+          <p:cNvPr id="22" name="Text 20"/>
+          <p:cNvSpPr/>
+          <p:nvPr/>
+        </p:nvSpPr>
+        <p:spPr>
+          <a:xfrm>
+            <a:off x="457200" y="3529584"/>
+            <a:ext cx="4114800" cy="146304"/>
+          </a:xfrm>
+          <a:prstGeom prst="rect">
+            <a:avLst/>
+          </a:prstGeom>
+          <a:noFill/>
+          <a:ln/>
+        </p:spPr>
+        <p:txBody>
+          <a:bodyPr wrap="square" lIns="0" tIns="0" rIns="0" bIns="0" rtlCol="0" anchor="ctr"/>
+          <a:lstStyle/>
+          <a:p>
+            <a:pPr indent="0" marL="0">
+              <a:buNone/>
+            </a:pPr>
+            <a:r>
+              <a:rPr lang="en-US" sz="800" dirty="0">
+                <a:solidFill>
+                  <a:srgbClr val="5E5E5E"/>
+                </a:solidFill>
+                <a:latin typeface="NVIDIA Sans" pitchFamily="34" charset="0"/>
+                <a:ea typeface="NVIDIA Sans" pitchFamily="34" charset="-122"/>
+                <a:cs typeface="NVIDIA Sans" pitchFamily="34" charset="-120"/>
+              </a:rPr>
+              <a:t>attention kernels</a:t>
+            </a:r>
+            <a:endParaRPr lang="en-US" sz="800" dirty="0"/>
+          </a:p>
+        </p:txBody>
+      </p:sp>
+      <p:sp>
+        <p:nvSpPr>
+          <p:cNvPr id="23" name="Text 21"/>
+          <p:cNvSpPr/>
+          <p:nvPr/>
+        </p:nvSpPr>
+        <p:spPr>
+          <a:xfrm>
+            <a:off x="457200" y="3730752"/>
+            <a:ext cx="4023360" cy="310896"/>
+          </a:xfrm>
+          <a:prstGeom prst="rect">
+            <a:avLst/>
+          </a:prstGeom>
+          <a:noFill/>
+          <a:ln/>
+        </p:spPr>
+        <p:txBody>
+          <a:bodyPr wrap="square" lIns="0" tIns="0" rIns="0" bIns="0" rtlCol="0" anchor="t"/>
+          <a:lstStyle/>
+          <a:p>
+            <a:pPr indent="0" marL="0">
+              <a:buNone/>
+            </a:pPr>
+            <a:r>
+              <a:rPr lang="en-US" sz="1100" b="1" dirty="0">
+                <a:solidFill>
+                  <a:srgbClr val="890C58"/>
+                </a:solidFill>
+                <a:latin typeface="NVIDIA Sans" pitchFamily="34" charset="0"/>
+                <a:ea typeface="NVIDIA Sans" pitchFamily="34" charset="-122"/>
+                <a:cs typeface="NVIDIA Sans" pitchFamily="34" charset="-120"/>
+              </a:rPr>
+              <a:t>37% of all GPU math is fp32 </a:t>
+            </a:r>
+            <a:pPr indent="0" marL="0">
+              <a:buNone/>
+            </a:pPr>
+            <a:r>
+              <a:rPr lang="en-US" sz="1000" dirty="0">
+                <a:solidFill>
+                  <a:srgbClr val="5E5E5E"/>
+                </a:solidFill>
+                <a:latin typeface="NVIDIA Sans" pitchFamily="34" charset="0"/>
+                <a:ea typeface="NVIDIA Sans" pitchFamily="34" charset="-122"/>
+                <a:cs typeface="NVIDIA Sans" pitchFamily="34" charset="-120"/>
+              </a:rPr>
+              <a:t>— all of it from the 2.96B DiT outside the bf16 autocast region.</a:t>
+            </a:r>
+            <a:endParaRPr lang="en-US" sz="1100" dirty="0"/>
+          </a:p>
+        </p:txBody>
+      </p:sp>
+      <p:sp>
+        <p:nvSpPr>
+          <p:cNvPr id="24" name="Text 22"/>
+          <p:cNvSpPr/>
+          <p:nvPr/>
+        </p:nvSpPr>
+        <p:spPr>
+          <a:xfrm>
+            <a:off x="4754880" y="1298448"/>
+            <a:ext cx="3931920" cy="274320"/>
+          </a:xfrm>
+          <a:prstGeom prst="rect">
+            <a:avLst/>
+          </a:prstGeom>
+          <a:noFill/>
+          <a:ln/>
+        </p:spPr>
+        <p:txBody>
+          <a:bodyPr wrap="square" lIns="0" tIns="0" rIns="0" bIns="0" rtlCol="0" anchor="ctr"/>
+          <a:lstStyle/>
+          <a:p>
+            <a:pPr indent="0" marL="0">
+              <a:buNone/>
+            </a:pPr>
+            <a:r>
+              <a:rPr lang="en-US" sz="1200" b="1" dirty="0">
+                <a:solidFill>
+                  <a:srgbClr val="000000"/>
+                </a:solidFill>
+                <a:latin typeface="NVIDIA Sans" pitchFamily="34" charset="0"/>
+                <a:ea typeface="NVIDIA Sans" pitchFamily="34" charset="-122"/>
+                <a:cs typeface="NVIDIA Sans" pitchFamily="34" charset="-120"/>
+              </a:rPr>
+              <a:t>Same seed, 200 steps: loss is unchanged</a:t>
+            </a:r>
+            <a:endParaRPr lang="en-US" sz="1200" dirty="0"/>
+          </a:p>
+        </p:txBody>
+      </p:sp>
+      <p:graphicFrame>
+        <p:nvGraphicFramePr>
+          <p:cNvPr id="25" name="Chart 0" descr=""/>
+          <p:cNvGraphicFramePr/>
+          <p:nvPr/>
+        </p:nvGraphicFramePr>
+        <p:xfrm>
+          <a:off x="4754880" y="1600200"/>
+          <a:ext cx="3931920" cy="2103120"/>
+        </p:xfrm>
+        <a:graphic xmlns:a="http://schemas.openxmlformats.org/drawingml/2006/main">
+          <a:graphicData uri="http://schemas.openxmlformats.org/drawingml/2006/chart">
+            <c:chart xmlns:c="http://schemas.openxmlformats.org/drawingml/2006/chart" r:id="rId1"/>
+          </a:graphicData>
+        </a:graphic>
+      </p:graphicFrame>
+      <p:sp>
+        <p:nvSpPr>
+          <p:cNvPr id="26" name="Text 23"/>
+          <p:cNvSpPr/>
+          <p:nvPr/>
+        </p:nvSpPr>
+        <p:spPr>
+          <a:xfrm>
+            <a:off x="4754880" y="3730752"/>
+            <a:ext cx="3931920" cy="320040"/>
+          </a:xfrm>
+          <a:prstGeom prst="rect">
+            <a:avLst/>
+          </a:prstGeom>
+          <a:noFill/>
+          <a:ln/>
+        </p:spPr>
+        <p:txBody>
+          <a:bodyPr wrap="square" lIns="0" tIns="0" rIns="0" bIns="0" rtlCol="0" anchor="ctr"/>
+          <a:lstStyle/>
+          <a:p>
+            <a:pPr indent="0" marL="0">
+              <a:buNone/>
+            </a:pPr>
+            <a:r>
+              <a:rPr lang="en-US" sz="900" i="1" dirty="0">
+                <a:solidFill>
+                  <a:srgbClr val="8C8C8C"/>
+                </a:solidFill>
+                <a:latin typeface="NVIDIA Sans" pitchFamily="34" charset="0"/>
+                <a:ea typeface="NVIDIA Sans" pitchFamily="34" charset="-122"/>
+                <a:cs typeface="NVIDIA Sans" pitchFamily="34" charset="-120"/>
+              </a:rPr>
+              <a:t>action loss, training steps 1 → 200 · mean per-step |Δ| = 0.04 (run-to-run noise floor) · final: 0.549 vs 0.533</a:t>
+            </a:r>
+            <a:endParaRPr lang="en-US" sz="900" dirty="0"/>
+          </a:p>
+        </p:txBody>
+      </p:sp>
+      <p:sp>
+        <p:nvSpPr>
+          <p:cNvPr id="27" name="Shape 24"/>
+          <p:cNvSpPr/>
+          <p:nvPr/>
+        </p:nvSpPr>
+        <p:spPr>
+          <a:xfrm>
+            <a:off x="457200" y="4041648"/>
+            <a:ext cx="8229600" cy="384048"/>
+          </a:xfrm>
+          <a:prstGeom prst="rect">
+            <a:avLst/>
+          </a:prstGeom>
+          <a:solidFill>
+            <a:srgbClr val="F5F5F5"/>
+          </a:solidFill>
+          <a:ln/>
+        </p:spPr>
+      </p:sp>
+      <p:sp>
+        <p:nvSpPr>
+          <p:cNvPr id="28" name="Shape 25"/>
+          <p:cNvSpPr/>
+          <p:nvPr/>
+        </p:nvSpPr>
+        <p:spPr>
+          <a:xfrm>
+            <a:off x="457200" y="4041648"/>
+            <a:ext cx="54864" cy="384048"/>
+          </a:xfrm>
+          <a:prstGeom prst="rect">
+            <a:avLst/>
+          </a:prstGeom>
+          <a:solidFill>
+            <a:srgbClr val="76B900"/>
+          </a:solidFill>
+          <a:ln/>
+        </p:spPr>
+      </p:sp>
+      <p:sp>
+        <p:nvSpPr>
+          <p:cNvPr id="29" name="Text 26"/>
+          <p:cNvSpPr/>
+          <p:nvPr/>
+        </p:nvSpPr>
+        <p:spPr>
+          <a:xfrm>
+            <a:off x="640080" y="4041648"/>
+            <a:ext cx="7955280" cy="384048"/>
           </a:xfrm>
           <a:prstGeom prst="rect">
             <a:avLst/>
@@ -16268,13 +19385,13 @@
                 <a:ea typeface="NVIDIA Sans" pitchFamily="34" charset="-122"/>
                 <a:cs typeface="NVIDIA Sans" pitchFamily="34" charset="-120"/>
               </a:rPr>
-              <a:t>Takeaway: </a:t>
+              <a:t>Why was it fp32 at all?  </a:t>
             </a:r>
             <a:pPr indent="0" marL="0">
               <a:buNone/>
             </a:pPr>
             <a:r>
-              <a:rPr lang="en-US" sz="1250" dirty="0">
+              <a:rPr lang="en-US" sz="1000" dirty="0">
                 <a:solidFill>
                   <a:srgbClr val="000000"/>
                 </a:solidFill>
@@ -16282,15 +19399,15 @@
                 <a:ea typeface="NVIDIA Sans" pitchFamily="34" charset="-122"/>
                 <a:cs typeface="NVIDIA Sans" pitchFamily="34" charset="-120"/>
               </a:rPr>
-              <a:t>audit precision policy and framework versions before touching any code — they set the floor everything else stands on.</a:t>
+              <a:t>Inherited caution for diffusion numerics. Only the timestep embedding and the loss math need fp32 — we kept exactly those in fp32 and moved the transformer body to bf16 (dit_dtype knob, one-line rollback).</a:t>
             </a:r>
-            <a:endParaRPr lang="en-US" sz="1250" dirty="0"/>
+            <a:endParaRPr lang="en-US" sz="1000" dirty="0"/>
           </a:p>
         </p:txBody>
       </p:sp>
       <p:sp>
         <p:nvSpPr>
-          <p:cNvPr id="17" name="Text 13"/>
+          <p:cNvPr id="30" name="Text 27"/>
           <p:cNvSpPr/>
           <p:nvPr/>
         </p:nvSpPr>
@@ -16329,7 +19446,7 @@
       </p:sp>
       <p:sp>
         <p:nvSpPr>
-          <p:cNvPr id="18" name="Text 14"/>
+          <p:cNvPr id="31" name="Text 28"/>
           <p:cNvSpPr/>
           <p:nvPr/>
         </p:nvSpPr>
@@ -16368,7 +19485,7 @@
       </p:sp>
       <p:sp>
         <p:nvSpPr>
-          <p:cNvPr id="19" name="Shape 15"/>
+          <p:cNvPr id="32" name="Shape 29"/>
           <p:cNvSpPr/>
           <p:nvPr/>
         </p:nvSpPr>
@@ -16388,14 +19505,14 @@
       </p:sp>
       <p:pic>
         <p:nvPicPr>
-          <p:cNvPr id="20" name="Image 2" descr="/app/logos/nvidia-logo-blk-sm.png">    </p:cNvPr>
+          <p:cNvPr id="33" name="Image 0" descr="/app/logos/nvidia-logo-blk-sm.png">    </p:cNvPr>
           <p:cNvPicPr>
             <a:picLocks noChangeAspect="1"/>
           </p:cNvPicPr>
           <p:nvPr/>
         </p:nvPicPr>
         <p:blipFill>
-          <a:blip r:embed="rId3"/>
+          <a:blip r:embed="rId2"/>
           <a:stretch>
             <a:fillRect/>
           </a:stretch>
@@ -16475,7 +19592,7 @@
                 <a:ea typeface="NVIDIA Sans" pitchFamily="34" charset="-122"/>
                 <a:cs typeface="NVIDIA Sans" pitchFamily="34" charset="-120"/>
               </a:rPr>
-              <a:t>Keep the GPU Fed: Pipeline &amp; Syncs</a:t>
+              <a:t>Fix 2+3 · Keep the GPU Fed: −117 ms</a:t>
             </a:r>
             <a:endParaRPr lang="en-US" sz="3000" dirty="0"/>
           </a:p>
@@ -16514,9 +19631,974 @@
                 <a:ea typeface="NVIDIA Sans" pitchFamily="34" charset="-122"/>
                 <a:cs typeface="NVIDIA Sans" pitchFamily="34" charset="-120"/>
               </a:rPr>
-              <a:t>545 → 398 ms.  CPU work off the critical path, no per-step syncs, right attention per stack</a:t>
+              <a:t>545 → 428 ms.  205 ms of every baseline step is GPU idle</a:t>
             </a:r>
             <a:endParaRPr lang="en-US" sz="1500" dirty="0"/>
+          </a:p>
+        </p:txBody>
+      </p:sp>
+      <p:sp>
+        <p:nvSpPr>
+          <p:cNvPr id="4" name="Text 2"/>
+          <p:cNvSpPr/>
+          <p:nvPr/>
+        </p:nvSpPr>
+        <p:spPr>
+          <a:xfrm>
+            <a:off x="457200" y="1280160"/>
+            <a:ext cx="3931920" cy="219456"/>
+          </a:xfrm>
+          <a:prstGeom prst="rect">
+            <a:avLst/>
+          </a:prstGeom>
+          <a:noFill/>
+          <a:ln/>
+        </p:spPr>
+        <p:txBody>
+          <a:bodyPr wrap="square" lIns="0" tIns="0" rIns="0" bIns="0" rtlCol="0" anchor="ctr"/>
+          <a:lstStyle/>
+          <a:p>
+            <a:pPr indent="0" marL="0">
+              <a:buNone/>
+            </a:pPr>
+            <a:r>
+              <a:rPr lang="en-US" sz="1150" b="1" dirty="0">
+                <a:solidFill>
+                  <a:srgbClr val="000000"/>
+                </a:solidFill>
+                <a:latin typeface="NVIDIA Sans" pitchFamily="34" charset="0"/>
+                <a:ea typeface="NVIDIA Sans" pitchFamily="34" charset="-122"/>
+                <a:cs typeface="NVIDIA Sans" pitchFamily="34" charset="-120"/>
+              </a:rPr>
+              <a:t>Before — everything serialized inside forward()</a:t>
+            </a:r>
+            <a:endParaRPr lang="en-US" sz="1150" dirty="0"/>
+          </a:p>
+        </p:txBody>
+      </p:sp>
+      <p:sp>
+        <p:nvSpPr>
+          <p:cNvPr id="5" name="Text 3"/>
+          <p:cNvSpPr/>
+          <p:nvPr/>
+        </p:nvSpPr>
+        <p:spPr>
+          <a:xfrm>
+            <a:off x="457200" y="1536192"/>
+            <a:ext cx="777240" cy="237744"/>
+          </a:xfrm>
+          <a:prstGeom prst="rect">
+            <a:avLst/>
+          </a:prstGeom>
+          <a:noFill/>
+          <a:ln/>
+        </p:spPr>
+        <p:txBody>
+          <a:bodyPr wrap="square" lIns="0" tIns="0" rIns="0" bIns="0" rtlCol="0" anchor="ctr"/>
+          <a:lstStyle/>
+          <a:p>
+            <a:pPr algn="r" indent="0" marL="0">
+              <a:buNone/>
+            </a:pPr>
+            <a:r>
+              <a:rPr lang="en-US" sz="850" dirty="0">
+                <a:solidFill>
+                  <a:srgbClr val="5E5E5E"/>
+                </a:solidFill>
+                <a:latin typeface="NVIDIA Sans" pitchFamily="34" charset="0"/>
+                <a:ea typeface="NVIDIA Sans" pitchFamily="34" charset="-122"/>
+                <a:cs typeface="NVIDIA Sans" pitchFamily="34" charset="-120"/>
+              </a:rPr>
+              <a:t>CPU</a:t>
+            </a:r>
+            <a:endParaRPr lang="en-US" sz="850" dirty="0"/>
+          </a:p>
+        </p:txBody>
+      </p:sp>
+      <p:sp>
+        <p:nvSpPr>
+          <p:cNvPr id="6" name="Shape 4"/>
+          <p:cNvSpPr/>
+          <p:nvPr/>
+        </p:nvSpPr>
+        <p:spPr>
+          <a:xfrm>
+            <a:off x="1325880" y="1536192"/>
+            <a:ext cx="3063240" cy="237744"/>
+          </a:xfrm>
+          <a:prstGeom prst="rect">
+            <a:avLst/>
+          </a:prstGeom>
+          <a:solidFill>
+            <a:srgbClr val="F0F0F0"/>
+          </a:solidFill>
+          <a:ln/>
+        </p:spPr>
+      </p:sp>
+      <p:sp>
+        <p:nvSpPr>
+          <p:cNvPr id="7" name="Shape 5"/>
+          <p:cNvSpPr/>
+          <p:nvPr/>
+        </p:nvSpPr>
+        <p:spPr>
+          <a:xfrm>
+            <a:off x="1325880" y="1554480"/>
+            <a:ext cx="980237" cy="201168"/>
+          </a:xfrm>
+          <a:prstGeom prst="rect">
+            <a:avLst/>
+          </a:prstGeom>
+          <a:solidFill>
+            <a:srgbClr val="8C8C8C"/>
+          </a:solidFill>
+          <a:ln/>
+        </p:spPr>
+      </p:sp>
+      <p:sp>
+        <p:nvSpPr>
+          <p:cNvPr id="8" name="Text 6"/>
+          <p:cNvSpPr/>
+          <p:nvPr/>
+        </p:nvSpPr>
+        <p:spPr>
+          <a:xfrm>
+            <a:off x="1325880" y="1554480"/>
+            <a:ext cx="980237" cy="201168"/>
+          </a:xfrm>
+          <a:prstGeom prst="rect">
+            <a:avLst/>
+          </a:prstGeom>
+          <a:noFill/>
+          <a:ln/>
+        </p:spPr>
+        <p:txBody>
+          <a:bodyPr wrap="square" lIns="0" tIns="0" rIns="0" bIns="0" rtlCol="0" anchor="ctr"/>
+          <a:lstStyle/>
+          <a:p>
+            <a:pPr algn="ctr" indent="0" marL="0">
+              <a:buNone/>
+            </a:pPr>
+            <a:r>
+              <a:rPr lang="en-US" sz="750" b="1" dirty="0">
+                <a:solidFill>
+                  <a:srgbClr val="FFFFFF"/>
+                </a:solidFill>
+                <a:latin typeface="NVIDIA Sans" pitchFamily="34" charset="0"/>
+                <a:ea typeface="NVIDIA Sans" pitchFamily="34" charset="-122"/>
+                <a:cs typeface="NVIDIA Sans" pitchFamily="34" charset="-120"/>
+              </a:rPr>
+              <a:t>preprocess ~40 ms</a:t>
+            </a:r>
+            <a:endParaRPr lang="en-US" sz="750" dirty="0"/>
+          </a:p>
+        </p:txBody>
+      </p:sp>
+      <p:sp>
+        <p:nvSpPr>
+          <p:cNvPr id="9" name="Shape 7"/>
+          <p:cNvSpPr/>
+          <p:nvPr/>
+        </p:nvSpPr>
+        <p:spPr>
+          <a:xfrm>
+            <a:off x="2244852" y="1554480"/>
+            <a:ext cx="122530" cy="201168"/>
+          </a:xfrm>
+          <a:prstGeom prst="rect">
+            <a:avLst/>
+          </a:prstGeom>
+          <a:solidFill>
+            <a:srgbClr val="890C58"/>
+          </a:solidFill>
+          <a:ln/>
+        </p:spPr>
+      </p:sp>
+      <p:sp>
+        <p:nvSpPr>
+          <p:cNvPr id="10" name="Shape 8"/>
+          <p:cNvSpPr/>
+          <p:nvPr/>
+        </p:nvSpPr>
+        <p:spPr>
+          <a:xfrm>
+            <a:off x="3010662" y="1554480"/>
+            <a:ext cx="122530" cy="201168"/>
+          </a:xfrm>
+          <a:prstGeom prst="rect">
+            <a:avLst/>
+          </a:prstGeom>
+          <a:solidFill>
+            <a:srgbClr val="890C58"/>
+          </a:solidFill>
+          <a:ln/>
+        </p:spPr>
+      </p:sp>
+      <p:sp>
+        <p:nvSpPr>
+          <p:cNvPr id="11" name="Shape 9"/>
+          <p:cNvSpPr/>
+          <p:nvPr/>
+        </p:nvSpPr>
+        <p:spPr>
+          <a:xfrm>
+            <a:off x="3868369" y="1554480"/>
+            <a:ext cx="122530" cy="201168"/>
+          </a:xfrm>
+          <a:prstGeom prst="rect">
+            <a:avLst/>
+          </a:prstGeom>
+          <a:solidFill>
+            <a:srgbClr val="890C58"/>
+          </a:solidFill>
+          <a:ln/>
+        </p:spPr>
+      </p:sp>
+      <p:sp>
+        <p:nvSpPr>
+          <p:cNvPr id="12" name="Text 10"/>
+          <p:cNvSpPr/>
+          <p:nvPr/>
+        </p:nvSpPr>
+        <p:spPr>
+          <a:xfrm>
+            <a:off x="457200" y="1847088"/>
+            <a:ext cx="777240" cy="237744"/>
+          </a:xfrm>
+          <a:prstGeom prst="rect">
+            <a:avLst/>
+          </a:prstGeom>
+          <a:noFill/>
+          <a:ln/>
+        </p:spPr>
+        <p:txBody>
+          <a:bodyPr wrap="square" lIns="0" tIns="0" rIns="0" bIns="0" rtlCol="0" anchor="ctr"/>
+          <a:lstStyle/>
+          <a:p>
+            <a:pPr algn="r" indent="0" marL="0">
+              <a:buNone/>
+            </a:pPr>
+            <a:r>
+              <a:rPr lang="en-US" sz="850" dirty="0">
+                <a:solidFill>
+                  <a:srgbClr val="5E5E5E"/>
+                </a:solidFill>
+                <a:latin typeface="NVIDIA Sans" pitchFamily="34" charset="0"/>
+                <a:ea typeface="NVIDIA Sans" pitchFamily="34" charset="-122"/>
+                <a:cs typeface="NVIDIA Sans" pitchFamily="34" charset="-120"/>
+              </a:rPr>
+              <a:t>H2D</a:t>
+            </a:r>
+            <a:endParaRPr lang="en-US" sz="850" dirty="0"/>
+          </a:p>
+        </p:txBody>
+      </p:sp>
+      <p:sp>
+        <p:nvSpPr>
+          <p:cNvPr id="13" name="Shape 11"/>
+          <p:cNvSpPr/>
+          <p:nvPr/>
+        </p:nvSpPr>
+        <p:spPr>
+          <a:xfrm>
+            <a:off x="1325880" y="1847088"/>
+            <a:ext cx="3063240" cy="237744"/>
+          </a:xfrm>
+          <a:prstGeom prst="rect">
+            <a:avLst/>
+          </a:prstGeom>
+          <a:solidFill>
+            <a:srgbClr val="F0F0F0"/>
+          </a:solidFill>
+          <a:ln/>
+        </p:spPr>
+      </p:sp>
+      <p:sp>
+        <p:nvSpPr>
+          <p:cNvPr id="14" name="Shape 12"/>
+          <p:cNvSpPr/>
+          <p:nvPr/>
+        </p:nvSpPr>
+        <p:spPr>
+          <a:xfrm>
+            <a:off x="2183587" y="1865376"/>
+            <a:ext cx="153162" cy="201168"/>
+          </a:xfrm>
+          <a:prstGeom prst="rect">
+            <a:avLst/>
+          </a:prstGeom>
+          <a:solidFill>
+            <a:srgbClr val="0071C5"/>
+          </a:solidFill>
+          <a:ln/>
+        </p:spPr>
+      </p:sp>
+      <p:sp>
+        <p:nvSpPr>
+          <p:cNvPr id="15" name="Text 13"/>
+          <p:cNvSpPr/>
+          <p:nvPr/>
+        </p:nvSpPr>
+        <p:spPr>
+          <a:xfrm>
+            <a:off x="457200" y="2157984"/>
+            <a:ext cx="777240" cy="237744"/>
+          </a:xfrm>
+          <a:prstGeom prst="rect">
+            <a:avLst/>
+          </a:prstGeom>
+          <a:noFill/>
+          <a:ln/>
+        </p:spPr>
+        <p:txBody>
+          <a:bodyPr wrap="square" lIns="0" tIns="0" rIns="0" bIns="0" rtlCol="0" anchor="ctr"/>
+          <a:lstStyle/>
+          <a:p>
+            <a:pPr algn="r" indent="0" marL="0">
+              <a:buNone/>
+            </a:pPr>
+            <a:r>
+              <a:rPr lang="en-US" sz="850" dirty="0">
+                <a:solidFill>
+                  <a:srgbClr val="5E5E5E"/>
+                </a:solidFill>
+                <a:latin typeface="NVIDIA Sans" pitchFamily="34" charset="0"/>
+                <a:ea typeface="NVIDIA Sans" pitchFamily="34" charset="-122"/>
+                <a:cs typeface="NVIDIA Sans" pitchFamily="34" charset="-120"/>
+              </a:rPr>
+              <a:t>GPU</a:t>
+            </a:r>
+            <a:endParaRPr lang="en-US" sz="850" dirty="0"/>
+          </a:p>
+        </p:txBody>
+      </p:sp>
+      <p:sp>
+        <p:nvSpPr>
+          <p:cNvPr id="16" name="Shape 14"/>
+          <p:cNvSpPr/>
+          <p:nvPr/>
+        </p:nvSpPr>
+        <p:spPr>
+          <a:xfrm>
+            <a:off x="1325880" y="2157984"/>
+            <a:ext cx="3063240" cy="237744"/>
+          </a:xfrm>
+          <a:prstGeom prst="rect">
+            <a:avLst/>
+          </a:prstGeom>
+          <a:solidFill>
+            <a:srgbClr val="F0F0F0"/>
+          </a:solidFill>
+          <a:ln/>
+        </p:spPr>
+      </p:sp>
+      <p:sp>
+        <p:nvSpPr>
+          <p:cNvPr id="17" name="Shape 15"/>
+          <p:cNvSpPr/>
+          <p:nvPr/>
+        </p:nvSpPr>
+        <p:spPr>
+          <a:xfrm>
+            <a:off x="2336749" y="2176272"/>
+            <a:ext cx="612648" cy="201168"/>
+          </a:xfrm>
+          <a:prstGeom prst="rect">
+            <a:avLst/>
+          </a:prstGeom>
+          <a:solidFill>
+            <a:srgbClr val="76B900"/>
+          </a:solidFill>
+          <a:ln/>
+        </p:spPr>
+      </p:sp>
+      <p:sp>
+        <p:nvSpPr>
+          <p:cNvPr id="18" name="Text 16"/>
+          <p:cNvSpPr/>
+          <p:nvPr/>
+        </p:nvSpPr>
+        <p:spPr>
+          <a:xfrm>
+            <a:off x="2336749" y="2176272"/>
+            <a:ext cx="612648" cy="201168"/>
+          </a:xfrm>
+          <a:prstGeom prst="rect">
+            <a:avLst/>
+          </a:prstGeom>
+          <a:noFill/>
+          <a:ln/>
+        </p:spPr>
+        <p:txBody>
+          <a:bodyPr wrap="square" lIns="0" tIns="0" rIns="0" bIns="0" rtlCol="0" anchor="ctr"/>
+          <a:lstStyle/>
+          <a:p>
+            <a:pPr algn="ctr" indent="0" marL="0">
+              <a:buNone/>
+            </a:pPr>
+            <a:r>
+              <a:rPr lang="en-US" sz="750" b="1" dirty="0">
+                <a:solidFill>
+                  <a:srgbClr val="FFFFFF"/>
+                </a:solidFill>
+                <a:latin typeface="NVIDIA Sans" pitchFamily="34" charset="0"/>
+                <a:ea typeface="NVIDIA Sans" pitchFamily="34" charset="-122"/>
+                <a:cs typeface="NVIDIA Sans" pitchFamily="34" charset="-120"/>
+              </a:rPr>
+              <a:t>fwd</a:t>
+            </a:r>
+            <a:endParaRPr lang="en-US" sz="750" dirty="0"/>
+          </a:p>
+        </p:txBody>
+      </p:sp>
+      <p:sp>
+        <p:nvSpPr>
+          <p:cNvPr id="19" name="Shape 17"/>
+          <p:cNvSpPr/>
+          <p:nvPr/>
+        </p:nvSpPr>
+        <p:spPr>
+          <a:xfrm>
+            <a:off x="3194456" y="2176272"/>
+            <a:ext cx="612648" cy="201168"/>
+          </a:xfrm>
+          <a:prstGeom prst="rect">
+            <a:avLst/>
+          </a:prstGeom>
+          <a:solidFill>
+            <a:srgbClr val="76B900"/>
+          </a:solidFill>
+          <a:ln/>
+        </p:spPr>
+      </p:sp>
+      <p:sp>
+        <p:nvSpPr>
+          <p:cNvPr id="20" name="Text 18"/>
+          <p:cNvSpPr/>
+          <p:nvPr/>
+        </p:nvSpPr>
+        <p:spPr>
+          <a:xfrm>
+            <a:off x="3194456" y="2176272"/>
+            <a:ext cx="612648" cy="201168"/>
+          </a:xfrm>
+          <a:prstGeom prst="rect">
+            <a:avLst/>
+          </a:prstGeom>
+          <a:noFill/>
+          <a:ln/>
+        </p:spPr>
+        <p:txBody>
+          <a:bodyPr wrap="square" lIns="0" tIns="0" rIns="0" bIns="0" rtlCol="0" anchor="ctr"/>
+          <a:lstStyle/>
+          <a:p>
+            <a:pPr algn="ctr" indent="0" marL="0">
+              <a:buNone/>
+            </a:pPr>
+            <a:r>
+              <a:rPr lang="en-US" sz="750" b="1" dirty="0">
+                <a:solidFill>
+                  <a:srgbClr val="FFFFFF"/>
+                </a:solidFill>
+                <a:latin typeface="NVIDIA Sans" pitchFamily="34" charset="0"/>
+                <a:ea typeface="NVIDIA Sans" pitchFamily="34" charset="-122"/>
+                <a:cs typeface="NVIDIA Sans" pitchFamily="34" charset="-120"/>
+              </a:rPr>
+              <a:t>bwd</a:t>
+            </a:r>
+            <a:endParaRPr lang="en-US" sz="750" dirty="0"/>
+          </a:p>
+        </p:txBody>
+      </p:sp>
+      <p:sp>
+        <p:nvSpPr>
+          <p:cNvPr id="21" name="Shape 19"/>
+          <p:cNvSpPr/>
+          <p:nvPr/>
+        </p:nvSpPr>
+        <p:spPr>
+          <a:xfrm>
+            <a:off x="4052164" y="2176272"/>
+            <a:ext cx="245059" cy="201168"/>
+          </a:xfrm>
+          <a:prstGeom prst="rect">
+            <a:avLst/>
+          </a:prstGeom>
+          <a:solidFill>
+            <a:srgbClr val="76B900"/>
+          </a:solidFill>
+          <a:ln/>
+        </p:spPr>
+      </p:sp>
+      <p:sp>
+        <p:nvSpPr>
+          <p:cNvPr id="22" name="Text 20"/>
+          <p:cNvSpPr/>
+          <p:nvPr/>
+        </p:nvSpPr>
+        <p:spPr>
+          <a:xfrm>
+            <a:off x="4754880" y="1280160"/>
+            <a:ext cx="3931920" cy="219456"/>
+          </a:xfrm>
+          <a:prstGeom prst="rect">
+            <a:avLst/>
+          </a:prstGeom>
+          <a:noFill/>
+          <a:ln/>
+        </p:spPr>
+        <p:txBody>
+          <a:bodyPr wrap="square" lIns="0" tIns="0" rIns="0" bIns="0" rtlCol="0" anchor="ctr"/>
+          <a:lstStyle/>
+          <a:p>
+            <a:pPr indent="0" marL="0">
+              <a:buNone/>
+            </a:pPr>
+            <a:r>
+              <a:rPr lang="en-US" sz="1150" b="1" dirty="0">
+                <a:solidFill>
+                  <a:srgbClr val="000000"/>
+                </a:solidFill>
+                <a:latin typeface="NVIDIA Sans" pitchFamily="34" charset="0"/>
+                <a:ea typeface="NVIDIA Sans" pitchFamily="34" charset="-122"/>
+                <a:cs typeface="NVIDIA Sans" pitchFamily="34" charset="-120"/>
+              </a:rPr>
+              <a:t>After — CPU work overlaps the previous step</a:t>
+            </a:r>
+            <a:endParaRPr lang="en-US" sz="1150" dirty="0"/>
+          </a:p>
+        </p:txBody>
+      </p:sp>
+      <p:sp>
+        <p:nvSpPr>
+          <p:cNvPr id="23" name="Text 21"/>
+          <p:cNvSpPr/>
+          <p:nvPr/>
+        </p:nvSpPr>
+        <p:spPr>
+          <a:xfrm>
+            <a:off x="4754880" y="1536192"/>
+            <a:ext cx="777240" cy="237744"/>
+          </a:xfrm>
+          <a:prstGeom prst="rect">
+            <a:avLst/>
+          </a:prstGeom>
+          <a:noFill/>
+          <a:ln/>
+        </p:spPr>
+        <p:txBody>
+          <a:bodyPr wrap="square" lIns="0" tIns="0" rIns="0" bIns="0" rtlCol="0" anchor="ctr"/>
+          <a:lstStyle/>
+          <a:p>
+            <a:pPr algn="r" indent="0" marL="0">
+              <a:buNone/>
+            </a:pPr>
+            <a:r>
+              <a:rPr lang="en-US" sz="850" dirty="0">
+                <a:solidFill>
+                  <a:srgbClr val="5E5E5E"/>
+                </a:solidFill>
+                <a:latin typeface="NVIDIA Sans" pitchFamily="34" charset="0"/>
+                <a:ea typeface="NVIDIA Sans" pitchFamily="34" charset="-122"/>
+                <a:cs typeface="NVIDIA Sans" pitchFamily="34" charset="-120"/>
+              </a:rPr>
+              <a:t>workers</a:t>
+            </a:r>
+            <a:endParaRPr lang="en-US" sz="850" dirty="0"/>
+          </a:p>
+        </p:txBody>
+      </p:sp>
+      <p:sp>
+        <p:nvSpPr>
+          <p:cNvPr id="24" name="Shape 22"/>
+          <p:cNvSpPr/>
+          <p:nvPr/>
+        </p:nvSpPr>
+        <p:spPr>
+          <a:xfrm>
+            <a:off x="5623560" y="1536192"/>
+            <a:ext cx="3063240" cy="237744"/>
+          </a:xfrm>
+          <a:prstGeom prst="rect">
+            <a:avLst/>
+          </a:prstGeom>
+          <a:solidFill>
+            <a:srgbClr val="F0F0F0"/>
+          </a:solidFill>
+          <a:ln/>
+        </p:spPr>
+      </p:sp>
+      <p:sp>
+        <p:nvSpPr>
+          <p:cNvPr id="25" name="Shape 23"/>
+          <p:cNvSpPr/>
+          <p:nvPr/>
+        </p:nvSpPr>
+        <p:spPr>
+          <a:xfrm>
+            <a:off x="5623560" y="1554480"/>
+            <a:ext cx="2879446" cy="201168"/>
+          </a:xfrm>
+          <a:prstGeom prst="rect">
+            <a:avLst/>
+          </a:prstGeom>
+          <a:solidFill>
+            <a:srgbClr val="0071C5"/>
+          </a:solidFill>
+          <a:ln/>
+        </p:spPr>
+      </p:sp>
+      <p:sp>
+        <p:nvSpPr>
+          <p:cNvPr id="26" name="Text 24"/>
+          <p:cNvSpPr/>
+          <p:nvPr/>
+        </p:nvSpPr>
+        <p:spPr>
+          <a:xfrm>
+            <a:off x="5623560" y="1554480"/>
+            <a:ext cx="2879446" cy="201168"/>
+          </a:xfrm>
+          <a:prstGeom prst="rect">
+            <a:avLst/>
+          </a:prstGeom>
+          <a:noFill/>
+          <a:ln/>
+        </p:spPr>
+        <p:txBody>
+          <a:bodyPr wrap="square" lIns="0" tIns="0" rIns="0" bIns="0" rtlCol="0" anchor="ctr"/>
+          <a:lstStyle/>
+          <a:p>
+            <a:pPr algn="ctr" indent="0" marL="0">
+              <a:buNone/>
+            </a:pPr>
+            <a:r>
+              <a:rPr lang="en-US" sz="750" b="1" dirty="0">
+                <a:solidFill>
+                  <a:srgbClr val="FFFFFF"/>
+                </a:solidFill>
+                <a:latin typeface="NVIDIA Sans" pitchFamily="34" charset="0"/>
+                <a:ea typeface="NVIDIA Sans" pitchFamily="34" charset="-122"/>
+                <a:cs typeface="NVIDIA Sans" pitchFamily="34" charset="-120"/>
+              </a:rPr>
+              <a:t>preprocess batch N+1 (8 DataLoader workers, pinned)</a:t>
+            </a:r>
+            <a:endParaRPr lang="en-US" sz="750" dirty="0"/>
+          </a:p>
+        </p:txBody>
+      </p:sp>
+      <p:sp>
+        <p:nvSpPr>
+          <p:cNvPr id="27" name="Text 25"/>
+          <p:cNvSpPr/>
+          <p:nvPr/>
+        </p:nvSpPr>
+        <p:spPr>
+          <a:xfrm>
+            <a:off x="4754880" y="1847088"/>
+            <a:ext cx="777240" cy="237744"/>
+          </a:xfrm>
+          <a:prstGeom prst="rect">
+            <a:avLst/>
+          </a:prstGeom>
+          <a:noFill/>
+          <a:ln/>
+        </p:spPr>
+        <p:txBody>
+          <a:bodyPr wrap="square" lIns="0" tIns="0" rIns="0" bIns="0" rtlCol="0" anchor="ctr"/>
+          <a:lstStyle/>
+          <a:p>
+            <a:pPr algn="r" indent="0" marL="0">
+              <a:buNone/>
+            </a:pPr>
+            <a:r>
+              <a:rPr lang="en-US" sz="850" dirty="0">
+                <a:solidFill>
+                  <a:srgbClr val="5E5E5E"/>
+                </a:solidFill>
+                <a:latin typeface="NVIDIA Sans" pitchFamily="34" charset="0"/>
+                <a:ea typeface="NVIDIA Sans" pitchFamily="34" charset="-122"/>
+                <a:cs typeface="NVIDIA Sans" pitchFamily="34" charset="-120"/>
+              </a:rPr>
+              <a:t>H2D</a:t>
+            </a:r>
+            <a:endParaRPr lang="en-US" sz="850" dirty="0"/>
+          </a:p>
+        </p:txBody>
+      </p:sp>
+      <p:sp>
+        <p:nvSpPr>
+          <p:cNvPr id="28" name="Shape 26"/>
+          <p:cNvSpPr/>
+          <p:nvPr/>
+        </p:nvSpPr>
+        <p:spPr>
+          <a:xfrm>
+            <a:off x="5623560" y="1847088"/>
+            <a:ext cx="3063240" cy="237744"/>
+          </a:xfrm>
+          <a:prstGeom prst="rect">
+            <a:avLst/>
+          </a:prstGeom>
+          <a:solidFill>
+            <a:srgbClr val="F0F0F0"/>
+          </a:solidFill>
+          <a:ln/>
+        </p:spPr>
+      </p:sp>
+      <p:sp>
+        <p:nvSpPr>
+          <p:cNvPr id="29" name="Shape 27"/>
+          <p:cNvSpPr/>
+          <p:nvPr/>
+        </p:nvSpPr>
+        <p:spPr>
+          <a:xfrm>
+            <a:off x="5623560" y="1865376"/>
+            <a:ext cx="183794" cy="201168"/>
+          </a:xfrm>
+          <a:prstGeom prst="rect">
+            <a:avLst/>
+          </a:prstGeom>
+          <a:solidFill>
+            <a:srgbClr val="0071C5"/>
+          </a:solidFill>
+          <a:ln/>
+        </p:spPr>
+      </p:sp>
+      <p:sp>
+        <p:nvSpPr>
+          <p:cNvPr id="30" name="Text 28"/>
+          <p:cNvSpPr/>
+          <p:nvPr/>
+        </p:nvSpPr>
+        <p:spPr>
+          <a:xfrm>
+            <a:off x="4754880" y="2157984"/>
+            <a:ext cx="777240" cy="237744"/>
+          </a:xfrm>
+          <a:prstGeom prst="rect">
+            <a:avLst/>
+          </a:prstGeom>
+          <a:noFill/>
+          <a:ln/>
+        </p:spPr>
+        <p:txBody>
+          <a:bodyPr wrap="square" lIns="0" tIns="0" rIns="0" bIns="0" rtlCol="0" anchor="ctr"/>
+          <a:lstStyle/>
+          <a:p>
+            <a:pPr algn="r" indent="0" marL="0">
+              <a:buNone/>
+            </a:pPr>
+            <a:r>
+              <a:rPr lang="en-US" sz="850" dirty="0">
+                <a:solidFill>
+                  <a:srgbClr val="5E5E5E"/>
+                </a:solidFill>
+                <a:latin typeface="NVIDIA Sans" pitchFamily="34" charset="0"/>
+                <a:ea typeface="NVIDIA Sans" pitchFamily="34" charset="-122"/>
+                <a:cs typeface="NVIDIA Sans" pitchFamily="34" charset="-120"/>
+              </a:rPr>
+              <a:t>GPU</a:t>
+            </a:r>
+            <a:endParaRPr lang="en-US" sz="850" dirty="0"/>
+          </a:p>
+        </p:txBody>
+      </p:sp>
+      <p:sp>
+        <p:nvSpPr>
+          <p:cNvPr id="31" name="Shape 29"/>
+          <p:cNvSpPr/>
+          <p:nvPr/>
+        </p:nvSpPr>
+        <p:spPr>
+          <a:xfrm>
+            <a:off x="5623560" y="2157984"/>
+            <a:ext cx="3063240" cy="237744"/>
+          </a:xfrm>
+          <a:prstGeom prst="rect">
+            <a:avLst/>
+          </a:prstGeom>
+          <a:solidFill>
+            <a:srgbClr val="F0F0F0"/>
+          </a:solidFill>
+          <a:ln/>
+        </p:spPr>
+      </p:sp>
+      <p:sp>
+        <p:nvSpPr>
+          <p:cNvPr id="32" name="Shape 30"/>
+          <p:cNvSpPr/>
+          <p:nvPr/>
+        </p:nvSpPr>
+        <p:spPr>
+          <a:xfrm>
+            <a:off x="5684825" y="2176272"/>
+            <a:ext cx="980237" cy="201168"/>
+          </a:xfrm>
+          <a:prstGeom prst="rect">
+            <a:avLst/>
+          </a:prstGeom>
+          <a:solidFill>
+            <a:srgbClr val="76B900"/>
+          </a:solidFill>
+          <a:ln/>
+        </p:spPr>
+      </p:sp>
+      <p:sp>
+        <p:nvSpPr>
+          <p:cNvPr id="33" name="Text 31"/>
+          <p:cNvSpPr/>
+          <p:nvPr/>
+        </p:nvSpPr>
+        <p:spPr>
+          <a:xfrm>
+            <a:off x="5684825" y="2176272"/>
+            <a:ext cx="980237" cy="201168"/>
+          </a:xfrm>
+          <a:prstGeom prst="rect">
+            <a:avLst/>
+          </a:prstGeom>
+          <a:noFill/>
+          <a:ln/>
+        </p:spPr>
+        <p:txBody>
+          <a:bodyPr wrap="square" lIns="0" tIns="0" rIns="0" bIns="0" rtlCol="0" anchor="ctr"/>
+          <a:lstStyle/>
+          <a:p>
+            <a:pPr algn="ctr" indent="0" marL="0">
+              <a:buNone/>
+            </a:pPr>
+            <a:r>
+              <a:rPr lang="en-US" sz="750" b="1" dirty="0">
+                <a:solidFill>
+                  <a:srgbClr val="FFFFFF"/>
+                </a:solidFill>
+                <a:latin typeface="NVIDIA Sans" pitchFamily="34" charset="0"/>
+                <a:ea typeface="NVIDIA Sans" pitchFamily="34" charset="-122"/>
+                <a:cs typeface="NVIDIA Sans" pitchFamily="34" charset="-120"/>
+              </a:rPr>
+              <a:t>fwd</a:t>
+            </a:r>
+            <a:endParaRPr lang="en-US" sz="750" dirty="0"/>
+          </a:p>
+        </p:txBody>
+      </p:sp>
+      <p:sp>
+        <p:nvSpPr>
+          <p:cNvPr id="34" name="Shape 32"/>
+          <p:cNvSpPr/>
+          <p:nvPr/>
+        </p:nvSpPr>
+        <p:spPr>
+          <a:xfrm>
+            <a:off x="6695694" y="2176272"/>
+            <a:ext cx="1133399" cy="201168"/>
+          </a:xfrm>
+          <a:prstGeom prst="rect">
+            <a:avLst/>
+          </a:prstGeom>
+          <a:solidFill>
+            <a:srgbClr val="76B900"/>
+          </a:solidFill>
+          <a:ln/>
+        </p:spPr>
+      </p:sp>
+      <p:sp>
+        <p:nvSpPr>
+          <p:cNvPr id="35" name="Text 33"/>
+          <p:cNvSpPr/>
+          <p:nvPr/>
+        </p:nvSpPr>
+        <p:spPr>
+          <a:xfrm>
+            <a:off x="6695694" y="2176272"/>
+            <a:ext cx="1133399" cy="201168"/>
+          </a:xfrm>
+          <a:prstGeom prst="rect">
+            <a:avLst/>
+          </a:prstGeom>
+          <a:noFill/>
+          <a:ln/>
+        </p:spPr>
+        <p:txBody>
+          <a:bodyPr wrap="square" lIns="0" tIns="0" rIns="0" bIns="0" rtlCol="0" anchor="ctr"/>
+          <a:lstStyle/>
+          <a:p>
+            <a:pPr algn="ctr" indent="0" marL="0">
+              <a:buNone/>
+            </a:pPr>
+            <a:r>
+              <a:rPr lang="en-US" sz="750" b="1" dirty="0">
+                <a:solidFill>
+                  <a:srgbClr val="FFFFFF"/>
+                </a:solidFill>
+                <a:latin typeface="NVIDIA Sans" pitchFamily="34" charset="0"/>
+                <a:ea typeface="NVIDIA Sans" pitchFamily="34" charset="-122"/>
+                <a:cs typeface="NVIDIA Sans" pitchFamily="34" charset="-120"/>
+              </a:rPr>
+              <a:t>bwd</a:t>
+            </a:r>
+            <a:endParaRPr lang="en-US" sz="750" dirty="0"/>
+          </a:p>
+        </p:txBody>
+      </p:sp>
+      <p:sp>
+        <p:nvSpPr>
+          <p:cNvPr id="36" name="Shape 34"/>
+          <p:cNvSpPr/>
+          <p:nvPr/>
+        </p:nvSpPr>
+        <p:spPr>
+          <a:xfrm>
+            <a:off x="7859725" y="2176272"/>
+            <a:ext cx="398221" cy="201168"/>
+          </a:xfrm>
+          <a:prstGeom prst="rect">
+            <a:avLst/>
+          </a:prstGeom>
+          <a:solidFill>
+            <a:srgbClr val="76B900"/>
+          </a:solidFill>
+          <a:ln/>
+        </p:spPr>
+      </p:sp>
+      <p:sp>
+        <p:nvSpPr>
+          <p:cNvPr id="37" name="Text 35"/>
+          <p:cNvSpPr/>
+          <p:nvPr/>
+        </p:nvSpPr>
+        <p:spPr>
+          <a:xfrm>
+            <a:off x="457200" y="2505456"/>
+            <a:ext cx="8229600" cy="201168"/>
+          </a:xfrm>
+          <a:prstGeom prst="rect">
+            <a:avLst/>
+          </a:prstGeom>
+          <a:noFill/>
+          <a:ln/>
+        </p:spPr>
+        <p:txBody>
+          <a:bodyPr wrap="square" lIns="0" tIns="0" rIns="0" bIns="0" rtlCol="0" anchor="ctr"/>
+          <a:lstStyle/>
+          <a:p>
+            <a:pPr indent="0" marL="0">
+              <a:buNone/>
+            </a:pPr>
+            <a:r>
+              <a:rPr lang="en-US" sz="900" i="1" dirty="0">
+                <a:solidFill>
+                  <a:srgbClr val="890C58"/>
+                </a:solidFill>
+                <a:latin typeface="NVIDIA Sans" pitchFamily="34" charset="0"/>
+                <a:ea typeface="NVIDIA Sans" pitchFamily="34" charset="-122"/>
+                <a:cs typeface="NVIDIA Sans" pitchFamily="34" charset="-120"/>
+              </a:rPr>
+              <a:t>red = per-step syncs (loss readback, DS timers, mm-merge check): each one drains the launch pipeline and strands the GPU</a:t>
+            </a:r>
+            <a:endParaRPr lang="en-US" sz="900" dirty="0"/>
           </a:p>
         </p:txBody>
       </p:sp>
@@ -16535,7 +20617,7 @@
           </p:nvPr>
         </p:nvGraphicFramePr>
         <p:xfrm>
-          <a:off x="457200" y="1371600"/>
+          <a:off x="457200" y="2761488"/>
           <a:ext cx="8229600" cy="914400"/>
         </p:xfrm>
         <a:graphic>
@@ -16543,11 +20625,11 @@
             <a:tbl>
               <a:tblPr/>
               <a:tblGrid>
-                <a:gridCol w="2148840"/>
-                <a:gridCol w="4434840"/>
-                <a:gridCol w="1645920"/>
+                <a:gridCol w="1737360"/>
+                <a:gridCol w="4480560"/>
+                <a:gridCol w="2011680"/>
               </a:tblGrid>
-              <a:tr h="475488">
+              <a:tr h="237744">
                 <a:tc>
                   <a:txBody>
                     <a:bodyPr/>
@@ -16557,7 +20639,7 @@
                         <a:buNone/>
                       </a:pPr>
                       <a:r>
-                        <a:rPr lang="en-US" sz="1100" b="1" dirty="0">
+                        <a:rPr lang="en-US" sz="950" b="1" dirty="0">
                           <a:solidFill>
                             <a:srgbClr val="000000"/>
                           </a:solidFill>
@@ -16565,9 +20647,9 @@
                           <a:ea typeface="NVIDIA Sans" pitchFamily="34" charset="-122"/>
                           <a:cs typeface="NVIDIA Sans" pitchFamily="34" charset="-120"/>
                         </a:rPr>
-                        <a:t>Preprocess in DataLoader workers</a:t>
+                        <a:t>Preprocess in workers</a:t>
                       </a:r>
-                      <a:endParaRPr lang="en-US" sz="1100" dirty="0">
+                      <a:endParaRPr lang="en-US" sz="950" dirty="0">
                         <a:latin typeface="NVIDIA Sans" charset="0"/>
                         <a:ea typeface="NVIDIA Sans" charset="0"/>
                         <a:cs typeface="NVIDIA Sans" charset="0"/>
@@ -16622,7 +20704,7 @@
                         <a:buNone/>
                       </a:pPr>
                       <a:r>
-                        <a:rPr lang="en-US" sz="1000" dirty="0">
+                        <a:rPr lang="en-US" sz="900" dirty="0">
                           <a:solidFill>
                             <a:srgbClr val="000000"/>
                           </a:solidFill>
@@ -16630,9 +20712,9 @@
                           <a:ea typeface="NVIDIA Sans" pitchFamily="34" charset="-122"/>
                           <a:cs typeface="NVIDIA Sans" pitchFamily="34" charset="-120"/>
                         </a:rPr>
-                        <a:t>HF processor (tokenize + image patches) runs in 8 workers, overlapped with the previous step's GPU work; batches arrive as pinned CPU tensors</a:t>
+                        <a:t>HF processor (image patches + tokenize) runs in 8 workers, overlapped with the previous step</a:t>
                       </a:r>
-                      <a:endParaRPr lang="en-US" sz="1000" dirty="0">
+                      <a:endParaRPr lang="en-US" sz="900" dirty="0">
                         <a:latin typeface="NVIDIA Sans" charset="0"/>
                         <a:ea typeface="NVIDIA Sans" charset="0"/>
                         <a:cs typeface="NVIDIA Sans" charset="0"/>
@@ -16687,7 +20769,7 @@
                         <a:buNone/>
                       </a:pPr>
                       <a:r>
-                        <a:rPr lang="en-US" sz="1000" b="1" dirty="0">
+                        <a:rPr lang="en-US" sz="900" b="1" dirty="0">
                           <a:solidFill>
                             <a:srgbClr val="008564"/>
                           </a:solidFill>
@@ -16695,9 +20777,9 @@
                           <a:ea typeface="NVIDIA Sans" pitchFamily="34" charset="-122"/>
                           <a:cs typeface="NVIDIA Sans" pitchFamily="34" charset="-120"/>
                         </a:rPr>
-                        <a:t>~40 ms of forward-path CPU removed</a:t>
+                        <a:t>~40 ms off the critical path</a:t>
                       </a:r>
-                      <a:endParaRPr lang="en-US" sz="1000" dirty="0">
+                      <a:endParaRPr lang="en-US" sz="900" dirty="0">
                         <a:latin typeface="NVIDIA Sans" charset="0"/>
                         <a:ea typeface="NVIDIA Sans" charset="0"/>
                         <a:cs typeface="NVIDIA Sans" charset="0"/>
@@ -16744,7 +20826,7 @@
                   </a:tcPr>
                 </a:tc>
               </a:tr>
-              <a:tr h="475488">
+              <a:tr h="237744">
                 <a:tc>
                   <a:txBody>
                     <a:bodyPr/>
@@ -16754,7 +20836,7 @@
                         <a:buNone/>
                       </a:pPr>
                       <a:r>
-                        <a:rPr lang="en-US" sz="1100" b="1" dirty="0">
+                        <a:rPr lang="en-US" sz="950" b="1" dirty="0">
                           <a:solidFill>
                             <a:srgbClr val="000000"/>
                           </a:solidFill>
@@ -16762,9 +20844,9 @@
                           <a:ea typeface="NVIDIA Sans" pitchFamily="34" charset="-122"/>
                           <a:cs typeface="NVIDIA Sans" pitchFamily="34" charset="-120"/>
                         </a:rPr>
-                        <a:t>Side-stream H2D copies</a:t>
+                        <a:t>Side-stream H2D</a:t>
                       </a:r>
-                      <a:endParaRPr lang="en-US" sz="1100" dirty="0">
+                      <a:endParaRPr lang="en-US" sz="950" dirty="0">
                         <a:latin typeface="NVIDIA Sans" charset="0"/>
                         <a:ea typeface="NVIDIA Sans" charset="0"/>
                         <a:cs typeface="NVIDIA Sans" charset="0"/>
@@ -16819,7 +20901,7 @@
                         <a:buNone/>
                       </a:pPr>
                       <a:r>
-                        <a:rPr lang="en-US" sz="1000" dirty="0">
+                        <a:rPr lang="en-US" sz="900" dirty="0">
                           <a:solidFill>
                             <a:srgbClr val="000000"/>
                           </a:solidFill>
@@ -16827,9 +20909,9 @@
                           <a:ea typeface="NVIDIA Sans" pitchFamily="34" charset="-122"/>
                           <a:cs typeface="NVIDIA Sans" pitchFamily="34" charset="-120"/>
                         </a:rPr>
-                        <a:t>Pinned host batch + dedicated copy stream overlaps upload with the ZeRO-2 optimizer tail</a:t>
+                        <a:t>pinned host batch + dedicated copy stream, overlaps the ZeRO-2 optimizer tail</a:t>
                       </a:r>
-                      <a:endParaRPr lang="en-US" sz="1000" dirty="0">
+                      <a:endParaRPr lang="en-US" sz="900" dirty="0">
                         <a:latin typeface="NVIDIA Sans" charset="0"/>
                         <a:ea typeface="NVIDIA Sans" charset="0"/>
                         <a:cs typeface="NVIDIA Sans" charset="0"/>
@@ -16884,7 +20966,7 @@
                         <a:buNone/>
                       </a:pPr>
                       <a:r>
-                        <a:rPr lang="en-US" sz="1000" b="1" dirty="0">
+                        <a:rPr lang="en-US" sz="900" b="1" dirty="0">
                           <a:solidFill>
                             <a:srgbClr val="008564"/>
                           </a:solidFill>
@@ -16892,9 +20974,9 @@
                           <a:ea typeface="NVIDIA Sans" pitchFamily="34" charset="-122"/>
                           <a:cs typeface="NVIDIA Sans" pitchFamily="34" charset="-120"/>
                         </a:rPr>
-                        <a:t>H2D off the critical path</a:t>
+                        <a:t>upload hidden</a:t>
                       </a:r>
-                      <a:endParaRPr lang="en-US" sz="1000" dirty="0">
+                      <a:endParaRPr lang="en-US" sz="900" dirty="0">
                         <a:latin typeface="NVIDIA Sans" charset="0"/>
                         <a:ea typeface="NVIDIA Sans" charset="0"/>
                         <a:cs typeface="NVIDIA Sans" charset="0"/>
@@ -16941,7 +21023,7 @@
                   </a:tcPr>
                 </a:tc>
               </a:tr>
-              <a:tr h="475488">
+              <a:tr h="237744">
                 <a:tc>
                   <a:txBody>
                     <a:bodyPr/>
@@ -16951,7 +21033,7 @@
                         <a:buNone/>
                       </a:pPr>
                       <a:r>
-                        <a:rPr lang="en-US" sz="1100" b="1" dirty="0">
+                        <a:rPr lang="en-US" sz="950" b="1" dirty="0">
                           <a:solidFill>
                             <a:srgbClr val="000000"/>
                           </a:solidFill>
@@ -16961,7 +21043,7 @@
                         </a:rPr>
                         <a:t>Sync-free logging</a:t>
                       </a:r>
-                      <a:endParaRPr lang="en-US" sz="1100" dirty="0">
+                      <a:endParaRPr lang="en-US" sz="950" dirty="0">
                         <a:latin typeface="NVIDIA Sans" charset="0"/>
                         <a:ea typeface="NVIDIA Sans" charset="0"/>
                         <a:cs typeface="NVIDIA Sans" charset="0"/>
@@ -17016,7 +21098,7 @@
                         <a:buNone/>
                       </a:pPr>
                       <a:r>
-                        <a:rPr lang="en-US" sz="1000" dirty="0">
+                        <a:rPr lang="en-US" sz="900" dirty="0">
                           <a:solidFill>
                             <a:srgbClr val="000000"/>
                           </a:solidFill>
@@ -17026,7 +21108,7 @@
                         </a:rPr>
                         <a:t>DeepSpeed timers unsynchronized; loss .item() only on logging steps</a:t>
                       </a:r>
-                      <a:endParaRPr lang="en-US" sz="1000" dirty="0">
+                      <a:endParaRPr lang="en-US" sz="900" dirty="0">
                         <a:latin typeface="NVIDIA Sans" charset="0"/>
                         <a:ea typeface="NVIDIA Sans" charset="0"/>
                         <a:cs typeface="NVIDIA Sans" charset="0"/>
@@ -17081,7 +21163,7 @@
                         <a:buNone/>
                       </a:pPr>
                       <a:r>
-                        <a:rPr lang="en-US" sz="1000" b="1" dirty="0">
+                        <a:rPr lang="en-US" sz="900" b="1" dirty="0">
                           <a:solidFill>
                             <a:srgbClr val="008564"/>
                           </a:solidFill>
@@ -17089,9 +21171,9 @@
                           <a:ea typeface="NVIDIA Sans" pitchFamily="34" charset="-122"/>
                           <a:cs typeface="NVIDIA Sans" pitchFamily="34" charset="-120"/>
                         </a:rPr>
-                        <a:t>removes 2 device syncs / step</a:t>
+                        <a:t>2 device syncs / step removed</a:t>
                       </a:r>
-                      <a:endParaRPr lang="en-US" sz="1000" dirty="0">
+                      <a:endParaRPr lang="en-US" sz="900" dirty="0">
                         <a:latin typeface="NVIDIA Sans" charset="0"/>
                         <a:ea typeface="NVIDIA Sans" charset="0"/>
                         <a:cs typeface="NVIDIA Sans" charset="0"/>
@@ -17138,7 +21220,7 @@
                   </a:tcPr>
                 </a:tc>
               </a:tr>
-              <a:tr h="475488">
+              <a:tr h="237744">
                 <a:tc>
                   <a:txBody>
                     <a:bodyPr/>
@@ -17148,7 +21230,7 @@
                         <a:buNone/>
                       </a:pPr>
                       <a:r>
-                        <a:rPr lang="en-US" sz="1100" b="1" dirty="0">
+                        <a:rPr lang="en-US" sz="950" b="1" dirty="0">
                           <a:solidFill>
                             <a:srgbClr val="000000"/>
                           </a:solidFill>
@@ -17158,7 +21240,7 @@
                         </a:rPr>
                         <a:t>MRoPE position-id cache</a:t>
                       </a:r>
-                      <a:endParaRPr lang="en-US" sz="1100" dirty="0">
+                      <a:endParaRPr lang="en-US" sz="950" dirty="0">
                         <a:latin typeface="NVIDIA Sans" charset="0"/>
                         <a:ea typeface="NVIDIA Sans" charset="0"/>
                         <a:cs typeface="NVIDIA Sans" charset="0"/>
@@ -17213,7 +21295,7 @@
                         <a:buNone/>
                       </a:pPr>
                       <a:r>
-                        <a:rPr lang="en-US" sz="1000" dirty="0">
+                        <a:rPr lang="en-US" sz="900" dirty="0">
                           <a:solidFill>
                             <a:srgbClr val="000000"/>
                           </a:solidFill>
@@ -17221,9 +21303,9 @@
                           <a:ea typeface="NVIDIA Sans" pitchFamily="34" charset="-122"/>
                           <a:cs typeface="NVIDIA Sans" pitchFamily="34" charset="-120"/>
                         </a:rPr>
-                        <a:t>3D position ids precomputed on CPU and cached — they depend only on the image grid</a:t>
+                        <a:t>3D position ids precomputed on CPU, cached by image grid</a:t>
                       </a:r>
-                      <a:endParaRPr lang="en-US" sz="1000" dirty="0">
+                      <a:endParaRPr lang="en-US" sz="900" dirty="0">
                         <a:latin typeface="NVIDIA Sans" charset="0"/>
                         <a:ea typeface="NVIDIA Sans" charset="0"/>
                         <a:cs typeface="NVIDIA Sans" charset="0"/>
@@ -17278,7 +21360,7 @@
                         <a:buNone/>
                       </a:pPr>
                       <a:r>
-                        <a:rPr lang="en-US" sz="1000" b="1" dirty="0">
+                        <a:rPr lang="en-US" sz="900" b="1" dirty="0">
                           <a:solidFill>
                             <a:srgbClr val="008564"/>
                           </a:solidFill>
@@ -17288,7 +21370,7 @@
                         </a:rPr>
                         <a:t>~13 ms sync eliminated</a:t>
                       </a:r>
-                      <a:endParaRPr lang="en-US" sz="1000" dirty="0">
+                      <a:endParaRPr lang="en-US" sz="900" dirty="0">
                         <a:latin typeface="NVIDIA Sans" charset="0"/>
                         <a:ea typeface="NVIDIA Sans" charset="0"/>
                         <a:cs typeface="NVIDIA Sans" charset="0"/>
@@ -17335,7 +21417,7 @@
                   </a:tcPr>
                 </a:tc>
               </a:tr>
-              <a:tr h="475488">
+              <a:tr h="237744">
                 <a:tc>
                   <a:txBody>
                     <a:bodyPr/>
@@ -17345,7 +21427,7 @@
                         <a:buNone/>
                       </a:pPr>
                       <a:r>
-                        <a:rPr lang="en-US" sz="1100" b="1" dirty="0">
+                        <a:rPr lang="en-US" sz="950" b="1" dirty="0">
                           <a:solidFill>
                             <a:srgbClr val="000000"/>
                           </a:solidFill>
@@ -17353,9 +21435,9 @@
                           <a:ea typeface="NVIDIA Sans" pitchFamily="34" charset="-122"/>
                           <a:cs typeface="NVIDIA Sans" pitchFamily="34" charset="-120"/>
                         </a:rPr>
-                        <a:t>Mixed attention</a:t>
+                        <a:t>+ Mixed attention</a:t>
                       </a:r>
-                      <a:endParaRPr lang="en-US" sz="1100" dirty="0">
+                      <a:endParaRPr lang="en-US" sz="950" dirty="0">
                         <a:latin typeface="NVIDIA Sans" charset="0"/>
                         <a:ea typeface="NVIDIA Sans" charset="0"/>
                         <a:cs typeface="NVIDIA Sans" charset="0"/>
@@ -17410,7 +21492,7 @@
                         <a:buNone/>
                       </a:pPr>
                       <a:r>
-                        <a:rPr lang="en-US" sz="1000" dirty="0">
+                        <a:rPr lang="en-US" sz="900" dirty="0">
                           <a:solidFill>
                             <a:srgbClr val="000000"/>
                           </a:solidFill>
@@ -17418,9 +21500,9 @@
                           <a:ea typeface="NVIDIA Sans" pitchFamily="34" charset="-122"/>
                           <a:cs typeface="NVIDIA Sans" pitchFamily="34" charset="-120"/>
                         </a:rPr>
-                        <a:t>Vision tower on FA2 varlen (one kernel per layer for all 16 images); text stays SDPA — at seq 192 FA2's unpad/repad is a net loss (measured)</a:t>
+                        <a:t>vision tower FA2 varlen (16 images / kernel); text stays SDPA — full FA2 measured slower at seq 192</a:t>
                       </a:r>
-                      <a:endParaRPr lang="en-US" sz="1000" dirty="0">
+                      <a:endParaRPr lang="en-US" sz="900" dirty="0">
                         <a:latin typeface="NVIDIA Sans" charset="0"/>
                         <a:ea typeface="NVIDIA Sans" charset="0"/>
                         <a:cs typeface="NVIDIA Sans" charset="0"/>
@@ -17475,7 +21557,7 @@
                         <a:buNone/>
                       </a:pPr>
                       <a:r>
-                        <a:rPr lang="en-US" sz="1000" b="1" dirty="0">
+                        <a:rPr lang="en-US" sz="900" b="1" dirty="0">
                           <a:solidFill>
                             <a:srgbClr val="008564"/>
                           </a:solidFill>
@@ -17483,9 +21565,9 @@
                           <a:ea typeface="NVIDIA Sans" pitchFamily="34" charset="-122"/>
                           <a:cs typeface="NVIDIA Sans" pitchFamily="34" charset="-120"/>
                         </a:rPr>
-                        <a:t>−30 ms</a:t>
+                        <a:t>−30 ms (428 → 398)</a:t>
                       </a:r>
-                      <a:endParaRPr lang="en-US" sz="1000" dirty="0">
+                      <a:endParaRPr lang="en-US" sz="900" dirty="0">
                         <a:latin typeface="NVIDIA Sans" charset="0"/>
                         <a:ea typeface="NVIDIA Sans" charset="0"/>
                         <a:cs typeface="NVIDIA Sans" charset="0"/>
@@ -17538,60 +21620,7 @@
       </p:graphicFrame>
       <p:sp>
         <p:nvSpPr>
-          <p:cNvPr id="5" name="Text 2"/>
-          <p:cNvSpPr/>
-          <p:nvPr/>
-        </p:nvSpPr>
-        <p:spPr>
-          <a:xfrm>
-            <a:off x="640080" y="3977640"/>
-            <a:ext cx="7863840" cy="457200"/>
-          </a:xfrm>
-          <a:prstGeom prst="rect">
-            <a:avLst/>
-          </a:prstGeom>
-          <a:noFill/>
-          <a:ln/>
-        </p:spPr>
-        <p:txBody>
-          <a:bodyPr wrap="square" lIns="0" tIns="0" rIns="0" bIns="0" rtlCol="0" anchor="ctr"/>
-          <a:lstStyle/>
-          <a:p>
-            <a:pPr indent="0" marL="0">
-              <a:buNone/>
-            </a:pPr>
-            <a:r>
-              <a:rPr lang="en-US" b="1" dirty="0">
-                <a:solidFill>
-                  <a:srgbClr val="76B900"/>
-                </a:solidFill>
-                <a:latin typeface="NVIDIA Sans" pitchFamily="34" charset="0"/>
-                <a:ea typeface="NVIDIA Sans" pitchFamily="34" charset="-122"/>
-                <a:cs typeface="NVIDIA Sans" pitchFamily="34" charset="-120"/>
-              </a:rPr>
-              <a:t>Principle: </a:t>
-            </a:r>
-            <a:pPr indent="0" marL="0">
-              <a:buNone/>
-            </a:pPr>
-            <a:r>
-              <a:rPr lang="en-US" sz="1250" dirty="0">
-                <a:solidFill>
-                  <a:srgbClr val="000000"/>
-                </a:solidFill>
-                <a:latin typeface="NVIDIA Sans" pitchFamily="34" charset="0"/>
-                <a:ea typeface="NVIDIA Sans" pitchFamily="34" charset="-122"/>
-                <a:cs typeface="NVIDIA Sans" pitchFamily="34" charset="-120"/>
-              </a:rPr>
-              <a:t>a training step should launch GPU work and get out of the way — anything the CPU must compute belongs in workers or caches, and anything that reads a GPU value blocks the launch pipeline.</a:t>
-            </a:r>
-            <a:endParaRPr lang="en-US" sz="1250" dirty="0"/>
-          </a:p>
-        </p:txBody>
-      </p:sp>
-      <p:sp>
-        <p:nvSpPr>
-          <p:cNvPr id="6" name="Text 3"/>
+          <p:cNvPr id="39" name="Text 36"/>
           <p:cNvSpPr/>
           <p:nvPr/>
         </p:nvSpPr>
@@ -17630,7 +21659,7 @@
       </p:sp>
       <p:sp>
         <p:nvSpPr>
-          <p:cNvPr id="7" name="Text 4"/>
+          <p:cNvPr id="40" name="Text 37"/>
           <p:cNvSpPr/>
           <p:nvPr/>
         </p:nvSpPr>
@@ -17669,7 +21698,7 @@
       </p:sp>
       <p:sp>
         <p:nvSpPr>
-          <p:cNvPr id="8" name="Shape 5"/>
+          <p:cNvPr id="41" name="Shape 38"/>
           <p:cNvSpPr/>
           <p:nvPr/>
         </p:nvSpPr>
@@ -17689,7 +21718,7 @@
       </p:sp>
       <p:pic>
         <p:nvPicPr>
-          <p:cNvPr id="9" name="Image 0" descr="/app/logos/nvidia-logo-blk-sm.png">    </p:cNvPr>
+          <p:cNvPr id="42" name="Image 0" descr="/app/logos/nvidia-logo-blk-sm.png">    </p:cNvPr>
           <p:cNvPicPr>
             <a:picLocks noChangeAspect="1"/>
           </p:cNvPicPr>

--- a/docs/slides/qwenpi-optimization.pptx
+++ b/docs/slides/qwenpi-optimization.pptx
@@ -3795,7 +3795,9 @@
           <a:p>
             <a:r>
               <a:rPr lang="en-US" dirty="0"/>
-              <a:t>Timeline from the NVTX-instrumented baseline re-capture (qwenpi_baseline_nvtx, viking-prod-303, 807 ms step).
+              <a:t>Timeline from the NVTX-instrumented baseline re-capture (qwenpi_baseline_nvtx, viking-prod-303, train_step_33, 807 ms, bs 8/GPU). Both strips use the GPU-execution clock: kernels attributed to phases/modules by their CPU launch window (correlationId join).
+CPU-side forward() returns at 225 ms - the GPU is still executing DiT forward kernels until 309 ms (eager launch-ahead). That is why phases here are defined on GPU execution, not CPU ranges.
+Qwen3.5 bwd:fwd busy = 123:50 = 2.46x, matching theory (GEMM exactly 1.94x). The SPAN ratio is only 1.18x because forward is launch-starved: occupancy 34% vs 70% in backward (Python-side launches vs C++ autograd).
 Module bands = GPU execution spans, attributed by launch-window correlation (kernels joined to their CPU launch time via correlationId). GPU busy inside the bands: Qwen3.5 fwd 50 ms, DiT fwd 120 ms, DiT bwd 224 ms, Qwen3.5 bwd 123 ms - DiT owns 43% of all GPU busy time.
 Rows 2+3 land as one ladder level (pipeline &amp; caching, -117 ms); row 5 combines bucket sizing (PR11) and the redundant-flatten removal (PR12); row 6 covers the two config-level fixes.
 [IMPORTANT] Key message: every fix in this deck was first SEEN here as a trace shape or a measured kernel cost - problems first, solutions second.</a:t>
@@ -11244,7 +11246,7 @@
                 <a:ea typeface="NVIDIA Sans" pitchFamily="34" charset="-122"/>
                 <a:cs typeface="NVIDIA Sans" pitchFamily="34" charset="-120"/>
               </a:rPr>
-              <a:t>Five problems visible in one baseline step (nsys, 806.9 ms) — each maps to a fix</a:t>
+              <a:t>One baseline step on the GPU-execution clock (807 ms, bs 8/GPU) — five problems, five fixes</a:t>
             </a:r>
             <a:endParaRPr lang="en-US" sz="1500" dirty="0"/>
           </a:p>
@@ -11259,7 +11261,7 @@
         <p:spPr>
           <a:xfrm>
             <a:off x="1508760" y="1261872"/>
-            <a:ext cx="1711375" cy="237744"/>
+            <a:ext cx="2346877" cy="237744"/>
           </a:xfrm>
           <a:prstGeom prst="rect">
             <a:avLst/>
@@ -11279,7 +11281,7 @@
         <p:spPr>
           <a:xfrm>
             <a:off x="1508760" y="1261872"/>
-            <a:ext cx="1711375" cy="237744"/>
+            <a:ext cx="2346877" cy="237744"/>
           </a:xfrm>
           <a:prstGeom prst="rect">
             <a:avLst/>
@@ -11303,7 +11305,7 @@
                 <a:ea typeface="NVIDIA Sans" pitchFamily="34" charset="-122"/>
                 <a:cs typeface="NVIDIA Sans" pitchFamily="34" charset="-120"/>
               </a:rPr>
-              <a:t>Forward 225 ms</a:t>
+              <a:t>Forward 309 ms</a:t>
             </a:r>
             <a:endParaRPr lang="en-US" sz="900" dirty="0"/>
           </a:p>
@@ -11317,8 +11319,8 @@
         </p:nvSpPr>
         <p:spPr>
           <a:xfrm>
-            <a:off x="3220135" y="1261872"/>
-            <a:ext cx="3799344" cy="237744"/>
+            <a:off x="3855637" y="1261872"/>
+            <a:ext cx="3102342" cy="237744"/>
           </a:xfrm>
           <a:prstGeom prst="rect">
             <a:avLst/>
@@ -11337,8 +11339,8 @@
         </p:nvSpPr>
         <p:spPr>
           <a:xfrm>
-            <a:off x="3220135" y="1261872"/>
-            <a:ext cx="3799344" cy="237744"/>
+            <a:off x="3855637" y="1261872"/>
+            <a:ext cx="3102342" cy="237744"/>
           </a:xfrm>
           <a:prstGeom prst="rect">
             <a:avLst/>
@@ -11362,7 +11364,7 @@
                 <a:ea typeface="NVIDIA Sans" pitchFamily="34" charset="-122"/>
                 <a:cs typeface="NVIDIA Sans" pitchFamily="34" charset="-120"/>
               </a:rPr>
-              <a:t>Backward 500 ms</a:t>
+              <a:t>Backward 409 ms</a:t>
             </a:r>
             <a:endParaRPr lang="en-US" sz="900" dirty="0"/>
           </a:p>
@@ -11376,8 +11378,8 @@
         </p:nvSpPr>
         <p:spPr>
           <a:xfrm>
-            <a:off x="7019479" y="1261872"/>
-            <a:ext cx="615761" cy="237744"/>
+            <a:off x="6957979" y="1261872"/>
+            <a:ext cx="677261" cy="237744"/>
           </a:xfrm>
           <a:prstGeom prst="rect">
             <a:avLst/>
@@ -11396,8 +11398,8 @@
         </p:nvSpPr>
         <p:spPr>
           <a:xfrm>
-            <a:off x="7019479" y="1261872"/>
-            <a:ext cx="615761" cy="237744"/>
+            <a:off x="6957979" y="1261872"/>
+            <a:ext cx="677261" cy="237744"/>
           </a:xfrm>
           <a:prstGeom prst="rect">
             <a:avLst/>
@@ -11421,7 +11423,7 @@
                 <a:ea typeface="NVIDIA Sans" pitchFamily="34" charset="-122"/>
                 <a:cs typeface="NVIDIA Sans" pitchFamily="34" charset="-120"/>
               </a:rPr>
-              <a:t>Optimizer 81 ms</a:t>
+              <a:t>Optimizer + AG 89 ms</a:t>
             </a:r>
             <a:endParaRPr lang="en-US" sz="900" dirty="0"/>
           </a:p>
@@ -11637,7 +11639,7 @@
                 <a:ea typeface="NVIDIA Sans" pitchFamily="34" charset="-122"/>
                 <a:cs typeface="NVIDIA Sans" pitchFamily="34" charset="-120"/>
               </a:rPr>
-              <a:t>DiT · 124 ms</a:t>
+              <a:t>DiT · 125 ms</a:t>
             </a:r>
             <a:endParaRPr lang="en-US" sz="850" dirty="0"/>
           </a:p>
@@ -11789,6 +11791,45 @@
         </p:nvSpPr>
         <p:spPr>
           <a:xfrm>
+            <a:off x="6957979" y="1536192"/>
+            <a:ext cx="677261" cy="237744"/>
+          </a:xfrm>
+          <a:prstGeom prst="rect">
+            <a:avLst/>
+          </a:prstGeom>
+          <a:noFill/>
+          <a:ln/>
+        </p:spPr>
+        <p:txBody>
+          <a:bodyPr wrap="square" lIns="0" tIns="0" rIns="0" bIns="0" rtlCol="0" anchor="ctr"/>
+          <a:lstStyle/>
+          <a:p>
+            <a:pPr algn="ctr" indent="0" marL="0">
+              <a:buNone/>
+            </a:pPr>
+            <a:r>
+              <a:rPr lang="en-US" sz="850" b="1" dirty="0">
+                <a:solidFill>
+                  <a:srgbClr val="5E5E5E"/>
+                </a:solidFill>
+                <a:latin typeface="NVIDIA Sans" pitchFamily="34" charset="0"/>
+                <a:ea typeface="NVIDIA Sans" pitchFamily="34" charset="-122"/>
+                <a:cs typeface="NVIDIA Sans" pitchFamily="34" charset="-120"/>
+              </a:rPr>
+              <a:t>optim · AG</a:t>
+            </a:r>
+            <a:endParaRPr lang="en-US" sz="850" dirty="0"/>
+          </a:p>
+        </p:txBody>
+      </p:sp>
+      <p:sp>
+        <p:nvSpPr>
+          <p:cNvPr id="23" name="Text 21"/>
+          <p:cNvSpPr/>
+          <p:nvPr/>
+        </p:nvSpPr>
+        <p:spPr>
+          <a:xfrm>
             <a:off x="457200" y="1536192"/>
             <a:ext cx="978408" cy="237744"/>
           </a:xfrm>
@@ -11822,7 +11863,7 @@
       </p:sp>
       <p:sp>
         <p:nvSpPr>
-          <p:cNvPr id="23" name="Text 21"/>
+          <p:cNvPr id="24" name="Text 22"/>
           <p:cNvSpPr/>
           <p:nvPr/>
         </p:nvSpPr>
@@ -11861,7 +11902,7 @@
       </p:sp>
       <p:sp>
         <p:nvSpPr>
-          <p:cNvPr id="24" name="Shape 22"/>
+          <p:cNvPr id="25" name="Shape 23"/>
           <p:cNvSpPr/>
           <p:nvPr/>
         </p:nvSpPr>
@@ -11886,7 +11927,7 @@
       </p:sp>
       <p:sp>
         <p:nvSpPr>
-          <p:cNvPr id="25" name="Shape 23"/>
+          <p:cNvPr id="26" name="Shape 24"/>
           <p:cNvSpPr/>
           <p:nvPr/>
         </p:nvSpPr>
@@ -11906,7 +11947,7 @@
       </p:sp>
       <p:sp>
         <p:nvSpPr>
-          <p:cNvPr id="26" name="Shape 24"/>
+          <p:cNvPr id="27" name="Shape 25"/>
           <p:cNvSpPr/>
           <p:nvPr/>
         </p:nvSpPr>
@@ -11926,7 +11967,7 @@
       </p:sp>
       <p:sp>
         <p:nvSpPr>
-          <p:cNvPr id="27" name="Shape 25"/>
+          <p:cNvPr id="28" name="Shape 26"/>
           <p:cNvSpPr/>
           <p:nvPr/>
         </p:nvSpPr>
@@ -11946,7 +11987,7 @@
       </p:sp>
       <p:sp>
         <p:nvSpPr>
-          <p:cNvPr id="28" name="Shape 26"/>
+          <p:cNvPr id="29" name="Shape 27"/>
           <p:cNvSpPr/>
           <p:nvPr/>
         </p:nvSpPr>
@@ -11966,7 +12007,7 @@
       </p:sp>
       <p:sp>
         <p:nvSpPr>
-          <p:cNvPr id="29" name="Shape 27"/>
+          <p:cNvPr id="30" name="Shape 28"/>
           <p:cNvSpPr/>
           <p:nvPr/>
         </p:nvSpPr>
@@ -11986,7 +12027,7 @@
       </p:sp>
       <p:sp>
         <p:nvSpPr>
-          <p:cNvPr id="30" name="Shape 28"/>
+          <p:cNvPr id="31" name="Shape 29"/>
           <p:cNvSpPr/>
           <p:nvPr/>
         </p:nvSpPr>
@@ -12006,7 +12047,7 @@
       </p:sp>
       <p:sp>
         <p:nvSpPr>
-          <p:cNvPr id="31" name="Shape 29"/>
+          <p:cNvPr id="32" name="Shape 30"/>
           <p:cNvSpPr/>
           <p:nvPr/>
         </p:nvSpPr>
@@ -12026,7 +12067,7 @@
       </p:sp>
       <p:sp>
         <p:nvSpPr>
-          <p:cNvPr id="32" name="Shape 30"/>
+          <p:cNvPr id="33" name="Shape 31"/>
           <p:cNvSpPr/>
           <p:nvPr/>
         </p:nvSpPr>
@@ -12046,7 +12087,7 @@
       </p:sp>
       <p:sp>
         <p:nvSpPr>
-          <p:cNvPr id="33" name="Shape 31"/>
+          <p:cNvPr id="34" name="Shape 32"/>
           <p:cNvSpPr/>
           <p:nvPr/>
         </p:nvSpPr>
@@ -12066,7 +12107,7 @@
       </p:sp>
       <p:sp>
         <p:nvSpPr>
-          <p:cNvPr id="34" name="Shape 32"/>
+          <p:cNvPr id="35" name="Shape 33"/>
           <p:cNvSpPr/>
           <p:nvPr/>
         </p:nvSpPr>
@@ -12086,7 +12127,7 @@
       </p:sp>
       <p:sp>
         <p:nvSpPr>
-          <p:cNvPr id="35" name="Shape 33"/>
+          <p:cNvPr id="36" name="Shape 34"/>
           <p:cNvSpPr/>
           <p:nvPr/>
         </p:nvSpPr>
@@ -12106,7 +12147,7 @@
       </p:sp>
       <p:sp>
         <p:nvSpPr>
-          <p:cNvPr id="36" name="Shape 34"/>
+          <p:cNvPr id="37" name="Shape 35"/>
           <p:cNvSpPr/>
           <p:nvPr/>
         </p:nvSpPr>
@@ -12126,7 +12167,7 @@
       </p:sp>
       <p:sp>
         <p:nvSpPr>
-          <p:cNvPr id="37" name="Shape 35"/>
+          <p:cNvPr id="38" name="Shape 36"/>
           <p:cNvSpPr/>
           <p:nvPr/>
         </p:nvSpPr>
@@ -12146,7 +12187,7 @@
       </p:sp>
       <p:sp>
         <p:nvSpPr>
-          <p:cNvPr id="38" name="Shape 36"/>
+          <p:cNvPr id="39" name="Shape 37"/>
           <p:cNvSpPr/>
           <p:nvPr/>
         </p:nvSpPr>
@@ -12166,7 +12207,7 @@
       </p:sp>
       <p:sp>
         <p:nvSpPr>
-          <p:cNvPr id="39" name="Shape 37"/>
+          <p:cNvPr id="40" name="Shape 38"/>
           <p:cNvSpPr/>
           <p:nvPr/>
         </p:nvSpPr>
@@ -12186,7 +12227,7 @@
       </p:sp>
       <p:sp>
         <p:nvSpPr>
-          <p:cNvPr id="40" name="Shape 38"/>
+          <p:cNvPr id="41" name="Shape 39"/>
           <p:cNvSpPr/>
           <p:nvPr/>
         </p:nvSpPr>
@@ -12206,7 +12247,7 @@
       </p:sp>
       <p:sp>
         <p:nvSpPr>
-          <p:cNvPr id="41" name="Shape 39"/>
+          <p:cNvPr id="42" name="Shape 40"/>
           <p:cNvSpPr/>
           <p:nvPr/>
         </p:nvSpPr>
@@ -12226,7 +12267,7 @@
       </p:sp>
       <p:sp>
         <p:nvSpPr>
-          <p:cNvPr id="42" name="Shape 40"/>
+          <p:cNvPr id="43" name="Shape 41"/>
           <p:cNvSpPr/>
           <p:nvPr/>
         </p:nvSpPr>
@@ -12246,7 +12287,7 @@
       </p:sp>
       <p:sp>
         <p:nvSpPr>
-          <p:cNvPr id="43" name="Shape 41"/>
+          <p:cNvPr id="44" name="Shape 42"/>
           <p:cNvSpPr/>
           <p:nvPr/>
         </p:nvSpPr>
@@ -12266,7 +12307,7 @@
       </p:sp>
       <p:sp>
         <p:nvSpPr>
-          <p:cNvPr id="44" name="Shape 42"/>
+          <p:cNvPr id="45" name="Shape 43"/>
           <p:cNvSpPr/>
           <p:nvPr/>
         </p:nvSpPr>
@@ -12286,7 +12327,7 @@
       </p:sp>
       <p:sp>
         <p:nvSpPr>
-          <p:cNvPr id="45" name="Shape 43"/>
+          <p:cNvPr id="46" name="Shape 44"/>
           <p:cNvSpPr/>
           <p:nvPr/>
         </p:nvSpPr>
@@ -12306,7 +12347,7 @@
       </p:sp>
       <p:sp>
         <p:nvSpPr>
-          <p:cNvPr id="46" name="Shape 44"/>
+          <p:cNvPr id="47" name="Shape 45"/>
           <p:cNvSpPr/>
           <p:nvPr/>
         </p:nvSpPr>
@@ -12326,7 +12367,7 @@
       </p:sp>
       <p:sp>
         <p:nvSpPr>
-          <p:cNvPr id="47" name="Shape 45"/>
+          <p:cNvPr id="48" name="Shape 46"/>
           <p:cNvSpPr/>
           <p:nvPr/>
         </p:nvSpPr>
@@ -12346,7 +12387,7 @@
       </p:sp>
       <p:sp>
         <p:nvSpPr>
-          <p:cNvPr id="48" name="Shape 46"/>
+          <p:cNvPr id="49" name="Shape 47"/>
           <p:cNvSpPr/>
           <p:nvPr/>
         </p:nvSpPr>
@@ -12366,7 +12407,7 @@
       </p:sp>
       <p:sp>
         <p:nvSpPr>
-          <p:cNvPr id="49" name="Shape 47"/>
+          <p:cNvPr id="50" name="Shape 48"/>
           <p:cNvSpPr/>
           <p:nvPr/>
         </p:nvSpPr>
@@ -12386,7 +12427,7 @@
       </p:sp>
       <p:sp>
         <p:nvSpPr>
-          <p:cNvPr id="50" name="Shape 48"/>
+          <p:cNvPr id="51" name="Shape 49"/>
           <p:cNvSpPr/>
           <p:nvPr/>
         </p:nvSpPr>
@@ -12406,7 +12447,7 @@
       </p:sp>
       <p:sp>
         <p:nvSpPr>
-          <p:cNvPr id="51" name="Shape 49"/>
+          <p:cNvPr id="52" name="Shape 50"/>
           <p:cNvSpPr/>
           <p:nvPr/>
         </p:nvSpPr>
@@ -12426,7 +12467,7 @@
       </p:sp>
       <p:sp>
         <p:nvSpPr>
-          <p:cNvPr id="52" name="Shape 50"/>
+          <p:cNvPr id="53" name="Shape 51"/>
           <p:cNvSpPr/>
           <p:nvPr/>
         </p:nvSpPr>
@@ -12446,7 +12487,7 @@
       </p:sp>
       <p:sp>
         <p:nvSpPr>
-          <p:cNvPr id="53" name="Shape 51"/>
+          <p:cNvPr id="54" name="Shape 52"/>
           <p:cNvSpPr/>
           <p:nvPr/>
         </p:nvSpPr>
@@ -12466,7 +12507,7 @@
       </p:sp>
       <p:sp>
         <p:nvSpPr>
-          <p:cNvPr id="54" name="Shape 52"/>
+          <p:cNvPr id="55" name="Shape 53"/>
           <p:cNvSpPr/>
           <p:nvPr/>
         </p:nvSpPr>
@@ -12486,7 +12527,7 @@
       </p:sp>
       <p:sp>
         <p:nvSpPr>
-          <p:cNvPr id="55" name="Shape 53"/>
+          <p:cNvPr id="56" name="Shape 54"/>
           <p:cNvSpPr/>
           <p:nvPr/>
         </p:nvSpPr>
@@ -12506,7 +12547,7 @@
       </p:sp>
       <p:sp>
         <p:nvSpPr>
-          <p:cNvPr id="56" name="Shape 54"/>
+          <p:cNvPr id="57" name="Shape 55"/>
           <p:cNvSpPr/>
           <p:nvPr/>
         </p:nvSpPr>
@@ -12526,7 +12567,7 @@
       </p:sp>
       <p:sp>
         <p:nvSpPr>
-          <p:cNvPr id="57" name="Shape 55"/>
+          <p:cNvPr id="58" name="Shape 56"/>
           <p:cNvSpPr/>
           <p:nvPr/>
         </p:nvSpPr>
@@ -12546,7 +12587,7 @@
       </p:sp>
       <p:sp>
         <p:nvSpPr>
-          <p:cNvPr id="58" name="Shape 56"/>
+          <p:cNvPr id="59" name="Shape 57"/>
           <p:cNvSpPr/>
           <p:nvPr/>
         </p:nvSpPr>
@@ -12566,7 +12607,7 @@
       </p:sp>
       <p:sp>
         <p:nvSpPr>
-          <p:cNvPr id="59" name="Shape 57"/>
+          <p:cNvPr id="60" name="Shape 58"/>
           <p:cNvSpPr/>
           <p:nvPr/>
         </p:nvSpPr>
@@ -12586,7 +12627,7 @@
       </p:sp>
       <p:sp>
         <p:nvSpPr>
-          <p:cNvPr id="60" name="Shape 58"/>
+          <p:cNvPr id="61" name="Shape 59"/>
           <p:cNvSpPr/>
           <p:nvPr/>
         </p:nvSpPr>
@@ -12606,7 +12647,7 @@
       </p:sp>
       <p:sp>
         <p:nvSpPr>
-          <p:cNvPr id="61" name="Shape 59"/>
+          <p:cNvPr id="62" name="Shape 60"/>
           <p:cNvSpPr/>
           <p:nvPr/>
         </p:nvSpPr>
@@ -12626,7 +12667,7 @@
       </p:sp>
       <p:sp>
         <p:nvSpPr>
-          <p:cNvPr id="62" name="Shape 60"/>
+          <p:cNvPr id="63" name="Shape 61"/>
           <p:cNvSpPr/>
           <p:nvPr/>
         </p:nvSpPr>
@@ -12646,7 +12687,7 @@
       </p:sp>
       <p:sp>
         <p:nvSpPr>
-          <p:cNvPr id="63" name="Shape 61"/>
+          <p:cNvPr id="64" name="Shape 62"/>
           <p:cNvSpPr/>
           <p:nvPr/>
         </p:nvSpPr>
@@ -12666,7 +12707,7 @@
       </p:sp>
       <p:sp>
         <p:nvSpPr>
-          <p:cNvPr id="64" name="Shape 62"/>
+          <p:cNvPr id="65" name="Shape 63"/>
           <p:cNvSpPr/>
           <p:nvPr/>
         </p:nvSpPr>
@@ -12686,7 +12727,7 @@
       </p:sp>
       <p:sp>
         <p:nvSpPr>
-          <p:cNvPr id="65" name="Shape 63"/>
+          <p:cNvPr id="66" name="Shape 64"/>
           <p:cNvSpPr/>
           <p:nvPr/>
         </p:nvSpPr>
@@ -12706,7 +12747,7 @@
       </p:sp>
       <p:sp>
         <p:nvSpPr>
-          <p:cNvPr id="66" name="Shape 64"/>
+          <p:cNvPr id="67" name="Shape 65"/>
           <p:cNvSpPr/>
           <p:nvPr/>
         </p:nvSpPr>
@@ -12726,7 +12767,7 @@
       </p:sp>
       <p:sp>
         <p:nvSpPr>
-          <p:cNvPr id="67" name="Shape 65"/>
+          <p:cNvPr id="68" name="Shape 66"/>
           <p:cNvSpPr/>
           <p:nvPr/>
         </p:nvSpPr>
@@ -12746,7 +12787,7 @@
       </p:sp>
       <p:sp>
         <p:nvSpPr>
-          <p:cNvPr id="68" name="Shape 66"/>
+          <p:cNvPr id="69" name="Shape 67"/>
           <p:cNvSpPr/>
           <p:nvPr/>
         </p:nvSpPr>
@@ -12766,7 +12807,7 @@
       </p:sp>
       <p:sp>
         <p:nvSpPr>
-          <p:cNvPr id="69" name="Shape 67"/>
+          <p:cNvPr id="70" name="Shape 68"/>
           <p:cNvSpPr/>
           <p:nvPr/>
         </p:nvSpPr>
@@ -12786,7 +12827,7 @@
       </p:sp>
       <p:sp>
         <p:nvSpPr>
-          <p:cNvPr id="70" name="Shape 68"/>
+          <p:cNvPr id="71" name="Shape 69"/>
           <p:cNvSpPr/>
           <p:nvPr/>
         </p:nvSpPr>
@@ -12806,7 +12847,7 @@
       </p:sp>
       <p:sp>
         <p:nvSpPr>
-          <p:cNvPr id="71" name="Shape 69"/>
+          <p:cNvPr id="72" name="Shape 70"/>
           <p:cNvSpPr/>
           <p:nvPr/>
         </p:nvSpPr>
@@ -12826,7 +12867,7 @@
       </p:sp>
       <p:sp>
         <p:nvSpPr>
-          <p:cNvPr id="72" name="Shape 70"/>
+          <p:cNvPr id="73" name="Shape 71"/>
           <p:cNvSpPr/>
           <p:nvPr/>
         </p:nvSpPr>
@@ -12846,7 +12887,7 @@
       </p:sp>
       <p:sp>
         <p:nvSpPr>
-          <p:cNvPr id="73" name="Shape 71"/>
+          <p:cNvPr id="74" name="Shape 72"/>
           <p:cNvSpPr/>
           <p:nvPr/>
         </p:nvSpPr>
@@ -12866,7 +12907,7 @@
       </p:sp>
       <p:sp>
         <p:nvSpPr>
-          <p:cNvPr id="74" name="Shape 72"/>
+          <p:cNvPr id="75" name="Shape 73"/>
           <p:cNvSpPr/>
           <p:nvPr/>
         </p:nvSpPr>
@@ -12886,7 +12927,7 @@
       </p:sp>
       <p:sp>
         <p:nvSpPr>
-          <p:cNvPr id="75" name="Shape 73"/>
+          <p:cNvPr id="76" name="Shape 74"/>
           <p:cNvSpPr/>
           <p:nvPr/>
         </p:nvSpPr>
@@ -12906,7 +12947,7 @@
       </p:sp>
       <p:sp>
         <p:nvSpPr>
-          <p:cNvPr id="76" name="Shape 74"/>
+          <p:cNvPr id="77" name="Shape 75"/>
           <p:cNvSpPr/>
           <p:nvPr/>
         </p:nvSpPr>
@@ -12926,7 +12967,7 @@
       </p:sp>
       <p:sp>
         <p:nvSpPr>
-          <p:cNvPr id="77" name="Shape 75"/>
+          <p:cNvPr id="78" name="Shape 76"/>
           <p:cNvSpPr/>
           <p:nvPr/>
         </p:nvSpPr>
@@ -12946,7 +12987,7 @@
       </p:sp>
       <p:sp>
         <p:nvSpPr>
-          <p:cNvPr id="78" name="Shape 76"/>
+          <p:cNvPr id="79" name="Shape 77"/>
           <p:cNvSpPr/>
           <p:nvPr/>
         </p:nvSpPr>
@@ -12966,7 +13007,7 @@
       </p:sp>
       <p:sp>
         <p:nvSpPr>
-          <p:cNvPr id="79" name="Shape 77"/>
+          <p:cNvPr id="80" name="Shape 78"/>
           <p:cNvSpPr/>
           <p:nvPr/>
         </p:nvSpPr>
@@ -12986,7 +13027,7 @@
       </p:sp>
       <p:sp>
         <p:nvSpPr>
-          <p:cNvPr id="80" name="Shape 78"/>
+          <p:cNvPr id="81" name="Shape 79"/>
           <p:cNvSpPr/>
           <p:nvPr/>
         </p:nvSpPr>
@@ -13006,7 +13047,7 @@
       </p:sp>
       <p:sp>
         <p:nvSpPr>
-          <p:cNvPr id="81" name="Shape 79"/>
+          <p:cNvPr id="82" name="Shape 80"/>
           <p:cNvSpPr/>
           <p:nvPr/>
         </p:nvSpPr>
@@ -13026,7 +13067,7 @@
       </p:sp>
       <p:sp>
         <p:nvSpPr>
-          <p:cNvPr id="82" name="Shape 80"/>
+          <p:cNvPr id="83" name="Shape 81"/>
           <p:cNvSpPr/>
           <p:nvPr/>
         </p:nvSpPr>
@@ -13046,7 +13087,7 @@
       </p:sp>
       <p:sp>
         <p:nvSpPr>
-          <p:cNvPr id="83" name="Shape 81"/>
+          <p:cNvPr id="84" name="Shape 82"/>
           <p:cNvSpPr/>
           <p:nvPr/>
         </p:nvSpPr>
@@ -13066,7 +13107,7 @@
       </p:sp>
       <p:sp>
         <p:nvSpPr>
-          <p:cNvPr id="84" name="Shape 82"/>
+          <p:cNvPr id="85" name="Shape 83"/>
           <p:cNvSpPr/>
           <p:nvPr/>
         </p:nvSpPr>
@@ -13086,7 +13127,7 @@
       </p:sp>
       <p:sp>
         <p:nvSpPr>
-          <p:cNvPr id="85" name="Shape 83"/>
+          <p:cNvPr id="86" name="Shape 84"/>
           <p:cNvSpPr/>
           <p:nvPr/>
         </p:nvSpPr>
@@ -13106,7 +13147,7 @@
       </p:sp>
       <p:sp>
         <p:nvSpPr>
-          <p:cNvPr id="86" name="Shape 84"/>
+          <p:cNvPr id="87" name="Shape 85"/>
           <p:cNvSpPr/>
           <p:nvPr/>
         </p:nvSpPr>
@@ -13126,7 +13167,7 @@
       </p:sp>
       <p:sp>
         <p:nvSpPr>
-          <p:cNvPr id="87" name="Shape 85"/>
+          <p:cNvPr id="88" name="Shape 86"/>
           <p:cNvSpPr/>
           <p:nvPr/>
         </p:nvSpPr>
@@ -13146,7 +13187,7 @@
       </p:sp>
       <p:sp>
         <p:nvSpPr>
-          <p:cNvPr id="88" name="Shape 86"/>
+          <p:cNvPr id="89" name="Shape 87"/>
           <p:cNvSpPr/>
           <p:nvPr/>
         </p:nvSpPr>
@@ -13166,7 +13207,7 @@
       </p:sp>
       <p:sp>
         <p:nvSpPr>
-          <p:cNvPr id="89" name="Shape 87"/>
+          <p:cNvPr id="90" name="Shape 88"/>
           <p:cNvSpPr/>
           <p:nvPr/>
         </p:nvSpPr>
@@ -13186,7 +13227,7 @@
       </p:sp>
       <p:sp>
         <p:nvSpPr>
-          <p:cNvPr id="90" name="Shape 88"/>
+          <p:cNvPr id="91" name="Shape 89"/>
           <p:cNvSpPr/>
           <p:nvPr/>
         </p:nvSpPr>
@@ -13206,7 +13247,7 @@
       </p:sp>
       <p:sp>
         <p:nvSpPr>
-          <p:cNvPr id="91" name="Shape 89"/>
+          <p:cNvPr id="92" name="Shape 90"/>
           <p:cNvSpPr/>
           <p:nvPr/>
         </p:nvSpPr>
@@ -13226,7 +13267,7 @@
       </p:sp>
       <p:sp>
         <p:nvSpPr>
-          <p:cNvPr id="92" name="Shape 90"/>
+          <p:cNvPr id="93" name="Shape 91"/>
           <p:cNvSpPr/>
           <p:nvPr/>
         </p:nvSpPr>
@@ -13246,7 +13287,7 @@
       </p:sp>
       <p:sp>
         <p:nvSpPr>
-          <p:cNvPr id="93" name="Shape 91"/>
+          <p:cNvPr id="94" name="Shape 92"/>
           <p:cNvSpPr/>
           <p:nvPr/>
         </p:nvSpPr>
@@ -13266,7 +13307,7 @@
       </p:sp>
       <p:sp>
         <p:nvSpPr>
-          <p:cNvPr id="94" name="Shape 92"/>
+          <p:cNvPr id="95" name="Shape 93"/>
           <p:cNvSpPr/>
           <p:nvPr/>
         </p:nvSpPr>
@@ -13286,7 +13327,7 @@
       </p:sp>
       <p:sp>
         <p:nvSpPr>
-          <p:cNvPr id="95" name="Shape 93"/>
+          <p:cNvPr id="96" name="Shape 94"/>
           <p:cNvSpPr/>
           <p:nvPr/>
         </p:nvSpPr>
@@ -13306,7 +13347,7 @@
       </p:sp>
       <p:sp>
         <p:nvSpPr>
-          <p:cNvPr id="96" name="Shape 94"/>
+          <p:cNvPr id="97" name="Shape 95"/>
           <p:cNvSpPr/>
           <p:nvPr/>
         </p:nvSpPr>
@@ -13326,7 +13367,7 @@
       </p:sp>
       <p:sp>
         <p:nvSpPr>
-          <p:cNvPr id="97" name="Shape 95"/>
+          <p:cNvPr id="98" name="Shape 96"/>
           <p:cNvSpPr/>
           <p:nvPr/>
         </p:nvSpPr>
@@ -13346,7 +13387,7 @@
       </p:sp>
       <p:sp>
         <p:nvSpPr>
-          <p:cNvPr id="98" name="Shape 96"/>
+          <p:cNvPr id="99" name="Shape 97"/>
           <p:cNvSpPr/>
           <p:nvPr/>
         </p:nvSpPr>
@@ -13366,7 +13407,7 @@
       </p:sp>
       <p:sp>
         <p:nvSpPr>
-          <p:cNvPr id="99" name="Shape 97"/>
+          <p:cNvPr id="100" name="Shape 98"/>
           <p:cNvSpPr/>
           <p:nvPr/>
         </p:nvSpPr>
@@ -13386,7 +13427,7 @@
       </p:sp>
       <p:sp>
         <p:nvSpPr>
-          <p:cNvPr id="100" name="Shape 98"/>
+          <p:cNvPr id="101" name="Shape 99"/>
           <p:cNvSpPr/>
           <p:nvPr/>
         </p:nvSpPr>
@@ -13406,7 +13447,7 @@
       </p:sp>
       <p:sp>
         <p:nvSpPr>
-          <p:cNvPr id="101" name="Shape 99"/>
+          <p:cNvPr id="102" name="Shape 100"/>
           <p:cNvSpPr/>
           <p:nvPr/>
         </p:nvSpPr>
@@ -13426,7 +13467,7 @@
       </p:sp>
       <p:sp>
         <p:nvSpPr>
-          <p:cNvPr id="102" name="Shape 100"/>
+          <p:cNvPr id="103" name="Shape 101"/>
           <p:cNvSpPr/>
           <p:nvPr/>
         </p:nvSpPr>
@@ -13446,7 +13487,7 @@
       </p:sp>
       <p:sp>
         <p:nvSpPr>
-          <p:cNvPr id="103" name="Shape 101"/>
+          <p:cNvPr id="104" name="Shape 102"/>
           <p:cNvSpPr/>
           <p:nvPr/>
         </p:nvSpPr>
@@ -13466,7 +13507,7 @@
       </p:sp>
       <p:sp>
         <p:nvSpPr>
-          <p:cNvPr id="104" name="Shape 102"/>
+          <p:cNvPr id="105" name="Shape 103"/>
           <p:cNvSpPr/>
           <p:nvPr/>
         </p:nvSpPr>
@@ -13486,7 +13527,7 @@
       </p:sp>
       <p:sp>
         <p:nvSpPr>
-          <p:cNvPr id="105" name="Shape 103"/>
+          <p:cNvPr id="106" name="Shape 104"/>
           <p:cNvSpPr/>
           <p:nvPr/>
         </p:nvSpPr>
@@ -13506,7 +13547,7 @@
       </p:sp>
       <p:sp>
         <p:nvSpPr>
-          <p:cNvPr id="106" name="Shape 104"/>
+          <p:cNvPr id="107" name="Shape 105"/>
           <p:cNvSpPr/>
           <p:nvPr/>
         </p:nvSpPr>
@@ -13526,7 +13567,7 @@
       </p:sp>
       <p:sp>
         <p:nvSpPr>
-          <p:cNvPr id="107" name="Shape 105"/>
+          <p:cNvPr id="108" name="Shape 106"/>
           <p:cNvSpPr/>
           <p:nvPr/>
         </p:nvSpPr>
@@ -13546,7 +13587,7 @@
       </p:sp>
       <p:sp>
         <p:nvSpPr>
-          <p:cNvPr id="108" name="Shape 106"/>
+          <p:cNvPr id="109" name="Shape 107"/>
           <p:cNvSpPr/>
           <p:nvPr/>
         </p:nvSpPr>
@@ -13566,7 +13607,7 @@
       </p:sp>
       <p:sp>
         <p:nvSpPr>
-          <p:cNvPr id="109" name="Shape 107"/>
+          <p:cNvPr id="110" name="Shape 108"/>
           <p:cNvSpPr/>
           <p:nvPr/>
         </p:nvSpPr>
@@ -13586,7 +13627,7 @@
       </p:sp>
       <p:sp>
         <p:nvSpPr>
-          <p:cNvPr id="110" name="Shape 108"/>
+          <p:cNvPr id="111" name="Shape 109"/>
           <p:cNvSpPr/>
           <p:nvPr/>
         </p:nvSpPr>
@@ -13606,7 +13647,7 @@
       </p:sp>
       <p:sp>
         <p:nvSpPr>
-          <p:cNvPr id="111" name="Shape 109"/>
+          <p:cNvPr id="112" name="Shape 110"/>
           <p:cNvSpPr/>
           <p:nvPr/>
         </p:nvSpPr>
@@ -13626,7 +13667,7 @@
       </p:sp>
       <p:sp>
         <p:nvSpPr>
-          <p:cNvPr id="112" name="Shape 110"/>
+          <p:cNvPr id="113" name="Shape 111"/>
           <p:cNvSpPr/>
           <p:nvPr/>
         </p:nvSpPr>
@@ -13646,7 +13687,7 @@
       </p:sp>
       <p:sp>
         <p:nvSpPr>
-          <p:cNvPr id="113" name="Shape 111"/>
+          <p:cNvPr id="114" name="Shape 112"/>
           <p:cNvSpPr/>
           <p:nvPr/>
         </p:nvSpPr>
@@ -13666,7 +13707,7 @@
       </p:sp>
       <p:sp>
         <p:nvSpPr>
-          <p:cNvPr id="114" name="Shape 112"/>
+          <p:cNvPr id="115" name="Shape 113"/>
           <p:cNvSpPr/>
           <p:nvPr/>
         </p:nvSpPr>
@@ -13686,7 +13727,7 @@
       </p:sp>
       <p:sp>
         <p:nvSpPr>
-          <p:cNvPr id="115" name="Shape 113"/>
+          <p:cNvPr id="116" name="Shape 114"/>
           <p:cNvSpPr/>
           <p:nvPr/>
         </p:nvSpPr>
@@ -13706,7 +13747,7 @@
       </p:sp>
       <p:sp>
         <p:nvSpPr>
-          <p:cNvPr id="116" name="Shape 114"/>
+          <p:cNvPr id="117" name="Shape 115"/>
           <p:cNvSpPr/>
           <p:nvPr/>
         </p:nvSpPr>
@@ -13726,7 +13767,7 @@
       </p:sp>
       <p:sp>
         <p:nvSpPr>
-          <p:cNvPr id="117" name="Shape 115"/>
+          <p:cNvPr id="118" name="Shape 116"/>
           <p:cNvSpPr/>
           <p:nvPr/>
         </p:nvSpPr>
@@ -13746,7 +13787,7 @@
       </p:sp>
       <p:sp>
         <p:nvSpPr>
-          <p:cNvPr id="118" name="Shape 116"/>
+          <p:cNvPr id="119" name="Shape 117"/>
           <p:cNvSpPr/>
           <p:nvPr/>
         </p:nvSpPr>
@@ -13766,7 +13807,7 @@
       </p:sp>
       <p:sp>
         <p:nvSpPr>
-          <p:cNvPr id="119" name="Shape 117"/>
+          <p:cNvPr id="120" name="Shape 118"/>
           <p:cNvSpPr/>
           <p:nvPr/>
         </p:nvSpPr>
@@ -13786,7 +13827,7 @@
       </p:sp>
       <p:sp>
         <p:nvSpPr>
-          <p:cNvPr id="120" name="Shape 118"/>
+          <p:cNvPr id="121" name="Shape 119"/>
           <p:cNvSpPr/>
           <p:nvPr/>
         </p:nvSpPr>
@@ -13806,7 +13847,7 @@
       </p:sp>
       <p:sp>
         <p:nvSpPr>
-          <p:cNvPr id="121" name="Shape 119"/>
+          <p:cNvPr id="122" name="Shape 120"/>
           <p:cNvSpPr/>
           <p:nvPr/>
         </p:nvSpPr>
@@ -13826,7 +13867,7 @@
       </p:sp>
       <p:sp>
         <p:nvSpPr>
-          <p:cNvPr id="122" name="Shape 120"/>
+          <p:cNvPr id="123" name="Shape 121"/>
           <p:cNvSpPr/>
           <p:nvPr/>
         </p:nvSpPr>
@@ -13846,7 +13887,7 @@
       </p:sp>
       <p:sp>
         <p:nvSpPr>
-          <p:cNvPr id="123" name="Shape 121"/>
+          <p:cNvPr id="124" name="Shape 122"/>
           <p:cNvSpPr/>
           <p:nvPr/>
         </p:nvSpPr>
@@ -13866,7 +13907,7 @@
       </p:sp>
       <p:sp>
         <p:nvSpPr>
-          <p:cNvPr id="124" name="Shape 122"/>
+          <p:cNvPr id="125" name="Shape 123"/>
           <p:cNvSpPr/>
           <p:nvPr/>
         </p:nvSpPr>
@@ -13886,7 +13927,7 @@
       </p:sp>
       <p:sp>
         <p:nvSpPr>
-          <p:cNvPr id="125" name="Shape 123"/>
+          <p:cNvPr id="126" name="Shape 124"/>
           <p:cNvSpPr/>
           <p:nvPr/>
         </p:nvSpPr>
@@ -13906,7 +13947,7 @@
       </p:sp>
       <p:sp>
         <p:nvSpPr>
-          <p:cNvPr id="126" name="Shape 124"/>
+          <p:cNvPr id="127" name="Shape 125"/>
           <p:cNvSpPr/>
           <p:nvPr/>
         </p:nvSpPr>
@@ -13926,7 +13967,7 @@
       </p:sp>
       <p:sp>
         <p:nvSpPr>
-          <p:cNvPr id="127" name="Shape 125"/>
+          <p:cNvPr id="128" name="Shape 126"/>
           <p:cNvSpPr/>
           <p:nvPr/>
         </p:nvSpPr>
@@ -13946,7 +13987,7 @@
       </p:sp>
       <p:sp>
         <p:nvSpPr>
-          <p:cNvPr id="128" name="Shape 126"/>
+          <p:cNvPr id="129" name="Shape 127"/>
           <p:cNvSpPr/>
           <p:nvPr/>
         </p:nvSpPr>
@@ -13966,7 +14007,7 @@
       </p:sp>
       <p:sp>
         <p:nvSpPr>
-          <p:cNvPr id="129" name="Shape 127"/>
+          <p:cNvPr id="130" name="Shape 128"/>
           <p:cNvSpPr/>
           <p:nvPr/>
         </p:nvSpPr>
@@ -13986,7 +14027,7 @@
       </p:sp>
       <p:sp>
         <p:nvSpPr>
-          <p:cNvPr id="130" name="Shape 128"/>
+          <p:cNvPr id="131" name="Shape 129"/>
           <p:cNvSpPr/>
           <p:nvPr/>
         </p:nvSpPr>
@@ -14006,7 +14047,7 @@
       </p:sp>
       <p:sp>
         <p:nvSpPr>
-          <p:cNvPr id="131" name="Shape 129"/>
+          <p:cNvPr id="132" name="Shape 130"/>
           <p:cNvSpPr/>
           <p:nvPr/>
         </p:nvSpPr>
@@ -14026,7 +14067,7 @@
       </p:sp>
       <p:sp>
         <p:nvSpPr>
-          <p:cNvPr id="132" name="Shape 130"/>
+          <p:cNvPr id="133" name="Shape 131"/>
           <p:cNvSpPr/>
           <p:nvPr/>
         </p:nvSpPr>
@@ -14046,7 +14087,7 @@
       </p:sp>
       <p:sp>
         <p:nvSpPr>
-          <p:cNvPr id="133" name="Shape 131"/>
+          <p:cNvPr id="134" name="Shape 132"/>
           <p:cNvSpPr/>
           <p:nvPr/>
         </p:nvSpPr>
@@ -14066,7 +14107,7 @@
       </p:sp>
       <p:sp>
         <p:nvSpPr>
-          <p:cNvPr id="134" name="Shape 132"/>
+          <p:cNvPr id="135" name="Shape 133"/>
           <p:cNvSpPr/>
           <p:nvPr/>
         </p:nvSpPr>
@@ -14086,7 +14127,7 @@
       </p:sp>
       <p:sp>
         <p:nvSpPr>
-          <p:cNvPr id="135" name="Shape 133"/>
+          <p:cNvPr id="136" name="Shape 134"/>
           <p:cNvSpPr/>
           <p:nvPr/>
         </p:nvSpPr>
@@ -14106,7 +14147,7 @@
       </p:sp>
       <p:sp>
         <p:nvSpPr>
-          <p:cNvPr id="136" name="Shape 134"/>
+          <p:cNvPr id="137" name="Shape 135"/>
           <p:cNvSpPr/>
           <p:nvPr/>
         </p:nvSpPr>
@@ -14126,7 +14167,7 @@
       </p:sp>
       <p:sp>
         <p:nvSpPr>
-          <p:cNvPr id="137" name="Shape 135"/>
+          <p:cNvPr id="138" name="Shape 136"/>
           <p:cNvSpPr/>
           <p:nvPr/>
         </p:nvSpPr>
@@ -14146,7 +14187,7 @@
       </p:sp>
       <p:sp>
         <p:nvSpPr>
-          <p:cNvPr id="138" name="Shape 136"/>
+          <p:cNvPr id="139" name="Shape 137"/>
           <p:cNvSpPr/>
           <p:nvPr/>
         </p:nvSpPr>
@@ -14166,7 +14207,7 @@
       </p:sp>
       <p:sp>
         <p:nvSpPr>
-          <p:cNvPr id="139" name="Shape 137"/>
+          <p:cNvPr id="140" name="Shape 138"/>
           <p:cNvSpPr/>
           <p:nvPr/>
         </p:nvSpPr>
@@ -14186,7 +14227,7 @@
       </p:sp>
       <p:sp>
         <p:nvSpPr>
-          <p:cNvPr id="140" name="Shape 138"/>
+          <p:cNvPr id="141" name="Shape 139"/>
           <p:cNvSpPr/>
           <p:nvPr/>
         </p:nvSpPr>
@@ -14206,7 +14247,7 @@
       </p:sp>
       <p:sp>
         <p:nvSpPr>
-          <p:cNvPr id="141" name="Shape 139"/>
+          <p:cNvPr id="142" name="Shape 140"/>
           <p:cNvSpPr/>
           <p:nvPr/>
         </p:nvSpPr>
@@ -14226,7 +14267,7 @@
       </p:sp>
       <p:sp>
         <p:nvSpPr>
-          <p:cNvPr id="142" name="Shape 140"/>
+          <p:cNvPr id="143" name="Shape 141"/>
           <p:cNvSpPr/>
           <p:nvPr/>
         </p:nvSpPr>
@@ -14246,7 +14287,7 @@
       </p:sp>
       <p:sp>
         <p:nvSpPr>
-          <p:cNvPr id="143" name="Shape 141"/>
+          <p:cNvPr id="144" name="Shape 142"/>
           <p:cNvSpPr/>
           <p:nvPr/>
         </p:nvSpPr>
@@ -14266,7 +14307,7 @@
       </p:sp>
       <p:sp>
         <p:nvSpPr>
-          <p:cNvPr id="144" name="Shape 142"/>
+          <p:cNvPr id="145" name="Shape 143"/>
           <p:cNvSpPr/>
           <p:nvPr/>
         </p:nvSpPr>
@@ -14286,7 +14327,7 @@
       </p:sp>
       <p:sp>
         <p:nvSpPr>
-          <p:cNvPr id="145" name="Shape 143"/>
+          <p:cNvPr id="146" name="Shape 144"/>
           <p:cNvSpPr/>
           <p:nvPr/>
         </p:nvSpPr>
@@ -14306,7 +14347,7 @@
       </p:sp>
       <p:sp>
         <p:nvSpPr>
-          <p:cNvPr id="146" name="Shape 144"/>
+          <p:cNvPr id="147" name="Shape 145"/>
           <p:cNvSpPr/>
           <p:nvPr/>
         </p:nvSpPr>
@@ -14326,7 +14367,7 @@
       </p:sp>
       <p:sp>
         <p:nvSpPr>
-          <p:cNvPr id="147" name="Shape 145"/>
+          <p:cNvPr id="148" name="Shape 146"/>
           <p:cNvSpPr/>
           <p:nvPr/>
         </p:nvSpPr>
@@ -14346,7 +14387,7 @@
       </p:sp>
       <p:sp>
         <p:nvSpPr>
-          <p:cNvPr id="148" name="Shape 146"/>
+          <p:cNvPr id="149" name="Shape 147"/>
           <p:cNvSpPr/>
           <p:nvPr/>
         </p:nvSpPr>
@@ -14366,7 +14407,7 @@
       </p:sp>
       <p:sp>
         <p:nvSpPr>
-          <p:cNvPr id="149" name="Shape 147"/>
+          <p:cNvPr id="150" name="Shape 148"/>
           <p:cNvSpPr/>
           <p:nvPr/>
         </p:nvSpPr>
@@ -14386,7 +14427,7 @@
       </p:sp>
       <p:sp>
         <p:nvSpPr>
-          <p:cNvPr id="150" name="Shape 148"/>
+          <p:cNvPr id="151" name="Shape 149"/>
           <p:cNvSpPr/>
           <p:nvPr/>
         </p:nvSpPr>
@@ -14406,7 +14447,7 @@
       </p:sp>
       <p:sp>
         <p:nvSpPr>
-          <p:cNvPr id="151" name="Shape 149"/>
+          <p:cNvPr id="152" name="Shape 150"/>
           <p:cNvSpPr/>
           <p:nvPr/>
         </p:nvSpPr>
@@ -14426,7 +14467,7 @@
       </p:sp>
       <p:sp>
         <p:nvSpPr>
-          <p:cNvPr id="152" name="Shape 150"/>
+          <p:cNvPr id="153" name="Shape 151"/>
           <p:cNvSpPr/>
           <p:nvPr/>
         </p:nvSpPr>
@@ -14446,7 +14487,7 @@
       </p:sp>
       <p:sp>
         <p:nvSpPr>
-          <p:cNvPr id="153" name="Shape 151"/>
+          <p:cNvPr id="154" name="Shape 152"/>
           <p:cNvSpPr/>
           <p:nvPr/>
         </p:nvSpPr>
@@ -14466,7 +14507,7 @@
       </p:sp>
       <p:sp>
         <p:nvSpPr>
-          <p:cNvPr id="154" name="Shape 152"/>
+          <p:cNvPr id="155" name="Shape 153"/>
           <p:cNvSpPr/>
           <p:nvPr/>
         </p:nvSpPr>
@@ -14486,7 +14527,7 @@
       </p:sp>
       <p:sp>
         <p:nvSpPr>
-          <p:cNvPr id="155" name="Shape 153"/>
+          <p:cNvPr id="156" name="Shape 154"/>
           <p:cNvSpPr/>
           <p:nvPr/>
         </p:nvSpPr>
@@ -14506,7 +14547,7 @@
       </p:sp>
       <p:sp>
         <p:nvSpPr>
-          <p:cNvPr id="156" name="Shape 154"/>
+          <p:cNvPr id="157" name="Shape 155"/>
           <p:cNvSpPr/>
           <p:nvPr/>
         </p:nvSpPr>
@@ -14526,7 +14567,7 @@
       </p:sp>
       <p:sp>
         <p:nvSpPr>
-          <p:cNvPr id="157" name="Shape 155"/>
+          <p:cNvPr id="158" name="Shape 156"/>
           <p:cNvSpPr/>
           <p:nvPr/>
         </p:nvSpPr>
@@ -14546,7 +14587,7 @@
       </p:sp>
       <p:sp>
         <p:nvSpPr>
-          <p:cNvPr id="158" name="Shape 156"/>
+          <p:cNvPr id="159" name="Shape 157"/>
           <p:cNvSpPr/>
           <p:nvPr/>
         </p:nvSpPr>
@@ -14566,7 +14607,7 @@
       </p:sp>
       <p:sp>
         <p:nvSpPr>
-          <p:cNvPr id="159" name="Shape 157"/>
+          <p:cNvPr id="160" name="Shape 158"/>
           <p:cNvSpPr/>
           <p:nvPr/>
         </p:nvSpPr>
@@ -14586,7 +14627,7 @@
       </p:sp>
       <p:sp>
         <p:nvSpPr>
-          <p:cNvPr id="160" name="Shape 158"/>
+          <p:cNvPr id="161" name="Shape 159"/>
           <p:cNvSpPr/>
           <p:nvPr/>
         </p:nvSpPr>
@@ -14606,7 +14647,7 @@
       </p:sp>
       <p:sp>
         <p:nvSpPr>
-          <p:cNvPr id="161" name="Shape 159"/>
+          <p:cNvPr id="162" name="Shape 160"/>
           <p:cNvSpPr/>
           <p:nvPr/>
         </p:nvSpPr>
@@ -14626,7 +14667,7 @@
       </p:sp>
       <p:sp>
         <p:nvSpPr>
-          <p:cNvPr id="162" name="Shape 160"/>
+          <p:cNvPr id="163" name="Shape 161"/>
           <p:cNvSpPr/>
           <p:nvPr/>
         </p:nvSpPr>
@@ -14646,7 +14687,7 @@
       </p:sp>
       <p:sp>
         <p:nvSpPr>
-          <p:cNvPr id="163" name="Shape 161"/>
+          <p:cNvPr id="164" name="Shape 162"/>
           <p:cNvSpPr/>
           <p:nvPr/>
         </p:nvSpPr>
@@ -14666,7 +14707,7 @@
       </p:sp>
       <p:sp>
         <p:nvSpPr>
-          <p:cNvPr id="164" name="Shape 162"/>
+          <p:cNvPr id="165" name="Shape 163"/>
           <p:cNvSpPr/>
           <p:nvPr/>
         </p:nvSpPr>
@@ -14686,7 +14727,7 @@
       </p:sp>
       <p:sp>
         <p:nvSpPr>
-          <p:cNvPr id="165" name="Shape 163"/>
+          <p:cNvPr id="166" name="Shape 164"/>
           <p:cNvSpPr/>
           <p:nvPr/>
         </p:nvSpPr>
@@ -14706,7 +14747,7 @@
       </p:sp>
       <p:sp>
         <p:nvSpPr>
-          <p:cNvPr id="166" name="Shape 164"/>
+          <p:cNvPr id="167" name="Shape 165"/>
           <p:cNvSpPr/>
           <p:nvPr/>
         </p:nvSpPr>
@@ -14726,7 +14767,7 @@
       </p:sp>
       <p:sp>
         <p:nvSpPr>
-          <p:cNvPr id="167" name="Shape 165"/>
+          <p:cNvPr id="168" name="Shape 166"/>
           <p:cNvSpPr/>
           <p:nvPr/>
         </p:nvSpPr>
@@ -14746,7 +14787,7 @@
       </p:sp>
       <p:sp>
         <p:nvSpPr>
-          <p:cNvPr id="168" name="Shape 166"/>
+          <p:cNvPr id="169" name="Shape 167"/>
           <p:cNvSpPr/>
           <p:nvPr/>
         </p:nvSpPr>
@@ -14766,7 +14807,7 @@
       </p:sp>
       <p:sp>
         <p:nvSpPr>
-          <p:cNvPr id="169" name="Shape 167"/>
+          <p:cNvPr id="170" name="Shape 168"/>
           <p:cNvSpPr/>
           <p:nvPr/>
         </p:nvSpPr>
@@ -14786,7 +14827,7 @@
       </p:sp>
       <p:sp>
         <p:nvSpPr>
-          <p:cNvPr id="170" name="Shape 168"/>
+          <p:cNvPr id="171" name="Shape 169"/>
           <p:cNvSpPr/>
           <p:nvPr/>
         </p:nvSpPr>
@@ -14806,7 +14847,7 @@
       </p:sp>
       <p:sp>
         <p:nvSpPr>
-          <p:cNvPr id="171" name="Shape 169"/>
+          <p:cNvPr id="172" name="Shape 170"/>
           <p:cNvSpPr/>
           <p:nvPr/>
         </p:nvSpPr>
@@ -14826,7 +14867,7 @@
       </p:sp>
       <p:sp>
         <p:nvSpPr>
-          <p:cNvPr id="172" name="Shape 170"/>
+          <p:cNvPr id="173" name="Shape 171"/>
           <p:cNvSpPr/>
           <p:nvPr/>
         </p:nvSpPr>
@@ -14846,7 +14887,7 @@
       </p:sp>
       <p:sp>
         <p:nvSpPr>
-          <p:cNvPr id="173" name="Shape 171"/>
+          <p:cNvPr id="174" name="Shape 172"/>
           <p:cNvSpPr/>
           <p:nvPr/>
         </p:nvSpPr>
@@ -14866,7 +14907,7 @@
       </p:sp>
       <p:sp>
         <p:nvSpPr>
-          <p:cNvPr id="174" name="Text 172"/>
+          <p:cNvPr id="175" name="Text 173"/>
           <p:cNvSpPr/>
           <p:nvPr/>
         </p:nvSpPr>
@@ -14905,7 +14946,7 @@
       </p:sp>
       <p:sp>
         <p:nvSpPr>
-          <p:cNvPr id="175" name="Text 173"/>
+          <p:cNvPr id="176" name="Text 174"/>
           <p:cNvSpPr/>
           <p:nvPr/>
         </p:nvSpPr>
@@ -14944,7 +14985,7 @@
       </p:sp>
       <p:sp>
         <p:nvSpPr>
-          <p:cNvPr id="176" name="Shape 174"/>
+          <p:cNvPr id="177" name="Shape 175"/>
           <p:cNvSpPr/>
           <p:nvPr/>
         </p:nvSpPr>
@@ -14969,7 +15010,7 @@
       </p:sp>
       <p:sp>
         <p:nvSpPr>
-          <p:cNvPr id="177" name="Shape 175"/>
+          <p:cNvPr id="178" name="Shape 176"/>
           <p:cNvSpPr/>
           <p:nvPr/>
         </p:nvSpPr>
@@ -14989,7 +15030,7 @@
       </p:sp>
       <p:sp>
         <p:nvSpPr>
-          <p:cNvPr id="178" name="Shape 176"/>
+          <p:cNvPr id="179" name="Shape 177"/>
           <p:cNvSpPr/>
           <p:nvPr/>
         </p:nvSpPr>
@@ -15009,7 +15050,7 @@
       </p:sp>
       <p:sp>
         <p:nvSpPr>
-          <p:cNvPr id="179" name="Shape 177"/>
+          <p:cNvPr id="180" name="Shape 178"/>
           <p:cNvSpPr/>
           <p:nvPr/>
         </p:nvSpPr>
@@ -15029,7 +15070,7 @@
       </p:sp>
       <p:sp>
         <p:nvSpPr>
-          <p:cNvPr id="180" name="Shape 178"/>
+          <p:cNvPr id="181" name="Shape 179"/>
           <p:cNvSpPr/>
           <p:nvPr/>
         </p:nvSpPr>
@@ -15049,7 +15090,7 @@
       </p:sp>
       <p:sp>
         <p:nvSpPr>
-          <p:cNvPr id="181" name="Shape 179"/>
+          <p:cNvPr id="182" name="Shape 180"/>
           <p:cNvSpPr/>
           <p:nvPr/>
         </p:nvSpPr>
@@ -15069,7 +15110,7 @@
       </p:sp>
       <p:sp>
         <p:nvSpPr>
-          <p:cNvPr id="182" name="Shape 180"/>
+          <p:cNvPr id="183" name="Shape 181"/>
           <p:cNvSpPr/>
           <p:nvPr/>
         </p:nvSpPr>
@@ -15089,7 +15130,7 @@
       </p:sp>
       <p:sp>
         <p:nvSpPr>
-          <p:cNvPr id="183" name="Shape 181"/>
+          <p:cNvPr id="184" name="Shape 182"/>
           <p:cNvSpPr/>
           <p:nvPr/>
         </p:nvSpPr>
@@ -15109,7 +15150,7 @@
       </p:sp>
       <p:sp>
         <p:nvSpPr>
-          <p:cNvPr id="184" name="Shape 182"/>
+          <p:cNvPr id="185" name="Shape 183"/>
           <p:cNvSpPr/>
           <p:nvPr/>
         </p:nvSpPr>
@@ -15129,7 +15170,7 @@
       </p:sp>
       <p:sp>
         <p:nvSpPr>
-          <p:cNvPr id="185" name="Shape 183"/>
+          <p:cNvPr id="186" name="Shape 184"/>
           <p:cNvSpPr/>
           <p:nvPr/>
         </p:nvSpPr>
@@ -15149,7 +15190,7 @@
       </p:sp>
       <p:sp>
         <p:nvSpPr>
-          <p:cNvPr id="186" name="Shape 184"/>
+          <p:cNvPr id="187" name="Shape 185"/>
           <p:cNvSpPr/>
           <p:nvPr/>
         </p:nvSpPr>
@@ -15169,7 +15210,7 @@
       </p:sp>
       <p:sp>
         <p:nvSpPr>
-          <p:cNvPr id="187" name="Shape 185"/>
+          <p:cNvPr id="188" name="Shape 186"/>
           <p:cNvSpPr/>
           <p:nvPr/>
         </p:nvSpPr>
@@ -15189,7 +15230,7 @@
       </p:sp>
       <p:sp>
         <p:nvSpPr>
-          <p:cNvPr id="188" name="Shape 186"/>
+          <p:cNvPr id="189" name="Shape 187"/>
           <p:cNvSpPr/>
           <p:nvPr/>
         </p:nvSpPr>
@@ -15209,7 +15250,7 @@
       </p:sp>
       <p:sp>
         <p:nvSpPr>
-          <p:cNvPr id="189" name="Shape 187"/>
+          <p:cNvPr id="190" name="Shape 188"/>
           <p:cNvSpPr/>
           <p:nvPr/>
         </p:nvSpPr>
@@ -15229,7 +15270,7 @@
       </p:sp>
       <p:sp>
         <p:nvSpPr>
-          <p:cNvPr id="190" name="Shape 188"/>
+          <p:cNvPr id="191" name="Shape 189"/>
           <p:cNvSpPr/>
           <p:nvPr/>
         </p:nvSpPr>
@@ -15249,7 +15290,7 @@
       </p:sp>
       <p:sp>
         <p:nvSpPr>
-          <p:cNvPr id="191" name="Shape 189"/>
+          <p:cNvPr id="192" name="Shape 190"/>
           <p:cNvSpPr/>
           <p:nvPr/>
         </p:nvSpPr>
@@ -15269,7 +15310,7 @@
       </p:sp>
       <p:sp>
         <p:nvSpPr>
-          <p:cNvPr id="192" name="Shape 190"/>
+          <p:cNvPr id="193" name="Shape 191"/>
           <p:cNvSpPr/>
           <p:nvPr/>
         </p:nvSpPr>
@@ -15289,7 +15330,7 @@
       </p:sp>
       <p:sp>
         <p:nvSpPr>
-          <p:cNvPr id="193" name="Text 191"/>
+          <p:cNvPr id="194" name="Text 192"/>
           <p:cNvSpPr/>
           <p:nvPr/>
         </p:nvSpPr>
@@ -15328,13 +15369,13 @@
       </p:sp>
       <p:sp>
         <p:nvSpPr>
-          <p:cNvPr id="194" name="Shape 192"/>
-          <p:cNvSpPr/>
-          <p:nvPr/>
-        </p:nvSpPr>
-        <p:spPr>
-          <a:xfrm>
-            <a:off x="3220135" y="1810512"/>
+          <p:cNvPr id="195" name="Shape 193"/>
+          <p:cNvSpPr/>
+          <p:nvPr/>
+        </p:nvSpPr>
+        <p:spPr>
+          <a:xfrm>
+            <a:off x="3855637" y="1810512"/>
             <a:ext cx="0" cy="713232"/>
           </a:xfrm>
           <a:prstGeom prst="line">
@@ -15351,13 +15392,13 @@
       </p:sp>
       <p:sp>
         <p:nvSpPr>
-          <p:cNvPr id="195" name="Shape 193"/>
-          <p:cNvSpPr/>
-          <p:nvPr/>
-        </p:nvSpPr>
-        <p:spPr>
-          <a:xfrm>
-            <a:off x="7019479" y="1810512"/>
+          <p:cNvPr id="196" name="Shape 194"/>
+          <p:cNvSpPr/>
+          <p:nvPr/>
+        </p:nvSpPr>
+        <p:spPr>
+          <a:xfrm>
+            <a:off x="6957979" y="1810512"/>
             <a:ext cx="0" cy="713232"/>
           </a:xfrm>
           <a:prstGeom prst="line">
@@ -15374,7 +15415,7 @@
       </p:sp>
       <p:sp>
         <p:nvSpPr>
-          <p:cNvPr id="196" name="Shape 194"/>
+          <p:cNvPr id="197" name="Shape 195"/>
           <p:cNvSpPr/>
           <p:nvPr/>
         </p:nvSpPr>
@@ -15397,7 +15438,7 @@
       </p:sp>
       <p:sp>
         <p:nvSpPr>
-          <p:cNvPr id="197" name="Shape 195"/>
+          <p:cNvPr id="198" name="Shape 196"/>
           <p:cNvSpPr/>
           <p:nvPr/>
         </p:nvSpPr>
@@ -15420,7 +15461,7 @@
       </p:sp>
       <p:sp>
         <p:nvSpPr>
-          <p:cNvPr id="198" name="Text 196"/>
+          <p:cNvPr id="199" name="Text 197"/>
           <p:cNvSpPr/>
           <p:nvPr/>
         </p:nvSpPr>
@@ -15459,7 +15500,7 @@
       </p:sp>
       <p:sp>
         <p:nvSpPr>
-          <p:cNvPr id="199" name="Shape 197"/>
+          <p:cNvPr id="200" name="Shape 198"/>
           <p:cNvSpPr/>
           <p:nvPr/>
         </p:nvSpPr>
@@ -15482,7 +15523,7 @@
       </p:sp>
       <p:sp>
         <p:nvSpPr>
-          <p:cNvPr id="200" name="Text 198"/>
+          <p:cNvPr id="201" name="Text 199"/>
           <p:cNvSpPr/>
           <p:nvPr/>
         </p:nvSpPr>
@@ -15521,7 +15562,7 @@
       </p:sp>
       <p:sp>
         <p:nvSpPr>
-          <p:cNvPr id="201" name="Shape 199"/>
+          <p:cNvPr id="202" name="Shape 200"/>
           <p:cNvSpPr/>
           <p:nvPr/>
         </p:nvSpPr>
@@ -15544,7 +15585,7 @@
       </p:sp>
       <p:sp>
         <p:nvSpPr>
-          <p:cNvPr id="202" name="Text 200"/>
+          <p:cNvPr id="203" name="Text 201"/>
           <p:cNvSpPr/>
           <p:nvPr/>
         </p:nvSpPr>
@@ -15583,7 +15624,7 @@
       </p:sp>
       <p:sp>
         <p:nvSpPr>
-          <p:cNvPr id="203" name="Shape 201"/>
+          <p:cNvPr id="204" name="Shape 202"/>
           <p:cNvSpPr/>
           <p:nvPr/>
         </p:nvSpPr>
@@ -15606,7 +15647,7 @@
       </p:sp>
       <p:sp>
         <p:nvSpPr>
-          <p:cNvPr id="204" name="Text 202"/>
+          <p:cNvPr id="205" name="Text 203"/>
           <p:cNvSpPr/>
           <p:nvPr/>
         </p:nvSpPr>
@@ -15645,7 +15686,7 @@
       </p:sp>
       <p:sp>
         <p:nvSpPr>
-          <p:cNvPr id="205" name="Shape 203"/>
+          <p:cNvPr id="206" name="Shape 204"/>
           <p:cNvSpPr/>
           <p:nvPr/>
         </p:nvSpPr>
@@ -15668,7 +15709,7 @@
       </p:sp>
       <p:sp>
         <p:nvSpPr>
-          <p:cNvPr id="206" name="Text 204"/>
+          <p:cNvPr id="207" name="Text 205"/>
           <p:cNvSpPr/>
           <p:nvPr/>
         </p:nvSpPr>
@@ -15707,7 +15748,7 @@
       </p:sp>
       <p:sp>
         <p:nvSpPr>
-          <p:cNvPr id="207" name="Text 205"/>
+          <p:cNvPr id="208" name="Text 206"/>
           <p:cNvSpPr/>
           <p:nvPr/>
         </p:nvSpPr>
@@ -15746,7 +15787,7 @@
       </p:sp>
       <p:sp>
         <p:nvSpPr>
-          <p:cNvPr id="208" name="Shape 206"/>
+          <p:cNvPr id="209" name="Shape 207"/>
           <p:cNvSpPr/>
           <p:nvPr/>
         </p:nvSpPr>
@@ -15766,7 +15807,7 @@
       </p:sp>
       <p:sp>
         <p:nvSpPr>
-          <p:cNvPr id="209" name="Text 207"/>
+          <p:cNvPr id="210" name="Text 208"/>
           <p:cNvSpPr/>
           <p:nvPr/>
         </p:nvSpPr>
@@ -15805,7 +15846,7 @@
       </p:sp>
       <p:sp>
         <p:nvSpPr>
-          <p:cNvPr id="210" name="Shape 208"/>
+          <p:cNvPr id="211" name="Shape 209"/>
           <p:cNvSpPr/>
           <p:nvPr/>
         </p:nvSpPr>
@@ -15825,7 +15866,7 @@
       </p:sp>
       <p:sp>
         <p:nvSpPr>
-          <p:cNvPr id="211" name="Text 209"/>
+          <p:cNvPr id="212" name="Text 210"/>
           <p:cNvSpPr/>
           <p:nvPr/>
         </p:nvSpPr>
@@ -15864,7 +15905,7 @@
       </p:sp>
       <p:sp>
         <p:nvSpPr>
-          <p:cNvPr id="212" name="Shape 210"/>
+          <p:cNvPr id="213" name="Shape 211"/>
           <p:cNvSpPr/>
           <p:nvPr/>
         </p:nvSpPr>
@@ -15884,7 +15925,7 @@
       </p:sp>
       <p:sp>
         <p:nvSpPr>
-          <p:cNvPr id="213" name="Text 211"/>
+          <p:cNvPr id="214" name="Text 212"/>
           <p:cNvSpPr/>
           <p:nvPr/>
         </p:nvSpPr>
@@ -15923,7 +15964,7 @@
       </p:sp>
       <p:sp>
         <p:nvSpPr>
-          <p:cNvPr id="214" name="Shape 212"/>
+          <p:cNvPr id="215" name="Shape 213"/>
           <p:cNvSpPr/>
           <p:nvPr/>
         </p:nvSpPr>
@@ -15943,7 +15984,7 @@
       </p:sp>
       <p:sp>
         <p:nvSpPr>
-          <p:cNvPr id="215" name="Text 213"/>
+          <p:cNvPr id="216" name="Text 214"/>
           <p:cNvSpPr/>
           <p:nvPr/>
         </p:nvSpPr>
@@ -15977,6 +16018,45 @@
               <a:t>5</a:t>
             </a:r>
             <a:endParaRPr lang="en-US" sz="850" dirty="0"/>
+          </a:p>
+        </p:txBody>
+      </p:sp>
+      <p:sp>
+        <p:nvSpPr>
+          <p:cNvPr id="217" name="Text 215"/>
+          <p:cNvSpPr/>
+          <p:nvPr/>
+        </p:nvSpPr>
+        <p:spPr>
+          <a:xfrm>
+            <a:off x="1508760" y="2898648"/>
+            <a:ext cx="6126480" cy="164592"/>
+          </a:xfrm>
+          <a:prstGeom prst="rect">
+            <a:avLst/>
+          </a:prstGeom>
+          <a:noFill/>
+          <a:ln/>
+        </p:spPr>
+        <p:txBody>
+          <a:bodyPr wrap="square" lIns="0" tIns="0" rIns="0" bIns="0" rtlCol="0" anchor="ctr"/>
+          <a:lstStyle/>
+          <a:p>
+            <a:pPr indent="0" marL="0">
+              <a:buNone/>
+            </a:pPr>
+            <a:r>
+              <a:rPr lang="en-US" sz="800" i="1" dirty="0">
+                <a:solidFill>
+                  <a:srgbClr val="5E5E5E"/>
+                </a:solidFill>
+                <a:latin typeface="NVIDIA Sans" pitchFamily="34" charset="0"/>
+                <a:ea typeface="NVIDIA Sans" pitchFamily="34" charset="-122"/>
+                <a:cs typeface="NVIDIA Sans" pitchFamily="34" charset="-120"/>
+              </a:rPr>
+              <a:t>GPU busy in bands: prep 0, Qwen3.5 50, DiT 120 | DiT 224, Qwen3.5 123, optim 26 ms</a:t>
+            </a:r>
+            <a:endParaRPr lang="en-US" sz="800" dirty="0"/>
           </a:p>
         </p:txBody>
       </p:sp>
@@ -16681,7 +16761,7 @@
                           <a:ea typeface="NVIDIA Sans" pitchFamily="34" charset="-122"/>
                           <a:cs typeface="NVIDIA Sans" pitchFamily="34" charset="-120"/>
                         </a:rPr>
-                        <a:t>13,868 launches/step, median 8 µs, 79% &lt; 20 µs — 205 ms pure idle</a:t>
+                        <a:t>13,868 launches @ 8 µs median; occupancy fwd 34% vs bwd 70%; idle 205 ms</a:t>
                       </a:r>
                       <a:endParaRPr lang="en-US" sz="850" dirty="0">
                         <a:latin typeface="NVIDIA Sans" charset="0"/>
@@ -16998,7 +17078,7 @@
       </p:graphicFrame>
       <p:sp>
         <p:nvSpPr>
-          <p:cNvPr id="217" name="Text 214"/>
+          <p:cNvPr id="219" name="Text 216"/>
           <p:cNvSpPr/>
           <p:nvPr/>
         </p:nvSpPr>
@@ -17037,7 +17117,7 @@
       </p:sp>
       <p:sp>
         <p:nvSpPr>
-          <p:cNvPr id="218" name="Text 215"/>
+          <p:cNvPr id="220" name="Text 217"/>
           <p:cNvSpPr/>
           <p:nvPr/>
         </p:nvSpPr>
@@ -17076,7 +17156,7 @@
       </p:sp>
       <p:sp>
         <p:nvSpPr>
-          <p:cNvPr id="219" name="Shape 216"/>
+          <p:cNvPr id="221" name="Shape 218"/>
           <p:cNvSpPr/>
           <p:nvPr/>
         </p:nvSpPr>
@@ -17096,7 +17176,7 @@
       </p:sp>
       <p:pic>
         <p:nvPicPr>
-          <p:cNvPr id="220" name="Image 0" descr="/app/logos/nvidia-logo-blk-sm.png">    </p:cNvPr>
+          <p:cNvPr id="222" name="Image 0" descr="/app/logos/nvidia-logo-blk-sm.png">    </p:cNvPr>
           <p:cNvPicPr>
             <a:picLocks noChangeAspect="1"/>
           </p:cNvPicPr>

--- a/docs/slides/qwenpi-optimization.pptx
+++ b/docs/slides/qwenpi-optimization.pptx
@@ -17,9 +17,10 @@
     <p:sldId id="265" r:id="rId11"/>
     <p:sldId id="266" r:id="rId12"/>
     <p:sldId id="267" r:id="rId13"/>
+    <p:sldId id="268" r:id="rId14"/>
   </p:sldIdLst>
   <p:notesMasterIdLst>
-    <p:notesMasterId r:id="rId14"/>
+    <p:notesMasterId r:id="rId15"/>
   </p:notesMasterIdLst>
   <p:sldSz cx="9144000" cy="5143500"/>
   <p:notesSz cx="5143500" cy="9144000"/>
@@ -3353,7 +3354,8 @@
           <a:p>
             <a:r>
               <a:rPr lang="en-US" dirty="0"/>
-              <a:t>[IMPORTANT] Recommendation: bs 24 is the throughput config, gated on customer-side convergence validation (lr recalibration).</a:t>
+              <a:t>Ledger method: exposed comm = NCCL busy while no compute kernel runs; idle = nothing on any stream.
+Remaining exposed comm is gradient-readiness-bound, not hook- or bandwidth-bound — verified by intervention experiments.</a:t>
             </a:r>
             <a:endParaRPr lang="en-US" dirty="0"/>
           </a:p>
@@ -3441,7 +3443,7 @@
           <a:p>
             <a:r>
               <a:rPr lang="en-US" dirty="0"/>
-              <a:t>This slide is the credibility anchor: what we did NOT ship is as evidence-based as what we did.</a:t>
+              <a:t>[IMPORTANT] Recommendation: bs 24 is the throughput config, gated on customer-side convergence validation (lr recalibration).</a:t>
             </a:r>
             <a:endParaRPr lang="en-US" dirty="0"/>
           </a:p>
@@ -3529,8 +3531,7 @@
           <a:p>
             <a:r>
               <a:rPr lang="en-US" dirty="0"/>
-              <a:t>Everything shipped is one MR per optimization with measured before/after — the repo history is the reproducibility story.
-[IMPORTANT] Close: 3.2x is banked; the roadmap above is how we keep going.</a:t>
+              <a:t>This slide is the credibility anchor: what we did NOT ship is as evidence-based as what we did.</a:t>
             </a:r>
             <a:endParaRPr lang="en-US" dirty="0"/>
           </a:p>
@@ -3554,6 +3555,95 @@
             <a:fld id="{F7021451-1387-4CA6-816F-3879F97B5CBC}" type="slidenum">
               <a:rPr lang="en-US"/>
               <a:t>12</a:t>
+            </a:fld>
+            <a:endParaRPr lang="en-US"/>
+          </a:p>
+        </p:txBody>
+      </p:sp>
+    </p:spTree>
+    <p:extLst>
+      <p:ext uri="{BB962C8B-B14F-4D97-AF65-F5344CB8AC3E}">
+        <p14:creationId xmlns:p14="http://schemas.microsoft.com/office/powerpoint/2010/main" val="1024086991"/>
+      </p:ext>
+    </p:extLst>
+  </p:cSld>
+  <p:clrMapOvr>
+    <a:masterClrMapping/>
+  </p:clrMapOvr>
+</p:notes>
+</file>
+
+<file path=ppt/notesSlides/notesSlide13.xml><?xml version="1.0" encoding="utf-8"?>
+<p:notes xmlns:a="http://schemas.openxmlformats.org/drawingml/2006/main" xmlns:r="http://schemas.openxmlformats.org/officeDocument/2006/relationships" xmlns:p="http://schemas.openxmlformats.org/presentationml/2006/main">
+  <p:cSld>
+    <p:spTree>
+      <p:nvGrpSpPr>
+        <p:cNvPr id="1" name=""/>
+        <p:cNvGrpSpPr/>
+        <p:nvPr/>
+      </p:nvGrpSpPr>
+      <p:grpSpPr>
+        <a:xfrm>
+          <a:off x="0" y="0"/>
+          <a:ext cx="0" cy="0"/>
+          <a:chOff x="0" y="0"/>
+          <a:chExt cx="0" cy="0"/>
+        </a:xfrm>
+      </p:grpSpPr>
+      <p:sp>
+        <p:nvSpPr>
+          <p:cNvPr id="2" name="Slide Image Placeholder 1"/>
+          <p:cNvSpPr>
+            <a:spLocks noGrp="1" noRot="1" noChangeAspect="1"/>
+          </p:cNvSpPr>
+          <p:nvPr>
+            <p:ph type="sldImg"/>
+          </p:nvPr>
+        </p:nvSpPr>
+        <p:spPr/>
+      </p:sp>
+      <p:sp>
+        <p:nvSpPr>
+          <p:cNvPr id="3" name="Notes Placeholder 2"/>
+          <p:cNvSpPr>
+            <a:spLocks noGrp="1"/>
+          </p:cNvSpPr>
+          <p:nvPr>
+            <p:ph type="body" idx="1"/>
+          </p:nvPr>
+        </p:nvSpPr>
+        <p:spPr/>
+        <p:txBody>
+          <a:bodyPr/>
+          <a:lstStyle/>
+          <a:p>
+            <a:r>
+              <a:rPr lang="en-US" dirty="0"/>
+              <a:t>Everything shipped is one MR per optimization with measured before/after — the repo history is the reproducibility story.
+[IMPORTANT] Close: 3.2x is banked; the roadmap above is how we keep going.</a:t>
+            </a:r>
+            <a:endParaRPr lang="en-US" dirty="0"/>
+          </a:p>
+        </p:txBody>
+      </p:sp>
+      <p:sp>
+        <p:nvSpPr>
+          <p:cNvPr id="4" name="Slide Number Placeholder 3"/>
+          <p:cNvSpPr>
+            <a:spLocks noGrp="1"/>
+          </p:cNvSpPr>
+          <p:nvPr>
+            <p:ph type="sldNum" sz="quarter" idx="10"/>
+          </p:nvPr>
+        </p:nvSpPr>
+        <p:spPr/>
+        <p:txBody>
+          <a:bodyPr/>
+          <a:lstStyle/>
+          <a:p>
+            <a:fld id="{F7021451-1387-4CA6-816F-3879F97B5CBC}" type="slidenum">
+              <a:rPr lang="en-US"/>
+              <a:t>13</a:t>
             </a:fld>
             <a:endParaRPr lang="en-US"/>
           </a:p>
@@ -4154,8 +4244,8 @@
           <a:p>
             <a:r>
               <a:rPr lang="en-US" dirty="0"/>
-              <a:t>Graph capture preserves exact hidden-state semantics — verified fullgraph fwd+bwd and unchanged loss trajectory.
-Group size 8 balances capture memory against launch savings; per-layer compile was ported but the fused graphs replaced it.</a:t>
+              <a:t>Baseline: qwenpi_baseline_nvtx train_step_33; optimized: milestone1 train_step_48. Launch-window attribution both sides.
+[IMPORTANT] This page motivates graphs with the customer's own trace numbers; the next page is the design and the 4-vs-1 answer.</a:t>
             </a:r>
             <a:endParaRPr lang="en-US" dirty="0"/>
           </a:p>
@@ -4243,8 +4333,8 @@
           <a:p>
             <a:r>
               <a:rPr lang="en-US" dirty="0"/>
-              <a:t>Ledger method: exposed comm = NCCL busy while no compute kernel runs; idle = nothing on any stream.
-Remaining exposed comm is gradient-readiness-bound, not hook- or bandwidth-bound — verified by intervention experiments.</a:t>
+              <a:t>Graph capture preserves exact hidden-state semantics — verified fullgraph fwd+bwd and unchanged loss trajectory.
+Group size 8 balances capture memory against launch savings; per-layer compile was ported but the fused graphs replaced it.</a:t>
             </a:r>
             <a:endParaRPr lang="en-US" dirty="0"/>
           </a:p>
@@ -4824,7 +4914,7 @@
                 <a:ea typeface="NVIDIA Sans" pitchFamily="34" charset="-122"/>
                 <a:cs typeface="NVIDIA Sans" pitchFamily="34" charset="-120"/>
               </a:rPr>
-              <a:t>Batch Scaling: Sweet Spot at 24 per GPU</a:t>
+              <a:t>ZeRO-2 Comm Tuning &amp; the Final Ledger</a:t>
             </a:r>
             <a:endParaRPr lang="en-US" sz="3000" dirty="0"/>
           </a:p>
@@ -4863,7 +4953,7 @@
                 <a:ea typeface="NVIDIA Sans" pitchFamily="34" charset="-122"/>
                 <a:cs typeface="NVIDIA Sans" pitchFamily="34" charset="-120"/>
               </a:rPr>
-              <a:t>Same optimized config, only per-GPU batch changes — peak 340 samples/node/s</a:t>
+              <a:t>271 → 249 ms.  Fewer, larger collectives — and an honest ledger of what remains</a:t>
             </a:r>
             <a:endParaRPr lang="en-US" sz="1500" dirty="0"/>
           </a:p>
@@ -4871,223 +4961,90 @@
       </p:sp>
       <p:sp>
         <p:nvSpPr>
-          <p:cNvPr id="4" name="Shape 2"/>
-          <p:cNvSpPr/>
-          <p:nvPr/>
-        </p:nvSpPr>
-        <p:spPr>
-          <a:xfrm>
-            <a:off x="1005840" y="3840480"/>
-            <a:ext cx="4846320" cy="0"/>
-          </a:xfrm>
-          <a:prstGeom prst="line">
+          <p:cNvPr id="4" name="Text 2"/>
+          <p:cNvSpPr/>
+          <p:nvPr/>
+        </p:nvSpPr>
+        <p:spPr>
+          <a:xfrm>
+            <a:off x="457200" y="1325880"/>
+            <a:ext cx="8229600" cy="1234440"/>
+          </a:xfrm>
+          <a:prstGeom prst="rect">
             <a:avLst/>
           </a:prstGeom>
           <a:noFill/>
-          <a:ln w="9525">
-            <a:solidFill>
-              <a:srgbClr val="EAEAEA"/>
-            </a:solidFill>
-            <a:prstDash val="solid"/>
-          </a:ln>
-        </p:spPr>
-      </p:sp>
-      <p:sp>
-        <p:nvSpPr>
-          <p:cNvPr id="5" name="Text 3"/>
-          <p:cNvSpPr/>
-          <p:nvPr/>
-        </p:nvSpPr>
-        <p:spPr>
-          <a:xfrm>
-            <a:off x="548640" y="3749040"/>
-            <a:ext cx="365760" cy="182880"/>
-          </a:xfrm>
-          <a:prstGeom prst="rect">
-            <a:avLst/>
-          </a:prstGeom>
-          <a:noFill/>
           <a:ln/>
         </p:spPr>
         <p:txBody>
-          <a:bodyPr wrap="square" lIns="0" tIns="0" rIns="0" bIns="0" rtlCol="0" anchor="ctr"/>
+          <a:bodyPr wrap="square" lIns="0" tIns="0" rIns="0" bIns="0" rtlCol="0" anchor="t"/>
           <a:lstStyle/>
           <a:p>
-            <a:pPr algn="r" indent="0" marL="0">
-              <a:buNone/>
+            <a:pPr marL="342900" indent="-342900">
+              <a:buSzPct val="100000"/>
+              <a:buChar char="•"/>
             </a:pPr>
             <a:r>
-              <a:rPr lang="en-US" sz="900" dirty="0">
+              <a:rPr lang="en-US" sz="1200" dirty="0">
                 <a:solidFill>
-                  <a:srgbClr val="8C8C8C"/>
+                  <a:srgbClr val="000000"/>
                 </a:solidFill>
                 <a:latin typeface="NVIDIA Sans" pitchFamily="34" charset="0"/>
                 <a:ea typeface="NVIDIA Sans" pitchFamily="34" charset="-122"/>
                 <a:cs typeface="NVIDIA Sans" pitchFamily="34" charset="-120"/>
               </a:rPr>
-              <a:t>0</a:t>
+              <a:t>reduce_bucket_size 5e8 → 1.5e9: 6 gradient AllReduces per step instead of ~20, scoped to this model's config only</a:t>
             </a:r>
-            <a:endParaRPr lang="en-US" sz="900" dirty="0"/>
-          </a:p>
-        </p:txBody>
-      </p:sp>
-      <p:sp>
-        <p:nvSpPr>
-          <p:cNvPr id="6" name="Shape 4"/>
-          <p:cNvSpPr/>
-          <p:nvPr/>
-        </p:nvSpPr>
-        <p:spPr>
-          <a:xfrm>
-            <a:off x="1005840" y="3223260"/>
-            <a:ext cx="4846320" cy="0"/>
-          </a:xfrm>
-          <a:prstGeom prst="line">
-            <a:avLst/>
-          </a:prstGeom>
-          <a:noFill/>
-          <a:ln w="9525">
-            <a:solidFill>
-              <a:srgbClr val="EAEAEA"/>
-            </a:solidFill>
-            <a:prstDash val="solid"/>
-          </a:ln>
-        </p:spPr>
-      </p:sp>
-      <p:sp>
-        <p:nvSpPr>
-          <p:cNvPr id="7" name="Text 5"/>
-          <p:cNvSpPr/>
-          <p:nvPr/>
-        </p:nvSpPr>
-        <p:spPr>
-          <a:xfrm>
-            <a:off x="548640" y="3131820"/>
-            <a:ext cx="365760" cy="182880"/>
-          </a:xfrm>
-          <a:prstGeom prst="rect">
-            <a:avLst/>
-          </a:prstGeom>
-          <a:noFill/>
-          <a:ln/>
-        </p:spPr>
-        <p:txBody>
-          <a:bodyPr wrap="square" lIns="0" tIns="0" rIns="0" bIns="0" rtlCol="0" anchor="ctr"/>
-          <a:lstStyle/>
-          <a:p>
-            <a:pPr algn="r" indent="0" marL="0">
-              <a:buNone/>
+            <a:endParaRPr lang="en-US" sz="1200" dirty="0"/>
+          </a:p>
+          <a:p>
+            <a:pPr marL="342900" indent="-342900">
+              <a:buSzPct val="100000"/>
+              <a:buChar char="•"/>
             </a:pPr>
             <a:r>
-              <a:rPr lang="en-US" sz="900" dirty="0">
+              <a:rPr lang="en-US" sz="1200" dirty="0">
                 <a:solidFill>
-                  <a:srgbClr val="8C8C8C"/>
+                  <a:srgbClr val="000000"/>
                 </a:solidFill>
                 <a:latin typeface="NVIDIA Sans" pitchFamily="34" charset="0"/>
                 <a:ea typeface="NVIDIA Sans" pitchFamily="34" charset="-122"/>
                 <a:cs typeface="NVIDIA Sans" pitchFamily="34" charset="-120"/>
               </a:rPr>
-              <a:t>100</a:t>
+              <a:t>reduce_scatter=false: drops DeepSpeed's redundant per-bucket flatten (CatArrayBatchedCopy) ahead of each AllReduce</a:t>
             </a:r>
-            <a:endParaRPr lang="en-US" sz="900" dirty="0"/>
-          </a:p>
-        </p:txBody>
-      </p:sp>
-      <p:sp>
-        <p:nvSpPr>
-          <p:cNvPr id="8" name="Shape 6"/>
-          <p:cNvSpPr/>
-          <p:nvPr/>
-        </p:nvSpPr>
-        <p:spPr>
-          <a:xfrm>
-            <a:off x="1005840" y="2606040"/>
-            <a:ext cx="4846320" cy="0"/>
-          </a:xfrm>
-          <a:prstGeom prst="line">
-            <a:avLst/>
-          </a:prstGeom>
-          <a:noFill/>
-          <a:ln w="9525">
-            <a:solidFill>
-              <a:srgbClr val="EAEAEA"/>
-            </a:solidFill>
-            <a:prstDash val="solid"/>
-          </a:ln>
-        </p:spPr>
-      </p:sp>
-      <p:sp>
-        <p:nvSpPr>
-          <p:cNvPr id="9" name="Text 7"/>
-          <p:cNvSpPr/>
-          <p:nvPr/>
-        </p:nvSpPr>
-        <p:spPr>
-          <a:xfrm>
-            <a:off x="548640" y="2514600"/>
-            <a:ext cx="365760" cy="182880"/>
-          </a:xfrm>
-          <a:prstGeom prst="rect">
-            <a:avLst/>
-          </a:prstGeom>
-          <a:noFill/>
-          <a:ln/>
-        </p:spPr>
-        <p:txBody>
-          <a:bodyPr wrap="square" lIns="0" tIns="0" rIns="0" bIns="0" rtlCol="0" anchor="ctr"/>
-          <a:lstStyle/>
-          <a:p>
-            <a:pPr algn="r" indent="0" marL="0">
-              <a:buNone/>
+            <a:endParaRPr lang="en-US" sz="1200" dirty="0"/>
+          </a:p>
+          <a:p>
+            <a:pPr marL="342900" indent="-342900">
+              <a:buSzPct val="100000"/>
+              <a:buChar char="•"/>
             </a:pPr>
             <a:r>
-              <a:rPr lang="en-US" sz="900" dirty="0">
+              <a:rPr lang="en-US" sz="1200" dirty="0">
                 <a:solidFill>
-                  <a:srgbClr val="8C8C8C"/>
+                  <a:srgbClr val="000000"/>
                 </a:solidFill>
                 <a:latin typeface="NVIDIA Sans" pitchFamily="34" charset="0"/>
                 <a:ea typeface="NVIDIA Sans" pitchFamily="34" charset="-122"/>
                 <a:cs typeface="NVIDIA Sans" pitchFamily="34" charset="-120"/>
               </a:rPr>
-              <a:t>200</a:t>
+              <a:t>Verified NOT bandwidth-bound: AllReduce microbenchmark hits 478 GB/s bus bandwidth — the NVLink per-direction ceiling. The remaining exposed comm can only shrink by sending fewer bytes.</a:t>
             </a:r>
-            <a:endParaRPr lang="en-US" sz="900" dirty="0"/>
+            <a:endParaRPr lang="en-US" sz="1200" dirty="0"/>
           </a:p>
         </p:txBody>
       </p:sp>
       <p:sp>
         <p:nvSpPr>
-          <p:cNvPr id="10" name="Shape 8"/>
-          <p:cNvSpPr/>
-          <p:nvPr/>
-        </p:nvSpPr>
-        <p:spPr>
-          <a:xfrm>
-            <a:off x="1005840" y="1988820"/>
-            <a:ext cx="4846320" cy="0"/>
-          </a:xfrm>
-          <a:prstGeom prst="line">
-            <a:avLst/>
-          </a:prstGeom>
-          <a:noFill/>
-          <a:ln w="9525">
-            <a:solidFill>
-              <a:srgbClr val="EAEAEA"/>
-            </a:solidFill>
-            <a:prstDash val="solid"/>
-          </a:ln>
-        </p:spPr>
-      </p:sp>
-      <p:sp>
-        <p:nvSpPr>
-          <p:cNvPr id="11" name="Text 9"/>
-          <p:cNvSpPr/>
-          <p:nvPr/>
-        </p:nvSpPr>
-        <p:spPr>
-          <a:xfrm>
-            <a:off x="548640" y="1897380"/>
-            <a:ext cx="365760" cy="182880"/>
+          <p:cNvPr id="5" name="Text 3"/>
+          <p:cNvSpPr/>
+          <p:nvPr/>
+        </p:nvSpPr>
+        <p:spPr>
+          <a:xfrm>
+            <a:off x="457200" y="2697480"/>
+            <a:ext cx="8229600" cy="274320"/>
           </a:xfrm>
           <a:prstGeom prst="rect">
             <a:avLst/>
@@ -5099,57 +5056,34 @@
           <a:bodyPr wrap="square" lIns="0" tIns="0" rIns="0" bIns="0" rtlCol="0" anchor="ctr"/>
           <a:lstStyle/>
           <a:p>
-            <a:pPr algn="r" indent="0" marL="0">
+            <a:pPr indent="0" marL="0">
               <a:buNone/>
             </a:pPr>
             <a:r>
-              <a:rPr lang="en-US" sz="900" dirty="0">
+              <a:rPr lang="en-US" sz="1300" b="1" dirty="0">
                 <a:solidFill>
-                  <a:srgbClr val="8C8C8C"/>
+                  <a:srgbClr val="000000"/>
                 </a:solidFill>
                 <a:latin typeface="NVIDIA Sans" pitchFamily="34" charset="0"/>
                 <a:ea typeface="NVIDIA Sans" pitchFamily="34" charset="-122"/>
                 <a:cs typeface="NVIDIA Sans" pitchFamily="34" charset="-120"/>
               </a:rPr>
-              <a:t>300</a:t>
+              <a:t>Per-step time ledger (same accounting, one steady step from each nsys capture)</a:t>
             </a:r>
-            <a:endParaRPr lang="en-US" sz="900" dirty="0"/>
+            <a:endParaRPr lang="en-US" sz="1300" dirty="0"/>
           </a:p>
         </p:txBody>
       </p:sp>
       <p:sp>
         <p:nvSpPr>
-          <p:cNvPr id="12" name="Shape 10"/>
-          <p:cNvSpPr/>
-          <p:nvPr/>
-        </p:nvSpPr>
-        <p:spPr>
-          <a:xfrm>
-            <a:off x="1005840" y="1371600"/>
-            <a:ext cx="4846320" cy="0"/>
-          </a:xfrm>
-          <a:prstGeom prst="line">
-            <a:avLst/>
-          </a:prstGeom>
-          <a:noFill/>
-          <a:ln w="9525">
-            <a:solidFill>
-              <a:srgbClr val="EAEAEA"/>
-            </a:solidFill>
-            <a:prstDash val="solid"/>
-          </a:ln>
-        </p:spPr>
-      </p:sp>
-      <p:sp>
-        <p:nvSpPr>
-          <p:cNvPr id="13" name="Text 11"/>
-          <p:cNvSpPr/>
-          <p:nvPr/>
-        </p:nvSpPr>
-        <p:spPr>
-          <a:xfrm>
-            <a:off x="548640" y="1280160"/>
-            <a:ext cx="365760" cy="182880"/>
+          <p:cNvPr id="6" name="Text 4"/>
+          <p:cNvSpPr/>
+          <p:nvPr/>
+        </p:nvSpPr>
+        <p:spPr>
+          <a:xfrm>
+            <a:off x="640080" y="3044952"/>
+            <a:ext cx="1463040" cy="310896"/>
           </a:xfrm>
           <a:prstGeom prst="rect">
             <a:avLst/>
@@ -5161,167 +5095,7 @@
           <a:bodyPr wrap="square" lIns="0" tIns="0" rIns="0" bIns="0" rtlCol="0" anchor="ctr"/>
           <a:lstStyle/>
           <a:p>
-            <a:pPr algn="r" indent="0" marL="0">
-              <a:buNone/>
-            </a:pPr>
-            <a:r>
-              <a:rPr lang="en-US" sz="900" dirty="0">
-                <a:solidFill>
-                  <a:srgbClr val="8C8C8C"/>
-                </a:solidFill>
-                <a:latin typeface="NVIDIA Sans" pitchFamily="34" charset="0"/>
-                <a:ea typeface="NVIDIA Sans" pitchFamily="34" charset="-122"/>
-                <a:cs typeface="NVIDIA Sans" pitchFamily="34" charset="-120"/>
-              </a:rPr>
-              <a:t>400</a:t>
-            </a:r>
-            <a:endParaRPr lang="en-US" sz="900" dirty="0"/>
-          </a:p>
-        </p:txBody>
-      </p:sp>
-      <p:sp>
-        <p:nvSpPr>
-          <p:cNvPr id="14" name="Shape 12"/>
-          <p:cNvSpPr/>
-          <p:nvPr/>
-        </p:nvSpPr>
-        <p:spPr>
-          <a:xfrm>
-            <a:off x="1005840" y="2606040"/>
-            <a:ext cx="4846320" cy="0"/>
-          </a:xfrm>
-          <a:prstGeom prst="line">
-            <a:avLst/>
-          </a:prstGeom>
-          <a:noFill/>
-          <a:ln w="15875">
-            <a:solidFill>
-              <a:srgbClr val="5E5E5E"/>
-            </a:solidFill>
-            <a:prstDash val="dash"/>
-          </a:ln>
-        </p:spPr>
-      </p:sp>
-      <p:sp>
-        <p:nvSpPr>
-          <p:cNvPr id="15" name="Text 13"/>
-          <p:cNvSpPr/>
-          <p:nvPr/>
-        </p:nvSpPr>
-        <p:spPr>
-          <a:xfrm>
-            <a:off x="1051560" y="1399032"/>
-            <a:ext cx="4114800" cy="182880"/>
-          </a:xfrm>
-          <a:prstGeom prst="rect">
-            <a:avLst/>
-          </a:prstGeom>
-          <a:noFill/>
-          <a:ln/>
-        </p:spPr>
-        <p:txBody>
-          <a:bodyPr wrap="square" lIns="0" tIns="0" rIns="0" bIns="0" rtlCol="0" anchor="ctr"/>
-          <a:lstStyle/>
-          <a:p>
             <a:pPr indent="0" marL="0">
-              <a:buNone/>
-            </a:pPr>
-            <a:r>
-              <a:rPr lang="en-US" sz="900" i="1" dirty="0">
-                <a:solidFill>
-                  <a:srgbClr val="5E5E5E"/>
-                </a:solidFill>
-                <a:latin typeface="NVIDIA Sans" pitchFamily="34" charset="0"/>
-                <a:ea typeface="NVIDIA Sans" pitchFamily="34" charset="-122"/>
-                <a:cs typeface="NVIDIA Sans" pitchFamily="34" charset="-120"/>
-              </a:rPr>
-              <a:t>samples / node / s   ·   dashed = 200/node/s target</a:t>
-            </a:r>
-            <a:endParaRPr lang="en-US" sz="900" dirty="0"/>
-          </a:p>
-        </p:txBody>
-      </p:sp>
-      <p:sp>
-        <p:nvSpPr>
-          <p:cNvPr id="16" name="Shape 14"/>
-          <p:cNvSpPr/>
-          <p:nvPr/>
-        </p:nvSpPr>
-        <p:spPr>
-          <a:xfrm>
-            <a:off x="1268730" y="2254225"/>
-            <a:ext cx="685800" cy="1586255"/>
-          </a:xfrm>
-          <a:prstGeom prst="rect">
-            <a:avLst/>
-          </a:prstGeom>
-          <a:solidFill>
-            <a:srgbClr val="008564"/>
-          </a:solidFill>
-          <a:ln/>
-        </p:spPr>
-      </p:sp>
-      <p:sp>
-        <p:nvSpPr>
-          <p:cNvPr id="17" name="Text 15"/>
-          <p:cNvSpPr/>
-          <p:nvPr/>
-        </p:nvSpPr>
-        <p:spPr>
-          <a:xfrm>
-            <a:off x="1131570" y="1998193"/>
-            <a:ext cx="960120" cy="228600"/>
-          </a:xfrm>
-          <a:prstGeom prst="rect">
-            <a:avLst/>
-          </a:prstGeom>
-          <a:noFill/>
-          <a:ln/>
-        </p:spPr>
-        <p:txBody>
-          <a:bodyPr wrap="square" lIns="0" tIns="0" rIns="0" bIns="0" rtlCol="0" anchor="ctr"/>
-          <a:lstStyle/>
-          <a:p>
-            <a:pPr algn="ctr" indent="0" marL="0">
-              <a:buNone/>
-            </a:pPr>
-            <a:r>
-              <a:rPr lang="en-US" sz="1300" b="1" dirty="0">
-                <a:solidFill>
-                  <a:srgbClr val="008564"/>
-                </a:solidFill>
-                <a:latin typeface="NVIDIA Sans" pitchFamily="34" charset="0"/>
-                <a:ea typeface="NVIDIA Sans" pitchFamily="34" charset="-122"/>
-                <a:cs typeface="NVIDIA Sans" pitchFamily="34" charset="-120"/>
-              </a:rPr>
-              <a:t>257</a:t>
-            </a:r>
-            <a:endParaRPr lang="en-US" sz="1300" dirty="0"/>
-          </a:p>
-        </p:txBody>
-      </p:sp>
-      <p:sp>
-        <p:nvSpPr>
-          <p:cNvPr id="18" name="Text 16"/>
-          <p:cNvSpPr/>
-          <p:nvPr/>
-        </p:nvSpPr>
-        <p:spPr>
-          <a:xfrm>
-            <a:off x="1131570" y="3895344"/>
-            <a:ext cx="960120" cy="201168"/>
-          </a:xfrm>
-          <a:prstGeom prst="rect">
-            <a:avLst/>
-          </a:prstGeom>
-          <a:noFill/>
-          <a:ln/>
-        </p:spPr>
-        <p:txBody>
-          <a:bodyPr wrap="square" lIns="0" tIns="0" rIns="0" bIns="0" rtlCol="0" anchor="ctr"/>
-          <a:lstStyle/>
-          <a:p>
-            <a:pPr algn="ctr" indent="0" marL="0">
               <a:buNone/>
             </a:pPr>
             <a:r>
@@ -5333,7 +5107,7 @@
                 <a:ea typeface="NVIDIA Sans" pitchFamily="34" charset="-122"/>
                 <a:cs typeface="NVIDIA Sans" pitchFamily="34" charset="-120"/>
               </a:rPr>
-              <a:t>bs 8</a:t>
+              <a:t>Baseline</a:t>
             </a:r>
             <a:endParaRPr lang="en-US" sz="1100" dirty="0"/>
           </a:p>
@@ -5341,14 +5115,34 @@
       </p:sp>
       <p:sp>
         <p:nvSpPr>
-          <p:cNvPr id="19" name="Text 17"/>
-          <p:cNvSpPr/>
-          <p:nvPr/>
-        </p:nvSpPr>
-        <p:spPr>
-          <a:xfrm>
-            <a:off x="1085850" y="4096512"/>
-            <a:ext cx="1051560" cy="182880"/>
+          <p:cNvPr id="7" name="Shape 5"/>
+          <p:cNvSpPr/>
+          <p:nvPr/>
+        </p:nvSpPr>
+        <p:spPr>
+          <a:xfrm>
+            <a:off x="2148840" y="3063240"/>
+            <a:ext cx="3605332" cy="310896"/>
+          </a:xfrm>
+          <a:prstGeom prst="rect">
+            <a:avLst/>
+          </a:prstGeom>
+          <a:solidFill>
+            <a:srgbClr val="76B900"/>
+          </a:solidFill>
+          <a:ln/>
+        </p:spPr>
+      </p:sp>
+      <p:sp>
+        <p:nvSpPr>
+          <p:cNvPr id="8" name="Text 6"/>
+          <p:cNvSpPr/>
+          <p:nvPr/>
+        </p:nvSpPr>
+        <p:spPr>
+          <a:xfrm>
+            <a:off x="2148840" y="3063240"/>
+            <a:ext cx="3605332" cy="310896"/>
           </a:xfrm>
           <a:prstGeom prst="rect">
             <a:avLst/>
@@ -5364,7 +5158,86 @@
               <a:buNone/>
             </a:pPr>
             <a:r>
-              <a:rPr lang="en-US" sz="900" dirty="0">
+              <a:rPr lang="en-US" sz="1000" b="1" dirty="0">
+                <a:solidFill>
+                  <a:srgbClr val="FFFFFF"/>
+                </a:solidFill>
+                <a:latin typeface="NVIDIA Sans" pitchFamily="34" charset="0"/>
+                <a:ea typeface="NVIDIA Sans" pitchFamily="34" charset="-122"/>
+                <a:cs typeface="NVIDIA Sans" pitchFamily="34" charset="-120"/>
+              </a:rPr>
+              <a:t>540</a:t>
+            </a:r>
+            <a:endParaRPr lang="en-US" sz="1000" dirty="0"/>
+          </a:p>
+        </p:txBody>
+      </p:sp>
+      <p:sp>
+        <p:nvSpPr>
+          <p:cNvPr id="9" name="Shape 7"/>
+          <p:cNvSpPr/>
+          <p:nvPr/>
+        </p:nvSpPr>
+        <p:spPr>
+          <a:xfrm>
+            <a:off x="5754172" y="3063240"/>
+            <a:ext cx="411123" cy="310896"/>
+          </a:xfrm>
+          <a:prstGeom prst="rect">
+            <a:avLst/>
+          </a:prstGeom>
+          <a:solidFill>
+            <a:srgbClr val="0071C5"/>
+          </a:solidFill>
+          <a:ln/>
+        </p:spPr>
+      </p:sp>
+      <p:sp>
+        <p:nvSpPr>
+          <p:cNvPr id="10" name="Shape 8"/>
+          <p:cNvSpPr/>
+          <p:nvPr/>
+        </p:nvSpPr>
+        <p:spPr>
+          <a:xfrm>
+            <a:off x="6165295" y="3063240"/>
+            <a:ext cx="1368852" cy="310896"/>
+          </a:xfrm>
+          <a:prstGeom prst="rect">
+            <a:avLst/>
+          </a:prstGeom>
+          <a:solidFill>
+            <a:srgbClr val="D9D9D9"/>
+          </a:solidFill>
+          <a:ln/>
+        </p:spPr>
+      </p:sp>
+      <p:sp>
+        <p:nvSpPr>
+          <p:cNvPr id="11" name="Text 9"/>
+          <p:cNvSpPr/>
+          <p:nvPr/>
+        </p:nvSpPr>
+        <p:spPr>
+          <a:xfrm>
+            <a:off x="6165295" y="3063240"/>
+            <a:ext cx="1368852" cy="310896"/>
+          </a:xfrm>
+          <a:prstGeom prst="rect">
+            <a:avLst/>
+          </a:prstGeom>
+          <a:noFill/>
+          <a:ln/>
+        </p:spPr>
+        <p:txBody>
+          <a:bodyPr wrap="square" lIns="0" tIns="0" rIns="0" bIns="0" rtlCol="0" anchor="ctr"/>
+          <a:lstStyle/>
+          <a:p>
+            <a:pPr algn="ctr" indent="0" marL="0">
+              <a:buNone/>
+            </a:pPr>
+            <a:r>
+              <a:rPr lang="en-US" sz="1000" b="1" dirty="0">
                 <a:solidFill>
                   <a:srgbClr val="5E5E5E"/>
                 </a:solidFill>
@@ -5372,42 +5245,22 @@
                 <a:ea typeface="NVIDIA Sans" pitchFamily="34" charset="-122"/>
                 <a:cs typeface="NVIDIA Sans" pitchFamily="34" charset="-120"/>
               </a:rPr>
-              <a:t>MFU 23.1%</a:t>
+              <a:t>205</a:t>
             </a:r>
-            <a:endParaRPr lang="en-US" sz="900" dirty="0"/>
+            <a:endParaRPr lang="en-US" sz="1000" dirty="0"/>
           </a:p>
         </p:txBody>
       </p:sp>
       <p:sp>
         <p:nvSpPr>
-          <p:cNvPr id="20" name="Shape 18"/>
-          <p:cNvSpPr/>
-          <p:nvPr/>
-        </p:nvSpPr>
-        <p:spPr>
-          <a:xfrm>
-            <a:off x="2480310" y="1883893"/>
-            <a:ext cx="685800" cy="1956587"/>
-          </a:xfrm>
-          <a:prstGeom prst="rect">
-            <a:avLst/>
-          </a:prstGeom>
-          <a:solidFill>
-            <a:srgbClr val="008564"/>
-          </a:solidFill>
-          <a:ln/>
-        </p:spPr>
-      </p:sp>
-      <p:sp>
-        <p:nvSpPr>
-          <p:cNvPr id="21" name="Text 19"/>
-          <p:cNvSpPr/>
-          <p:nvPr/>
-        </p:nvSpPr>
-        <p:spPr>
-          <a:xfrm>
-            <a:off x="2343150" y="1627861"/>
-            <a:ext cx="960120" cy="228600"/>
+          <p:cNvPr id="12" name="Text 10"/>
+          <p:cNvSpPr/>
+          <p:nvPr/>
+        </p:nvSpPr>
+        <p:spPr>
+          <a:xfrm>
+            <a:off x="7589010" y="3063240"/>
+            <a:ext cx="822960" cy="310896"/>
           </a:xfrm>
           <a:prstGeom prst="rect">
             <a:avLst/>
@@ -5419,46 +5272,7 @@
           <a:bodyPr wrap="square" lIns="0" tIns="0" rIns="0" bIns="0" rtlCol="0" anchor="ctr"/>
           <a:lstStyle/>
           <a:p>
-            <a:pPr algn="ctr" indent="0" marL="0">
-              <a:buNone/>
-            </a:pPr>
-            <a:r>
-              <a:rPr lang="en-US" sz="1300" b="1" dirty="0">
-                <a:solidFill>
-                  <a:srgbClr val="008564"/>
-                </a:solidFill>
-                <a:latin typeface="NVIDIA Sans" pitchFamily="34" charset="0"/>
-                <a:ea typeface="NVIDIA Sans" pitchFamily="34" charset="-122"/>
-                <a:cs typeface="NVIDIA Sans" pitchFamily="34" charset="-120"/>
-              </a:rPr>
-              <a:t>317</a:t>
-            </a:r>
-            <a:endParaRPr lang="en-US" sz="1300" dirty="0"/>
-          </a:p>
-        </p:txBody>
-      </p:sp>
-      <p:sp>
-        <p:nvSpPr>
-          <p:cNvPr id="22" name="Text 20"/>
-          <p:cNvSpPr/>
-          <p:nvPr/>
-        </p:nvSpPr>
-        <p:spPr>
-          <a:xfrm>
-            <a:off x="2343150" y="3895344"/>
-            <a:ext cx="960120" cy="201168"/>
-          </a:xfrm>
-          <a:prstGeom prst="rect">
-            <a:avLst/>
-          </a:prstGeom>
-          <a:noFill/>
-          <a:ln/>
-        </p:spPr>
-        <p:txBody>
-          <a:bodyPr wrap="square" lIns="0" tIns="0" rIns="0" bIns="0" rtlCol="0" anchor="ctr"/>
-          <a:lstStyle/>
-          <a:p>
-            <a:pPr algn="ctr" indent="0" marL="0">
+            <a:pPr indent="0" marL="0">
               <a:buNone/>
             </a:pPr>
             <a:r>
@@ -5470,7 +5284,7 @@
                 <a:ea typeface="NVIDIA Sans" pitchFamily="34" charset="-122"/>
                 <a:cs typeface="NVIDIA Sans" pitchFamily="34" charset="-120"/>
               </a:rPr>
-              <a:t>bs 16</a:t>
+              <a:t>807 ms</a:t>
             </a:r>
             <a:endParaRPr lang="en-US" sz="1100" dirty="0"/>
           </a:p>
@@ -5478,14 +5292,14 @@
       </p:sp>
       <p:sp>
         <p:nvSpPr>
-          <p:cNvPr id="23" name="Text 21"/>
-          <p:cNvSpPr/>
-          <p:nvPr/>
-        </p:nvSpPr>
-        <p:spPr>
-          <a:xfrm>
-            <a:off x="2297430" y="4096512"/>
-            <a:ext cx="1051560" cy="182880"/>
+          <p:cNvPr id="13" name="Text 11"/>
+          <p:cNvSpPr/>
+          <p:nvPr/>
+        </p:nvSpPr>
+        <p:spPr>
+          <a:xfrm>
+            <a:off x="640080" y="3502152"/>
+            <a:ext cx="1463040" cy="310896"/>
           </a:xfrm>
           <a:prstGeom prst="rect">
             <a:avLst/>
@@ -5497,105 +5311,7 @@
           <a:bodyPr wrap="square" lIns="0" tIns="0" rIns="0" bIns="0" rtlCol="0" anchor="ctr"/>
           <a:lstStyle/>
           <a:p>
-            <a:pPr algn="ctr" indent="0" marL="0">
-              <a:buNone/>
-            </a:pPr>
-            <a:r>
-              <a:rPr lang="en-US" sz="900" dirty="0">
-                <a:solidFill>
-                  <a:srgbClr val="5E5E5E"/>
-                </a:solidFill>
-                <a:latin typeface="NVIDIA Sans" pitchFamily="34" charset="0"/>
-                <a:ea typeface="NVIDIA Sans" pitchFamily="34" charset="-122"/>
-                <a:cs typeface="NVIDIA Sans" pitchFamily="34" charset="-120"/>
-              </a:rPr>
-              <a:t>MFU 28.4%</a:t>
-            </a:r>
-            <a:endParaRPr lang="en-US" sz="900" dirty="0"/>
-          </a:p>
-        </p:txBody>
-      </p:sp>
-      <p:sp>
-        <p:nvSpPr>
-          <p:cNvPr id="24" name="Shape 22"/>
-          <p:cNvSpPr/>
-          <p:nvPr/>
-        </p:nvSpPr>
-        <p:spPr>
-          <a:xfrm>
-            <a:off x="3691890" y="1741932"/>
-            <a:ext cx="685800" cy="2098548"/>
-          </a:xfrm>
-          <a:prstGeom prst="rect">
-            <a:avLst/>
-          </a:prstGeom>
-          <a:solidFill>
-            <a:srgbClr val="76B900"/>
-          </a:solidFill>
-          <a:ln/>
-        </p:spPr>
-      </p:sp>
-      <p:sp>
-        <p:nvSpPr>
-          <p:cNvPr id="25" name="Text 23"/>
-          <p:cNvSpPr/>
-          <p:nvPr/>
-        </p:nvSpPr>
-        <p:spPr>
-          <a:xfrm>
-            <a:off x="3554730" y="1485900"/>
-            <a:ext cx="960120" cy="228600"/>
-          </a:xfrm>
-          <a:prstGeom prst="rect">
-            <a:avLst/>
-          </a:prstGeom>
-          <a:noFill/>
-          <a:ln/>
-        </p:spPr>
-        <p:txBody>
-          <a:bodyPr wrap="square" lIns="0" tIns="0" rIns="0" bIns="0" rtlCol="0" anchor="ctr"/>
-          <a:lstStyle/>
-          <a:p>
-            <a:pPr algn="ctr" indent="0" marL="0">
-              <a:buNone/>
-            </a:pPr>
-            <a:r>
-              <a:rPr lang="en-US" sz="1300" b="1" dirty="0">
-                <a:solidFill>
-                  <a:srgbClr val="76B900"/>
-                </a:solidFill>
-                <a:latin typeface="NVIDIA Sans" pitchFamily="34" charset="0"/>
-                <a:ea typeface="NVIDIA Sans" pitchFamily="34" charset="-122"/>
-                <a:cs typeface="NVIDIA Sans" pitchFamily="34" charset="-120"/>
-              </a:rPr>
-              <a:t>340</a:t>
-            </a:r>
-            <a:endParaRPr lang="en-US" sz="1300" dirty="0"/>
-          </a:p>
-        </p:txBody>
-      </p:sp>
-      <p:sp>
-        <p:nvSpPr>
-          <p:cNvPr id="26" name="Text 24"/>
-          <p:cNvSpPr/>
-          <p:nvPr/>
-        </p:nvSpPr>
-        <p:spPr>
-          <a:xfrm>
-            <a:off x="3554730" y="3895344"/>
-            <a:ext cx="960120" cy="201168"/>
-          </a:xfrm>
-          <a:prstGeom prst="rect">
-            <a:avLst/>
-          </a:prstGeom>
-          <a:noFill/>
-          <a:ln/>
-        </p:spPr>
-        <p:txBody>
-          <a:bodyPr wrap="square" lIns="0" tIns="0" rIns="0" bIns="0" rtlCol="0" anchor="ctr"/>
-          <a:lstStyle/>
-          <a:p>
-            <a:pPr algn="ctr" indent="0" marL="0">
+            <a:pPr indent="0" marL="0">
               <a:buNone/>
             </a:pPr>
             <a:r>
@@ -5607,7 +5323,7 @@
                 <a:ea typeface="NVIDIA Sans" pitchFamily="34" charset="-122"/>
                 <a:cs typeface="NVIDIA Sans" pitchFamily="34" charset="-120"/>
               </a:rPr>
-              <a:t>bs 24</a:t>
+              <a:t>Optimized</a:t>
             </a:r>
             <a:endParaRPr lang="en-US" sz="1100" dirty="0"/>
           </a:p>
@@ -5615,14 +5331,34 @@
       </p:sp>
       <p:sp>
         <p:nvSpPr>
-          <p:cNvPr id="27" name="Text 25"/>
-          <p:cNvSpPr/>
-          <p:nvPr/>
-        </p:nvSpPr>
-        <p:spPr>
-          <a:xfrm>
-            <a:off x="3509010" y="4096512"/>
-            <a:ext cx="1051560" cy="182880"/>
+          <p:cNvPr id="14" name="Shape 12"/>
+          <p:cNvSpPr/>
+          <p:nvPr/>
+        </p:nvSpPr>
+        <p:spPr>
+          <a:xfrm>
+            <a:off x="2148840" y="3520440"/>
+            <a:ext cx="1169297" cy="310896"/>
+          </a:xfrm>
+          <a:prstGeom prst="rect">
+            <a:avLst/>
+          </a:prstGeom>
+          <a:solidFill>
+            <a:srgbClr val="76B900"/>
+          </a:solidFill>
+          <a:ln/>
+        </p:spPr>
+      </p:sp>
+      <p:sp>
+        <p:nvSpPr>
+          <p:cNvPr id="15" name="Text 13"/>
+          <p:cNvSpPr/>
+          <p:nvPr/>
+        </p:nvSpPr>
+        <p:spPr>
+          <a:xfrm>
+            <a:off x="2148840" y="3520440"/>
+            <a:ext cx="1169297" cy="310896"/>
           </a:xfrm>
           <a:prstGeom prst="rect">
             <a:avLst/>
@@ -5638,50 +5374,70 @@
               <a:buNone/>
             </a:pPr>
             <a:r>
-              <a:rPr lang="en-US" sz="900" dirty="0">
+              <a:rPr lang="en-US" sz="1000" b="1" dirty="0">
                 <a:solidFill>
-                  <a:srgbClr val="5E5E5E"/>
+                  <a:srgbClr val="FFFFFF"/>
                 </a:solidFill>
                 <a:latin typeface="NVIDIA Sans" pitchFamily="34" charset="0"/>
                 <a:ea typeface="NVIDIA Sans" pitchFamily="34" charset="-122"/>
                 <a:cs typeface="NVIDIA Sans" pitchFamily="34" charset="-120"/>
               </a:rPr>
-              <a:t>MFU 30.5%</a:t>
+              <a:t>175</a:t>
             </a:r>
-            <a:endParaRPr lang="en-US" sz="900" dirty="0"/>
+            <a:endParaRPr lang="en-US" sz="1000" dirty="0"/>
           </a:p>
         </p:txBody>
       </p:sp>
       <p:sp>
         <p:nvSpPr>
-          <p:cNvPr id="28" name="Shape 26"/>
-          <p:cNvSpPr/>
-          <p:nvPr/>
-        </p:nvSpPr>
-        <p:spPr>
-          <a:xfrm>
-            <a:off x="4903470" y="2235708"/>
-            <a:ext cx="685800" cy="1604772"/>
-          </a:xfrm>
-          <a:prstGeom prst="rect">
-            <a:avLst/>
-          </a:prstGeom>
-          <a:solidFill>
-            <a:srgbClr val="890C58"/>
-          </a:solidFill>
-          <a:ln/>
-        </p:spPr>
-      </p:sp>
-      <p:sp>
-        <p:nvSpPr>
-          <p:cNvPr id="29" name="Text 27"/>
-          <p:cNvSpPr/>
-          <p:nvPr/>
-        </p:nvSpPr>
-        <p:spPr>
-          <a:xfrm>
-            <a:off x="4766310" y="1979676"/>
-            <a:ext cx="960120" cy="228600"/>
+          <p:cNvPr id="16" name="Shape 14"/>
+          <p:cNvSpPr/>
+          <p:nvPr/>
+        </p:nvSpPr>
+        <p:spPr>
+          <a:xfrm>
+            <a:off x="3318137" y="3520440"/>
+            <a:ext cx="148164" cy="310896"/>
+          </a:xfrm>
+          <a:prstGeom prst="rect">
+            <a:avLst/>
+          </a:prstGeom>
+          <a:solidFill>
+            <a:srgbClr val="0071C5"/>
+          </a:solidFill>
+          <a:ln/>
+        </p:spPr>
+      </p:sp>
+      <p:sp>
+        <p:nvSpPr>
+          <p:cNvPr id="17" name="Shape 15"/>
+          <p:cNvSpPr/>
+          <p:nvPr/>
+        </p:nvSpPr>
+        <p:spPr>
+          <a:xfrm>
+            <a:off x="3466301" y="3520440"/>
+            <a:ext cx="289655" cy="310896"/>
+          </a:xfrm>
+          <a:prstGeom prst="rect">
+            <a:avLst/>
+          </a:prstGeom>
+          <a:solidFill>
+            <a:srgbClr val="D9D9D9"/>
+          </a:solidFill>
+          <a:ln/>
+        </p:spPr>
+      </p:sp>
+      <p:sp>
+        <p:nvSpPr>
+          <p:cNvPr id="18" name="Text 16"/>
+          <p:cNvSpPr/>
+          <p:nvPr/>
+        </p:nvSpPr>
+        <p:spPr>
+          <a:xfrm>
+            <a:off x="3810820" y="3520440"/>
+            <a:ext cx="822960" cy="310896"/>
           </a:xfrm>
           <a:prstGeom prst="rect">
             <a:avLst/>
@@ -5693,46 +5449,7 @@
           <a:bodyPr wrap="square" lIns="0" tIns="0" rIns="0" bIns="0" rtlCol="0" anchor="ctr"/>
           <a:lstStyle/>
           <a:p>
-            <a:pPr algn="ctr" indent="0" marL="0">
-              <a:buNone/>
-            </a:pPr>
-            <a:r>
-              <a:rPr lang="en-US" sz="1300" b="1" dirty="0">
-                <a:solidFill>
-                  <a:srgbClr val="890C58"/>
-                </a:solidFill>
-                <a:latin typeface="NVIDIA Sans" pitchFamily="34" charset="0"/>
-                <a:ea typeface="NVIDIA Sans" pitchFamily="34" charset="-122"/>
-                <a:cs typeface="NVIDIA Sans" pitchFamily="34" charset="-120"/>
-              </a:rPr>
-              <a:t>260</a:t>
-            </a:r>
-            <a:endParaRPr lang="en-US" sz="1300" dirty="0"/>
-          </a:p>
-        </p:txBody>
-      </p:sp>
-      <p:sp>
-        <p:nvSpPr>
-          <p:cNvPr id="30" name="Text 28"/>
-          <p:cNvSpPr/>
-          <p:nvPr/>
-        </p:nvSpPr>
-        <p:spPr>
-          <a:xfrm>
-            <a:off x="4766310" y="3895344"/>
-            <a:ext cx="960120" cy="201168"/>
-          </a:xfrm>
-          <a:prstGeom prst="rect">
-            <a:avLst/>
-          </a:prstGeom>
-          <a:noFill/>
-          <a:ln/>
-        </p:spPr>
-        <p:txBody>
-          <a:bodyPr wrap="square" lIns="0" tIns="0" rIns="0" bIns="0" rtlCol="0" anchor="ctr"/>
-          <a:lstStyle/>
-          <a:p>
-            <a:pPr algn="ctr" indent="0" marL="0">
+            <a:pPr indent="0" marL="0">
               <a:buNone/>
             </a:pPr>
             <a:r>
@@ -5744,7 +5461,7 @@
                 <a:ea typeface="NVIDIA Sans" pitchFamily="34" charset="-122"/>
                 <a:cs typeface="NVIDIA Sans" pitchFamily="34" charset="-120"/>
               </a:rPr>
-              <a:t>bs 32</a:t>
+              <a:t>249 ms</a:t>
             </a:r>
             <a:endParaRPr lang="en-US" sz="1100" dirty="0"/>
           </a:p>
@@ -5752,14 +5469,34 @@
       </p:sp>
       <p:sp>
         <p:nvSpPr>
-          <p:cNvPr id="31" name="Text 29"/>
-          <p:cNvSpPr/>
-          <p:nvPr/>
-        </p:nvSpPr>
-        <p:spPr>
-          <a:xfrm>
-            <a:off x="4720590" y="4096512"/>
-            <a:ext cx="1051560" cy="182880"/>
+          <p:cNvPr id="19" name="Shape 17"/>
+          <p:cNvSpPr/>
+          <p:nvPr/>
+        </p:nvSpPr>
+        <p:spPr>
+          <a:xfrm>
+            <a:off x="2148840" y="4005072"/>
+            <a:ext cx="164592" cy="128016"/>
+          </a:xfrm>
+          <a:prstGeom prst="rect">
+            <a:avLst/>
+          </a:prstGeom>
+          <a:solidFill>
+            <a:srgbClr val="76B900"/>
+          </a:solidFill>
+          <a:ln/>
+        </p:spPr>
+      </p:sp>
+      <p:sp>
+        <p:nvSpPr>
+          <p:cNvPr id="20" name="Text 18"/>
+          <p:cNvSpPr/>
+          <p:nvPr/>
+        </p:nvSpPr>
+        <p:spPr>
+          <a:xfrm>
+            <a:off x="2368296" y="3931920"/>
+            <a:ext cx="1600200" cy="274320"/>
           </a:xfrm>
           <a:prstGeom prst="rect">
             <a:avLst/>
@@ -5771,11 +5508,11 @@
           <a:bodyPr wrap="square" lIns="0" tIns="0" rIns="0" bIns="0" rtlCol="0" anchor="ctr"/>
           <a:lstStyle/>
           <a:p>
-            <a:pPr algn="ctr" indent="0" marL="0">
+            <a:pPr indent="0" marL="0">
               <a:buNone/>
             </a:pPr>
             <a:r>
-              <a:rPr lang="en-US" sz="900" dirty="0">
+              <a:rPr lang="en-US" sz="1000" dirty="0">
                 <a:solidFill>
                   <a:srgbClr val="5E5E5E"/>
                 </a:solidFill>
@@ -5783,22 +5520,42 @@
                 <a:ea typeface="NVIDIA Sans" pitchFamily="34" charset="-122"/>
                 <a:cs typeface="NVIDIA Sans" pitchFamily="34" charset="-120"/>
               </a:rPr>
-              <a:t>MFU 23.3%</a:t>
+              <a:t>Compute busy</a:t>
             </a:r>
-            <a:endParaRPr lang="en-US" sz="900" dirty="0"/>
+            <a:endParaRPr lang="en-US" sz="1000" dirty="0"/>
           </a:p>
         </p:txBody>
       </p:sp>
       <p:sp>
         <p:nvSpPr>
-          <p:cNvPr id="32" name="Text 30"/>
-          <p:cNvSpPr/>
-          <p:nvPr/>
-        </p:nvSpPr>
-        <p:spPr>
-          <a:xfrm>
-            <a:off x="1051560" y="1399032"/>
-            <a:ext cx="1828800" cy="182880"/>
+          <p:cNvPr id="21" name="Shape 19"/>
+          <p:cNvSpPr/>
+          <p:nvPr/>
+        </p:nvSpPr>
+        <p:spPr>
+          <a:xfrm>
+            <a:off x="3977640" y="4005072"/>
+            <a:ext cx="164592" cy="128016"/>
+          </a:xfrm>
+          <a:prstGeom prst="rect">
+            <a:avLst/>
+          </a:prstGeom>
+          <a:solidFill>
+            <a:srgbClr val="0071C5"/>
+          </a:solidFill>
+          <a:ln/>
+        </p:spPr>
+      </p:sp>
+      <p:sp>
+        <p:nvSpPr>
+          <p:cNvPr id="22" name="Text 20"/>
+          <p:cNvSpPr/>
+          <p:nvPr/>
+        </p:nvSpPr>
+        <p:spPr>
+          <a:xfrm>
+            <a:off x="4197096" y="3931920"/>
+            <a:ext cx="1600200" cy="274320"/>
           </a:xfrm>
           <a:prstGeom prst="rect">
             <a:avLst/>
@@ -5814,7 +5571,105 @@
               <a:buNone/>
             </a:pPr>
             <a:r>
-              <a:rPr lang="en-US" sz="900" i="1" dirty="0">
+              <a:rPr lang="en-US" sz="1000" dirty="0">
+                <a:solidFill>
+                  <a:srgbClr val="5E5E5E"/>
+                </a:solidFill>
+                <a:latin typeface="NVIDIA Sans" pitchFamily="34" charset="0"/>
+                <a:ea typeface="NVIDIA Sans" pitchFamily="34" charset="-122"/>
+                <a:cs typeface="NVIDIA Sans" pitchFamily="34" charset="-120"/>
+              </a:rPr>
+              <a:t>Exposed comm</a:t>
+            </a:r>
+            <a:endParaRPr lang="en-US" sz="1000" dirty="0"/>
+          </a:p>
+        </p:txBody>
+      </p:sp>
+      <p:sp>
+        <p:nvSpPr>
+          <p:cNvPr id="23" name="Shape 21"/>
+          <p:cNvSpPr/>
+          <p:nvPr/>
+        </p:nvSpPr>
+        <p:spPr>
+          <a:xfrm>
+            <a:off x="5806440" y="4005072"/>
+            <a:ext cx="164592" cy="128016"/>
+          </a:xfrm>
+          <a:prstGeom prst="rect">
+            <a:avLst/>
+          </a:prstGeom>
+          <a:solidFill>
+            <a:srgbClr val="D9D9D9"/>
+          </a:solidFill>
+          <a:ln/>
+        </p:spPr>
+      </p:sp>
+      <p:sp>
+        <p:nvSpPr>
+          <p:cNvPr id="24" name="Text 22"/>
+          <p:cNvSpPr/>
+          <p:nvPr/>
+        </p:nvSpPr>
+        <p:spPr>
+          <a:xfrm>
+            <a:off x="6025896" y="3931920"/>
+            <a:ext cx="1600200" cy="274320"/>
+          </a:xfrm>
+          <a:prstGeom prst="rect">
+            <a:avLst/>
+          </a:prstGeom>
+          <a:noFill/>
+          <a:ln/>
+        </p:spPr>
+        <p:txBody>
+          <a:bodyPr wrap="square" lIns="0" tIns="0" rIns="0" bIns="0" rtlCol="0" anchor="ctr"/>
+          <a:lstStyle/>
+          <a:p>
+            <a:pPr indent="0" marL="0">
+              <a:buNone/>
+            </a:pPr>
+            <a:r>
+              <a:rPr lang="en-US" sz="1000" dirty="0">
+                <a:solidFill>
+                  <a:srgbClr val="5E5E5E"/>
+                </a:solidFill>
+                <a:latin typeface="NVIDIA Sans" pitchFamily="34" charset="0"/>
+                <a:ea typeface="NVIDIA Sans" pitchFamily="34" charset="-122"/>
+                <a:cs typeface="NVIDIA Sans" pitchFamily="34" charset="-120"/>
+              </a:rPr>
+              <a:t>Idle / launch gaps</a:t>
+            </a:r>
+            <a:endParaRPr lang="en-US" sz="1000" dirty="0"/>
+          </a:p>
+        </p:txBody>
+      </p:sp>
+      <p:sp>
+        <p:nvSpPr>
+          <p:cNvPr id="25" name="Text 23"/>
+          <p:cNvSpPr/>
+          <p:nvPr/>
+        </p:nvSpPr>
+        <p:spPr>
+          <a:xfrm>
+            <a:off x="457200" y="4224528"/>
+            <a:ext cx="8229600" cy="228600"/>
+          </a:xfrm>
+          <a:prstGeom prst="rect">
+            <a:avLst/>
+          </a:prstGeom>
+          <a:noFill/>
+          <a:ln/>
+        </p:spPr>
+        <p:txBody>
+          <a:bodyPr wrap="square" lIns="0" tIns="0" rIns="0" bIns="0" rtlCol="0" anchor="ctr"/>
+          <a:lstStyle/>
+          <a:p>
+            <a:pPr indent="0" marL="0">
+              <a:buNone/>
+            </a:pPr>
+            <a:r>
+              <a:rPr lang="en-US" sz="950" i="1" dirty="0">
                 <a:solidFill>
                   <a:srgbClr val="8C8C8C"/>
                 </a:solidFill>
@@ -5822,91 +5677,15 @@
                 <a:ea typeface="NVIDIA Sans" pitchFamily="34" charset="-122"/>
                 <a:cs typeface="NVIDIA Sans" pitchFamily="34" charset="-120"/>
               </a:rPr>
-              <a:t>samples / node / s</a:t>
+              <a:t>Gradient AllReduce 15.1 GB/step + optimizer AllGather 15.1 GB/step (bf16). Idle from 254 ms to 43 ms.</a:t>
             </a:r>
-            <a:endParaRPr lang="en-US" sz="900" dirty="0"/>
+            <a:endParaRPr lang="en-US" sz="950" dirty="0"/>
           </a:p>
         </p:txBody>
       </p:sp>
       <p:sp>
         <p:nvSpPr>
-          <p:cNvPr id="33" name="Text 31"/>
-          <p:cNvSpPr/>
-          <p:nvPr/>
-        </p:nvSpPr>
-        <p:spPr>
-          <a:xfrm>
-            <a:off x="6400800" y="1417320"/>
-            <a:ext cx="2286000" cy="2743200"/>
-          </a:xfrm>
-          <a:prstGeom prst="rect">
-            <a:avLst/>
-          </a:prstGeom>
-          <a:noFill/>
-          <a:ln/>
-        </p:spPr>
-        <p:txBody>
-          <a:bodyPr wrap="square" lIns="0" tIns="0" rIns="0" bIns="0" rtlCol="0" anchor="t"/>
-          <a:lstStyle/>
-          <a:p>
-            <a:pPr marL="342900" indent="-342900">
-              <a:buSzPct val="100000"/>
-              <a:buChar char="•"/>
-            </a:pPr>
-            <a:r>
-              <a:rPr lang="en-US" sz="1150" dirty="0">
-                <a:solidFill>
-                  <a:srgbClr val="000000"/>
-                </a:solidFill>
-                <a:latin typeface="NVIDIA Sans" pitchFamily="34" charset="0"/>
-                <a:ea typeface="NVIDIA Sans" pitchFamily="34" charset="-122"/>
-                <a:cs typeface="NVIDIA Sans" pitchFamily="34" charset="-120"/>
-              </a:rPr>
-              <a:t>Batching amortizes launch and comm costs: MFU climbs 23% → 30.5%</a:t>
-            </a:r>
-            <a:endParaRPr lang="en-US" sz="1150" dirty="0"/>
-          </a:p>
-          <a:p>
-            <a:pPr marL="342900" indent="-342900">
-              <a:buSzPct val="100000"/>
-              <a:buChar char="•"/>
-            </a:pPr>
-            <a:r>
-              <a:rPr lang="en-US" sz="1150" dirty="0">
-                <a:solidFill>
-                  <a:srgbClr val="000000"/>
-                </a:solidFill>
-                <a:latin typeface="NVIDIA Sans" pitchFamily="34" charset="0"/>
-                <a:ea typeface="NVIDIA Sans" pitchFamily="34" charset="-122"/>
-                <a:cs typeface="NVIDIA Sans" pitchFamily="34" charset="-120"/>
-              </a:rPr>
-              <a:t>bs 32 regresses hard (986 ms/step): not OOM, not the dataloader — memory-pressure effects under investigation</a:t>
-            </a:r>
-            <a:endParaRPr lang="en-US" sz="1150" dirty="0"/>
-          </a:p>
-          <a:p>
-            <a:pPr marL="342900" indent="-342900">
-              <a:buSzPct val="100000"/>
-              <a:buChar char="•"/>
-            </a:pPr>
-            <a:r>
-              <a:rPr lang="en-US" sz="1150" dirty="0">
-                <a:solidFill>
-                  <a:srgbClr val="000000"/>
-                </a:solidFill>
-                <a:latin typeface="NVIDIA Sans" pitchFamily="34" charset="0"/>
-                <a:ea typeface="NVIDIA Sans" pitchFamily="34" charset="-122"/>
-                <a:cs typeface="NVIDIA Sans" pitchFamily="34" charset="-120"/>
-              </a:rPr>
-              <a:t>Larger global batch (192) changes optimization dynamics — needs a convergence run before adoption</a:t>
-            </a:r>
-            <a:endParaRPr lang="en-US" sz="1150" dirty="0"/>
-          </a:p>
-        </p:txBody>
-      </p:sp>
-      <p:sp>
-        <p:nvSpPr>
-          <p:cNvPr id="34" name="Text 32"/>
+          <p:cNvPr id="26" name="Text 24"/>
           <p:cNvSpPr/>
           <p:nvPr/>
         </p:nvSpPr>
@@ -5945,7 +5724,7 @@
       </p:sp>
       <p:sp>
         <p:nvSpPr>
-          <p:cNvPr id="35" name="Text 33"/>
+          <p:cNvPr id="27" name="Text 25"/>
           <p:cNvSpPr/>
           <p:nvPr/>
         </p:nvSpPr>
@@ -5984,7 +5763,7 @@
       </p:sp>
       <p:sp>
         <p:nvSpPr>
-          <p:cNvPr id="36" name="Shape 34"/>
+          <p:cNvPr id="28" name="Shape 26"/>
           <p:cNvSpPr/>
           <p:nvPr/>
         </p:nvSpPr>
@@ -6004,7 +5783,7 @@
       </p:sp>
       <p:pic>
         <p:nvPicPr>
-          <p:cNvPr id="37" name="Image 0" descr="/app/logos/nvidia-logo-blk-sm.png">    </p:cNvPr>
+          <p:cNvPr id="29" name="Image 0" descr="/app/logos/nvidia-logo-blk-sm.png">    </p:cNvPr>
           <p:cNvPicPr>
             <a:picLocks noChangeAspect="1"/>
           </p:cNvPicPr>
@@ -6091,6 +5870,1273 @@
                 <a:ea typeface="NVIDIA Sans" pitchFamily="34" charset="-122"/>
                 <a:cs typeface="NVIDIA Sans" pitchFamily="34" charset="-120"/>
               </a:rPr>
+              <a:t>Batch Scaling: Sweet Spot at 24 per GPU</a:t>
+            </a:r>
+            <a:endParaRPr lang="en-US" sz="3000" dirty="0"/>
+          </a:p>
+        </p:txBody>
+      </p:sp>
+      <p:sp>
+        <p:nvSpPr>
+          <p:cNvPr id="3" name="Text 1"/>
+          <p:cNvSpPr/>
+          <p:nvPr/>
+        </p:nvSpPr>
+        <p:spPr>
+          <a:xfrm>
+            <a:off x="457200" y="804672"/>
+            <a:ext cx="8229600" cy="329184"/>
+          </a:xfrm>
+          <a:prstGeom prst="rect">
+            <a:avLst/>
+          </a:prstGeom>
+          <a:noFill/>
+          <a:ln/>
+        </p:spPr>
+        <p:txBody>
+          <a:bodyPr wrap="square" lIns="0" tIns="0" rIns="0" bIns="0" rtlCol="0" anchor="ctr"/>
+          <a:lstStyle/>
+          <a:p>
+            <a:pPr indent="0" marL="0">
+              <a:buNone/>
+            </a:pPr>
+            <a:r>
+              <a:rPr lang="en-US" sz="1500" dirty="0">
+                <a:solidFill>
+                  <a:srgbClr val="76B900"/>
+                </a:solidFill>
+                <a:latin typeface="NVIDIA Sans" pitchFamily="34" charset="0"/>
+                <a:ea typeface="NVIDIA Sans" pitchFamily="34" charset="-122"/>
+                <a:cs typeface="NVIDIA Sans" pitchFamily="34" charset="-120"/>
+              </a:rPr>
+              <a:t>Same optimized config, only per-GPU batch changes — peak 340 samples/node/s</a:t>
+            </a:r>
+            <a:endParaRPr lang="en-US" sz="1500" dirty="0"/>
+          </a:p>
+        </p:txBody>
+      </p:sp>
+      <p:sp>
+        <p:nvSpPr>
+          <p:cNvPr id="4" name="Shape 2"/>
+          <p:cNvSpPr/>
+          <p:nvPr/>
+        </p:nvSpPr>
+        <p:spPr>
+          <a:xfrm>
+            <a:off x="1005840" y="3840480"/>
+            <a:ext cx="4846320" cy="0"/>
+          </a:xfrm>
+          <a:prstGeom prst="line">
+            <a:avLst/>
+          </a:prstGeom>
+          <a:noFill/>
+          <a:ln w="9525">
+            <a:solidFill>
+              <a:srgbClr val="EAEAEA"/>
+            </a:solidFill>
+            <a:prstDash val="solid"/>
+          </a:ln>
+        </p:spPr>
+      </p:sp>
+      <p:sp>
+        <p:nvSpPr>
+          <p:cNvPr id="5" name="Text 3"/>
+          <p:cNvSpPr/>
+          <p:nvPr/>
+        </p:nvSpPr>
+        <p:spPr>
+          <a:xfrm>
+            <a:off x="548640" y="3749040"/>
+            <a:ext cx="365760" cy="182880"/>
+          </a:xfrm>
+          <a:prstGeom prst="rect">
+            <a:avLst/>
+          </a:prstGeom>
+          <a:noFill/>
+          <a:ln/>
+        </p:spPr>
+        <p:txBody>
+          <a:bodyPr wrap="square" lIns="0" tIns="0" rIns="0" bIns="0" rtlCol="0" anchor="ctr"/>
+          <a:lstStyle/>
+          <a:p>
+            <a:pPr algn="r" indent="0" marL="0">
+              <a:buNone/>
+            </a:pPr>
+            <a:r>
+              <a:rPr lang="en-US" sz="900" dirty="0">
+                <a:solidFill>
+                  <a:srgbClr val="8C8C8C"/>
+                </a:solidFill>
+                <a:latin typeface="NVIDIA Sans" pitchFamily="34" charset="0"/>
+                <a:ea typeface="NVIDIA Sans" pitchFamily="34" charset="-122"/>
+                <a:cs typeface="NVIDIA Sans" pitchFamily="34" charset="-120"/>
+              </a:rPr>
+              <a:t>0</a:t>
+            </a:r>
+            <a:endParaRPr lang="en-US" sz="900" dirty="0"/>
+          </a:p>
+        </p:txBody>
+      </p:sp>
+      <p:sp>
+        <p:nvSpPr>
+          <p:cNvPr id="6" name="Shape 4"/>
+          <p:cNvSpPr/>
+          <p:nvPr/>
+        </p:nvSpPr>
+        <p:spPr>
+          <a:xfrm>
+            <a:off x="1005840" y="3223260"/>
+            <a:ext cx="4846320" cy="0"/>
+          </a:xfrm>
+          <a:prstGeom prst="line">
+            <a:avLst/>
+          </a:prstGeom>
+          <a:noFill/>
+          <a:ln w="9525">
+            <a:solidFill>
+              <a:srgbClr val="EAEAEA"/>
+            </a:solidFill>
+            <a:prstDash val="solid"/>
+          </a:ln>
+        </p:spPr>
+      </p:sp>
+      <p:sp>
+        <p:nvSpPr>
+          <p:cNvPr id="7" name="Text 5"/>
+          <p:cNvSpPr/>
+          <p:nvPr/>
+        </p:nvSpPr>
+        <p:spPr>
+          <a:xfrm>
+            <a:off x="548640" y="3131820"/>
+            <a:ext cx="365760" cy="182880"/>
+          </a:xfrm>
+          <a:prstGeom prst="rect">
+            <a:avLst/>
+          </a:prstGeom>
+          <a:noFill/>
+          <a:ln/>
+        </p:spPr>
+        <p:txBody>
+          <a:bodyPr wrap="square" lIns="0" tIns="0" rIns="0" bIns="0" rtlCol="0" anchor="ctr"/>
+          <a:lstStyle/>
+          <a:p>
+            <a:pPr algn="r" indent="0" marL="0">
+              <a:buNone/>
+            </a:pPr>
+            <a:r>
+              <a:rPr lang="en-US" sz="900" dirty="0">
+                <a:solidFill>
+                  <a:srgbClr val="8C8C8C"/>
+                </a:solidFill>
+                <a:latin typeface="NVIDIA Sans" pitchFamily="34" charset="0"/>
+                <a:ea typeface="NVIDIA Sans" pitchFamily="34" charset="-122"/>
+                <a:cs typeface="NVIDIA Sans" pitchFamily="34" charset="-120"/>
+              </a:rPr>
+              <a:t>100</a:t>
+            </a:r>
+            <a:endParaRPr lang="en-US" sz="900" dirty="0"/>
+          </a:p>
+        </p:txBody>
+      </p:sp>
+      <p:sp>
+        <p:nvSpPr>
+          <p:cNvPr id="8" name="Shape 6"/>
+          <p:cNvSpPr/>
+          <p:nvPr/>
+        </p:nvSpPr>
+        <p:spPr>
+          <a:xfrm>
+            <a:off x="1005840" y="2606040"/>
+            <a:ext cx="4846320" cy="0"/>
+          </a:xfrm>
+          <a:prstGeom prst="line">
+            <a:avLst/>
+          </a:prstGeom>
+          <a:noFill/>
+          <a:ln w="9525">
+            <a:solidFill>
+              <a:srgbClr val="EAEAEA"/>
+            </a:solidFill>
+            <a:prstDash val="solid"/>
+          </a:ln>
+        </p:spPr>
+      </p:sp>
+      <p:sp>
+        <p:nvSpPr>
+          <p:cNvPr id="9" name="Text 7"/>
+          <p:cNvSpPr/>
+          <p:nvPr/>
+        </p:nvSpPr>
+        <p:spPr>
+          <a:xfrm>
+            <a:off x="548640" y="2514600"/>
+            <a:ext cx="365760" cy="182880"/>
+          </a:xfrm>
+          <a:prstGeom prst="rect">
+            <a:avLst/>
+          </a:prstGeom>
+          <a:noFill/>
+          <a:ln/>
+        </p:spPr>
+        <p:txBody>
+          <a:bodyPr wrap="square" lIns="0" tIns="0" rIns="0" bIns="0" rtlCol="0" anchor="ctr"/>
+          <a:lstStyle/>
+          <a:p>
+            <a:pPr algn="r" indent="0" marL="0">
+              <a:buNone/>
+            </a:pPr>
+            <a:r>
+              <a:rPr lang="en-US" sz="900" dirty="0">
+                <a:solidFill>
+                  <a:srgbClr val="8C8C8C"/>
+                </a:solidFill>
+                <a:latin typeface="NVIDIA Sans" pitchFamily="34" charset="0"/>
+                <a:ea typeface="NVIDIA Sans" pitchFamily="34" charset="-122"/>
+                <a:cs typeface="NVIDIA Sans" pitchFamily="34" charset="-120"/>
+              </a:rPr>
+              <a:t>200</a:t>
+            </a:r>
+            <a:endParaRPr lang="en-US" sz="900" dirty="0"/>
+          </a:p>
+        </p:txBody>
+      </p:sp>
+      <p:sp>
+        <p:nvSpPr>
+          <p:cNvPr id="10" name="Shape 8"/>
+          <p:cNvSpPr/>
+          <p:nvPr/>
+        </p:nvSpPr>
+        <p:spPr>
+          <a:xfrm>
+            <a:off x="1005840" y="1988820"/>
+            <a:ext cx="4846320" cy="0"/>
+          </a:xfrm>
+          <a:prstGeom prst="line">
+            <a:avLst/>
+          </a:prstGeom>
+          <a:noFill/>
+          <a:ln w="9525">
+            <a:solidFill>
+              <a:srgbClr val="EAEAEA"/>
+            </a:solidFill>
+            <a:prstDash val="solid"/>
+          </a:ln>
+        </p:spPr>
+      </p:sp>
+      <p:sp>
+        <p:nvSpPr>
+          <p:cNvPr id="11" name="Text 9"/>
+          <p:cNvSpPr/>
+          <p:nvPr/>
+        </p:nvSpPr>
+        <p:spPr>
+          <a:xfrm>
+            <a:off x="548640" y="1897380"/>
+            <a:ext cx="365760" cy="182880"/>
+          </a:xfrm>
+          <a:prstGeom prst="rect">
+            <a:avLst/>
+          </a:prstGeom>
+          <a:noFill/>
+          <a:ln/>
+        </p:spPr>
+        <p:txBody>
+          <a:bodyPr wrap="square" lIns="0" tIns="0" rIns="0" bIns="0" rtlCol="0" anchor="ctr"/>
+          <a:lstStyle/>
+          <a:p>
+            <a:pPr algn="r" indent="0" marL="0">
+              <a:buNone/>
+            </a:pPr>
+            <a:r>
+              <a:rPr lang="en-US" sz="900" dirty="0">
+                <a:solidFill>
+                  <a:srgbClr val="8C8C8C"/>
+                </a:solidFill>
+                <a:latin typeface="NVIDIA Sans" pitchFamily="34" charset="0"/>
+                <a:ea typeface="NVIDIA Sans" pitchFamily="34" charset="-122"/>
+                <a:cs typeface="NVIDIA Sans" pitchFamily="34" charset="-120"/>
+              </a:rPr>
+              <a:t>300</a:t>
+            </a:r>
+            <a:endParaRPr lang="en-US" sz="900" dirty="0"/>
+          </a:p>
+        </p:txBody>
+      </p:sp>
+      <p:sp>
+        <p:nvSpPr>
+          <p:cNvPr id="12" name="Shape 10"/>
+          <p:cNvSpPr/>
+          <p:nvPr/>
+        </p:nvSpPr>
+        <p:spPr>
+          <a:xfrm>
+            <a:off x="1005840" y="1371600"/>
+            <a:ext cx="4846320" cy="0"/>
+          </a:xfrm>
+          <a:prstGeom prst="line">
+            <a:avLst/>
+          </a:prstGeom>
+          <a:noFill/>
+          <a:ln w="9525">
+            <a:solidFill>
+              <a:srgbClr val="EAEAEA"/>
+            </a:solidFill>
+            <a:prstDash val="solid"/>
+          </a:ln>
+        </p:spPr>
+      </p:sp>
+      <p:sp>
+        <p:nvSpPr>
+          <p:cNvPr id="13" name="Text 11"/>
+          <p:cNvSpPr/>
+          <p:nvPr/>
+        </p:nvSpPr>
+        <p:spPr>
+          <a:xfrm>
+            <a:off x="548640" y="1280160"/>
+            <a:ext cx="365760" cy="182880"/>
+          </a:xfrm>
+          <a:prstGeom prst="rect">
+            <a:avLst/>
+          </a:prstGeom>
+          <a:noFill/>
+          <a:ln/>
+        </p:spPr>
+        <p:txBody>
+          <a:bodyPr wrap="square" lIns="0" tIns="0" rIns="0" bIns="0" rtlCol="0" anchor="ctr"/>
+          <a:lstStyle/>
+          <a:p>
+            <a:pPr algn="r" indent="0" marL="0">
+              <a:buNone/>
+            </a:pPr>
+            <a:r>
+              <a:rPr lang="en-US" sz="900" dirty="0">
+                <a:solidFill>
+                  <a:srgbClr val="8C8C8C"/>
+                </a:solidFill>
+                <a:latin typeface="NVIDIA Sans" pitchFamily="34" charset="0"/>
+                <a:ea typeface="NVIDIA Sans" pitchFamily="34" charset="-122"/>
+                <a:cs typeface="NVIDIA Sans" pitchFamily="34" charset="-120"/>
+              </a:rPr>
+              <a:t>400</a:t>
+            </a:r>
+            <a:endParaRPr lang="en-US" sz="900" dirty="0"/>
+          </a:p>
+        </p:txBody>
+      </p:sp>
+      <p:sp>
+        <p:nvSpPr>
+          <p:cNvPr id="14" name="Shape 12"/>
+          <p:cNvSpPr/>
+          <p:nvPr/>
+        </p:nvSpPr>
+        <p:spPr>
+          <a:xfrm>
+            <a:off x="1005840" y="2606040"/>
+            <a:ext cx="4846320" cy="0"/>
+          </a:xfrm>
+          <a:prstGeom prst="line">
+            <a:avLst/>
+          </a:prstGeom>
+          <a:noFill/>
+          <a:ln w="15875">
+            <a:solidFill>
+              <a:srgbClr val="5E5E5E"/>
+            </a:solidFill>
+            <a:prstDash val="dash"/>
+          </a:ln>
+        </p:spPr>
+      </p:sp>
+      <p:sp>
+        <p:nvSpPr>
+          <p:cNvPr id="15" name="Text 13"/>
+          <p:cNvSpPr/>
+          <p:nvPr/>
+        </p:nvSpPr>
+        <p:spPr>
+          <a:xfrm>
+            <a:off x="1051560" y="1399032"/>
+            <a:ext cx="4114800" cy="182880"/>
+          </a:xfrm>
+          <a:prstGeom prst="rect">
+            <a:avLst/>
+          </a:prstGeom>
+          <a:noFill/>
+          <a:ln/>
+        </p:spPr>
+        <p:txBody>
+          <a:bodyPr wrap="square" lIns="0" tIns="0" rIns="0" bIns="0" rtlCol="0" anchor="ctr"/>
+          <a:lstStyle/>
+          <a:p>
+            <a:pPr indent="0" marL="0">
+              <a:buNone/>
+            </a:pPr>
+            <a:r>
+              <a:rPr lang="en-US" sz="900" i="1" dirty="0">
+                <a:solidFill>
+                  <a:srgbClr val="5E5E5E"/>
+                </a:solidFill>
+                <a:latin typeface="NVIDIA Sans" pitchFamily="34" charset="0"/>
+                <a:ea typeface="NVIDIA Sans" pitchFamily="34" charset="-122"/>
+                <a:cs typeface="NVIDIA Sans" pitchFamily="34" charset="-120"/>
+              </a:rPr>
+              <a:t>samples / node / s   ·   dashed = 200/node/s target</a:t>
+            </a:r>
+            <a:endParaRPr lang="en-US" sz="900" dirty="0"/>
+          </a:p>
+        </p:txBody>
+      </p:sp>
+      <p:sp>
+        <p:nvSpPr>
+          <p:cNvPr id="16" name="Shape 14"/>
+          <p:cNvSpPr/>
+          <p:nvPr/>
+        </p:nvSpPr>
+        <p:spPr>
+          <a:xfrm>
+            <a:off x="1268730" y="2254225"/>
+            <a:ext cx="685800" cy="1586255"/>
+          </a:xfrm>
+          <a:prstGeom prst="rect">
+            <a:avLst/>
+          </a:prstGeom>
+          <a:solidFill>
+            <a:srgbClr val="008564"/>
+          </a:solidFill>
+          <a:ln/>
+        </p:spPr>
+      </p:sp>
+      <p:sp>
+        <p:nvSpPr>
+          <p:cNvPr id="17" name="Text 15"/>
+          <p:cNvSpPr/>
+          <p:nvPr/>
+        </p:nvSpPr>
+        <p:spPr>
+          <a:xfrm>
+            <a:off x="1131570" y="1998193"/>
+            <a:ext cx="960120" cy="228600"/>
+          </a:xfrm>
+          <a:prstGeom prst="rect">
+            <a:avLst/>
+          </a:prstGeom>
+          <a:noFill/>
+          <a:ln/>
+        </p:spPr>
+        <p:txBody>
+          <a:bodyPr wrap="square" lIns="0" tIns="0" rIns="0" bIns="0" rtlCol="0" anchor="ctr"/>
+          <a:lstStyle/>
+          <a:p>
+            <a:pPr algn="ctr" indent="0" marL="0">
+              <a:buNone/>
+            </a:pPr>
+            <a:r>
+              <a:rPr lang="en-US" sz="1300" b="1" dirty="0">
+                <a:solidFill>
+                  <a:srgbClr val="008564"/>
+                </a:solidFill>
+                <a:latin typeface="NVIDIA Sans" pitchFamily="34" charset="0"/>
+                <a:ea typeface="NVIDIA Sans" pitchFamily="34" charset="-122"/>
+                <a:cs typeface="NVIDIA Sans" pitchFamily="34" charset="-120"/>
+              </a:rPr>
+              <a:t>257</a:t>
+            </a:r>
+            <a:endParaRPr lang="en-US" sz="1300" dirty="0"/>
+          </a:p>
+        </p:txBody>
+      </p:sp>
+      <p:sp>
+        <p:nvSpPr>
+          <p:cNvPr id="18" name="Text 16"/>
+          <p:cNvSpPr/>
+          <p:nvPr/>
+        </p:nvSpPr>
+        <p:spPr>
+          <a:xfrm>
+            <a:off x="1131570" y="3895344"/>
+            <a:ext cx="960120" cy="201168"/>
+          </a:xfrm>
+          <a:prstGeom prst="rect">
+            <a:avLst/>
+          </a:prstGeom>
+          <a:noFill/>
+          <a:ln/>
+        </p:spPr>
+        <p:txBody>
+          <a:bodyPr wrap="square" lIns="0" tIns="0" rIns="0" bIns="0" rtlCol="0" anchor="ctr"/>
+          <a:lstStyle/>
+          <a:p>
+            <a:pPr algn="ctr" indent="0" marL="0">
+              <a:buNone/>
+            </a:pPr>
+            <a:r>
+              <a:rPr lang="en-US" sz="1100" b="1" dirty="0">
+                <a:solidFill>
+                  <a:srgbClr val="000000"/>
+                </a:solidFill>
+                <a:latin typeface="NVIDIA Sans" pitchFamily="34" charset="0"/>
+                <a:ea typeface="NVIDIA Sans" pitchFamily="34" charset="-122"/>
+                <a:cs typeface="NVIDIA Sans" pitchFamily="34" charset="-120"/>
+              </a:rPr>
+              <a:t>bs 8</a:t>
+            </a:r>
+            <a:endParaRPr lang="en-US" sz="1100" dirty="0"/>
+          </a:p>
+        </p:txBody>
+      </p:sp>
+      <p:sp>
+        <p:nvSpPr>
+          <p:cNvPr id="19" name="Text 17"/>
+          <p:cNvSpPr/>
+          <p:nvPr/>
+        </p:nvSpPr>
+        <p:spPr>
+          <a:xfrm>
+            <a:off x="1085850" y="4096512"/>
+            <a:ext cx="1051560" cy="182880"/>
+          </a:xfrm>
+          <a:prstGeom prst="rect">
+            <a:avLst/>
+          </a:prstGeom>
+          <a:noFill/>
+          <a:ln/>
+        </p:spPr>
+        <p:txBody>
+          <a:bodyPr wrap="square" lIns="0" tIns="0" rIns="0" bIns="0" rtlCol="0" anchor="ctr"/>
+          <a:lstStyle/>
+          <a:p>
+            <a:pPr algn="ctr" indent="0" marL="0">
+              <a:buNone/>
+            </a:pPr>
+            <a:r>
+              <a:rPr lang="en-US" sz="900" dirty="0">
+                <a:solidFill>
+                  <a:srgbClr val="5E5E5E"/>
+                </a:solidFill>
+                <a:latin typeface="NVIDIA Sans" pitchFamily="34" charset="0"/>
+                <a:ea typeface="NVIDIA Sans" pitchFamily="34" charset="-122"/>
+                <a:cs typeface="NVIDIA Sans" pitchFamily="34" charset="-120"/>
+              </a:rPr>
+              <a:t>MFU 23.1%</a:t>
+            </a:r>
+            <a:endParaRPr lang="en-US" sz="900" dirty="0"/>
+          </a:p>
+        </p:txBody>
+      </p:sp>
+      <p:sp>
+        <p:nvSpPr>
+          <p:cNvPr id="20" name="Shape 18"/>
+          <p:cNvSpPr/>
+          <p:nvPr/>
+        </p:nvSpPr>
+        <p:spPr>
+          <a:xfrm>
+            <a:off x="2480310" y="1883893"/>
+            <a:ext cx="685800" cy="1956587"/>
+          </a:xfrm>
+          <a:prstGeom prst="rect">
+            <a:avLst/>
+          </a:prstGeom>
+          <a:solidFill>
+            <a:srgbClr val="008564"/>
+          </a:solidFill>
+          <a:ln/>
+        </p:spPr>
+      </p:sp>
+      <p:sp>
+        <p:nvSpPr>
+          <p:cNvPr id="21" name="Text 19"/>
+          <p:cNvSpPr/>
+          <p:nvPr/>
+        </p:nvSpPr>
+        <p:spPr>
+          <a:xfrm>
+            <a:off x="2343150" y="1627861"/>
+            <a:ext cx="960120" cy="228600"/>
+          </a:xfrm>
+          <a:prstGeom prst="rect">
+            <a:avLst/>
+          </a:prstGeom>
+          <a:noFill/>
+          <a:ln/>
+        </p:spPr>
+        <p:txBody>
+          <a:bodyPr wrap="square" lIns="0" tIns="0" rIns="0" bIns="0" rtlCol="0" anchor="ctr"/>
+          <a:lstStyle/>
+          <a:p>
+            <a:pPr algn="ctr" indent="0" marL="0">
+              <a:buNone/>
+            </a:pPr>
+            <a:r>
+              <a:rPr lang="en-US" sz="1300" b="1" dirty="0">
+                <a:solidFill>
+                  <a:srgbClr val="008564"/>
+                </a:solidFill>
+                <a:latin typeface="NVIDIA Sans" pitchFamily="34" charset="0"/>
+                <a:ea typeface="NVIDIA Sans" pitchFamily="34" charset="-122"/>
+                <a:cs typeface="NVIDIA Sans" pitchFamily="34" charset="-120"/>
+              </a:rPr>
+              <a:t>317</a:t>
+            </a:r>
+            <a:endParaRPr lang="en-US" sz="1300" dirty="0"/>
+          </a:p>
+        </p:txBody>
+      </p:sp>
+      <p:sp>
+        <p:nvSpPr>
+          <p:cNvPr id="22" name="Text 20"/>
+          <p:cNvSpPr/>
+          <p:nvPr/>
+        </p:nvSpPr>
+        <p:spPr>
+          <a:xfrm>
+            <a:off x="2343150" y="3895344"/>
+            <a:ext cx="960120" cy="201168"/>
+          </a:xfrm>
+          <a:prstGeom prst="rect">
+            <a:avLst/>
+          </a:prstGeom>
+          <a:noFill/>
+          <a:ln/>
+        </p:spPr>
+        <p:txBody>
+          <a:bodyPr wrap="square" lIns="0" tIns="0" rIns="0" bIns="0" rtlCol="0" anchor="ctr"/>
+          <a:lstStyle/>
+          <a:p>
+            <a:pPr algn="ctr" indent="0" marL="0">
+              <a:buNone/>
+            </a:pPr>
+            <a:r>
+              <a:rPr lang="en-US" sz="1100" b="1" dirty="0">
+                <a:solidFill>
+                  <a:srgbClr val="000000"/>
+                </a:solidFill>
+                <a:latin typeface="NVIDIA Sans" pitchFamily="34" charset="0"/>
+                <a:ea typeface="NVIDIA Sans" pitchFamily="34" charset="-122"/>
+                <a:cs typeface="NVIDIA Sans" pitchFamily="34" charset="-120"/>
+              </a:rPr>
+              <a:t>bs 16</a:t>
+            </a:r>
+            <a:endParaRPr lang="en-US" sz="1100" dirty="0"/>
+          </a:p>
+        </p:txBody>
+      </p:sp>
+      <p:sp>
+        <p:nvSpPr>
+          <p:cNvPr id="23" name="Text 21"/>
+          <p:cNvSpPr/>
+          <p:nvPr/>
+        </p:nvSpPr>
+        <p:spPr>
+          <a:xfrm>
+            <a:off x="2297430" y="4096512"/>
+            <a:ext cx="1051560" cy="182880"/>
+          </a:xfrm>
+          <a:prstGeom prst="rect">
+            <a:avLst/>
+          </a:prstGeom>
+          <a:noFill/>
+          <a:ln/>
+        </p:spPr>
+        <p:txBody>
+          <a:bodyPr wrap="square" lIns="0" tIns="0" rIns="0" bIns="0" rtlCol="0" anchor="ctr"/>
+          <a:lstStyle/>
+          <a:p>
+            <a:pPr algn="ctr" indent="0" marL="0">
+              <a:buNone/>
+            </a:pPr>
+            <a:r>
+              <a:rPr lang="en-US" sz="900" dirty="0">
+                <a:solidFill>
+                  <a:srgbClr val="5E5E5E"/>
+                </a:solidFill>
+                <a:latin typeface="NVIDIA Sans" pitchFamily="34" charset="0"/>
+                <a:ea typeface="NVIDIA Sans" pitchFamily="34" charset="-122"/>
+                <a:cs typeface="NVIDIA Sans" pitchFamily="34" charset="-120"/>
+              </a:rPr>
+              <a:t>MFU 28.4%</a:t>
+            </a:r>
+            <a:endParaRPr lang="en-US" sz="900" dirty="0"/>
+          </a:p>
+        </p:txBody>
+      </p:sp>
+      <p:sp>
+        <p:nvSpPr>
+          <p:cNvPr id="24" name="Shape 22"/>
+          <p:cNvSpPr/>
+          <p:nvPr/>
+        </p:nvSpPr>
+        <p:spPr>
+          <a:xfrm>
+            <a:off x="3691890" y="1741932"/>
+            <a:ext cx="685800" cy="2098548"/>
+          </a:xfrm>
+          <a:prstGeom prst="rect">
+            <a:avLst/>
+          </a:prstGeom>
+          <a:solidFill>
+            <a:srgbClr val="76B900"/>
+          </a:solidFill>
+          <a:ln/>
+        </p:spPr>
+      </p:sp>
+      <p:sp>
+        <p:nvSpPr>
+          <p:cNvPr id="25" name="Text 23"/>
+          <p:cNvSpPr/>
+          <p:nvPr/>
+        </p:nvSpPr>
+        <p:spPr>
+          <a:xfrm>
+            <a:off x="3554730" y="1485900"/>
+            <a:ext cx="960120" cy="228600"/>
+          </a:xfrm>
+          <a:prstGeom prst="rect">
+            <a:avLst/>
+          </a:prstGeom>
+          <a:noFill/>
+          <a:ln/>
+        </p:spPr>
+        <p:txBody>
+          <a:bodyPr wrap="square" lIns="0" tIns="0" rIns="0" bIns="0" rtlCol="0" anchor="ctr"/>
+          <a:lstStyle/>
+          <a:p>
+            <a:pPr algn="ctr" indent="0" marL="0">
+              <a:buNone/>
+            </a:pPr>
+            <a:r>
+              <a:rPr lang="en-US" sz="1300" b="1" dirty="0">
+                <a:solidFill>
+                  <a:srgbClr val="76B900"/>
+                </a:solidFill>
+                <a:latin typeface="NVIDIA Sans" pitchFamily="34" charset="0"/>
+                <a:ea typeface="NVIDIA Sans" pitchFamily="34" charset="-122"/>
+                <a:cs typeface="NVIDIA Sans" pitchFamily="34" charset="-120"/>
+              </a:rPr>
+              <a:t>340</a:t>
+            </a:r>
+            <a:endParaRPr lang="en-US" sz="1300" dirty="0"/>
+          </a:p>
+        </p:txBody>
+      </p:sp>
+      <p:sp>
+        <p:nvSpPr>
+          <p:cNvPr id="26" name="Text 24"/>
+          <p:cNvSpPr/>
+          <p:nvPr/>
+        </p:nvSpPr>
+        <p:spPr>
+          <a:xfrm>
+            <a:off x="3554730" y="3895344"/>
+            <a:ext cx="960120" cy="201168"/>
+          </a:xfrm>
+          <a:prstGeom prst="rect">
+            <a:avLst/>
+          </a:prstGeom>
+          <a:noFill/>
+          <a:ln/>
+        </p:spPr>
+        <p:txBody>
+          <a:bodyPr wrap="square" lIns="0" tIns="0" rIns="0" bIns="0" rtlCol="0" anchor="ctr"/>
+          <a:lstStyle/>
+          <a:p>
+            <a:pPr algn="ctr" indent="0" marL="0">
+              <a:buNone/>
+            </a:pPr>
+            <a:r>
+              <a:rPr lang="en-US" sz="1100" b="1" dirty="0">
+                <a:solidFill>
+                  <a:srgbClr val="000000"/>
+                </a:solidFill>
+                <a:latin typeface="NVIDIA Sans" pitchFamily="34" charset="0"/>
+                <a:ea typeface="NVIDIA Sans" pitchFamily="34" charset="-122"/>
+                <a:cs typeface="NVIDIA Sans" pitchFamily="34" charset="-120"/>
+              </a:rPr>
+              <a:t>bs 24</a:t>
+            </a:r>
+            <a:endParaRPr lang="en-US" sz="1100" dirty="0"/>
+          </a:p>
+        </p:txBody>
+      </p:sp>
+      <p:sp>
+        <p:nvSpPr>
+          <p:cNvPr id="27" name="Text 25"/>
+          <p:cNvSpPr/>
+          <p:nvPr/>
+        </p:nvSpPr>
+        <p:spPr>
+          <a:xfrm>
+            <a:off x="3509010" y="4096512"/>
+            <a:ext cx="1051560" cy="182880"/>
+          </a:xfrm>
+          <a:prstGeom prst="rect">
+            <a:avLst/>
+          </a:prstGeom>
+          <a:noFill/>
+          <a:ln/>
+        </p:spPr>
+        <p:txBody>
+          <a:bodyPr wrap="square" lIns="0" tIns="0" rIns="0" bIns="0" rtlCol="0" anchor="ctr"/>
+          <a:lstStyle/>
+          <a:p>
+            <a:pPr algn="ctr" indent="0" marL="0">
+              <a:buNone/>
+            </a:pPr>
+            <a:r>
+              <a:rPr lang="en-US" sz="900" dirty="0">
+                <a:solidFill>
+                  <a:srgbClr val="5E5E5E"/>
+                </a:solidFill>
+                <a:latin typeface="NVIDIA Sans" pitchFamily="34" charset="0"/>
+                <a:ea typeface="NVIDIA Sans" pitchFamily="34" charset="-122"/>
+                <a:cs typeface="NVIDIA Sans" pitchFamily="34" charset="-120"/>
+              </a:rPr>
+              <a:t>MFU 30.5%</a:t>
+            </a:r>
+            <a:endParaRPr lang="en-US" sz="900" dirty="0"/>
+          </a:p>
+        </p:txBody>
+      </p:sp>
+      <p:sp>
+        <p:nvSpPr>
+          <p:cNvPr id="28" name="Shape 26"/>
+          <p:cNvSpPr/>
+          <p:nvPr/>
+        </p:nvSpPr>
+        <p:spPr>
+          <a:xfrm>
+            <a:off x="4903470" y="2235708"/>
+            <a:ext cx="685800" cy="1604772"/>
+          </a:xfrm>
+          <a:prstGeom prst="rect">
+            <a:avLst/>
+          </a:prstGeom>
+          <a:solidFill>
+            <a:srgbClr val="890C58"/>
+          </a:solidFill>
+          <a:ln/>
+        </p:spPr>
+      </p:sp>
+      <p:sp>
+        <p:nvSpPr>
+          <p:cNvPr id="29" name="Text 27"/>
+          <p:cNvSpPr/>
+          <p:nvPr/>
+        </p:nvSpPr>
+        <p:spPr>
+          <a:xfrm>
+            <a:off x="4766310" y="1979676"/>
+            <a:ext cx="960120" cy="228600"/>
+          </a:xfrm>
+          <a:prstGeom prst="rect">
+            <a:avLst/>
+          </a:prstGeom>
+          <a:noFill/>
+          <a:ln/>
+        </p:spPr>
+        <p:txBody>
+          <a:bodyPr wrap="square" lIns="0" tIns="0" rIns="0" bIns="0" rtlCol="0" anchor="ctr"/>
+          <a:lstStyle/>
+          <a:p>
+            <a:pPr algn="ctr" indent="0" marL="0">
+              <a:buNone/>
+            </a:pPr>
+            <a:r>
+              <a:rPr lang="en-US" sz="1300" b="1" dirty="0">
+                <a:solidFill>
+                  <a:srgbClr val="890C58"/>
+                </a:solidFill>
+                <a:latin typeface="NVIDIA Sans" pitchFamily="34" charset="0"/>
+                <a:ea typeface="NVIDIA Sans" pitchFamily="34" charset="-122"/>
+                <a:cs typeface="NVIDIA Sans" pitchFamily="34" charset="-120"/>
+              </a:rPr>
+              <a:t>260</a:t>
+            </a:r>
+            <a:endParaRPr lang="en-US" sz="1300" dirty="0"/>
+          </a:p>
+        </p:txBody>
+      </p:sp>
+      <p:sp>
+        <p:nvSpPr>
+          <p:cNvPr id="30" name="Text 28"/>
+          <p:cNvSpPr/>
+          <p:nvPr/>
+        </p:nvSpPr>
+        <p:spPr>
+          <a:xfrm>
+            <a:off x="4766310" y="3895344"/>
+            <a:ext cx="960120" cy="201168"/>
+          </a:xfrm>
+          <a:prstGeom prst="rect">
+            <a:avLst/>
+          </a:prstGeom>
+          <a:noFill/>
+          <a:ln/>
+        </p:spPr>
+        <p:txBody>
+          <a:bodyPr wrap="square" lIns="0" tIns="0" rIns="0" bIns="0" rtlCol="0" anchor="ctr"/>
+          <a:lstStyle/>
+          <a:p>
+            <a:pPr algn="ctr" indent="0" marL="0">
+              <a:buNone/>
+            </a:pPr>
+            <a:r>
+              <a:rPr lang="en-US" sz="1100" b="1" dirty="0">
+                <a:solidFill>
+                  <a:srgbClr val="000000"/>
+                </a:solidFill>
+                <a:latin typeface="NVIDIA Sans" pitchFamily="34" charset="0"/>
+                <a:ea typeface="NVIDIA Sans" pitchFamily="34" charset="-122"/>
+                <a:cs typeface="NVIDIA Sans" pitchFamily="34" charset="-120"/>
+              </a:rPr>
+              <a:t>bs 32</a:t>
+            </a:r>
+            <a:endParaRPr lang="en-US" sz="1100" dirty="0"/>
+          </a:p>
+        </p:txBody>
+      </p:sp>
+      <p:sp>
+        <p:nvSpPr>
+          <p:cNvPr id="31" name="Text 29"/>
+          <p:cNvSpPr/>
+          <p:nvPr/>
+        </p:nvSpPr>
+        <p:spPr>
+          <a:xfrm>
+            <a:off x="4720590" y="4096512"/>
+            <a:ext cx="1051560" cy="182880"/>
+          </a:xfrm>
+          <a:prstGeom prst="rect">
+            <a:avLst/>
+          </a:prstGeom>
+          <a:noFill/>
+          <a:ln/>
+        </p:spPr>
+        <p:txBody>
+          <a:bodyPr wrap="square" lIns="0" tIns="0" rIns="0" bIns="0" rtlCol="0" anchor="ctr"/>
+          <a:lstStyle/>
+          <a:p>
+            <a:pPr algn="ctr" indent="0" marL="0">
+              <a:buNone/>
+            </a:pPr>
+            <a:r>
+              <a:rPr lang="en-US" sz="900" dirty="0">
+                <a:solidFill>
+                  <a:srgbClr val="5E5E5E"/>
+                </a:solidFill>
+                <a:latin typeface="NVIDIA Sans" pitchFamily="34" charset="0"/>
+                <a:ea typeface="NVIDIA Sans" pitchFamily="34" charset="-122"/>
+                <a:cs typeface="NVIDIA Sans" pitchFamily="34" charset="-120"/>
+              </a:rPr>
+              <a:t>MFU 23.3%</a:t>
+            </a:r>
+            <a:endParaRPr lang="en-US" sz="900" dirty="0"/>
+          </a:p>
+        </p:txBody>
+      </p:sp>
+      <p:sp>
+        <p:nvSpPr>
+          <p:cNvPr id="32" name="Text 30"/>
+          <p:cNvSpPr/>
+          <p:nvPr/>
+        </p:nvSpPr>
+        <p:spPr>
+          <a:xfrm>
+            <a:off x="1051560" y="1399032"/>
+            <a:ext cx="1828800" cy="182880"/>
+          </a:xfrm>
+          <a:prstGeom prst="rect">
+            <a:avLst/>
+          </a:prstGeom>
+          <a:noFill/>
+          <a:ln/>
+        </p:spPr>
+        <p:txBody>
+          <a:bodyPr wrap="square" lIns="0" tIns="0" rIns="0" bIns="0" rtlCol="0" anchor="ctr"/>
+          <a:lstStyle/>
+          <a:p>
+            <a:pPr indent="0" marL="0">
+              <a:buNone/>
+            </a:pPr>
+            <a:r>
+              <a:rPr lang="en-US" sz="900" i="1" dirty="0">
+                <a:solidFill>
+                  <a:srgbClr val="8C8C8C"/>
+                </a:solidFill>
+                <a:latin typeface="NVIDIA Sans" pitchFamily="34" charset="0"/>
+                <a:ea typeface="NVIDIA Sans" pitchFamily="34" charset="-122"/>
+                <a:cs typeface="NVIDIA Sans" pitchFamily="34" charset="-120"/>
+              </a:rPr>
+              <a:t>samples / node / s</a:t>
+            </a:r>
+            <a:endParaRPr lang="en-US" sz="900" dirty="0"/>
+          </a:p>
+        </p:txBody>
+      </p:sp>
+      <p:sp>
+        <p:nvSpPr>
+          <p:cNvPr id="33" name="Text 31"/>
+          <p:cNvSpPr/>
+          <p:nvPr/>
+        </p:nvSpPr>
+        <p:spPr>
+          <a:xfrm>
+            <a:off x="6400800" y="1417320"/>
+            <a:ext cx="2286000" cy="2743200"/>
+          </a:xfrm>
+          <a:prstGeom prst="rect">
+            <a:avLst/>
+          </a:prstGeom>
+          <a:noFill/>
+          <a:ln/>
+        </p:spPr>
+        <p:txBody>
+          <a:bodyPr wrap="square" lIns="0" tIns="0" rIns="0" bIns="0" rtlCol="0" anchor="t"/>
+          <a:lstStyle/>
+          <a:p>
+            <a:pPr marL="342900" indent="-342900">
+              <a:buSzPct val="100000"/>
+              <a:buChar char="•"/>
+            </a:pPr>
+            <a:r>
+              <a:rPr lang="en-US" sz="1150" dirty="0">
+                <a:solidFill>
+                  <a:srgbClr val="000000"/>
+                </a:solidFill>
+                <a:latin typeface="NVIDIA Sans" pitchFamily="34" charset="0"/>
+                <a:ea typeface="NVIDIA Sans" pitchFamily="34" charset="-122"/>
+                <a:cs typeface="NVIDIA Sans" pitchFamily="34" charset="-120"/>
+              </a:rPr>
+              <a:t>Batching amortizes launch and comm costs: MFU climbs 23% → 30.5%</a:t>
+            </a:r>
+            <a:endParaRPr lang="en-US" sz="1150" dirty="0"/>
+          </a:p>
+          <a:p>
+            <a:pPr marL="342900" indent="-342900">
+              <a:buSzPct val="100000"/>
+              <a:buChar char="•"/>
+            </a:pPr>
+            <a:r>
+              <a:rPr lang="en-US" sz="1150" dirty="0">
+                <a:solidFill>
+                  <a:srgbClr val="000000"/>
+                </a:solidFill>
+                <a:latin typeface="NVIDIA Sans" pitchFamily="34" charset="0"/>
+                <a:ea typeface="NVIDIA Sans" pitchFamily="34" charset="-122"/>
+                <a:cs typeface="NVIDIA Sans" pitchFamily="34" charset="-120"/>
+              </a:rPr>
+              <a:t>bs 32 regresses hard (986 ms/step): not OOM, not the dataloader — memory-pressure effects under investigation</a:t>
+            </a:r>
+            <a:endParaRPr lang="en-US" sz="1150" dirty="0"/>
+          </a:p>
+          <a:p>
+            <a:pPr marL="342900" indent="-342900">
+              <a:buSzPct val="100000"/>
+              <a:buChar char="•"/>
+            </a:pPr>
+            <a:r>
+              <a:rPr lang="en-US" sz="1150" dirty="0">
+                <a:solidFill>
+                  <a:srgbClr val="000000"/>
+                </a:solidFill>
+                <a:latin typeface="NVIDIA Sans" pitchFamily="34" charset="0"/>
+                <a:ea typeface="NVIDIA Sans" pitchFamily="34" charset="-122"/>
+                <a:cs typeface="NVIDIA Sans" pitchFamily="34" charset="-120"/>
+              </a:rPr>
+              <a:t>Larger global batch (192) changes optimization dynamics — needs a convergence run before adoption</a:t>
+            </a:r>
+            <a:endParaRPr lang="en-US" sz="1150" dirty="0"/>
+          </a:p>
+        </p:txBody>
+      </p:sp>
+      <p:sp>
+        <p:nvSpPr>
+          <p:cNvPr id="34" name="Text 32"/>
+          <p:cNvSpPr/>
+          <p:nvPr/>
+        </p:nvSpPr>
+        <p:spPr>
+          <a:xfrm>
+            <a:off x="457200" y="4617720"/>
+            <a:ext cx="4572000" cy="320040"/>
+          </a:xfrm>
+          <a:prstGeom prst="rect">
+            <a:avLst/>
+          </a:prstGeom>
+          <a:noFill/>
+          <a:ln/>
+        </p:spPr>
+        <p:txBody>
+          <a:bodyPr wrap="square" lIns="0" tIns="0" rIns="0" bIns="0" rtlCol="0" anchor="ctr"/>
+          <a:lstStyle/>
+          <a:p>
+            <a:pPr algn="l" indent="0" marL="0">
+              <a:buNone/>
+            </a:pPr>
+            <a:r>
+              <a:rPr lang="en-US" sz="1000" dirty="0">
+                <a:solidFill>
+                  <a:srgbClr val="5E5E5E"/>
+                </a:solidFill>
+                <a:latin typeface="NVIDIA Sans" pitchFamily="34" charset="0"/>
+                <a:ea typeface="NVIDIA Sans" pitchFamily="34" charset="-122"/>
+                <a:cs typeface="NVIDIA Sans" pitchFamily="34" charset="-120"/>
+              </a:rPr>
+              <a:t>QwenPI Training Optimization</a:t>
+            </a:r>
+            <a:endParaRPr lang="en-US" sz="1000" dirty="0"/>
+          </a:p>
+        </p:txBody>
+      </p:sp>
+      <p:sp>
+        <p:nvSpPr>
+          <p:cNvPr id="35" name="Text 33"/>
+          <p:cNvSpPr/>
+          <p:nvPr/>
+        </p:nvSpPr>
+        <p:spPr>
+          <a:xfrm>
+            <a:off x="7360920" y="4617720"/>
+            <a:ext cx="320040" cy="320040"/>
+          </a:xfrm>
+          <a:prstGeom prst="rect">
+            <a:avLst/>
+          </a:prstGeom>
+          <a:noFill/>
+          <a:ln/>
+        </p:spPr>
+        <p:txBody>
+          <a:bodyPr wrap="square" lIns="0" tIns="0" rIns="0" bIns="0" rtlCol="0" anchor="ctr"/>
+          <a:lstStyle/>
+          <a:p>
+            <a:pPr algn="r" indent="0" marL="0">
+              <a:buNone/>
+            </a:pPr>
+            <a:r>
+              <a:rPr lang="en-US" sz="1000" dirty="0">
+                <a:solidFill>
+                  <a:srgbClr val="5E5E5E"/>
+                </a:solidFill>
+                <a:latin typeface="NVIDIA Sans" pitchFamily="34" charset="0"/>
+                <a:ea typeface="NVIDIA Sans" pitchFamily="34" charset="-122"/>
+                <a:cs typeface="NVIDIA Sans" pitchFamily="34" charset="-120"/>
+              </a:rPr>
+              <a:t>11</a:t>
+            </a:r>
+            <a:endParaRPr lang="en-US" sz="1000" dirty="0"/>
+          </a:p>
+        </p:txBody>
+      </p:sp>
+      <p:sp>
+        <p:nvSpPr>
+          <p:cNvPr id="36" name="Shape 34"/>
+          <p:cNvSpPr/>
+          <p:nvPr/>
+        </p:nvSpPr>
+        <p:spPr>
+          <a:xfrm>
+            <a:off x="7726680" y="4617720"/>
+            <a:ext cx="36576" cy="320040"/>
+          </a:xfrm>
+          <a:prstGeom prst="rect">
+            <a:avLst/>
+          </a:prstGeom>
+          <a:solidFill>
+            <a:srgbClr val="76B900"/>
+          </a:solidFill>
+          <a:ln/>
+        </p:spPr>
+      </p:sp>
+      <p:pic>
+        <p:nvPicPr>
+          <p:cNvPr id="37" name="Image 0" descr="/app/logos/nvidia-logo-blk-sm.png">    </p:cNvPr>
+          <p:cNvPicPr>
+            <a:picLocks noChangeAspect="1"/>
+          </p:cNvPicPr>
+          <p:nvPr/>
+        </p:nvPicPr>
+        <p:blipFill>
+          <a:blip r:embed="rId1"/>
+          <a:stretch>
+            <a:fillRect/>
+          </a:stretch>
+        </p:blipFill>
+        <p:spPr>
+          <a:xfrm>
+            <a:off x="7863840" y="4604004"/>
+            <a:ext cx="1005840" cy="347472"/>
+          </a:xfrm>
+          <a:prstGeom prst="rect">
+            <a:avLst/>
+          </a:prstGeom>
+        </p:spPr>
+      </p:pic>
+    </p:spTree>
+  </p:cSld>
+  <p:clrMapOvr>
+    <a:masterClrMapping/>
+  </p:clrMapOvr>
+</p:sld>
+</file>
+
+<file path=ppt/slides/slide12.xml><?xml version="1.0" encoding="utf-8"?>
+<p:sld xmlns:a="http://schemas.openxmlformats.org/drawingml/2006/main" xmlns:r="http://schemas.openxmlformats.org/officeDocument/2006/relationships" xmlns:p="http://schemas.openxmlformats.org/presentationml/2006/main">
+  <p:cSld name="Slide 12">
+    <p:bg>
+      <p:bgPr>
+        <a:solidFill>
+          <a:srgbClr val="FFFFFF"/>
+        </a:solidFill>
+      </p:bgPr>
+    </p:bg>
+    <p:spTree>
+      <p:nvGrpSpPr>
+        <p:cNvPr id="1" name=""/>
+        <p:cNvGrpSpPr/>
+        <p:nvPr/>
+      </p:nvGrpSpPr>
+      <p:grpSpPr>
+        <a:xfrm>
+          <a:off x="0" y="0"/>
+          <a:ext cx="0" cy="0"/>
+          <a:chOff x="0" y="0"/>
+          <a:chExt cx="0" cy="0"/>
+        </a:xfrm>
+      </p:grpSpPr>
+      <p:sp>
+        <p:nvSpPr>
+          <p:cNvPr id="2" name="Text 0"/>
+          <p:cNvSpPr/>
+          <p:nvPr/>
+        </p:nvSpPr>
+        <p:spPr>
+          <a:xfrm>
+            <a:off x="457200" y="256032"/>
+            <a:ext cx="8229600" cy="548640"/>
+          </a:xfrm>
+          <a:prstGeom prst="rect">
+            <a:avLst/>
+          </a:prstGeom>
+          <a:noFill/>
+          <a:ln/>
+        </p:spPr>
+        <p:txBody>
+          <a:bodyPr wrap="square" lIns="0" tIns="0" rIns="0" bIns="0" rtlCol="0" anchor="ctr"/>
+          <a:lstStyle/>
+          <a:p>
+            <a:pPr indent="0" marL="0">
+              <a:buNone/>
+            </a:pPr>
+            <a:r>
+              <a:rPr lang="en-US" sz="3000" b="1" dirty="0">
+                <a:solidFill>
+                  <a:srgbClr val="000000"/>
+                </a:solidFill>
+                <a:latin typeface="NVIDIA Sans" pitchFamily="34" charset="0"/>
+                <a:ea typeface="NVIDIA Sans" pitchFamily="34" charset="-122"/>
+                <a:cs typeface="NVIDIA Sans" pitchFamily="34" charset="-120"/>
+              </a:rPr>
               <a:t>What We Ruled Out — and How</a:t>
             </a:r>
             <a:endParaRPr lang="en-US" sz="3000" dirty="0"/>
@@ -6138,7 +7184,7 @@
       </p:sp>
       <p:graphicFrame>
         <p:nvGraphicFramePr>
-          <p:cNvPr id="12" name="Table 0"/>
+          <p:cNvPr id="13" name="Table 0"/>
           <p:cNvGraphicFramePr>
             <a:graphicFrameLocks noGrp="1"/>
           </p:cNvGraphicFramePr>
@@ -7627,7 +8673,7 @@
                 <a:ea typeface="NVIDIA Sans" pitchFamily="34" charset="-122"/>
                 <a:cs typeface="NVIDIA Sans" pitchFamily="34" charset="-120"/>
               </a:rPr>
-              <a:t>11</a:t>
+              <a:t>12</a:t>
             </a:r>
             <a:endParaRPr lang="en-US" sz="1000" dirty="0"/>
           </a:p>
@@ -7685,9 +8731,9 @@
 </p:sld>
 </file>
 
-<file path=ppt/slides/slide12.xml><?xml version="1.0" encoding="utf-8"?>
+<file path=ppt/slides/slide13.xml><?xml version="1.0" encoding="utf-8"?>
 <p:sld xmlns:a="http://schemas.openxmlformats.org/drawingml/2006/main" xmlns:r="http://schemas.openxmlformats.org/officeDocument/2006/relationships" xmlns:p="http://schemas.openxmlformats.org/presentationml/2006/main">
-  <p:cSld name="Slide 12">
+  <p:cSld name="Slide 13">
     <p:bg>
       <p:bgPr>
         <a:solidFill>
@@ -8511,7 +9557,7 @@
                 <a:ea typeface="NVIDIA Sans" pitchFamily="34" charset="-122"/>
                 <a:cs typeface="NVIDIA Sans" pitchFamily="34" charset="-120"/>
               </a:rPr>
-              <a:t>12</a:t>
+              <a:t>13</a:t>
             </a:r>
             <a:endParaRPr lang="en-US" sz="1000" dirty="0"/>
           </a:p>
@@ -21885,7 +22931,7 @@
                 <a:ea typeface="NVIDIA Sans" pitchFamily="34" charset="-122"/>
                 <a:cs typeface="NVIDIA Sans" pitchFamily="34" charset="-120"/>
               </a:rPr>
-              <a:t>CUDA Graphs &amp; torch.compile: −126 ms</a:t>
+              <a:t>Why CUDA Graphs: Launch-Bound Forward</a:t>
             </a:r>
             <a:endParaRPr lang="en-US" sz="3000" dirty="0"/>
           </a:p>
@@ -21924,46 +22970,22 @@
                 <a:ea typeface="NVIDIA Sans" pitchFamily="34" charset="-122"/>
                 <a:cs typeface="NVIDIA Sans" pitchFamily="34" charset="-120"/>
               </a:rPr>
-              <a:t>398 → 271 ms.  Replay the whole network as six graphs instead of ~14k eager launches</a:t>
+              <a:t>Anatomy of the Qwen3.5 forward — same math, very different wall clock</a:t>
             </a:r>
             <a:endParaRPr lang="en-US" sz="1500" dirty="0"/>
           </a:p>
         </p:txBody>
       </p:sp>
-      <p:pic>
-        <p:nvPicPr>
-          <p:cNvPr id="4" name="Image 0" descr="/work/tikz-graphs.png">    </p:cNvPr>
-          <p:cNvPicPr>
-            <a:picLocks noChangeAspect="1"/>
-          </p:cNvPicPr>
-          <p:nvPr/>
-        </p:nvPicPr>
-        <p:blipFill>
-          <a:blip r:embed="rId1"/>
-          <a:stretch>
-            <a:fillRect/>
-          </a:stretch>
-        </p:blipFill>
-        <p:spPr>
-          <a:xfrm>
-            <a:off x="457200" y="1371600"/>
-            <a:ext cx="3291962" cy="2834640"/>
-          </a:xfrm>
-          <a:prstGeom prst="rect">
-            <a:avLst/>
-          </a:prstGeom>
-        </p:spPr>
-      </p:pic>
-      <p:sp>
-        <p:nvSpPr>
-          <p:cNvPr id="5" name="Text 2"/>
-          <p:cNvSpPr/>
-          <p:nvPr/>
-        </p:nvSpPr>
-        <p:spPr>
-          <a:xfrm>
-            <a:off x="4206362" y="1417320"/>
-            <a:ext cx="4480438" cy="2194560"/>
+      <p:sp>
+        <p:nvSpPr>
+          <p:cNvPr id="4" name="Text 2"/>
+          <p:cNvSpPr/>
+          <p:nvPr/>
+        </p:nvSpPr>
+        <p:spPr>
+          <a:xfrm>
+            <a:off x="457200" y="1399032"/>
+            <a:ext cx="1417320" cy="384048"/>
           </a:xfrm>
           <a:prstGeom prst="rect">
             <a:avLst/>
@@ -21972,15 +22994,14 @@
           <a:ln/>
         </p:spPr>
         <p:txBody>
-          <a:bodyPr wrap="square" lIns="0" tIns="0" rIns="0" bIns="0" rtlCol="0" anchor="t"/>
+          <a:bodyPr wrap="square" lIns="0" tIns="0" rIns="0" bIns="0" rtlCol="0" anchor="ctr"/>
           <a:lstStyle/>
           <a:p>
-            <a:pPr marL="342900" indent="-342900">
-              <a:buSzPct val="100000"/>
-              <a:buChar char="•"/>
+            <a:pPr indent="0" marL="0">
+              <a:buNone/>
             </a:pPr>
             <a:r>
-              <a:rPr lang="en-US" sz="1200" b="1" dirty="0">
+              <a:rPr lang="en-US" sz="1100" b="1" dirty="0">
                 <a:solidFill>
                   <a:srgbClr val="000000"/>
                 </a:solidFill>
@@ -21988,17 +23009,16 @@
                 <a:ea typeface="NVIDIA Sans" pitchFamily="34" charset="-122"/>
                 <a:cs typeface="NVIDIA Sans" pitchFamily="34" charset="-120"/>
               </a:rPr>
-              <a:t>Whole-model compile is blocked: the hybrid GDN layers (fla library) graph-break in dynamo</a:t>
+              <a:t>Baseline</a:t>
             </a:r>
-            <a:endParaRPr lang="en-US" sz="1200" dirty="0"/>
-          </a:p>
-          <a:p>
-            <a:pPr marL="342900" indent="-342900">
-              <a:buSzPct val="100000"/>
-              <a:buChar char="•"/>
+            <a:endParaRPr lang="en-US" sz="1100" dirty="0"/>
+          </a:p>
+          <a:p>
+            <a:pPr indent="0" marL="0">
+              <a:buNone/>
             </a:pPr>
             <a:r>
-              <a:rPr lang="en-US" sz="1200" dirty="0">
+              <a:rPr lang="en-US" sz="1100" b="1" dirty="0">
                 <a:solidFill>
                   <a:srgbClr val="000000"/>
                 </a:solidFill>
@@ -22006,116 +23026,140 @@
                 <a:ea typeface="NVIDIA Sans" pitchFamily="34" charset="-122"/>
                 <a:cs typeface="NVIDIA Sans" pitchFamily="34" charset="-120"/>
               </a:rPr>
-              <a:t>So we capture around it: 32 text layers grouped into 4 CUDA Graphs of 8 layers each</a:t>
+              <a:t>(eager)</a:t>
             </a:r>
-            <a:endParaRPr lang="en-US" sz="1200" dirty="0"/>
-          </a:p>
-          <a:p>
-            <a:pPr marL="342900" indent="-342900">
-              <a:buSzPct val="100000"/>
-              <a:buChar char="•"/>
+            <a:endParaRPr lang="en-US" sz="1100" dirty="0"/>
+          </a:p>
+        </p:txBody>
+      </p:sp>
+      <p:sp>
+        <p:nvSpPr>
+          <p:cNvPr id="5" name="Shape 3"/>
+          <p:cNvSpPr/>
+          <p:nvPr/>
+        </p:nvSpPr>
+        <p:spPr>
+          <a:xfrm>
+            <a:off x="1920240" y="1417320"/>
+            <a:ext cx="2131541" cy="384048"/>
+          </a:xfrm>
+          <a:prstGeom prst="rect">
+            <a:avLst/>
+          </a:prstGeom>
+          <a:solidFill>
+            <a:srgbClr val="76B900"/>
+          </a:solidFill>
+          <a:ln/>
+        </p:spPr>
+      </p:sp>
+      <p:sp>
+        <p:nvSpPr>
+          <p:cNvPr id="6" name="Text 4"/>
+          <p:cNvSpPr/>
+          <p:nvPr/>
+        </p:nvSpPr>
+        <p:spPr>
+          <a:xfrm>
+            <a:off x="1920240" y="1417320"/>
+            <a:ext cx="2131541" cy="384048"/>
+          </a:xfrm>
+          <a:prstGeom prst="rect">
+            <a:avLst/>
+          </a:prstGeom>
+          <a:noFill/>
+          <a:ln/>
+        </p:spPr>
+        <p:txBody>
+          <a:bodyPr wrap="square" lIns="0" tIns="0" rIns="0" bIns="0" rtlCol="0" anchor="ctr"/>
+          <a:lstStyle/>
+          <a:p>
+            <a:pPr algn="ctr" indent="0" marL="0">
+              <a:buNone/>
             </a:pPr>
             <a:r>
-              <a:rPr lang="en-US" sz="1200" dirty="0">
+              <a:rPr lang="en-US" sz="1000" b="1" dirty="0">
                 <a:solidFill>
-                  <a:srgbClr val="000000"/>
+                  <a:srgbClr val="FFFFFF"/>
                 </a:solidFill>
                 <a:latin typeface="NVIDIA Sans" pitchFamily="34" charset="0"/>
                 <a:ea typeface="NVIDIA Sans" pitchFamily="34" charset="-122"/>
                 <a:cs typeface="NVIDIA Sans" pitchFamily="34" charset="-120"/>
               </a:rPr>
-              <a:t>Vision tower captured as a single graph (FA2 kernels inside, host-cached max_seqlen)</a:t>
+              <a:t>GPU busy 50 ms</a:t>
             </a:r>
-            <a:endParaRPr lang="en-US" sz="1200" dirty="0"/>
-          </a:p>
-          <a:p>
-            <a:pPr marL="342900" indent="-342900">
-              <a:buSzPct val="100000"/>
-              <a:buChar char="•"/>
+            <a:endParaRPr lang="en-US" sz="1000" dirty="0"/>
+          </a:p>
+        </p:txBody>
+      </p:sp>
+      <p:sp>
+        <p:nvSpPr>
+          <p:cNvPr id="7" name="Shape 5"/>
+          <p:cNvSpPr/>
+          <p:nvPr/>
+        </p:nvSpPr>
+        <p:spPr>
+          <a:xfrm>
+            <a:off x="4051781" y="1417320"/>
+            <a:ext cx="4177819" cy="384048"/>
+          </a:xfrm>
+          <a:prstGeom prst="rect">
+            <a:avLst/>
+          </a:prstGeom>
+          <a:solidFill>
+            <a:srgbClr val="890C58"/>
+          </a:solidFill>
+          <a:ln/>
+        </p:spPr>
+      </p:sp>
+      <p:sp>
+        <p:nvSpPr>
+          <p:cNvPr id="8" name="Text 6"/>
+          <p:cNvSpPr/>
+          <p:nvPr/>
+        </p:nvSpPr>
+        <p:spPr>
+          <a:xfrm>
+            <a:off x="4051781" y="1417320"/>
+            <a:ext cx="4177819" cy="384048"/>
+          </a:xfrm>
+          <a:prstGeom prst="rect">
+            <a:avLst/>
+          </a:prstGeom>
+          <a:noFill/>
+          <a:ln/>
+        </p:spPr>
+        <p:txBody>
+          <a:bodyPr wrap="square" lIns="0" tIns="0" rIns="0" bIns="0" rtlCol="0" anchor="ctr"/>
+          <a:lstStyle/>
+          <a:p>
+            <a:pPr algn="ctr" indent="0" marL="0">
+              <a:buNone/>
             </a:pPr>
             <a:r>
-              <a:rPr lang="en-US" sz="1200" dirty="0">
+              <a:rPr lang="en-US" sz="1000" b="1" dirty="0">
                 <a:solidFill>
-                  <a:srgbClr val="000000"/>
+                  <a:srgbClr val="FFFFFF"/>
                 </a:solidFill>
                 <a:latin typeface="NVIDIA Sans" pitchFamily="34" charset="0"/>
                 <a:ea typeface="NVIDIA Sans" pitchFamily="34" charset="-122"/>
                 <a:cs typeface="NVIDIA Sans" pitchFamily="34" charset="-120"/>
               </a:rPr>
-              <a:t>Static shapes make it possible: text fixed at 192, encoder padded to 192</a:t>
+              <a:t>waiting for launches 98 ms</a:t>
             </a:r>
-            <a:endParaRPr lang="en-US" sz="1200" dirty="0"/>
-          </a:p>
-          <a:p>
-            <a:pPr marL="342900" indent="-342900">
-              <a:buSzPct val="100000"/>
-              <a:buChar char="•"/>
-            </a:pPr>
-            <a:r>
-              <a:rPr lang="en-US" sz="1200" dirty="0">
-                <a:solidFill>
-                  <a:srgbClr val="000000"/>
-                </a:solidFill>
-                <a:latin typeface="NVIDIA Sans" pitchFamily="34" charset="0"/>
-                <a:ea typeface="NVIDIA Sans" pitchFamily="34" charset="-122"/>
-                <a:cs typeface="NVIDIA Sans" pitchFamily="34" charset="-120"/>
-              </a:rPr>
-              <a:t>Sync-free multimodal merge: removed a device-to-host validation readback in the image-token scatter</a:t>
-            </a:r>
-            <a:endParaRPr lang="en-US" sz="1200" dirty="0"/>
+            <a:endParaRPr lang="en-US" sz="1000" dirty="0"/>
           </a:p>
         </p:txBody>
       </p:sp>
       <p:sp>
         <p:nvSpPr>
-          <p:cNvPr id="6" name="Shape 3"/>
-          <p:cNvSpPr/>
-          <p:nvPr/>
-        </p:nvSpPr>
-        <p:spPr>
-          <a:xfrm>
-            <a:off x="4206362" y="3657600"/>
-            <a:ext cx="4480438" cy="658368"/>
-          </a:xfrm>
-          <a:prstGeom prst="rect">
-            <a:avLst/>
-          </a:prstGeom>
-          <a:solidFill>
-            <a:srgbClr val="F5F5F5"/>
-          </a:solidFill>
-          <a:ln/>
-        </p:spPr>
-      </p:sp>
-      <p:sp>
-        <p:nvSpPr>
-          <p:cNvPr id="7" name="Shape 4"/>
-          <p:cNvSpPr/>
-          <p:nvPr/>
-        </p:nvSpPr>
-        <p:spPr>
-          <a:xfrm>
-            <a:off x="4206362" y="3657600"/>
-            <a:ext cx="54864" cy="658368"/>
-          </a:xfrm>
-          <a:prstGeom prst="rect">
-            <a:avLst/>
-          </a:prstGeom>
-          <a:solidFill>
-            <a:srgbClr val="76B900"/>
-          </a:solidFill>
-          <a:ln/>
-        </p:spPr>
-      </p:sp>
-      <p:sp>
-        <p:nvSpPr>
-          <p:cNvPr id="8" name="Text 5"/>
-          <p:cNvSpPr/>
-          <p:nvPr/>
-        </p:nvSpPr>
-        <p:spPr>
-          <a:xfrm>
-            <a:off x="4389242" y="3657600"/>
-            <a:ext cx="4206118" cy="658368"/>
+          <p:cNvPr id="9" name="Text 7"/>
+          <p:cNvSpPr/>
+          <p:nvPr/>
+        </p:nvSpPr>
+        <p:spPr>
+          <a:xfrm>
+            <a:off x="8302752" y="1417320"/>
+            <a:ext cx="822960" cy="384048"/>
           </a:xfrm>
           <a:prstGeom prst="rect">
             <a:avLst/>
@@ -22139,13 +23183,38 @@
                 <a:ea typeface="NVIDIA Sans" pitchFamily="34" charset="-122"/>
                 <a:cs typeface="NVIDIA Sans" pitchFamily="34" charset="-120"/>
               </a:rPr>
-              <a:t>Kernel launches: 13.9k → 6.4k per step. </a:t>
+              <a:t>148 ms</a:t>
             </a:r>
+            <a:endParaRPr lang="en-US" sz="1200" dirty="0"/>
+          </a:p>
+        </p:txBody>
+      </p:sp>
+      <p:sp>
+        <p:nvSpPr>
+          <p:cNvPr id="10" name="Text 8"/>
+          <p:cNvSpPr/>
+          <p:nvPr/>
+        </p:nvSpPr>
+        <p:spPr>
+          <a:xfrm>
+            <a:off x="1920240" y="1819656"/>
+            <a:ext cx="6400800" cy="201168"/>
+          </a:xfrm>
+          <a:prstGeom prst="rect">
+            <a:avLst/>
+          </a:prstGeom>
+          <a:noFill/>
+          <a:ln/>
+        </p:spPr>
+        <p:txBody>
+          <a:bodyPr wrap="square" lIns="0" tIns="0" rIns="0" bIns="0" rtlCol="0" anchor="ctr"/>
+          <a:lstStyle/>
+          <a:p>
             <a:pPr indent="0" marL="0">
               <a:buNone/>
             </a:pPr>
             <a:r>
-              <a:rPr lang="en-US" sz="1200" dirty="0">
+              <a:rPr lang="en-US" sz="950" i="1" dirty="0">
                 <a:solidFill>
                   <a:srgbClr val="5E5E5E"/>
                 </a:solidFill>
@@ -22153,7 +23222,220 @@
                 <a:ea typeface="NVIDIA Sans" pitchFamily="34" charset="-122"/>
                 <a:cs typeface="NVIDIA Sans" pitchFamily="34" charset="-120"/>
               </a:rPr>
-              <a:t>CPU launch cost leaves the critical path; GPU idle collapses.</a:t>
+              <a:t>3,929 kernel launches · 19.1 ms of cudaLaunchKernel CPU time · occupancy 34%</a:t>
+            </a:r>
+            <a:endParaRPr lang="en-US" sz="950" dirty="0"/>
+          </a:p>
+        </p:txBody>
+      </p:sp>
+      <p:sp>
+        <p:nvSpPr>
+          <p:cNvPr id="11" name="Text 9"/>
+          <p:cNvSpPr/>
+          <p:nvPr/>
+        </p:nvSpPr>
+        <p:spPr>
+          <a:xfrm>
+            <a:off x="457200" y="2267712"/>
+            <a:ext cx="1417320" cy="384048"/>
+          </a:xfrm>
+          <a:prstGeom prst="rect">
+            <a:avLst/>
+          </a:prstGeom>
+          <a:noFill/>
+          <a:ln/>
+        </p:spPr>
+        <p:txBody>
+          <a:bodyPr wrap="square" lIns="0" tIns="0" rIns="0" bIns="0" rtlCol="0" anchor="ctr"/>
+          <a:lstStyle/>
+          <a:p>
+            <a:pPr indent="0" marL="0">
+              <a:buNone/>
+            </a:pPr>
+            <a:r>
+              <a:rPr lang="en-US" sz="1100" b="1" dirty="0">
+                <a:solidFill>
+                  <a:srgbClr val="000000"/>
+                </a:solidFill>
+                <a:latin typeface="NVIDIA Sans" pitchFamily="34" charset="0"/>
+                <a:ea typeface="NVIDIA Sans" pitchFamily="34" charset="-122"/>
+                <a:cs typeface="NVIDIA Sans" pitchFamily="34" charset="-120"/>
+              </a:rPr>
+              <a:t>Optimized</a:t>
+            </a:r>
+            <a:endParaRPr lang="en-US" sz="1100" dirty="0"/>
+          </a:p>
+          <a:p>
+            <a:pPr indent="0" marL="0">
+              <a:buNone/>
+            </a:pPr>
+            <a:r>
+              <a:rPr lang="en-US" sz="1100" b="1" dirty="0">
+                <a:solidFill>
+                  <a:srgbClr val="000000"/>
+                </a:solidFill>
+                <a:latin typeface="NVIDIA Sans" pitchFamily="34" charset="0"/>
+                <a:ea typeface="NVIDIA Sans" pitchFamily="34" charset="-122"/>
+                <a:cs typeface="NVIDIA Sans" pitchFamily="34" charset="-120"/>
+              </a:rPr>
+              <a:t>(CUDA Graphs)</a:t>
+            </a:r>
+            <a:endParaRPr lang="en-US" sz="1100" dirty="0"/>
+          </a:p>
+        </p:txBody>
+      </p:sp>
+      <p:sp>
+        <p:nvSpPr>
+          <p:cNvPr id="12" name="Shape 10"/>
+          <p:cNvSpPr/>
+          <p:nvPr/>
+        </p:nvSpPr>
+        <p:spPr>
+          <a:xfrm>
+            <a:off x="1920240" y="2286000"/>
+            <a:ext cx="1577340" cy="384048"/>
+          </a:xfrm>
+          <a:prstGeom prst="rect">
+            <a:avLst/>
+          </a:prstGeom>
+          <a:solidFill>
+            <a:srgbClr val="76B900"/>
+          </a:solidFill>
+          <a:ln/>
+        </p:spPr>
+      </p:sp>
+      <p:sp>
+        <p:nvSpPr>
+          <p:cNvPr id="13" name="Text 11"/>
+          <p:cNvSpPr/>
+          <p:nvPr/>
+        </p:nvSpPr>
+        <p:spPr>
+          <a:xfrm>
+            <a:off x="1920240" y="2286000"/>
+            <a:ext cx="1577340" cy="384048"/>
+          </a:xfrm>
+          <a:prstGeom prst="rect">
+            <a:avLst/>
+          </a:prstGeom>
+          <a:noFill/>
+          <a:ln/>
+        </p:spPr>
+        <p:txBody>
+          <a:bodyPr wrap="square" lIns="0" tIns="0" rIns="0" bIns="0" rtlCol="0" anchor="ctr"/>
+          <a:lstStyle/>
+          <a:p>
+            <a:pPr algn="ctr" indent="0" marL="0">
+              <a:buNone/>
+            </a:pPr>
+            <a:r>
+              <a:rPr lang="en-US" sz="1000" b="1" dirty="0">
+                <a:solidFill>
+                  <a:srgbClr val="FFFFFF"/>
+                </a:solidFill>
+                <a:latin typeface="NVIDIA Sans" pitchFamily="34" charset="0"/>
+                <a:ea typeface="NVIDIA Sans" pitchFamily="34" charset="-122"/>
+                <a:cs typeface="NVIDIA Sans" pitchFamily="34" charset="-120"/>
+              </a:rPr>
+              <a:t>GPU busy 37 ms</a:t>
+            </a:r>
+            <a:endParaRPr lang="en-US" sz="1000" dirty="0"/>
+          </a:p>
+        </p:txBody>
+      </p:sp>
+      <p:sp>
+        <p:nvSpPr>
+          <p:cNvPr id="14" name="Shape 12"/>
+          <p:cNvSpPr/>
+          <p:nvPr/>
+        </p:nvSpPr>
+        <p:spPr>
+          <a:xfrm>
+            <a:off x="3497580" y="2286000"/>
+            <a:ext cx="1193663" cy="384048"/>
+          </a:xfrm>
+          <a:prstGeom prst="rect">
+            <a:avLst/>
+          </a:prstGeom>
+          <a:solidFill>
+            <a:srgbClr val="890C58"/>
+          </a:solidFill>
+          <a:ln/>
+        </p:spPr>
+      </p:sp>
+      <p:sp>
+        <p:nvSpPr>
+          <p:cNvPr id="15" name="Text 13"/>
+          <p:cNvSpPr/>
+          <p:nvPr/>
+        </p:nvSpPr>
+        <p:spPr>
+          <a:xfrm>
+            <a:off x="3497580" y="2286000"/>
+            <a:ext cx="1193663" cy="384048"/>
+          </a:xfrm>
+          <a:prstGeom prst="rect">
+            <a:avLst/>
+          </a:prstGeom>
+          <a:noFill/>
+          <a:ln/>
+        </p:spPr>
+        <p:txBody>
+          <a:bodyPr wrap="square" lIns="0" tIns="0" rIns="0" bIns="0" rtlCol="0" anchor="ctr"/>
+          <a:lstStyle/>
+          <a:p>
+            <a:pPr algn="ctr" indent="0" marL="0">
+              <a:buNone/>
+            </a:pPr>
+            <a:r>
+              <a:rPr lang="en-US" sz="1000" b="1" dirty="0">
+                <a:solidFill>
+                  <a:srgbClr val="FFFFFF"/>
+                </a:solidFill>
+                <a:latin typeface="NVIDIA Sans" pitchFamily="34" charset="0"/>
+                <a:ea typeface="NVIDIA Sans" pitchFamily="34" charset="-122"/>
+                <a:cs typeface="NVIDIA Sans" pitchFamily="34" charset="-120"/>
+              </a:rPr>
+              <a:t>waiting for launches 28 ms</a:t>
+            </a:r>
+            <a:endParaRPr lang="en-US" sz="1000" dirty="0"/>
+          </a:p>
+        </p:txBody>
+      </p:sp>
+      <p:sp>
+        <p:nvSpPr>
+          <p:cNvPr id="16" name="Text 14"/>
+          <p:cNvSpPr/>
+          <p:nvPr/>
+        </p:nvSpPr>
+        <p:spPr>
+          <a:xfrm>
+            <a:off x="4764395" y="2286000"/>
+            <a:ext cx="822960" cy="384048"/>
+          </a:xfrm>
+          <a:prstGeom prst="rect">
+            <a:avLst/>
+          </a:prstGeom>
+          <a:noFill/>
+          <a:ln/>
+        </p:spPr>
+        <p:txBody>
+          <a:bodyPr wrap="square" lIns="0" tIns="0" rIns="0" bIns="0" rtlCol="0" anchor="ctr"/>
+          <a:lstStyle/>
+          <a:p>
+            <a:pPr indent="0" marL="0">
+              <a:buNone/>
+            </a:pPr>
+            <a:r>
+              <a:rPr lang="en-US" sz="1200" b="1" dirty="0">
+                <a:solidFill>
+                  <a:srgbClr val="000000"/>
+                </a:solidFill>
+                <a:latin typeface="NVIDIA Sans" pitchFamily="34" charset="0"/>
+                <a:ea typeface="NVIDIA Sans" pitchFamily="34" charset="-122"/>
+                <a:cs typeface="NVIDIA Sans" pitchFamily="34" charset="-120"/>
+              </a:rPr>
+              <a:t>65 ms</a:t>
             </a:r>
             <a:endParaRPr lang="en-US" sz="1200" dirty="0"/>
           </a:p>
@@ -22161,7 +23443,214 @@
       </p:sp>
       <p:sp>
         <p:nvSpPr>
-          <p:cNvPr id="9" name="Text 6"/>
+          <p:cNvPr id="17" name="Text 15"/>
+          <p:cNvSpPr/>
+          <p:nvPr/>
+        </p:nvSpPr>
+        <p:spPr>
+          <a:xfrm>
+            <a:off x="1920240" y="2688336"/>
+            <a:ext cx="6400800" cy="201168"/>
+          </a:xfrm>
+          <a:prstGeom prst="rect">
+            <a:avLst/>
+          </a:prstGeom>
+          <a:noFill/>
+          <a:ln/>
+        </p:spPr>
+        <p:txBody>
+          <a:bodyPr wrap="square" lIns="0" tIns="0" rIns="0" bIns="0" rtlCol="0" anchor="ctr"/>
+          <a:lstStyle/>
+          <a:p>
+            <a:pPr indent="0" marL="0">
+              <a:buNone/>
+            </a:pPr>
+            <a:r>
+              <a:rPr lang="en-US" sz="950" i="1" dirty="0">
+                <a:solidFill>
+                  <a:srgbClr val="5E5E5E"/>
+                </a:solidFill>
+                <a:latin typeface="NVIDIA Sans" pitchFamily="34" charset="0"/>
+                <a:ea typeface="NVIDIA Sans" pitchFamily="34" charset="-122"/>
+                <a:cs typeface="NVIDIA Sans" pitchFamily="34" charset="-120"/>
+              </a:rPr>
+              <a:t>6 graph launches + 736 eager · 9.4 ms launch CPU · occupancy 57%</a:t>
+            </a:r>
+            <a:endParaRPr lang="en-US" sz="950" dirty="0"/>
+          </a:p>
+        </p:txBody>
+      </p:sp>
+      <p:sp>
+        <p:nvSpPr>
+          <p:cNvPr id="18" name="Text 16"/>
+          <p:cNvSpPr/>
+          <p:nvPr/>
+        </p:nvSpPr>
+        <p:spPr>
+          <a:xfrm>
+            <a:off x="1920240" y="2907792"/>
+            <a:ext cx="6400800" cy="365760"/>
+          </a:xfrm>
+          <a:prstGeom prst="rect">
+            <a:avLst/>
+          </a:prstGeom>
+          <a:noFill/>
+          <a:ln/>
+        </p:spPr>
+        <p:txBody>
+          <a:bodyPr wrap="square" lIns="0" tIns="0" rIns="0" bIns="0" rtlCol="0" anchor="ctr"/>
+          <a:lstStyle/>
+          <a:p>
+            <a:pPr indent="0" marL="0">
+              <a:buNone/>
+            </a:pPr>
+            <a:r>
+              <a:rPr lang="en-US" sz="2400" b="1" dirty="0">
+                <a:solidFill>
+                  <a:srgbClr val="76B900"/>
+                </a:solidFill>
+                <a:latin typeface="NVIDIA Sans" pitchFamily="34" charset="0"/>
+                <a:ea typeface="NVIDIA Sans" pitchFamily="34" charset="-122"/>
+                <a:cs typeface="NVIDIA Sans" pitchFamily="34" charset="-120"/>
+              </a:rPr>
+              <a:t>2.3× </a:t>
+            </a:r>
+            <a:pPr indent="0" marL="0">
+              <a:buNone/>
+            </a:pPr>
+            <a:r>
+              <a:rPr lang="en-US" sz="1300" b="1" dirty="0">
+                <a:solidFill>
+                  <a:srgbClr val="000000"/>
+                </a:solidFill>
+                <a:latin typeface="NVIDIA Sans" pitchFamily="34" charset="0"/>
+                <a:ea typeface="NVIDIA Sans" pitchFamily="34" charset="-122"/>
+                <a:cs typeface="NVIDIA Sans" pitchFamily="34" charset="-120"/>
+              </a:rPr>
+              <a:t>faster forward wall clock — with 81% fewer launches</a:t>
+            </a:r>
+            <a:endParaRPr lang="en-US" sz="2400" dirty="0"/>
+          </a:p>
+        </p:txBody>
+      </p:sp>
+      <p:sp>
+        <p:nvSpPr>
+          <p:cNvPr id="19" name="Text 17"/>
+          <p:cNvSpPr/>
+          <p:nvPr/>
+        </p:nvSpPr>
+        <p:spPr>
+          <a:xfrm>
+            <a:off x="457200" y="3346704"/>
+            <a:ext cx="8229600" cy="822960"/>
+          </a:xfrm>
+          <a:prstGeom prst="rect">
+            <a:avLst/>
+          </a:prstGeom>
+          <a:noFill/>
+          <a:ln/>
+        </p:spPr>
+        <p:txBody>
+          <a:bodyPr wrap="square" lIns="0" tIns="0" rIns="0" bIns="0" rtlCol="0" anchor="t"/>
+          <a:lstStyle/>
+          <a:p>
+            <a:pPr marL="342900" indent="-342900">
+              <a:buSzPct val="100000"/>
+              <a:buChar char="•"/>
+            </a:pPr>
+            <a:r>
+              <a:rPr lang="en-US" sz="1100" dirty="0">
+                <a:solidFill>
+                  <a:srgbClr val="000000"/>
+                </a:solidFill>
+                <a:latin typeface="NVIDIA Sans" pitchFamily="34" charset="0"/>
+                <a:ea typeface="NVIDIA Sans" pitchFamily="34" charset="-122"/>
+                <a:cs typeface="NVIDIA Sans" pitchFamily="34" charset="-120"/>
+              </a:rPr>
+              <a:t>An eager op costs 30–60 µs of Python dispatch + launch; the median kernel runs 8 µs — the GPU finishes before the CPU can feed the next one</a:t>
+            </a:r>
+            <a:endParaRPr lang="en-US" sz="1100" dirty="0"/>
+          </a:p>
+          <a:p>
+            <a:pPr marL="342900" indent="-342900">
+              <a:buSzPct val="100000"/>
+              <a:buChar char="•"/>
+            </a:pPr>
+            <a:r>
+              <a:rPr lang="en-US" sz="1100" dirty="0">
+                <a:solidFill>
+                  <a:srgbClr val="000000"/>
+                </a:solidFill>
+                <a:latin typeface="NVIDIA Sans" pitchFamily="34" charset="0"/>
+                <a:ea typeface="NVIDIA Sans" pitchFamily="34" charset="-122"/>
+                <a:cs typeface="NVIDIA Sans" pitchFamily="34" charset="-120"/>
+              </a:rPr>
+              <a:t>Backward suffers far less (C++ autograd engine, occupancy 70%) — forward is where launch overhead bites</a:t>
+            </a:r>
+            <a:endParaRPr lang="en-US" sz="1100" dirty="0"/>
+          </a:p>
+          <a:p>
+            <a:pPr marL="342900" indent="-342900">
+              <a:buSzPct val="100000"/>
+              <a:buChar char="•"/>
+            </a:pPr>
+            <a:r>
+              <a:rPr lang="en-US" sz="1100" dirty="0">
+                <a:solidFill>
+                  <a:srgbClr val="000000"/>
+                </a:solidFill>
+                <a:latin typeface="NVIDIA Sans" pitchFamily="34" charset="0"/>
+                <a:ea typeface="NVIDIA Sans" pitchFamily="34" charset="-122"/>
+                <a:cs typeface="NVIDIA Sans" pitchFamily="34" charset="-120"/>
+              </a:rPr>
+              <a:t>A CUDA Graph replays an entire 8-layer group as ONE cudaGraphLaunch — per-op dispatch leaves the critical path</a:t>
+            </a:r>
+            <a:endParaRPr lang="en-US" sz="1100" dirty="0"/>
+          </a:p>
+        </p:txBody>
+      </p:sp>
+      <p:sp>
+        <p:nvSpPr>
+          <p:cNvPr id="20" name="Text 18"/>
+          <p:cNvSpPr/>
+          <p:nvPr/>
+        </p:nvSpPr>
+        <p:spPr>
+          <a:xfrm>
+            <a:off x="457200" y="4206240"/>
+            <a:ext cx="8229600" cy="201168"/>
+          </a:xfrm>
+          <a:prstGeom prst="rect">
+            <a:avLst/>
+          </a:prstGeom>
+          <a:noFill/>
+          <a:ln/>
+        </p:spPr>
+        <p:txBody>
+          <a:bodyPr wrap="square" lIns="0" tIns="0" rIns="0" bIns="0" rtlCol="0" anchor="ctr"/>
+          <a:lstStyle/>
+          <a:p>
+            <a:pPr indent="0" marL="0">
+              <a:buNone/>
+            </a:pPr>
+            <a:r>
+              <a:rPr lang="en-US" sz="850" i="1" dirty="0">
+                <a:solidFill>
+                  <a:srgbClr val="8C8C8C"/>
+                </a:solidFill>
+                <a:latin typeface="NVIDIA Sans" pitchFamily="34" charset="0"/>
+                <a:ea typeface="NVIDIA Sans" pitchFamily="34" charset="-122"/>
+                <a:cs typeface="NVIDIA Sans" pitchFamily="34" charset="-120"/>
+              </a:rPr>
+              <a:t>Busy also shrinks 50 → 37 ms (mixed attention + fusion); the split isolates the launch effect. Windows: baseline Qwen3.5 fwd vs merged-main VLM fwd, same launch-window accounting.</a:t>
+            </a:r>
+            <a:endParaRPr lang="en-US" sz="850" dirty="0"/>
+          </a:p>
+        </p:txBody>
+      </p:sp>
+      <p:sp>
+        <p:nvSpPr>
+          <p:cNvPr id="21" name="Text 19"/>
           <p:cNvSpPr/>
           <p:nvPr/>
         </p:nvSpPr>
@@ -22200,7 +23689,7 @@
       </p:sp>
       <p:sp>
         <p:nvSpPr>
-          <p:cNvPr id="10" name="Text 7"/>
+          <p:cNvPr id="22" name="Text 20"/>
           <p:cNvSpPr/>
           <p:nvPr/>
         </p:nvSpPr>
@@ -22239,7 +23728,7 @@
       </p:sp>
       <p:sp>
         <p:nvSpPr>
-          <p:cNvPr id="11" name="Shape 8"/>
+          <p:cNvPr id="23" name="Shape 21"/>
           <p:cNvSpPr/>
           <p:nvPr/>
         </p:nvSpPr>
@@ -22259,14 +23748,14 @@
       </p:sp>
       <p:pic>
         <p:nvPicPr>
-          <p:cNvPr id="12" name="Image 1" descr="/app/logos/nvidia-logo-blk-sm.png">    </p:cNvPr>
+          <p:cNvPr id="24" name="Image 0" descr="/app/logos/nvidia-logo-blk-sm.png">    </p:cNvPr>
           <p:cNvPicPr>
             <a:picLocks noChangeAspect="1"/>
           </p:cNvPicPr>
           <p:nvPr/>
         </p:nvPicPr>
         <p:blipFill>
-          <a:blip r:embed="rId2"/>
+          <a:blip r:embed="rId1"/>
           <a:stretch>
             <a:fillRect/>
           </a:stretch>
@@ -22346,7 +23835,7 @@
                 <a:ea typeface="NVIDIA Sans" pitchFamily="34" charset="-122"/>
                 <a:cs typeface="NVIDIA Sans" pitchFamily="34" charset="-120"/>
               </a:rPr>
-              <a:t>ZeRO-2 Comm Tuning &amp; the Final Ledger</a:t>
+              <a:t>CUDA Graphs — and Why Four, Not One</a:t>
             </a:r>
             <a:endParaRPr lang="en-US" sz="3000" dirty="0"/>
           </a:p>
@@ -22385,22 +23874,46 @@
                 <a:ea typeface="NVIDIA Sans" pitchFamily="34" charset="-122"/>
                 <a:cs typeface="NVIDIA Sans" pitchFamily="34" charset="-120"/>
               </a:rPr>
-              <a:t>271 → 249 ms.  Fewer, larger collectives — and an honest ledger of what remains</a:t>
+              <a:t>398 → 271 ms (−126).  Capture once, replay every step</a:t>
             </a:r>
             <a:endParaRPr lang="en-US" sz="1500" dirty="0"/>
           </a:p>
         </p:txBody>
       </p:sp>
-      <p:sp>
-        <p:nvSpPr>
-          <p:cNvPr id="4" name="Text 2"/>
-          <p:cNvSpPr/>
-          <p:nvPr/>
-        </p:nvSpPr>
-        <p:spPr>
-          <a:xfrm>
-            <a:off x="457200" y="1325880"/>
-            <a:ext cx="8229600" cy="1234440"/>
+      <p:pic>
+        <p:nvPicPr>
+          <p:cNvPr id="4" name="Image 0" descr="/work/tikz-graphs.png">    </p:cNvPr>
+          <p:cNvPicPr>
+            <a:picLocks noChangeAspect="1"/>
+          </p:cNvPicPr>
+          <p:nvPr/>
+        </p:nvPicPr>
+        <p:blipFill>
+          <a:blip r:embed="rId1"/>
+          <a:stretch>
+            <a:fillRect/>
+          </a:stretch>
+        </p:blipFill>
+        <p:spPr>
+          <a:xfrm>
+            <a:off x="457200" y="1371600"/>
+            <a:ext cx="3291962" cy="2834640"/>
+          </a:xfrm>
+          <a:prstGeom prst="rect">
+            <a:avLst/>
+          </a:prstGeom>
+        </p:spPr>
+      </p:pic>
+      <p:sp>
+        <p:nvSpPr>
+          <p:cNvPr id="5" name="Text 2"/>
+          <p:cNvSpPr/>
+          <p:nvPr/>
+        </p:nvSpPr>
+        <p:spPr>
+          <a:xfrm>
+            <a:off x="4206362" y="1371600"/>
+            <a:ext cx="4480438" cy="502920"/>
           </a:xfrm>
           <a:prstGeom prst="rect">
             <a:avLst/>
@@ -22417,7 +23930,46 @@
               <a:buChar char="•"/>
             </a:pPr>
             <a:r>
-              <a:rPr lang="en-US" sz="1200" dirty="0">
+              <a:rPr lang="en-US" sz="1050" dirty="0">
+                <a:solidFill>
+                  <a:srgbClr val="5E5E5E"/>
+                </a:solidFill>
+                <a:latin typeface="NVIDIA Sans" pitchFamily="34" charset="0"/>
+                <a:ea typeface="NVIDIA Sans" pitchFamily="34" charset="-122"/>
+                <a:cs typeface="NVIDIA Sans" pitchFamily="34" charset="-120"/>
+              </a:rPr>
+              <a:t>Static shapes (pad-192) make capture possible; vision tower = 1 graph, DiT = torch.compile reduce-overhead, merge stays sync-free eager</a:t>
+            </a:r>
+            <a:endParaRPr lang="en-US" sz="1050" dirty="0"/>
+          </a:p>
+        </p:txBody>
+      </p:sp>
+      <p:sp>
+        <p:nvSpPr>
+          <p:cNvPr id="6" name="Text 3"/>
+          <p:cNvSpPr/>
+          <p:nvPr/>
+        </p:nvSpPr>
+        <p:spPr>
+          <a:xfrm>
+            <a:off x="4206362" y="1874520"/>
+            <a:ext cx="4480438" cy="274320"/>
+          </a:xfrm>
+          <a:prstGeom prst="rect">
+            <a:avLst/>
+          </a:prstGeom>
+          <a:noFill/>
+          <a:ln/>
+        </p:spPr>
+        <p:txBody>
+          <a:bodyPr wrap="square" lIns="0" tIns="0" rIns="0" bIns="0" rtlCol="0" anchor="ctr"/>
+          <a:lstStyle/>
+          <a:p>
+            <a:pPr indent="0" marL="0">
+              <a:buNone/>
+            </a:pPr>
+            <a:r>
+              <a:rPr lang="en-US" sz="1400" b="1" dirty="0">
                 <a:solidFill>
                   <a:srgbClr val="000000"/>
                 </a:solidFill>
@@ -22425,17 +23977,39 @@
                 <a:ea typeface="NVIDIA Sans" pitchFamily="34" charset="-122"/>
                 <a:cs typeface="NVIDIA Sans" pitchFamily="34" charset="-120"/>
               </a:rPr>
-              <a:t>reduce_bucket_size 5e8 → 1.5e9: 6 gradient AllReduces per step instead of ~20, scoped to this model's config only</a:t>
+              <a:t>Why is the decoder FOUR graphs, not one?</a:t>
             </a:r>
-            <a:endParaRPr lang="en-US" sz="1200" dirty="0"/>
-          </a:p>
+            <a:endParaRPr lang="en-US" sz="1400" dirty="0"/>
+          </a:p>
+        </p:txBody>
+      </p:sp>
+      <p:sp>
+        <p:nvSpPr>
+          <p:cNvPr id="7" name="Text 4"/>
+          <p:cNvSpPr/>
+          <p:nvPr/>
+        </p:nvSpPr>
+        <p:spPr>
+          <a:xfrm>
+            <a:off x="4206362" y="2176272"/>
+            <a:ext cx="4480438" cy="1371600"/>
+          </a:xfrm>
+          <a:prstGeom prst="rect">
+            <a:avLst/>
+          </a:prstGeom>
+          <a:noFill/>
+          <a:ln/>
+        </p:spPr>
+        <p:txBody>
+          <a:bodyPr wrap="square" lIns="0" tIns="0" rIns="0" bIns="0" rtlCol="0" anchor="t"/>
+          <a:lstStyle/>
           <a:p>
             <a:pPr marL="342900" indent="-342900">
               <a:buSzPct val="100000"/>
               <a:buChar char="•"/>
             </a:pPr>
             <a:r>
-              <a:rPr lang="en-US" sz="1200" dirty="0">
+              <a:rPr lang="en-US" sz="1000" dirty="0">
                 <a:solidFill>
                   <a:srgbClr val="000000"/>
                 </a:solidFill>
@@ -22443,9 +24017,9 @@
                 <a:ea typeface="NVIDIA Sans" pitchFamily="34" charset="-122"/>
                 <a:cs typeface="NVIDIA Sans" pitchFamily="34" charset="-120"/>
               </a:rPr>
-              <a:t>reduce_scatter=false: drops DeepSpeed's redundant per-bucket flatten (CatArrayBatchedCopy) ahead of each AllReduce</a:t>
+              <a:t>fla/GDN layers ship @torch.compiler.disable → dynamo graph-breaks: a whole-stack compile fragments into many cudagraph partitions sharing ONE memory pool</a:t>
             </a:r>
-            <a:endParaRPr lang="en-US" sz="1200" dirty="0"/>
+            <a:endParaRPr lang="en-US" sz="1000" dirty="0"/>
           </a:p>
           <a:p>
             <a:pPr marL="342900" indent="-342900">
@@ -22453,7 +24027,7 @@
               <a:buChar char="•"/>
             </a:pPr>
             <a:r>
-              <a:rPr lang="en-US" sz="1200" dirty="0">
+              <a:rPr lang="en-US" sz="1000" dirty="0">
                 <a:solidFill>
                   <a:srgbClr val="000000"/>
                 </a:solidFill>
@@ -22461,38 +24035,17 @@
                 <a:ea typeface="NVIDIA Sans" pitchFamily="34" charset="-122"/>
                 <a:cs typeface="NVIDIA Sans" pitchFamily="34" charset="-120"/>
               </a:rPr>
-              <a:t>Verified NOT bandwidth-bound: AllReduce microbenchmark hits 478 GB/s bus bandwidth — the NVLink per-direction ceiling. The remaining exposed comm can only shrink by sending fewer bytes.</a:t>
+              <a:t>That pool's allocator checkpointing collides with ZeRO-2's gradient-hook NCCL allocations in backward — hard crash on torch 2.6 AND 2.7.1</a:t>
             </a:r>
-            <a:endParaRPr lang="en-US" sz="1200" dirty="0"/>
-          </a:p>
-        </p:txBody>
-      </p:sp>
-      <p:sp>
-        <p:nvSpPr>
-          <p:cNvPr id="5" name="Text 3"/>
-          <p:cNvSpPr/>
-          <p:nvPr/>
-        </p:nvSpPr>
-        <p:spPr>
-          <a:xfrm>
-            <a:off x="457200" y="2697480"/>
-            <a:ext cx="8229600" cy="274320"/>
-          </a:xfrm>
-          <a:prstGeom prst="rect">
-            <a:avLst/>
-          </a:prstGeom>
-          <a:noFill/>
-          <a:ln/>
-        </p:spPr>
-        <p:txBody>
-          <a:bodyPr wrap="square" lIns="0" tIns="0" rIns="0" bIns="0" rtlCol="0" anchor="ctr"/>
-          <a:lstStyle/>
-          <a:p>
-            <a:pPr indent="0" marL="0">
-              <a:buNone/>
+            <a:endParaRPr lang="en-US" sz="1000" dirty="0"/>
+          </a:p>
+          <a:p>
+            <a:pPr marL="342900" indent="-342900">
+              <a:buSzPct val="100000"/>
+              <a:buChar char="•"/>
             </a:pPr>
             <a:r>
-              <a:rPr lang="en-US" sz="1300" b="1" dirty="0">
+              <a:rPr lang="en-US" sz="1000" dirty="0">
                 <a:solidFill>
                   <a:srgbClr val="000000"/>
                 </a:solidFill>
@@ -22500,22 +24053,80 @@
                 <a:ea typeface="NVIDIA Sans" pitchFamily="34" charset="-122"/>
                 <a:cs typeface="NVIDIA Sans" pitchFamily="34" charset="-120"/>
               </a:rPr>
-              <a:t>Per-step time ledger (same accounting, one steady step from each nsys capture)</a:t>
+              <a:t>Four independent compiles = private pools, and gradient hooks fire between replays — backward AllReduce keeps overlapping compute</a:t>
             </a:r>
-            <a:endParaRPr lang="en-US" sz="1300" dirty="0"/>
+            <a:endParaRPr lang="en-US" sz="1000" dirty="0"/>
+          </a:p>
+          <a:p>
+            <a:pPr marL="342900" indent="-342900">
+              <a:buSzPct val="100000"/>
+              <a:buChar char="•"/>
+            </a:pPr>
+            <a:r>
+              <a:rPr lang="en-US" sz="1000" dirty="0">
+                <a:solidFill>
+                  <a:srgbClr val="000000"/>
+                </a:solidFill>
+                <a:latin typeface="NVIDIA Sans" pitchFamily="34" charset="0"/>
+                <a:ea typeface="NVIDIA Sans" pitchFamily="34" charset="-122"/>
+                <a:cs typeface="NVIDIA Sans" pitchFamily="34" charset="-120"/>
+              </a:rPr>
+              <a:t>Cost: 4 launches vs 1 = microseconds. Group size 8 is the measured sweet spot</a:t>
+            </a:r>
+            <a:endParaRPr lang="en-US" sz="1000" dirty="0"/>
           </a:p>
         </p:txBody>
       </p:sp>
       <p:sp>
         <p:nvSpPr>
-          <p:cNvPr id="6" name="Text 4"/>
-          <p:cNvSpPr/>
-          <p:nvPr/>
-        </p:nvSpPr>
-        <p:spPr>
-          <a:xfrm>
-            <a:off x="640080" y="3044952"/>
-            <a:ext cx="1463040" cy="310896"/>
+          <p:cNvPr id="8" name="Shape 5"/>
+          <p:cNvSpPr/>
+          <p:nvPr/>
+        </p:nvSpPr>
+        <p:spPr>
+          <a:xfrm>
+            <a:off x="4206362" y="3785616"/>
+            <a:ext cx="4480438" cy="548640"/>
+          </a:xfrm>
+          <a:prstGeom prst="rect">
+            <a:avLst/>
+          </a:prstGeom>
+          <a:solidFill>
+            <a:srgbClr val="F5F5F5"/>
+          </a:solidFill>
+          <a:ln/>
+        </p:spPr>
+      </p:sp>
+      <p:sp>
+        <p:nvSpPr>
+          <p:cNvPr id="9" name="Shape 6"/>
+          <p:cNvSpPr/>
+          <p:nvPr/>
+        </p:nvSpPr>
+        <p:spPr>
+          <a:xfrm>
+            <a:off x="4206362" y="3785616"/>
+            <a:ext cx="54864" cy="548640"/>
+          </a:xfrm>
+          <a:prstGeom prst="rect">
+            <a:avLst/>
+          </a:prstGeom>
+          <a:solidFill>
+            <a:srgbClr val="76B900"/>
+          </a:solidFill>
+          <a:ln/>
+        </p:spPr>
+      </p:sp>
+      <p:sp>
+        <p:nvSpPr>
+          <p:cNvPr id="10" name="Text 7"/>
+          <p:cNvSpPr/>
+          <p:nvPr/>
+        </p:nvSpPr>
+        <p:spPr>
+          <a:xfrm>
+            <a:off x="4389242" y="3785616"/>
+            <a:ext cx="4206118" cy="548640"/>
           </a:xfrm>
           <a:prstGeom prst="rect">
             <a:avLst/>
@@ -22539,137 +24150,13 @@
                 <a:ea typeface="NVIDIA Sans" pitchFamily="34" charset="-122"/>
                 <a:cs typeface="NVIDIA Sans" pitchFamily="34" charset="-120"/>
               </a:rPr>
-              <a:t>Baseline</a:t>
+              <a:t>Kernel launches: 13.9k → 6.4k per step. </a:t>
             </a:r>
-            <a:endParaRPr lang="en-US" sz="1100" dirty="0"/>
-          </a:p>
-        </p:txBody>
-      </p:sp>
-      <p:sp>
-        <p:nvSpPr>
-          <p:cNvPr id="7" name="Shape 5"/>
-          <p:cNvSpPr/>
-          <p:nvPr/>
-        </p:nvSpPr>
-        <p:spPr>
-          <a:xfrm>
-            <a:off x="2148840" y="3063240"/>
-            <a:ext cx="3605332" cy="310896"/>
-          </a:xfrm>
-          <a:prstGeom prst="rect">
-            <a:avLst/>
-          </a:prstGeom>
-          <a:solidFill>
-            <a:srgbClr val="76B900"/>
-          </a:solidFill>
-          <a:ln/>
-        </p:spPr>
-      </p:sp>
-      <p:sp>
-        <p:nvSpPr>
-          <p:cNvPr id="8" name="Text 6"/>
-          <p:cNvSpPr/>
-          <p:nvPr/>
-        </p:nvSpPr>
-        <p:spPr>
-          <a:xfrm>
-            <a:off x="2148840" y="3063240"/>
-            <a:ext cx="3605332" cy="310896"/>
-          </a:xfrm>
-          <a:prstGeom prst="rect">
-            <a:avLst/>
-          </a:prstGeom>
-          <a:noFill/>
-          <a:ln/>
-        </p:spPr>
-        <p:txBody>
-          <a:bodyPr wrap="square" lIns="0" tIns="0" rIns="0" bIns="0" rtlCol="0" anchor="ctr"/>
-          <a:lstStyle/>
-          <a:p>
-            <a:pPr algn="ctr" indent="0" marL="0">
+            <a:pPr indent="0" marL="0">
               <a:buNone/>
             </a:pPr>
             <a:r>
-              <a:rPr lang="en-US" sz="1000" b="1" dirty="0">
-                <a:solidFill>
-                  <a:srgbClr val="FFFFFF"/>
-                </a:solidFill>
-                <a:latin typeface="NVIDIA Sans" pitchFamily="34" charset="0"/>
-                <a:ea typeface="NVIDIA Sans" pitchFamily="34" charset="-122"/>
-                <a:cs typeface="NVIDIA Sans" pitchFamily="34" charset="-120"/>
-              </a:rPr>
-              <a:t>540</a:t>
-            </a:r>
-            <a:endParaRPr lang="en-US" sz="1000" dirty="0"/>
-          </a:p>
-        </p:txBody>
-      </p:sp>
-      <p:sp>
-        <p:nvSpPr>
-          <p:cNvPr id="9" name="Shape 7"/>
-          <p:cNvSpPr/>
-          <p:nvPr/>
-        </p:nvSpPr>
-        <p:spPr>
-          <a:xfrm>
-            <a:off x="5754172" y="3063240"/>
-            <a:ext cx="411123" cy="310896"/>
-          </a:xfrm>
-          <a:prstGeom prst="rect">
-            <a:avLst/>
-          </a:prstGeom>
-          <a:solidFill>
-            <a:srgbClr val="0071C5"/>
-          </a:solidFill>
-          <a:ln/>
-        </p:spPr>
-      </p:sp>
-      <p:sp>
-        <p:nvSpPr>
-          <p:cNvPr id="10" name="Shape 8"/>
-          <p:cNvSpPr/>
-          <p:nvPr/>
-        </p:nvSpPr>
-        <p:spPr>
-          <a:xfrm>
-            <a:off x="6165295" y="3063240"/>
-            <a:ext cx="1368852" cy="310896"/>
-          </a:xfrm>
-          <a:prstGeom prst="rect">
-            <a:avLst/>
-          </a:prstGeom>
-          <a:solidFill>
-            <a:srgbClr val="D9D9D9"/>
-          </a:solidFill>
-          <a:ln/>
-        </p:spPr>
-      </p:sp>
-      <p:sp>
-        <p:nvSpPr>
-          <p:cNvPr id="11" name="Text 9"/>
-          <p:cNvSpPr/>
-          <p:nvPr/>
-        </p:nvSpPr>
-        <p:spPr>
-          <a:xfrm>
-            <a:off x="6165295" y="3063240"/>
-            <a:ext cx="1368852" cy="310896"/>
-          </a:xfrm>
-          <a:prstGeom prst="rect">
-            <a:avLst/>
-          </a:prstGeom>
-          <a:noFill/>
-          <a:ln/>
-        </p:spPr>
-        <p:txBody>
-          <a:bodyPr wrap="square" lIns="0" tIns="0" rIns="0" bIns="0" rtlCol="0" anchor="ctr"/>
-          <a:lstStyle/>
-          <a:p>
-            <a:pPr algn="ctr" indent="0" marL="0">
-              <a:buNone/>
-            </a:pPr>
-            <a:r>
-              <a:rPr lang="en-US" sz="1000" b="1" dirty="0">
+              <a:rPr lang="en-US" sz="1100" dirty="0">
                 <a:solidFill>
                   <a:srgbClr val="5E5E5E"/>
                 </a:solidFill>
@@ -22677,46 +24164,7 @@
                 <a:ea typeface="NVIDIA Sans" pitchFamily="34" charset="-122"/>
                 <a:cs typeface="NVIDIA Sans" pitchFamily="34" charset="-120"/>
               </a:rPr>
-              <a:t>205</a:t>
-            </a:r>
-            <a:endParaRPr lang="en-US" sz="1000" dirty="0"/>
-          </a:p>
-        </p:txBody>
-      </p:sp>
-      <p:sp>
-        <p:nvSpPr>
-          <p:cNvPr id="12" name="Text 10"/>
-          <p:cNvSpPr/>
-          <p:nvPr/>
-        </p:nvSpPr>
-        <p:spPr>
-          <a:xfrm>
-            <a:off x="7589010" y="3063240"/>
-            <a:ext cx="822960" cy="310896"/>
-          </a:xfrm>
-          <a:prstGeom prst="rect">
-            <a:avLst/>
-          </a:prstGeom>
-          <a:noFill/>
-          <a:ln/>
-        </p:spPr>
-        <p:txBody>
-          <a:bodyPr wrap="square" lIns="0" tIns="0" rIns="0" bIns="0" rtlCol="0" anchor="ctr"/>
-          <a:lstStyle/>
-          <a:p>
-            <a:pPr indent="0" marL="0">
-              <a:buNone/>
-            </a:pPr>
-            <a:r>
-              <a:rPr lang="en-US" sz="1100" b="1" dirty="0">
-                <a:solidFill>
-                  <a:srgbClr val="000000"/>
-                </a:solidFill>
-                <a:latin typeface="NVIDIA Sans" pitchFamily="34" charset="0"/>
-                <a:ea typeface="NVIDIA Sans" pitchFamily="34" charset="-122"/>
-                <a:cs typeface="NVIDIA Sans" pitchFamily="34" charset="-120"/>
-              </a:rPr>
-              <a:t>807 ms</a:t>
+              <a:t>CPU launch cost leaves the critical path; GPU idle collapses.</a:t>
             </a:r>
             <a:endParaRPr lang="en-US" sz="1100" dirty="0"/>
           </a:p>
@@ -22724,400 +24172,7 @@
       </p:sp>
       <p:sp>
         <p:nvSpPr>
-          <p:cNvPr id="13" name="Text 11"/>
-          <p:cNvSpPr/>
-          <p:nvPr/>
-        </p:nvSpPr>
-        <p:spPr>
-          <a:xfrm>
-            <a:off x="640080" y="3502152"/>
-            <a:ext cx="1463040" cy="310896"/>
-          </a:xfrm>
-          <a:prstGeom prst="rect">
-            <a:avLst/>
-          </a:prstGeom>
-          <a:noFill/>
-          <a:ln/>
-        </p:spPr>
-        <p:txBody>
-          <a:bodyPr wrap="square" lIns="0" tIns="0" rIns="0" bIns="0" rtlCol="0" anchor="ctr"/>
-          <a:lstStyle/>
-          <a:p>
-            <a:pPr indent="0" marL="0">
-              <a:buNone/>
-            </a:pPr>
-            <a:r>
-              <a:rPr lang="en-US" sz="1100" b="1" dirty="0">
-                <a:solidFill>
-                  <a:srgbClr val="000000"/>
-                </a:solidFill>
-                <a:latin typeface="NVIDIA Sans" pitchFamily="34" charset="0"/>
-                <a:ea typeface="NVIDIA Sans" pitchFamily="34" charset="-122"/>
-                <a:cs typeface="NVIDIA Sans" pitchFamily="34" charset="-120"/>
-              </a:rPr>
-              <a:t>Optimized</a:t>
-            </a:r>
-            <a:endParaRPr lang="en-US" sz="1100" dirty="0"/>
-          </a:p>
-        </p:txBody>
-      </p:sp>
-      <p:sp>
-        <p:nvSpPr>
-          <p:cNvPr id="14" name="Shape 12"/>
-          <p:cNvSpPr/>
-          <p:nvPr/>
-        </p:nvSpPr>
-        <p:spPr>
-          <a:xfrm>
-            <a:off x="2148840" y="3520440"/>
-            <a:ext cx="1169297" cy="310896"/>
-          </a:xfrm>
-          <a:prstGeom prst="rect">
-            <a:avLst/>
-          </a:prstGeom>
-          <a:solidFill>
-            <a:srgbClr val="76B900"/>
-          </a:solidFill>
-          <a:ln/>
-        </p:spPr>
-      </p:sp>
-      <p:sp>
-        <p:nvSpPr>
-          <p:cNvPr id="15" name="Text 13"/>
-          <p:cNvSpPr/>
-          <p:nvPr/>
-        </p:nvSpPr>
-        <p:spPr>
-          <a:xfrm>
-            <a:off x="2148840" y="3520440"/>
-            <a:ext cx="1169297" cy="310896"/>
-          </a:xfrm>
-          <a:prstGeom prst="rect">
-            <a:avLst/>
-          </a:prstGeom>
-          <a:noFill/>
-          <a:ln/>
-        </p:spPr>
-        <p:txBody>
-          <a:bodyPr wrap="square" lIns="0" tIns="0" rIns="0" bIns="0" rtlCol="0" anchor="ctr"/>
-          <a:lstStyle/>
-          <a:p>
-            <a:pPr algn="ctr" indent="0" marL="0">
-              <a:buNone/>
-            </a:pPr>
-            <a:r>
-              <a:rPr lang="en-US" sz="1000" b="1" dirty="0">
-                <a:solidFill>
-                  <a:srgbClr val="FFFFFF"/>
-                </a:solidFill>
-                <a:latin typeface="NVIDIA Sans" pitchFamily="34" charset="0"/>
-                <a:ea typeface="NVIDIA Sans" pitchFamily="34" charset="-122"/>
-                <a:cs typeface="NVIDIA Sans" pitchFamily="34" charset="-120"/>
-              </a:rPr>
-              <a:t>175</a:t>
-            </a:r>
-            <a:endParaRPr lang="en-US" sz="1000" dirty="0"/>
-          </a:p>
-        </p:txBody>
-      </p:sp>
-      <p:sp>
-        <p:nvSpPr>
-          <p:cNvPr id="16" name="Shape 14"/>
-          <p:cNvSpPr/>
-          <p:nvPr/>
-        </p:nvSpPr>
-        <p:spPr>
-          <a:xfrm>
-            <a:off x="3318137" y="3520440"/>
-            <a:ext cx="148164" cy="310896"/>
-          </a:xfrm>
-          <a:prstGeom prst="rect">
-            <a:avLst/>
-          </a:prstGeom>
-          <a:solidFill>
-            <a:srgbClr val="0071C5"/>
-          </a:solidFill>
-          <a:ln/>
-        </p:spPr>
-      </p:sp>
-      <p:sp>
-        <p:nvSpPr>
-          <p:cNvPr id="17" name="Shape 15"/>
-          <p:cNvSpPr/>
-          <p:nvPr/>
-        </p:nvSpPr>
-        <p:spPr>
-          <a:xfrm>
-            <a:off x="3466301" y="3520440"/>
-            <a:ext cx="289655" cy="310896"/>
-          </a:xfrm>
-          <a:prstGeom prst="rect">
-            <a:avLst/>
-          </a:prstGeom>
-          <a:solidFill>
-            <a:srgbClr val="D9D9D9"/>
-          </a:solidFill>
-          <a:ln/>
-        </p:spPr>
-      </p:sp>
-      <p:sp>
-        <p:nvSpPr>
-          <p:cNvPr id="18" name="Text 16"/>
-          <p:cNvSpPr/>
-          <p:nvPr/>
-        </p:nvSpPr>
-        <p:spPr>
-          <a:xfrm>
-            <a:off x="3810820" y="3520440"/>
-            <a:ext cx="822960" cy="310896"/>
-          </a:xfrm>
-          <a:prstGeom prst="rect">
-            <a:avLst/>
-          </a:prstGeom>
-          <a:noFill/>
-          <a:ln/>
-        </p:spPr>
-        <p:txBody>
-          <a:bodyPr wrap="square" lIns="0" tIns="0" rIns="0" bIns="0" rtlCol="0" anchor="ctr"/>
-          <a:lstStyle/>
-          <a:p>
-            <a:pPr indent="0" marL="0">
-              <a:buNone/>
-            </a:pPr>
-            <a:r>
-              <a:rPr lang="en-US" sz="1100" b="1" dirty="0">
-                <a:solidFill>
-                  <a:srgbClr val="000000"/>
-                </a:solidFill>
-                <a:latin typeface="NVIDIA Sans" pitchFamily="34" charset="0"/>
-                <a:ea typeface="NVIDIA Sans" pitchFamily="34" charset="-122"/>
-                <a:cs typeface="NVIDIA Sans" pitchFamily="34" charset="-120"/>
-              </a:rPr>
-              <a:t>249 ms</a:t>
-            </a:r>
-            <a:endParaRPr lang="en-US" sz="1100" dirty="0"/>
-          </a:p>
-        </p:txBody>
-      </p:sp>
-      <p:sp>
-        <p:nvSpPr>
-          <p:cNvPr id="19" name="Shape 17"/>
-          <p:cNvSpPr/>
-          <p:nvPr/>
-        </p:nvSpPr>
-        <p:spPr>
-          <a:xfrm>
-            <a:off x="2148840" y="4005072"/>
-            <a:ext cx="164592" cy="128016"/>
-          </a:xfrm>
-          <a:prstGeom prst="rect">
-            <a:avLst/>
-          </a:prstGeom>
-          <a:solidFill>
-            <a:srgbClr val="76B900"/>
-          </a:solidFill>
-          <a:ln/>
-        </p:spPr>
-      </p:sp>
-      <p:sp>
-        <p:nvSpPr>
-          <p:cNvPr id="20" name="Text 18"/>
-          <p:cNvSpPr/>
-          <p:nvPr/>
-        </p:nvSpPr>
-        <p:spPr>
-          <a:xfrm>
-            <a:off x="2368296" y="3931920"/>
-            <a:ext cx="1600200" cy="274320"/>
-          </a:xfrm>
-          <a:prstGeom prst="rect">
-            <a:avLst/>
-          </a:prstGeom>
-          <a:noFill/>
-          <a:ln/>
-        </p:spPr>
-        <p:txBody>
-          <a:bodyPr wrap="square" lIns="0" tIns="0" rIns="0" bIns="0" rtlCol="0" anchor="ctr"/>
-          <a:lstStyle/>
-          <a:p>
-            <a:pPr indent="0" marL="0">
-              <a:buNone/>
-            </a:pPr>
-            <a:r>
-              <a:rPr lang="en-US" sz="1000" dirty="0">
-                <a:solidFill>
-                  <a:srgbClr val="5E5E5E"/>
-                </a:solidFill>
-                <a:latin typeface="NVIDIA Sans" pitchFamily="34" charset="0"/>
-                <a:ea typeface="NVIDIA Sans" pitchFamily="34" charset="-122"/>
-                <a:cs typeface="NVIDIA Sans" pitchFamily="34" charset="-120"/>
-              </a:rPr>
-              <a:t>Compute busy</a:t>
-            </a:r>
-            <a:endParaRPr lang="en-US" sz="1000" dirty="0"/>
-          </a:p>
-        </p:txBody>
-      </p:sp>
-      <p:sp>
-        <p:nvSpPr>
-          <p:cNvPr id="21" name="Shape 19"/>
-          <p:cNvSpPr/>
-          <p:nvPr/>
-        </p:nvSpPr>
-        <p:spPr>
-          <a:xfrm>
-            <a:off x="3977640" y="4005072"/>
-            <a:ext cx="164592" cy="128016"/>
-          </a:xfrm>
-          <a:prstGeom prst="rect">
-            <a:avLst/>
-          </a:prstGeom>
-          <a:solidFill>
-            <a:srgbClr val="0071C5"/>
-          </a:solidFill>
-          <a:ln/>
-        </p:spPr>
-      </p:sp>
-      <p:sp>
-        <p:nvSpPr>
-          <p:cNvPr id="22" name="Text 20"/>
-          <p:cNvSpPr/>
-          <p:nvPr/>
-        </p:nvSpPr>
-        <p:spPr>
-          <a:xfrm>
-            <a:off x="4197096" y="3931920"/>
-            <a:ext cx="1600200" cy="274320"/>
-          </a:xfrm>
-          <a:prstGeom prst="rect">
-            <a:avLst/>
-          </a:prstGeom>
-          <a:noFill/>
-          <a:ln/>
-        </p:spPr>
-        <p:txBody>
-          <a:bodyPr wrap="square" lIns="0" tIns="0" rIns="0" bIns="0" rtlCol="0" anchor="ctr"/>
-          <a:lstStyle/>
-          <a:p>
-            <a:pPr indent="0" marL="0">
-              <a:buNone/>
-            </a:pPr>
-            <a:r>
-              <a:rPr lang="en-US" sz="1000" dirty="0">
-                <a:solidFill>
-                  <a:srgbClr val="5E5E5E"/>
-                </a:solidFill>
-                <a:latin typeface="NVIDIA Sans" pitchFamily="34" charset="0"/>
-                <a:ea typeface="NVIDIA Sans" pitchFamily="34" charset="-122"/>
-                <a:cs typeface="NVIDIA Sans" pitchFamily="34" charset="-120"/>
-              </a:rPr>
-              <a:t>Exposed comm</a:t>
-            </a:r>
-            <a:endParaRPr lang="en-US" sz="1000" dirty="0"/>
-          </a:p>
-        </p:txBody>
-      </p:sp>
-      <p:sp>
-        <p:nvSpPr>
-          <p:cNvPr id="23" name="Shape 21"/>
-          <p:cNvSpPr/>
-          <p:nvPr/>
-        </p:nvSpPr>
-        <p:spPr>
-          <a:xfrm>
-            <a:off x="5806440" y="4005072"/>
-            <a:ext cx="164592" cy="128016"/>
-          </a:xfrm>
-          <a:prstGeom prst="rect">
-            <a:avLst/>
-          </a:prstGeom>
-          <a:solidFill>
-            <a:srgbClr val="D9D9D9"/>
-          </a:solidFill>
-          <a:ln/>
-        </p:spPr>
-      </p:sp>
-      <p:sp>
-        <p:nvSpPr>
-          <p:cNvPr id="24" name="Text 22"/>
-          <p:cNvSpPr/>
-          <p:nvPr/>
-        </p:nvSpPr>
-        <p:spPr>
-          <a:xfrm>
-            <a:off x="6025896" y="3931920"/>
-            <a:ext cx="1600200" cy="274320"/>
-          </a:xfrm>
-          <a:prstGeom prst="rect">
-            <a:avLst/>
-          </a:prstGeom>
-          <a:noFill/>
-          <a:ln/>
-        </p:spPr>
-        <p:txBody>
-          <a:bodyPr wrap="square" lIns="0" tIns="0" rIns="0" bIns="0" rtlCol="0" anchor="ctr"/>
-          <a:lstStyle/>
-          <a:p>
-            <a:pPr indent="0" marL="0">
-              <a:buNone/>
-            </a:pPr>
-            <a:r>
-              <a:rPr lang="en-US" sz="1000" dirty="0">
-                <a:solidFill>
-                  <a:srgbClr val="5E5E5E"/>
-                </a:solidFill>
-                <a:latin typeface="NVIDIA Sans" pitchFamily="34" charset="0"/>
-                <a:ea typeface="NVIDIA Sans" pitchFamily="34" charset="-122"/>
-                <a:cs typeface="NVIDIA Sans" pitchFamily="34" charset="-120"/>
-              </a:rPr>
-              <a:t>Idle / launch gaps</a:t>
-            </a:r>
-            <a:endParaRPr lang="en-US" sz="1000" dirty="0"/>
-          </a:p>
-        </p:txBody>
-      </p:sp>
-      <p:sp>
-        <p:nvSpPr>
-          <p:cNvPr id="25" name="Text 23"/>
-          <p:cNvSpPr/>
-          <p:nvPr/>
-        </p:nvSpPr>
-        <p:spPr>
-          <a:xfrm>
-            <a:off x="457200" y="4224528"/>
-            <a:ext cx="8229600" cy="228600"/>
-          </a:xfrm>
-          <a:prstGeom prst="rect">
-            <a:avLst/>
-          </a:prstGeom>
-          <a:noFill/>
-          <a:ln/>
-        </p:spPr>
-        <p:txBody>
-          <a:bodyPr wrap="square" lIns="0" tIns="0" rIns="0" bIns="0" rtlCol="0" anchor="ctr"/>
-          <a:lstStyle/>
-          <a:p>
-            <a:pPr indent="0" marL="0">
-              <a:buNone/>
-            </a:pPr>
-            <a:r>
-              <a:rPr lang="en-US" sz="950" i="1" dirty="0">
-                <a:solidFill>
-                  <a:srgbClr val="8C8C8C"/>
-                </a:solidFill>
-                <a:latin typeface="NVIDIA Sans" pitchFamily="34" charset="0"/>
-                <a:ea typeface="NVIDIA Sans" pitchFamily="34" charset="-122"/>
-                <a:cs typeface="NVIDIA Sans" pitchFamily="34" charset="-120"/>
-              </a:rPr>
-              <a:t>Gradient AllReduce 15.1 GB/step + optimizer AllGather 15.1 GB/step (bf16). Idle from 254 ms to 43 ms.</a:t>
-            </a:r>
-            <a:endParaRPr lang="en-US" sz="950" dirty="0"/>
-          </a:p>
-        </p:txBody>
-      </p:sp>
-      <p:sp>
-        <p:nvSpPr>
-          <p:cNvPr id="26" name="Text 24"/>
+          <p:cNvPr id="11" name="Text 8"/>
           <p:cNvSpPr/>
           <p:nvPr/>
         </p:nvSpPr>
@@ -23156,7 +24211,7 @@
       </p:sp>
       <p:sp>
         <p:nvSpPr>
-          <p:cNvPr id="27" name="Text 25"/>
+          <p:cNvPr id="12" name="Text 9"/>
           <p:cNvSpPr/>
           <p:nvPr/>
         </p:nvSpPr>
@@ -23195,7 +24250,7 @@
       </p:sp>
       <p:sp>
         <p:nvSpPr>
-          <p:cNvPr id="28" name="Shape 26"/>
+          <p:cNvPr id="13" name="Shape 10"/>
           <p:cNvSpPr/>
           <p:nvPr/>
         </p:nvSpPr>
@@ -23215,14 +24270,14 @@
       </p:sp>
       <p:pic>
         <p:nvPicPr>
-          <p:cNvPr id="29" name="Image 0" descr="/app/logos/nvidia-logo-blk-sm.png">    </p:cNvPr>
+          <p:cNvPr id="14" name="Image 1" descr="/app/logos/nvidia-logo-blk-sm.png">    </p:cNvPr>
           <p:cNvPicPr>
             <a:picLocks noChangeAspect="1"/>
           </p:cNvPicPr>
           <p:nvPr/>
         </p:nvPicPr>
         <p:blipFill>
-          <a:blip r:embed="rId1"/>
+          <a:blip r:embed="rId2"/>
           <a:stretch>
             <a:fillRect/>
           </a:stretch>

--- a/docs/slides/qwenpi-optimization.pptx
+++ b/docs/slides/qwenpi-optimization.pptx
@@ -18,9 +18,10 @@
     <p:sldId id="266" r:id="rId12"/>
     <p:sldId id="267" r:id="rId13"/>
     <p:sldId id="268" r:id="rId14"/>
+    <p:sldId id="269" r:id="rId15"/>
   </p:sldIdLst>
   <p:notesMasterIdLst>
-    <p:notesMasterId r:id="rId15"/>
+    <p:notesMasterId r:id="rId16"/>
   </p:notesMasterIdLst>
   <p:sldSz cx="9144000" cy="5143500"/>
   <p:notesSz cx="5143500" cy="9144000"/>
@@ -3354,8 +3355,9 @@
           <a:p>
             <a:r>
               <a:rPr lang="en-US" dirty="0"/>
-              <a:t>Ledger method: exposed comm = NCCL busy while no compute kernel runs; idle = nothing on any stream.
-Remaining exposed comm is gradient-readiness-bound, not hook- or bandwidth-bound — verified by intervention experiments.</a:t>
+              <a:t>Graph capture preserves exact hidden-state semantics - verified fullgraph fwd+bwd and unchanged loss trajectory.
+If pressed on details: a whole-stack compile also fails outright here (fla graph-breaks fragment it into cudagraph partitions sharing one memory pool, whose allocator checkpointing collides with ZeRO-2 hook NCCL allocations - crash on torch 2.6 and 2.7.1). Keep it at 'engineering constraints' unless the audience digs.
+Group size 8 = measured sweet spot; 4 replays vs 1 costs microseconds.</a:t>
             </a:r>
             <a:endParaRPr lang="en-US" dirty="0"/>
           </a:p>
@@ -3443,7 +3445,8 @@
           <a:p>
             <a:r>
               <a:rPr lang="en-US" dirty="0"/>
-              <a:t>[IMPORTANT] Recommendation: bs 24 is the throughput config, gated on customer-side convergence validation (lr recalibration).</a:t>
+              <a:t>Ledger method: exposed comm = NCCL busy while no compute kernel runs; idle = nothing on any stream.
+Remaining exposed comm is gradient-readiness-bound, not hook- or bandwidth-bound — verified by intervention experiments.</a:t>
             </a:r>
             <a:endParaRPr lang="en-US" dirty="0"/>
           </a:p>
@@ -3531,7 +3534,7 @@
           <a:p>
             <a:r>
               <a:rPr lang="en-US" dirty="0"/>
-              <a:t>This slide is the credibility anchor: what we did NOT ship is as evidence-based as what we did.</a:t>
+              <a:t>[IMPORTANT] Recommendation: bs 24 is the throughput config, gated on customer-side convergence validation (lr recalibration).</a:t>
             </a:r>
             <a:endParaRPr lang="en-US" dirty="0"/>
           </a:p>
@@ -3619,8 +3622,7 @@
           <a:p>
             <a:r>
               <a:rPr lang="en-US" dirty="0"/>
-              <a:t>Everything shipped is one MR per optimization with measured before/after — the repo history is the reproducibility story.
-[IMPORTANT] Close: 3.2x is banked; the roadmap above is how we keep going.</a:t>
+              <a:t>This slide is the credibility anchor: what we did NOT ship is as evidence-based as what we did.</a:t>
             </a:r>
             <a:endParaRPr lang="en-US" dirty="0"/>
           </a:p>
@@ -3644,6 +3646,95 @@
             <a:fld id="{F7021451-1387-4CA6-816F-3879F97B5CBC}" type="slidenum">
               <a:rPr lang="en-US"/>
               <a:t>13</a:t>
+            </a:fld>
+            <a:endParaRPr lang="en-US"/>
+          </a:p>
+        </p:txBody>
+      </p:sp>
+    </p:spTree>
+    <p:extLst>
+      <p:ext uri="{BB962C8B-B14F-4D97-AF65-F5344CB8AC3E}">
+        <p14:creationId xmlns:p14="http://schemas.microsoft.com/office/powerpoint/2010/main" val="1024086991"/>
+      </p:ext>
+    </p:extLst>
+  </p:cSld>
+  <p:clrMapOvr>
+    <a:masterClrMapping/>
+  </p:clrMapOvr>
+</p:notes>
+</file>
+
+<file path=ppt/notesSlides/notesSlide14.xml><?xml version="1.0" encoding="utf-8"?>
+<p:notes xmlns:a="http://schemas.openxmlformats.org/drawingml/2006/main" xmlns:r="http://schemas.openxmlformats.org/officeDocument/2006/relationships" xmlns:p="http://schemas.openxmlformats.org/presentationml/2006/main">
+  <p:cSld>
+    <p:spTree>
+      <p:nvGrpSpPr>
+        <p:cNvPr id="1" name=""/>
+        <p:cNvGrpSpPr/>
+        <p:nvPr/>
+      </p:nvGrpSpPr>
+      <p:grpSpPr>
+        <a:xfrm>
+          <a:off x="0" y="0"/>
+          <a:ext cx="0" cy="0"/>
+          <a:chOff x="0" y="0"/>
+          <a:chExt cx="0" cy="0"/>
+        </a:xfrm>
+      </p:grpSpPr>
+      <p:sp>
+        <p:nvSpPr>
+          <p:cNvPr id="2" name="Slide Image Placeholder 1"/>
+          <p:cNvSpPr>
+            <a:spLocks noGrp="1" noRot="1" noChangeAspect="1"/>
+          </p:cNvSpPr>
+          <p:nvPr>
+            <p:ph type="sldImg"/>
+          </p:nvPr>
+        </p:nvSpPr>
+        <p:spPr/>
+      </p:sp>
+      <p:sp>
+        <p:nvSpPr>
+          <p:cNvPr id="3" name="Notes Placeholder 2"/>
+          <p:cNvSpPr>
+            <a:spLocks noGrp="1"/>
+          </p:cNvSpPr>
+          <p:nvPr>
+            <p:ph type="body" idx="1"/>
+          </p:nvPr>
+        </p:nvSpPr>
+        <p:spPr/>
+        <p:txBody>
+          <a:bodyPr/>
+          <a:lstStyle/>
+          <a:p>
+            <a:r>
+              <a:rPr lang="en-US" dirty="0"/>
+              <a:t>Everything shipped is one MR per optimization with measured before/after — the repo history is the reproducibility story.
+[IMPORTANT] Close: 3.2x is banked; the roadmap above is how we keep going.</a:t>
+            </a:r>
+            <a:endParaRPr lang="en-US" dirty="0"/>
+          </a:p>
+        </p:txBody>
+      </p:sp>
+      <p:sp>
+        <p:nvSpPr>
+          <p:cNvPr id="4" name="Slide Number Placeholder 3"/>
+          <p:cNvSpPr>
+            <a:spLocks noGrp="1"/>
+          </p:cNvSpPr>
+          <p:nvPr>
+            <p:ph type="sldNum" sz="quarter" idx="10"/>
+          </p:nvPr>
+        </p:nvSpPr>
+        <p:spPr/>
+        <p:txBody>
+          <a:bodyPr/>
+          <a:lstStyle/>
+          <a:p>
+            <a:fld id="{F7021451-1387-4CA6-816F-3879F97B5CBC}" type="slidenum">
+              <a:rPr lang="en-US"/>
+              <a:t>14</a:t>
             </a:fld>
             <a:endParaRPr lang="en-US"/>
           </a:p>
@@ -4155,8 +4246,8 @@
           <a:p>
             <a:r>
               <a:rPr lang="en-US" dirty="0"/>
-              <a:t>Idle quantification from the instrumented baseline: 205 ms/step total idle - ~40 ms preprocessing gap at step start, plus sync stalls and launch gaps.
-Schematic is illustrative; proportions follow the measured trace (preprocess ~40 ms of a 807 ms step at baseline, fully hidden after.</a:t>
+              <a:t>All three sync points are CPU work serialized inside forward: data parsing at the top, ViT rotary/positional embedding, and MRoPE position ids between ViT and decoder.
+Stall sizes from the instrumented baseline; the timeline is a schematic, proportions follow the trace.</a:t>
             </a:r>
             <a:endParaRPr lang="en-US" dirty="0"/>
           </a:p>
@@ -4244,8 +4335,8 @@
           <a:p>
             <a:r>
               <a:rPr lang="en-US" dirty="0"/>
-              <a:t>Baseline: qwenpi_baseline_nvtx train_step_33; optimized: milestone1 train_step_48. Launch-window attribution both sides.
-[IMPORTANT] This page motivates graphs with the customer's own trace numbers; the next page is the design and the 4-vs-1 answer.</a:t>
+              <a:t>Idle quantification from the instrumented baseline: 205 ms/step total idle - ~40 ms preprocessing gap at step start, plus sync stalls and launch gaps.
+Schematic is illustrative; proportions follow the measured trace (preprocess ~40 ms of a 807 ms step at baseline, fully hidden after.</a:t>
             </a:r>
             <a:endParaRPr lang="en-US" dirty="0"/>
           </a:p>
@@ -4333,8 +4424,8 @@
           <a:p>
             <a:r>
               <a:rPr lang="en-US" dirty="0"/>
-              <a:t>Graph capture preserves exact hidden-state semantics — verified fullgraph fwd+bwd and unchanged loss trajectory.
-Group size 8 balances capture memory against launch savings; per-layer compile was ported but the fused graphs replaced it.</a:t>
+              <a:t>Baseline: qwenpi_baseline_nvtx train_step_33; optimized: milestone1 train_step_48. Launch-window attribution both sides.
+[IMPORTANT] This page motivates graphs with the customer's own trace numbers; the next page is the design and the 4-vs-1 answer.</a:t>
             </a:r>
             <a:endParaRPr lang="en-US" dirty="0"/>
           </a:p>
@@ -4914,7 +5005,7 @@
                 <a:ea typeface="NVIDIA Sans" pitchFamily="34" charset="-122"/>
                 <a:cs typeface="NVIDIA Sans" pitchFamily="34" charset="-120"/>
               </a:rPr>
-              <a:t>ZeRO-2 Comm Tuning &amp; the Final Ledger</a:t>
+              <a:t>CUDA Graphs — and Why Four, Not One</a:t>
             </a:r>
             <a:endParaRPr lang="en-US" sz="3000" dirty="0"/>
           </a:p>
@@ -4953,22 +5044,46 @@
                 <a:ea typeface="NVIDIA Sans" pitchFamily="34" charset="-122"/>
                 <a:cs typeface="NVIDIA Sans" pitchFamily="34" charset="-120"/>
               </a:rPr>
-              <a:t>271 → 249 ms.  Fewer, larger collectives — and an honest ledger of what remains</a:t>
+              <a:t>398 → 271 ms (−126).  Capture once, replay every step</a:t>
             </a:r>
             <a:endParaRPr lang="en-US" sz="1500" dirty="0"/>
           </a:p>
         </p:txBody>
       </p:sp>
-      <p:sp>
-        <p:nvSpPr>
-          <p:cNvPr id="4" name="Text 2"/>
-          <p:cNvSpPr/>
-          <p:nvPr/>
-        </p:nvSpPr>
-        <p:spPr>
-          <a:xfrm>
-            <a:off x="457200" y="1325880"/>
-            <a:ext cx="8229600" cy="1234440"/>
+      <p:pic>
+        <p:nvPicPr>
+          <p:cNvPr id="4" name="Image 0" descr="/work/tikz-graphs.png">    </p:cNvPr>
+          <p:cNvPicPr>
+            <a:picLocks noChangeAspect="1"/>
+          </p:cNvPicPr>
+          <p:nvPr/>
+        </p:nvPicPr>
+        <p:blipFill>
+          <a:blip r:embed="rId1"/>
+          <a:stretch>
+            <a:fillRect/>
+          </a:stretch>
+        </p:blipFill>
+        <p:spPr>
+          <a:xfrm>
+            <a:off x="457200" y="1371600"/>
+            <a:ext cx="3291962" cy="2834640"/>
+          </a:xfrm>
+          <a:prstGeom prst="rect">
+            <a:avLst/>
+          </a:prstGeom>
+        </p:spPr>
+      </p:pic>
+      <p:sp>
+        <p:nvSpPr>
+          <p:cNvPr id="5" name="Text 2"/>
+          <p:cNvSpPr/>
+          <p:nvPr/>
+        </p:nvSpPr>
+        <p:spPr>
+          <a:xfrm>
+            <a:off x="4206362" y="1371600"/>
+            <a:ext cx="4480438" cy="502920"/>
           </a:xfrm>
           <a:prstGeom prst="rect">
             <a:avLst/>
@@ -4985,7 +5100,46 @@
               <a:buChar char="•"/>
             </a:pPr>
             <a:r>
-              <a:rPr lang="en-US" sz="1200" dirty="0">
+              <a:rPr lang="en-US" sz="1050" dirty="0">
+                <a:solidFill>
+                  <a:srgbClr val="5E5E5E"/>
+                </a:solidFill>
+                <a:latin typeface="NVIDIA Sans" pitchFamily="34" charset="0"/>
+                <a:ea typeface="NVIDIA Sans" pitchFamily="34" charset="-122"/>
+                <a:cs typeface="NVIDIA Sans" pitchFamily="34" charset="-120"/>
+              </a:rPr>
+              <a:t>Static shapes (pad-192) make capture possible; vision tower = 1 graph, DiT = torch.compile reduce-overhead, merge stays sync-free eager</a:t>
+            </a:r>
+            <a:endParaRPr lang="en-US" sz="1050" dirty="0"/>
+          </a:p>
+        </p:txBody>
+      </p:sp>
+      <p:sp>
+        <p:nvSpPr>
+          <p:cNvPr id="6" name="Text 3"/>
+          <p:cNvSpPr/>
+          <p:nvPr/>
+        </p:nvSpPr>
+        <p:spPr>
+          <a:xfrm>
+            <a:off x="4206362" y="1874520"/>
+            <a:ext cx="4480438" cy="274320"/>
+          </a:xfrm>
+          <a:prstGeom prst="rect">
+            <a:avLst/>
+          </a:prstGeom>
+          <a:noFill/>
+          <a:ln/>
+        </p:spPr>
+        <p:txBody>
+          <a:bodyPr wrap="square" lIns="0" tIns="0" rIns="0" bIns="0" rtlCol="0" anchor="ctr"/>
+          <a:lstStyle/>
+          <a:p>
+            <a:pPr indent="0" marL="0">
+              <a:buNone/>
+            </a:pPr>
+            <a:r>
+              <a:rPr lang="en-US" sz="1400" b="1" dirty="0">
                 <a:solidFill>
                   <a:srgbClr val="000000"/>
                 </a:solidFill>
@@ -4993,17 +5147,38 @@
                 <a:ea typeface="NVIDIA Sans" pitchFamily="34" charset="-122"/>
                 <a:cs typeface="NVIDIA Sans" pitchFamily="34" charset="-120"/>
               </a:rPr>
-              <a:t>reduce_bucket_size 5e8 → 1.5e9: 6 gradient AllReduces per step instead of ~20, scoped to this model's config only</a:t>
-            </a:r>
-            <a:endParaRPr lang="en-US" sz="1200" dirty="0"/>
-          </a:p>
-          <a:p>
-            <a:pPr marL="342900" indent="-342900">
-              <a:buSzPct val="100000"/>
-              <a:buChar char="•"/>
+              <a:t>Why is the decoder FOUR graphs, not one?</a:t>
+            </a:r>
+            <a:endParaRPr lang="en-US" sz="1400" dirty="0"/>
+          </a:p>
+        </p:txBody>
+      </p:sp>
+      <p:sp>
+        <p:nvSpPr>
+          <p:cNvPr id="7" name="Text 4"/>
+          <p:cNvSpPr/>
+          <p:nvPr/>
+        </p:nvSpPr>
+        <p:spPr>
+          <a:xfrm>
+            <a:off x="4206362" y="2139696"/>
+            <a:ext cx="4480438" cy="329184"/>
+          </a:xfrm>
+          <a:prstGeom prst="rect">
+            <a:avLst/>
+          </a:prstGeom>
+          <a:noFill/>
+          <a:ln/>
+        </p:spPr>
+        <p:txBody>
+          <a:bodyPr wrap="square" lIns="0" tIns="0" rIns="0" bIns="0" rtlCol="0" anchor="t"/>
+          <a:lstStyle/>
+          <a:p>
+            <a:pPr indent="0" marL="0">
+              <a:buNone/>
             </a:pPr>
             <a:r>
-              <a:rPr lang="en-US" sz="1200" dirty="0">
+              <a:rPr lang="en-US" sz="1050" b="1" dirty="0">
                 <a:solidFill>
                   <a:srgbClr val="000000"/>
                 </a:solidFill>
@@ -5011,17 +5186,13 @@
                 <a:ea typeface="NVIDIA Sans" pitchFamily="34" charset="-122"/>
                 <a:cs typeface="NVIDIA Sans" pitchFamily="34" charset="-120"/>
               </a:rPr>
-              <a:t>reduce_scatter=false: drops DeepSpeed's redundant per-bucket flatten (CatArrayBatchedCopy) ahead of each AllReduce</a:t>
-            </a:r>
-            <a:endParaRPr lang="en-US" sz="1200" dirty="0"/>
-          </a:p>
-          <a:p>
-            <a:pPr marL="342900" indent="-342900">
-              <a:buSzPct val="100000"/>
-              <a:buChar char="•"/>
+              <a:t>DeepSpeed's compute-comm overlap must survive: </a:t>
+            </a:r>
+            <a:pPr indent="0" marL="0">
+              <a:buNone/>
             </a:pPr>
             <a:r>
-              <a:rPr lang="en-US" sz="1200" dirty="0">
+              <a:rPr lang="en-US" sz="1050" dirty="0">
                 <a:solidFill>
                   <a:srgbClr val="000000"/>
                 </a:solidFill>
@@ -5029,22 +5200,22 @@
                 <a:ea typeface="NVIDIA Sans" pitchFamily="34" charset="-122"/>
                 <a:cs typeface="NVIDIA Sans" pitchFamily="34" charset="-120"/>
               </a:rPr>
-              <a:t>Verified NOT bandwidth-bound: AllReduce microbenchmark hits 478 GB/s bus bandwidth — the NVLink per-direction ceiling. The remaining exposed comm can only shrink by sending fewer bytes.</a:t>
-            </a:r>
-            <a:endParaRPr lang="en-US" sz="1200" dirty="0"/>
+              <a:t>AllReduce hooks fire only BETWEEN replays — never inside one.</a:t>
+            </a:r>
+            <a:endParaRPr lang="en-US" sz="1050" dirty="0"/>
           </a:p>
         </p:txBody>
       </p:sp>
       <p:sp>
         <p:nvSpPr>
-          <p:cNvPr id="5" name="Text 3"/>
-          <p:cNvSpPr/>
-          <p:nvPr/>
-        </p:nvSpPr>
-        <p:spPr>
-          <a:xfrm>
-            <a:off x="457200" y="2697480"/>
-            <a:ext cx="8229600" cy="274320"/>
+          <p:cNvPr id="8" name="Text 5"/>
+          <p:cNvSpPr/>
+          <p:nvPr/>
+        </p:nvSpPr>
+        <p:spPr>
+          <a:xfrm>
+            <a:off x="4206362" y="2542032"/>
+            <a:ext cx="4480438" cy="182880"/>
           </a:xfrm>
           <a:prstGeom prst="rect">
             <a:avLst/>
@@ -5060,7 +5231,7 @@
               <a:buNone/>
             </a:pPr>
             <a:r>
-              <a:rPr lang="en-US" sz="1300" b="1" dirty="0">
+              <a:rPr lang="en-US" sz="950" b="1" dirty="0">
                 <a:solidFill>
                   <a:srgbClr val="000000"/>
                 </a:solidFill>
@@ -5068,22 +5239,857 @@
                 <a:ea typeface="NVIDIA Sans" pitchFamily="34" charset="-122"/>
                 <a:cs typeface="NVIDIA Sans" pitchFamily="34" charset="-120"/>
               </a:rPr>
-              <a:t>Per-step time ledger (same accounting, one steady step from each nsys capture)</a:t>
-            </a:r>
-            <a:endParaRPr lang="en-US" sz="1300" dirty="0"/>
+              <a:t>4 graphs — AllReduce overlaps the group replays:</a:t>
+            </a:r>
+            <a:endParaRPr lang="en-US" sz="950" dirty="0"/>
           </a:p>
         </p:txBody>
       </p:sp>
       <p:sp>
         <p:nvSpPr>
-          <p:cNvPr id="6" name="Text 4"/>
-          <p:cNvSpPr/>
-          <p:nvPr/>
-        </p:nvSpPr>
-        <p:spPr>
-          <a:xfrm>
-            <a:off x="640080" y="3044952"/>
-            <a:ext cx="1463040" cy="310896"/>
+          <p:cNvPr id="9" name="Text 6"/>
+          <p:cNvSpPr/>
+          <p:nvPr/>
+        </p:nvSpPr>
+        <p:spPr>
+          <a:xfrm>
+            <a:off x="4206362" y="2743200"/>
+            <a:ext cx="457200" cy="146304"/>
+          </a:xfrm>
+          <a:prstGeom prst="rect">
+            <a:avLst/>
+          </a:prstGeom>
+          <a:noFill/>
+          <a:ln/>
+        </p:spPr>
+        <p:txBody>
+          <a:bodyPr wrap="square" lIns="0" tIns="0" rIns="0" bIns="0" rtlCol="0" anchor="ctr"/>
+          <a:lstStyle/>
+          <a:p>
+            <a:pPr algn="r" indent="0" marL="0">
+              <a:buNone/>
+            </a:pPr>
+            <a:r>
+              <a:rPr lang="en-US" sz="750" dirty="0">
+                <a:solidFill>
+                  <a:srgbClr val="5E5E5E"/>
+                </a:solidFill>
+                <a:latin typeface="NVIDIA Sans" pitchFamily="34" charset="0"/>
+                <a:ea typeface="NVIDIA Sans" pitchFamily="34" charset="-122"/>
+                <a:cs typeface="NVIDIA Sans" pitchFamily="34" charset="-120"/>
+              </a:rPr>
+              <a:t>GPU</a:t>
+            </a:r>
+            <a:endParaRPr lang="en-US" sz="750" dirty="0"/>
+          </a:p>
+        </p:txBody>
+      </p:sp>
+      <p:sp>
+        <p:nvSpPr>
+          <p:cNvPr id="10" name="Text 7"/>
+          <p:cNvSpPr/>
+          <p:nvPr/>
+        </p:nvSpPr>
+        <p:spPr>
+          <a:xfrm>
+            <a:off x="4206362" y="2907792"/>
+            <a:ext cx="457200" cy="146304"/>
+          </a:xfrm>
+          <a:prstGeom prst="rect">
+            <a:avLst/>
+          </a:prstGeom>
+          <a:noFill/>
+          <a:ln/>
+        </p:spPr>
+        <p:txBody>
+          <a:bodyPr wrap="square" lIns="0" tIns="0" rIns="0" bIns="0" rtlCol="0" anchor="ctr"/>
+          <a:lstStyle/>
+          <a:p>
+            <a:pPr algn="r" indent="0" marL="0">
+              <a:buNone/>
+            </a:pPr>
+            <a:r>
+              <a:rPr lang="en-US" sz="750" dirty="0">
+                <a:solidFill>
+                  <a:srgbClr val="5E5E5E"/>
+                </a:solidFill>
+                <a:latin typeface="NVIDIA Sans" pitchFamily="34" charset="0"/>
+                <a:ea typeface="NVIDIA Sans" pitchFamily="34" charset="-122"/>
+                <a:cs typeface="NVIDIA Sans" pitchFamily="34" charset="-120"/>
+              </a:rPr>
+              <a:t>NCCL</a:t>
+            </a:r>
+            <a:endParaRPr lang="en-US" sz="750" dirty="0"/>
+          </a:p>
+        </p:txBody>
+      </p:sp>
+      <p:sp>
+        <p:nvSpPr>
+          <p:cNvPr id="11" name="Shape 8"/>
+          <p:cNvSpPr/>
+          <p:nvPr/>
+        </p:nvSpPr>
+        <p:spPr>
+          <a:xfrm>
+            <a:off x="4709282" y="2743200"/>
+            <a:ext cx="3931798" cy="146304"/>
+          </a:xfrm>
+          <a:prstGeom prst="rect">
+            <a:avLst/>
+          </a:prstGeom>
+          <a:solidFill>
+            <a:srgbClr val="F0F0F0"/>
+          </a:solidFill>
+          <a:ln/>
+        </p:spPr>
+      </p:sp>
+      <p:sp>
+        <p:nvSpPr>
+          <p:cNvPr id="12" name="Shape 9"/>
+          <p:cNvSpPr/>
+          <p:nvPr/>
+        </p:nvSpPr>
+        <p:spPr>
+          <a:xfrm>
+            <a:off x="4709282" y="2907792"/>
+            <a:ext cx="3931798" cy="146304"/>
+          </a:xfrm>
+          <a:prstGeom prst="rect">
+            <a:avLst/>
+          </a:prstGeom>
+          <a:solidFill>
+            <a:srgbClr val="F0F0F0"/>
+          </a:solidFill>
+          <a:ln/>
+        </p:spPr>
+      </p:sp>
+      <p:sp>
+        <p:nvSpPr>
+          <p:cNvPr id="13" name="Shape 10"/>
+          <p:cNvSpPr/>
+          <p:nvPr/>
+        </p:nvSpPr>
+        <p:spPr>
+          <a:xfrm>
+            <a:off x="4709282" y="2752344"/>
+            <a:ext cx="707724" cy="128016"/>
+          </a:xfrm>
+          <a:prstGeom prst="rect">
+            <a:avLst/>
+          </a:prstGeom>
+          <a:solidFill>
+            <a:srgbClr val="76B900"/>
+          </a:solidFill>
+          <a:ln/>
+        </p:spPr>
+      </p:sp>
+      <p:sp>
+        <p:nvSpPr>
+          <p:cNvPr id="14" name="Text 11"/>
+          <p:cNvSpPr/>
+          <p:nvPr/>
+        </p:nvSpPr>
+        <p:spPr>
+          <a:xfrm>
+            <a:off x="4709282" y="2743200"/>
+            <a:ext cx="707724" cy="146304"/>
+          </a:xfrm>
+          <a:prstGeom prst="rect">
+            <a:avLst/>
+          </a:prstGeom>
+          <a:noFill/>
+          <a:ln/>
+        </p:spPr>
+        <p:txBody>
+          <a:bodyPr wrap="square" lIns="0" tIns="0" rIns="0" bIns="0" rtlCol="0" anchor="ctr"/>
+          <a:lstStyle/>
+          <a:p>
+            <a:pPr algn="ctr" indent="0" marL="0">
+              <a:buNone/>
+            </a:pPr>
+            <a:r>
+              <a:rPr lang="en-US" sz="700" b="1" dirty="0">
+                <a:solidFill>
+                  <a:srgbClr val="FFFFFF"/>
+                </a:solidFill>
+                <a:latin typeface="NVIDIA Sans" pitchFamily="34" charset="0"/>
+                <a:ea typeface="NVIDIA Sans" pitchFamily="34" charset="-122"/>
+                <a:cs typeface="NVIDIA Sans" pitchFamily="34" charset="-120"/>
+              </a:rPr>
+              <a:t>bwd G4</a:t>
+            </a:r>
+            <a:endParaRPr lang="en-US" sz="700" dirty="0"/>
+          </a:p>
+        </p:txBody>
+      </p:sp>
+      <p:sp>
+        <p:nvSpPr>
+          <p:cNvPr id="15" name="Shape 12"/>
+          <p:cNvSpPr/>
+          <p:nvPr/>
+        </p:nvSpPr>
+        <p:spPr>
+          <a:xfrm>
+            <a:off x="5495642" y="2752344"/>
+            <a:ext cx="707724" cy="128016"/>
+          </a:xfrm>
+          <a:prstGeom prst="rect">
+            <a:avLst/>
+          </a:prstGeom>
+          <a:solidFill>
+            <a:srgbClr val="76B900"/>
+          </a:solidFill>
+          <a:ln/>
+        </p:spPr>
+      </p:sp>
+      <p:sp>
+        <p:nvSpPr>
+          <p:cNvPr id="16" name="Text 13"/>
+          <p:cNvSpPr/>
+          <p:nvPr/>
+        </p:nvSpPr>
+        <p:spPr>
+          <a:xfrm>
+            <a:off x="5495642" y="2743200"/>
+            <a:ext cx="707724" cy="146304"/>
+          </a:xfrm>
+          <a:prstGeom prst="rect">
+            <a:avLst/>
+          </a:prstGeom>
+          <a:noFill/>
+          <a:ln/>
+        </p:spPr>
+        <p:txBody>
+          <a:bodyPr wrap="square" lIns="0" tIns="0" rIns="0" bIns="0" rtlCol="0" anchor="ctr"/>
+          <a:lstStyle/>
+          <a:p>
+            <a:pPr algn="ctr" indent="0" marL="0">
+              <a:buNone/>
+            </a:pPr>
+            <a:r>
+              <a:rPr lang="en-US" sz="700" b="1" dirty="0">
+                <a:solidFill>
+                  <a:srgbClr val="FFFFFF"/>
+                </a:solidFill>
+                <a:latin typeface="NVIDIA Sans" pitchFamily="34" charset="0"/>
+                <a:ea typeface="NVIDIA Sans" pitchFamily="34" charset="-122"/>
+                <a:cs typeface="NVIDIA Sans" pitchFamily="34" charset="-120"/>
+              </a:rPr>
+              <a:t>bwd G3</a:t>
+            </a:r>
+            <a:endParaRPr lang="en-US" sz="700" dirty="0"/>
+          </a:p>
+        </p:txBody>
+      </p:sp>
+      <p:sp>
+        <p:nvSpPr>
+          <p:cNvPr id="17" name="Shape 14"/>
+          <p:cNvSpPr/>
+          <p:nvPr/>
+        </p:nvSpPr>
+        <p:spPr>
+          <a:xfrm>
+            <a:off x="6282001" y="2752344"/>
+            <a:ext cx="707724" cy="128016"/>
+          </a:xfrm>
+          <a:prstGeom prst="rect">
+            <a:avLst/>
+          </a:prstGeom>
+          <a:solidFill>
+            <a:srgbClr val="76B900"/>
+          </a:solidFill>
+          <a:ln/>
+        </p:spPr>
+      </p:sp>
+      <p:sp>
+        <p:nvSpPr>
+          <p:cNvPr id="18" name="Text 15"/>
+          <p:cNvSpPr/>
+          <p:nvPr/>
+        </p:nvSpPr>
+        <p:spPr>
+          <a:xfrm>
+            <a:off x="6282001" y="2743200"/>
+            <a:ext cx="707724" cy="146304"/>
+          </a:xfrm>
+          <a:prstGeom prst="rect">
+            <a:avLst/>
+          </a:prstGeom>
+          <a:noFill/>
+          <a:ln/>
+        </p:spPr>
+        <p:txBody>
+          <a:bodyPr wrap="square" lIns="0" tIns="0" rIns="0" bIns="0" rtlCol="0" anchor="ctr"/>
+          <a:lstStyle/>
+          <a:p>
+            <a:pPr algn="ctr" indent="0" marL="0">
+              <a:buNone/>
+            </a:pPr>
+            <a:r>
+              <a:rPr lang="en-US" sz="700" b="1" dirty="0">
+                <a:solidFill>
+                  <a:srgbClr val="FFFFFF"/>
+                </a:solidFill>
+                <a:latin typeface="NVIDIA Sans" pitchFamily="34" charset="0"/>
+                <a:ea typeface="NVIDIA Sans" pitchFamily="34" charset="-122"/>
+                <a:cs typeface="NVIDIA Sans" pitchFamily="34" charset="-120"/>
+              </a:rPr>
+              <a:t>bwd G2</a:t>
+            </a:r>
+            <a:endParaRPr lang="en-US" sz="700" dirty="0"/>
+          </a:p>
+        </p:txBody>
+      </p:sp>
+      <p:sp>
+        <p:nvSpPr>
+          <p:cNvPr id="19" name="Shape 16"/>
+          <p:cNvSpPr/>
+          <p:nvPr/>
+        </p:nvSpPr>
+        <p:spPr>
+          <a:xfrm>
+            <a:off x="7068361" y="2752344"/>
+            <a:ext cx="707724" cy="128016"/>
+          </a:xfrm>
+          <a:prstGeom prst="rect">
+            <a:avLst/>
+          </a:prstGeom>
+          <a:solidFill>
+            <a:srgbClr val="76B900"/>
+          </a:solidFill>
+          <a:ln/>
+        </p:spPr>
+      </p:sp>
+      <p:sp>
+        <p:nvSpPr>
+          <p:cNvPr id="20" name="Text 17"/>
+          <p:cNvSpPr/>
+          <p:nvPr/>
+        </p:nvSpPr>
+        <p:spPr>
+          <a:xfrm>
+            <a:off x="7068361" y="2743200"/>
+            <a:ext cx="707724" cy="146304"/>
+          </a:xfrm>
+          <a:prstGeom prst="rect">
+            <a:avLst/>
+          </a:prstGeom>
+          <a:noFill/>
+          <a:ln/>
+        </p:spPr>
+        <p:txBody>
+          <a:bodyPr wrap="square" lIns="0" tIns="0" rIns="0" bIns="0" rtlCol="0" anchor="ctr"/>
+          <a:lstStyle/>
+          <a:p>
+            <a:pPr algn="ctr" indent="0" marL="0">
+              <a:buNone/>
+            </a:pPr>
+            <a:r>
+              <a:rPr lang="en-US" sz="700" b="1" dirty="0">
+                <a:solidFill>
+                  <a:srgbClr val="FFFFFF"/>
+                </a:solidFill>
+                <a:latin typeface="NVIDIA Sans" pitchFamily="34" charset="0"/>
+                <a:ea typeface="NVIDIA Sans" pitchFamily="34" charset="-122"/>
+                <a:cs typeface="NVIDIA Sans" pitchFamily="34" charset="-120"/>
+              </a:rPr>
+              <a:t>bwd G1</a:t>
+            </a:r>
+            <a:endParaRPr lang="en-US" sz="700" dirty="0"/>
+          </a:p>
+        </p:txBody>
+      </p:sp>
+      <p:sp>
+        <p:nvSpPr>
+          <p:cNvPr id="21" name="Shape 18"/>
+          <p:cNvSpPr/>
+          <p:nvPr/>
+        </p:nvSpPr>
+        <p:spPr>
+          <a:xfrm>
+            <a:off x="5456324" y="2916936"/>
+            <a:ext cx="589770" cy="128016"/>
+          </a:xfrm>
+          <a:prstGeom prst="rect">
+            <a:avLst/>
+          </a:prstGeom>
+          <a:solidFill>
+            <a:srgbClr val="0071C5"/>
+          </a:solidFill>
+          <a:ln/>
+        </p:spPr>
+      </p:sp>
+      <p:sp>
+        <p:nvSpPr>
+          <p:cNvPr id="22" name="Shape 19"/>
+          <p:cNvSpPr/>
+          <p:nvPr/>
+        </p:nvSpPr>
+        <p:spPr>
+          <a:xfrm>
+            <a:off x="6242683" y="2916936"/>
+            <a:ext cx="589770" cy="128016"/>
+          </a:xfrm>
+          <a:prstGeom prst="rect">
+            <a:avLst/>
+          </a:prstGeom>
+          <a:solidFill>
+            <a:srgbClr val="0071C5"/>
+          </a:solidFill>
+          <a:ln/>
+        </p:spPr>
+      </p:sp>
+      <p:sp>
+        <p:nvSpPr>
+          <p:cNvPr id="23" name="Shape 20"/>
+          <p:cNvSpPr/>
+          <p:nvPr/>
+        </p:nvSpPr>
+        <p:spPr>
+          <a:xfrm>
+            <a:off x="7029043" y="2916936"/>
+            <a:ext cx="589770" cy="128016"/>
+          </a:xfrm>
+          <a:prstGeom prst="rect">
+            <a:avLst/>
+          </a:prstGeom>
+          <a:solidFill>
+            <a:srgbClr val="0071C5"/>
+          </a:solidFill>
+          <a:ln/>
+        </p:spPr>
+      </p:sp>
+      <p:sp>
+        <p:nvSpPr>
+          <p:cNvPr id="24" name="Shape 21"/>
+          <p:cNvSpPr/>
+          <p:nvPr/>
+        </p:nvSpPr>
+        <p:spPr>
+          <a:xfrm>
+            <a:off x="7815402" y="2916936"/>
+            <a:ext cx="275226" cy="128016"/>
+          </a:xfrm>
+          <a:prstGeom prst="rect">
+            <a:avLst/>
+          </a:prstGeom>
+          <a:solidFill>
+            <a:srgbClr val="0071C5"/>
+          </a:solidFill>
+          <a:ln/>
+        </p:spPr>
+      </p:sp>
+      <p:sp>
+        <p:nvSpPr>
+          <p:cNvPr id="25" name="Shape 22"/>
+          <p:cNvSpPr/>
+          <p:nvPr/>
+        </p:nvSpPr>
+        <p:spPr>
+          <a:xfrm>
+            <a:off x="8090628" y="2724912"/>
+            <a:ext cx="0" cy="365760"/>
+          </a:xfrm>
+          <a:prstGeom prst="line">
+            <a:avLst/>
+          </a:prstGeom>
+          <a:noFill/>
+          <a:ln w="19050">
+            <a:solidFill>
+              <a:srgbClr val="890C58"/>
+            </a:solidFill>
+            <a:prstDash val="solid"/>
+          </a:ln>
+        </p:spPr>
+      </p:sp>
+      <p:sp>
+        <p:nvSpPr>
+          <p:cNvPr id="26" name="Text 23"/>
+          <p:cNvSpPr/>
+          <p:nvPr/>
+        </p:nvSpPr>
+        <p:spPr>
+          <a:xfrm>
+            <a:off x="4206362" y="3108960"/>
+            <a:ext cx="4480438" cy="182880"/>
+          </a:xfrm>
+          <a:prstGeom prst="rect">
+            <a:avLst/>
+          </a:prstGeom>
+          <a:noFill/>
+          <a:ln/>
+        </p:spPr>
+        <p:txBody>
+          <a:bodyPr wrap="square" lIns="0" tIns="0" rIns="0" bIns="0" rtlCol="0" anchor="ctr"/>
+          <a:lstStyle/>
+          <a:p>
+            <a:pPr indent="0" marL="0">
+              <a:buNone/>
+            </a:pPr>
+            <a:r>
+              <a:rPr lang="en-US" sz="950" b="1" dirty="0">
+                <a:solidFill>
+                  <a:srgbClr val="000000"/>
+                </a:solidFill>
+                <a:latin typeface="NVIDIA Sans" pitchFamily="34" charset="0"/>
+                <a:ea typeface="NVIDIA Sans" pitchFamily="34" charset="-122"/>
+                <a:cs typeface="NVIDIA Sans" pitchFamily="34" charset="-120"/>
+              </a:rPr>
+              <a:t>1 graph — every AllReduce waits for the whole backward:</a:t>
+            </a:r>
+            <a:endParaRPr lang="en-US" sz="950" dirty="0"/>
+          </a:p>
+        </p:txBody>
+      </p:sp>
+      <p:sp>
+        <p:nvSpPr>
+          <p:cNvPr id="27" name="Text 24"/>
+          <p:cNvSpPr/>
+          <p:nvPr/>
+        </p:nvSpPr>
+        <p:spPr>
+          <a:xfrm>
+            <a:off x="4206362" y="3310128"/>
+            <a:ext cx="457200" cy="146304"/>
+          </a:xfrm>
+          <a:prstGeom prst="rect">
+            <a:avLst/>
+          </a:prstGeom>
+          <a:noFill/>
+          <a:ln/>
+        </p:spPr>
+        <p:txBody>
+          <a:bodyPr wrap="square" lIns="0" tIns="0" rIns="0" bIns="0" rtlCol="0" anchor="ctr"/>
+          <a:lstStyle/>
+          <a:p>
+            <a:pPr algn="r" indent="0" marL="0">
+              <a:buNone/>
+            </a:pPr>
+            <a:r>
+              <a:rPr lang="en-US" sz="750" dirty="0">
+                <a:solidFill>
+                  <a:srgbClr val="5E5E5E"/>
+                </a:solidFill>
+                <a:latin typeface="NVIDIA Sans" pitchFamily="34" charset="0"/>
+                <a:ea typeface="NVIDIA Sans" pitchFamily="34" charset="-122"/>
+                <a:cs typeface="NVIDIA Sans" pitchFamily="34" charset="-120"/>
+              </a:rPr>
+              <a:t>GPU</a:t>
+            </a:r>
+            <a:endParaRPr lang="en-US" sz="750" dirty="0"/>
+          </a:p>
+        </p:txBody>
+      </p:sp>
+      <p:sp>
+        <p:nvSpPr>
+          <p:cNvPr id="28" name="Text 25"/>
+          <p:cNvSpPr/>
+          <p:nvPr/>
+        </p:nvSpPr>
+        <p:spPr>
+          <a:xfrm>
+            <a:off x="4206362" y="3474720"/>
+            <a:ext cx="457200" cy="146304"/>
+          </a:xfrm>
+          <a:prstGeom prst="rect">
+            <a:avLst/>
+          </a:prstGeom>
+          <a:noFill/>
+          <a:ln/>
+        </p:spPr>
+        <p:txBody>
+          <a:bodyPr wrap="square" lIns="0" tIns="0" rIns="0" bIns="0" rtlCol="0" anchor="ctr"/>
+          <a:lstStyle/>
+          <a:p>
+            <a:pPr algn="r" indent="0" marL="0">
+              <a:buNone/>
+            </a:pPr>
+            <a:r>
+              <a:rPr lang="en-US" sz="750" dirty="0">
+                <a:solidFill>
+                  <a:srgbClr val="5E5E5E"/>
+                </a:solidFill>
+                <a:latin typeface="NVIDIA Sans" pitchFamily="34" charset="0"/>
+                <a:ea typeface="NVIDIA Sans" pitchFamily="34" charset="-122"/>
+                <a:cs typeface="NVIDIA Sans" pitchFamily="34" charset="-120"/>
+              </a:rPr>
+              <a:t>NCCL</a:t>
+            </a:r>
+            <a:endParaRPr lang="en-US" sz="750" dirty="0"/>
+          </a:p>
+        </p:txBody>
+      </p:sp>
+      <p:sp>
+        <p:nvSpPr>
+          <p:cNvPr id="29" name="Shape 26"/>
+          <p:cNvSpPr/>
+          <p:nvPr/>
+        </p:nvSpPr>
+        <p:spPr>
+          <a:xfrm>
+            <a:off x="4709282" y="3310128"/>
+            <a:ext cx="3931798" cy="146304"/>
+          </a:xfrm>
+          <a:prstGeom prst="rect">
+            <a:avLst/>
+          </a:prstGeom>
+          <a:solidFill>
+            <a:srgbClr val="F0F0F0"/>
+          </a:solidFill>
+          <a:ln/>
+        </p:spPr>
+      </p:sp>
+      <p:sp>
+        <p:nvSpPr>
+          <p:cNvPr id="30" name="Shape 27"/>
+          <p:cNvSpPr/>
+          <p:nvPr/>
+        </p:nvSpPr>
+        <p:spPr>
+          <a:xfrm>
+            <a:off x="4709282" y="3474720"/>
+            <a:ext cx="3931798" cy="146304"/>
+          </a:xfrm>
+          <a:prstGeom prst="rect">
+            <a:avLst/>
+          </a:prstGeom>
+          <a:solidFill>
+            <a:srgbClr val="F0F0F0"/>
+          </a:solidFill>
+          <a:ln/>
+        </p:spPr>
+      </p:sp>
+      <p:sp>
+        <p:nvSpPr>
+          <p:cNvPr id="31" name="Shape 28"/>
+          <p:cNvSpPr/>
+          <p:nvPr/>
+        </p:nvSpPr>
+        <p:spPr>
+          <a:xfrm>
+            <a:off x="4709282" y="3319272"/>
+            <a:ext cx="3066803" cy="128016"/>
+          </a:xfrm>
+          <a:prstGeom prst="rect">
+            <a:avLst/>
+          </a:prstGeom>
+          <a:solidFill>
+            <a:srgbClr val="76B900"/>
+          </a:solidFill>
+          <a:ln/>
+        </p:spPr>
+      </p:sp>
+      <p:sp>
+        <p:nvSpPr>
+          <p:cNvPr id="32" name="Text 29"/>
+          <p:cNvSpPr/>
+          <p:nvPr/>
+        </p:nvSpPr>
+        <p:spPr>
+          <a:xfrm>
+            <a:off x="4709282" y="3310128"/>
+            <a:ext cx="3066803" cy="146304"/>
+          </a:xfrm>
+          <a:prstGeom prst="rect">
+            <a:avLst/>
+          </a:prstGeom>
+          <a:noFill/>
+          <a:ln/>
+        </p:spPr>
+        <p:txBody>
+          <a:bodyPr wrap="square" lIns="0" tIns="0" rIns="0" bIns="0" rtlCol="0" anchor="ctr"/>
+          <a:lstStyle/>
+          <a:p>
+            <a:pPr algn="ctr" indent="0" marL="0">
+              <a:buNone/>
+            </a:pPr>
+            <a:r>
+              <a:rPr lang="en-US" sz="700" b="1" dirty="0">
+                <a:solidFill>
+                  <a:srgbClr val="FFFFFF"/>
+                </a:solidFill>
+                <a:latin typeface="NVIDIA Sans" pitchFamily="34" charset="0"/>
+                <a:ea typeface="NVIDIA Sans" pitchFamily="34" charset="-122"/>
+                <a:cs typeface="NVIDIA Sans" pitchFamily="34" charset="-120"/>
+              </a:rPr>
+              <a:t>backward (one giant graph, hooks cannot fire inside)</a:t>
+            </a:r>
+            <a:endParaRPr lang="en-US" sz="700" dirty="0"/>
+          </a:p>
+        </p:txBody>
+      </p:sp>
+      <p:sp>
+        <p:nvSpPr>
+          <p:cNvPr id="33" name="Shape 30"/>
+          <p:cNvSpPr/>
+          <p:nvPr/>
+        </p:nvSpPr>
+        <p:spPr>
+          <a:xfrm>
+            <a:off x="7776084" y="3483864"/>
+            <a:ext cx="275226" cy="128016"/>
+          </a:xfrm>
+          <a:prstGeom prst="rect">
+            <a:avLst/>
+          </a:prstGeom>
+          <a:solidFill>
+            <a:srgbClr val="0071C5"/>
+          </a:solidFill>
+          <a:ln/>
+        </p:spPr>
+      </p:sp>
+      <p:sp>
+        <p:nvSpPr>
+          <p:cNvPr id="34" name="Shape 31"/>
+          <p:cNvSpPr/>
+          <p:nvPr/>
+        </p:nvSpPr>
+        <p:spPr>
+          <a:xfrm>
+            <a:off x="8070969" y="3483864"/>
+            <a:ext cx="275226" cy="128016"/>
+          </a:xfrm>
+          <a:prstGeom prst="rect">
+            <a:avLst/>
+          </a:prstGeom>
+          <a:solidFill>
+            <a:srgbClr val="0071C5"/>
+          </a:solidFill>
+          <a:ln/>
+        </p:spPr>
+      </p:sp>
+      <p:sp>
+        <p:nvSpPr>
+          <p:cNvPr id="35" name="Shape 32"/>
+          <p:cNvSpPr/>
+          <p:nvPr/>
+        </p:nvSpPr>
+        <p:spPr>
+          <a:xfrm>
+            <a:off x="8365854" y="3483864"/>
+            <a:ext cx="275226" cy="128016"/>
+          </a:xfrm>
+          <a:prstGeom prst="rect">
+            <a:avLst/>
+          </a:prstGeom>
+          <a:solidFill>
+            <a:srgbClr val="0071C5"/>
+          </a:solidFill>
+          <a:ln/>
+        </p:spPr>
+      </p:sp>
+      <p:sp>
+        <p:nvSpPr>
+          <p:cNvPr id="36" name="Shape 33"/>
+          <p:cNvSpPr/>
+          <p:nvPr/>
+        </p:nvSpPr>
+        <p:spPr>
+          <a:xfrm>
+            <a:off x="8641080" y="3291840"/>
+            <a:ext cx="0" cy="365760"/>
+          </a:xfrm>
+          <a:prstGeom prst="line">
+            <a:avLst/>
+          </a:prstGeom>
+          <a:noFill/>
+          <a:ln w="19050">
+            <a:solidFill>
+              <a:srgbClr val="890C58"/>
+            </a:solidFill>
+            <a:prstDash val="solid"/>
+          </a:ln>
+        </p:spPr>
+      </p:sp>
+      <p:sp>
+        <p:nvSpPr>
+          <p:cNvPr id="37" name="Text 34"/>
+          <p:cNvSpPr/>
+          <p:nvPr/>
+        </p:nvSpPr>
+        <p:spPr>
+          <a:xfrm>
+            <a:off x="4206362" y="3639312"/>
+            <a:ext cx="4480438" cy="146304"/>
+          </a:xfrm>
+          <a:prstGeom prst="rect">
+            <a:avLst/>
+          </a:prstGeom>
+          <a:noFill/>
+          <a:ln/>
+        </p:spPr>
+        <p:txBody>
+          <a:bodyPr wrap="square" lIns="0" tIns="0" rIns="0" bIns="0" rtlCol="0" anchor="ctr"/>
+          <a:lstStyle/>
+          <a:p>
+            <a:pPr indent="0" marL="0">
+              <a:buNone/>
+            </a:pPr>
+            <a:r>
+              <a:rPr lang="en-US" sz="800" i="1" dirty="0">
+                <a:solidFill>
+                  <a:srgbClr val="8C8C8C"/>
+                </a:solidFill>
+                <a:latin typeface="NVIDIA Sans" pitchFamily="34" charset="0"/>
+                <a:ea typeface="NVIDIA Sans" pitchFamily="34" charset="-122"/>
+                <a:cs typeface="NVIDIA Sans" pitchFamily="34" charset="-120"/>
+              </a:rPr>
+              <a:t>same compute, same bytes — the red line is where the step ends</a:t>
+            </a:r>
+            <a:endParaRPr lang="en-US" sz="800" dirty="0"/>
+          </a:p>
+        </p:txBody>
+      </p:sp>
+      <p:sp>
+        <p:nvSpPr>
+          <p:cNvPr id="38" name="Shape 35"/>
+          <p:cNvSpPr/>
+          <p:nvPr/>
+        </p:nvSpPr>
+        <p:spPr>
+          <a:xfrm>
+            <a:off x="4206362" y="3785616"/>
+            <a:ext cx="4480438" cy="548640"/>
+          </a:xfrm>
+          <a:prstGeom prst="rect">
+            <a:avLst/>
+          </a:prstGeom>
+          <a:solidFill>
+            <a:srgbClr val="F5F5F5"/>
+          </a:solidFill>
+          <a:ln/>
+        </p:spPr>
+      </p:sp>
+      <p:sp>
+        <p:nvSpPr>
+          <p:cNvPr id="39" name="Shape 36"/>
+          <p:cNvSpPr/>
+          <p:nvPr/>
+        </p:nvSpPr>
+        <p:spPr>
+          <a:xfrm>
+            <a:off x="4206362" y="3785616"/>
+            <a:ext cx="54864" cy="548640"/>
+          </a:xfrm>
+          <a:prstGeom prst="rect">
+            <a:avLst/>
+          </a:prstGeom>
+          <a:solidFill>
+            <a:srgbClr val="76B900"/>
+          </a:solidFill>
+          <a:ln/>
+        </p:spPr>
+      </p:sp>
+      <p:sp>
+        <p:nvSpPr>
+          <p:cNvPr id="40" name="Text 37"/>
+          <p:cNvSpPr/>
+          <p:nvPr/>
+        </p:nvSpPr>
+        <p:spPr>
+          <a:xfrm>
+            <a:off x="4389242" y="3785616"/>
+            <a:ext cx="4206118" cy="548640"/>
           </a:xfrm>
           <a:prstGeom prst="rect">
             <a:avLst/>
@@ -5107,137 +6113,13 @@
                 <a:ea typeface="NVIDIA Sans" pitchFamily="34" charset="-122"/>
                 <a:cs typeface="NVIDIA Sans" pitchFamily="34" charset="-120"/>
               </a:rPr>
-              <a:t>Baseline</a:t>
-            </a:r>
-            <a:endParaRPr lang="en-US" sz="1100" dirty="0"/>
-          </a:p>
-        </p:txBody>
-      </p:sp>
-      <p:sp>
-        <p:nvSpPr>
-          <p:cNvPr id="7" name="Shape 5"/>
-          <p:cNvSpPr/>
-          <p:nvPr/>
-        </p:nvSpPr>
-        <p:spPr>
-          <a:xfrm>
-            <a:off x="2148840" y="3063240"/>
-            <a:ext cx="3605332" cy="310896"/>
-          </a:xfrm>
-          <a:prstGeom prst="rect">
-            <a:avLst/>
-          </a:prstGeom>
-          <a:solidFill>
-            <a:srgbClr val="76B900"/>
-          </a:solidFill>
-          <a:ln/>
-        </p:spPr>
-      </p:sp>
-      <p:sp>
-        <p:nvSpPr>
-          <p:cNvPr id="8" name="Text 6"/>
-          <p:cNvSpPr/>
-          <p:nvPr/>
-        </p:nvSpPr>
-        <p:spPr>
-          <a:xfrm>
-            <a:off x="2148840" y="3063240"/>
-            <a:ext cx="3605332" cy="310896"/>
-          </a:xfrm>
-          <a:prstGeom prst="rect">
-            <a:avLst/>
-          </a:prstGeom>
-          <a:noFill/>
-          <a:ln/>
-        </p:spPr>
-        <p:txBody>
-          <a:bodyPr wrap="square" lIns="0" tIns="0" rIns="0" bIns="0" rtlCol="0" anchor="ctr"/>
-          <a:lstStyle/>
-          <a:p>
-            <a:pPr algn="ctr" indent="0" marL="0">
+              <a:t>Kernel launches: 13.9k → 6.4k per step. </a:t>
+            </a:r>
+            <a:pPr indent="0" marL="0">
               <a:buNone/>
             </a:pPr>
             <a:r>
-              <a:rPr lang="en-US" sz="1000" b="1" dirty="0">
-                <a:solidFill>
-                  <a:srgbClr val="FFFFFF"/>
-                </a:solidFill>
-                <a:latin typeface="NVIDIA Sans" pitchFamily="34" charset="0"/>
-                <a:ea typeface="NVIDIA Sans" pitchFamily="34" charset="-122"/>
-                <a:cs typeface="NVIDIA Sans" pitchFamily="34" charset="-120"/>
-              </a:rPr>
-              <a:t>540</a:t>
-            </a:r>
-            <a:endParaRPr lang="en-US" sz="1000" dirty="0"/>
-          </a:p>
-        </p:txBody>
-      </p:sp>
-      <p:sp>
-        <p:nvSpPr>
-          <p:cNvPr id="9" name="Shape 7"/>
-          <p:cNvSpPr/>
-          <p:nvPr/>
-        </p:nvSpPr>
-        <p:spPr>
-          <a:xfrm>
-            <a:off x="5754172" y="3063240"/>
-            <a:ext cx="411123" cy="310896"/>
-          </a:xfrm>
-          <a:prstGeom prst="rect">
-            <a:avLst/>
-          </a:prstGeom>
-          <a:solidFill>
-            <a:srgbClr val="0071C5"/>
-          </a:solidFill>
-          <a:ln/>
-        </p:spPr>
-      </p:sp>
-      <p:sp>
-        <p:nvSpPr>
-          <p:cNvPr id="10" name="Shape 8"/>
-          <p:cNvSpPr/>
-          <p:nvPr/>
-        </p:nvSpPr>
-        <p:spPr>
-          <a:xfrm>
-            <a:off x="6165295" y="3063240"/>
-            <a:ext cx="1368852" cy="310896"/>
-          </a:xfrm>
-          <a:prstGeom prst="rect">
-            <a:avLst/>
-          </a:prstGeom>
-          <a:solidFill>
-            <a:srgbClr val="D9D9D9"/>
-          </a:solidFill>
-          <a:ln/>
-        </p:spPr>
-      </p:sp>
-      <p:sp>
-        <p:nvSpPr>
-          <p:cNvPr id="11" name="Text 9"/>
-          <p:cNvSpPr/>
-          <p:nvPr/>
-        </p:nvSpPr>
-        <p:spPr>
-          <a:xfrm>
-            <a:off x="6165295" y="3063240"/>
-            <a:ext cx="1368852" cy="310896"/>
-          </a:xfrm>
-          <a:prstGeom prst="rect">
-            <a:avLst/>
-          </a:prstGeom>
-          <a:noFill/>
-          <a:ln/>
-        </p:spPr>
-        <p:txBody>
-          <a:bodyPr wrap="square" lIns="0" tIns="0" rIns="0" bIns="0" rtlCol="0" anchor="ctr"/>
-          <a:lstStyle/>
-          <a:p>
-            <a:pPr algn="ctr" indent="0" marL="0">
-              <a:buNone/>
-            </a:pPr>
-            <a:r>
-              <a:rPr lang="en-US" sz="1000" b="1" dirty="0">
+              <a:rPr lang="en-US" sz="1100" dirty="0">
                 <a:solidFill>
                   <a:srgbClr val="5E5E5E"/>
                 </a:solidFill>
@@ -5245,447 +6127,15 @@
                 <a:ea typeface="NVIDIA Sans" pitchFamily="34" charset="-122"/>
                 <a:cs typeface="NVIDIA Sans" pitchFamily="34" charset="-120"/>
               </a:rPr>
-              <a:t>205</a:t>
-            </a:r>
-            <a:endParaRPr lang="en-US" sz="1000" dirty="0"/>
+              <a:t>CPU launch cost leaves the critical path; GPU idle collapses.</a:t>
+            </a:r>
+            <a:endParaRPr lang="en-US" sz="1100" dirty="0"/>
           </a:p>
         </p:txBody>
       </p:sp>
       <p:sp>
         <p:nvSpPr>
-          <p:cNvPr id="12" name="Text 10"/>
-          <p:cNvSpPr/>
-          <p:nvPr/>
-        </p:nvSpPr>
-        <p:spPr>
-          <a:xfrm>
-            <a:off x="7589010" y="3063240"/>
-            <a:ext cx="822960" cy="310896"/>
-          </a:xfrm>
-          <a:prstGeom prst="rect">
-            <a:avLst/>
-          </a:prstGeom>
-          <a:noFill/>
-          <a:ln/>
-        </p:spPr>
-        <p:txBody>
-          <a:bodyPr wrap="square" lIns="0" tIns="0" rIns="0" bIns="0" rtlCol="0" anchor="ctr"/>
-          <a:lstStyle/>
-          <a:p>
-            <a:pPr indent="0" marL="0">
-              <a:buNone/>
-            </a:pPr>
-            <a:r>
-              <a:rPr lang="en-US" sz="1100" b="1" dirty="0">
-                <a:solidFill>
-                  <a:srgbClr val="000000"/>
-                </a:solidFill>
-                <a:latin typeface="NVIDIA Sans" pitchFamily="34" charset="0"/>
-                <a:ea typeface="NVIDIA Sans" pitchFamily="34" charset="-122"/>
-                <a:cs typeface="NVIDIA Sans" pitchFamily="34" charset="-120"/>
-              </a:rPr>
-              <a:t>807 ms</a:t>
-            </a:r>
-            <a:endParaRPr lang="en-US" sz="1100" dirty="0"/>
-          </a:p>
-        </p:txBody>
-      </p:sp>
-      <p:sp>
-        <p:nvSpPr>
-          <p:cNvPr id="13" name="Text 11"/>
-          <p:cNvSpPr/>
-          <p:nvPr/>
-        </p:nvSpPr>
-        <p:spPr>
-          <a:xfrm>
-            <a:off x="640080" y="3502152"/>
-            <a:ext cx="1463040" cy="310896"/>
-          </a:xfrm>
-          <a:prstGeom prst="rect">
-            <a:avLst/>
-          </a:prstGeom>
-          <a:noFill/>
-          <a:ln/>
-        </p:spPr>
-        <p:txBody>
-          <a:bodyPr wrap="square" lIns="0" tIns="0" rIns="0" bIns="0" rtlCol="0" anchor="ctr"/>
-          <a:lstStyle/>
-          <a:p>
-            <a:pPr indent="0" marL="0">
-              <a:buNone/>
-            </a:pPr>
-            <a:r>
-              <a:rPr lang="en-US" sz="1100" b="1" dirty="0">
-                <a:solidFill>
-                  <a:srgbClr val="000000"/>
-                </a:solidFill>
-                <a:latin typeface="NVIDIA Sans" pitchFamily="34" charset="0"/>
-                <a:ea typeface="NVIDIA Sans" pitchFamily="34" charset="-122"/>
-                <a:cs typeface="NVIDIA Sans" pitchFamily="34" charset="-120"/>
-              </a:rPr>
-              <a:t>Optimized</a:t>
-            </a:r>
-            <a:endParaRPr lang="en-US" sz="1100" dirty="0"/>
-          </a:p>
-        </p:txBody>
-      </p:sp>
-      <p:sp>
-        <p:nvSpPr>
-          <p:cNvPr id="14" name="Shape 12"/>
-          <p:cNvSpPr/>
-          <p:nvPr/>
-        </p:nvSpPr>
-        <p:spPr>
-          <a:xfrm>
-            <a:off x="2148840" y="3520440"/>
-            <a:ext cx="1169297" cy="310896"/>
-          </a:xfrm>
-          <a:prstGeom prst="rect">
-            <a:avLst/>
-          </a:prstGeom>
-          <a:solidFill>
-            <a:srgbClr val="76B900"/>
-          </a:solidFill>
-          <a:ln/>
-        </p:spPr>
-      </p:sp>
-      <p:sp>
-        <p:nvSpPr>
-          <p:cNvPr id="15" name="Text 13"/>
-          <p:cNvSpPr/>
-          <p:nvPr/>
-        </p:nvSpPr>
-        <p:spPr>
-          <a:xfrm>
-            <a:off x="2148840" y="3520440"/>
-            <a:ext cx="1169297" cy="310896"/>
-          </a:xfrm>
-          <a:prstGeom prst="rect">
-            <a:avLst/>
-          </a:prstGeom>
-          <a:noFill/>
-          <a:ln/>
-        </p:spPr>
-        <p:txBody>
-          <a:bodyPr wrap="square" lIns="0" tIns="0" rIns="0" bIns="0" rtlCol="0" anchor="ctr"/>
-          <a:lstStyle/>
-          <a:p>
-            <a:pPr algn="ctr" indent="0" marL="0">
-              <a:buNone/>
-            </a:pPr>
-            <a:r>
-              <a:rPr lang="en-US" sz="1000" b="1" dirty="0">
-                <a:solidFill>
-                  <a:srgbClr val="FFFFFF"/>
-                </a:solidFill>
-                <a:latin typeface="NVIDIA Sans" pitchFamily="34" charset="0"/>
-                <a:ea typeface="NVIDIA Sans" pitchFamily="34" charset="-122"/>
-                <a:cs typeface="NVIDIA Sans" pitchFamily="34" charset="-120"/>
-              </a:rPr>
-              <a:t>175</a:t>
-            </a:r>
-            <a:endParaRPr lang="en-US" sz="1000" dirty="0"/>
-          </a:p>
-        </p:txBody>
-      </p:sp>
-      <p:sp>
-        <p:nvSpPr>
-          <p:cNvPr id="16" name="Shape 14"/>
-          <p:cNvSpPr/>
-          <p:nvPr/>
-        </p:nvSpPr>
-        <p:spPr>
-          <a:xfrm>
-            <a:off x="3318137" y="3520440"/>
-            <a:ext cx="148164" cy="310896"/>
-          </a:xfrm>
-          <a:prstGeom prst="rect">
-            <a:avLst/>
-          </a:prstGeom>
-          <a:solidFill>
-            <a:srgbClr val="0071C5"/>
-          </a:solidFill>
-          <a:ln/>
-        </p:spPr>
-      </p:sp>
-      <p:sp>
-        <p:nvSpPr>
-          <p:cNvPr id="17" name="Shape 15"/>
-          <p:cNvSpPr/>
-          <p:nvPr/>
-        </p:nvSpPr>
-        <p:spPr>
-          <a:xfrm>
-            <a:off x="3466301" y="3520440"/>
-            <a:ext cx="289655" cy="310896"/>
-          </a:xfrm>
-          <a:prstGeom prst="rect">
-            <a:avLst/>
-          </a:prstGeom>
-          <a:solidFill>
-            <a:srgbClr val="D9D9D9"/>
-          </a:solidFill>
-          <a:ln/>
-        </p:spPr>
-      </p:sp>
-      <p:sp>
-        <p:nvSpPr>
-          <p:cNvPr id="18" name="Text 16"/>
-          <p:cNvSpPr/>
-          <p:nvPr/>
-        </p:nvSpPr>
-        <p:spPr>
-          <a:xfrm>
-            <a:off x="3810820" y="3520440"/>
-            <a:ext cx="822960" cy="310896"/>
-          </a:xfrm>
-          <a:prstGeom prst="rect">
-            <a:avLst/>
-          </a:prstGeom>
-          <a:noFill/>
-          <a:ln/>
-        </p:spPr>
-        <p:txBody>
-          <a:bodyPr wrap="square" lIns="0" tIns="0" rIns="0" bIns="0" rtlCol="0" anchor="ctr"/>
-          <a:lstStyle/>
-          <a:p>
-            <a:pPr indent="0" marL="0">
-              <a:buNone/>
-            </a:pPr>
-            <a:r>
-              <a:rPr lang="en-US" sz="1100" b="1" dirty="0">
-                <a:solidFill>
-                  <a:srgbClr val="000000"/>
-                </a:solidFill>
-                <a:latin typeface="NVIDIA Sans" pitchFamily="34" charset="0"/>
-                <a:ea typeface="NVIDIA Sans" pitchFamily="34" charset="-122"/>
-                <a:cs typeface="NVIDIA Sans" pitchFamily="34" charset="-120"/>
-              </a:rPr>
-              <a:t>249 ms</a:t>
-            </a:r>
-            <a:endParaRPr lang="en-US" sz="1100" dirty="0"/>
-          </a:p>
-        </p:txBody>
-      </p:sp>
-      <p:sp>
-        <p:nvSpPr>
-          <p:cNvPr id="19" name="Shape 17"/>
-          <p:cNvSpPr/>
-          <p:nvPr/>
-        </p:nvSpPr>
-        <p:spPr>
-          <a:xfrm>
-            <a:off x="2148840" y="4005072"/>
-            <a:ext cx="164592" cy="128016"/>
-          </a:xfrm>
-          <a:prstGeom prst="rect">
-            <a:avLst/>
-          </a:prstGeom>
-          <a:solidFill>
-            <a:srgbClr val="76B900"/>
-          </a:solidFill>
-          <a:ln/>
-        </p:spPr>
-      </p:sp>
-      <p:sp>
-        <p:nvSpPr>
-          <p:cNvPr id="20" name="Text 18"/>
-          <p:cNvSpPr/>
-          <p:nvPr/>
-        </p:nvSpPr>
-        <p:spPr>
-          <a:xfrm>
-            <a:off x="2368296" y="3931920"/>
-            <a:ext cx="1600200" cy="274320"/>
-          </a:xfrm>
-          <a:prstGeom prst="rect">
-            <a:avLst/>
-          </a:prstGeom>
-          <a:noFill/>
-          <a:ln/>
-        </p:spPr>
-        <p:txBody>
-          <a:bodyPr wrap="square" lIns="0" tIns="0" rIns="0" bIns="0" rtlCol="0" anchor="ctr"/>
-          <a:lstStyle/>
-          <a:p>
-            <a:pPr indent="0" marL="0">
-              <a:buNone/>
-            </a:pPr>
-            <a:r>
-              <a:rPr lang="en-US" sz="1000" dirty="0">
-                <a:solidFill>
-                  <a:srgbClr val="5E5E5E"/>
-                </a:solidFill>
-                <a:latin typeface="NVIDIA Sans" pitchFamily="34" charset="0"/>
-                <a:ea typeface="NVIDIA Sans" pitchFamily="34" charset="-122"/>
-                <a:cs typeface="NVIDIA Sans" pitchFamily="34" charset="-120"/>
-              </a:rPr>
-              <a:t>Compute busy</a:t>
-            </a:r>
-            <a:endParaRPr lang="en-US" sz="1000" dirty="0"/>
-          </a:p>
-        </p:txBody>
-      </p:sp>
-      <p:sp>
-        <p:nvSpPr>
-          <p:cNvPr id="21" name="Shape 19"/>
-          <p:cNvSpPr/>
-          <p:nvPr/>
-        </p:nvSpPr>
-        <p:spPr>
-          <a:xfrm>
-            <a:off x="3977640" y="4005072"/>
-            <a:ext cx="164592" cy="128016"/>
-          </a:xfrm>
-          <a:prstGeom prst="rect">
-            <a:avLst/>
-          </a:prstGeom>
-          <a:solidFill>
-            <a:srgbClr val="0071C5"/>
-          </a:solidFill>
-          <a:ln/>
-        </p:spPr>
-      </p:sp>
-      <p:sp>
-        <p:nvSpPr>
-          <p:cNvPr id="22" name="Text 20"/>
-          <p:cNvSpPr/>
-          <p:nvPr/>
-        </p:nvSpPr>
-        <p:spPr>
-          <a:xfrm>
-            <a:off x="4197096" y="3931920"/>
-            <a:ext cx="1600200" cy="274320"/>
-          </a:xfrm>
-          <a:prstGeom prst="rect">
-            <a:avLst/>
-          </a:prstGeom>
-          <a:noFill/>
-          <a:ln/>
-        </p:spPr>
-        <p:txBody>
-          <a:bodyPr wrap="square" lIns="0" tIns="0" rIns="0" bIns="0" rtlCol="0" anchor="ctr"/>
-          <a:lstStyle/>
-          <a:p>
-            <a:pPr indent="0" marL="0">
-              <a:buNone/>
-            </a:pPr>
-            <a:r>
-              <a:rPr lang="en-US" sz="1000" dirty="0">
-                <a:solidFill>
-                  <a:srgbClr val="5E5E5E"/>
-                </a:solidFill>
-                <a:latin typeface="NVIDIA Sans" pitchFamily="34" charset="0"/>
-                <a:ea typeface="NVIDIA Sans" pitchFamily="34" charset="-122"/>
-                <a:cs typeface="NVIDIA Sans" pitchFamily="34" charset="-120"/>
-              </a:rPr>
-              <a:t>Exposed comm</a:t>
-            </a:r>
-            <a:endParaRPr lang="en-US" sz="1000" dirty="0"/>
-          </a:p>
-        </p:txBody>
-      </p:sp>
-      <p:sp>
-        <p:nvSpPr>
-          <p:cNvPr id="23" name="Shape 21"/>
-          <p:cNvSpPr/>
-          <p:nvPr/>
-        </p:nvSpPr>
-        <p:spPr>
-          <a:xfrm>
-            <a:off x="5806440" y="4005072"/>
-            <a:ext cx="164592" cy="128016"/>
-          </a:xfrm>
-          <a:prstGeom prst="rect">
-            <a:avLst/>
-          </a:prstGeom>
-          <a:solidFill>
-            <a:srgbClr val="D9D9D9"/>
-          </a:solidFill>
-          <a:ln/>
-        </p:spPr>
-      </p:sp>
-      <p:sp>
-        <p:nvSpPr>
-          <p:cNvPr id="24" name="Text 22"/>
-          <p:cNvSpPr/>
-          <p:nvPr/>
-        </p:nvSpPr>
-        <p:spPr>
-          <a:xfrm>
-            <a:off x="6025896" y="3931920"/>
-            <a:ext cx="1600200" cy="274320"/>
-          </a:xfrm>
-          <a:prstGeom prst="rect">
-            <a:avLst/>
-          </a:prstGeom>
-          <a:noFill/>
-          <a:ln/>
-        </p:spPr>
-        <p:txBody>
-          <a:bodyPr wrap="square" lIns="0" tIns="0" rIns="0" bIns="0" rtlCol="0" anchor="ctr"/>
-          <a:lstStyle/>
-          <a:p>
-            <a:pPr indent="0" marL="0">
-              <a:buNone/>
-            </a:pPr>
-            <a:r>
-              <a:rPr lang="en-US" sz="1000" dirty="0">
-                <a:solidFill>
-                  <a:srgbClr val="5E5E5E"/>
-                </a:solidFill>
-                <a:latin typeface="NVIDIA Sans" pitchFamily="34" charset="0"/>
-                <a:ea typeface="NVIDIA Sans" pitchFamily="34" charset="-122"/>
-                <a:cs typeface="NVIDIA Sans" pitchFamily="34" charset="-120"/>
-              </a:rPr>
-              <a:t>Idle / launch gaps</a:t>
-            </a:r>
-            <a:endParaRPr lang="en-US" sz="1000" dirty="0"/>
-          </a:p>
-        </p:txBody>
-      </p:sp>
-      <p:sp>
-        <p:nvSpPr>
-          <p:cNvPr id="25" name="Text 23"/>
-          <p:cNvSpPr/>
-          <p:nvPr/>
-        </p:nvSpPr>
-        <p:spPr>
-          <a:xfrm>
-            <a:off x="457200" y="4224528"/>
-            <a:ext cx="8229600" cy="228600"/>
-          </a:xfrm>
-          <a:prstGeom prst="rect">
-            <a:avLst/>
-          </a:prstGeom>
-          <a:noFill/>
-          <a:ln/>
-        </p:spPr>
-        <p:txBody>
-          <a:bodyPr wrap="square" lIns="0" tIns="0" rIns="0" bIns="0" rtlCol="0" anchor="ctr"/>
-          <a:lstStyle/>
-          <a:p>
-            <a:pPr indent="0" marL="0">
-              <a:buNone/>
-            </a:pPr>
-            <a:r>
-              <a:rPr lang="en-US" sz="950" i="1" dirty="0">
-                <a:solidFill>
-                  <a:srgbClr val="8C8C8C"/>
-                </a:solidFill>
-                <a:latin typeface="NVIDIA Sans" pitchFamily="34" charset="0"/>
-                <a:ea typeface="NVIDIA Sans" pitchFamily="34" charset="-122"/>
-                <a:cs typeface="NVIDIA Sans" pitchFamily="34" charset="-120"/>
-              </a:rPr>
-              <a:t>Gradient AllReduce 15.1 GB/step + optimizer AllGather 15.1 GB/step (bf16). Idle from 254 ms to 43 ms.</a:t>
-            </a:r>
-            <a:endParaRPr lang="en-US" sz="950" dirty="0"/>
-          </a:p>
-        </p:txBody>
-      </p:sp>
-      <p:sp>
-        <p:nvSpPr>
-          <p:cNvPr id="26" name="Text 24"/>
+          <p:cNvPr id="41" name="Text 38"/>
           <p:cNvSpPr/>
           <p:nvPr/>
         </p:nvSpPr>
@@ -5724,7 +6174,7 @@
       </p:sp>
       <p:sp>
         <p:nvSpPr>
-          <p:cNvPr id="27" name="Text 25"/>
+          <p:cNvPr id="42" name="Text 39"/>
           <p:cNvSpPr/>
           <p:nvPr/>
         </p:nvSpPr>
@@ -5763,7 +6213,7 @@
       </p:sp>
       <p:sp>
         <p:nvSpPr>
-          <p:cNvPr id="28" name="Shape 26"/>
+          <p:cNvPr id="43" name="Shape 40"/>
           <p:cNvSpPr/>
           <p:nvPr/>
         </p:nvSpPr>
@@ -5783,14 +6233,14 @@
       </p:sp>
       <p:pic>
         <p:nvPicPr>
-          <p:cNvPr id="29" name="Image 0" descr="/app/logos/nvidia-logo-blk-sm.png">    </p:cNvPr>
+          <p:cNvPr id="44" name="Image 1" descr="/app/logos/nvidia-logo-blk-sm.png">    </p:cNvPr>
           <p:cNvPicPr>
             <a:picLocks noChangeAspect="1"/>
           </p:cNvPicPr>
           <p:nvPr/>
         </p:nvPicPr>
         <p:blipFill>
-          <a:blip r:embed="rId1"/>
+          <a:blip r:embed="rId2"/>
           <a:stretch>
             <a:fillRect/>
           </a:stretch>
@@ -5870,7 +6320,7 @@
                 <a:ea typeface="NVIDIA Sans" pitchFamily="34" charset="-122"/>
                 <a:cs typeface="NVIDIA Sans" pitchFamily="34" charset="-120"/>
               </a:rPr>
-              <a:t>Batch Scaling: Sweet Spot at 24 per GPU</a:t>
+              <a:t>ZeRO-2 Comm Tuning &amp; the Final Ledger</a:t>
             </a:r>
             <a:endParaRPr lang="en-US" sz="3000" dirty="0"/>
           </a:p>
@@ -5909,7 +6359,7 @@
                 <a:ea typeface="NVIDIA Sans" pitchFamily="34" charset="-122"/>
                 <a:cs typeface="NVIDIA Sans" pitchFamily="34" charset="-120"/>
               </a:rPr>
-              <a:t>Same optimized config, only per-GPU batch changes — peak 340 samples/node/s</a:t>
+              <a:t>271 → 249 ms.  Fewer, larger collectives — and an honest ledger of what remains</a:t>
             </a:r>
             <a:endParaRPr lang="en-US" sz="1500" dirty="0"/>
           </a:p>
@@ -5917,223 +6367,90 @@
       </p:sp>
       <p:sp>
         <p:nvSpPr>
-          <p:cNvPr id="4" name="Shape 2"/>
-          <p:cNvSpPr/>
-          <p:nvPr/>
-        </p:nvSpPr>
-        <p:spPr>
-          <a:xfrm>
-            <a:off x="1005840" y="3840480"/>
-            <a:ext cx="4846320" cy="0"/>
-          </a:xfrm>
-          <a:prstGeom prst="line">
+          <p:cNvPr id="4" name="Text 2"/>
+          <p:cNvSpPr/>
+          <p:nvPr/>
+        </p:nvSpPr>
+        <p:spPr>
+          <a:xfrm>
+            <a:off x="457200" y="1325880"/>
+            <a:ext cx="8229600" cy="1234440"/>
+          </a:xfrm>
+          <a:prstGeom prst="rect">
             <a:avLst/>
           </a:prstGeom>
           <a:noFill/>
-          <a:ln w="9525">
-            <a:solidFill>
-              <a:srgbClr val="EAEAEA"/>
-            </a:solidFill>
-            <a:prstDash val="solid"/>
-          </a:ln>
-        </p:spPr>
-      </p:sp>
-      <p:sp>
-        <p:nvSpPr>
-          <p:cNvPr id="5" name="Text 3"/>
-          <p:cNvSpPr/>
-          <p:nvPr/>
-        </p:nvSpPr>
-        <p:spPr>
-          <a:xfrm>
-            <a:off x="548640" y="3749040"/>
-            <a:ext cx="365760" cy="182880"/>
-          </a:xfrm>
-          <a:prstGeom prst="rect">
-            <a:avLst/>
-          </a:prstGeom>
-          <a:noFill/>
           <a:ln/>
         </p:spPr>
         <p:txBody>
-          <a:bodyPr wrap="square" lIns="0" tIns="0" rIns="0" bIns="0" rtlCol="0" anchor="ctr"/>
+          <a:bodyPr wrap="square" lIns="0" tIns="0" rIns="0" bIns="0" rtlCol="0" anchor="t"/>
           <a:lstStyle/>
           <a:p>
-            <a:pPr algn="r" indent="0" marL="0">
-              <a:buNone/>
+            <a:pPr marL="342900" indent="-342900">
+              <a:buSzPct val="100000"/>
+              <a:buChar char="•"/>
             </a:pPr>
             <a:r>
-              <a:rPr lang="en-US" sz="900" dirty="0">
+              <a:rPr lang="en-US" sz="1200" dirty="0">
                 <a:solidFill>
-                  <a:srgbClr val="8C8C8C"/>
+                  <a:srgbClr val="000000"/>
                 </a:solidFill>
                 <a:latin typeface="NVIDIA Sans" pitchFamily="34" charset="0"/>
                 <a:ea typeface="NVIDIA Sans" pitchFamily="34" charset="-122"/>
                 <a:cs typeface="NVIDIA Sans" pitchFamily="34" charset="-120"/>
               </a:rPr>
-              <a:t>0</a:t>
-            </a:r>
-            <a:endParaRPr lang="en-US" sz="900" dirty="0"/>
-          </a:p>
-        </p:txBody>
-      </p:sp>
-      <p:sp>
-        <p:nvSpPr>
-          <p:cNvPr id="6" name="Shape 4"/>
-          <p:cNvSpPr/>
-          <p:nvPr/>
-        </p:nvSpPr>
-        <p:spPr>
-          <a:xfrm>
-            <a:off x="1005840" y="3223260"/>
-            <a:ext cx="4846320" cy="0"/>
-          </a:xfrm>
-          <a:prstGeom prst="line">
-            <a:avLst/>
-          </a:prstGeom>
-          <a:noFill/>
-          <a:ln w="9525">
-            <a:solidFill>
-              <a:srgbClr val="EAEAEA"/>
-            </a:solidFill>
-            <a:prstDash val="solid"/>
-          </a:ln>
-        </p:spPr>
-      </p:sp>
-      <p:sp>
-        <p:nvSpPr>
-          <p:cNvPr id="7" name="Text 5"/>
-          <p:cNvSpPr/>
-          <p:nvPr/>
-        </p:nvSpPr>
-        <p:spPr>
-          <a:xfrm>
-            <a:off x="548640" y="3131820"/>
-            <a:ext cx="365760" cy="182880"/>
-          </a:xfrm>
-          <a:prstGeom prst="rect">
-            <a:avLst/>
-          </a:prstGeom>
-          <a:noFill/>
-          <a:ln/>
-        </p:spPr>
-        <p:txBody>
-          <a:bodyPr wrap="square" lIns="0" tIns="0" rIns="0" bIns="0" rtlCol="0" anchor="ctr"/>
-          <a:lstStyle/>
-          <a:p>
-            <a:pPr algn="r" indent="0" marL="0">
-              <a:buNone/>
+              <a:t>reduce_bucket_size 5e8 → 1.5e9: 6 gradient AllReduces per step instead of ~20, scoped to this model's config only</a:t>
+            </a:r>
+            <a:endParaRPr lang="en-US" sz="1200" dirty="0"/>
+          </a:p>
+          <a:p>
+            <a:pPr marL="342900" indent="-342900">
+              <a:buSzPct val="100000"/>
+              <a:buChar char="•"/>
             </a:pPr>
             <a:r>
-              <a:rPr lang="en-US" sz="900" dirty="0">
+              <a:rPr lang="en-US" sz="1200" dirty="0">
                 <a:solidFill>
-                  <a:srgbClr val="8C8C8C"/>
+                  <a:srgbClr val="000000"/>
                 </a:solidFill>
                 <a:latin typeface="NVIDIA Sans" pitchFamily="34" charset="0"/>
                 <a:ea typeface="NVIDIA Sans" pitchFamily="34" charset="-122"/>
                 <a:cs typeface="NVIDIA Sans" pitchFamily="34" charset="-120"/>
               </a:rPr>
-              <a:t>100</a:t>
-            </a:r>
-            <a:endParaRPr lang="en-US" sz="900" dirty="0"/>
-          </a:p>
-        </p:txBody>
-      </p:sp>
-      <p:sp>
-        <p:nvSpPr>
-          <p:cNvPr id="8" name="Shape 6"/>
-          <p:cNvSpPr/>
-          <p:nvPr/>
-        </p:nvSpPr>
-        <p:spPr>
-          <a:xfrm>
-            <a:off x="1005840" y="2606040"/>
-            <a:ext cx="4846320" cy="0"/>
-          </a:xfrm>
-          <a:prstGeom prst="line">
-            <a:avLst/>
-          </a:prstGeom>
-          <a:noFill/>
-          <a:ln w="9525">
-            <a:solidFill>
-              <a:srgbClr val="EAEAEA"/>
-            </a:solidFill>
-            <a:prstDash val="solid"/>
-          </a:ln>
-        </p:spPr>
-      </p:sp>
-      <p:sp>
-        <p:nvSpPr>
-          <p:cNvPr id="9" name="Text 7"/>
-          <p:cNvSpPr/>
-          <p:nvPr/>
-        </p:nvSpPr>
-        <p:spPr>
-          <a:xfrm>
-            <a:off x="548640" y="2514600"/>
-            <a:ext cx="365760" cy="182880"/>
-          </a:xfrm>
-          <a:prstGeom prst="rect">
-            <a:avLst/>
-          </a:prstGeom>
-          <a:noFill/>
-          <a:ln/>
-        </p:spPr>
-        <p:txBody>
-          <a:bodyPr wrap="square" lIns="0" tIns="0" rIns="0" bIns="0" rtlCol="0" anchor="ctr"/>
-          <a:lstStyle/>
-          <a:p>
-            <a:pPr algn="r" indent="0" marL="0">
-              <a:buNone/>
+              <a:t>reduce_scatter=false: drops DeepSpeed's redundant per-bucket flatten (CatArrayBatchedCopy) ahead of each AllReduce</a:t>
+            </a:r>
+            <a:endParaRPr lang="en-US" sz="1200" dirty="0"/>
+          </a:p>
+          <a:p>
+            <a:pPr marL="342900" indent="-342900">
+              <a:buSzPct val="100000"/>
+              <a:buChar char="•"/>
             </a:pPr>
             <a:r>
-              <a:rPr lang="en-US" sz="900" dirty="0">
+              <a:rPr lang="en-US" sz="1200" dirty="0">
                 <a:solidFill>
-                  <a:srgbClr val="8C8C8C"/>
+                  <a:srgbClr val="000000"/>
                 </a:solidFill>
                 <a:latin typeface="NVIDIA Sans" pitchFamily="34" charset="0"/>
                 <a:ea typeface="NVIDIA Sans" pitchFamily="34" charset="-122"/>
                 <a:cs typeface="NVIDIA Sans" pitchFamily="34" charset="-120"/>
               </a:rPr>
-              <a:t>200</a:t>
-            </a:r>
-            <a:endParaRPr lang="en-US" sz="900" dirty="0"/>
+              <a:t>Verified NOT bandwidth-bound: AllReduce microbenchmark hits 478 GB/s bus bandwidth — the NVLink per-direction ceiling. The remaining exposed comm can only shrink by sending fewer bytes.</a:t>
+            </a:r>
+            <a:endParaRPr lang="en-US" sz="1200" dirty="0"/>
           </a:p>
         </p:txBody>
       </p:sp>
       <p:sp>
         <p:nvSpPr>
-          <p:cNvPr id="10" name="Shape 8"/>
-          <p:cNvSpPr/>
-          <p:nvPr/>
-        </p:nvSpPr>
-        <p:spPr>
-          <a:xfrm>
-            <a:off x="1005840" y="1988820"/>
-            <a:ext cx="4846320" cy="0"/>
-          </a:xfrm>
-          <a:prstGeom prst="line">
-            <a:avLst/>
-          </a:prstGeom>
-          <a:noFill/>
-          <a:ln w="9525">
-            <a:solidFill>
-              <a:srgbClr val="EAEAEA"/>
-            </a:solidFill>
-            <a:prstDash val="solid"/>
-          </a:ln>
-        </p:spPr>
-      </p:sp>
-      <p:sp>
-        <p:nvSpPr>
-          <p:cNvPr id="11" name="Text 9"/>
-          <p:cNvSpPr/>
-          <p:nvPr/>
-        </p:nvSpPr>
-        <p:spPr>
-          <a:xfrm>
-            <a:off x="548640" y="1897380"/>
-            <a:ext cx="365760" cy="182880"/>
+          <p:cNvPr id="5" name="Text 3"/>
+          <p:cNvSpPr/>
+          <p:nvPr/>
+        </p:nvSpPr>
+        <p:spPr>
+          <a:xfrm>
+            <a:off x="457200" y="2697480"/>
+            <a:ext cx="8229600" cy="274320"/>
           </a:xfrm>
           <a:prstGeom prst="rect">
             <a:avLst/>
@@ -6145,57 +6462,34 @@
           <a:bodyPr wrap="square" lIns="0" tIns="0" rIns="0" bIns="0" rtlCol="0" anchor="ctr"/>
           <a:lstStyle/>
           <a:p>
-            <a:pPr algn="r" indent="0" marL="0">
+            <a:pPr indent="0" marL="0">
               <a:buNone/>
             </a:pPr>
             <a:r>
-              <a:rPr lang="en-US" sz="900" dirty="0">
+              <a:rPr lang="en-US" sz="1300" b="1" dirty="0">
                 <a:solidFill>
-                  <a:srgbClr val="8C8C8C"/>
+                  <a:srgbClr val="000000"/>
                 </a:solidFill>
                 <a:latin typeface="NVIDIA Sans" pitchFamily="34" charset="0"/>
                 <a:ea typeface="NVIDIA Sans" pitchFamily="34" charset="-122"/>
                 <a:cs typeface="NVIDIA Sans" pitchFamily="34" charset="-120"/>
               </a:rPr>
-              <a:t>300</a:t>
-            </a:r>
-            <a:endParaRPr lang="en-US" sz="900" dirty="0"/>
+              <a:t>Per-step time ledger (same accounting, one steady step from each nsys capture)</a:t>
+            </a:r>
+            <a:endParaRPr lang="en-US" sz="1300" dirty="0"/>
           </a:p>
         </p:txBody>
       </p:sp>
       <p:sp>
         <p:nvSpPr>
-          <p:cNvPr id="12" name="Shape 10"/>
-          <p:cNvSpPr/>
-          <p:nvPr/>
-        </p:nvSpPr>
-        <p:spPr>
-          <a:xfrm>
-            <a:off x="1005840" y="1371600"/>
-            <a:ext cx="4846320" cy="0"/>
-          </a:xfrm>
-          <a:prstGeom prst="line">
-            <a:avLst/>
-          </a:prstGeom>
-          <a:noFill/>
-          <a:ln w="9525">
-            <a:solidFill>
-              <a:srgbClr val="EAEAEA"/>
-            </a:solidFill>
-            <a:prstDash val="solid"/>
-          </a:ln>
-        </p:spPr>
-      </p:sp>
-      <p:sp>
-        <p:nvSpPr>
-          <p:cNvPr id="13" name="Text 11"/>
-          <p:cNvSpPr/>
-          <p:nvPr/>
-        </p:nvSpPr>
-        <p:spPr>
-          <a:xfrm>
-            <a:off x="548640" y="1280160"/>
-            <a:ext cx="365760" cy="182880"/>
+          <p:cNvPr id="6" name="Text 4"/>
+          <p:cNvSpPr/>
+          <p:nvPr/>
+        </p:nvSpPr>
+        <p:spPr>
+          <a:xfrm>
+            <a:off x="640080" y="3044952"/>
+            <a:ext cx="1463040" cy="310896"/>
           </a:xfrm>
           <a:prstGeom prst="rect">
             <a:avLst/>
@@ -6207,167 +6501,7 @@
           <a:bodyPr wrap="square" lIns="0" tIns="0" rIns="0" bIns="0" rtlCol="0" anchor="ctr"/>
           <a:lstStyle/>
           <a:p>
-            <a:pPr algn="r" indent="0" marL="0">
-              <a:buNone/>
-            </a:pPr>
-            <a:r>
-              <a:rPr lang="en-US" sz="900" dirty="0">
-                <a:solidFill>
-                  <a:srgbClr val="8C8C8C"/>
-                </a:solidFill>
-                <a:latin typeface="NVIDIA Sans" pitchFamily="34" charset="0"/>
-                <a:ea typeface="NVIDIA Sans" pitchFamily="34" charset="-122"/>
-                <a:cs typeface="NVIDIA Sans" pitchFamily="34" charset="-120"/>
-              </a:rPr>
-              <a:t>400</a:t>
-            </a:r>
-            <a:endParaRPr lang="en-US" sz="900" dirty="0"/>
-          </a:p>
-        </p:txBody>
-      </p:sp>
-      <p:sp>
-        <p:nvSpPr>
-          <p:cNvPr id="14" name="Shape 12"/>
-          <p:cNvSpPr/>
-          <p:nvPr/>
-        </p:nvSpPr>
-        <p:spPr>
-          <a:xfrm>
-            <a:off x="1005840" y="2606040"/>
-            <a:ext cx="4846320" cy="0"/>
-          </a:xfrm>
-          <a:prstGeom prst="line">
-            <a:avLst/>
-          </a:prstGeom>
-          <a:noFill/>
-          <a:ln w="15875">
-            <a:solidFill>
-              <a:srgbClr val="5E5E5E"/>
-            </a:solidFill>
-            <a:prstDash val="dash"/>
-          </a:ln>
-        </p:spPr>
-      </p:sp>
-      <p:sp>
-        <p:nvSpPr>
-          <p:cNvPr id="15" name="Text 13"/>
-          <p:cNvSpPr/>
-          <p:nvPr/>
-        </p:nvSpPr>
-        <p:spPr>
-          <a:xfrm>
-            <a:off x="1051560" y="1399032"/>
-            <a:ext cx="4114800" cy="182880"/>
-          </a:xfrm>
-          <a:prstGeom prst="rect">
-            <a:avLst/>
-          </a:prstGeom>
-          <a:noFill/>
-          <a:ln/>
-        </p:spPr>
-        <p:txBody>
-          <a:bodyPr wrap="square" lIns="0" tIns="0" rIns="0" bIns="0" rtlCol="0" anchor="ctr"/>
-          <a:lstStyle/>
-          <a:p>
             <a:pPr indent="0" marL="0">
-              <a:buNone/>
-            </a:pPr>
-            <a:r>
-              <a:rPr lang="en-US" sz="900" i="1" dirty="0">
-                <a:solidFill>
-                  <a:srgbClr val="5E5E5E"/>
-                </a:solidFill>
-                <a:latin typeface="NVIDIA Sans" pitchFamily="34" charset="0"/>
-                <a:ea typeface="NVIDIA Sans" pitchFamily="34" charset="-122"/>
-                <a:cs typeface="NVIDIA Sans" pitchFamily="34" charset="-120"/>
-              </a:rPr>
-              <a:t>samples / node / s   ·   dashed = 200/node/s target</a:t>
-            </a:r>
-            <a:endParaRPr lang="en-US" sz="900" dirty="0"/>
-          </a:p>
-        </p:txBody>
-      </p:sp>
-      <p:sp>
-        <p:nvSpPr>
-          <p:cNvPr id="16" name="Shape 14"/>
-          <p:cNvSpPr/>
-          <p:nvPr/>
-        </p:nvSpPr>
-        <p:spPr>
-          <a:xfrm>
-            <a:off x="1268730" y="2254225"/>
-            <a:ext cx="685800" cy="1586255"/>
-          </a:xfrm>
-          <a:prstGeom prst="rect">
-            <a:avLst/>
-          </a:prstGeom>
-          <a:solidFill>
-            <a:srgbClr val="008564"/>
-          </a:solidFill>
-          <a:ln/>
-        </p:spPr>
-      </p:sp>
-      <p:sp>
-        <p:nvSpPr>
-          <p:cNvPr id="17" name="Text 15"/>
-          <p:cNvSpPr/>
-          <p:nvPr/>
-        </p:nvSpPr>
-        <p:spPr>
-          <a:xfrm>
-            <a:off x="1131570" y="1998193"/>
-            <a:ext cx="960120" cy="228600"/>
-          </a:xfrm>
-          <a:prstGeom prst="rect">
-            <a:avLst/>
-          </a:prstGeom>
-          <a:noFill/>
-          <a:ln/>
-        </p:spPr>
-        <p:txBody>
-          <a:bodyPr wrap="square" lIns="0" tIns="0" rIns="0" bIns="0" rtlCol="0" anchor="ctr"/>
-          <a:lstStyle/>
-          <a:p>
-            <a:pPr algn="ctr" indent="0" marL="0">
-              <a:buNone/>
-            </a:pPr>
-            <a:r>
-              <a:rPr lang="en-US" sz="1300" b="1" dirty="0">
-                <a:solidFill>
-                  <a:srgbClr val="008564"/>
-                </a:solidFill>
-                <a:latin typeface="NVIDIA Sans" pitchFamily="34" charset="0"/>
-                <a:ea typeface="NVIDIA Sans" pitchFamily="34" charset="-122"/>
-                <a:cs typeface="NVIDIA Sans" pitchFamily="34" charset="-120"/>
-              </a:rPr>
-              <a:t>257</a:t>
-            </a:r>
-            <a:endParaRPr lang="en-US" sz="1300" dirty="0"/>
-          </a:p>
-        </p:txBody>
-      </p:sp>
-      <p:sp>
-        <p:nvSpPr>
-          <p:cNvPr id="18" name="Text 16"/>
-          <p:cNvSpPr/>
-          <p:nvPr/>
-        </p:nvSpPr>
-        <p:spPr>
-          <a:xfrm>
-            <a:off x="1131570" y="3895344"/>
-            <a:ext cx="960120" cy="201168"/>
-          </a:xfrm>
-          <a:prstGeom prst="rect">
-            <a:avLst/>
-          </a:prstGeom>
-          <a:noFill/>
-          <a:ln/>
-        </p:spPr>
-        <p:txBody>
-          <a:bodyPr wrap="square" lIns="0" tIns="0" rIns="0" bIns="0" rtlCol="0" anchor="ctr"/>
-          <a:lstStyle/>
-          <a:p>
-            <a:pPr algn="ctr" indent="0" marL="0">
               <a:buNone/>
             </a:pPr>
             <a:r>
@@ -6379,7 +6513,7 @@
                 <a:ea typeface="NVIDIA Sans" pitchFamily="34" charset="-122"/>
                 <a:cs typeface="NVIDIA Sans" pitchFamily="34" charset="-120"/>
               </a:rPr>
-              <a:t>bs 8</a:t>
+              <a:t>Baseline</a:t>
             </a:r>
             <a:endParaRPr lang="en-US" sz="1100" dirty="0"/>
           </a:p>
@@ -6387,14 +6521,34 @@
       </p:sp>
       <p:sp>
         <p:nvSpPr>
-          <p:cNvPr id="19" name="Text 17"/>
-          <p:cNvSpPr/>
-          <p:nvPr/>
-        </p:nvSpPr>
-        <p:spPr>
-          <a:xfrm>
-            <a:off x="1085850" y="4096512"/>
-            <a:ext cx="1051560" cy="182880"/>
+          <p:cNvPr id="7" name="Shape 5"/>
+          <p:cNvSpPr/>
+          <p:nvPr/>
+        </p:nvSpPr>
+        <p:spPr>
+          <a:xfrm>
+            <a:off x="2148840" y="3063240"/>
+            <a:ext cx="3605332" cy="310896"/>
+          </a:xfrm>
+          <a:prstGeom prst="rect">
+            <a:avLst/>
+          </a:prstGeom>
+          <a:solidFill>
+            <a:srgbClr val="76B900"/>
+          </a:solidFill>
+          <a:ln/>
+        </p:spPr>
+      </p:sp>
+      <p:sp>
+        <p:nvSpPr>
+          <p:cNvPr id="8" name="Text 6"/>
+          <p:cNvSpPr/>
+          <p:nvPr/>
+        </p:nvSpPr>
+        <p:spPr>
+          <a:xfrm>
+            <a:off x="2148840" y="3063240"/>
+            <a:ext cx="3605332" cy="310896"/>
           </a:xfrm>
           <a:prstGeom prst="rect">
             <a:avLst/>
@@ -6410,7 +6564,86 @@
               <a:buNone/>
             </a:pPr>
             <a:r>
-              <a:rPr lang="en-US" sz="900" dirty="0">
+              <a:rPr lang="en-US" sz="1000" b="1" dirty="0">
+                <a:solidFill>
+                  <a:srgbClr val="FFFFFF"/>
+                </a:solidFill>
+                <a:latin typeface="NVIDIA Sans" pitchFamily="34" charset="0"/>
+                <a:ea typeface="NVIDIA Sans" pitchFamily="34" charset="-122"/>
+                <a:cs typeface="NVIDIA Sans" pitchFamily="34" charset="-120"/>
+              </a:rPr>
+              <a:t>540</a:t>
+            </a:r>
+            <a:endParaRPr lang="en-US" sz="1000" dirty="0"/>
+          </a:p>
+        </p:txBody>
+      </p:sp>
+      <p:sp>
+        <p:nvSpPr>
+          <p:cNvPr id="9" name="Shape 7"/>
+          <p:cNvSpPr/>
+          <p:nvPr/>
+        </p:nvSpPr>
+        <p:spPr>
+          <a:xfrm>
+            <a:off x="5754172" y="3063240"/>
+            <a:ext cx="411123" cy="310896"/>
+          </a:xfrm>
+          <a:prstGeom prst="rect">
+            <a:avLst/>
+          </a:prstGeom>
+          <a:solidFill>
+            <a:srgbClr val="0071C5"/>
+          </a:solidFill>
+          <a:ln/>
+        </p:spPr>
+      </p:sp>
+      <p:sp>
+        <p:nvSpPr>
+          <p:cNvPr id="10" name="Shape 8"/>
+          <p:cNvSpPr/>
+          <p:nvPr/>
+        </p:nvSpPr>
+        <p:spPr>
+          <a:xfrm>
+            <a:off x="6165295" y="3063240"/>
+            <a:ext cx="1368852" cy="310896"/>
+          </a:xfrm>
+          <a:prstGeom prst="rect">
+            <a:avLst/>
+          </a:prstGeom>
+          <a:solidFill>
+            <a:srgbClr val="D9D9D9"/>
+          </a:solidFill>
+          <a:ln/>
+        </p:spPr>
+      </p:sp>
+      <p:sp>
+        <p:nvSpPr>
+          <p:cNvPr id="11" name="Text 9"/>
+          <p:cNvSpPr/>
+          <p:nvPr/>
+        </p:nvSpPr>
+        <p:spPr>
+          <a:xfrm>
+            <a:off x="6165295" y="3063240"/>
+            <a:ext cx="1368852" cy="310896"/>
+          </a:xfrm>
+          <a:prstGeom prst="rect">
+            <a:avLst/>
+          </a:prstGeom>
+          <a:noFill/>
+          <a:ln/>
+        </p:spPr>
+        <p:txBody>
+          <a:bodyPr wrap="square" lIns="0" tIns="0" rIns="0" bIns="0" rtlCol="0" anchor="ctr"/>
+          <a:lstStyle/>
+          <a:p>
+            <a:pPr algn="ctr" indent="0" marL="0">
+              <a:buNone/>
+            </a:pPr>
+            <a:r>
+              <a:rPr lang="en-US" sz="1000" b="1" dirty="0">
                 <a:solidFill>
                   <a:srgbClr val="5E5E5E"/>
                 </a:solidFill>
@@ -6418,42 +6651,22 @@
                 <a:ea typeface="NVIDIA Sans" pitchFamily="34" charset="-122"/>
                 <a:cs typeface="NVIDIA Sans" pitchFamily="34" charset="-120"/>
               </a:rPr>
-              <a:t>MFU 23.1%</a:t>
-            </a:r>
-            <a:endParaRPr lang="en-US" sz="900" dirty="0"/>
+              <a:t>205</a:t>
+            </a:r>
+            <a:endParaRPr lang="en-US" sz="1000" dirty="0"/>
           </a:p>
         </p:txBody>
       </p:sp>
       <p:sp>
         <p:nvSpPr>
-          <p:cNvPr id="20" name="Shape 18"/>
-          <p:cNvSpPr/>
-          <p:nvPr/>
-        </p:nvSpPr>
-        <p:spPr>
-          <a:xfrm>
-            <a:off x="2480310" y="1883893"/>
-            <a:ext cx="685800" cy="1956587"/>
-          </a:xfrm>
-          <a:prstGeom prst="rect">
-            <a:avLst/>
-          </a:prstGeom>
-          <a:solidFill>
-            <a:srgbClr val="008564"/>
-          </a:solidFill>
-          <a:ln/>
-        </p:spPr>
-      </p:sp>
-      <p:sp>
-        <p:nvSpPr>
-          <p:cNvPr id="21" name="Text 19"/>
-          <p:cNvSpPr/>
-          <p:nvPr/>
-        </p:nvSpPr>
-        <p:spPr>
-          <a:xfrm>
-            <a:off x="2343150" y="1627861"/>
-            <a:ext cx="960120" cy="228600"/>
+          <p:cNvPr id="12" name="Text 10"/>
+          <p:cNvSpPr/>
+          <p:nvPr/>
+        </p:nvSpPr>
+        <p:spPr>
+          <a:xfrm>
+            <a:off x="7589010" y="3063240"/>
+            <a:ext cx="822960" cy="310896"/>
           </a:xfrm>
           <a:prstGeom prst="rect">
             <a:avLst/>
@@ -6465,46 +6678,7 @@
           <a:bodyPr wrap="square" lIns="0" tIns="0" rIns="0" bIns="0" rtlCol="0" anchor="ctr"/>
           <a:lstStyle/>
           <a:p>
-            <a:pPr algn="ctr" indent="0" marL="0">
-              <a:buNone/>
-            </a:pPr>
-            <a:r>
-              <a:rPr lang="en-US" sz="1300" b="1" dirty="0">
-                <a:solidFill>
-                  <a:srgbClr val="008564"/>
-                </a:solidFill>
-                <a:latin typeface="NVIDIA Sans" pitchFamily="34" charset="0"/>
-                <a:ea typeface="NVIDIA Sans" pitchFamily="34" charset="-122"/>
-                <a:cs typeface="NVIDIA Sans" pitchFamily="34" charset="-120"/>
-              </a:rPr>
-              <a:t>317</a:t>
-            </a:r>
-            <a:endParaRPr lang="en-US" sz="1300" dirty="0"/>
-          </a:p>
-        </p:txBody>
-      </p:sp>
-      <p:sp>
-        <p:nvSpPr>
-          <p:cNvPr id="22" name="Text 20"/>
-          <p:cNvSpPr/>
-          <p:nvPr/>
-        </p:nvSpPr>
-        <p:spPr>
-          <a:xfrm>
-            <a:off x="2343150" y="3895344"/>
-            <a:ext cx="960120" cy="201168"/>
-          </a:xfrm>
-          <a:prstGeom prst="rect">
-            <a:avLst/>
-          </a:prstGeom>
-          <a:noFill/>
-          <a:ln/>
-        </p:spPr>
-        <p:txBody>
-          <a:bodyPr wrap="square" lIns="0" tIns="0" rIns="0" bIns="0" rtlCol="0" anchor="ctr"/>
-          <a:lstStyle/>
-          <a:p>
-            <a:pPr algn="ctr" indent="0" marL="0">
+            <a:pPr indent="0" marL="0">
               <a:buNone/>
             </a:pPr>
             <a:r>
@@ -6516,7 +6690,7 @@
                 <a:ea typeface="NVIDIA Sans" pitchFamily="34" charset="-122"/>
                 <a:cs typeface="NVIDIA Sans" pitchFamily="34" charset="-120"/>
               </a:rPr>
-              <a:t>bs 16</a:t>
+              <a:t>807 ms</a:t>
             </a:r>
             <a:endParaRPr lang="en-US" sz="1100" dirty="0"/>
           </a:p>
@@ -6524,14 +6698,14 @@
       </p:sp>
       <p:sp>
         <p:nvSpPr>
-          <p:cNvPr id="23" name="Text 21"/>
-          <p:cNvSpPr/>
-          <p:nvPr/>
-        </p:nvSpPr>
-        <p:spPr>
-          <a:xfrm>
-            <a:off x="2297430" y="4096512"/>
-            <a:ext cx="1051560" cy="182880"/>
+          <p:cNvPr id="13" name="Text 11"/>
+          <p:cNvSpPr/>
+          <p:nvPr/>
+        </p:nvSpPr>
+        <p:spPr>
+          <a:xfrm>
+            <a:off x="640080" y="3502152"/>
+            <a:ext cx="1463040" cy="310896"/>
           </a:xfrm>
           <a:prstGeom prst="rect">
             <a:avLst/>
@@ -6543,105 +6717,7 @@
           <a:bodyPr wrap="square" lIns="0" tIns="0" rIns="0" bIns="0" rtlCol="0" anchor="ctr"/>
           <a:lstStyle/>
           <a:p>
-            <a:pPr algn="ctr" indent="0" marL="0">
-              <a:buNone/>
-            </a:pPr>
-            <a:r>
-              <a:rPr lang="en-US" sz="900" dirty="0">
-                <a:solidFill>
-                  <a:srgbClr val="5E5E5E"/>
-                </a:solidFill>
-                <a:latin typeface="NVIDIA Sans" pitchFamily="34" charset="0"/>
-                <a:ea typeface="NVIDIA Sans" pitchFamily="34" charset="-122"/>
-                <a:cs typeface="NVIDIA Sans" pitchFamily="34" charset="-120"/>
-              </a:rPr>
-              <a:t>MFU 28.4%</a:t>
-            </a:r>
-            <a:endParaRPr lang="en-US" sz="900" dirty="0"/>
-          </a:p>
-        </p:txBody>
-      </p:sp>
-      <p:sp>
-        <p:nvSpPr>
-          <p:cNvPr id="24" name="Shape 22"/>
-          <p:cNvSpPr/>
-          <p:nvPr/>
-        </p:nvSpPr>
-        <p:spPr>
-          <a:xfrm>
-            <a:off x="3691890" y="1741932"/>
-            <a:ext cx="685800" cy="2098548"/>
-          </a:xfrm>
-          <a:prstGeom prst="rect">
-            <a:avLst/>
-          </a:prstGeom>
-          <a:solidFill>
-            <a:srgbClr val="76B900"/>
-          </a:solidFill>
-          <a:ln/>
-        </p:spPr>
-      </p:sp>
-      <p:sp>
-        <p:nvSpPr>
-          <p:cNvPr id="25" name="Text 23"/>
-          <p:cNvSpPr/>
-          <p:nvPr/>
-        </p:nvSpPr>
-        <p:spPr>
-          <a:xfrm>
-            <a:off x="3554730" y="1485900"/>
-            <a:ext cx="960120" cy="228600"/>
-          </a:xfrm>
-          <a:prstGeom prst="rect">
-            <a:avLst/>
-          </a:prstGeom>
-          <a:noFill/>
-          <a:ln/>
-        </p:spPr>
-        <p:txBody>
-          <a:bodyPr wrap="square" lIns="0" tIns="0" rIns="0" bIns="0" rtlCol="0" anchor="ctr"/>
-          <a:lstStyle/>
-          <a:p>
-            <a:pPr algn="ctr" indent="0" marL="0">
-              <a:buNone/>
-            </a:pPr>
-            <a:r>
-              <a:rPr lang="en-US" sz="1300" b="1" dirty="0">
-                <a:solidFill>
-                  <a:srgbClr val="76B900"/>
-                </a:solidFill>
-                <a:latin typeface="NVIDIA Sans" pitchFamily="34" charset="0"/>
-                <a:ea typeface="NVIDIA Sans" pitchFamily="34" charset="-122"/>
-                <a:cs typeface="NVIDIA Sans" pitchFamily="34" charset="-120"/>
-              </a:rPr>
-              <a:t>340</a:t>
-            </a:r>
-            <a:endParaRPr lang="en-US" sz="1300" dirty="0"/>
-          </a:p>
-        </p:txBody>
-      </p:sp>
-      <p:sp>
-        <p:nvSpPr>
-          <p:cNvPr id="26" name="Text 24"/>
-          <p:cNvSpPr/>
-          <p:nvPr/>
-        </p:nvSpPr>
-        <p:spPr>
-          <a:xfrm>
-            <a:off x="3554730" y="3895344"/>
-            <a:ext cx="960120" cy="201168"/>
-          </a:xfrm>
-          <a:prstGeom prst="rect">
-            <a:avLst/>
-          </a:prstGeom>
-          <a:noFill/>
-          <a:ln/>
-        </p:spPr>
-        <p:txBody>
-          <a:bodyPr wrap="square" lIns="0" tIns="0" rIns="0" bIns="0" rtlCol="0" anchor="ctr"/>
-          <a:lstStyle/>
-          <a:p>
-            <a:pPr algn="ctr" indent="0" marL="0">
+            <a:pPr indent="0" marL="0">
               <a:buNone/>
             </a:pPr>
             <a:r>
@@ -6653,7 +6729,7 @@
                 <a:ea typeface="NVIDIA Sans" pitchFamily="34" charset="-122"/>
                 <a:cs typeface="NVIDIA Sans" pitchFamily="34" charset="-120"/>
               </a:rPr>
-              <a:t>bs 24</a:t>
+              <a:t>Optimized</a:t>
             </a:r>
             <a:endParaRPr lang="en-US" sz="1100" dirty="0"/>
           </a:p>
@@ -6661,14 +6737,34 @@
       </p:sp>
       <p:sp>
         <p:nvSpPr>
-          <p:cNvPr id="27" name="Text 25"/>
-          <p:cNvSpPr/>
-          <p:nvPr/>
-        </p:nvSpPr>
-        <p:spPr>
-          <a:xfrm>
-            <a:off x="3509010" y="4096512"/>
-            <a:ext cx="1051560" cy="182880"/>
+          <p:cNvPr id="14" name="Shape 12"/>
+          <p:cNvSpPr/>
+          <p:nvPr/>
+        </p:nvSpPr>
+        <p:spPr>
+          <a:xfrm>
+            <a:off x="2148840" y="3520440"/>
+            <a:ext cx="1169297" cy="310896"/>
+          </a:xfrm>
+          <a:prstGeom prst="rect">
+            <a:avLst/>
+          </a:prstGeom>
+          <a:solidFill>
+            <a:srgbClr val="76B900"/>
+          </a:solidFill>
+          <a:ln/>
+        </p:spPr>
+      </p:sp>
+      <p:sp>
+        <p:nvSpPr>
+          <p:cNvPr id="15" name="Text 13"/>
+          <p:cNvSpPr/>
+          <p:nvPr/>
+        </p:nvSpPr>
+        <p:spPr>
+          <a:xfrm>
+            <a:off x="2148840" y="3520440"/>
+            <a:ext cx="1169297" cy="310896"/>
           </a:xfrm>
           <a:prstGeom prst="rect">
             <a:avLst/>
@@ -6684,50 +6780,70 @@
               <a:buNone/>
             </a:pPr>
             <a:r>
-              <a:rPr lang="en-US" sz="900" dirty="0">
+              <a:rPr lang="en-US" sz="1000" b="1" dirty="0">
                 <a:solidFill>
-                  <a:srgbClr val="5E5E5E"/>
+                  <a:srgbClr val="FFFFFF"/>
                 </a:solidFill>
                 <a:latin typeface="NVIDIA Sans" pitchFamily="34" charset="0"/>
                 <a:ea typeface="NVIDIA Sans" pitchFamily="34" charset="-122"/>
                 <a:cs typeface="NVIDIA Sans" pitchFamily="34" charset="-120"/>
               </a:rPr>
-              <a:t>MFU 30.5%</a:t>
-            </a:r>
-            <a:endParaRPr lang="en-US" sz="900" dirty="0"/>
+              <a:t>175</a:t>
+            </a:r>
+            <a:endParaRPr lang="en-US" sz="1000" dirty="0"/>
           </a:p>
         </p:txBody>
       </p:sp>
       <p:sp>
         <p:nvSpPr>
-          <p:cNvPr id="28" name="Shape 26"/>
-          <p:cNvSpPr/>
-          <p:nvPr/>
-        </p:nvSpPr>
-        <p:spPr>
-          <a:xfrm>
-            <a:off x="4903470" y="2235708"/>
-            <a:ext cx="685800" cy="1604772"/>
-          </a:xfrm>
-          <a:prstGeom prst="rect">
-            <a:avLst/>
-          </a:prstGeom>
-          <a:solidFill>
-            <a:srgbClr val="890C58"/>
-          </a:solidFill>
-          <a:ln/>
-        </p:spPr>
-      </p:sp>
-      <p:sp>
-        <p:nvSpPr>
-          <p:cNvPr id="29" name="Text 27"/>
-          <p:cNvSpPr/>
-          <p:nvPr/>
-        </p:nvSpPr>
-        <p:spPr>
-          <a:xfrm>
-            <a:off x="4766310" y="1979676"/>
-            <a:ext cx="960120" cy="228600"/>
+          <p:cNvPr id="16" name="Shape 14"/>
+          <p:cNvSpPr/>
+          <p:nvPr/>
+        </p:nvSpPr>
+        <p:spPr>
+          <a:xfrm>
+            <a:off x="3318137" y="3520440"/>
+            <a:ext cx="148164" cy="310896"/>
+          </a:xfrm>
+          <a:prstGeom prst="rect">
+            <a:avLst/>
+          </a:prstGeom>
+          <a:solidFill>
+            <a:srgbClr val="0071C5"/>
+          </a:solidFill>
+          <a:ln/>
+        </p:spPr>
+      </p:sp>
+      <p:sp>
+        <p:nvSpPr>
+          <p:cNvPr id="17" name="Shape 15"/>
+          <p:cNvSpPr/>
+          <p:nvPr/>
+        </p:nvSpPr>
+        <p:spPr>
+          <a:xfrm>
+            <a:off x="3466301" y="3520440"/>
+            <a:ext cx="289655" cy="310896"/>
+          </a:xfrm>
+          <a:prstGeom prst="rect">
+            <a:avLst/>
+          </a:prstGeom>
+          <a:solidFill>
+            <a:srgbClr val="D9D9D9"/>
+          </a:solidFill>
+          <a:ln/>
+        </p:spPr>
+      </p:sp>
+      <p:sp>
+        <p:nvSpPr>
+          <p:cNvPr id="18" name="Text 16"/>
+          <p:cNvSpPr/>
+          <p:nvPr/>
+        </p:nvSpPr>
+        <p:spPr>
+          <a:xfrm>
+            <a:off x="3810820" y="3520440"/>
+            <a:ext cx="822960" cy="310896"/>
           </a:xfrm>
           <a:prstGeom prst="rect">
             <a:avLst/>
@@ -6739,46 +6855,7 @@
           <a:bodyPr wrap="square" lIns="0" tIns="0" rIns="0" bIns="0" rtlCol="0" anchor="ctr"/>
           <a:lstStyle/>
           <a:p>
-            <a:pPr algn="ctr" indent="0" marL="0">
-              <a:buNone/>
-            </a:pPr>
-            <a:r>
-              <a:rPr lang="en-US" sz="1300" b="1" dirty="0">
-                <a:solidFill>
-                  <a:srgbClr val="890C58"/>
-                </a:solidFill>
-                <a:latin typeface="NVIDIA Sans" pitchFamily="34" charset="0"/>
-                <a:ea typeface="NVIDIA Sans" pitchFamily="34" charset="-122"/>
-                <a:cs typeface="NVIDIA Sans" pitchFamily="34" charset="-120"/>
-              </a:rPr>
-              <a:t>260</a:t>
-            </a:r>
-            <a:endParaRPr lang="en-US" sz="1300" dirty="0"/>
-          </a:p>
-        </p:txBody>
-      </p:sp>
-      <p:sp>
-        <p:nvSpPr>
-          <p:cNvPr id="30" name="Text 28"/>
-          <p:cNvSpPr/>
-          <p:nvPr/>
-        </p:nvSpPr>
-        <p:spPr>
-          <a:xfrm>
-            <a:off x="4766310" y="3895344"/>
-            <a:ext cx="960120" cy="201168"/>
-          </a:xfrm>
-          <a:prstGeom prst="rect">
-            <a:avLst/>
-          </a:prstGeom>
-          <a:noFill/>
-          <a:ln/>
-        </p:spPr>
-        <p:txBody>
-          <a:bodyPr wrap="square" lIns="0" tIns="0" rIns="0" bIns="0" rtlCol="0" anchor="ctr"/>
-          <a:lstStyle/>
-          <a:p>
-            <a:pPr algn="ctr" indent="0" marL="0">
+            <a:pPr indent="0" marL="0">
               <a:buNone/>
             </a:pPr>
             <a:r>
@@ -6790,7 +6867,7 @@
                 <a:ea typeface="NVIDIA Sans" pitchFamily="34" charset="-122"/>
                 <a:cs typeface="NVIDIA Sans" pitchFamily="34" charset="-120"/>
               </a:rPr>
-              <a:t>bs 32</a:t>
+              <a:t>249 ms</a:t>
             </a:r>
             <a:endParaRPr lang="en-US" sz="1100" dirty="0"/>
           </a:p>
@@ -6798,14 +6875,34 @@
       </p:sp>
       <p:sp>
         <p:nvSpPr>
-          <p:cNvPr id="31" name="Text 29"/>
-          <p:cNvSpPr/>
-          <p:nvPr/>
-        </p:nvSpPr>
-        <p:spPr>
-          <a:xfrm>
-            <a:off x="4720590" y="4096512"/>
-            <a:ext cx="1051560" cy="182880"/>
+          <p:cNvPr id="19" name="Shape 17"/>
+          <p:cNvSpPr/>
+          <p:nvPr/>
+        </p:nvSpPr>
+        <p:spPr>
+          <a:xfrm>
+            <a:off x="2148840" y="4005072"/>
+            <a:ext cx="164592" cy="128016"/>
+          </a:xfrm>
+          <a:prstGeom prst="rect">
+            <a:avLst/>
+          </a:prstGeom>
+          <a:solidFill>
+            <a:srgbClr val="76B900"/>
+          </a:solidFill>
+          <a:ln/>
+        </p:spPr>
+      </p:sp>
+      <p:sp>
+        <p:nvSpPr>
+          <p:cNvPr id="20" name="Text 18"/>
+          <p:cNvSpPr/>
+          <p:nvPr/>
+        </p:nvSpPr>
+        <p:spPr>
+          <a:xfrm>
+            <a:off x="2368296" y="3931920"/>
+            <a:ext cx="1600200" cy="274320"/>
           </a:xfrm>
           <a:prstGeom prst="rect">
             <a:avLst/>
@@ -6817,11 +6914,11 @@
           <a:bodyPr wrap="square" lIns="0" tIns="0" rIns="0" bIns="0" rtlCol="0" anchor="ctr"/>
           <a:lstStyle/>
           <a:p>
-            <a:pPr algn="ctr" indent="0" marL="0">
+            <a:pPr indent="0" marL="0">
               <a:buNone/>
             </a:pPr>
             <a:r>
-              <a:rPr lang="en-US" sz="900" dirty="0">
+              <a:rPr lang="en-US" sz="1000" dirty="0">
                 <a:solidFill>
                   <a:srgbClr val="5E5E5E"/>
                 </a:solidFill>
@@ -6829,22 +6926,42 @@
                 <a:ea typeface="NVIDIA Sans" pitchFamily="34" charset="-122"/>
                 <a:cs typeface="NVIDIA Sans" pitchFamily="34" charset="-120"/>
               </a:rPr>
-              <a:t>MFU 23.3%</a:t>
-            </a:r>
-            <a:endParaRPr lang="en-US" sz="900" dirty="0"/>
+              <a:t>Compute busy</a:t>
+            </a:r>
+            <a:endParaRPr lang="en-US" sz="1000" dirty="0"/>
           </a:p>
         </p:txBody>
       </p:sp>
       <p:sp>
         <p:nvSpPr>
-          <p:cNvPr id="32" name="Text 30"/>
-          <p:cNvSpPr/>
-          <p:nvPr/>
-        </p:nvSpPr>
-        <p:spPr>
-          <a:xfrm>
-            <a:off x="1051560" y="1399032"/>
-            <a:ext cx="1828800" cy="182880"/>
+          <p:cNvPr id="21" name="Shape 19"/>
+          <p:cNvSpPr/>
+          <p:nvPr/>
+        </p:nvSpPr>
+        <p:spPr>
+          <a:xfrm>
+            <a:off x="3977640" y="4005072"/>
+            <a:ext cx="164592" cy="128016"/>
+          </a:xfrm>
+          <a:prstGeom prst="rect">
+            <a:avLst/>
+          </a:prstGeom>
+          <a:solidFill>
+            <a:srgbClr val="0071C5"/>
+          </a:solidFill>
+          <a:ln/>
+        </p:spPr>
+      </p:sp>
+      <p:sp>
+        <p:nvSpPr>
+          <p:cNvPr id="22" name="Text 20"/>
+          <p:cNvSpPr/>
+          <p:nvPr/>
+        </p:nvSpPr>
+        <p:spPr>
+          <a:xfrm>
+            <a:off x="4197096" y="3931920"/>
+            <a:ext cx="1600200" cy="274320"/>
           </a:xfrm>
           <a:prstGeom prst="rect">
             <a:avLst/>
@@ -6860,7 +6977,105 @@
               <a:buNone/>
             </a:pPr>
             <a:r>
-              <a:rPr lang="en-US" sz="900" i="1" dirty="0">
+              <a:rPr lang="en-US" sz="1000" dirty="0">
+                <a:solidFill>
+                  <a:srgbClr val="5E5E5E"/>
+                </a:solidFill>
+                <a:latin typeface="NVIDIA Sans" pitchFamily="34" charset="0"/>
+                <a:ea typeface="NVIDIA Sans" pitchFamily="34" charset="-122"/>
+                <a:cs typeface="NVIDIA Sans" pitchFamily="34" charset="-120"/>
+              </a:rPr>
+              <a:t>Exposed comm</a:t>
+            </a:r>
+            <a:endParaRPr lang="en-US" sz="1000" dirty="0"/>
+          </a:p>
+        </p:txBody>
+      </p:sp>
+      <p:sp>
+        <p:nvSpPr>
+          <p:cNvPr id="23" name="Shape 21"/>
+          <p:cNvSpPr/>
+          <p:nvPr/>
+        </p:nvSpPr>
+        <p:spPr>
+          <a:xfrm>
+            <a:off x="5806440" y="4005072"/>
+            <a:ext cx="164592" cy="128016"/>
+          </a:xfrm>
+          <a:prstGeom prst="rect">
+            <a:avLst/>
+          </a:prstGeom>
+          <a:solidFill>
+            <a:srgbClr val="D9D9D9"/>
+          </a:solidFill>
+          <a:ln/>
+        </p:spPr>
+      </p:sp>
+      <p:sp>
+        <p:nvSpPr>
+          <p:cNvPr id="24" name="Text 22"/>
+          <p:cNvSpPr/>
+          <p:nvPr/>
+        </p:nvSpPr>
+        <p:spPr>
+          <a:xfrm>
+            <a:off x="6025896" y="3931920"/>
+            <a:ext cx="1600200" cy="274320"/>
+          </a:xfrm>
+          <a:prstGeom prst="rect">
+            <a:avLst/>
+          </a:prstGeom>
+          <a:noFill/>
+          <a:ln/>
+        </p:spPr>
+        <p:txBody>
+          <a:bodyPr wrap="square" lIns="0" tIns="0" rIns="0" bIns="0" rtlCol="0" anchor="ctr"/>
+          <a:lstStyle/>
+          <a:p>
+            <a:pPr indent="0" marL="0">
+              <a:buNone/>
+            </a:pPr>
+            <a:r>
+              <a:rPr lang="en-US" sz="1000" dirty="0">
+                <a:solidFill>
+                  <a:srgbClr val="5E5E5E"/>
+                </a:solidFill>
+                <a:latin typeface="NVIDIA Sans" pitchFamily="34" charset="0"/>
+                <a:ea typeface="NVIDIA Sans" pitchFamily="34" charset="-122"/>
+                <a:cs typeface="NVIDIA Sans" pitchFamily="34" charset="-120"/>
+              </a:rPr>
+              <a:t>Idle / launch gaps</a:t>
+            </a:r>
+            <a:endParaRPr lang="en-US" sz="1000" dirty="0"/>
+          </a:p>
+        </p:txBody>
+      </p:sp>
+      <p:sp>
+        <p:nvSpPr>
+          <p:cNvPr id="25" name="Text 23"/>
+          <p:cNvSpPr/>
+          <p:nvPr/>
+        </p:nvSpPr>
+        <p:spPr>
+          <a:xfrm>
+            <a:off x="457200" y="4224528"/>
+            <a:ext cx="8229600" cy="228600"/>
+          </a:xfrm>
+          <a:prstGeom prst="rect">
+            <a:avLst/>
+          </a:prstGeom>
+          <a:noFill/>
+          <a:ln/>
+        </p:spPr>
+        <p:txBody>
+          <a:bodyPr wrap="square" lIns="0" tIns="0" rIns="0" bIns="0" rtlCol="0" anchor="ctr"/>
+          <a:lstStyle/>
+          <a:p>
+            <a:pPr indent="0" marL="0">
+              <a:buNone/>
+            </a:pPr>
+            <a:r>
+              <a:rPr lang="en-US" sz="950" i="1" dirty="0">
                 <a:solidFill>
                   <a:srgbClr val="8C8C8C"/>
                 </a:solidFill>
@@ -6868,91 +7083,15 @@
                 <a:ea typeface="NVIDIA Sans" pitchFamily="34" charset="-122"/>
                 <a:cs typeface="NVIDIA Sans" pitchFamily="34" charset="-120"/>
               </a:rPr>
-              <a:t>samples / node / s</a:t>
-            </a:r>
-            <a:endParaRPr lang="en-US" sz="900" dirty="0"/>
+              <a:t>Gradient AllReduce 15.1 GB/step + optimizer AllGather 15.1 GB/step (bf16). Idle from 254 ms to 43 ms.</a:t>
+            </a:r>
+            <a:endParaRPr lang="en-US" sz="950" dirty="0"/>
           </a:p>
         </p:txBody>
       </p:sp>
       <p:sp>
         <p:nvSpPr>
-          <p:cNvPr id="33" name="Text 31"/>
-          <p:cNvSpPr/>
-          <p:nvPr/>
-        </p:nvSpPr>
-        <p:spPr>
-          <a:xfrm>
-            <a:off x="6400800" y="1417320"/>
-            <a:ext cx="2286000" cy="2743200"/>
-          </a:xfrm>
-          <a:prstGeom prst="rect">
-            <a:avLst/>
-          </a:prstGeom>
-          <a:noFill/>
-          <a:ln/>
-        </p:spPr>
-        <p:txBody>
-          <a:bodyPr wrap="square" lIns="0" tIns="0" rIns="0" bIns="0" rtlCol="0" anchor="t"/>
-          <a:lstStyle/>
-          <a:p>
-            <a:pPr marL="342900" indent="-342900">
-              <a:buSzPct val="100000"/>
-              <a:buChar char="•"/>
-            </a:pPr>
-            <a:r>
-              <a:rPr lang="en-US" sz="1150" dirty="0">
-                <a:solidFill>
-                  <a:srgbClr val="000000"/>
-                </a:solidFill>
-                <a:latin typeface="NVIDIA Sans" pitchFamily="34" charset="0"/>
-                <a:ea typeface="NVIDIA Sans" pitchFamily="34" charset="-122"/>
-                <a:cs typeface="NVIDIA Sans" pitchFamily="34" charset="-120"/>
-              </a:rPr>
-              <a:t>Batching amortizes launch and comm costs: MFU climbs 23% → 30.5%</a:t>
-            </a:r>
-            <a:endParaRPr lang="en-US" sz="1150" dirty="0"/>
-          </a:p>
-          <a:p>
-            <a:pPr marL="342900" indent="-342900">
-              <a:buSzPct val="100000"/>
-              <a:buChar char="•"/>
-            </a:pPr>
-            <a:r>
-              <a:rPr lang="en-US" sz="1150" dirty="0">
-                <a:solidFill>
-                  <a:srgbClr val="000000"/>
-                </a:solidFill>
-                <a:latin typeface="NVIDIA Sans" pitchFamily="34" charset="0"/>
-                <a:ea typeface="NVIDIA Sans" pitchFamily="34" charset="-122"/>
-                <a:cs typeface="NVIDIA Sans" pitchFamily="34" charset="-120"/>
-              </a:rPr>
-              <a:t>bs 32 regresses hard (986 ms/step): not OOM, not the dataloader — memory-pressure effects under investigation</a:t>
-            </a:r>
-            <a:endParaRPr lang="en-US" sz="1150" dirty="0"/>
-          </a:p>
-          <a:p>
-            <a:pPr marL="342900" indent="-342900">
-              <a:buSzPct val="100000"/>
-              <a:buChar char="•"/>
-            </a:pPr>
-            <a:r>
-              <a:rPr lang="en-US" sz="1150" dirty="0">
-                <a:solidFill>
-                  <a:srgbClr val="000000"/>
-                </a:solidFill>
-                <a:latin typeface="NVIDIA Sans" pitchFamily="34" charset="0"/>
-                <a:ea typeface="NVIDIA Sans" pitchFamily="34" charset="-122"/>
-                <a:cs typeface="NVIDIA Sans" pitchFamily="34" charset="-120"/>
-              </a:rPr>
-              <a:t>Larger global batch (192) changes optimization dynamics — needs a convergence run before adoption</a:t>
-            </a:r>
-            <a:endParaRPr lang="en-US" sz="1150" dirty="0"/>
-          </a:p>
-        </p:txBody>
-      </p:sp>
-      <p:sp>
-        <p:nvSpPr>
-          <p:cNvPr id="34" name="Text 32"/>
+          <p:cNvPr id="26" name="Text 24"/>
           <p:cNvSpPr/>
           <p:nvPr/>
         </p:nvSpPr>
@@ -6991,7 +7130,7 @@
       </p:sp>
       <p:sp>
         <p:nvSpPr>
-          <p:cNvPr id="35" name="Text 33"/>
+          <p:cNvPr id="27" name="Text 25"/>
           <p:cNvSpPr/>
           <p:nvPr/>
         </p:nvSpPr>
@@ -7030,7 +7169,7 @@
       </p:sp>
       <p:sp>
         <p:nvSpPr>
-          <p:cNvPr id="36" name="Shape 34"/>
+          <p:cNvPr id="28" name="Shape 26"/>
           <p:cNvSpPr/>
           <p:nvPr/>
         </p:nvSpPr>
@@ -7050,7 +7189,7 @@
       </p:sp>
       <p:pic>
         <p:nvPicPr>
-          <p:cNvPr id="37" name="Image 0" descr="/app/logos/nvidia-logo-blk-sm.png">    </p:cNvPr>
+          <p:cNvPr id="29" name="Image 0" descr="/app/logos/nvidia-logo-blk-sm.png">    </p:cNvPr>
           <p:cNvPicPr>
             <a:picLocks noChangeAspect="1"/>
           </p:cNvPicPr>
@@ -7137,6 +7276,1273 @@
                 <a:ea typeface="NVIDIA Sans" pitchFamily="34" charset="-122"/>
                 <a:cs typeface="NVIDIA Sans" pitchFamily="34" charset="-120"/>
               </a:rPr>
+              <a:t>Batch Scaling: Sweet Spot at 24 per GPU</a:t>
+            </a:r>
+            <a:endParaRPr lang="en-US" sz="3000" dirty="0"/>
+          </a:p>
+        </p:txBody>
+      </p:sp>
+      <p:sp>
+        <p:nvSpPr>
+          <p:cNvPr id="3" name="Text 1"/>
+          <p:cNvSpPr/>
+          <p:nvPr/>
+        </p:nvSpPr>
+        <p:spPr>
+          <a:xfrm>
+            <a:off x="457200" y="804672"/>
+            <a:ext cx="8229600" cy="329184"/>
+          </a:xfrm>
+          <a:prstGeom prst="rect">
+            <a:avLst/>
+          </a:prstGeom>
+          <a:noFill/>
+          <a:ln/>
+        </p:spPr>
+        <p:txBody>
+          <a:bodyPr wrap="square" lIns="0" tIns="0" rIns="0" bIns="0" rtlCol="0" anchor="ctr"/>
+          <a:lstStyle/>
+          <a:p>
+            <a:pPr indent="0" marL="0">
+              <a:buNone/>
+            </a:pPr>
+            <a:r>
+              <a:rPr lang="en-US" sz="1500" dirty="0">
+                <a:solidFill>
+                  <a:srgbClr val="76B900"/>
+                </a:solidFill>
+                <a:latin typeface="NVIDIA Sans" pitchFamily="34" charset="0"/>
+                <a:ea typeface="NVIDIA Sans" pitchFamily="34" charset="-122"/>
+                <a:cs typeface="NVIDIA Sans" pitchFamily="34" charset="-120"/>
+              </a:rPr>
+              <a:t>Same optimized config, only per-GPU batch changes — peak 340 samples/node/s</a:t>
+            </a:r>
+            <a:endParaRPr lang="en-US" sz="1500" dirty="0"/>
+          </a:p>
+        </p:txBody>
+      </p:sp>
+      <p:sp>
+        <p:nvSpPr>
+          <p:cNvPr id="4" name="Shape 2"/>
+          <p:cNvSpPr/>
+          <p:nvPr/>
+        </p:nvSpPr>
+        <p:spPr>
+          <a:xfrm>
+            <a:off x="1005840" y="3840480"/>
+            <a:ext cx="4846320" cy="0"/>
+          </a:xfrm>
+          <a:prstGeom prst="line">
+            <a:avLst/>
+          </a:prstGeom>
+          <a:noFill/>
+          <a:ln w="9525">
+            <a:solidFill>
+              <a:srgbClr val="EAEAEA"/>
+            </a:solidFill>
+            <a:prstDash val="solid"/>
+          </a:ln>
+        </p:spPr>
+      </p:sp>
+      <p:sp>
+        <p:nvSpPr>
+          <p:cNvPr id="5" name="Text 3"/>
+          <p:cNvSpPr/>
+          <p:nvPr/>
+        </p:nvSpPr>
+        <p:spPr>
+          <a:xfrm>
+            <a:off x="548640" y="3749040"/>
+            <a:ext cx="365760" cy="182880"/>
+          </a:xfrm>
+          <a:prstGeom prst="rect">
+            <a:avLst/>
+          </a:prstGeom>
+          <a:noFill/>
+          <a:ln/>
+        </p:spPr>
+        <p:txBody>
+          <a:bodyPr wrap="square" lIns="0" tIns="0" rIns="0" bIns="0" rtlCol="0" anchor="ctr"/>
+          <a:lstStyle/>
+          <a:p>
+            <a:pPr algn="r" indent="0" marL="0">
+              <a:buNone/>
+            </a:pPr>
+            <a:r>
+              <a:rPr lang="en-US" sz="900" dirty="0">
+                <a:solidFill>
+                  <a:srgbClr val="8C8C8C"/>
+                </a:solidFill>
+                <a:latin typeface="NVIDIA Sans" pitchFamily="34" charset="0"/>
+                <a:ea typeface="NVIDIA Sans" pitchFamily="34" charset="-122"/>
+                <a:cs typeface="NVIDIA Sans" pitchFamily="34" charset="-120"/>
+              </a:rPr>
+              <a:t>0</a:t>
+            </a:r>
+            <a:endParaRPr lang="en-US" sz="900" dirty="0"/>
+          </a:p>
+        </p:txBody>
+      </p:sp>
+      <p:sp>
+        <p:nvSpPr>
+          <p:cNvPr id="6" name="Shape 4"/>
+          <p:cNvSpPr/>
+          <p:nvPr/>
+        </p:nvSpPr>
+        <p:spPr>
+          <a:xfrm>
+            <a:off x="1005840" y="3223260"/>
+            <a:ext cx="4846320" cy="0"/>
+          </a:xfrm>
+          <a:prstGeom prst="line">
+            <a:avLst/>
+          </a:prstGeom>
+          <a:noFill/>
+          <a:ln w="9525">
+            <a:solidFill>
+              <a:srgbClr val="EAEAEA"/>
+            </a:solidFill>
+            <a:prstDash val="solid"/>
+          </a:ln>
+        </p:spPr>
+      </p:sp>
+      <p:sp>
+        <p:nvSpPr>
+          <p:cNvPr id="7" name="Text 5"/>
+          <p:cNvSpPr/>
+          <p:nvPr/>
+        </p:nvSpPr>
+        <p:spPr>
+          <a:xfrm>
+            <a:off x="548640" y="3131820"/>
+            <a:ext cx="365760" cy="182880"/>
+          </a:xfrm>
+          <a:prstGeom prst="rect">
+            <a:avLst/>
+          </a:prstGeom>
+          <a:noFill/>
+          <a:ln/>
+        </p:spPr>
+        <p:txBody>
+          <a:bodyPr wrap="square" lIns="0" tIns="0" rIns="0" bIns="0" rtlCol="0" anchor="ctr"/>
+          <a:lstStyle/>
+          <a:p>
+            <a:pPr algn="r" indent="0" marL="0">
+              <a:buNone/>
+            </a:pPr>
+            <a:r>
+              <a:rPr lang="en-US" sz="900" dirty="0">
+                <a:solidFill>
+                  <a:srgbClr val="8C8C8C"/>
+                </a:solidFill>
+                <a:latin typeface="NVIDIA Sans" pitchFamily="34" charset="0"/>
+                <a:ea typeface="NVIDIA Sans" pitchFamily="34" charset="-122"/>
+                <a:cs typeface="NVIDIA Sans" pitchFamily="34" charset="-120"/>
+              </a:rPr>
+              <a:t>100</a:t>
+            </a:r>
+            <a:endParaRPr lang="en-US" sz="900" dirty="0"/>
+          </a:p>
+        </p:txBody>
+      </p:sp>
+      <p:sp>
+        <p:nvSpPr>
+          <p:cNvPr id="8" name="Shape 6"/>
+          <p:cNvSpPr/>
+          <p:nvPr/>
+        </p:nvSpPr>
+        <p:spPr>
+          <a:xfrm>
+            <a:off x="1005840" y="2606040"/>
+            <a:ext cx="4846320" cy="0"/>
+          </a:xfrm>
+          <a:prstGeom prst="line">
+            <a:avLst/>
+          </a:prstGeom>
+          <a:noFill/>
+          <a:ln w="9525">
+            <a:solidFill>
+              <a:srgbClr val="EAEAEA"/>
+            </a:solidFill>
+            <a:prstDash val="solid"/>
+          </a:ln>
+        </p:spPr>
+      </p:sp>
+      <p:sp>
+        <p:nvSpPr>
+          <p:cNvPr id="9" name="Text 7"/>
+          <p:cNvSpPr/>
+          <p:nvPr/>
+        </p:nvSpPr>
+        <p:spPr>
+          <a:xfrm>
+            <a:off x="548640" y="2514600"/>
+            <a:ext cx="365760" cy="182880"/>
+          </a:xfrm>
+          <a:prstGeom prst="rect">
+            <a:avLst/>
+          </a:prstGeom>
+          <a:noFill/>
+          <a:ln/>
+        </p:spPr>
+        <p:txBody>
+          <a:bodyPr wrap="square" lIns="0" tIns="0" rIns="0" bIns="0" rtlCol="0" anchor="ctr"/>
+          <a:lstStyle/>
+          <a:p>
+            <a:pPr algn="r" indent="0" marL="0">
+              <a:buNone/>
+            </a:pPr>
+            <a:r>
+              <a:rPr lang="en-US" sz="900" dirty="0">
+                <a:solidFill>
+                  <a:srgbClr val="8C8C8C"/>
+                </a:solidFill>
+                <a:latin typeface="NVIDIA Sans" pitchFamily="34" charset="0"/>
+                <a:ea typeface="NVIDIA Sans" pitchFamily="34" charset="-122"/>
+                <a:cs typeface="NVIDIA Sans" pitchFamily="34" charset="-120"/>
+              </a:rPr>
+              <a:t>200</a:t>
+            </a:r>
+            <a:endParaRPr lang="en-US" sz="900" dirty="0"/>
+          </a:p>
+        </p:txBody>
+      </p:sp>
+      <p:sp>
+        <p:nvSpPr>
+          <p:cNvPr id="10" name="Shape 8"/>
+          <p:cNvSpPr/>
+          <p:nvPr/>
+        </p:nvSpPr>
+        <p:spPr>
+          <a:xfrm>
+            <a:off x="1005840" y="1988820"/>
+            <a:ext cx="4846320" cy="0"/>
+          </a:xfrm>
+          <a:prstGeom prst="line">
+            <a:avLst/>
+          </a:prstGeom>
+          <a:noFill/>
+          <a:ln w="9525">
+            <a:solidFill>
+              <a:srgbClr val="EAEAEA"/>
+            </a:solidFill>
+            <a:prstDash val="solid"/>
+          </a:ln>
+        </p:spPr>
+      </p:sp>
+      <p:sp>
+        <p:nvSpPr>
+          <p:cNvPr id="11" name="Text 9"/>
+          <p:cNvSpPr/>
+          <p:nvPr/>
+        </p:nvSpPr>
+        <p:spPr>
+          <a:xfrm>
+            <a:off x="548640" y="1897380"/>
+            <a:ext cx="365760" cy="182880"/>
+          </a:xfrm>
+          <a:prstGeom prst="rect">
+            <a:avLst/>
+          </a:prstGeom>
+          <a:noFill/>
+          <a:ln/>
+        </p:spPr>
+        <p:txBody>
+          <a:bodyPr wrap="square" lIns="0" tIns="0" rIns="0" bIns="0" rtlCol="0" anchor="ctr"/>
+          <a:lstStyle/>
+          <a:p>
+            <a:pPr algn="r" indent="0" marL="0">
+              <a:buNone/>
+            </a:pPr>
+            <a:r>
+              <a:rPr lang="en-US" sz="900" dirty="0">
+                <a:solidFill>
+                  <a:srgbClr val="8C8C8C"/>
+                </a:solidFill>
+                <a:latin typeface="NVIDIA Sans" pitchFamily="34" charset="0"/>
+                <a:ea typeface="NVIDIA Sans" pitchFamily="34" charset="-122"/>
+                <a:cs typeface="NVIDIA Sans" pitchFamily="34" charset="-120"/>
+              </a:rPr>
+              <a:t>300</a:t>
+            </a:r>
+            <a:endParaRPr lang="en-US" sz="900" dirty="0"/>
+          </a:p>
+        </p:txBody>
+      </p:sp>
+      <p:sp>
+        <p:nvSpPr>
+          <p:cNvPr id="12" name="Shape 10"/>
+          <p:cNvSpPr/>
+          <p:nvPr/>
+        </p:nvSpPr>
+        <p:spPr>
+          <a:xfrm>
+            <a:off x="1005840" y="1371600"/>
+            <a:ext cx="4846320" cy="0"/>
+          </a:xfrm>
+          <a:prstGeom prst="line">
+            <a:avLst/>
+          </a:prstGeom>
+          <a:noFill/>
+          <a:ln w="9525">
+            <a:solidFill>
+              <a:srgbClr val="EAEAEA"/>
+            </a:solidFill>
+            <a:prstDash val="solid"/>
+          </a:ln>
+        </p:spPr>
+      </p:sp>
+      <p:sp>
+        <p:nvSpPr>
+          <p:cNvPr id="13" name="Text 11"/>
+          <p:cNvSpPr/>
+          <p:nvPr/>
+        </p:nvSpPr>
+        <p:spPr>
+          <a:xfrm>
+            <a:off x="548640" y="1280160"/>
+            <a:ext cx="365760" cy="182880"/>
+          </a:xfrm>
+          <a:prstGeom prst="rect">
+            <a:avLst/>
+          </a:prstGeom>
+          <a:noFill/>
+          <a:ln/>
+        </p:spPr>
+        <p:txBody>
+          <a:bodyPr wrap="square" lIns="0" tIns="0" rIns="0" bIns="0" rtlCol="0" anchor="ctr"/>
+          <a:lstStyle/>
+          <a:p>
+            <a:pPr algn="r" indent="0" marL="0">
+              <a:buNone/>
+            </a:pPr>
+            <a:r>
+              <a:rPr lang="en-US" sz="900" dirty="0">
+                <a:solidFill>
+                  <a:srgbClr val="8C8C8C"/>
+                </a:solidFill>
+                <a:latin typeface="NVIDIA Sans" pitchFamily="34" charset="0"/>
+                <a:ea typeface="NVIDIA Sans" pitchFamily="34" charset="-122"/>
+                <a:cs typeface="NVIDIA Sans" pitchFamily="34" charset="-120"/>
+              </a:rPr>
+              <a:t>400</a:t>
+            </a:r>
+            <a:endParaRPr lang="en-US" sz="900" dirty="0"/>
+          </a:p>
+        </p:txBody>
+      </p:sp>
+      <p:sp>
+        <p:nvSpPr>
+          <p:cNvPr id="14" name="Shape 12"/>
+          <p:cNvSpPr/>
+          <p:nvPr/>
+        </p:nvSpPr>
+        <p:spPr>
+          <a:xfrm>
+            <a:off x="1005840" y="2606040"/>
+            <a:ext cx="4846320" cy="0"/>
+          </a:xfrm>
+          <a:prstGeom prst="line">
+            <a:avLst/>
+          </a:prstGeom>
+          <a:noFill/>
+          <a:ln w="15875">
+            <a:solidFill>
+              <a:srgbClr val="5E5E5E"/>
+            </a:solidFill>
+            <a:prstDash val="dash"/>
+          </a:ln>
+        </p:spPr>
+      </p:sp>
+      <p:sp>
+        <p:nvSpPr>
+          <p:cNvPr id="15" name="Text 13"/>
+          <p:cNvSpPr/>
+          <p:nvPr/>
+        </p:nvSpPr>
+        <p:spPr>
+          <a:xfrm>
+            <a:off x="1051560" y="1399032"/>
+            <a:ext cx="4114800" cy="182880"/>
+          </a:xfrm>
+          <a:prstGeom prst="rect">
+            <a:avLst/>
+          </a:prstGeom>
+          <a:noFill/>
+          <a:ln/>
+        </p:spPr>
+        <p:txBody>
+          <a:bodyPr wrap="square" lIns="0" tIns="0" rIns="0" bIns="0" rtlCol="0" anchor="ctr"/>
+          <a:lstStyle/>
+          <a:p>
+            <a:pPr indent="0" marL="0">
+              <a:buNone/>
+            </a:pPr>
+            <a:r>
+              <a:rPr lang="en-US" sz="900" i="1" dirty="0">
+                <a:solidFill>
+                  <a:srgbClr val="5E5E5E"/>
+                </a:solidFill>
+                <a:latin typeface="NVIDIA Sans" pitchFamily="34" charset="0"/>
+                <a:ea typeface="NVIDIA Sans" pitchFamily="34" charset="-122"/>
+                <a:cs typeface="NVIDIA Sans" pitchFamily="34" charset="-120"/>
+              </a:rPr>
+              <a:t>samples / node / s   ·   dashed = 200/node/s target</a:t>
+            </a:r>
+            <a:endParaRPr lang="en-US" sz="900" dirty="0"/>
+          </a:p>
+        </p:txBody>
+      </p:sp>
+      <p:sp>
+        <p:nvSpPr>
+          <p:cNvPr id="16" name="Shape 14"/>
+          <p:cNvSpPr/>
+          <p:nvPr/>
+        </p:nvSpPr>
+        <p:spPr>
+          <a:xfrm>
+            <a:off x="1268730" y="2254225"/>
+            <a:ext cx="685800" cy="1586255"/>
+          </a:xfrm>
+          <a:prstGeom prst="rect">
+            <a:avLst/>
+          </a:prstGeom>
+          <a:solidFill>
+            <a:srgbClr val="008564"/>
+          </a:solidFill>
+          <a:ln/>
+        </p:spPr>
+      </p:sp>
+      <p:sp>
+        <p:nvSpPr>
+          <p:cNvPr id="17" name="Text 15"/>
+          <p:cNvSpPr/>
+          <p:nvPr/>
+        </p:nvSpPr>
+        <p:spPr>
+          <a:xfrm>
+            <a:off x="1131570" y="1998193"/>
+            <a:ext cx="960120" cy="228600"/>
+          </a:xfrm>
+          <a:prstGeom prst="rect">
+            <a:avLst/>
+          </a:prstGeom>
+          <a:noFill/>
+          <a:ln/>
+        </p:spPr>
+        <p:txBody>
+          <a:bodyPr wrap="square" lIns="0" tIns="0" rIns="0" bIns="0" rtlCol="0" anchor="ctr"/>
+          <a:lstStyle/>
+          <a:p>
+            <a:pPr algn="ctr" indent="0" marL="0">
+              <a:buNone/>
+            </a:pPr>
+            <a:r>
+              <a:rPr lang="en-US" sz="1300" b="1" dirty="0">
+                <a:solidFill>
+                  <a:srgbClr val="008564"/>
+                </a:solidFill>
+                <a:latin typeface="NVIDIA Sans" pitchFamily="34" charset="0"/>
+                <a:ea typeface="NVIDIA Sans" pitchFamily="34" charset="-122"/>
+                <a:cs typeface="NVIDIA Sans" pitchFamily="34" charset="-120"/>
+              </a:rPr>
+              <a:t>257</a:t>
+            </a:r>
+            <a:endParaRPr lang="en-US" sz="1300" dirty="0"/>
+          </a:p>
+        </p:txBody>
+      </p:sp>
+      <p:sp>
+        <p:nvSpPr>
+          <p:cNvPr id="18" name="Text 16"/>
+          <p:cNvSpPr/>
+          <p:nvPr/>
+        </p:nvSpPr>
+        <p:spPr>
+          <a:xfrm>
+            <a:off x="1131570" y="3895344"/>
+            <a:ext cx="960120" cy="201168"/>
+          </a:xfrm>
+          <a:prstGeom prst="rect">
+            <a:avLst/>
+          </a:prstGeom>
+          <a:noFill/>
+          <a:ln/>
+        </p:spPr>
+        <p:txBody>
+          <a:bodyPr wrap="square" lIns="0" tIns="0" rIns="0" bIns="0" rtlCol="0" anchor="ctr"/>
+          <a:lstStyle/>
+          <a:p>
+            <a:pPr algn="ctr" indent="0" marL="0">
+              <a:buNone/>
+            </a:pPr>
+            <a:r>
+              <a:rPr lang="en-US" sz="1100" b="1" dirty="0">
+                <a:solidFill>
+                  <a:srgbClr val="000000"/>
+                </a:solidFill>
+                <a:latin typeface="NVIDIA Sans" pitchFamily="34" charset="0"/>
+                <a:ea typeface="NVIDIA Sans" pitchFamily="34" charset="-122"/>
+                <a:cs typeface="NVIDIA Sans" pitchFamily="34" charset="-120"/>
+              </a:rPr>
+              <a:t>bs 8</a:t>
+            </a:r>
+            <a:endParaRPr lang="en-US" sz="1100" dirty="0"/>
+          </a:p>
+        </p:txBody>
+      </p:sp>
+      <p:sp>
+        <p:nvSpPr>
+          <p:cNvPr id="19" name="Text 17"/>
+          <p:cNvSpPr/>
+          <p:nvPr/>
+        </p:nvSpPr>
+        <p:spPr>
+          <a:xfrm>
+            <a:off x="1085850" y="4096512"/>
+            <a:ext cx="1051560" cy="182880"/>
+          </a:xfrm>
+          <a:prstGeom prst="rect">
+            <a:avLst/>
+          </a:prstGeom>
+          <a:noFill/>
+          <a:ln/>
+        </p:spPr>
+        <p:txBody>
+          <a:bodyPr wrap="square" lIns="0" tIns="0" rIns="0" bIns="0" rtlCol="0" anchor="ctr"/>
+          <a:lstStyle/>
+          <a:p>
+            <a:pPr algn="ctr" indent="0" marL="0">
+              <a:buNone/>
+            </a:pPr>
+            <a:r>
+              <a:rPr lang="en-US" sz="900" dirty="0">
+                <a:solidFill>
+                  <a:srgbClr val="5E5E5E"/>
+                </a:solidFill>
+                <a:latin typeface="NVIDIA Sans" pitchFamily="34" charset="0"/>
+                <a:ea typeface="NVIDIA Sans" pitchFamily="34" charset="-122"/>
+                <a:cs typeface="NVIDIA Sans" pitchFamily="34" charset="-120"/>
+              </a:rPr>
+              <a:t>MFU 23.1%</a:t>
+            </a:r>
+            <a:endParaRPr lang="en-US" sz="900" dirty="0"/>
+          </a:p>
+        </p:txBody>
+      </p:sp>
+      <p:sp>
+        <p:nvSpPr>
+          <p:cNvPr id="20" name="Shape 18"/>
+          <p:cNvSpPr/>
+          <p:nvPr/>
+        </p:nvSpPr>
+        <p:spPr>
+          <a:xfrm>
+            <a:off x="2480310" y="1883893"/>
+            <a:ext cx="685800" cy="1956587"/>
+          </a:xfrm>
+          <a:prstGeom prst="rect">
+            <a:avLst/>
+          </a:prstGeom>
+          <a:solidFill>
+            <a:srgbClr val="008564"/>
+          </a:solidFill>
+          <a:ln/>
+        </p:spPr>
+      </p:sp>
+      <p:sp>
+        <p:nvSpPr>
+          <p:cNvPr id="21" name="Text 19"/>
+          <p:cNvSpPr/>
+          <p:nvPr/>
+        </p:nvSpPr>
+        <p:spPr>
+          <a:xfrm>
+            <a:off x="2343150" y="1627861"/>
+            <a:ext cx="960120" cy="228600"/>
+          </a:xfrm>
+          <a:prstGeom prst="rect">
+            <a:avLst/>
+          </a:prstGeom>
+          <a:noFill/>
+          <a:ln/>
+        </p:spPr>
+        <p:txBody>
+          <a:bodyPr wrap="square" lIns="0" tIns="0" rIns="0" bIns="0" rtlCol="0" anchor="ctr"/>
+          <a:lstStyle/>
+          <a:p>
+            <a:pPr algn="ctr" indent="0" marL="0">
+              <a:buNone/>
+            </a:pPr>
+            <a:r>
+              <a:rPr lang="en-US" sz="1300" b="1" dirty="0">
+                <a:solidFill>
+                  <a:srgbClr val="008564"/>
+                </a:solidFill>
+                <a:latin typeface="NVIDIA Sans" pitchFamily="34" charset="0"/>
+                <a:ea typeface="NVIDIA Sans" pitchFamily="34" charset="-122"/>
+                <a:cs typeface="NVIDIA Sans" pitchFamily="34" charset="-120"/>
+              </a:rPr>
+              <a:t>317</a:t>
+            </a:r>
+            <a:endParaRPr lang="en-US" sz="1300" dirty="0"/>
+          </a:p>
+        </p:txBody>
+      </p:sp>
+      <p:sp>
+        <p:nvSpPr>
+          <p:cNvPr id="22" name="Text 20"/>
+          <p:cNvSpPr/>
+          <p:nvPr/>
+        </p:nvSpPr>
+        <p:spPr>
+          <a:xfrm>
+            <a:off x="2343150" y="3895344"/>
+            <a:ext cx="960120" cy="201168"/>
+          </a:xfrm>
+          <a:prstGeom prst="rect">
+            <a:avLst/>
+          </a:prstGeom>
+          <a:noFill/>
+          <a:ln/>
+        </p:spPr>
+        <p:txBody>
+          <a:bodyPr wrap="square" lIns="0" tIns="0" rIns="0" bIns="0" rtlCol="0" anchor="ctr"/>
+          <a:lstStyle/>
+          <a:p>
+            <a:pPr algn="ctr" indent="0" marL="0">
+              <a:buNone/>
+            </a:pPr>
+            <a:r>
+              <a:rPr lang="en-US" sz="1100" b="1" dirty="0">
+                <a:solidFill>
+                  <a:srgbClr val="000000"/>
+                </a:solidFill>
+                <a:latin typeface="NVIDIA Sans" pitchFamily="34" charset="0"/>
+                <a:ea typeface="NVIDIA Sans" pitchFamily="34" charset="-122"/>
+                <a:cs typeface="NVIDIA Sans" pitchFamily="34" charset="-120"/>
+              </a:rPr>
+              <a:t>bs 16</a:t>
+            </a:r>
+            <a:endParaRPr lang="en-US" sz="1100" dirty="0"/>
+          </a:p>
+        </p:txBody>
+      </p:sp>
+      <p:sp>
+        <p:nvSpPr>
+          <p:cNvPr id="23" name="Text 21"/>
+          <p:cNvSpPr/>
+          <p:nvPr/>
+        </p:nvSpPr>
+        <p:spPr>
+          <a:xfrm>
+            <a:off x="2297430" y="4096512"/>
+            <a:ext cx="1051560" cy="182880"/>
+          </a:xfrm>
+          <a:prstGeom prst="rect">
+            <a:avLst/>
+          </a:prstGeom>
+          <a:noFill/>
+          <a:ln/>
+        </p:spPr>
+        <p:txBody>
+          <a:bodyPr wrap="square" lIns="0" tIns="0" rIns="0" bIns="0" rtlCol="0" anchor="ctr"/>
+          <a:lstStyle/>
+          <a:p>
+            <a:pPr algn="ctr" indent="0" marL="0">
+              <a:buNone/>
+            </a:pPr>
+            <a:r>
+              <a:rPr lang="en-US" sz="900" dirty="0">
+                <a:solidFill>
+                  <a:srgbClr val="5E5E5E"/>
+                </a:solidFill>
+                <a:latin typeface="NVIDIA Sans" pitchFamily="34" charset="0"/>
+                <a:ea typeface="NVIDIA Sans" pitchFamily="34" charset="-122"/>
+                <a:cs typeface="NVIDIA Sans" pitchFamily="34" charset="-120"/>
+              </a:rPr>
+              <a:t>MFU 28.4%</a:t>
+            </a:r>
+            <a:endParaRPr lang="en-US" sz="900" dirty="0"/>
+          </a:p>
+        </p:txBody>
+      </p:sp>
+      <p:sp>
+        <p:nvSpPr>
+          <p:cNvPr id="24" name="Shape 22"/>
+          <p:cNvSpPr/>
+          <p:nvPr/>
+        </p:nvSpPr>
+        <p:spPr>
+          <a:xfrm>
+            <a:off x="3691890" y="1741932"/>
+            <a:ext cx="685800" cy="2098548"/>
+          </a:xfrm>
+          <a:prstGeom prst="rect">
+            <a:avLst/>
+          </a:prstGeom>
+          <a:solidFill>
+            <a:srgbClr val="76B900"/>
+          </a:solidFill>
+          <a:ln/>
+        </p:spPr>
+      </p:sp>
+      <p:sp>
+        <p:nvSpPr>
+          <p:cNvPr id="25" name="Text 23"/>
+          <p:cNvSpPr/>
+          <p:nvPr/>
+        </p:nvSpPr>
+        <p:spPr>
+          <a:xfrm>
+            <a:off x="3554730" y="1485900"/>
+            <a:ext cx="960120" cy="228600"/>
+          </a:xfrm>
+          <a:prstGeom prst="rect">
+            <a:avLst/>
+          </a:prstGeom>
+          <a:noFill/>
+          <a:ln/>
+        </p:spPr>
+        <p:txBody>
+          <a:bodyPr wrap="square" lIns="0" tIns="0" rIns="0" bIns="0" rtlCol="0" anchor="ctr"/>
+          <a:lstStyle/>
+          <a:p>
+            <a:pPr algn="ctr" indent="0" marL="0">
+              <a:buNone/>
+            </a:pPr>
+            <a:r>
+              <a:rPr lang="en-US" sz="1300" b="1" dirty="0">
+                <a:solidFill>
+                  <a:srgbClr val="76B900"/>
+                </a:solidFill>
+                <a:latin typeface="NVIDIA Sans" pitchFamily="34" charset="0"/>
+                <a:ea typeface="NVIDIA Sans" pitchFamily="34" charset="-122"/>
+                <a:cs typeface="NVIDIA Sans" pitchFamily="34" charset="-120"/>
+              </a:rPr>
+              <a:t>340</a:t>
+            </a:r>
+            <a:endParaRPr lang="en-US" sz="1300" dirty="0"/>
+          </a:p>
+        </p:txBody>
+      </p:sp>
+      <p:sp>
+        <p:nvSpPr>
+          <p:cNvPr id="26" name="Text 24"/>
+          <p:cNvSpPr/>
+          <p:nvPr/>
+        </p:nvSpPr>
+        <p:spPr>
+          <a:xfrm>
+            <a:off x="3554730" y="3895344"/>
+            <a:ext cx="960120" cy="201168"/>
+          </a:xfrm>
+          <a:prstGeom prst="rect">
+            <a:avLst/>
+          </a:prstGeom>
+          <a:noFill/>
+          <a:ln/>
+        </p:spPr>
+        <p:txBody>
+          <a:bodyPr wrap="square" lIns="0" tIns="0" rIns="0" bIns="0" rtlCol="0" anchor="ctr"/>
+          <a:lstStyle/>
+          <a:p>
+            <a:pPr algn="ctr" indent="0" marL="0">
+              <a:buNone/>
+            </a:pPr>
+            <a:r>
+              <a:rPr lang="en-US" sz="1100" b="1" dirty="0">
+                <a:solidFill>
+                  <a:srgbClr val="000000"/>
+                </a:solidFill>
+                <a:latin typeface="NVIDIA Sans" pitchFamily="34" charset="0"/>
+                <a:ea typeface="NVIDIA Sans" pitchFamily="34" charset="-122"/>
+                <a:cs typeface="NVIDIA Sans" pitchFamily="34" charset="-120"/>
+              </a:rPr>
+              <a:t>bs 24</a:t>
+            </a:r>
+            <a:endParaRPr lang="en-US" sz="1100" dirty="0"/>
+          </a:p>
+        </p:txBody>
+      </p:sp>
+      <p:sp>
+        <p:nvSpPr>
+          <p:cNvPr id="27" name="Text 25"/>
+          <p:cNvSpPr/>
+          <p:nvPr/>
+        </p:nvSpPr>
+        <p:spPr>
+          <a:xfrm>
+            <a:off x="3509010" y="4096512"/>
+            <a:ext cx="1051560" cy="182880"/>
+          </a:xfrm>
+          <a:prstGeom prst="rect">
+            <a:avLst/>
+          </a:prstGeom>
+          <a:noFill/>
+          <a:ln/>
+        </p:spPr>
+        <p:txBody>
+          <a:bodyPr wrap="square" lIns="0" tIns="0" rIns="0" bIns="0" rtlCol="0" anchor="ctr"/>
+          <a:lstStyle/>
+          <a:p>
+            <a:pPr algn="ctr" indent="0" marL="0">
+              <a:buNone/>
+            </a:pPr>
+            <a:r>
+              <a:rPr lang="en-US" sz="900" dirty="0">
+                <a:solidFill>
+                  <a:srgbClr val="5E5E5E"/>
+                </a:solidFill>
+                <a:latin typeface="NVIDIA Sans" pitchFamily="34" charset="0"/>
+                <a:ea typeface="NVIDIA Sans" pitchFamily="34" charset="-122"/>
+                <a:cs typeface="NVIDIA Sans" pitchFamily="34" charset="-120"/>
+              </a:rPr>
+              <a:t>MFU 30.5%</a:t>
+            </a:r>
+            <a:endParaRPr lang="en-US" sz="900" dirty="0"/>
+          </a:p>
+        </p:txBody>
+      </p:sp>
+      <p:sp>
+        <p:nvSpPr>
+          <p:cNvPr id="28" name="Shape 26"/>
+          <p:cNvSpPr/>
+          <p:nvPr/>
+        </p:nvSpPr>
+        <p:spPr>
+          <a:xfrm>
+            <a:off x="4903470" y="2235708"/>
+            <a:ext cx="685800" cy="1604772"/>
+          </a:xfrm>
+          <a:prstGeom prst="rect">
+            <a:avLst/>
+          </a:prstGeom>
+          <a:solidFill>
+            <a:srgbClr val="890C58"/>
+          </a:solidFill>
+          <a:ln/>
+        </p:spPr>
+      </p:sp>
+      <p:sp>
+        <p:nvSpPr>
+          <p:cNvPr id="29" name="Text 27"/>
+          <p:cNvSpPr/>
+          <p:nvPr/>
+        </p:nvSpPr>
+        <p:spPr>
+          <a:xfrm>
+            <a:off x="4766310" y="1979676"/>
+            <a:ext cx="960120" cy="228600"/>
+          </a:xfrm>
+          <a:prstGeom prst="rect">
+            <a:avLst/>
+          </a:prstGeom>
+          <a:noFill/>
+          <a:ln/>
+        </p:spPr>
+        <p:txBody>
+          <a:bodyPr wrap="square" lIns="0" tIns="0" rIns="0" bIns="0" rtlCol="0" anchor="ctr"/>
+          <a:lstStyle/>
+          <a:p>
+            <a:pPr algn="ctr" indent="0" marL="0">
+              <a:buNone/>
+            </a:pPr>
+            <a:r>
+              <a:rPr lang="en-US" sz="1300" b="1" dirty="0">
+                <a:solidFill>
+                  <a:srgbClr val="890C58"/>
+                </a:solidFill>
+                <a:latin typeface="NVIDIA Sans" pitchFamily="34" charset="0"/>
+                <a:ea typeface="NVIDIA Sans" pitchFamily="34" charset="-122"/>
+                <a:cs typeface="NVIDIA Sans" pitchFamily="34" charset="-120"/>
+              </a:rPr>
+              <a:t>260</a:t>
+            </a:r>
+            <a:endParaRPr lang="en-US" sz="1300" dirty="0"/>
+          </a:p>
+        </p:txBody>
+      </p:sp>
+      <p:sp>
+        <p:nvSpPr>
+          <p:cNvPr id="30" name="Text 28"/>
+          <p:cNvSpPr/>
+          <p:nvPr/>
+        </p:nvSpPr>
+        <p:spPr>
+          <a:xfrm>
+            <a:off x="4766310" y="3895344"/>
+            <a:ext cx="960120" cy="201168"/>
+          </a:xfrm>
+          <a:prstGeom prst="rect">
+            <a:avLst/>
+          </a:prstGeom>
+          <a:noFill/>
+          <a:ln/>
+        </p:spPr>
+        <p:txBody>
+          <a:bodyPr wrap="square" lIns="0" tIns="0" rIns="0" bIns="0" rtlCol="0" anchor="ctr"/>
+          <a:lstStyle/>
+          <a:p>
+            <a:pPr algn="ctr" indent="0" marL="0">
+              <a:buNone/>
+            </a:pPr>
+            <a:r>
+              <a:rPr lang="en-US" sz="1100" b="1" dirty="0">
+                <a:solidFill>
+                  <a:srgbClr val="000000"/>
+                </a:solidFill>
+                <a:latin typeface="NVIDIA Sans" pitchFamily="34" charset="0"/>
+                <a:ea typeface="NVIDIA Sans" pitchFamily="34" charset="-122"/>
+                <a:cs typeface="NVIDIA Sans" pitchFamily="34" charset="-120"/>
+              </a:rPr>
+              <a:t>bs 32</a:t>
+            </a:r>
+            <a:endParaRPr lang="en-US" sz="1100" dirty="0"/>
+          </a:p>
+        </p:txBody>
+      </p:sp>
+      <p:sp>
+        <p:nvSpPr>
+          <p:cNvPr id="31" name="Text 29"/>
+          <p:cNvSpPr/>
+          <p:nvPr/>
+        </p:nvSpPr>
+        <p:spPr>
+          <a:xfrm>
+            <a:off x="4720590" y="4096512"/>
+            <a:ext cx="1051560" cy="182880"/>
+          </a:xfrm>
+          <a:prstGeom prst="rect">
+            <a:avLst/>
+          </a:prstGeom>
+          <a:noFill/>
+          <a:ln/>
+        </p:spPr>
+        <p:txBody>
+          <a:bodyPr wrap="square" lIns="0" tIns="0" rIns="0" bIns="0" rtlCol="0" anchor="ctr"/>
+          <a:lstStyle/>
+          <a:p>
+            <a:pPr algn="ctr" indent="0" marL="0">
+              <a:buNone/>
+            </a:pPr>
+            <a:r>
+              <a:rPr lang="en-US" sz="900" dirty="0">
+                <a:solidFill>
+                  <a:srgbClr val="5E5E5E"/>
+                </a:solidFill>
+                <a:latin typeface="NVIDIA Sans" pitchFamily="34" charset="0"/>
+                <a:ea typeface="NVIDIA Sans" pitchFamily="34" charset="-122"/>
+                <a:cs typeface="NVIDIA Sans" pitchFamily="34" charset="-120"/>
+              </a:rPr>
+              <a:t>MFU 23.3%</a:t>
+            </a:r>
+            <a:endParaRPr lang="en-US" sz="900" dirty="0"/>
+          </a:p>
+        </p:txBody>
+      </p:sp>
+      <p:sp>
+        <p:nvSpPr>
+          <p:cNvPr id="32" name="Text 30"/>
+          <p:cNvSpPr/>
+          <p:nvPr/>
+        </p:nvSpPr>
+        <p:spPr>
+          <a:xfrm>
+            <a:off x="1051560" y="1399032"/>
+            <a:ext cx="1828800" cy="182880"/>
+          </a:xfrm>
+          <a:prstGeom prst="rect">
+            <a:avLst/>
+          </a:prstGeom>
+          <a:noFill/>
+          <a:ln/>
+        </p:spPr>
+        <p:txBody>
+          <a:bodyPr wrap="square" lIns="0" tIns="0" rIns="0" bIns="0" rtlCol="0" anchor="ctr"/>
+          <a:lstStyle/>
+          <a:p>
+            <a:pPr indent="0" marL="0">
+              <a:buNone/>
+            </a:pPr>
+            <a:r>
+              <a:rPr lang="en-US" sz="900" i="1" dirty="0">
+                <a:solidFill>
+                  <a:srgbClr val="8C8C8C"/>
+                </a:solidFill>
+                <a:latin typeface="NVIDIA Sans" pitchFamily="34" charset="0"/>
+                <a:ea typeface="NVIDIA Sans" pitchFamily="34" charset="-122"/>
+                <a:cs typeface="NVIDIA Sans" pitchFamily="34" charset="-120"/>
+              </a:rPr>
+              <a:t>samples / node / s</a:t>
+            </a:r>
+            <a:endParaRPr lang="en-US" sz="900" dirty="0"/>
+          </a:p>
+        </p:txBody>
+      </p:sp>
+      <p:sp>
+        <p:nvSpPr>
+          <p:cNvPr id="33" name="Text 31"/>
+          <p:cNvSpPr/>
+          <p:nvPr/>
+        </p:nvSpPr>
+        <p:spPr>
+          <a:xfrm>
+            <a:off x="6400800" y="1417320"/>
+            <a:ext cx="2286000" cy="2743200"/>
+          </a:xfrm>
+          <a:prstGeom prst="rect">
+            <a:avLst/>
+          </a:prstGeom>
+          <a:noFill/>
+          <a:ln/>
+        </p:spPr>
+        <p:txBody>
+          <a:bodyPr wrap="square" lIns="0" tIns="0" rIns="0" bIns="0" rtlCol="0" anchor="t"/>
+          <a:lstStyle/>
+          <a:p>
+            <a:pPr marL="342900" indent="-342900">
+              <a:buSzPct val="100000"/>
+              <a:buChar char="•"/>
+            </a:pPr>
+            <a:r>
+              <a:rPr lang="en-US" sz="1150" dirty="0">
+                <a:solidFill>
+                  <a:srgbClr val="000000"/>
+                </a:solidFill>
+                <a:latin typeface="NVIDIA Sans" pitchFamily="34" charset="0"/>
+                <a:ea typeface="NVIDIA Sans" pitchFamily="34" charset="-122"/>
+                <a:cs typeface="NVIDIA Sans" pitchFamily="34" charset="-120"/>
+              </a:rPr>
+              <a:t>Batching amortizes launch and comm costs: MFU climbs 23% → 30.5%</a:t>
+            </a:r>
+            <a:endParaRPr lang="en-US" sz="1150" dirty="0"/>
+          </a:p>
+          <a:p>
+            <a:pPr marL="342900" indent="-342900">
+              <a:buSzPct val="100000"/>
+              <a:buChar char="•"/>
+            </a:pPr>
+            <a:r>
+              <a:rPr lang="en-US" sz="1150" dirty="0">
+                <a:solidFill>
+                  <a:srgbClr val="000000"/>
+                </a:solidFill>
+                <a:latin typeface="NVIDIA Sans" pitchFamily="34" charset="0"/>
+                <a:ea typeface="NVIDIA Sans" pitchFamily="34" charset="-122"/>
+                <a:cs typeface="NVIDIA Sans" pitchFamily="34" charset="-120"/>
+              </a:rPr>
+              <a:t>bs 32 regresses hard (986 ms/step): not OOM, not the dataloader — memory-pressure effects under investigation</a:t>
+            </a:r>
+            <a:endParaRPr lang="en-US" sz="1150" dirty="0"/>
+          </a:p>
+          <a:p>
+            <a:pPr marL="342900" indent="-342900">
+              <a:buSzPct val="100000"/>
+              <a:buChar char="•"/>
+            </a:pPr>
+            <a:r>
+              <a:rPr lang="en-US" sz="1150" dirty="0">
+                <a:solidFill>
+                  <a:srgbClr val="000000"/>
+                </a:solidFill>
+                <a:latin typeface="NVIDIA Sans" pitchFamily="34" charset="0"/>
+                <a:ea typeface="NVIDIA Sans" pitchFamily="34" charset="-122"/>
+                <a:cs typeface="NVIDIA Sans" pitchFamily="34" charset="-120"/>
+              </a:rPr>
+              <a:t>Larger global batch (192) changes optimization dynamics — needs a convergence run before adoption</a:t>
+            </a:r>
+            <a:endParaRPr lang="en-US" sz="1150" dirty="0"/>
+          </a:p>
+        </p:txBody>
+      </p:sp>
+      <p:sp>
+        <p:nvSpPr>
+          <p:cNvPr id="34" name="Text 32"/>
+          <p:cNvSpPr/>
+          <p:nvPr/>
+        </p:nvSpPr>
+        <p:spPr>
+          <a:xfrm>
+            <a:off x="457200" y="4617720"/>
+            <a:ext cx="4572000" cy="320040"/>
+          </a:xfrm>
+          <a:prstGeom prst="rect">
+            <a:avLst/>
+          </a:prstGeom>
+          <a:noFill/>
+          <a:ln/>
+        </p:spPr>
+        <p:txBody>
+          <a:bodyPr wrap="square" lIns="0" tIns="0" rIns="0" bIns="0" rtlCol="0" anchor="ctr"/>
+          <a:lstStyle/>
+          <a:p>
+            <a:pPr algn="l" indent="0" marL="0">
+              <a:buNone/>
+            </a:pPr>
+            <a:r>
+              <a:rPr lang="en-US" sz="1000" dirty="0">
+                <a:solidFill>
+                  <a:srgbClr val="5E5E5E"/>
+                </a:solidFill>
+                <a:latin typeface="NVIDIA Sans" pitchFamily="34" charset="0"/>
+                <a:ea typeface="NVIDIA Sans" pitchFamily="34" charset="-122"/>
+                <a:cs typeface="NVIDIA Sans" pitchFamily="34" charset="-120"/>
+              </a:rPr>
+              <a:t>QwenPI Training Optimization</a:t>
+            </a:r>
+            <a:endParaRPr lang="en-US" sz="1000" dirty="0"/>
+          </a:p>
+        </p:txBody>
+      </p:sp>
+      <p:sp>
+        <p:nvSpPr>
+          <p:cNvPr id="35" name="Text 33"/>
+          <p:cNvSpPr/>
+          <p:nvPr/>
+        </p:nvSpPr>
+        <p:spPr>
+          <a:xfrm>
+            <a:off x="7360920" y="4617720"/>
+            <a:ext cx="320040" cy="320040"/>
+          </a:xfrm>
+          <a:prstGeom prst="rect">
+            <a:avLst/>
+          </a:prstGeom>
+          <a:noFill/>
+          <a:ln/>
+        </p:spPr>
+        <p:txBody>
+          <a:bodyPr wrap="square" lIns="0" tIns="0" rIns="0" bIns="0" rtlCol="0" anchor="ctr"/>
+          <a:lstStyle/>
+          <a:p>
+            <a:pPr algn="r" indent="0" marL="0">
+              <a:buNone/>
+            </a:pPr>
+            <a:r>
+              <a:rPr lang="en-US" sz="1000" dirty="0">
+                <a:solidFill>
+                  <a:srgbClr val="5E5E5E"/>
+                </a:solidFill>
+                <a:latin typeface="NVIDIA Sans" pitchFamily="34" charset="0"/>
+                <a:ea typeface="NVIDIA Sans" pitchFamily="34" charset="-122"/>
+                <a:cs typeface="NVIDIA Sans" pitchFamily="34" charset="-120"/>
+              </a:rPr>
+              <a:t>12</a:t>
+            </a:r>
+            <a:endParaRPr lang="en-US" sz="1000" dirty="0"/>
+          </a:p>
+        </p:txBody>
+      </p:sp>
+      <p:sp>
+        <p:nvSpPr>
+          <p:cNvPr id="36" name="Shape 34"/>
+          <p:cNvSpPr/>
+          <p:nvPr/>
+        </p:nvSpPr>
+        <p:spPr>
+          <a:xfrm>
+            <a:off x="7726680" y="4617720"/>
+            <a:ext cx="36576" cy="320040"/>
+          </a:xfrm>
+          <a:prstGeom prst="rect">
+            <a:avLst/>
+          </a:prstGeom>
+          <a:solidFill>
+            <a:srgbClr val="76B900"/>
+          </a:solidFill>
+          <a:ln/>
+        </p:spPr>
+      </p:sp>
+      <p:pic>
+        <p:nvPicPr>
+          <p:cNvPr id="37" name="Image 0" descr="/app/logos/nvidia-logo-blk-sm.png">    </p:cNvPr>
+          <p:cNvPicPr>
+            <a:picLocks noChangeAspect="1"/>
+          </p:cNvPicPr>
+          <p:nvPr/>
+        </p:nvPicPr>
+        <p:blipFill>
+          <a:blip r:embed="rId1"/>
+          <a:stretch>
+            <a:fillRect/>
+          </a:stretch>
+        </p:blipFill>
+        <p:spPr>
+          <a:xfrm>
+            <a:off x="7863840" y="4604004"/>
+            <a:ext cx="1005840" cy="347472"/>
+          </a:xfrm>
+          <a:prstGeom prst="rect">
+            <a:avLst/>
+          </a:prstGeom>
+        </p:spPr>
+      </p:pic>
+    </p:spTree>
+  </p:cSld>
+  <p:clrMapOvr>
+    <a:masterClrMapping/>
+  </p:clrMapOvr>
+</p:sld>
+</file>
+
+<file path=ppt/slides/slide13.xml><?xml version="1.0" encoding="utf-8"?>
+<p:sld xmlns:a="http://schemas.openxmlformats.org/drawingml/2006/main" xmlns:r="http://schemas.openxmlformats.org/officeDocument/2006/relationships" xmlns:p="http://schemas.openxmlformats.org/presentationml/2006/main">
+  <p:cSld name="Slide 13">
+    <p:bg>
+      <p:bgPr>
+        <a:solidFill>
+          <a:srgbClr val="FFFFFF"/>
+        </a:solidFill>
+      </p:bgPr>
+    </p:bg>
+    <p:spTree>
+      <p:nvGrpSpPr>
+        <p:cNvPr id="1" name=""/>
+        <p:cNvGrpSpPr/>
+        <p:nvPr/>
+      </p:nvGrpSpPr>
+      <p:grpSpPr>
+        <a:xfrm>
+          <a:off x="0" y="0"/>
+          <a:ext cx="0" cy="0"/>
+          <a:chOff x="0" y="0"/>
+          <a:chExt cx="0" cy="0"/>
+        </a:xfrm>
+      </p:grpSpPr>
+      <p:sp>
+        <p:nvSpPr>
+          <p:cNvPr id="2" name="Text 0"/>
+          <p:cNvSpPr/>
+          <p:nvPr/>
+        </p:nvSpPr>
+        <p:spPr>
+          <a:xfrm>
+            <a:off x="457200" y="256032"/>
+            <a:ext cx="8229600" cy="548640"/>
+          </a:xfrm>
+          <a:prstGeom prst="rect">
+            <a:avLst/>
+          </a:prstGeom>
+          <a:noFill/>
+          <a:ln/>
+        </p:spPr>
+        <p:txBody>
+          <a:bodyPr wrap="square" lIns="0" tIns="0" rIns="0" bIns="0" rtlCol="0" anchor="ctr"/>
+          <a:lstStyle/>
+          <a:p>
+            <a:pPr indent="0" marL="0">
+              <a:buNone/>
+            </a:pPr>
+            <a:r>
+              <a:rPr lang="en-US" sz="3000" b="1" dirty="0">
+                <a:solidFill>
+                  <a:srgbClr val="000000"/>
+                </a:solidFill>
+                <a:latin typeface="NVIDIA Sans" pitchFamily="34" charset="0"/>
+                <a:ea typeface="NVIDIA Sans" pitchFamily="34" charset="-122"/>
+                <a:cs typeface="NVIDIA Sans" pitchFamily="34" charset="-120"/>
+              </a:rPr>
               <a:t>What We Ruled Out — and How</a:t>
             </a:r>
             <a:endParaRPr lang="en-US" sz="3000" dirty="0"/>
@@ -7184,7 +8590,7 @@
       </p:sp>
       <p:graphicFrame>
         <p:nvGraphicFramePr>
-          <p:cNvPr id="13" name="Table 0"/>
+          <p:cNvPr id="14" name="Table 0"/>
           <p:cNvGraphicFramePr>
             <a:graphicFrameLocks noGrp="1"/>
           </p:cNvGraphicFramePr>
@@ -8673,7 +10079,7 @@
                 <a:ea typeface="NVIDIA Sans" pitchFamily="34" charset="-122"/>
                 <a:cs typeface="NVIDIA Sans" pitchFamily="34" charset="-120"/>
               </a:rPr>
-              <a:t>12</a:t>
+              <a:t>13</a:t>
             </a:r>
             <a:endParaRPr lang="en-US" sz="1000" dirty="0"/>
           </a:p>
@@ -8731,9 +10137,9 @@
 </p:sld>
 </file>
 
-<file path=ppt/slides/slide13.xml><?xml version="1.0" encoding="utf-8"?>
+<file path=ppt/slides/slide14.xml><?xml version="1.0" encoding="utf-8"?>
 <p:sld xmlns:a="http://schemas.openxmlformats.org/drawingml/2006/main" xmlns:r="http://schemas.openxmlformats.org/officeDocument/2006/relationships" xmlns:p="http://schemas.openxmlformats.org/presentationml/2006/main">
-  <p:cSld name="Slide 13">
+  <p:cSld name="Slide 14">
     <p:bg>
       <p:bgPr>
         <a:solidFill>
@@ -9557,7 +10963,7 @@
                 <a:ea typeface="NVIDIA Sans" pitchFamily="34" charset="-122"/>
                 <a:cs typeface="NVIDIA Sans" pitchFamily="34" charset="-120"/>
               </a:rPr>
-              <a:t>13</a:t>
+              <a:t>14</a:t>
             </a:r>
             <a:endParaRPr lang="en-US" sz="1000" dirty="0"/>
           </a:p>
@@ -20718,7 +22124,7 @@
                 <a:ea typeface="NVIDIA Sans" pitchFamily="34" charset="-122"/>
                 <a:cs typeface="NVIDIA Sans" pitchFamily="34" charset="-120"/>
               </a:rPr>
-              <a:t>Fix 2+3 · Keep the GPU Fed: −117 ms</a:t>
+              <a:t>Sync Points: Where the CPU Blocks the GPU</a:t>
             </a:r>
             <a:endParaRPr lang="en-US" sz="3000" dirty="0"/>
           </a:p>
@@ -20757,7 +22163,691 @@
                 <a:ea typeface="NVIDIA Sans" pitchFamily="34" charset="-122"/>
                 <a:cs typeface="NVIDIA Sans" pitchFamily="34" charset="-120"/>
               </a:rPr>
-              <a:t>545 → 428 ms.  205 ms of every baseline step is GPU idle</a:t>
+              <a:t>Three CPU round-trips hide inside every baseline forward pass</a:t>
+            </a:r>
+            <a:endParaRPr lang="en-US" sz="1500" dirty="0"/>
+          </a:p>
+        </p:txBody>
+      </p:sp>
+      <p:pic>
+        <p:nvPicPr>
+          <p:cNvPr id="4" name="Image 0" descr="/work/tikz-syncpoints.png">    </p:cNvPr>
+          <p:cNvPicPr>
+            <a:picLocks noChangeAspect="1"/>
+          </p:cNvPicPr>
+          <p:nvPr/>
+        </p:nvPicPr>
+        <p:blipFill>
+          <a:blip r:embed="rId1"/>
+          <a:stretch>
+            <a:fillRect/>
+          </a:stretch>
+        </p:blipFill>
+        <p:spPr>
+          <a:xfrm>
+            <a:off x="1702393" y="1280160"/>
+            <a:ext cx="5739214" cy="2103120"/>
+          </a:xfrm>
+          <a:prstGeom prst="rect">
+            <a:avLst/>
+          </a:prstGeom>
+        </p:spPr>
+      </p:pic>
+      <p:sp>
+        <p:nvSpPr>
+          <p:cNvPr id="5" name="Text 2"/>
+          <p:cNvSpPr/>
+          <p:nvPr/>
+        </p:nvSpPr>
+        <p:spPr>
+          <a:xfrm>
+            <a:off x="457200" y="3529584"/>
+            <a:ext cx="685800" cy="274320"/>
+          </a:xfrm>
+          <a:prstGeom prst="rect">
+            <a:avLst/>
+          </a:prstGeom>
+          <a:noFill/>
+          <a:ln/>
+        </p:spPr>
+        <p:txBody>
+          <a:bodyPr wrap="square" lIns="0" tIns="0" rIns="0" bIns="0" rtlCol="0" anchor="ctr"/>
+          <a:lstStyle/>
+          <a:p>
+            <a:pPr algn="r" indent="0" marL="0">
+              <a:buNone/>
+            </a:pPr>
+            <a:r>
+              <a:rPr lang="en-US" sz="1000" dirty="0">
+                <a:solidFill>
+                  <a:srgbClr val="5E5E5E"/>
+                </a:solidFill>
+                <a:latin typeface="NVIDIA Sans" pitchFamily="34" charset="0"/>
+                <a:ea typeface="NVIDIA Sans" pitchFamily="34" charset="-122"/>
+                <a:cs typeface="NVIDIA Sans" pitchFamily="34" charset="-120"/>
+              </a:rPr>
+              <a:t>GPU</a:t>
+            </a:r>
+            <a:endParaRPr lang="en-US" sz="1000" dirty="0"/>
+          </a:p>
+        </p:txBody>
+      </p:sp>
+      <p:sp>
+        <p:nvSpPr>
+          <p:cNvPr id="6" name="Shape 3"/>
+          <p:cNvSpPr/>
+          <p:nvPr/>
+        </p:nvSpPr>
+        <p:spPr>
+          <a:xfrm>
+            <a:off x="1234440" y="3529584"/>
+            <a:ext cx="7315200" cy="274320"/>
+          </a:xfrm>
+          <a:prstGeom prst="rect">
+            <a:avLst/>
+          </a:prstGeom>
+          <a:solidFill>
+            <a:srgbClr val="F0F0F0"/>
+          </a:solidFill>
+          <a:ln/>
+        </p:spPr>
+      </p:sp>
+      <p:sp>
+        <p:nvSpPr>
+          <p:cNvPr id="7" name="Shape 4"/>
+          <p:cNvSpPr/>
+          <p:nvPr/>
+        </p:nvSpPr>
+        <p:spPr>
+          <a:xfrm>
+            <a:off x="1234440" y="3547872"/>
+            <a:ext cx="336499" cy="237744"/>
+          </a:xfrm>
+          <a:prstGeom prst="rect">
+            <a:avLst/>
+          </a:prstGeom>
+          <a:solidFill>
+            <a:srgbClr val="890C58"/>
+          </a:solidFill>
+          <a:ln/>
+        </p:spPr>
+      </p:sp>
+      <p:sp>
+        <p:nvSpPr>
+          <p:cNvPr id="8" name="Shape 5"/>
+          <p:cNvSpPr/>
+          <p:nvPr/>
+        </p:nvSpPr>
+        <p:spPr>
+          <a:xfrm>
+            <a:off x="1570939" y="3547872"/>
+            <a:ext cx="395021" cy="237744"/>
+          </a:xfrm>
+          <a:prstGeom prst="rect">
+            <a:avLst/>
+          </a:prstGeom>
+          <a:solidFill>
+            <a:srgbClr val="76B900"/>
+          </a:solidFill>
+          <a:ln/>
+        </p:spPr>
+      </p:sp>
+      <p:sp>
+        <p:nvSpPr>
+          <p:cNvPr id="9" name="Shape 6"/>
+          <p:cNvSpPr/>
+          <p:nvPr/>
+        </p:nvSpPr>
+        <p:spPr>
+          <a:xfrm>
+            <a:off x="1965960" y="3547872"/>
+            <a:ext cx="109728" cy="237744"/>
+          </a:xfrm>
+          <a:prstGeom prst="rect">
+            <a:avLst/>
+          </a:prstGeom>
+          <a:solidFill>
+            <a:srgbClr val="890C58"/>
+          </a:solidFill>
+          <a:ln/>
+        </p:spPr>
+      </p:sp>
+      <p:sp>
+        <p:nvSpPr>
+          <p:cNvPr id="10" name="Shape 7"/>
+          <p:cNvSpPr/>
+          <p:nvPr/>
+        </p:nvSpPr>
+        <p:spPr>
+          <a:xfrm>
+            <a:off x="2075688" y="3547872"/>
+            <a:ext cx="402336" cy="237744"/>
+          </a:xfrm>
+          <a:prstGeom prst="rect">
+            <a:avLst/>
+          </a:prstGeom>
+          <a:solidFill>
+            <a:srgbClr val="76B900"/>
+          </a:solidFill>
+          <a:ln/>
+        </p:spPr>
+      </p:sp>
+      <p:sp>
+        <p:nvSpPr>
+          <p:cNvPr id="11" name="Shape 8"/>
+          <p:cNvSpPr/>
+          <p:nvPr/>
+        </p:nvSpPr>
+        <p:spPr>
+          <a:xfrm>
+            <a:off x="2478024" y="3547872"/>
+            <a:ext cx="117043" cy="237744"/>
+          </a:xfrm>
+          <a:prstGeom prst="rect">
+            <a:avLst/>
+          </a:prstGeom>
+          <a:solidFill>
+            <a:srgbClr val="890C58"/>
+          </a:solidFill>
+          <a:ln/>
+        </p:spPr>
+      </p:sp>
+      <p:sp>
+        <p:nvSpPr>
+          <p:cNvPr id="12" name="Shape 9"/>
+          <p:cNvSpPr/>
+          <p:nvPr/>
+        </p:nvSpPr>
+        <p:spPr>
+          <a:xfrm>
+            <a:off x="2595067" y="3547872"/>
+            <a:ext cx="1419149" cy="237744"/>
+          </a:xfrm>
+          <a:prstGeom prst="rect">
+            <a:avLst/>
+          </a:prstGeom>
+          <a:solidFill>
+            <a:srgbClr val="76B900"/>
+          </a:solidFill>
+          <a:ln/>
+        </p:spPr>
+      </p:sp>
+      <p:sp>
+        <p:nvSpPr>
+          <p:cNvPr id="13" name="Shape 10"/>
+          <p:cNvSpPr/>
+          <p:nvPr/>
+        </p:nvSpPr>
+        <p:spPr>
+          <a:xfrm>
+            <a:off x="4160520" y="3547872"/>
+            <a:ext cx="3511296" cy="237744"/>
+          </a:xfrm>
+          <a:prstGeom prst="rect">
+            <a:avLst/>
+          </a:prstGeom>
+          <a:solidFill>
+            <a:srgbClr val="76B900"/>
+          </a:solidFill>
+          <a:ln/>
+        </p:spPr>
+      </p:sp>
+      <p:sp>
+        <p:nvSpPr>
+          <p:cNvPr id="14" name="Shape 11"/>
+          <p:cNvSpPr/>
+          <p:nvPr/>
+        </p:nvSpPr>
+        <p:spPr>
+          <a:xfrm>
+            <a:off x="8037576" y="3547872"/>
+            <a:ext cx="292608" cy="237744"/>
+          </a:xfrm>
+          <a:prstGeom prst="rect">
+            <a:avLst/>
+          </a:prstGeom>
+          <a:solidFill>
+            <a:srgbClr val="76B900"/>
+          </a:solidFill>
+          <a:ln/>
+        </p:spPr>
+      </p:sp>
+      <p:sp>
+        <p:nvSpPr>
+          <p:cNvPr id="15" name="Text 12"/>
+          <p:cNvSpPr/>
+          <p:nvPr/>
+        </p:nvSpPr>
+        <p:spPr>
+          <a:xfrm>
+            <a:off x="1329538" y="3291840"/>
+            <a:ext cx="274320" cy="219456"/>
+          </a:xfrm>
+          <a:prstGeom prst="rect">
+            <a:avLst/>
+          </a:prstGeom>
+          <a:noFill/>
+          <a:ln/>
+        </p:spPr>
+        <p:txBody>
+          <a:bodyPr wrap="square" lIns="0" tIns="0" rIns="0" bIns="0" rtlCol="0" anchor="ctr"/>
+          <a:lstStyle/>
+          <a:p>
+            <a:pPr algn="ctr" indent="0" marL="0">
+              <a:buNone/>
+            </a:pPr>
+            <a:r>
+              <a:rPr lang="en-US" sz="1000" b="1" dirty="0">
+                <a:solidFill>
+                  <a:srgbClr val="890C58"/>
+                </a:solidFill>
+                <a:latin typeface="NVIDIA Sans" pitchFamily="34" charset="0"/>
+                <a:ea typeface="NVIDIA Sans" pitchFamily="34" charset="-122"/>
+                <a:cs typeface="NVIDIA Sans" pitchFamily="34" charset="-120"/>
+              </a:rPr>
+              <a:t>1</a:t>
+            </a:r>
+            <a:endParaRPr lang="en-US" sz="1000" dirty="0"/>
+          </a:p>
+        </p:txBody>
+      </p:sp>
+      <p:sp>
+        <p:nvSpPr>
+          <p:cNvPr id="16" name="Text 13"/>
+          <p:cNvSpPr/>
+          <p:nvPr/>
+        </p:nvSpPr>
+        <p:spPr>
+          <a:xfrm>
+            <a:off x="1944014" y="3291840"/>
+            <a:ext cx="274320" cy="219456"/>
+          </a:xfrm>
+          <a:prstGeom prst="rect">
+            <a:avLst/>
+          </a:prstGeom>
+          <a:noFill/>
+          <a:ln/>
+        </p:spPr>
+        <p:txBody>
+          <a:bodyPr wrap="square" lIns="0" tIns="0" rIns="0" bIns="0" rtlCol="0" anchor="ctr"/>
+          <a:lstStyle/>
+          <a:p>
+            <a:pPr algn="ctr" indent="0" marL="0">
+              <a:buNone/>
+            </a:pPr>
+            <a:r>
+              <a:rPr lang="en-US" sz="1000" b="1" dirty="0">
+                <a:solidFill>
+                  <a:srgbClr val="890C58"/>
+                </a:solidFill>
+                <a:latin typeface="NVIDIA Sans" pitchFamily="34" charset="0"/>
+                <a:ea typeface="NVIDIA Sans" pitchFamily="34" charset="-122"/>
+                <a:cs typeface="NVIDIA Sans" pitchFamily="34" charset="-120"/>
+              </a:rPr>
+              <a:t>2</a:t>
+            </a:r>
+            <a:endParaRPr lang="en-US" sz="1000" dirty="0"/>
+          </a:p>
+        </p:txBody>
+      </p:sp>
+      <p:sp>
+        <p:nvSpPr>
+          <p:cNvPr id="17" name="Text 14"/>
+          <p:cNvSpPr/>
+          <p:nvPr/>
+        </p:nvSpPr>
+        <p:spPr>
+          <a:xfrm>
+            <a:off x="2463394" y="3291840"/>
+            <a:ext cx="274320" cy="219456"/>
+          </a:xfrm>
+          <a:prstGeom prst="rect">
+            <a:avLst/>
+          </a:prstGeom>
+          <a:noFill/>
+          <a:ln/>
+        </p:spPr>
+        <p:txBody>
+          <a:bodyPr wrap="square" lIns="0" tIns="0" rIns="0" bIns="0" rtlCol="0" anchor="ctr"/>
+          <a:lstStyle/>
+          <a:p>
+            <a:pPr algn="ctr" indent="0" marL="0">
+              <a:buNone/>
+            </a:pPr>
+            <a:r>
+              <a:rPr lang="en-US" sz="1000" b="1" dirty="0">
+                <a:solidFill>
+                  <a:srgbClr val="890C58"/>
+                </a:solidFill>
+                <a:latin typeface="NVIDIA Sans" pitchFamily="34" charset="0"/>
+                <a:ea typeface="NVIDIA Sans" pitchFamily="34" charset="-122"/>
+                <a:cs typeface="NVIDIA Sans" pitchFamily="34" charset="-120"/>
+              </a:rPr>
+              <a:t>3</a:t>
+            </a:r>
+            <a:endParaRPr lang="en-US" sz="1000" dirty="0"/>
+          </a:p>
+        </p:txBody>
+      </p:sp>
+      <p:sp>
+        <p:nvSpPr>
+          <p:cNvPr id="18" name="Text 15"/>
+          <p:cNvSpPr/>
+          <p:nvPr/>
+        </p:nvSpPr>
+        <p:spPr>
+          <a:xfrm>
+            <a:off x="1234440" y="3840480"/>
+            <a:ext cx="7315200" cy="182880"/>
+          </a:xfrm>
+          <a:prstGeom prst="rect">
+            <a:avLst/>
+          </a:prstGeom>
+          <a:noFill/>
+          <a:ln/>
+        </p:spPr>
+        <p:txBody>
+          <a:bodyPr wrap="square" lIns="0" tIns="0" rIns="0" bIns="0" rtlCol="0" anchor="ctr"/>
+          <a:lstStyle/>
+          <a:p>
+            <a:pPr indent="0" marL="0">
+              <a:buNone/>
+            </a:pPr>
+            <a:r>
+              <a:rPr lang="en-US" sz="900" i="1" dirty="0">
+                <a:solidFill>
+                  <a:srgbClr val="8C8C8C"/>
+                </a:solidFill>
+                <a:latin typeface="NVIDIA Sans" pitchFamily="34" charset="0"/>
+                <a:ea typeface="NVIDIA Sans" pitchFamily="34" charset="-122"/>
+                <a:cs typeface="NVIDIA Sans" pitchFamily="34" charset="-120"/>
+              </a:rPr>
+              <a:t>one baseline step (807 ms, schematic) — red = GPU stalled on CPU work</a:t>
+            </a:r>
+            <a:endParaRPr lang="en-US" sz="900" dirty="0"/>
+          </a:p>
+        </p:txBody>
+      </p:sp>
+      <p:sp>
+        <p:nvSpPr>
+          <p:cNvPr id="19" name="Text 16"/>
+          <p:cNvSpPr/>
+          <p:nvPr/>
+        </p:nvSpPr>
+        <p:spPr>
+          <a:xfrm>
+            <a:off x="640080" y="4041648"/>
+            <a:ext cx="7863840" cy="365760"/>
+          </a:xfrm>
+          <a:prstGeom prst="rect">
+            <a:avLst/>
+          </a:prstGeom>
+          <a:noFill/>
+          <a:ln/>
+        </p:spPr>
+        <p:txBody>
+          <a:bodyPr wrap="square" lIns="0" tIns="0" rIns="0" bIns="0" rtlCol="0" anchor="t"/>
+          <a:lstStyle/>
+          <a:p>
+            <a:pPr indent="0" marL="0">
+              <a:buNone/>
+            </a:pPr>
+            <a:r>
+              <a:rPr lang="en-US" b="1" dirty="0">
+                <a:solidFill>
+                  <a:srgbClr val="76B900"/>
+                </a:solidFill>
+                <a:latin typeface="NVIDIA Sans" pitchFamily="34" charset="0"/>
+                <a:ea typeface="NVIDIA Sans" pitchFamily="34" charset="-122"/>
+                <a:cs typeface="NVIDIA Sans" pitchFamily="34" charset="-120"/>
+              </a:rPr>
+              <a:t>Measured: </a:t>
+            </a:r>
+            <a:pPr indent="0" marL="0">
+              <a:buNone/>
+            </a:pPr>
+            <a:r>
+              <a:rPr lang="en-US" sz="1100" dirty="0">
+                <a:solidFill>
+                  <a:srgbClr val="000000"/>
+                </a:solidFill>
+                <a:latin typeface="NVIDIA Sans" pitchFamily="34" charset="0"/>
+                <a:ea typeface="NVIDIA Sans" pitchFamily="34" charset="-122"/>
+                <a:cs typeface="NVIDIA Sans" pitchFamily="34" charset="-120"/>
+              </a:rPr>
+              <a:t>stall 1 ≈ 37 ms at every step start; stall 3 ≈ 13 ms; plus loss/timer readbacks — together seeding the 205 ms/step of GPU idle. The next page removes all three.</a:t>
+            </a:r>
+            <a:endParaRPr lang="en-US" sz="1100" dirty="0"/>
+          </a:p>
+        </p:txBody>
+      </p:sp>
+      <p:sp>
+        <p:nvSpPr>
+          <p:cNvPr id="20" name="Text 17"/>
+          <p:cNvSpPr/>
+          <p:nvPr/>
+        </p:nvSpPr>
+        <p:spPr>
+          <a:xfrm>
+            <a:off x="457200" y="4617720"/>
+            <a:ext cx="4572000" cy="320040"/>
+          </a:xfrm>
+          <a:prstGeom prst="rect">
+            <a:avLst/>
+          </a:prstGeom>
+          <a:noFill/>
+          <a:ln/>
+        </p:spPr>
+        <p:txBody>
+          <a:bodyPr wrap="square" lIns="0" tIns="0" rIns="0" bIns="0" rtlCol="0" anchor="ctr"/>
+          <a:lstStyle/>
+          <a:p>
+            <a:pPr algn="l" indent="0" marL="0">
+              <a:buNone/>
+            </a:pPr>
+            <a:r>
+              <a:rPr lang="en-US" sz="1000" dirty="0">
+                <a:solidFill>
+                  <a:srgbClr val="5E5E5E"/>
+                </a:solidFill>
+                <a:latin typeface="NVIDIA Sans" pitchFamily="34" charset="0"/>
+                <a:ea typeface="NVIDIA Sans" pitchFamily="34" charset="-122"/>
+                <a:cs typeface="NVIDIA Sans" pitchFamily="34" charset="-120"/>
+              </a:rPr>
+              <a:t>QwenPI Training Optimization</a:t>
+            </a:r>
+            <a:endParaRPr lang="en-US" sz="1000" dirty="0"/>
+          </a:p>
+        </p:txBody>
+      </p:sp>
+      <p:sp>
+        <p:nvSpPr>
+          <p:cNvPr id="21" name="Text 18"/>
+          <p:cNvSpPr/>
+          <p:nvPr/>
+        </p:nvSpPr>
+        <p:spPr>
+          <a:xfrm>
+            <a:off x="7360920" y="4617720"/>
+            <a:ext cx="320040" cy="320040"/>
+          </a:xfrm>
+          <a:prstGeom prst="rect">
+            <a:avLst/>
+          </a:prstGeom>
+          <a:noFill/>
+          <a:ln/>
+        </p:spPr>
+        <p:txBody>
+          <a:bodyPr wrap="square" lIns="0" tIns="0" rIns="0" bIns="0" rtlCol="0" anchor="ctr"/>
+          <a:lstStyle/>
+          <a:p>
+            <a:pPr algn="r" indent="0" marL="0">
+              <a:buNone/>
+            </a:pPr>
+            <a:r>
+              <a:rPr lang="en-US" sz="1000" dirty="0">
+                <a:solidFill>
+                  <a:srgbClr val="5E5E5E"/>
+                </a:solidFill>
+                <a:latin typeface="NVIDIA Sans" pitchFamily="34" charset="0"/>
+                <a:ea typeface="NVIDIA Sans" pitchFamily="34" charset="-122"/>
+                <a:cs typeface="NVIDIA Sans" pitchFamily="34" charset="-120"/>
+              </a:rPr>
+              <a:t>7</a:t>
+            </a:r>
+            <a:endParaRPr lang="en-US" sz="1000" dirty="0"/>
+          </a:p>
+        </p:txBody>
+      </p:sp>
+      <p:sp>
+        <p:nvSpPr>
+          <p:cNvPr id="22" name="Shape 19"/>
+          <p:cNvSpPr/>
+          <p:nvPr/>
+        </p:nvSpPr>
+        <p:spPr>
+          <a:xfrm>
+            <a:off x="7726680" y="4617720"/>
+            <a:ext cx="36576" cy="320040"/>
+          </a:xfrm>
+          <a:prstGeom prst="rect">
+            <a:avLst/>
+          </a:prstGeom>
+          <a:solidFill>
+            <a:srgbClr val="76B900"/>
+          </a:solidFill>
+          <a:ln/>
+        </p:spPr>
+      </p:sp>
+      <p:pic>
+        <p:nvPicPr>
+          <p:cNvPr id="23" name="Image 1" descr="/app/logos/nvidia-logo-blk-sm.png">    </p:cNvPr>
+          <p:cNvPicPr>
+            <a:picLocks noChangeAspect="1"/>
+          </p:cNvPicPr>
+          <p:nvPr/>
+        </p:nvPicPr>
+        <p:blipFill>
+          <a:blip r:embed="rId2"/>
+          <a:stretch>
+            <a:fillRect/>
+          </a:stretch>
+        </p:blipFill>
+        <p:spPr>
+          <a:xfrm>
+            <a:off x="7863840" y="4604004"/>
+            <a:ext cx="1005840" cy="347472"/>
+          </a:xfrm>
+          <a:prstGeom prst="rect">
+            <a:avLst/>
+          </a:prstGeom>
+        </p:spPr>
+      </p:pic>
+    </p:spTree>
+  </p:cSld>
+  <p:clrMapOvr>
+    <a:masterClrMapping/>
+  </p:clrMapOvr>
+</p:sld>
+</file>
+
+<file path=ppt/slides/slide8.xml><?xml version="1.0" encoding="utf-8"?>
+<p:sld xmlns:a="http://schemas.openxmlformats.org/drawingml/2006/main" xmlns:r="http://schemas.openxmlformats.org/officeDocument/2006/relationships" xmlns:p="http://schemas.openxmlformats.org/presentationml/2006/main">
+  <p:cSld name="Slide 8">
+    <p:bg>
+      <p:bgPr>
+        <a:solidFill>
+          <a:srgbClr val="FFFFFF"/>
+        </a:solidFill>
+      </p:bgPr>
+    </p:bg>
+    <p:spTree>
+      <p:nvGrpSpPr>
+        <p:cNvPr id="1" name=""/>
+        <p:cNvGrpSpPr/>
+        <p:nvPr/>
+      </p:nvGrpSpPr>
+      <p:grpSpPr>
+        <a:xfrm>
+          <a:off x="0" y="0"/>
+          <a:ext cx="0" cy="0"/>
+          <a:chOff x="0" y="0"/>
+          <a:chExt cx="0" cy="0"/>
+        </a:xfrm>
+      </p:grpSpPr>
+      <p:sp>
+        <p:nvSpPr>
+          <p:cNvPr id="2" name="Text 0"/>
+          <p:cNvSpPr/>
+          <p:nvPr/>
+        </p:nvSpPr>
+        <p:spPr>
+          <a:xfrm>
+            <a:off x="457200" y="256032"/>
+            <a:ext cx="8229600" cy="548640"/>
+          </a:xfrm>
+          <a:prstGeom prst="rect">
+            <a:avLst/>
+          </a:prstGeom>
+          <a:noFill/>
+          <a:ln/>
+        </p:spPr>
+        <p:txBody>
+          <a:bodyPr wrap="square" lIns="0" tIns="0" rIns="0" bIns="0" rtlCol="0" anchor="ctr"/>
+          <a:lstStyle/>
+          <a:p>
+            <a:pPr indent="0" marL="0">
+              <a:buNone/>
+            </a:pPr>
+            <a:r>
+              <a:rPr lang="en-US" sz="3000" b="1" dirty="0">
+                <a:solidFill>
+                  <a:srgbClr val="000000"/>
+                </a:solidFill>
+                <a:latin typeface="NVIDIA Sans" pitchFamily="34" charset="0"/>
+                <a:ea typeface="NVIDIA Sans" pitchFamily="34" charset="-122"/>
+                <a:cs typeface="NVIDIA Sans" pitchFamily="34" charset="-120"/>
+              </a:rPr>
+              <a:t>Removing the Sync Points: −117 ms</a:t>
+            </a:r>
+            <a:endParaRPr lang="en-US" sz="3000" dirty="0"/>
+          </a:p>
+        </p:txBody>
+      </p:sp>
+      <p:sp>
+        <p:nvSpPr>
+          <p:cNvPr id="3" name="Text 1"/>
+          <p:cNvSpPr/>
+          <p:nvPr/>
+        </p:nvSpPr>
+        <p:spPr>
+          <a:xfrm>
+            <a:off x="457200" y="804672"/>
+            <a:ext cx="8229600" cy="329184"/>
+          </a:xfrm>
+          <a:prstGeom prst="rect">
+            <a:avLst/>
+          </a:prstGeom>
+          <a:noFill/>
+          <a:ln/>
+        </p:spPr>
+        <p:txBody>
+          <a:bodyPr wrap="square" lIns="0" tIns="0" rIns="0" bIns="0" rtlCol="0" anchor="ctr"/>
+          <a:lstStyle/>
+          <a:p>
+            <a:pPr indent="0" marL="0">
+              <a:buNone/>
+            </a:pPr>
+            <a:r>
+              <a:rPr lang="en-US" sz="1500" dirty="0">
+                <a:solidFill>
+                  <a:srgbClr val="76B900"/>
+                </a:solidFill>
+                <a:latin typeface="NVIDIA Sans" pitchFamily="34" charset="0"/>
+                <a:ea typeface="NVIDIA Sans" pitchFamily="34" charset="-122"/>
+                <a:cs typeface="NVIDIA Sans" pitchFamily="34" charset="-120"/>
+              </a:rPr>
+              <a:t>545 → 428 ms.  Every CPU round-trip moves off the critical path</a:t>
             </a:r>
             <a:endParaRPr lang="en-US" sz="1500" dirty="0"/>
           </a:p>
@@ -21730,7 +23820,7 @@
       </p:sp>
       <p:graphicFrame>
         <p:nvGraphicFramePr>
-          <p:cNvPr id="8" name="Table 0"/>
+          <p:cNvPr id="9" name="Table 0"/>
           <p:cNvGraphicFramePr>
             <a:graphicFrameLocks noGrp="1"/>
           </p:cNvGraphicFramePr>
@@ -22816,7 +24906,7 @@
                 <a:ea typeface="NVIDIA Sans" pitchFamily="34" charset="-122"/>
                 <a:cs typeface="NVIDIA Sans" pitchFamily="34" charset="-120"/>
               </a:rPr>
-              <a:t>7</a:t>
+              <a:t>8</a:t>
             </a:r>
             <a:endParaRPr lang="en-US" sz="1000" dirty="0"/>
           </a:p>
@@ -22845,910 +24935,6 @@
       <p:pic>
         <p:nvPicPr>
           <p:cNvPr id="42" name="Image 0" descr="/app/logos/nvidia-logo-blk-sm.png">    </p:cNvPr>
-          <p:cNvPicPr>
-            <a:picLocks noChangeAspect="1"/>
-          </p:cNvPicPr>
-          <p:nvPr/>
-        </p:nvPicPr>
-        <p:blipFill>
-          <a:blip r:embed="rId1"/>
-          <a:stretch>
-            <a:fillRect/>
-          </a:stretch>
-        </p:blipFill>
-        <p:spPr>
-          <a:xfrm>
-            <a:off x="7863840" y="4604004"/>
-            <a:ext cx="1005840" cy="347472"/>
-          </a:xfrm>
-          <a:prstGeom prst="rect">
-            <a:avLst/>
-          </a:prstGeom>
-        </p:spPr>
-      </p:pic>
-    </p:spTree>
-  </p:cSld>
-  <p:clrMapOvr>
-    <a:masterClrMapping/>
-  </p:clrMapOvr>
-</p:sld>
-</file>
-
-<file path=ppt/slides/slide8.xml><?xml version="1.0" encoding="utf-8"?>
-<p:sld xmlns:a="http://schemas.openxmlformats.org/drawingml/2006/main" xmlns:r="http://schemas.openxmlformats.org/officeDocument/2006/relationships" xmlns:p="http://schemas.openxmlformats.org/presentationml/2006/main">
-  <p:cSld name="Slide 8">
-    <p:bg>
-      <p:bgPr>
-        <a:solidFill>
-          <a:srgbClr val="FFFFFF"/>
-        </a:solidFill>
-      </p:bgPr>
-    </p:bg>
-    <p:spTree>
-      <p:nvGrpSpPr>
-        <p:cNvPr id="1" name=""/>
-        <p:cNvGrpSpPr/>
-        <p:nvPr/>
-      </p:nvGrpSpPr>
-      <p:grpSpPr>
-        <a:xfrm>
-          <a:off x="0" y="0"/>
-          <a:ext cx="0" cy="0"/>
-          <a:chOff x="0" y="0"/>
-          <a:chExt cx="0" cy="0"/>
-        </a:xfrm>
-      </p:grpSpPr>
-      <p:sp>
-        <p:nvSpPr>
-          <p:cNvPr id="2" name="Text 0"/>
-          <p:cNvSpPr/>
-          <p:nvPr/>
-        </p:nvSpPr>
-        <p:spPr>
-          <a:xfrm>
-            <a:off x="457200" y="256032"/>
-            <a:ext cx="8229600" cy="548640"/>
-          </a:xfrm>
-          <a:prstGeom prst="rect">
-            <a:avLst/>
-          </a:prstGeom>
-          <a:noFill/>
-          <a:ln/>
-        </p:spPr>
-        <p:txBody>
-          <a:bodyPr wrap="square" lIns="0" tIns="0" rIns="0" bIns="0" rtlCol="0" anchor="ctr"/>
-          <a:lstStyle/>
-          <a:p>
-            <a:pPr indent="0" marL="0">
-              <a:buNone/>
-            </a:pPr>
-            <a:r>
-              <a:rPr lang="en-US" sz="3000" b="1" dirty="0">
-                <a:solidFill>
-                  <a:srgbClr val="000000"/>
-                </a:solidFill>
-                <a:latin typeface="NVIDIA Sans" pitchFamily="34" charset="0"/>
-                <a:ea typeface="NVIDIA Sans" pitchFamily="34" charset="-122"/>
-                <a:cs typeface="NVIDIA Sans" pitchFamily="34" charset="-120"/>
-              </a:rPr>
-              <a:t>Why CUDA Graphs: Launch-Bound Forward</a:t>
-            </a:r>
-            <a:endParaRPr lang="en-US" sz="3000" dirty="0"/>
-          </a:p>
-        </p:txBody>
-      </p:sp>
-      <p:sp>
-        <p:nvSpPr>
-          <p:cNvPr id="3" name="Text 1"/>
-          <p:cNvSpPr/>
-          <p:nvPr/>
-        </p:nvSpPr>
-        <p:spPr>
-          <a:xfrm>
-            <a:off x="457200" y="804672"/>
-            <a:ext cx="8229600" cy="329184"/>
-          </a:xfrm>
-          <a:prstGeom prst="rect">
-            <a:avLst/>
-          </a:prstGeom>
-          <a:noFill/>
-          <a:ln/>
-        </p:spPr>
-        <p:txBody>
-          <a:bodyPr wrap="square" lIns="0" tIns="0" rIns="0" bIns="0" rtlCol="0" anchor="ctr"/>
-          <a:lstStyle/>
-          <a:p>
-            <a:pPr indent="0" marL="0">
-              <a:buNone/>
-            </a:pPr>
-            <a:r>
-              <a:rPr lang="en-US" sz="1500" dirty="0">
-                <a:solidFill>
-                  <a:srgbClr val="76B900"/>
-                </a:solidFill>
-                <a:latin typeface="NVIDIA Sans" pitchFamily="34" charset="0"/>
-                <a:ea typeface="NVIDIA Sans" pitchFamily="34" charset="-122"/>
-                <a:cs typeface="NVIDIA Sans" pitchFamily="34" charset="-120"/>
-              </a:rPr>
-              <a:t>Anatomy of the Qwen3.5 forward — same math, very different wall clock</a:t>
-            </a:r>
-            <a:endParaRPr lang="en-US" sz="1500" dirty="0"/>
-          </a:p>
-        </p:txBody>
-      </p:sp>
-      <p:sp>
-        <p:nvSpPr>
-          <p:cNvPr id="4" name="Text 2"/>
-          <p:cNvSpPr/>
-          <p:nvPr/>
-        </p:nvSpPr>
-        <p:spPr>
-          <a:xfrm>
-            <a:off x="457200" y="1399032"/>
-            <a:ext cx="1417320" cy="384048"/>
-          </a:xfrm>
-          <a:prstGeom prst="rect">
-            <a:avLst/>
-          </a:prstGeom>
-          <a:noFill/>
-          <a:ln/>
-        </p:spPr>
-        <p:txBody>
-          <a:bodyPr wrap="square" lIns="0" tIns="0" rIns="0" bIns="0" rtlCol="0" anchor="ctr"/>
-          <a:lstStyle/>
-          <a:p>
-            <a:pPr indent="0" marL="0">
-              <a:buNone/>
-            </a:pPr>
-            <a:r>
-              <a:rPr lang="en-US" sz="1100" b="1" dirty="0">
-                <a:solidFill>
-                  <a:srgbClr val="000000"/>
-                </a:solidFill>
-                <a:latin typeface="NVIDIA Sans" pitchFamily="34" charset="0"/>
-                <a:ea typeface="NVIDIA Sans" pitchFamily="34" charset="-122"/>
-                <a:cs typeface="NVIDIA Sans" pitchFamily="34" charset="-120"/>
-              </a:rPr>
-              <a:t>Baseline</a:t>
-            </a:r>
-            <a:endParaRPr lang="en-US" sz="1100" dirty="0"/>
-          </a:p>
-          <a:p>
-            <a:pPr indent="0" marL="0">
-              <a:buNone/>
-            </a:pPr>
-            <a:r>
-              <a:rPr lang="en-US" sz="1100" b="1" dirty="0">
-                <a:solidFill>
-                  <a:srgbClr val="000000"/>
-                </a:solidFill>
-                <a:latin typeface="NVIDIA Sans" pitchFamily="34" charset="0"/>
-                <a:ea typeface="NVIDIA Sans" pitchFamily="34" charset="-122"/>
-                <a:cs typeface="NVIDIA Sans" pitchFamily="34" charset="-120"/>
-              </a:rPr>
-              <a:t>(eager)</a:t>
-            </a:r>
-            <a:endParaRPr lang="en-US" sz="1100" dirty="0"/>
-          </a:p>
-        </p:txBody>
-      </p:sp>
-      <p:sp>
-        <p:nvSpPr>
-          <p:cNvPr id="5" name="Shape 3"/>
-          <p:cNvSpPr/>
-          <p:nvPr/>
-        </p:nvSpPr>
-        <p:spPr>
-          <a:xfrm>
-            <a:off x="1920240" y="1417320"/>
-            <a:ext cx="2131541" cy="384048"/>
-          </a:xfrm>
-          <a:prstGeom prst="rect">
-            <a:avLst/>
-          </a:prstGeom>
-          <a:solidFill>
-            <a:srgbClr val="76B900"/>
-          </a:solidFill>
-          <a:ln/>
-        </p:spPr>
-      </p:sp>
-      <p:sp>
-        <p:nvSpPr>
-          <p:cNvPr id="6" name="Text 4"/>
-          <p:cNvSpPr/>
-          <p:nvPr/>
-        </p:nvSpPr>
-        <p:spPr>
-          <a:xfrm>
-            <a:off x="1920240" y="1417320"/>
-            <a:ext cx="2131541" cy="384048"/>
-          </a:xfrm>
-          <a:prstGeom prst="rect">
-            <a:avLst/>
-          </a:prstGeom>
-          <a:noFill/>
-          <a:ln/>
-        </p:spPr>
-        <p:txBody>
-          <a:bodyPr wrap="square" lIns="0" tIns="0" rIns="0" bIns="0" rtlCol="0" anchor="ctr"/>
-          <a:lstStyle/>
-          <a:p>
-            <a:pPr algn="ctr" indent="0" marL="0">
-              <a:buNone/>
-            </a:pPr>
-            <a:r>
-              <a:rPr lang="en-US" sz="1000" b="1" dirty="0">
-                <a:solidFill>
-                  <a:srgbClr val="FFFFFF"/>
-                </a:solidFill>
-                <a:latin typeface="NVIDIA Sans" pitchFamily="34" charset="0"/>
-                <a:ea typeface="NVIDIA Sans" pitchFamily="34" charset="-122"/>
-                <a:cs typeface="NVIDIA Sans" pitchFamily="34" charset="-120"/>
-              </a:rPr>
-              <a:t>GPU busy 50 ms</a:t>
-            </a:r>
-            <a:endParaRPr lang="en-US" sz="1000" dirty="0"/>
-          </a:p>
-        </p:txBody>
-      </p:sp>
-      <p:sp>
-        <p:nvSpPr>
-          <p:cNvPr id="7" name="Shape 5"/>
-          <p:cNvSpPr/>
-          <p:nvPr/>
-        </p:nvSpPr>
-        <p:spPr>
-          <a:xfrm>
-            <a:off x="4051781" y="1417320"/>
-            <a:ext cx="4177819" cy="384048"/>
-          </a:xfrm>
-          <a:prstGeom prst="rect">
-            <a:avLst/>
-          </a:prstGeom>
-          <a:solidFill>
-            <a:srgbClr val="890C58"/>
-          </a:solidFill>
-          <a:ln/>
-        </p:spPr>
-      </p:sp>
-      <p:sp>
-        <p:nvSpPr>
-          <p:cNvPr id="8" name="Text 6"/>
-          <p:cNvSpPr/>
-          <p:nvPr/>
-        </p:nvSpPr>
-        <p:spPr>
-          <a:xfrm>
-            <a:off x="4051781" y="1417320"/>
-            <a:ext cx="4177819" cy="384048"/>
-          </a:xfrm>
-          <a:prstGeom prst="rect">
-            <a:avLst/>
-          </a:prstGeom>
-          <a:noFill/>
-          <a:ln/>
-        </p:spPr>
-        <p:txBody>
-          <a:bodyPr wrap="square" lIns="0" tIns="0" rIns="0" bIns="0" rtlCol="0" anchor="ctr"/>
-          <a:lstStyle/>
-          <a:p>
-            <a:pPr algn="ctr" indent="0" marL="0">
-              <a:buNone/>
-            </a:pPr>
-            <a:r>
-              <a:rPr lang="en-US" sz="1000" b="1" dirty="0">
-                <a:solidFill>
-                  <a:srgbClr val="FFFFFF"/>
-                </a:solidFill>
-                <a:latin typeface="NVIDIA Sans" pitchFamily="34" charset="0"/>
-                <a:ea typeface="NVIDIA Sans" pitchFamily="34" charset="-122"/>
-                <a:cs typeface="NVIDIA Sans" pitchFamily="34" charset="-120"/>
-              </a:rPr>
-              <a:t>waiting for launches 98 ms</a:t>
-            </a:r>
-            <a:endParaRPr lang="en-US" sz="1000" dirty="0"/>
-          </a:p>
-        </p:txBody>
-      </p:sp>
-      <p:sp>
-        <p:nvSpPr>
-          <p:cNvPr id="9" name="Text 7"/>
-          <p:cNvSpPr/>
-          <p:nvPr/>
-        </p:nvSpPr>
-        <p:spPr>
-          <a:xfrm>
-            <a:off x="8302752" y="1417320"/>
-            <a:ext cx="822960" cy="384048"/>
-          </a:xfrm>
-          <a:prstGeom prst="rect">
-            <a:avLst/>
-          </a:prstGeom>
-          <a:noFill/>
-          <a:ln/>
-        </p:spPr>
-        <p:txBody>
-          <a:bodyPr wrap="square" lIns="0" tIns="0" rIns="0" bIns="0" rtlCol="0" anchor="ctr"/>
-          <a:lstStyle/>
-          <a:p>
-            <a:pPr indent="0" marL="0">
-              <a:buNone/>
-            </a:pPr>
-            <a:r>
-              <a:rPr lang="en-US" sz="1200" b="1" dirty="0">
-                <a:solidFill>
-                  <a:srgbClr val="000000"/>
-                </a:solidFill>
-                <a:latin typeface="NVIDIA Sans" pitchFamily="34" charset="0"/>
-                <a:ea typeface="NVIDIA Sans" pitchFamily="34" charset="-122"/>
-                <a:cs typeface="NVIDIA Sans" pitchFamily="34" charset="-120"/>
-              </a:rPr>
-              <a:t>148 ms</a:t>
-            </a:r>
-            <a:endParaRPr lang="en-US" sz="1200" dirty="0"/>
-          </a:p>
-        </p:txBody>
-      </p:sp>
-      <p:sp>
-        <p:nvSpPr>
-          <p:cNvPr id="10" name="Text 8"/>
-          <p:cNvSpPr/>
-          <p:nvPr/>
-        </p:nvSpPr>
-        <p:spPr>
-          <a:xfrm>
-            <a:off x="1920240" y="1819656"/>
-            <a:ext cx="6400800" cy="201168"/>
-          </a:xfrm>
-          <a:prstGeom prst="rect">
-            <a:avLst/>
-          </a:prstGeom>
-          <a:noFill/>
-          <a:ln/>
-        </p:spPr>
-        <p:txBody>
-          <a:bodyPr wrap="square" lIns="0" tIns="0" rIns="0" bIns="0" rtlCol="0" anchor="ctr"/>
-          <a:lstStyle/>
-          <a:p>
-            <a:pPr indent="0" marL="0">
-              <a:buNone/>
-            </a:pPr>
-            <a:r>
-              <a:rPr lang="en-US" sz="950" i="1" dirty="0">
-                <a:solidFill>
-                  <a:srgbClr val="5E5E5E"/>
-                </a:solidFill>
-                <a:latin typeface="NVIDIA Sans" pitchFamily="34" charset="0"/>
-                <a:ea typeface="NVIDIA Sans" pitchFamily="34" charset="-122"/>
-                <a:cs typeface="NVIDIA Sans" pitchFamily="34" charset="-120"/>
-              </a:rPr>
-              <a:t>3,929 kernel launches · 19.1 ms of cudaLaunchKernel CPU time · occupancy 34%</a:t>
-            </a:r>
-            <a:endParaRPr lang="en-US" sz="950" dirty="0"/>
-          </a:p>
-        </p:txBody>
-      </p:sp>
-      <p:sp>
-        <p:nvSpPr>
-          <p:cNvPr id="11" name="Text 9"/>
-          <p:cNvSpPr/>
-          <p:nvPr/>
-        </p:nvSpPr>
-        <p:spPr>
-          <a:xfrm>
-            <a:off x="457200" y="2267712"/>
-            <a:ext cx="1417320" cy="384048"/>
-          </a:xfrm>
-          <a:prstGeom prst="rect">
-            <a:avLst/>
-          </a:prstGeom>
-          <a:noFill/>
-          <a:ln/>
-        </p:spPr>
-        <p:txBody>
-          <a:bodyPr wrap="square" lIns="0" tIns="0" rIns="0" bIns="0" rtlCol="0" anchor="ctr"/>
-          <a:lstStyle/>
-          <a:p>
-            <a:pPr indent="0" marL="0">
-              <a:buNone/>
-            </a:pPr>
-            <a:r>
-              <a:rPr lang="en-US" sz="1100" b="1" dirty="0">
-                <a:solidFill>
-                  <a:srgbClr val="000000"/>
-                </a:solidFill>
-                <a:latin typeface="NVIDIA Sans" pitchFamily="34" charset="0"/>
-                <a:ea typeface="NVIDIA Sans" pitchFamily="34" charset="-122"/>
-                <a:cs typeface="NVIDIA Sans" pitchFamily="34" charset="-120"/>
-              </a:rPr>
-              <a:t>Optimized</a:t>
-            </a:r>
-            <a:endParaRPr lang="en-US" sz="1100" dirty="0"/>
-          </a:p>
-          <a:p>
-            <a:pPr indent="0" marL="0">
-              <a:buNone/>
-            </a:pPr>
-            <a:r>
-              <a:rPr lang="en-US" sz="1100" b="1" dirty="0">
-                <a:solidFill>
-                  <a:srgbClr val="000000"/>
-                </a:solidFill>
-                <a:latin typeface="NVIDIA Sans" pitchFamily="34" charset="0"/>
-                <a:ea typeface="NVIDIA Sans" pitchFamily="34" charset="-122"/>
-                <a:cs typeface="NVIDIA Sans" pitchFamily="34" charset="-120"/>
-              </a:rPr>
-              <a:t>(CUDA Graphs)</a:t>
-            </a:r>
-            <a:endParaRPr lang="en-US" sz="1100" dirty="0"/>
-          </a:p>
-        </p:txBody>
-      </p:sp>
-      <p:sp>
-        <p:nvSpPr>
-          <p:cNvPr id="12" name="Shape 10"/>
-          <p:cNvSpPr/>
-          <p:nvPr/>
-        </p:nvSpPr>
-        <p:spPr>
-          <a:xfrm>
-            <a:off x="1920240" y="2286000"/>
-            <a:ext cx="1577340" cy="384048"/>
-          </a:xfrm>
-          <a:prstGeom prst="rect">
-            <a:avLst/>
-          </a:prstGeom>
-          <a:solidFill>
-            <a:srgbClr val="76B900"/>
-          </a:solidFill>
-          <a:ln/>
-        </p:spPr>
-      </p:sp>
-      <p:sp>
-        <p:nvSpPr>
-          <p:cNvPr id="13" name="Text 11"/>
-          <p:cNvSpPr/>
-          <p:nvPr/>
-        </p:nvSpPr>
-        <p:spPr>
-          <a:xfrm>
-            <a:off x="1920240" y="2286000"/>
-            <a:ext cx="1577340" cy="384048"/>
-          </a:xfrm>
-          <a:prstGeom prst="rect">
-            <a:avLst/>
-          </a:prstGeom>
-          <a:noFill/>
-          <a:ln/>
-        </p:spPr>
-        <p:txBody>
-          <a:bodyPr wrap="square" lIns="0" tIns="0" rIns="0" bIns="0" rtlCol="0" anchor="ctr"/>
-          <a:lstStyle/>
-          <a:p>
-            <a:pPr algn="ctr" indent="0" marL="0">
-              <a:buNone/>
-            </a:pPr>
-            <a:r>
-              <a:rPr lang="en-US" sz="1000" b="1" dirty="0">
-                <a:solidFill>
-                  <a:srgbClr val="FFFFFF"/>
-                </a:solidFill>
-                <a:latin typeface="NVIDIA Sans" pitchFamily="34" charset="0"/>
-                <a:ea typeface="NVIDIA Sans" pitchFamily="34" charset="-122"/>
-                <a:cs typeface="NVIDIA Sans" pitchFamily="34" charset="-120"/>
-              </a:rPr>
-              <a:t>GPU busy 37 ms</a:t>
-            </a:r>
-            <a:endParaRPr lang="en-US" sz="1000" dirty="0"/>
-          </a:p>
-        </p:txBody>
-      </p:sp>
-      <p:sp>
-        <p:nvSpPr>
-          <p:cNvPr id="14" name="Shape 12"/>
-          <p:cNvSpPr/>
-          <p:nvPr/>
-        </p:nvSpPr>
-        <p:spPr>
-          <a:xfrm>
-            <a:off x="3497580" y="2286000"/>
-            <a:ext cx="1193663" cy="384048"/>
-          </a:xfrm>
-          <a:prstGeom prst="rect">
-            <a:avLst/>
-          </a:prstGeom>
-          <a:solidFill>
-            <a:srgbClr val="890C58"/>
-          </a:solidFill>
-          <a:ln/>
-        </p:spPr>
-      </p:sp>
-      <p:sp>
-        <p:nvSpPr>
-          <p:cNvPr id="15" name="Text 13"/>
-          <p:cNvSpPr/>
-          <p:nvPr/>
-        </p:nvSpPr>
-        <p:spPr>
-          <a:xfrm>
-            <a:off x="3497580" y="2286000"/>
-            <a:ext cx="1193663" cy="384048"/>
-          </a:xfrm>
-          <a:prstGeom prst="rect">
-            <a:avLst/>
-          </a:prstGeom>
-          <a:noFill/>
-          <a:ln/>
-        </p:spPr>
-        <p:txBody>
-          <a:bodyPr wrap="square" lIns="0" tIns="0" rIns="0" bIns="0" rtlCol="0" anchor="ctr"/>
-          <a:lstStyle/>
-          <a:p>
-            <a:pPr algn="ctr" indent="0" marL="0">
-              <a:buNone/>
-            </a:pPr>
-            <a:r>
-              <a:rPr lang="en-US" sz="1000" b="1" dirty="0">
-                <a:solidFill>
-                  <a:srgbClr val="FFFFFF"/>
-                </a:solidFill>
-                <a:latin typeface="NVIDIA Sans" pitchFamily="34" charset="0"/>
-                <a:ea typeface="NVIDIA Sans" pitchFamily="34" charset="-122"/>
-                <a:cs typeface="NVIDIA Sans" pitchFamily="34" charset="-120"/>
-              </a:rPr>
-              <a:t>waiting for launches 28 ms</a:t>
-            </a:r>
-            <a:endParaRPr lang="en-US" sz="1000" dirty="0"/>
-          </a:p>
-        </p:txBody>
-      </p:sp>
-      <p:sp>
-        <p:nvSpPr>
-          <p:cNvPr id="16" name="Text 14"/>
-          <p:cNvSpPr/>
-          <p:nvPr/>
-        </p:nvSpPr>
-        <p:spPr>
-          <a:xfrm>
-            <a:off x="4764395" y="2286000"/>
-            <a:ext cx="822960" cy="384048"/>
-          </a:xfrm>
-          <a:prstGeom prst="rect">
-            <a:avLst/>
-          </a:prstGeom>
-          <a:noFill/>
-          <a:ln/>
-        </p:spPr>
-        <p:txBody>
-          <a:bodyPr wrap="square" lIns="0" tIns="0" rIns="0" bIns="0" rtlCol="0" anchor="ctr"/>
-          <a:lstStyle/>
-          <a:p>
-            <a:pPr indent="0" marL="0">
-              <a:buNone/>
-            </a:pPr>
-            <a:r>
-              <a:rPr lang="en-US" sz="1200" b="1" dirty="0">
-                <a:solidFill>
-                  <a:srgbClr val="000000"/>
-                </a:solidFill>
-                <a:latin typeface="NVIDIA Sans" pitchFamily="34" charset="0"/>
-                <a:ea typeface="NVIDIA Sans" pitchFamily="34" charset="-122"/>
-                <a:cs typeface="NVIDIA Sans" pitchFamily="34" charset="-120"/>
-              </a:rPr>
-              <a:t>65 ms</a:t>
-            </a:r>
-            <a:endParaRPr lang="en-US" sz="1200" dirty="0"/>
-          </a:p>
-        </p:txBody>
-      </p:sp>
-      <p:sp>
-        <p:nvSpPr>
-          <p:cNvPr id="17" name="Text 15"/>
-          <p:cNvSpPr/>
-          <p:nvPr/>
-        </p:nvSpPr>
-        <p:spPr>
-          <a:xfrm>
-            <a:off x="1920240" y="2688336"/>
-            <a:ext cx="6400800" cy="201168"/>
-          </a:xfrm>
-          <a:prstGeom prst="rect">
-            <a:avLst/>
-          </a:prstGeom>
-          <a:noFill/>
-          <a:ln/>
-        </p:spPr>
-        <p:txBody>
-          <a:bodyPr wrap="square" lIns="0" tIns="0" rIns="0" bIns="0" rtlCol="0" anchor="ctr"/>
-          <a:lstStyle/>
-          <a:p>
-            <a:pPr indent="0" marL="0">
-              <a:buNone/>
-            </a:pPr>
-            <a:r>
-              <a:rPr lang="en-US" sz="950" i="1" dirty="0">
-                <a:solidFill>
-                  <a:srgbClr val="5E5E5E"/>
-                </a:solidFill>
-                <a:latin typeface="NVIDIA Sans" pitchFamily="34" charset="0"/>
-                <a:ea typeface="NVIDIA Sans" pitchFamily="34" charset="-122"/>
-                <a:cs typeface="NVIDIA Sans" pitchFamily="34" charset="-120"/>
-              </a:rPr>
-              <a:t>6 graph launches + 736 eager · 9.4 ms launch CPU · occupancy 57%</a:t>
-            </a:r>
-            <a:endParaRPr lang="en-US" sz="950" dirty="0"/>
-          </a:p>
-        </p:txBody>
-      </p:sp>
-      <p:sp>
-        <p:nvSpPr>
-          <p:cNvPr id="18" name="Text 16"/>
-          <p:cNvSpPr/>
-          <p:nvPr/>
-        </p:nvSpPr>
-        <p:spPr>
-          <a:xfrm>
-            <a:off x="1920240" y="2907792"/>
-            <a:ext cx="6400800" cy="365760"/>
-          </a:xfrm>
-          <a:prstGeom prst="rect">
-            <a:avLst/>
-          </a:prstGeom>
-          <a:noFill/>
-          <a:ln/>
-        </p:spPr>
-        <p:txBody>
-          <a:bodyPr wrap="square" lIns="0" tIns="0" rIns="0" bIns="0" rtlCol="0" anchor="ctr"/>
-          <a:lstStyle/>
-          <a:p>
-            <a:pPr indent="0" marL="0">
-              <a:buNone/>
-            </a:pPr>
-            <a:r>
-              <a:rPr lang="en-US" sz="2400" b="1" dirty="0">
-                <a:solidFill>
-                  <a:srgbClr val="76B900"/>
-                </a:solidFill>
-                <a:latin typeface="NVIDIA Sans" pitchFamily="34" charset="0"/>
-                <a:ea typeface="NVIDIA Sans" pitchFamily="34" charset="-122"/>
-                <a:cs typeface="NVIDIA Sans" pitchFamily="34" charset="-120"/>
-              </a:rPr>
-              <a:t>2.3× </a:t>
-            </a:r>
-            <a:pPr indent="0" marL="0">
-              <a:buNone/>
-            </a:pPr>
-            <a:r>
-              <a:rPr lang="en-US" sz="1300" b="1" dirty="0">
-                <a:solidFill>
-                  <a:srgbClr val="000000"/>
-                </a:solidFill>
-                <a:latin typeface="NVIDIA Sans" pitchFamily="34" charset="0"/>
-                <a:ea typeface="NVIDIA Sans" pitchFamily="34" charset="-122"/>
-                <a:cs typeface="NVIDIA Sans" pitchFamily="34" charset="-120"/>
-              </a:rPr>
-              <a:t>faster forward wall clock — with 81% fewer launches</a:t>
-            </a:r>
-            <a:endParaRPr lang="en-US" sz="2400" dirty="0"/>
-          </a:p>
-        </p:txBody>
-      </p:sp>
-      <p:sp>
-        <p:nvSpPr>
-          <p:cNvPr id="19" name="Text 17"/>
-          <p:cNvSpPr/>
-          <p:nvPr/>
-        </p:nvSpPr>
-        <p:spPr>
-          <a:xfrm>
-            <a:off x="457200" y="3346704"/>
-            <a:ext cx="8229600" cy="822960"/>
-          </a:xfrm>
-          <a:prstGeom prst="rect">
-            <a:avLst/>
-          </a:prstGeom>
-          <a:noFill/>
-          <a:ln/>
-        </p:spPr>
-        <p:txBody>
-          <a:bodyPr wrap="square" lIns="0" tIns="0" rIns="0" bIns="0" rtlCol="0" anchor="t"/>
-          <a:lstStyle/>
-          <a:p>
-            <a:pPr marL="342900" indent="-342900">
-              <a:buSzPct val="100000"/>
-              <a:buChar char="•"/>
-            </a:pPr>
-            <a:r>
-              <a:rPr lang="en-US" sz="1100" dirty="0">
-                <a:solidFill>
-                  <a:srgbClr val="000000"/>
-                </a:solidFill>
-                <a:latin typeface="NVIDIA Sans" pitchFamily="34" charset="0"/>
-                <a:ea typeface="NVIDIA Sans" pitchFamily="34" charset="-122"/>
-                <a:cs typeface="NVIDIA Sans" pitchFamily="34" charset="-120"/>
-              </a:rPr>
-              <a:t>An eager op costs 30–60 µs of Python dispatch + launch; the median kernel runs 8 µs — the GPU finishes before the CPU can feed the next one</a:t>
-            </a:r>
-            <a:endParaRPr lang="en-US" sz="1100" dirty="0"/>
-          </a:p>
-          <a:p>
-            <a:pPr marL="342900" indent="-342900">
-              <a:buSzPct val="100000"/>
-              <a:buChar char="•"/>
-            </a:pPr>
-            <a:r>
-              <a:rPr lang="en-US" sz="1100" dirty="0">
-                <a:solidFill>
-                  <a:srgbClr val="000000"/>
-                </a:solidFill>
-                <a:latin typeface="NVIDIA Sans" pitchFamily="34" charset="0"/>
-                <a:ea typeface="NVIDIA Sans" pitchFamily="34" charset="-122"/>
-                <a:cs typeface="NVIDIA Sans" pitchFamily="34" charset="-120"/>
-              </a:rPr>
-              <a:t>Backward suffers far less (C++ autograd engine, occupancy 70%) — forward is where launch overhead bites</a:t>
-            </a:r>
-            <a:endParaRPr lang="en-US" sz="1100" dirty="0"/>
-          </a:p>
-          <a:p>
-            <a:pPr marL="342900" indent="-342900">
-              <a:buSzPct val="100000"/>
-              <a:buChar char="•"/>
-            </a:pPr>
-            <a:r>
-              <a:rPr lang="en-US" sz="1100" dirty="0">
-                <a:solidFill>
-                  <a:srgbClr val="000000"/>
-                </a:solidFill>
-                <a:latin typeface="NVIDIA Sans" pitchFamily="34" charset="0"/>
-                <a:ea typeface="NVIDIA Sans" pitchFamily="34" charset="-122"/>
-                <a:cs typeface="NVIDIA Sans" pitchFamily="34" charset="-120"/>
-              </a:rPr>
-              <a:t>A CUDA Graph replays an entire 8-layer group as ONE cudaGraphLaunch — per-op dispatch leaves the critical path</a:t>
-            </a:r>
-            <a:endParaRPr lang="en-US" sz="1100" dirty="0"/>
-          </a:p>
-        </p:txBody>
-      </p:sp>
-      <p:sp>
-        <p:nvSpPr>
-          <p:cNvPr id="20" name="Text 18"/>
-          <p:cNvSpPr/>
-          <p:nvPr/>
-        </p:nvSpPr>
-        <p:spPr>
-          <a:xfrm>
-            <a:off x="457200" y="4206240"/>
-            <a:ext cx="8229600" cy="201168"/>
-          </a:xfrm>
-          <a:prstGeom prst="rect">
-            <a:avLst/>
-          </a:prstGeom>
-          <a:noFill/>
-          <a:ln/>
-        </p:spPr>
-        <p:txBody>
-          <a:bodyPr wrap="square" lIns="0" tIns="0" rIns="0" bIns="0" rtlCol="0" anchor="ctr"/>
-          <a:lstStyle/>
-          <a:p>
-            <a:pPr indent="0" marL="0">
-              <a:buNone/>
-            </a:pPr>
-            <a:r>
-              <a:rPr lang="en-US" sz="850" i="1" dirty="0">
-                <a:solidFill>
-                  <a:srgbClr val="8C8C8C"/>
-                </a:solidFill>
-                <a:latin typeface="NVIDIA Sans" pitchFamily="34" charset="0"/>
-                <a:ea typeface="NVIDIA Sans" pitchFamily="34" charset="-122"/>
-                <a:cs typeface="NVIDIA Sans" pitchFamily="34" charset="-120"/>
-              </a:rPr>
-              <a:t>Busy also shrinks 50 → 37 ms (mixed attention + fusion); the split isolates the launch effect. Windows: baseline Qwen3.5 fwd vs merged-main VLM fwd, same launch-window accounting.</a:t>
-            </a:r>
-            <a:endParaRPr lang="en-US" sz="850" dirty="0"/>
-          </a:p>
-        </p:txBody>
-      </p:sp>
-      <p:sp>
-        <p:nvSpPr>
-          <p:cNvPr id="21" name="Text 19"/>
-          <p:cNvSpPr/>
-          <p:nvPr/>
-        </p:nvSpPr>
-        <p:spPr>
-          <a:xfrm>
-            <a:off x="457200" y="4617720"/>
-            <a:ext cx="4572000" cy="320040"/>
-          </a:xfrm>
-          <a:prstGeom prst="rect">
-            <a:avLst/>
-          </a:prstGeom>
-          <a:noFill/>
-          <a:ln/>
-        </p:spPr>
-        <p:txBody>
-          <a:bodyPr wrap="square" lIns="0" tIns="0" rIns="0" bIns="0" rtlCol="0" anchor="ctr"/>
-          <a:lstStyle/>
-          <a:p>
-            <a:pPr algn="l" indent="0" marL="0">
-              <a:buNone/>
-            </a:pPr>
-            <a:r>
-              <a:rPr lang="en-US" sz="1000" dirty="0">
-                <a:solidFill>
-                  <a:srgbClr val="5E5E5E"/>
-                </a:solidFill>
-                <a:latin typeface="NVIDIA Sans" pitchFamily="34" charset="0"/>
-                <a:ea typeface="NVIDIA Sans" pitchFamily="34" charset="-122"/>
-                <a:cs typeface="NVIDIA Sans" pitchFamily="34" charset="-120"/>
-              </a:rPr>
-              <a:t>QwenPI Training Optimization</a:t>
-            </a:r>
-            <a:endParaRPr lang="en-US" sz="1000" dirty="0"/>
-          </a:p>
-        </p:txBody>
-      </p:sp>
-      <p:sp>
-        <p:nvSpPr>
-          <p:cNvPr id="22" name="Text 20"/>
-          <p:cNvSpPr/>
-          <p:nvPr/>
-        </p:nvSpPr>
-        <p:spPr>
-          <a:xfrm>
-            <a:off x="7360920" y="4617720"/>
-            <a:ext cx="320040" cy="320040"/>
-          </a:xfrm>
-          <a:prstGeom prst="rect">
-            <a:avLst/>
-          </a:prstGeom>
-          <a:noFill/>
-          <a:ln/>
-        </p:spPr>
-        <p:txBody>
-          <a:bodyPr wrap="square" lIns="0" tIns="0" rIns="0" bIns="0" rtlCol="0" anchor="ctr"/>
-          <a:lstStyle/>
-          <a:p>
-            <a:pPr algn="r" indent="0" marL="0">
-              <a:buNone/>
-            </a:pPr>
-            <a:r>
-              <a:rPr lang="en-US" sz="1000" dirty="0">
-                <a:solidFill>
-                  <a:srgbClr val="5E5E5E"/>
-                </a:solidFill>
-                <a:latin typeface="NVIDIA Sans" pitchFamily="34" charset="0"/>
-                <a:ea typeface="NVIDIA Sans" pitchFamily="34" charset="-122"/>
-                <a:cs typeface="NVIDIA Sans" pitchFamily="34" charset="-120"/>
-              </a:rPr>
-              <a:t>8</a:t>
-            </a:r>
-            <a:endParaRPr lang="en-US" sz="1000" dirty="0"/>
-          </a:p>
-        </p:txBody>
-      </p:sp>
-      <p:sp>
-        <p:nvSpPr>
-          <p:cNvPr id="23" name="Shape 21"/>
-          <p:cNvSpPr/>
-          <p:nvPr/>
-        </p:nvSpPr>
-        <p:spPr>
-          <a:xfrm>
-            <a:off x="7726680" y="4617720"/>
-            <a:ext cx="36576" cy="320040"/>
-          </a:xfrm>
-          <a:prstGeom prst="rect">
-            <a:avLst/>
-          </a:prstGeom>
-          <a:solidFill>
-            <a:srgbClr val="76B900"/>
-          </a:solidFill>
-          <a:ln/>
-        </p:spPr>
-      </p:sp>
-      <p:pic>
-        <p:nvPicPr>
-          <p:cNvPr id="24" name="Image 0" descr="/app/logos/nvidia-logo-blk-sm.png">    </p:cNvPr>
           <p:cNvPicPr>
             <a:picLocks noChangeAspect="1"/>
           </p:cNvPicPr>
@@ -23835,7 +25021,7 @@
                 <a:ea typeface="NVIDIA Sans" pitchFamily="34" charset="-122"/>
                 <a:cs typeface="NVIDIA Sans" pitchFamily="34" charset="-120"/>
               </a:rPr>
-              <a:t>CUDA Graphs — and Why Four, Not One</a:t>
+              <a:t>Why CUDA Graphs: Launch-Bound Forward</a:t>
             </a:r>
             <a:endParaRPr lang="en-US" sz="3000" dirty="0"/>
           </a:p>
@@ -23874,259 +25060,22 @@
                 <a:ea typeface="NVIDIA Sans" pitchFamily="34" charset="-122"/>
                 <a:cs typeface="NVIDIA Sans" pitchFamily="34" charset="-120"/>
               </a:rPr>
-              <a:t>398 → 271 ms (−126).  Capture once, replay every step</a:t>
+              <a:t>Anatomy of the Qwen3.5 forward — same math, very different wall clock</a:t>
             </a:r>
             <a:endParaRPr lang="en-US" sz="1500" dirty="0"/>
           </a:p>
         </p:txBody>
       </p:sp>
-      <p:pic>
-        <p:nvPicPr>
-          <p:cNvPr id="4" name="Image 0" descr="/work/tikz-graphs.png">    </p:cNvPr>
-          <p:cNvPicPr>
-            <a:picLocks noChangeAspect="1"/>
-          </p:cNvPicPr>
-          <p:nvPr/>
-        </p:nvPicPr>
-        <p:blipFill>
-          <a:blip r:embed="rId1"/>
-          <a:stretch>
-            <a:fillRect/>
-          </a:stretch>
-        </p:blipFill>
-        <p:spPr>
-          <a:xfrm>
-            <a:off x="457200" y="1371600"/>
-            <a:ext cx="3291962" cy="2834640"/>
-          </a:xfrm>
-          <a:prstGeom prst="rect">
-            <a:avLst/>
-          </a:prstGeom>
-        </p:spPr>
-      </p:pic>
-      <p:sp>
-        <p:nvSpPr>
-          <p:cNvPr id="5" name="Text 2"/>
-          <p:cNvSpPr/>
-          <p:nvPr/>
-        </p:nvSpPr>
-        <p:spPr>
-          <a:xfrm>
-            <a:off x="4206362" y="1371600"/>
-            <a:ext cx="4480438" cy="502920"/>
-          </a:xfrm>
-          <a:prstGeom prst="rect">
-            <a:avLst/>
-          </a:prstGeom>
-          <a:noFill/>
-          <a:ln/>
-        </p:spPr>
-        <p:txBody>
-          <a:bodyPr wrap="square" lIns="0" tIns="0" rIns="0" bIns="0" rtlCol="0" anchor="t"/>
-          <a:lstStyle/>
-          <a:p>
-            <a:pPr marL="342900" indent="-342900">
-              <a:buSzPct val="100000"/>
-              <a:buChar char="•"/>
-            </a:pPr>
-            <a:r>
-              <a:rPr lang="en-US" sz="1050" dirty="0">
-                <a:solidFill>
-                  <a:srgbClr val="5E5E5E"/>
-                </a:solidFill>
-                <a:latin typeface="NVIDIA Sans" pitchFamily="34" charset="0"/>
-                <a:ea typeface="NVIDIA Sans" pitchFamily="34" charset="-122"/>
-                <a:cs typeface="NVIDIA Sans" pitchFamily="34" charset="-120"/>
-              </a:rPr>
-              <a:t>Static shapes (pad-192) make capture possible; vision tower = 1 graph, DiT = torch.compile reduce-overhead, merge stays sync-free eager</a:t>
-            </a:r>
-            <a:endParaRPr lang="en-US" sz="1050" dirty="0"/>
-          </a:p>
-        </p:txBody>
-      </p:sp>
-      <p:sp>
-        <p:nvSpPr>
-          <p:cNvPr id="6" name="Text 3"/>
-          <p:cNvSpPr/>
-          <p:nvPr/>
-        </p:nvSpPr>
-        <p:spPr>
-          <a:xfrm>
-            <a:off x="4206362" y="1874520"/>
-            <a:ext cx="4480438" cy="274320"/>
-          </a:xfrm>
-          <a:prstGeom prst="rect">
-            <a:avLst/>
-          </a:prstGeom>
-          <a:noFill/>
-          <a:ln/>
-        </p:spPr>
-        <p:txBody>
-          <a:bodyPr wrap="square" lIns="0" tIns="0" rIns="0" bIns="0" rtlCol="0" anchor="ctr"/>
-          <a:lstStyle/>
-          <a:p>
-            <a:pPr indent="0" marL="0">
-              <a:buNone/>
-            </a:pPr>
-            <a:r>
-              <a:rPr lang="en-US" sz="1400" b="1" dirty="0">
-                <a:solidFill>
-                  <a:srgbClr val="000000"/>
-                </a:solidFill>
-                <a:latin typeface="NVIDIA Sans" pitchFamily="34" charset="0"/>
-                <a:ea typeface="NVIDIA Sans" pitchFamily="34" charset="-122"/>
-                <a:cs typeface="NVIDIA Sans" pitchFamily="34" charset="-120"/>
-              </a:rPr>
-              <a:t>Why is the decoder FOUR graphs, not one?</a:t>
-            </a:r>
-            <a:endParaRPr lang="en-US" sz="1400" dirty="0"/>
-          </a:p>
-        </p:txBody>
-      </p:sp>
-      <p:sp>
-        <p:nvSpPr>
-          <p:cNvPr id="7" name="Text 4"/>
-          <p:cNvSpPr/>
-          <p:nvPr/>
-        </p:nvSpPr>
-        <p:spPr>
-          <a:xfrm>
-            <a:off x="4206362" y="2176272"/>
-            <a:ext cx="4480438" cy="1371600"/>
-          </a:xfrm>
-          <a:prstGeom prst="rect">
-            <a:avLst/>
-          </a:prstGeom>
-          <a:noFill/>
-          <a:ln/>
-        </p:spPr>
-        <p:txBody>
-          <a:bodyPr wrap="square" lIns="0" tIns="0" rIns="0" bIns="0" rtlCol="0" anchor="t"/>
-          <a:lstStyle/>
-          <a:p>
-            <a:pPr marL="342900" indent="-342900">
-              <a:buSzPct val="100000"/>
-              <a:buChar char="•"/>
-            </a:pPr>
-            <a:r>
-              <a:rPr lang="en-US" sz="1000" dirty="0">
-                <a:solidFill>
-                  <a:srgbClr val="000000"/>
-                </a:solidFill>
-                <a:latin typeface="NVIDIA Sans" pitchFamily="34" charset="0"/>
-                <a:ea typeface="NVIDIA Sans" pitchFamily="34" charset="-122"/>
-                <a:cs typeface="NVIDIA Sans" pitchFamily="34" charset="-120"/>
-              </a:rPr>
-              <a:t>fla/GDN layers ship @torch.compiler.disable → dynamo graph-breaks: a whole-stack compile fragments into many cudagraph partitions sharing ONE memory pool</a:t>
-            </a:r>
-            <a:endParaRPr lang="en-US" sz="1000" dirty="0"/>
-          </a:p>
-          <a:p>
-            <a:pPr marL="342900" indent="-342900">
-              <a:buSzPct val="100000"/>
-              <a:buChar char="•"/>
-            </a:pPr>
-            <a:r>
-              <a:rPr lang="en-US" sz="1000" dirty="0">
-                <a:solidFill>
-                  <a:srgbClr val="000000"/>
-                </a:solidFill>
-                <a:latin typeface="NVIDIA Sans" pitchFamily="34" charset="0"/>
-                <a:ea typeface="NVIDIA Sans" pitchFamily="34" charset="-122"/>
-                <a:cs typeface="NVIDIA Sans" pitchFamily="34" charset="-120"/>
-              </a:rPr>
-              <a:t>That pool's allocator checkpointing collides with ZeRO-2's gradient-hook NCCL allocations in backward — hard crash on torch 2.6 AND 2.7.1</a:t>
-            </a:r>
-            <a:endParaRPr lang="en-US" sz="1000" dirty="0"/>
-          </a:p>
-          <a:p>
-            <a:pPr marL="342900" indent="-342900">
-              <a:buSzPct val="100000"/>
-              <a:buChar char="•"/>
-            </a:pPr>
-            <a:r>
-              <a:rPr lang="en-US" sz="1000" dirty="0">
-                <a:solidFill>
-                  <a:srgbClr val="000000"/>
-                </a:solidFill>
-                <a:latin typeface="NVIDIA Sans" pitchFamily="34" charset="0"/>
-                <a:ea typeface="NVIDIA Sans" pitchFamily="34" charset="-122"/>
-                <a:cs typeface="NVIDIA Sans" pitchFamily="34" charset="-120"/>
-              </a:rPr>
-              <a:t>Four independent compiles = private pools, and gradient hooks fire between replays — backward AllReduce keeps overlapping compute</a:t>
-            </a:r>
-            <a:endParaRPr lang="en-US" sz="1000" dirty="0"/>
-          </a:p>
-          <a:p>
-            <a:pPr marL="342900" indent="-342900">
-              <a:buSzPct val="100000"/>
-              <a:buChar char="•"/>
-            </a:pPr>
-            <a:r>
-              <a:rPr lang="en-US" sz="1000" dirty="0">
-                <a:solidFill>
-                  <a:srgbClr val="000000"/>
-                </a:solidFill>
-                <a:latin typeface="NVIDIA Sans" pitchFamily="34" charset="0"/>
-                <a:ea typeface="NVIDIA Sans" pitchFamily="34" charset="-122"/>
-                <a:cs typeface="NVIDIA Sans" pitchFamily="34" charset="-120"/>
-              </a:rPr>
-              <a:t>Cost: 4 launches vs 1 = microseconds. Group size 8 is the measured sweet spot</a:t>
-            </a:r>
-            <a:endParaRPr lang="en-US" sz="1000" dirty="0"/>
-          </a:p>
-        </p:txBody>
-      </p:sp>
-      <p:sp>
-        <p:nvSpPr>
-          <p:cNvPr id="8" name="Shape 5"/>
-          <p:cNvSpPr/>
-          <p:nvPr/>
-        </p:nvSpPr>
-        <p:spPr>
-          <a:xfrm>
-            <a:off x="4206362" y="3785616"/>
-            <a:ext cx="4480438" cy="548640"/>
-          </a:xfrm>
-          <a:prstGeom prst="rect">
-            <a:avLst/>
-          </a:prstGeom>
-          <a:solidFill>
-            <a:srgbClr val="F5F5F5"/>
-          </a:solidFill>
-          <a:ln/>
-        </p:spPr>
-      </p:sp>
-      <p:sp>
-        <p:nvSpPr>
-          <p:cNvPr id="9" name="Shape 6"/>
-          <p:cNvSpPr/>
-          <p:nvPr/>
-        </p:nvSpPr>
-        <p:spPr>
-          <a:xfrm>
-            <a:off x="4206362" y="3785616"/>
-            <a:ext cx="54864" cy="548640"/>
-          </a:xfrm>
-          <a:prstGeom prst="rect">
-            <a:avLst/>
-          </a:prstGeom>
-          <a:solidFill>
-            <a:srgbClr val="76B900"/>
-          </a:solidFill>
-          <a:ln/>
-        </p:spPr>
-      </p:sp>
-      <p:sp>
-        <p:nvSpPr>
-          <p:cNvPr id="10" name="Text 7"/>
-          <p:cNvSpPr/>
-          <p:nvPr/>
-        </p:nvSpPr>
-        <p:spPr>
-          <a:xfrm>
-            <a:off x="4389242" y="3785616"/>
-            <a:ext cx="4206118" cy="548640"/>
+      <p:sp>
+        <p:nvSpPr>
+          <p:cNvPr id="4" name="Text 2"/>
+          <p:cNvSpPr/>
+          <p:nvPr/>
+        </p:nvSpPr>
+        <p:spPr>
+          <a:xfrm>
+            <a:off x="457200" y="1399032"/>
+            <a:ext cx="1417320" cy="384048"/>
           </a:xfrm>
           <a:prstGeom prst="rect">
             <a:avLst/>
@@ -24150,13 +25099,212 @@
                 <a:ea typeface="NVIDIA Sans" pitchFamily="34" charset="-122"/>
                 <a:cs typeface="NVIDIA Sans" pitchFamily="34" charset="-120"/>
               </a:rPr>
-              <a:t>Kernel launches: 13.9k → 6.4k per step. </a:t>
-            </a:r>
+              <a:t>Baseline</a:t>
+            </a:r>
+            <a:endParaRPr lang="en-US" sz="1100" dirty="0"/>
+          </a:p>
+          <a:p>
             <a:pPr indent="0" marL="0">
               <a:buNone/>
             </a:pPr>
             <a:r>
-              <a:rPr lang="en-US" sz="1100" dirty="0">
+              <a:rPr lang="en-US" sz="1100" b="1" dirty="0">
+                <a:solidFill>
+                  <a:srgbClr val="000000"/>
+                </a:solidFill>
+                <a:latin typeface="NVIDIA Sans" pitchFamily="34" charset="0"/>
+                <a:ea typeface="NVIDIA Sans" pitchFamily="34" charset="-122"/>
+                <a:cs typeface="NVIDIA Sans" pitchFamily="34" charset="-120"/>
+              </a:rPr>
+              <a:t>(eager)</a:t>
+            </a:r>
+            <a:endParaRPr lang="en-US" sz="1100" dirty="0"/>
+          </a:p>
+        </p:txBody>
+      </p:sp>
+      <p:sp>
+        <p:nvSpPr>
+          <p:cNvPr id="5" name="Shape 3"/>
+          <p:cNvSpPr/>
+          <p:nvPr/>
+        </p:nvSpPr>
+        <p:spPr>
+          <a:xfrm>
+            <a:off x="1920240" y="1417320"/>
+            <a:ext cx="2131541" cy="384048"/>
+          </a:xfrm>
+          <a:prstGeom prst="rect">
+            <a:avLst/>
+          </a:prstGeom>
+          <a:solidFill>
+            <a:srgbClr val="76B900"/>
+          </a:solidFill>
+          <a:ln/>
+        </p:spPr>
+      </p:sp>
+      <p:sp>
+        <p:nvSpPr>
+          <p:cNvPr id="6" name="Text 4"/>
+          <p:cNvSpPr/>
+          <p:nvPr/>
+        </p:nvSpPr>
+        <p:spPr>
+          <a:xfrm>
+            <a:off x="1920240" y="1417320"/>
+            <a:ext cx="2131541" cy="384048"/>
+          </a:xfrm>
+          <a:prstGeom prst="rect">
+            <a:avLst/>
+          </a:prstGeom>
+          <a:noFill/>
+          <a:ln/>
+        </p:spPr>
+        <p:txBody>
+          <a:bodyPr wrap="square" lIns="0" tIns="0" rIns="0" bIns="0" rtlCol="0" anchor="ctr"/>
+          <a:lstStyle/>
+          <a:p>
+            <a:pPr algn="ctr" indent="0" marL="0">
+              <a:buNone/>
+            </a:pPr>
+            <a:r>
+              <a:rPr lang="en-US" sz="1000" b="1" dirty="0">
+                <a:solidFill>
+                  <a:srgbClr val="FFFFFF"/>
+                </a:solidFill>
+                <a:latin typeface="NVIDIA Sans" pitchFamily="34" charset="0"/>
+                <a:ea typeface="NVIDIA Sans" pitchFamily="34" charset="-122"/>
+                <a:cs typeface="NVIDIA Sans" pitchFamily="34" charset="-120"/>
+              </a:rPr>
+              <a:t>GPU busy 50 ms</a:t>
+            </a:r>
+            <a:endParaRPr lang="en-US" sz="1000" dirty="0"/>
+          </a:p>
+        </p:txBody>
+      </p:sp>
+      <p:sp>
+        <p:nvSpPr>
+          <p:cNvPr id="7" name="Shape 5"/>
+          <p:cNvSpPr/>
+          <p:nvPr/>
+        </p:nvSpPr>
+        <p:spPr>
+          <a:xfrm>
+            <a:off x="4051781" y="1417320"/>
+            <a:ext cx="4177819" cy="384048"/>
+          </a:xfrm>
+          <a:prstGeom prst="rect">
+            <a:avLst/>
+          </a:prstGeom>
+          <a:solidFill>
+            <a:srgbClr val="890C58"/>
+          </a:solidFill>
+          <a:ln/>
+        </p:spPr>
+      </p:sp>
+      <p:sp>
+        <p:nvSpPr>
+          <p:cNvPr id="8" name="Text 6"/>
+          <p:cNvSpPr/>
+          <p:nvPr/>
+        </p:nvSpPr>
+        <p:spPr>
+          <a:xfrm>
+            <a:off x="4051781" y="1417320"/>
+            <a:ext cx="4177819" cy="384048"/>
+          </a:xfrm>
+          <a:prstGeom prst="rect">
+            <a:avLst/>
+          </a:prstGeom>
+          <a:noFill/>
+          <a:ln/>
+        </p:spPr>
+        <p:txBody>
+          <a:bodyPr wrap="square" lIns="0" tIns="0" rIns="0" bIns="0" rtlCol="0" anchor="ctr"/>
+          <a:lstStyle/>
+          <a:p>
+            <a:pPr algn="ctr" indent="0" marL="0">
+              <a:buNone/>
+            </a:pPr>
+            <a:r>
+              <a:rPr lang="en-US" sz="1000" b="1" dirty="0">
+                <a:solidFill>
+                  <a:srgbClr val="FFFFFF"/>
+                </a:solidFill>
+                <a:latin typeface="NVIDIA Sans" pitchFamily="34" charset="0"/>
+                <a:ea typeface="NVIDIA Sans" pitchFamily="34" charset="-122"/>
+                <a:cs typeface="NVIDIA Sans" pitchFamily="34" charset="-120"/>
+              </a:rPr>
+              <a:t>waiting for launches 98 ms</a:t>
+            </a:r>
+            <a:endParaRPr lang="en-US" sz="1000" dirty="0"/>
+          </a:p>
+        </p:txBody>
+      </p:sp>
+      <p:sp>
+        <p:nvSpPr>
+          <p:cNvPr id="9" name="Text 7"/>
+          <p:cNvSpPr/>
+          <p:nvPr/>
+        </p:nvSpPr>
+        <p:spPr>
+          <a:xfrm>
+            <a:off x="8302752" y="1417320"/>
+            <a:ext cx="822960" cy="384048"/>
+          </a:xfrm>
+          <a:prstGeom prst="rect">
+            <a:avLst/>
+          </a:prstGeom>
+          <a:noFill/>
+          <a:ln/>
+        </p:spPr>
+        <p:txBody>
+          <a:bodyPr wrap="square" lIns="0" tIns="0" rIns="0" bIns="0" rtlCol="0" anchor="ctr"/>
+          <a:lstStyle/>
+          <a:p>
+            <a:pPr indent="0" marL="0">
+              <a:buNone/>
+            </a:pPr>
+            <a:r>
+              <a:rPr lang="en-US" sz="1200" b="1" dirty="0">
+                <a:solidFill>
+                  <a:srgbClr val="000000"/>
+                </a:solidFill>
+                <a:latin typeface="NVIDIA Sans" pitchFamily="34" charset="0"/>
+                <a:ea typeface="NVIDIA Sans" pitchFamily="34" charset="-122"/>
+                <a:cs typeface="NVIDIA Sans" pitchFamily="34" charset="-120"/>
+              </a:rPr>
+              <a:t>148 ms</a:t>
+            </a:r>
+            <a:endParaRPr lang="en-US" sz="1200" dirty="0"/>
+          </a:p>
+        </p:txBody>
+      </p:sp>
+      <p:sp>
+        <p:nvSpPr>
+          <p:cNvPr id="10" name="Text 8"/>
+          <p:cNvSpPr/>
+          <p:nvPr/>
+        </p:nvSpPr>
+        <p:spPr>
+          <a:xfrm>
+            <a:off x="1920240" y="1819656"/>
+            <a:ext cx="6400800" cy="201168"/>
+          </a:xfrm>
+          <a:prstGeom prst="rect">
+            <a:avLst/>
+          </a:prstGeom>
+          <a:noFill/>
+          <a:ln/>
+        </p:spPr>
+        <p:txBody>
+          <a:bodyPr wrap="square" lIns="0" tIns="0" rIns="0" bIns="0" rtlCol="0" anchor="ctr"/>
+          <a:lstStyle/>
+          <a:p>
+            <a:pPr indent="0" marL="0">
+              <a:buNone/>
+            </a:pPr>
+            <a:r>
+              <a:rPr lang="en-US" sz="950" i="1" dirty="0">
                 <a:solidFill>
                   <a:srgbClr val="5E5E5E"/>
                 </a:solidFill>
@@ -24164,15 +25312,435 @@
                 <a:ea typeface="NVIDIA Sans" pitchFamily="34" charset="-122"/>
                 <a:cs typeface="NVIDIA Sans" pitchFamily="34" charset="-120"/>
               </a:rPr>
-              <a:t>CPU launch cost leaves the critical path; GPU idle collapses.</a:t>
+              <a:t>3,929 kernel launches · 19.1 ms of cudaLaunchKernel CPU time · occupancy 34%</a:t>
+            </a:r>
+            <a:endParaRPr lang="en-US" sz="950" dirty="0"/>
+          </a:p>
+        </p:txBody>
+      </p:sp>
+      <p:sp>
+        <p:nvSpPr>
+          <p:cNvPr id="11" name="Text 9"/>
+          <p:cNvSpPr/>
+          <p:nvPr/>
+        </p:nvSpPr>
+        <p:spPr>
+          <a:xfrm>
+            <a:off x="457200" y="2267712"/>
+            <a:ext cx="1417320" cy="384048"/>
+          </a:xfrm>
+          <a:prstGeom prst="rect">
+            <a:avLst/>
+          </a:prstGeom>
+          <a:noFill/>
+          <a:ln/>
+        </p:spPr>
+        <p:txBody>
+          <a:bodyPr wrap="square" lIns="0" tIns="0" rIns="0" bIns="0" rtlCol="0" anchor="ctr"/>
+          <a:lstStyle/>
+          <a:p>
+            <a:pPr indent="0" marL="0">
+              <a:buNone/>
+            </a:pPr>
+            <a:r>
+              <a:rPr lang="en-US" sz="1100" b="1" dirty="0">
+                <a:solidFill>
+                  <a:srgbClr val="000000"/>
+                </a:solidFill>
+                <a:latin typeface="NVIDIA Sans" pitchFamily="34" charset="0"/>
+                <a:ea typeface="NVIDIA Sans" pitchFamily="34" charset="-122"/>
+                <a:cs typeface="NVIDIA Sans" pitchFamily="34" charset="-120"/>
+              </a:rPr>
+              <a:t>Optimized</a:t>
             </a:r>
             <a:endParaRPr lang="en-US" sz="1100" dirty="0"/>
           </a:p>
+          <a:p>
+            <a:pPr indent="0" marL="0">
+              <a:buNone/>
+            </a:pPr>
+            <a:r>
+              <a:rPr lang="en-US" sz="1100" b="1" dirty="0">
+                <a:solidFill>
+                  <a:srgbClr val="000000"/>
+                </a:solidFill>
+                <a:latin typeface="NVIDIA Sans" pitchFamily="34" charset="0"/>
+                <a:ea typeface="NVIDIA Sans" pitchFamily="34" charset="-122"/>
+                <a:cs typeface="NVIDIA Sans" pitchFamily="34" charset="-120"/>
+              </a:rPr>
+              <a:t>(CUDA Graphs)</a:t>
+            </a:r>
+            <a:endParaRPr lang="en-US" sz="1100" dirty="0"/>
+          </a:p>
         </p:txBody>
       </p:sp>
       <p:sp>
         <p:nvSpPr>
-          <p:cNvPr id="11" name="Text 8"/>
+          <p:cNvPr id="12" name="Shape 10"/>
+          <p:cNvSpPr/>
+          <p:nvPr/>
+        </p:nvSpPr>
+        <p:spPr>
+          <a:xfrm>
+            <a:off x="1920240" y="2286000"/>
+            <a:ext cx="1577340" cy="384048"/>
+          </a:xfrm>
+          <a:prstGeom prst="rect">
+            <a:avLst/>
+          </a:prstGeom>
+          <a:solidFill>
+            <a:srgbClr val="76B900"/>
+          </a:solidFill>
+          <a:ln/>
+        </p:spPr>
+      </p:sp>
+      <p:sp>
+        <p:nvSpPr>
+          <p:cNvPr id="13" name="Text 11"/>
+          <p:cNvSpPr/>
+          <p:nvPr/>
+        </p:nvSpPr>
+        <p:spPr>
+          <a:xfrm>
+            <a:off x="1920240" y="2286000"/>
+            <a:ext cx="1577340" cy="384048"/>
+          </a:xfrm>
+          <a:prstGeom prst="rect">
+            <a:avLst/>
+          </a:prstGeom>
+          <a:noFill/>
+          <a:ln/>
+        </p:spPr>
+        <p:txBody>
+          <a:bodyPr wrap="square" lIns="0" tIns="0" rIns="0" bIns="0" rtlCol="0" anchor="ctr"/>
+          <a:lstStyle/>
+          <a:p>
+            <a:pPr algn="ctr" indent="0" marL="0">
+              <a:buNone/>
+            </a:pPr>
+            <a:r>
+              <a:rPr lang="en-US" sz="1000" b="1" dirty="0">
+                <a:solidFill>
+                  <a:srgbClr val="FFFFFF"/>
+                </a:solidFill>
+                <a:latin typeface="NVIDIA Sans" pitchFamily="34" charset="0"/>
+                <a:ea typeface="NVIDIA Sans" pitchFamily="34" charset="-122"/>
+                <a:cs typeface="NVIDIA Sans" pitchFamily="34" charset="-120"/>
+              </a:rPr>
+              <a:t>GPU busy 37 ms</a:t>
+            </a:r>
+            <a:endParaRPr lang="en-US" sz="1000" dirty="0"/>
+          </a:p>
+        </p:txBody>
+      </p:sp>
+      <p:sp>
+        <p:nvSpPr>
+          <p:cNvPr id="14" name="Shape 12"/>
+          <p:cNvSpPr/>
+          <p:nvPr/>
+        </p:nvSpPr>
+        <p:spPr>
+          <a:xfrm>
+            <a:off x="3497580" y="2286000"/>
+            <a:ext cx="1193663" cy="384048"/>
+          </a:xfrm>
+          <a:prstGeom prst="rect">
+            <a:avLst/>
+          </a:prstGeom>
+          <a:solidFill>
+            <a:srgbClr val="890C58"/>
+          </a:solidFill>
+          <a:ln/>
+        </p:spPr>
+      </p:sp>
+      <p:sp>
+        <p:nvSpPr>
+          <p:cNvPr id="15" name="Text 13"/>
+          <p:cNvSpPr/>
+          <p:nvPr/>
+        </p:nvSpPr>
+        <p:spPr>
+          <a:xfrm>
+            <a:off x="3497580" y="2286000"/>
+            <a:ext cx="1193663" cy="384048"/>
+          </a:xfrm>
+          <a:prstGeom prst="rect">
+            <a:avLst/>
+          </a:prstGeom>
+          <a:noFill/>
+          <a:ln/>
+        </p:spPr>
+        <p:txBody>
+          <a:bodyPr wrap="square" lIns="0" tIns="0" rIns="0" bIns="0" rtlCol="0" anchor="ctr"/>
+          <a:lstStyle/>
+          <a:p>
+            <a:pPr algn="ctr" indent="0" marL="0">
+              <a:buNone/>
+            </a:pPr>
+            <a:r>
+              <a:rPr lang="en-US" sz="1000" b="1" dirty="0">
+                <a:solidFill>
+                  <a:srgbClr val="FFFFFF"/>
+                </a:solidFill>
+                <a:latin typeface="NVIDIA Sans" pitchFamily="34" charset="0"/>
+                <a:ea typeface="NVIDIA Sans" pitchFamily="34" charset="-122"/>
+                <a:cs typeface="NVIDIA Sans" pitchFamily="34" charset="-120"/>
+              </a:rPr>
+              <a:t>waiting for launches 28 ms</a:t>
+            </a:r>
+            <a:endParaRPr lang="en-US" sz="1000" dirty="0"/>
+          </a:p>
+        </p:txBody>
+      </p:sp>
+      <p:sp>
+        <p:nvSpPr>
+          <p:cNvPr id="16" name="Text 14"/>
+          <p:cNvSpPr/>
+          <p:nvPr/>
+        </p:nvSpPr>
+        <p:spPr>
+          <a:xfrm>
+            <a:off x="4764395" y="2286000"/>
+            <a:ext cx="822960" cy="384048"/>
+          </a:xfrm>
+          <a:prstGeom prst="rect">
+            <a:avLst/>
+          </a:prstGeom>
+          <a:noFill/>
+          <a:ln/>
+        </p:spPr>
+        <p:txBody>
+          <a:bodyPr wrap="square" lIns="0" tIns="0" rIns="0" bIns="0" rtlCol="0" anchor="ctr"/>
+          <a:lstStyle/>
+          <a:p>
+            <a:pPr indent="0" marL="0">
+              <a:buNone/>
+            </a:pPr>
+            <a:r>
+              <a:rPr lang="en-US" sz="1200" b="1" dirty="0">
+                <a:solidFill>
+                  <a:srgbClr val="000000"/>
+                </a:solidFill>
+                <a:latin typeface="NVIDIA Sans" pitchFamily="34" charset="0"/>
+                <a:ea typeface="NVIDIA Sans" pitchFamily="34" charset="-122"/>
+                <a:cs typeface="NVIDIA Sans" pitchFamily="34" charset="-120"/>
+              </a:rPr>
+              <a:t>65 ms</a:t>
+            </a:r>
+            <a:endParaRPr lang="en-US" sz="1200" dirty="0"/>
+          </a:p>
+        </p:txBody>
+      </p:sp>
+      <p:sp>
+        <p:nvSpPr>
+          <p:cNvPr id="17" name="Text 15"/>
+          <p:cNvSpPr/>
+          <p:nvPr/>
+        </p:nvSpPr>
+        <p:spPr>
+          <a:xfrm>
+            <a:off x="1920240" y="2688336"/>
+            <a:ext cx="6400800" cy="201168"/>
+          </a:xfrm>
+          <a:prstGeom prst="rect">
+            <a:avLst/>
+          </a:prstGeom>
+          <a:noFill/>
+          <a:ln/>
+        </p:spPr>
+        <p:txBody>
+          <a:bodyPr wrap="square" lIns="0" tIns="0" rIns="0" bIns="0" rtlCol="0" anchor="ctr"/>
+          <a:lstStyle/>
+          <a:p>
+            <a:pPr indent="0" marL="0">
+              <a:buNone/>
+            </a:pPr>
+            <a:r>
+              <a:rPr lang="en-US" sz="950" i="1" dirty="0">
+                <a:solidFill>
+                  <a:srgbClr val="5E5E5E"/>
+                </a:solidFill>
+                <a:latin typeface="NVIDIA Sans" pitchFamily="34" charset="0"/>
+                <a:ea typeface="NVIDIA Sans" pitchFamily="34" charset="-122"/>
+                <a:cs typeface="NVIDIA Sans" pitchFamily="34" charset="-120"/>
+              </a:rPr>
+              <a:t>6 graph launches + 736 eager · 9.4 ms launch CPU · occupancy 57%</a:t>
+            </a:r>
+            <a:endParaRPr lang="en-US" sz="950" dirty="0"/>
+          </a:p>
+        </p:txBody>
+      </p:sp>
+      <p:sp>
+        <p:nvSpPr>
+          <p:cNvPr id="18" name="Text 16"/>
+          <p:cNvSpPr/>
+          <p:nvPr/>
+        </p:nvSpPr>
+        <p:spPr>
+          <a:xfrm>
+            <a:off x="1920240" y="2907792"/>
+            <a:ext cx="6400800" cy="365760"/>
+          </a:xfrm>
+          <a:prstGeom prst="rect">
+            <a:avLst/>
+          </a:prstGeom>
+          <a:noFill/>
+          <a:ln/>
+        </p:spPr>
+        <p:txBody>
+          <a:bodyPr wrap="square" lIns="0" tIns="0" rIns="0" bIns="0" rtlCol="0" anchor="ctr"/>
+          <a:lstStyle/>
+          <a:p>
+            <a:pPr indent="0" marL="0">
+              <a:buNone/>
+            </a:pPr>
+            <a:r>
+              <a:rPr lang="en-US" sz="2400" b="1" dirty="0">
+                <a:solidFill>
+                  <a:srgbClr val="76B900"/>
+                </a:solidFill>
+                <a:latin typeface="NVIDIA Sans" pitchFamily="34" charset="0"/>
+                <a:ea typeface="NVIDIA Sans" pitchFamily="34" charset="-122"/>
+                <a:cs typeface="NVIDIA Sans" pitchFamily="34" charset="-120"/>
+              </a:rPr>
+              <a:t>2.3× </a:t>
+            </a:r>
+            <a:pPr indent="0" marL="0">
+              <a:buNone/>
+            </a:pPr>
+            <a:r>
+              <a:rPr lang="en-US" sz="1300" b="1" dirty="0">
+                <a:solidFill>
+                  <a:srgbClr val="000000"/>
+                </a:solidFill>
+                <a:latin typeface="NVIDIA Sans" pitchFamily="34" charset="0"/>
+                <a:ea typeface="NVIDIA Sans" pitchFamily="34" charset="-122"/>
+                <a:cs typeface="NVIDIA Sans" pitchFamily="34" charset="-120"/>
+              </a:rPr>
+              <a:t>faster forward wall clock — with 81% fewer launches</a:t>
+            </a:r>
+            <a:endParaRPr lang="en-US" sz="2400" dirty="0"/>
+          </a:p>
+        </p:txBody>
+      </p:sp>
+      <p:sp>
+        <p:nvSpPr>
+          <p:cNvPr id="19" name="Text 17"/>
+          <p:cNvSpPr/>
+          <p:nvPr/>
+        </p:nvSpPr>
+        <p:spPr>
+          <a:xfrm>
+            <a:off x="457200" y="3346704"/>
+            <a:ext cx="8229600" cy="822960"/>
+          </a:xfrm>
+          <a:prstGeom prst="rect">
+            <a:avLst/>
+          </a:prstGeom>
+          <a:noFill/>
+          <a:ln/>
+        </p:spPr>
+        <p:txBody>
+          <a:bodyPr wrap="square" lIns="0" tIns="0" rIns="0" bIns="0" rtlCol="0" anchor="t"/>
+          <a:lstStyle/>
+          <a:p>
+            <a:pPr marL="342900" indent="-342900">
+              <a:buSzPct val="100000"/>
+              <a:buChar char="•"/>
+            </a:pPr>
+            <a:r>
+              <a:rPr lang="en-US" sz="1100" dirty="0">
+                <a:solidFill>
+                  <a:srgbClr val="000000"/>
+                </a:solidFill>
+                <a:latin typeface="NVIDIA Sans" pitchFamily="34" charset="0"/>
+                <a:ea typeface="NVIDIA Sans" pitchFamily="34" charset="-122"/>
+                <a:cs typeface="NVIDIA Sans" pitchFamily="34" charset="-120"/>
+              </a:rPr>
+              <a:t>An eager op costs 30–60 µs of Python dispatch + launch; the median kernel runs 8 µs — the GPU finishes before the CPU can feed the next one</a:t>
+            </a:r>
+            <a:endParaRPr lang="en-US" sz="1100" dirty="0"/>
+          </a:p>
+          <a:p>
+            <a:pPr marL="342900" indent="-342900">
+              <a:buSzPct val="100000"/>
+              <a:buChar char="•"/>
+            </a:pPr>
+            <a:r>
+              <a:rPr lang="en-US" sz="1100" dirty="0">
+                <a:solidFill>
+                  <a:srgbClr val="000000"/>
+                </a:solidFill>
+                <a:latin typeface="NVIDIA Sans" pitchFamily="34" charset="0"/>
+                <a:ea typeface="NVIDIA Sans" pitchFamily="34" charset="-122"/>
+                <a:cs typeface="NVIDIA Sans" pitchFamily="34" charset="-120"/>
+              </a:rPr>
+              <a:t>Backward suffers far less (C++ autograd engine, occupancy 70%) — forward is where launch overhead bites</a:t>
+            </a:r>
+            <a:endParaRPr lang="en-US" sz="1100" dirty="0"/>
+          </a:p>
+          <a:p>
+            <a:pPr marL="342900" indent="-342900">
+              <a:buSzPct val="100000"/>
+              <a:buChar char="•"/>
+            </a:pPr>
+            <a:r>
+              <a:rPr lang="en-US" sz="1100" dirty="0">
+                <a:solidFill>
+                  <a:srgbClr val="000000"/>
+                </a:solidFill>
+                <a:latin typeface="NVIDIA Sans" pitchFamily="34" charset="0"/>
+                <a:ea typeface="NVIDIA Sans" pitchFamily="34" charset="-122"/>
+                <a:cs typeface="NVIDIA Sans" pitchFamily="34" charset="-120"/>
+              </a:rPr>
+              <a:t>A CUDA Graph replays an entire 8-layer group as ONE cudaGraphLaunch — per-op dispatch leaves the critical path</a:t>
+            </a:r>
+            <a:endParaRPr lang="en-US" sz="1100" dirty="0"/>
+          </a:p>
+        </p:txBody>
+      </p:sp>
+      <p:sp>
+        <p:nvSpPr>
+          <p:cNvPr id="20" name="Text 18"/>
+          <p:cNvSpPr/>
+          <p:nvPr/>
+        </p:nvSpPr>
+        <p:spPr>
+          <a:xfrm>
+            <a:off x="457200" y="4206240"/>
+            <a:ext cx="8229600" cy="201168"/>
+          </a:xfrm>
+          <a:prstGeom prst="rect">
+            <a:avLst/>
+          </a:prstGeom>
+          <a:noFill/>
+          <a:ln/>
+        </p:spPr>
+        <p:txBody>
+          <a:bodyPr wrap="square" lIns="0" tIns="0" rIns="0" bIns="0" rtlCol="0" anchor="ctr"/>
+          <a:lstStyle/>
+          <a:p>
+            <a:pPr indent="0" marL="0">
+              <a:buNone/>
+            </a:pPr>
+            <a:r>
+              <a:rPr lang="en-US" sz="850" i="1" dirty="0">
+                <a:solidFill>
+                  <a:srgbClr val="8C8C8C"/>
+                </a:solidFill>
+                <a:latin typeface="NVIDIA Sans" pitchFamily="34" charset="0"/>
+                <a:ea typeface="NVIDIA Sans" pitchFamily="34" charset="-122"/>
+                <a:cs typeface="NVIDIA Sans" pitchFamily="34" charset="-120"/>
+              </a:rPr>
+              <a:t>Busy also shrinks 50 → 37 ms (mixed attention + fusion); the split isolates the launch effect. Windows: baseline Qwen3.5 fwd vs merged-main VLM fwd, same launch-window accounting.</a:t>
+            </a:r>
+            <a:endParaRPr lang="en-US" sz="850" dirty="0"/>
+          </a:p>
+        </p:txBody>
+      </p:sp>
+      <p:sp>
+        <p:nvSpPr>
+          <p:cNvPr id="21" name="Text 19"/>
           <p:cNvSpPr/>
           <p:nvPr/>
         </p:nvSpPr>
@@ -24211,7 +25779,7 @@
       </p:sp>
       <p:sp>
         <p:nvSpPr>
-          <p:cNvPr id="12" name="Text 9"/>
+          <p:cNvPr id="22" name="Text 20"/>
           <p:cNvSpPr/>
           <p:nvPr/>
         </p:nvSpPr>
@@ -24250,7 +25818,7 @@
       </p:sp>
       <p:sp>
         <p:nvSpPr>
-          <p:cNvPr id="13" name="Shape 10"/>
+          <p:cNvPr id="23" name="Shape 21"/>
           <p:cNvSpPr/>
           <p:nvPr/>
         </p:nvSpPr>
@@ -24270,14 +25838,14 @@
       </p:sp>
       <p:pic>
         <p:nvPicPr>
-          <p:cNvPr id="14" name="Image 1" descr="/app/logos/nvidia-logo-blk-sm.png">    </p:cNvPr>
+          <p:cNvPr id="24" name="Image 0" descr="/app/logos/nvidia-logo-blk-sm.png">    </p:cNvPr>
           <p:cNvPicPr>
             <a:picLocks noChangeAspect="1"/>
           </p:cNvPicPr>
           <p:nvPr/>
         </p:nvPicPr>
         <p:blipFill>
-          <a:blip r:embed="rId2"/>
+          <a:blip r:embed="rId1"/>
           <a:stretch>
             <a:fillRect/>
           </a:stretch>

--- a/docs/slides/qwenpi-optimization.pptx
+++ b/docs/slides/qwenpi-optimization.pptx
@@ -22163,7 +22163,7 @@
                 <a:ea typeface="NVIDIA Sans" pitchFamily="34" charset="-122"/>
                 <a:cs typeface="NVIDIA Sans" pitchFamily="34" charset="-120"/>
               </a:rPr>
-              <a:t>Three CPU round-trips hide inside every baseline forward pass</a:t>
+              <a:t>Four CPU round-trips hide inside every baseline training step</a:t>
             </a:r>
             <a:endParaRPr lang="en-US" sz="1500" dirty="0"/>
           </a:p>
@@ -22185,8 +22185,8 @@
         </p:blipFill>
         <p:spPr>
           <a:xfrm>
-            <a:off x="1702393" y="1280160"/>
-            <a:ext cx="5739214" cy="2103120"/>
+            <a:off x="1636316" y="1280160"/>
+            <a:ext cx="5871367" cy="2103120"/>
           </a:xfrm>
           <a:prstGeom prst="rect">
             <a:avLst/>
@@ -22361,7 +22361,7 @@
         <p:spPr>
           <a:xfrm>
             <a:off x="2595067" y="3547872"/>
-            <a:ext cx="1419149" cy="237744"/>
+            <a:ext cx="1309421" cy="237744"/>
           </a:xfrm>
           <a:prstGeom prst="rect">
             <a:avLst/>
@@ -22375,6 +22375,26 @@
       <p:sp>
         <p:nvSpPr>
           <p:cNvPr id="13" name="Shape 10"/>
+          <p:cNvSpPr/>
+          <p:nvPr/>
+        </p:nvSpPr>
+        <p:spPr>
+          <a:xfrm>
+            <a:off x="3904488" y="3547872"/>
+            <a:ext cx="109728" cy="237744"/>
+          </a:xfrm>
+          <a:prstGeom prst="rect">
+            <a:avLst/>
+          </a:prstGeom>
+          <a:solidFill>
+            <a:srgbClr val="890C58"/>
+          </a:solidFill>
+          <a:ln/>
+        </p:spPr>
+      </p:sp>
+      <p:sp>
+        <p:nvSpPr>
+          <p:cNvPr id="14" name="Shape 11"/>
           <p:cNvSpPr/>
           <p:nvPr/>
         </p:nvSpPr>
@@ -22394,7 +22414,7 @@
       </p:sp>
       <p:sp>
         <p:nvSpPr>
-          <p:cNvPr id="14" name="Shape 11"/>
+          <p:cNvPr id="15" name="Shape 12"/>
           <p:cNvSpPr/>
           <p:nvPr/>
         </p:nvSpPr>
@@ -22414,7 +22434,7 @@
       </p:sp>
       <p:sp>
         <p:nvSpPr>
-          <p:cNvPr id="15" name="Text 12"/>
+          <p:cNvPr id="16" name="Text 13"/>
           <p:cNvSpPr/>
           <p:nvPr/>
         </p:nvSpPr>
@@ -22453,7 +22473,7 @@
       </p:sp>
       <p:sp>
         <p:nvSpPr>
-          <p:cNvPr id="16" name="Text 13"/>
+          <p:cNvPr id="17" name="Text 14"/>
           <p:cNvSpPr/>
           <p:nvPr/>
         </p:nvSpPr>
@@ -22492,7 +22512,7 @@
       </p:sp>
       <p:sp>
         <p:nvSpPr>
-          <p:cNvPr id="17" name="Text 14"/>
+          <p:cNvPr id="18" name="Text 15"/>
           <p:cNvSpPr/>
           <p:nvPr/>
         </p:nvSpPr>
@@ -22531,7 +22551,46 @@
       </p:sp>
       <p:sp>
         <p:nvSpPr>
-          <p:cNvPr id="18" name="Text 15"/>
+          <p:cNvPr id="19" name="Text 16"/>
+          <p:cNvSpPr/>
+          <p:nvPr/>
+        </p:nvSpPr>
+        <p:spPr>
+          <a:xfrm>
+            <a:off x="3882542" y="3291840"/>
+            <a:ext cx="274320" cy="219456"/>
+          </a:xfrm>
+          <a:prstGeom prst="rect">
+            <a:avLst/>
+          </a:prstGeom>
+          <a:noFill/>
+          <a:ln/>
+        </p:spPr>
+        <p:txBody>
+          <a:bodyPr wrap="square" lIns="0" tIns="0" rIns="0" bIns="0" rtlCol="0" anchor="ctr"/>
+          <a:lstStyle/>
+          <a:p>
+            <a:pPr algn="ctr" indent="0" marL="0">
+              <a:buNone/>
+            </a:pPr>
+            <a:r>
+              <a:rPr lang="en-US" sz="1000" b="1" dirty="0">
+                <a:solidFill>
+                  <a:srgbClr val="890C58"/>
+                </a:solidFill>
+                <a:latin typeface="NVIDIA Sans" pitchFamily="34" charset="0"/>
+                <a:ea typeface="NVIDIA Sans" pitchFamily="34" charset="-122"/>
+                <a:cs typeface="NVIDIA Sans" pitchFamily="34" charset="-120"/>
+              </a:rPr>
+              <a:t>4</a:t>
+            </a:r>
+            <a:endParaRPr lang="en-US" sz="1000" dirty="0"/>
+          </a:p>
+        </p:txBody>
+      </p:sp>
+      <p:sp>
+        <p:nvSpPr>
+          <p:cNvPr id="20" name="Text 17"/>
           <p:cNvSpPr/>
           <p:nvPr/>
         </p:nvSpPr>
@@ -22570,7 +22629,7 @@
       </p:sp>
       <p:sp>
         <p:nvSpPr>
-          <p:cNvPr id="19" name="Text 16"/>
+          <p:cNvPr id="21" name="Text 18"/>
           <p:cNvSpPr/>
           <p:nvPr/>
         </p:nvSpPr>
@@ -22615,7 +22674,7 @@
                 <a:ea typeface="NVIDIA Sans" pitchFamily="34" charset="-122"/>
                 <a:cs typeface="NVIDIA Sans" pitchFamily="34" charset="-120"/>
               </a:rPr>
-              <a:t>stall 1 ≈ 37 ms at every step start; stall 3 ≈ 13 ms; plus loss/timer readbacks — together seeding the 205 ms/step of GPU idle. The next page removes all three.</a:t>
+              <a:t>stall 1 ≈ 37 ms at every step start; stall 3 ≈ 13 ms; stall 4 drains the launch pipeline twice per step — together seeding the 205 ms/step of GPU idle. The next page removes all four.</a:t>
             </a:r>
             <a:endParaRPr lang="en-US" sz="1100" dirty="0"/>
           </a:p>
@@ -22623,7 +22682,7 @@
       </p:sp>
       <p:sp>
         <p:nvSpPr>
-          <p:cNvPr id="20" name="Text 17"/>
+          <p:cNvPr id="22" name="Text 19"/>
           <p:cNvSpPr/>
           <p:nvPr/>
         </p:nvSpPr>
@@ -22662,7 +22721,7 @@
       </p:sp>
       <p:sp>
         <p:nvSpPr>
-          <p:cNvPr id="21" name="Text 18"/>
+          <p:cNvPr id="23" name="Text 20"/>
           <p:cNvSpPr/>
           <p:nvPr/>
         </p:nvSpPr>
@@ -22701,7 +22760,7 @@
       </p:sp>
       <p:sp>
         <p:nvSpPr>
-          <p:cNvPr id="22" name="Shape 19"/>
+          <p:cNvPr id="24" name="Shape 21"/>
           <p:cNvSpPr/>
           <p:nvPr/>
         </p:nvSpPr>
@@ -22721,7 +22780,7 @@
       </p:sp>
       <p:pic>
         <p:nvPicPr>
-          <p:cNvPr id="23" name="Image 1" descr="/app/logos/nvidia-logo-blk-sm.png">    </p:cNvPr>
+          <p:cNvPr id="25" name="Image 1" descr="/app/logos/nvidia-logo-blk-sm.png">    </p:cNvPr>
           <p:cNvPicPr>
             <a:picLocks noChangeAspect="1"/>
           </p:cNvPicPr>

--- a/docs/slides/qwenpi-optimization.pptx
+++ b/docs/slides/qwenpi-optimization.pptx
@@ -5067,7 +5067,7 @@
         <p:spPr>
           <a:xfrm>
             <a:off x="457200" y="1371600"/>
-            <a:ext cx="3291962" cy="2834640"/>
+            <a:ext cx="3026481" cy="2606040"/>
           </a:xfrm>
           <a:prstGeom prst="rect">
             <a:avLst/>
@@ -5082,8 +5082,8 @@
         </p:nvSpPr>
         <p:spPr>
           <a:xfrm>
-            <a:off x="4206362" y="1371600"/>
-            <a:ext cx="4480438" cy="502920"/>
+            <a:off x="457200" y="4087368"/>
+            <a:ext cx="3392241" cy="365760"/>
           </a:xfrm>
           <a:prstGeom prst="rect">
             <a:avLst/>
@@ -5092,15 +5092,14 @@
           <a:ln/>
         </p:spPr>
         <p:txBody>
-          <a:bodyPr wrap="square" lIns="0" tIns="0" rIns="0" bIns="0" rtlCol="0" anchor="t"/>
+          <a:bodyPr wrap="square" lIns="0" tIns="0" rIns="0" bIns="0" rtlCol="0" anchor="ctr"/>
           <a:lstStyle/>
           <a:p>
-            <a:pPr marL="342900" indent="-342900">
-              <a:buSzPct val="100000"/>
-              <a:buChar char="•"/>
+            <a:pPr indent="0" marL="0">
+              <a:buNone/>
             </a:pPr>
             <a:r>
-              <a:rPr lang="en-US" sz="1050" dirty="0">
+              <a:rPr lang="en-US" sz="900" i="1" dirty="0">
                 <a:solidFill>
                   <a:srgbClr val="5E5E5E"/>
                 </a:solidFill>
@@ -5108,9 +5107,9 @@
                 <a:ea typeface="NVIDIA Sans" pitchFamily="34" charset="-122"/>
                 <a:cs typeface="NVIDIA Sans" pitchFamily="34" charset="-120"/>
               </a:rPr>
-              <a:t>Static shapes (pad-192) make capture possible; vision tower = 1 graph, DiT = torch.compile reduce-overhead, merge stays sync-free eager</a:t>
-            </a:r>
-            <a:endParaRPr lang="en-US" sz="1050" dirty="0"/>
+              <a:t>Enablers: static shapes (pad-192) · vision tower = 1 graph · DiT = torch.compile · merge sync-free eager</a:t>
+            </a:r>
+            <a:endParaRPr lang="en-US" sz="900" dirty="0"/>
           </a:p>
         </p:txBody>
       </p:sp>
@@ -5122,8 +5121,8 @@
         </p:nvSpPr>
         <p:spPr>
           <a:xfrm>
-            <a:off x="4206362" y="1874520"/>
-            <a:ext cx="4480438" cy="274320"/>
+            <a:off x="3940881" y="1371600"/>
+            <a:ext cx="4745919" cy="274320"/>
           </a:xfrm>
           <a:prstGeom prst="rect">
             <a:avLst/>
@@ -5161,8 +5160,8 @@
         </p:nvSpPr>
         <p:spPr>
           <a:xfrm>
-            <a:off x="4206362" y="2139696"/>
-            <a:ext cx="4480438" cy="329184"/>
+            <a:off x="3940881" y="1682496"/>
+            <a:ext cx="4745919" cy="329184"/>
           </a:xfrm>
           <a:prstGeom prst="rect">
             <a:avLst/>
@@ -5214,8 +5213,8 @@
         </p:nvSpPr>
         <p:spPr>
           <a:xfrm>
-            <a:off x="4206362" y="2542032"/>
-            <a:ext cx="4480438" cy="182880"/>
+            <a:off x="3940881" y="2103120"/>
+            <a:ext cx="4745919" cy="219456"/>
           </a:xfrm>
           <a:prstGeom prst="rect">
             <a:avLst/>
@@ -5231,7 +5230,7 @@
               <a:buNone/>
             </a:pPr>
             <a:r>
-              <a:rPr lang="en-US" sz="950" b="1" dirty="0">
+              <a:rPr lang="en-US" sz="1050" b="1" dirty="0">
                 <a:solidFill>
                   <a:srgbClr val="000000"/>
                 </a:solidFill>
@@ -5241,7 +5240,7 @@
               </a:rPr>
               <a:t>4 graphs — AllReduce overlaps the group replays:</a:t>
             </a:r>
-            <a:endParaRPr lang="en-US" sz="950" dirty="0"/>
+            <a:endParaRPr lang="en-US" sz="1050" dirty="0"/>
           </a:p>
         </p:txBody>
       </p:sp>
@@ -5253,8 +5252,8 @@
         </p:nvSpPr>
         <p:spPr>
           <a:xfrm>
-            <a:off x="4206362" y="2743200"/>
-            <a:ext cx="457200" cy="146304"/>
+            <a:off x="3940881" y="2359152"/>
+            <a:ext cx="457200" cy="201168"/>
           </a:xfrm>
           <a:prstGeom prst="rect">
             <a:avLst/>
@@ -5270,7 +5269,7 @@
               <a:buNone/>
             </a:pPr>
             <a:r>
-              <a:rPr lang="en-US" sz="750" dirty="0">
+              <a:rPr lang="en-US" sz="850" dirty="0">
                 <a:solidFill>
                   <a:srgbClr val="5E5E5E"/>
                 </a:solidFill>
@@ -5280,7 +5279,7 @@
               </a:rPr>
               <a:t>GPU</a:t>
             </a:r>
-            <a:endParaRPr lang="en-US" sz="750" dirty="0"/>
+            <a:endParaRPr lang="en-US" sz="850" dirty="0"/>
           </a:p>
         </p:txBody>
       </p:sp>
@@ -5292,8 +5291,8 @@
         </p:nvSpPr>
         <p:spPr>
           <a:xfrm>
-            <a:off x="4206362" y="2907792"/>
-            <a:ext cx="457200" cy="146304"/>
+            <a:off x="3940881" y="2596896"/>
+            <a:ext cx="457200" cy="201168"/>
           </a:xfrm>
           <a:prstGeom prst="rect">
             <a:avLst/>
@@ -5309,7 +5308,7 @@
               <a:buNone/>
             </a:pPr>
             <a:r>
-              <a:rPr lang="en-US" sz="750" dirty="0">
+              <a:rPr lang="en-US" sz="850" dirty="0">
                 <a:solidFill>
                   <a:srgbClr val="5E5E5E"/>
                 </a:solidFill>
@@ -5319,7 +5318,7 @@
               </a:rPr>
               <a:t>NCCL</a:t>
             </a:r>
-            <a:endParaRPr lang="en-US" sz="750" dirty="0"/>
+            <a:endParaRPr lang="en-US" sz="850" dirty="0"/>
           </a:p>
         </p:txBody>
       </p:sp>
@@ -5331,8 +5330,8 @@
         </p:nvSpPr>
         <p:spPr>
           <a:xfrm>
-            <a:off x="4709282" y="2743200"/>
-            <a:ext cx="3931798" cy="146304"/>
+            <a:off x="4443801" y="2359152"/>
+            <a:ext cx="4197279" cy="201168"/>
           </a:xfrm>
           <a:prstGeom prst="rect">
             <a:avLst/>
@@ -5351,8 +5350,8 @@
         </p:nvSpPr>
         <p:spPr>
           <a:xfrm>
-            <a:off x="4709282" y="2907792"/>
-            <a:ext cx="3931798" cy="146304"/>
+            <a:off x="4443801" y="2596896"/>
+            <a:ext cx="4197279" cy="201168"/>
           </a:xfrm>
           <a:prstGeom prst="rect">
             <a:avLst/>
@@ -5371,8 +5370,8 @@
         </p:nvSpPr>
         <p:spPr>
           <a:xfrm>
-            <a:off x="4709282" y="2752344"/>
-            <a:ext cx="707724" cy="128016"/>
+            <a:off x="4443801" y="2368296"/>
+            <a:ext cx="755510" cy="182880"/>
           </a:xfrm>
           <a:prstGeom prst="rect">
             <a:avLst/>
@@ -5391,8 +5390,8 @@
         </p:nvSpPr>
         <p:spPr>
           <a:xfrm>
-            <a:off x="4709282" y="2743200"/>
-            <a:ext cx="707724" cy="146304"/>
+            <a:off x="4443801" y="2359152"/>
+            <a:ext cx="755510" cy="201168"/>
           </a:xfrm>
           <a:prstGeom prst="rect">
             <a:avLst/>
@@ -5408,7 +5407,7 @@
               <a:buNone/>
             </a:pPr>
             <a:r>
-              <a:rPr lang="en-US" sz="700" b="1" dirty="0">
+              <a:rPr lang="en-US" sz="800" b="1" dirty="0">
                 <a:solidFill>
                   <a:srgbClr val="FFFFFF"/>
                 </a:solidFill>
@@ -5418,7 +5417,7 @@
               </a:rPr>
               <a:t>bwd G4</a:t>
             </a:r>
-            <a:endParaRPr lang="en-US" sz="700" dirty="0"/>
+            <a:endParaRPr lang="en-US" sz="800" dirty="0"/>
           </a:p>
         </p:txBody>
       </p:sp>
@@ -5430,8 +5429,8 @@
         </p:nvSpPr>
         <p:spPr>
           <a:xfrm>
-            <a:off x="5495642" y="2752344"/>
-            <a:ext cx="707724" cy="128016"/>
+            <a:off x="5283257" y="2368296"/>
+            <a:ext cx="755510" cy="182880"/>
           </a:xfrm>
           <a:prstGeom prst="rect">
             <a:avLst/>
@@ -5450,8 +5449,8 @@
         </p:nvSpPr>
         <p:spPr>
           <a:xfrm>
-            <a:off x="5495642" y="2743200"/>
-            <a:ext cx="707724" cy="146304"/>
+            <a:off x="5283257" y="2359152"/>
+            <a:ext cx="755510" cy="201168"/>
           </a:xfrm>
           <a:prstGeom prst="rect">
             <a:avLst/>
@@ -5467,7 +5466,7 @@
               <a:buNone/>
             </a:pPr>
             <a:r>
-              <a:rPr lang="en-US" sz="700" b="1" dirty="0">
+              <a:rPr lang="en-US" sz="800" b="1" dirty="0">
                 <a:solidFill>
                   <a:srgbClr val="FFFFFF"/>
                 </a:solidFill>
@@ -5477,7 +5476,7 @@
               </a:rPr>
               <a:t>bwd G3</a:t>
             </a:r>
-            <a:endParaRPr lang="en-US" sz="700" dirty="0"/>
+            <a:endParaRPr lang="en-US" sz="800" dirty="0"/>
           </a:p>
         </p:txBody>
       </p:sp>
@@ -5489,8 +5488,8 @@
         </p:nvSpPr>
         <p:spPr>
           <a:xfrm>
-            <a:off x="6282001" y="2752344"/>
-            <a:ext cx="707724" cy="128016"/>
+            <a:off x="6122713" y="2368296"/>
+            <a:ext cx="755510" cy="182880"/>
           </a:xfrm>
           <a:prstGeom prst="rect">
             <a:avLst/>
@@ -5509,8 +5508,8 @@
         </p:nvSpPr>
         <p:spPr>
           <a:xfrm>
-            <a:off x="6282001" y="2743200"/>
-            <a:ext cx="707724" cy="146304"/>
+            <a:off x="6122713" y="2359152"/>
+            <a:ext cx="755510" cy="201168"/>
           </a:xfrm>
           <a:prstGeom prst="rect">
             <a:avLst/>
@@ -5526,7 +5525,7 @@
               <a:buNone/>
             </a:pPr>
             <a:r>
-              <a:rPr lang="en-US" sz="700" b="1" dirty="0">
+              <a:rPr lang="en-US" sz="800" b="1" dirty="0">
                 <a:solidFill>
                   <a:srgbClr val="FFFFFF"/>
                 </a:solidFill>
@@ -5536,7 +5535,7 @@
               </a:rPr>
               <a:t>bwd G2</a:t>
             </a:r>
-            <a:endParaRPr lang="en-US" sz="700" dirty="0"/>
+            <a:endParaRPr lang="en-US" sz="800" dirty="0"/>
           </a:p>
         </p:txBody>
       </p:sp>
@@ -5548,8 +5547,8 @@
         </p:nvSpPr>
         <p:spPr>
           <a:xfrm>
-            <a:off x="7068361" y="2752344"/>
-            <a:ext cx="707724" cy="128016"/>
+            <a:off x="6962168" y="2368296"/>
+            <a:ext cx="755510" cy="182880"/>
           </a:xfrm>
           <a:prstGeom prst="rect">
             <a:avLst/>
@@ -5568,8 +5567,8 @@
         </p:nvSpPr>
         <p:spPr>
           <a:xfrm>
-            <a:off x="7068361" y="2743200"/>
-            <a:ext cx="707724" cy="146304"/>
+            <a:off x="6962168" y="2359152"/>
+            <a:ext cx="755510" cy="201168"/>
           </a:xfrm>
           <a:prstGeom prst="rect">
             <a:avLst/>
@@ -5585,7 +5584,7 @@
               <a:buNone/>
             </a:pPr>
             <a:r>
-              <a:rPr lang="en-US" sz="700" b="1" dirty="0">
+              <a:rPr lang="en-US" sz="800" b="1" dirty="0">
                 <a:solidFill>
                   <a:srgbClr val="FFFFFF"/>
                 </a:solidFill>
@@ -5595,7 +5594,7 @@
               </a:rPr>
               <a:t>bwd G1</a:t>
             </a:r>
-            <a:endParaRPr lang="en-US" sz="700" dirty="0"/>
+            <a:endParaRPr lang="en-US" sz="800" dirty="0"/>
           </a:p>
         </p:txBody>
       </p:sp>
@@ -5607,8 +5606,8 @@
         </p:nvSpPr>
         <p:spPr>
           <a:xfrm>
-            <a:off x="5456324" y="2916936"/>
-            <a:ext cx="589770" cy="128016"/>
+            <a:off x="5241284" y="2606040"/>
+            <a:ext cx="629592" cy="182880"/>
           </a:xfrm>
           <a:prstGeom prst="rect">
             <a:avLst/>
@@ -5627,8 +5626,8 @@
         </p:nvSpPr>
         <p:spPr>
           <a:xfrm>
-            <a:off x="6242683" y="2916936"/>
-            <a:ext cx="589770" cy="128016"/>
+            <a:off x="6080740" y="2606040"/>
+            <a:ext cx="629592" cy="182880"/>
           </a:xfrm>
           <a:prstGeom prst="rect">
             <a:avLst/>
@@ -5647,8 +5646,8 @@
         </p:nvSpPr>
         <p:spPr>
           <a:xfrm>
-            <a:off x="7029043" y="2916936"/>
-            <a:ext cx="589770" cy="128016"/>
+            <a:off x="6920196" y="2606040"/>
+            <a:ext cx="629592" cy="182880"/>
           </a:xfrm>
           <a:prstGeom prst="rect">
             <a:avLst/>
@@ -5667,8 +5666,8 @@
         </p:nvSpPr>
         <p:spPr>
           <a:xfrm>
-            <a:off x="7815402" y="2916936"/>
-            <a:ext cx="275226" cy="128016"/>
+            <a:off x="7759651" y="2606040"/>
+            <a:ext cx="293810" cy="182880"/>
           </a:xfrm>
           <a:prstGeom prst="rect">
             <a:avLst/>
@@ -5687,14 +5686,14 @@
         </p:nvSpPr>
         <p:spPr>
           <a:xfrm>
-            <a:off x="8090628" y="2724912"/>
-            <a:ext cx="0" cy="365760"/>
+            <a:off x="8053461" y="2340864"/>
+            <a:ext cx="0" cy="475488"/>
           </a:xfrm>
           <a:prstGeom prst="line">
             <a:avLst/>
           </a:prstGeom>
           <a:noFill/>
-          <a:ln w="19050">
+          <a:ln w="22225">
             <a:solidFill>
               <a:srgbClr val="890C58"/>
             </a:solidFill>
@@ -5710,8 +5709,8 @@
         </p:nvSpPr>
         <p:spPr>
           <a:xfrm>
-            <a:off x="4206362" y="3108960"/>
-            <a:ext cx="4480438" cy="182880"/>
+            <a:off x="3940881" y="2907792"/>
+            <a:ext cx="4745919" cy="219456"/>
           </a:xfrm>
           <a:prstGeom prst="rect">
             <a:avLst/>
@@ -5727,7 +5726,7 @@
               <a:buNone/>
             </a:pPr>
             <a:r>
-              <a:rPr lang="en-US" sz="950" b="1" dirty="0">
+              <a:rPr lang="en-US" sz="1050" b="1" dirty="0">
                 <a:solidFill>
                   <a:srgbClr val="000000"/>
                 </a:solidFill>
@@ -5737,7 +5736,7 @@
               </a:rPr>
               <a:t>1 graph — every AllReduce waits for the whole backward:</a:t>
             </a:r>
-            <a:endParaRPr lang="en-US" sz="950" dirty="0"/>
+            <a:endParaRPr lang="en-US" sz="1050" dirty="0"/>
           </a:p>
         </p:txBody>
       </p:sp>
@@ -5749,8 +5748,8 @@
         </p:nvSpPr>
         <p:spPr>
           <a:xfrm>
-            <a:off x="4206362" y="3310128"/>
-            <a:ext cx="457200" cy="146304"/>
+            <a:off x="3940881" y="3163824"/>
+            <a:ext cx="457200" cy="201168"/>
           </a:xfrm>
           <a:prstGeom prst="rect">
             <a:avLst/>
@@ -5766,7 +5765,7 @@
               <a:buNone/>
             </a:pPr>
             <a:r>
-              <a:rPr lang="en-US" sz="750" dirty="0">
+              <a:rPr lang="en-US" sz="850" dirty="0">
                 <a:solidFill>
                   <a:srgbClr val="5E5E5E"/>
                 </a:solidFill>
@@ -5776,7 +5775,7 @@
               </a:rPr>
               <a:t>GPU</a:t>
             </a:r>
-            <a:endParaRPr lang="en-US" sz="750" dirty="0"/>
+            <a:endParaRPr lang="en-US" sz="850" dirty="0"/>
           </a:p>
         </p:txBody>
       </p:sp>
@@ -5788,8 +5787,8 @@
         </p:nvSpPr>
         <p:spPr>
           <a:xfrm>
-            <a:off x="4206362" y="3474720"/>
-            <a:ext cx="457200" cy="146304"/>
+            <a:off x="3940881" y="3401568"/>
+            <a:ext cx="457200" cy="201168"/>
           </a:xfrm>
           <a:prstGeom prst="rect">
             <a:avLst/>
@@ -5805,7 +5804,7 @@
               <a:buNone/>
             </a:pPr>
             <a:r>
-              <a:rPr lang="en-US" sz="750" dirty="0">
+              <a:rPr lang="en-US" sz="850" dirty="0">
                 <a:solidFill>
                   <a:srgbClr val="5E5E5E"/>
                 </a:solidFill>
@@ -5815,7 +5814,7 @@
               </a:rPr>
               <a:t>NCCL</a:t>
             </a:r>
-            <a:endParaRPr lang="en-US" sz="750" dirty="0"/>
+            <a:endParaRPr lang="en-US" sz="850" dirty="0"/>
           </a:p>
         </p:txBody>
       </p:sp>
@@ -5827,8 +5826,8 @@
         </p:nvSpPr>
         <p:spPr>
           <a:xfrm>
-            <a:off x="4709282" y="3310128"/>
-            <a:ext cx="3931798" cy="146304"/>
+            <a:off x="4443801" y="3163824"/>
+            <a:ext cx="4197279" cy="201168"/>
           </a:xfrm>
           <a:prstGeom prst="rect">
             <a:avLst/>
@@ -5847,8 +5846,8 @@
         </p:nvSpPr>
         <p:spPr>
           <a:xfrm>
-            <a:off x="4709282" y="3474720"/>
-            <a:ext cx="3931798" cy="146304"/>
+            <a:off x="4443801" y="3401568"/>
+            <a:ext cx="4197279" cy="201168"/>
           </a:xfrm>
           <a:prstGeom prst="rect">
             <a:avLst/>
@@ -5867,8 +5866,8 @@
         </p:nvSpPr>
         <p:spPr>
           <a:xfrm>
-            <a:off x="4709282" y="3319272"/>
-            <a:ext cx="3066803" cy="128016"/>
+            <a:off x="4443801" y="3172968"/>
+            <a:ext cx="3273878" cy="182880"/>
           </a:xfrm>
           <a:prstGeom prst="rect">
             <a:avLst/>
@@ -5887,8 +5886,8 @@
         </p:nvSpPr>
         <p:spPr>
           <a:xfrm>
-            <a:off x="4709282" y="3310128"/>
-            <a:ext cx="3066803" cy="146304"/>
+            <a:off x="4443801" y="3163824"/>
+            <a:ext cx="3273878" cy="201168"/>
           </a:xfrm>
           <a:prstGeom prst="rect">
             <a:avLst/>
@@ -5904,7 +5903,7 @@
               <a:buNone/>
             </a:pPr>
             <a:r>
-              <a:rPr lang="en-US" sz="700" b="1" dirty="0">
+              <a:rPr lang="en-US" sz="800" b="1" dirty="0">
                 <a:solidFill>
                   <a:srgbClr val="FFFFFF"/>
                 </a:solidFill>
@@ -5914,7 +5913,7 @@
               </a:rPr>
               <a:t>backward (one giant graph, hooks cannot fire inside)</a:t>
             </a:r>
-            <a:endParaRPr lang="en-US" sz="700" dirty="0"/>
+            <a:endParaRPr lang="en-US" sz="800" dirty="0"/>
           </a:p>
         </p:txBody>
       </p:sp>
@@ -5926,8 +5925,8 @@
         </p:nvSpPr>
         <p:spPr>
           <a:xfrm>
-            <a:off x="7776084" y="3483864"/>
-            <a:ext cx="275226" cy="128016"/>
+            <a:off x="7717679" y="3410712"/>
+            <a:ext cx="293810" cy="182880"/>
           </a:xfrm>
           <a:prstGeom prst="rect">
             <a:avLst/>
@@ -5946,8 +5945,8 @@
         </p:nvSpPr>
         <p:spPr>
           <a:xfrm>
-            <a:off x="8070969" y="3483864"/>
-            <a:ext cx="275226" cy="128016"/>
+            <a:off x="8032475" y="3410712"/>
+            <a:ext cx="293810" cy="182880"/>
           </a:xfrm>
           <a:prstGeom prst="rect">
             <a:avLst/>
@@ -5966,8 +5965,8 @@
         </p:nvSpPr>
         <p:spPr>
           <a:xfrm>
-            <a:off x="8365854" y="3483864"/>
-            <a:ext cx="275226" cy="128016"/>
+            <a:off x="8347270" y="3410712"/>
+            <a:ext cx="293810" cy="182880"/>
           </a:xfrm>
           <a:prstGeom prst="rect">
             <a:avLst/>
@@ -5986,14 +5985,14 @@
         </p:nvSpPr>
         <p:spPr>
           <a:xfrm>
-            <a:off x="8641080" y="3291840"/>
-            <a:ext cx="0" cy="365760"/>
+            <a:off x="8641080" y="3145536"/>
+            <a:ext cx="0" cy="475488"/>
           </a:xfrm>
           <a:prstGeom prst="line">
             <a:avLst/>
           </a:prstGeom>
           <a:noFill/>
-          <a:ln w="19050">
+          <a:ln w="22225">
             <a:solidFill>
               <a:srgbClr val="890C58"/>
             </a:solidFill>
@@ -6009,8 +6008,8 @@
         </p:nvSpPr>
         <p:spPr>
           <a:xfrm>
-            <a:off x="4206362" y="3639312"/>
-            <a:ext cx="4480438" cy="146304"/>
+            <a:off x="3940881" y="3621024"/>
+            <a:ext cx="4745919" cy="146304"/>
           </a:xfrm>
           <a:prstGeom prst="rect">
             <a:avLst/>
@@ -6026,7 +6025,7 @@
               <a:buNone/>
             </a:pPr>
             <a:r>
-              <a:rPr lang="en-US" sz="800" i="1" dirty="0">
+              <a:rPr lang="en-US" sz="850" i="1" dirty="0">
                 <a:solidFill>
                   <a:srgbClr val="8C8C8C"/>
                 </a:solidFill>
@@ -6036,7 +6035,7 @@
               </a:rPr>
               <a:t>same compute, same bytes — the red line is where the step ends</a:t>
             </a:r>
-            <a:endParaRPr lang="en-US" sz="800" dirty="0"/>
+            <a:endParaRPr lang="en-US" sz="850" dirty="0"/>
           </a:p>
         </p:txBody>
       </p:sp>
@@ -6048,8 +6047,8 @@
         </p:nvSpPr>
         <p:spPr>
           <a:xfrm>
-            <a:off x="4206362" y="3785616"/>
-            <a:ext cx="4480438" cy="548640"/>
+            <a:off x="3940881" y="3785616"/>
+            <a:ext cx="4745919" cy="548640"/>
           </a:xfrm>
           <a:prstGeom prst="rect">
             <a:avLst/>
@@ -6068,7 +6067,7 @@
         </p:nvSpPr>
         <p:spPr>
           <a:xfrm>
-            <a:off x="4206362" y="3785616"/>
+            <a:off x="3940881" y="3785616"/>
             <a:ext cx="54864" cy="548640"/>
           </a:xfrm>
           <a:prstGeom prst="rect">
@@ -6088,8 +6087,8 @@
         </p:nvSpPr>
         <p:spPr>
           <a:xfrm>
-            <a:off x="4389242" y="3785616"/>
-            <a:ext cx="4206118" cy="548640"/>
+            <a:off x="4123761" y="3785616"/>
+            <a:ext cx="4471599" cy="548640"/>
           </a:xfrm>
           <a:prstGeom prst="rect">
             <a:avLst/>
@@ -12120,7 +12119,7 @@
         <p:spPr>
           <a:xfrm>
             <a:off x="411480" y="1234440"/>
-            <a:ext cx="3522026" cy="3017520"/>
+            <a:ext cx="3582313" cy="3017520"/>
           </a:xfrm>
           <a:prstGeom prst="rect">
             <a:avLst/>

--- a/docs/slides/qwenpi-optimization.pptx
+++ b/docs/slides/qwenpi-optimization.pptx
@@ -3445,7 +3445,9 @@
           <a:p>
             <a:r>
               <a:rPr lang="en-US" dirty="0"/>
-              <a:t>Ledger method: exposed comm = NCCL busy while no compute kernel runs; idle = nothing on any stream.
+              <a:t>Mechanism source (DeepSpeed 0.16.9 stage_1_and_2.py): TWO ipg buffers allocated when overlap_comm (L2055, 'Use double buffers...'); average_tensor makes the compute stream wait_stream(reduction_stream) at every bucket boundary (L1061-1062) - the pipeline depth is one in-flight reduction.
+Variance collapse (±17.7 → ±3.4 ms) is the fingerprint of removing the random waits on the reduction stream.
+Ledger method: exposed comm = NCCL busy while no compute kernel runs; idle = nothing on any stream.
 Remaining exposed comm is gradient-readiness-bound, not hook- or bandwidth-bound — verified by intervention experiments.</a:t>
             </a:r>
             <a:endParaRPr lang="en-US" dirty="0"/>
@@ -6372,8 +6374,8 @@
         </p:nvSpPr>
         <p:spPr>
           <a:xfrm>
-            <a:off x="457200" y="1325880"/>
-            <a:ext cx="8229600" cy="1234440"/>
+            <a:off x="457200" y="1298448"/>
+            <a:ext cx="8229600" cy="1417320"/>
           </a:xfrm>
           <a:prstGeom prst="rect">
             <a:avLst/>
@@ -6390,7 +6392,7 @@
               <a:buChar char="•"/>
             </a:pPr>
             <a:r>
-              <a:rPr lang="en-US" sz="1200" dirty="0">
+              <a:rPr lang="en-US" sz="1050" dirty="0">
                 <a:solidFill>
                   <a:srgbClr val="000000"/>
                 </a:solidFill>
@@ -6398,9 +6400,9 @@
                 <a:ea typeface="NVIDIA Sans" pitchFamily="34" charset="-122"/>
                 <a:cs typeface="NVIDIA Sans" pitchFamily="34" charset="-120"/>
               </a:rPr>
-              <a:t>reduce_bucket_size 5e8 → 1.5e9: 6 gradient AllReduces per step instead of ~20, scoped to this model's config only</a:t>
-            </a:r>
-            <a:endParaRPr lang="en-US" sz="1200" dirty="0"/>
+              <a:t>Why bucket size matters: with overlap_comm, DeepSpeed double-buffers gradients into just TWO flat buckets — and at every bucket boundary the compute stream must wait on the reduction stream. Small buckets = frequent rendezvous → backward stalls behind its own AllReduces</a:t>
+            </a:r>
+            <a:endParaRPr lang="en-US" sz="1050" dirty="0"/>
           </a:p>
           <a:p>
             <a:pPr marL="342900" indent="-342900">
@@ -6408,7 +6410,7 @@
               <a:buChar char="•"/>
             </a:pPr>
             <a:r>
-              <a:rPr lang="en-US" sz="1200" dirty="0">
+              <a:rPr lang="en-US" sz="1050" dirty="0">
                 <a:solidFill>
                   <a:srgbClr val="000000"/>
                 </a:solidFill>
@@ -6416,9 +6418,9 @@
                 <a:ea typeface="NVIDIA Sans" pitchFamily="34" charset="-122"/>
                 <a:cs typeface="NVIDIA Sans" pitchFamily="34" charset="-120"/>
               </a:rPr>
-              <a:t>reduce_scatter=false: drops DeepSpeed's redundant per-bucket flatten (CatArrayBatchedCopy) ahead of each AllReduce</a:t>
-            </a:r>
-            <a:endParaRPr lang="en-US" sz="1200" dirty="0"/>
+              <a:t>5e8 → 1.5e9 elements: 15 → 6 buckets/step; the DiT's contiguous ~3e9-element gradient region drops from 6 buckets to 2 — measured −11.3 ms AND step variance ±17.7 → ±3.4 ms (2e9 is worse: the coarser tail exposes more comm)</a:t>
+            </a:r>
+            <a:endParaRPr lang="en-US" sz="1050" dirty="0"/>
           </a:p>
           <a:p>
             <a:pPr marL="342900" indent="-342900">
@@ -6426,7 +6428,7 @@
               <a:buChar char="•"/>
             </a:pPr>
             <a:r>
-              <a:rPr lang="en-US" sz="1200" dirty="0">
+              <a:rPr lang="en-US" sz="1050" dirty="0">
                 <a:solidFill>
                   <a:srgbClr val="000000"/>
                 </a:solidFill>
@@ -6434,9 +6436,27 @@
                 <a:ea typeface="NVIDIA Sans" pitchFamily="34" charset="-122"/>
                 <a:cs typeface="NVIDIA Sans" pitchFamily="34" charset="-120"/>
               </a:rPr>
-              <a:t>Verified NOT bandwidth-bound: AllReduce microbenchmark hits 478 GB/s bus bandwidth — the NVLink per-direction ceiling. The remaining exposed comm can only shrink by sending fewer bytes.</a:t>
-            </a:r>
-            <a:endParaRPr lang="en-US" sz="1200" dirty="0"/>
+              <a:t>reduce_scatter=false: drops DeepSpeed's redundant per-bucket flatten — the 22 ms of CatArrayBatchedCopy from the diagnosis page</a:t>
+            </a:r>
+            <a:endParaRPr lang="en-US" sz="1050" dirty="0"/>
+          </a:p>
+          <a:p>
+            <a:pPr marL="342900" indent="-342900">
+              <a:buSzPct val="100000"/>
+              <a:buChar char="•"/>
+            </a:pPr>
+            <a:r>
+              <a:rPr lang="en-US" sz="1050" dirty="0">
+                <a:solidFill>
+                  <a:srgbClr val="000000"/>
+                </a:solidFill>
+                <a:latin typeface="NVIDIA Sans" pitchFamily="34" charset="0"/>
+                <a:ea typeface="NVIDIA Sans" pitchFamily="34" charset="-122"/>
+                <a:cs typeface="NVIDIA Sans" pitchFamily="34" charset="-120"/>
+              </a:rPr>
+              <a:t>Not bandwidth-bound: AllReduce microbench hits 478 GB/s busbw = the NVLink ceiling — past config hygiene, only fewer bytes can shrink comm</a:t>
+            </a:r>
+            <a:endParaRPr lang="en-US" sz="1050" dirty="0"/>
           </a:p>
         </p:txBody>
       </p:sp>
@@ -6448,8 +6468,8 @@
         </p:nvSpPr>
         <p:spPr>
           <a:xfrm>
-            <a:off x="457200" y="2697480"/>
-            <a:ext cx="8229600" cy="274320"/>
+            <a:off x="457200" y="2788920"/>
+            <a:ext cx="8229600" cy="256032"/>
           </a:xfrm>
           <a:prstGeom prst="rect">
             <a:avLst/>
@@ -6487,7 +6507,7 @@
         </p:nvSpPr>
         <p:spPr>
           <a:xfrm>
-            <a:off x="640080" y="3044952"/>
+            <a:off x="640080" y="3108960"/>
             <a:ext cx="1463040" cy="310896"/>
           </a:xfrm>
           <a:prstGeom prst="rect">
@@ -6526,7 +6546,7 @@
         </p:nvSpPr>
         <p:spPr>
           <a:xfrm>
-            <a:off x="2148840" y="3063240"/>
+            <a:off x="2148840" y="3127248"/>
             <a:ext cx="3605332" cy="310896"/>
           </a:xfrm>
           <a:prstGeom prst="rect">
@@ -6546,7 +6566,7 @@
         </p:nvSpPr>
         <p:spPr>
           <a:xfrm>
-            <a:off x="2148840" y="3063240"/>
+            <a:off x="2148840" y="3127248"/>
             <a:ext cx="3605332" cy="310896"/>
           </a:xfrm>
           <a:prstGeom prst="rect">
@@ -6585,7 +6605,7 @@
         </p:nvSpPr>
         <p:spPr>
           <a:xfrm>
-            <a:off x="5754172" y="3063240"/>
+            <a:off x="5754172" y="3127248"/>
             <a:ext cx="411123" cy="310896"/>
           </a:xfrm>
           <a:prstGeom prst="rect">
@@ -6605,7 +6625,7 @@
         </p:nvSpPr>
         <p:spPr>
           <a:xfrm>
-            <a:off x="6165295" y="3063240"/>
+            <a:off x="6165295" y="3127248"/>
             <a:ext cx="1368852" cy="310896"/>
           </a:xfrm>
           <a:prstGeom prst="rect">
@@ -6625,7 +6645,7 @@
         </p:nvSpPr>
         <p:spPr>
           <a:xfrm>
-            <a:off x="6165295" y="3063240"/>
+            <a:off x="6165295" y="3127248"/>
             <a:ext cx="1368852" cy="310896"/>
           </a:xfrm>
           <a:prstGeom prst="rect">
@@ -6664,7 +6684,7 @@
         </p:nvSpPr>
         <p:spPr>
           <a:xfrm>
-            <a:off x="7589010" y="3063240"/>
+            <a:off x="7589010" y="3127248"/>
             <a:ext cx="822960" cy="310896"/>
           </a:xfrm>
           <a:prstGeom prst="rect">
@@ -6703,7 +6723,7 @@
         </p:nvSpPr>
         <p:spPr>
           <a:xfrm>
-            <a:off x="640080" y="3502152"/>
+            <a:off x="640080" y="3566160"/>
             <a:ext cx="1463040" cy="310896"/>
           </a:xfrm>
           <a:prstGeom prst="rect">
@@ -6742,7 +6762,7 @@
         </p:nvSpPr>
         <p:spPr>
           <a:xfrm>
-            <a:off x="2148840" y="3520440"/>
+            <a:off x="2148840" y="3584448"/>
             <a:ext cx="1169297" cy="310896"/>
           </a:xfrm>
           <a:prstGeom prst="rect">
@@ -6762,7 +6782,7 @@
         </p:nvSpPr>
         <p:spPr>
           <a:xfrm>
-            <a:off x="2148840" y="3520440"/>
+            <a:off x="2148840" y="3584448"/>
             <a:ext cx="1169297" cy="310896"/>
           </a:xfrm>
           <a:prstGeom prst="rect">
@@ -6801,7 +6821,7 @@
         </p:nvSpPr>
         <p:spPr>
           <a:xfrm>
-            <a:off x="3318137" y="3520440"/>
+            <a:off x="3318137" y="3584448"/>
             <a:ext cx="148164" cy="310896"/>
           </a:xfrm>
           <a:prstGeom prst="rect">
@@ -6821,7 +6841,7 @@
         </p:nvSpPr>
         <p:spPr>
           <a:xfrm>
-            <a:off x="3466301" y="3520440"/>
+            <a:off x="3466301" y="3584448"/>
             <a:ext cx="289655" cy="310896"/>
           </a:xfrm>
           <a:prstGeom prst="rect">
@@ -6841,7 +6861,7 @@
         </p:nvSpPr>
         <p:spPr>
           <a:xfrm>
-            <a:off x="3810820" y="3520440"/>
+            <a:off x="3810820" y="3584448"/>
             <a:ext cx="822960" cy="310896"/>
           </a:xfrm>
           <a:prstGeom prst="rect">
@@ -6880,7 +6900,7 @@
         </p:nvSpPr>
         <p:spPr>
           <a:xfrm>
-            <a:off x="2148840" y="4005072"/>
+            <a:off x="2148840" y="4059936"/>
             <a:ext cx="164592" cy="128016"/>
           </a:xfrm>
           <a:prstGeom prst="rect">
@@ -6900,7 +6920,7 @@
         </p:nvSpPr>
         <p:spPr>
           <a:xfrm>
-            <a:off x="2368296" y="3931920"/>
+            <a:off x="2368296" y="3986784"/>
             <a:ext cx="1600200" cy="274320"/>
           </a:xfrm>
           <a:prstGeom prst="rect">
@@ -6939,7 +6959,7 @@
         </p:nvSpPr>
         <p:spPr>
           <a:xfrm>
-            <a:off x="3977640" y="4005072"/>
+            <a:off x="3977640" y="4059936"/>
             <a:ext cx="164592" cy="128016"/>
           </a:xfrm>
           <a:prstGeom prst="rect">
@@ -6959,7 +6979,7 @@
         </p:nvSpPr>
         <p:spPr>
           <a:xfrm>
-            <a:off x="4197096" y="3931920"/>
+            <a:off x="4197096" y="3986784"/>
             <a:ext cx="1600200" cy="274320"/>
           </a:xfrm>
           <a:prstGeom prst="rect">
@@ -6998,7 +7018,7 @@
         </p:nvSpPr>
         <p:spPr>
           <a:xfrm>
-            <a:off x="5806440" y="4005072"/>
+            <a:off x="5806440" y="4059936"/>
             <a:ext cx="164592" cy="128016"/>
           </a:xfrm>
           <a:prstGeom prst="rect">
@@ -7018,7 +7038,7 @@
         </p:nvSpPr>
         <p:spPr>
           <a:xfrm>
-            <a:off x="6025896" y="3931920"/>
+            <a:off x="6025896" y="3986784"/>
             <a:ext cx="1600200" cy="274320"/>
           </a:xfrm>
           <a:prstGeom prst="rect">
@@ -7057,8 +7077,8 @@
         </p:nvSpPr>
         <p:spPr>
           <a:xfrm>
-            <a:off x="457200" y="4224528"/>
-            <a:ext cx="8229600" cy="228600"/>
+            <a:off x="457200" y="4261104"/>
+            <a:ext cx="8229600" cy="182880"/>
           </a:xfrm>
           <a:prstGeom prst="rect">
             <a:avLst/>
@@ -7082,7 +7102,7 @@
                 <a:ea typeface="NVIDIA Sans" pitchFamily="34" charset="-122"/>
                 <a:cs typeface="NVIDIA Sans" pitchFamily="34" charset="-120"/>
               </a:rPr>
-              <a:t>Gradient AllReduce 15.1 GB/step + optimizer AllGather 15.1 GB/step (bf16). Idle from 254 ms to 43 ms.</a:t>
+              <a:t>Gradient AllReduce 15.1 GB/step + optimizer AllGather 15.1 GB/step (bf16). Idle from 205 ms to 43 ms.</a:t>
             </a:r>
             <a:endParaRPr lang="en-US" sz="950" dirty="0"/>
           </a:p>

--- a/docs/slides/qwenpi-optimization.pptx
+++ b/docs/slides/qwenpi-optimization.pptx
@@ -3445,10 +3445,9 @@
           <a:p>
             <a:r>
               <a:rPr lang="en-US" dirty="0"/>
-              <a:t>Mechanism source (DeepSpeed 0.16.9 stage_1_and_2.py): TWO ipg buffers allocated when overlap_comm (L2055, 'Use double buffers...'); average_tensor makes the compute stream wait_stream(reduction_stream) at every bucket boundary (L1061-1062) - the pipeline depth is one in-flight reduction.
-Variance collapse (±17.7 → ±3.4 ms) is the fingerprint of removing the random waits on the reduction stream.
-Ledger method: exposed comm = NCCL busy while no compute kernel runs; idle = nothing on any stream.
-Remaining exposed comm is gradient-readiness-bound, not hook- or bandwidth-bound — verified by intervention experiments.</a:t>
+              <a:t>Mechanism source (DeepSpeed 0.16.9 stage_1_and_2.py): TWO ipg buffers when overlap_comm (L2055); average_tensor enqueues compute.wait_stream(reduction_stream) at every bucket boundary (L1061-1062) - pipeline depth is one in-flight reduction.
+A/B re-captured on viking-prod-303 with node-level graph trace: 5e8 = 261 ms/step (std 4.2), 1.5e9 = 249 ms (std 3.9); AR busy equal within 1 ms (same bytes). Original-branch sweep: 2e9 was +4.7 ms; variance collapse +-17.7 -&gt; +-3.4 recorded there.
+Final ledger (moved off-slide): baseline 807 = 540 busy + 62 exposed + 205 idle; optimized 249 = 175 + 22 + 43.</a:t>
             </a:r>
             <a:endParaRPr lang="en-US" dirty="0"/>
           </a:p>
@@ -3712,7 +3711,8 @@
           <a:p>
             <a:r>
               <a:rPr lang="en-US" dirty="0"/>
-              <a:t>Everything shipped is one MR per optimization with measured before/after — the repo history is the reproducibility story.
+              <a:t>AllGather card: optimizer math itself (~26 ms busy) has a separate compiled-autograd / fused-optimizer lever; the 44 ms AllGather is the structural ZeRO-2 limit.
+Everything shipped is one MR per optimization with measured before/after — the repo history is the reproducibility story.
 [IMPORTANT] Close: 3.2x is banked; the roadmap above is how we keep going.</a:t>
             </a:r>
             <a:endParaRPr lang="en-US" dirty="0"/>
@@ -6321,7 +6321,7 @@
                 <a:ea typeface="NVIDIA Sans" pitchFamily="34" charset="-122"/>
                 <a:cs typeface="NVIDIA Sans" pitchFamily="34" charset="-120"/>
               </a:rPr>
-              <a:t>ZeRO-2 Comm Tuning &amp; the Final Ledger</a:t>
+              <a:t>ZeRO-2 Comm Tuning: Two Knobs</a:t>
             </a:r>
             <a:endParaRPr lang="en-US" sz="3000" dirty="0"/>
           </a:p>
@@ -6360,7 +6360,7 @@
                 <a:ea typeface="NVIDIA Sans" pitchFamily="34" charset="-122"/>
                 <a:cs typeface="NVIDIA Sans" pitchFamily="34" charset="-120"/>
               </a:rPr>
-              <a:t>271 → 249 ms.  Fewer, larger collectives — and an honest ledger of what remains</a:t>
+              <a:t>271 → 249 ms.  Two different problems: a redundant flatten, and a blocked backward</a:t>
             </a:r>
             <a:endParaRPr lang="en-US" sz="1500" dirty="0"/>
           </a:p>
@@ -6368,14 +6368,93 @@
       </p:sp>
       <p:sp>
         <p:nvSpPr>
-          <p:cNvPr id="4" name="Text 2"/>
-          <p:cNvSpPr/>
-          <p:nvPr/>
-        </p:nvSpPr>
-        <p:spPr>
-          <a:xfrm>
-            <a:off x="457200" y="1298448"/>
-            <a:ext cx="8229600" cy="1417320"/>
+          <p:cNvPr id="4" name="Shape 2"/>
+          <p:cNvSpPr/>
+          <p:nvPr/>
+        </p:nvSpPr>
+        <p:spPr>
+          <a:xfrm>
+            <a:off x="457200" y="1188720"/>
+            <a:ext cx="4023360" cy="969264"/>
+          </a:xfrm>
+          <a:prstGeom prst="rect">
+            <a:avLst/>
+          </a:prstGeom>
+          <a:solidFill>
+            <a:srgbClr val="F5F5F5"/>
+          </a:solidFill>
+          <a:ln/>
+        </p:spPr>
+      </p:sp>
+      <p:sp>
+        <p:nvSpPr>
+          <p:cNvPr id="5" name="Shape 3"/>
+          <p:cNvSpPr/>
+          <p:nvPr/>
+        </p:nvSpPr>
+        <p:spPr>
+          <a:xfrm>
+            <a:off x="457200" y="1188720"/>
+            <a:ext cx="54864" cy="969264"/>
+          </a:xfrm>
+          <a:prstGeom prst="rect">
+            <a:avLst/>
+          </a:prstGeom>
+          <a:solidFill>
+            <a:srgbClr val="76B900"/>
+          </a:solidFill>
+          <a:ln/>
+        </p:spPr>
+      </p:sp>
+      <p:sp>
+        <p:nvSpPr>
+          <p:cNvPr id="6" name="Text 4"/>
+          <p:cNvSpPr/>
+          <p:nvPr/>
+        </p:nvSpPr>
+        <p:spPr>
+          <a:xfrm>
+            <a:off x="621792" y="1243584"/>
+            <a:ext cx="3749040" cy="219456"/>
+          </a:xfrm>
+          <a:prstGeom prst="rect">
+            <a:avLst/>
+          </a:prstGeom>
+          <a:noFill/>
+          <a:ln/>
+        </p:spPr>
+        <p:txBody>
+          <a:bodyPr wrap="square" lIns="0" tIns="0" rIns="0" bIns="0" rtlCol="0" anchor="ctr"/>
+          <a:lstStyle/>
+          <a:p>
+            <a:pPr indent="0" marL="0">
+              <a:buNone/>
+            </a:pPr>
+            <a:r>
+              <a:rPr lang="en-US" sz="1150" b="1" dirty="0">
+                <a:solidFill>
+                  <a:srgbClr val="000000"/>
+                </a:solidFill>
+                <a:latin typeface="NVIDIA Sans" pitchFamily="34" charset="0"/>
+                <a:ea typeface="NVIDIA Sans" pitchFamily="34" charset="-122"/>
+                <a:cs typeface="NVIDIA Sans" pitchFamily="34" charset="-120"/>
+              </a:rPr>
+              <a:t>Knob 1 · reduce_scatter → false   (−13 ms)</a:t>
+            </a:r>
+            <a:endParaRPr lang="en-US" sz="1150" dirty="0"/>
+          </a:p>
+        </p:txBody>
+      </p:sp>
+      <p:sp>
+        <p:nvSpPr>
+          <p:cNvPr id="7" name="Text 5"/>
+          <p:cNvSpPr/>
+          <p:nvPr/>
+        </p:nvSpPr>
+        <p:spPr>
+          <a:xfrm>
+            <a:off x="621792" y="1481328"/>
+            <a:ext cx="3749040" cy="658368"/>
           </a:xfrm>
           <a:prstGeom prst="rect">
             <a:avLst/>
@@ -6392,7 +6471,7 @@
               <a:buChar char="•"/>
             </a:pPr>
             <a:r>
-              <a:rPr lang="en-US" sz="1050" dirty="0">
+              <a:rPr lang="en-US" sz="900" dirty="0">
                 <a:solidFill>
                   <a:srgbClr val="000000"/>
                 </a:solidFill>
@@ -6400,9 +6479,9 @@
                 <a:ea typeface="NVIDIA Sans" pitchFamily="34" charset="-122"/>
                 <a:cs typeface="NVIDIA Sans" pitchFamily="34" charset="-120"/>
               </a:rPr>
-              <a:t>Why bucket size matters: with overlap_comm, DeepSpeed double-buffers gradients into just TWO flat buckets — and at every bucket boundary the compute stream must wait on the reduction stream. Small buckets = frequent rendezvous → backward stalls behind its own AllReduces</a:t>
+              <a:t>Default path flattens every bucket (22 ms/step CatArrayBatchedCopy) — but grads already sit contiguous</a:t>
             </a:r>
-            <a:endParaRPr lang="en-US" sz="1050" dirty="0"/>
+            <a:endParaRPr lang="en-US" sz="900" dirty="0"/>
           </a:p>
           <a:p>
             <a:pPr marL="342900" indent="-342900">
@@ -6410,7 +6489,7 @@
               <a:buChar char="•"/>
             </a:pPr>
             <a:r>
-              <a:rPr lang="en-US" sz="1050" dirty="0">
+              <a:rPr lang="en-US" sz="900" dirty="0">
                 <a:solidFill>
                   <a:srgbClr val="000000"/>
                 </a:solidFill>
@@ -6418,58 +6497,62 @@
                 <a:ea typeface="NVIDIA Sans" pitchFamily="34" charset="-122"/>
                 <a:cs typeface="NVIDIA Sans" pitchFamily="34" charset="-120"/>
               </a:rPr>
-              <a:t>5e8 → 1.5e9 elements: 15 → 6 buckets/step; the DiT's contiguous ~3e9-element gradient region drops from 6 buckets to 2 — measured −11.3 ms AND step variance ±17.7 → ±3.4 ms (2e9 is worse: the coarser tail exposes more comm)</a:t>
+              <a:t>Plain AllReduce skips it. Cost: ~2× wire bytes — fine while comm overlaps and NVLink has headroom</a:t>
             </a:r>
-            <a:endParaRPr lang="en-US" sz="1050" dirty="0"/>
-          </a:p>
-          <a:p>
-            <a:pPr marL="342900" indent="-342900">
-              <a:buSzPct val="100000"/>
-              <a:buChar char="•"/>
-            </a:pPr>
-            <a:r>
-              <a:rPr lang="en-US" sz="1050" dirty="0">
-                <a:solidFill>
-                  <a:srgbClr val="000000"/>
-                </a:solidFill>
-                <a:latin typeface="NVIDIA Sans" pitchFamily="34" charset="0"/>
-                <a:ea typeface="NVIDIA Sans" pitchFamily="34" charset="-122"/>
-                <a:cs typeface="NVIDIA Sans" pitchFamily="34" charset="-120"/>
-              </a:rPr>
-              <a:t>reduce_scatter=false: drops DeepSpeed's redundant per-bucket flatten — the 22 ms of CatArrayBatchedCopy from the diagnosis page</a:t>
-            </a:r>
-            <a:endParaRPr lang="en-US" sz="1050" dirty="0"/>
-          </a:p>
-          <a:p>
-            <a:pPr marL="342900" indent="-342900">
-              <a:buSzPct val="100000"/>
-              <a:buChar char="•"/>
-            </a:pPr>
-            <a:r>
-              <a:rPr lang="en-US" sz="1050" dirty="0">
-                <a:solidFill>
-                  <a:srgbClr val="000000"/>
-                </a:solidFill>
-                <a:latin typeface="NVIDIA Sans" pitchFamily="34" charset="0"/>
-                <a:ea typeface="NVIDIA Sans" pitchFamily="34" charset="-122"/>
-                <a:cs typeface="NVIDIA Sans" pitchFamily="34" charset="-120"/>
-              </a:rPr>
-              <a:t>Not bandwidth-bound: AllReduce microbench hits 478 GB/s busbw = the NVLink ceiling — past config hygiene, only fewer bytes can shrink comm</a:t>
-            </a:r>
-            <a:endParaRPr lang="en-US" sz="1050" dirty="0"/>
+            <a:endParaRPr lang="en-US" sz="900" dirty="0"/>
           </a:p>
         </p:txBody>
       </p:sp>
       <p:sp>
         <p:nvSpPr>
-          <p:cNvPr id="5" name="Text 3"/>
-          <p:cNvSpPr/>
-          <p:nvPr/>
-        </p:nvSpPr>
-        <p:spPr>
-          <a:xfrm>
-            <a:off x="457200" y="2788920"/>
-            <a:ext cx="8229600" cy="256032"/>
+          <p:cNvPr id="8" name="Shape 6"/>
+          <p:cNvSpPr/>
+          <p:nvPr/>
+        </p:nvSpPr>
+        <p:spPr>
+          <a:xfrm>
+            <a:off x="4663440" y="1188720"/>
+            <a:ext cx="4023360" cy="969264"/>
+          </a:xfrm>
+          <a:prstGeom prst="rect">
+            <a:avLst/>
+          </a:prstGeom>
+          <a:solidFill>
+            <a:srgbClr val="F5F5F5"/>
+          </a:solidFill>
+          <a:ln/>
+        </p:spPr>
+      </p:sp>
+      <p:sp>
+        <p:nvSpPr>
+          <p:cNvPr id="9" name="Shape 7"/>
+          <p:cNvSpPr/>
+          <p:nvPr/>
+        </p:nvSpPr>
+        <p:spPr>
+          <a:xfrm>
+            <a:off x="4663440" y="1188720"/>
+            <a:ext cx="54864" cy="969264"/>
+          </a:xfrm>
+          <a:prstGeom prst="rect">
+            <a:avLst/>
+          </a:prstGeom>
+          <a:solidFill>
+            <a:srgbClr val="76B900"/>
+          </a:solidFill>
+          <a:ln/>
+        </p:spPr>
+      </p:sp>
+      <p:sp>
+        <p:nvSpPr>
+          <p:cNvPr id="10" name="Text 8"/>
+          <p:cNvSpPr/>
+          <p:nvPr/>
+        </p:nvSpPr>
+        <p:spPr>
+          <a:xfrm>
+            <a:off x="4828032" y="1243584"/>
+            <a:ext cx="3749040" cy="219456"/>
           </a:xfrm>
           <a:prstGeom prst="rect">
             <a:avLst/>
@@ -6485,7 +6568,7 @@
               <a:buNone/>
             </a:pPr>
             <a:r>
-              <a:rPr lang="en-US" sz="1300" b="1" dirty="0">
+              <a:rPr lang="en-US" sz="1150" b="1" dirty="0">
                 <a:solidFill>
                   <a:srgbClr val="000000"/>
                 </a:solidFill>
@@ -6493,22 +6576,80 @@
                 <a:ea typeface="NVIDIA Sans" pitchFamily="34" charset="-122"/>
                 <a:cs typeface="NVIDIA Sans" pitchFamily="34" charset="-120"/>
               </a:rPr>
-              <a:t>Per-step time ledger (same accounting, one steady step from each nsys capture)</a:t>
+              <a:t>Knob 2 · reduce_bucket_size → 1.5e9   (−12 ms)</a:t>
             </a:r>
-            <a:endParaRPr lang="en-US" sz="1300" dirty="0"/>
+            <a:endParaRPr lang="en-US" sz="1150" dirty="0"/>
           </a:p>
         </p:txBody>
       </p:sp>
       <p:sp>
         <p:nvSpPr>
-          <p:cNvPr id="6" name="Text 4"/>
-          <p:cNvSpPr/>
-          <p:nvPr/>
-        </p:nvSpPr>
-        <p:spPr>
-          <a:xfrm>
-            <a:off x="640080" y="3108960"/>
-            <a:ext cx="1463040" cy="310896"/>
+          <p:cNvPr id="11" name="Text 9"/>
+          <p:cNvSpPr/>
+          <p:nvPr/>
+        </p:nvSpPr>
+        <p:spPr>
+          <a:xfrm>
+            <a:off x="4828032" y="1481328"/>
+            <a:ext cx="3749040" cy="658368"/>
+          </a:xfrm>
+          <a:prstGeom prst="rect">
+            <a:avLst/>
+          </a:prstGeom>
+          <a:noFill/>
+          <a:ln/>
+        </p:spPr>
+        <p:txBody>
+          <a:bodyPr wrap="square" lIns="0" tIns="0" rIns="0" bIns="0" rtlCol="0" anchor="t"/>
+          <a:lstStyle/>
+          <a:p>
+            <a:pPr marL="342900" indent="-342900">
+              <a:buSzPct val="100000"/>
+              <a:buChar char="•"/>
+            </a:pPr>
+            <a:r>
+              <a:rPr lang="en-US" sz="900" dirty="0">
+                <a:solidFill>
+                  <a:srgbClr val="000000"/>
+                </a:solidFill>
+                <a:latin typeface="NVIDIA Sans" pitchFamily="34" charset="0"/>
+                <a:ea typeface="NVIDIA Sans" pitchFamily="34" charset="-122"/>
+                <a:cs typeface="NVIDIA Sans" pitchFamily="34" charset="-120"/>
+              </a:rPr>
+              <a:t>Grads double-buffer into TWO buckets; every boundary makes compute wait on the reduction stream</a:t>
+            </a:r>
+            <a:endParaRPr lang="en-US" sz="900" dirty="0"/>
+          </a:p>
+          <a:p>
+            <a:pPr marL="342900" indent="-342900">
+              <a:buSzPct val="100000"/>
+              <a:buChar char="•"/>
+            </a:pPr>
+            <a:r>
+              <a:rPr lang="en-US" sz="900" dirty="0">
+                <a:solidFill>
+                  <a:srgbClr val="000000"/>
+                </a:solidFill>
+                <a:latin typeface="NVIDIA Sans" pitchFamily="34" charset="0"/>
+                <a:ea typeface="NVIDIA Sans" pitchFamily="34" charset="-122"/>
+                <a:cs typeface="NVIDIA Sans" pitchFamily="34" charset="-120"/>
+              </a:rPr>
+              <a:t>Too small → backward stalls behind its own AllReduces (below). Too big → exposed tail (2e9 worse)</a:t>
+            </a:r>
+            <a:endParaRPr lang="en-US" sz="900" dirty="0"/>
+          </a:p>
+        </p:txBody>
+      </p:sp>
+      <p:sp>
+        <p:nvSpPr>
+          <p:cNvPr id="12" name="Text 10"/>
+          <p:cNvSpPr/>
+          <p:nvPr/>
+        </p:nvSpPr>
+        <p:spPr>
+          <a:xfrm>
+            <a:off x="457200" y="2304288"/>
+            <a:ext cx="8229600" cy="182880"/>
           </a:xfrm>
           <a:prstGeom prst="rect">
             <a:avLst/>
@@ -6524,7 +6665,7 @@
               <a:buNone/>
             </a:pPr>
             <a:r>
-              <a:rPr lang="en-US" sz="1100" b="1" dirty="0">
+              <a:rPr lang="en-US" sz="1050" b="1" dirty="0">
                 <a:solidFill>
                   <a:srgbClr val="000000"/>
                 </a:solidFill>
@@ -6532,42 +6673,22 @@
                 <a:ea typeface="NVIDIA Sans" pitchFamily="34" charset="-122"/>
                 <a:cs typeface="NVIDIA Sans" pitchFamily="34" charset="-120"/>
               </a:rPr>
-              <a:t>Baseline</a:t>
+              <a:t>bucket 5e8 — backward 167 ms · 18 AllReduces · 15 stalls, 47 ms of blocked compute</a:t>
             </a:r>
-            <a:endParaRPr lang="en-US" sz="1100" dirty="0"/>
+            <a:endParaRPr lang="en-US" sz="1050" dirty="0"/>
           </a:p>
         </p:txBody>
       </p:sp>
       <p:sp>
         <p:nvSpPr>
-          <p:cNvPr id="7" name="Shape 5"/>
-          <p:cNvSpPr/>
-          <p:nvPr/>
-        </p:nvSpPr>
-        <p:spPr>
-          <a:xfrm>
-            <a:off x="2148840" y="3127248"/>
-            <a:ext cx="3605332" cy="310896"/>
-          </a:xfrm>
-          <a:prstGeom prst="rect">
-            <a:avLst/>
-          </a:prstGeom>
-          <a:solidFill>
-            <a:srgbClr val="76B900"/>
-          </a:solidFill>
-          <a:ln/>
-        </p:spPr>
-      </p:sp>
-      <p:sp>
-        <p:nvSpPr>
-          <p:cNvPr id="8" name="Text 6"/>
-          <p:cNvSpPr/>
-          <p:nvPr/>
-        </p:nvSpPr>
-        <p:spPr>
-          <a:xfrm>
-            <a:off x="2148840" y="3127248"/>
-            <a:ext cx="3605332" cy="310896"/>
+          <p:cNvPr id="13" name="Text 11"/>
+          <p:cNvSpPr/>
+          <p:nvPr/>
+        </p:nvSpPr>
+        <p:spPr>
+          <a:xfrm>
+            <a:off x="457200" y="2523744"/>
+            <a:ext cx="713232" cy="201168"/>
           </a:xfrm>
           <a:prstGeom prst="rect">
             <a:avLst/>
@@ -6579,90 +6700,11 @@
           <a:bodyPr wrap="square" lIns="0" tIns="0" rIns="0" bIns="0" rtlCol="0" anchor="ctr"/>
           <a:lstStyle/>
           <a:p>
-            <a:pPr algn="ctr" indent="0" marL="0">
+            <a:pPr algn="r" indent="0" marL="0">
               <a:buNone/>
             </a:pPr>
             <a:r>
-              <a:rPr lang="en-US" sz="1000" b="1" dirty="0">
-                <a:solidFill>
-                  <a:srgbClr val="FFFFFF"/>
-                </a:solidFill>
-                <a:latin typeface="NVIDIA Sans" pitchFamily="34" charset="0"/>
-                <a:ea typeface="NVIDIA Sans" pitchFamily="34" charset="-122"/>
-                <a:cs typeface="NVIDIA Sans" pitchFamily="34" charset="-120"/>
-              </a:rPr>
-              <a:t>540</a:t>
-            </a:r>
-            <a:endParaRPr lang="en-US" sz="1000" dirty="0"/>
-          </a:p>
-        </p:txBody>
-      </p:sp>
-      <p:sp>
-        <p:nvSpPr>
-          <p:cNvPr id="9" name="Shape 7"/>
-          <p:cNvSpPr/>
-          <p:nvPr/>
-        </p:nvSpPr>
-        <p:spPr>
-          <a:xfrm>
-            <a:off x="5754172" y="3127248"/>
-            <a:ext cx="411123" cy="310896"/>
-          </a:xfrm>
-          <a:prstGeom prst="rect">
-            <a:avLst/>
-          </a:prstGeom>
-          <a:solidFill>
-            <a:srgbClr val="0071C5"/>
-          </a:solidFill>
-          <a:ln/>
-        </p:spPr>
-      </p:sp>
-      <p:sp>
-        <p:nvSpPr>
-          <p:cNvPr id="10" name="Shape 8"/>
-          <p:cNvSpPr/>
-          <p:nvPr/>
-        </p:nvSpPr>
-        <p:spPr>
-          <a:xfrm>
-            <a:off x="6165295" y="3127248"/>
-            <a:ext cx="1368852" cy="310896"/>
-          </a:xfrm>
-          <a:prstGeom prst="rect">
-            <a:avLst/>
-          </a:prstGeom>
-          <a:solidFill>
-            <a:srgbClr val="D9D9D9"/>
-          </a:solidFill>
-          <a:ln/>
-        </p:spPr>
-      </p:sp>
-      <p:sp>
-        <p:nvSpPr>
-          <p:cNvPr id="11" name="Text 9"/>
-          <p:cNvSpPr/>
-          <p:nvPr/>
-        </p:nvSpPr>
-        <p:spPr>
-          <a:xfrm>
-            <a:off x="6165295" y="3127248"/>
-            <a:ext cx="1368852" cy="310896"/>
-          </a:xfrm>
-          <a:prstGeom prst="rect">
-            <a:avLst/>
-          </a:prstGeom>
-          <a:noFill/>
-          <a:ln/>
-        </p:spPr>
-        <p:txBody>
-          <a:bodyPr wrap="square" lIns="0" tIns="0" rIns="0" bIns="0" rtlCol="0" anchor="ctr"/>
-          <a:lstStyle/>
-          <a:p>
-            <a:pPr algn="ctr" indent="0" marL="0">
-              <a:buNone/>
-            </a:pPr>
-            <a:r>
-              <a:rPr lang="en-US" sz="1000" b="1" dirty="0">
+              <a:rPr lang="en-US" sz="850" dirty="0">
                 <a:solidFill>
                   <a:srgbClr val="5E5E5E"/>
                 </a:solidFill>
@@ -6670,22 +6712,1061 @@
                 <a:ea typeface="NVIDIA Sans" pitchFamily="34" charset="-122"/>
                 <a:cs typeface="NVIDIA Sans" pitchFamily="34" charset="-120"/>
               </a:rPr>
-              <a:t>205</a:t>
+              <a:t>Compute</a:t>
             </a:r>
-            <a:endParaRPr lang="en-US" sz="1000" dirty="0"/>
+            <a:endParaRPr lang="en-US" sz="850" dirty="0"/>
           </a:p>
         </p:txBody>
       </p:sp>
       <p:sp>
         <p:nvSpPr>
-          <p:cNvPr id="12" name="Text 10"/>
-          <p:cNvSpPr/>
-          <p:nvPr/>
-        </p:nvSpPr>
-        <p:spPr>
-          <a:xfrm>
-            <a:off x="7589010" y="3127248"/>
-            <a:ext cx="822960" cy="310896"/>
+          <p:cNvPr id="14" name="Shape 12"/>
+          <p:cNvSpPr/>
+          <p:nvPr/>
+        </p:nvSpPr>
+        <p:spPr>
+          <a:xfrm>
+            <a:off x="1234440" y="2523744"/>
+            <a:ext cx="7360920" cy="201168"/>
+          </a:xfrm>
+          <a:prstGeom prst="rect">
+            <a:avLst/>
+          </a:prstGeom>
+          <a:solidFill>
+            <a:srgbClr val="F0F0F0"/>
+          </a:solidFill>
+          <a:ln/>
+        </p:spPr>
+      </p:sp>
+      <p:sp>
+        <p:nvSpPr>
+          <p:cNvPr id="15" name="Text 13"/>
+          <p:cNvSpPr/>
+          <p:nvPr/>
+        </p:nvSpPr>
+        <p:spPr>
+          <a:xfrm>
+            <a:off x="457200" y="2761488"/>
+            <a:ext cx="713232" cy="201168"/>
+          </a:xfrm>
+          <a:prstGeom prst="rect">
+            <a:avLst/>
+          </a:prstGeom>
+          <a:noFill/>
+          <a:ln/>
+        </p:spPr>
+        <p:txBody>
+          <a:bodyPr wrap="square" lIns="0" tIns="0" rIns="0" bIns="0" rtlCol="0" anchor="ctr"/>
+          <a:lstStyle/>
+          <a:p>
+            <a:pPr algn="r" indent="0" marL="0">
+              <a:buNone/>
+            </a:pPr>
+            <a:r>
+              <a:rPr lang="en-US" sz="850" dirty="0">
+                <a:solidFill>
+                  <a:srgbClr val="5E5E5E"/>
+                </a:solidFill>
+                <a:latin typeface="NVIDIA Sans" pitchFamily="34" charset="0"/>
+                <a:ea typeface="NVIDIA Sans" pitchFamily="34" charset="-122"/>
+                <a:cs typeface="NVIDIA Sans" pitchFamily="34" charset="-120"/>
+              </a:rPr>
+              <a:t>NCCL AR</a:t>
+            </a:r>
+            <a:endParaRPr lang="en-US" sz="850" dirty="0"/>
+          </a:p>
+        </p:txBody>
+      </p:sp>
+      <p:sp>
+        <p:nvSpPr>
+          <p:cNvPr id="16" name="Shape 14"/>
+          <p:cNvSpPr/>
+          <p:nvPr/>
+        </p:nvSpPr>
+        <p:spPr>
+          <a:xfrm>
+            <a:off x="1234440" y="2761488"/>
+            <a:ext cx="7360920" cy="201168"/>
+          </a:xfrm>
+          <a:prstGeom prst="rect">
+            <a:avLst/>
+          </a:prstGeom>
+          <a:solidFill>
+            <a:srgbClr val="F0F0F0"/>
+          </a:solidFill>
+          <a:ln/>
+        </p:spPr>
+      </p:sp>
+      <p:sp>
+        <p:nvSpPr>
+          <p:cNvPr id="17" name="Shape 15"/>
+          <p:cNvSpPr/>
+          <p:nvPr/>
+        </p:nvSpPr>
+        <p:spPr>
+          <a:xfrm>
+            <a:off x="1234873" y="2542032"/>
+            <a:ext cx="1204160" cy="164592"/>
+          </a:xfrm>
+          <a:prstGeom prst="rect">
+            <a:avLst/>
+          </a:prstGeom>
+          <a:solidFill>
+            <a:srgbClr val="76B900"/>
+          </a:solidFill>
+          <a:ln/>
+        </p:spPr>
+      </p:sp>
+      <p:sp>
+        <p:nvSpPr>
+          <p:cNvPr id="18" name="Shape 16"/>
+          <p:cNvSpPr/>
+          <p:nvPr/>
+        </p:nvSpPr>
+        <p:spPr>
+          <a:xfrm>
+            <a:off x="2665922" y="2542032"/>
+            <a:ext cx="20351" cy="164592"/>
+          </a:xfrm>
+          <a:prstGeom prst="rect">
+            <a:avLst/>
+          </a:prstGeom>
+          <a:solidFill>
+            <a:srgbClr val="76B900"/>
+          </a:solidFill>
+          <a:ln/>
+        </p:spPr>
+      </p:sp>
+      <p:sp>
+        <p:nvSpPr>
+          <p:cNvPr id="19" name="Shape 17"/>
+          <p:cNvSpPr/>
+          <p:nvPr/>
+        </p:nvSpPr>
+        <p:spPr>
+          <a:xfrm>
+            <a:off x="2879822" y="2542032"/>
+            <a:ext cx="19918" cy="164592"/>
+          </a:xfrm>
+          <a:prstGeom prst="rect">
+            <a:avLst/>
+          </a:prstGeom>
+          <a:solidFill>
+            <a:srgbClr val="76B900"/>
+          </a:solidFill>
+          <a:ln/>
+        </p:spPr>
+      </p:sp>
+      <p:sp>
+        <p:nvSpPr>
+          <p:cNvPr id="20" name="Shape 18"/>
+          <p:cNvSpPr/>
+          <p:nvPr/>
+        </p:nvSpPr>
+        <p:spPr>
+          <a:xfrm>
+            <a:off x="3089825" y="2542032"/>
+            <a:ext cx="19918" cy="164592"/>
+          </a:xfrm>
+          <a:prstGeom prst="rect">
+            <a:avLst/>
+          </a:prstGeom>
+          <a:solidFill>
+            <a:srgbClr val="76B900"/>
+          </a:solidFill>
+          <a:ln/>
+        </p:spPr>
+      </p:sp>
+      <p:sp>
+        <p:nvSpPr>
+          <p:cNvPr id="21" name="Shape 19"/>
+          <p:cNvSpPr/>
+          <p:nvPr/>
+        </p:nvSpPr>
+        <p:spPr>
+          <a:xfrm>
+            <a:off x="3300694" y="2542032"/>
+            <a:ext cx="19918" cy="164592"/>
+          </a:xfrm>
+          <a:prstGeom prst="rect">
+            <a:avLst/>
+          </a:prstGeom>
+          <a:solidFill>
+            <a:srgbClr val="76B900"/>
+          </a:solidFill>
+          <a:ln/>
+        </p:spPr>
+      </p:sp>
+      <p:sp>
+        <p:nvSpPr>
+          <p:cNvPr id="22" name="Shape 20"/>
+          <p:cNvSpPr/>
+          <p:nvPr/>
+        </p:nvSpPr>
+        <p:spPr>
+          <a:xfrm>
+            <a:off x="3363045" y="2542032"/>
+            <a:ext cx="11691" cy="164592"/>
+          </a:xfrm>
+          <a:prstGeom prst="rect">
+            <a:avLst/>
+          </a:prstGeom>
+          <a:solidFill>
+            <a:srgbClr val="76B900"/>
+          </a:solidFill>
+          <a:ln/>
+        </p:spPr>
+      </p:sp>
+      <p:sp>
+        <p:nvSpPr>
+          <p:cNvPr id="23" name="Shape 21"/>
+          <p:cNvSpPr/>
+          <p:nvPr/>
+        </p:nvSpPr>
+        <p:spPr>
+          <a:xfrm>
+            <a:off x="3503768" y="2542032"/>
+            <a:ext cx="763371" cy="164592"/>
+          </a:xfrm>
+          <a:prstGeom prst="rect">
+            <a:avLst/>
+          </a:prstGeom>
+          <a:solidFill>
+            <a:srgbClr val="76B900"/>
+          </a:solidFill>
+          <a:ln/>
+        </p:spPr>
+      </p:sp>
+      <p:sp>
+        <p:nvSpPr>
+          <p:cNvPr id="24" name="Shape 22"/>
+          <p:cNvSpPr/>
+          <p:nvPr/>
+        </p:nvSpPr>
+        <p:spPr>
+          <a:xfrm>
+            <a:off x="4338150" y="2542032"/>
+            <a:ext cx="692359" cy="164592"/>
+          </a:xfrm>
+          <a:prstGeom prst="rect">
+            <a:avLst/>
+          </a:prstGeom>
+          <a:solidFill>
+            <a:srgbClr val="76B900"/>
+          </a:solidFill>
+          <a:ln/>
+        </p:spPr>
+      </p:sp>
+      <p:sp>
+        <p:nvSpPr>
+          <p:cNvPr id="25" name="Shape 23"/>
+          <p:cNvSpPr/>
+          <p:nvPr/>
+        </p:nvSpPr>
+        <p:spPr>
+          <a:xfrm>
+            <a:off x="5212368" y="2542032"/>
+            <a:ext cx="19918" cy="164592"/>
+          </a:xfrm>
+          <a:prstGeom prst="rect">
+            <a:avLst/>
+          </a:prstGeom>
+          <a:solidFill>
+            <a:srgbClr val="76B900"/>
+          </a:solidFill>
+          <a:ln/>
+        </p:spPr>
+      </p:sp>
+      <p:sp>
+        <p:nvSpPr>
+          <p:cNvPr id="26" name="Shape 24"/>
+          <p:cNvSpPr/>
+          <p:nvPr/>
+        </p:nvSpPr>
+        <p:spPr>
+          <a:xfrm>
+            <a:off x="5259131" y="2542032"/>
+            <a:ext cx="705782" cy="164592"/>
+          </a:xfrm>
+          <a:prstGeom prst="rect">
+            <a:avLst/>
+          </a:prstGeom>
+          <a:solidFill>
+            <a:srgbClr val="76B900"/>
+          </a:solidFill>
+          <a:ln/>
+        </p:spPr>
+      </p:sp>
+      <p:sp>
+        <p:nvSpPr>
+          <p:cNvPr id="27" name="Shape 25"/>
+          <p:cNvSpPr/>
+          <p:nvPr/>
+        </p:nvSpPr>
+        <p:spPr>
+          <a:xfrm>
+            <a:off x="6158462" y="2542032"/>
+            <a:ext cx="19918" cy="164592"/>
+          </a:xfrm>
+          <a:prstGeom prst="rect">
+            <a:avLst/>
+          </a:prstGeom>
+          <a:solidFill>
+            <a:srgbClr val="76B900"/>
+          </a:solidFill>
+          <a:ln/>
+        </p:spPr>
+      </p:sp>
+      <p:sp>
+        <p:nvSpPr>
+          <p:cNvPr id="28" name="Shape 26"/>
+          <p:cNvSpPr/>
+          <p:nvPr/>
+        </p:nvSpPr>
+        <p:spPr>
+          <a:xfrm>
+            <a:off x="6196999" y="2542032"/>
+            <a:ext cx="708380" cy="164592"/>
+          </a:xfrm>
+          <a:prstGeom prst="rect">
+            <a:avLst/>
+          </a:prstGeom>
+          <a:solidFill>
+            <a:srgbClr val="76B900"/>
+          </a:solidFill>
+          <a:ln/>
+        </p:spPr>
+      </p:sp>
+      <p:sp>
+        <p:nvSpPr>
+          <p:cNvPr id="29" name="Shape 27"/>
+          <p:cNvSpPr/>
+          <p:nvPr/>
+        </p:nvSpPr>
+        <p:spPr>
+          <a:xfrm>
+            <a:off x="7116248" y="2542032"/>
+            <a:ext cx="19052" cy="164592"/>
+          </a:xfrm>
+          <a:prstGeom prst="rect">
+            <a:avLst/>
+          </a:prstGeom>
+          <a:solidFill>
+            <a:srgbClr val="76B900"/>
+          </a:solidFill>
+          <a:ln/>
+        </p:spPr>
+      </p:sp>
+      <p:sp>
+        <p:nvSpPr>
+          <p:cNvPr id="30" name="Shape 28"/>
+          <p:cNvSpPr/>
+          <p:nvPr/>
+        </p:nvSpPr>
+        <p:spPr>
+          <a:xfrm>
+            <a:off x="7150022" y="2542032"/>
+            <a:ext cx="655988" cy="164592"/>
+          </a:xfrm>
+          <a:prstGeom prst="rect">
+            <a:avLst/>
+          </a:prstGeom>
+          <a:solidFill>
+            <a:srgbClr val="76B900"/>
+          </a:solidFill>
+          <a:ln/>
+        </p:spPr>
+      </p:sp>
+      <p:sp>
+        <p:nvSpPr>
+          <p:cNvPr id="31" name="Shape 29"/>
+          <p:cNvSpPr/>
+          <p:nvPr/>
+        </p:nvSpPr>
+        <p:spPr>
+          <a:xfrm>
+            <a:off x="7867062" y="2542032"/>
+            <a:ext cx="123404" cy="164592"/>
+          </a:xfrm>
+          <a:prstGeom prst="rect">
+            <a:avLst/>
+          </a:prstGeom>
+          <a:solidFill>
+            <a:srgbClr val="76B900"/>
+          </a:solidFill>
+          <a:ln/>
+        </p:spPr>
+      </p:sp>
+      <p:sp>
+        <p:nvSpPr>
+          <p:cNvPr id="32" name="Shape 30"/>
+          <p:cNvSpPr/>
+          <p:nvPr/>
+        </p:nvSpPr>
+        <p:spPr>
+          <a:xfrm>
+            <a:off x="8054549" y="2542032"/>
+            <a:ext cx="19918" cy="164592"/>
+          </a:xfrm>
+          <a:prstGeom prst="rect">
+            <a:avLst/>
+          </a:prstGeom>
+          <a:solidFill>
+            <a:srgbClr val="76B900"/>
+          </a:solidFill>
+          <a:ln/>
+        </p:spPr>
+      </p:sp>
+      <p:sp>
+        <p:nvSpPr>
+          <p:cNvPr id="33" name="Shape 31"/>
+          <p:cNvSpPr/>
+          <p:nvPr/>
+        </p:nvSpPr>
+        <p:spPr>
+          <a:xfrm>
+            <a:off x="8340326" y="2542032"/>
+            <a:ext cx="25547" cy="164592"/>
+          </a:xfrm>
+          <a:prstGeom prst="rect">
+            <a:avLst/>
+          </a:prstGeom>
+          <a:solidFill>
+            <a:srgbClr val="76B900"/>
+          </a:solidFill>
+          <a:ln/>
+        </p:spPr>
+      </p:sp>
+      <p:sp>
+        <p:nvSpPr>
+          <p:cNvPr id="34" name="Shape 32"/>
+          <p:cNvSpPr/>
+          <p:nvPr/>
+        </p:nvSpPr>
+        <p:spPr>
+          <a:xfrm>
+            <a:off x="2439033" y="2519172"/>
+            <a:ext cx="226890" cy="41148"/>
+          </a:xfrm>
+          <a:prstGeom prst="rect">
+            <a:avLst/>
+          </a:prstGeom>
+          <a:solidFill>
+            <a:srgbClr val="890C58"/>
+          </a:solidFill>
+          <a:ln/>
+        </p:spPr>
+      </p:sp>
+      <p:sp>
+        <p:nvSpPr>
+          <p:cNvPr id="35" name="Shape 33"/>
+          <p:cNvSpPr/>
+          <p:nvPr/>
+        </p:nvSpPr>
+        <p:spPr>
+          <a:xfrm>
+            <a:off x="2686273" y="2519172"/>
+            <a:ext cx="193549" cy="41148"/>
+          </a:xfrm>
+          <a:prstGeom prst="rect">
+            <a:avLst/>
+          </a:prstGeom>
+          <a:solidFill>
+            <a:srgbClr val="890C58"/>
+          </a:solidFill>
+          <a:ln/>
+        </p:spPr>
+      </p:sp>
+      <p:sp>
+        <p:nvSpPr>
+          <p:cNvPr id="36" name="Shape 34"/>
+          <p:cNvSpPr/>
+          <p:nvPr/>
+        </p:nvSpPr>
+        <p:spPr>
+          <a:xfrm>
+            <a:off x="2899740" y="2519172"/>
+            <a:ext cx="190085" cy="41148"/>
+          </a:xfrm>
+          <a:prstGeom prst="rect">
+            <a:avLst/>
+          </a:prstGeom>
+          <a:solidFill>
+            <a:srgbClr val="890C58"/>
+          </a:solidFill>
+          <a:ln/>
+        </p:spPr>
+      </p:sp>
+      <p:sp>
+        <p:nvSpPr>
+          <p:cNvPr id="37" name="Shape 35"/>
+          <p:cNvSpPr/>
+          <p:nvPr/>
+        </p:nvSpPr>
+        <p:spPr>
+          <a:xfrm>
+            <a:off x="3109743" y="2519172"/>
+            <a:ext cx="190951" cy="41148"/>
+          </a:xfrm>
+          <a:prstGeom prst="rect">
+            <a:avLst/>
+          </a:prstGeom>
+          <a:solidFill>
+            <a:srgbClr val="890C58"/>
+          </a:solidFill>
+          <a:ln/>
+        </p:spPr>
+      </p:sp>
+      <p:sp>
+        <p:nvSpPr>
+          <p:cNvPr id="38" name="Shape 36"/>
+          <p:cNvSpPr/>
+          <p:nvPr/>
+        </p:nvSpPr>
+        <p:spPr>
+          <a:xfrm>
+            <a:off x="3320611" y="2519172"/>
+            <a:ext cx="42434" cy="41148"/>
+          </a:xfrm>
+          <a:prstGeom prst="rect">
+            <a:avLst/>
+          </a:prstGeom>
+          <a:solidFill>
+            <a:srgbClr val="890C58"/>
+          </a:solidFill>
+          <a:ln/>
+        </p:spPr>
+      </p:sp>
+      <p:sp>
+        <p:nvSpPr>
+          <p:cNvPr id="39" name="Shape 37"/>
+          <p:cNvSpPr/>
+          <p:nvPr/>
+        </p:nvSpPr>
+        <p:spPr>
+          <a:xfrm>
+            <a:off x="3374736" y="2519172"/>
+            <a:ext cx="129033" cy="41148"/>
+          </a:xfrm>
+          <a:prstGeom prst="rect">
+            <a:avLst/>
+          </a:prstGeom>
+          <a:solidFill>
+            <a:srgbClr val="890C58"/>
+          </a:solidFill>
+          <a:ln/>
+        </p:spPr>
+      </p:sp>
+      <p:sp>
+        <p:nvSpPr>
+          <p:cNvPr id="40" name="Shape 38"/>
+          <p:cNvSpPr/>
+          <p:nvPr/>
+        </p:nvSpPr>
+        <p:spPr>
+          <a:xfrm>
+            <a:off x="4267139" y="2519172"/>
+            <a:ext cx="71011" cy="41148"/>
+          </a:xfrm>
+          <a:prstGeom prst="rect">
+            <a:avLst/>
+          </a:prstGeom>
+          <a:solidFill>
+            <a:srgbClr val="890C58"/>
+          </a:solidFill>
+          <a:ln/>
+        </p:spPr>
+      </p:sp>
+      <p:sp>
+        <p:nvSpPr>
+          <p:cNvPr id="41" name="Shape 39"/>
+          <p:cNvSpPr/>
+          <p:nvPr/>
+        </p:nvSpPr>
+        <p:spPr>
+          <a:xfrm>
+            <a:off x="5030510" y="2519172"/>
+            <a:ext cx="181858" cy="41148"/>
+          </a:xfrm>
+          <a:prstGeom prst="rect">
+            <a:avLst/>
+          </a:prstGeom>
+          <a:solidFill>
+            <a:srgbClr val="890C58"/>
+          </a:solidFill>
+          <a:ln/>
+        </p:spPr>
+      </p:sp>
+      <p:sp>
+        <p:nvSpPr>
+          <p:cNvPr id="42" name="Shape 40"/>
+          <p:cNvSpPr/>
+          <p:nvPr/>
+        </p:nvSpPr>
+        <p:spPr>
+          <a:xfrm>
+            <a:off x="5232286" y="2519172"/>
+            <a:ext cx="26846" cy="41148"/>
+          </a:xfrm>
+          <a:prstGeom prst="rect">
+            <a:avLst/>
+          </a:prstGeom>
+          <a:solidFill>
+            <a:srgbClr val="890C58"/>
+          </a:solidFill>
+          <a:ln/>
+        </p:spPr>
+      </p:sp>
+      <p:sp>
+        <p:nvSpPr>
+          <p:cNvPr id="43" name="Shape 41"/>
+          <p:cNvSpPr/>
+          <p:nvPr/>
+        </p:nvSpPr>
+        <p:spPr>
+          <a:xfrm>
+            <a:off x="5964914" y="2519172"/>
+            <a:ext cx="193549" cy="41148"/>
+          </a:xfrm>
+          <a:prstGeom prst="rect">
+            <a:avLst/>
+          </a:prstGeom>
+          <a:solidFill>
+            <a:srgbClr val="890C58"/>
+          </a:solidFill>
+          <a:ln/>
+        </p:spPr>
+      </p:sp>
+      <p:sp>
+        <p:nvSpPr>
+          <p:cNvPr id="44" name="Shape 42"/>
+          <p:cNvSpPr/>
+          <p:nvPr/>
+        </p:nvSpPr>
+        <p:spPr>
+          <a:xfrm>
+            <a:off x="6905379" y="2519172"/>
+            <a:ext cx="210869" cy="41148"/>
+          </a:xfrm>
+          <a:prstGeom prst="rect">
+            <a:avLst/>
+          </a:prstGeom>
+          <a:solidFill>
+            <a:srgbClr val="890C58"/>
+          </a:solidFill>
+          <a:ln/>
+        </p:spPr>
+      </p:sp>
+      <p:sp>
+        <p:nvSpPr>
+          <p:cNvPr id="45" name="Shape 43"/>
+          <p:cNvSpPr/>
+          <p:nvPr/>
+        </p:nvSpPr>
+        <p:spPr>
+          <a:xfrm>
+            <a:off x="7806010" y="2519172"/>
+            <a:ext cx="61052" cy="41148"/>
+          </a:xfrm>
+          <a:prstGeom prst="rect">
+            <a:avLst/>
+          </a:prstGeom>
+          <a:solidFill>
+            <a:srgbClr val="890C58"/>
+          </a:solidFill>
+          <a:ln/>
+        </p:spPr>
+      </p:sp>
+      <p:sp>
+        <p:nvSpPr>
+          <p:cNvPr id="46" name="Shape 44"/>
+          <p:cNvSpPr/>
+          <p:nvPr/>
+        </p:nvSpPr>
+        <p:spPr>
+          <a:xfrm>
+            <a:off x="7990466" y="2519172"/>
+            <a:ext cx="64083" cy="41148"/>
+          </a:xfrm>
+          <a:prstGeom prst="rect">
+            <a:avLst/>
+          </a:prstGeom>
+          <a:solidFill>
+            <a:srgbClr val="890C58"/>
+          </a:solidFill>
+          <a:ln/>
+        </p:spPr>
+      </p:sp>
+      <p:sp>
+        <p:nvSpPr>
+          <p:cNvPr id="47" name="Shape 45"/>
+          <p:cNvSpPr/>
+          <p:nvPr/>
+        </p:nvSpPr>
+        <p:spPr>
+          <a:xfrm>
+            <a:off x="8074467" y="2519172"/>
+            <a:ext cx="56289" cy="41148"/>
+          </a:xfrm>
+          <a:prstGeom prst="rect">
+            <a:avLst/>
+          </a:prstGeom>
+          <a:solidFill>
+            <a:srgbClr val="890C58"/>
+          </a:solidFill>
+          <a:ln/>
+        </p:spPr>
+      </p:sp>
+      <p:sp>
+        <p:nvSpPr>
+          <p:cNvPr id="48" name="Shape 46"/>
+          <p:cNvSpPr/>
+          <p:nvPr/>
+        </p:nvSpPr>
+        <p:spPr>
+          <a:xfrm>
+            <a:off x="8131622" y="2519172"/>
+            <a:ext cx="208704" cy="41148"/>
+          </a:xfrm>
+          <a:prstGeom prst="rect">
+            <a:avLst/>
+          </a:prstGeom>
+          <a:solidFill>
+            <a:srgbClr val="890C58"/>
+          </a:solidFill>
+          <a:ln/>
+        </p:spPr>
+      </p:sp>
+      <p:sp>
+        <p:nvSpPr>
+          <p:cNvPr id="49" name="Shape 47"/>
+          <p:cNvSpPr/>
+          <p:nvPr/>
+        </p:nvSpPr>
+        <p:spPr>
+          <a:xfrm>
+            <a:off x="2492291" y="2779776"/>
+            <a:ext cx="173631" cy="164592"/>
+          </a:xfrm>
+          <a:prstGeom prst="rect">
+            <a:avLst/>
+          </a:prstGeom>
+          <a:solidFill>
+            <a:srgbClr val="0071C5"/>
+          </a:solidFill>
+          <a:ln/>
+        </p:spPr>
+      </p:sp>
+      <p:sp>
+        <p:nvSpPr>
+          <p:cNvPr id="50" name="Shape 48"/>
+          <p:cNvSpPr/>
+          <p:nvPr/>
+        </p:nvSpPr>
+        <p:spPr>
+          <a:xfrm>
+            <a:off x="2688438" y="2779776"/>
+            <a:ext cx="191384" cy="164592"/>
+          </a:xfrm>
+          <a:prstGeom prst="rect">
+            <a:avLst/>
+          </a:prstGeom>
+          <a:solidFill>
+            <a:srgbClr val="0071C5"/>
+          </a:solidFill>
+          <a:ln/>
+        </p:spPr>
+      </p:sp>
+      <p:sp>
+        <p:nvSpPr>
+          <p:cNvPr id="51" name="Shape 49"/>
+          <p:cNvSpPr/>
+          <p:nvPr/>
+        </p:nvSpPr>
+        <p:spPr>
+          <a:xfrm>
+            <a:off x="2901039" y="2779776"/>
+            <a:ext cx="188786" cy="164592"/>
+          </a:xfrm>
+          <a:prstGeom prst="rect">
+            <a:avLst/>
+          </a:prstGeom>
+          <a:solidFill>
+            <a:srgbClr val="0071C5"/>
+          </a:solidFill>
+          <a:ln/>
+        </p:spPr>
+      </p:sp>
+      <p:sp>
+        <p:nvSpPr>
+          <p:cNvPr id="52" name="Shape 50"/>
+          <p:cNvSpPr/>
+          <p:nvPr/>
+        </p:nvSpPr>
+        <p:spPr>
+          <a:xfrm>
+            <a:off x="3112341" y="2779776"/>
+            <a:ext cx="188353" cy="164592"/>
+          </a:xfrm>
+          <a:prstGeom prst="rect">
+            <a:avLst/>
+          </a:prstGeom>
+          <a:solidFill>
+            <a:srgbClr val="0071C5"/>
+          </a:solidFill>
+          <a:ln/>
+        </p:spPr>
+      </p:sp>
+      <p:sp>
+        <p:nvSpPr>
+          <p:cNvPr id="53" name="Shape 51"/>
+          <p:cNvSpPr/>
+          <p:nvPr/>
+        </p:nvSpPr>
+        <p:spPr>
+          <a:xfrm>
+            <a:off x="3321044" y="2779776"/>
+            <a:ext cx="182724" cy="164592"/>
+          </a:xfrm>
+          <a:prstGeom prst="rect">
+            <a:avLst/>
+          </a:prstGeom>
+          <a:solidFill>
+            <a:srgbClr val="0071C5"/>
+          </a:solidFill>
+          <a:ln/>
+        </p:spPr>
+      </p:sp>
+      <p:sp>
+        <p:nvSpPr>
+          <p:cNvPr id="54" name="Shape 52"/>
+          <p:cNvSpPr/>
+          <p:nvPr/>
+        </p:nvSpPr>
+        <p:spPr>
+          <a:xfrm>
+            <a:off x="3525418" y="2779776"/>
+            <a:ext cx="199178" cy="164592"/>
+          </a:xfrm>
+          <a:prstGeom prst="rect">
+            <a:avLst/>
+          </a:prstGeom>
+          <a:solidFill>
+            <a:srgbClr val="0071C5"/>
+          </a:solidFill>
+          <a:ln/>
+        </p:spPr>
+      </p:sp>
+      <p:sp>
+        <p:nvSpPr>
+          <p:cNvPr id="55" name="Shape 53"/>
+          <p:cNvSpPr/>
+          <p:nvPr/>
+        </p:nvSpPr>
+        <p:spPr>
+          <a:xfrm>
+            <a:off x="4296583" y="2779776"/>
+            <a:ext cx="198745" cy="164592"/>
+          </a:xfrm>
+          <a:prstGeom prst="rect">
+            <a:avLst/>
+          </a:prstGeom>
+          <a:solidFill>
+            <a:srgbClr val="0071C5"/>
+          </a:solidFill>
+          <a:ln/>
+        </p:spPr>
+      </p:sp>
+      <p:sp>
+        <p:nvSpPr>
+          <p:cNvPr id="56" name="Shape 54"/>
+          <p:cNvSpPr/>
+          <p:nvPr/>
+        </p:nvSpPr>
+        <p:spPr>
+          <a:xfrm>
+            <a:off x="5035273" y="2779776"/>
+            <a:ext cx="177095" cy="164592"/>
+          </a:xfrm>
+          <a:prstGeom prst="rect">
+            <a:avLst/>
+          </a:prstGeom>
+          <a:solidFill>
+            <a:srgbClr val="0071C5"/>
+          </a:solidFill>
+          <a:ln/>
+        </p:spPr>
+      </p:sp>
+      <p:sp>
+        <p:nvSpPr>
+          <p:cNvPr id="57" name="Shape 55"/>
+          <p:cNvSpPr/>
+          <p:nvPr/>
+        </p:nvSpPr>
+        <p:spPr>
+          <a:xfrm>
+            <a:off x="5233152" y="2779776"/>
+            <a:ext cx="210003" cy="164592"/>
+          </a:xfrm>
+          <a:prstGeom prst="rect">
+            <a:avLst/>
+          </a:prstGeom>
+          <a:solidFill>
+            <a:srgbClr val="0071C5"/>
+          </a:solidFill>
+          <a:ln/>
+        </p:spPr>
+      </p:sp>
+      <p:sp>
+        <p:nvSpPr>
+          <p:cNvPr id="58" name="Shape 56"/>
+          <p:cNvSpPr/>
+          <p:nvPr/>
+        </p:nvSpPr>
+        <p:spPr>
+          <a:xfrm>
+            <a:off x="5973573" y="2779776"/>
+            <a:ext cx="184889" cy="164592"/>
+          </a:xfrm>
+          <a:prstGeom prst="rect">
+            <a:avLst/>
+          </a:prstGeom>
+          <a:solidFill>
+            <a:srgbClr val="0071C5"/>
+          </a:solidFill>
+          <a:ln/>
+        </p:spPr>
+      </p:sp>
+      <p:sp>
+        <p:nvSpPr>
+          <p:cNvPr id="59" name="Shape 57"/>
+          <p:cNvSpPr/>
+          <p:nvPr/>
+        </p:nvSpPr>
+        <p:spPr>
+          <a:xfrm>
+            <a:off x="6179679" y="2779776"/>
+            <a:ext cx="206106" cy="164592"/>
+          </a:xfrm>
+          <a:prstGeom prst="rect">
+            <a:avLst/>
+          </a:prstGeom>
+          <a:solidFill>
+            <a:srgbClr val="0071C5"/>
+          </a:solidFill>
+          <a:ln/>
+        </p:spPr>
+      </p:sp>
+      <p:sp>
+        <p:nvSpPr>
+          <p:cNvPr id="60" name="Shape 58"/>
+          <p:cNvSpPr/>
+          <p:nvPr/>
+        </p:nvSpPr>
+        <p:spPr>
+          <a:xfrm>
+            <a:off x="6918802" y="2779776"/>
+            <a:ext cx="197013" cy="164592"/>
+          </a:xfrm>
+          <a:prstGeom prst="rect">
+            <a:avLst/>
+          </a:prstGeom>
+          <a:solidFill>
+            <a:srgbClr val="0071C5"/>
+          </a:solidFill>
+          <a:ln/>
+        </p:spPr>
+      </p:sp>
+      <p:sp>
+        <p:nvSpPr>
+          <p:cNvPr id="61" name="Shape 59"/>
+          <p:cNvSpPr/>
+          <p:nvPr/>
+        </p:nvSpPr>
+        <p:spPr>
+          <a:xfrm>
+            <a:off x="7136599" y="2779776"/>
+            <a:ext cx="208704" cy="164592"/>
+          </a:xfrm>
+          <a:prstGeom prst="rect">
+            <a:avLst/>
+          </a:prstGeom>
+          <a:solidFill>
+            <a:srgbClr val="0071C5"/>
+          </a:solidFill>
+          <a:ln/>
+        </p:spPr>
+      </p:sp>
+      <p:sp>
+        <p:nvSpPr>
+          <p:cNvPr id="62" name="Shape 60"/>
+          <p:cNvSpPr/>
+          <p:nvPr/>
+        </p:nvSpPr>
+        <p:spPr>
+          <a:xfrm>
+            <a:off x="7862732" y="2779776"/>
+            <a:ext cx="191817" cy="164592"/>
+          </a:xfrm>
+          <a:prstGeom prst="rect">
+            <a:avLst/>
+          </a:prstGeom>
+          <a:solidFill>
+            <a:srgbClr val="0071C5"/>
+          </a:solidFill>
+          <a:ln/>
+        </p:spPr>
+      </p:sp>
+      <p:sp>
+        <p:nvSpPr>
+          <p:cNvPr id="63" name="Shape 61"/>
+          <p:cNvSpPr/>
+          <p:nvPr/>
+        </p:nvSpPr>
+        <p:spPr>
+          <a:xfrm>
+            <a:off x="8118199" y="2779776"/>
+            <a:ext cx="12124" cy="164592"/>
+          </a:xfrm>
+          <a:prstGeom prst="rect">
+            <a:avLst/>
+          </a:prstGeom>
+          <a:solidFill>
+            <a:srgbClr val="0071C5"/>
+          </a:solidFill>
+          <a:ln/>
+        </p:spPr>
+      </p:sp>
+      <p:sp>
+        <p:nvSpPr>
+          <p:cNvPr id="64" name="Shape 62"/>
+          <p:cNvSpPr/>
+          <p:nvPr/>
+        </p:nvSpPr>
+        <p:spPr>
+          <a:xfrm>
+            <a:off x="8135519" y="2779776"/>
+            <a:ext cx="204807" cy="164592"/>
+          </a:xfrm>
+          <a:prstGeom prst="rect">
+            <a:avLst/>
+          </a:prstGeom>
+          <a:solidFill>
+            <a:srgbClr val="0071C5"/>
+          </a:solidFill>
+          <a:ln/>
+        </p:spPr>
+      </p:sp>
+      <p:sp>
+        <p:nvSpPr>
+          <p:cNvPr id="65" name="Text 63"/>
+          <p:cNvSpPr/>
+          <p:nvPr/>
+        </p:nvSpPr>
+        <p:spPr>
+          <a:xfrm>
+            <a:off x="457200" y="3127248"/>
+            <a:ext cx="8229600" cy="182880"/>
           </a:xfrm>
           <a:prstGeom prst="rect">
             <a:avLst/>
@@ -6701,7 +7782,7 @@
               <a:buNone/>
             </a:pPr>
             <a:r>
-              <a:rPr lang="en-US" sz="1100" b="1" dirty="0">
+              <a:rPr lang="en-US" sz="1050" b="1" dirty="0">
                 <a:solidFill>
                   <a:srgbClr val="000000"/>
                 </a:solidFill>
@@ -6709,22 +7790,620 @@
                 <a:ea typeface="NVIDIA Sans" pitchFamily="34" charset="-122"/>
                 <a:cs typeface="NVIDIA Sans" pitchFamily="34" charset="-120"/>
               </a:rPr>
-              <a:t>807 ms</a:t>
+              <a:t>bucket 1.5e9 — backward 154 ms · 8 AllReduces · 8 stalls, 27 ms</a:t>
             </a:r>
-            <a:endParaRPr lang="en-US" sz="1100" dirty="0"/>
+            <a:endParaRPr lang="en-US" sz="1050" dirty="0"/>
           </a:p>
         </p:txBody>
       </p:sp>
       <p:sp>
         <p:nvSpPr>
-          <p:cNvPr id="13" name="Text 11"/>
-          <p:cNvSpPr/>
-          <p:nvPr/>
-        </p:nvSpPr>
-        <p:spPr>
-          <a:xfrm>
-            <a:off x="640080" y="3566160"/>
-            <a:ext cx="1463040" cy="310896"/>
+          <p:cNvPr id="66" name="Text 64"/>
+          <p:cNvSpPr/>
+          <p:nvPr/>
+        </p:nvSpPr>
+        <p:spPr>
+          <a:xfrm>
+            <a:off x="457200" y="3346704"/>
+            <a:ext cx="713232" cy="201168"/>
+          </a:xfrm>
+          <a:prstGeom prst="rect">
+            <a:avLst/>
+          </a:prstGeom>
+          <a:noFill/>
+          <a:ln/>
+        </p:spPr>
+        <p:txBody>
+          <a:bodyPr wrap="square" lIns="0" tIns="0" rIns="0" bIns="0" rtlCol="0" anchor="ctr"/>
+          <a:lstStyle/>
+          <a:p>
+            <a:pPr algn="r" indent="0" marL="0">
+              <a:buNone/>
+            </a:pPr>
+            <a:r>
+              <a:rPr lang="en-US" sz="850" dirty="0">
+                <a:solidFill>
+                  <a:srgbClr val="5E5E5E"/>
+                </a:solidFill>
+                <a:latin typeface="NVIDIA Sans" pitchFamily="34" charset="0"/>
+                <a:ea typeface="NVIDIA Sans" pitchFamily="34" charset="-122"/>
+                <a:cs typeface="NVIDIA Sans" pitchFamily="34" charset="-120"/>
+              </a:rPr>
+              <a:t>Compute</a:t>
+            </a:r>
+            <a:endParaRPr lang="en-US" sz="850" dirty="0"/>
+          </a:p>
+        </p:txBody>
+      </p:sp>
+      <p:sp>
+        <p:nvSpPr>
+          <p:cNvPr id="67" name="Shape 65"/>
+          <p:cNvSpPr/>
+          <p:nvPr/>
+        </p:nvSpPr>
+        <p:spPr>
+          <a:xfrm>
+            <a:off x="1234440" y="3346704"/>
+            <a:ext cx="7360920" cy="201168"/>
+          </a:xfrm>
+          <a:prstGeom prst="rect">
+            <a:avLst/>
+          </a:prstGeom>
+          <a:solidFill>
+            <a:srgbClr val="F0F0F0"/>
+          </a:solidFill>
+          <a:ln/>
+        </p:spPr>
+      </p:sp>
+      <p:sp>
+        <p:nvSpPr>
+          <p:cNvPr id="68" name="Text 66"/>
+          <p:cNvSpPr/>
+          <p:nvPr/>
+        </p:nvSpPr>
+        <p:spPr>
+          <a:xfrm>
+            <a:off x="457200" y="3584448"/>
+            <a:ext cx="713232" cy="201168"/>
+          </a:xfrm>
+          <a:prstGeom prst="rect">
+            <a:avLst/>
+          </a:prstGeom>
+          <a:noFill/>
+          <a:ln/>
+        </p:spPr>
+        <p:txBody>
+          <a:bodyPr wrap="square" lIns="0" tIns="0" rIns="0" bIns="0" rtlCol="0" anchor="ctr"/>
+          <a:lstStyle/>
+          <a:p>
+            <a:pPr algn="r" indent="0" marL="0">
+              <a:buNone/>
+            </a:pPr>
+            <a:r>
+              <a:rPr lang="en-US" sz="850" dirty="0">
+                <a:solidFill>
+                  <a:srgbClr val="5E5E5E"/>
+                </a:solidFill>
+                <a:latin typeface="NVIDIA Sans" pitchFamily="34" charset="0"/>
+                <a:ea typeface="NVIDIA Sans" pitchFamily="34" charset="-122"/>
+                <a:cs typeface="NVIDIA Sans" pitchFamily="34" charset="-120"/>
+              </a:rPr>
+              <a:t>NCCL AR</a:t>
+            </a:r>
+            <a:endParaRPr lang="en-US" sz="850" dirty="0"/>
+          </a:p>
+        </p:txBody>
+      </p:sp>
+      <p:sp>
+        <p:nvSpPr>
+          <p:cNvPr id="69" name="Shape 67"/>
+          <p:cNvSpPr/>
+          <p:nvPr/>
+        </p:nvSpPr>
+        <p:spPr>
+          <a:xfrm>
+            <a:off x="1234440" y="3584448"/>
+            <a:ext cx="7360920" cy="201168"/>
+          </a:xfrm>
+          <a:prstGeom prst="rect">
+            <a:avLst/>
+          </a:prstGeom>
+          <a:solidFill>
+            <a:srgbClr val="F0F0F0"/>
+          </a:solidFill>
+          <a:ln/>
+        </p:spPr>
+      </p:sp>
+      <p:sp>
+        <p:nvSpPr>
+          <p:cNvPr id="70" name="Shape 68"/>
+          <p:cNvSpPr/>
+          <p:nvPr/>
+        </p:nvSpPr>
+        <p:spPr>
+          <a:xfrm>
+            <a:off x="1234873" y="3364992"/>
+            <a:ext cx="1191170" cy="164592"/>
+          </a:xfrm>
+          <a:prstGeom prst="rect">
+            <a:avLst/>
+          </a:prstGeom>
+          <a:solidFill>
+            <a:srgbClr val="76B900"/>
+          </a:solidFill>
+          <a:ln/>
+        </p:spPr>
+      </p:sp>
+      <p:sp>
+        <p:nvSpPr>
+          <p:cNvPr id="71" name="Shape 69"/>
+          <p:cNvSpPr/>
+          <p:nvPr/>
+        </p:nvSpPr>
+        <p:spPr>
+          <a:xfrm>
+            <a:off x="2714851" y="3364992"/>
+            <a:ext cx="888073" cy="164592"/>
+          </a:xfrm>
+          <a:prstGeom prst="rect">
+            <a:avLst/>
+          </a:prstGeom>
+          <a:solidFill>
+            <a:srgbClr val="76B900"/>
+          </a:solidFill>
+          <a:ln/>
+        </p:spPr>
+      </p:sp>
+      <p:sp>
+        <p:nvSpPr>
+          <p:cNvPr id="72" name="Shape 70"/>
+          <p:cNvSpPr/>
+          <p:nvPr/>
+        </p:nvSpPr>
+        <p:spPr>
+          <a:xfrm>
+            <a:off x="3681729" y="3364992"/>
+            <a:ext cx="866857" cy="164592"/>
+          </a:xfrm>
+          <a:prstGeom prst="rect">
+            <a:avLst/>
+          </a:prstGeom>
+          <a:solidFill>
+            <a:srgbClr val="76B900"/>
+          </a:solidFill>
+          <a:ln/>
+        </p:spPr>
+      </p:sp>
+      <p:sp>
+        <p:nvSpPr>
+          <p:cNvPr id="73" name="Shape 71"/>
+          <p:cNvSpPr/>
+          <p:nvPr/>
+        </p:nvSpPr>
+        <p:spPr>
+          <a:xfrm>
+            <a:off x="4610071" y="3364992"/>
+            <a:ext cx="871620" cy="164592"/>
+          </a:xfrm>
+          <a:prstGeom prst="rect">
+            <a:avLst/>
+          </a:prstGeom>
+          <a:solidFill>
+            <a:srgbClr val="76B900"/>
+          </a:solidFill>
+          <a:ln/>
+        </p:spPr>
+      </p:sp>
+      <p:sp>
+        <p:nvSpPr>
+          <p:cNvPr id="74" name="Shape 72"/>
+          <p:cNvSpPr/>
+          <p:nvPr/>
+        </p:nvSpPr>
+        <p:spPr>
+          <a:xfrm>
+            <a:off x="5535815" y="3364992"/>
+            <a:ext cx="615286" cy="164592"/>
+          </a:xfrm>
+          <a:prstGeom prst="rect">
+            <a:avLst/>
+          </a:prstGeom>
+          <a:solidFill>
+            <a:srgbClr val="76B900"/>
+          </a:solidFill>
+          <a:ln/>
+        </p:spPr>
+      </p:sp>
+      <p:sp>
+        <p:nvSpPr>
+          <p:cNvPr id="75" name="Shape 73"/>
+          <p:cNvSpPr/>
+          <p:nvPr/>
+        </p:nvSpPr>
+        <p:spPr>
+          <a:xfrm>
+            <a:off x="6222979" y="3364992"/>
+            <a:ext cx="824423" cy="164592"/>
+          </a:xfrm>
+          <a:prstGeom prst="rect">
+            <a:avLst/>
+          </a:prstGeom>
+          <a:solidFill>
+            <a:srgbClr val="76B900"/>
+          </a:solidFill>
+          <a:ln/>
+        </p:spPr>
+      </p:sp>
+      <p:sp>
+        <p:nvSpPr>
+          <p:cNvPr id="76" name="Shape 74"/>
+          <p:cNvSpPr/>
+          <p:nvPr/>
+        </p:nvSpPr>
+        <p:spPr>
+          <a:xfrm>
+            <a:off x="7103691" y="3364992"/>
+            <a:ext cx="87898" cy="164592"/>
+          </a:xfrm>
+          <a:prstGeom prst="rect">
+            <a:avLst/>
+          </a:prstGeom>
+          <a:solidFill>
+            <a:srgbClr val="76B900"/>
+          </a:solidFill>
+          <a:ln/>
+        </p:spPr>
+      </p:sp>
+      <p:sp>
+        <p:nvSpPr>
+          <p:cNvPr id="77" name="Shape 75"/>
+          <p:cNvSpPr/>
+          <p:nvPr/>
+        </p:nvSpPr>
+        <p:spPr>
+          <a:xfrm>
+            <a:off x="7509841" y="3364992"/>
+            <a:ext cx="37671" cy="164592"/>
+          </a:xfrm>
+          <a:prstGeom prst="rect">
+            <a:avLst/>
+          </a:prstGeom>
+          <a:solidFill>
+            <a:srgbClr val="76B900"/>
+          </a:solidFill>
+          <a:ln/>
+        </p:spPr>
+      </p:sp>
+      <p:sp>
+        <p:nvSpPr>
+          <p:cNvPr id="78" name="Shape 76"/>
+          <p:cNvSpPr/>
+          <p:nvPr/>
+        </p:nvSpPr>
+        <p:spPr>
+          <a:xfrm>
+            <a:off x="7798216" y="3364992"/>
+            <a:ext cx="25547" cy="164592"/>
+          </a:xfrm>
+          <a:prstGeom prst="rect">
+            <a:avLst/>
+          </a:prstGeom>
+          <a:solidFill>
+            <a:srgbClr val="76B900"/>
+          </a:solidFill>
+          <a:ln/>
+        </p:spPr>
+      </p:sp>
+      <p:sp>
+        <p:nvSpPr>
+          <p:cNvPr id="79" name="Shape 77"/>
+          <p:cNvSpPr/>
+          <p:nvPr/>
+        </p:nvSpPr>
+        <p:spPr>
+          <a:xfrm>
+            <a:off x="2426043" y="3342132"/>
+            <a:ext cx="288808" cy="41148"/>
+          </a:xfrm>
+          <a:prstGeom prst="rect">
+            <a:avLst/>
+          </a:prstGeom>
+          <a:solidFill>
+            <a:srgbClr val="890C58"/>
+          </a:solidFill>
+          <a:ln/>
+        </p:spPr>
+      </p:sp>
+      <p:sp>
+        <p:nvSpPr>
+          <p:cNvPr id="80" name="Shape 78"/>
+          <p:cNvSpPr/>
+          <p:nvPr/>
+        </p:nvSpPr>
+        <p:spPr>
+          <a:xfrm>
+            <a:off x="3602924" y="3342132"/>
+            <a:ext cx="78805" cy="41148"/>
+          </a:xfrm>
+          <a:prstGeom prst="rect">
+            <a:avLst/>
+          </a:prstGeom>
+          <a:solidFill>
+            <a:srgbClr val="890C58"/>
+          </a:solidFill>
+          <a:ln/>
+        </p:spPr>
+      </p:sp>
+      <p:sp>
+        <p:nvSpPr>
+          <p:cNvPr id="81" name="Shape 79"/>
+          <p:cNvSpPr/>
+          <p:nvPr/>
+        </p:nvSpPr>
+        <p:spPr>
+          <a:xfrm>
+            <a:off x="4548586" y="3342132"/>
+            <a:ext cx="61485" cy="41148"/>
+          </a:xfrm>
+          <a:prstGeom prst="rect">
+            <a:avLst/>
+          </a:prstGeom>
+          <a:solidFill>
+            <a:srgbClr val="890C58"/>
+          </a:solidFill>
+          <a:ln/>
+        </p:spPr>
+      </p:sp>
+      <p:sp>
+        <p:nvSpPr>
+          <p:cNvPr id="82" name="Shape 80"/>
+          <p:cNvSpPr/>
+          <p:nvPr/>
+        </p:nvSpPr>
+        <p:spPr>
+          <a:xfrm>
+            <a:off x="5481691" y="3342132"/>
+            <a:ext cx="54124" cy="41148"/>
+          </a:xfrm>
+          <a:prstGeom prst="rect">
+            <a:avLst/>
+          </a:prstGeom>
+          <a:solidFill>
+            <a:srgbClr val="890C58"/>
+          </a:solidFill>
+          <a:ln/>
+        </p:spPr>
+      </p:sp>
+      <p:sp>
+        <p:nvSpPr>
+          <p:cNvPr id="83" name="Shape 81"/>
+          <p:cNvSpPr/>
+          <p:nvPr/>
+        </p:nvSpPr>
+        <p:spPr>
+          <a:xfrm>
+            <a:off x="6151102" y="3342132"/>
+            <a:ext cx="71877" cy="41148"/>
+          </a:xfrm>
+          <a:prstGeom prst="rect">
+            <a:avLst/>
+          </a:prstGeom>
+          <a:solidFill>
+            <a:srgbClr val="890C58"/>
+          </a:solidFill>
+          <a:ln/>
+        </p:spPr>
+      </p:sp>
+      <p:sp>
+        <p:nvSpPr>
+          <p:cNvPr id="84" name="Shape 82"/>
+          <p:cNvSpPr/>
+          <p:nvPr/>
+        </p:nvSpPr>
+        <p:spPr>
+          <a:xfrm>
+            <a:off x="7047402" y="3342132"/>
+            <a:ext cx="56289" cy="41148"/>
+          </a:xfrm>
+          <a:prstGeom prst="rect">
+            <a:avLst/>
+          </a:prstGeom>
+          <a:solidFill>
+            <a:srgbClr val="890C58"/>
+          </a:solidFill>
+          <a:ln/>
+        </p:spPr>
+      </p:sp>
+      <p:sp>
+        <p:nvSpPr>
+          <p:cNvPr id="85" name="Shape 83"/>
+          <p:cNvSpPr/>
+          <p:nvPr/>
+        </p:nvSpPr>
+        <p:spPr>
+          <a:xfrm>
+            <a:off x="7191589" y="3342132"/>
+            <a:ext cx="318252" cy="41148"/>
+          </a:xfrm>
+          <a:prstGeom prst="rect">
+            <a:avLst/>
+          </a:prstGeom>
+          <a:solidFill>
+            <a:srgbClr val="890C58"/>
+          </a:solidFill>
+          <a:ln/>
+        </p:spPr>
+      </p:sp>
+      <p:sp>
+        <p:nvSpPr>
+          <p:cNvPr id="86" name="Shape 84"/>
+          <p:cNvSpPr/>
+          <p:nvPr/>
+        </p:nvSpPr>
+        <p:spPr>
+          <a:xfrm>
+            <a:off x="7547511" y="3342132"/>
+            <a:ext cx="250704" cy="41148"/>
+          </a:xfrm>
+          <a:prstGeom prst="rect">
+            <a:avLst/>
+          </a:prstGeom>
+          <a:solidFill>
+            <a:srgbClr val="890C58"/>
+          </a:solidFill>
+          <a:ln/>
+        </p:spPr>
+      </p:sp>
+      <p:sp>
+        <p:nvSpPr>
+          <p:cNvPr id="87" name="Shape 85"/>
+          <p:cNvSpPr/>
+          <p:nvPr/>
+        </p:nvSpPr>
+        <p:spPr>
+          <a:xfrm>
+            <a:off x="2584519" y="3602736"/>
+            <a:ext cx="523058" cy="164592"/>
+          </a:xfrm>
+          <a:prstGeom prst="rect">
+            <a:avLst/>
+          </a:prstGeom>
+          <a:solidFill>
+            <a:srgbClr val="0071C5"/>
+          </a:solidFill>
+          <a:ln/>
+        </p:spPr>
+      </p:sp>
+      <p:sp>
+        <p:nvSpPr>
+          <p:cNvPr id="88" name="Shape 86"/>
+          <p:cNvSpPr/>
+          <p:nvPr/>
+        </p:nvSpPr>
+        <p:spPr>
+          <a:xfrm>
+            <a:off x="3603357" y="3602736"/>
+            <a:ext cx="527821" cy="164592"/>
+          </a:xfrm>
+          <a:prstGeom prst="rect">
+            <a:avLst/>
+          </a:prstGeom>
+          <a:solidFill>
+            <a:srgbClr val="0071C5"/>
+          </a:solidFill>
+          <a:ln/>
+        </p:spPr>
+      </p:sp>
+      <p:sp>
+        <p:nvSpPr>
+          <p:cNvPr id="89" name="Shape 87"/>
+          <p:cNvSpPr/>
+          <p:nvPr/>
+        </p:nvSpPr>
+        <p:spPr>
+          <a:xfrm>
+            <a:off x="4583226" y="3602736"/>
+            <a:ext cx="513965" cy="164592"/>
+          </a:xfrm>
+          <a:prstGeom prst="rect">
+            <a:avLst/>
+          </a:prstGeom>
+          <a:solidFill>
+            <a:srgbClr val="0071C5"/>
+          </a:solidFill>
+          <a:ln/>
+        </p:spPr>
+      </p:sp>
+      <p:sp>
+        <p:nvSpPr>
+          <p:cNvPr id="90" name="Shape 88"/>
+          <p:cNvSpPr/>
+          <p:nvPr/>
+        </p:nvSpPr>
+        <p:spPr>
+          <a:xfrm>
+            <a:off x="6168421" y="3602736"/>
+            <a:ext cx="500110" cy="164592"/>
+          </a:xfrm>
+          <a:prstGeom prst="rect">
+            <a:avLst/>
+          </a:prstGeom>
+          <a:solidFill>
+            <a:srgbClr val="0071C5"/>
+          </a:solidFill>
+          <a:ln/>
+        </p:spPr>
+      </p:sp>
+      <p:sp>
+        <p:nvSpPr>
+          <p:cNvPr id="91" name="Shape 89"/>
+          <p:cNvSpPr/>
+          <p:nvPr/>
+        </p:nvSpPr>
+        <p:spPr>
+          <a:xfrm>
+            <a:off x="7191589" y="3602736"/>
+            <a:ext cx="317819" cy="164592"/>
+          </a:xfrm>
+          <a:prstGeom prst="rect">
+            <a:avLst/>
+          </a:prstGeom>
+          <a:solidFill>
+            <a:srgbClr val="0071C5"/>
+          </a:solidFill>
+          <a:ln/>
+        </p:spPr>
+      </p:sp>
+      <p:sp>
+        <p:nvSpPr>
+          <p:cNvPr id="92" name="Shape 90"/>
+          <p:cNvSpPr/>
+          <p:nvPr/>
+        </p:nvSpPr>
+        <p:spPr>
+          <a:xfrm>
+            <a:off x="7593409" y="3602736"/>
+            <a:ext cx="204807" cy="164592"/>
+          </a:xfrm>
+          <a:prstGeom prst="rect">
+            <a:avLst/>
+          </a:prstGeom>
+          <a:solidFill>
+            <a:srgbClr val="0071C5"/>
+          </a:solidFill>
+          <a:ln/>
+        </p:spPr>
+      </p:sp>
+      <p:sp>
+        <p:nvSpPr>
+          <p:cNvPr id="93" name="Shape 91"/>
+          <p:cNvSpPr/>
+          <p:nvPr/>
+        </p:nvSpPr>
+        <p:spPr>
+          <a:xfrm>
+            <a:off x="8459832" y="3602736"/>
+            <a:ext cx="9144" cy="164592"/>
+          </a:xfrm>
+          <a:prstGeom prst="rect">
+            <a:avLst/>
+          </a:prstGeom>
+          <a:solidFill>
+            <a:srgbClr val="0071C5"/>
+          </a:solidFill>
+          <a:ln/>
+        </p:spPr>
+      </p:sp>
+      <p:sp>
+        <p:nvSpPr>
+          <p:cNvPr id="94" name="Text 92"/>
+          <p:cNvSpPr/>
+          <p:nvPr/>
+        </p:nvSpPr>
+        <p:spPr>
+          <a:xfrm>
+            <a:off x="1234440" y="3913632"/>
+            <a:ext cx="7360920" cy="164592"/>
           </a:xfrm>
           <a:prstGeom prst="rect">
             <a:avLst/>
@@ -6740,7 +8419,60 @@
               <a:buNone/>
             </a:pPr>
             <a:r>
-              <a:rPr lang="en-US" sz="1100" b="1" dirty="0">
+              <a:rPr lang="en-US" sz="850" i="1" dirty="0">
+                <a:solidFill>
+                  <a:srgbClr val="8C8C8C"/>
+                </a:solidFill>
+                <a:latin typeface="NVIDIA Sans" pitchFamily="34" charset="0"/>
+                <a:ea typeface="NVIDIA Sans" pitchFamily="34" charset="-122"/>
+                <a:cs typeface="NVIDIA Sans" pitchFamily="34" charset="-120"/>
+              </a:rPr>
+              <a:t>one backward pass, real kernels (node-level nsys, same node, same bytes) · red = compute stream stalled at a bucket rendezvous</a:t>
+            </a:r>
+            <a:endParaRPr lang="en-US" sz="850" dirty="0"/>
+          </a:p>
+        </p:txBody>
+      </p:sp>
+      <p:sp>
+        <p:nvSpPr>
+          <p:cNvPr id="95" name="Text 93"/>
+          <p:cNvSpPr/>
+          <p:nvPr/>
+        </p:nvSpPr>
+        <p:spPr>
+          <a:xfrm>
+            <a:off x="640080" y="4114800"/>
+            <a:ext cx="7955280" cy="292608"/>
+          </a:xfrm>
+          <a:prstGeom prst="rect">
+            <a:avLst/>
+          </a:prstGeom>
+          <a:noFill/>
+          <a:ln/>
+        </p:spPr>
+        <p:txBody>
+          <a:bodyPr wrap="square" lIns="0" tIns="0" rIns="0" bIns="0" rtlCol="0" anchor="t"/>
+          <a:lstStyle/>
+          <a:p>
+            <a:pPr indent="0" marL="0">
+              <a:buNone/>
+            </a:pPr>
+            <a:r>
+              <a:rPr lang="en-US" b="1" dirty="0">
+                <a:solidFill>
+                  <a:srgbClr val="76B900"/>
+                </a:solidFill>
+                <a:latin typeface="NVIDIA Sans" pitchFamily="34" charset="0"/>
+                <a:ea typeface="NVIDIA Sans" pitchFamily="34" charset="-122"/>
+                <a:cs typeface="NVIDIA Sans" pitchFamily="34" charset="-120"/>
+              </a:rPr>
+              <a:t>No conflict — they compose: </a:t>
+            </a:r>
+            <a:pPr indent="0" marL="0">
+              <a:buNone/>
+            </a:pPr>
+            <a:r>
+              <a:rPr lang="en-US" sz="1000" dirty="0">
                 <a:solidFill>
                   <a:srgbClr val="000000"/>
                 </a:solidFill>
@@ -6748,66 +8480,7 @@
                 <a:ea typeface="NVIDIA Sans" pitchFamily="34" charset="-122"/>
                 <a:cs typeface="NVIDIA Sans" pitchFamily="34" charset="-120"/>
               </a:rPr>
-              <a:t>Optimized</a:t>
-            </a:r>
-            <a:endParaRPr lang="en-US" sz="1100" dirty="0"/>
-          </a:p>
-        </p:txBody>
-      </p:sp>
-      <p:sp>
-        <p:nvSpPr>
-          <p:cNvPr id="14" name="Shape 12"/>
-          <p:cNvSpPr/>
-          <p:nvPr/>
-        </p:nvSpPr>
-        <p:spPr>
-          <a:xfrm>
-            <a:off x="2148840" y="3584448"/>
-            <a:ext cx="1169297" cy="310896"/>
-          </a:xfrm>
-          <a:prstGeom prst="rect">
-            <a:avLst/>
-          </a:prstGeom>
-          <a:solidFill>
-            <a:srgbClr val="76B900"/>
-          </a:solidFill>
-          <a:ln/>
-        </p:spPr>
-      </p:sp>
-      <p:sp>
-        <p:nvSpPr>
-          <p:cNvPr id="15" name="Text 13"/>
-          <p:cNvSpPr/>
-          <p:nvPr/>
-        </p:nvSpPr>
-        <p:spPr>
-          <a:xfrm>
-            <a:off x="2148840" y="3584448"/>
-            <a:ext cx="1169297" cy="310896"/>
-          </a:xfrm>
-          <a:prstGeom prst="rect">
-            <a:avLst/>
-          </a:prstGeom>
-          <a:noFill/>
-          <a:ln/>
-        </p:spPr>
-        <p:txBody>
-          <a:bodyPr wrap="square" lIns="0" tIns="0" rIns="0" bIns="0" rtlCol="0" anchor="ctr"/>
-          <a:lstStyle/>
-          <a:p>
-            <a:pPr algn="ctr" indent="0" marL="0">
-              <a:buNone/>
-            </a:pPr>
-            <a:r>
-              <a:rPr lang="en-US" sz="1000" b="1" dirty="0">
-                <a:solidFill>
-                  <a:srgbClr val="FFFFFF"/>
-                </a:solidFill>
-                <a:latin typeface="NVIDIA Sans" pitchFamily="34" charset="0"/>
-                <a:ea typeface="NVIDIA Sans" pitchFamily="34" charset="-122"/>
-                <a:cs typeface="NVIDIA Sans" pitchFamily="34" charset="-120"/>
-              </a:rPr>
-              <a:t>175</a:t>
+              <a:t>bucket size = how OFTEN compute and reduction rendezvous; reduce_scatter = what each rendezvous COSTS. false makes each AR bigger, strengthening the case for large buckets.</a:t>
             </a:r>
             <a:endParaRPr lang="en-US" sz="1000" dirty="0"/>
           </a:p>
@@ -6815,302 +8488,7 @@
       </p:sp>
       <p:sp>
         <p:nvSpPr>
-          <p:cNvPr id="16" name="Shape 14"/>
-          <p:cNvSpPr/>
-          <p:nvPr/>
-        </p:nvSpPr>
-        <p:spPr>
-          <a:xfrm>
-            <a:off x="3318137" y="3584448"/>
-            <a:ext cx="148164" cy="310896"/>
-          </a:xfrm>
-          <a:prstGeom prst="rect">
-            <a:avLst/>
-          </a:prstGeom>
-          <a:solidFill>
-            <a:srgbClr val="0071C5"/>
-          </a:solidFill>
-          <a:ln/>
-        </p:spPr>
-      </p:sp>
-      <p:sp>
-        <p:nvSpPr>
-          <p:cNvPr id="17" name="Shape 15"/>
-          <p:cNvSpPr/>
-          <p:nvPr/>
-        </p:nvSpPr>
-        <p:spPr>
-          <a:xfrm>
-            <a:off x="3466301" y="3584448"/>
-            <a:ext cx="289655" cy="310896"/>
-          </a:xfrm>
-          <a:prstGeom prst="rect">
-            <a:avLst/>
-          </a:prstGeom>
-          <a:solidFill>
-            <a:srgbClr val="D9D9D9"/>
-          </a:solidFill>
-          <a:ln/>
-        </p:spPr>
-      </p:sp>
-      <p:sp>
-        <p:nvSpPr>
-          <p:cNvPr id="18" name="Text 16"/>
-          <p:cNvSpPr/>
-          <p:nvPr/>
-        </p:nvSpPr>
-        <p:spPr>
-          <a:xfrm>
-            <a:off x="3810820" y="3584448"/>
-            <a:ext cx="822960" cy="310896"/>
-          </a:xfrm>
-          <a:prstGeom prst="rect">
-            <a:avLst/>
-          </a:prstGeom>
-          <a:noFill/>
-          <a:ln/>
-        </p:spPr>
-        <p:txBody>
-          <a:bodyPr wrap="square" lIns="0" tIns="0" rIns="0" bIns="0" rtlCol="0" anchor="ctr"/>
-          <a:lstStyle/>
-          <a:p>
-            <a:pPr indent="0" marL="0">
-              <a:buNone/>
-            </a:pPr>
-            <a:r>
-              <a:rPr lang="en-US" sz="1100" b="1" dirty="0">
-                <a:solidFill>
-                  <a:srgbClr val="000000"/>
-                </a:solidFill>
-                <a:latin typeface="NVIDIA Sans" pitchFamily="34" charset="0"/>
-                <a:ea typeface="NVIDIA Sans" pitchFamily="34" charset="-122"/>
-                <a:cs typeface="NVIDIA Sans" pitchFamily="34" charset="-120"/>
-              </a:rPr>
-              <a:t>249 ms</a:t>
-            </a:r>
-            <a:endParaRPr lang="en-US" sz="1100" dirty="0"/>
-          </a:p>
-        </p:txBody>
-      </p:sp>
-      <p:sp>
-        <p:nvSpPr>
-          <p:cNvPr id="19" name="Shape 17"/>
-          <p:cNvSpPr/>
-          <p:nvPr/>
-        </p:nvSpPr>
-        <p:spPr>
-          <a:xfrm>
-            <a:off x="2148840" y="4059936"/>
-            <a:ext cx="164592" cy="128016"/>
-          </a:xfrm>
-          <a:prstGeom prst="rect">
-            <a:avLst/>
-          </a:prstGeom>
-          <a:solidFill>
-            <a:srgbClr val="76B900"/>
-          </a:solidFill>
-          <a:ln/>
-        </p:spPr>
-      </p:sp>
-      <p:sp>
-        <p:nvSpPr>
-          <p:cNvPr id="20" name="Text 18"/>
-          <p:cNvSpPr/>
-          <p:nvPr/>
-        </p:nvSpPr>
-        <p:spPr>
-          <a:xfrm>
-            <a:off x="2368296" y="3986784"/>
-            <a:ext cx="1600200" cy="274320"/>
-          </a:xfrm>
-          <a:prstGeom prst="rect">
-            <a:avLst/>
-          </a:prstGeom>
-          <a:noFill/>
-          <a:ln/>
-        </p:spPr>
-        <p:txBody>
-          <a:bodyPr wrap="square" lIns="0" tIns="0" rIns="0" bIns="0" rtlCol="0" anchor="ctr"/>
-          <a:lstStyle/>
-          <a:p>
-            <a:pPr indent="0" marL="0">
-              <a:buNone/>
-            </a:pPr>
-            <a:r>
-              <a:rPr lang="en-US" sz="1000" dirty="0">
-                <a:solidFill>
-                  <a:srgbClr val="5E5E5E"/>
-                </a:solidFill>
-                <a:latin typeface="NVIDIA Sans" pitchFamily="34" charset="0"/>
-                <a:ea typeface="NVIDIA Sans" pitchFamily="34" charset="-122"/>
-                <a:cs typeface="NVIDIA Sans" pitchFamily="34" charset="-120"/>
-              </a:rPr>
-              <a:t>Compute busy</a:t>
-            </a:r>
-            <a:endParaRPr lang="en-US" sz="1000" dirty="0"/>
-          </a:p>
-        </p:txBody>
-      </p:sp>
-      <p:sp>
-        <p:nvSpPr>
-          <p:cNvPr id="21" name="Shape 19"/>
-          <p:cNvSpPr/>
-          <p:nvPr/>
-        </p:nvSpPr>
-        <p:spPr>
-          <a:xfrm>
-            <a:off x="3977640" y="4059936"/>
-            <a:ext cx="164592" cy="128016"/>
-          </a:xfrm>
-          <a:prstGeom prst="rect">
-            <a:avLst/>
-          </a:prstGeom>
-          <a:solidFill>
-            <a:srgbClr val="0071C5"/>
-          </a:solidFill>
-          <a:ln/>
-        </p:spPr>
-      </p:sp>
-      <p:sp>
-        <p:nvSpPr>
-          <p:cNvPr id="22" name="Text 20"/>
-          <p:cNvSpPr/>
-          <p:nvPr/>
-        </p:nvSpPr>
-        <p:spPr>
-          <a:xfrm>
-            <a:off x="4197096" y="3986784"/>
-            <a:ext cx="1600200" cy="274320"/>
-          </a:xfrm>
-          <a:prstGeom prst="rect">
-            <a:avLst/>
-          </a:prstGeom>
-          <a:noFill/>
-          <a:ln/>
-        </p:spPr>
-        <p:txBody>
-          <a:bodyPr wrap="square" lIns="0" tIns="0" rIns="0" bIns="0" rtlCol="0" anchor="ctr"/>
-          <a:lstStyle/>
-          <a:p>
-            <a:pPr indent="0" marL="0">
-              <a:buNone/>
-            </a:pPr>
-            <a:r>
-              <a:rPr lang="en-US" sz="1000" dirty="0">
-                <a:solidFill>
-                  <a:srgbClr val="5E5E5E"/>
-                </a:solidFill>
-                <a:latin typeface="NVIDIA Sans" pitchFamily="34" charset="0"/>
-                <a:ea typeface="NVIDIA Sans" pitchFamily="34" charset="-122"/>
-                <a:cs typeface="NVIDIA Sans" pitchFamily="34" charset="-120"/>
-              </a:rPr>
-              <a:t>Exposed comm</a:t>
-            </a:r>
-            <a:endParaRPr lang="en-US" sz="1000" dirty="0"/>
-          </a:p>
-        </p:txBody>
-      </p:sp>
-      <p:sp>
-        <p:nvSpPr>
-          <p:cNvPr id="23" name="Shape 21"/>
-          <p:cNvSpPr/>
-          <p:nvPr/>
-        </p:nvSpPr>
-        <p:spPr>
-          <a:xfrm>
-            <a:off x="5806440" y="4059936"/>
-            <a:ext cx="164592" cy="128016"/>
-          </a:xfrm>
-          <a:prstGeom prst="rect">
-            <a:avLst/>
-          </a:prstGeom>
-          <a:solidFill>
-            <a:srgbClr val="D9D9D9"/>
-          </a:solidFill>
-          <a:ln/>
-        </p:spPr>
-      </p:sp>
-      <p:sp>
-        <p:nvSpPr>
-          <p:cNvPr id="24" name="Text 22"/>
-          <p:cNvSpPr/>
-          <p:nvPr/>
-        </p:nvSpPr>
-        <p:spPr>
-          <a:xfrm>
-            <a:off x="6025896" y="3986784"/>
-            <a:ext cx="1600200" cy="274320"/>
-          </a:xfrm>
-          <a:prstGeom prst="rect">
-            <a:avLst/>
-          </a:prstGeom>
-          <a:noFill/>
-          <a:ln/>
-        </p:spPr>
-        <p:txBody>
-          <a:bodyPr wrap="square" lIns="0" tIns="0" rIns="0" bIns="0" rtlCol="0" anchor="ctr"/>
-          <a:lstStyle/>
-          <a:p>
-            <a:pPr indent="0" marL="0">
-              <a:buNone/>
-            </a:pPr>
-            <a:r>
-              <a:rPr lang="en-US" sz="1000" dirty="0">
-                <a:solidFill>
-                  <a:srgbClr val="5E5E5E"/>
-                </a:solidFill>
-                <a:latin typeface="NVIDIA Sans" pitchFamily="34" charset="0"/>
-                <a:ea typeface="NVIDIA Sans" pitchFamily="34" charset="-122"/>
-                <a:cs typeface="NVIDIA Sans" pitchFamily="34" charset="-120"/>
-              </a:rPr>
-              <a:t>Idle / launch gaps</a:t>
-            </a:r>
-            <a:endParaRPr lang="en-US" sz="1000" dirty="0"/>
-          </a:p>
-        </p:txBody>
-      </p:sp>
-      <p:sp>
-        <p:nvSpPr>
-          <p:cNvPr id="25" name="Text 23"/>
-          <p:cNvSpPr/>
-          <p:nvPr/>
-        </p:nvSpPr>
-        <p:spPr>
-          <a:xfrm>
-            <a:off x="457200" y="4261104"/>
-            <a:ext cx="8229600" cy="182880"/>
-          </a:xfrm>
-          <a:prstGeom prst="rect">
-            <a:avLst/>
-          </a:prstGeom>
-          <a:noFill/>
-          <a:ln/>
-        </p:spPr>
-        <p:txBody>
-          <a:bodyPr wrap="square" lIns="0" tIns="0" rIns="0" bIns="0" rtlCol="0" anchor="ctr"/>
-          <a:lstStyle/>
-          <a:p>
-            <a:pPr indent="0" marL="0">
-              <a:buNone/>
-            </a:pPr>
-            <a:r>
-              <a:rPr lang="en-US" sz="950" i="1" dirty="0">
-                <a:solidFill>
-                  <a:srgbClr val="8C8C8C"/>
-                </a:solidFill>
-                <a:latin typeface="NVIDIA Sans" pitchFamily="34" charset="0"/>
-                <a:ea typeface="NVIDIA Sans" pitchFamily="34" charset="-122"/>
-                <a:cs typeface="NVIDIA Sans" pitchFamily="34" charset="-120"/>
-              </a:rPr>
-              <a:t>Gradient AllReduce 15.1 GB/step + optimizer AllGather 15.1 GB/step (bf16). Idle from 205 ms to 43 ms.</a:t>
-            </a:r>
-            <a:endParaRPr lang="en-US" sz="950" dirty="0"/>
-          </a:p>
-        </p:txBody>
-      </p:sp>
-      <p:sp>
-        <p:nvSpPr>
-          <p:cNvPr id="26" name="Text 24"/>
+          <p:cNvPr id="96" name="Text 94"/>
           <p:cNvSpPr/>
           <p:nvPr/>
         </p:nvSpPr>
@@ -7149,7 +8527,7 @@
       </p:sp>
       <p:sp>
         <p:nvSpPr>
-          <p:cNvPr id="27" name="Text 25"/>
+          <p:cNvPr id="97" name="Text 95"/>
           <p:cNvSpPr/>
           <p:nvPr/>
         </p:nvSpPr>
@@ -7188,7 +8566,7 @@
       </p:sp>
       <p:sp>
         <p:nvSpPr>
-          <p:cNvPr id="28" name="Shape 26"/>
+          <p:cNvPr id="98" name="Shape 96"/>
           <p:cNvSpPr/>
           <p:nvPr/>
         </p:nvSpPr>
@@ -7208,7 +8586,7 @@
       </p:sp>
       <p:pic>
         <p:nvPicPr>
-          <p:cNvPr id="29" name="Image 0" descr="/app/logos/nvidia-logo-blk-sm.png">    </p:cNvPr>
+          <p:cNvPr id="99" name="Image 0" descr="/app/logos/nvidia-logo-blk-sm.png">    </p:cNvPr>
           <p:cNvPicPr>
             <a:picLocks noChangeAspect="1"/>
           </p:cNvPicPr>
@@ -10688,7 +12066,7 @@
                 <a:ea typeface="NVIDIA Sans" pitchFamily="34" charset="-122"/>
                 <a:cs typeface="NVIDIA Sans" pitchFamily="34" charset="-120"/>
               </a:rPr>
-              <a:t>Optimizer tail (~25 ms)  </a:t>
+              <a:t>Exposed parameter AllGather (44 ms)  </a:t>
             </a:r>
             <a:pPr indent="0" marL="0">
               <a:buNone/>
@@ -10702,7 +12080,7 @@
                 <a:ea typeface="NVIDIA Sans" pitchFamily="34" charset="-122"/>
                 <a:cs typeface="NVIDIA Sans" pitchFamily="34" charset="-120"/>
               </a:rPr>
-              <a:t>[compiled autograd]</a:t>
+              <a:t>[FSDP or async ZeRO-2]</a:t>
             </a:r>
             <a:endParaRPr lang="en-US" sz="1250" dirty="0"/>
           </a:p>
@@ -10741,7 +12119,7 @@
                 <a:ea typeface="NVIDIA Sans" pitchFamily="34" charset="-122"/>
                 <a:cs typeface="NVIDIA Sans" pitchFamily="34" charset="-120"/>
               </a:rPr>
-              <a:t>ZeRO-2 optimizer step + AllGather at step end; compiled autograd / fused optimizer can overlap part of it.</a:t>
+              <a:t>Optimization shrank compute — the step-end AllGather is now fully exposed and ZeRO-2 cannot overlap it. Adopt FSDP (overlapped unshard) or extend ZeRO-2 with an async parameter gather.</a:t>
             </a:r>
             <a:endParaRPr lang="en-US" sz="1000" dirty="0"/>
           </a:p>

--- a/docs/slides/qwenpi-optimization.pptx
+++ b/docs/slides/qwenpi-optimization.pptx
@@ -18,10 +18,9 @@
     <p:sldId id="266" r:id="rId12"/>
     <p:sldId id="267" r:id="rId13"/>
     <p:sldId id="268" r:id="rId14"/>
-    <p:sldId id="269" r:id="rId15"/>
   </p:sldIdLst>
   <p:notesMasterIdLst>
-    <p:notesMasterId r:id="rId16"/>
+    <p:notesMasterId r:id="rId15"/>
   </p:notesMasterIdLst>
   <p:sldSz cx="9144000" cy="5143500"/>
   <p:notesSz cx="5143500" cy="9144000"/>
@@ -3623,7 +3622,9 @@
           <a:p>
             <a:r>
               <a:rPr lang="en-US" dirty="0"/>
-              <a:t>This slide is the credibility anchor: what we did NOT ship is as evidence-based as what we did.</a:t>
+              <a:t>Dropped from the old ruled-out table (internal detail, keep for Q&amp;A): masked_scatter nonzero-sync patch measured 0 ms (the AllReduce tail is gradient-readiness-bound); MRoPE cache is neutral at the final config (CUDA Graphs hide it) and kept for CPU headroom.
+Optimizer math (~26 ms busy) additionally has a compiled-autograd / fused-optimizer lever, separate from the AllGather overlap.
+[IMPORTANT] Close: 3.2x at bs8 and 340 samples/node/s at bs24 are banked; this page is the go-forward plan.</a:t>
             </a:r>
             <a:endParaRPr lang="en-US" dirty="0"/>
           </a:p>
@@ -3647,96 +3648,6 @@
             <a:fld id="{F7021451-1387-4CA6-816F-3879F97B5CBC}" type="slidenum">
               <a:rPr lang="en-US"/>
               <a:t>13</a:t>
-            </a:fld>
-            <a:endParaRPr lang="en-US"/>
-          </a:p>
-        </p:txBody>
-      </p:sp>
-    </p:spTree>
-    <p:extLst>
-      <p:ext uri="{BB962C8B-B14F-4D97-AF65-F5344CB8AC3E}">
-        <p14:creationId xmlns:p14="http://schemas.microsoft.com/office/powerpoint/2010/main" val="1024086991"/>
-      </p:ext>
-    </p:extLst>
-  </p:cSld>
-  <p:clrMapOvr>
-    <a:masterClrMapping/>
-  </p:clrMapOvr>
-</p:notes>
-</file>
-
-<file path=ppt/notesSlides/notesSlide14.xml><?xml version="1.0" encoding="utf-8"?>
-<p:notes xmlns:a="http://schemas.openxmlformats.org/drawingml/2006/main" xmlns:r="http://schemas.openxmlformats.org/officeDocument/2006/relationships" xmlns:p="http://schemas.openxmlformats.org/presentationml/2006/main">
-  <p:cSld>
-    <p:spTree>
-      <p:nvGrpSpPr>
-        <p:cNvPr id="1" name=""/>
-        <p:cNvGrpSpPr/>
-        <p:nvPr/>
-      </p:nvGrpSpPr>
-      <p:grpSpPr>
-        <a:xfrm>
-          <a:off x="0" y="0"/>
-          <a:ext cx="0" cy="0"/>
-          <a:chOff x="0" y="0"/>
-          <a:chExt cx="0" cy="0"/>
-        </a:xfrm>
-      </p:grpSpPr>
-      <p:sp>
-        <p:nvSpPr>
-          <p:cNvPr id="2" name="Slide Image Placeholder 1"/>
-          <p:cNvSpPr>
-            <a:spLocks noGrp="1" noRot="1" noChangeAspect="1"/>
-          </p:cNvSpPr>
-          <p:nvPr>
-            <p:ph type="sldImg"/>
-          </p:nvPr>
-        </p:nvSpPr>
-        <p:spPr/>
-      </p:sp>
-      <p:sp>
-        <p:nvSpPr>
-          <p:cNvPr id="3" name="Notes Placeholder 2"/>
-          <p:cNvSpPr>
-            <a:spLocks noGrp="1"/>
-          </p:cNvSpPr>
-          <p:nvPr>
-            <p:ph type="body" idx="1"/>
-          </p:nvPr>
-        </p:nvSpPr>
-        <p:spPr/>
-        <p:txBody>
-          <a:bodyPr/>
-          <a:lstStyle/>
-          <a:p>
-            <a:r>
-              <a:rPr lang="en-US" dirty="0"/>
-              <a:t>AllGather card: optimizer math itself (~26 ms busy) has a separate compiled-autograd / fused-optimizer lever; the 44 ms AllGather is the structural ZeRO-2 limit.
-Everything shipped is one MR per optimization with measured before/after — the repo history is the reproducibility story.
-[IMPORTANT] Close: 3.2x is banked; the roadmap above is how we keep going.</a:t>
-            </a:r>
-            <a:endParaRPr lang="en-US" dirty="0"/>
-          </a:p>
-        </p:txBody>
-      </p:sp>
-      <p:sp>
-        <p:nvSpPr>
-          <p:cNvPr id="4" name="Slide Number Placeholder 3"/>
-          <p:cNvSpPr>
-            <a:spLocks noGrp="1"/>
-          </p:cNvSpPr>
-          <p:nvPr>
-            <p:ph type="sldNum" sz="quarter" idx="10"/>
-          </p:nvPr>
-        </p:nvSpPr>
-        <p:spPr/>
-        <p:txBody>
-          <a:bodyPr/>
-          <a:lstStyle/>
-          <a:p>
-            <a:fld id="{F7021451-1387-4CA6-816F-3879F97B5CBC}" type="slidenum">
-              <a:rPr lang="en-US"/>
-              <a:t>14</a:t>
             </a:fld>
             <a:endParaRPr lang="en-US"/>
           </a:p>
@@ -9940,7 +9851,7 @@
                 <a:ea typeface="NVIDIA Sans" pitchFamily="34" charset="-122"/>
                 <a:cs typeface="NVIDIA Sans" pitchFamily="34" charset="-120"/>
               </a:rPr>
-              <a:t>What We Ruled Out — and How</a:t>
+              <a:t>What's Next — and What Not to Retry</a:t>
             </a:r>
             <a:endParaRPr lang="en-US" sz="3000" dirty="0"/>
           </a:p>
@@ -9979,1434 +9890,877 @@
                 <a:ea typeface="NVIDIA Sans" pitchFamily="34" charset="-122"/>
                 <a:cs typeface="NVIDIA Sans" pitchFamily="34" charset="-120"/>
               </a:rPr>
-              <a:t>Negative results are results: every hypothesis got a same-node experiment</a:t>
+              <a:t>Levers ranked by ceiling — and measured dead ends</a:t>
             </a:r>
             <a:endParaRPr lang="en-US" sz="1500" dirty="0"/>
           </a:p>
         </p:txBody>
       </p:sp>
-      <p:graphicFrame>
-        <p:nvGraphicFramePr>
-          <p:cNvPr id="14" name="Table 0"/>
-          <p:cNvGraphicFramePr>
-            <a:graphicFrameLocks noGrp="1"/>
-          </p:cNvGraphicFramePr>
-          <p:nvPr>
-            <p:extLst>
-              <p:ext uri="{D42A27DB-BD31-4B8C-83A1-F6EECF244321}">
-                <p14:modId xmlns:p14="http://schemas.microsoft.com/office/powerpoint/2010/main" val="1579011935"/>
-              </p:ext>
-            </p:extLst>
-          </p:nvPr>
-        </p:nvGraphicFramePr>
-        <p:xfrm>
-          <a:off x="457200" y="1325880"/>
-          <a:ext cx="8229600" cy="914400"/>
-        </p:xfrm>
-        <a:graphic>
-          <a:graphicData uri="http://schemas.openxmlformats.org/drawingml/2006/table">
-            <a:tbl>
-              <a:tblPr/>
-              <a:tblGrid>
-                <a:gridCol w="1965960"/>
-                <a:gridCol w="2011680"/>
-                <a:gridCol w="4251960"/>
-              </a:tblGrid>
-              <a:tr h="402336">
-                <a:tc>
-                  <a:txBody>
-                    <a:bodyPr/>
-                    <a:lstStyle/>
-                    <a:p>
-                      <a:pPr algn="l" indent="0" marL="0">
-                        <a:buNone/>
-                      </a:pPr>
-                      <a:r>
-                        <a:rPr lang="en-US" sz="1100" b="1" dirty="0">
-                          <a:solidFill>
-                            <a:srgbClr val="FFFFFF"/>
-                          </a:solidFill>
-                          <a:latin typeface="NVIDIA Sans" pitchFamily="34" charset="0"/>
-                          <a:ea typeface="NVIDIA Sans" pitchFamily="34" charset="-122"/>
-                          <a:cs typeface="NVIDIA Sans" pitchFamily="34" charset="-120"/>
-                        </a:rPr>
-                        <a:t>Hypothesis</a:t>
-                      </a:r>
-                      <a:endParaRPr lang="en-US" sz="1100" dirty="0">
-                        <a:latin typeface="NVIDIA Sans" charset="0"/>
-                        <a:ea typeface="NVIDIA Sans" charset="0"/>
-                        <a:cs typeface="NVIDIA Sans" charset="0"/>
-                      </a:endParaRPr>
-                    </a:p>
-                  </a:txBody>
-                  <a:tcPr marL="91440" marR="91440" marT="45720" marB="45720" anchor="ctr">
-                    <a:lnL w="6350" cap="flat" cmpd="sng" algn="ctr">
-                      <a:solidFill>
-                        <a:srgbClr val="CDCDCD"/>
-                      </a:solidFill>
-                      <a:prstDash val="solid"/>
-                      <a:round/>
-                      <a:headEnd type="none" w="med" len="med"/>
-                      <a:tailEnd type="none" w="med" len="med"/>
-                    </a:lnL>
-                    <a:lnR w="6350" cap="flat" cmpd="sng" algn="ctr">
-                      <a:solidFill>
-                        <a:srgbClr val="CDCDCD"/>
-                      </a:solidFill>
-                      <a:prstDash val="solid"/>
-                      <a:round/>
-                      <a:headEnd type="none" w="med" len="med"/>
-                      <a:tailEnd type="none" w="med" len="med"/>
-                    </a:lnR>
-                    <a:lnT w="6350" cap="flat" cmpd="sng" algn="ctr">
-                      <a:solidFill>
-                        <a:srgbClr val="CDCDCD"/>
-                      </a:solidFill>
-                      <a:prstDash val="solid"/>
-                      <a:round/>
-                      <a:headEnd type="none" w="med" len="med"/>
-                      <a:tailEnd type="none" w="med" len="med"/>
-                    </a:lnT>
-                    <a:lnB w="6350" cap="flat" cmpd="sng" algn="ctr">
-                      <a:solidFill>
-                        <a:srgbClr val="CDCDCD"/>
-                      </a:solidFill>
-                      <a:prstDash val="solid"/>
-                      <a:round/>
-                      <a:headEnd type="none" w="med" len="med"/>
-                      <a:tailEnd type="none" w="med" len="med"/>
-                    </a:lnB>
-                    <a:solidFill>
-                      <a:srgbClr val="76B900"/>
-                    </a:solidFill>
-                  </a:tcPr>
-                </a:tc>
-                <a:tc>
-                  <a:txBody>
-                    <a:bodyPr/>
-                    <a:lstStyle/>
-                    <a:p>
-                      <a:pPr algn="l" indent="0" marL="0">
-                        <a:buNone/>
-                      </a:pPr>
-                      <a:r>
-                        <a:rPr lang="en-US" sz="1100" b="1" dirty="0">
-                          <a:solidFill>
-                            <a:srgbClr val="FFFFFF"/>
-                          </a:solidFill>
-                          <a:latin typeface="NVIDIA Sans" pitchFamily="34" charset="0"/>
-                          <a:ea typeface="NVIDIA Sans" pitchFamily="34" charset="-122"/>
-                          <a:cs typeface="NVIDIA Sans" pitchFamily="34" charset="-120"/>
-                        </a:rPr>
-                        <a:t>Experiment</a:t>
-                      </a:r>
-                      <a:endParaRPr lang="en-US" sz="1100" dirty="0">
-                        <a:latin typeface="NVIDIA Sans" charset="0"/>
-                        <a:ea typeface="NVIDIA Sans" charset="0"/>
-                        <a:cs typeface="NVIDIA Sans" charset="0"/>
-                      </a:endParaRPr>
-                    </a:p>
-                  </a:txBody>
-                  <a:tcPr marL="91440" marR="91440" marT="45720" marB="45720" anchor="ctr">
-                    <a:lnL w="6350" cap="flat" cmpd="sng" algn="ctr">
-                      <a:solidFill>
-                        <a:srgbClr val="CDCDCD"/>
-                      </a:solidFill>
-                      <a:prstDash val="solid"/>
-                      <a:round/>
-                      <a:headEnd type="none" w="med" len="med"/>
-                      <a:tailEnd type="none" w="med" len="med"/>
-                    </a:lnL>
-                    <a:lnR w="6350" cap="flat" cmpd="sng" algn="ctr">
-                      <a:solidFill>
-                        <a:srgbClr val="CDCDCD"/>
-                      </a:solidFill>
-                      <a:prstDash val="solid"/>
-                      <a:round/>
-                      <a:headEnd type="none" w="med" len="med"/>
-                      <a:tailEnd type="none" w="med" len="med"/>
-                    </a:lnR>
-                    <a:lnT w="6350" cap="flat" cmpd="sng" algn="ctr">
-                      <a:solidFill>
-                        <a:srgbClr val="CDCDCD"/>
-                      </a:solidFill>
-                      <a:prstDash val="solid"/>
-                      <a:round/>
-                      <a:headEnd type="none" w="med" len="med"/>
-                      <a:tailEnd type="none" w="med" len="med"/>
-                    </a:lnT>
-                    <a:lnB w="6350" cap="flat" cmpd="sng" algn="ctr">
-                      <a:solidFill>
-                        <a:srgbClr val="CDCDCD"/>
-                      </a:solidFill>
-                      <a:prstDash val="solid"/>
-                      <a:round/>
-                      <a:headEnd type="none" w="med" len="med"/>
-                      <a:tailEnd type="none" w="med" len="med"/>
-                    </a:lnB>
-                    <a:solidFill>
-                      <a:srgbClr val="76B900"/>
-                    </a:solidFill>
-                  </a:tcPr>
-                </a:tc>
-                <a:tc>
-                  <a:txBody>
-                    <a:bodyPr/>
-                    <a:lstStyle/>
-                    <a:p>
-                      <a:pPr algn="l" indent="0" marL="0">
-                        <a:buNone/>
-                      </a:pPr>
-                      <a:r>
-                        <a:rPr lang="en-US" sz="1100" b="1" dirty="0">
-                          <a:solidFill>
-                            <a:srgbClr val="FFFFFF"/>
-                          </a:solidFill>
-                          <a:latin typeface="NVIDIA Sans" pitchFamily="34" charset="0"/>
-                          <a:ea typeface="NVIDIA Sans" pitchFamily="34" charset="-122"/>
-                          <a:cs typeface="NVIDIA Sans" pitchFamily="34" charset="-120"/>
-                        </a:rPr>
-                        <a:t>Verdict</a:t>
-                      </a:r>
-                      <a:endParaRPr lang="en-US" sz="1100" dirty="0">
-                        <a:latin typeface="NVIDIA Sans" charset="0"/>
-                        <a:ea typeface="NVIDIA Sans" charset="0"/>
-                        <a:cs typeface="NVIDIA Sans" charset="0"/>
-                      </a:endParaRPr>
-                    </a:p>
-                  </a:txBody>
-                  <a:tcPr marL="91440" marR="91440" marT="45720" marB="45720" anchor="ctr">
-                    <a:lnL w="6350" cap="flat" cmpd="sng" algn="ctr">
-                      <a:solidFill>
-                        <a:srgbClr val="CDCDCD"/>
-                      </a:solidFill>
-                      <a:prstDash val="solid"/>
-                      <a:round/>
-                      <a:headEnd type="none" w="med" len="med"/>
-                      <a:tailEnd type="none" w="med" len="med"/>
-                    </a:lnL>
-                    <a:lnR w="6350" cap="flat" cmpd="sng" algn="ctr">
-                      <a:solidFill>
-                        <a:srgbClr val="CDCDCD"/>
-                      </a:solidFill>
-                      <a:prstDash val="solid"/>
-                      <a:round/>
-                      <a:headEnd type="none" w="med" len="med"/>
-                      <a:tailEnd type="none" w="med" len="med"/>
-                    </a:lnR>
-                    <a:lnT w="6350" cap="flat" cmpd="sng" algn="ctr">
-                      <a:solidFill>
-                        <a:srgbClr val="CDCDCD"/>
-                      </a:solidFill>
-                      <a:prstDash val="solid"/>
-                      <a:round/>
-                      <a:headEnd type="none" w="med" len="med"/>
-                      <a:tailEnd type="none" w="med" len="med"/>
-                    </a:lnT>
-                    <a:lnB w="6350" cap="flat" cmpd="sng" algn="ctr">
-                      <a:solidFill>
-                        <a:srgbClr val="CDCDCD"/>
-                      </a:solidFill>
-                      <a:prstDash val="solid"/>
-                      <a:round/>
-                      <a:headEnd type="none" w="med" len="med"/>
-                      <a:tailEnd type="none" w="med" len="med"/>
-                    </a:lnB>
-                    <a:solidFill>
-                      <a:srgbClr val="76B900"/>
-                    </a:solidFill>
-                  </a:tcPr>
-                </a:tc>
-              </a:tr>
-              <a:tr h="402336">
-                <a:tc>
-                  <a:txBody>
-                    <a:bodyPr/>
-                    <a:lstStyle/>
-                    <a:p>
-                      <a:pPr algn="l" indent="0" marL="0">
-                        <a:buNone/>
-                      </a:pPr>
-                      <a:r>
-                        <a:rPr lang="en-US" sz="1050" b="1" dirty="0">
-                          <a:solidFill>
-                            <a:srgbClr val="000000"/>
-                          </a:solidFill>
-                          <a:latin typeface="NVIDIA Sans" pitchFamily="34" charset="0"/>
-                          <a:ea typeface="NVIDIA Sans" pitchFamily="34" charset="-122"/>
-                          <a:cs typeface="NVIDIA Sans" pitchFamily="34" charset="-120"/>
-                        </a:rPr>
-                        <a:t>FA2 for the text stack</a:t>
-                      </a:r>
-                      <a:endParaRPr lang="en-US" sz="1050" dirty="0">
-                        <a:latin typeface="NVIDIA Sans" charset="0"/>
-                        <a:ea typeface="NVIDIA Sans" charset="0"/>
-                        <a:cs typeface="NVIDIA Sans" charset="0"/>
-                      </a:endParaRPr>
-                    </a:p>
-                  </a:txBody>
-                  <a:tcPr marL="91440" marR="91440" marT="45720" marB="45720" anchor="ctr">
-                    <a:lnL w="6350" cap="flat" cmpd="sng" algn="ctr">
-                      <a:solidFill>
-                        <a:srgbClr val="CDCDCD"/>
-                      </a:solidFill>
-                      <a:prstDash val="solid"/>
-                      <a:round/>
-                      <a:headEnd type="none" w="med" len="med"/>
-                      <a:tailEnd type="none" w="med" len="med"/>
-                    </a:lnL>
-                    <a:lnR w="6350" cap="flat" cmpd="sng" algn="ctr">
-                      <a:solidFill>
-                        <a:srgbClr val="CDCDCD"/>
-                      </a:solidFill>
-                      <a:prstDash val="solid"/>
-                      <a:round/>
-                      <a:headEnd type="none" w="med" len="med"/>
-                      <a:tailEnd type="none" w="med" len="med"/>
-                    </a:lnR>
-                    <a:lnT w="6350" cap="flat" cmpd="sng" algn="ctr">
-                      <a:solidFill>
-                        <a:srgbClr val="CDCDCD"/>
-                      </a:solidFill>
-                      <a:prstDash val="solid"/>
-                      <a:round/>
-                      <a:headEnd type="none" w="med" len="med"/>
-                      <a:tailEnd type="none" w="med" len="med"/>
-                    </a:lnT>
-                    <a:lnB w="6350" cap="flat" cmpd="sng" algn="ctr">
-                      <a:solidFill>
-                        <a:srgbClr val="CDCDCD"/>
-                      </a:solidFill>
-                      <a:prstDash val="solid"/>
-                      <a:round/>
-                      <a:headEnd type="none" w="med" len="med"/>
-                      <a:tailEnd type="none" w="med" len="med"/>
-                    </a:lnB>
-                  </a:tcPr>
-                </a:tc>
-                <a:tc>
-                  <a:txBody>
-                    <a:bodyPr/>
-                    <a:lstStyle/>
-                    <a:p>
-                      <a:pPr algn="l" indent="0" marL="0">
-                        <a:buNone/>
-                      </a:pPr>
-                      <a:r>
-                        <a:rPr lang="en-US" sz="1000" dirty="0">
-                          <a:solidFill>
-                            <a:srgbClr val="000000"/>
-                          </a:solidFill>
-                          <a:latin typeface="NVIDIA Sans" pitchFamily="34" charset="0"/>
-                          <a:ea typeface="NVIDIA Sans" pitchFamily="34" charset="-122"/>
-                          <a:cs typeface="NVIDIA Sans" pitchFamily="34" charset="-120"/>
-                        </a:rPr>
-                        <a:t>A/B at seq 192</a:t>
-                      </a:r>
-                      <a:endParaRPr lang="en-US" sz="1000" dirty="0">
-                        <a:latin typeface="NVIDIA Sans" charset="0"/>
-                        <a:ea typeface="NVIDIA Sans" charset="0"/>
-                        <a:cs typeface="NVIDIA Sans" charset="0"/>
-                      </a:endParaRPr>
-                    </a:p>
-                  </a:txBody>
-                  <a:tcPr marL="91440" marR="91440" marT="45720" marB="45720" anchor="ctr">
-                    <a:lnL w="6350" cap="flat" cmpd="sng" algn="ctr">
-                      <a:solidFill>
-                        <a:srgbClr val="CDCDCD"/>
-                      </a:solidFill>
-                      <a:prstDash val="solid"/>
-                      <a:round/>
-                      <a:headEnd type="none" w="med" len="med"/>
-                      <a:tailEnd type="none" w="med" len="med"/>
-                    </a:lnL>
-                    <a:lnR w="6350" cap="flat" cmpd="sng" algn="ctr">
-                      <a:solidFill>
-                        <a:srgbClr val="CDCDCD"/>
-                      </a:solidFill>
-                      <a:prstDash val="solid"/>
-                      <a:round/>
-                      <a:headEnd type="none" w="med" len="med"/>
-                      <a:tailEnd type="none" w="med" len="med"/>
-                    </a:lnR>
-                    <a:lnT w="6350" cap="flat" cmpd="sng" algn="ctr">
-                      <a:solidFill>
-                        <a:srgbClr val="CDCDCD"/>
-                      </a:solidFill>
-                      <a:prstDash val="solid"/>
-                      <a:round/>
-                      <a:headEnd type="none" w="med" len="med"/>
-                      <a:tailEnd type="none" w="med" len="med"/>
-                    </a:lnT>
-                    <a:lnB w="6350" cap="flat" cmpd="sng" algn="ctr">
-                      <a:solidFill>
-                        <a:srgbClr val="CDCDCD"/>
-                      </a:solidFill>
-                      <a:prstDash val="solid"/>
-                      <a:round/>
-                      <a:headEnd type="none" w="med" len="med"/>
-                      <a:tailEnd type="none" w="med" len="med"/>
-                    </a:lnB>
-                  </a:tcPr>
-                </a:tc>
-                <a:tc>
-                  <a:txBody>
-                    <a:bodyPr/>
-                    <a:lstStyle/>
-                    <a:p>
-                      <a:pPr algn="l" indent="0" marL="0">
-                        <a:buNone/>
-                      </a:pPr>
-                      <a:r>
-                        <a:rPr lang="en-US" sz="1000" dirty="0">
-                          <a:solidFill>
-                            <a:srgbClr val="000000"/>
-                          </a:solidFill>
-                          <a:latin typeface="NVIDIA Sans" pitchFamily="34" charset="0"/>
-                          <a:ea typeface="NVIDIA Sans" pitchFamily="34" charset="-122"/>
-                          <a:cs typeface="NVIDIA Sans" pitchFamily="34" charset="-120"/>
-                        </a:rPr>
-                        <a:t>Slower (+10 ms): unpad/repad overhead exceeds kernel gains at short sequences</a:t>
-                      </a:r>
-                      <a:endParaRPr lang="en-US" sz="1000" dirty="0">
-                        <a:latin typeface="NVIDIA Sans" charset="0"/>
-                        <a:ea typeface="NVIDIA Sans" charset="0"/>
-                        <a:cs typeface="NVIDIA Sans" charset="0"/>
-                      </a:endParaRPr>
-                    </a:p>
-                  </a:txBody>
-                  <a:tcPr marL="91440" marR="91440" marT="45720" marB="45720" anchor="ctr">
-                    <a:lnL w="6350" cap="flat" cmpd="sng" algn="ctr">
-                      <a:solidFill>
-                        <a:srgbClr val="CDCDCD"/>
-                      </a:solidFill>
-                      <a:prstDash val="solid"/>
-                      <a:round/>
-                      <a:headEnd type="none" w="med" len="med"/>
-                      <a:tailEnd type="none" w="med" len="med"/>
-                    </a:lnL>
-                    <a:lnR w="6350" cap="flat" cmpd="sng" algn="ctr">
-                      <a:solidFill>
-                        <a:srgbClr val="CDCDCD"/>
-                      </a:solidFill>
-                      <a:prstDash val="solid"/>
-                      <a:round/>
-                      <a:headEnd type="none" w="med" len="med"/>
-                      <a:tailEnd type="none" w="med" len="med"/>
-                    </a:lnR>
-                    <a:lnT w="6350" cap="flat" cmpd="sng" algn="ctr">
-                      <a:solidFill>
-                        <a:srgbClr val="CDCDCD"/>
-                      </a:solidFill>
-                      <a:prstDash val="solid"/>
-                      <a:round/>
-                      <a:headEnd type="none" w="med" len="med"/>
-                      <a:tailEnd type="none" w="med" len="med"/>
-                    </a:lnT>
-                    <a:lnB w="6350" cap="flat" cmpd="sng" algn="ctr">
-                      <a:solidFill>
-                        <a:srgbClr val="CDCDCD"/>
-                      </a:solidFill>
-                      <a:prstDash val="solid"/>
-                      <a:round/>
-                      <a:headEnd type="none" w="med" len="med"/>
-                      <a:tailEnd type="none" w="med" len="med"/>
-                    </a:lnB>
-                  </a:tcPr>
-                </a:tc>
-              </a:tr>
-              <a:tr h="402336">
-                <a:tc>
-                  <a:txBody>
-                    <a:bodyPr/>
-                    <a:lstStyle/>
-                    <a:p>
-                      <a:pPr algn="l" indent="0" marL="0">
-                        <a:buNone/>
-                      </a:pPr>
-                      <a:r>
-                        <a:rPr lang="en-US" sz="1050" b="1" dirty="0">
-                          <a:solidFill>
-                            <a:srgbClr val="000000"/>
-                          </a:solidFill>
-                          <a:latin typeface="NVIDIA Sans" pitchFamily="34" charset="0"/>
-                          <a:ea typeface="NVIDIA Sans" pitchFamily="34" charset="-122"/>
-                          <a:cs typeface="NVIDIA Sans" pitchFamily="34" charset="-120"/>
-                        </a:rPr>
-                        <a:t>“NCCL is misconfigured”</a:t>
-                      </a:r>
-                      <a:endParaRPr lang="en-US" sz="1050" dirty="0">
-                        <a:latin typeface="NVIDIA Sans" charset="0"/>
-                        <a:ea typeface="NVIDIA Sans" charset="0"/>
-                        <a:cs typeface="NVIDIA Sans" charset="0"/>
-                      </a:endParaRPr>
-                    </a:p>
-                  </a:txBody>
-                  <a:tcPr marL="91440" marR="91440" marT="45720" marB="45720" anchor="ctr">
-                    <a:lnL w="6350" cap="flat" cmpd="sng" algn="ctr">
-                      <a:solidFill>
-                        <a:srgbClr val="CDCDCD"/>
-                      </a:solidFill>
-                      <a:prstDash val="solid"/>
-                      <a:round/>
-                      <a:headEnd type="none" w="med" len="med"/>
-                      <a:tailEnd type="none" w="med" len="med"/>
-                    </a:lnL>
-                    <a:lnR w="6350" cap="flat" cmpd="sng" algn="ctr">
-                      <a:solidFill>
-                        <a:srgbClr val="CDCDCD"/>
-                      </a:solidFill>
-                      <a:prstDash val="solid"/>
-                      <a:round/>
-                      <a:headEnd type="none" w="med" len="med"/>
-                      <a:tailEnd type="none" w="med" len="med"/>
-                    </a:lnR>
-                    <a:lnT w="6350" cap="flat" cmpd="sng" algn="ctr">
-                      <a:solidFill>
-                        <a:srgbClr val="CDCDCD"/>
-                      </a:solidFill>
-                      <a:prstDash val="solid"/>
-                      <a:round/>
-                      <a:headEnd type="none" w="med" len="med"/>
-                      <a:tailEnd type="none" w="med" len="med"/>
-                    </a:lnT>
-                    <a:lnB w="6350" cap="flat" cmpd="sng" algn="ctr">
-                      <a:solidFill>
-                        <a:srgbClr val="CDCDCD"/>
-                      </a:solidFill>
-                      <a:prstDash val="solid"/>
-                      <a:round/>
-                      <a:headEnd type="none" w="med" len="med"/>
-                      <a:tailEnd type="none" w="med" len="med"/>
-                    </a:lnB>
-                  </a:tcPr>
-                </a:tc>
-                <a:tc>
-                  <a:txBody>
-                    <a:bodyPr/>
-                    <a:lstStyle/>
-                    <a:p>
-                      <a:pPr algn="l" indent="0" marL="0">
-                        <a:buNone/>
-                      </a:pPr>
-                      <a:r>
-                        <a:rPr lang="en-US" sz="1000" dirty="0">
-                          <a:solidFill>
-                            <a:srgbClr val="000000"/>
-                          </a:solidFill>
-                          <a:latin typeface="NVIDIA Sans" pitchFamily="34" charset="0"/>
-                          <a:ea typeface="NVIDIA Sans" pitchFamily="34" charset="-122"/>
-                          <a:cs typeface="NVIDIA Sans" pitchFamily="34" charset="-120"/>
-                        </a:rPr>
-                        <a:t>Forced protocols, NCCL_DEBUG, microbenchmark</a:t>
-                      </a:r>
-                      <a:endParaRPr lang="en-US" sz="1000" dirty="0">
-                        <a:latin typeface="NVIDIA Sans" charset="0"/>
-                        <a:ea typeface="NVIDIA Sans" charset="0"/>
-                        <a:cs typeface="NVIDIA Sans" charset="0"/>
-                      </a:endParaRPr>
-                    </a:p>
-                  </a:txBody>
-                  <a:tcPr marL="91440" marR="91440" marT="45720" marB="45720" anchor="ctr">
-                    <a:lnL w="6350" cap="flat" cmpd="sng" algn="ctr">
-                      <a:solidFill>
-                        <a:srgbClr val="CDCDCD"/>
-                      </a:solidFill>
-                      <a:prstDash val="solid"/>
-                      <a:round/>
-                      <a:headEnd type="none" w="med" len="med"/>
-                      <a:tailEnd type="none" w="med" len="med"/>
-                    </a:lnL>
-                    <a:lnR w="6350" cap="flat" cmpd="sng" algn="ctr">
-                      <a:solidFill>
-                        <a:srgbClr val="CDCDCD"/>
-                      </a:solidFill>
-                      <a:prstDash val="solid"/>
-                      <a:round/>
-                      <a:headEnd type="none" w="med" len="med"/>
-                      <a:tailEnd type="none" w="med" len="med"/>
-                    </a:lnR>
-                    <a:lnT w="6350" cap="flat" cmpd="sng" algn="ctr">
-                      <a:solidFill>
-                        <a:srgbClr val="CDCDCD"/>
-                      </a:solidFill>
-                      <a:prstDash val="solid"/>
-                      <a:round/>
-                      <a:headEnd type="none" w="med" len="med"/>
-                      <a:tailEnd type="none" w="med" len="med"/>
-                    </a:lnT>
-                    <a:lnB w="6350" cap="flat" cmpd="sng" algn="ctr">
-                      <a:solidFill>
-                        <a:srgbClr val="CDCDCD"/>
-                      </a:solidFill>
-                      <a:prstDash val="solid"/>
-                      <a:round/>
-                      <a:headEnd type="none" w="med" len="med"/>
-                      <a:tailEnd type="none" w="med" len="med"/>
-                    </a:lnB>
-                  </a:tcPr>
-                </a:tc>
-                <a:tc>
-                  <a:txBody>
-                    <a:bodyPr/>
-                    <a:lstStyle/>
-                    <a:p>
-                      <a:pPr algn="l" indent="0" marL="0">
-                        <a:buNone/>
-                      </a:pPr>
-                      <a:r>
-                        <a:rPr lang="en-US" sz="1000" dirty="0">
-                          <a:solidFill>
-                            <a:srgbClr val="000000"/>
-                          </a:solidFill>
-                          <a:latin typeface="NVIDIA Sans" pitchFamily="34" charset="0"/>
-                          <a:ea typeface="NVIDIA Sans" pitchFamily="34" charset="-122"/>
-                          <a:cs typeface="NVIDIA Sans" pitchFamily="34" charset="-120"/>
-                        </a:rPr>
-                        <a:t>AllReduce already at 478 GB/s busbw = NVLink ceiling; kernel-name suffix was a red herring</a:t>
-                      </a:r>
-                      <a:endParaRPr lang="en-US" sz="1000" dirty="0">
-                        <a:latin typeface="NVIDIA Sans" charset="0"/>
-                        <a:ea typeface="NVIDIA Sans" charset="0"/>
-                        <a:cs typeface="NVIDIA Sans" charset="0"/>
-                      </a:endParaRPr>
-                    </a:p>
-                  </a:txBody>
-                  <a:tcPr marL="91440" marR="91440" marT="45720" marB="45720" anchor="ctr">
-                    <a:lnL w="6350" cap="flat" cmpd="sng" algn="ctr">
-                      <a:solidFill>
-                        <a:srgbClr val="CDCDCD"/>
-                      </a:solidFill>
-                      <a:prstDash val="solid"/>
-                      <a:round/>
-                      <a:headEnd type="none" w="med" len="med"/>
-                      <a:tailEnd type="none" w="med" len="med"/>
-                    </a:lnL>
-                    <a:lnR w="6350" cap="flat" cmpd="sng" algn="ctr">
-                      <a:solidFill>
-                        <a:srgbClr val="CDCDCD"/>
-                      </a:solidFill>
-                      <a:prstDash val="solid"/>
-                      <a:round/>
-                      <a:headEnd type="none" w="med" len="med"/>
-                      <a:tailEnd type="none" w="med" len="med"/>
-                    </a:lnR>
-                    <a:lnT w="6350" cap="flat" cmpd="sng" algn="ctr">
-                      <a:solidFill>
-                        <a:srgbClr val="CDCDCD"/>
-                      </a:solidFill>
-                      <a:prstDash val="solid"/>
-                      <a:round/>
-                      <a:headEnd type="none" w="med" len="med"/>
-                      <a:tailEnd type="none" w="med" len="med"/>
-                    </a:lnT>
-                    <a:lnB w="6350" cap="flat" cmpd="sng" algn="ctr">
-                      <a:solidFill>
-                        <a:srgbClr val="CDCDCD"/>
-                      </a:solidFill>
-                      <a:prstDash val="solid"/>
-                      <a:round/>
-                      <a:headEnd type="none" w="med" len="med"/>
-                      <a:tailEnd type="none" w="med" len="med"/>
-                    </a:lnB>
-                  </a:tcPr>
-                </a:tc>
-              </a:tr>
-              <a:tr h="402336">
-                <a:tc>
-                  <a:txBody>
-                    <a:bodyPr/>
-                    <a:lstStyle/>
-                    <a:p>
-                      <a:pPr algn="l" indent="0" marL="0">
-                        <a:buNone/>
-                      </a:pPr>
-                      <a:r>
-                        <a:rPr lang="en-US" sz="1050" b="1" dirty="0">
-                          <a:solidFill>
-                            <a:srgbClr val="000000"/>
-                          </a:solidFill>
-                          <a:latin typeface="NVIDIA Sans" pitchFamily="34" charset="0"/>
-                          <a:ea typeface="NVIDIA Sans" pitchFamily="34" charset="-122"/>
-                          <a:cs typeface="NVIDIA Sans" pitchFamily="34" charset="-120"/>
-                        </a:rPr>
-                        <a:t>masked_scatter nonzero sync</a:t>
-                      </a:r>
-                      <a:endParaRPr lang="en-US" sz="1050" dirty="0">
-                        <a:latin typeface="NVIDIA Sans" charset="0"/>
-                        <a:ea typeface="NVIDIA Sans" charset="0"/>
-                        <a:cs typeface="NVIDIA Sans" charset="0"/>
-                      </a:endParaRPr>
-                    </a:p>
-                  </a:txBody>
-                  <a:tcPr marL="91440" marR="91440" marT="45720" marB="45720" anchor="ctr">
-                    <a:lnL w="6350" cap="flat" cmpd="sng" algn="ctr">
-                      <a:solidFill>
-                        <a:srgbClr val="CDCDCD"/>
-                      </a:solidFill>
-                      <a:prstDash val="solid"/>
-                      <a:round/>
-                      <a:headEnd type="none" w="med" len="med"/>
-                      <a:tailEnd type="none" w="med" len="med"/>
-                    </a:lnL>
-                    <a:lnR w="6350" cap="flat" cmpd="sng" algn="ctr">
-                      <a:solidFill>
-                        <a:srgbClr val="CDCDCD"/>
-                      </a:solidFill>
-                      <a:prstDash val="solid"/>
-                      <a:round/>
-                      <a:headEnd type="none" w="med" len="med"/>
-                      <a:tailEnd type="none" w="med" len="med"/>
-                    </a:lnR>
-                    <a:lnT w="6350" cap="flat" cmpd="sng" algn="ctr">
-                      <a:solidFill>
-                        <a:srgbClr val="CDCDCD"/>
-                      </a:solidFill>
-                      <a:prstDash val="solid"/>
-                      <a:round/>
-                      <a:headEnd type="none" w="med" len="med"/>
-                      <a:tailEnd type="none" w="med" len="med"/>
-                    </a:lnT>
-                    <a:lnB w="6350" cap="flat" cmpd="sng" algn="ctr">
-                      <a:solidFill>
-                        <a:srgbClr val="CDCDCD"/>
-                      </a:solidFill>
-                      <a:prstDash val="solid"/>
-                      <a:round/>
-                      <a:headEnd type="none" w="med" len="med"/>
-                      <a:tailEnd type="none" w="med" len="med"/>
-                    </a:lnB>
-                  </a:tcPr>
-                </a:tc>
-                <a:tc>
-                  <a:txBody>
-                    <a:bodyPr/>
-                    <a:lstStyle/>
-                    <a:p>
-                      <a:pPr algn="l" indent="0" marL="0">
-                        <a:buNone/>
-                      </a:pPr>
-                      <a:r>
-                        <a:rPr lang="en-US" sz="1000" dirty="0">
-                          <a:solidFill>
-                            <a:srgbClr val="000000"/>
-                          </a:solidFill>
-                          <a:latin typeface="NVIDIA Sans" pitchFamily="34" charset="0"/>
-                          <a:ea typeface="NVIDIA Sans" pitchFamily="34" charset="-122"/>
-                          <a:cs typeface="NVIDIA Sans" pitchFamily="34" charset="-120"/>
-                        </a:rPr>
-                        <a:t>index_copy patch, bitwise-equal unit test</a:t>
-                      </a:r>
-                      <a:endParaRPr lang="en-US" sz="1000" dirty="0">
-                        <a:latin typeface="NVIDIA Sans" charset="0"/>
-                        <a:ea typeface="NVIDIA Sans" charset="0"/>
-                        <a:cs typeface="NVIDIA Sans" charset="0"/>
-                      </a:endParaRPr>
-                    </a:p>
-                  </a:txBody>
-                  <a:tcPr marL="91440" marR="91440" marT="45720" marB="45720" anchor="ctr">
-                    <a:lnL w="6350" cap="flat" cmpd="sng" algn="ctr">
-                      <a:solidFill>
-                        <a:srgbClr val="CDCDCD"/>
-                      </a:solidFill>
-                      <a:prstDash val="solid"/>
-                      <a:round/>
-                      <a:headEnd type="none" w="med" len="med"/>
-                      <a:tailEnd type="none" w="med" len="med"/>
-                    </a:lnL>
-                    <a:lnR w="6350" cap="flat" cmpd="sng" algn="ctr">
-                      <a:solidFill>
-                        <a:srgbClr val="CDCDCD"/>
-                      </a:solidFill>
-                      <a:prstDash val="solid"/>
-                      <a:round/>
-                      <a:headEnd type="none" w="med" len="med"/>
-                      <a:tailEnd type="none" w="med" len="med"/>
-                    </a:lnR>
-                    <a:lnT w="6350" cap="flat" cmpd="sng" algn="ctr">
-                      <a:solidFill>
-                        <a:srgbClr val="CDCDCD"/>
-                      </a:solidFill>
-                      <a:prstDash val="solid"/>
-                      <a:round/>
-                      <a:headEnd type="none" w="med" len="med"/>
-                      <a:tailEnd type="none" w="med" len="med"/>
-                    </a:lnT>
-                    <a:lnB w="6350" cap="flat" cmpd="sng" algn="ctr">
-                      <a:solidFill>
-                        <a:srgbClr val="CDCDCD"/>
-                      </a:solidFill>
-                      <a:prstDash val="solid"/>
-                      <a:round/>
-                      <a:headEnd type="none" w="med" len="med"/>
-                      <a:tailEnd type="none" w="med" len="med"/>
-                    </a:lnB>
-                  </a:tcPr>
-                </a:tc>
-                <a:tc>
-                  <a:txBody>
-                    <a:bodyPr/>
-                    <a:lstStyle/>
-                    <a:p>
-                      <a:pPr algn="l" indent="0" marL="0">
-                        <a:buNone/>
-                      </a:pPr>
-                      <a:r>
-                        <a:rPr lang="en-US" sz="1000" dirty="0">
-                          <a:solidFill>
-                            <a:srgbClr val="000000"/>
-                          </a:solidFill>
-                          <a:latin typeface="NVIDIA Sans" pitchFamily="34" charset="0"/>
-                          <a:ea typeface="NVIDIA Sans" pitchFamily="34" charset="-122"/>
-                          <a:cs typeface="NVIDIA Sans" pitchFamily="34" charset="-120"/>
-                        </a:rPr>
-                        <a:t>0 ms: the AllReduce tail is gradient-readiness-bound, so hiding the sync moves nothing</a:t>
-                      </a:r>
-                      <a:endParaRPr lang="en-US" sz="1000" dirty="0">
-                        <a:latin typeface="NVIDIA Sans" charset="0"/>
-                        <a:ea typeface="NVIDIA Sans" charset="0"/>
-                        <a:cs typeface="NVIDIA Sans" charset="0"/>
-                      </a:endParaRPr>
-                    </a:p>
-                  </a:txBody>
-                  <a:tcPr marL="91440" marR="91440" marT="45720" marB="45720" anchor="ctr">
-                    <a:lnL w="6350" cap="flat" cmpd="sng" algn="ctr">
-                      <a:solidFill>
-                        <a:srgbClr val="CDCDCD"/>
-                      </a:solidFill>
-                      <a:prstDash val="solid"/>
-                      <a:round/>
-                      <a:headEnd type="none" w="med" len="med"/>
-                      <a:tailEnd type="none" w="med" len="med"/>
-                    </a:lnL>
-                    <a:lnR w="6350" cap="flat" cmpd="sng" algn="ctr">
-                      <a:solidFill>
-                        <a:srgbClr val="CDCDCD"/>
-                      </a:solidFill>
-                      <a:prstDash val="solid"/>
-                      <a:round/>
-                      <a:headEnd type="none" w="med" len="med"/>
-                      <a:tailEnd type="none" w="med" len="med"/>
-                    </a:lnR>
-                    <a:lnT w="6350" cap="flat" cmpd="sng" algn="ctr">
-                      <a:solidFill>
-                        <a:srgbClr val="CDCDCD"/>
-                      </a:solidFill>
-                      <a:prstDash val="solid"/>
-                      <a:round/>
-                      <a:headEnd type="none" w="med" len="med"/>
-                      <a:tailEnd type="none" w="med" len="med"/>
-                    </a:lnT>
-                    <a:lnB w="6350" cap="flat" cmpd="sng" algn="ctr">
-                      <a:solidFill>
-                        <a:srgbClr val="CDCDCD"/>
-                      </a:solidFill>
-                      <a:prstDash val="solid"/>
-                      <a:round/>
-                      <a:headEnd type="none" w="med" len="med"/>
-                      <a:tailEnd type="none" w="med" len="med"/>
-                    </a:lnB>
-                  </a:tcPr>
-                </a:tc>
-              </a:tr>
-              <a:tr h="402336">
-                <a:tc>
-                  <a:txBody>
-                    <a:bodyPr/>
-                    <a:lstStyle/>
-                    <a:p>
-                      <a:pPr algn="l" indent="0" marL="0">
-                        <a:buNone/>
-                      </a:pPr>
-                      <a:r>
-                        <a:rPr lang="en-US" sz="1050" b="1" dirty="0">
-                          <a:solidFill>
-                            <a:srgbClr val="000000"/>
-                          </a:solidFill>
-                          <a:latin typeface="NVIDIA Sans" pitchFamily="34" charset="0"/>
-                          <a:ea typeface="NVIDIA Sans" pitchFamily="34" charset="-122"/>
-                          <a:cs typeface="NVIDIA Sans" pitchFamily="34" charset="-120"/>
-                        </a:rPr>
-                        <a:t>MRoPE cache still needed?</a:t>
-                      </a:r>
-                      <a:endParaRPr lang="en-US" sz="1050" dirty="0">
-                        <a:latin typeface="NVIDIA Sans" charset="0"/>
-                        <a:ea typeface="NVIDIA Sans" charset="0"/>
-                        <a:cs typeface="NVIDIA Sans" charset="0"/>
-                      </a:endParaRPr>
-                    </a:p>
-                  </a:txBody>
-                  <a:tcPr marL="91440" marR="91440" marT="45720" marB="45720" anchor="ctr">
-                    <a:lnL w="6350" cap="flat" cmpd="sng" algn="ctr">
-                      <a:solidFill>
-                        <a:srgbClr val="CDCDCD"/>
-                      </a:solidFill>
-                      <a:prstDash val="solid"/>
-                      <a:round/>
-                      <a:headEnd type="none" w="med" len="med"/>
-                      <a:tailEnd type="none" w="med" len="med"/>
-                    </a:lnL>
-                    <a:lnR w="6350" cap="flat" cmpd="sng" algn="ctr">
-                      <a:solidFill>
-                        <a:srgbClr val="CDCDCD"/>
-                      </a:solidFill>
-                      <a:prstDash val="solid"/>
-                      <a:round/>
-                      <a:headEnd type="none" w="med" len="med"/>
-                      <a:tailEnd type="none" w="med" len="med"/>
-                    </a:lnR>
-                    <a:lnT w="6350" cap="flat" cmpd="sng" algn="ctr">
-                      <a:solidFill>
-                        <a:srgbClr val="CDCDCD"/>
-                      </a:solidFill>
-                      <a:prstDash val="solid"/>
-                      <a:round/>
-                      <a:headEnd type="none" w="med" len="med"/>
-                      <a:tailEnd type="none" w="med" len="med"/>
-                    </a:lnT>
-                    <a:lnB w="6350" cap="flat" cmpd="sng" algn="ctr">
-                      <a:solidFill>
-                        <a:srgbClr val="CDCDCD"/>
-                      </a:solidFill>
-                      <a:prstDash val="solid"/>
-                      <a:round/>
-                      <a:headEnd type="none" w="med" len="med"/>
-                      <a:tailEnd type="none" w="med" len="med"/>
-                    </a:lnB>
-                  </a:tcPr>
-                </a:tc>
-                <a:tc>
-                  <a:txBody>
-                    <a:bodyPr/>
-                    <a:lstStyle/>
-                    <a:p>
-                      <a:pPr algn="l" indent="0" marL="0">
-                        <a:buNone/>
-                      </a:pPr>
-                      <a:r>
-                        <a:rPr lang="en-US" sz="1000" dirty="0">
-                          <a:solidFill>
-                            <a:srgbClr val="000000"/>
-                          </a:solidFill>
-                          <a:latin typeface="NVIDIA Sans" pitchFamily="34" charset="0"/>
-                          <a:ea typeface="NVIDIA Sans" pitchFamily="34" charset="-122"/>
-                          <a:cs typeface="NVIDIA Sans" pitchFamily="34" charset="-120"/>
-                        </a:rPr>
-                        <a:t>Toggle at final config</a:t>
-                      </a:r>
-                      <a:endParaRPr lang="en-US" sz="1000" dirty="0">
-                        <a:latin typeface="NVIDIA Sans" charset="0"/>
-                        <a:ea typeface="NVIDIA Sans" charset="0"/>
-                        <a:cs typeface="NVIDIA Sans" charset="0"/>
-                      </a:endParaRPr>
-                    </a:p>
-                  </a:txBody>
-                  <a:tcPr marL="91440" marR="91440" marT="45720" marB="45720" anchor="ctr">
-                    <a:lnL w="6350" cap="flat" cmpd="sng" algn="ctr">
-                      <a:solidFill>
-                        <a:srgbClr val="CDCDCD"/>
-                      </a:solidFill>
-                      <a:prstDash val="solid"/>
-                      <a:round/>
-                      <a:headEnd type="none" w="med" len="med"/>
-                      <a:tailEnd type="none" w="med" len="med"/>
-                    </a:lnL>
-                    <a:lnR w="6350" cap="flat" cmpd="sng" algn="ctr">
-                      <a:solidFill>
-                        <a:srgbClr val="CDCDCD"/>
-                      </a:solidFill>
-                      <a:prstDash val="solid"/>
-                      <a:round/>
-                      <a:headEnd type="none" w="med" len="med"/>
-                      <a:tailEnd type="none" w="med" len="med"/>
-                    </a:lnR>
-                    <a:lnT w="6350" cap="flat" cmpd="sng" algn="ctr">
-                      <a:solidFill>
-                        <a:srgbClr val="CDCDCD"/>
-                      </a:solidFill>
-                      <a:prstDash val="solid"/>
-                      <a:round/>
-                      <a:headEnd type="none" w="med" len="med"/>
-                      <a:tailEnd type="none" w="med" len="med"/>
-                    </a:lnT>
-                    <a:lnB w="6350" cap="flat" cmpd="sng" algn="ctr">
-                      <a:solidFill>
-                        <a:srgbClr val="CDCDCD"/>
-                      </a:solidFill>
-                      <a:prstDash val="solid"/>
-                      <a:round/>
-                      <a:headEnd type="none" w="med" len="med"/>
-                      <a:tailEnd type="none" w="med" len="med"/>
-                    </a:lnB>
-                  </a:tcPr>
-                </a:tc>
-                <a:tc>
-                  <a:txBody>
-                    <a:bodyPr/>
-                    <a:lstStyle/>
-                    <a:p>
-                      <a:pPr algn="l" indent="0" marL="0">
-                        <a:buNone/>
-                      </a:pPr>
-                      <a:r>
-                        <a:rPr lang="en-US" sz="1000" dirty="0">
-                          <a:solidFill>
-                            <a:srgbClr val="000000"/>
-                          </a:solidFill>
-                          <a:latin typeface="NVIDIA Sans" pitchFamily="34" charset="0"/>
-                          <a:ea typeface="NVIDIA Sans" pitchFamily="34" charset="-122"/>
-                          <a:cs typeface="NVIDIA Sans" pitchFamily="34" charset="-120"/>
-                        </a:rPr>
-                        <a:t>Neutral at the tip (CUDA Graphs hide it) — kept for CPU headroom, one-knob rollback</a:t>
-                      </a:r>
-                      <a:endParaRPr lang="en-US" sz="1000" dirty="0">
-                        <a:latin typeface="NVIDIA Sans" charset="0"/>
-                        <a:ea typeface="NVIDIA Sans" charset="0"/>
-                        <a:cs typeface="NVIDIA Sans" charset="0"/>
-                      </a:endParaRPr>
-                    </a:p>
-                  </a:txBody>
-                  <a:tcPr marL="91440" marR="91440" marT="45720" marB="45720" anchor="ctr">
-                    <a:lnL w="6350" cap="flat" cmpd="sng" algn="ctr">
-                      <a:solidFill>
-                        <a:srgbClr val="CDCDCD"/>
-                      </a:solidFill>
-                      <a:prstDash val="solid"/>
-                      <a:round/>
-                      <a:headEnd type="none" w="med" len="med"/>
-                      <a:tailEnd type="none" w="med" len="med"/>
-                    </a:lnL>
-                    <a:lnR w="6350" cap="flat" cmpd="sng" algn="ctr">
-                      <a:solidFill>
-                        <a:srgbClr val="CDCDCD"/>
-                      </a:solidFill>
-                      <a:prstDash val="solid"/>
-                      <a:round/>
-                      <a:headEnd type="none" w="med" len="med"/>
-                      <a:tailEnd type="none" w="med" len="med"/>
-                    </a:lnR>
-                    <a:lnT w="6350" cap="flat" cmpd="sng" algn="ctr">
-                      <a:solidFill>
-                        <a:srgbClr val="CDCDCD"/>
-                      </a:solidFill>
-                      <a:prstDash val="solid"/>
-                      <a:round/>
-                      <a:headEnd type="none" w="med" len="med"/>
-                      <a:tailEnd type="none" w="med" len="med"/>
-                    </a:lnT>
-                    <a:lnB w="6350" cap="flat" cmpd="sng" algn="ctr">
-                      <a:solidFill>
-                        <a:srgbClr val="CDCDCD"/>
-                      </a:solidFill>
-                      <a:prstDash val="solid"/>
-                      <a:round/>
-                      <a:headEnd type="none" w="med" len="med"/>
-                      <a:tailEnd type="none" w="med" len="med"/>
-                    </a:lnB>
-                  </a:tcPr>
-                </a:tc>
-              </a:tr>
-              <a:tr h="402336">
-                <a:tc>
-                  <a:txBody>
-                    <a:bodyPr/>
-                    <a:lstStyle/>
-                    <a:p>
-                      <a:pPr algn="l" indent="0" marL="0">
-                        <a:buNone/>
-                      </a:pPr>
-                      <a:r>
-                        <a:rPr lang="en-US" sz="1050" b="1" dirty="0">
-                          <a:solidFill>
-                            <a:srgbClr val="000000"/>
-                          </a:solidFill>
-                          <a:latin typeface="NVIDIA Sans" pitchFamily="34" charset="0"/>
-                          <a:ea typeface="NVIDIA Sans" pitchFamily="34" charset="-122"/>
-                          <a:cs typeface="NVIDIA Sans" pitchFamily="34" charset="-120"/>
-                        </a:rPr>
-                        <a:t>Whole-model torch.compile</a:t>
-                      </a:r>
-                      <a:endParaRPr lang="en-US" sz="1050" dirty="0">
-                        <a:latin typeface="NVIDIA Sans" charset="0"/>
-                        <a:ea typeface="NVIDIA Sans" charset="0"/>
-                        <a:cs typeface="NVIDIA Sans" charset="0"/>
-                      </a:endParaRPr>
-                    </a:p>
-                  </a:txBody>
-                  <a:tcPr marL="91440" marR="91440" marT="45720" marB="45720" anchor="ctr">
-                    <a:lnL w="6350" cap="flat" cmpd="sng" algn="ctr">
-                      <a:solidFill>
-                        <a:srgbClr val="CDCDCD"/>
-                      </a:solidFill>
-                      <a:prstDash val="solid"/>
-                      <a:round/>
-                      <a:headEnd type="none" w="med" len="med"/>
-                      <a:tailEnd type="none" w="med" len="med"/>
-                    </a:lnL>
-                    <a:lnR w="6350" cap="flat" cmpd="sng" algn="ctr">
-                      <a:solidFill>
-                        <a:srgbClr val="CDCDCD"/>
-                      </a:solidFill>
-                      <a:prstDash val="solid"/>
-                      <a:round/>
-                      <a:headEnd type="none" w="med" len="med"/>
-                      <a:tailEnd type="none" w="med" len="med"/>
-                    </a:lnR>
-                    <a:lnT w="6350" cap="flat" cmpd="sng" algn="ctr">
-                      <a:solidFill>
-                        <a:srgbClr val="CDCDCD"/>
-                      </a:solidFill>
-                      <a:prstDash val="solid"/>
-                      <a:round/>
-                      <a:headEnd type="none" w="med" len="med"/>
-                      <a:tailEnd type="none" w="med" len="med"/>
-                    </a:lnT>
-                    <a:lnB w="6350" cap="flat" cmpd="sng" algn="ctr">
-                      <a:solidFill>
-                        <a:srgbClr val="CDCDCD"/>
-                      </a:solidFill>
-                      <a:prstDash val="solid"/>
-                      <a:round/>
-                      <a:headEnd type="none" w="med" len="med"/>
-                      <a:tailEnd type="none" w="med" len="med"/>
-                    </a:lnB>
-                  </a:tcPr>
-                </a:tc>
-                <a:tc>
-                  <a:txBody>
-                    <a:bodyPr/>
-                    <a:lstStyle/>
-                    <a:p>
-                      <a:pPr algn="l" indent="0" marL="0">
-                        <a:buNone/>
-                      </a:pPr>
-                      <a:r>
-                        <a:rPr lang="en-US" sz="1000" dirty="0">
-                          <a:solidFill>
-                            <a:srgbClr val="000000"/>
-                          </a:solidFill>
-                          <a:latin typeface="NVIDIA Sans" pitchFamily="34" charset="0"/>
-                          <a:ea typeface="NVIDIA Sans" pitchFamily="34" charset="-122"/>
-                          <a:cs typeface="NVIDIA Sans" pitchFamily="34" charset="-120"/>
-                        </a:rPr>
-                        <a:t>Compile attempts on torch 2.6 &amp; 2.7</a:t>
-                      </a:r>
-                      <a:endParaRPr lang="en-US" sz="1000" dirty="0">
-                        <a:latin typeface="NVIDIA Sans" charset="0"/>
-                        <a:ea typeface="NVIDIA Sans" charset="0"/>
-                        <a:cs typeface="NVIDIA Sans" charset="0"/>
-                      </a:endParaRPr>
-                    </a:p>
-                  </a:txBody>
-                  <a:tcPr marL="91440" marR="91440" marT="45720" marB="45720" anchor="ctr">
-                    <a:lnL w="6350" cap="flat" cmpd="sng" algn="ctr">
-                      <a:solidFill>
-                        <a:srgbClr val="CDCDCD"/>
-                      </a:solidFill>
-                      <a:prstDash val="solid"/>
-                      <a:round/>
-                      <a:headEnd type="none" w="med" len="med"/>
-                      <a:tailEnd type="none" w="med" len="med"/>
-                    </a:lnL>
-                    <a:lnR w="6350" cap="flat" cmpd="sng" algn="ctr">
-                      <a:solidFill>
-                        <a:srgbClr val="CDCDCD"/>
-                      </a:solidFill>
-                      <a:prstDash val="solid"/>
-                      <a:round/>
-                      <a:headEnd type="none" w="med" len="med"/>
-                      <a:tailEnd type="none" w="med" len="med"/>
-                    </a:lnR>
-                    <a:lnT w="6350" cap="flat" cmpd="sng" algn="ctr">
-                      <a:solidFill>
-                        <a:srgbClr val="CDCDCD"/>
-                      </a:solidFill>
-                      <a:prstDash val="solid"/>
-                      <a:round/>
-                      <a:headEnd type="none" w="med" len="med"/>
-                      <a:tailEnd type="none" w="med" len="med"/>
-                    </a:lnT>
-                    <a:lnB w="6350" cap="flat" cmpd="sng" algn="ctr">
-                      <a:solidFill>
-                        <a:srgbClr val="CDCDCD"/>
-                      </a:solidFill>
-                      <a:prstDash val="solid"/>
-                      <a:round/>
-                      <a:headEnd type="none" w="med" len="med"/>
-                      <a:tailEnd type="none" w="med" len="med"/>
-                    </a:lnB>
-                  </a:tcPr>
-                </a:tc>
-                <a:tc>
-                  <a:txBody>
-                    <a:bodyPr/>
-                    <a:lstStyle/>
-                    <a:p>
-                      <a:pPr algn="l" indent="0" marL="0">
-                        <a:buNone/>
-                      </a:pPr>
-                      <a:r>
-                        <a:rPr lang="en-US" sz="1000" dirty="0">
-                          <a:solidFill>
-                            <a:srgbClr val="000000"/>
-                          </a:solidFill>
-                          <a:latin typeface="NVIDIA Sans" pitchFamily="34" charset="0"/>
-                          <a:ea typeface="NVIDIA Sans" pitchFamily="34" charset="-122"/>
-                          <a:cs typeface="NVIDIA Sans" pitchFamily="34" charset="-120"/>
-                        </a:rPr>
-                        <a:t>Hybrid GDN layers graph-break in dynamo → group-graph capture instead</a:t>
-                      </a:r>
-                      <a:endParaRPr lang="en-US" sz="1000" dirty="0">
-                        <a:latin typeface="NVIDIA Sans" charset="0"/>
-                        <a:ea typeface="NVIDIA Sans" charset="0"/>
-                        <a:cs typeface="NVIDIA Sans" charset="0"/>
-                      </a:endParaRPr>
-                    </a:p>
-                  </a:txBody>
-                  <a:tcPr marL="91440" marR="91440" marT="45720" marB="45720" anchor="ctr">
-                    <a:lnL w="6350" cap="flat" cmpd="sng" algn="ctr">
-                      <a:solidFill>
-                        <a:srgbClr val="CDCDCD"/>
-                      </a:solidFill>
-                      <a:prstDash val="solid"/>
-                      <a:round/>
-                      <a:headEnd type="none" w="med" len="med"/>
-                      <a:tailEnd type="none" w="med" len="med"/>
-                    </a:lnL>
-                    <a:lnR w="6350" cap="flat" cmpd="sng" algn="ctr">
-                      <a:solidFill>
-                        <a:srgbClr val="CDCDCD"/>
-                      </a:solidFill>
-                      <a:prstDash val="solid"/>
-                      <a:round/>
-                      <a:headEnd type="none" w="med" len="med"/>
-                      <a:tailEnd type="none" w="med" len="med"/>
-                    </a:lnR>
-                    <a:lnT w="6350" cap="flat" cmpd="sng" algn="ctr">
-                      <a:solidFill>
-                        <a:srgbClr val="CDCDCD"/>
-                      </a:solidFill>
-                      <a:prstDash val="solid"/>
-                      <a:round/>
-                      <a:headEnd type="none" w="med" len="med"/>
-                      <a:tailEnd type="none" w="med" len="med"/>
-                    </a:lnT>
-                    <a:lnB w="6350" cap="flat" cmpd="sng" algn="ctr">
-                      <a:solidFill>
-                        <a:srgbClr val="CDCDCD"/>
-                      </a:solidFill>
-                      <a:prstDash val="solid"/>
-                      <a:round/>
-                      <a:headEnd type="none" w="med" len="med"/>
-                      <a:tailEnd type="none" w="med" len="med"/>
-                    </a:lnB>
-                  </a:tcPr>
-                </a:tc>
-              </a:tr>
-              <a:tr h="402336">
-                <a:tc>
-                  <a:txBody>
-                    <a:bodyPr/>
-                    <a:lstStyle/>
-                    <a:p>
-                      <a:pPr algn="l" indent="0" marL="0">
-                        <a:buNone/>
-                      </a:pPr>
-                      <a:r>
-                        <a:rPr lang="en-US" sz="1050" b="1" dirty="0">
-                          <a:solidFill>
-                            <a:srgbClr val="000000"/>
-                          </a:solidFill>
-                          <a:latin typeface="NVIDIA Sans" pitchFamily="34" charset="0"/>
-                          <a:ea typeface="NVIDIA Sans" pitchFamily="34" charset="-122"/>
-                          <a:cs typeface="NVIDIA Sans" pitchFamily="34" charset="-120"/>
-                        </a:rPr>
-                        <a:t>FlashQLA GDN kernels</a:t>
-                      </a:r>
-                      <a:endParaRPr lang="en-US" sz="1050" dirty="0">
-                        <a:latin typeface="NVIDIA Sans" charset="0"/>
-                        <a:ea typeface="NVIDIA Sans" charset="0"/>
-                        <a:cs typeface="NVIDIA Sans" charset="0"/>
-                      </a:endParaRPr>
-                    </a:p>
-                  </a:txBody>
-                  <a:tcPr marL="91440" marR="91440" marT="45720" marB="45720" anchor="ctr">
-                    <a:lnL w="6350" cap="flat" cmpd="sng" algn="ctr">
-                      <a:solidFill>
-                        <a:srgbClr val="CDCDCD"/>
-                      </a:solidFill>
-                      <a:prstDash val="solid"/>
-                      <a:round/>
-                      <a:headEnd type="none" w="med" len="med"/>
-                      <a:tailEnd type="none" w="med" len="med"/>
-                    </a:lnL>
-                    <a:lnR w="6350" cap="flat" cmpd="sng" algn="ctr">
-                      <a:solidFill>
-                        <a:srgbClr val="CDCDCD"/>
-                      </a:solidFill>
-                      <a:prstDash val="solid"/>
-                      <a:round/>
-                      <a:headEnd type="none" w="med" len="med"/>
-                      <a:tailEnd type="none" w="med" len="med"/>
-                    </a:lnR>
-                    <a:lnT w="6350" cap="flat" cmpd="sng" algn="ctr">
-                      <a:solidFill>
-                        <a:srgbClr val="CDCDCD"/>
-                      </a:solidFill>
-                      <a:prstDash val="solid"/>
-                      <a:round/>
-                      <a:headEnd type="none" w="med" len="med"/>
-                      <a:tailEnd type="none" w="med" len="med"/>
-                    </a:lnT>
-                    <a:lnB w="6350" cap="flat" cmpd="sng" algn="ctr">
-                      <a:solidFill>
-                        <a:srgbClr val="CDCDCD"/>
-                      </a:solidFill>
-                      <a:prstDash val="solid"/>
-                      <a:round/>
-                      <a:headEnd type="none" w="med" len="med"/>
-                      <a:tailEnd type="none" w="med" len="med"/>
-                    </a:lnB>
-                  </a:tcPr>
-                </a:tc>
-                <a:tc>
-                  <a:txBody>
-                    <a:bodyPr/>
-                    <a:lstStyle/>
-                    <a:p>
-                      <a:pPr algn="l" indent="0" marL="0">
-                        <a:buNone/>
-                      </a:pPr>
-                      <a:r>
-                        <a:rPr lang="en-US" sz="1000" dirty="0">
-                          <a:solidFill>
-                            <a:srgbClr val="000000"/>
-                          </a:solidFill>
-                          <a:latin typeface="NVIDIA Sans" pitchFamily="34" charset="0"/>
-                          <a:ea typeface="NVIDIA Sans" pitchFamily="34" charset="-122"/>
-                          <a:cs typeface="NVIDIA Sans" pitchFamily="34" charset="-120"/>
-                        </a:rPr>
-                        <a:t>Kernel-time ceiling analysis</a:t>
-                      </a:r>
-                      <a:endParaRPr lang="en-US" sz="1000" dirty="0">
-                        <a:latin typeface="NVIDIA Sans" charset="0"/>
-                        <a:ea typeface="NVIDIA Sans" charset="0"/>
-                        <a:cs typeface="NVIDIA Sans" charset="0"/>
-                      </a:endParaRPr>
-                    </a:p>
-                  </a:txBody>
-                  <a:tcPr marL="91440" marR="91440" marT="45720" marB="45720" anchor="ctr">
-                    <a:lnL w="6350" cap="flat" cmpd="sng" algn="ctr">
-                      <a:solidFill>
-                        <a:srgbClr val="CDCDCD"/>
-                      </a:solidFill>
-                      <a:prstDash val="solid"/>
-                      <a:round/>
-                      <a:headEnd type="none" w="med" len="med"/>
-                      <a:tailEnd type="none" w="med" len="med"/>
-                    </a:lnL>
-                    <a:lnR w="6350" cap="flat" cmpd="sng" algn="ctr">
-                      <a:solidFill>
-                        <a:srgbClr val="CDCDCD"/>
-                      </a:solidFill>
-                      <a:prstDash val="solid"/>
-                      <a:round/>
-                      <a:headEnd type="none" w="med" len="med"/>
-                      <a:tailEnd type="none" w="med" len="med"/>
-                    </a:lnR>
-                    <a:lnT w="6350" cap="flat" cmpd="sng" algn="ctr">
-                      <a:solidFill>
-                        <a:srgbClr val="CDCDCD"/>
-                      </a:solidFill>
-                      <a:prstDash val="solid"/>
-                      <a:round/>
-                      <a:headEnd type="none" w="med" len="med"/>
-                      <a:tailEnd type="none" w="med" len="med"/>
-                    </a:lnT>
-                    <a:lnB w="6350" cap="flat" cmpd="sng" algn="ctr">
-                      <a:solidFill>
-                        <a:srgbClr val="CDCDCD"/>
-                      </a:solidFill>
-                      <a:prstDash val="solid"/>
-                      <a:round/>
-                      <a:headEnd type="none" w="med" len="med"/>
-                      <a:tailEnd type="none" w="med" len="med"/>
-                    </a:lnB>
-                  </a:tcPr>
-                </a:tc>
-                <a:tc>
-                  <a:txBody>
-                    <a:bodyPr/>
-                    <a:lstStyle/>
-                    <a:p>
-                      <a:pPr algn="l" indent="0" marL="0">
-                        <a:buNone/>
-                      </a:pPr>
-                      <a:r>
-                        <a:rPr lang="en-US" sz="1000" dirty="0">
-                          <a:solidFill>
-                            <a:srgbClr val="000000"/>
-                          </a:solidFill>
-                          <a:latin typeface="NVIDIA Sans" pitchFamily="34" charset="0"/>
-                          <a:ea typeface="NVIDIA Sans" pitchFamily="34" charset="-122"/>
-                          <a:cs typeface="NVIDIA Sans" pitchFamily="34" charset="-120"/>
-                        </a:rPr>
-                        <a:t>Only ~10.5 ms/step of GDN time exists; needs torch ≥ 2.8 — deferred, not worth the risk now</a:t>
-                      </a:r>
-                      <a:endParaRPr lang="en-US" sz="1000" dirty="0">
-                        <a:latin typeface="NVIDIA Sans" charset="0"/>
-                        <a:ea typeface="NVIDIA Sans" charset="0"/>
-                        <a:cs typeface="NVIDIA Sans" charset="0"/>
-                      </a:endParaRPr>
-                    </a:p>
-                  </a:txBody>
-                  <a:tcPr marL="91440" marR="91440" marT="45720" marB="45720" anchor="ctr">
-                    <a:lnL w="6350" cap="flat" cmpd="sng" algn="ctr">
-                      <a:solidFill>
-                        <a:srgbClr val="CDCDCD"/>
-                      </a:solidFill>
-                      <a:prstDash val="solid"/>
-                      <a:round/>
-                      <a:headEnd type="none" w="med" len="med"/>
-                      <a:tailEnd type="none" w="med" len="med"/>
-                    </a:lnL>
-                    <a:lnR w="6350" cap="flat" cmpd="sng" algn="ctr">
-                      <a:solidFill>
-                        <a:srgbClr val="CDCDCD"/>
-                      </a:solidFill>
-                      <a:prstDash val="solid"/>
-                      <a:round/>
-                      <a:headEnd type="none" w="med" len="med"/>
-                      <a:tailEnd type="none" w="med" len="med"/>
-                    </a:lnR>
-                    <a:lnT w="6350" cap="flat" cmpd="sng" algn="ctr">
-                      <a:solidFill>
-                        <a:srgbClr val="CDCDCD"/>
-                      </a:solidFill>
-                      <a:prstDash val="solid"/>
-                      <a:round/>
-                      <a:headEnd type="none" w="med" len="med"/>
-                      <a:tailEnd type="none" w="med" len="med"/>
-                    </a:lnT>
-                    <a:lnB w="6350" cap="flat" cmpd="sng" algn="ctr">
-                      <a:solidFill>
-                        <a:srgbClr val="CDCDCD"/>
-                      </a:solidFill>
-                      <a:prstDash val="solid"/>
-                      <a:round/>
-                      <a:headEnd type="none" w="med" len="med"/>
-                      <a:tailEnd type="none" w="med" len="med"/>
-                    </a:lnB>
-                  </a:tcPr>
-                </a:tc>
-              </a:tr>
-            </a:tbl>
-          </a:graphicData>
-        </a:graphic>
-      </p:graphicFrame>
-      <p:sp>
-        <p:nvSpPr>
-          <p:cNvPr id="5" name="Text 2"/>
+      <p:sp>
+        <p:nvSpPr>
+          <p:cNvPr id="4" name="Text 2"/>
+          <p:cNvSpPr/>
+          <p:nvPr/>
+        </p:nvSpPr>
+        <p:spPr>
+          <a:xfrm>
+            <a:off x="457200" y="1261872"/>
+            <a:ext cx="4023360" cy="274320"/>
+          </a:xfrm>
+          <a:prstGeom prst="rect">
+            <a:avLst/>
+          </a:prstGeom>
+          <a:noFill/>
+          <a:ln/>
+        </p:spPr>
+        <p:txBody>
+          <a:bodyPr wrap="square" lIns="0" tIns="0" rIns="0" bIns="0" rtlCol="0" anchor="ctr"/>
+          <a:lstStyle/>
+          <a:p>
+            <a:pPr indent="0" marL="0">
+              <a:buNone/>
+            </a:pPr>
+            <a:r>
+              <a:rPr lang="en-US" sz="1400" b="1" dirty="0">
+                <a:solidFill>
+                  <a:srgbClr val="76B900"/>
+                </a:solidFill>
+                <a:latin typeface="NVIDIA Sans" pitchFamily="34" charset="0"/>
+                <a:ea typeface="NVIDIA Sans" pitchFamily="34" charset="-122"/>
+                <a:cs typeface="NVIDIA Sans" pitchFamily="34" charset="-120"/>
+              </a:rPr>
+              <a:t>Next levers (ranked by ceiling)</a:t>
+            </a:r>
+            <a:endParaRPr lang="en-US" sz="1400" dirty="0"/>
+          </a:p>
+        </p:txBody>
+      </p:sp>
+      <p:sp>
+        <p:nvSpPr>
+          <p:cNvPr id="5" name="Shape 3"/>
+          <p:cNvSpPr/>
+          <p:nvPr/>
+        </p:nvSpPr>
+        <p:spPr>
+          <a:xfrm>
+            <a:off x="457200" y="1609344"/>
+            <a:ext cx="45720" cy="603504"/>
+          </a:xfrm>
+          <a:prstGeom prst="rect">
+            <a:avLst/>
+          </a:prstGeom>
+          <a:solidFill>
+            <a:srgbClr val="76B900"/>
+          </a:solidFill>
+          <a:ln/>
+        </p:spPr>
+      </p:sp>
+      <p:sp>
+        <p:nvSpPr>
+          <p:cNvPr id="6" name="Text 4"/>
+          <p:cNvSpPr/>
+          <p:nvPr/>
+        </p:nvSpPr>
+        <p:spPr>
+          <a:xfrm>
+            <a:off x="603504" y="1591056"/>
+            <a:ext cx="3877056" cy="201168"/>
+          </a:xfrm>
+          <a:prstGeom prst="rect">
+            <a:avLst/>
+          </a:prstGeom>
+          <a:noFill/>
+          <a:ln/>
+        </p:spPr>
+        <p:txBody>
+          <a:bodyPr wrap="square" lIns="0" tIns="0" rIns="0" bIns="0" rtlCol="0" anchor="ctr"/>
+          <a:lstStyle/>
+          <a:p>
+            <a:pPr indent="0" marL="0">
+              <a:buNone/>
+            </a:pPr>
+            <a:r>
+              <a:rPr lang="en-US" sz="1100" b="1" dirty="0">
+                <a:solidFill>
+                  <a:srgbClr val="000000"/>
+                </a:solidFill>
+                <a:latin typeface="NVIDIA Sans" pitchFamily="34" charset="0"/>
+                <a:ea typeface="NVIDIA Sans" pitchFamily="34" charset="-122"/>
+                <a:cs typeface="NVIDIA Sans" pitchFamily="34" charset="-120"/>
+              </a:rPr>
+              <a:t>fp8 for the backward GEMMs</a:t>
+            </a:r>
+            <a:endParaRPr lang="en-US" sz="1100" dirty="0"/>
+          </a:p>
+        </p:txBody>
+      </p:sp>
+      <p:sp>
+        <p:nvSpPr>
+          <p:cNvPr id="7" name="Text 5"/>
+          <p:cNvSpPr/>
+          <p:nvPr/>
+        </p:nvSpPr>
+        <p:spPr>
+          <a:xfrm>
+            <a:off x="603504" y="1792224"/>
+            <a:ext cx="3877056" cy="438912"/>
+          </a:xfrm>
+          <a:prstGeom prst="rect">
+            <a:avLst/>
+          </a:prstGeom>
+          <a:noFill/>
+          <a:ln/>
+        </p:spPr>
+        <p:txBody>
+          <a:bodyPr wrap="square" lIns="0" tIns="0" rIns="0" bIns="0" rtlCol="0" anchor="t"/>
+          <a:lstStyle/>
+          <a:p>
+            <a:pPr indent="0" marL="0">
+              <a:buNone/>
+            </a:pPr>
+            <a:r>
+              <a:rPr lang="en-US" sz="900" dirty="0">
+                <a:solidFill>
+                  <a:srgbClr val="5E5E5E"/>
+                </a:solidFill>
+                <a:latin typeface="NVIDIA Sans" pitchFamily="34" charset="0"/>
+                <a:ea typeface="NVIDIA Sans" pitchFamily="34" charset="-122"/>
+                <a:cs typeface="NVIDIA Sans" pitchFamily="34" charset="-120"/>
+              </a:rPr>
+              <a:t>Sustained GEMM throughput caps at ~622 TFLOPS on this node (power wall, not occupancy) — fp8 is the only math lever left.</a:t>
+            </a:r>
+            <a:endParaRPr lang="en-US" sz="900" dirty="0"/>
+          </a:p>
+        </p:txBody>
+      </p:sp>
+      <p:sp>
+        <p:nvSpPr>
+          <p:cNvPr id="8" name="Shape 6"/>
+          <p:cNvSpPr/>
+          <p:nvPr/>
+        </p:nvSpPr>
+        <p:spPr>
+          <a:xfrm>
+            <a:off x="457200" y="2322576"/>
+            <a:ext cx="45720" cy="603504"/>
+          </a:xfrm>
+          <a:prstGeom prst="rect">
+            <a:avLst/>
+          </a:prstGeom>
+          <a:solidFill>
+            <a:srgbClr val="76B900"/>
+          </a:solidFill>
+          <a:ln/>
+        </p:spPr>
+      </p:sp>
+      <p:sp>
+        <p:nvSpPr>
+          <p:cNvPr id="9" name="Text 7"/>
+          <p:cNvSpPr/>
+          <p:nvPr/>
+        </p:nvSpPr>
+        <p:spPr>
+          <a:xfrm>
+            <a:off x="603504" y="2304288"/>
+            <a:ext cx="3877056" cy="201168"/>
+          </a:xfrm>
+          <a:prstGeom prst="rect">
+            <a:avLst/>
+          </a:prstGeom>
+          <a:noFill/>
+          <a:ln/>
+        </p:spPr>
+        <p:txBody>
+          <a:bodyPr wrap="square" lIns="0" tIns="0" rIns="0" bIns="0" rtlCol="0" anchor="ctr"/>
+          <a:lstStyle/>
+          <a:p>
+            <a:pPr indent="0" marL="0">
+              <a:buNone/>
+            </a:pPr>
+            <a:r>
+              <a:rPr lang="en-US" sz="1100" b="1" dirty="0">
+                <a:solidFill>
+                  <a:srgbClr val="000000"/>
+                </a:solidFill>
+                <a:latin typeface="NVIDIA Sans" pitchFamily="34" charset="0"/>
+                <a:ea typeface="NVIDIA Sans" pitchFamily="34" charset="-122"/>
+                <a:cs typeface="NVIDIA Sans" pitchFamily="34" charset="-120"/>
+              </a:rPr>
+              <a:t>Gradient compression / 1-bit Adam</a:t>
+            </a:r>
+            <a:endParaRPr lang="en-US" sz="1100" dirty="0"/>
+          </a:p>
+        </p:txBody>
+      </p:sp>
+      <p:sp>
+        <p:nvSpPr>
+          <p:cNvPr id="10" name="Text 8"/>
+          <p:cNvSpPr/>
+          <p:nvPr/>
+        </p:nvSpPr>
+        <p:spPr>
+          <a:xfrm>
+            <a:off x="603504" y="2505456"/>
+            <a:ext cx="3877056" cy="438912"/>
+          </a:xfrm>
+          <a:prstGeom prst="rect">
+            <a:avLst/>
+          </a:prstGeom>
+          <a:noFill/>
+          <a:ln/>
+        </p:spPr>
+        <p:txBody>
+          <a:bodyPr wrap="square" lIns="0" tIns="0" rIns="0" bIns="0" rtlCol="0" anchor="t"/>
+          <a:lstStyle/>
+          <a:p>
+            <a:pPr indent="0" marL="0">
+              <a:buNone/>
+            </a:pPr>
+            <a:r>
+              <a:rPr lang="en-US" sz="900" dirty="0">
+                <a:solidFill>
+                  <a:srgbClr val="5E5E5E"/>
+                </a:solidFill>
+                <a:latin typeface="NVIDIA Sans" pitchFamily="34" charset="0"/>
+                <a:ea typeface="NVIDIA Sans" pitchFamily="34" charset="-122"/>
+                <a:cs typeface="NVIDIA Sans" pitchFamily="34" charset="-120"/>
+              </a:rPr>
+              <a:t>NVLink is at its ceiling, so bytes are the only comm lever for the ~30 ms of exposed AllReduce. Needs convergence sign-off.</a:t>
+            </a:r>
+            <a:endParaRPr lang="en-US" sz="900" dirty="0"/>
+          </a:p>
+        </p:txBody>
+      </p:sp>
+      <p:sp>
+        <p:nvSpPr>
+          <p:cNvPr id="11" name="Shape 9"/>
+          <p:cNvSpPr/>
+          <p:nvPr/>
+        </p:nvSpPr>
+        <p:spPr>
+          <a:xfrm>
+            <a:off x="457200" y="3035808"/>
+            <a:ext cx="45720" cy="603504"/>
+          </a:xfrm>
+          <a:prstGeom prst="rect">
+            <a:avLst/>
+          </a:prstGeom>
+          <a:solidFill>
+            <a:srgbClr val="76B900"/>
+          </a:solidFill>
+          <a:ln/>
+        </p:spPr>
+      </p:sp>
+      <p:sp>
+        <p:nvSpPr>
+          <p:cNvPr id="12" name="Text 10"/>
+          <p:cNvSpPr/>
+          <p:nvPr/>
+        </p:nvSpPr>
+        <p:spPr>
+          <a:xfrm>
+            <a:off x="603504" y="3017520"/>
+            <a:ext cx="3877056" cy="201168"/>
+          </a:xfrm>
+          <a:prstGeom prst="rect">
+            <a:avLst/>
+          </a:prstGeom>
+          <a:noFill/>
+          <a:ln/>
+        </p:spPr>
+        <p:txBody>
+          <a:bodyPr wrap="square" lIns="0" tIns="0" rIns="0" bIns="0" rtlCol="0" anchor="ctr"/>
+          <a:lstStyle/>
+          <a:p>
+            <a:pPr indent="0" marL="0">
+              <a:buNone/>
+            </a:pPr>
+            <a:r>
+              <a:rPr lang="en-US" sz="1100" b="1" dirty="0">
+                <a:solidFill>
+                  <a:srgbClr val="000000"/>
+                </a:solidFill>
+                <a:latin typeface="NVIDIA Sans" pitchFamily="34" charset="0"/>
+                <a:ea typeface="NVIDIA Sans" pitchFamily="34" charset="-122"/>
+                <a:cs typeface="NVIDIA Sans" pitchFamily="34" charset="-120"/>
+              </a:rPr>
+              <a:t>Overlap the param AllGather (44 ms)</a:t>
+            </a:r>
+            <a:endParaRPr lang="en-US" sz="1100" dirty="0"/>
+          </a:p>
+        </p:txBody>
+      </p:sp>
+      <p:sp>
+        <p:nvSpPr>
+          <p:cNvPr id="13" name="Text 11"/>
+          <p:cNvSpPr/>
+          <p:nvPr/>
+        </p:nvSpPr>
+        <p:spPr>
+          <a:xfrm>
+            <a:off x="603504" y="3218688"/>
+            <a:ext cx="3877056" cy="438912"/>
+          </a:xfrm>
+          <a:prstGeom prst="rect">
+            <a:avLst/>
+          </a:prstGeom>
+          <a:noFill/>
+          <a:ln/>
+        </p:spPr>
+        <p:txBody>
+          <a:bodyPr wrap="square" lIns="0" tIns="0" rIns="0" bIns="0" rtlCol="0" anchor="t"/>
+          <a:lstStyle/>
+          <a:p>
+            <a:pPr indent="0" marL="0">
+              <a:buNone/>
+            </a:pPr>
+            <a:r>
+              <a:rPr lang="en-US" sz="900" dirty="0">
+                <a:solidFill>
+                  <a:srgbClr val="5E5E5E"/>
+                </a:solidFill>
+                <a:latin typeface="NVIDIA Sans" pitchFamily="34" charset="0"/>
+                <a:ea typeface="NVIDIA Sans" pitchFamily="34" charset="-122"/>
+                <a:cs typeface="NVIDIA Sans" pitchFamily="34" charset="-120"/>
+              </a:rPr>
+              <a:t>The step-end AllGather is now fully exposed and ZeRO-2 cannot overlap it — adopt FSDP, or add an async gather to ZeRO-2.</a:t>
+            </a:r>
+            <a:endParaRPr lang="en-US" sz="900" dirty="0"/>
+          </a:p>
+        </p:txBody>
+      </p:sp>
+      <p:sp>
+        <p:nvSpPr>
+          <p:cNvPr id="14" name="Shape 12"/>
+          <p:cNvSpPr/>
+          <p:nvPr/>
+        </p:nvSpPr>
+        <p:spPr>
+          <a:xfrm>
+            <a:off x="457200" y="3749040"/>
+            <a:ext cx="45720" cy="603504"/>
+          </a:xfrm>
+          <a:prstGeom prst="rect">
+            <a:avLst/>
+          </a:prstGeom>
+          <a:solidFill>
+            <a:srgbClr val="76B900"/>
+          </a:solidFill>
+          <a:ln/>
+        </p:spPr>
+      </p:sp>
+      <p:sp>
+        <p:nvSpPr>
+          <p:cNvPr id="15" name="Text 13"/>
+          <p:cNvSpPr/>
+          <p:nvPr/>
+        </p:nvSpPr>
+        <p:spPr>
+          <a:xfrm>
+            <a:off x="603504" y="3730752"/>
+            <a:ext cx="3877056" cy="201168"/>
+          </a:xfrm>
+          <a:prstGeom prst="rect">
+            <a:avLst/>
+          </a:prstGeom>
+          <a:noFill/>
+          <a:ln/>
+        </p:spPr>
+        <p:txBody>
+          <a:bodyPr wrap="square" lIns="0" tIns="0" rIns="0" bIns="0" rtlCol="0" anchor="ctr"/>
+          <a:lstStyle/>
+          <a:p>
+            <a:pPr indent="0" marL="0">
+              <a:buNone/>
+            </a:pPr>
+            <a:r>
+              <a:rPr lang="en-US" sz="1100" b="1" dirty="0">
+                <a:solidFill>
+                  <a:srgbClr val="000000"/>
+                </a:solidFill>
+                <a:latin typeface="NVIDIA Sans" pitchFamily="34" charset="0"/>
+                <a:ea typeface="NVIDIA Sans" pitchFamily="34" charset="-122"/>
+                <a:cs typeface="NVIDIA Sans" pitchFamily="34" charset="-120"/>
+              </a:rPr>
+              <a:t>Deployment &amp; batch</a:t>
+            </a:r>
+            <a:endParaRPr lang="en-US" sz="1100" dirty="0"/>
+          </a:p>
+        </p:txBody>
+      </p:sp>
+      <p:sp>
+        <p:nvSpPr>
+          <p:cNvPr id="16" name="Text 14"/>
+          <p:cNvSpPr/>
+          <p:nvPr/>
+        </p:nvSpPr>
+        <p:spPr>
+          <a:xfrm>
+            <a:off x="603504" y="3931920"/>
+            <a:ext cx="3877056" cy="438912"/>
+          </a:xfrm>
+          <a:prstGeom prst="rect">
+            <a:avLst/>
+          </a:prstGeom>
+          <a:noFill/>
+          <a:ln/>
+        </p:spPr>
+        <p:txBody>
+          <a:bodyPr wrap="square" lIns="0" tIns="0" rIns="0" bIns="0" rtlCol="0" anchor="t"/>
+          <a:lstStyle/>
+          <a:p>
+            <a:pPr indent="0" marL="0">
+              <a:buNone/>
+            </a:pPr>
+            <a:r>
+              <a:rPr lang="en-US" sz="900" dirty="0">
+                <a:solidFill>
+                  <a:srgbClr val="5E5E5E"/>
+                </a:solidFill>
+                <a:latin typeface="NVIDIA Sans" pitchFamily="34" charset="0"/>
+                <a:ea typeface="NVIDIA Sans" pitchFamily="34" charset="-122"/>
+                <a:cs typeface="NVIDIA Sans" pitchFamily="34" charset="-120"/>
+              </a:rPr>
+              <a:t>Split-topology nodes (4+4 NVLink) need NCCL_P2P_LEVEL=NVL. bs 24 (340 samples/node/s) is gated on a convergence run.</a:t>
+            </a:r>
+            <a:endParaRPr lang="en-US" sz="900" dirty="0"/>
+          </a:p>
+        </p:txBody>
+      </p:sp>
+      <p:sp>
+        <p:nvSpPr>
+          <p:cNvPr id="17" name="Text 15"/>
+          <p:cNvSpPr/>
+          <p:nvPr/>
+        </p:nvSpPr>
+        <p:spPr>
+          <a:xfrm>
+            <a:off x="4663440" y="1261872"/>
+            <a:ext cx="4023360" cy="274320"/>
+          </a:xfrm>
+          <a:prstGeom prst="rect">
+            <a:avLst/>
+          </a:prstGeom>
+          <a:noFill/>
+          <a:ln/>
+        </p:spPr>
+        <p:txBody>
+          <a:bodyPr wrap="square" lIns="0" tIns="0" rIns="0" bIns="0" rtlCol="0" anchor="ctr"/>
+          <a:lstStyle/>
+          <a:p>
+            <a:pPr indent="0" marL="0">
+              <a:buNone/>
+            </a:pPr>
+            <a:r>
+              <a:rPr lang="en-US" sz="1400" b="1" dirty="0">
+                <a:solidFill>
+                  <a:srgbClr val="890C58"/>
+                </a:solidFill>
+                <a:latin typeface="NVIDIA Sans" pitchFamily="34" charset="0"/>
+                <a:ea typeface="NVIDIA Sans" pitchFamily="34" charset="-122"/>
+                <a:cs typeface="NVIDIA Sans" pitchFamily="34" charset="-120"/>
+              </a:rPr>
+              <a:t>Don't retry — we measured</a:t>
+            </a:r>
+            <a:endParaRPr lang="en-US" sz="1400" dirty="0"/>
+          </a:p>
+        </p:txBody>
+      </p:sp>
+      <p:sp>
+        <p:nvSpPr>
+          <p:cNvPr id="18" name="Shape 16"/>
+          <p:cNvSpPr/>
+          <p:nvPr/>
+        </p:nvSpPr>
+        <p:spPr>
+          <a:xfrm>
+            <a:off x="4663440" y="1609344"/>
+            <a:ext cx="45720" cy="603504"/>
+          </a:xfrm>
+          <a:prstGeom prst="rect">
+            <a:avLst/>
+          </a:prstGeom>
+          <a:solidFill>
+            <a:srgbClr val="890C58"/>
+          </a:solidFill>
+          <a:ln/>
+        </p:spPr>
+      </p:sp>
+      <p:sp>
+        <p:nvSpPr>
+          <p:cNvPr id="19" name="Text 17"/>
+          <p:cNvSpPr/>
+          <p:nvPr/>
+        </p:nvSpPr>
+        <p:spPr>
+          <a:xfrm>
+            <a:off x="4809744" y="1591056"/>
+            <a:ext cx="3877056" cy="201168"/>
+          </a:xfrm>
+          <a:prstGeom prst="rect">
+            <a:avLst/>
+          </a:prstGeom>
+          <a:noFill/>
+          <a:ln/>
+        </p:spPr>
+        <p:txBody>
+          <a:bodyPr wrap="square" lIns="0" tIns="0" rIns="0" bIns="0" rtlCol="0" anchor="ctr"/>
+          <a:lstStyle/>
+          <a:p>
+            <a:pPr indent="0" marL="0">
+              <a:buNone/>
+            </a:pPr>
+            <a:r>
+              <a:rPr lang="en-US" sz="1100" b="1" dirty="0">
+                <a:solidFill>
+                  <a:srgbClr val="000000"/>
+                </a:solidFill>
+                <a:latin typeface="NVIDIA Sans" pitchFamily="34" charset="0"/>
+                <a:ea typeface="NVIDIA Sans" pitchFamily="34" charset="-122"/>
+                <a:cs typeface="NVIDIA Sans" pitchFamily="34" charset="-120"/>
+              </a:rPr>
+              <a:t>FA2 for the text stack too</a:t>
+            </a:r>
+            <a:endParaRPr lang="en-US" sz="1100" dirty="0"/>
+          </a:p>
+        </p:txBody>
+      </p:sp>
+      <p:sp>
+        <p:nvSpPr>
+          <p:cNvPr id="20" name="Text 18"/>
+          <p:cNvSpPr/>
+          <p:nvPr/>
+        </p:nvSpPr>
+        <p:spPr>
+          <a:xfrm>
+            <a:off x="4809744" y="1792224"/>
+            <a:ext cx="3877056" cy="438912"/>
+          </a:xfrm>
+          <a:prstGeom prst="rect">
+            <a:avLst/>
+          </a:prstGeom>
+          <a:noFill/>
+          <a:ln/>
+        </p:spPr>
+        <p:txBody>
+          <a:bodyPr wrap="square" lIns="0" tIns="0" rIns="0" bIns="0" rtlCol="0" anchor="t"/>
+          <a:lstStyle/>
+          <a:p>
+            <a:pPr indent="0" marL="0">
+              <a:buNone/>
+            </a:pPr>
+            <a:r>
+              <a:rPr lang="en-US" sz="900" dirty="0">
+                <a:solidFill>
+                  <a:srgbClr val="5E5E5E"/>
+                </a:solidFill>
+                <a:latin typeface="NVIDIA Sans" pitchFamily="34" charset="0"/>
+                <a:ea typeface="NVIDIA Sans" pitchFamily="34" charset="-122"/>
+                <a:cs typeface="NVIDIA Sans" pitchFamily="34" charset="-120"/>
+              </a:rPr>
+              <a:t>+10 ms at seq 192: unpad/repad overhead outweighs the kernel gains. Mixed (vision-only FA2) is the right split.</a:t>
+            </a:r>
+            <a:endParaRPr lang="en-US" sz="900" dirty="0"/>
+          </a:p>
+        </p:txBody>
+      </p:sp>
+      <p:sp>
+        <p:nvSpPr>
+          <p:cNvPr id="21" name="Shape 19"/>
+          <p:cNvSpPr/>
+          <p:nvPr/>
+        </p:nvSpPr>
+        <p:spPr>
+          <a:xfrm>
+            <a:off x="4663440" y="2322576"/>
+            <a:ext cx="45720" cy="603504"/>
+          </a:xfrm>
+          <a:prstGeom prst="rect">
+            <a:avLst/>
+          </a:prstGeom>
+          <a:solidFill>
+            <a:srgbClr val="890C58"/>
+          </a:solidFill>
+          <a:ln/>
+        </p:spPr>
+      </p:sp>
+      <p:sp>
+        <p:nvSpPr>
+          <p:cNvPr id="22" name="Text 20"/>
+          <p:cNvSpPr/>
+          <p:nvPr/>
+        </p:nvSpPr>
+        <p:spPr>
+          <a:xfrm>
+            <a:off x="4809744" y="2304288"/>
+            <a:ext cx="3877056" cy="201168"/>
+          </a:xfrm>
+          <a:prstGeom prst="rect">
+            <a:avLst/>
+          </a:prstGeom>
+          <a:noFill/>
+          <a:ln/>
+        </p:spPr>
+        <p:txBody>
+          <a:bodyPr wrap="square" lIns="0" tIns="0" rIns="0" bIns="0" rtlCol="0" anchor="ctr"/>
+          <a:lstStyle/>
+          <a:p>
+            <a:pPr indent="0" marL="0">
+              <a:buNone/>
+            </a:pPr>
+            <a:r>
+              <a:rPr lang="en-US" sz="1100" b="1" dirty="0">
+                <a:solidFill>
+                  <a:srgbClr val="000000"/>
+                </a:solidFill>
+                <a:latin typeface="NVIDIA Sans" pitchFamily="34" charset="0"/>
+                <a:ea typeface="NVIDIA Sans" pitchFamily="34" charset="-122"/>
+                <a:cs typeface="NVIDIA Sans" pitchFamily="34" charset="-120"/>
+              </a:rPr>
+              <a:t>NCCL knob tuning (NVLS / protocol / channels)</a:t>
+            </a:r>
+            <a:endParaRPr lang="en-US" sz="1100" dirty="0"/>
+          </a:p>
+        </p:txBody>
+      </p:sp>
+      <p:sp>
+        <p:nvSpPr>
+          <p:cNvPr id="23" name="Text 21"/>
+          <p:cNvSpPr/>
+          <p:nvPr/>
+        </p:nvSpPr>
+        <p:spPr>
+          <a:xfrm>
+            <a:off x="4809744" y="2505456"/>
+            <a:ext cx="3877056" cy="438912"/>
+          </a:xfrm>
+          <a:prstGeom prst="rect">
+            <a:avLst/>
+          </a:prstGeom>
+          <a:noFill/>
+          <a:ln/>
+        </p:spPr>
+        <p:txBody>
+          <a:bodyPr wrap="square" lIns="0" tIns="0" rIns="0" bIns="0" rtlCol="0" anchor="t"/>
+          <a:lstStyle/>
+          <a:p>
+            <a:pPr indent="0" marL="0">
+              <a:buNone/>
+            </a:pPr>
+            <a:r>
+              <a:rPr lang="en-US" sz="900" dirty="0">
+                <a:solidFill>
+                  <a:srgbClr val="5E5E5E"/>
+                </a:solidFill>
+                <a:latin typeface="NVIDIA Sans" pitchFamily="34" charset="0"/>
+                <a:ea typeface="NVIDIA Sans" pitchFamily="34" charset="-122"/>
+                <a:cs typeface="NVIDIA Sans" pitchFamily="34" charset="-120"/>
+              </a:rPr>
+              <a:t>AllReduce microbench already hits 478 GB/s busbw — the NVLink per-direction ceiling. Config cannot add bandwidth.</a:t>
+            </a:r>
+            <a:endParaRPr lang="en-US" sz="900" dirty="0"/>
+          </a:p>
+        </p:txBody>
+      </p:sp>
+      <p:sp>
+        <p:nvSpPr>
+          <p:cNvPr id="24" name="Shape 22"/>
+          <p:cNvSpPr/>
+          <p:nvPr/>
+        </p:nvSpPr>
+        <p:spPr>
+          <a:xfrm>
+            <a:off x="4663440" y="3035808"/>
+            <a:ext cx="45720" cy="603504"/>
+          </a:xfrm>
+          <a:prstGeom prst="rect">
+            <a:avLst/>
+          </a:prstGeom>
+          <a:solidFill>
+            <a:srgbClr val="890C58"/>
+          </a:solidFill>
+          <a:ln/>
+        </p:spPr>
+      </p:sp>
+      <p:sp>
+        <p:nvSpPr>
+          <p:cNvPr id="25" name="Text 23"/>
+          <p:cNvSpPr/>
+          <p:nvPr/>
+        </p:nvSpPr>
+        <p:spPr>
+          <a:xfrm>
+            <a:off x="4809744" y="3017520"/>
+            <a:ext cx="3877056" cy="201168"/>
+          </a:xfrm>
+          <a:prstGeom prst="rect">
+            <a:avLst/>
+          </a:prstGeom>
+          <a:noFill/>
+          <a:ln/>
+        </p:spPr>
+        <p:txBody>
+          <a:bodyPr wrap="square" lIns="0" tIns="0" rIns="0" bIns="0" rtlCol="0" anchor="ctr"/>
+          <a:lstStyle/>
+          <a:p>
+            <a:pPr indent="0" marL="0">
+              <a:buNone/>
+            </a:pPr>
+            <a:r>
+              <a:rPr lang="en-US" sz="1100" b="1" dirty="0">
+                <a:solidFill>
+                  <a:srgbClr val="000000"/>
+                </a:solidFill>
+                <a:latin typeface="NVIDIA Sans" pitchFamily="34" charset="0"/>
+                <a:ea typeface="NVIDIA Sans" pitchFamily="34" charset="-122"/>
+                <a:cs typeface="NVIDIA Sans" pitchFamily="34" charset="-120"/>
+              </a:rPr>
+              <a:t>One giant decoder graph</a:t>
+            </a:r>
+            <a:endParaRPr lang="en-US" sz="1100" dirty="0"/>
+          </a:p>
+        </p:txBody>
+      </p:sp>
+      <p:sp>
+        <p:nvSpPr>
+          <p:cNvPr id="26" name="Text 24"/>
+          <p:cNvSpPr/>
+          <p:nvPr/>
+        </p:nvSpPr>
+        <p:spPr>
+          <a:xfrm>
+            <a:off x="4809744" y="3218688"/>
+            <a:ext cx="3877056" cy="438912"/>
+          </a:xfrm>
+          <a:prstGeom prst="rect">
+            <a:avLst/>
+          </a:prstGeom>
+          <a:noFill/>
+          <a:ln/>
+        </p:spPr>
+        <p:txBody>
+          <a:bodyPr wrap="square" lIns="0" tIns="0" rIns="0" bIns="0" rtlCol="0" anchor="t"/>
+          <a:lstStyle/>
+          <a:p>
+            <a:pPr indent="0" marL="0">
+              <a:buNone/>
+            </a:pPr>
+            <a:r>
+              <a:rPr lang="en-US" sz="900" dirty="0">
+                <a:solidFill>
+                  <a:srgbClr val="5E5E5E"/>
+                </a:solidFill>
+                <a:latin typeface="NVIDIA Sans" pitchFamily="34" charset="0"/>
+                <a:ea typeface="NVIDIA Sans" pitchFamily="34" charset="-122"/>
+                <a:cs typeface="NVIDIA Sans" pitchFamily="34" charset="-120"/>
+              </a:rPr>
+              <a:t>Library graph-breaks fragment the capture, and a single graph would defer every AllReduce to the step end (page 10).</a:t>
+            </a:r>
+            <a:endParaRPr lang="en-US" sz="900" dirty="0"/>
+          </a:p>
+        </p:txBody>
+      </p:sp>
+      <p:sp>
+        <p:nvSpPr>
+          <p:cNvPr id="27" name="Shape 25"/>
+          <p:cNvSpPr/>
+          <p:nvPr/>
+        </p:nvSpPr>
+        <p:spPr>
+          <a:xfrm>
+            <a:off x="4663440" y="3749040"/>
+            <a:ext cx="45720" cy="603504"/>
+          </a:xfrm>
+          <a:prstGeom prst="rect">
+            <a:avLst/>
+          </a:prstGeom>
+          <a:solidFill>
+            <a:srgbClr val="890C58"/>
+          </a:solidFill>
+          <a:ln/>
+        </p:spPr>
+      </p:sp>
+      <p:sp>
+        <p:nvSpPr>
+          <p:cNvPr id="28" name="Text 26"/>
+          <p:cNvSpPr/>
+          <p:nvPr/>
+        </p:nvSpPr>
+        <p:spPr>
+          <a:xfrm>
+            <a:off x="4809744" y="3730752"/>
+            <a:ext cx="3877056" cy="201168"/>
+          </a:xfrm>
+          <a:prstGeom prst="rect">
+            <a:avLst/>
+          </a:prstGeom>
+          <a:noFill/>
+          <a:ln/>
+        </p:spPr>
+        <p:txBody>
+          <a:bodyPr wrap="square" lIns="0" tIns="0" rIns="0" bIns="0" rtlCol="0" anchor="ctr"/>
+          <a:lstStyle/>
+          <a:p>
+            <a:pPr indent="0" marL="0">
+              <a:buNone/>
+            </a:pPr>
+            <a:r>
+              <a:rPr lang="en-US" sz="1100" b="1" dirty="0">
+                <a:solidFill>
+                  <a:srgbClr val="000000"/>
+                </a:solidFill>
+                <a:latin typeface="NVIDIA Sans" pitchFamily="34" charset="0"/>
+                <a:ea typeface="NVIDIA Sans" pitchFamily="34" charset="-122"/>
+                <a:cs typeface="NVIDIA Sans" pitchFamily="34" charset="-120"/>
+              </a:rPr>
+              <a:t>FlashQLA GDN kernels</a:t>
+            </a:r>
+            <a:endParaRPr lang="en-US" sz="1100" dirty="0"/>
+          </a:p>
+        </p:txBody>
+      </p:sp>
+      <p:sp>
+        <p:nvSpPr>
+          <p:cNvPr id="29" name="Text 27"/>
+          <p:cNvSpPr/>
+          <p:nvPr/>
+        </p:nvSpPr>
+        <p:spPr>
+          <a:xfrm>
+            <a:off x="4809744" y="3931920"/>
+            <a:ext cx="3877056" cy="438912"/>
+          </a:xfrm>
+          <a:prstGeom prst="rect">
+            <a:avLst/>
+          </a:prstGeom>
+          <a:noFill/>
+          <a:ln/>
+        </p:spPr>
+        <p:txBody>
+          <a:bodyPr wrap="square" lIns="0" tIns="0" rIns="0" bIns="0" rtlCol="0" anchor="t"/>
+          <a:lstStyle/>
+          <a:p>
+            <a:pPr indent="0" marL="0">
+              <a:buNone/>
+            </a:pPr>
+            <a:r>
+              <a:rPr lang="en-US" sz="900" dirty="0">
+                <a:solidFill>
+                  <a:srgbClr val="5E5E5E"/>
+                </a:solidFill>
+                <a:latin typeface="NVIDIA Sans" pitchFamily="34" charset="0"/>
+                <a:ea typeface="NVIDIA Sans" pitchFamily="34" charset="-122"/>
+                <a:cs typeface="NVIDIA Sans" pitchFamily="34" charset="-120"/>
+              </a:rPr>
+              <a:t>Total GDN kernel time is only ~10.5 ms/step at seq 192 — below the integration risk; also needs torch ≥ 2.8.</a:t>
+            </a:r>
+            <a:endParaRPr lang="en-US" sz="900" dirty="0"/>
+          </a:p>
+        </p:txBody>
+      </p:sp>
+      <p:sp>
+        <p:nvSpPr>
+          <p:cNvPr id="30" name="Text 28"/>
           <p:cNvSpPr/>
           <p:nvPr/>
         </p:nvSpPr>
@@ -11445,7 +10799,7 @@
       </p:sp>
       <p:sp>
         <p:nvSpPr>
-          <p:cNvPr id="6" name="Text 3"/>
+          <p:cNvPr id="31" name="Text 29"/>
           <p:cNvSpPr/>
           <p:nvPr/>
         </p:nvSpPr>
@@ -11484,7 +10838,7 @@
       </p:sp>
       <p:sp>
         <p:nvSpPr>
-          <p:cNvPr id="7" name="Shape 4"/>
+          <p:cNvPr id="32" name="Shape 30"/>
           <p:cNvSpPr/>
           <p:nvPr/>
         </p:nvSpPr>
@@ -11504,7 +10858,7 @@
       </p:sp>
       <p:pic>
         <p:nvPicPr>
-          <p:cNvPr id="8" name="Image 0" descr="/app/logos/nvidia-logo-blk-sm.png">    </p:cNvPr>
+          <p:cNvPr id="33" name="Image 0" descr="/app/logos/nvidia-logo-blk-sm.png">    </p:cNvPr>
           <p:cNvPicPr>
             <a:picLocks noChangeAspect="1"/>
           </p:cNvPicPr>
@@ -11512,890 +10866,6 @@
         </p:nvPicPr>
         <p:blipFill>
           <a:blip r:embed="rId1"/>
-          <a:stretch>
-            <a:fillRect/>
-          </a:stretch>
-        </p:blipFill>
-        <p:spPr>
-          <a:xfrm>
-            <a:off x="7863840" y="4604004"/>
-            <a:ext cx="1005840" cy="347472"/>
-          </a:xfrm>
-          <a:prstGeom prst="rect">
-            <a:avLst/>
-          </a:prstGeom>
-        </p:spPr>
-      </p:pic>
-    </p:spTree>
-  </p:cSld>
-  <p:clrMapOvr>
-    <a:masterClrMapping/>
-  </p:clrMapOvr>
-</p:sld>
-</file>
-
-<file path=ppt/slides/slide14.xml><?xml version="1.0" encoding="utf-8"?>
-<p:sld xmlns:a="http://schemas.openxmlformats.org/drawingml/2006/main" xmlns:r="http://schemas.openxmlformats.org/officeDocument/2006/relationships" xmlns:p="http://schemas.openxmlformats.org/presentationml/2006/main">
-  <p:cSld name="Slide 14">
-    <p:bg>
-      <p:bgPr>
-        <a:solidFill>
-          <a:srgbClr val="FFFFFF"/>
-        </a:solidFill>
-      </p:bgPr>
-    </p:bg>
-    <p:spTree>
-      <p:nvGrpSpPr>
-        <p:cNvPr id="1" name=""/>
-        <p:cNvGrpSpPr/>
-        <p:nvPr/>
-      </p:nvGrpSpPr>
-      <p:grpSpPr>
-        <a:xfrm>
-          <a:off x="0" y="0"/>
-          <a:ext cx="0" cy="0"/>
-          <a:chOff x="0" y="0"/>
-          <a:chExt cx="0" cy="0"/>
-        </a:xfrm>
-      </p:grpSpPr>
-      <p:sp>
-        <p:nvSpPr>
-          <p:cNvPr id="2" name="Text 0"/>
-          <p:cNvSpPr/>
-          <p:nvPr/>
-        </p:nvSpPr>
-        <p:spPr>
-          <a:xfrm>
-            <a:off x="457200" y="256032"/>
-            <a:ext cx="8229600" cy="548640"/>
-          </a:xfrm>
-          <a:prstGeom prst="rect">
-            <a:avLst/>
-          </a:prstGeom>
-          <a:noFill/>
-          <a:ln/>
-        </p:spPr>
-        <p:txBody>
-          <a:bodyPr wrap="square" lIns="0" tIns="0" rIns="0" bIns="0" rtlCol="0" anchor="ctr"/>
-          <a:lstStyle/>
-          <a:p>
-            <a:pPr indent="0" marL="0">
-              <a:buNone/>
-            </a:pPr>
-            <a:r>
-              <a:rPr lang="en-US" sz="3000" b="1" dirty="0">
-                <a:solidFill>
-                  <a:srgbClr val="000000"/>
-                </a:solidFill>
-                <a:latin typeface="NVIDIA Sans" pitchFamily="34" charset="0"/>
-                <a:ea typeface="NVIDIA Sans" pitchFamily="34" charset="-122"/>
-                <a:cs typeface="NVIDIA Sans" pitchFamily="34" charset="-120"/>
-              </a:rPr>
-              <a:t>Remaining Headroom &amp; Next Steps</a:t>
-            </a:r>
-            <a:endParaRPr lang="en-US" sz="3000" dirty="0"/>
-          </a:p>
-        </p:txBody>
-      </p:sp>
-      <p:sp>
-        <p:nvSpPr>
-          <p:cNvPr id="3" name="Text 1"/>
-          <p:cNvSpPr/>
-          <p:nvPr/>
-        </p:nvSpPr>
-        <p:spPr>
-          <a:xfrm>
-            <a:off x="457200" y="804672"/>
-            <a:ext cx="8229600" cy="329184"/>
-          </a:xfrm>
-          <a:prstGeom prst="rect">
-            <a:avLst/>
-          </a:prstGeom>
-          <a:noFill/>
-          <a:ln/>
-        </p:spPr>
-        <p:txBody>
-          <a:bodyPr wrap="square" lIns="0" tIns="0" rIns="0" bIns="0" rtlCol="0" anchor="ctr"/>
-          <a:lstStyle/>
-          <a:p>
-            <a:pPr indent="0" marL="0">
-              <a:buNone/>
-            </a:pPr>
-            <a:r>
-              <a:rPr lang="en-US" sz="1500" dirty="0">
-                <a:solidFill>
-                  <a:srgbClr val="76B900"/>
-                </a:solidFill>
-                <a:latin typeface="NVIDIA Sans" pitchFamily="34" charset="0"/>
-                <a:ea typeface="NVIDIA Sans" pitchFamily="34" charset="-122"/>
-                <a:cs typeface="NVIDIA Sans" pitchFamily="34" charset="-120"/>
-              </a:rPr>
-              <a:t>Where the next milliseconds live, ranked by ceiling — measured, not guessed</a:t>
-            </a:r>
-            <a:endParaRPr lang="en-US" sz="1500" dirty="0"/>
-          </a:p>
-        </p:txBody>
-      </p:sp>
-      <p:sp>
-        <p:nvSpPr>
-          <p:cNvPr id="4" name="Shape 2"/>
-          <p:cNvSpPr/>
-          <p:nvPr/>
-        </p:nvSpPr>
-        <p:spPr>
-          <a:xfrm>
-            <a:off x="457200" y="1371600"/>
-            <a:ext cx="8229600" cy="640080"/>
-          </a:xfrm>
-          <a:prstGeom prst="rect">
-            <a:avLst/>
-          </a:prstGeom>
-          <a:solidFill>
-            <a:srgbClr val="FFFFFF"/>
-          </a:solidFill>
-          <a:ln/>
-          <a:effectLst>
-            <a:outerShdw sx="100000" sy="100000" kx="0" ky="0" algn="bl" rotWithShape="0" blurRad="38100" dist="12700" dir="8100000">
-              <a:srgbClr val="000000">
-                <a:alpha val="15000"/>
-              </a:srgbClr>
-            </a:outerShdw>
-          </a:effectLst>
-        </p:spPr>
-      </p:sp>
-      <p:sp>
-        <p:nvSpPr>
-          <p:cNvPr id="5" name="Shape 3"/>
-          <p:cNvSpPr/>
-          <p:nvPr/>
-        </p:nvSpPr>
-        <p:spPr>
-          <a:xfrm>
-            <a:off x="457200" y="1371600"/>
-            <a:ext cx="54864" cy="640080"/>
-          </a:xfrm>
-          <a:prstGeom prst="rect">
-            <a:avLst/>
-          </a:prstGeom>
-          <a:solidFill>
-            <a:srgbClr val="76B900"/>
-          </a:solidFill>
-          <a:ln/>
-        </p:spPr>
-      </p:sp>
-      <p:pic>
-        <p:nvPicPr>
-          <p:cNvPr id="6" name="Image 0" descr="/app/icons/m48-gpu-chip-256px-grn.png">    </p:cNvPr>
-          <p:cNvPicPr>
-            <a:picLocks noChangeAspect="1"/>
-          </p:cNvPicPr>
-          <p:nvPr/>
-        </p:nvPicPr>
-        <p:blipFill>
-          <a:blip r:embed="rId1"/>
-          <a:stretch>
-            <a:fillRect/>
-          </a:stretch>
-        </p:blipFill>
-        <p:spPr>
-          <a:xfrm>
-            <a:off x="658368" y="1517904"/>
-            <a:ext cx="347472" cy="347472"/>
-          </a:xfrm>
-          <a:prstGeom prst="rect">
-            <a:avLst/>
-          </a:prstGeom>
-        </p:spPr>
-      </p:pic>
-      <p:sp>
-        <p:nvSpPr>
-          <p:cNvPr id="7" name="Text 4"/>
-          <p:cNvSpPr/>
-          <p:nvPr/>
-        </p:nvSpPr>
-        <p:spPr>
-          <a:xfrm>
-            <a:off x="1143000" y="1417320"/>
-            <a:ext cx="7406640" cy="274320"/>
-          </a:xfrm>
-          <a:prstGeom prst="rect">
-            <a:avLst/>
-          </a:prstGeom>
-          <a:noFill/>
-          <a:ln/>
-        </p:spPr>
-        <p:txBody>
-          <a:bodyPr wrap="square" lIns="0" tIns="0" rIns="0" bIns="0" rtlCol="0" anchor="ctr"/>
-          <a:lstStyle/>
-          <a:p>
-            <a:pPr indent="0" marL="0">
-              <a:buNone/>
-            </a:pPr>
-            <a:r>
-              <a:rPr lang="en-US" sz="1250" b="1" dirty="0">
-                <a:solidFill>
-                  <a:srgbClr val="000000"/>
-                </a:solidFill>
-                <a:latin typeface="NVIDIA Sans" pitchFamily="34" charset="0"/>
-                <a:ea typeface="NVIDIA Sans" pitchFamily="34" charset="-122"/>
-                <a:cs typeface="NVIDIA Sans" pitchFamily="34" charset="-120"/>
-              </a:rPr>
-              <a:t>Backward GEMMs at the power wall  </a:t>
-            </a:r>
-            <a:pPr indent="0" marL="0">
-              <a:buNone/>
-            </a:pPr>
-            <a:r>
-              <a:rPr lang="en-US" sz="1100" b="1" dirty="0">
-                <a:solidFill>
-                  <a:srgbClr val="76B900"/>
-                </a:solidFill>
-                <a:latin typeface="NVIDIA Sans" pitchFamily="34" charset="0"/>
-                <a:ea typeface="NVIDIA Sans" pitchFamily="34" charset="-122"/>
-                <a:cs typeface="NVIDIA Sans" pitchFamily="34" charset="-120"/>
-              </a:rPr>
-              <a:t>[fp8 territory]</a:t>
-            </a:r>
-            <a:endParaRPr lang="en-US" sz="1250" dirty="0"/>
-          </a:p>
-        </p:txBody>
-      </p:sp>
-      <p:sp>
-        <p:nvSpPr>
-          <p:cNvPr id="8" name="Text 5"/>
-          <p:cNvSpPr/>
-          <p:nvPr/>
-        </p:nvSpPr>
-        <p:spPr>
-          <a:xfrm>
-            <a:off x="1143000" y="1682496"/>
-            <a:ext cx="7406640" cy="292608"/>
-          </a:xfrm>
-          <a:prstGeom prst="rect">
-            <a:avLst/>
-          </a:prstGeom>
-          <a:noFill/>
-          <a:ln/>
-        </p:spPr>
-        <p:txBody>
-          <a:bodyPr wrap="square" lIns="0" tIns="0" rIns="0" bIns="0" rtlCol="0" anchor="t"/>
-          <a:lstStyle/>
-          <a:p>
-            <a:pPr indent="0" marL="0">
-              <a:buNone/>
-            </a:pPr>
-            <a:r>
-              <a:rPr lang="en-US" sz="1000" dirty="0">
-                <a:solidFill>
-                  <a:srgbClr val="5E5E5E"/>
-                </a:solidFill>
-                <a:latin typeface="NVIDIA Sans" pitchFamily="34" charset="0"/>
-                <a:ea typeface="NVIDIA Sans" pitchFamily="34" charset="-122"/>
-                <a:cs typeface="NVIDIA Sans" pitchFamily="34" charset="-120"/>
-              </a:rPr>
-              <a:t>Sustained GEMM throughput caps at ~622 TFLOPS on this node (power, not occupancy). The only lever left for the math itself is fp8.</a:t>
-            </a:r>
-            <a:endParaRPr lang="en-US" sz="1000" dirty="0"/>
-          </a:p>
-        </p:txBody>
-      </p:sp>
-      <p:sp>
-        <p:nvSpPr>
-          <p:cNvPr id="9" name="Shape 6"/>
-          <p:cNvSpPr/>
-          <p:nvPr/>
-        </p:nvSpPr>
-        <p:spPr>
-          <a:xfrm>
-            <a:off x="457200" y="2121408"/>
-            <a:ext cx="8229600" cy="640080"/>
-          </a:xfrm>
-          <a:prstGeom prst="rect">
-            <a:avLst/>
-          </a:prstGeom>
-          <a:solidFill>
-            <a:srgbClr val="FFFFFF"/>
-          </a:solidFill>
-          <a:ln/>
-          <a:effectLst>
-            <a:outerShdw sx="100000" sy="100000" kx="0" ky="0" algn="bl" rotWithShape="0" blurRad="38100" dist="12700" dir="8100000">
-              <a:srgbClr val="000000">
-                <a:alpha val="15000"/>
-              </a:srgbClr>
-            </a:outerShdw>
-          </a:effectLst>
-        </p:spPr>
-      </p:sp>
-      <p:sp>
-        <p:nvSpPr>
-          <p:cNvPr id="10" name="Shape 7"/>
-          <p:cNvSpPr/>
-          <p:nvPr/>
-        </p:nvSpPr>
-        <p:spPr>
-          <a:xfrm>
-            <a:off x="457200" y="2121408"/>
-            <a:ext cx="54864" cy="640080"/>
-          </a:xfrm>
-          <a:prstGeom prst="rect">
-            <a:avLst/>
-          </a:prstGeom>
-          <a:solidFill>
-            <a:srgbClr val="76B900"/>
-          </a:solidFill>
-          <a:ln/>
-        </p:spPr>
-      </p:sp>
-      <p:pic>
-        <p:nvPicPr>
-          <p:cNvPr id="11" name="Image 1" descr="/app/icons/m48-distributed-learning-256px-grn.png">    </p:cNvPr>
-          <p:cNvPicPr>
-            <a:picLocks noChangeAspect="1"/>
-          </p:cNvPicPr>
-          <p:nvPr/>
-        </p:nvPicPr>
-        <p:blipFill>
-          <a:blip r:embed="rId2"/>
-          <a:stretch>
-            <a:fillRect/>
-          </a:stretch>
-        </p:blipFill>
-        <p:spPr>
-          <a:xfrm>
-            <a:off x="658368" y="2267712"/>
-            <a:ext cx="347472" cy="347472"/>
-          </a:xfrm>
-          <a:prstGeom prst="rect">
-            <a:avLst/>
-          </a:prstGeom>
-        </p:spPr>
-      </p:pic>
-      <p:sp>
-        <p:nvSpPr>
-          <p:cNvPr id="12" name="Text 8"/>
-          <p:cNvSpPr/>
-          <p:nvPr/>
-        </p:nvSpPr>
-        <p:spPr>
-          <a:xfrm>
-            <a:off x="1143000" y="2167128"/>
-            <a:ext cx="7406640" cy="274320"/>
-          </a:xfrm>
-          <a:prstGeom prst="rect">
-            <a:avLst/>
-          </a:prstGeom>
-          <a:noFill/>
-          <a:ln/>
-        </p:spPr>
-        <p:txBody>
-          <a:bodyPr wrap="square" lIns="0" tIns="0" rIns="0" bIns="0" rtlCol="0" anchor="ctr"/>
-          <a:lstStyle/>
-          <a:p>
-            <a:pPr indent="0" marL="0">
-              <a:buNone/>
-            </a:pPr>
-            <a:r>
-              <a:rPr lang="en-US" sz="1250" b="1" dirty="0">
-                <a:solidFill>
-                  <a:srgbClr val="000000"/>
-                </a:solidFill>
-                <a:latin typeface="NVIDIA Sans" pitchFamily="34" charset="0"/>
-                <a:ea typeface="NVIDIA Sans" pitchFamily="34" charset="-122"/>
-                <a:cs typeface="NVIDIA Sans" pitchFamily="34" charset="-120"/>
-              </a:rPr>
-              <a:t>Exposed communication (~30-55 ms)  </a:t>
-            </a:r>
-            <a:pPr indent="0" marL="0">
-              <a:buNone/>
-            </a:pPr>
-            <a:r>
-              <a:rPr lang="en-US" sz="1100" b="1" dirty="0">
-                <a:solidFill>
-                  <a:srgbClr val="76B900"/>
-                </a:solidFill>
-                <a:latin typeface="NVIDIA Sans" pitchFamily="34" charset="0"/>
-                <a:ea typeface="NVIDIA Sans" pitchFamily="34" charset="-122"/>
-                <a:cs typeface="NVIDIA Sans" pitchFamily="34" charset="-120"/>
-              </a:rPr>
-              <a:t>[compression]</a:t>
-            </a:r>
-            <a:endParaRPr lang="en-US" sz="1250" dirty="0"/>
-          </a:p>
-        </p:txBody>
-      </p:sp>
-      <p:sp>
-        <p:nvSpPr>
-          <p:cNvPr id="13" name="Text 9"/>
-          <p:cNvSpPr/>
-          <p:nvPr/>
-        </p:nvSpPr>
-        <p:spPr>
-          <a:xfrm>
-            <a:off x="1143000" y="2432304"/>
-            <a:ext cx="7406640" cy="292608"/>
-          </a:xfrm>
-          <a:prstGeom prst="rect">
-            <a:avLst/>
-          </a:prstGeom>
-          <a:noFill/>
-          <a:ln/>
-        </p:spPr>
-        <p:txBody>
-          <a:bodyPr wrap="square" lIns="0" tIns="0" rIns="0" bIns="0" rtlCol="0" anchor="t"/>
-          <a:lstStyle/>
-          <a:p>
-            <a:pPr indent="0" marL="0">
-              <a:buNone/>
-            </a:pPr>
-            <a:r>
-              <a:rPr lang="en-US" sz="1000" dirty="0">
-                <a:solidFill>
-                  <a:srgbClr val="5E5E5E"/>
-                </a:solidFill>
-                <a:latin typeface="NVIDIA Sans" pitchFamily="34" charset="0"/>
-                <a:ea typeface="NVIDIA Sans" pitchFamily="34" charset="-122"/>
-                <a:cs typeface="NVIDIA Sans" pitchFamily="34" charset="-120"/>
-              </a:rPr>
-              <a:t>Bandwidth is at the NVLink ceiling; bytes are the only lever — 1-bit Adam / gradient compression, with convergence sign-off.</a:t>
-            </a:r>
-            <a:endParaRPr lang="en-US" sz="1000" dirty="0"/>
-          </a:p>
-        </p:txBody>
-      </p:sp>
-      <p:sp>
-        <p:nvSpPr>
-          <p:cNvPr id="14" name="Shape 10"/>
-          <p:cNvSpPr/>
-          <p:nvPr/>
-        </p:nvSpPr>
-        <p:spPr>
-          <a:xfrm>
-            <a:off x="457200" y="2871216"/>
-            <a:ext cx="8229600" cy="640080"/>
-          </a:xfrm>
-          <a:prstGeom prst="rect">
-            <a:avLst/>
-          </a:prstGeom>
-          <a:solidFill>
-            <a:srgbClr val="FFFFFF"/>
-          </a:solidFill>
-          <a:ln/>
-          <a:effectLst>
-            <a:outerShdw sx="100000" sy="100000" kx="0" ky="0" algn="bl" rotWithShape="0" blurRad="38100" dist="12700" dir="8100000">
-              <a:srgbClr val="000000">
-                <a:alpha val="15000"/>
-              </a:srgbClr>
-            </a:outerShdw>
-          </a:effectLst>
-        </p:spPr>
-      </p:sp>
-      <p:sp>
-        <p:nvSpPr>
-          <p:cNvPr id="15" name="Shape 11"/>
-          <p:cNvSpPr/>
-          <p:nvPr/>
-        </p:nvSpPr>
-        <p:spPr>
-          <a:xfrm>
-            <a:off x="457200" y="2871216"/>
-            <a:ext cx="54864" cy="640080"/>
-          </a:xfrm>
-          <a:prstGeom prst="rect">
-            <a:avLst/>
-          </a:prstGeom>
-          <a:solidFill>
-            <a:srgbClr val="76B900"/>
-          </a:solidFill>
-          <a:ln/>
-        </p:spPr>
-      </p:sp>
-      <p:pic>
-        <p:nvPicPr>
-          <p:cNvPr id="16" name="Image 2" descr="/app/icons/m48-cog-gear-256x-grn.png">    </p:cNvPr>
-          <p:cNvPicPr>
-            <a:picLocks noChangeAspect="1"/>
-          </p:cNvPicPr>
-          <p:nvPr/>
-        </p:nvPicPr>
-        <p:blipFill>
-          <a:blip r:embed="rId3"/>
-          <a:stretch>
-            <a:fillRect/>
-          </a:stretch>
-        </p:blipFill>
-        <p:spPr>
-          <a:xfrm>
-            <a:off x="658368" y="3017520"/>
-            <a:ext cx="347472" cy="347472"/>
-          </a:xfrm>
-          <a:prstGeom prst="rect">
-            <a:avLst/>
-          </a:prstGeom>
-        </p:spPr>
-      </p:pic>
-      <p:sp>
-        <p:nvSpPr>
-          <p:cNvPr id="17" name="Text 12"/>
-          <p:cNvSpPr/>
-          <p:nvPr/>
-        </p:nvSpPr>
-        <p:spPr>
-          <a:xfrm>
-            <a:off x="1143000" y="2916936"/>
-            <a:ext cx="7406640" cy="274320"/>
-          </a:xfrm>
-          <a:prstGeom prst="rect">
-            <a:avLst/>
-          </a:prstGeom>
-          <a:noFill/>
-          <a:ln/>
-        </p:spPr>
-        <p:txBody>
-          <a:bodyPr wrap="square" lIns="0" tIns="0" rIns="0" bIns="0" rtlCol="0" anchor="ctr"/>
-          <a:lstStyle/>
-          <a:p>
-            <a:pPr indent="0" marL="0">
-              <a:buNone/>
-            </a:pPr>
-            <a:r>
-              <a:rPr lang="en-US" sz="1250" b="1" dirty="0">
-                <a:solidFill>
-                  <a:srgbClr val="000000"/>
-                </a:solidFill>
-                <a:latin typeface="NVIDIA Sans" pitchFamily="34" charset="0"/>
-                <a:ea typeface="NVIDIA Sans" pitchFamily="34" charset="-122"/>
-                <a:cs typeface="NVIDIA Sans" pitchFamily="34" charset="-120"/>
-              </a:rPr>
-              <a:t>Exposed parameter AllGather (44 ms)  </a:t>
-            </a:r>
-            <a:pPr indent="0" marL="0">
-              <a:buNone/>
-            </a:pPr>
-            <a:r>
-              <a:rPr lang="en-US" sz="1100" b="1" dirty="0">
-                <a:solidFill>
-                  <a:srgbClr val="76B900"/>
-                </a:solidFill>
-                <a:latin typeface="NVIDIA Sans" pitchFamily="34" charset="0"/>
-                <a:ea typeface="NVIDIA Sans" pitchFamily="34" charset="-122"/>
-                <a:cs typeface="NVIDIA Sans" pitchFamily="34" charset="-120"/>
-              </a:rPr>
-              <a:t>[FSDP or async ZeRO-2]</a:t>
-            </a:r>
-            <a:endParaRPr lang="en-US" sz="1250" dirty="0"/>
-          </a:p>
-        </p:txBody>
-      </p:sp>
-      <p:sp>
-        <p:nvSpPr>
-          <p:cNvPr id="18" name="Text 13"/>
-          <p:cNvSpPr/>
-          <p:nvPr/>
-        </p:nvSpPr>
-        <p:spPr>
-          <a:xfrm>
-            <a:off x="1143000" y="3182112"/>
-            <a:ext cx="7406640" cy="292608"/>
-          </a:xfrm>
-          <a:prstGeom prst="rect">
-            <a:avLst/>
-          </a:prstGeom>
-          <a:noFill/>
-          <a:ln/>
-        </p:spPr>
-        <p:txBody>
-          <a:bodyPr wrap="square" lIns="0" tIns="0" rIns="0" bIns="0" rtlCol="0" anchor="t"/>
-          <a:lstStyle/>
-          <a:p>
-            <a:pPr indent="0" marL="0">
-              <a:buNone/>
-            </a:pPr>
-            <a:r>
-              <a:rPr lang="en-US" sz="1000" dirty="0">
-                <a:solidFill>
-                  <a:srgbClr val="5E5E5E"/>
-                </a:solidFill>
-                <a:latin typeface="NVIDIA Sans" pitchFamily="34" charset="0"/>
-                <a:ea typeface="NVIDIA Sans" pitchFamily="34" charset="-122"/>
-                <a:cs typeface="NVIDIA Sans" pitchFamily="34" charset="-120"/>
-              </a:rPr>
-              <a:t>Optimization shrank compute — the step-end AllGather is now fully exposed and ZeRO-2 cannot overlap it. Adopt FSDP (overlapped unshard) or extend ZeRO-2 with an async parameter gather.</a:t>
-            </a:r>
-            <a:endParaRPr lang="en-US" sz="1000" dirty="0"/>
-          </a:p>
-        </p:txBody>
-      </p:sp>
-      <p:sp>
-        <p:nvSpPr>
-          <p:cNvPr id="19" name="Shape 14"/>
-          <p:cNvSpPr/>
-          <p:nvPr/>
-        </p:nvSpPr>
-        <p:spPr>
-          <a:xfrm>
-            <a:off x="457200" y="3621024"/>
-            <a:ext cx="8229600" cy="640080"/>
-          </a:xfrm>
-          <a:prstGeom prst="rect">
-            <a:avLst/>
-          </a:prstGeom>
-          <a:solidFill>
-            <a:srgbClr val="FFFFFF"/>
-          </a:solidFill>
-          <a:ln/>
-          <a:effectLst>
-            <a:outerShdw sx="100000" sy="100000" kx="0" ky="0" algn="bl" rotWithShape="0" blurRad="38100" dist="12700" dir="8100000">
-              <a:srgbClr val="000000">
-                <a:alpha val="15000"/>
-              </a:srgbClr>
-            </a:outerShdw>
-          </a:effectLst>
-        </p:spPr>
-      </p:sp>
-      <p:sp>
-        <p:nvSpPr>
-          <p:cNvPr id="20" name="Shape 15"/>
-          <p:cNvSpPr/>
-          <p:nvPr/>
-        </p:nvSpPr>
-        <p:spPr>
-          <a:xfrm>
-            <a:off x="457200" y="3621024"/>
-            <a:ext cx="54864" cy="640080"/>
-          </a:xfrm>
-          <a:prstGeom prst="rect">
-            <a:avLst/>
-          </a:prstGeom>
-          <a:solidFill>
-            <a:srgbClr val="76B900"/>
-          </a:solidFill>
-          <a:ln/>
-        </p:spPr>
-      </p:sp>
-      <p:pic>
-        <p:nvPicPr>
-          <p:cNvPr id="21" name="Image 3" descr="/app/icons/m48-scalability-up-sample-256px-grn.png">    </p:cNvPr>
-          <p:cNvPicPr>
-            <a:picLocks noChangeAspect="1"/>
-          </p:cNvPicPr>
-          <p:nvPr/>
-        </p:nvPicPr>
-        <p:blipFill>
-          <a:blip r:embed="rId4"/>
-          <a:stretch>
-            <a:fillRect/>
-          </a:stretch>
-        </p:blipFill>
-        <p:spPr>
-          <a:xfrm>
-            <a:off x="658368" y="3767328"/>
-            <a:ext cx="347472" cy="347472"/>
-          </a:xfrm>
-          <a:prstGeom prst="rect">
-            <a:avLst/>
-          </a:prstGeom>
-        </p:spPr>
-      </p:pic>
-      <p:sp>
-        <p:nvSpPr>
-          <p:cNvPr id="22" name="Text 16"/>
-          <p:cNvSpPr/>
-          <p:nvPr/>
-        </p:nvSpPr>
-        <p:spPr>
-          <a:xfrm>
-            <a:off x="1143000" y="3666744"/>
-            <a:ext cx="7406640" cy="274320"/>
-          </a:xfrm>
-          <a:prstGeom prst="rect">
-            <a:avLst/>
-          </a:prstGeom>
-          <a:noFill/>
-          <a:ln/>
-        </p:spPr>
-        <p:txBody>
-          <a:bodyPr wrap="square" lIns="0" tIns="0" rIns="0" bIns="0" rtlCol="0" anchor="ctr"/>
-          <a:lstStyle/>
-          <a:p>
-            <a:pPr indent="0" marL="0">
-              <a:buNone/>
-            </a:pPr>
-            <a:r>
-              <a:rPr lang="en-US" sz="1250" b="1" dirty="0">
-                <a:solidFill>
-                  <a:srgbClr val="000000"/>
-                </a:solidFill>
-                <a:latin typeface="NVIDIA Sans" pitchFamily="34" charset="0"/>
-                <a:ea typeface="NVIDIA Sans" pitchFamily="34" charset="-122"/>
-                <a:cs typeface="NVIDIA Sans" pitchFamily="34" charset="-120"/>
-              </a:rPr>
-              <a:t>Scale-out readiness  </a:t>
-            </a:r>
-            <a:pPr indent="0" marL="0">
-              <a:buNone/>
-            </a:pPr>
-            <a:r>
-              <a:rPr lang="en-US" sz="1100" b="1" dirty="0">
-                <a:solidFill>
-                  <a:srgbClr val="76B900"/>
-                </a:solidFill>
-                <a:latin typeface="NVIDIA Sans" pitchFamily="34" charset="0"/>
-                <a:ea typeface="NVIDIA Sans" pitchFamily="34" charset="-122"/>
-                <a:cs typeface="NVIDIA Sans" pitchFamily="34" charset="-120"/>
-              </a:rPr>
-              <a:t>[deployment]</a:t>
-            </a:r>
-            <a:endParaRPr lang="en-US" sz="1250" dirty="0"/>
-          </a:p>
-        </p:txBody>
-      </p:sp>
-      <p:sp>
-        <p:nvSpPr>
-          <p:cNvPr id="23" name="Text 17"/>
-          <p:cNvSpPr/>
-          <p:nvPr/>
-        </p:nvSpPr>
-        <p:spPr>
-          <a:xfrm>
-            <a:off x="1143000" y="3931920"/>
-            <a:ext cx="7406640" cy="292608"/>
-          </a:xfrm>
-          <a:prstGeom prst="rect">
-            <a:avLst/>
-          </a:prstGeom>
-          <a:noFill/>
-          <a:ln/>
-        </p:spPr>
-        <p:txBody>
-          <a:bodyPr wrap="square" lIns="0" tIns="0" rIns="0" bIns="0" rtlCol="0" anchor="t"/>
-          <a:lstStyle/>
-          <a:p>
-            <a:pPr indent="0" marL="0">
-              <a:buNone/>
-            </a:pPr>
-            <a:r>
-              <a:rPr lang="en-US" sz="1000" dirty="0">
-                <a:solidFill>
-                  <a:srgbClr val="5E5E5E"/>
-                </a:solidFill>
-                <a:latin typeface="NVIDIA Sans" pitchFamily="34" charset="0"/>
-                <a:ea typeface="NVIDIA Sans" pitchFamily="34" charset="-122"/>
-                <a:cs typeface="NVIDIA Sans" pitchFamily="34" charset="-120"/>
-              </a:rPr>
-              <a:t>On split-topology nodes (4+4 NVLink islands) set NCCL_P2P_LEVEL=NVL — first collective hangs otherwise. bs24 adoption gated on a convergence run.</a:t>
-            </a:r>
-            <a:endParaRPr lang="en-US" sz="1000" dirty="0"/>
-          </a:p>
-        </p:txBody>
-      </p:sp>
-      <p:sp>
-        <p:nvSpPr>
-          <p:cNvPr id="24" name="Text 18"/>
-          <p:cNvSpPr/>
-          <p:nvPr/>
-        </p:nvSpPr>
-        <p:spPr>
-          <a:xfrm>
-            <a:off x="457200" y="4617720"/>
-            <a:ext cx="4572000" cy="320040"/>
-          </a:xfrm>
-          <a:prstGeom prst="rect">
-            <a:avLst/>
-          </a:prstGeom>
-          <a:noFill/>
-          <a:ln/>
-        </p:spPr>
-        <p:txBody>
-          <a:bodyPr wrap="square" lIns="0" tIns="0" rIns="0" bIns="0" rtlCol="0" anchor="ctr"/>
-          <a:lstStyle/>
-          <a:p>
-            <a:pPr algn="l" indent="0" marL="0">
-              <a:buNone/>
-            </a:pPr>
-            <a:r>
-              <a:rPr lang="en-US" sz="1000" dirty="0">
-                <a:solidFill>
-                  <a:srgbClr val="5E5E5E"/>
-                </a:solidFill>
-                <a:latin typeface="NVIDIA Sans" pitchFamily="34" charset="0"/>
-                <a:ea typeface="NVIDIA Sans" pitchFamily="34" charset="-122"/>
-                <a:cs typeface="NVIDIA Sans" pitchFamily="34" charset="-120"/>
-              </a:rPr>
-              <a:t>QwenPI Training Optimization</a:t>
-            </a:r>
-            <a:endParaRPr lang="en-US" sz="1000" dirty="0"/>
-          </a:p>
-        </p:txBody>
-      </p:sp>
-      <p:sp>
-        <p:nvSpPr>
-          <p:cNvPr id="25" name="Text 19"/>
-          <p:cNvSpPr/>
-          <p:nvPr/>
-        </p:nvSpPr>
-        <p:spPr>
-          <a:xfrm>
-            <a:off x="7360920" y="4617720"/>
-            <a:ext cx="320040" cy="320040"/>
-          </a:xfrm>
-          <a:prstGeom prst="rect">
-            <a:avLst/>
-          </a:prstGeom>
-          <a:noFill/>
-          <a:ln/>
-        </p:spPr>
-        <p:txBody>
-          <a:bodyPr wrap="square" lIns="0" tIns="0" rIns="0" bIns="0" rtlCol="0" anchor="ctr"/>
-          <a:lstStyle/>
-          <a:p>
-            <a:pPr algn="r" indent="0" marL="0">
-              <a:buNone/>
-            </a:pPr>
-            <a:r>
-              <a:rPr lang="en-US" sz="1000" dirty="0">
-                <a:solidFill>
-                  <a:srgbClr val="5E5E5E"/>
-                </a:solidFill>
-                <a:latin typeface="NVIDIA Sans" pitchFamily="34" charset="0"/>
-                <a:ea typeface="NVIDIA Sans" pitchFamily="34" charset="-122"/>
-                <a:cs typeface="NVIDIA Sans" pitchFamily="34" charset="-120"/>
-              </a:rPr>
-              <a:t>14</a:t>
-            </a:r>
-            <a:endParaRPr lang="en-US" sz="1000" dirty="0"/>
-          </a:p>
-        </p:txBody>
-      </p:sp>
-      <p:sp>
-        <p:nvSpPr>
-          <p:cNvPr id="26" name="Shape 20"/>
-          <p:cNvSpPr/>
-          <p:nvPr/>
-        </p:nvSpPr>
-        <p:spPr>
-          <a:xfrm>
-            <a:off x="7726680" y="4617720"/>
-            <a:ext cx="36576" cy="320040"/>
-          </a:xfrm>
-          <a:prstGeom prst="rect">
-            <a:avLst/>
-          </a:prstGeom>
-          <a:solidFill>
-            <a:srgbClr val="76B900"/>
-          </a:solidFill>
-          <a:ln/>
-        </p:spPr>
-      </p:sp>
-      <p:pic>
-        <p:nvPicPr>
-          <p:cNvPr id="27" name="Image 4" descr="/app/logos/nvidia-logo-blk-sm.png">    </p:cNvPr>
-          <p:cNvPicPr>
-            <a:picLocks noChangeAspect="1"/>
-          </p:cNvPicPr>
-          <p:nvPr/>
-        </p:nvPicPr>
-        <p:blipFill>
-          <a:blip r:embed="rId5"/>
           <a:stretch>
             <a:fillRect/>
           </a:stretch>

--- a/docs/slides/qwenpi-optimization.pptx
+++ b/docs/slides/qwenpi-optimization.pptx
@@ -18,9 +18,10 @@
     <p:sldId id="266" r:id="rId12"/>
     <p:sldId id="267" r:id="rId13"/>
     <p:sldId id="268" r:id="rId14"/>
+    <p:sldId id="269" r:id="rId15"/>
   </p:sldIdLst>
   <p:notesMasterIdLst>
-    <p:notesMasterId r:id="rId15"/>
+    <p:notesMasterId r:id="rId16"/>
   </p:notesMasterIdLst>
   <p:sldSz cx="9144000" cy="5143500"/>
   <p:notesSz cx="5143500" cy="9144000"/>
@@ -12954,9 +12955,8 @@
           <a:p>
             <a:r>
               <a:rPr lang="en-US" dirty="0"/>
-              <a:t>Graph capture preserves exact hidden-state semantics - verified fullgraph fwd+bwd and unchanged loss trajectory.
-If pressed on details: a whole-stack compile also fails outright here (fla graph-breaks fragment it into cudagraph partitions sharing one memory pool, whose allocator checkpointing collides with ZeRO-2 hook NCCL allocations - crash on torch 2.6 and 2.7.1). Keep it at 'engineering constraints' unless the audience digs.
-Group size 8 = measured sweet spot; 4 replays vs 1 costs microseconds.</a:t>
+              <a:t>Baseline: qwenpi_baseline_nvtx train_step_33; optimized: milestone1 train_step_48. Launch-window attribution both sides.
+[IMPORTANT] This page motivates graphs with the customer's own trace numbers; the next page is the design and the 4-vs-1 answer.</a:t>
             </a:r>
             <a:endParaRPr lang="en-US" dirty="0"/>
           </a:p>
@@ -13044,9 +13044,9 @@
           <a:p>
             <a:r>
               <a:rPr lang="en-US" dirty="0"/>
-              <a:t>Mechanism source (DeepSpeed 0.16.9 stage_1_and_2.py): TWO ipg buffers when overlap_comm (L2055); average_tensor enqueues compute.wait_stream(reduction_stream) at every bucket boundary (L1061-1062) - pipeline depth is one in-flight reduction.
-A/B re-captured on viking-prod-303 with node-level graph trace: period basis 5e8 = 319 ms/step, 1.5e9 = 306 ms (in-step walls 261/249, gaps ~57 both); AR busy equal within 1 ms (same bytes). Original-branch sweep: 2e9 was +4.7 ms.
-Final ledger (moved off-slide): baseline 807 = 540 busy + 62 exposed + 205 idle; optimized 249 = 175 + 22 + 43.</a:t>
+              <a:t>Graph capture preserves exact hidden-state semantics - verified fullgraph fwd+bwd and unchanged loss trajectory.
+If pressed on details: a whole-stack compile also fails outright here (fla graph-breaks fragment it into cudagraph partitions sharing one memory pool, whose allocator checkpointing collides with ZeRO-2 hook NCCL allocations - crash on torch 2.6 and 2.7.1). Keep it at 'engineering constraints' unless the audience digs.
+Group size 8 = measured sweet spot; 4 replays vs 1 costs microseconds.</a:t>
             </a:r>
             <a:endParaRPr lang="en-US" dirty="0"/>
           </a:p>
@@ -13134,7 +13134,9 @@
           <a:p>
             <a:r>
               <a:rPr lang="en-US" dirty="0"/>
-              <a:t>[IMPORTANT] Recommendation: bs 24 is the throughput config, gated on customer-side convergence validation (lr recalibration).</a:t>
+              <a:t>Mechanism source (DeepSpeed 0.16.9 stage_1_and_2.py): TWO ipg buffers when overlap_comm (L2055); average_tensor enqueues compute.wait_stream(reduction_stream) at every bucket boundary (L1061-1062) - pipeline depth is one in-flight reduction.
+A/B re-captured on viking-prod-303 with node-level graph trace: period basis 5e8 = 319 ms/step, 1.5e9 = 306 ms (in-step walls 261/249, gaps ~57 both); AR busy equal within 1 ms (same bytes). Original-branch sweep: 2e9 was +4.7 ms.
+Final ledger (moved off-slide): baseline 807 = 540 busy + 62 exposed + 205 idle; optimized 249 = 175 + 22 + 43.</a:t>
             </a:r>
             <a:endParaRPr lang="en-US" dirty="0"/>
           </a:p>
@@ -13222,6 +13224,94 @@
           <a:p>
             <a:r>
               <a:rPr lang="en-US" dirty="0"/>
+              <a:t>[IMPORTANT] Recommendation: bs 24 is the throughput config, gated on customer-side convergence validation (lr recalibration).</a:t>
+            </a:r>
+            <a:endParaRPr lang="en-US" dirty="0"/>
+          </a:p>
+        </p:txBody>
+      </p:sp>
+      <p:sp>
+        <p:nvSpPr>
+          <p:cNvPr id="4" name="Slide Number Placeholder 3"/>
+          <p:cNvSpPr>
+            <a:spLocks noGrp="1"/>
+          </p:cNvSpPr>
+          <p:nvPr>
+            <p:ph type="sldNum" sz="quarter" idx="10"/>
+          </p:nvPr>
+        </p:nvSpPr>
+        <p:spPr/>
+        <p:txBody>
+          <a:bodyPr/>
+          <a:lstStyle/>
+          <a:p>
+            <a:fld id="{F7021451-1387-4CA6-816F-3879F97B5CBC}" type="slidenum">
+              <a:rPr lang="en-US"/>
+              <a:t>13</a:t>
+            </a:fld>
+            <a:endParaRPr lang="en-US"/>
+          </a:p>
+        </p:txBody>
+      </p:sp>
+    </p:spTree>
+    <p:extLst>
+      <p:ext uri="{BB962C8B-B14F-4D97-AF65-F5344CB8AC3E}">
+        <p14:creationId xmlns:p14="http://schemas.microsoft.com/office/powerpoint/2010/main" val="1024086991"/>
+      </p:ext>
+    </p:extLst>
+  </p:cSld>
+  <p:clrMapOvr>
+    <a:masterClrMapping/>
+  </p:clrMapOvr>
+</p:notes>
+</file>
+
+<file path=ppt/notesSlides/notesSlide14.xml><?xml version="1.0" encoding="utf-8"?>
+<p:notes xmlns:a="http://schemas.openxmlformats.org/drawingml/2006/main" xmlns:r="http://schemas.openxmlformats.org/officeDocument/2006/relationships" xmlns:p="http://schemas.openxmlformats.org/presentationml/2006/main">
+  <p:cSld>
+    <p:spTree>
+      <p:nvGrpSpPr>
+        <p:cNvPr id="1" name=""/>
+        <p:cNvGrpSpPr/>
+        <p:nvPr/>
+      </p:nvGrpSpPr>
+      <p:grpSpPr>
+        <a:xfrm>
+          <a:off x="0" y="0"/>
+          <a:ext cx="0" cy="0"/>
+          <a:chOff x="0" y="0"/>
+          <a:chExt cx="0" cy="0"/>
+        </a:xfrm>
+      </p:grpSpPr>
+      <p:sp>
+        <p:nvSpPr>
+          <p:cNvPr id="2" name="Slide Image Placeholder 1"/>
+          <p:cNvSpPr>
+            <a:spLocks noGrp="1" noRot="1" noChangeAspect="1"/>
+          </p:cNvSpPr>
+          <p:nvPr>
+            <p:ph type="sldImg"/>
+          </p:nvPr>
+        </p:nvSpPr>
+        <p:spPr/>
+      </p:sp>
+      <p:sp>
+        <p:nvSpPr>
+          <p:cNvPr id="3" name="Notes Placeholder 2"/>
+          <p:cNvSpPr>
+            <a:spLocks noGrp="1"/>
+          </p:cNvSpPr>
+          <p:nvPr>
+            <p:ph type="body" idx="1"/>
+          </p:nvPr>
+        </p:nvSpPr>
+        <p:spPr/>
+        <p:txBody>
+          <a:bodyPr/>
+          <a:lstStyle/>
+          <a:p>
+            <a:r>
+              <a:rPr lang="en-US" dirty="0"/>
               <a:t>Timeline: qwenpi_bktAB_15e9 train_step_48 through the next step start (node-level trace). AllGather = 2 x 22 ms, fully exposed - the single biggest remaining block.
 Ruled-out list (keep for Q&amp;A): full FA2 +10 ms at seq 192; NCCL knobs futile (478 GB/s busbw = ceiling); one giant decoder graph breaks + kills AR overlap; FlashQLA ceiling ~10.5 ms and needs torch&gt;=2.8; masked_scatter nonzero patch 0 ms; MRoPE cache neutral at tip.
 Optimizer math (~10 ms Adam) additionally has a compiled-autograd lever. Deployment notes: 4+4-topology nodes need NCCL_P2P_LEVEL=NVL; bs24 gated on convergence run.
@@ -13248,7 +13338,7 @@
           <a:p>
             <a:fld id="{F7021451-1387-4CA6-816F-3879F97B5CBC}" type="slidenum">
               <a:rPr lang="en-US"/>
-              <a:t>13</a:t>
+              <a:t>14</a:t>
             </a:fld>
             <a:endParaRPr lang="en-US"/>
           </a:p>
@@ -13313,7 +13403,7 @@
           <a:p>
             <a:r>
               <a:rPr lang="en-US" dirty="0"/>
-              <a:t>Anchor slide: 3.2x step time, 3.2x throughput at same batch; batch scaling adds another 32% on top.</a:t>
+              <a:t>Story spine: problems first (pages 5-6), then one fix per problem, each with same-node A/B evidence; close with scaling and the go-forward plan.</a:t>
             </a:r>
             <a:endParaRPr lang="en-US" dirty="0"/>
           </a:p>
@@ -13401,8 +13491,7 @@
           <a:p>
             <a:r>
               <a:rPr lang="en-US" dirty="0"/>
-              <a:t>Hybrid decoder = full attention + gated-delta-net (linear attention) layers — this matters later: GDN blocks whole-model torch.compile.
-Action expert consumes VLM hidden states layer-wise (layerwise DiT).</a:t>
+              <a:t>Anchor slide: 3.2x step time, 3.2x throughput at same batch; batch scaling adds another 32% on top.</a:t>
             </a:r>
             <a:endParaRPr lang="en-US" dirty="0"/>
           </a:p>
@@ -13490,12 +13579,8 @@
           <a:p>
             <a:r>
               <a:rPr lang="en-US" dirty="0"/>
-              <a:t>Timeline from the NVTX-instrumented baseline re-capture (qwenpi_baseline_nvtx, viking-prod-303, train_step_33, 807 ms, bs 8/GPU). Both strips use the GPU-execution clock: kernels attributed to phases/modules by their CPU launch window (correlationId join).
-CPU-side forward() returns at 225 ms - the GPU is still executing DiT forward kernels until 309 ms (eager launch-ahead). That is why phases here are defined on GPU execution, not CPU ranges.
-Qwen3.5 bwd:fwd busy = 123:50 = 2.46x, matching theory (GEMM exactly 1.94x). The SPAN ratio is only 1.18x because forward is launch-starved: occupancy 34% vs 70% in backward (Python-side launches vs C++ autograd).
-Module bands = GPU execution spans, attributed by launch-window correlation (kernels joined to their CPU launch time via correlationId). GPU busy inside the bands: Qwen3.5 fwd 50 ms, DiT fwd 120 ms, DiT bwd 224 ms, Qwen3.5 bwd 123 ms - DiT owns 43% of all GPU busy time.
-Rows 2+3 land as one ladder level (pipeline &amp; caching, -117 ms); row 5 combines bucket sizing (PR11) and the redundant-flatten removal (PR12); row 6 covers the two config-level fixes.
-[IMPORTANT] Key message: every fix in this deck was first SEEN here as a trace shape or a measured kernel cost - problems first, solutions second.</a:t>
+              <a:t>Hybrid decoder = full attention + gated-delta-net (linear attention) layers — this matters later: GDN blocks whole-model torch.compile.
+Action expert consumes VLM hidden states layer-wise (layerwise DiT).</a:t>
             </a:r>
             <a:endParaRPr lang="en-US" dirty="0"/>
           </a:p>
@@ -13583,7 +13668,12 @@
           <a:p>
             <a:r>
               <a:rPr lang="en-US" dirty="0"/>
-              <a:t>Each bar is a separate 60-step run at that cumulative level; bars show ACTUAL step time, not deltas. The next slides walk these levels.</a:t>
+              <a:t>Timeline from the NVTX-instrumented baseline re-capture (qwenpi_baseline_nvtx, viking-prod-303, train_step_33, 807 ms, bs 8/GPU). Both strips use the GPU-execution clock: kernels attributed to phases/modules by their CPU launch window (correlationId join).
+CPU-side forward() returns at 225 ms - the GPU is still executing DiT forward kernels until 309 ms (eager launch-ahead). That is why phases here are defined on GPU execution, not CPU ranges.
+Qwen3.5 bwd:fwd busy = 123:50 = 2.46x, matching theory (GEMM exactly 1.94x). The SPAN ratio is only 1.18x because forward is launch-starved: occupancy 34% vs 70% in backward (Python-side launches vs C++ autograd).
+Module bands = GPU execution spans, attributed by launch-window correlation (kernels joined to their CPU launch time via correlationId). GPU busy inside the bands: Qwen3.5 fwd 50 ms, DiT fwd 120 ms, DiT bwd 224 ms, Qwen3.5 bwd 123 ms - DiT owns 43% of all GPU busy time.
+Rows 2+3 land as one ladder level (pipeline &amp; caching, -117 ms); row 5 combines bucket sizing (PR11) and the redundant-flatten removal (PR12); row 6 covers the two config-level fixes.
+[IMPORTANT] Key message: every fix in this deck was first SEEN here as a trace shape or a measured kernel cost - problems first, solutions second.</a:t>
             </a:r>
             <a:endParaRPr lang="en-US" dirty="0"/>
           </a:p>
@@ -13671,8 +13761,7 @@
           <a:p>
             <a:r>
               <a:rPr lang="en-US" dirty="0"/>
-              <a:t>Kernel classes measured on the instrumented baseline capture (qwenpi_baseline_nvtx).
-Loss curves: 1000-step clean A/B at the merged best config, only DIT_DTYPE differs (qwenpi_loss1k_fp32 vs qwenpi_loss1k_bf16, 2026-07-22, viking-prod-303). Final-100 means match to 4 decimals. Task-level accuracy is validated customer-side; loss trajectory is our correctness evidence.</a:t>
+              <a:t>Each bar is a separate 60-step run at that cumulative level; bars show ACTUAL step time, not deltas. The next slides walk these levels.</a:t>
             </a:r>
             <a:endParaRPr lang="en-US" dirty="0"/>
           </a:p>
@@ -13760,8 +13849,8 @@
           <a:p>
             <a:r>
               <a:rPr lang="en-US" dirty="0"/>
-              <a:t>All three sync points are CPU work serialized inside forward: data parsing at the top, ViT rotary/positional embedding, and MRoPE position ids between ViT and decoder.
-Stall sizes from the instrumented baseline; the timeline is a schematic, proportions follow the trace.</a:t>
+              <a:t>Kernel classes measured on the instrumented baseline capture (qwenpi_baseline_nvtx).
+Loss curves: 1000-step clean A/B at the merged best config, only DIT_DTYPE differs (qwenpi_loss1k_fp32 vs qwenpi_loss1k_bf16, 2026-07-22, viking-prod-303). Final-100 means match to 4 decimals. Task-level accuracy is validated customer-side; loss trajectory is our correctness evidence.</a:t>
             </a:r>
             <a:endParaRPr lang="en-US" dirty="0"/>
           </a:p>
@@ -13849,8 +13938,8 @@
           <a:p>
             <a:r>
               <a:rPr lang="en-US" dirty="0"/>
-              <a:t>Idle quantification from the instrumented baseline: 205 ms/step total idle - ~40 ms preprocessing gap at step start, plus sync stalls and launch gaps.
-Schematic is illustrative; proportions follow the measured trace (preprocess ~40 ms of a 807 ms step at baseline, fully hidden after.</a:t>
+              <a:t>All three sync points are CPU work serialized inside forward: data parsing at the top, ViT rotary/positional embedding, and MRoPE position ids between ViT and decoder.
+Stall sizes from the instrumented baseline; the timeline is a schematic, proportions follow the trace.</a:t>
             </a:r>
             <a:endParaRPr lang="en-US" dirty="0"/>
           </a:p>
@@ -13938,8 +14027,8 @@
           <a:p>
             <a:r>
               <a:rPr lang="en-US" dirty="0"/>
-              <a:t>Baseline: qwenpi_baseline_nvtx train_step_33; optimized: milestone1 train_step_48. Launch-window attribution both sides.
-[IMPORTANT] This page motivates graphs with the customer's own trace numbers; the next page is the design and the 4-vs-1 answer.</a:t>
+              <a:t>Idle quantification from the instrumented baseline: 205 ms/step total idle - ~40 ms preprocessing gap at step start, plus sync stalls and launch gaps.
+Schematic is illustrative; proportions follow the measured trace (preprocess ~40 ms of a 807 ms step at baseline, fully hidden after.</a:t>
             </a:r>
             <a:endParaRPr lang="en-US" dirty="0"/>
           </a:p>
@@ -14519,6 +14608,910 @@
                 <a:ea typeface="NVIDIA Sans" pitchFamily="34" charset="-122"/>
                 <a:cs typeface="NVIDIA Sans" pitchFamily="34" charset="-120"/>
               </a:rPr>
+              <a:t>Why CUDA Graphs: Launch-Bound Forward</a:t>
+            </a:r>
+            <a:endParaRPr lang="en-US" sz="3000" dirty="0"/>
+          </a:p>
+        </p:txBody>
+      </p:sp>
+      <p:sp>
+        <p:nvSpPr>
+          <p:cNvPr id="3" name="Text 1"/>
+          <p:cNvSpPr/>
+          <p:nvPr/>
+        </p:nvSpPr>
+        <p:spPr>
+          <a:xfrm>
+            <a:off x="457200" y="804672"/>
+            <a:ext cx="8229600" cy="329184"/>
+          </a:xfrm>
+          <a:prstGeom prst="rect">
+            <a:avLst/>
+          </a:prstGeom>
+          <a:noFill/>
+          <a:ln/>
+        </p:spPr>
+        <p:txBody>
+          <a:bodyPr wrap="square" lIns="0" tIns="0" rIns="0" bIns="0" rtlCol="0" anchor="ctr"/>
+          <a:lstStyle/>
+          <a:p>
+            <a:pPr indent="0" marL="0">
+              <a:buNone/>
+            </a:pPr>
+            <a:r>
+              <a:rPr lang="en-US" sz="1500" dirty="0">
+                <a:solidFill>
+                  <a:srgbClr val="76B900"/>
+                </a:solidFill>
+                <a:latin typeface="NVIDIA Sans" pitchFamily="34" charset="0"/>
+                <a:ea typeface="NVIDIA Sans" pitchFamily="34" charset="-122"/>
+                <a:cs typeface="NVIDIA Sans" pitchFamily="34" charset="-120"/>
+              </a:rPr>
+              <a:t>Anatomy of the Qwen3.5 forward — same math, very different wall clock</a:t>
+            </a:r>
+            <a:endParaRPr lang="en-US" sz="1500" dirty="0"/>
+          </a:p>
+        </p:txBody>
+      </p:sp>
+      <p:sp>
+        <p:nvSpPr>
+          <p:cNvPr id="4" name="Text 2"/>
+          <p:cNvSpPr/>
+          <p:nvPr/>
+        </p:nvSpPr>
+        <p:spPr>
+          <a:xfrm>
+            <a:off x="457200" y="1399032"/>
+            <a:ext cx="1417320" cy="384048"/>
+          </a:xfrm>
+          <a:prstGeom prst="rect">
+            <a:avLst/>
+          </a:prstGeom>
+          <a:noFill/>
+          <a:ln/>
+        </p:spPr>
+        <p:txBody>
+          <a:bodyPr wrap="square" lIns="0" tIns="0" rIns="0" bIns="0" rtlCol="0" anchor="ctr"/>
+          <a:lstStyle/>
+          <a:p>
+            <a:pPr indent="0" marL="0">
+              <a:buNone/>
+            </a:pPr>
+            <a:r>
+              <a:rPr lang="en-US" sz="1100" b="1" dirty="0">
+                <a:solidFill>
+                  <a:srgbClr val="000000"/>
+                </a:solidFill>
+                <a:latin typeface="NVIDIA Sans" pitchFamily="34" charset="0"/>
+                <a:ea typeface="NVIDIA Sans" pitchFamily="34" charset="-122"/>
+                <a:cs typeface="NVIDIA Sans" pitchFamily="34" charset="-120"/>
+              </a:rPr>
+              <a:t>Baseline</a:t>
+            </a:r>
+            <a:endParaRPr lang="en-US" sz="1100" dirty="0"/>
+          </a:p>
+          <a:p>
+            <a:pPr indent="0" marL="0">
+              <a:buNone/>
+            </a:pPr>
+            <a:r>
+              <a:rPr lang="en-US" sz="1100" b="1" dirty="0">
+                <a:solidFill>
+                  <a:srgbClr val="000000"/>
+                </a:solidFill>
+                <a:latin typeface="NVIDIA Sans" pitchFamily="34" charset="0"/>
+                <a:ea typeface="NVIDIA Sans" pitchFamily="34" charset="-122"/>
+                <a:cs typeface="NVIDIA Sans" pitchFamily="34" charset="-120"/>
+              </a:rPr>
+              <a:t>(eager)</a:t>
+            </a:r>
+            <a:endParaRPr lang="en-US" sz="1100" dirty="0"/>
+          </a:p>
+        </p:txBody>
+      </p:sp>
+      <p:sp>
+        <p:nvSpPr>
+          <p:cNvPr id="5" name="Shape 3"/>
+          <p:cNvSpPr/>
+          <p:nvPr/>
+        </p:nvSpPr>
+        <p:spPr>
+          <a:xfrm>
+            <a:off x="1920240" y="1417320"/>
+            <a:ext cx="2131541" cy="384048"/>
+          </a:xfrm>
+          <a:prstGeom prst="rect">
+            <a:avLst/>
+          </a:prstGeom>
+          <a:solidFill>
+            <a:srgbClr val="76B900"/>
+          </a:solidFill>
+          <a:ln/>
+        </p:spPr>
+      </p:sp>
+      <p:sp>
+        <p:nvSpPr>
+          <p:cNvPr id="6" name="Text 4"/>
+          <p:cNvSpPr/>
+          <p:nvPr/>
+        </p:nvSpPr>
+        <p:spPr>
+          <a:xfrm>
+            <a:off x="1920240" y="1417320"/>
+            <a:ext cx="2131541" cy="384048"/>
+          </a:xfrm>
+          <a:prstGeom prst="rect">
+            <a:avLst/>
+          </a:prstGeom>
+          <a:noFill/>
+          <a:ln/>
+        </p:spPr>
+        <p:txBody>
+          <a:bodyPr wrap="square" lIns="0" tIns="0" rIns="0" bIns="0" rtlCol="0" anchor="ctr"/>
+          <a:lstStyle/>
+          <a:p>
+            <a:pPr algn="ctr" indent="0" marL="0">
+              <a:buNone/>
+            </a:pPr>
+            <a:r>
+              <a:rPr lang="en-US" sz="1000" b="1" dirty="0">
+                <a:solidFill>
+                  <a:srgbClr val="FFFFFF"/>
+                </a:solidFill>
+                <a:latin typeface="NVIDIA Sans" pitchFamily="34" charset="0"/>
+                <a:ea typeface="NVIDIA Sans" pitchFamily="34" charset="-122"/>
+                <a:cs typeface="NVIDIA Sans" pitchFamily="34" charset="-120"/>
+              </a:rPr>
+              <a:t>GPU busy 50 ms</a:t>
+            </a:r>
+            <a:endParaRPr lang="en-US" sz="1000" dirty="0"/>
+          </a:p>
+        </p:txBody>
+      </p:sp>
+      <p:sp>
+        <p:nvSpPr>
+          <p:cNvPr id="7" name="Shape 5"/>
+          <p:cNvSpPr/>
+          <p:nvPr/>
+        </p:nvSpPr>
+        <p:spPr>
+          <a:xfrm>
+            <a:off x="4051781" y="1417320"/>
+            <a:ext cx="4177819" cy="384048"/>
+          </a:xfrm>
+          <a:prstGeom prst="rect">
+            <a:avLst/>
+          </a:prstGeom>
+          <a:solidFill>
+            <a:srgbClr val="890C58"/>
+          </a:solidFill>
+          <a:ln/>
+        </p:spPr>
+      </p:sp>
+      <p:sp>
+        <p:nvSpPr>
+          <p:cNvPr id="8" name="Text 6"/>
+          <p:cNvSpPr/>
+          <p:nvPr/>
+        </p:nvSpPr>
+        <p:spPr>
+          <a:xfrm>
+            <a:off x="4051781" y="1417320"/>
+            <a:ext cx="4177819" cy="384048"/>
+          </a:xfrm>
+          <a:prstGeom prst="rect">
+            <a:avLst/>
+          </a:prstGeom>
+          <a:noFill/>
+          <a:ln/>
+        </p:spPr>
+        <p:txBody>
+          <a:bodyPr wrap="square" lIns="0" tIns="0" rIns="0" bIns="0" rtlCol="0" anchor="ctr"/>
+          <a:lstStyle/>
+          <a:p>
+            <a:pPr algn="ctr" indent="0" marL="0">
+              <a:buNone/>
+            </a:pPr>
+            <a:r>
+              <a:rPr lang="en-US" sz="1000" b="1" dirty="0">
+                <a:solidFill>
+                  <a:srgbClr val="FFFFFF"/>
+                </a:solidFill>
+                <a:latin typeface="NVIDIA Sans" pitchFamily="34" charset="0"/>
+                <a:ea typeface="NVIDIA Sans" pitchFamily="34" charset="-122"/>
+                <a:cs typeface="NVIDIA Sans" pitchFamily="34" charset="-120"/>
+              </a:rPr>
+              <a:t>waiting for launches 98 ms</a:t>
+            </a:r>
+            <a:endParaRPr lang="en-US" sz="1000" dirty="0"/>
+          </a:p>
+        </p:txBody>
+      </p:sp>
+      <p:sp>
+        <p:nvSpPr>
+          <p:cNvPr id="9" name="Text 7"/>
+          <p:cNvSpPr/>
+          <p:nvPr/>
+        </p:nvSpPr>
+        <p:spPr>
+          <a:xfrm>
+            <a:off x="8302752" y="1417320"/>
+            <a:ext cx="822960" cy="384048"/>
+          </a:xfrm>
+          <a:prstGeom prst="rect">
+            <a:avLst/>
+          </a:prstGeom>
+          <a:noFill/>
+          <a:ln/>
+        </p:spPr>
+        <p:txBody>
+          <a:bodyPr wrap="square" lIns="0" tIns="0" rIns="0" bIns="0" rtlCol="0" anchor="ctr"/>
+          <a:lstStyle/>
+          <a:p>
+            <a:pPr indent="0" marL="0">
+              <a:buNone/>
+            </a:pPr>
+            <a:r>
+              <a:rPr lang="en-US" sz="1200" b="1" dirty="0">
+                <a:solidFill>
+                  <a:srgbClr val="000000"/>
+                </a:solidFill>
+                <a:latin typeface="NVIDIA Sans" pitchFamily="34" charset="0"/>
+                <a:ea typeface="NVIDIA Sans" pitchFamily="34" charset="-122"/>
+                <a:cs typeface="NVIDIA Sans" pitchFamily="34" charset="-120"/>
+              </a:rPr>
+              <a:t>148 ms</a:t>
+            </a:r>
+            <a:endParaRPr lang="en-US" sz="1200" dirty="0"/>
+          </a:p>
+        </p:txBody>
+      </p:sp>
+      <p:sp>
+        <p:nvSpPr>
+          <p:cNvPr id="10" name="Text 8"/>
+          <p:cNvSpPr/>
+          <p:nvPr/>
+        </p:nvSpPr>
+        <p:spPr>
+          <a:xfrm>
+            <a:off x="1920240" y="1819656"/>
+            <a:ext cx="6400800" cy="201168"/>
+          </a:xfrm>
+          <a:prstGeom prst="rect">
+            <a:avLst/>
+          </a:prstGeom>
+          <a:noFill/>
+          <a:ln/>
+        </p:spPr>
+        <p:txBody>
+          <a:bodyPr wrap="square" lIns="0" tIns="0" rIns="0" bIns="0" rtlCol="0" anchor="ctr"/>
+          <a:lstStyle/>
+          <a:p>
+            <a:pPr indent="0" marL="0">
+              <a:buNone/>
+            </a:pPr>
+            <a:r>
+              <a:rPr lang="en-US" sz="950" i="1" dirty="0">
+                <a:solidFill>
+                  <a:srgbClr val="5E5E5E"/>
+                </a:solidFill>
+                <a:latin typeface="NVIDIA Sans" pitchFamily="34" charset="0"/>
+                <a:ea typeface="NVIDIA Sans" pitchFamily="34" charset="-122"/>
+                <a:cs typeface="NVIDIA Sans" pitchFamily="34" charset="-120"/>
+              </a:rPr>
+              <a:t>3,929 kernel launches · 19.1 ms of cudaLaunchKernel CPU time · occupancy 34%</a:t>
+            </a:r>
+            <a:endParaRPr lang="en-US" sz="950" dirty="0"/>
+          </a:p>
+        </p:txBody>
+      </p:sp>
+      <p:sp>
+        <p:nvSpPr>
+          <p:cNvPr id="11" name="Text 9"/>
+          <p:cNvSpPr/>
+          <p:nvPr/>
+        </p:nvSpPr>
+        <p:spPr>
+          <a:xfrm>
+            <a:off x="457200" y="2267712"/>
+            <a:ext cx="1417320" cy="384048"/>
+          </a:xfrm>
+          <a:prstGeom prst="rect">
+            <a:avLst/>
+          </a:prstGeom>
+          <a:noFill/>
+          <a:ln/>
+        </p:spPr>
+        <p:txBody>
+          <a:bodyPr wrap="square" lIns="0" tIns="0" rIns="0" bIns="0" rtlCol="0" anchor="ctr"/>
+          <a:lstStyle/>
+          <a:p>
+            <a:pPr indent="0" marL="0">
+              <a:buNone/>
+            </a:pPr>
+            <a:r>
+              <a:rPr lang="en-US" sz="1100" b="1" dirty="0">
+                <a:solidFill>
+                  <a:srgbClr val="000000"/>
+                </a:solidFill>
+                <a:latin typeface="NVIDIA Sans" pitchFamily="34" charset="0"/>
+                <a:ea typeface="NVIDIA Sans" pitchFamily="34" charset="-122"/>
+                <a:cs typeface="NVIDIA Sans" pitchFamily="34" charset="-120"/>
+              </a:rPr>
+              <a:t>Optimized</a:t>
+            </a:r>
+            <a:endParaRPr lang="en-US" sz="1100" dirty="0"/>
+          </a:p>
+          <a:p>
+            <a:pPr indent="0" marL="0">
+              <a:buNone/>
+            </a:pPr>
+            <a:r>
+              <a:rPr lang="en-US" sz="1100" b="1" dirty="0">
+                <a:solidFill>
+                  <a:srgbClr val="000000"/>
+                </a:solidFill>
+                <a:latin typeface="NVIDIA Sans" pitchFamily="34" charset="0"/>
+                <a:ea typeface="NVIDIA Sans" pitchFamily="34" charset="-122"/>
+                <a:cs typeface="NVIDIA Sans" pitchFamily="34" charset="-120"/>
+              </a:rPr>
+              <a:t>(CUDA Graphs)</a:t>
+            </a:r>
+            <a:endParaRPr lang="en-US" sz="1100" dirty="0"/>
+          </a:p>
+        </p:txBody>
+      </p:sp>
+      <p:sp>
+        <p:nvSpPr>
+          <p:cNvPr id="12" name="Shape 10"/>
+          <p:cNvSpPr/>
+          <p:nvPr/>
+        </p:nvSpPr>
+        <p:spPr>
+          <a:xfrm>
+            <a:off x="1920240" y="2286000"/>
+            <a:ext cx="1577340" cy="384048"/>
+          </a:xfrm>
+          <a:prstGeom prst="rect">
+            <a:avLst/>
+          </a:prstGeom>
+          <a:solidFill>
+            <a:srgbClr val="76B900"/>
+          </a:solidFill>
+          <a:ln/>
+        </p:spPr>
+      </p:sp>
+      <p:sp>
+        <p:nvSpPr>
+          <p:cNvPr id="13" name="Text 11"/>
+          <p:cNvSpPr/>
+          <p:nvPr/>
+        </p:nvSpPr>
+        <p:spPr>
+          <a:xfrm>
+            <a:off x="1920240" y="2286000"/>
+            <a:ext cx="1577340" cy="384048"/>
+          </a:xfrm>
+          <a:prstGeom prst="rect">
+            <a:avLst/>
+          </a:prstGeom>
+          <a:noFill/>
+          <a:ln/>
+        </p:spPr>
+        <p:txBody>
+          <a:bodyPr wrap="square" lIns="0" tIns="0" rIns="0" bIns="0" rtlCol="0" anchor="ctr"/>
+          <a:lstStyle/>
+          <a:p>
+            <a:pPr algn="ctr" indent="0" marL="0">
+              <a:buNone/>
+            </a:pPr>
+            <a:r>
+              <a:rPr lang="en-US" sz="1000" b="1" dirty="0">
+                <a:solidFill>
+                  <a:srgbClr val="FFFFFF"/>
+                </a:solidFill>
+                <a:latin typeface="NVIDIA Sans" pitchFamily="34" charset="0"/>
+                <a:ea typeface="NVIDIA Sans" pitchFamily="34" charset="-122"/>
+                <a:cs typeface="NVIDIA Sans" pitchFamily="34" charset="-120"/>
+              </a:rPr>
+              <a:t>GPU busy 37 ms</a:t>
+            </a:r>
+            <a:endParaRPr lang="en-US" sz="1000" dirty="0"/>
+          </a:p>
+        </p:txBody>
+      </p:sp>
+      <p:sp>
+        <p:nvSpPr>
+          <p:cNvPr id="14" name="Shape 12"/>
+          <p:cNvSpPr/>
+          <p:nvPr/>
+        </p:nvSpPr>
+        <p:spPr>
+          <a:xfrm>
+            <a:off x="3497580" y="2286000"/>
+            <a:ext cx="1193663" cy="384048"/>
+          </a:xfrm>
+          <a:prstGeom prst="rect">
+            <a:avLst/>
+          </a:prstGeom>
+          <a:solidFill>
+            <a:srgbClr val="890C58"/>
+          </a:solidFill>
+          <a:ln/>
+        </p:spPr>
+      </p:sp>
+      <p:sp>
+        <p:nvSpPr>
+          <p:cNvPr id="15" name="Text 13"/>
+          <p:cNvSpPr/>
+          <p:nvPr/>
+        </p:nvSpPr>
+        <p:spPr>
+          <a:xfrm>
+            <a:off x="3497580" y="2286000"/>
+            <a:ext cx="1193663" cy="384048"/>
+          </a:xfrm>
+          <a:prstGeom prst="rect">
+            <a:avLst/>
+          </a:prstGeom>
+          <a:noFill/>
+          <a:ln/>
+        </p:spPr>
+        <p:txBody>
+          <a:bodyPr wrap="square" lIns="0" tIns="0" rIns="0" bIns="0" rtlCol="0" anchor="ctr"/>
+          <a:lstStyle/>
+          <a:p>
+            <a:pPr algn="ctr" indent="0" marL="0">
+              <a:buNone/>
+            </a:pPr>
+            <a:r>
+              <a:rPr lang="en-US" sz="1000" b="1" dirty="0">
+                <a:solidFill>
+                  <a:srgbClr val="FFFFFF"/>
+                </a:solidFill>
+                <a:latin typeface="NVIDIA Sans" pitchFamily="34" charset="0"/>
+                <a:ea typeface="NVIDIA Sans" pitchFamily="34" charset="-122"/>
+                <a:cs typeface="NVIDIA Sans" pitchFamily="34" charset="-120"/>
+              </a:rPr>
+              <a:t>waiting for launches 28 ms</a:t>
+            </a:r>
+            <a:endParaRPr lang="en-US" sz="1000" dirty="0"/>
+          </a:p>
+        </p:txBody>
+      </p:sp>
+      <p:sp>
+        <p:nvSpPr>
+          <p:cNvPr id="16" name="Text 14"/>
+          <p:cNvSpPr/>
+          <p:nvPr/>
+        </p:nvSpPr>
+        <p:spPr>
+          <a:xfrm>
+            <a:off x="4764395" y="2286000"/>
+            <a:ext cx="822960" cy="384048"/>
+          </a:xfrm>
+          <a:prstGeom prst="rect">
+            <a:avLst/>
+          </a:prstGeom>
+          <a:noFill/>
+          <a:ln/>
+        </p:spPr>
+        <p:txBody>
+          <a:bodyPr wrap="square" lIns="0" tIns="0" rIns="0" bIns="0" rtlCol="0" anchor="ctr"/>
+          <a:lstStyle/>
+          <a:p>
+            <a:pPr indent="0" marL="0">
+              <a:buNone/>
+            </a:pPr>
+            <a:r>
+              <a:rPr lang="en-US" sz="1200" b="1" dirty="0">
+                <a:solidFill>
+                  <a:srgbClr val="000000"/>
+                </a:solidFill>
+                <a:latin typeface="NVIDIA Sans" pitchFamily="34" charset="0"/>
+                <a:ea typeface="NVIDIA Sans" pitchFamily="34" charset="-122"/>
+                <a:cs typeface="NVIDIA Sans" pitchFamily="34" charset="-120"/>
+              </a:rPr>
+              <a:t>65 ms</a:t>
+            </a:r>
+            <a:endParaRPr lang="en-US" sz="1200" dirty="0"/>
+          </a:p>
+        </p:txBody>
+      </p:sp>
+      <p:sp>
+        <p:nvSpPr>
+          <p:cNvPr id="17" name="Text 15"/>
+          <p:cNvSpPr/>
+          <p:nvPr/>
+        </p:nvSpPr>
+        <p:spPr>
+          <a:xfrm>
+            <a:off x="1920240" y="2688336"/>
+            <a:ext cx="6400800" cy="201168"/>
+          </a:xfrm>
+          <a:prstGeom prst="rect">
+            <a:avLst/>
+          </a:prstGeom>
+          <a:noFill/>
+          <a:ln/>
+        </p:spPr>
+        <p:txBody>
+          <a:bodyPr wrap="square" lIns="0" tIns="0" rIns="0" bIns="0" rtlCol="0" anchor="ctr"/>
+          <a:lstStyle/>
+          <a:p>
+            <a:pPr indent="0" marL="0">
+              <a:buNone/>
+            </a:pPr>
+            <a:r>
+              <a:rPr lang="en-US" sz="950" i="1" dirty="0">
+                <a:solidFill>
+                  <a:srgbClr val="5E5E5E"/>
+                </a:solidFill>
+                <a:latin typeface="NVIDIA Sans" pitchFamily="34" charset="0"/>
+                <a:ea typeface="NVIDIA Sans" pitchFamily="34" charset="-122"/>
+                <a:cs typeface="NVIDIA Sans" pitchFamily="34" charset="-120"/>
+              </a:rPr>
+              <a:t>6 graph launches + 736 eager · 9.4 ms launch CPU · occupancy 57%</a:t>
+            </a:r>
+            <a:endParaRPr lang="en-US" sz="950" dirty="0"/>
+          </a:p>
+        </p:txBody>
+      </p:sp>
+      <p:sp>
+        <p:nvSpPr>
+          <p:cNvPr id="18" name="Text 16"/>
+          <p:cNvSpPr/>
+          <p:nvPr/>
+        </p:nvSpPr>
+        <p:spPr>
+          <a:xfrm>
+            <a:off x="1920240" y="2907792"/>
+            <a:ext cx="6400800" cy="365760"/>
+          </a:xfrm>
+          <a:prstGeom prst="rect">
+            <a:avLst/>
+          </a:prstGeom>
+          <a:noFill/>
+          <a:ln/>
+        </p:spPr>
+        <p:txBody>
+          <a:bodyPr wrap="square" lIns="0" tIns="0" rIns="0" bIns="0" rtlCol="0" anchor="ctr"/>
+          <a:lstStyle/>
+          <a:p>
+            <a:pPr indent="0" marL="0">
+              <a:buNone/>
+            </a:pPr>
+            <a:r>
+              <a:rPr lang="en-US" sz="2400" b="1" dirty="0">
+                <a:solidFill>
+                  <a:srgbClr val="76B900"/>
+                </a:solidFill>
+                <a:latin typeface="NVIDIA Sans" pitchFamily="34" charset="0"/>
+                <a:ea typeface="NVIDIA Sans" pitchFamily="34" charset="-122"/>
+                <a:cs typeface="NVIDIA Sans" pitchFamily="34" charset="-120"/>
+              </a:rPr>
+              <a:t>2.3× </a:t>
+            </a:r>
+            <a:pPr indent="0" marL="0">
+              <a:buNone/>
+            </a:pPr>
+            <a:r>
+              <a:rPr lang="en-US" sz="1300" b="1" dirty="0">
+                <a:solidFill>
+                  <a:srgbClr val="000000"/>
+                </a:solidFill>
+                <a:latin typeface="NVIDIA Sans" pitchFamily="34" charset="0"/>
+                <a:ea typeface="NVIDIA Sans" pitchFamily="34" charset="-122"/>
+                <a:cs typeface="NVIDIA Sans" pitchFamily="34" charset="-120"/>
+              </a:rPr>
+              <a:t>faster forward wall clock — with 81% fewer launches</a:t>
+            </a:r>
+            <a:endParaRPr lang="en-US" sz="2400" dirty="0"/>
+          </a:p>
+        </p:txBody>
+      </p:sp>
+      <p:sp>
+        <p:nvSpPr>
+          <p:cNvPr id="19" name="Text 17"/>
+          <p:cNvSpPr/>
+          <p:nvPr/>
+        </p:nvSpPr>
+        <p:spPr>
+          <a:xfrm>
+            <a:off x="457200" y="3346704"/>
+            <a:ext cx="8229600" cy="822960"/>
+          </a:xfrm>
+          <a:prstGeom prst="rect">
+            <a:avLst/>
+          </a:prstGeom>
+          <a:noFill/>
+          <a:ln/>
+        </p:spPr>
+        <p:txBody>
+          <a:bodyPr wrap="square" lIns="0" tIns="0" rIns="0" bIns="0" rtlCol="0" anchor="t"/>
+          <a:lstStyle/>
+          <a:p>
+            <a:pPr marL="342900" indent="-342900">
+              <a:buSzPct val="100000"/>
+              <a:buChar char="•"/>
+            </a:pPr>
+            <a:r>
+              <a:rPr lang="en-US" sz="1100" dirty="0">
+                <a:solidFill>
+                  <a:srgbClr val="000000"/>
+                </a:solidFill>
+                <a:latin typeface="NVIDIA Sans" pitchFamily="34" charset="0"/>
+                <a:ea typeface="NVIDIA Sans" pitchFamily="34" charset="-122"/>
+                <a:cs typeface="NVIDIA Sans" pitchFamily="34" charset="-120"/>
+              </a:rPr>
+              <a:t>An eager op costs 30–60 µs of Python dispatch + launch; the median kernel runs 8 µs — the GPU finishes before the CPU can feed the next one</a:t>
+            </a:r>
+            <a:endParaRPr lang="en-US" sz="1100" dirty="0"/>
+          </a:p>
+          <a:p>
+            <a:pPr marL="342900" indent="-342900">
+              <a:buSzPct val="100000"/>
+              <a:buChar char="•"/>
+            </a:pPr>
+            <a:r>
+              <a:rPr lang="en-US" sz="1100" dirty="0">
+                <a:solidFill>
+                  <a:srgbClr val="000000"/>
+                </a:solidFill>
+                <a:latin typeface="NVIDIA Sans" pitchFamily="34" charset="0"/>
+                <a:ea typeface="NVIDIA Sans" pitchFamily="34" charset="-122"/>
+                <a:cs typeface="NVIDIA Sans" pitchFamily="34" charset="-120"/>
+              </a:rPr>
+              <a:t>Backward suffers far less (C++ autograd engine, occupancy 70%) — forward is where launch overhead bites</a:t>
+            </a:r>
+            <a:endParaRPr lang="en-US" sz="1100" dirty="0"/>
+          </a:p>
+          <a:p>
+            <a:pPr marL="342900" indent="-342900">
+              <a:buSzPct val="100000"/>
+              <a:buChar char="•"/>
+            </a:pPr>
+            <a:r>
+              <a:rPr lang="en-US" sz="1100" dirty="0">
+                <a:solidFill>
+                  <a:srgbClr val="000000"/>
+                </a:solidFill>
+                <a:latin typeface="NVIDIA Sans" pitchFamily="34" charset="0"/>
+                <a:ea typeface="NVIDIA Sans" pitchFamily="34" charset="-122"/>
+                <a:cs typeface="NVIDIA Sans" pitchFamily="34" charset="-120"/>
+              </a:rPr>
+              <a:t>A CUDA Graph replays an entire 8-layer group as ONE cudaGraphLaunch — per-op dispatch leaves the critical path</a:t>
+            </a:r>
+            <a:endParaRPr lang="en-US" sz="1100" dirty="0"/>
+          </a:p>
+        </p:txBody>
+      </p:sp>
+      <p:sp>
+        <p:nvSpPr>
+          <p:cNvPr id="20" name="Text 18"/>
+          <p:cNvSpPr/>
+          <p:nvPr/>
+        </p:nvSpPr>
+        <p:spPr>
+          <a:xfrm>
+            <a:off x="457200" y="4206240"/>
+            <a:ext cx="8229600" cy="201168"/>
+          </a:xfrm>
+          <a:prstGeom prst="rect">
+            <a:avLst/>
+          </a:prstGeom>
+          <a:noFill/>
+          <a:ln/>
+        </p:spPr>
+        <p:txBody>
+          <a:bodyPr wrap="square" lIns="0" tIns="0" rIns="0" bIns="0" rtlCol="0" anchor="ctr"/>
+          <a:lstStyle/>
+          <a:p>
+            <a:pPr indent="0" marL="0">
+              <a:buNone/>
+            </a:pPr>
+            <a:r>
+              <a:rPr lang="en-US" sz="850" i="1" dirty="0">
+                <a:solidFill>
+                  <a:srgbClr val="8C8C8C"/>
+                </a:solidFill>
+                <a:latin typeface="NVIDIA Sans" pitchFamily="34" charset="0"/>
+                <a:ea typeface="NVIDIA Sans" pitchFamily="34" charset="-122"/>
+                <a:cs typeface="NVIDIA Sans" pitchFamily="34" charset="-120"/>
+              </a:rPr>
+              <a:t>Busy also shrinks 50 → 37 ms (mixed attention + fusion); the split isolates the launch effect. Windows: baseline Qwen3.5 fwd vs merged-main VLM fwd, same launch-window accounting.</a:t>
+            </a:r>
+            <a:endParaRPr lang="en-US" sz="850" dirty="0"/>
+          </a:p>
+        </p:txBody>
+      </p:sp>
+      <p:sp>
+        <p:nvSpPr>
+          <p:cNvPr id="21" name="Text 19"/>
+          <p:cNvSpPr/>
+          <p:nvPr/>
+        </p:nvSpPr>
+        <p:spPr>
+          <a:xfrm>
+            <a:off x="457200" y="4617720"/>
+            <a:ext cx="4572000" cy="320040"/>
+          </a:xfrm>
+          <a:prstGeom prst="rect">
+            <a:avLst/>
+          </a:prstGeom>
+          <a:noFill/>
+          <a:ln/>
+        </p:spPr>
+        <p:txBody>
+          <a:bodyPr wrap="square" lIns="0" tIns="0" rIns="0" bIns="0" rtlCol="0" anchor="ctr"/>
+          <a:lstStyle/>
+          <a:p>
+            <a:pPr algn="l" indent="0" marL="0">
+              <a:buNone/>
+            </a:pPr>
+            <a:r>
+              <a:rPr lang="en-US" sz="1000" dirty="0">
+                <a:solidFill>
+                  <a:srgbClr val="5E5E5E"/>
+                </a:solidFill>
+                <a:latin typeface="NVIDIA Sans" pitchFamily="34" charset="0"/>
+                <a:ea typeface="NVIDIA Sans" pitchFamily="34" charset="-122"/>
+                <a:cs typeface="NVIDIA Sans" pitchFamily="34" charset="-120"/>
+              </a:rPr>
+              <a:t>QwenPI Training Optimization</a:t>
+            </a:r>
+            <a:endParaRPr lang="en-US" sz="1000" dirty="0"/>
+          </a:p>
+        </p:txBody>
+      </p:sp>
+      <p:sp>
+        <p:nvSpPr>
+          <p:cNvPr id="22" name="Text 20"/>
+          <p:cNvSpPr/>
+          <p:nvPr/>
+        </p:nvSpPr>
+        <p:spPr>
+          <a:xfrm>
+            <a:off x="7360920" y="4617720"/>
+            <a:ext cx="320040" cy="320040"/>
+          </a:xfrm>
+          <a:prstGeom prst="rect">
+            <a:avLst/>
+          </a:prstGeom>
+          <a:noFill/>
+          <a:ln/>
+        </p:spPr>
+        <p:txBody>
+          <a:bodyPr wrap="square" lIns="0" tIns="0" rIns="0" bIns="0" rtlCol="0" anchor="ctr"/>
+          <a:lstStyle/>
+          <a:p>
+            <a:pPr algn="r" indent="0" marL="0">
+              <a:buNone/>
+            </a:pPr>
+            <a:r>
+              <a:rPr lang="en-US" sz="1000" dirty="0">
+                <a:solidFill>
+                  <a:srgbClr val="5E5E5E"/>
+                </a:solidFill>
+                <a:latin typeface="NVIDIA Sans" pitchFamily="34" charset="0"/>
+                <a:ea typeface="NVIDIA Sans" pitchFamily="34" charset="-122"/>
+                <a:cs typeface="NVIDIA Sans" pitchFamily="34" charset="-120"/>
+              </a:rPr>
+              <a:t>10</a:t>
+            </a:r>
+            <a:endParaRPr lang="en-US" sz="1000" dirty="0"/>
+          </a:p>
+        </p:txBody>
+      </p:sp>
+      <p:sp>
+        <p:nvSpPr>
+          <p:cNvPr id="23" name="Shape 21"/>
+          <p:cNvSpPr/>
+          <p:nvPr/>
+        </p:nvSpPr>
+        <p:spPr>
+          <a:xfrm>
+            <a:off x="7726680" y="4617720"/>
+            <a:ext cx="36576" cy="320040"/>
+          </a:xfrm>
+          <a:prstGeom prst="rect">
+            <a:avLst/>
+          </a:prstGeom>
+          <a:solidFill>
+            <a:srgbClr val="76B900"/>
+          </a:solidFill>
+          <a:ln/>
+        </p:spPr>
+      </p:sp>
+      <p:pic>
+        <p:nvPicPr>
+          <p:cNvPr id="24" name="Image 0" descr="/app/logos/nvidia-logo-blk-sm.png">    </p:cNvPr>
+          <p:cNvPicPr>
+            <a:picLocks noChangeAspect="1"/>
+          </p:cNvPicPr>
+          <p:nvPr/>
+        </p:nvPicPr>
+        <p:blipFill>
+          <a:blip r:embed="rId1"/>
+          <a:stretch>
+            <a:fillRect/>
+          </a:stretch>
+        </p:blipFill>
+        <p:spPr>
+          <a:xfrm>
+            <a:off x="7863840" y="4604004"/>
+            <a:ext cx="1005840" cy="347472"/>
+          </a:xfrm>
+          <a:prstGeom prst="rect">
+            <a:avLst/>
+          </a:prstGeom>
+        </p:spPr>
+      </p:pic>
+    </p:spTree>
+  </p:cSld>
+  <p:clrMapOvr>
+    <a:masterClrMapping/>
+  </p:clrMapOvr>
+</p:sld>
+</file>
+
+<file path=ppt/slides/slide11.xml><?xml version="1.0" encoding="utf-8"?>
+<p:sld xmlns:a="http://schemas.openxmlformats.org/drawingml/2006/main" xmlns:r="http://schemas.openxmlformats.org/officeDocument/2006/relationships" xmlns:p="http://schemas.openxmlformats.org/presentationml/2006/main">
+  <p:cSld name="Slide 11">
+    <p:bg>
+      <p:bgPr>
+        <a:solidFill>
+          <a:srgbClr val="FFFFFF"/>
+        </a:solidFill>
+      </p:bgPr>
+    </p:bg>
+    <p:spTree>
+      <p:nvGrpSpPr>
+        <p:cNvPr id="1" name=""/>
+        <p:cNvGrpSpPr/>
+        <p:nvPr/>
+      </p:nvGrpSpPr>
+      <p:grpSpPr>
+        <a:xfrm>
+          <a:off x="0" y="0"/>
+          <a:ext cx="0" cy="0"/>
+          <a:chOff x="0" y="0"/>
+          <a:chExt cx="0" cy="0"/>
+        </a:xfrm>
+      </p:grpSpPr>
+      <p:sp>
+        <p:nvSpPr>
+          <p:cNvPr id="2" name="Text 0"/>
+          <p:cNvSpPr/>
+          <p:nvPr/>
+        </p:nvSpPr>
+        <p:spPr>
+          <a:xfrm>
+            <a:off x="457200" y="256032"/>
+            <a:ext cx="8229600" cy="548640"/>
+          </a:xfrm>
+          <a:prstGeom prst="rect">
+            <a:avLst/>
+          </a:prstGeom>
+          <a:noFill/>
+          <a:ln/>
+        </p:spPr>
+        <p:txBody>
+          <a:bodyPr wrap="square" lIns="0" tIns="0" rIns="0" bIns="0" rtlCol="0" anchor="ctr"/>
+          <a:lstStyle/>
+          <a:p>
+            <a:pPr indent="0" marL="0">
+              <a:buNone/>
+            </a:pPr>
+            <a:r>
+              <a:rPr lang="en-US" sz="3000" b="1" dirty="0">
+                <a:solidFill>
+                  <a:srgbClr val="000000"/>
+                </a:solidFill>
+                <a:latin typeface="NVIDIA Sans" pitchFamily="34" charset="0"/>
+                <a:ea typeface="NVIDIA Sans" pitchFamily="34" charset="-122"/>
+                <a:cs typeface="NVIDIA Sans" pitchFamily="34" charset="-120"/>
+              </a:rPr>
               <a:t>CUDA Graphs — and Why Four, Not One</a:t>
             </a:r>
             <a:endParaRPr lang="en-US" sz="3000" dirty="0"/>
@@ -15718,7 +16711,7 @@
                 <a:ea typeface="NVIDIA Sans" pitchFamily="34" charset="-122"/>
                 <a:cs typeface="NVIDIA Sans" pitchFamily="34" charset="-120"/>
               </a:rPr>
-              <a:t>10</a:t>
+              <a:t>11</a:t>
             </a:r>
             <a:endParaRPr lang="en-US" sz="1000" dirty="0"/>
           </a:p>
@@ -15776,9 +16769,9 @@
 </p:sld>
 </file>
 
-<file path=ppt/slides/slide11.xml><?xml version="1.0" encoding="utf-8"?>
+<file path=ppt/slides/slide12.xml><?xml version="1.0" encoding="utf-8"?>
 <p:sld xmlns:a="http://schemas.openxmlformats.org/drawingml/2006/main" xmlns:r="http://schemas.openxmlformats.org/officeDocument/2006/relationships" xmlns:p="http://schemas.openxmlformats.org/presentationml/2006/main">
-  <p:cSld name="Slide 11">
+  <p:cSld name="Slide 12">
     <p:bg>
       <p:bgPr>
         <a:solidFill>
@@ -18070,7 +19063,7 @@
                 <a:ea typeface="NVIDIA Sans" pitchFamily="34" charset="-122"/>
                 <a:cs typeface="NVIDIA Sans" pitchFamily="34" charset="-120"/>
               </a:rPr>
-              <a:t>11</a:t>
+              <a:t>12</a:t>
             </a:r>
             <a:endParaRPr lang="en-US" sz="1000" dirty="0"/>
           </a:p>
@@ -18128,9 +19121,9 @@
 </p:sld>
 </file>
 
-<file path=ppt/slides/slide12.xml><?xml version="1.0" encoding="utf-8"?>
+<file path=ppt/slides/slide13.xml><?xml version="1.0" encoding="utf-8"?>
 <p:sld xmlns:a="http://schemas.openxmlformats.org/drawingml/2006/main" xmlns:r="http://schemas.openxmlformats.org/officeDocument/2006/relationships" xmlns:p="http://schemas.openxmlformats.org/presentationml/2006/main">
-  <p:cSld name="Slide 12">
+  <p:cSld name="Slide 13">
     <p:bg>
       <p:bgPr>
         <a:solidFill>
@@ -19337,7 +20330,7 @@
                 <a:ea typeface="NVIDIA Sans" pitchFamily="34" charset="-122"/>
                 <a:cs typeface="NVIDIA Sans" pitchFamily="34" charset="-120"/>
               </a:rPr>
-              <a:t>12</a:t>
+              <a:t>13</a:t>
             </a:r>
             <a:endParaRPr lang="en-US" sz="1000" dirty="0"/>
           </a:p>
@@ -19395,9 +20388,9 @@
 </p:sld>
 </file>
 
-<file path=ppt/slides/slide13.xml><?xml version="1.0" encoding="utf-8"?>
+<file path=ppt/slides/slide14.xml><?xml version="1.0" encoding="utf-8"?>
 <p:sld xmlns:a="http://schemas.openxmlformats.org/drawingml/2006/main" xmlns:r="http://schemas.openxmlformats.org/officeDocument/2006/relationships" xmlns:p="http://schemas.openxmlformats.org/presentationml/2006/main">
-  <p:cSld name="Slide 13">
+  <p:cSld name="Slide 14">
     <p:bg>
       <p:bgPr>
         <a:solidFill>
@@ -22339,7 +23332,7 @@
                 <a:ea typeface="NVIDIA Sans" pitchFamily="34" charset="-122"/>
                 <a:cs typeface="NVIDIA Sans" pitchFamily="34" charset="-120"/>
               </a:rPr>
-              <a:t>13</a:t>
+              <a:t>14</a:t>
             </a:r>
             <a:endParaRPr lang="en-US" sz="1000" dirty="0"/>
           </a:p>
@@ -22400,6 +23393,1021 @@
 <file path=ppt/slides/slide2.xml><?xml version="1.0" encoding="utf-8"?>
 <p:sld xmlns:a="http://schemas.openxmlformats.org/drawingml/2006/main" xmlns:r="http://schemas.openxmlformats.org/officeDocument/2006/relationships" xmlns:p="http://schemas.openxmlformats.org/presentationml/2006/main">
   <p:cSld name="Slide 2">
+    <p:bg>
+      <p:bgPr>
+        <a:solidFill>
+          <a:srgbClr val="FFFFFF"/>
+        </a:solidFill>
+      </p:bgPr>
+    </p:bg>
+    <p:spTree>
+      <p:nvGrpSpPr>
+        <p:cNvPr id="1" name=""/>
+        <p:cNvGrpSpPr/>
+        <p:nvPr/>
+      </p:nvGrpSpPr>
+      <p:grpSpPr>
+        <a:xfrm>
+          <a:off x="0" y="0"/>
+          <a:ext cx="0" cy="0"/>
+          <a:chOff x="0" y="0"/>
+          <a:chExt cx="0" cy="0"/>
+        </a:xfrm>
+      </p:grpSpPr>
+      <p:sp>
+        <p:nvSpPr>
+          <p:cNvPr id="2" name="Text 0"/>
+          <p:cNvSpPr/>
+          <p:nvPr/>
+        </p:nvSpPr>
+        <p:spPr>
+          <a:xfrm>
+            <a:off x="457200" y="256032"/>
+            <a:ext cx="8229600" cy="548640"/>
+          </a:xfrm>
+          <a:prstGeom prst="rect">
+            <a:avLst/>
+          </a:prstGeom>
+          <a:noFill/>
+          <a:ln/>
+        </p:spPr>
+        <p:txBody>
+          <a:bodyPr wrap="square" lIns="0" tIns="0" rIns="0" bIns="0" rtlCol="0" anchor="ctr"/>
+          <a:lstStyle/>
+          <a:p>
+            <a:pPr indent="0" marL="0">
+              <a:buNone/>
+            </a:pPr>
+            <a:r>
+              <a:rPr lang="en-US" sz="3000" b="1" dirty="0">
+                <a:solidFill>
+                  <a:srgbClr val="000000"/>
+                </a:solidFill>
+                <a:latin typeface="NVIDIA Sans" pitchFamily="34" charset="0"/>
+                <a:ea typeface="NVIDIA Sans" pitchFamily="34" charset="-122"/>
+                <a:cs typeface="NVIDIA Sans" pitchFamily="34" charset="-120"/>
+              </a:rPr>
+              <a:t>Agenda</a:t>
+            </a:r>
+            <a:endParaRPr lang="en-US" sz="3000" dirty="0"/>
+          </a:p>
+        </p:txBody>
+      </p:sp>
+      <p:sp>
+        <p:nvSpPr>
+          <p:cNvPr id="3" name="Shape 1"/>
+          <p:cNvSpPr/>
+          <p:nvPr/>
+        </p:nvSpPr>
+        <p:spPr>
+          <a:xfrm>
+            <a:off x="640080" y="1271016"/>
+            <a:ext cx="365760" cy="365760"/>
+          </a:xfrm>
+          <a:prstGeom prst="ellipse">
+            <a:avLst/>
+          </a:prstGeom>
+          <a:solidFill>
+            <a:srgbClr val="76B900"/>
+          </a:solidFill>
+          <a:ln/>
+        </p:spPr>
+      </p:sp>
+      <p:sp>
+        <p:nvSpPr>
+          <p:cNvPr id="4" name="Text 2"/>
+          <p:cNvSpPr/>
+          <p:nvPr/>
+        </p:nvSpPr>
+        <p:spPr>
+          <a:xfrm>
+            <a:off x="640080" y="1271016"/>
+            <a:ext cx="365760" cy="365760"/>
+          </a:xfrm>
+          <a:prstGeom prst="rect">
+            <a:avLst/>
+          </a:prstGeom>
+          <a:noFill/>
+          <a:ln/>
+        </p:spPr>
+        <p:txBody>
+          <a:bodyPr wrap="square" lIns="0" tIns="0" rIns="0" bIns="0" rtlCol="0" anchor="ctr"/>
+          <a:lstStyle/>
+          <a:p>
+            <a:pPr algn="ctr" indent="0" marL="0">
+              <a:buNone/>
+            </a:pPr>
+            <a:r>
+              <a:rPr lang="en-US" sz="1500" b="1" dirty="0">
+                <a:solidFill>
+                  <a:srgbClr val="FFFFFF"/>
+                </a:solidFill>
+                <a:latin typeface="NVIDIA Sans" pitchFamily="34" charset="0"/>
+                <a:ea typeface="NVIDIA Sans" pitchFamily="34" charset="-122"/>
+                <a:cs typeface="NVIDIA Sans" pitchFamily="34" charset="-120"/>
+              </a:rPr>
+              <a:t>1</a:t>
+            </a:r>
+            <a:endParaRPr lang="en-US" sz="1500" dirty="0"/>
+          </a:p>
+        </p:txBody>
+      </p:sp>
+      <p:sp>
+        <p:nvSpPr>
+          <p:cNvPr id="5" name="Text 3"/>
+          <p:cNvSpPr/>
+          <p:nvPr/>
+        </p:nvSpPr>
+        <p:spPr>
+          <a:xfrm>
+            <a:off x="1234440" y="1234440"/>
+            <a:ext cx="6309360" cy="438912"/>
+          </a:xfrm>
+          <a:prstGeom prst="rect">
+            <a:avLst/>
+          </a:prstGeom>
+          <a:noFill/>
+          <a:ln/>
+        </p:spPr>
+        <p:txBody>
+          <a:bodyPr wrap="square" lIns="0" tIns="0" rIns="0" bIns="0" rtlCol="0" anchor="ctr"/>
+          <a:lstStyle/>
+          <a:p>
+            <a:pPr indent="0" marL="0">
+              <a:buNone/>
+            </a:pPr>
+            <a:r>
+              <a:rPr lang="en-US" sz="1700" dirty="0">
+                <a:solidFill>
+                  <a:srgbClr val="000000"/>
+                </a:solidFill>
+                <a:latin typeface="NVIDIA Sans" pitchFamily="34" charset="0"/>
+                <a:ea typeface="NVIDIA Sans" pitchFamily="34" charset="-122"/>
+                <a:cs typeface="NVIDIA Sans" pitchFamily="34" charset="-120"/>
+              </a:rPr>
+              <a:t>Results at a glance</a:t>
+            </a:r>
+            <a:endParaRPr lang="en-US" sz="1700" dirty="0"/>
+          </a:p>
+        </p:txBody>
+      </p:sp>
+      <p:sp>
+        <p:nvSpPr>
+          <p:cNvPr id="6" name="Text 4"/>
+          <p:cNvSpPr/>
+          <p:nvPr/>
+        </p:nvSpPr>
+        <p:spPr>
+          <a:xfrm>
+            <a:off x="7680960" y="1234440"/>
+            <a:ext cx="914400" cy="438912"/>
+          </a:xfrm>
+          <a:prstGeom prst="rect">
+            <a:avLst/>
+          </a:prstGeom>
+          <a:noFill/>
+          <a:ln/>
+        </p:spPr>
+        <p:txBody>
+          <a:bodyPr wrap="square" lIns="0" tIns="0" rIns="0" bIns="0" rtlCol="0" anchor="ctr"/>
+          <a:lstStyle/>
+          <a:p>
+            <a:pPr algn="r" indent="0" marL="0">
+              <a:buNone/>
+            </a:pPr>
+            <a:r>
+              <a:rPr lang="en-US" sz="1400" b="1" dirty="0">
+                <a:solidFill>
+                  <a:srgbClr val="76B900"/>
+                </a:solidFill>
+                <a:latin typeface="NVIDIA Sans" pitchFamily="34" charset="0"/>
+                <a:ea typeface="NVIDIA Sans" pitchFamily="34" charset="-122"/>
+                <a:cs typeface="NVIDIA Sans" pitchFamily="34" charset="-120"/>
+              </a:rPr>
+              <a:t>3</a:t>
+            </a:r>
+            <a:endParaRPr lang="en-US" sz="1400" dirty="0"/>
+          </a:p>
+        </p:txBody>
+      </p:sp>
+      <p:sp>
+        <p:nvSpPr>
+          <p:cNvPr id="7" name="Shape 5"/>
+          <p:cNvSpPr/>
+          <p:nvPr/>
+        </p:nvSpPr>
+        <p:spPr>
+          <a:xfrm>
+            <a:off x="640080" y="1783080"/>
+            <a:ext cx="365760" cy="365760"/>
+          </a:xfrm>
+          <a:prstGeom prst="ellipse">
+            <a:avLst/>
+          </a:prstGeom>
+          <a:solidFill>
+            <a:srgbClr val="76B900"/>
+          </a:solidFill>
+          <a:ln/>
+        </p:spPr>
+      </p:sp>
+      <p:sp>
+        <p:nvSpPr>
+          <p:cNvPr id="8" name="Text 6"/>
+          <p:cNvSpPr/>
+          <p:nvPr/>
+        </p:nvSpPr>
+        <p:spPr>
+          <a:xfrm>
+            <a:off x="640080" y="1783080"/>
+            <a:ext cx="365760" cy="365760"/>
+          </a:xfrm>
+          <a:prstGeom prst="rect">
+            <a:avLst/>
+          </a:prstGeom>
+          <a:noFill/>
+          <a:ln/>
+        </p:spPr>
+        <p:txBody>
+          <a:bodyPr wrap="square" lIns="0" tIns="0" rIns="0" bIns="0" rtlCol="0" anchor="ctr"/>
+          <a:lstStyle/>
+          <a:p>
+            <a:pPr algn="ctr" indent="0" marL="0">
+              <a:buNone/>
+            </a:pPr>
+            <a:r>
+              <a:rPr lang="en-US" sz="1500" b="1" dirty="0">
+                <a:solidFill>
+                  <a:srgbClr val="FFFFFF"/>
+                </a:solidFill>
+                <a:latin typeface="NVIDIA Sans" pitchFamily="34" charset="0"/>
+                <a:ea typeface="NVIDIA Sans" pitchFamily="34" charset="-122"/>
+                <a:cs typeface="NVIDIA Sans" pitchFamily="34" charset="-120"/>
+              </a:rPr>
+              <a:t>2</a:t>
+            </a:r>
+            <a:endParaRPr lang="en-US" sz="1500" dirty="0"/>
+          </a:p>
+        </p:txBody>
+      </p:sp>
+      <p:sp>
+        <p:nvSpPr>
+          <p:cNvPr id="9" name="Text 7"/>
+          <p:cNvSpPr/>
+          <p:nvPr/>
+        </p:nvSpPr>
+        <p:spPr>
+          <a:xfrm>
+            <a:off x="1234440" y="1746504"/>
+            <a:ext cx="6309360" cy="438912"/>
+          </a:xfrm>
+          <a:prstGeom prst="rect">
+            <a:avLst/>
+          </a:prstGeom>
+          <a:noFill/>
+          <a:ln/>
+        </p:spPr>
+        <p:txBody>
+          <a:bodyPr wrap="square" lIns="0" tIns="0" rIns="0" bIns="0" rtlCol="0" anchor="ctr"/>
+          <a:lstStyle/>
+          <a:p>
+            <a:pPr indent="0" marL="0">
+              <a:buNone/>
+            </a:pPr>
+            <a:r>
+              <a:rPr lang="en-US" sz="1700" dirty="0">
+                <a:solidFill>
+                  <a:srgbClr val="000000"/>
+                </a:solidFill>
+                <a:latin typeface="NVIDIA Sans" pitchFamily="34" charset="0"/>
+                <a:ea typeface="NVIDIA Sans" pitchFamily="34" charset="-122"/>
+                <a:cs typeface="NVIDIA Sans" pitchFamily="34" charset="-120"/>
+              </a:rPr>
+              <a:t>Model &amp; workload</a:t>
+            </a:r>
+            <a:endParaRPr lang="en-US" sz="1700" dirty="0"/>
+          </a:p>
+        </p:txBody>
+      </p:sp>
+      <p:sp>
+        <p:nvSpPr>
+          <p:cNvPr id="10" name="Text 8"/>
+          <p:cNvSpPr/>
+          <p:nvPr/>
+        </p:nvSpPr>
+        <p:spPr>
+          <a:xfrm>
+            <a:off x="7680960" y="1746504"/>
+            <a:ext cx="914400" cy="438912"/>
+          </a:xfrm>
+          <a:prstGeom prst="rect">
+            <a:avLst/>
+          </a:prstGeom>
+          <a:noFill/>
+          <a:ln/>
+        </p:spPr>
+        <p:txBody>
+          <a:bodyPr wrap="square" lIns="0" tIns="0" rIns="0" bIns="0" rtlCol="0" anchor="ctr"/>
+          <a:lstStyle/>
+          <a:p>
+            <a:pPr algn="r" indent="0" marL="0">
+              <a:buNone/>
+            </a:pPr>
+            <a:r>
+              <a:rPr lang="en-US" sz="1400" b="1" dirty="0">
+                <a:solidFill>
+                  <a:srgbClr val="76B900"/>
+                </a:solidFill>
+                <a:latin typeface="NVIDIA Sans" pitchFamily="34" charset="0"/>
+                <a:ea typeface="NVIDIA Sans" pitchFamily="34" charset="-122"/>
+                <a:cs typeface="NVIDIA Sans" pitchFamily="34" charset="-120"/>
+              </a:rPr>
+              <a:t>4</a:t>
+            </a:r>
+            <a:endParaRPr lang="en-US" sz="1400" dirty="0"/>
+          </a:p>
+        </p:txBody>
+      </p:sp>
+      <p:sp>
+        <p:nvSpPr>
+          <p:cNvPr id="11" name="Shape 9"/>
+          <p:cNvSpPr/>
+          <p:nvPr/>
+        </p:nvSpPr>
+        <p:spPr>
+          <a:xfrm>
+            <a:off x="640080" y="2295144"/>
+            <a:ext cx="365760" cy="365760"/>
+          </a:xfrm>
+          <a:prstGeom prst="ellipse">
+            <a:avLst/>
+          </a:prstGeom>
+          <a:solidFill>
+            <a:srgbClr val="76B900"/>
+          </a:solidFill>
+          <a:ln/>
+        </p:spPr>
+      </p:sp>
+      <p:sp>
+        <p:nvSpPr>
+          <p:cNvPr id="12" name="Text 10"/>
+          <p:cNvSpPr/>
+          <p:nvPr/>
+        </p:nvSpPr>
+        <p:spPr>
+          <a:xfrm>
+            <a:off x="640080" y="2295144"/>
+            <a:ext cx="365760" cy="365760"/>
+          </a:xfrm>
+          <a:prstGeom prst="rect">
+            <a:avLst/>
+          </a:prstGeom>
+          <a:noFill/>
+          <a:ln/>
+        </p:spPr>
+        <p:txBody>
+          <a:bodyPr wrap="square" lIns="0" tIns="0" rIns="0" bIns="0" rtlCol="0" anchor="ctr"/>
+          <a:lstStyle/>
+          <a:p>
+            <a:pPr algn="ctr" indent="0" marL="0">
+              <a:buNone/>
+            </a:pPr>
+            <a:r>
+              <a:rPr lang="en-US" sz="1500" b="1" dirty="0">
+                <a:solidFill>
+                  <a:srgbClr val="FFFFFF"/>
+                </a:solidFill>
+                <a:latin typeface="NVIDIA Sans" pitchFamily="34" charset="0"/>
+                <a:ea typeface="NVIDIA Sans" pitchFamily="34" charset="-122"/>
+                <a:cs typeface="NVIDIA Sans" pitchFamily="34" charset="-120"/>
+              </a:rPr>
+              <a:t>3</a:t>
+            </a:r>
+            <a:endParaRPr lang="en-US" sz="1500" dirty="0"/>
+          </a:p>
+        </p:txBody>
+      </p:sp>
+      <p:sp>
+        <p:nvSpPr>
+          <p:cNvPr id="13" name="Text 11"/>
+          <p:cNvSpPr/>
+          <p:nvPr/>
+        </p:nvSpPr>
+        <p:spPr>
+          <a:xfrm>
+            <a:off x="1234440" y="2258568"/>
+            <a:ext cx="6309360" cy="438912"/>
+          </a:xfrm>
+          <a:prstGeom prst="rect">
+            <a:avLst/>
+          </a:prstGeom>
+          <a:noFill/>
+          <a:ln/>
+        </p:spPr>
+        <p:txBody>
+          <a:bodyPr wrap="square" lIns="0" tIns="0" rIns="0" bIns="0" rtlCol="0" anchor="ctr"/>
+          <a:lstStyle/>
+          <a:p>
+            <a:pPr indent="0" marL="0">
+              <a:buNone/>
+            </a:pPr>
+            <a:r>
+              <a:rPr lang="en-US" sz="1700" dirty="0">
+                <a:solidFill>
+                  <a:srgbClr val="000000"/>
+                </a:solidFill>
+                <a:latin typeface="NVIDIA Sans" pitchFamily="34" charset="0"/>
+                <a:ea typeface="NVIDIA Sans" pitchFamily="34" charset="-122"/>
+                <a:cs typeface="NVIDIA Sans" pitchFamily="34" charset="-120"/>
+              </a:rPr>
+              <a:t>Diagnosis — where did 800 ms go</a:t>
+            </a:r>
+            <a:endParaRPr lang="en-US" sz="1700" dirty="0"/>
+          </a:p>
+        </p:txBody>
+      </p:sp>
+      <p:sp>
+        <p:nvSpPr>
+          <p:cNvPr id="14" name="Text 12"/>
+          <p:cNvSpPr/>
+          <p:nvPr/>
+        </p:nvSpPr>
+        <p:spPr>
+          <a:xfrm>
+            <a:off x="7680960" y="2258568"/>
+            <a:ext cx="914400" cy="438912"/>
+          </a:xfrm>
+          <a:prstGeom prst="rect">
+            <a:avLst/>
+          </a:prstGeom>
+          <a:noFill/>
+          <a:ln/>
+        </p:spPr>
+        <p:txBody>
+          <a:bodyPr wrap="square" lIns="0" tIns="0" rIns="0" bIns="0" rtlCol="0" anchor="ctr"/>
+          <a:lstStyle/>
+          <a:p>
+            <a:pPr algn="r" indent="0" marL="0">
+              <a:buNone/>
+            </a:pPr>
+            <a:r>
+              <a:rPr lang="en-US" sz="1400" b="1" dirty="0">
+                <a:solidFill>
+                  <a:srgbClr val="76B900"/>
+                </a:solidFill>
+                <a:latin typeface="NVIDIA Sans" pitchFamily="34" charset="0"/>
+                <a:ea typeface="NVIDIA Sans" pitchFamily="34" charset="-122"/>
+                <a:cs typeface="NVIDIA Sans" pitchFamily="34" charset="-120"/>
+              </a:rPr>
+              <a:t>5 – 6</a:t>
+            </a:r>
+            <a:endParaRPr lang="en-US" sz="1400" dirty="0"/>
+          </a:p>
+        </p:txBody>
+      </p:sp>
+      <p:sp>
+        <p:nvSpPr>
+          <p:cNvPr id="15" name="Shape 13"/>
+          <p:cNvSpPr/>
+          <p:nvPr/>
+        </p:nvSpPr>
+        <p:spPr>
+          <a:xfrm>
+            <a:off x="640080" y="2807208"/>
+            <a:ext cx="365760" cy="365760"/>
+          </a:xfrm>
+          <a:prstGeom prst="ellipse">
+            <a:avLst/>
+          </a:prstGeom>
+          <a:solidFill>
+            <a:srgbClr val="76B900"/>
+          </a:solidFill>
+          <a:ln/>
+        </p:spPr>
+      </p:sp>
+      <p:sp>
+        <p:nvSpPr>
+          <p:cNvPr id="16" name="Text 14"/>
+          <p:cNvSpPr/>
+          <p:nvPr/>
+        </p:nvSpPr>
+        <p:spPr>
+          <a:xfrm>
+            <a:off x="640080" y="2807208"/>
+            <a:ext cx="365760" cy="365760"/>
+          </a:xfrm>
+          <a:prstGeom prst="rect">
+            <a:avLst/>
+          </a:prstGeom>
+          <a:noFill/>
+          <a:ln/>
+        </p:spPr>
+        <p:txBody>
+          <a:bodyPr wrap="square" lIns="0" tIns="0" rIns="0" bIns="0" rtlCol="0" anchor="ctr"/>
+          <a:lstStyle/>
+          <a:p>
+            <a:pPr algn="ctr" indent="0" marL="0">
+              <a:buNone/>
+            </a:pPr>
+            <a:r>
+              <a:rPr lang="en-US" sz="1500" b="1" dirty="0">
+                <a:solidFill>
+                  <a:srgbClr val="FFFFFF"/>
+                </a:solidFill>
+                <a:latin typeface="NVIDIA Sans" pitchFamily="34" charset="0"/>
+                <a:ea typeface="NVIDIA Sans" pitchFamily="34" charset="-122"/>
+                <a:cs typeface="NVIDIA Sans" pitchFamily="34" charset="-120"/>
+              </a:rPr>
+              <a:t>4</a:t>
+            </a:r>
+            <a:endParaRPr lang="en-US" sz="1500" dirty="0"/>
+          </a:p>
+        </p:txBody>
+      </p:sp>
+      <p:sp>
+        <p:nvSpPr>
+          <p:cNvPr id="17" name="Text 15"/>
+          <p:cNvSpPr/>
+          <p:nvPr/>
+        </p:nvSpPr>
+        <p:spPr>
+          <a:xfrm>
+            <a:off x="1234440" y="2770632"/>
+            <a:ext cx="6309360" cy="438912"/>
+          </a:xfrm>
+          <a:prstGeom prst="rect">
+            <a:avLst/>
+          </a:prstGeom>
+          <a:noFill/>
+          <a:ln/>
+        </p:spPr>
+        <p:txBody>
+          <a:bodyPr wrap="square" lIns="0" tIns="0" rIns="0" bIns="0" rtlCol="0" anchor="ctr"/>
+          <a:lstStyle/>
+          <a:p>
+            <a:pPr indent="0" marL="0">
+              <a:buNone/>
+            </a:pPr>
+            <a:r>
+              <a:rPr lang="en-US" sz="1700" dirty="0">
+                <a:solidFill>
+                  <a:srgbClr val="000000"/>
+                </a:solidFill>
+                <a:latin typeface="NVIDIA Sans" pitchFamily="34" charset="0"/>
+                <a:ea typeface="NVIDIA Sans" pitchFamily="34" charset="-122"/>
+                <a:cs typeface="NVIDIA Sans" pitchFamily="34" charset="-120"/>
+              </a:rPr>
+              <a:t>The six fixes — precision, syncs, CUDA Graphs, comm</a:t>
+            </a:r>
+            <a:endParaRPr lang="en-US" sz="1700" dirty="0"/>
+          </a:p>
+        </p:txBody>
+      </p:sp>
+      <p:sp>
+        <p:nvSpPr>
+          <p:cNvPr id="18" name="Text 16"/>
+          <p:cNvSpPr/>
+          <p:nvPr/>
+        </p:nvSpPr>
+        <p:spPr>
+          <a:xfrm>
+            <a:off x="7680960" y="2770632"/>
+            <a:ext cx="914400" cy="438912"/>
+          </a:xfrm>
+          <a:prstGeom prst="rect">
+            <a:avLst/>
+          </a:prstGeom>
+          <a:noFill/>
+          <a:ln/>
+        </p:spPr>
+        <p:txBody>
+          <a:bodyPr wrap="square" lIns="0" tIns="0" rIns="0" bIns="0" rtlCol="0" anchor="ctr"/>
+          <a:lstStyle/>
+          <a:p>
+            <a:pPr algn="r" indent="0" marL="0">
+              <a:buNone/>
+            </a:pPr>
+            <a:r>
+              <a:rPr lang="en-US" sz="1400" b="1" dirty="0">
+                <a:solidFill>
+                  <a:srgbClr val="76B900"/>
+                </a:solidFill>
+                <a:latin typeface="NVIDIA Sans" pitchFamily="34" charset="0"/>
+                <a:ea typeface="NVIDIA Sans" pitchFamily="34" charset="-122"/>
+                <a:cs typeface="NVIDIA Sans" pitchFamily="34" charset="-120"/>
+              </a:rPr>
+              <a:t>7 – 12</a:t>
+            </a:r>
+            <a:endParaRPr lang="en-US" sz="1400" dirty="0"/>
+          </a:p>
+        </p:txBody>
+      </p:sp>
+      <p:sp>
+        <p:nvSpPr>
+          <p:cNvPr id="19" name="Shape 17"/>
+          <p:cNvSpPr/>
+          <p:nvPr/>
+        </p:nvSpPr>
+        <p:spPr>
+          <a:xfrm>
+            <a:off x="640080" y="3319272"/>
+            <a:ext cx="365760" cy="365760"/>
+          </a:xfrm>
+          <a:prstGeom prst="ellipse">
+            <a:avLst/>
+          </a:prstGeom>
+          <a:solidFill>
+            <a:srgbClr val="76B900"/>
+          </a:solidFill>
+          <a:ln/>
+        </p:spPr>
+      </p:sp>
+      <p:sp>
+        <p:nvSpPr>
+          <p:cNvPr id="20" name="Text 18"/>
+          <p:cNvSpPr/>
+          <p:nvPr/>
+        </p:nvSpPr>
+        <p:spPr>
+          <a:xfrm>
+            <a:off x="640080" y="3319272"/>
+            <a:ext cx="365760" cy="365760"/>
+          </a:xfrm>
+          <a:prstGeom prst="rect">
+            <a:avLst/>
+          </a:prstGeom>
+          <a:noFill/>
+          <a:ln/>
+        </p:spPr>
+        <p:txBody>
+          <a:bodyPr wrap="square" lIns="0" tIns="0" rIns="0" bIns="0" rtlCol="0" anchor="ctr"/>
+          <a:lstStyle/>
+          <a:p>
+            <a:pPr algn="ctr" indent="0" marL="0">
+              <a:buNone/>
+            </a:pPr>
+            <a:r>
+              <a:rPr lang="en-US" sz="1500" b="1" dirty="0">
+                <a:solidFill>
+                  <a:srgbClr val="FFFFFF"/>
+                </a:solidFill>
+                <a:latin typeface="NVIDIA Sans" pitchFamily="34" charset="0"/>
+                <a:ea typeface="NVIDIA Sans" pitchFamily="34" charset="-122"/>
+                <a:cs typeface="NVIDIA Sans" pitchFamily="34" charset="-120"/>
+              </a:rPr>
+              <a:t>5</a:t>
+            </a:r>
+            <a:endParaRPr lang="en-US" sz="1500" dirty="0"/>
+          </a:p>
+        </p:txBody>
+      </p:sp>
+      <p:sp>
+        <p:nvSpPr>
+          <p:cNvPr id="21" name="Text 19"/>
+          <p:cNvSpPr/>
+          <p:nvPr/>
+        </p:nvSpPr>
+        <p:spPr>
+          <a:xfrm>
+            <a:off x="1234440" y="3282696"/>
+            <a:ext cx="6309360" cy="438912"/>
+          </a:xfrm>
+          <a:prstGeom prst="rect">
+            <a:avLst/>
+          </a:prstGeom>
+          <a:noFill/>
+          <a:ln/>
+        </p:spPr>
+        <p:txBody>
+          <a:bodyPr wrap="square" lIns="0" tIns="0" rIns="0" bIns="0" rtlCol="0" anchor="ctr"/>
+          <a:lstStyle/>
+          <a:p>
+            <a:pPr indent="0" marL="0">
+              <a:buNone/>
+            </a:pPr>
+            <a:r>
+              <a:rPr lang="en-US" sz="1700" dirty="0">
+                <a:solidFill>
+                  <a:srgbClr val="000000"/>
+                </a:solidFill>
+                <a:latin typeface="NVIDIA Sans" pitchFamily="34" charset="0"/>
+                <a:ea typeface="NVIDIA Sans" pitchFamily="34" charset="-122"/>
+                <a:cs typeface="NVIDIA Sans" pitchFamily="34" charset="-120"/>
+              </a:rPr>
+              <a:t>Batch scaling</a:t>
+            </a:r>
+            <a:endParaRPr lang="en-US" sz="1700" dirty="0"/>
+          </a:p>
+        </p:txBody>
+      </p:sp>
+      <p:sp>
+        <p:nvSpPr>
+          <p:cNvPr id="22" name="Text 20"/>
+          <p:cNvSpPr/>
+          <p:nvPr/>
+        </p:nvSpPr>
+        <p:spPr>
+          <a:xfrm>
+            <a:off x="7680960" y="3282696"/>
+            <a:ext cx="914400" cy="438912"/>
+          </a:xfrm>
+          <a:prstGeom prst="rect">
+            <a:avLst/>
+          </a:prstGeom>
+          <a:noFill/>
+          <a:ln/>
+        </p:spPr>
+        <p:txBody>
+          <a:bodyPr wrap="square" lIns="0" tIns="0" rIns="0" bIns="0" rtlCol="0" anchor="ctr"/>
+          <a:lstStyle/>
+          <a:p>
+            <a:pPr algn="r" indent="0" marL="0">
+              <a:buNone/>
+            </a:pPr>
+            <a:r>
+              <a:rPr lang="en-US" sz="1400" b="1" dirty="0">
+                <a:solidFill>
+                  <a:srgbClr val="76B900"/>
+                </a:solidFill>
+                <a:latin typeface="NVIDIA Sans" pitchFamily="34" charset="0"/>
+                <a:ea typeface="NVIDIA Sans" pitchFamily="34" charset="-122"/>
+                <a:cs typeface="NVIDIA Sans" pitchFamily="34" charset="-120"/>
+              </a:rPr>
+              <a:t>13</a:t>
+            </a:r>
+            <a:endParaRPr lang="en-US" sz="1400" dirty="0"/>
+          </a:p>
+        </p:txBody>
+      </p:sp>
+      <p:sp>
+        <p:nvSpPr>
+          <p:cNvPr id="23" name="Shape 21"/>
+          <p:cNvSpPr/>
+          <p:nvPr/>
+        </p:nvSpPr>
+        <p:spPr>
+          <a:xfrm>
+            <a:off x="640080" y="3831336"/>
+            <a:ext cx="365760" cy="365760"/>
+          </a:xfrm>
+          <a:prstGeom prst="ellipse">
+            <a:avLst/>
+          </a:prstGeom>
+          <a:solidFill>
+            <a:srgbClr val="76B900"/>
+          </a:solidFill>
+          <a:ln/>
+        </p:spPr>
+      </p:sp>
+      <p:sp>
+        <p:nvSpPr>
+          <p:cNvPr id="24" name="Text 22"/>
+          <p:cNvSpPr/>
+          <p:nvPr/>
+        </p:nvSpPr>
+        <p:spPr>
+          <a:xfrm>
+            <a:off x="640080" y="3831336"/>
+            <a:ext cx="365760" cy="365760"/>
+          </a:xfrm>
+          <a:prstGeom prst="rect">
+            <a:avLst/>
+          </a:prstGeom>
+          <a:noFill/>
+          <a:ln/>
+        </p:spPr>
+        <p:txBody>
+          <a:bodyPr wrap="square" lIns="0" tIns="0" rIns="0" bIns="0" rtlCol="0" anchor="ctr"/>
+          <a:lstStyle/>
+          <a:p>
+            <a:pPr algn="ctr" indent="0" marL="0">
+              <a:buNone/>
+            </a:pPr>
+            <a:r>
+              <a:rPr lang="en-US" sz="1500" b="1" dirty="0">
+                <a:solidFill>
+                  <a:srgbClr val="FFFFFF"/>
+                </a:solidFill>
+                <a:latin typeface="NVIDIA Sans" pitchFamily="34" charset="0"/>
+                <a:ea typeface="NVIDIA Sans" pitchFamily="34" charset="-122"/>
+                <a:cs typeface="NVIDIA Sans" pitchFamily="34" charset="-120"/>
+              </a:rPr>
+              <a:t>6</a:t>
+            </a:r>
+            <a:endParaRPr lang="en-US" sz="1500" dirty="0"/>
+          </a:p>
+        </p:txBody>
+      </p:sp>
+      <p:sp>
+        <p:nvSpPr>
+          <p:cNvPr id="25" name="Text 23"/>
+          <p:cNvSpPr/>
+          <p:nvPr/>
+        </p:nvSpPr>
+        <p:spPr>
+          <a:xfrm>
+            <a:off x="1234440" y="3794760"/>
+            <a:ext cx="6309360" cy="438912"/>
+          </a:xfrm>
+          <a:prstGeom prst="rect">
+            <a:avLst/>
+          </a:prstGeom>
+          <a:noFill/>
+          <a:ln/>
+        </p:spPr>
+        <p:txBody>
+          <a:bodyPr wrap="square" lIns="0" tIns="0" rIns="0" bIns="0" rtlCol="0" anchor="ctr"/>
+          <a:lstStyle/>
+          <a:p>
+            <a:pPr indent="0" marL="0">
+              <a:buNone/>
+            </a:pPr>
+            <a:r>
+              <a:rPr lang="en-US" sz="1700" dirty="0">
+                <a:solidFill>
+                  <a:srgbClr val="000000"/>
+                </a:solidFill>
+                <a:latin typeface="NVIDIA Sans" pitchFamily="34" charset="0"/>
+                <a:ea typeface="NVIDIA Sans" pitchFamily="34" charset="-122"/>
+                <a:cs typeface="NVIDIA Sans" pitchFamily="34" charset="-120"/>
+              </a:rPr>
+              <a:t>What's next</a:t>
+            </a:r>
+            <a:endParaRPr lang="en-US" sz="1700" dirty="0"/>
+          </a:p>
+        </p:txBody>
+      </p:sp>
+      <p:sp>
+        <p:nvSpPr>
+          <p:cNvPr id="26" name="Text 24"/>
+          <p:cNvSpPr/>
+          <p:nvPr/>
+        </p:nvSpPr>
+        <p:spPr>
+          <a:xfrm>
+            <a:off x="7680960" y="3794760"/>
+            <a:ext cx="914400" cy="438912"/>
+          </a:xfrm>
+          <a:prstGeom prst="rect">
+            <a:avLst/>
+          </a:prstGeom>
+          <a:noFill/>
+          <a:ln/>
+        </p:spPr>
+        <p:txBody>
+          <a:bodyPr wrap="square" lIns="0" tIns="0" rIns="0" bIns="0" rtlCol="0" anchor="ctr"/>
+          <a:lstStyle/>
+          <a:p>
+            <a:pPr algn="r" indent="0" marL="0">
+              <a:buNone/>
+            </a:pPr>
+            <a:r>
+              <a:rPr lang="en-US" sz="1400" b="1" dirty="0">
+                <a:solidFill>
+                  <a:srgbClr val="76B900"/>
+                </a:solidFill>
+                <a:latin typeface="NVIDIA Sans" pitchFamily="34" charset="0"/>
+                <a:ea typeface="NVIDIA Sans" pitchFamily="34" charset="-122"/>
+                <a:cs typeface="NVIDIA Sans" pitchFamily="34" charset="-120"/>
+              </a:rPr>
+              <a:t>14</a:t>
+            </a:r>
+            <a:endParaRPr lang="en-US" sz="1400" dirty="0"/>
+          </a:p>
+        </p:txBody>
+      </p:sp>
+      <p:sp>
+        <p:nvSpPr>
+          <p:cNvPr id="27" name="Text 25"/>
+          <p:cNvSpPr/>
+          <p:nvPr/>
+        </p:nvSpPr>
+        <p:spPr>
+          <a:xfrm>
+            <a:off x="457200" y="4617720"/>
+            <a:ext cx="4572000" cy="320040"/>
+          </a:xfrm>
+          <a:prstGeom prst="rect">
+            <a:avLst/>
+          </a:prstGeom>
+          <a:noFill/>
+          <a:ln/>
+        </p:spPr>
+        <p:txBody>
+          <a:bodyPr wrap="square" lIns="0" tIns="0" rIns="0" bIns="0" rtlCol="0" anchor="ctr"/>
+          <a:lstStyle/>
+          <a:p>
+            <a:pPr algn="l" indent="0" marL="0">
+              <a:buNone/>
+            </a:pPr>
+            <a:r>
+              <a:rPr lang="en-US" sz="1000" dirty="0">
+                <a:solidFill>
+                  <a:srgbClr val="5E5E5E"/>
+                </a:solidFill>
+                <a:latin typeface="NVIDIA Sans" pitchFamily="34" charset="0"/>
+                <a:ea typeface="NVIDIA Sans" pitchFamily="34" charset="-122"/>
+                <a:cs typeface="NVIDIA Sans" pitchFamily="34" charset="-120"/>
+              </a:rPr>
+              <a:t>QwenPI Training Optimization</a:t>
+            </a:r>
+            <a:endParaRPr lang="en-US" sz="1000" dirty="0"/>
+          </a:p>
+        </p:txBody>
+      </p:sp>
+      <p:sp>
+        <p:nvSpPr>
+          <p:cNvPr id="28" name="Text 26"/>
+          <p:cNvSpPr/>
+          <p:nvPr/>
+        </p:nvSpPr>
+        <p:spPr>
+          <a:xfrm>
+            <a:off x="7360920" y="4617720"/>
+            <a:ext cx="320040" cy="320040"/>
+          </a:xfrm>
+          <a:prstGeom prst="rect">
+            <a:avLst/>
+          </a:prstGeom>
+          <a:noFill/>
+          <a:ln/>
+        </p:spPr>
+        <p:txBody>
+          <a:bodyPr wrap="square" lIns="0" tIns="0" rIns="0" bIns="0" rtlCol="0" anchor="ctr"/>
+          <a:lstStyle/>
+          <a:p>
+            <a:pPr algn="r" indent="0" marL="0">
+              <a:buNone/>
+            </a:pPr>
+            <a:r>
+              <a:rPr lang="en-US" sz="1000" dirty="0">
+                <a:solidFill>
+                  <a:srgbClr val="5E5E5E"/>
+                </a:solidFill>
+                <a:latin typeface="NVIDIA Sans" pitchFamily="34" charset="0"/>
+                <a:ea typeface="NVIDIA Sans" pitchFamily="34" charset="-122"/>
+                <a:cs typeface="NVIDIA Sans" pitchFamily="34" charset="-120"/>
+              </a:rPr>
+              <a:t>2</a:t>
+            </a:r>
+            <a:endParaRPr lang="en-US" sz="1000" dirty="0"/>
+          </a:p>
+        </p:txBody>
+      </p:sp>
+      <p:sp>
+        <p:nvSpPr>
+          <p:cNvPr id="29" name="Shape 27"/>
+          <p:cNvSpPr/>
+          <p:nvPr/>
+        </p:nvSpPr>
+        <p:spPr>
+          <a:xfrm>
+            <a:off x="7726680" y="4617720"/>
+            <a:ext cx="36576" cy="320040"/>
+          </a:xfrm>
+          <a:prstGeom prst="rect">
+            <a:avLst/>
+          </a:prstGeom>
+          <a:solidFill>
+            <a:srgbClr val="76B900"/>
+          </a:solidFill>
+          <a:ln/>
+        </p:spPr>
+      </p:sp>
+      <p:pic>
+        <p:nvPicPr>
+          <p:cNvPr id="30" name="Image 0" descr="/app/logos/nvidia-logo-blk-sm.png">    </p:cNvPr>
+          <p:cNvPicPr>
+            <a:picLocks noChangeAspect="1"/>
+          </p:cNvPicPr>
+          <p:nvPr/>
+        </p:nvPicPr>
+        <p:blipFill>
+          <a:blip r:embed="rId1"/>
+          <a:stretch>
+            <a:fillRect/>
+          </a:stretch>
+        </p:blipFill>
+        <p:spPr>
+          <a:xfrm>
+            <a:off x="7863840" y="4604004"/>
+            <a:ext cx="1005840" cy="347472"/>
+          </a:xfrm>
+          <a:prstGeom prst="rect">
+            <a:avLst/>
+          </a:prstGeom>
+        </p:spPr>
+      </p:pic>
+    </p:spTree>
+  </p:cSld>
+  <p:clrMapOvr>
+    <a:masterClrMapping/>
+  </p:clrMapOvr>
+</p:sld>
+</file>
+
+<file path=ppt/slides/slide3.xml><?xml version="1.0" encoding="utf-8"?>
+<p:sld xmlns:a="http://schemas.openxmlformats.org/drawingml/2006/main" xmlns:r="http://schemas.openxmlformats.org/officeDocument/2006/relationships" xmlns:p="http://schemas.openxmlformats.org/presentationml/2006/main">
+  <p:cSld name="Slide 3">
     <p:bg>
       <p:bgPr>
         <a:solidFill>
@@ -23319,7 +25327,7 @@
                 <a:ea typeface="NVIDIA Sans" pitchFamily="34" charset="-122"/>
                 <a:cs typeface="NVIDIA Sans" pitchFamily="34" charset="-120"/>
               </a:rPr>
-              <a:t>2</a:t>
+              <a:t>3</a:t>
             </a:r>
             <a:endParaRPr lang="en-US" sz="1000" dirty="0"/>
           </a:p>
@@ -23377,9 +25385,9 @@
 </p:sld>
 </file>
 
-<file path=ppt/slides/slide3.xml><?xml version="1.0" encoding="utf-8"?>
+<file path=ppt/slides/slide4.xml><?xml version="1.0" encoding="utf-8"?>
 <p:sld xmlns:a="http://schemas.openxmlformats.org/drawingml/2006/main" xmlns:r="http://schemas.openxmlformats.org/officeDocument/2006/relationships" xmlns:p="http://schemas.openxmlformats.org/presentationml/2006/main">
-  <p:cSld name="Slide 3">
+  <p:cSld name="Slide 4">
     <p:bg>
       <p:bgPr>
         <a:solidFill>
@@ -23505,7 +25513,7 @@
       </p:pic>
       <p:graphicFrame>
         <p:nvGraphicFramePr>
-          <p:cNvPr id="4" name="Table 0"/>
+          <p:cNvPr id="5" name="Table 0"/>
           <p:cNvGraphicFramePr>
             <a:graphicFrameLocks noGrp="1"/>
           </p:cNvGraphicFramePr>
@@ -24920,7 +26928,7 @@
                 <a:ea typeface="NVIDIA Sans" pitchFamily="34" charset="-122"/>
                 <a:cs typeface="NVIDIA Sans" pitchFamily="34" charset="-120"/>
               </a:rPr>
-              <a:t>3</a:t>
+              <a:t>4</a:t>
             </a:r>
             <a:endParaRPr lang="en-US" sz="1000" dirty="0"/>
           </a:p>
@@ -24978,9 +26986,9 @@
 </p:sld>
 </file>
 
-<file path=ppt/slides/slide4.xml><?xml version="1.0" encoding="utf-8"?>
+<file path=ppt/slides/slide5.xml><?xml version="1.0" encoding="utf-8"?>
 <p:sld xmlns:a="http://schemas.openxmlformats.org/drawingml/2006/main" xmlns:r="http://schemas.openxmlformats.org/officeDocument/2006/relationships" xmlns:p="http://schemas.openxmlformats.org/presentationml/2006/main">
-  <p:cSld name="Slide 4">
+  <p:cSld name="Slide 5">
     <p:bg>
       <p:bgPr>
         <a:solidFill>
@@ -29890,7 +31898,7 @@
       </p:sp>
       <p:graphicFrame>
         <p:nvGraphicFramePr>
-          <p:cNvPr id="5" name="Table 0"/>
+          <p:cNvPr id="6" name="Table 0"/>
           <p:cNvGraphicFramePr>
             <a:graphicFrameLocks noGrp="1"/>
           </p:cNvGraphicFramePr>
@@ -30976,7 +32984,7 @@
                 <a:ea typeface="NVIDIA Sans" pitchFamily="34" charset="-122"/>
                 <a:cs typeface="NVIDIA Sans" pitchFamily="34" charset="-120"/>
               </a:rPr>
-              <a:t>4</a:t>
+              <a:t>5</a:t>
             </a:r>
             <a:endParaRPr lang="en-US" sz="1000" dirty="0"/>
           </a:p>
@@ -31034,9 +33042,9 @@
 </p:sld>
 </file>
 
-<file path=ppt/slides/slide5.xml><?xml version="1.0" encoding="utf-8"?>
+<file path=ppt/slides/slide6.xml><?xml version="1.0" encoding="utf-8"?>
 <p:sld xmlns:a="http://schemas.openxmlformats.org/drawingml/2006/main" xmlns:r="http://schemas.openxmlformats.org/officeDocument/2006/relationships" xmlns:p="http://schemas.openxmlformats.org/presentationml/2006/main">
-  <p:cSld name="Slide 5">
+  <p:cSld name="Slide 6">
     <p:bg>
       <p:bgPr>
         <a:solidFill>
@@ -32286,7 +34294,7 @@
                 <a:ea typeface="NVIDIA Sans" pitchFamily="34" charset="-122"/>
                 <a:cs typeface="NVIDIA Sans" pitchFamily="34" charset="-120"/>
               </a:rPr>
-              <a:t>5</a:t>
+              <a:t>6</a:t>
             </a:r>
             <a:endParaRPr lang="en-US" sz="1000" dirty="0"/>
           </a:p>
@@ -32344,9 +34352,9 @@
 </p:sld>
 </file>
 
-<file path=ppt/slides/slide6.xml><?xml version="1.0" encoding="utf-8"?>
+<file path=ppt/slides/slide7.xml><?xml version="1.0" encoding="utf-8"?>
 <p:sld xmlns:a="http://schemas.openxmlformats.org/drawingml/2006/main" xmlns:r="http://schemas.openxmlformats.org/officeDocument/2006/relationships" xmlns:p="http://schemas.openxmlformats.org/presentationml/2006/main">
-  <p:cSld name="Slide 6">
+  <p:cSld name="Slide 7">
     <p:bg>
       <p:bgPr>
         <a:solidFill>
@@ -33385,7 +35393,7 @@
                 <a:ea typeface="NVIDIA Sans" pitchFamily="34" charset="-122"/>
                 <a:cs typeface="NVIDIA Sans" pitchFamily="34" charset="-120"/>
               </a:rPr>
-              <a:t>6</a:t>
+              <a:t>7</a:t>
             </a:r>
             <a:endParaRPr lang="en-US" sz="1000" dirty="0"/>
           </a:p>
@@ -33443,9 +35451,9 @@
 </p:sld>
 </file>
 
-<file path=ppt/slides/slide7.xml><?xml version="1.0" encoding="utf-8"?>
+<file path=ppt/slides/slide8.xml><?xml version="1.0" encoding="utf-8"?>
 <p:sld xmlns:a="http://schemas.openxmlformats.org/drawingml/2006/main" xmlns:r="http://schemas.openxmlformats.org/officeDocument/2006/relationships" xmlns:p="http://schemas.openxmlformats.org/presentationml/2006/main">
-  <p:cSld name="Slide 7">
+  <p:cSld name="Slide 8">
     <p:bg>
       <p:bgPr>
         <a:solidFill>
@@ -34128,7 +36136,7 @@
                 <a:ea typeface="NVIDIA Sans" pitchFamily="34" charset="-122"/>
                 <a:cs typeface="NVIDIA Sans" pitchFamily="34" charset="-120"/>
               </a:rPr>
-              <a:t>7</a:t>
+              <a:t>8</a:t>
             </a:r>
             <a:endParaRPr lang="en-US" sz="1000" dirty="0"/>
           </a:p>
@@ -34186,9 +36194,9 @@
 </p:sld>
 </file>
 
-<file path=ppt/slides/slide8.xml><?xml version="1.0" encoding="utf-8"?>
+<file path=ppt/slides/slide9.xml><?xml version="1.0" encoding="utf-8"?>
 <p:sld xmlns:a="http://schemas.openxmlformats.org/drawingml/2006/main" xmlns:r="http://schemas.openxmlformats.org/officeDocument/2006/relationships" xmlns:p="http://schemas.openxmlformats.org/presentationml/2006/main">
-  <p:cSld name="Slide 8">
+  <p:cSld name="Slide 9">
     <p:bg>
       <p:bgPr>
         <a:solidFill>
@@ -35255,7 +37263,7 @@
       </p:sp>
       <p:graphicFrame>
         <p:nvGraphicFramePr>
-          <p:cNvPr id="9" name="Table 0"/>
+          <p:cNvPr id="10" name="Table 0"/>
           <p:cNvGraphicFramePr>
             <a:graphicFrameLocks noGrp="1"/>
           </p:cNvGraphicFramePr>
@@ -36341,910 +38349,6 @@
                 <a:ea typeface="NVIDIA Sans" pitchFamily="34" charset="-122"/>
                 <a:cs typeface="NVIDIA Sans" pitchFamily="34" charset="-120"/>
               </a:rPr>
-              <a:t>8</a:t>
-            </a:r>
-            <a:endParaRPr lang="en-US" sz="1000" dirty="0"/>
-          </a:p>
-        </p:txBody>
-      </p:sp>
-      <p:sp>
-        <p:nvSpPr>
-          <p:cNvPr id="41" name="Shape 38"/>
-          <p:cNvSpPr/>
-          <p:nvPr/>
-        </p:nvSpPr>
-        <p:spPr>
-          <a:xfrm>
-            <a:off x="7726680" y="4617720"/>
-            <a:ext cx="36576" cy="320040"/>
-          </a:xfrm>
-          <a:prstGeom prst="rect">
-            <a:avLst/>
-          </a:prstGeom>
-          <a:solidFill>
-            <a:srgbClr val="76B900"/>
-          </a:solidFill>
-          <a:ln/>
-        </p:spPr>
-      </p:sp>
-      <p:pic>
-        <p:nvPicPr>
-          <p:cNvPr id="42" name="Image 0" descr="/app/logos/nvidia-logo-blk-sm.png">    </p:cNvPr>
-          <p:cNvPicPr>
-            <a:picLocks noChangeAspect="1"/>
-          </p:cNvPicPr>
-          <p:nvPr/>
-        </p:nvPicPr>
-        <p:blipFill>
-          <a:blip r:embed="rId1"/>
-          <a:stretch>
-            <a:fillRect/>
-          </a:stretch>
-        </p:blipFill>
-        <p:spPr>
-          <a:xfrm>
-            <a:off x="7863840" y="4604004"/>
-            <a:ext cx="1005840" cy="347472"/>
-          </a:xfrm>
-          <a:prstGeom prst="rect">
-            <a:avLst/>
-          </a:prstGeom>
-        </p:spPr>
-      </p:pic>
-    </p:spTree>
-  </p:cSld>
-  <p:clrMapOvr>
-    <a:masterClrMapping/>
-  </p:clrMapOvr>
-</p:sld>
-</file>
-
-<file path=ppt/slides/slide9.xml><?xml version="1.0" encoding="utf-8"?>
-<p:sld xmlns:a="http://schemas.openxmlformats.org/drawingml/2006/main" xmlns:r="http://schemas.openxmlformats.org/officeDocument/2006/relationships" xmlns:p="http://schemas.openxmlformats.org/presentationml/2006/main">
-  <p:cSld name="Slide 9">
-    <p:bg>
-      <p:bgPr>
-        <a:solidFill>
-          <a:srgbClr val="FFFFFF"/>
-        </a:solidFill>
-      </p:bgPr>
-    </p:bg>
-    <p:spTree>
-      <p:nvGrpSpPr>
-        <p:cNvPr id="1" name=""/>
-        <p:cNvGrpSpPr/>
-        <p:nvPr/>
-      </p:nvGrpSpPr>
-      <p:grpSpPr>
-        <a:xfrm>
-          <a:off x="0" y="0"/>
-          <a:ext cx="0" cy="0"/>
-          <a:chOff x="0" y="0"/>
-          <a:chExt cx="0" cy="0"/>
-        </a:xfrm>
-      </p:grpSpPr>
-      <p:sp>
-        <p:nvSpPr>
-          <p:cNvPr id="2" name="Text 0"/>
-          <p:cNvSpPr/>
-          <p:nvPr/>
-        </p:nvSpPr>
-        <p:spPr>
-          <a:xfrm>
-            <a:off x="457200" y="256032"/>
-            <a:ext cx="8229600" cy="548640"/>
-          </a:xfrm>
-          <a:prstGeom prst="rect">
-            <a:avLst/>
-          </a:prstGeom>
-          <a:noFill/>
-          <a:ln/>
-        </p:spPr>
-        <p:txBody>
-          <a:bodyPr wrap="square" lIns="0" tIns="0" rIns="0" bIns="0" rtlCol="0" anchor="ctr"/>
-          <a:lstStyle/>
-          <a:p>
-            <a:pPr indent="0" marL="0">
-              <a:buNone/>
-            </a:pPr>
-            <a:r>
-              <a:rPr lang="en-US" sz="3000" b="1" dirty="0">
-                <a:solidFill>
-                  <a:srgbClr val="000000"/>
-                </a:solidFill>
-                <a:latin typeface="NVIDIA Sans" pitchFamily="34" charset="0"/>
-                <a:ea typeface="NVIDIA Sans" pitchFamily="34" charset="-122"/>
-                <a:cs typeface="NVIDIA Sans" pitchFamily="34" charset="-120"/>
-              </a:rPr>
-              <a:t>Why CUDA Graphs: Launch-Bound Forward</a:t>
-            </a:r>
-            <a:endParaRPr lang="en-US" sz="3000" dirty="0"/>
-          </a:p>
-        </p:txBody>
-      </p:sp>
-      <p:sp>
-        <p:nvSpPr>
-          <p:cNvPr id="3" name="Text 1"/>
-          <p:cNvSpPr/>
-          <p:nvPr/>
-        </p:nvSpPr>
-        <p:spPr>
-          <a:xfrm>
-            <a:off x="457200" y="804672"/>
-            <a:ext cx="8229600" cy="329184"/>
-          </a:xfrm>
-          <a:prstGeom prst="rect">
-            <a:avLst/>
-          </a:prstGeom>
-          <a:noFill/>
-          <a:ln/>
-        </p:spPr>
-        <p:txBody>
-          <a:bodyPr wrap="square" lIns="0" tIns="0" rIns="0" bIns="0" rtlCol="0" anchor="ctr"/>
-          <a:lstStyle/>
-          <a:p>
-            <a:pPr indent="0" marL="0">
-              <a:buNone/>
-            </a:pPr>
-            <a:r>
-              <a:rPr lang="en-US" sz="1500" dirty="0">
-                <a:solidFill>
-                  <a:srgbClr val="76B900"/>
-                </a:solidFill>
-                <a:latin typeface="NVIDIA Sans" pitchFamily="34" charset="0"/>
-                <a:ea typeface="NVIDIA Sans" pitchFamily="34" charset="-122"/>
-                <a:cs typeface="NVIDIA Sans" pitchFamily="34" charset="-120"/>
-              </a:rPr>
-              <a:t>Anatomy of the Qwen3.5 forward — same math, very different wall clock</a:t>
-            </a:r>
-            <a:endParaRPr lang="en-US" sz="1500" dirty="0"/>
-          </a:p>
-        </p:txBody>
-      </p:sp>
-      <p:sp>
-        <p:nvSpPr>
-          <p:cNvPr id="4" name="Text 2"/>
-          <p:cNvSpPr/>
-          <p:nvPr/>
-        </p:nvSpPr>
-        <p:spPr>
-          <a:xfrm>
-            <a:off x="457200" y="1399032"/>
-            <a:ext cx="1417320" cy="384048"/>
-          </a:xfrm>
-          <a:prstGeom prst="rect">
-            <a:avLst/>
-          </a:prstGeom>
-          <a:noFill/>
-          <a:ln/>
-        </p:spPr>
-        <p:txBody>
-          <a:bodyPr wrap="square" lIns="0" tIns="0" rIns="0" bIns="0" rtlCol="0" anchor="ctr"/>
-          <a:lstStyle/>
-          <a:p>
-            <a:pPr indent="0" marL="0">
-              <a:buNone/>
-            </a:pPr>
-            <a:r>
-              <a:rPr lang="en-US" sz="1100" b="1" dirty="0">
-                <a:solidFill>
-                  <a:srgbClr val="000000"/>
-                </a:solidFill>
-                <a:latin typeface="NVIDIA Sans" pitchFamily="34" charset="0"/>
-                <a:ea typeface="NVIDIA Sans" pitchFamily="34" charset="-122"/>
-                <a:cs typeface="NVIDIA Sans" pitchFamily="34" charset="-120"/>
-              </a:rPr>
-              <a:t>Baseline</a:t>
-            </a:r>
-            <a:endParaRPr lang="en-US" sz="1100" dirty="0"/>
-          </a:p>
-          <a:p>
-            <a:pPr indent="0" marL="0">
-              <a:buNone/>
-            </a:pPr>
-            <a:r>
-              <a:rPr lang="en-US" sz="1100" b="1" dirty="0">
-                <a:solidFill>
-                  <a:srgbClr val="000000"/>
-                </a:solidFill>
-                <a:latin typeface="NVIDIA Sans" pitchFamily="34" charset="0"/>
-                <a:ea typeface="NVIDIA Sans" pitchFamily="34" charset="-122"/>
-                <a:cs typeface="NVIDIA Sans" pitchFamily="34" charset="-120"/>
-              </a:rPr>
-              <a:t>(eager)</a:t>
-            </a:r>
-            <a:endParaRPr lang="en-US" sz="1100" dirty="0"/>
-          </a:p>
-        </p:txBody>
-      </p:sp>
-      <p:sp>
-        <p:nvSpPr>
-          <p:cNvPr id="5" name="Shape 3"/>
-          <p:cNvSpPr/>
-          <p:nvPr/>
-        </p:nvSpPr>
-        <p:spPr>
-          <a:xfrm>
-            <a:off x="1920240" y="1417320"/>
-            <a:ext cx="2131541" cy="384048"/>
-          </a:xfrm>
-          <a:prstGeom prst="rect">
-            <a:avLst/>
-          </a:prstGeom>
-          <a:solidFill>
-            <a:srgbClr val="76B900"/>
-          </a:solidFill>
-          <a:ln/>
-        </p:spPr>
-      </p:sp>
-      <p:sp>
-        <p:nvSpPr>
-          <p:cNvPr id="6" name="Text 4"/>
-          <p:cNvSpPr/>
-          <p:nvPr/>
-        </p:nvSpPr>
-        <p:spPr>
-          <a:xfrm>
-            <a:off x="1920240" y="1417320"/>
-            <a:ext cx="2131541" cy="384048"/>
-          </a:xfrm>
-          <a:prstGeom prst="rect">
-            <a:avLst/>
-          </a:prstGeom>
-          <a:noFill/>
-          <a:ln/>
-        </p:spPr>
-        <p:txBody>
-          <a:bodyPr wrap="square" lIns="0" tIns="0" rIns="0" bIns="0" rtlCol="0" anchor="ctr"/>
-          <a:lstStyle/>
-          <a:p>
-            <a:pPr algn="ctr" indent="0" marL="0">
-              <a:buNone/>
-            </a:pPr>
-            <a:r>
-              <a:rPr lang="en-US" sz="1000" b="1" dirty="0">
-                <a:solidFill>
-                  <a:srgbClr val="FFFFFF"/>
-                </a:solidFill>
-                <a:latin typeface="NVIDIA Sans" pitchFamily="34" charset="0"/>
-                <a:ea typeface="NVIDIA Sans" pitchFamily="34" charset="-122"/>
-                <a:cs typeface="NVIDIA Sans" pitchFamily="34" charset="-120"/>
-              </a:rPr>
-              <a:t>GPU busy 50 ms</a:t>
-            </a:r>
-            <a:endParaRPr lang="en-US" sz="1000" dirty="0"/>
-          </a:p>
-        </p:txBody>
-      </p:sp>
-      <p:sp>
-        <p:nvSpPr>
-          <p:cNvPr id="7" name="Shape 5"/>
-          <p:cNvSpPr/>
-          <p:nvPr/>
-        </p:nvSpPr>
-        <p:spPr>
-          <a:xfrm>
-            <a:off x="4051781" y="1417320"/>
-            <a:ext cx="4177819" cy="384048"/>
-          </a:xfrm>
-          <a:prstGeom prst="rect">
-            <a:avLst/>
-          </a:prstGeom>
-          <a:solidFill>
-            <a:srgbClr val="890C58"/>
-          </a:solidFill>
-          <a:ln/>
-        </p:spPr>
-      </p:sp>
-      <p:sp>
-        <p:nvSpPr>
-          <p:cNvPr id="8" name="Text 6"/>
-          <p:cNvSpPr/>
-          <p:nvPr/>
-        </p:nvSpPr>
-        <p:spPr>
-          <a:xfrm>
-            <a:off x="4051781" y="1417320"/>
-            <a:ext cx="4177819" cy="384048"/>
-          </a:xfrm>
-          <a:prstGeom prst="rect">
-            <a:avLst/>
-          </a:prstGeom>
-          <a:noFill/>
-          <a:ln/>
-        </p:spPr>
-        <p:txBody>
-          <a:bodyPr wrap="square" lIns="0" tIns="0" rIns="0" bIns="0" rtlCol="0" anchor="ctr"/>
-          <a:lstStyle/>
-          <a:p>
-            <a:pPr algn="ctr" indent="0" marL="0">
-              <a:buNone/>
-            </a:pPr>
-            <a:r>
-              <a:rPr lang="en-US" sz="1000" b="1" dirty="0">
-                <a:solidFill>
-                  <a:srgbClr val="FFFFFF"/>
-                </a:solidFill>
-                <a:latin typeface="NVIDIA Sans" pitchFamily="34" charset="0"/>
-                <a:ea typeface="NVIDIA Sans" pitchFamily="34" charset="-122"/>
-                <a:cs typeface="NVIDIA Sans" pitchFamily="34" charset="-120"/>
-              </a:rPr>
-              <a:t>waiting for launches 98 ms</a:t>
-            </a:r>
-            <a:endParaRPr lang="en-US" sz="1000" dirty="0"/>
-          </a:p>
-        </p:txBody>
-      </p:sp>
-      <p:sp>
-        <p:nvSpPr>
-          <p:cNvPr id="9" name="Text 7"/>
-          <p:cNvSpPr/>
-          <p:nvPr/>
-        </p:nvSpPr>
-        <p:spPr>
-          <a:xfrm>
-            <a:off x="8302752" y="1417320"/>
-            <a:ext cx="822960" cy="384048"/>
-          </a:xfrm>
-          <a:prstGeom prst="rect">
-            <a:avLst/>
-          </a:prstGeom>
-          <a:noFill/>
-          <a:ln/>
-        </p:spPr>
-        <p:txBody>
-          <a:bodyPr wrap="square" lIns="0" tIns="0" rIns="0" bIns="0" rtlCol="0" anchor="ctr"/>
-          <a:lstStyle/>
-          <a:p>
-            <a:pPr indent="0" marL="0">
-              <a:buNone/>
-            </a:pPr>
-            <a:r>
-              <a:rPr lang="en-US" sz="1200" b="1" dirty="0">
-                <a:solidFill>
-                  <a:srgbClr val="000000"/>
-                </a:solidFill>
-                <a:latin typeface="NVIDIA Sans" pitchFamily="34" charset="0"/>
-                <a:ea typeface="NVIDIA Sans" pitchFamily="34" charset="-122"/>
-                <a:cs typeface="NVIDIA Sans" pitchFamily="34" charset="-120"/>
-              </a:rPr>
-              <a:t>148 ms</a:t>
-            </a:r>
-            <a:endParaRPr lang="en-US" sz="1200" dirty="0"/>
-          </a:p>
-        </p:txBody>
-      </p:sp>
-      <p:sp>
-        <p:nvSpPr>
-          <p:cNvPr id="10" name="Text 8"/>
-          <p:cNvSpPr/>
-          <p:nvPr/>
-        </p:nvSpPr>
-        <p:spPr>
-          <a:xfrm>
-            <a:off x="1920240" y="1819656"/>
-            <a:ext cx="6400800" cy="201168"/>
-          </a:xfrm>
-          <a:prstGeom prst="rect">
-            <a:avLst/>
-          </a:prstGeom>
-          <a:noFill/>
-          <a:ln/>
-        </p:spPr>
-        <p:txBody>
-          <a:bodyPr wrap="square" lIns="0" tIns="0" rIns="0" bIns="0" rtlCol="0" anchor="ctr"/>
-          <a:lstStyle/>
-          <a:p>
-            <a:pPr indent="0" marL="0">
-              <a:buNone/>
-            </a:pPr>
-            <a:r>
-              <a:rPr lang="en-US" sz="950" i="1" dirty="0">
-                <a:solidFill>
-                  <a:srgbClr val="5E5E5E"/>
-                </a:solidFill>
-                <a:latin typeface="NVIDIA Sans" pitchFamily="34" charset="0"/>
-                <a:ea typeface="NVIDIA Sans" pitchFamily="34" charset="-122"/>
-                <a:cs typeface="NVIDIA Sans" pitchFamily="34" charset="-120"/>
-              </a:rPr>
-              <a:t>3,929 kernel launches · 19.1 ms of cudaLaunchKernel CPU time · occupancy 34%</a:t>
-            </a:r>
-            <a:endParaRPr lang="en-US" sz="950" dirty="0"/>
-          </a:p>
-        </p:txBody>
-      </p:sp>
-      <p:sp>
-        <p:nvSpPr>
-          <p:cNvPr id="11" name="Text 9"/>
-          <p:cNvSpPr/>
-          <p:nvPr/>
-        </p:nvSpPr>
-        <p:spPr>
-          <a:xfrm>
-            <a:off x="457200" y="2267712"/>
-            <a:ext cx="1417320" cy="384048"/>
-          </a:xfrm>
-          <a:prstGeom prst="rect">
-            <a:avLst/>
-          </a:prstGeom>
-          <a:noFill/>
-          <a:ln/>
-        </p:spPr>
-        <p:txBody>
-          <a:bodyPr wrap="square" lIns="0" tIns="0" rIns="0" bIns="0" rtlCol="0" anchor="ctr"/>
-          <a:lstStyle/>
-          <a:p>
-            <a:pPr indent="0" marL="0">
-              <a:buNone/>
-            </a:pPr>
-            <a:r>
-              <a:rPr lang="en-US" sz="1100" b="1" dirty="0">
-                <a:solidFill>
-                  <a:srgbClr val="000000"/>
-                </a:solidFill>
-                <a:latin typeface="NVIDIA Sans" pitchFamily="34" charset="0"/>
-                <a:ea typeface="NVIDIA Sans" pitchFamily="34" charset="-122"/>
-                <a:cs typeface="NVIDIA Sans" pitchFamily="34" charset="-120"/>
-              </a:rPr>
-              <a:t>Optimized</a:t>
-            </a:r>
-            <a:endParaRPr lang="en-US" sz="1100" dirty="0"/>
-          </a:p>
-          <a:p>
-            <a:pPr indent="0" marL="0">
-              <a:buNone/>
-            </a:pPr>
-            <a:r>
-              <a:rPr lang="en-US" sz="1100" b="1" dirty="0">
-                <a:solidFill>
-                  <a:srgbClr val="000000"/>
-                </a:solidFill>
-                <a:latin typeface="NVIDIA Sans" pitchFamily="34" charset="0"/>
-                <a:ea typeface="NVIDIA Sans" pitchFamily="34" charset="-122"/>
-                <a:cs typeface="NVIDIA Sans" pitchFamily="34" charset="-120"/>
-              </a:rPr>
-              <a:t>(CUDA Graphs)</a:t>
-            </a:r>
-            <a:endParaRPr lang="en-US" sz="1100" dirty="0"/>
-          </a:p>
-        </p:txBody>
-      </p:sp>
-      <p:sp>
-        <p:nvSpPr>
-          <p:cNvPr id="12" name="Shape 10"/>
-          <p:cNvSpPr/>
-          <p:nvPr/>
-        </p:nvSpPr>
-        <p:spPr>
-          <a:xfrm>
-            <a:off x="1920240" y="2286000"/>
-            <a:ext cx="1577340" cy="384048"/>
-          </a:xfrm>
-          <a:prstGeom prst="rect">
-            <a:avLst/>
-          </a:prstGeom>
-          <a:solidFill>
-            <a:srgbClr val="76B900"/>
-          </a:solidFill>
-          <a:ln/>
-        </p:spPr>
-      </p:sp>
-      <p:sp>
-        <p:nvSpPr>
-          <p:cNvPr id="13" name="Text 11"/>
-          <p:cNvSpPr/>
-          <p:nvPr/>
-        </p:nvSpPr>
-        <p:spPr>
-          <a:xfrm>
-            <a:off x="1920240" y="2286000"/>
-            <a:ext cx="1577340" cy="384048"/>
-          </a:xfrm>
-          <a:prstGeom prst="rect">
-            <a:avLst/>
-          </a:prstGeom>
-          <a:noFill/>
-          <a:ln/>
-        </p:spPr>
-        <p:txBody>
-          <a:bodyPr wrap="square" lIns="0" tIns="0" rIns="0" bIns="0" rtlCol="0" anchor="ctr"/>
-          <a:lstStyle/>
-          <a:p>
-            <a:pPr algn="ctr" indent="0" marL="0">
-              <a:buNone/>
-            </a:pPr>
-            <a:r>
-              <a:rPr lang="en-US" sz="1000" b="1" dirty="0">
-                <a:solidFill>
-                  <a:srgbClr val="FFFFFF"/>
-                </a:solidFill>
-                <a:latin typeface="NVIDIA Sans" pitchFamily="34" charset="0"/>
-                <a:ea typeface="NVIDIA Sans" pitchFamily="34" charset="-122"/>
-                <a:cs typeface="NVIDIA Sans" pitchFamily="34" charset="-120"/>
-              </a:rPr>
-              <a:t>GPU busy 37 ms</a:t>
-            </a:r>
-            <a:endParaRPr lang="en-US" sz="1000" dirty="0"/>
-          </a:p>
-        </p:txBody>
-      </p:sp>
-      <p:sp>
-        <p:nvSpPr>
-          <p:cNvPr id="14" name="Shape 12"/>
-          <p:cNvSpPr/>
-          <p:nvPr/>
-        </p:nvSpPr>
-        <p:spPr>
-          <a:xfrm>
-            <a:off x="3497580" y="2286000"/>
-            <a:ext cx="1193663" cy="384048"/>
-          </a:xfrm>
-          <a:prstGeom prst="rect">
-            <a:avLst/>
-          </a:prstGeom>
-          <a:solidFill>
-            <a:srgbClr val="890C58"/>
-          </a:solidFill>
-          <a:ln/>
-        </p:spPr>
-      </p:sp>
-      <p:sp>
-        <p:nvSpPr>
-          <p:cNvPr id="15" name="Text 13"/>
-          <p:cNvSpPr/>
-          <p:nvPr/>
-        </p:nvSpPr>
-        <p:spPr>
-          <a:xfrm>
-            <a:off x="3497580" y="2286000"/>
-            <a:ext cx="1193663" cy="384048"/>
-          </a:xfrm>
-          <a:prstGeom prst="rect">
-            <a:avLst/>
-          </a:prstGeom>
-          <a:noFill/>
-          <a:ln/>
-        </p:spPr>
-        <p:txBody>
-          <a:bodyPr wrap="square" lIns="0" tIns="0" rIns="0" bIns="0" rtlCol="0" anchor="ctr"/>
-          <a:lstStyle/>
-          <a:p>
-            <a:pPr algn="ctr" indent="0" marL="0">
-              <a:buNone/>
-            </a:pPr>
-            <a:r>
-              <a:rPr lang="en-US" sz="1000" b="1" dirty="0">
-                <a:solidFill>
-                  <a:srgbClr val="FFFFFF"/>
-                </a:solidFill>
-                <a:latin typeface="NVIDIA Sans" pitchFamily="34" charset="0"/>
-                <a:ea typeface="NVIDIA Sans" pitchFamily="34" charset="-122"/>
-                <a:cs typeface="NVIDIA Sans" pitchFamily="34" charset="-120"/>
-              </a:rPr>
-              <a:t>waiting for launches 28 ms</a:t>
-            </a:r>
-            <a:endParaRPr lang="en-US" sz="1000" dirty="0"/>
-          </a:p>
-        </p:txBody>
-      </p:sp>
-      <p:sp>
-        <p:nvSpPr>
-          <p:cNvPr id="16" name="Text 14"/>
-          <p:cNvSpPr/>
-          <p:nvPr/>
-        </p:nvSpPr>
-        <p:spPr>
-          <a:xfrm>
-            <a:off x="4764395" y="2286000"/>
-            <a:ext cx="822960" cy="384048"/>
-          </a:xfrm>
-          <a:prstGeom prst="rect">
-            <a:avLst/>
-          </a:prstGeom>
-          <a:noFill/>
-          <a:ln/>
-        </p:spPr>
-        <p:txBody>
-          <a:bodyPr wrap="square" lIns="0" tIns="0" rIns="0" bIns="0" rtlCol="0" anchor="ctr"/>
-          <a:lstStyle/>
-          <a:p>
-            <a:pPr indent="0" marL="0">
-              <a:buNone/>
-            </a:pPr>
-            <a:r>
-              <a:rPr lang="en-US" sz="1200" b="1" dirty="0">
-                <a:solidFill>
-                  <a:srgbClr val="000000"/>
-                </a:solidFill>
-                <a:latin typeface="NVIDIA Sans" pitchFamily="34" charset="0"/>
-                <a:ea typeface="NVIDIA Sans" pitchFamily="34" charset="-122"/>
-                <a:cs typeface="NVIDIA Sans" pitchFamily="34" charset="-120"/>
-              </a:rPr>
-              <a:t>65 ms</a:t>
-            </a:r>
-            <a:endParaRPr lang="en-US" sz="1200" dirty="0"/>
-          </a:p>
-        </p:txBody>
-      </p:sp>
-      <p:sp>
-        <p:nvSpPr>
-          <p:cNvPr id="17" name="Text 15"/>
-          <p:cNvSpPr/>
-          <p:nvPr/>
-        </p:nvSpPr>
-        <p:spPr>
-          <a:xfrm>
-            <a:off x="1920240" y="2688336"/>
-            <a:ext cx="6400800" cy="201168"/>
-          </a:xfrm>
-          <a:prstGeom prst="rect">
-            <a:avLst/>
-          </a:prstGeom>
-          <a:noFill/>
-          <a:ln/>
-        </p:spPr>
-        <p:txBody>
-          <a:bodyPr wrap="square" lIns="0" tIns="0" rIns="0" bIns="0" rtlCol="0" anchor="ctr"/>
-          <a:lstStyle/>
-          <a:p>
-            <a:pPr indent="0" marL="0">
-              <a:buNone/>
-            </a:pPr>
-            <a:r>
-              <a:rPr lang="en-US" sz="950" i="1" dirty="0">
-                <a:solidFill>
-                  <a:srgbClr val="5E5E5E"/>
-                </a:solidFill>
-                <a:latin typeface="NVIDIA Sans" pitchFamily="34" charset="0"/>
-                <a:ea typeface="NVIDIA Sans" pitchFamily="34" charset="-122"/>
-                <a:cs typeface="NVIDIA Sans" pitchFamily="34" charset="-120"/>
-              </a:rPr>
-              <a:t>6 graph launches + 736 eager · 9.4 ms launch CPU · occupancy 57%</a:t>
-            </a:r>
-            <a:endParaRPr lang="en-US" sz="950" dirty="0"/>
-          </a:p>
-        </p:txBody>
-      </p:sp>
-      <p:sp>
-        <p:nvSpPr>
-          <p:cNvPr id="18" name="Text 16"/>
-          <p:cNvSpPr/>
-          <p:nvPr/>
-        </p:nvSpPr>
-        <p:spPr>
-          <a:xfrm>
-            <a:off x="1920240" y="2907792"/>
-            <a:ext cx="6400800" cy="365760"/>
-          </a:xfrm>
-          <a:prstGeom prst="rect">
-            <a:avLst/>
-          </a:prstGeom>
-          <a:noFill/>
-          <a:ln/>
-        </p:spPr>
-        <p:txBody>
-          <a:bodyPr wrap="square" lIns="0" tIns="0" rIns="0" bIns="0" rtlCol="0" anchor="ctr"/>
-          <a:lstStyle/>
-          <a:p>
-            <a:pPr indent="0" marL="0">
-              <a:buNone/>
-            </a:pPr>
-            <a:r>
-              <a:rPr lang="en-US" sz="2400" b="1" dirty="0">
-                <a:solidFill>
-                  <a:srgbClr val="76B900"/>
-                </a:solidFill>
-                <a:latin typeface="NVIDIA Sans" pitchFamily="34" charset="0"/>
-                <a:ea typeface="NVIDIA Sans" pitchFamily="34" charset="-122"/>
-                <a:cs typeface="NVIDIA Sans" pitchFamily="34" charset="-120"/>
-              </a:rPr>
-              <a:t>2.3× </a:t>
-            </a:r>
-            <a:pPr indent="0" marL="0">
-              <a:buNone/>
-            </a:pPr>
-            <a:r>
-              <a:rPr lang="en-US" sz="1300" b="1" dirty="0">
-                <a:solidFill>
-                  <a:srgbClr val="000000"/>
-                </a:solidFill>
-                <a:latin typeface="NVIDIA Sans" pitchFamily="34" charset="0"/>
-                <a:ea typeface="NVIDIA Sans" pitchFamily="34" charset="-122"/>
-                <a:cs typeface="NVIDIA Sans" pitchFamily="34" charset="-120"/>
-              </a:rPr>
-              <a:t>faster forward wall clock — with 81% fewer launches</a:t>
-            </a:r>
-            <a:endParaRPr lang="en-US" sz="2400" dirty="0"/>
-          </a:p>
-        </p:txBody>
-      </p:sp>
-      <p:sp>
-        <p:nvSpPr>
-          <p:cNvPr id="19" name="Text 17"/>
-          <p:cNvSpPr/>
-          <p:nvPr/>
-        </p:nvSpPr>
-        <p:spPr>
-          <a:xfrm>
-            <a:off x="457200" y="3346704"/>
-            <a:ext cx="8229600" cy="822960"/>
-          </a:xfrm>
-          <a:prstGeom prst="rect">
-            <a:avLst/>
-          </a:prstGeom>
-          <a:noFill/>
-          <a:ln/>
-        </p:spPr>
-        <p:txBody>
-          <a:bodyPr wrap="square" lIns="0" tIns="0" rIns="0" bIns="0" rtlCol="0" anchor="t"/>
-          <a:lstStyle/>
-          <a:p>
-            <a:pPr marL="342900" indent="-342900">
-              <a:buSzPct val="100000"/>
-              <a:buChar char="•"/>
-            </a:pPr>
-            <a:r>
-              <a:rPr lang="en-US" sz="1100" dirty="0">
-                <a:solidFill>
-                  <a:srgbClr val="000000"/>
-                </a:solidFill>
-                <a:latin typeface="NVIDIA Sans" pitchFamily="34" charset="0"/>
-                <a:ea typeface="NVIDIA Sans" pitchFamily="34" charset="-122"/>
-                <a:cs typeface="NVIDIA Sans" pitchFamily="34" charset="-120"/>
-              </a:rPr>
-              <a:t>An eager op costs 30–60 µs of Python dispatch + launch; the median kernel runs 8 µs — the GPU finishes before the CPU can feed the next one</a:t>
-            </a:r>
-            <a:endParaRPr lang="en-US" sz="1100" dirty="0"/>
-          </a:p>
-          <a:p>
-            <a:pPr marL="342900" indent="-342900">
-              <a:buSzPct val="100000"/>
-              <a:buChar char="•"/>
-            </a:pPr>
-            <a:r>
-              <a:rPr lang="en-US" sz="1100" dirty="0">
-                <a:solidFill>
-                  <a:srgbClr val="000000"/>
-                </a:solidFill>
-                <a:latin typeface="NVIDIA Sans" pitchFamily="34" charset="0"/>
-                <a:ea typeface="NVIDIA Sans" pitchFamily="34" charset="-122"/>
-                <a:cs typeface="NVIDIA Sans" pitchFamily="34" charset="-120"/>
-              </a:rPr>
-              <a:t>Backward suffers far less (C++ autograd engine, occupancy 70%) — forward is where launch overhead bites</a:t>
-            </a:r>
-            <a:endParaRPr lang="en-US" sz="1100" dirty="0"/>
-          </a:p>
-          <a:p>
-            <a:pPr marL="342900" indent="-342900">
-              <a:buSzPct val="100000"/>
-              <a:buChar char="•"/>
-            </a:pPr>
-            <a:r>
-              <a:rPr lang="en-US" sz="1100" dirty="0">
-                <a:solidFill>
-                  <a:srgbClr val="000000"/>
-                </a:solidFill>
-                <a:latin typeface="NVIDIA Sans" pitchFamily="34" charset="0"/>
-                <a:ea typeface="NVIDIA Sans" pitchFamily="34" charset="-122"/>
-                <a:cs typeface="NVIDIA Sans" pitchFamily="34" charset="-120"/>
-              </a:rPr>
-              <a:t>A CUDA Graph replays an entire 8-layer group as ONE cudaGraphLaunch — per-op dispatch leaves the critical path</a:t>
-            </a:r>
-            <a:endParaRPr lang="en-US" sz="1100" dirty="0"/>
-          </a:p>
-        </p:txBody>
-      </p:sp>
-      <p:sp>
-        <p:nvSpPr>
-          <p:cNvPr id="20" name="Text 18"/>
-          <p:cNvSpPr/>
-          <p:nvPr/>
-        </p:nvSpPr>
-        <p:spPr>
-          <a:xfrm>
-            <a:off x="457200" y="4206240"/>
-            <a:ext cx="8229600" cy="201168"/>
-          </a:xfrm>
-          <a:prstGeom prst="rect">
-            <a:avLst/>
-          </a:prstGeom>
-          <a:noFill/>
-          <a:ln/>
-        </p:spPr>
-        <p:txBody>
-          <a:bodyPr wrap="square" lIns="0" tIns="0" rIns="0" bIns="0" rtlCol="0" anchor="ctr"/>
-          <a:lstStyle/>
-          <a:p>
-            <a:pPr indent="0" marL="0">
-              <a:buNone/>
-            </a:pPr>
-            <a:r>
-              <a:rPr lang="en-US" sz="850" i="1" dirty="0">
-                <a:solidFill>
-                  <a:srgbClr val="8C8C8C"/>
-                </a:solidFill>
-                <a:latin typeface="NVIDIA Sans" pitchFamily="34" charset="0"/>
-                <a:ea typeface="NVIDIA Sans" pitchFamily="34" charset="-122"/>
-                <a:cs typeface="NVIDIA Sans" pitchFamily="34" charset="-120"/>
-              </a:rPr>
-              <a:t>Busy also shrinks 50 → 37 ms (mixed attention + fusion); the split isolates the launch effect. Windows: baseline Qwen3.5 fwd vs merged-main VLM fwd, same launch-window accounting.</a:t>
-            </a:r>
-            <a:endParaRPr lang="en-US" sz="850" dirty="0"/>
-          </a:p>
-        </p:txBody>
-      </p:sp>
-      <p:sp>
-        <p:nvSpPr>
-          <p:cNvPr id="21" name="Text 19"/>
-          <p:cNvSpPr/>
-          <p:nvPr/>
-        </p:nvSpPr>
-        <p:spPr>
-          <a:xfrm>
-            <a:off x="457200" y="4617720"/>
-            <a:ext cx="4572000" cy="320040"/>
-          </a:xfrm>
-          <a:prstGeom prst="rect">
-            <a:avLst/>
-          </a:prstGeom>
-          <a:noFill/>
-          <a:ln/>
-        </p:spPr>
-        <p:txBody>
-          <a:bodyPr wrap="square" lIns="0" tIns="0" rIns="0" bIns="0" rtlCol="0" anchor="ctr"/>
-          <a:lstStyle/>
-          <a:p>
-            <a:pPr algn="l" indent="0" marL="0">
-              <a:buNone/>
-            </a:pPr>
-            <a:r>
-              <a:rPr lang="en-US" sz="1000" dirty="0">
-                <a:solidFill>
-                  <a:srgbClr val="5E5E5E"/>
-                </a:solidFill>
-                <a:latin typeface="NVIDIA Sans" pitchFamily="34" charset="0"/>
-                <a:ea typeface="NVIDIA Sans" pitchFamily="34" charset="-122"/>
-                <a:cs typeface="NVIDIA Sans" pitchFamily="34" charset="-120"/>
-              </a:rPr>
-              <a:t>QwenPI Training Optimization</a:t>
-            </a:r>
-            <a:endParaRPr lang="en-US" sz="1000" dirty="0"/>
-          </a:p>
-        </p:txBody>
-      </p:sp>
-      <p:sp>
-        <p:nvSpPr>
-          <p:cNvPr id="22" name="Text 20"/>
-          <p:cNvSpPr/>
-          <p:nvPr/>
-        </p:nvSpPr>
-        <p:spPr>
-          <a:xfrm>
-            <a:off x="7360920" y="4617720"/>
-            <a:ext cx="320040" cy="320040"/>
-          </a:xfrm>
-          <a:prstGeom prst="rect">
-            <a:avLst/>
-          </a:prstGeom>
-          <a:noFill/>
-          <a:ln/>
-        </p:spPr>
-        <p:txBody>
-          <a:bodyPr wrap="square" lIns="0" tIns="0" rIns="0" bIns="0" rtlCol="0" anchor="ctr"/>
-          <a:lstStyle/>
-          <a:p>
-            <a:pPr algn="r" indent="0" marL="0">
-              <a:buNone/>
-            </a:pPr>
-            <a:r>
-              <a:rPr lang="en-US" sz="1000" dirty="0">
-                <a:solidFill>
-                  <a:srgbClr val="5E5E5E"/>
-                </a:solidFill>
-                <a:latin typeface="NVIDIA Sans" pitchFamily="34" charset="0"/>
-                <a:ea typeface="NVIDIA Sans" pitchFamily="34" charset="-122"/>
-                <a:cs typeface="NVIDIA Sans" pitchFamily="34" charset="-120"/>
-              </a:rPr>
               <a:t>9</a:t>
             </a:r>
             <a:endParaRPr lang="en-US" sz="1000" dirty="0"/>
@@ -37253,7 +38357,7 @@
       </p:sp>
       <p:sp>
         <p:nvSpPr>
-          <p:cNvPr id="23" name="Shape 21"/>
+          <p:cNvPr id="41" name="Shape 38"/>
           <p:cNvSpPr/>
           <p:nvPr/>
         </p:nvSpPr>
@@ -37273,7 +38377,7 @@
       </p:sp>
       <p:pic>
         <p:nvPicPr>
-          <p:cNvPr id="24" name="Image 0" descr="/app/logos/nvidia-logo-blk-sm.png">    </p:cNvPr>
+          <p:cNvPr id="42" name="Image 0" descr="/app/logos/nvidia-logo-blk-sm.png">    </p:cNvPr>
           <p:cNvPicPr>
             <a:picLocks noChangeAspect="1"/>
           </p:cNvPicPr>

--- a/docs/slides/qwenpi-optimization.pptx
+++ b/docs/slides/qwenpi-optimization.pptx
@@ -23819,7 +23819,7 @@
                 <a:ea typeface="NVIDIA Sans" pitchFamily="34" charset="-122"/>
                 <a:cs typeface="NVIDIA Sans" pitchFamily="34" charset="-120"/>
               </a:rPr>
-              <a:t>Diagnosis — where did 800 ms go</a:t>
+              <a:t>Diagnosis</a:t>
             </a:r>
             <a:endParaRPr lang="en-US" sz="1700" dirty="0"/>
           </a:p>
@@ -23956,7 +23956,7 @@
                 <a:ea typeface="NVIDIA Sans" pitchFamily="34" charset="-122"/>
                 <a:cs typeface="NVIDIA Sans" pitchFamily="34" charset="-120"/>
               </a:rPr>
-              <a:t>The six fixes — precision, syncs, CUDA Graphs, comm</a:t>
+              <a:t>Optimizations</a:t>
             </a:r>
             <a:endParaRPr lang="en-US" sz="1700" dirty="0"/>
           </a:p>
@@ -24093,7 +24093,7 @@
                 <a:ea typeface="NVIDIA Sans" pitchFamily="34" charset="-122"/>
                 <a:cs typeface="NVIDIA Sans" pitchFamily="34" charset="-120"/>
               </a:rPr>
-              <a:t>Batch scaling</a:t>
+              <a:t>What's next</a:t>
             </a:r>
             <a:endParaRPr lang="en-US" sz="1700" dirty="0"/>
           </a:p>
@@ -24132,7 +24132,7 @@
                 <a:ea typeface="NVIDIA Sans" pitchFamily="34" charset="-122"/>
                 <a:cs typeface="NVIDIA Sans" pitchFamily="34" charset="-120"/>
               </a:rPr>
-              <a:t>13</a:t>
+              <a:t>13 – 14</a:t>
             </a:r>
             <a:endParaRPr lang="en-US" sz="1400" dirty="0"/>
           </a:p>
@@ -24140,144 +24140,7 @@
       </p:sp>
       <p:sp>
         <p:nvSpPr>
-          <p:cNvPr id="23" name="Shape 21"/>
-          <p:cNvSpPr/>
-          <p:nvPr/>
-        </p:nvSpPr>
-        <p:spPr>
-          <a:xfrm>
-            <a:off x="640080" y="3831336"/>
-            <a:ext cx="365760" cy="365760"/>
-          </a:xfrm>
-          <a:prstGeom prst="ellipse">
-            <a:avLst/>
-          </a:prstGeom>
-          <a:solidFill>
-            <a:srgbClr val="76B900"/>
-          </a:solidFill>
-          <a:ln/>
-        </p:spPr>
-      </p:sp>
-      <p:sp>
-        <p:nvSpPr>
-          <p:cNvPr id="24" name="Text 22"/>
-          <p:cNvSpPr/>
-          <p:nvPr/>
-        </p:nvSpPr>
-        <p:spPr>
-          <a:xfrm>
-            <a:off x="640080" y="3831336"/>
-            <a:ext cx="365760" cy="365760"/>
-          </a:xfrm>
-          <a:prstGeom prst="rect">
-            <a:avLst/>
-          </a:prstGeom>
-          <a:noFill/>
-          <a:ln/>
-        </p:spPr>
-        <p:txBody>
-          <a:bodyPr wrap="square" lIns="0" tIns="0" rIns="0" bIns="0" rtlCol="0" anchor="ctr"/>
-          <a:lstStyle/>
-          <a:p>
-            <a:pPr algn="ctr" indent="0" marL="0">
-              <a:buNone/>
-            </a:pPr>
-            <a:r>
-              <a:rPr lang="en-US" sz="1500" b="1" dirty="0">
-                <a:solidFill>
-                  <a:srgbClr val="FFFFFF"/>
-                </a:solidFill>
-                <a:latin typeface="NVIDIA Sans" pitchFamily="34" charset="0"/>
-                <a:ea typeface="NVIDIA Sans" pitchFamily="34" charset="-122"/>
-                <a:cs typeface="NVIDIA Sans" pitchFamily="34" charset="-120"/>
-              </a:rPr>
-              <a:t>6</a:t>
-            </a:r>
-            <a:endParaRPr lang="en-US" sz="1500" dirty="0"/>
-          </a:p>
-        </p:txBody>
-      </p:sp>
-      <p:sp>
-        <p:nvSpPr>
-          <p:cNvPr id="25" name="Text 23"/>
-          <p:cNvSpPr/>
-          <p:nvPr/>
-        </p:nvSpPr>
-        <p:spPr>
-          <a:xfrm>
-            <a:off x="1234440" y="3794760"/>
-            <a:ext cx="6309360" cy="438912"/>
-          </a:xfrm>
-          <a:prstGeom prst="rect">
-            <a:avLst/>
-          </a:prstGeom>
-          <a:noFill/>
-          <a:ln/>
-        </p:spPr>
-        <p:txBody>
-          <a:bodyPr wrap="square" lIns="0" tIns="0" rIns="0" bIns="0" rtlCol="0" anchor="ctr"/>
-          <a:lstStyle/>
-          <a:p>
-            <a:pPr indent="0" marL="0">
-              <a:buNone/>
-            </a:pPr>
-            <a:r>
-              <a:rPr lang="en-US" sz="1700" dirty="0">
-                <a:solidFill>
-                  <a:srgbClr val="000000"/>
-                </a:solidFill>
-                <a:latin typeface="NVIDIA Sans" pitchFamily="34" charset="0"/>
-                <a:ea typeface="NVIDIA Sans" pitchFamily="34" charset="-122"/>
-                <a:cs typeface="NVIDIA Sans" pitchFamily="34" charset="-120"/>
-              </a:rPr>
-              <a:t>What's next</a:t>
-            </a:r>
-            <a:endParaRPr lang="en-US" sz="1700" dirty="0"/>
-          </a:p>
-        </p:txBody>
-      </p:sp>
-      <p:sp>
-        <p:nvSpPr>
-          <p:cNvPr id="26" name="Text 24"/>
-          <p:cNvSpPr/>
-          <p:nvPr/>
-        </p:nvSpPr>
-        <p:spPr>
-          <a:xfrm>
-            <a:off x="7680960" y="3794760"/>
-            <a:ext cx="914400" cy="438912"/>
-          </a:xfrm>
-          <a:prstGeom prst="rect">
-            <a:avLst/>
-          </a:prstGeom>
-          <a:noFill/>
-          <a:ln/>
-        </p:spPr>
-        <p:txBody>
-          <a:bodyPr wrap="square" lIns="0" tIns="0" rIns="0" bIns="0" rtlCol="0" anchor="ctr"/>
-          <a:lstStyle/>
-          <a:p>
-            <a:pPr algn="r" indent="0" marL="0">
-              <a:buNone/>
-            </a:pPr>
-            <a:r>
-              <a:rPr lang="en-US" sz="1400" b="1" dirty="0">
-                <a:solidFill>
-                  <a:srgbClr val="76B900"/>
-                </a:solidFill>
-                <a:latin typeface="NVIDIA Sans" pitchFamily="34" charset="0"/>
-                <a:ea typeface="NVIDIA Sans" pitchFamily="34" charset="-122"/>
-                <a:cs typeface="NVIDIA Sans" pitchFamily="34" charset="-120"/>
-              </a:rPr>
-              <a:t>14</a:t>
-            </a:r>
-            <a:endParaRPr lang="en-US" sz="1400" dirty="0"/>
-          </a:p>
-        </p:txBody>
-      </p:sp>
-      <p:sp>
-        <p:nvSpPr>
-          <p:cNvPr id="27" name="Text 25"/>
+          <p:cNvPr id="23" name="Text 21"/>
           <p:cNvSpPr/>
           <p:nvPr/>
         </p:nvSpPr>
@@ -24316,7 +24179,7 @@
       </p:sp>
       <p:sp>
         <p:nvSpPr>
-          <p:cNvPr id="28" name="Text 26"/>
+          <p:cNvPr id="24" name="Text 22"/>
           <p:cNvSpPr/>
           <p:nvPr/>
         </p:nvSpPr>
@@ -24355,7 +24218,7 @@
       </p:sp>
       <p:sp>
         <p:nvSpPr>
-          <p:cNvPr id="29" name="Shape 27"/>
+          <p:cNvPr id="25" name="Shape 23"/>
           <p:cNvSpPr/>
           <p:nvPr/>
         </p:nvSpPr>
@@ -24375,7 +24238,7 @@
       </p:sp>
       <p:pic>
         <p:nvPicPr>
-          <p:cNvPr id="30" name="Image 0" descr="/app/logos/nvidia-logo-blk-sm.png">    </p:cNvPr>
+          <p:cNvPr id="26" name="Image 0" descr="/app/logos/nvidia-logo-blk-sm.png">    </p:cNvPr>
           <p:cNvPicPr>
             <a:picLocks noChangeAspect="1"/>
           </p:cNvPicPr>

--- a/docs/slides/qwenpi-optimization.pptx
+++ b/docs/slides/qwenpi-optimization.pptx
@@ -12867,7 +12867,8 @@
           <a:p>
             <a:r>
               <a:rPr lang="en-US" dirty="0"/>
-              <a:t>[IMPORTANT] All numbers in this deck are same-node A/B measurements on 8×H200 (NVLink), nsys-verified.</a:t>
+              <a:t>讲稿:各位好。今天汇报我们在 starVLA QwenPI 训练上的性能优化工作:8 张 H200 上,把每步训练时间从 800 毫秒压到 306 毫秒。整个过程的方法论只有一句话——先用 nsys 找到问题,再针对问题做修复,每一步都有同机 A/B 数据。今天所有数字,大家都可以拿我们公开的 nsys trace 复核。
+Q: 测试环境是什么? A: 单节点 8x H200 SXM、全 NVLink 互联,DeepSpeed ZeRO-2 全参数微调,数据是 LIBERO;软件栈稍后第 4 页详述。</a:t>
             </a:r>
             <a:endParaRPr lang="en-US" dirty="0"/>
           </a:p>
@@ -12955,8 +12956,9 @@
           <a:p>
             <a:r>
               <a:rPr lang="en-US" dirty="0"/>
-              <a:t>Baseline: qwenpi_baseline_nvtx train_step_33; optimized: milestone1 train_step_48. Launch-window attribution both sides.
-[IMPORTANT] This page motivates graphs with the customer's own trace numbers; the next page is the design and the 4-vs-1 answer.</a:t>
+              <a:t>讲稿:进入 CUDA Graph 之前,先看动机。同样的数学,Qwen3.5 前向在基线要 148 毫秒墙钟,其中 GPU 真正在算的只有 50 毫秒——三分之二在等 CPU 发射:3,929 次 kernel launch,每个 op 的 Python 调度加发射要 30 到 60 微秒,而 kernel 中位只有 8 微秒。优化后:6 次 graph launch 替代几千次发射,墙钟 65 毫秒,快 2.3 倍。
+Q: 优化后占空比也才 57%? A: 剩余间隙是图之间的 eager 胶水——多模态 merge、embedding 等,以及本页只看前向的窗口效应;整步的 GPU 空闲从 205ms 降到了 43ms。继续压胶水收益递减,所以下一步的优先级给了 AllGather。
+Q: 为什么反向问题不大? A: 反向由 autograd 引擎在 C++ 里发射,没有 Python 逐层开销,占空比本来就有 70%。所以我们只对前向做图,反向图是 reduce-overhead 顺带的。</a:t>
             </a:r>
             <a:endParaRPr lang="en-US" dirty="0"/>
           </a:p>
@@ -13044,9 +13046,10 @@
           <a:p>
             <a:r>
               <a:rPr lang="en-US" dirty="0"/>
-              <a:t>Graph capture preserves exact hidden-state semantics - verified fullgraph fwd+bwd and unchanged loss trajectory.
-If pressed on details: a whole-stack compile also fails outright here (fla graph-breaks fragment it into cudagraph partitions sharing one memory pool, whose allocator checkpointing collides with ZeRO-2 hook NCCL allocations - crash on torch 2.6 and 2.7.1). Keep it at 'engineering constraints' unless the audience digs.
-Group size 8 = measured sweet spot; 4 replays vs 1 costs microseconds.</a:t>
+              <a:t>讲稿:CUDA Graph 的设计。左边:vision tower 一张图,32 层 decoder 分四张图,DiT 走 torch.compile。客户最常问的问题——为什么是四张不是一张?右图就是答案:DeepSpeed 的梯度 AllReduce 靠 hook 触发,而 hook 只能在图与图之间执行。四张图,反向每重放完一组,hook 就把该组梯度的 AllReduce 发出去,通信和计算重叠;一张大图,所有通信只能挤在反向结束后串行——同样的计算和字节,红线(步结束)明显更晚。
+Q: 模型结构改了,图要重做吗?维护成本多大? A: 捕获在训练启动时自动完成,分组 runner 对层列表是通用的,改层数不用改代码;换注意力结构则需要回归验证。我们还保留了逐层 compile 模式作为回退。
+Q: 为什么每组 8 层? A: 实测甜点:发射节省在组大小 8 就饱和了,更大的组只增加编译时间和故障影响面。
+Q: 一张大图真的不行吗? A: 除了重叠问题,技术上也过不去——线性注意力库的 graph-break 会把单图切成共享显存池的多个分区,和 ZeRO-2 hook 的显存分配冲突,在 torch 2.6 和 2.7.1 上都稳定崩溃。细节可以会后展开。</a:t>
             </a:r>
             <a:endParaRPr lang="en-US" dirty="0"/>
           </a:p>
@@ -13134,9 +13137,10 @@
           <a:p>
             <a:r>
               <a:rPr lang="en-US" dirty="0"/>
-              <a:t>Mechanism source (DeepSpeed 0.16.9 stage_1_and_2.py): TWO ipg buffers when overlap_comm (L2055); average_tensor enqueues compute.wait_stream(reduction_stream) at every bucket boundary (L1061-1062) - pipeline depth is one in-flight reduction.
-A/B re-captured on viking-prod-303 with node-level graph trace: period basis 5e8 = 319 ms/step, 1.5e9 = 306 ms (in-step walls 261/249, gaps ~57 both); AR busy equal within 1 ms (same bytes). Original-branch sweep: 2e9 was +4.7 ms.
-Final ledger (moved off-slide): baseline 807 = 540 busy + 62 exposed + 205 idle; optimized 249 = 175 + 22 + 43.</a:t>
+              <a:t>讲稿:通信配置两个旋钮,解决两个不同的问题。旋钮一 reduce_scatter 关掉:DeepSpeed 默认在每个桶发送前做一次 flatten 拷贝,就是诊断页那 22 毫秒的 CatArrayBatchedCopy,而梯度本来就在连续缓冲里——纯冗余。旋钮二桶大小:DeepSpeed 只有两个梯度缓冲,每次桶满,计算流必须等上一次 reduction 排空。下面是真实对照:5e8 的桶,反向被打断 15 次、47 毫秒;1.5e9 只有 8 次、27 毫秒。两个旋钮正交且同向。
+Q: reduce_scatter 改 AllReduce,线上字节翻倍,多节点上还成立吗? A: 直说:这是单节点 NVLink 的结论——节点内带宽有余量且通信被重叠,flatten 的收益占优。跨节点 IB 上这个权衡很可能反转,部署你们集群前需要重新 A/B,桶大小也要按拓扑重调。这两项都是 15 分钟级的实验,我们可以一起跑。
+Q: 1.5e9 能直接抄到别的模型吗? A: 不能——桶按梯度元素计数,合适的值取决于参数布局(这里是 DiT 那段 30 亿元素的连续梯度)。所以我们把它做成了模型级配置,没动共享默认值。
+Q: 双缓冲这个限制 DeepSpeed 为什么不修? A: 上游的设计取舍(显存换流水深度)。我们后面提的 ZeRO-2 异步 gather 改造会动同一份代码,可以一并评估。</a:t>
             </a:r>
             <a:endParaRPr lang="en-US" dirty="0"/>
           </a:p>
@@ -13224,7 +13228,9 @@
           <a:p>
             <a:r>
               <a:rPr lang="en-US" dirty="0"/>
-              <a:t>[IMPORTANT] Recommendation: bs 24 is the throughput config, gated on customer-side convergence validation (lr recalibration).</a:t>
+              <a:t>讲稿:横向扩 batch:8 到 24,吞吐 209 到 309,MFU 到 27.7%——发射、通信、AllGather 排空这些每步固定开销被摊薄了。甜点在 24;32 反而回落,已排除 OOM 和数据加载,初步指向显存压力,trace 在手。重要边界:bs24 意味着全局 batch 192,收敛性需要在你们的数据和评测器上验证后才能采纳。
+Q: bs24 的学习率怎么调?收敛验证怎么做? A: 建议从线性缩放加 warmup 起步;验证需要你们的任务评测器,我们提供陪跑和训练侧支持。在此之前 deck 的推荐配置仍是 bs8。
+Q: bs32 为什么塌? A: 现场不猜。已排除 OOM 和 dataloader;疑似 allocator/显存压力效应,nsys trace 已采集,需要的话作为后续项深挖。</a:t>
             </a:r>
             <a:endParaRPr lang="en-US" dirty="0"/>
           </a:p>
@@ -13312,10 +13318,10 @@
           <a:p>
             <a:r>
               <a:rPr lang="en-US" dirty="0"/>
-              <a:t>Timeline: qwenpi_bktAB_15e9 train_step_48 through the next step start (node-level trace). AllGather = 2 x 22 ms, fully exposed - the single biggest remaining block.
-Ruled-out list (keep for Q&amp;A): full FA2 +10 ms at seq 192; NCCL knobs futile (478 GB/s busbw = ceiling); one giant decoder graph breaks + kills AR overlap; FlashQLA ceiling ~10.5 ms and needs torch&gt;=2.8; masked_scatter nonzero patch 0 ms; MRoPE cache neutral at tip.
-Optimizer math (~10 ms Adam) additionally has a compiled-autograd lever. Deployment notes: 4+4-topology nodes need NCCL_P2P_LEVEL=NVL; bs24 gated on convergence run.
-[IMPORTANT] Close: 2.6x at bs8 (209 samples/node/s), 309 at bs24 - and the road to ~250+ at bs8 runs through the AllGather.</a:t>
+              <a:t>讲稿:收尾。上图是优化后的完整一步:计算结束后,44 毫秒的参数 AllGather 完全裸露——占每步 18%,这是当前最大的单块损耗。左下 kernel 分布已经平坦:最大类 GEMM 95 毫秒,且已顶在这台机器 622 TFLOPS 的功耗墙上——kernel 层面没有可榨的了,剩下的都是结构性机会。三个方向按规模排序:重叠 AllGather 约 50 毫秒,ZeRO-2 今天做不到,要么 FSDP 要么给 ZeRO-2 加异步 gather;fp8 突破功耗墙;梯度压缩拿回步内约 20 毫秒的暴露 AllReduce。2.6 倍已经落袋,bs8 通往 250+ 的路在 AllGather 上。
+Q: FSDP 迁移成本多大,收益确定吗? A: 收益上限就是实测的 44-57 毫秒,不是估算。两条路成本不同:FSDP 迁移动 checkpoint 格式和训练配置,面大但一劳永逸;ZeRO-2 异步 gather 补丁改动集中在一个文件,面小。我们建议先做一周级的 PoC 把两条路的数字跑出来再定。
+Q: fp8 对收敛的影响? A: 需要 per-tensor scaling(Transformer-Engine 路线)加收敛验证,和 bf16 一样走「先千步 loss 对照、再任务评测」的流程。它是唯一能提高 GEMM 上限的杠杆。
+Q: 有些方向你们试过没有? A: 试过并否证的都有数据:文本栈全 FA2 慢 10ms;NCCL 参数调优无效(带宽已在 478 GB/s 线速);单张大图不可行;FlashQLA 天花板只有 10.5ms。这些清单可以发给你们,避免重复踩坑。</a:t>
             </a:r>
             <a:endParaRPr lang="en-US" dirty="0"/>
           </a:p>
@@ -13403,7 +13409,7 @@
           <a:p>
             <a:r>
               <a:rPr lang="en-US" dirty="0"/>
-              <a:t>Story spine: problems first (pages 5-6), then one fix per problem, each with same-node A/B evidence; close with scaling and the go-forward plan.</a:t>
+              <a:t>讲稿:流程很简单:先给结果,然后花一分钟对齐模型和负载,重点在中间两段——我们诊断出了哪些问题、每个问题怎么修的;最后讲还剩下什么、下一步怎么走。中间任何一页都欢迎随时打断提问。</a:t>
             </a:r>
             <a:endParaRPr lang="en-US" dirty="0"/>
           </a:p>
@@ -13491,7 +13497,10 @@
           <a:p>
             <a:r>
               <a:rPr lang="en-US" dirty="0"/>
-              <a:t>Anchor slide: 3.2x step time, 3.2x throughput at same batch; batch scaling adds another 32% on top.</a:t>
+              <a:t>讲稿:四个数:步时 800 到 306 毫秒,2.6 倍;吞吐从交接时的 80 到 209 samples/node/s,超过 200 的目标线;MFU 从 7.2% 到 18.8%;batch 24 时吞吐 309,是目标的 1.5 倍。特别说明口径:我们的「步时」是步间周期——包含了步尾参数 AllGather 的排空,不是只算前反向的窗口;并且用 1000 步不带 profiler 的干净跑验证过,稳态 303 到 313 毫秒。
+Q: 你们之前沟通提过 249ms,为什么现在是 306? A: 我们自己发现并修正了口径问题:免同步日志优化之后,训练器的 in-step 计时器漏掉了步间约 57ms 的 AllGather 排空。249 是计时器窗口,306 是真实步间周期——你们用 nsys 量到的会是 306。宁可数字难看一点,也要经得起复核。
+Q: 209 离 200 目标太近了? A: 两个答案:batch 24 是 309,余量充足;bs8 下最大的单块损耗就是那 57ms 的 AllGather 暴露,最后一页有把它重叠掉的方案,修复后 bs8 预期回到 250 左右。
+Q: MFU 18.8% 是不是太低? A: 分母用的是 H200 纸面 989.5 TFLOPS;这台机器 GEMM 的持续上限实测只有 622(功耗墙),所以 kernel 层面其实已经接近打满,详见最后一页的 kernel 分布。bs24 时 MFU 27.7%。</a:t>
             </a:r>
             <a:endParaRPr lang="en-US" dirty="0"/>
           </a:p>
@@ -13579,8 +13588,10 @@
           <a:p>
             <a:r>
               <a:rPr lang="en-US" dirty="0"/>
-              <a:t>Hybrid decoder = full attention + gated-delta-net (linear attention) layers — this matters later: GDN blocks whole-model torch.compile.
-Action expert consumes VLM hidden states layer-wise (layerwise DiT).</a:t>
+              <a:t>讲稿:对齐一下负载。7.52B 参数全部参与训练:Qwen3.5-VL 4B 做主干——注意它的 decoder 是 32 层混合结构,全注意力和 gated-delta-net 线性注意力交替,这个细节在讲 CUDA Graph 时会变得很重要;动作专家是 2.96B 的 cross-attention DiT,深度和宽度跟随 VLM(32 块、hidden 2560),逐层交叉注意 VLM 的 hidden states。右边是训练配置,重点:ZeRO-2、bs 8 到 24、文本定长 192。
+Q: 为什么用 ZeRO-2 而不是 ZeRO-3 或 FSDP? A: 这是与你们对齐的基线选型,本次优化不改训练语义。但优化到今天,ZeRO-2 无法重叠参数 AllGather 已成为第一大结构性损耗,最后一页我们正是建议评估 FSDP 或改造 ZeRO-2。
+Q: 文本定长 192 对真实数据成立吗?更长指令怎么办? A: pad 长度是配置项;当前数据分布下 192 覆盖良好、padding 开销实测很小。若上更长指令,按长度分桶、每桶各自捕获一张图即可,方案现成。
+Q: transformers 为什么停在 5.3? A: 有意不动——与你们的环境钉板对齐。我们所有优化都绕开了升级需求,包括一个 5.3 特有的 hidden-states 捕获兼容问题。</a:t>
             </a:r>
             <a:endParaRPr lang="en-US" dirty="0"/>
           </a:p>
@@ -13668,12 +13679,10 @@
           <a:p>
             <a:r>
               <a:rPr lang="en-US" dirty="0"/>
-              <a:t>Timeline from the NVTX-instrumented baseline re-capture (qwenpi_baseline_nvtx, viking-prod-303, train_step_33, 807 ms, bs 8/GPU). Both strips use the GPU-execution clock: kernels attributed to phases/modules by their CPU launch window (correlationId join).
-CPU-side forward() returns at 225 ms - the GPU is still executing DiT forward kernels until 309 ms (eager launch-ahead). That is why phases here are defined on GPU execution, not CPU ranges.
-Qwen3.5 bwd:fwd busy = 123:50 = 2.46x, matching theory (GEMM exactly 1.94x). The SPAN ratio is only 1.18x because forward is launch-starved: occupancy 34% vs 70% in backward (Python-side launches vs C++ autograd).
-Module bands = GPU execution spans, attributed by launch-window correlation (kernels joined to their CPU launch time via correlationId). GPU busy inside the bands: Qwen3.5 fwd 50 ms, DiT fwd 120 ms, DiT bwd 224 ms, Qwen3.5 bwd 123 ms - DiT owns 43% of all GPU busy time.
-Rows 2+3 land as one ladder level (pipeline &amp; caching, -117 ms); row 5 combines bucket sizing (PR11) and the redundant-flatten removal (PR12); row 6 covers the two config-level fixes.
-[IMPORTANT] Key message: every fix in this deck was first SEEN here as a trace shape or a measured kernel cost - problems first, solutions second.</a:t>
+              <a:t>讲稿:这是基线的一个真实训练步,807 毫秒,全部按 GPU 执行时钟画。上面两行:模型阶段和模块归属——前向 309 里 Qwen3.5 占 148、DiT 占 124,反向里 DiT 234、Qwen3.5 175。下面泳道是真实 kernel。五个可见的问题,每个都标了修复方案和收益:fp32 的动作头、CPU 在 forward 里做预处理、每步同步点、发射瓶颈、通信配置。这一页是整个 deck 的地图,后面每页修一个。
+Q: 为什么 CPU 侧 forward 只有 225ms,这里画 309? A: eager 下 CPU 发射超前于 GPU 执行:forward 函数在 225ms 返回,但 GPU 队列里的 DiT 前向 kernel 一直执行到 309。所以本图统一用 GPU 执行时钟,kernel 按发射窗口归属——两行的边界才能严格对齐,你们用 correlationId 关联可以复算。
+Q: Qwen3.5 反向为什么不是前向的两倍? A: 按 GPU busy 恰好是 2.46 倍,符合理论(纯 GEMM 是 1.94)。墙钟跨度只有 1.18 倍,是因为前向发射饥饿——占空比 34% 对反向的 70%,Python 逐层发射喂不饱 GPU。这正是第 10 页的主题。
+Q: 13,868 个 kernel 怎么来的? A: eager 模式每个算子独立发射,中位 kernel 只有 8 微秒;79% 不到 20 微秒。发射成本反而成了主导,这是 CUDA Graph 的动机。</a:t>
             </a:r>
             <a:endParaRPr lang="en-US" dirty="0"/>
           </a:p>
@@ -13761,7 +13770,9 @@
           <a:p>
             <a:r>
               <a:rPr lang="en-US" dirty="0"/>
-              <a:t>Each bar is a separate 60-step run at that cumulative level; bars show ACTUAL step time, not deltas. The next slides walk these levels.</a:t>
+              <a:t>讲稿:优化路线图,柱子是每级落地后的真实步时——注意是周期口径,包含 AllGather 排空。六级:bf16 动作头单项最大,-214;流水线与同步点 -104(其中环境升级折算 -37);混合注意力 -32;CUDA Graph -122;通信调优 -22。累计 2.6 倍。每一根柱子都是同一台机器上的独立 60 步实测,不是估算叠加。
+Q: 为什么不标每项的增量? A: 柱子的差就是增量;我们刻意展示绝对时间,因为那才是你们真实感受到的训练速度。
+Q: 顺序可以变吗?能只挑其中几项吗? A: 大部分独立可选,但有依赖:CUDA Graph 需要定长 shape(来自流水线级的 pad-192)和 torch 2.7.1;混合注意力需要 flash-attn 2.8。想分阶段合入的话,我们可以给依赖图。</a:t>
             </a:r>
             <a:endParaRPr lang="en-US" dirty="0"/>
           </a:p>
@@ -13849,8 +13860,9 @@
           <a:p>
             <a:r>
               <a:rPr lang="en-US" dirty="0"/>
-              <a:t>Kernel classes measured on the instrumented baseline capture (qwenpi_baseline_nvtx).
-Loss curves: 1000-step clean A/B at the merged best config, only DIT_DTYPE differs (qwenpi_loss1k_fp32 vs qwenpi_loss1k_bf16, 2026-07-22, viking-prod-303). Final-100 means match to 4 decimals. Task-level accuracy is validated customer-side; loss trajectory is our correctness evidence.</a:t>
+              <a:t>讲稿:第一个修复,也是最大的单项。左图:基线中 37% 的 GPU 计算时间是 fp32 GEMM,而且全部来自动作头——2.96B 的 DiT 泡在 fp32 里。修复是一个配置开关:DiT 主体进 bf16 autocast,timestep 编码和 loss 数学保持 fp32。右图是正确性证据:1000 步、只有 dtype 不同的干净对照,最后 100 步的平均 loss 两边都是 0.1473,四位小数一致。
+Q: loss 一致不代表任务成功率一致,操作精度怎么保证? A: 同意,任务级评测需要在你们的评测器上做,这是我们建议的联合验证项。我们能给的证据是:损失轨迹千步统计不可区分、对数值最敏感的两处(timestep、loss)保留 fp32——这与业界 VLA 训练的通行做法一致。
+Q: 为什么当初是 fp32? A: 继承自参考实现对 diffusion 数值的保守处理。逐步 |Δ|=0.02 完全来自未固定种子的扩散采样噪声;如果你们需要,我们可以加固定采样种子的模式做逐位验证。</a:t>
             </a:r>
             <a:endParaRPr lang="en-US" dirty="0"/>
           </a:p>
@@ -13938,8 +13950,8 @@
           <a:p>
             <a:r>
               <a:rPr lang="en-US" dirty="0"/>
-              <a:t>All three sync points are CPU work serialized inside forward: data parsing at the top, ViT rotary/positional embedding, and MRoPE position ids between ViT and decoder.
-Stall sizes from the instrumented baseline; the timeline is a schematic, proportions follow the trace.</a:t>
+              <a:t>讲稿:第二类问题:同步点。上图是前向的计算流,四条虚线都是 GPU 必须等 CPU 的往返:图像解码和 tokenize 在 forward 里做,每步开头 GPU 干等 37 毫秒;ViT 的 RoPE 和位置编码在 CPU 上逐步算;ViT 到 decoder 之间的 MRoPE 位置索引也在 CPU;最后 loss 读回和计时器每步两次拉停发射流水线。下面时间线标了它们在真实步里的位置。
+Q: 这些是 HuggingFace 的 bug 吗? A: 不是 bug,是通用性设计——HF 要兼容任意输入形状和推理路径,所以在 CPU 上算这些最稳妥。但训练热循环里输入形状固定,这些就成了纯开销,可以预计算或缓存。</a:t>
             </a:r>
             <a:endParaRPr lang="en-US" dirty="0"/>
           </a:p>
@@ -14027,8 +14039,9 @@
           <a:p>
             <a:r>
               <a:rPr lang="en-US" dirty="0"/>
-              <a:t>Idle quantification from the instrumented baseline: 205 ms/step total idle - ~40 ms preprocessing gap at step start, plus sync stalls and launch gaps.
-Schematic is illustrative; proportions follow the measured trace (preprocess ~40 ms of a 807 ms step at baseline, fully hidden after.</a:t>
+              <a:t>讲稿:对应的四个修复:预处理搬进 8 个 DataLoader worker,和上一步 GPU 计算完全重叠;H2D 用锁页内存加专用拷贝流;日志免同步——loss 只在记录时读回、DeepSpeed 计时器不做强制同步;MRoPE 位置索引按图像网格缓存。加上混合注意力,这一段合计周期从 549 降到 450。
+Q: 标题是 -67,之前不是说这级省了 117 吗? A: 117 是 in-step 计时器口径。把同步点移出计时窗口的同时,原本藏在窗口里的 AllGather 排空也被移出去了,按诚实的周期口径这级净赚 67。我们主动把两个口径都讲清楚。
+Q: 8 个 worker 会不会抢 CPU?数据顺序会变吗? A: 预处理后 data_times 稳定在 1-2ms,CPU 有富余;采样器和数据顺序完全不变,只是预处理的执行位置变了,有逐位验证。</a:t>
             </a:r>
             <a:endParaRPr lang="en-US" dirty="0"/>
           </a:p>

--- a/docs/slides/qwenpi-optimization.pptx
+++ b/docs/slides/qwenpi-optimization.pptx
@@ -13860,9 +13860,12 @@
           <a:p>
             <a:r>
               <a:rPr lang="en-US" dirty="0"/>
-              <a:t>讲稿:第一个修复,也是最大的单项。左图:基线中 37% 的 GPU 计算时间是 fp32 GEMM,而且全部来自动作头——2.96B 的 DiT 泡在 fp32 里。修复是一个配置开关:DiT 主体进 bf16 autocast,timestep 编码和 loss 数学保持 fp32。右图是正确性证据:1000 步、只有 dtype 不同的干净对照,最后 100 步的平均 loss 两边都是 0.1473,四位小数一致。
-Q: loss 一致不代表任务成功率一致,操作精度怎么保证? A: 同意,任务级评测需要在你们的评测器上做,这是我们建议的联合验证项。我们能给的证据是:损失轨迹千步统计不可区分、对数值最敏感的两处(timestep、loss)保留 fp32——这与业界 VLA 训练的通行做法一致。
-Q: 为什么当初是 fp32? A: 继承自参考实现对 diffusion 数值的保守处理。逐步 |Δ|=0.02 完全来自未固定种子的扩散采样噪声;如果你们需要,我们可以加固定采样种子的模式做逐位验证。</a:t>
+              <a:t>讲稿:最大单项。左图:基线 37% 的 GPU 计算是 fp32 GEMM,全部来自 2.96B 的动作头。先澄清事实:权重存储本来就是 bf16(DeepSpeed bf16 引擎),fp32 只在优化器 master 副本里;基线的 fp32 计算来自一个作用域过宽的 autocast(float32) 上下文。我们的修复就是收窄它。
+精度边界:转 bf16 的只有 DiT transformer 那一次调用(32 block 的矩阵乘,前反向,tensor core 上 fp32 累加)。保留 fp32:flow-matching 标量数学(噪声插值/velocity/timestep)、action-state encoder、action_decoder、MSE loss、DiT 内 LayerNorm(白名单)、TimestepEncoder、优化器 fp32 master 与 grad-norm。
+结果:训练 loss 无可测退化——1000 步对照,末段百步均值 0.1473 vs 0.1473;末段逐步差 std 0.014,仅为曲线自身步间波动 0.080 的 0.4 倍,精度差异淹没在采样噪声之下。
+Q: loss 一致不代表任务成功率一致? A: 同意,任务级评测在你们评测器上做,建议联合验证;我们的证据是千步轨迹统计不可区分 + 数值敏感处全保 fp32,与业界通行做法一致。
+Q: 为什么当初是 fp32?收窄合理吗? A: 权重本就 bf16 存储,外层 fp32 从未保护权重精度,两倍 GEMM 代价只买到激活精度。收窄用 autocast 标准嵌套机制(内层覆盖外层、白名单仍 fp32),与 VLM 主干既有跑法一致,是 AMP/Megatron/DeepSpeed 标准配方。
+Q: 前 200 步曲线有偏差? A: 扩散采样未固定种子,陡降段对抽到的 t 敏感;平稳段偏移严格归零(401-600 与 901-1000 的均值差均为 0.0000)。要逐位验证可加固定采样种子模式。</a:t>
             </a:r>
             <a:endParaRPr lang="en-US" dirty="0"/>
           </a:p>

--- a/docs/slides/qwenpi-optimization.pptx
+++ b/docs/slides/qwenpi-optimization.pptx
@@ -13865,7 +13865,9 @@
 结果:训练 loss 无可测退化——1000 步对照,末段百步均值 0.1473 vs 0.1473;末段逐步差 std 0.014,仅为曲线自身步间波动 0.080 的 0.4 倍,精度差异淹没在采样噪声之下。
 Q: loss 一致不代表任务成功率一致? A: 同意,任务级评测在你们评测器上做,建议联合验证;我们的证据是千步轨迹统计不可区分 + 数值敏感处全保 fp32,与业界通行做法一致。
 Q: 为什么当初是 fp32?收窄合理吗? A: 权重本就 bf16 存储,外层 fp32 从未保护权重精度,两倍 GEMM 代价只买到激活精度。收窄用 autocast 标准嵌套机制(内层覆盖外层、白名单仍 fp32),与 VLM 主干既有跑法一致,是 AMP/Megatron/DeepSpeed 标准配方。
-Q: 前 200 步曲线有偏差? A: 扩散采样未固定种子,陡降段对抽到的 t 敏感;平稳段偏移严格归零(401-600 与 901-1000 的均值差均为 0.0000)。要逐位验证可加固定采样种子模式。</a:t>
+Q: 前 200 步曲线有偏差? A: 扩散采样未固定种子,陡降段对抽到的 t 敏感;平稳段偏移严格归零(401-600 与 901-1000 的均值差均为 0.0000)。要逐位验证可加固定采样种子模式。
+可行性:bf16 与 fp32 指数位相同(无溢出、无需 loss scaling);GEMM 在 tensor core 上 fp32 累加;优化器 fp32 master;归约/LN/loss 走 autocast 白名单 fp32。业界:BLOOM/Llama 3/Megatron/DeepSpeed 均以 bf16 为标准训练精度,OpenVLA 等 VLA 实现默认 bf16 微调;本仓库 VLM 主干本就全程 bf16。
+参考:Micikevicius et al. ICLR18 (arXiv:1710.03740);Kalamkar et al. (1905.12322);BLOOM (2211.05100) / OPT (2205.01068);Llama 3 (2407.21783);PyTorch AMP 与 NVIDIA Mixed Precision 指南;OpenVLA (2406.09246)。</a:t>
             </a:r>
             <a:endParaRPr lang="en-US" dirty="0"/>
           </a:p>

--- a/docs/slides/qwenpi-optimization.pptx
+++ b/docs/slides/qwenpi-optimization.pptx
@@ -13137,10 +13137,11 @@
           <a:p>
             <a:r>
               <a:rPr lang="en-US" dirty="0"/>
-              <a:t>讲稿:通信配置两个旋钮,解决两个不同的问题。旋钮一 reduce_scatter 关掉:DeepSpeed 默认在每个桶发送前做一次 flatten 拷贝,就是诊断页那 22 毫秒的 CatArrayBatchedCopy,而梯度本来就在连续缓冲里——纯冗余。旋钮二桶大小:DeepSpeed 只有两个梯度缓冲,每次桶满,计算流必须等上一次 reduction 排空。下面是真实对照:5e8 的桶,反向被打断 15 次、47 毫秒;1.5e9 只有 8 次、27 毫秒。两个旋钮正交且同向。
-Q: reduce_scatter 改 AllReduce,线上字节翻倍,多节点上还成立吗? A: 直说:这是单节点 NVLink 的结论——节点内带宽有余量且通信被重叠,flatten 的收益占优。跨节点 IB 上这个权衡很可能反转,部署你们集群前需要重新 A/B,桶大小也要按拓扑重调。这两项都是 15 分钟级的实验,我们可以一起跑。
-Q: 1.5e9 能直接抄到别的模型吗? A: 不能——桶按梯度元素计数,合适的值取决于参数布局(这里是 DiT 那段 30 亿元素的连续梯度)。所以我们把它做成了模型级配置,没动共享默认值。
-Q: 双缓冲这个限制 DeepSpeed 为什么不修? A: 上游的设计取舍(显存换流水深度)。我们后面提的 ZeRO-2 异步 gather 改造会动同一份代码,可以一并评估。</a:t>
+              <a:t>讲稿:通信两个旋钮。旋钮一 reduce_scatter=false:关键事实——DeepSpeed 默认的 reduce_scatter=true 底层其实仍是整桶 all_reduce(allreduce_bucket L1521,rank=None→dist.all_reduce),只是多付了每桶的 flatten(诊断页那 22ms CatArrayBatchedCopy)和 copy-back;false 对本就连续的桶直接一次 all_reduce,字节完全不变、纯省两轮拷贝(−13ms)。旋钮二桶大小:只有两个梯度缓冲,每次桶满计算流要等上次 reduction 排空(L2055 双缓冲 + L1061-62 wait_stream)。真实对照:5e8 打断 15 次/47ms,1.5e9 只有 8 次/27ms。
+Q(最尖锐): all_reduce 不就是 reduce-scatter + all-gather 吗?那 reduce_scatter=true 该省一半字节才对? A: 理论完全对——纯 reduce-scatter 跳过 all-gather 段、只搬一半字节,正是 ZeRO-2 该用的。但陷阱在于:DeepSpeed 默认的 reduce_scatter=true(use_multi_rank_bucket_allreduce=True,构造默认 L120)底层调的是 dist.all_reduce,不是真 reduce-scatter,搬满量字节还加重排——所以关掉它是纯赚,不是权衡。真正的 reduce-scatter 在另一条子路径(use_multi_rank=false → allreduce_no_retain → dist.reduce 逐分片)。
+Q: 那真 reduce-scatter 为什么不用?多节点呢? A: 我们测过真 RS 路径在单机反而更慢:NVLink 上梯度通信与反向计算重叠、非带宽瓶颈(478 GB/s 已到顶但被藏住),砍一半字节几乎不缩短暴露时间,而它碎成很多小 dist.reduce 且照样 flatten。多节点上通信暴露且带宽受限,砍字节才真正值钱——但正确做法是上真正实现 RS 的路径/新版 DS,不是把开关拨回默认 true(那只是 all_reduce+重排)。桶大小也需按拓扑重调;均为 15 分钟级实验。
+Q: 1.5e9 能抄到别的模型吗? A: 不能——桶按梯度元素计数,取决于参数布局(DiT 那段 30 亿元素连续梯度),所以做成了模型级配置,没动共享默认值。
+Q: 双缓冲 DeepSpeed 为什么不修? A: 上游设计取舍(显存换流水深度);我们的 ZeRO-2 异步 gather 改造会动同一份代码,可一并评估。</a:t>
             </a:r>
             <a:endParaRPr lang="en-US" dirty="0"/>
           </a:p>
@@ -17002,7 +17003,7 @@
                 <a:ea typeface="NVIDIA Sans" pitchFamily="34" charset="-122"/>
                 <a:cs typeface="NVIDIA Sans" pitchFamily="34" charset="-120"/>
               </a:rPr>
-              <a:t>Default path flattens every bucket (22 ms/step CatArrayBatchedCopy) — but grads already sit contiguous</a:t>
+              <a:t>reduce_scatter=true is still a full all_reduce underneath — it just adds a per-bucket flatten (22 ms CatArrayBatchedCopy) + copy-back</a:t>
             </a:r>
             <a:endParaRPr lang="en-US" sz="900" dirty="0"/>
           </a:p>
@@ -17020,7 +17021,7 @@
                 <a:ea typeface="NVIDIA Sans" pitchFamily="34" charset="-122"/>
                 <a:cs typeface="NVIDIA Sans" pitchFamily="34" charset="-120"/>
               </a:rPr>
-              <a:t>Plain AllReduce skips it. Cost: ~2× wire bytes — fine while comm overlaps and NVLink has headroom</a:t>
+              <a:t>false = one all_reduce on the already-contiguous bucket: same bytes, no reshuffle</a:t>
             </a:r>
             <a:endParaRPr lang="en-US" sz="900" dirty="0"/>
           </a:p>
@@ -19003,7 +19004,7 @@
                 <a:ea typeface="NVIDIA Sans" pitchFamily="34" charset="-122"/>
                 <a:cs typeface="NVIDIA Sans" pitchFamily="34" charset="-120"/>
               </a:rPr>
-              <a:t>bucket size = how OFTEN compute and reduction rendezvous; reduce_scatter = what each rendezvous COSTS. false makes each AR bigger, strengthening the case for large buckets.</a:t>
+              <a:t>bucket size sets how OFTEN compute and reduction rendezvous; reduce_scatter sets how much copy work rides on each reduction. Both shrink the backward stall, independently.</a:t>
             </a:r>
             <a:endParaRPr lang="en-US" sz="1000" dirty="0"/>
           </a:p>

--- a/docs/slides/qwenpi-optimization.pptx
+++ b/docs/slides/qwenpi-optimization.pptx
@@ -13683,7 +13683,8 @@
               <a:t>讲稿:这是基线的一个真实训练步,807 毫秒,全部按 GPU 执行时钟画。上面两行:模型阶段和模块归属——前向 309 里 Qwen3.5 占 148、DiT 占 124,反向里 DiT 234、Qwen3.5 175。下面泳道是真实 kernel。五个可见的问题,每个都标了修复方案和收益:fp32 的动作头、CPU 在 forward 里做预处理、每步同步点、发射瓶颈、通信配置。这一页是整个 deck 的地图,后面每页修一个。
 Q: 为什么 CPU 侧 forward 只有 225ms,这里画 309? A: eager 下 CPU 发射超前于 GPU 执行:forward 函数在 225ms 返回,但 GPU 队列里的 DiT 前向 kernel 一直执行到 309。所以本图统一用 GPU 执行时钟,kernel 按发射窗口归属——两行的边界才能严格对齐,你们用 correlationId 关联可以复算。
 Q: Qwen3.5 反向为什么不是前向的两倍? A: 按 GPU busy 恰好是 2.46 倍,符合理论(纯 GEMM 是 1.94)。墙钟跨度只有 1.18 倍,是因为前向发射饥饿——占空比 34% 对反向的 70%,Python 逐层发射喂不饱 GPU。这正是第 10 页的主题。
-Q: 13,868 个 kernel 怎么来的? A: eager 模式每个算子独立发射,中位 kernel 只有 8 微秒;79% 不到 20 微秒。发射成本反而成了主导,这是 CUDA Graph 的动机。</a:t>
+Q: 13,868 个 kernel 怎么来的? A: eager 模式每个算子独立发射,中位 kernel 只有 8 微秒;79% 不到 20 微秒。发射成本反而成了主导,这是 CUDA Graph 的动机。
+全场定调(可在这一页点出):这是开销主导的负载,不是计算或注意力主导。序列很短(LLM 192、DiT ~80),所以 O(seq²) 的 attention 只占计算 6%(理论 seq/hidden≈8%),主导的是 O(seq) 的稠密线性层(投影+FFN,47%)且已饱和;每步 GEMM busy 只 95ms、占一步 306ms 的 31%,其余 69% 是发射/同步/通信。推论:优化开销(CUDA Graph/免同步/ZeRO-2),不碰 attention(全 FA2 更慢、FlashQLA 天花板 10.5ms 的根因),不写自定义 GEMM(已饱和);剩 fp8(功耗墙)与重叠 AllGather 两个杠杆。序列/batch 增大 → 向 compute-bound 迁移 → fp8 接棒(P13 的 MFU 18.8%→27.7% 已在演示)。</a:t>
             </a:r>
             <a:endParaRPr lang="en-US" dirty="0"/>
           </a:p>
@@ -13957,7 +13958,8 @@
             <a:r>
               <a:rPr lang="en-US" dirty="0"/>
               <a:t>讲稿:第二类问题:同步点。上图是前向的计算流,四条虚线都是 GPU 必须等 CPU 的往返:图像解码和 tokenize 在 forward 里做,每步开头 GPU 干等 37 毫秒;ViT 的 RoPE 和位置编码在 CPU 上逐步算;ViT 到 decoder 之间的 MRoPE 位置索引也在 CPU;最后 loss 读回和计时器每步两次拉停发射流水线。下面时间线标了它们在真实步里的位置。
-Q: 这些是 HuggingFace 的 bug 吗? A: 不是 bug,是通用性设计——HF 要兼容任意输入形状和推理路径,所以在 CPU 上算这些最稳妥。但训练热循环里输入形状固定,这些就成了纯开销,可以预计算或缓存。</a:t>
+Q: 这些是 HuggingFace 的 bug 吗? A: 不是 bug,是通用性设计——HF 要兼容任意输入形状和推理路径,所以在 CPU 上算这些最稳妥。但训练热循环里输入形状固定,这些就成了纯开销,可以预计算或缓存。
+Q: MRoPE 是干嘛的?为什么是同步点? A: MRoPE 是 Qwen-VL 的多模态位置编码(arXiv:2409.12191):给每个 token 一个 3D 位置 (t,h,w)——文本三坐标一起走,视觉 token 的 h/w 编码 patch 在图像 2D 网格里的行列,让 decoder 理解视觉 token 的空间结构和视频时序。它只取决于序列结构(image_grid_thw + 图/文布局 + mask),与像素内容无关;HF 用 Python 循环算含每图 .item() 读回(~13ms 同步)。我们图像尺寸固定、pad-192 → 每步位置 id 一样 → 按 grid 缓存只算一次(用 HF 自己的 compute_3d_position_ids,语义零风险,STARVLA_CHECK_POSIDS 逐位校验)。</a:t>
             </a:r>
             <a:endParaRPr lang="en-US" dirty="0"/>
           </a:p>
